--- a/slides/Unifying-Local-Cloud-AI.pptx
+++ b/slides/Unifying-Local-Cloud-AI.pptx
@@ -17,9 +17,10 @@
     <p:sldId id="265" r:id="rId11"/>
     <p:sldId id="266" r:id="rId12"/>
     <p:sldId id="267" r:id="rId13"/>
+    <p:sldId id="268" r:id="rId14"/>
   </p:sldIdLst>
   <p:notesMasterIdLst>
-    <p:notesMasterId r:id="rId14"/>
+    <p:notesMasterId r:id="rId15"/>
   </p:notesMasterIdLst>
   <p:sldSz cx="12192000" cy="6858000"/>
   <p:notesSz cx="6858000" cy="12192000"/>
@@ -801,6 +802,94 @@
             <a:fld id="{F7021451-1387-4CA6-816F-3879F97B5CBC}" type="slidenum">
               <a:rPr lang="en-US"/>
               <a:t>12</a:t>
+            </a:fld>
+            <a:endParaRPr lang="en-US"/>
+          </a:p>
+        </p:txBody>
+      </p:sp>
+    </p:spTree>
+    <p:extLst>
+      <p:ext uri="{BB962C8B-B14F-4D97-AF65-F5344CB8AC3E}">
+        <p14:creationId xmlns:p14="http://schemas.microsoft.com/office/powerpoint/2010/main" val="1024086991"/>
+      </p:ext>
+    </p:extLst>
+  </p:cSld>
+  <p:clrMapOvr>
+    <a:masterClrMapping/>
+  </p:clrMapOvr>
+</p:notes>
+</file>
+
+<file path=ppt/notesSlides/notesSlide13.xml><?xml version="1.0" encoding="utf-8"?>
+<p:notes xmlns:a="http://schemas.openxmlformats.org/drawingml/2006/main" xmlns:r="http://schemas.openxmlformats.org/officeDocument/2006/relationships" xmlns:p="http://schemas.openxmlformats.org/presentationml/2006/main">
+  <p:cSld>
+    <p:spTree>
+      <p:nvGrpSpPr>
+        <p:cNvPr id="1" name=""/>
+        <p:cNvGrpSpPr/>
+        <p:nvPr/>
+      </p:nvGrpSpPr>
+      <p:grpSpPr>
+        <a:xfrm>
+          <a:off x="0" y="0"/>
+          <a:ext cx="0" cy="0"/>
+          <a:chOff x="0" y="0"/>
+          <a:chExt cx="0" cy="0"/>
+        </a:xfrm>
+      </p:grpSpPr>
+      <p:sp>
+        <p:nvSpPr>
+          <p:cNvPr id="2" name="Slide Image Placeholder 1"/>
+          <p:cNvSpPr>
+            <a:spLocks noGrp="1" noRot="1" noChangeAspect="1"/>
+          </p:cNvSpPr>
+          <p:nvPr>
+            <p:ph type="sldImg"/>
+          </p:nvPr>
+        </p:nvSpPr>
+        <p:spPr/>
+      </p:sp>
+      <p:sp>
+        <p:nvSpPr>
+          <p:cNvPr id="3" name="Notes Placeholder 2"/>
+          <p:cNvSpPr>
+            <a:spLocks noGrp="1"/>
+          </p:cNvSpPr>
+          <p:nvPr>
+            <p:ph type="body" idx="1"/>
+          </p:nvPr>
+        </p:nvSpPr>
+        <p:spPr/>
+        <p:txBody>
+          <a:bodyPr/>
+          <a:lstStyle/>
+          <a:p>
+            <a:r>
+              <a:rPr lang="en-US" dirty="0"/>
+              <a:t/>
+            </a:r>
+            <a:endParaRPr lang="en-US" dirty="0"/>
+          </a:p>
+        </p:txBody>
+      </p:sp>
+      <p:sp>
+        <p:nvSpPr>
+          <p:cNvPr id="4" name="Slide Number Placeholder 3"/>
+          <p:cNvSpPr>
+            <a:spLocks noGrp="1"/>
+          </p:cNvSpPr>
+          <p:nvPr>
+            <p:ph type="sldNum" sz="quarter" idx="10"/>
+          </p:nvPr>
+        </p:nvSpPr>
+        <p:spPr/>
+        <p:txBody>
+          <a:bodyPr/>
+          <a:lstStyle/>
+          <a:p>
+            <a:fld id="{F7021451-1387-4CA6-816F-3879F97B5CBC}" type="slidenum">
+              <a:rPr lang="en-US"/>
+              <a:t>13</a:t>
             </a:fld>
             <a:endParaRPr lang="en-US"/>
           </a:p>
@@ -3247,7 +3336,7 @@
                 <a:ea typeface="Consolas" pitchFamily="34" charset="-122"/>
                 <a:cs typeface="Consolas" pitchFamily="34" charset="-120"/>
               </a:rPr>
-              <a:t>    Console.Write(update);</a:t>
+              <a:t>    Console.Write(update.Text);</a:t>
             </a:r>
             <a:endParaRPr lang="en-US" sz="1200" dirty="0"/>
           </a:p>
@@ -3525,7 +3614,7 @@
                 <a:ea typeface="Calibri" pitchFamily="34" charset="-122"/>
                 <a:cs typeface="Calibri" pitchFamily="34" charset="-120"/>
               </a:rPr>
-              <a:t>10 / 12</a:t>
+              <a:t>10 / 13</a:t>
             </a:r>
             <a:endParaRPr lang="en-US" sz="1000" dirty="0"/>
           </a:p>
@@ -3857,7 +3946,7 @@
                 <a:ea typeface="Consolas" pitchFamily="34" charset="-122"/>
                 <a:cs typeface="Consolas" pitchFamily="34" charset="-120"/>
               </a:rPr>
-              <a:t>chatClient = new AppleIntelligence</a:t>
+              <a:t>chatClient = new AppleIntelligenceChatClient();</a:t>
             </a:r>
             <a:endParaRPr lang="en-US" sz="1100" dirty="0"/>
           </a:p>
@@ -3877,7 +3966,7 @@
                 <a:ea typeface="Consolas" pitchFamily="34" charset="-122"/>
                 <a:cs typeface="Consolas" pitchFamily="34" charset="-120"/>
               </a:rPr>
-              <a:t>    .FoundationModelsClient();</a:t>
+              <a:t>//  Microsoft.Maui.Essentials.AI</a:t>
             </a:r>
             <a:endParaRPr lang="en-US" sz="1100" dirty="0"/>
           </a:p>
@@ -4005,7 +4094,7 @@
                 <a:ea typeface="Consolas" pitchFamily="34" charset="-122"/>
                 <a:cs typeface="Consolas" pitchFamily="34" charset="-120"/>
               </a:rPr>
-              <a:t>    new Uri("http://localhost:5273/v1"),</a:t>
+              <a:t>    new ApiKeyCredential("not-used"),</a:t>
             </a:r>
             <a:endParaRPr lang="en-US" sz="1100" dirty="0"/>
           </a:p>
@@ -4025,7 +4114,47 @@
                 <a:ea typeface="Consolas" pitchFamily="34" charset="-122"/>
                 <a:cs typeface="Consolas" pitchFamily="34" charset="-120"/>
               </a:rPr>
-              <a:t>    new ApiKeyCredential("local"))</a:t>
+              <a:t>    new OpenAIClientOptions {</a:t>
+            </a:r>
+            <a:endParaRPr lang="en-US" sz="1100" dirty="0"/>
+          </a:p>
+          <a:p>
+            <a:pPr indent="0" marL="0">
+              <a:spcAft>
+                <a:spcPts val="200"/>
+              </a:spcAft>
+              <a:buNone/>
+            </a:pPr>
+            <a:r>
+              <a:rPr lang="en-US" sz="1100" dirty="0">
+                <a:solidFill>
+                  <a:srgbClr val="FAF8FF"/>
+                </a:solidFill>
+                <a:latin typeface="Consolas" pitchFamily="34" charset="0"/>
+                <a:ea typeface="Consolas" pitchFamily="34" charset="-122"/>
+                <a:cs typeface="Consolas" pitchFamily="34" charset="-120"/>
+              </a:rPr>
+              <a:t>      Endpoint = manager.Endpoint</a:t>
+            </a:r>
+            <a:endParaRPr lang="en-US" sz="1100" dirty="0"/>
+          </a:p>
+          <a:p>
+            <a:pPr indent="0" marL="0">
+              <a:spcAft>
+                <a:spcPts val="200"/>
+              </a:spcAft>
+              <a:buNone/>
+            </a:pPr>
+            <a:r>
+              <a:rPr lang="en-US" sz="1100" dirty="0">
+                <a:solidFill>
+                  <a:srgbClr val="FAF8FF"/>
+                </a:solidFill>
+                <a:latin typeface="Consolas" pitchFamily="34" charset="0"/>
+                <a:ea typeface="Consolas" pitchFamily="34" charset="-122"/>
+                <a:cs typeface="Consolas" pitchFamily="34" charset="-120"/>
+              </a:rPr>
+              <a:t>    })</a:t>
             </a:r>
             <a:endParaRPr lang="en-US" sz="1100" dirty="0"/>
           </a:p>
@@ -4193,7 +4322,7 @@
                 <a:ea typeface="Consolas" pitchFamily="34" charset="-122"/>
                 <a:cs typeface="Consolas" pitchFamily="34" charset="-120"/>
               </a:rPr>
-              <a:t>    endpoint, credential)</a:t>
+              <a:t>    endpoint, new DefaultAzureCredential())</a:t>
             </a:r>
             <a:endParaRPr lang="en-US" sz="1100" dirty="0"/>
           </a:p>
@@ -4213,7 +4342,7 @@
                 <a:ea typeface="Consolas" pitchFamily="34" charset="-122"/>
                 <a:cs typeface="Consolas" pitchFamily="34" charset="-120"/>
               </a:rPr>
-              <a:t>    .GetChatClient("gpt-4o")</a:t>
+              <a:t>    .GetChatClient("gpt-4.1")</a:t>
             </a:r>
             <a:endParaRPr lang="en-US" sz="1100" dirty="0"/>
           </a:p>
@@ -4330,6 +4459,1092 @@
 <file path=ppt/slides/slide12.xml><?xml version="1.0" encoding="utf-8"?>
 <p:sld xmlns:a="http://schemas.openxmlformats.org/drawingml/2006/main" xmlns:r="http://schemas.openxmlformats.org/officeDocument/2006/relationships" xmlns:p="http://schemas.openxmlformats.org/presentationml/2006/main">
   <p:cSld name="Slide 12">
+    <p:bg>
+      <p:bgPr>
+        <a:solidFill>
+          <a:srgbClr val="FAF8FF"/>
+        </a:solidFill>
+      </p:bgPr>
+    </p:bg>
+    <p:spTree>
+      <p:nvGrpSpPr>
+        <p:cNvPr id="1" name=""/>
+        <p:cNvGrpSpPr/>
+        <p:nvPr/>
+      </p:nvGrpSpPr>
+      <p:grpSpPr>
+        <a:xfrm>
+          <a:off x="0" y="0"/>
+          <a:ext cx="0" cy="0"/>
+          <a:chOff x="0" y="0"/>
+          <a:chExt cx="0" cy="0"/>
+        </a:xfrm>
+      </p:grpSpPr>
+      <p:sp>
+        <p:nvSpPr>
+          <p:cNvPr id="2" name="Text 0"/>
+          <p:cNvSpPr/>
+          <p:nvPr/>
+        </p:nvSpPr>
+        <p:spPr>
+          <a:xfrm>
+            <a:off x="548640" y="502920"/>
+            <a:ext cx="7315200" cy="320040"/>
+          </a:xfrm>
+          <a:prstGeom prst="rect">
+            <a:avLst/>
+          </a:prstGeom>
+          <a:noFill/>
+          <a:ln/>
+        </p:spPr>
+        <p:txBody>
+          <a:bodyPr wrap="square" rtlCol="0" anchor="ctr"/>
+          <a:lstStyle/>
+          <a:p>
+            <a:pPr indent="0" marL="0">
+              <a:buNone/>
+            </a:pPr>
+            <a:r>
+              <a:rPr lang="en-US" sz="1200" b="1" spc="400" kern="0" dirty="0">
+                <a:solidFill>
+                  <a:srgbClr val="FB7185"/>
+                </a:solidFill>
+                <a:latin typeface="Calibri" pitchFamily="34" charset="0"/>
+                <a:ea typeface="Calibri" pitchFamily="34" charset="-122"/>
+                <a:cs typeface="Calibri" pitchFamily="34" charset="-120"/>
+              </a:rPr>
+              <a:t>BUILT WITH</a:t>
+            </a:r>
+            <a:endParaRPr lang="en-US" sz="1200" dirty="0"/>
+          </a:p>
+        </p:txBody>
+      </p:sp>
+      <p:sp>
+        <p:nvSpPr>
+          <p:cNvPr id="3" name="Text 1"/>
+          <p:cNvSpPr/>
+          <p:nvPr/>
+        </p:nvSpPr>
+        <p:spPr>
+          <a:xfrm>
+            <a:off x="548640" y="822960"/>
+            <a:ext cx="10058400" cy="822960"/>
+          </a:xfrm>
+          <a:prstGeom prst="rect">
+            <a:avLst/>
+          </a:prstGeom>
+          <a:noFill/>
+          <a:ln/>
+        </p:spPr>
+        <p:txBody>
+          <a:bodyPr wrap="square" rtlCol="0" anchor="ctr"/>
+          <a:lstStyle/>
+          <a:p>
+            <a:pPr indent="0" marL="0">
+              <a:buNone/>
+            </a:pPr>
+            <a:r>
+              <a:rPr lang="en-US" sz="3800" b="1" dirty="0">
+                <a:solidFill>
+                  <a:srgbClr val="0F0A2E"/>
+                </a:solidFill>
+                <a:latin typeface="Georgia" pitchFamily="34" charset="0"/>
+                <a:ea typeface="Georgia" pitchFamily="34" charset="-122"/>
+                <a:cs typeface="Georgia" pitchFamily="34" charset="-120"/>
+              </a:rPr>
+              <a:t>Standing on the shoulders of maui-labs</a:t>
+            </a:r>
+            <a:endParaRPr lang="en-US" sz="3800" dirty="0"/>
+          </a:p>
+        </p:txBody>
+      </p:sp>
+      <p:sp>
+        <p:nvSpPr>
+          <p:cNvPr id="4" name="Text 2"/>
+          <p:cNvSpPr/>
+          <p:nvPr/>
+        </p:nvSpPr>
+        <p:spPr>
+          <a:xfrm>
+            <a:off x="548640" y="1600200"/>
+            <a:ext cx="10972800" cy="502920"/>
+          </a:xfrm>
+          <a:prstGeom prst="rect">
+            <a:avLst/>
+          </a:prstGeom>
+          <a:noFill/>
+          <a:ln/>
+        </p:spPr>
+        <p:txBody>
+          <a:bodyPr wrap="square" rtlCol="0" anchor="ctr"/>
+          <a:lstStyle/>
+          <a:p>
+            <a:pPr indent="0" marL="0">
+              <a:buNone/>
+            </a:pPr>
+            <a:r>
+              <a:rPr lang="en-US" sz="1500" i="1" dirty="0">
+                <a:solidFill>
+                  <a:srgbClr val="6B6B8F"/>
+                </a:solidFill>
+                <a:latin typeface="Calibri" pitchFamily="34" charset="0"/>
+                <a:ea typeface="Calibri" pitchFamily="34" charset="-122"/>
+                <a:cs typeface="Calibri" pitchFamily="34" charset="-120"/>
+              </a:rPr>
+              <a:t>Everything you saw runs on experimental packages from github.com/dotnet/maui-labs — try them, file issues, send PRs.</a:t>
+            </a:r>
+            <a:endParaRPr lang="en-US" sz="1500" dirty="0"/>
+          </a:p>
+        </p:txBody>
+      </p:sp>
+      <p:sp>
+        <p:nvSpPr>
+          <p:cNvPr id="5" name="Shape 3"/>
+          <p:cNvSpPr/>
+          <p:nvPr/>
+        </p:nvSpPr>
+        <p:spPr>
+          <a:xfrm>
+            <a:off x="548640" y="2240280"/>
+            <a:ext cx="5532120" cy="1737360"/>
+          </a:xfrm>
+          <a:prstGeom prst="roundRect">
+            <a:avLst>
+              <a:gd name="adj" fmla="val 5263"/>
+            </a:avLst>
+          </a:prstGeom>
+          <a:solidFill>
+            <a:srgbClr val="FFFFFF"/>
+          </a:solidFill>
+          <a:ln w="12700">
+            <a:solidFill>
+              <a:srgbClr val="E5E1F5"/>
+            </a:solidFill>
+            <a:prstDash val="solid"/>
+          </a:ln>
+        </p:spPr>
+      </p:sp>
+      <p:sp>
+        <p:nvSpPr>
+          <p:cNvPr id="6" name="Shape 4"/>
+          <p:cNvSpPr/>
+          <p:nvPr/>
+        </p:nvSpPr>
+        <p:spPr>
+          <a:xfrm>
+            <a:off x="548640" y="2240280"/>
+            <a:ext cx="137160" cy="1737360"/>
+          </a:xfrm>
+          <a:prstGeom prst="rect">
+            <a:avLst/>
+          </a:prstGeom>
+          <a:solidFill>
+            <a:srgbClr val="FB7185"/>
+          </a:solidFill>
+          <a:ln w="12700">
+            <a:solidFill>
+              <a:srgbClr val="FB7185"/>
+            </a:solidFill>
+            <a:prstDash val="solid"/>
+          </a:ln>
+        </p:spPr>
+      </p:sp>
+      <p:sp>
+        <p:nvSpPr>
+          <p:cNvPr id="7" name="Text 5"/>
+          <p:cNvSpPr/>
+          <p:nvPr/>
+        </p:nvSpPr>
+        <p:spPr>
+          <a:xfrm>
+            <a:off x="868680" y="2423160"/>
+            <a:ext cx="4983480" cy="411480"/>
+          </a:xfrm>
+          <a:prstGeom prst="rect">
+            <a:avLst/>
+          </a:prstGeom>
+          <a:noFill/>
+          <a:ln/>
+        </p:spPr>
+        <p:txBody>
+          <a:bodyPr wrap="square" rtlCol="0" anchor="ctr"/>
+          <a:lstStyle/>
+          <a:p>
+            <a:pPr indent="0" marL="0">
+              <a:buNone/>
+            </a:pPr>
+            <a:r>
+              <a:rPr lang="en-US" sz="1600" b="1" dirty="0">
+                <a:solidFill>
+                  <a:srgbClr val="0F0A2E"/>
+                </a:solidFill>
+                <a:latin typeface="Consolas" pitchFamily="34" charset="0"/>
+                <a:ea typeface="Consolas" pitchFamily="34" charset="-122"/>
+                <a:cs typeface="Consolas" pitchFamily="34" charset="-120"/>
+              </a:rPr>
+              <a:t>Microsoft.Maui.Essentials.AI</a:t>
+            </a:r>
+            <a:endParaRPr lang="en-US" sz="1600" dirty="0"/>
+          </a:p>
+        </p:txBody>
+      </p:sp>
+      <p:sp>
+        <p:nvSpPr>
+          <p:cNvPr id="8" name="Text 6"/>
+          <p:cNvSpPr/>
+          <p:nvPr/>
+        </p:nvSpPr>
+        <p:spPr>
+          <a:xfrm>
+            <a:off x="868680" y="2834640"/>
+            <a:ext cx="4983480" cy="320040"/>
+          </a:xfrm>
+          <a:prstGeom prst="rect">
+            <a:avLst/>
+          </a:prstGeom>
+          <a:noFill/>
+          <a:ln/>
+        </p:spPr>
+        <p:txBody>
+          <a:bodyPr wrap="square" rtlCol="0" anchor="ctr"/>
+          <a:lstStyle/>
+          <a:p>
+            <a:pPr indent="0" marL="0">
+              <a:buNone/>
+            </a:pPr>
+            <a:r>
+              <a:rPr lang="en-US" sz="1100" i="1" dirty="0">
+                <a:solidFill>
+                  <a:srgbClr val="FB7185"/>
+                </a:solidFill>
+                <a:latin typeface="Calibri" pitchFamily="34" charset="0"/>
+                <a:ea typeface="Calibri" pitchFamily="34" charset="-122"/>
+                <a:cs typeface="Calibri" pitchFamily="34" charset="-120"/>
+              </a:rPr>
+              <a:t>11.0.0-preview.4</a:t>
+            </a:r>
+            <a:endParaRPr lang="en-US" sz="1100" dirty="0"/>
+          </a:p>
+        </p:txBody>
+      </p:sp>
+      <p:sp>
+        <p:nvSpPr>
+          <p:cNvPr id="9" name="Text 7"/>
+          <p:cNvSpPr/>
+          <p:nvPr/>
+        </p:nvSpPr>
+        <p:spPr>
+          <a:xfrm>
+            <a:off x="868680" y="3200400"/>
+            <a:ext cx="4983480" cy="685800"/>
+          </a:xfrm>
+          <a:prstGeom prst="rect">
+            <a:avLst/>
+          </a:prstGeom>
+          <a:noFill/>
+          <a:ln/>
+        </p:spPr>
+        <p:txBody>
+          <a:bodyPr wrap="square" rtlCol="0" anchor="ctr"/>
+          <a:lstStyle/>
+          <a:p>
+            <a:pPr indent="0" marL="0">
+              <a:buNone/>
+            </a:pPr>
+            <a:r>
+              <a:rPr lang="en-US" sz="1300" dirty="0">
+                <a:solidFill>
+                  <a:srgbClr val="0F0A2E"/>
+                </a:solidFill>
+                <a:latin typeface="Calibri" pitchFamily="34" charset="0"/>
+                <a:ea typeface="Calibri" pitchFamily="34" charset="-122"/>
+                <a:cs typeface="Calibri" pitchFamily="34" charset="-120"/>
+              </a:rPr>
+              <a:t>Wraps Apple Intelligence as a standard IChatClient — same code path as your cloud client. No key, no cloud, works offline.</a:t>
+            </a:r>
+            <a:endParaRPr lang="en-US" sz="1300" dirty="0"/>
+          </a:p>
+        </p:txBody>
+      </p:sp>
+      <p:sp>
+        <p:nvSpPr>
+          <p:cNvPr id="10" name="Shape 8"/>
+          <p:cNvSpPr/>
+          <p:nvPr/>
+        </p:nvSpPr>
+        <p:spPr>
+          <a:xfrm>
+            <a:off x="6355080" y="2240280"/>
+            <a:ext cx="5532120" cy="1737360"/>
+          </a:xfrm>
+          <a:prstGeom prst="roundRect">
+            <a:avLst>
+              <a:gd name="adj" fmla="val 5263"/>
+            </a:avLst>
+          </a:prstGeom>
+          <a:solidFill>
+            <a:srgbClr val="FFFFFF"/>
+          </a:solidFill>
+          <a:ln w="12700">
+            <a:solidFill>
+              <a:srgbClr val="E5E1F5"/>
+            </a:solidFill>
+            <a:prstDash val="solid"/>
+          </a:ln>
+        </p:spPr>
+      </p:sp>
+      <p:sp>
+        <p:nvSpPr>
+          <p:cNvPr id="11" name="Shape 9"/>
+          <p:cNvSpPr/>
+          <p:nvPr/>
+        </p:nvSpPr>
+        <p:spPr>
+          <a:xfrm>
+            <a:off x="6355080" y="2240280"/>
+            <a:ext cx="137160" cy="1737360"/>
+          </a:xfrm>
+          <a:prstGeom prst="rect">
+            <a:avLst/>
+          </a:prstGeom>
+          <a:solidFill>
+            <a:srgbClr val="6366F1"/>
+          </a:solidFill>
+          <a:ln w="12700">
+            <a:solidFill>
+              <a:srgbClr val="6366F1"/>
+            </a:solidFill>
+            <a:prstDash val="solid"/>
+          </a:ln>
+        </p:spPr>
+      </p:sp>
+      <p:sp>
+        <p:nvSpPr>
+          <p:cNvPr id="12" name="Text 10"/>
+          <p:cNvSpPr/>
+          <p:nvPr/>
+        </p:nvSpPr>
+        <p:spPr>
+          <a:xfrm>
+            <a:off x="6675120" y="2423160"/>
+            <a:ext cx="4983480" cy="411480"/>
+          </a:xfrm>
+          <a:prstGeom prst="rect">
+            <a:avLst/>
+          </a:prstGeom>
+          <a:noFill/>
+          <a:ln/>
+        </p:spPr>
+        <p:txBody>
+          <a:bodyPr wrap="square" rtlCol="0" anchor="ctr"/>
+          <a:lstStyle/>
+          <a:p>
+            <a:pPr indent="0" marL="0">
+              <a:buNone/>
+            </a:pPr>
+            <a:r>
+              <a:rPr lang="en-US" sz="1600" b="1" dirty="0">
+                <a:solidFill>
+                  <a:srgbClr val="0F0A2E"/>
+                </a:solidFill>
+                <a:latin typeface="Consolas" pitchFamily="34" charset="0"/>
+                <a:ea typeface="Consolas" pitchFamily="34" charset="-122"/>
+                <a:cs typeface="Consolas" pitchFamily="34" charset="-120"/>
+              </a:rPr>
+              <a:t>Microsoft.Maui.AI.Attributes</a:t>
+            </a:r>
+            <a:endParaRPr lang="en-US" sz="1600" dirty="0"/>
+          </a:p>
+        </p:txBody>
+      </p:sp>
+      <p:sp>
+        <p:nvSpPr>
+          <p:cNvPr id="13" name="Text 11"/>
+          <p:cNvSpPr/>
+          <p:nvPr/>
+        </p:nvSpPr>
+        <p:spPr>
+          <a:xfrm>
+            <a:off x="6675120" y="2834640"/>
+            <a:ext cx="4983480" cy="320040"/>
+          </a:xfrm>
+          <a:prstGeom prst="rect">
+            <a:avLst/>
+          </a:prstGeom>
+          <a:noFill/>
+          <a:ln/>
+        </p:spPr>
+        <p:txBody>
+          <a:bodyPr wrap="square" rtlCol="0" anchor="ctr"/>
+          <a:lstStyle/>
+          <a:p>
+            <a:pPr indent="0" marL="0">
+              <a:buNone/>
+            </a:pPr>
+            <a:r>
+              <a:rPr lang="en-US" sz="1100" i="1" dirty="0">
+                <a:solidFill>
+                  <a:srgbClr val="6366F1"/>
+                </a:solidFill>
+                <a:latin typeface="Calibri" pitchFamily="34" charset="0"/>
+                <a:ea typeface="Calibri" pitchFamily="34" charset="-122"/>
+                <a:cs typeface="Calibri" pitchFamily="34" charset="-120"/>
+              </a:rPr>
+              <a:t>0.1.0-preview.10</a:t>
+            </a:r>
+            <a:endParaRPr lang="en-US" sz="1100" dirty="0"/>
+          </a:p>
+        </p:txBody>
+      </p:sp>
+      <p:sp>
+        <p:nvSpPr>
+          <p:cNvPr id="14" name="Text 12"/>
+          <p:cNvSpPr/>
+          <p:nvPr/>
+        </p:nvSpPr>
+        <p:spPr>
+          <a:xfrm>
+            <a:off x="6675120" y="3200400"/>
+            <a:ext cx="4983480" cy="685800"/>
+          </a:xfrm>
+          <a:prstGeom prst="rect">
+            <a:avLst/>
+          </a:prstGeom>
+          <a:noFill/>
+          <a:ln/>
+        </p:spPr>
+        <p:txBody>
+          <a:bodyPr wrap="square" rtlCol="0" anchor="ctr"/>
+          <a:lstStyle/>
+          <a:p>
+            <a:pPr indent="0" marL="0">
+              <a:buNone/>
+            </a:pPr>
+            <a:r>
+              <a:rPr lang="en-US" sz="1300" dirty="0">
+                <a:solidFill>
+                  <a:srgbClr val="0F0A2E"/>
+                </a:solidFill>
+                <a:latin typeface="Calibri" pitchFamily="34" charset="0"/>
+                <a:ea typeface="Calibri" pitchFamily="34" charset="-122"/>
+                <a:cs typeface="Calibri" pitchFamily="34" charset="-120"/>
+              </a:rPr>
+              <a:t>Source generator: decorate a C# method with [ExportAIFunction] and it becomes a strongly-typed AI tool. AOT-safe, zero reflection.</a:t>
+            </a:r>
+            <a:endParaRPr lang="en-US" sz="1300" dirty="0"/>
+          </a:p>
+        </p:txBody>
+      </p:sp>
+      <p:sp>
+        <p:nvSpPr>
+          <p:cNvPr id="15" name="Shape 13"/>
+          <p:cNvSpPr/>
+          <p:nvPr/>
+        </p:nvSpPr>
+        <p:spPr>
+          <a:xfrm>
+            <a:off x="548640" y="4160520"/>
+            <a:ext cx="5532120" cy="1737360"/>
+          </a:xfrm>
+          <a:prstGeom prst="roundRect">
+            <a:avLst>
+              <a:gd name="adj" fmla="val 5263"/>
+            </a:avLst>
+          </a:prstGeom>
+          <a:solidFill>
+            <a:srgbClr val="FFFFFF"/>
+          </a:solidFill>
+          <a:ln w="12700">
+            <a:solidFill>
+              <a:srgbClr val="E5E1F5"/>
+            </a:solidFill>
+            <a:prstDash val="solid"/>
+          </a:ln>
+        </p:spPr>
+      </p:sp>
+      <p:sp>
+        <p:nvSpPr>
+          <p:cNvPr id="16" name="Shape 14"/>
+          <p:cNvSpPr/>
+          <p:nvPr/>
+        </p:nvSpPr>
+        <p:spPr>
+          <a:xfrm>
+            <a:off x="548640" y="4160520"/>
+            <a:ext cx="137160" cy="1737360"/>
+          </a:xfrm>
+          <a:prstGeom prst="rect">
+            <a:avLst/>
+          </a:prstGeom>
+          <a:solidFill>
+            <a:srgbClr val="FBBF24"/>
+          </a:solidFill>
+          <a:ln w="12700">
+            <a:solidFill>
+              <a:srgbClr val="FBBF24"/>
+            </a:solidFill>
+            <a:prstDash val="solid"/>
+          </a:ln>
+        </p:spPr>
+      </p:sp>
+      <p:sp>
+        <p:nvSpPr>
+          <p:cNvPr id="17" name="Text 15"/>
+          <p:cNvSpPr/>
+          <p:nvPr/>
+        </p:nvSpPr>
+        <p:spPr>
+          <a:xfrm>
+            <a:off x="868680" y="4343400"/>
+            <a:ext cx="4983480" cy="411480"/>
+          </a:xfrm>
+          <a:prstGeom prst="rect">
+            <a:avLst/>
+          </a:prstGeom>
+          <a:noFill/>
+          <a:ln/>
+        </p:spPr>
+        <p:txBody>
+          <a:bodyPr wrap="square" rtlCol="0" anchor="ctr"/>
+          <a:lstStyle/>
+          <a:p>
+            <a:pPr indent="0" marL="0">
+              <a:buNone/>
+            </a:pPr>
+            <a:r>
+              <a:rPr lang="en-US" sz="1600" b="1" dirty="0">
+                <a:solidFill>
+                  <a:srgbClr val="0F0A2E"/>
+                </a:solidFill>
+                <a:latin typeface="Consolas" pitchFamily="34" charset="0"/>
+                <a:ea typeface="Consolas" pitchFamily="34" charset="-122"/>
+                <a:cs typeface="Consolas" pitchFamily="34" charset="-120"/>
+              </a:rPr>
+              <a:t>Phi Silica  ·  PR #178</a:t>
+            </a:r>
+            <a:endParaRPr lang="en-US" sz="1600" dirty="0"/>
+          </a:p>
+        </p:txBody>
+      </p:sp>
+      <p:sp>
+        <p:nvSpPr>
+          <p:cNvPr id="18" name="Text 16"/>
+          <p:cNvSpPr/>
+          <p:nvPr/>
+        </p:nvSpPr>
+        <p:spPr>
+          <a:xfrm>
+            <a:off x="868680" y="4754880"/>
+            <a:ext cx="4983480" cy="320040"/>
+          </a:xfrm>
+          <a:prstGeom prst="rect">
+            <a:avLst/>
+          </a:prstGeom>
+          <a:noFill/>
+          <a:ln/>
+        </p:spPr>
+        <p:txBody>
+          <a:bodyPr wrap="square" rtlCol="0" anchor="ctr"/>
+          <a:lstStyle/>
+          <a:p>
+            <a:pPr indent="0" marL="0">
+              <a:buNone/>
+            </a:pPr>
+            <a:r>
+              <a:rPr lang="en-US" sz="1100" i="1" dirty="0">
+                <a:solidFill>
+                  <a:srgbClr val="FBBF24"/>
+                </a:solidFill>
+                <a:latin typeface="Calibri" pitchFamily="34" charset="0"/>
+                <a:ea typeface="Calibri" pitchFamily="34" charset="-122"/>
+                <a:cs typeface="Calibri" pitchFamily="34" charset="-120"/>
+              </a:rPr>
+              <a:t>draft / in flight</a:t>
+            </a:r>
+            <a:endParaRPr lang="en-US" sz="1100" dirty="0"/>
+          </a:p>
+        </p:txBody>
+      </p:sp>
+      <p:sp>
+        <p:nvSpPr>
+          <p:cNvPr id="19" name="Text 17"/>
+          <p:cNvSpPr/>
+          <p:nvPr/>
+        </p:nvSpPr>
+        <p:spPr>
+          <a:xfrm>
+            <a:off x="868680" y="5120640"/>
+            <a:ext cx="4983480" cy="685800"/>
+          </a:xfrm>
+          <a:prstGeom prst="rect">
+            <a:avLst/>
+          </a:prstGeom>
+          <a:noFill/>
+          <a:ln/>
+        </p:spPr>
+        <p:txBody>
+          <a:bodyPr wrap="square" rtlCol="0" anchor="ctr"/>
+          <a:lstStyle/>
+          <a:p>
+            <a:pPr indent="0" marL="0">
+              <a:buNone/>
+            </a:pPr>
+            <a:r>
+              <a:rPr lang="en-US" sz="1300" dirty="0">
+                <a:solidFill>
+                  <a:srgbClr val="0F0A2E"/>
+                </a:solidFill>
+                <a:latin typeface="Calibri" pitchFamily="34" charset="0"/>
+                <a:ea typeface="Calibri" pitchFamily="34" charset="-122"/>
+                <a:cs typeface="Calibri" pitchFamily="34" charset="-120"/>
+              </a:rPr>
+              <a:t>Brings the same IChatClient wrapper to Windows Copilot+ PCs via Windows AI APIs. Adds Phi Silica as another local provider.</a:t>
+            </a:r>
+            <a:endParaRPr lang="en-US" sz="1300" dirty="0"/>
+          </a:p>
+        </p:txBody>
+      </p:sp>
+      <p:sp>
+        <p:nvSpPr>
+          <p:cNvPr id="20" name="Shape 18"/>
+          <p:cNvSpPr/>
+          <p:nvPr/>
+        </p:nvSpPr>
+        <p:spPr>
+          <a:xfrm>
+            <a:off x="6355080" y="4160520"/>
+            <a:ext cx="5532120" cy="1737360"/>
+          </a:xfrm>
+          <a:prstGeom prst="roundRect">
+            <a:avLst>
+              <a:gd name="adj" fmla="val 5263"/>
+            </a:avLst>
+          </a:prstGeom>
+          <a:solidFill>
+            <a:srgbClr val="FFFFFF"/>
+          </a:solidFill>
+          <a:ln w="12700">
+            <a:solidFill>
+              <a:srgbClr val="E5E1F5"/>
+            </a:solidFill>
+            <a:prstDash val="solid"/>
+          </a:ln>
+        </p:spPr>
+      </p:sp>
+      <p:sp>
+        <p:nvSpPr>
+          <p:cNvPr id="21" name="Shape 19"/>
+          <p:cNvSpPr/>
+          <p:nvPr/>
+        </p:nvSpPr>
+        <p:spPr>
+          <a:xfrm>
+            <a:off x="6355080" y="4160520"/>
+            <a:ext cx="137160" cy="1737360"/>
+          </a:xfrm>
+          <a:prstGeom prst="rect">
+            <a:avLst/>
+          </a:prstGeom>
+          <a:solidFill>
+            <a:srgbClr val="FB7185"/>
+          </a:solidFill>
+          <a:ln w="12700">
+            <a:solidFill>
+              <a:srgbClr val="FB7185"/>
+            </a:solidFill>
+            <a:prstDash val="solid"/>
+          </a:ln>
+        </p:spPr>
+      </p:sp>
+      <p:sp>
+        <p:nvSpPr>
+          <p:cNvPr id="22" name="Text 20"/>
+          <p:cNvSpPr/>
+          <p:nvPr/>
+        </p:nvSpPr>
+        <p:spPr>
+          <a:xfrm>
+            <a:off x="6675120" y="4343400"/>
+            <a:ext cx="4983480" cy="411480"/>
+          </a:xfrm>
+          <a:prstGeom prst="rect">
+            <a:avLst/>
+          </a:prstGeom>
+          <a:noFill/>
+          <a:ln/>
+        </p:spPr>
+        <p:txBody>
+          <a:bodyPr wrap="square" rtlCol="0" anchor="ctr"/>
+          <a:lstStyle/>
+          <a:p>
+            <a:pPr indent="0" marL="0">
+              <a:buNone/>
+            </a:pPr>
+            <a:r>
+              <a:rPr lang="en-US" sz="1600" b="1" dirty="0">
+                <a:solidFill>
+                  <a:srgbClr val="0F0A2E"/>
+                </a:solidFill>
+                <a:latin typeface="Consolas" pitchFamily="34" charset="0"/>
+                <a:ea typeface="Consolas" pitchFamily="34" charset="-122"/>
+                <a:cs typeface="Consolas" pitchFamily="34" charset="-120"/>
+              </a:rPr>
+              <a:t>Microsoft.Maui.DevFlow.Agent</a:t>
+            </a:r>
+            <a:endParaRPr lang="en-US" sz="1600" dirty="0"/>
+          </a:p>
+        </p:txBody>
+      </p:sp>
+      <p:sp>
+        <p:nvSpPr>
+          <p:cNvPr id="23" name="Text 21"/>
+          <p:cNvSpPr/>
+          <p:nvPr/>
+        </p:nvSpPr>
+        <p:spPr>
+          <a:xfrm>
+            <a:off x="6675120" y="4754880"/>
+            <a:ext cx="4983480" cy="320040"/>
+          </a:xfrm>
+          <a:prstGeom prst="rect">
+            <a:avLst/>
+          </a:prstGeom>
+          <a:noFill/>
+          <a:ln/>
+        </p:spPr>
+        <p:txBody>
+          <a:bodyPr wrap="square" rtlCol="0" anchor="ctr"/>
+          <a:lstStyle/>
+          <a:p>
+            <a:pPr indent="0" marL="0">
+              <a:buNone/>
+            </a:pPr>
+            <a:r>
+              <a:rPr lang="en-US" sz="1100" i="1" dirty="0">
+                <a:solidFill>
+                  <a:srgbClr val="FB7185"/>
+                </a:solidFill>
+                <a:latin typeface="Calibri" pitchFamily="34" charset="0"/>
+                <a:ea typeface="Calibri" pitchFamily="34" charset="-122"/>
+                <a:cs typeface="Calibri" pitchFamily="34" charset="-120"/>
+              </a:rPr>
+              <a:t>0.1.0-preview.10</a:t>
+            </a:r>
+            <a:endParaRPr lang="en-US" sz="1100" dirty="0"/>
+          </a:p>
+        </p:txBody>
+      </p:sp>
+      <p:sp>
+        <p:nvSpPr>
+          <p:cNvPr id="24" name="Text 22"/>
+          <p:cNvSpPr/>
+          <p:nvPr/>
+        </p:nvSpPr>
+        <p:spPr>
+          <a:xfrm>
+            <a:off x="6675120" y="5120640"/>
+            <a:ext cx="4983480" cy="685800"/>
+          </a:xfrm>
+          <a:prstGeom prst="rect">
+            <a:avLst/>
+          </a:prstGeom>
+          <a:noFill/>
+          <a:ln/>
+        </p:spPr>
+        <p:txBody>
+          <a:bodyPr wrap="square" rtlCol="0" anchor="ctr"/>
+          <a:lstStyle/>
+          <a:p>
+            <a:pPr indent="0" marL="0">
+              <a:buNone/>
+            </a:pPr>
+            <a:r>
+              <a:rPr lang="en-US" sz="1300" dirty="0">
+                <a:solidFill>
+                  <a:srgbClr val="0F0A2E"/>
+                </a:solidFill>
+                <a:latin typeface="Calibri" pitchFamily="34" charset="0"/>
+                <a:ea typeface="Calibri" pitchFamily="34" charset="-122"/>
+                <a:cs typeface="Calibri" pitchFamily="34" charset="-120"/>
+              </a:rPr>
+              <a:t>Playwright-for-MAUI + MCP server. AI agents (Copilot, Claude) can drive the live app — this entire app was built that way.</a:t>
+            </a:r>
+            <a:endParaRPr lang="en-US" sz="1300" dirty="0"/>
+          </a:p>
+        </p:txBody>
+      </p:sp>
+      <p:sp>
+        <p:nvSpPr>
+          <p:cNvPr id="25" name="Text 23"/>
+          <p:cNvSpPr/>
+          <p:nvPr/>
+        </p:nvSpPr>
+        <p:spPr>
+          <a:xfrm>
+            <a:off x="548640" y="6035040"/>
+            <a:ext cx="11094415" cy="365760"/>
+          </a:xfrm>
+          <a:prstGeom prst="rect">
+            <a:avLst/>
+          </a:prstGeom>
+          <a:noFill/>
+          <a:ln/>
+        </p:spPr>
+        <p:txBody>
+          <a:bodyPr wrap="square" rtlCol="0" anchor="ctr"/>
+          <a:lstStyle/>
+          <a:p>
+            <a:pPr algn="ctr" indent="0" marL="0">
+              <a:buNone/>
+            </a:pPr>
+            <a:r>
+              <a:rPr lang="en-US" sz="1500" b="1" dirty="0">
+                <a:solidFill>
+                  <a:srgbClr val="FB7185"/>
+                </a:solidFill>
+                <a:latin typeface="Consolas" pitchFamily="34" charset="0"/>
+                <a:ea typeface="Consolas" pitchFamily="34" charset="-122"/>
+                <a:cs typeface="Consolas" pitchFamily="34" charset="-120"/>
+              </a:rPr>
+              <a:t>github.com/dotnet/maui-labs</a:t>
+            </a:r>
+            <a:endParaRPr lang="en-US" sz="1500" dirty="0"/>
+          </a:p>
+        </p:txBody>
+      </p:sp>
+      <p:sp>
+        <p:nvSpPr>
+          <p:cNvPr id="26" name="Shape 24"/>
+          <p:cNvSpPr/>
+          <p:nvPr/>
+        </p:nvSpPr>
+        <p:spPr>
+          <a:xfrm>
+            <a:off x="10180015" y="502920"/>
+            <a:ext cx="292608" cy="292608"/>
+          </a:xfrm>
+          <a:prstGeom prst="roundRect">
+            <a:avLst>
+              <a:gd name="adj" fmla="val 15625"/>
+            </a:avLst>
+          </a:prstGeom>
+          <a:ln w="19050">
+            <a:solidFill>
+              <a:srgbClr val="6366F1"/>
+            </a:solidFill>
+            <a:prstDash val="solid"/>
+          </a:ln>
+        </p:spPr>
+      </p:sp>
+      <p:sp>
+        <p:nvSpPr>
+          <p:cNvPr id="27" name="Text 25"/>
+          <p:cNvSpPr/>
+          <p:nvPr/>
+        </p:nvSpPr>
+        <p:spPr>
+          <a:xfrm>
+            <a:off x="10472623" y="457200"/>
+            <a:ext cx="411480" cy="384048"/>
+          </a:xfrm>
+          <a:prstGeom prst="rect">
+            <a:avLst/>
+          </a:prstGeom>
+          <a:noFill/>
+          <a:ln/>
+        </p:spPr>
+        <p:txBody>
+          <a:bodyPr wrap="square" rtlCol="0" anchor="ctr"/>
+          <a:lstStyle/>
+          <a:p>
+            <a:pPr algn="ctr" indent="0" marL="0">
+              <a:buNone/>
+            </a:pPr>
+            <a:r>
+              <a:rPr lang="en-US" sz="1800" b="1" dirty="0">
+                <a:solidFill>
+                  <a:srgbClr val="6366F1"/>
+                </a:solidFill>
+                <a:latin typeface="Calibri" pitchFamily="34" charset="0"/>
+                <a:ea typeface="Calibri" pitchFamily="34" charset="-122"/>
+                <a:cs typeface="Calibri" pitchFamily="34" charset="-120"/>
+              </a:rPr>
+              <a:t>↔</a:t>
+            </a:r>
+            <a:endParaRPr lang="en-US" sz="1800" dirty="0"/>
+          </a:p>
+        </p:txBody>
+      </p:sp>
+      <p:sp>
+        <p:nvSpPr>
+          <p:cNvPr id="28" name="Text 26"/>
+          <p:cNvSpPr/>
+          <p:nvPr/>
+        </p:nvSpPr>
+        <p:spPr>
+          <a:xfrm>
+            <a:off x="10893247" y="429768"/>
+            <a:ext cx="411480" cy="457200"/>
+          </a:xfrm>
+          <a:prstGeom prst="rect">
+            <a:avLst/>
+          </a:prstGeom>
+          <a:noFill/>
+          <a:ln/>
+        </p:spPr>
+        <p:txBody>
+          <a:bodyPr wrap="square" rtlCol="0" anchor="ctr"/>
+          <a:lstStyle/>
+          <a:p>
+            <a:pPr algn="ctr" indent="0" marL="0">
+              <a:buNone/>
+            </a:pPr>
+            <a:r>
+              <a:rPr lang="en-US" sz="2200" dirty="0">
+                <a:solidFill>
+                  <a:srgbClr val="6366F1"/>
+                </a:solidFill>
+                <a:latin typeface="Calibri" pitchFamily="34" charset="0"/>
+                <a:ea typeface="Calibri" pitchFamily="34" charset="-122"/>
+                <a:cs typeface="Calibri" pitchFamily="34" charset="-120"/>
+              </a:rPr>
+              <a:t>☁</a:t>
+            </a:r>
+            <a:endParaRPr lang="en-US" sz="2200" dirty="0"/>
+          </a:p>
+        </p:txBody>
+      </p:sp>
+      <p:sp>
+        <p:nvSpPr>
+          <p:cNvPr id="29" name="Text 27"/>
+          <p:cNvSpPr/>
+          <p:nvPr/>
+        </p:nvSpPr>
+        <p:spPr>
+          <a:xfrm>
+            <a:off x="457200" y="6446520"/>
+            <a:ext cx="7315200" cy="274320"/>
+          </a:xfrm>
+          <a:prstGeom prst="rect">
+            <a:avLst/>
+          </a:prstGeom>
+          <a:noFill/>
+          <a:ln/>
+        </p:spPr>
+        <p:txBody>
+          <a:bodyPr wrap="square" rtlCol="0" anchor="ctr"/>
+          <a:lstStyle/>
+          <a:p>
+            <a:pPr algn="l" indent="0" marL="0">
+              <a:buNone/>
+            </a:pPr>
+            <a:r>
+              <a:rPr lang="en-US" sz="1000" dirty="0">
+                <a:solidFill>
+                  <a:srgbClr val="6B6B8F"/>
+                </a:solidFill>
+                <a:latin typeface="Calibri" pitchFamily="34" charset="0"/>
+                <a:ea typeface="Calibri" pitchFamily="34" charset="-122"/>
+                <a:cs typeface="Calibri" pitchFamily="34" charset="-120"/>
+              </a:rPr>
+              <a:t>Unifying Local and Cloud AI</a:t>
+            </a:r>
+            <a:pPr algn="l" indent="0" marL="0">
+              <a:buNone/>
+            </a:pPr>
+            <a:r>
+              <a:rPr lang="en-US" sz="1000" dirty="0">
+                <a:solidFill>
+                  <a:srgbClr val="6B6B8F"/>
+                </a:solidFill>
+                <a:latin typeface="Calibri" pitchFamily="34" charset="0"/>
+                <a:ea typeface="Calibri" pitchFamily="34" charset="-122"/>
+                <a:cs typeface="Calibri" pitchFamily="34" charset="-120"/>
+              </a:rPr>
+              <a:t>  ·  </a:t>
+            </a:r>
+            <a:pPr algn="l" indent="0" marL="0">
+              <a:buNone/>
+            </a:pPr>
+            <a:r>
+              <a:rPr lang="en-US" sz="1000" b="1" dirty="0">
+                <a:solidFill>
+                  <a:srgbClr val="FB7185"/>
+                </a:solidFill>
+                <a:latin typeface="Calibri" pitchFamily="34" charset="0"/>
+                <a:ea typeface="Calibri" pitchFamily="34" charset="-122"/>
+                <a:cs typeface="Calibri" pitchFamily="34" charset="-120"/>
+              </a:rPr>
+              <a:t>@mattleibow</a:t>
+            </a:r>
+            <a:pPr algn="l" indent="0" marL="0">
+              <a:buNone/>
+            </a:pPr>
+            <a:r>
+              <a:rPr lang="en-US" sz="1000" dirty="0">
+                <a:solidFill>
+                  <a:srgbClr val="6B6B8F"/>
+                </a:solidFill>
+                <a:latin typeface="Calibri" pitchFamily="34" charset="0"/>
+                <a:ea typeface="Calibri" pitchFamily="34" charset="-122"/>
+                <a:cs typeface="Calibri" pitchFamily="34" charset="-120"/>
+              </a:rPr>
+              <a:t>  ·  @CPTMSDUG</a:t>
+            </a:r>
+            <a:endParaRPr lang="en-US" sz="1000" dirty="0"/>
+          </a:p>
+        </p:txBody>
+      </p:sp>
+      <p:sp>
+        <p:nvSpPr>
+          <p:cNvPr id="30" name="Text 28"/>
+          <p:cNvSpPr/>
+          <p:nvPr/>
+        </p:nvSpPr>
+        <p:spPr>
+          <a:xfrm>
+            <a:off x="10820095" y="6446520"/>
+            <a:ext cx="914400" cy="274320"/>
+          </a:xfrm>
+          <a:prstGeom prst="rect">
+            <a:avLst/>
+          </a:prstGeom>
+          <a:noFill/>
+          <a:ln/>
+        </p:spPr>
+        <p:txBody>
+          <a:bodyPr wrap="square" rtlCol="0" anchor="ctr"/>
+          <a:lstStyle/>
+          <a:p>
+            <a:pPr algn="r" indent="0" marL="0">
+              <a:buNone/>
+            </a:pPr>
+            <a:r>
+              <a:rPr lang="en-US" sz="1000" dirty="0">
+                <a:solidFill>
+                  <a:srgbClr val="6B6B8F"/>
+                </a:solidFill>
+                <a:latin typeface="Calibri" pitchFamily="34" charset="0"/>
+                <a:ea typeface="Calibri" pitchFamily="34" charset="-122"/>
+                <a:cs typeface="Calibri" pitchFamily="34" charset="-120"/>
+              </a:rPr>
+              <a:t>12 / 13</a:t>
+            </a:r>
+            <a:endParaRPr lang="en-US" sz="1000" dirty="0"/>
+          </a:p>
+        </p:txBody>
+      </p:sp>
+    </p:spTree>
+  </p:cSld>
+  <p:clrMapOvr>
+    <a:masterClrMapping/>
+  </p:clrMapOvr>
+</p:sld>
+</file>
+
+<file path=ppt/slides/slide13.xml><?xml version="1.0" encoding="utf-8"?>
+<p:sld xmlns:a="http://schemas.openxmlformats.org/drawingml/2006/main" xmlns:r="http://schemas.openxmlformats.org/officeDocument/2006/relationships" xmlns:p="http://schemas.openxmlformats.org/presentationml/2006/main">
+  <p:cSld name="Slide 13">
     <p:bg>
       <p:bgPr>
         <a:solidFill>
@@ -6450,7 +7665,7 @@
                 <a:ea typeface="Calibri" pitchFamily="34" charset="-122"/>
                 <a:cs typeface="Calibri" pitchFamily="34" charset="-120"/>
               </a:rPr>
-              <a:t>2 / 12</a:t>
+              <a:t>2 / 13</a:t>
             </a:r>
             <a:endParaRPr lang="en-US" sz="1000" dirty="0"/>
           </a:p>
@@ -7382,7 +8597,7 @@
                 <a:ea typeface="Calibri" pitchFamily="34" charset="-122"/>
                 <a:cs typeface="Calibri" pitchFamily="34" charset="-120"/>
               </a:rPr>
-              <a:t>3 / 12</a:t>
+              <a:t>3 / 13</a:t>
             </a:r>
             <a:endParaRPr lang="en-US" sz="1000" dirty="0"/>
           </a:p>
@@ -7780,7 +8995,7 @@
                 <a:ea typeface="Calibri" pitchFamily="34" charset="-122"/>
                 <a:cs typeface="Calibri" pitchFamily="34" charset="-120"/>
               </a:rPr>
-              <a:t>Claude, Llama, Titan, Mistral</a:t>
+              <a:t>Nova, Claude, Llama, Mistral</a:t>
             </a:r>
             <a:endParaRPr lang="en-US" sz="1300" dirty="0"/>
           </a:p>
@@ -8053,7 +9268,7 @@
                 <a:ea typeface="Calibri" pitchFamily="34" charset="-122"/>
                 <a:cs typeface="Calibri" pitchFamily="34" charset="-120"/>
               </a:rPr>
-              <a:t>Always up-to-date</a:t>
+              <a:t>Latest frontier models</a:t>
             </a:r>
             <a:endParaRPr lang="en-US" sz="1300" dirty="0"/>
           </a:p>
@@ -8443,7 +9658,7 @@
                 <a:ea typeface="Calibri" pitchFamily="34" charset="-122"/>
                 <a:cs typeface="Calibri" pitchFamily="34" charset="-120"/>
               </a:rPr>
-              <a:t>4 / 12</a:t>
+              <a:t>4 / 13</a:t>
             </a:r>
             <a:endParaRPr lang="en-US" sz="1000" dirty="0"/>
           </a:p>
@@ -8726,7 +9941,7 @@
                 <a:ea typeface="Consolas" pitchFamily="34" charset="-122"/>
                 <a:cs typeface="Consolas" pitchFamily="34" charset="-120"/>
               </a:rPr>
-              <a:t>    new ApiKeyCredential(key));</a:t>
+              <a:t>    new DefaultAzureCredential());</a:t>
             </a:r>
             <a:endParaRPr lang="en-US" sz="1400" dirty="0"/>
           </a:p>
@@ -8755,7 +9970,7 @@
                 <a:ea typeface="Consolas" pitchFamily="34" charset="-122"/>
                 <a:cs typeface="Consolas" pitchFamily="34" charset="-120"/>
               </a:rPr>
-              <a:t>var chat = client.GetChatClient("gpt-4o");</a:t>
+              <a:t>var chat = client.GetChatClient("gpt-4.1");</a:t>
             </a:r>
             <a:endParaRPr lang="en-US" sz="1400" dirty="0"/>
           </a:p>
@@ -9450,11 +10665,11 @@
         <p:spPr>
           <a:xfrm>
             <a:off x="548640" y="2286000"/>
-            <a:ext cx="3703320" cy="3931920"/>
+            <a:ext cx="3703320" cy="3566160"/>
           </a:xfrm>
           <a:prstGeom prst="roundRect">
             <a:avLst>
-              <a:gd name="adj" fmla="val 2963"/>
+              <a:gd name="adj" fmla="val 3077"/>
             </a:avLst>
           </a:prstGeom>
           <a:solidFill>
@@ -9642,7 +10857,7 @@
         <p:spPr>
           <a:xfrm>
             <a:off x="822960" y="4069080"/>
-            <a:ext cx="3154680" cy="2011680"/>
+            <a:ext cx="3154680" cy="1325880"/>
           </a:xfrm>
           <a:prstGeom prst="rect">
             <a:avLst/>
@@ -9713,42 +10928,61 @@
             </a:r>
             <a:endParaRPr lang="en-US" sz="1300" dirty="0"/>
           </a:p>
-          <a:p>
-            <a:pPr indent="0" marL="0">
-              <a:spcAft>
-                <a:spcPts val="400"/>
-              </a:spcAft>
-              <a:buNone/>
-            </a:pPr>
-            <a:r>
-              <a:rPr lang="en-US" sz="1300" dirty="0">
-                <a:solidFill>
-                  <a:srgbClr val="0F0A2E"/>
-                </a:solidFill>
-                <a:latin typeface="Calibri" pitchFamily="34" charset="0"/>
-                <a:ea typeface="Calibri" pitchFamily="34" charset="-122"/>
-                <a:cs typeface="Calibri" pitchFamily="34" charset="-120"/>
-              </a:rPr>
-              <a:t>Server fallback via Private Cloud Compute</a:t>
-            </a:r>
-            <a:endParaRPr lang="en-US" sz="1300" dirty="0"/>
-          </a:p>
-        </p:txBody>
-      </p:sp>
-      <p:sp>
-        <p:nvSpPr>
-          <p:cNvPr id="12" name="Shape 10"/>
+        </p:txBody>
+      </p:sp>
+      <p:sp>
+        <p:nvSpPr>
+          <p:cNvPr id="12" name="Text 10"/>
+          <p:cNvSpPr/>
+          <p:nvPr/>
+        </p:nvSpPr>
+        <p:spPr>
+          <a:xfrm>
+            <a:off x="822960" y="5440680"/>
+            <a:ext cx="3154680" cy="320040"/>
+          </a:xfrm>
+          <a:prstGeom prst="rect">
+            <a:avLst/>
+          </a:prstGeom>
+          <a:noFill/>
+          <a:ln/>
+        </p:spPr>
+        <p:txBody>
+          <a:bodyPr wrap="square" rtlCol="0" anchor="ctr"/>
+          <a:lstStyle/>
+          <a:p>
+            <a:pPr indent="0" marL="0">
+              <a:buNone/>
+            </a:pPr>
+            <a:r>
+              <a:rPr lang="en-US" sz="1200" b="1" dirty="0">
+                <a:solidFill>
+                  <a:srgbClr val="FB7185"/>
+                </a:solidFill>
+                <a:latin typeface="Calibri" pitchFamily="34" charset="0"/>
+                <a:ea typeface="Calibri" pitchFamily="34" charset="-122"/>
+                <a:cs typeface="Calibri" pitchFamily="34" charset="-120"/>
+              </a:rPr>
+              <a:t>✅  shipped</a:t>
+            </a:r>
+            <a:endParaRPr lang="en-US" sz="1200" dirty="0"/>
+          </a:p>
+        </p:txBody>
+      </p:sp>
+      <p:sp>
+        <p:nvSpPr>
+          <p:cNvPr id="13" name="Shape 11"/>
           <p:cNvSpPr/>
           <p:nvPr/>
         </p:nvSpPr>
         <p:spPr>
           <a:xfrm>
             <a:off x="4389120" y="2286000"/>
-            <a:ext cx="3703320" cy="3931920"/>
+            <a:ext cx="3703320" cy="3566160"/>
           </a:xfrm>
           <a:prstGeom prst="roundRect">
             <a:avLst>
-              <a:gd name="adj" fmla="val 2963"/>
+              <a:gd name="adj" fmla="val 3077"/>
             </a:avLst>
           </a:prstGeom>
           <a:solidFill>
@@ -9764,7 +10998,7 @@
       </p:sp>
       <p:sp>
         <p:nvSpPr>
-          <p:cNvPr id="13" name="Shape 11"/>
+          <p:cNvPr id="14" name="Shape 12"/>
           <p:cNvSpPr/>
           <p:nvPr/>
         </p:nvSpPr>
@@ -9789,7 +11023,7 @@
       </p:sp>
       <p:sp>
         <p:nvSpPr>
-          <p:cNvPr id="14" name="Text 12"/>
+          <p:cNvPr id="15" name="Text 13"/>
           <p:cNvSpPr/>
           <p:nvPr/>
         </p:nvSpPr>
@@ -9828,7 +11062,7 @@
       </p:sp>
       <p:sp>
         <p:nvSpPr>
-          <p:cNvPr id="15" name="Text 13"/>
+          <p:cNvPr id="16" name="Text 14"/>
           <p:cNvSpPr/>
           <p:nvPr/>
         </p:nvSpPr>
@@ -9867,7 +11101,7 @@
       </p:sp>
       <p:sp>
         <p:nvSpPr>
-          <p:cNvPr id="16" name="Text 14"/>
+          <p:cNvPr id="17" name="Text 15"/>
           <p:cNvSpPr/>
           <p:nvPr/>
         </p:nvSpPr>
@@ -9906,7 +11140,7 @@
       </p:sp>
       <p:sp>
         <p:nvSpPr>
-          <p:cNvPr id="17" name="Shape 15"/>
+          <p:cNvPr id="18" name="Shape 16"/>
           <p:cNvSpPr/>
           <p:nvPr/>
         </p:nvSpPr>
@@ -9929,14 +11163,14 @@
       </p:sp>
       <p:sp>
         <p:nvSpPr>
-          <p:cNvPr id="18" name="Text 16"/>
+          <p:cNvPr id="19" name="Text 17"/>
           <p:cNvSpPr/>
           <p:nvPr/>
         </p:nvSpPr>
         <p:spPr>
           <a:xfrm>
             <a:off x="4663440" y="4069080"/>
-            <a:ext cx="3154680" cy="2011680"/>
+            <a:ext cx="3154680" cy="1325880"/>
           </a:xfrm>
           <a:prstGeom prst="rect">
             <a:avLst/>
@@ -9983,7 +11217,7 @@
                 <a:ea typeface="Calibri" pitchFamily="34" charset="-122"/>
                 <a:cs typeface="Calibri" pitchFamily="34" charset="-120"/>
               </a:rPr>
-              <a:t>~3.8B Phi-class model</a:t>
+              <a:t>~3.3B Phi-3.5-class model</a:t>
             </a:r>
             <a:endParaRPr lang="en-US" sz="1300" dirty="0"/>
           </a:p>
@@ -10003,46 +11237,65 @@
                 <a:ea typeface="Calibri" pitchFamily="34" charset="-122"/>
                 <a:cs typeface="Calibri" pitchFamily="34" charset="-120"/>
               </a:rPr>
-              <a:t>WinML / ONNX Runtime path</a:t>
+              <a:t>Summarize · rewrite · generate</a:t>
             </a:r>
             <a:endParaRPr lang="en-US" sz="1300" dirty="0"/>
           </a:p>
-          <a:p>
-            <a:pPr indent="0" marL="0">
-              <a:spcAft>
-                <a:spcPts val="400"/>
-              </a:spcAft>
-              <a:buNone/>
-            </a:pPr>
-            <a:r>
-              <a:rPr lang="en-US" sz="1300" dirty="0">
-                <a:solidFill>
-                  <a:srgbClr val="0F0A2E"/>
-                </a:solidFill>
-                <a:latin typeface="Calibri" pitchFamily="34" charset="0"/>
-                <a:ea typeface="Calibri" pitchFamily="34" charset="-122"/>
-                <a:cs typeface="Calibri" pitchFamily="34" charset="-120"/>
-              </a:rPr>
-              <a:t>Summarize, rewrite, generate</a:t>
-            </a:r>
-            <a:endParaRPr lang="en-US" sz="1300" dirty="0"/>
-          </a:p>
-        </p:txBody>
-      </p:sp>
-      <p:sp>
-        <p:nvSpPr>
-          <p:cNvPr id="19" name="Shape 17"/>
+        </p:txBody>
+      </p:sp>
+      <p:sp>
+        <p:nvSpPr>
+          <p:cNvPr id="20" name="Text 18"/>
+          <p:cNvSpPr/>
+          <p:nvPr/>
+        </p:nvSpPr>
+        <p:spPr>
+          <a:xfrm>
+            <a:off x="4663440" y="5440680"/>
+            <a:ext cx="3154680" cy="320040"/>
+          </a:xfrm>
+          <a:prstGeom prst="rect">
+            <a:avLst/>
+          </a:prstGeom>
+          <a:noFill/>
+          <a:ln/>
+        </p:spPr>
+        <p:txBody>
+          <a:bodyPr wrap="square" rtlCol="0" anchor="ctr"/>
+          <a:lstStyle/>
+          <a:p>
+            <a:pPr indent="0" marL="0">
+              <a:buNone/>
+            </a:pPr>
+            <a:r>
+              <a:rPr lang="en-US" sz="1200" b="1" dirty="0">
+                <a:solidFill>
+                  <a:srgbClr val="6366F1"/>
+                </a:solidFill>
+                <a:latin typeface="Calibri" pitchFamily="34" charset="0"/>
+                <a:ea typeface="Calibri" pitchFamily="34" charset="-122"/>
+                <a:cs typeface="Calibri" pitchFamily="34" charset="-120"/>
+              </a:rPr>
+              <a:t>🔜  maui-labs PR #178</a:t>
+            </a:r>
+            <a:endParaRPr lang="en-US" sz="1200" dirty="0"/>
+          </a:p>
+        </p:txBody>
+      </p:sp>
+      <p:sp>
+        <p:nvSpPr>
+          <p:cNvPr id="21" name="Shape 19"/>
           <p:cNvSpPr/>
           <p:nvPr/>
         </p:nvSpPr>
         <p:spPr>
           <a:xfrm>
             <a:off x="8229600" y="2286000"/>
-            <a:ext cx="3703320" cy="3931920"/>
+            <a:ext cx="3703320" cy="3566160"/>
           </a:xfrm>
           <a:prstGeom prst="roundRect">
             <a:avLst>
-              <a:gd name="adj" fmla="val 2963"/>
+              <a:gd name="adj" fmla="val 3077"/>
             </a:avLst>
           </a:prstGeom>
           <a:solidFill>
@@ -10058,7 +11311,7 @@
       </p:sp>
       <p:sp>
         <p:nvSpPr>
-          <p:cNvPr id="20" name="Shape 18"/>
+          <p:cNvPr id="22" name="Shape 20"/>
           <p:cNvSpPr/>
           <p:nvPr/>
         </p:nvSpPr>
@@ -10083,7 +11336,7 @@
       </p:sp>
       <p:sp>
         <p:nvSpPr>
-          <p:cNvPr id="21" name="Text 19"/>
+          <p:cNvPr id="23" name="Text 21"/>
           <p:cNvSpPr/>
           <p:nvPr/>
         </p:nvSpPr>
@@ -10122,7 +11375,7 @@
       </p:sp>
       <p:sp>
         <p:nvSpPr>
-          <p:cNvPr id="22" name="Text 20"/>
+          <p:cNvPr id="24" name="Text 22"/>
           <p:cNvSpPr/>
           <p:nvPr/>
         </p:nvSpPr>
@@ -10161,7 +11414,7 @@
       </p:sp>
       <p:sp>
         <p:nvSpPr>
-          <p:cNvPr id="23" name="Text 21"/>
+          <p:cNvPr id="25" name="Text 23"/>
           <p:cNvSpPr/>
           <p:nvPr/>
         </p:nvSpPr>
@@ -10200,7 +11453,7 @@
       </p:sp>
       <p:sp>
         <p:nvSpPr>
-          <p:cNvPr id="24" name="Shape 22"/>
+          <p:cNvPr id="26" name="Shape 24"/>
           <p:cNvSpPr/>
           <p:nvPr/>
         </p:nvSpPr>
@@ -10223,14 +11476,14 @@
       </p:sp>
       <p:sp>
         <p:nvSpPr>
-          <p:cNvPr id="25" name="Text 23"/>
+          <p:cNvPr id="27" name="Text 25"/>
           <p:cNvSpPr/>
           <p:nvPr/>
         </p:nvSpPr>
         <p:spPr>
           <a:xfrm>
             <a:off x="8503920" y="4069080"/>
-            <a:ext cx="3154680" cy="2011680"/>
+            <a:ext cx="3154680" cy="1325880"/>
           </a:xfrm>
           <a:prstGeom prst="rect">
             <a:avLst/>
@@ -10277,7 +11530,7 @@
                 <a:ea typeface="Calibri" pitchFamily="34" charset="-122"/>
                 <a:cs typeface="Calibri" pitchFamily="34" charset="-120"/>
               </a:rPr>
-              <a:t>~3B Gemini Nano</a:t>
+              <a:t>Compact Gemini Nano</a:t>
             </a:r>
             <a:endParaRPr lang="en-US" sz="1300" dirty="0"/>
           </a:p>
@@ -10301,23 +11554,136 @@
             </a:r>
             <a:endParaRPr lang="en-US" sz="1300" dirty="0"/>
           </a:p>
-          <a:p>
-            <a:pPr indent="0" marL="0">
-              <a:spcAft>
-                <a:spcPts val="400"/>
-              </a:spcAft>
+        </p:txBody>
+      </p:sp>
+      <p:sp>
+        <p:nvSpPr>
+          <p:cNvPr id="28" name="Text 26"/>
+          <p:cNvSpPr/>
+          <p:nvPr/>
+        </p:nvSpPr>
+        <p:spPr>
+          <a:xfrm>
+            <a:off x="8503920" y="5440680"/>
+            <a:ext cx="3154680" cy="320040"/>
+          </a:xfrm>
+          <a:prstGeom prst="rect">
+            <a:avLst/>
+          </a:prstGeom>
+          <a:noFill/>
+          <a:ln/>
+        </p:spPr>
+        <p:txBody>
+          <a:bodyPr wrap="square" rtlCol="0" anchor="ctr"/>
+          <a:lstStyle/>
+          <a:p>
+            <a:pPr indent="0" marL="0">
+              <a:buNone/>
+            </a:pPr>
+            <a:r>
+              <a:rPr lang="en-US" sz="1200" b="1" dirty="0">
+                <a:solidFill>
+                  <a:srgbClr val="FBBF24"/>
+                </a:solidFill>
+                <a:latin typeface="Calibri" pitchFamily="34" charset="0"/>
+                <a:ea typeface="Calibri" pitchFamily="34" charset="-122"/>
+                <a:cs typeface="Calibri" pitchFamily="34" charset="-120"/>
+              </a:rPr>
+              <a:t>🔬  .NET wrapper in scope</a:t>
+            </a:r>
+            <a:endParaRPr lang="en-US" sz="1200" dirty="0"/>
+          </a:p>
+        </p:txBody>
+      </p:sp>
+      <p:sp>
+        <p:nvSpPr>
+          <p:cNvPr id="29" name="Shape 27"/>
+          <p:cNvSpPr/>
+          <p:nvPr/>
+        </p:nvSpPr>
+        <p:spPr>
+          <a:xfrm>
+            <a:off x="548640" y="5989320"/>
+            <a:ext cx="11094415" cy="502920"/>
+          </a:xfrm>
+          <a:prstGeom prst="roundRect">
+            <a:avLst>
+              <a:gd name="adj" fmla="val 14545"/>
+            </a:avLst>
+          </a:prstGeom>
+          <a:solidFill>
+            <a:srgbClr val="0F0A2E"/>
+          </a:solidFill>
+          <a:ln w="12700">
+            <a:solidFill>
+              <a:srgbClr val="0F0A2E"/>
+            </a:solidFill>
+            <a:prstDash val="solid"/>
+          </a:ln>
+        </p:spPr>
+      </p:sp>
+      <p:sp>
+        <p:nvSpPr>
+          <p:cNvPr id="30" name="Text 28"/>
+          <p:cNvSpPr/>
+          <p:nvPr/>
+        </p:nvSpPr>
+        <p:spPr>
+          <a:xfrm>
+            <a:off x="548640" y="5989320"/>
+            <a:ext cx="11094415" cy="502920"/>
+          </a:xfrm>
+          <a:prstGeom prst="rect">
+            <a:avLst/>
+          </a:prstGeom>
+          <a:noFill/>
+          <a:ln/>
+        </p:spPr>
+        <p:txBody>
+          <a:bodyPr wrap="square" rtlCol="0" anchor="ctr"/>
+          <a:lstStyle/>
+          <a:p>
+            <a:pPr algn="ctr" indent="0" marL="0">
               <a:buNone/>
             </a:pPr>
             <a:r>
               <a:rPr lang="en-US" sz="1300" dirty="0">
                 <a:solidFill>
-                  <a:srgbClr val="0F0A2E"/>
-                </a:solidFill>
-                <a:latin typeface="Calibri" pitchFamily="34" charset="0"/>
-                <a:ea typeface="Calibri" pitchFamily="34" charset="-122"/>
-                <a:cs typeface="Calibri" pitchFamily="34" charset="-120"/>
-              </a:rPr>
-              <a:t>Prompt API (alpha)</a:t>
+                  <a:srgbClr val="CFCBED"/>
+                </a:solidFill>
+                <a:latin typeface="Calibri" pitchFamily="34" charset="0"/>
+                <a:ea typeface="Calibri" pitchFamily="34" charset="-122"/>
+                <a:cs typeface="Calibri" pitchFamily="34" charset="-120"/>
+              </a:rPr>
+              <a:t>Unified for .NET MAUI:  </a:t>
+            </a:r>
+            <a:pPr algn="ctr" indent="0" marL="0">
+              <a:buNone/>
+            </a:pPr>
+            <a:r>
+              <a:rPr lang="en-US" sz="1300" b="1" dirty="0">
+                <a:solidFill>
+                  <a:srgbClr val="FB7185"/>
+                </a:solidFill>
+                <a:latin typeface="Consolas" pitchFamily="34" charset="0"/>
+                <a:ea typeface="Consolas" pitchFamily="34" charset="-122"/>
+                <a:cs typeface="Consolas" pitchFamily="34" charset="-120"/>
+              </a:rPr>
+              <a:t>Microsoft.Maui.Essentials.AI</a:t>
+            </a:r>
+            <a:pPr algn="ctr" indent="0" marL="0">
+              <a:buNone/>
+            </a:pPr>
+            <a:r>
+              <a:rPr lang="en-US" sz="1300" i="1" dirty="0">
+                <a:solidFill>
+                  <a:srgbClr val="CFCBED"/>
+                </a:solidFill>
+                <a:latin typeface="Calibri" pitchFamily="34" charset="0"/>
+                <a:ea typeface="Calibri" pitchFamily="34" charset="-122"/>
+                <a:cs typeface="Calibri" pitchFamily="34" charset="-120"/>
+              </a:rPr>
+              <a:t>  →  one IChatClient shape, Apple today · Phi Silica next · Gemini in scope</a:t>
             </a:r>
             <a:endParaRPr lang="en-US" sz="1300" dirty="0"/>
           </a:p>
@@ -10325,7 +11691,7 @@
       </p:sp>
       <p:sp>
         <p:nvSpPr>
-          <p:cNvPr id="26" name="Shape 24"/>
+          <p:cNvPr id="31" name="Shape 29"/>
           <p:cNvSpPr/>
           <p:nvPr/>
         </p:nvSpPr>
@@ -10349,7 +11715,7 @@
       </p:sp>
       <p:sp>
         <p:nvSpPr>
-          <p:cNvPr id="27" name="Text 25"/>
+          <p:cNvPr id="32" name="Text 30"/>
           <p:cNvSpPr/>
           <p:nvPr/>
         </p:nvSpPr>
@@ -10388,7 +11754,7 @@
       </p:sp>
       <p:sp>
         <p:nvSpPr>
-          <p:cNvPr id="28" name="Text 26"/>
+          <p:cNvPr id="33" name="Text 31"/>
           <p:cNvSpPr/>
           <p:nvPr/>
         </p:nvSpPr>
@@ -10427,7 +11793,7 @@
       </p:sp>
       <p:sp>
         <p:nvSpPr>
-          <p:cNvPr id="29" name="Text 27"/>
+          <p:cNvPr id="34" name="Text 32"/>
           <p:cNvSpPr/>
           <p:nvPr/>
         </p:nvSpPr>
@@ -10508,7 +11874,7 @@
       </p:sp>
       <p:sp>
         <p:nvSpPr>
-          <p:cNvPr id="30" name="Text 28"/>
+          <p:cNvPr id="35" name="Text 33"/>
           <p:cNvSpPr/>
           <p:nvPr/>
         </p:nvSpPr>
@@ -10539,7 +11905,7 @@
                 <a:ea typeface="Calibri" pitchFamily="34" charset="-122"/>
                 <a:cs typeface="Calibri" pitchFamily="34" charset="-120"/>
               </a:rPr>
-              <a:t>6 / 12</a:t>
+              <a:t>6 / 13</a:t>
             </a:r>
             <a:endParaRPr lang="en-US" sz="1000" dirty="0"/>
           </a:p>
@@ -10774,7 +12140,7 @@
               <a:buNone/>
             </a:pPr>
             <a:r>
-              <a:rPr lang="en-US" sz="1400" dirty="0">
+              <a:rPr lang="en-US" sz="1300" dirty="0">
                 <a:solidFill>
                   <a:srgbClr val="FAF8FF"/>
                 </a:solidFill>
@@ -10782,9 +12148,9 @@
                 <a:ea typeface="Consolas" pitchFamily="34" charset="-122"/>
                 <a:cs typeface="Consolas" pitchFamily="34" charset="-120"/>
               </a:rPr>
-              <a:t>import FoundationModels</a:t>
-            </a:r>
-            <a:endParaRPr lang="en-US" sz="1400" dirty="0"/>
+              <a:t>using Microsoft.Maui.Essentials.AI;</a:t>
+            </a:r>
+            <a:endParaRPr lang="en-US" sz="1300" dirty="0"/>
           </a:p>
           <a:p>
             <a:pPr indent="0" marL="0">
@@ -10793,7 +12159,18 @@
               </a:spcAft>
               <a:buNone/>
             </a:pPr>
-            <a:endParaRPr lang="en-US" sz="1400" dirty="0"/>
+            <a:r>
+              <a:rPr lang="en-US" sz="1300" dirty="0">
+                <a:solidFill>
+                  <a:srgbClr val="FAF8FF"/>
+                </a:solidFill>
+                <a:latin typeface="Consolas" pitchFamily="34" charset="0"/>
+                <a:ea typeface="Consolas" pitchFamily="34" charset="-122"/>
+                <a:cs typeface="Consolas" pitchFamily="34" charset="-120"/>
+              </a:rPr>
+              <a:t>using Microsoft.Extensions.AI;</a:t>
+            </a:r>
+            <a:endParaRPr lang="en-US" sz="1300" dirty="0"/>
           </a:p>
           <a:p>
             <a:pPr indent="0" marL="0">
@@ -10802,8 +12179,17 @@
               </a:spcAft>
               <a:buNone/>
             </a:pPr>
-            <a:r>
-              <a:rPr lang="en-US" sz="1400" dirty="0">
+            <a:endParaRPr lang="en-US" sz="1300" dirty="0"/>
+          </a:p>
+          <a:p>
+            <a:pPr indent="0" marL="0">
+              <a:spcAft>
+                <a:spcPts val="200"/>
+              </a:spcAft>
+              <a:buNone/>
+            </a:pPr>
+            <a:r>
+              <a:rPr lang="en-US" sz="1300" dirty="0">
                 <a:solidFill>
                   <a:srgbClr val="FAF8FF"/>
                 </a:solidFill>
@@ -10811,9 +12197,9 @@
                 <a:ea typeface="Consolas" pitchFamily="34" charset="-122"/>
                 <a:cs typeface="Consolas" pitchFamily="34" charset="-120"/>
               </a:rPr>
-              <a:t>let session = LanguageModelSession()</a:t>
-            </a:r>
-            <a:endParaRPr lang="en-US" sz="1400" dirty="0"/>
+              <a:t>IChatClient chat = new AppleIntelligenceChatClient();</a:t>
+            </a:r>
+            <a:endParaRPr lang="en-US" sz="1300" dirty="0"/>
           </a:p>
           <a:p>
             <a:pPr indent="0" marL="0">
@@ -10822,7 +12208,7 @@
               </a:spcAft>
               <a:buNone/>
             </a:pPr>
-            <a:endParaRPr lang="en-US" sz="1400" dirty="0"/>
+            <a:endParaRPr lang="en-US" sz="1300" dirty="0"/>
           </a:p>
           <a:p>
             <a:pPr indent="0" marL="0">
@@ -10832,7 +12218,7 @@
               <a:buNone/>
             </a:pPr>
             <a:r>
-              <a:rPr lang="en-US" sz="1400" dirty="0">
+              <a:rPr lang="en-US" sz="1300" dirty="0">
                 <a:solidFill>
                   <a:srgbClr val="FAF8FF"/>
                 </a:solidFill>
@@ -10840,9 +12226,9 @@
                 <a:ea typeface="Consolas" pitchFamily="34" charset="-122"/>
                 <a:cs typeface="Consolas" pitchFamily="34" charset="-120"/>
               </a:rPr>
-              <a:t>let result = try await session.respond(</a:t>
-            </a:r>
-            <a:endParaRPr lang="en-US" sz="1400" dirty="0"/>
+              <a:t>var response = await chat.GetResponseAsync(</a:t>
+            </a:r>
+            <a:endParaRPr lang="en-US" sz="1300" dirty="0"/>
           </a:p>
           <a:p>
             <a:pPr indent="0" marL="0">
@@ -10852,7 +12238,7 @@
               <a:buNone/>
             </a:pPr>
             <a:r>
-              <a:rPr lang="en-US" sz="1400" dirty="0">
+              <a:rPr lang="en-US" sz="1300" dirty="0">
                 <a:solidFill>
                   <a:srgbClr val="FAF8FF"/>
                 </a:solidFill>
@@ -10860,9 +12246,9 @@
                 <a:ea typeface="Consolas" pitchFamily="34" charset="-122"/>
                 <a:cs typeface="Consolas" pitchFamily="34" charset="-120"/>
               </a:rPr>
-              <a:t>    to: "Summarise the agenda for today.")</a:t>
-            </a:r>
-            <a:endParaRPr lang="en-US" sz="1400" dirty="0"/>
+              <a:t>    "Summarise the agenda for today.");</a:t>
+            </a:r>
+            <a:endParaRPr lang="en-US" sz="1300" dirty="0"/>
           </a:p>
           <a:p>
             <a:pPr indent="0" marL="0">
@@ -10871,7 +12257,7 @@
               </a:spcAft>
               <a:buNone/>
             </a:pPr>
-            <a:endParaRPr lang="en-US" sz="1400" dirty="0"/>
+            <a:endParaRPr lang="en-US" sz="1300" dirty="0"/>
           </a:p>
           <a:p>
             <a:pPr indent="0" marL="0">
@@ -10881,7 +12267,7 @@
               <a:buNone/>
             </a:pPr>
             <a:r>
-              <a:rPr lang="en-US" sz="1400" dirty="0">
+              <a:rPr lang="en-US" sz="1300" dirty="0">
                 <a:solidFill>
                   <a:srgbClr val="FAF8FF"/>
                 </a:solidFill>
@@ -10889,9 +12275,9 @@
                 <a:ea typeface="Consolas" pitchFamily="34" charset="-122"/>
                 <a:cs typeface="Consolas" pitchFamily="34" charset="-120"/>
               </a:rPr>
-              <a:t>print(result.content)</a:t>
-            </a:r>
-            <a:endParaRPr lang="en-US" sz="1400" dirty="0"/>
+              <a:t>Console.WriteLine(response.Text);</a:t>
+            </a:r>
+            <a:endParaRPr lang="en-US" sz="1300" dirty="0"/>
           </a:p>
           <a:p>
             <a:pPr indent="0" marL="0">
@@ -10900,7 +12286,7 @@
               </a:spcAft>
               <a:buNone/>
             </a:pPr>
-            <a:endParaRPr lang="en-US" sz="1400" dirty="0"/>
+            <a:endParaRPr lang="en-US" sz="1300" dirty="0"/>
           </a:p>
           <a:p>
             <a:pPr indent="0" marL="0">
@@ -10910,7 +12296,7 @@
               <a:buNone/>
             </a:pPr>
             <a:r>
-              <a:rPr lang="en-US" sz="1400" dirty="0">
+              <a:rPr lang="en-US" sz="1300" dirty="0">
                 <a:solidFill>
                   <a:srgbClr val="FAF8FF"/>
                 </a:solidFill>
@@ -10920,7 +12306,7 @@
               </a:rPr>
               <a:t>// ✈️  Works in airplane mode</a:t>
             </a:r>
-            <a:endParaRPr lang="en-US" sz="1400" dirty="0"/>
+            <a:endParaRPr lang="en-US" sz="1300" dirty="0"/>
           </a:p>
           <a:p>
             <a:pPr indent="0" marL="0">
@@ -10930,7 +12316,7 @@
               <a:buNone/>
             </a:pPr>
             <a:r>
-              <a:rPr lang="en-US" sz="1400" dirty="0">
+              <a:rPr lang="en-US" sz="1300" dirty="0">
                 <a:solidFill>
                   <a:srgbClr val="FAF8FF"/>
                 </a:solidFill>
@@ -10940,7 +12326,7 @@
               </a:rPr>
               <a:t>// 🆓  No API key, no per-token cost</a:t>
             </a:r>
-            <a:endParaRPr lang="en-US" sz="1400" dirty="0"/>
+            <a:endParaRPr lang="en-US" sz="1300" dirty="0"/>
           </a:p>
           <a:p>
             <a:pPr indent="0" marL="0">
@@ -10950,7 +12336,7 @@
               <a:buNone/>
             </a:pPr>
             <a:r>
-              <a:rPr lang="en-US" sz="1400" dirty="0">
+              <a:rPr lang="en-US" sz="1300" dirty="0">
                 <a:solidFill>
                   <a:srgbClr val="FAF8FF"/>
                 </a:solidFill>
@@ -10960,7 +12346,7 @@
               </a:rPr>
               <a:t>// 🔒  Data never leaves the device</a:t>
             </a:r>
-            <a:endParaRPr lang="en-US" sz="1400" dirty="0"/>
+            <a:endParaRPr lang="en-US" sz="1300" dirty="0"/>
           </a:p>
         </p:txBody>
       </p:sp>
@@ -12412,7 +13798,7 @@
                 <a:ea typeface="Calibri" pitchFamily="34" charset="-122"/>
                 <a:cs typeface="Calibri" pitchFamily="34" charset="-120"/>
               </a:rPr>
-              <a:t>8 / 12</a:t>
+              <a:t>8 / 13</a:t>
             </a:r>
             <a:endParaRPr lang="en-US" sz="1000" dirty="0"/>
           </a:p>
@@ -12647,7 +14033,7 @@
               <a:buNone/>
             </a:pPr>
             <a:r>
-              <a:rPr lang="en-US" sz="1300" dirty="0">
+              <a:rPr lang="en-US" sz="1200" dirty="0">
                 <a:solidFill>
                   <a:srgbClr val="FAF8FF"/>
                 </a:solidFill>
@@ -12655,9 +14041,9 @@
                 <a:ea typeface="Consolas" pitchFamily="34" charset="-122"/>
                 <a:cs typeface="Consolas" pitchFamily="34" charset="-120"/>
               </a:rPr>
-              <a:t># Start a local model</a:t>
-            </a:r>
-            <a:endParaRPr lang="en-US" sz="1300" dirty="0"/>
+              <a:t># Start a local model from the CLI</a:t>
+            </a:r>
+            <a:endParaRPr lang="en-US" sz="1200" dirty="0"/>
           </a:p>
           <a:p>
             <a:pPr indent="0" marL="0">
@@ -12667,7 +14053,7 @@
               <a:buNone/>
             </a:pPr>
             <a:r>
-              <a:rPr lang="en-US" sz="1300" dirty="0">
+              <a:rPr lang="en-US" sz="1200" dirty="0">
                 <a:solidFill>
                   <a:srgbClr val="FAF8FF"/>
                 </a:solidFill>
@@ -12677,7 +14063,7 @@
               </a:rPr>
               <a:t>&gt; foundry model run phi-4-mini</a:t>
             </a:r>
-            <a:endParaRPr lang="en-US" sz="1300" dirty="0"/>
+            <a:endParaRPr lang="en-US" sz="1200" dirty="0"/>
           </a:p>
           <a:p>
             <a:pPr indent="0" marL="0">
@@ -12686,7 +14072,7 @@
               </a:spcAft>
               <a:buNone/>
             </a:pPr>
-            <a:endParaRPr lang="en-US" sz="1300" dirty="0"/>
+            <a:endParaRPr lang="en-US" sz="1200" dirty="0"/>
           </a:p>
           <a:p>
             <a:pPr indent="0" marL="0">
@@ -12696,7 +14082,7 @@
               <a:buNone/>
             </a:pPr>
             <a:r>
-              <a:rPr lang="en-US" sz="1300" dirty="0">
+              <a:rPr lang="en-US" sz="1200" dirty="0">
                 <a:solidFill>
                   <a:srgbClr val="FAF8FF"/>
                 </a:solidFill>
@@ -12704,9 +14090,9 @@
                 <a:ea typeface="Consolas" pitchFamily="34" charset="-122"/>
                 <a:cs typeface="Consolas" pitchFamily="34" charset="-120"/>
               </a:rPr>
-              <a:t># Same OpenAI shape, different base URL</a:t>
-            </a:r>
-            <a:endParaRPr lang="en-US" sz="1300" dirty="0"/>
+              <a:t>// Manager owns the dynamic endpoint + key</a:t>
+            </a:r>
+            <a:endParaRPr lang="en-US" sz="1200" dirty="0"/>
           </a:p>
           <a:p>
             <a:pPr indent="0" marL="0">
@@ -12716,7 +14102,7 @@
               <a:buNone/>
             </a:pPr>
             <a:r>
-              <a:rPr lang="en-US" sz="1300" dirty="0">
+              <a:rPr lang="en-US" sz="1200" dirty="0">
                 <a:solidFill>
                   <a:srgbClr val="FAF8FF"/>
                 </a:solidFill>
@@ -12724,9 +14110,9 @@
                 <a:ea typeface="Consolas" pitchFamily="34" charset="-122"/>
                 <a:cs typeface="Consolas" pitchFamily="34" charset="-120"/>
               </a:rPr>
-              <a:t>var client = new OpenAIClient(</a:t>
-            </a:r>
-            <a:endParaRPr lang="en-US" sz="1300" dirty="0"/>
+              <a:t>var manager = await FoundryLocalManager</a:t>
+            </a:r>
+            <a:endParaRPr lang="en-US" sz="1200" dirty="0"/>
           </a:p>
           <a:p>
             <a:pPr indent="0" marL="0">
@@ -12736,7 +14122,7 @@
               <a:buNone/>
             </a:pPr>
             <a:r>
-              <a:rPr lang="en-US" sz="1300" dirty="0">
+              <a:rPr lang="en-US" sz="1200" dirty="0">
                 <a:solidFill>
                   <a:srgbClr val="FAF8FF"/>
                 </a:solidFill>
@@ -12744,9 +14130,9 @@
                 <a:ea typeface="Consolas" pitchFamily="34" charset="-122"/>
                 <a:cs typeface="Consolas" pitchFamily="34" charset="-120"/>
               </a:rPr>
-              <a:t>    new Uri("http://localhost:5273/v1"),</a:t>
-            </a:r>
-            <a:endParaRPr lang="en-US" sz="1300" dirty="0"/>
+              <a:t>    .StartModelAsync("phi-4-mini");</a:t>
+            </a:r>
+            <a:endParaRPr lang="en-US" sz="1200" dirty="0"/>
           </a:p>
           <a:p>
             <a:pPr indent="0" marL="0">
@@ -12755,8 +14141,17 @@
               </a:spcAft>
               <a:buNone/>
             </a:pPr>
-            <a:r>
-              <a:rPr lang="en-US" sz="1300" dirty="0">
+            <a:endParaRPr lang="en-US" sz="1200" dirty="0"/>
+          </a:p>
+          <a:p>
+            <a:pPr indent="0" marL="0">
+              <a:spcAft>
+                <a:spcPts val="200"/>
+              </a:spcAft>
+              <a:buNone/>
+            </a:pPr>
+            <a:r>
+              <a:rPr lang="en-US" sz="1200" dirty="0">
                 <a:solidFill>
                   <a:srgbClr val="FAF8FF"/>
                 </a:solidFill>
@@ -12764,9 +14159,9 @@
                 <a:ea typeface="Consolas" pitchFamily="34" charset="-122"/>
                 <a:cs typeface="Consolas" pitchFamily="34" charset="-120"/>
               </a:rPr>
-              <a:t>    new ApiKeyCredential("local"));</a:t>
-            </a:r>
-            <a:endParaRPr lang="en-US" sz="1300" dirty="0"/>
+              <a:t>var client = new OpenAIClient(</a:t>
+            </a:r>
+            <a:endParaRPr lang="en-US" sz="1200" dirty="0"/>
           </a:p>
           <a:p>
             <a:pPr indent="0" marL="0">
@@ -12775,7 +14170,18 @@
               </a:spcAft>
               <a:buNone/>
             </a:pPr>
-            <a:endParaRPr lang="en-US" sz="1300" dirty="0"/>
+            <a:r>
+              <a:rPr lang="en-US" sz="1200" dirty="0">
+                <a:solidFill>
+                  <a:srgbClr val="FAF8FF"/>
+                </a:solidFill>
+                <a:latin typeface="Consolas" pitchFamily="34" charset="0"/>
+                <a:ea typeface="Consolas" pitchFamily="34" charset="-122"/>
+                <a:cs typeface="Consolas" pitchFamily="34" charset="-120"/>
+              </a:rPr>
+              <a:t>    new ApiKeyCredential(manager.ApiKey),</a:t>
+            </a:r>
+            <a:endParaRPr lang="en-US" sz="1200" dirty="0"/>
           </a:p>
           <a:p>
             <a:pPr indent="0" marL="0">
@@ -12785,7 +14191,7 @@
               <a:buNone/>
             </a:pPr>
             <a:r>
-              <a:rPr lang="en-US" sz="1300" dirty="0">
+              <a:rPr lang="en-US" sz="1200" dirty="0">
                 <a:solidFill>
                   <a:srgbClr val="FAF8FF"/>
                 </a:solidFill>
@@ -12793,9 +14199,9 @@
                 <a:ea typeface="Consolas" pitchFamily="34" charset="-122"/>
                 <a:cs typeface="Consolas" pitchFamily="34" charset="-120"/>
               </a:rPr>
-              <a:t>var chat = client.GetChatClient("phi-4-mini");</a:t>
-            </a:r>
-            <a:endParaRPr lang="en-US" sz="1300" dirty="0"/>
+              <a:t>    new OpenAIClientOptions { Endpoint = manager.Endpoint });</a:t>
+            </a:r>
+            <a:endParaRPr lang="en-US" sz="1200" dirty="0"/>
           </a:p>
           <a:p>
             <a:pPr indent="0" marL="0">
@@ -12804,8 +14210,17 @@
               </a:spcAft>
               <a:buNone/>
             </a:pPr>
-            <a:r>
-              <a:rPr lang="en-US" sz="1300" dirty="0">
+            <a:endParaRPr lang="en-US" sz="1200" dirty="0"/>
+          </a:p>
+          <a:p>
+            <a:pPr indent="0" marL="0">
+              <a:spcAft>
+                <a:spcPts val="200"/>
+              </a:spcAft>
+              <a:buNone/>
+            </a:pPr>
+            <a:r>
+              <a:rPr lang="en-US" sz="1200" dirty="0">
                 <a:solidFill>
                   <a:srgbClr val="FAF8FF"/>
                 </a:solidFill>
@@ -12813,29 +14228,9 @@
                 <a:ea typeface="Consolas" pitchFamily="34" charset="-122"/>
                 <a:cs typeface="Consolas" pitchFamily="34" charset="-120"/>
               </a:rPr>
-              <a:t>var response = await chat.CompleteChatAsync(</a:t>
-            </a:r>
-            <a:endParaRPr lang="en-US" sz="1300" dirty="0"/>
-          </a:p>
-          <a:p>
-            <a:pPr indent="0" marL="0">
-              <a:spcAft>
-                <a:spcPts val="200"/>
-              </a:spcAft>
-              <a:buNone/>
-            </a:pPr>
-            <a:r>
-              <a:rPr lang="en-US" sz="1300" dirty="0">
-                <a:solidFill>
-                  <a:srgbClr val="FAF8FF"/>
-                </a:solidFill>
-                <a:latin typeface="Consolas" pitchFamily="34" charset="0"/>
-                <a:ea typeface="Consolas" pitchFamily="34" charset="-122"/>
-                <a:cs typeface="Consolas" pitchFamily="34" charset="-120"/>
-              </a:rPr>
-              <a:t>    "Summarise the agenda for today.");</a:t>
-            </a:r>
-            <a:endParaRPr lang="en-US" sz="1300" dirty="0"/>
+              <a:t>var chat = client.GetChatClient("phi-4-mini");</a:t>
+            </a:r>
+            <a:endParaRPr lang="en-US" sz="1200" dirty="0"/>
           </a:p>
         </p:txBody>
       </p:sp>

--- a/slides/Unifying-Local-Cloud-AI.pptx
+++ b/slides/Unifying-Local-Cloud-AI.pptx
@@ -2508,7 +2508,7 @@
         <p:spPr>
           <a:xfrm>
             <a:off x="548640" y="2377440"/>
-            <a:ext cx="3200400" cy="822960"/>
+            <a:ext cx="2743200" cy="822960"/>
           </a:xfrm>
           <a:prstGeom prst="roundRect">
             <a:avLst>
@@ -2560,7 +2560,7 @@
         <p:spPr>
           <a:xfrm>
             <a:off x="822960" y="2468880"/>
-            <a:ext cx="2834640" cy="320040"/>
+            <a:ext cx="2377440" cy="320040"/>
           </a:xfrm>
           <a:prstGeom prst="rect">
             <a:avLst/>
@@ -2599,7 +2599,7 @@
         <p:spPr>
           <a:xfrm>
             <a:off x="822960" y="2788920"/>
-            <a:ext cx="2834640" cy="320040"/>
+            <a:ext cx="2377440" cy="320040"/>
           </a:xfrm>
           <a:prstGeom prst="rect">
             <a:avLst/>
@@ -2638,7 +2638,7 @@
         <p:spPr>
           <a:xfrm>
             <a:off x="548640" y="3337560"/>
-            <a:ext cx="3200400" cy="822960"/>
+            <a:ext cx="2743200" cy="822960"/>
           </a:xfrm>
           <a:prstGeom prst="roundRect">
             <a:avLst>
@@ -2690,7 +2690,7 @@
         <p:spPr>
           <a:xfrm>
             <a:off x="822960" y="3429000"/>
-            <a:ext cx="2834640" cy="320040"/>
+            <a:ext cx="2377440" cy="320040"/>
           </a:xfrm>
           <a:prstGeom prst="rect">
             <a:avLst/>
@@ -2729,7 +2729,7 @@
         <p:spPr>
           <a:xfrm>
             <a:off x="822960" y="3749040"/>
-            <a:ext cx="2834640" cy="320040"/>
+            <a:ext cx="2377440" cy="320040"/>
           </a:xfrm>
           <a:prstGeom prst="rect">
             <a:avLst/>
@@ -2768,7 +2768,7 @@
         <p:spPr>
           <a:xfrm>
             <a:off x="548640" y="4297680"/>
-            <a:ext cx="3200400" cy="822960"/>
+            <a:ext cx="2743200" cy="822960"/>
           </a:xfrm>
           <a:prstGeom prst="roundRect">
             <a:avLst>
@@ -2820,7 +2820,7 @@
         <p:spPr>
           <a:xfrm>
             <a:off x="822960" y="4389120"/>
-            <a:ext cx="2834640" cy="320040"/>
+            <a:ext cx="2377440" cy="320040"/>
           </a:xfrm>
           <a:prstGeom prst="rect">
             <a:avLst/>
@@ -2859,7 +2859,7 @@
         <p:spPr>
           <a:xfrm>
             <a:off x="822960" y="4709160"/>
-            <a:ext cx="2834640" cy="320040"/>
+            <a:ext cx="2377440" cy="320040"/>
           </a:xfrm>
           <a:prstGeom prst="rect">
             <a:avLst/>
@@ -2897,7 +2897,7 @@
         </p:nvSpPr>
         <p:spPr>
           <a:xfrm rot="5400000">
-            <a:off x="3794760" y="2624328"/>
+            <a:off x="3337560" y="2624328"/>
             <a:ext cx="365760" cy="329184"/>
           </a:xfrm>
           <a:prstGeom prst="rightTriangle">
@@ -2922,7 +2922,7 @@
         </p:nvSpPr>
         <p:spPr>
           <a:xfrm rot="5400000">
-            <a:off x="3794760" y="3584448"/>
+            <a:off x="3337560" y="3584448"/>
             <a:ext cx="365760" cy="329184"/>
           </a:xfrm>
           <a:prstGeom prst="rightTriangle">
@@ -2947,7 +2947,7 @@
         </p:nvSpPr>
         <p:spPr>
           <a:xfrm rot="5400000">
-            <a:off x="3794760" y="4544568"/>
+            <a:off x="3337560" y="4544568"/>
             <a:ext cx="365760" cy="329184"/>
           </a:xfrm>
           <a:prstGeom prst="rightTriangle">
@@ -2972,12 +2972,12 @@
         </p:nvSpPr>
         <p:spPr>
           <a:xfrm>
-            <a:off x="4297680" y="2377440"/>
-            <a:ext cx="3291840" cy="2880360"/>
+            <a:off x="3840480" y="2377440"/>
+            <a:ext cx="2743200" cy="2880360"/>
           </a:xfrm>
           <a:prstGeom prst="roundRect">
             <a:avLst>
-              <a:gd name="adj" fmla="val 4762"/>
+              <a:gd name="adj" fmla="val 5000"/>
             </a:avLst>
           </a:prstGeom>
           <a:solidFill>
@@ -2999,8 +2999,8 @@
         </p:nvSpPr>
         <p:spPr>
           <a:xfrm>
-            <a:off x="4297680" y="2651760"/>
-            <a:ext cx="3291840" cy="548640"/>
+            <a:off x="3840480" y="2651760"/>
+            <a:ext cx="2743200" cy="548640"/>
           </a:xfrm>
           <a:prstGeom prst="rect">
             <a:avLst/>
@@ -3038,8 +3038,8 @@
         </p:nvSpPr>
         <p:spPr>
           <a:xfrm>
-            <a:off x="4297680" y="3383280"/>
-            <a:ext cx="3291840" cy="1463040"/>
+            <a:off x="3840480" y="3383280"/>
+            <a:ext cx="2743200" cy="1463040"/>
           </a:xfrm>
           <a:prstGeom prst="rect">
             <a:avLst/>
@@ -3120,8 +3120,8 @@
         </p:nvSpPr>
         <p:spPr>
           <a:xfrm>
-            <a:off x="4297680" y="4754880"/>
-            <a:ext cx="3291840" cy="365760"/>
+            <a:off x="3840480" y="4754880"/>
+            <a:ext cx="2743200" cy="365760"/>
           </a:xfrm>
           <a:prstGeom prst="rect">
             <a:avLst/>
@@ -3159,8 +3159,8 @@
         </p:nvSpPr>
         <p:spPr>
           <a:xfrm>
-            <a:off x="7863840" y="2377440"/>
-            <a:ext cx="3870655" cy="2880360"/>
+            <a:off x="6858000" y="2377440"/>
+            <a:ext cx="4876495" cy="2880360"/>
           </a:xfrm>
           <a:prstGeom prst="roundRect">
             <a:avLst>
@@ -3186,8 +3186,8 @@
         </p:nvSpPr>
         <p:spPr>
           <a:xfrm>
-            <a:off x="8046720" y="2514600"/>
-            <a:ext cx="3504895" cy="2606040"/>
+            <a:off x="7040880" y="2514600"/>
+            <a:ext cx="4510735" cy="2606040"/>
           </a:xfrm>
           <a:prstGeom prst="rect">
             <a:avLst/>
@@ -3211,7 +3211,7 @@
                 <a:ea typeface="Consolas" pitchFamily="34" charset="-122"/>
                 <a:cs typeface="Consolas" pitchFamily="34" charset="-120"/>
               </a:rPr>
-              <a:t>AIAgent agent = chatClient</a:t>
+              <a:t>AIAgent agent = chatClient.CreateAIAgent(</a:t>
             </a:r>
             <a:endParaRPr lang="en-US" sz="1200" dirty="0"/>
           </a:p>
@@ -3228,7 +3228,7 @@
                 <a:ea typeface="Consolas" pitchFamily="34" charset="-122"/>
                 <a:cs typeface="Consolas" pitchFamily="34" charset="-120"/>
               </a:rPr>
-              <a:t>    .CreateAIAgent(</a:t>
+              <a:t>    instructions: "You are helpful.",</a:t>
             </a:r>
             <a:endParaRPr lang="en-US" sz="1200" dirty="0"/>
           </a:p>
@@ -3245,24 +3245,7 @@
                 <a:ea typeface="Consolas" pitchFamily="34" charset="-122"/>
                 <a:cs typeface="Consolas" pitchFamily="34" charset="-120"/>
               </a:rPr>
-              <a:t>        instructions: "You are a helpful assistant.",</a:t>
-            </a:r>
-            <a:endParaRPr lang="en-US" sz="1200" dirty="0"/>
-          </a:p>
-          <a:p>
-            <a:pPr indent="0" marL="0">
-              <a:buNone/>
-            </a:pPr>
-            <a:r>
-              <a:rPr lang="en-US" sz="1200" dirty="0">
-                <a:solidFill>
-                  <a:srgbClr val="FAF8FF"/>
-                </a:solidFill>
-                <a:latin typeface="Consolas" pitchFamily="34" charset="0"/>
-                <a:ea typeface="Consolas" pitchFamily="34" charset="-122"/>
-                <a:cs typeface="Consolas" pitchFamily="34" charset="-120"/>
-              </a:rPr>
-              <a:t>        name: "assistant");</a:t>
+              <a:t>    name: "assistant");</a:t>
             </a:r>
             <a:endParaRPr lang="en-US" sz="1200" dirty="0"/>
           </a:p>

--- a/slides/Unifying-Local-Cloud-AI.pptx
+++ b/slides/Unifying-Local-Cloud-AI.pptx
@@ -18,9 +18,10 @@
     <p:sldId id="266" r:id="rId12"/>
     <p:sldId id="267" r:id="rId13"/>
     <p:sldId id="268" r:id="rId14"/>
+    <p:sldId id="269" r:id="rId15"/>
   </p:sldIdLst>
   <p:notesMasterIdLst>
-    <p:notesMasterId r:id="rId15"/>
+    <p:notesMasterId r:id="rId16"/>
   </p:notesMasterIdLst>
   <p:sldSz cx="12192000" cy="6858000"/>
   <p:notesSz cx="6858000" cy="12192000"/>
@@ -890,6 +891,94 @@
             <a:fld id="{F7021451-1387-4CA6-816F-3879F97B5CBC}" type="slidenum">
               <a:rPr lang="en-US"/>
               <a:t>13</a:t>
+            </a:fld>
+            <a:endParaRPr lang="en-US"/>
+          </a:p>
+        </p:txBody>
+      </p:sp>
+    </p:spTree>
+    <p:extLst>
+      <p:ext uri="{BB962C8B-B14F-4D97-AF65-F5344CB8AC3E}">
+        <p14:creationId xmlns:p14="http://schemas.microsoft.com/office/powerpoint/2010/main" val="1024086991"/>
+      </p:ext>
+    </p:extLst>
+  </p:cSld>
+  <p:clrMapOvr>
+    <a:masterClrMapping/>
+  </p:clrMapOvr>
+</p:notes>
+</file>
+
+<file path=ppt/notesSlides/notesSlide14.xml><?xml version="1.0" encoding="utf-8"?>
+<p:notes xmlns:a="http://schemas.openxmlformats.org/drawingml/2006/main" xmlns:r="http://schemas.openxmlformats.org/officeDocument/2006/relationships" xmlns:p="http://schemas.openxmlformats.org/presentationml/2006/main">
+  <p:cSld>
+    <p:spTree>
+      <p:nvGrpSpPr>
+        <p:cNvPr id="1" name=""/>
+        <p:cNvGrpSpPr/>
+        <p:nvPr/>
+      </p:nvGrpSpPr>
+      <p:grpSpPr>
+        <a:xfrm>
+          <a:off x="0" y="0"/>
+          <a:ext cx="0" cy="0"/>
+          <a:chOff x="0" y="0"/>
+          <a:chExt cx="0" cy="0"/>
+        </a:xfrm>
+      </p:grpSpPr>
+      <p:sp>
+        <p:nvSpPr>
+          <p:cNvPr id="2" name="Slide Image Placeholder 1"/>
+          <p:cNvSpPr>
+            <a:spLocks noGrp="1" noRot="1" noChangeAspect="1"/>
+          </p:cNvSpPr>
+          <p:nvPr>
+            <p:ph type="sldImg"/>
+          </p:nvPr>
+        </p:nvSpPr>
+        <p:spPr/>
+      </p:sp>
+      <p:sp>
+        <p:nvSpPr>
+          <p:cNvPr id="3" name="Notes Placeholder 2"/>
+          <p:cNvSpPr>
+            <a:spLocks noGrp="1"/>
+          </p:cNvSpPr>
+          <p:nvPr>
+            <p:ph type="body" idx="1"/>
+          </p:nvPr>
+        </p:nvSpPr>
+        <p:spPr/>
+        <p:txBody>
+          <a:bodyPr/>
+          <a:lstStyle/>
+          <a:p>
+            <a:r>
+              <a:rPr lang="en-US" dirty="0"/>
+              <a:t/>
+            </a:r>
+            <a:endParaRPr lang="en-US" dirty="0"/>
+          </a:p>
+        </p:txBody>
+      </p:sp>
+      <p:sp>
+        <p:nvSpPr>
+          <p:cNvPr id="4" name="Slide Number Placeholder 3"/>
+          <p:cNvSpPr>
+            <a:spLocks noGrp="1"/>
+          </p:cNvSpPr>
+          <p:nvPr>
+            <p:ph type="sldNum" sz="quarter" idx="10"/>
+          </p:nvPr>
+        </p:nvSpPr>
+        <p:spPr/>
+        <p:txBody>
+          <a:bodyPr/>
+          <a:lstStyle/>
+          <a:p>
+            <a:fld id="{F7021451-1387-4CA6-816F-3879F97B5CBC}" type="slidenum">
+              <a:rPr lang="en-US"/>
+              <a:t>14</a:t>
             </a:fld>
             <a:endParaRPr lang="en-US"/>
           </a:p>
@@ -2972,12 +3061,12 @@
         </p:nvSpPr>
         <p:spPr>
           <a:xfrm>
-            <a:off x="3840480" y="2377440"/>
-            <a:ext cx="2743200" cy="2880360"/>
+            <a:off x="3840480" y="2286000"/>
+            <a:ext cx="5029200" cy="3063240"/>
           </a:xfrm>
           <a:prstGeom prst="roundRect">
             <a:avLst>
-              <a:gd name="adj" fmla="val 5000"/>
+              <a:gd name="adj" fmla="val 4478"/>
             </a:avLst>
           </a:prstGeom>
           <a:solidFill>
@@ -2999,8 +3088,8 @@
         </p:nvSpPr>
         <p:spPr>
           <a:xfrm>
-            <a:off x="3840480" y="2651760"/>
-            <a:ext cx="2743200" cy="548640"/>
+            <a:off x="3840480" y="2560320"/>
+            <a:ext cx="5029200" cy="640080"/>
           </a:xfrm>
           <a:prstGeom prst="rect">
             <a:avLst/>
@@ -3016,7 +3105,7 @@
               <a:buNone/>
             </a:pPr>
             <a:r>
-              <a:rPr lang="en-US" sz="2600" b="1" dirty="0">
+              <a:rPr lang="en-US" sz="4000" b="1" dirty="0">
                 <a:solidFill>
                   <a:srgbClr val="FAF8FF"/>
                 </a:solidFill>
@@ -3026,7 +3115,7 @@
               </a:rPr>
               <a:t>AIAgent</a:t>
             </a:r>
-            <a:endParaRPr lang="en-US" sz="2600" dirty="0"/>
+            <a:endParaRPr lang="en-US" sz="4000" dirty="0"/>
           </a:p>
         </p:txBody>
       </p:sp>
@@ -3038,8 +3127,70 @@
         </p:nvSpPr>
         <p:spPr>
           <a:xfrm>
-            <a:off x="3840480" y="3383280"/>
-            <a:ext cx="2743200" cy="1463040"/>
+            <a:off x="3840480" y="3337560"/>
+            <a:ext cx="5029200" cy="365760"/>
+          </a:xfrm>
+          <a:prstGeom prst="rect">
+            <a:avLst/>
+          </a:prstGeom>
+          <a:noFill/>
+          <a:ln/>
+        </p:spPr>
+        <p:txBody>
+          <a:bodyPr wrap="square" rtlCol="0" anchor="ctr"/>
+          <a:lstStyle/>
+          <a:p>
+            <a:pPr algn="ctr" indent="0" marL="0">
+              <a:buNone/>
+            </a:pPr>
+            <a:r>
+              <a:rPr lang="en-US" sz="1400" dirty="0">
+                <a:solidFill>
+                  <a:srgbClr val="CFCBED"/>
+                </a:solidFill>
+                <a:latin typeface="Calibri" pitchFamily="34" charset="0"/>
+                <a:ea typeface="Calibri" pitchFamily="34" charset="-122"/>
+                <a:cs typeface="Calibri" pitchFamily="34" charset="-120"/>
+              </a:rPr>
+              <a:t>AgentThread  ·  Tools  ·  Workflows  ·  Streaming</a:t>
+            </a:r>
+            <a:endParaRPr lang="en-US" sz="1400" dirty="0"/>
+          </a:p>
+        </p:txBody>
+      </p:sp>
+      <p:sp>
+        <p:nvSpPr>
+          <p:cNvPr id="23" name="Shape 21"/>
+          <p:cNvSpPr/>
+          <p:nvPr/>
+        </p:nvSpPr>
+        <p:spPr>
+          <a:xfrm>
+            <a:off x="4846320" y="3840480"/>
+            <a:ext cx="3017520" cy="0"/>
+          </a:xfrm>
+          <a:prstGeom prst="line">
+            <a:avLst/>
+          </a:prstGeom>
+          <a:noFill/>
+          <a:ln w="12700">
+            <a:solidFill>
+              <a:srgbClr val="FB7185"/>
+            </a:solidFill>
+            <a:prstDash val="solid"/>
+          </a:ln>
+        </p:spPr>
+      </p:sp>
+      <p:sp>
+        <p:nvSpPr>
+          <p:cNvPr id="24" name="Text 22"/>
+          <p:cNvSpPr/>
+          <p:nvPr/>
+        </p:nvSpPr>
+        <p:spPr>
+          <a:xfrm>
+            <a:off x="3840480" y="3977640"/>
+            <a:ext cx="5029200" cy="822960"/>
           </a:xfrm>
           <a:prstGeom prst="rect">
             <a:avLst/>
@@ -3058,7 +3209,7 @@
               <a:buNone/>
             </a:pPr>
             <a:r>
-              <a:rPr lang="en-US" sz="1400" dirty="0">
+              <a:rPr lang="en-US" sz="1300" dirty="0">
                 <a:solidFill>
                   <a:srgbClr val="CFCBED"/>
                 </a:solidFill>
@@ -3066,9 +3217,9 @@
                 <a:ea typeface="Calibri" pitchFamily="34" charset="-122"/>
                 <a:cs typeface="Calibri" pitchFamily="34" charset="-120"/>
               </a:rPr>
-              <a:t>AgentThread · Tools</a:t>
-            </a:r>
-            <a:endParaRPr lang="en-US" sz="1400" dirty="0"/>
+              <a:t>ChatClientAgent  ·  WorkflowAgent</a:t>
+            </a:r>
+            <a:endParaRPr lang="en-US" sz="1300" dirty="0"/>
           </a:p>
           <a:p>
             <a:pPr algn="ctr" indent="0" marL="0">
@@ -3078,7 +3229,7 @@
               <a:buNone/>
             </a:pPr>
             <a:r>
-              <a:rPr lang="en-US" sz="1400" dirty="0">
+              <a:rPr lang="en-US" sz="1300" dirty="0">
                 <a:solidFill>
                   <a:srgbClr val="CFCBED"/>
                 </a:solidFill>
@@ -3086,58 +3237,38 @@
                 <a:ea typeface="Calibri" pitchFamily="34" charset="-122"/>
                 <a:cs typeface="Calibri" pitchFamily="34" charset="-120"/>
               </a:rPr>
-              <a:t>Workflows · Streaming</a:t>
-            </a:r>
-            <a:endParaRPr lang="en-US" sz="1400" dirty="0"/>
-          </a:p>
+              <a:t>FunctionInvokingChatClient</a:t>
+            </a:r>
+            <a:endParaRPr lang="en-US" sz="1300" dirty="0"/>
+          </a:p>
+        </p:txBody>
+      </p:sp>
+      <p:sp>
+        <p:nvSpPr>
+          <p:cNvPr id="25" name="Text 23"/>
+          <p:cNvSpPr/>
+          <p:nvPr/>
+        </p:nvSpPr>
+        <p:spPr>
+          <a:xfrm>
+            <a:off x="3840480" y="4937760"/>
+            <a:ext cx="5029200" cy="320040"/>
+          </a:xfrm>
+          <a:prstGeom prst="rect">
+            <a:avLst/>
+          </a:prstGeom>
+          <a:noFill/>
+          <a:ln/>
+        </p:spPr>
+        <p:txBody>
+          <a:bodyPr wrap="square" rtlCol="0" anchor="ctr"/>
+          <a:lstStyle/>
           <a:p>
             <a:pPr algn="ctr" indent="0" marL="0">
-              <a:spcAft>
-                <a:spcPts val="400"/>
-              </a:spcAft>
-              <a:buNone/>
-            </a:pPr>
-            <a:r>
-              <a:rPr lang="en-US" sz="1400" dirty="0">
-                <a:solidFill>
-                  <a:srgbClr val="CFCBED"/>
-                </a:solidFill>
-                <a:latin typeface="Calibri" pitchFamily="34" charset="0"/>
-                <a:ea typeface="Calibri" pitchFamily="34" charset="-122"/>
-                <a:cs typeface="Calibri" pitchFamily="34" charset="-120"/>
-              </a:rPr>
-              <a:t>Providers</a:t>
-            </a:r>
-            <a:endParaRPr lang="en-US" sz="1400" dirty="0"/>
-          </a:p>
-        </p:txBody>
-      </p:sp>
-      <p:sp>
-        <p:nvSpPr>
-          <p:cNvPr id="23" name="Text 21"/>
-          <p:cNvSpPr/>
-          <p:nvPr/>
-        </p:nvSpPr>
-        <p:spPr>
-          <a:xfrm>
-            <a:off x="3840480" y="4754880"/>
-            <a:ext cx="2743200" cy="365760"/>
-          </a:xfrm>
-          <a:prstGeom prst="rect">
-            <a:avLst/>
-          </a:prstGeom>
-          <a:noFill/>
-          <a:ln/>
-        </p:spPr>
-        <p:txBody>
-          <a:bodyPr wrap="square" rtlCol="0" anchor="ctr"/>
-          <a:lstStyle/>
-          <a:p>
-            <a:pPr algn="ctr" indent="0" marL="0">
-              <a:buNone/>
-            </a:pPr>
-            <a:r>
-              <a:rPr lang="en-US" sz="1200" i="1" dirty="0">
+              <a:buNone/>
+            </a:pPr>
+            <a:r>
+              <a:rPr lang="en-US" sz="1300" i="1" dirty="0">
                 <a:solidFill>
                   <a:srgbClr val="FB7185"/>
                 </a:solidFill>
@@ -3147,32 +3278,30 @@
               </a:rPr>
               <a:t>Microsoft.Agents.AI</a:t>
             </a:r>
-            <a:endParaRPr lang="en-US" sz="1200" dirty="0"/>
-          </a:p>
-        </p:txBody>
-      </p:sp>
-      <p:sp>
-        <p:nvSpPr>
-          <p:cNvPr id="24" name="Shape 22"/>
-          <p:cNvSpPr/>
-          <p:nvPr/>
-        </p:nvSpPr>
-        <p:spPr>
-          <a:xfrm>
-            <a:off x="6858000" y="2377440"/>
-            <a:ext cx="4876495" cy="2880360"/>
-          </a:xfrm>
-          <a:prstGeom prst="roundRect">
-            <a:avLst>
-              <a:gd name="adj" fmla="val 3175"/>
-            </a:avLst>
+            <a:endParaRPr lang="en-US" sz="1300" dirty="0"/>
+          </a:p>
+        </p:txBody>
+      </p:sp>
+      <p:sp>
+        <p:nvSpPr>
+          <p:cNvPr id="26" name="Shape 24"/>
+          <p:cNvSpPr/>
+          <p:nvPr/>
+        </p:nvSpPr>
+        <p:spPr>
+          <a:xfrm>
+            <a:off x="9235440" y="2404872"/>
+            <a:ext cx="182880" cy="182880"/>
+          </a:xfrm>
+          <a:prstGeom prst="ellipse">
+            <a:avLst/>
           </a:prstGeom>
           <a:solidFill>
-            <a:srgbClr val="1E1B4B"/>
+            <a:srgbClr val="FB7185"/>
           </a:solidFill>
           <a:ln w="12700">
             <a:solidFill>
-              <a:srgbClr val="6366F1"/>
+              <a:srgbClr val="FB7185"/>
             </a:solidFill>
             <a:prstDash val="solid"/>
           </a:ln>
@@ -3180,177 +3309,400 @@
       </p:sp>
       <p:sp>
         <p:nvSpPr>
-          <p:cNvPr id="25" name="Text 23"/>
-          <p:cNvSpPr/>
-          <p:nvPr/>
-        </p:nvSpPr>
-        <p:spPr>
-          <a:xfrm>
-            <a:off x="7040880" y="2514600"/>
-            <a:ext cx="4510735" cy="2606040"/>
-          </a:xfrm>
-          <a:prstGeom prst="rect">
-            <a:avLst/>
-          </a:prstGeom>
-          <a:noFill/>
-          <a:ln/>
-        </p:spPr>
-        <p:txBody>
-          <a:bodyPr wrap="square" rtlCol="0" anchor="ctr"/>
-          <a:lstStyle/>
-          <a:p>
-            <a:pPr indent="0" marL="0">
-              <a:buNone/>
-            </a:pPr>
-            <a:r>
-              <a:rPr lang="en-US" sz="1200" dirty="0">
-                <a:solidFill>
-                  <a:srgbClr val="FAF8FF"/>
-                </a:solidFill>
-                <a:latin typeface="Consolas" pitchFamily="34" charset="0"/>
-                <a:ea typeface="Consolas" pitchFamily="34" charset="-122"/>
-                <a:cs typeface="Consolas" pitchFamily="34" charset="-120"/>
-              </a:rPr>
-              <a:t>AIAgent agent = chatClient.CreateAIAgent(</a:t>
-            </a:r>
-            <a:endParaRPr lang="en-US" sz="1200" dirty="0"/>
-          </a:p>
-          <a:p>
-            <a:pPr indent="0" marL="0">
-              <a:buNone/>
-            </a:pPr>
-            <a:r>
-              <a:rPr lang="en-US" sz="1200" dirty="0">
-                <a:solidFill>
-                  <a:srgbClr val="FAF8FF"/>
-                </a:solidFill>
-                <a:latin typeface="Consolas" pitchFamily="34" charset="0"/>
-                <a:ea typeface="Consolas" pitchFamily="34" charset="-122"/>
-                <a:cs typeface="Consolas" pitchFamily="34" charset="-120"/>
-              </a:rPr>
-              <a:t>    instructions: "You are helpful.",</a:t>
-            </a:r>
-            <a:endParaRPr lang="en-US" sz="1200" dirty="0"/>
-          </a:p>
-          <a:p>
-            <a:pPr indent="0" marL="0">
-              <a:buNone/>
-            </a:pPr>
-            <a:r>
-              <a:rPr lang="en-US" sz="1200" dirty="0">
-                <a:solidFill>
-                  <a:srgbClr val="FAF8FF"/>
-                </a:solidFill>
-                <a:latin typeface="Consolas" pitchFamily="34" charset="0"/>
-                <a:ea typeface="Consolas" pitchFamily="34" charset="-122"/>
-                <a:cs typeface="Consolas" pitchFamily="34" charset="-120"/>
-              </a:rPr>
-              <a:t>    name: "assistant");</a:t>
-            </a:r>
-            <a:endParaRPr lang="en-US" sz="1200" dirty="0"/>
-          </a:p>
-          <a:p>
-            <a:pPr indent="0" marL="0">
-              <a:buNone/>
-            </a:pPr>
-            <a:endParaRPr lang="en-US" sz="1200" dirty="0"/>
-          </a:p>
-          <a:p>
-            <a:pPr indent="0" marL="0">
-              <a:buNone/>
-            </a:pPr>
-            <a:r>
-              <a:rPr lang="en-US" sz="1200" dirty="0">
-                <a:solidFill>
-                  <a:srgbClr val="FAF8FF"/>
-                </a:solidFill>
-                <a:latin typeface="Consolas" pitchFamily="34" charset="0"/>
-                <a:ea typeface="Consolas" pitchFamily="34" charset="-122"/>
-                <a:cs typeface="Consolas" pitchFamily="34" charset="-120"/>
-              </a:rPr>
-              <a:t>await foreach (var update in</a:t>
-            </a:r>
-            <a:endParaRPr lang="en-US" sz="1200" dirty="0"/>
-          </a:p>
-          <a:p>
-            <a:pPr indent="0" marL="0">
-              <a:buNone/>
-            </a:pPr>
-            <a:r>
-              <a:rPr lang="en-US" sz="1200" dirty="0">
-                <a:solidFill>
-                  <a:srgbClr val="FAF8FF"/>
-                </a:solidFill>
-                <a:latin typeface="Consolas" pitchFamily="34" charset="0"/>
-                <a:ea typeface="Consolas" pitchFamily="34" charset="-122"/>
-                <a:cs typeface="Consolas" pitchFamily="34" charset="-120"/>
-              </a:rPr>
-              <a:t>    agent.RunStreamingAsync(prompt))</a:t>
-            </a:r>
-            <a:endParaRPr lang="en-US" sz="1200" dirty="0"/>
-          </a:p>
-          <a:p>
-            <a:pPr indent="0" marL="0">
-              <a:buNone/>
-            </a:pPr>
-            <a:r>
-              <a:rPr lang="en-US" sz="1200" dirty="0">
-                <a:solidFill>
-                  <a:srgbClr val="FAF8FF"/>
-                </a:solidFill>
-                <a:latin typeface="Consolas" pitchFamily="34" charset="0"/>
-                <a:ea typeface="Consolas" pitchFamily="34" charset="-122"/>
-                <a:cs typeface="Consolas" pitchFamily="34" charset="-120"/>
-              </a:rPr>
-              <a:t>{</a:t>
-            </a:r>
-            <a:endParaRPr lang="en-US" sz="1200" dirty="0"/>
-          </a:p>
-          <a:p>
-            <a:pPr indent="0" marL="0">
-              <a:buNone/>
-            </a:pPr>
-            <a:r>
-              <a:rPr lang="en-US" sz="1200" dirty="0">
-                <a:solidFill>
-                  <a:srgbClr val="FAF8FF"/>
-                </a:solidFill>
-                <a:latin typeface="Consolas" pitchFamily="34" charset="0"/>
-                <a:ea typeface="Consolas" pitchFamily="34" charset="-122"/>
-                <a:cs typeface="Consolas" pitchFamily="34" charset="-120"/>
-              </a:rPr>
-              <a:t>    Console.Write(update.Text);</a:t>
-            </a:r>
-            <a:endParaRPr lang="en-US" sz="1200" dirty="0"/>
-          </a:p>
-          <a:p>
-            <a:pPr indent="0" marL="0">
-              <a:buNone/>
-            </a:pPr>
-            <a:r>
-              <a:rPr lang="en-US" sz="1200" dirty="0">
-                <a:solidFill>
-                  <a:srgbClr val="FAF8FF"/>
-                </a:solidFill>
-                <a:latin typeface="Consolas" pitchFamily="34" charset="0"/>
-                <a:ea typeface="Consolas" pitchFamily="34" charset="-122"/>
-                <a:cs typeface="Consolas" pitchFamily="34" charset="-120"/>
-              </a:rPr>
-              <a:t>}</a:t>
-            </a:r>
-            <a:endParaRPr lang="en-US" sz="1200" dirty="0"/>
-          </a:p>
-        </p:txBody>
-      </p:sp>
-      <p:sp>
-        <p:nvSpPr>
-          <p:cNvPr id="26" name="Text 24"/>
-          <p:cNvSpPr/>
-          <p:nvPr/>
-        </p:nvSpPr>
-        <p:spPr>
-          <a:xfrm>
-            <a:off x="548640" y="5486400"/>
+          <p:cNvPr id="27" name="Text 25"/>
+          <p:cNvSpPr/>
+          <p:nvPr/>
+        </p:nvSpPr>
+        <p:spPr>
+          <a:xfrm>
+            <a:off x="9509760" y="2331720"/>
+            <a:ext cx="2224735" cy="320040"/>
+          </a:xfrm>
+          <a:prstGeom prst="rect">
+            <a:avLst/>
+          </a:prstGeom>
+          <a:noFill/>
+          <a:ln/>
+        </p:spPr>
+        <p:txBody>
+          <a:bodyPr wrap="square" rtlCol="0" anchor="ctr"/>
+          <a:lstStyle/>
+          <a:p>
+            <a:pPr indent="0" marL="0">
+              <a:buNone/>
+            </a:pPr>
+            <a:r>
+              <a:rPr lang="en-US" sz="1500" b="1" dirty="0">
+                <a:solidFill>
+                  <a:srgbClr val="0F0A2E"/>
+                </a:solidFill>
+                <a:latin typeface="Calibri" pitchFamily="34" charset="0"/>
+                <a:ea typeface="Calibri" pitchFamily="34" charset="-122"/>
+                <a:cs typeface="Calibri" pitchFamily="34" charset="-120"/>
+              </a:rPr>
+              <a:t>Same code</a:t>
+            </a:r>
+            <a:endParaRPr lang="en-US" sz="1500" dirty="0"/>
+          </a:p>
+        </p:txBody>
+      </p:sp>
+      <p:sp>
+        <p:nvSpPr>
+          <p:cNvPr id="28" name="Text 26"/>
+          <p:cNvSpPr/>
+          <p:nvPr/>
+        </p:nvSpPr>
+        <p:spPr>
+          <a:xfrm>
+            <a:off x="9509760" y="2651760"/>
+            <a:ext cx="2224735" cy="365760"/>
+          </a:xfrm>
+          <a:prstGeom prst="rect">
+            <a:avLst/>
+          </a:prstGeom>
+          <a:noFill/>
+          <a:ln/>
+        </p:spPr>
+        <p:txBody>
+          <a:bodyPr wrap="square" rtlCol="0" anchor="ctr"/>
+          <a:lstStyle/>
+          <a:p>
+            <a:pPr indent="0" marL="0">
+              <a:buNone/>
+            </a:pPr>
+            <a:r>
+              <a:rPr lang="en-US" sz="1100" i="1" dirty="0">
+                <a:solidFill>
+                  <a:srgbClr val="6B6B8F"/>
+                </a:solidFill>
+                <a:latin typeface="Calibri" pitchFamily="34" charset="0"/>
+                <a:ea typeface="Calibri" pitchFamily="34" charset="-122"/>
+                <a:cs typeface="Calibri" pitchFamily="34" charset="-120"/>
+              </a:rPr>
+              <a:t>Swap the IChatClient, keep your agent</a:t>
+            </a:r>
+            <a:endParaRPr lang="en-US" sz="1100" dirty="0"/>
+          </a:p>
+        </p:txBody>
+      </p:sp>
+      <p:sp>
+        <p:nvSpPr>
+          <p:cNvPr id="29" name="Shape 27"/>
+          <p:cNvSpPr/>
+          <p:nvPr/>
+        </p:nvSpPr>
+        <p:spPr>
+          <a:xfrm>
+            <a:off x="9235440" y="3118104"/>
+            <a:ext cx="182880" cy="182880"/>
+          </a:xfrm>
+          <a:prstGeom prst="ellipse">
+            <a:avLst/>
+          </a:prstGeom>
+          <a:solidFill>
+            <a:srgbClr val="FB7185"/>
+          </a:solidFill>
+          <a:ln w="12700">
+            <a:solidFill>
+              <a:srgbClr val="FB7185"/>
+            </a:solidFill>
+            <a:prstDash val="solid"/>
+          </a:ln>
+        </p:spPr>
+      </p:sp>
+      <p:sp>
+        <p:nvSpPr>
+          <p:cNvPr id="30" name="Text 28"/>
+          <p:cNvSpPr/>
+          <p:nvPr/>
+        </p:nvSpPr>
+        <p:spPr>
+          <a:xfrm>
+            <a:off x="9509760" y="3044952"/>
+            <a:ext cx="2224735" cy="320040"/>
+          </a:xfrm>
+          <a:prstGeom prst="rect">
+            <a:avLst/>
+          </a:prstGeom>
+          <a:noFill/>
+          <a:ln/>
+        </p:spPr>
+        <p:txBody>
+          <a:bodyPr wrap="square" rtlCol="0" anchor="ctr"/>
+          <a:lstStyle/>
+          <a:p>
+            <a:pPr indent="0" marL="0">
+              <a:buNone/>
+            </a:pPr>
+            <a:r>
+              <a:rPr lang="en-US" sz="1500" b="1" dirty="0">
+                <a:solidFill>
+                  <a:srgbClr val="0F0A2E"/>
+                </a:solidFill>
+                <a:latin typeface="Calibri" pitchFamily="34" charset="0"/>
+                <a:ea typeface="Calibri" pitchFamily="34" charset="-122"/>
+                <a:cs typeface="Calibri" pitchFamily="34" charset="-120"/>
+              </a:rPr>
+              <a:t>Stateful</a:t>
+            </a:r>
+            <a:endParaRPr lang="en-US" sz="1500" dirty="0"/>
+          </a:p>
+        </p:txBody>
+      </p:sp>
+      <p:sp>
+        <p:nvSpPr>
+          <p:cNvPr id="31" name="Text 29"/>
+          <p:cNvSpPr/>
+          <p:nvPr/>
+        </p:nvSpPr>
+        <p:spPr>
+          <a:xfrm>
+            <a:off x="9509760" y="3364992"/>
+            <a:ext cx="2224735" cy="365760"/>
+          </a:xfrm>
+          <a:prstGeom prst="rect">
+            <a:avLst/>
+          </a:prstGeom>
+          <a:noFill/>
+          <a:ln/>
+        </p:spPr>
+        <p:txBody>
+          <a:bodyPr wrap="square" rtlCol="0" anchor="ctr"/>
+          <a:lstStyle/>
+          <a:p>
+            <a:pPr indent="0" marL="0">
+              <a:buNone/>
+            </a:pPr>
+            <a:r>
+              <a:rPr lang="en-US" sz="1100" i="1" dirty="0">
+                <a:solidFill>
+                  <a:srgbClr val="6B6B8F"/>
+                </a:solidFill>
+                <a:latin typeface="Calibri" pitchFamily="34" charset="0"/>
+                <a:ea typeface="Calibri" pitchFamily="34" charset="-122"/>
+                <a:cs typeface="Calibri" pitchFamily="34" charset="-120"/>
+              </a:rPr>
+              <a:t>AgentThread persists conversation</a:t>
+            </a:r>
+            <a:endParaRPr lang="en-US" sz="1100" dirty="0"/>
+          </a:p>
+        </p:txBody>
+      </p:sp>
+      <p:sp>
+        <p:nvSpPr>
+          <p:cNvPr id="32" name="Shape 30"/>
+          <p:cNvSpPr/>
+          <p:nvPr/>
+        </p:nvSpPr>
+        <p:spPr>
+          <a:xfrm>
+            <a:off x="9235440" y="3831336"/>
+            <a:ext cx="182880" cy="182880"/>
+          </a:xfrm>
+          <a:prstGeom prst="ellipse">
+            <a:avLst/>
+          </a:prstGeom>
+          <a:solidFill>
+            <a:srgbClr val="FB7185"/>
+          </a:solidFill>
+          <a:ln w="12700">
+            <a:solidFill>
+              <a:srgbClr val="FB7185"/>
+            </a:solidFill>
+            <a:prstDash val="solid"/>
+          </a:ln>
+        </p:spPr>
+      </p:sp>
+      <p:sp>
+        <p:nvSpPr>
+          <p:cNvPr id="33" name="Text 31"/>
+          <p:cNvSpPr/>
+          <p:nvPr/>
+        </p:nvSpPr>
+        <p:spPr>
+          <a:xfrm>
+            <a:off x="9509760" y="3758184"/>
+            <a:ext cx="2224735" cy="320040"/>
+          </a:xfrm>
+          <a:prstGeom prst="rect">
+            <a:avLst/>
+          </a:prstGeom>
+          <a:noFill/>
+          <a:ln/>
+        </p:spPr>
+        <p:txBody>
+          <a:bodyPr wrap="square" rtlCol="0" anchor="ctr"/>
+          <a:lstStyle/>
+          <a:p>
+            <a:pPr indent="0" marL="0">
+              <a:buNone/>
+            </a:pPr>
+            <a:r>
+              <a:rPr lang="en-US" sz="1500" b="1" dirty="0">
+                <a:solidFill>
+                  <a:srgbClr val="0F0A2E"/>
+                </a:solidFill>
+                <a:latin typeface="Calibri" pitchFamily="34" charset="0"/>
+                <a:ea typeface="Calibri" pitchFamily="34" charset="-122"/>
+                <a:cs typeface="Calibri" pitchFamily="34" charset="-120"/>
+              </a:rPr>
+              <a:t>Tool-aware</a:t>
+            </a:r>
+            <a:endParaRPr lang="en-US" sz="1500" dirty="0"/>
+          </a:p>
+        </p:txBody>
+      </p:sp>
+      <p:sp>
+        <p:nvSpPr>
+          <p:cNvPr id="34" name="Text 32"/>
+          <p:cNvSpPr/>
+          <p:nvPr/>
+        </p:nvSpPr>
+        <p:spPr>
+          <a:xfrm>
+            <a:off x="9509760" y="4078224"/>
+            <a:ext cx="2224735" cy="365760"/>
+          </a:xfrm>
+          <a:prstGeom prst="rect">
+            <a:avLst/>
+          </a:prstGeom>
+          <a:noFill/>
+          <a:ln/>
+        </p:spPr>
+        <p:txBody>
+          <a:bodyPr wrap="square" rtlCol="0" anchor="ctr"/>
+          <a:lstStyle/>
+          <a:p>
+            <a:pPr indent="0" marL="0">
+              <a:buNone/>
+            </a:pPr>
+            <a:r>
+              <a:rPr lang="en-US" sz="1100" i="1" dirty="0">
+                <a:solidFill>
+                  <a:srgbClr val="6B6B8F"/>
+                </a:solidFill>
+                <a:latin typeface="Calibri" pitchFamily="34" charset="0"/>
+                <a:ea typeface="Calibri" pitchFamily="34" charset="-122"/>
+                <a:cs typeface="Calibri" pitchFamily="34" charset="-120"/>
+              </a:rPr>
+              <a:t>Source-generated AITools (no reflection)</a:t>
+            </a:r>
+            <a:endParaRPr lang="en-US" sz="1100" dirty="0"/>
+          </a:p>
+        </p:txBody>
+      </p:sp>
+      <p:sp>
+        <p:nvSpPr>
+          <p:cNvPr id="35" name="Shape 33"/>
+          <p:cNvSpPr/>
+          <p:nvPr/>
+        </p:nvSpPr>
+        <p:spPr>
+          <a:xfrm>
+            <a:off x="9235440" y="4544568"/>
+            <a:ext cx="182880" cy="182880"/>
+          </a:xfrm>
+          <a:prstGeom prst="ellipse">
+            <a:avLst/>
+          </a:prstGeom>
+          <a:solidFill>
+            <a:srgbClr val="FB7185"/>
+          </a:solidFill>
+          <a:ln w="12700">
+            <a:solidFill>
+              <a:srgbClr val="FB7185"/>
+            </a:solidFill>
+            <a:prstDash val="solid"/>
+          </a:ln>
+        </p:spPr>
+      </p:sp>
+      <p:sp>
+        <p:nvSpPr>
+          <p:cNvPr id="36" name="Text 34"/>
+          <p:cNvSpPr/>
+          <p:nvPr/>
+        </p:nvSpPr>
+        <p:spPr>
+          <a:xfrm>
+            <a:off x="9509760" y="4471416"/>
+            <a:ext cx="2224735" cy="320040"/>
+          </a:xfrm>
+          <a:prstGeom prst="rect">
+            <a:avLst/>
+          </a:prstGeom>
+          <a:noFill/>
+          <a:ln/>
+        </p:spPr>
+        <p:txBody>
+          <a:bodyPr wrap="square" rtlCol="0" anchor="ctr"/>
+          <a:lstStyle/>
+          <a:p>
+            <a:pPr indent="0" marL="0">
+              <a:buNone/>
+            </a:pPr>
+            <a:r>
+              <a:rPr lang="en-US" sz="1500" b="1" dirty="0">
+                <a:solidFill>
+                  <a:srgbClr val="0F0A2E"/>
+                </a:solidFill>
+                <a:latin typeface="Calibri" pitchFamily="34" charset="0"/>
+                <a:ea typeface="Calibri" pitchFamily="34" charset="-122"/>
+                <a:cs typeface="Calibri" pitchFamily="34" charset="-120"/>
+              </a:rPr>
+              <a:t>Streaming</a:t>
+            </a:r>
+            <a:endParaRPr lang="en-US" sz="1500" dirty="0"/>
+          </a:p>
+        </p:txBody>
+      </p:sp>
+      <p:sp>
+        <p:nvSpPr>
+          <p:cNvPr id="37" name="Text 35"/>
+          <p:cNvSpPr/>
+          <p:nvPr/>
+        </p:nvSpPr>
+        <p:spPr>
+          <a:xfrm>
+            <a:off x="9509760" y="4791456"/>
+            <a:ext cx="2224735" cy="365760"/>
+          </a:xfrm>
+          <a:prstGeom prst="rect">
+            <a:avLst/>
+          </a:prstGeom>
+          <a:noFill/>
+          <a:ln/>
+        </p:spPr>
+        <p:txBody>
+          <a:bodyPr wrap="square" rtlCol="0" anchor="ctr"/>
+          <a:lstStyle/>
+          <a:p>
+            <a:pPr indent="0" marL="0">
+              <a:buNone/>
+            </a:pPr>
+            <a:r>
+              <a:rPr lang="en-US" sz="1100" i="1" dirty="0">
+                <a:solidFill>
+                  <a:srgbClr val="6B6B8F"/>
+                </a:solidFill>
+                <a:latin typeface="Calibri" pitchFamily="34" charset="0"/>
+                <a:ea typeface="Calibri" pitchFamily="34" charset="-122"/>
+                <a:cs typeface="Calibri" pitchFamily="34" charset="-120"/>
+              </a:rPr>
+              <a:t>Token-by-token via IAsyncEnumerable</a:t>
+            </a:r>
+            <a:endParaRPr lang="en-US" sz="1100" dirty="0"/>
+          </a:p>
+        </p:txBody>
+      </p:sp>
+      <p:sp>
+        <p:nvSpPr>
+          <p:cNvPr id="38" name="Text 36"/>
+          <p:cNvSpPr/>
+          <p:nvPr/>
+        </p:nvSpPr>
+        <p:spPr>
+          <a:xfrm>
+            <a:off x="548640" y="5577840"/>
             <a:ext cx="10972800" cy="457200"/>
           </a:xfrm>
           <a:prstGeom prst="rect">
@@ -3367,7 +3719,7 @@
               <a:buNone/>
             </a:pPr>
             <a:r>
-              <a:rPr lang="en-US" sz="1800" b="1" i="1" dirty="0">
+              <a:rPr lang="en-US" sz="2000" b="1" i="1" dirty="0">
                 <a:solidFill>
                   <a:srgbClr val="FB7185"/>
                 </a:solidFill>
@@ -3377,13 +3729,13 @@
               </a:rPr>
               <a:t>📐 The provider changes. The agent code does not.</a:t>
             </a:r>
-            <a:endParaRPr lang="en-US" sz="1800" dirty="0"/>
-          </a:p>
-        </p:txBody>
-      </p:sp>
-      <p:sp>
-        <p:nvSpPr>
-          <p:cNvPr id="27" name="Shape 25"/>
+            <a:endParaRPr lang="en-US" sz="2000" dirty="0"/>
+          </a:p>
+        </p:txBody>
+      </p:sp>
+      <p:sp>
+        <p:nvSpPr>
+          <p:cNvPr id="39" name="Shape 37"/>
           <p:cNvSpPr/>
           <p:nvPr/>
         </p:nvSpPr>
@@ -3407,7 +3759,7 @@
       </p:sp>
       <p:sp>
         <p:nvSpPr>
-          <p:cNvPr id="28" name="Text 26"/>
+          <p:cNvPr id="40" name="Text 38"/>
           <p:cNvSpPr/>
           <p:nvPr/>
         </p:nvSpPr>
@@ -3446,7 +3798,7 @@
       </p:sp>
       <p:sp>
         <p:nvSpPr>
-          <p:cNvPr id="29" name="Text 27"/>
+          <p:cNvPr id="41" name="Text 39"/>
           <p:cNvSpPr/>
           <p:nvPr/>
         </p:nvSpPr>
@@ -3485,7 +3837,7 @@
       </p:sp>
       <p:sp>
         <p:nvSpPr>
-          <p:cNvPr id="30" name="Text 28"/>
+          <p:cNvPr id="42" name="Text 40"/>
           <p:cNvSpPr/>
           <p:nvPr/>
         </p:nvSpPr>
@@ -3566,7 +3918,7 @@
       </p:sp>
       <p:sp>
         <p:nvSpPr>
-          <p:cNvPr id="31" name="Text 29"/>
+          <p:cNvPr id="43" name="Text 41"/>
           <p:cNvSpPr/>
           <p:nvPr/>
         </p:nvSpPr>
@@ -3597,7 +3949,7 @@
                 <a:ea typeface="Calibri" pitchFamily="34" charset="-122"/>
                 <a:cs typeface="Calibri" pitchFamily="34" charset="-120"/>
               </a:rPr>
-              <a:t>10 / 13</a:t>
+              <a:t>10 / 14</a:t>
             </a:r>
             <a:endParaRPr lang="en-US" sz="1000" dirty="0"/>
           </a:p>
@@ -3614,6 +3966,2279 @@
 <file path=ppt/slides/slide11.xml><?xml version="1.0" encoding="utf-8"?>
 <p:sld xmlns:a="http://schemas.openxmlformats.org/drawingml/2006/main" xmlns:r="http://schemas.openxmlformats.org/officeDocument/2006/relationships" xmlns:p="http://schemas.openxmlformats.org/presentationml/2006/main">
   <p:cSld name="Slide 11">
+    <p:bg>
+      <p:bgPr>
+        <a:solidFill>
+          <a:srgbClr val="FAF8FF"/>
+        </a:solidFill>
+      </p:bgPr>
+    </p:bg>
+    <p:spTree>
+      <p:nvGrpSpPr>
+        <p:cNvPr id="1" name=""/>
+        <p:cNvGrpSpPr/>
+        <p:nvPr/>
+      </p:nvGrpSpPr>
+      <p:grpSpPr>
+        <a:xfrm>
+          <a:off x="0" y="0"/>
+          <a:ext cx="0" cy="0"/>
+          <a:chOff x="0" y="0"/>
+          <a:chExt cx="0" cy="0"/>
+        </a:xfrm>
+      </p:grpSpPr>
+      <p:sp>
+        <p:nvSpPr>
+          <p:cNvPr id="2" name="Text 0"/>
+          <p:cNvSpPr/>
+          <p:nvPr/>
+        </p:nvSpPr>
+        <p:spPr>
+          <a:xfrm>
+            <a:off x="548640" y="502920"/>
+            <a:ext cx="7315200" cy="320040"/>
+          </a:xfrm>
+          <a:prstGeom prst="rect">
+            <a:avLst/>
+          </a:prstGeom>
+          <a:noFill/>
+          <a:ln/>
+        </p:spPr>
+        <p:txBody>
+          <a:bodyPr wrap="square" rtlCol="0" anchor="ctr"/>
+          <a:lstStyle/>
+          <a:p>
+            <a:pPr indent="0" marL="0">
+              <a:buNone/>
+            </a:pPr>
+            <a:r>
+              <a:rPr lang="en-US" sz="1200" b="1" spc="400" kern="0" dirty="0">
+                <a:solidFill>
+                  <a:srgbClr val="6366F1"/>
+                </a:solidFill>
+                <a:latin typeface="Calibri" pitchFamily="34" charset="0"/>
+                <a:ea typeface="Calibri" pitchFamily="34" charset="-122"/>
+                <a:cs typeface="Calibri" pitchFamily="34" charset="-120"/>
+              </a:rPr>
+              <a:t>FIVE LINES OF CODE</a:t>
+            </a:r>
+            <a:endParaRPr lang="en-US" sz="1200" dirty="0"/>
+          </a:p>
+        </p:txBody>
+      </p:sp>
+      <p:sp>
+        <p:nvSpPr>
+          <p:cNvPr id="3" name="Text 1"/>
+          <p:cNvSpPr/>
+          <p:nvPr/>
+        </p:nvSpPr>
+        <p:spPr>
+          <a:xfrm>
+            <a:off x="548640" y="822960"/>
+            <a:ext cx="10058400" cy="822960"/>
+          </a:xfrm>
+          <a:prstGeom prst="rect">
+            <a:avLst/>
+          </a:prstGeom>
+          <a:noFill/>
+          <a:ln/>
+        </p:spPr>
+        <p:txBody>
+          <a:bodyPr wrap="square" rtlCol="0" anchor="ctr"/>
+          <a:lstStyle/>
+          <a:p>
+            <a:pPr indent="0" marL="0">
+              <a:buNone/>
+            </a:pPr>
+            <a:r>
+              <a:rPr lang="en-US" sz="3800" b="1" dirty="0">
+                <a:solidFill>
+                  <a:srgbClr val="0F0A2E"/>
+                </a:solidFill>
+                <a:latin typeface="Georgia" pitchFamily="34" charset="0"/>
+                <a:ea typeface="Georgia" pitchFamily="34" charset="-122"/>
+                <a:cs typeface="Georgia" pitchFamily="34" charset="-120"/>
+              </a:rPr>
+              <a:t>How to use it</a:t>
+            </a:r>
+            <a:endParaRPr lang="en-US" sz="3800" dirty="0"/>
+          </a:p>
+        </p:txBody>
+      </p:sp>
+      <p:sp>
+        <p:nvSpPr>
+          <p:cNvPr id="4" name="Text 2"/>
+          <p:cNvSpPr/>
+          <p:nvPr/>
+        </p:nvSpPr>
+        <p:spPr>
+          <a:xfrm>
+            <a:off x="548640" y="1600200"/>
+            <a:ext cx="10972800" cy="457200"/>
+          </a:xfrm>
+          <a:prstGeom prst="rect">
+            <a:avLst/>
+          </a:prstGeom>
+          <a:noFill/>
+          <a:ln/>
+        </p:spPr>
+        <p:txBody>
+          <a:bodyPr wrap="square" rtlCol="0" anchor="ctr"/>
+          <a:lstStyle/>
+          <a:p>
+            <a:pPr indent="0" marL="0">
+              <a:buNone/>
+            </a:pPr>
+            <a:r>
+              <a:rPr lang="en-US" sz="1700" i="1" dirty="0">
+                <a:solidFill>
+                  <a:srgbClr val="6B6B8F"/>
+                </a:solidFill>
+                <a:latin typeface="Calibri" pitchFamily="34" charset="0"/>
+                <a:ea typeface="Calibri" pitchFamily="34" charset="-122"/>
+                <a:cs typeface="Calibri" pitchFamily="34" charset="-120"/>
+              </a:rPr>
+              <a:t>Take an IChatClient — any tier — and wrap it as an agent.</a:t>
+            </a:r>
+            <a:endParaRPr lang="en-US" sz="1700" dirty="0"/>
+          </a:p>
+        </p:txBody>
+      </p:sp>
+      <p:sp>
+        <p:nvSpPr>
+          <p:cNvPr id="5" name="Shape 3"/>
+          <p:cNvSpPr/>
+          <p:nvPr/>
+        </p:nvSpPr>
+        <p:spPr>
+          <a:xfrm>
+            <a:off x="548640" y="2194560"/>
+            <a:ext cx="7680960" cy="4023360"/>
+          </a:xfrm>
+          <a:prstGeom prst="roundRect">
+            <a:avLst>
+              <a:gd name="adj" fmla="val 2727"/>
+            </a:avLst>
+          </a:prstGeom>
+          <a:solidFill>
+            <a:srgbClr val="1E1B4B"/>
+          </a:solidFill>
+          <a:ln w="12700">
+            <a:solidFill>
+              <a:srgbClr val="6366F1"/>
+            </a:solidFill>
+            <a:prstDash val="solid"/>
+          </a:ln>
+        </p:spPr>
+      </p:sp>
+      <p:sp>
+        <p:nvSpPr>
+          <p:cNvPr id="6" name="Text 4"/>
+          <p:cNvSpPr/>
+          <p:nvPr/>
+        </p:nvSpPr>
+        <p:spPr>
+          <a:xfrm>
+            <a:off x="777240" y="2331720"/>
+            <a:ext cx="7223760" cy="3749040"/>
+          </a:xfrm>
+          <a:prstGeom prst="rect">
+            <a:avLst/>
+          </a:prstGeom>
+          <a:noFill/>
+          <a:ln/>
+        </p:spPr>
+        <p:txBody>
+          <a:bodyPr wrap="square" rtlCol="0" anchor="ctr"/>
+          <a:lstStyle/>
+          <a:p>
+            <a:pPr indent="0" marL="0">
+              <a:buNone/>
+            </a:pPr>
+            <a:r>
+              <a:rPr lang="en-US" sz="1100" i="1" dirty="0">
+                <a:solidFill>
+                  <a:srgbClr val="8B88B5"/>
+                </a:solidFill>
+                <a:latin typeface="Consolas" pitchFamily="34" charset="0"/>
+                <a:ea typeface="Consolas" pitchFamily="34" charset="-122"/>
+                <a:cs typeface="Consolas" pitchFamily="34" charset="-120"/>
+              </a:rPr>
+              <a:t>// 1. Take any IChatClient — Apple, Foundry Local, Cloud…</a:t>
+            </a:r>
+            <a:pPr indent="0" marL="0">
+              <a:buNone/>
+            </a:pPr>
+            <a:endParaRPr lang="en-US" sz="1100" dirty="0"/>
+          </a:p>
+          <a:p>
+            <a:pPr indent="0" marL="0">
+              <a:buNone/>
+            </a:pPr>
+            <a:r>
+              <a:rPr lang="en-US" sz="1100" dirty="0">
+                <a:solidFill>
+                  <a:srgbClr val="A78BFA"/>
+                </a:solidFill>
+                <a:latin typeface="Consolas" pitchFamily="34" charset="0"/>
+                <a:ea typeface="Consolas" pitchFamily="34" charset="-122"/>
+                <a:cs typeface="Consolas" pitchFamily="34" charset="-120"/>
+              </a:rPr>
+              <a:t>IChatClient</a:t>
+            </a:r>
+            <a:pPr indent="0" marL="0">
+              <a:buNone/>
+            </a:pPr>
+            <a:r>
+              <a:rPr lang="en-US" sz="1100" dirty="0">
+                <a:solidFill>
+                  <a:srgbClr val="FAF8FF"/>
+                </a:solidFill>
+                <a:latin typeface="Consolas" pitchFamily="34" charset="0"/>
+                <a:ea typeface="Consolas" pitchFamily="34" charset="-122"/>
+                <a:cs typeface="Consolas" pitchFamily="34" charset="-120"/>
+              </a:rPr>
+              <a:t> client </a:t>
+            </a:r>
+            <a:pPr indent="0" marL="0">
+              <a:buNone/>
+            </a:pPr>
+            <a:r>
+              <a:rPr lang="en-US" sz="1100" dirty="0">
+                <a:solidFill>
+                  <a:srgbClr val="CFCBED"/>
+                </a:solidFill>
+                <a:latin typeface="Consolas" pitchFamily="34" charset="0"/>
+                <a:ea typeface="Consolas" pitchFamily="34" charset="-122"/>
+                <a:cs typeface="Consolas" pitchFamily="34" charset="-120"/>
+              </a:rPr>
+              <a:t>=</a:t>
+            </a:r>
+            <a:pPr indent="0" marL="0">
+              <a:buNone/>
+            </a:pPr>
+            <a:r>
+              <a:rPr lang="en-US" sz="1100" dirty="0">
+                <a:solidFill>
+                  <a:srgbClr val="FAF8FF"/>
+                </a:solidFill>
+                <a:latin typeface="Consolas" pitchFamily="34" charset="0"/>
+                <a:ea typeface="Consolas" pitchFamily="34" charset="-122"/>
+                <a:cs typeface="Consolas" pitchFamily="34" charset="-120"/>
+              </a:rPr>
+              <a:t> </a:t>
+            </a:r>
+            <a:pPr indent="0" marL="0">
+              <a:buNone/>
+            </a:pPr>
+            <a:r>
+              <a:rPr lang="en-US" sz="1100" dirty="0">
+                <a:solidFill>
+                  <a:srgbClr val="FB7185"/>
+                </a:solidFill>
+                <a:latin typeface="Consolas" pitchFamily="34" charset="0"/>
+                <a:ea typeface="Consolas" pitchFamily="34" charset="-122"/>
+                <a:cs typeface="Consolas" pitchFamily="34" charset="-120"/>
+              </a:rPr>
+              <a:t>new</a:t>
+            </a:r>
+            <a:pPr indent="0" marL="0">
+              <a:buNone/>
+            </a:pPr>
+            <a:r>
+              <a:rPr lang="en-US" sz="1100" dirty="0">
+                <a:solidFill>
+                  <a:srgbClr val="FAF8FF"/>
+                </a:solidFill>
+                <a:latin typeface="Consolas" pitchFamily="34" charset="0"/>
+                <a:ea typeface="Consolas" pitchFamily="34" charset="-122"/>
+                <a:cs typeface="Consolas" pitchFamily="34" charset="-120"/>
+              </a:rPr>
+              <a:t> </a:t>
+            </a:r>
+            <a:pPr indent="0" marL="0">
+              <a:buNone/>
+            </a:pPr>
+            <a:r>
+              <a:rPr lang="en-US" sz="1100" dirty="0">
+                <a:solidFill>
+                  <a:srgbClr val="FAF8FF"/>
+                </a:solidFill>
+                <a:latin typeface="Consolas" pitchFamily="34" charset="0"/>
+                <a:ea typeface="Consolas" pitchFamily="34" charset="-122"/>
+                <a:cs typeface="Consolas" pitchFamily="34" charset="-120"/>
+              </a:rPr>
+              <a:t>AppleIntelligenceChatClient</a:t>
+            </a:r>
+            <a:pPr indent="0" marL="0">
+              <a:buNone/>
+            </a:pPr>
+            <a:r>
+              <a:rPr lang="en-US" sz="1100" dirty="0">
+                <a:solidFill>
+                  <a:srgbClr val="B8B5D9"/>
+                </a:solidFill>
+                <a:latin typeface="Consolas" pitchFamily="34" charset="0"/>
+                <a:ea typeface="Consolas" pitchFamily="34" charset="-122"/>
+                <a:cs typeface="Consolas" pitchFamily="34" charset="-120"/>
+              </a:rPr>
+              <a:t>(</a:t>
+            </a:r>
+            <a:pPr indent="0" marL="0">
+              <a:buNone/>
+            </a:pPr>
+            <a:r>
+              <a:rPr lang="en-US" sz="1100" dirty="0">
+                <a:solidFill>
+                  <a:srgbClr val="B8B5D9"/>
+                </a:solidFill>
+                <a:latin typeface="Consolas" pitchFamily="34" charset="0"/>
+                <a:ea typeface="Consolas" pitchFamily="34" charset="-122"/>
+                <a:cs typeface="Consolas" pitchFamily="34" charset="-120"/>
+              </a:rPr>
+              <a:t>)</a:t>
+            </a:r>
+            <a:pPr indent="0" marL="0">
+              <a:buNone/>
+            </a:pPr>
+            <a:r>
+              <a:rPr lang="en-US" sz="1100" dirty="0">
+                <a:solidFill>
+                  <a:srgbClr val="B8B5D9"/>
+                </a:solidFill>
+                <a:latin typeface="Consolas" pitchFamily="34" charset="0"/>
+                <a:ea typeface="Consolas" pitchFamily="34" charset="-122"/>
+                <a:cs typeface="Consolas" pitchFamily="34" charset="-120"/>
+              </a:rPr>
+              <a:t>;</a:t>
+            </a:r>
+            <a:pPr indent="0" marL="0">
+              <a:buNone/>
+            </a:pPr>
+            <a:endParaRPr lang="en-US" sz="1100" dirty="0"/>
+          </a:p>
+          <a:p>
+            <a:pPr indent="0" marL="0">
+              <a:buNone/>
+            </a:pPr>
+            <a:endParaRPr lang="en-US" sz="1100" dirty="0"/>
+          </a:p>
+          <a:p>
+            <a:pPr indent="0" marL="0">
+              <a:buNone/>
+            </a:pPr>
+            <a:r>
+              <a:rPr lang="en-US" sz="1100" i="1" dirty="0">
+                <a:solidFill>
+                  <a:srgbClr val="8B88B5"/>
+                </a:solidFill>
+                <a:latin typeface="Consolas" pitchFamily="34" charset="0"/>
+                <a:ea typeface="Consolas" pitchFamily="34" charset="-122"/>
+                <a:cs typeface="Consolas" pitchFamily="34" charset="-120"/>
+              </a:rPr>
+              <a:t>// 2. Wrap it as an agent (with optional tools)</a:t>
+            </a:r>
+            <a:pPr indent="0" marL="0">
+              <a:buNone/>
+            </a:pPr>
+            <a:endParaRPr lang="en-US" sz="1100" dirty="0"/>
+          </a:p>
+          <a:p>
+            <a:pPr indent="0" marL="0">
+              <a:buNone/>
+            </a:pPr>
+            <a:r>
+              <a:rPr lang="en-US" sz="1100" dirty="0">
+                <a:solidFill>
+                  <a:srgbClr val="A78BFA"/>
+                </a:solidFill>
+                <a:latin typeface="Consolas" pitchFamily="34" charset="0"/>
+                <a:ea typeface="Consolas" pitchFamily="34" charset="-122"/>
+                <a:cs typeface="Consolas" pitchFamily="34" charset="-120"/>
+              </a:rPr>
+              <a:t>AIAgent</a:t>
+            </a:r>
+            <a:pPr indent="0" marL="0">
+              <a:buNone/>
+            </a:pPr>
+            <a:r>
+              <a:rPr lang="en-US" sz="1100" dirty="0">
+                <a:solidFill>
+                  <a:srgbClr val="FAF8FF"/>
+                </a:solidFill>
+                <a:latin typeface="Consolas" pitchFamily="34" charset="0"/>
+                <a:ea typeface="Consolas" pitchFamily="34" charset="-122"/>
+                <a:cs typeface="Consolas" pitchFamily="34" charset="-120"/>
+              </a:rPr>
+              <a:t> agent </a:t>
+            </a:r>
+            <a:pPr indent="0" marL="0">
+              <a:buNone/>
+            </a:pPr>
+            <a:r>
+              <a:rPr lang="en-US" sz="1100" dirty="0">
+                <a:solidFill>
+                  <a:srgbClr val="CFCBED"/>
+                </a:solidFill>
+                <a:latin typeface="Consolas" pitchFamily="34" charset="0"/>
+                <a:ea typeface="Consolas" pitchFamily="34" charset="-122"/>
+                <a:cs typeface="Consolas" pitchFamily="34" charset="-120"/>
+              </a:rPr>
+              <a:t>=</a:t>
+            </a:r>
+            <a:pPr indent="0" marL="0">
+              <a:buNone/>
+            </a:pPr>
+            <a:r>
+              <a:rPr lang="en-US" sz="1100" dirty="0">
+                <a:solidFill>
+                  <a:srgbClr val="FAF8FF"/>
+                </a:solidFill>
+                <a:latin typeface="Consolas" pitchFamily="34" charset="0"/>
+                <a:ea typeface="Consolas" pitchFamily="34" charset="-122"/>
+                <a:cs typeface="Consolas" pitchFamily="34" charset="-120"/>
+              </a:rPr>
+              <a:t> client</a:t>
+            </a:r>
+            <a:pPr indent="0" marL="0">
+              <a:buNone/>
+            </a:pPr>
+            <a:r>
+              <a:rPr lang="en-US" sz="1100" dirty="0">
+                <a:solidFill>
+                  <a:srgbClr val="B8B5D9"/>
+                </a:solidFill>
+                <a:latin typeface="Consolas" pitchFamily="34" charset="0"/>
+                <a:ea typeface="Consolas" pitchFamily="34" charset="-122"/>
+                <a:cs typeface="Consolas" pitchFamily="34" charset="-120"/>
+              </a:rPr>
+              <a:t>.</a:t>
+            </a:r>
+            <a:pPr indent="0" marL="0">
+              <a:buNone/>
+            </a:pPr>
+            <a:r>
+              <a:rPr lang="en-US" sz="1100" dirty="0">
+                <a:solidFill>
+                  <a:srgbClr val="86EFAC"/>
+                </a:solidFill>
+                <a:latin typeface="Consolas" pitchFamily="34" charset="0"/>
+                <a:ea typeface="Consolas" pitchFamily="34" charset="-122"/>
+                <a:cs typeface="Consolas" pitchFamily="34" charset="-120"/>
+              </a:rPr>
+              <a:t>CreateAIAgent</a:t>
+            </a:r>
+            <a:pPr indent="0" marL="0">
+              <a:buNone/>
+            </a:pPr>
+            <a:r>
+              <a:rPr lang="en-US" sz="1100" dirty="0">
+                <a:solidFill>
+                  <a:srgbClr val="B8B5D9"/>
+                </a:solidFill>
+                <a:latin typeface="Consolas" pitchFamily="34" charset="0"/>
+                <a:ea typeface="Consolas" pitchFamily="34" charset="-122"/>
+                <a:cs typeface="Consolas" pitchFamily="34" charset="-120"/>
+              </a:rPr>
+              <a:t>(</a:t>
+            </a:r>
+            <a:pPr indent="0" marL="0">
+              <a:buNone/>
+            </a:pPr>
+            <a:endParaRPr lang="en-US" sz="1100" dirty="0"/>
+          </a:p>
+          <a:p>
+            <a:pPr indent="0" marL="0">
+              <a:buNone/>
+            </a:pPr>
+            <a:r>
+              <a:rPr lang="en-US" sz="1100" dirty="0">
+                <a:solidFill>
+                  <a:srgbClr val="FAF8FF"/>
+                </a:solidFill>
+                <a:latin typeface="Consolas" pitchFamily="34" charset="0"/>
+                <a:ea typeface="Consolas" pitchFamily="34" charset="-122"/>
+                <a:cs typeface="Consolas" pitchFamily="34" charset="-120"/>
+              </a:rPr>
+              <a:t>    </a:t>
+            </a:r>
+            <a:pPr indent="0" marL="0">
+              <a:buNone/>
+            </a:pPr>
+            <a:r>
+              <a:rPr lang="en-US" sz="1100" dirty="0">
+                <a:solidFill>
+                  <a:srgbClr val="FAF8FF"/>
+                </a:solidFill>
+                <a:latin typeface="Consolas" pitchFamily="34" charset="0"/>
+                <a:ea typeface="Consolas" pitchFamily="34" charset="-122"/>
+                <a:cs typeface="Consolas" pitchFamily="34" charset="-120"/>
+              </a:rPr>
+              <a:t>instructions</a:t>
+            </a:r>
+            <a:pPr indent="0" marL="0">
+              <a:buNone/>
+            </a:pPr>
+            <a:r>
+              <a:rPr lang="en-US" sz="1100" dirty="0">
+                <a:solidFill>
+                  <a:srgbClr val="B8B5D9"/>
+                </a:solidFill>
+                <a:latin typeface="Consolas" pitchFamily="34" charset="0"/>
+                <a:ea typeface="Consolas" pitchFamily="34" charset="-122"/>
+                <a:cs typeface="Consolas" pitchFamily="34" charset="-120"/>
+              </a:rPr>
+              <a:t>:</a:t>
+            </a:r>
+            <a:pPr indent="0" marL="0">
+              <a:buNone/>
+            </a:pPr>
+            <a:r>
+              <a:rPr lang="en-US" sz="1100" dirty="0">
+                <a:solidFill>
+                  <a:srgbClr val="FAF8FF"/>
+                </a:solidFill>
+                <a:latin typeface="Consolas" pitchFamily="34" charset="0"/>
+                <a:ea typeface="Consolas" pitchFamily="34" charset="-122"/>
+                <a:cs typeface="Consolas" pitchFamily="34" charset="-120"/>
+              </a:rPr>
+              <a:t> </a:t>
+            </a:r>
+            <a:pPr indent="0" marL="0">
+              <a:buNone/>
+            </a:pPr>
+            <a:r>
+              <a:rPr lang="en-US" sz="1100" dirty="0">
+                <a:solidFill>
+                  <a:srgbClr val="FBBF24"/>
+                </a:solidFill>
+                <a:latin typeface="Consolas" pitchFamily="34" charset="0"/>
+                <a:ea typeface="Consolas" pitchFamily="34" charset="-122"/>
+                <a:cs typeface="Consolas" pitchFamily="34" charset="-120"/>
+              </a:rPr>
+              <a:t>"You are a travel guide."</a:t>
+            </a:r>
+            <a:pPr indent="0" marL="0">
+              <a:buNone/>
+            </a:pPr>
+            <a:r>
+              <a:rPr lang="en-US" sz="1100" dirty="0">
+                <a:solidFill>
+                  <a:srgbClr val="B8B5D9"/>
+                </a:solidFill>
+                <a:latin typeface="Consolas" pitchFamily="34" charset="0"/>
+                <a:ea typeface="Consolas" pitchFamily="34" charset="-122"/>
+                <a:cs typeface="Consolas" pitchFamily="34" charset="-120"/>
+              </a:rPr>
+              <a:t>,</a:t>
+            </a:r>
+            <a:pPr indent="0" marL="0">
+              <a:buNone/>
+            </a:pPr>
+            <a:endParaRPr lang="en-US" sz="1100" dirty="0"/>
+          </a:p>
+          <a:p>
+            <a:pPr indent="0" marL="0">
+              <a:buNone/>
+            </a:pPr>
+            <a:r>
+              <a:rPr lang="en-US" sz="1100" dirty="0">
+                <a:solidFill>
+                  <a:srgbClr val="FAF8FF"/>
+                </a:solidFill>
+                <a:latin typeface="Consolas" pitchFamily="34" charset="0"/>
+                <a:ea typeface="Consolas" pitchFamily="34" charset="-122"/>
+                <a:cs typeface="Consolas" pitchFamily="34" charset="-120"/>
+              </a:rPr>
+              <a:t>    </a:t>
+            </a:r>
+            <a:pPr indent="0" marL="0">
+              <a:buNone/>
+            </a:pPr>
+            <a:r>
+              <a:rPr lang="en-US" sz="1100" dirty="0">
+                <a:solidFill>
+                  <a:srgbClr val="FAF8FF"/>
+                </a:solidFill>
+                <a:latin typeface="Consolas" pitchFamily="34" charset="0"/>
+                <a:ea typeface="Consolas" pitchFamily="34" charset="-122"/>
+                <a:cs typeface="Consolas" pitchFamily="34" charset="-120"/>
+              </a:rPr>
+              <a:t>tools</a:t>
+            </a:r>
+            <a:pPr indent="0" marL="0">
+              <a:buNone/>
+            </a:pPr>
+            <a:r>
+              <a:rPr lang="en-US" sz="1100" dirty="0">
+                <a:solidFill>
+                  <a:srgbClr val="B8B5D9"/>
+                </a:solidFill>
+                <a:latin typeface="Consolas" pitchFamily="34" charset="0"/>
+                <a:ea typeface="Consolas" pitchFamily="34" charset="-122"/>
+                <a:cs typeface="Consolas" pitchFamily="34" charset="-120"/>
+              </a:rPr>
+              <a:t>:</a:t>
+            </a:r>
+            <a:pPr indent="0" marL="0">
+              <a:buNone/>
+            </a:pPr>
+            <a:r>
+              <a:rPr lang="en-US" sz="1100" dirty="0">
+                <a:solidFill>
+                  <a:srgbClr val="FAF8FF"/>
+                </a:solidFill>
+                <a:latin typeface="Consolas" pitchFamily="34" charset="0"/>
+                <a:ea typeface="Consolas" pitchFamily="34" charset="-122"/>
+                <a:cs typeface="Consolas" pitchFamily="34" charset="-120"/>
+              </a:rPr>
+              <a:t> </a:t>
+            </a:r>
+            <a:pPr indent="0" marL="0">
+              <a:buNone/>
+            </a:pPr>
+            <a:r>
+              <a:rPr lang="en-US" sz="1100" dirty="0">
+                <a:solidFill>
+                  <a:srgbClr val="FB7185"/>
+                </a:solidFill>
+                <a:latin typeface="Consolas" pitchFamily="34" charset="0"/>
+                <a:ea typeface="Consolas" pitchFamily="34" charset="-122"/>
+                <a:cs typeface="Consolas" pitchFamily="34" charset="-120"/>
+              </a:rPr>
+              <a:t>new</a:t>
+            </a:r>
+            <a:pPr indent="0" marL="0">
+              <a:buNone/>
+            </a:pPr>
+            <a:r>
+              <a:rPr lang="en-US" sz="1100" dirty="0">
+                <a:solidFill>
+                  <a:srgbClr val="FAF8FF"/>
+                </a:solidFill>
+                <a:latin typeface="Consolas" pitchFamily="34" charset="0"/>
+                <a:ea typeface="Consolas" pitchFamily="34" charset="-122"/>
+                <a:cs typeface="Consolas" pitchFamily="34" charset="-120"/>
+              </a:rPr>
+              <a:t> </a:t>
+            </a:r>
+            <a:pPr indent="0" marL="0">
+              <a:buNone/>
+            </a:pPr>
+            <a:r>
+              <a:rPr lang="en-US" sz="1100" dirty="0">
+                <a:solidFill>
+                  <a:srgbClr val="FAF8FF"/>
+                </a:solidFill>
+                <a:latin typeface="Consolas" pitchFamily="34" charset="0"/>
+                <a:ea typeface="Consolas" pitchFamily="34" charset="-122"/>
+                <a:cs typeface="Consolas" pitchFamily="34" charset="-120"/>
+              </a:rPr>
+              <a:t>TravelToolContext</a:t>
+            </a:r>
+            <a:pPr indent="0" marL="0">
+              <a:buNone/>
+            </a:pPr>
+            <a:r>
+              <a:rPr lang="en-US" sz="1100" dirty="0">
+                <a:solidFill>
+                  <a:srgbClr val="B8B5D9"/>
+                </a:solidFill>
+                <a:latin typeface="Consolas" pitchFamily="34" charset="0"/>
+                <a:ea typeface="Consolas" pitchFamily="34" charset="-122"/>
+                <a:cs typeface="Consolas" pitchFamily="34" charset="-120"/>
+              </a:rPr>
+              <a:t>(</a:t>
+            </a:r>
+            <a:pPr indent="0" marL="0">
+              <a:buNone/>
+            </a:pPr>
+            <a:r>
+              <a:rPr lang="en-US" sz="1100" dirty="0">
+                <a:solidFill>
+                  <a:srgbClr val="B8B5D9"/>
+                </a:solidFill>
+                <a:latin typeface="Consolas" pitchFamily="34" charset="0"/>
+                <a:ea typeface="Consolas" pitchFamily="34" charset="-122"/>
+                <a:cs typeface="Consolas" pitchFamily="34" charset="-120"/>
+              </a:rPr>
+              <a:t>)</a:t>
+            </a:r>
+            <a:pPr indent="0" marL="0">
+              <a:buNone/>
+            </a:pPr>
+            <a:r>
+              <a:rPr lang="en-US" sz="1100" dirty="0">
+                <a:solidFill>
+                  <a:srgbClr val="B8B5D9"/>
+                </a:solidFill>
+                <a:latin typeface="Consolas" pitchFamily="34" charset="0"/>
+                <a:ea typeface="Consolas" pitchFamily="34" charset="-122"/>
+                <a:cs typeface="Consolas" pitchFamily="34" charset="-120"/>
+              </a:rPr>
+              <a:t>.</a:t>
+            </a:r>
+            <a:pPr indent="0" marL="0">
+              <a:buNone/>
+            </a:pPr>
+            <a:r>
+              <a:rPr lang="en-US" sz="1100" dirty="0">
+                <a:solidFill>
+                  <a:srgbClr val="FAF8FF"/>
+                </a:solidFill>
+                <a:latin typeface="Consolas" pitchFamily="34" charset="0"/>
+                <a:ea typeface="Consolas" pitchFamily="34" charset="-122"/>
+                <a:cs typeface="Consolas" pitchFamily="34" charset="-120"/>
+              </a:rPr>
+              <a:t>Tools</a:t>
+            </a:r>
+            <a:pPr indent="0" marL="0">
+              <a:buNone/>
+            </a:pPr>
+            <a:r>
+              <a:rPr lang="en-US" sz="1100" dirty="0">
+                <a:solidFill>
+                  <a:srgbClr val="B8B5D9"/>
+                </a:solidFill>
+                <a:latin typeface="Consolas" pitchFamily="34" charset="0"/>
+                <a:ea typeface="Consolas" pitchFamily="34" charset="-122"/>
+                <a:cs typeface="Consolas" pitchFamily="34" charset="-120"/>
+              </a:rPr>
+              <a:t>)</a:t>
+            </a:r>
+            <a:pPr indent="0" marL="0">
+              <a:buNone/>
+            </a:pPr>
+            <a:r>
+              <a:rPr lang="en-US" sz="1100" dirty="0">
+                <a:solidFill>
+                  <a:srgbClr val="B8B5D9"/>
+                </a:solidFill>
+                <a:latin typeface="Consolas" pitchFamily="34" charset="0"/>
+                <a:ea typeface="Consolas" pitchFamily="34" charset="-122"/>
+                <a:cs typeface="Consolas" pitchFamily="34" charset="-120"/>
+              </a:rPr>
+              <a:t>;</a:t>
+            </a:r>
+            <a:pPr indent="0" marL="0">
+              <a:buNone/>
+            </a:pPr>
+            <a:endParaRPr lang="en-US" sz="1100" dirty="0"/>
+          </a:p>
+          <a:p>
+            <a:pPr indent="0" marL="0">
+              <a:buNone/>
+            </a:pPr>
+            <a:endParaRPr lang="en-US" sz="1100" dirty="0"/>
+          </a:p>
+          <a:p>
+            <a:pPr indent="0" marL="0">
+              <a:buNone/>
+            </a:pPr>
+            <a:r>
+              <a:rPr lang="en-US" sz="1100" i="1" dirty="0">
+                <a:solidFill>
+                  <a:srgbClr val="8B88B5"/>
+                </a:solidFill>
+                <a:latin typeface="Consolas" pitchFamily="34" charset="0"/>
+                <a:ea typeface="Consolas" pitchFamily="34" charset="-122"/>
+                <a:cs typeface="Consolas" pitchFamily="34" charset="-120"/>
+              </a:rPr>
+              <a:t>// 3. Keep a thread for conversation state</a:t>
+            </a:r>
+            <a:pPr indent="0" marL="0">
+              <a:buNone/>
+            </a:pPr>
+            <a:endParaRPr lang="en-US" sz="1100" dirty="0"/>
+          </a:p>
+          <a:p>
+            <a:pPr indent="0" marL="0">
+              <a:buNone/>
+            </a:pPr>
+            <a:r>
+              <a:rPr lang="en-US" sz="1100" dirty="0">
+                <a:solidFill>
+                  <a:srgbClr val="A78BFA"/>
+                </a:solidFill>
+                <a:latin typeface="Consolas" pitchFamily="34" charset="0"/>
+                <a:ea typeface="Consolas" pitchFamily="34" charset="-122"/>
+                <a:cs typeface="Consolas" pitchFamily="34" charset="-120"/>
+              </a:rPr>
+              <a:t>AgentThread</a:t>
+            </a:r>
+            <a:pPr indent="0" marL="0">
+              <a:buNone/>
+            </a:pPr>
+            <a:r>
+              <a:rPr lang="en-US" sz="1100" dirty="0">
+                <a:solidFill>
+                  <a:srgbClr val="FAF8FF"/>
+                </a:solidFill>
+                <a:latin typeface="Consolas" pitchFamily="34" charset="0"/>
+                <a:ea typeface="Consolas" pitchFamily="34" charset="-122"/>
+                <a:cs typeface="Consolas" pitchFamily="34" charset="-120"/>
+              </a:rPr>
+              <a:t> thread </a:t>
+            </a:r>
+            <a:pPr indent="0" marL="0">
+              <a:buNone/>
+            </a:pPr>
+            <a:r>
+              <a:rPr lang="en-US" sz="1100" dirty="0">
+                <a:solidFill>
+                  <a:srgbClr val="CFCBED"/>
+                </a:solidFill>
+                <a:latin typeface="Consolas" pitchFamily="34" charset="0"/>
+                <a:ea typeface="Consolas" pitchFamily="34" charset="-122"/>
+                <a:cs typeface="Consolas" pitchFamily="34" charset="-120"/>
+              </a:rPr>
+              <a:t>=</a:t>
+            </a:r>
+            <a:pPr indent="0" marL="0">
+              <a:buNone/>
+            </a:pPr>
+            <a:r>
+              <a:rPr lang="en-US" sz="1100" dirty="0">
+                <a:solidFill>
+                  <a:srgbClr val="FAF8FF"/>
+                </a:solidFill>
+                <a:latin typeface="Consolas" pitchFamily="34" charset="0"/>
+                <a:ea typeface="Consolas" pitchFamily="34" charset="-122"/>
+                <a:cs typeface="Consolas" pitchFamily="34" charset="-120"/>
+              </a:rPr>
+              <a:t> agent</a:t>
+            </a:r>
+            <a:pPr indent="0" marL="0">
+              <a:buNone/>
+            </a:pPr>
+            <a:r>
+              <a:rPr lang="en-US" sz="1100" dirty="0">
+                <a:solidFill>
+                  <a:srgbClr val="B8B5D9"/>
+                </a:solidFill>
+                <a:latin typeface="Consolas" pitchFamily="34" charset="0"/>
+                <a:ea typeface="Consolas" pitchFamily="34" charset="-122"/>
+                <a:cs typeface="Consolas" pitchFamily="34" charset="-120"/>
+              </a:rPr>
+              <a:t>.</a:t>
+            </a:r>
+            <a:pPr indent="0" marL="0">
+              <a:buNone/>
+            </a:pPr>
+            <a:r>
+              <a:rPr lang="en-US" sz="1100" dirty="0">
+                <a:solidFill>
+                  <a:srgbClr val="86EFAC"/>
+                </a:solidFill>
+                <a:latin typeface="Consolas" pitchFamily="34" charset="0"/>
+                <a:ea typeface="Consolas" pitchFamily="34" charset="-122"/>
+                <a:cs typeface="Consolas" pitchFamily="34" charset="-120"/>
+              </a:rPr>
+              <a:t>GetNewThread</a:t>
+            </a:r>
+            <a:pPr indent="0" marL="0">
+              <a:buNone/>
+            </a:pPr>
+            <a:r>
+              <a:rPr lang="en-US" sz="1100" dirty="0">
+                <a:solidFill>
+                  <a:srgbClr val="B8B5D9"/>
+                </a:solidFill>
+                <a:latin typeface="Consolas" pitchFamily="34" charset="0"/>
+                <a:ea typeface="Consolas" pitchFamily="34" charset="-122"/>
+                <a:cs typeface="Consolas" pitchFamily="34" charset="-120"/>
+              </a:rPr>
+              <a:t>(</a:t>
+            </a:r>
+            <a:pPr indent="0" marL="0">
+              <a:buNone/>
+            </a:pPr>
+            <a:r>
+              <a:rPr lang="en-US" sz="1100" dirty="0">
+                <a:solidFill>
+                  <a:srgbClr val="B8B5D9"/>
+                </a:solidFill>
+                <a:latin typeface="Consolas" pitchFamily="34" charset="0"/>
+                <a:ea typeface="Consolas" pitchFamily="34" charset="-122"/>
+                <a:cs typeface="Consolas" pitchFamily="34" charset="-120"/>
+              </a:rPr>
+              <a:t>)</a:t>
+            </a:r>
+            <a:pPr indent="0" marL="0">
+              <a:buNone/>
+            </a:pPr>
+            <a:r>
+              <a:rPr lang="en-US" sz="1100" dirty="0">
+                <a:solidFill>
+                  <a:srgbClr val="B8B5D9"/>
+                </a:solidFill>
+                <a:latin typeface="Consolas" pitchFamily="34" charset="0"/>
+                <a:ea typeface="Consolas" pitchFamily="34" charset="-122"/>
+                <a:cs typeface="Consolas" pitchFamily="34" charset="-120"/>
+              </a:rPr>
+              <a:t>;</a:t>
+            </a:r>
+            <a:pPr indent="0" marL="0">
+              <a:buNone/>
+            </a:pPr>
+            <a:endParaRPr lang="en-US" sz="1100" dirty="0"/>
+          </a:p>
+          <a:p>
+            <a:pPr indent="0" marL="0">
+              <a:buNone/>
+            </a:pPr>
+            <a:endParaRPr lang="en-US" sz="1100" dirty="0"/>
+          </a:p>
+          <a:p>
+            <a:pPr indent="0" marL="0">
+              <a:buNone/>
+            </a:pPr>
+            <a:r>
+              <a:rPr lang="en-US" sz="1100" i="1" dirty="0">
+                <a:solidFill>
+                  <a:srgbClr val="8B88B5"/>
+                </a:solidFill>
+                <a:latin typeface="Consolas" pitchFamily="34" charset="0"/>
+                <a:ea typeface="Consolas" pitchFamily="34" charset="-122"/>
+                <a:cs typeface="Consolas" pitchFamily="34" charset="-120"/>
+              </a:rPr>
+              <a:t>// 4. Stream the response, token by token</a:t>
+            </a:r>
+            <a:pPr indent="0" marL="0">
+              <a:buNone/>
+            </a:pPr>
+            <a:endParaRPr lang="en-US" sz="1100" dirty="0"/>
+          </a:p>
+          <a:p>
+            <a:pPr indent="0" marL="0">
+              <a:buNone/>
+            </a:pPr>
+            <a:r>
+              <a:rPr lang="en-US" sz="1100" dirty="0">
+                <a:solidFill>
+                  <a:srgbClr val="FB7185"/>
+                </a:solidFill>
+                <a:latin typeface="Consolas" pitchFamily="34" charset="0"/>
+                <a:ea typeface="Consolas" pitchFamily="34" charset="-122"/>
+                <a:cs typeface="Consolas" pitchFamily="34" charset="-120"/>
+              </a:rPr>
+              <a:t>await</a:t>
+            </a:r>
+            <a:pPr indent="0" marL="0">
+              <a:buNone/>
+            </a:pPr>
+            <a:r>
+              <a:rPr lang="en-US" sz="1100" dirty="0">
+                <a:solidFill>
+                  <a:srgbClr val="FAF8FF"/>
+                </a:solidFill>
+                <a:latin typeface="Consolas" pitchFamily="34" charset="0"/>
+                <a:ea typeface="Consolas" pitchFamily="34" charset="-122"/>
+                <a:cs typeface="Consolas" pitchFamily="34" charset="-120"/>
+              </a:rPr>
+              <a:t> </a:t>
+            </a:r>
+            <a:pPr indent="0" marL="0">
+              <a:buNone/>
+            </a:pPr>
+            <a:r>
+              <a:rPr lang="en-US" sz="1100" dirty="0">
+                <a:solidFill>
+                  <a:srgbClr val="FB7185"/>
+                </a:solidFill>
+                <a:latin typeface="Consolas" pitchFamily="34" charset="0"/>
+                <a:ea typeface="Consolas" pitchFamily="34" charset="-122"/>
+                <a:cs typeface="Consolas" pitchFamily="34" charset="-120"/>
+              </a:rPr>
+              <a:t>foreach</a:t>
+            </a:r>
+            <a:pPr indent="0" marL="0">
+              <a:buNone/>
+            </a:pPr>
+            <a:r>
+              <a:rPr lang="en-US" sz="1100" dirty="0">
+                <a:solidFill>
+                  <a:srgbClr val="FAF8FF"/>
+                </a:solidFill>
+                <a:latin typeface="Consolas" pitchFamily="34" charset="0"/>
+                <a:ea typeface="Consolas" pitchFamily="34" charset="-122"/>
+                <a:cs typeface="Consolas" pitchFamily="34" charset="-120"/>
+              </a:rPr>
+              <a:t> </a:t>
+            </a:r>
+            <a:pPr indent="0" marL="0">
+              <a:buNone/>
+            </a:pPr>
+            <a:r>
+              <a:rPr lang="en-US" sz="1100" dirty="0">
+                <a:solidFill>
+                  <a:srgbClr val="B8B5D9"/>
+                </a:solidFill>
+                <a:latin typeface="Consolas" pitchFamily="34" charset="0"/>
+                <a:ea typeface="Consolas" pitchFamily="34" charset="-122"/>
+                <a:cs typeface="Consolas" pitchFamily="34" charset="-120"/>
+              </a:rPr>
+              <a:t>(</a:t>
+            </a:r>
+            <a:pPr indent="0" marL="0">
+              <a:buNone/>
+            </a:pPr>
+            <a:r>
+              <a:rPr lang="en-US" sz="1100" dirty="0">
+                <a:solidFill>
+                  <a:srgbClr val="FB7185"/>
+                </a:solidFill>
+                <a:latin typeface="Consolas" pitchFamily="34" charset="0"/>
+                <a:ea typeface="Consolas" pitchFamily="34" charset="-122"/>
+                <a:cs typeface="Consolas" pitchFamily="34" charset="-120"/>
+              </a:rPr>
+              <a:t>var</a:t>
+            </a:r>
+            <a:pPr indent="0" marL="0">
+              <a:buNone/>
+            </a:pPr>
+            <a:r>
+              <a:rPr lang="en-US" sz="1100" dirty="0">
+                <a:solidFill>
+                  <a:srgbClr val="FAF8FF"/>
+                </a:solidFill>
+                <a:latin typeface="Consolas" pitchFamily="34" charset="0"/>
+                <a:ea typeface="Consolas" pitchFamily="34" charset="-122"/>
+                <a:cs typeface="Consolas" pitchFamily="34" charset="-120"/>
+              </a:rPr>
+              <a:t> update </a:t>
+            </a:r>
+            <a:pPr indent="0" marL="0">
+              <a:buNone/>
+            </a:pPr>
+            <a:r>
+              <a:rPr lang="en-US" sz="1100" dirty="0">
+                <a:solidFill>
+                  <a:srgbClr val="FB7185"/>
+                </a:solidFill>
+                <a:latin typeface="Consolas" pitchFamily="34" charset="0"/>
+                <a:ea typeface="Consolas" pitchFamily="34" charset="-122"/>
+                <a:cs typeface="Consolas" pitchFamily="34" charset="-120"/>
+              </a:rPr>
+              <a:t>in</a:t>
+            </a:r>
+            <a:pPr indent="0" marL="0">
+              <a:buNone/>
+            </a:pPr>
+            <a:endParaRPr lang="en-US" sz="1100" dirty="0"/>
+          </a:p>
+          <a:p>
+            <a:pPr indent="0" marL="0">
+              <a:buNone/>
+            </a:pPr>
+            <a:r>
+              <a:rPr lang="en-US" sz="1100" dirty="0">
+                <a:solidFill>
+                  <a:srgbClr val="FAF8FF"/>
+                </a:solidFill>
+                <a:latin typeface="Consolas" pitchFamily="34" charset="0"/>
+                <a:ea typeface="Consolas" pitchFamily="34" charset="-122"/>
+                <a:cs typeface="Consolas" pitchFamily="34" charset="-120"/>
+              </a:rPr>
+              <a:t>    agent</a:t>
+            </a:r>
+            <a:pPr indent="0" marL="0">
+              <a:buNone/>
+            </a:pPr>
+            <a:r>
+              <a:rPr lang="en-US" sz="1100" dirty="0">
+                <a:solidFill>
+                  <a:srgbClr val="B8B5D9"/>
+                </a:solidFill>
+                <a:latin typeface="Consolas" pitchFamily="34" charset="0"/>
+                <a:ea typeface="Consolas" pitchFamily="34" charset="-122"/>
+                <a:cs typeface="Consolas" pitchFamily="34" charset="-120"/>
+              </a:rPr>
+              <a:t>.</a:t>
+            </a:r>
+            <a:pPr indent="0" marL="0">
+              <a:buNone/>
+            </a:pPr>
+            <a:r>
+              <a:rPr lang="en-US" sz="1100" dirty="0">
+                <a:solidFill>
+                  <a:srgbClr val="86EFAC"/>
+                </a:solidFill>
+                <a:latin typeface="Consolas" pitchFamily="34" charset="0"/>
+                <a:ea typeface="Consolas" pitchFamily="34" charset="-122"/>
+                <a:cs typeface="Consolas" pitchFamily="34" charset="-120"/>
+              </a:rPr>
+              <a:t>RunStreamingAsync</a:t>
+            </a:r>
+            <a:pPr indent="0" marL="0">
+              <a:buNone/>
+            </a:pPr>
+            <a:r>
+              <a:rPr lang="en-US" sz="1100" dirty="0">
+                <a:solidFill>
+                  <a:srgbClr val="B8B5D9"/>
+                </a:solidFill>
+                <a:latin typeface="Consolas" pitchFamily="34" charset="0"/>
+                <a:ea typeface="Consolas" pitchFamily="34" charset="-122"/>
+                <a:cs typeface="Consolas" pitchFamily="34" charset="-120"/>
+              </a:rPr>
+              <a:t>(</a:t>
+            </a:r>
+            <a:pPr indent="0" marL="0">
+              <a:buNone/>
+            </a:pPr>
+            <a:r>
+              <a:rPr lang="en-US" sz="1100" dirty="0">
+                <a:solidFill>
+                  <a:srgbClr val="FAF8FF"/>
+                </a:solidFill>
+                <a:latin typeface="Consolas" pitchFamily="34" charset="0"/>
+                <a:ea typeface="Consolas" pitchFamily="34" charset="-122"/>
+                <a:cs typeface="Consolas" pitchFamily="34" charset="-120"/>
+              </a:rPr>
+              <a:t>prompt</a:t>
+            </a:r>
+            <a:pPr indent="0" marL="0">
+              <a:buNone/>
+            </a:pPr>
+            <a:r>
+              <a:rPr lang="en-US" sz="1100" dirty="0">
+                <a:solidFill>
+                  <a:srgbClr val="B8B5D9"/>
+                </a:solidFill>
+                <a:latin typeface="Consolas" pitchFamily="34" charset="0"/>
+                <a:ea typeface="Consolas" pitchFamily="34" charset="-122"/>
+                <a:cs typeface="Consolas" pitchFamily="34" charset="-120"/>
+              </a:rPr>
+              <a:t>,</a:t>
+            </a:r>
+            <a:pPr indent="0" marL="0">
+              <a:buNone/>
+            </a:pPr>
+            <a:r>
+              <a:rPr lang="en-US" sz="1100" dirty="0">
+                <a:solidFill>
+                  <a:srgbClr val="FAF8FF"/>
+                </a:solidFill>
+                <a:latin typeface="Consolas" pitchFamily="34" charset="0"/>
+                <a:ea typeface="Consolas" pitchFamily="34" charset="-122"/>
+                <a:cs typeface="Consolas" pitchFamily="34" charset="-120"/>
+              </a:rPr>
+              <a:t> thread</a:t>
+            </a:r>
+            <a:pPr indent="0" marL="0">
+              <a:buNone/>
+            </a:pPr>
+            <a:r>
+              <a:rPr lang="en-US" sz="1100" dirty="0">
+                <a:solidFill>
+                  <a:srgbClr val="B8B5D9"/>
+                </a:solidFill>
+                <a:latin typeface="Consolas" pitchFamily="34" charset="0"/>
+                <a:ea typeface="Consolas" pitchFamily="34" charset="-122"/>
+                <a:cs typeface="Consolas" pitchFamily="34" charset="-120"/>
+              </a:rPr>
+              <a:t>)</a:t>
+            </a:r>
+            <a:pPr indent="0" marL="0">
+              <a:buNone/>
+            </a:pPr>
+            <a:r>
+              <a:rPr lang="en-US" sz="1100" dirty="0">
+                <a:solidFill>
+                  <a:srgbClr val="B8B5D9"/>
+                </a:solidFill>
+                <a:latin typeface="Consolas" pitchFamily="34" charset="0"/>
+                <a:ea typeface="Consolas" pitchFamily="34" charset="-122"/>
+                <a:cs typeface="Consolas" pitchFamily="34" charset="-120"/>
+              </a:rPr>
+              <a:t>)</a:t>
+            </a:r>
+            <a:pPr indent="0" marL="0">
+              <a:buNone/>
+            </a:pPr>
+            <a:endParaRPr lang="en-US" sz="1100" dirty="0"/>
+          </a:p>
+          <a:p>
+            <a:pPr indent="0" marL="0">
+              <a:buNone/>
+            </a:pPr>
+            <a:r>
+              <a:rPr lang="en-US" sz="1100" dirty="0">
+                <a:solidFill>
+                  <a:srgbClr val="B8B5D9"/>
+                </a:solidFill>
+                <a:latin typeface="Consolas" pitchFamily="34" charset="0"/>
+                <a:ea typeface="Consolas" pitchFamily="34" charset="-122"/>
+                <a:cs typeface="Consolas" pitchFamily="34" charset="-120"/>
+              </a:rPr>
+              <a:t>{</a:t>
+            </a:r>
+            <a:pPr indent="0" marL="0">
+              <a:buNone/>
+            </a:pPr>
+            <a:endParaRPr lang="en-US" sz="1100" dirty="0"/>
+          </a:p>
+          <a:p>
+            <a:pPr indent="0" marL="0">
+              <a:buNone/>
+            </a:pPr>
+            <a:r>
+              <a:rPr lang="en-US" sz="1100" dirty="0">
+                <a:solidFill>
+                  <a:srgbClr val="FAF8FF"/>
+                </a:solidFill>
+                <a:latin typeface="Consolas" pitchFamily="34" charset="0"/>
+                <a:ea typeface="Consolas" pitchFamily="34" charset="-122"/>
+                <a:cs typeface="Consolas" pitchFamily="34" charset="-120"/>
+              </a:rPr>
+              <a:t>    Console</a:t>
+            </a:r>
+            <a:pPr indent="0" marL="0">
+              <a:buNone/>
+            </a:pPr>
+            <a:r>
+              <a:rPr lang="en-US" sz="1100" dirty="0">
+                <a:solidFill>
+                  <a:srgbClr val="B8B5D9"/>
+                </a:solidFill>
+                <a:latin typeface="Consolas" pitchFamily="34" charset="0"/>
+                <a:ea typeface="Consolas" pitchFamily="34" charset="-122"/>
+                <a:cs typeface="Consolas" pitchFamily="34" charset="-120"/>
+              </a:rPr>
+              <a:t>.</a:t>
+            </a:r>
+            <a:pPr indent="0" marL="0">
+              <a:buNone/>
+            </a:pPr>
+            <a:r>
+              <a:rPr lang="en-US" sz="1100" dirty="0">
+                <a:solidFill>
+                  <a:srgbClr val="86EFAC"/>
+                </a:solidFill>
+                <a:latin typeface="Consolas" pitchFamily="34" charset="0"/>
+                <a:ea typeface="Consolas" pitchFamily="34" charset="-122"/>
+                <a:cs typeface="Consolas" pitchFamily="34" charset="-120"/>
+              </a:rPr>
+              <a:t>Write</a:t>
+            </a:r>
+            <a:pPr indent="0" marL="0">
+              <a:buNone/>
+            </a:pPr>
+            <a:r>
+              <a:rPr lang="en-US" sz="1100" dirty="0">
+                <a:solidFill>
+                  <a:srgbClr val="B8B5D9"/>
+                </a:solidFill>
+                <a:latin typeface="Consolas" pitchFamily="34" charset="0"/>
+                <a:ea typeface="Consolas" pitchFamily="34" charset="-122"/>
+                <a:cs typeface="Consolas" pitchFamily="34" charset="-120"/>
+              </a:rPr>
+              <a:t>(</a:t>
+            </a:r>
+            <a:pPr indent="0" marL="0">
+              <a:buNone/>
+            </a:pPr>
+            <a:r>
+              <a:rPr lang="en-US" sz="1100" dirty="0">
+                <a:solidFill>
+                  <a:srgbClr val="FAF8FF"/>
+                </a:solidFill>
+                <a:latin typeface="Consolas" pitchFamily="34" charset="0"/>
+                <a:ea typeface="Consolas" pitchFamily="34" charset="-122"/>
+                <a:cs typeface="Consolas" pitchFamily="34" charset="-120"/>
+              </a:rPr>
+              <a:t>update</a:t>
+            </a:r>
+            <a:pPr indent="0" marL="0">
+              <a:buNone/>
+            </a:pPr>
+            <a:r>
+              <a:rPr lang="en-US" sz="1100" dirty="0">
+                <a:solidFill>
+                  <a:srgbClr val="B8B5D9"/>
+                </a:solidFill>
+                <a:latin typeface="Consolas" pitchFamily="34" charset="0"/>
+                <a:ea typeface="Consolas" pitchFamily="34" charset="-122"/>
+                <a:cs typeface="Consolas" pitchFamily="34" charset="-120"/>
+              </a:rPr>
+              <a:t>.</a:t>
+            </a:r>
+            <a:pPr indent="0" marL="0">
+              <a:buNone/>
+            </a:pPr>
+            <a:r>
+              <a:rPr lang="en-US" sz="1100" dirty="0">
+                <a:solidFill>
+                  <a:srgbClr val="FAF8FF"/>
+                </a:solidFill>
+                <a:latin typeface="Consolas" pitchFamily="34" charset="0"/>
+                <a:ea typeface="Consolas" pitchFamily="34" charset="-122"/>
+                <a:cs typeface="Consolas" pitchFamily="34" charset="-120"/>
+              </a:rPr>
+              <a:t>Text</a:t>
+            </a:r>
+            <a:pPr indent="0" marL="0">
+              <a:buNone/>
+            </a:pPr>
+            <a:r>
+              <a:rPr lang="en-US" sz="1100" dirty="0">
+                <a:solidFill>
+                  <a:srgbClr val="B8B5D9"/>
+                </a:solidFill>
+                <a:latin typeface="Consolas" pitchFamily="34" charset="0"/>
+                <a:ea typeface="Consolas" pitchFamily="34" charset="-122"/>
+                <a:cs typeface="Consolas" pitchFamily="34" charset="-120"/>
+              </a:rPr>
+              <a:t>)</a:t>
+            </a:r>
+            <a:pPr indent="0" marL="0">
+              <a:buNone/>
+            </a:pPr>
+            <a:r>
+              <a:rPr lang="en-US" sz="1100" dirty="0">
+                <a:solidFill>
+                  <a:srgbClr val="B8B5D9"/>
+                </a:solidFill>
+                <a:latin typeface="Consolas" pitchFamily="34" charset="0"/>
+                <a:ea typeface="Consolas" pitchFamily="34" charset="-122"/>
+                <a:cs typeface="Consolas" pitchFamily="34" charset="-120"/>
+              </a:rPr>
+              <a:t>;</a:t>
+            </a:r>
+            <a:pPr indent="0" marL="0">
+              <a:buNone/>
+            </a:pPr>
+            <a:endParaRPr lang="en-US" sz="1100" dirty="0"/>
+          </a:p>
+          <a:p>
+            <a:pPr indent="0" marL="0">
+              <a:buNone/>
+            </a:pPr>
+            <a:r>
+              <a:rPr lang="en-US" sz="1100" dirty="0">
+                <a:solidFill>
+                  <a:srgbClr val="B8B5D9"/>
+                </a:solidFill>
+                <a:latin typeface="Consolas" pitchFamily="34" charset="0"/>
+                <a:ea typeface="Consolas" pitchFamily="34" charset="-122"/>
+                <a:cs typeface="Consolas" pitchFamily="34" charset="-120"/>
+              </a:rPr>
+              <a:t>}</a:t>
+            </a:r>
+            <a:endParaRPr lang="en-US" sz="1100" dirty="0"/>
+          </a:p>
+        </p:txBody>
+      </p:sp>
+      <p:sp>
+        <p:nvSpPr>
+          <p:cNvPr id="7" name="Shape 5"/>
+          <p:cNvSpPr/>
+          <p:nvPr/>
+        </p:nvSpPr>
+        <p:spPr>
+          <a:xfrm>
+            <a:off x="8458200" y="2194560"/>
+            <a:ext cx="3276295" cy="914400"/>
+          </a:xfrm>
+          <a:prstGeom prst="roundRect">
+            <a:avLst>
+              <a:gd name="adj" fmla="val 8000"/>
+            </a:avLst>
+          </a:prstGeom>
+          <a:solidFill>
+            <a:srgbClr val="FFFFFF"/>
+          </a:solidFill>
+          <a:ln w="12700">
+            <a:solidFill>
+              <a:srgbClr val="E5E1F5"/>
+            </a:solidFill>
+            <a:prstDash val="solid"/>
+          </a:ln>
+        </p:spPr>
+      </p:sp>
+      <p:sp>
+        <p:nvSpPr>
+          <p:cNvPr id="8" name="Shape 6"/>
+          <p:cNvSpPr/>
+          <p:nvPr/>
+        </p:nvSpPr>
+        <p:spPr>
+          <a:xfrm>
+            <a:off x="8641080" y="2377440"/>
+            <a:ext cx="502920" cy="502920"/>
+          </a:xfrm>
+          <a:prstGeom prst="ellipse">
+            <a:avLst/>
+          </a:prstGeom>
+          <a:solidFill>
+            <a:srgbClr val="FB7185"/>
+          </a:solidFill>
+          <a:ln w="12700">
+            <a:solidFill>
+              <a:srgbClr val="FB7185"/>
+            </a:solidFill>
+            <a:prstDash val="solid"/>
+          </a:ln>
+        </p:spPr>
+      </p:sp>
+      <p:sp>
+        <p:nvSpPr>
+          <p:cNvPr id="9" name="Text 7"/>
+          <p:cNvSpPr/>
+          <p:nvPr/>
+        </p:nvSpPr>
+        <p:spPr>
+          <a:xfrm>
+            <a:off x="8641080" y="2377440"/>
+            <a:ext cx="502920" cy="502920"/>
+          </a:xfrm>
+          <a:prstGeom prst="rect">
+            <a:avLst/>
+          </a:prstGeom>
+          <a:noFill/>
+          <a:ln/>
+        </p:spPr>
+        <p:txBody>
+          <a:bodyPr wrap="square" rtlCol="0" anchor="ctr"/>
+          <a:lstStyle/>
+          <a:p>
+            <a:pPr algn="ctr" indent="0" marL="0">
+              <a:buNone/>
+            </a:pPr>
+            <a:r>
+              <a:rPr lang="en-US" sz="1800" b="1" dirty="0">
+                <a:solidFill>
+                  <a:srgbClr val="FAF8FF"/>
+                </a:solidFill>
+                <a:latin typeface="Georgia" pitchFamily="34" charset="0"/>
+                <a:ea typeface="Georgia" pitchFamily="34" charset="-122"/>
+                <a:cs typeface="Georgia" pitchFamily="34" charset="-120"/>
+              </a:rPr>
+              <a:t>1</a:t>
+            </a:r>
+            <a:endParaRPr lang="en-US" sz="1800" dirty="0"/>
+          </a:p>
+        </p:txBody>
+      </p:sp>
+      <p:sp>
+        <p:nvSpPr>
+          <p:cNvPr id="10" name="Text 8"/>
+          <p:cNvSpPr/>
+          <p:nvPr/>
+        </p:nvSpPr>
+        <p:spPr>
+          <a:xfrm>
+            <a:off x="9281160" y="2331720"/>
+            <a:ext cx="2361895" cy="320040"/>
+          </a:xfrm>
+          <a:prstGeom prst="rect">
+            <a:avLst/>
+          </a:prstGeom>
+          <a:noFill/>
+          <a:ln/>
+        </p:spPr>
+        <p:txBody>
+          <a:bodyPr wrap="square" rtlCol="0" anchor="ctr"/>
+          <a:lstStyle/>
+          <a:p>
+            <a:pPr indent="0" marL="0">
+              <a:buNone/>
+            </a:pPr>
+            <a:r>
+              <a:rPr lang="en-US" sz="1500" b="1" dirty="0">
+                <a:solidFill>
+                  <a:srgbClr val="0F0A2E"/>
+                </a:solidFill>
+                <a:latin typeface="Calibri" pitchFamily="34" charset="0"/>
+                <a:ea typeface="Calibri" pitchFamily="34" charset="-122"/>
+                <a:cs typeface="Calibri" pitchFamily="34" charset="-120"/>
+              </a:rPr>
+              <a:t>Pluggable</a:t>
+            </a:r>
+            <a:endParaRPr lang="en-US" sz="1500" dirty="0"/>
+          </a:p>
+        </p:txBody>
+      </p:sp>
+      <p:sp>
+        <p:nvSpPr>
+          <p:cNvPr id="11" name="Text 9"/>
+          <p:cNvSpPr/>
+          <p:nvPr/>
+        </p:nvSpPr>
+        <p:spPr>
+          <a:xfrm>
+            <a:off x="9281160" y="2651760"/>
+            <a:ext cx="2361895" cy="411480"/>
+          </a:xfrm>
+          <a:prstGeom prst="rect">
+            <a:avLst/>
+          </a:prstGeom>
+          <a:noFill/>
+          <a:ln/>
+        </p:spPr>
+        <p:txBody>
+          <a:bodyPr wrap="square" rtlCol="0" anchor="ctr"/>
+          <a:lstStyle/>
+          <a:p>
+            <a:pPr indent="0" marL="0">
+              <a:buNone/>
+            </a:pPr>
+            <a:r>
+              <a:rPr lang="en-US" sz="1000" i="1" dirty="0">
+                <a:solidFill>
+                  <a:srgbClr val="6B6B8F"/>
+                </a:solidFill>
+                <a:latin typeface="Calibri" pitchFamily="34" charset="0"/>
+                <a:ea typeface="Calibri" pitchFamily="34" charset="-122"/>
+                <a:cs typeface="Calibri" pitchFamily="34" charset="-120"/>
+              </a:rPr>
+              <a:t>Any IChatClient — Apple, Foundry Local, Azure OpenAI</a:t>
+            </a:r>
+            <a:endParaRPr lang="en-US" sz="1000" dirty="0"/>
+          </a:p>
+        </p:txBody>
+      </p:sp>
+      <p:sp>
+        <p:nvSpPr>
+          <p:cNvPr id="12" name="Shape 10"/>
+          <p:cNvSpPr/>
+          <p:nvPr/>
+        </p:nvSpPr>
+        <p:spPr>
+          <a:xfrm>
+            <a:off x="8458200" y="3200400"/>
+            <a:ext cx="3276295" cy="914400"/>
+          </a:xfrm>
+          <a:prstGeom prst="roundRect">
+            <a:avLst>
+              <a:gd name="adj" fmla="val 8000"/>
+            </a:avLst>
+          </a:prstGeom>
+          <a:solidFill>
+            <a:srgbClr val="FFFFFF"/>
+          </a:solidFill>
+          <a:ln w="12700">
+            <a:solidFill>
+              <a:srgbClr val="E5E1F5"/>
+            </a:solidFill>
+            <a:prstDash val="solid"/>
+          </a:ln>
+        </p:spPr>
+      </p:sp>
+      <p:sp>
+        <p:nvSpPr>
+          <p:cNvPr id="13" name="Shape 11"/>
+          <p:cNvSpPr/>
+          <p:nvPr/>
+        </p:nvSpPr>
+        <p:spPr>
+          <a:xfrm>
+            <a:off x="8641080" y="3383280"/>
+            <a:ext cx="502920" cy="502920"/>
+          </a:xfrm>
+          <a:prstGeom prst="ellipse">
+            <a:avLst/>
+          </a:prstGeom>
+          <a:solidFill>
+            <a:srgbClr val="6366F1"/>
+          </a:solidFill>
+          <a:ln w="12700">
+            <a:solidFill>
+              <a:srgbClr val="6366F1"/>
+            </a:solidFill>
+            <a:prstDash val="solid"/>
+          </a:ln>
+        </p:spPr>
+      </p:sp>
+      <p:sp>
+        <p:nvSpPr>
+          <p:cNvPr id="14" name="Text 12"/>
+          <p:cNvSpPr/>
+          <p:nvPr/>
+        </p:nvSpPr>
+        <p:spPr>
+          <a:xfrm>
+            <a:off x="8641080" y="3383280"/>
+            <a:ext cx="502920" cy="502920"/>
+          </a:xfrm>
+          <a:prstGeom prst="rect">
+            <a:avLst/>
+          </a:prstGeom>
+          <a:noFill/>
+          <a:ln/>
+        </p:spPr>
+        <p:txBody>
+          <a:bodyPr wrap="square" rtlCol="0" anchor="ctr"/>
+          <a:lstStyle/>
+          <a:p>
+            <a:pPr algn="ctr" indent="0" marL="0">
+              <a:buNone/>
+            </a:pPr>
+            <a:r>
+              <a:rPr lang="en-US" sz="1800" b="1" dirty="0">
+                <a:solidFill>
+                  <a:srgbClr val="FAF8FF"/>
+                </a:solidFill>
+                <a:latin typeface="Georgia" pitchFamily="34" charset="0"/>
+                <a:ea typeface="Georgia" pitchFamily="34" charset="-122"/>
+                <a:cs typeface="Georgia" pitchFamily="34" charset="-120"/>
+              </a:rPr>
+              <a:t>2</a:t>
+            </a:r>
+            <a:endParaRPr lang="en-US" sz="1800" dirty="0"/>
+          </a:p>
+        </p:txBody>
+      </p:sp>
+      <p:sp>
+        <p:nvSpPr>
+          <p:cNvPr id="15" name="Text 13"/>
+          <p:cNvSpPr/>
+          <p:nvPr/>
+        </p:nvSpPr>
+        <p:spPr>
+          <a:xfrm>
+            <a:off x="9281160" y="3337560"/>
+            <a:ext cx="2361895" cy="320040"/>
+          </a:xfrm>
+          <a:prstGeom prst="rect">
+            <a:avLst/>
+          </a:prstGeom>
+          <a:noFill/>
+          <a:ln/>
+        </p:spPr>
+        <p:txBody>
+          <a:bodyPr wrap="square" rtlCol="0" anchor="ctr"/>
+          <a:lstStyle/>
+          <a:p>
+            <a:pPr indent="0" marL="0">
+              <a:buNone/>
+            </a:pPr>
+            <a:r>
+              <a:rPr lang="en-US" sz="1500" b="1" dirty="0">
+                <a:solidFill>
+                  <a:srgbClr val="0F0A2E"/>
+                </a:solidFill>
+                <a:latin typeface="Calibri" pitchFamily="34" charset="0"/>
+                <a:ea typeface="Calibri" pitchFamily="34" charset="-122"/>
+                <a:cs typeface="Calibri" pitchFamily="34" charset="-120"/>
+              </a:rPr>
+              <a:t>Tool-aware</a:t>
+            </a:r>
+            <a:endParaRPr lang="en-US" sz="1500" dirty="0"/>
+          </a:p>
+        </p:txBody>
+      </p:sp>
+      <p:sp>
+        <p:nvSpPr>
+          <p:cNvPr id="16" name="Text 14"/>
+          <p:cNvSpPr/>
+          <p:nvPr/>
+        </p:nvSpPr>
+        <p:spPr>
+          <a:xfrm>
+            <a:off x="9281160" y="3657600"/>
+            <a:ext cx="2361895" cy="411480"/>
+          </a:xfrm>
+          <a:prstGeom prst="rect">
+            <a:avLst/>
+          </a:prstGeom>
+          <a:noFill/>
+          <a:ln/>
+        </p:spPr>
+        <p:txBody>
+          <a:bodyPr wrap="square" rtlCol="0" anchor="ctr"/>
+          <a:lstStyle/>
+          <a:p>
+            <a:pPr indent="0" marL="0">
+              <a:buNone/>
+            </a:pPr>
+            <a:r>
+              <a:rPr lang="en-US" sz="1000" i="1" dirty="0">
+                <a:solidFill>
+                  <a:srgbClr val="6B6B8F"/>
+                </a:solidFill>
+                <a:latin typeface="Calibri" pitchFamily="34" charset="0"/>
+                <a:ea typeface="Calibri" pitchFamily="34" charset="-122"/>
+                <a:cs typeface="Calibri" pitchFamily="34" charset="-120"/>
+              </a:rPr>
+              <a:t>[ExportAIFunction] generates AITool descriptors at compile time</a:t>
+            </a:r>
+            <a:endParaRPr lang="en-US" sz="1000" dirty="0"/>
+          </a:p>
+        </p:txBody>
+      </p:sp>
+      <p:sp>
+        <p:nvSpPr>
+          <p:cNvPr id="17" name="Shape 15"/>
+          <p:cNvSpPr/>
+          <p:nvPr/>
+        </p:nvSpPr>
+        <p:spPr>
+          <a:xfrm>
+            <a:off x="8458200" y="4206240"/>
+            <a:ext cx="3276295" cy="914400"/>
+          </a:xfrm>
+          <a:prstGeom prst="roundRect">
+            <a:avLst>
+              <a:gd name="adj" fmla="val 8000"/>
+            </a:avLst>
+          </a:prstGeom>
+          <a:solidFill>
+            <a:srgbClr val="FFFFFF"/>
+          </a:solidFill>
+          <a:ln w="12700">
+            <a:solidFill>
+              <a:srgbClr val="E5E1F5"/>
+            </a:solidFill>
+            <a:prstDash val="solid"/>
+          </a:ln>
+        </p:spPr>
+      </p:sp>
+      <p:sp>
+        <p:nvSpPr>
+          <p:cNvPr id="18" name="Shape 16"/>
+          <p:cNvSpPr/>
+          <p:nvPr/>
+        </p:nvSpPr>
+        <p:spPr>
+          <a:xfrm>
+            <a:off x="8641080" y="4389120"/>
+            <a:ext cx="502920" cy="502920"/>
+          </a:xfrm>
+          <a:prstGeom prst="ellipse">
+            <a:avLst/>
+          </a:prstGeom>
+          <a:solidFill>
+            <a:srgbClr val="FBBF24"/>
+          </a:solidFill>
+          <a:ln w="12700">
+            <a:solidFill>
+              <a:srgbClr val="FBBF24"/>
+            </a:solidFill>
+            <a:prstDash val="solid"/>
+          </a:ln>
+        </p:spPr>
+      </p:sp>
+      <p:sp>
+        <p:nvSpPr>
+          <p:cNvPr id="19" name="Text 17"/>
+          <p:cNvSpPr/>
+          <p:nvPr/>
+        </p:nvSpPr>
+        <p:spPr>
+          <a:xfrm>
+            <a:off x="8641080" y="4389120"/>
+            <a:ext cx="502920" cy="502920"/>
+          </a:xfrm>
+          <a:prstGeom prst="rect">
+            <a:avLst/>
+          </a:prstGeom>
+          <a:noFill/>
+          <a:ln/>
+        </p:spPr>
+        <p:txBody>
+          <a:bodyPr wrap="square" rtlCol="0" anchor="ctr"/>
+          <a:lstStyle/>
+          <a:p>
+            <a:pPr algn="ctr" indent="0" marL="0">
+              <a:buNone/>
+            </a:pPr>
+            <a:r>
+              <a:rPr lang="en-US" sz="1800" b="1" dirty="0">
+                <a:solidFill>
+                  <a:srgbClr val="FAF8FF"/>
+                </a:solidFill>
+                <a:latin typeface="Georgia" pitchFamily="34" charset="0"/>
+                <a:ea typeface="Georgia" pitchFamily="34" charset="-122"/>
+                <a:cs typeface="Georgia" pitchFamily="34" charset="-120"/>
+              </a:rPr>
+              <a:t>3</a:t>
+            </a:r>
+            <a:endParaRPr lang="en-US" sz="1800" dirty="0"/>
+          </a:p>
+        </p:txBody>
+      </p:sp>
+      <p:sp>
+        <p:nvSpPr>
+          <p:cNvPr id="20" name="Text 18"/>
+          <p:cNvSpPr/>
+          <p:nvPr/>
+        </p:nvSpPr>
+        <p:spPr>
+          <a:xfrm>
+            <a:off x="9281160" y="4343400"/>
+            <a:ext cx="2361895" cy="320040"/>
+          </a:xfrm>
+          <a:prstGeom prst="rect">
+            <a:avLst/>
+          </a:prstGeom>
+          <a:noFill/>
+          <a:ln/>
+        </p:spPr>
+        <p:txBody>
+          <a:bodyPr wrap="square" rtlCol="0" anchor="ctr"/>
+          <a:lstStyle/>
+          <a:p>
+            <a:pPr indent="0" marL="0">
+              <a:buNone/>
+            </a:pPr>
+            <a:r>
+              <a:rPr lang="en-US" sz="1500" b="1" dirty="0">
+                <a:solidFill>
+                  <a:srgbClr val="0F0A2E"/>
+                </a:solidFill>
+                <a:latin typeface="Calibri" pitchFamily="34" charset="0"/>
+                <a:ea typeface="Calibri" pitchFamily="34" charset="-122"/>
+                <a:cs typeface="Calibri" pitchFamily="34" charset="-120"/>
+              </a:rPr>
+              <a:t>Stateful</a:t>
+            </a:r>
+            <a:endParaRPr lang="en-US" sz="1500" dirty="0"/>
+          </a:p>
+        </p:txBody>
+      </p:sp>
+      <p:sp>
+        <p:nvSpPr>
+          <p:cNvPr id="21" name="Text 19"/>
+          <p:cNvSpPr/>
+          <p:nvPr/>
+        </p:nvSpPr>
+        <p:spPr>
+          <a:xfrm>
+            <a:off x="9281160" y="4663440"/>
+            <a:ext cx="2361895" cy="411480"/>
+          </a:xfrm>
+          <a:prstGeom prst="rect">
+            <a:avLst/>
+          </a:prstGeom>
+          <a:noFill/>
+          <a:ln/>
+        </p:spPr>
+        <p:txBody>
+          <a:bodyPr wrap="square" rtlCol="0" anchor="ctr"/>
+          <a:lstStyle/>
+          <a:p>
+            <a:pPr indent="0" marL="0">
+              <a:buNone/>
+            </a:pPr>
+            <a:r>
+              <a:rPr lang="en-US" sz="1000" i="1" dirty="0">
+                <a:solidFill>
+                  <a:srgbClr val="6B6B8F"/>
+                </a:solidFill>
+                <a:latin typeface="Calibri" pitchFamily="34" charset="0"/>
+                <a:ea typeface="Calibri" pitchFamily="34" charset="-122"/>
+                <a:cs typeface="Calibri" pitchFamily="34" charset="-120"/>
+              </a:rPr>
+              <a:t>AgentThread carries history across runs — no manual list-juggling</a:t>
+            </a:r>
+            <a:endParaRPr lang="en-US" sz="1000" dirty="0"/>
+          </a:p>
+        </p:txBody>
+      </p:sp>
+      <p:sp>
+        <p:nvSpPr>
+          <p:cNvPr id="22" name="Shape 20"/>
+          <p:cNvSpPr/>
+          <p:nvPr/>
+        </p:nvSpPr>
+        <p:spPr>
+          <a:xfrm>
+            <a:off x="8458200" y="5212080"/>
+            <a:ext cx="3276295" cy="914400"/>
+          </a:xfrm>
+          <a:prstGeom prst="roundRect">
+            <a:avLst>
+              <a:gd name="adj" fmla="val 8000"/>
+            </a:avLst>
+          </a:prstGeom>
+          <a:solidFill>
+            <a:srgbClr val="FFFFFF"/>
+          </a:solidFill>
+          <a:ln w="12700">
+            <a:solidFill>
+              <a:srgbClr val="E5E1F5"/>
+            </a:solidFill>
+            <a:prstDash val="solid"/>
+          </a:ln>
+        </p:spPr>
+      </p:sp>
+      <p:sp>
+        <p:nvSpPr>
+          <p:cNvPr id="23" name="Shape 21"/>
+          <p:cNvSpPr/>
+          <p:nvPr/>
+        </p:nvSpPr>
+        <p:spPr>
+          <a:xfrm>
+            <a:off x="8641080" y="5394960"/>
+            <a:ext cx="502920" cy="502920"/>
+          </a:xfrm>
+          <a:prstGeom prst="ellipse">
+            <a:avLst/>
+          </a:prstGeom>
+          <a:solidFill>
+            <a:srgbClr val="FB7185"/>
+          </a:solidFill>
+          <a:ln w="12700">
+            <a:solidFill>
+              <a:srgbClr val="FB7185"/>
+            </a:solidFill>
+            <a:prstDash val="solid"/>
+          </a:ln>
+        </p:spPr>
+      </p:sp>
+      <p:sp>
+        <p:nvSpPr>
+          <p:cNvPr id="24" name="Text 22"/>
+          <p:cNvSpPr/>
+          <p:nvPr/>
+        </p:nvSpPr>
+        <p:spPr>
+          <a:xfrm>
+            <a:off x="8641080" y="5394960"/>
+            <a:ext cx="502920" cy="502920"/>
+          </a:xfrm>
+          <a:prstGeom prst="rect">
+            <a:avLst/>
+          </a:prstGeom>
+          <a:noFill/>
+          <a:ln/>
+        </p:spPr>
+        <p:txBody>
+          <a:bodyPr wrap="square" rtlCol="0" anchor="ctr"/>
+          <a:lstStyle/>
+          <a:p>
+            <a:pPr algn="ctr" indent="0" marL="0">
+              <a:buNone/>
+            </a:pPr>
+            <a:r>
+              <a:rPr lang="en-US" sz="1800" b="1" dirty="0">
+                <a:solidFill>
+                  <a:srgbClr val="FAF8FF"/>
+                </a:solidFill>
+                <a:latin typeface="Georgia" pitchFamily="34" charset="0"/>
+                <a:ea typeface="Georgia" pitchFamily="34" charset="-122"/>
+                <a:cs typeface="Georgia" pitchFamily="34" charset="-120"/>
+              </a:rPr>
+              <a:t>4</a:t>
+            </a:r>
+            <a:endParaRPr lang="en-US" sz="1800" dirty="0"/>
+          </a:p>
+        </p:txBody>
+      </p:sp>
+      <p:sp>
+        <p:nvSpPr>
+          <p:cNvPr id="25" name="Text 23"/>
+          <p:cNvSpPr/>
+          <p:nvPr/>
+        </p:nvSpPr>
+        <p:spPr>
+          <a:xfrm>
+            <a:off x="9281160" y="5349240"/>
+            <a:ext cx="2361895" cy="320040"/>
+          </a:xfrm>
+          <a:prstGeom prst="rect">
+            <a:avLst/>
+          </a:prstGeom>
+          <a:noFill/>
+          <a:ln/>
+        </p:spPr>
+        <p:txBody>
+          <a:bodyPr wrap="square" rtlCol="0" anchor="ctr"/>
+          <a:lstStyle/>
+          <a:p>
+            <a:pPr indent="0" marL="0">
+              <a:buNone/>
+            </a:pPr>
+            <a:r>
+              <a:rPr lang="en-US" sz="1500" b="1" dirty="0">
+                <a:solidFill>
+                  <a:srgbClr val="0F0A2E"/>
+                </a:solidFill>
+                <a:latin typeface="Calibri" pitchFamily="34" charset="0"/>
+                <a:ea typeface="Calibri" pitchFamily="34" charset="-122"/>
+                <a:cs typeface="Calibri" pitchFamily="34" charset="-120"/>
+              </a:rPr>
+              <a:t>Streaming</a:t>
+            </a:r>
+            <a:endParaRPr lang="en-US" sz="1500" dirty="0"/>
+          </a:p>
+        </p:txBody>
+      </p:sp>
+      <p:sp>
+        <p:nvSpPr>
+          <p:cNvPr id="26" name="Text 24"/>
+          <p:cNvSpPr/>
+          <p:nvPr/>
+        </p:nvSpPr>
+        <p:spPr>
+          <a:xfrm>
+            <a:off x="9281160" y="5669280"/>
+            <a:ext cx="2361895" cy="411480"/>
+          </a:xfrm>
+          <a:prstGeom prst="rect">
+            <a:avLst/>
+          </a:prstGeom>
+          <a:noFill/>
+          <a:ln/>
+        </p:spPr>
+        <p:txBody>
+          <a:bodyPr wrap="square" rtlCol="0" anchor="ctr"/>
+          <a:lstStyle/>
+          <a:p>
+            <a:pPr indent="0" marL="0">
+              <a:buNone/>
+            </a:pPr>
+            <a:r>
+              <a:rPr lang="en-US" sz="1000" i="1" dirty="0">
+                <a:solidFill>
+                  <a:srgbClr val="6B6B8F"/>
+                </a:solidFill>
+                <a:latin typeface="Calibri" pitchFamily="34" charset="0"/>
+                <a:ea typeface="Calibri" pitchFamily="34" charset="-122"/>
+                <a:cs typeface="Calibri" pitchFamily="34" charset="-120"/>
+              </a:rPr>
+              <a:t>RunStreamingAsync yields AgentRunResponseUpdate — wire to your UI</a:t>
+            </a:r>
+            <a:endParaRPr lang="en-US" sz="1000" dirty="0"/>
+          </a:p>
+        </p:txBody>
+      </p:sp>
+      <p:sp>
+        <p:nvSpPr>
+          <p:cNvPr id="27" name="Shape 25"/>
+          <p:cNvSpPr/>
+          <p:nvPr/>
+        </p:nvSpPr>
+        <p:spPr>
+          <a:xfrm>
+            <a:off x="10180015" y="502920"/>
+            <a:ext cx="292608" cy="292608"/>
+          </a:xfrm>
+          <a:prstGeom prst="roundRect">
+            <a:avLst>
+              <a:gd name="adj" fmla="val 15625"/>
+            </a:avLst>
+          </a:prstGeom>
+          <a:ln w="19050">
+            <a:solidFill>
+              <a:srgbClr val="6366F1"/>
+            </a:solidFill>
+            <a:prstDash val="solid"/>
+          </a:ln>
+        </p:spPr>
+      </p:sp>
+      <p:sp>
+        <p:nvSpPr>
+          <p:cNvPr id="28" name="Text 26"/>
+          <p:cNvSpPr/>
+          <p:nvPr/>
+        </p:nvSpPr>
+        <p:spPr>
+          <a:xfrm>
+            <a:off x="10472623" y="457200"/>
+            <a:ext cx="411480" cy="384048"/>
+          </a:xfrm>
+          <a:prstGeom prst="rect">
+            <a:avLst/>
+          </a:prstGeom>
+          <a:noFill/>
+          <a:ln/>
+        </p:spPr>
+        <p:txBody>
+          <a:bodyPr wrap="square" rtlCol="0" anchor="ctr"/>
+          <a:lstStyle/>
+          <a:p>
+            <a:pPr algn="ctr" indent="0" marL="0">
+              <a:buNone/>
+            </a:pPr>
+            <a:r>
+              <a:rPr lang="en-US" sz="1800" b="1" dirty="0">
+                <a:solidFill>
+                  <a:srgbClr val="6366F1"/>
+                </a:solidFill>
+                <a:latin typeface="Calibri" pitchFamily="34" charset="0"/>
+                <a:ea typeface="Calibri" pitchFamily="34" charset="-122"/>
+                <a:cs typeface="Calibri" pitchFamily="34" charset="-120"/>
+              </a:rPr>
+              <a:t>↔</a:t>
+            </a:r>
+            <a:endParaRPr lang="en-US" sz="1800" dirty="0"/>
+          </a:p>
+        </p:txBody>
+      </p:sp>
+      <p:sp>
+        <p:nvSpPr>
+          <p:cNvPr id="29" name="Text 27"/>
+          <p:cNvSpPr/>
+          <p:nvPr/>
+        </p:nvSpPr>
+        <p:spPr>
+          <a:xfrm>
+            <a:off x="10893247" y="429768"/>
+            <a:ext cx="411480" cy="457200"/>
+          </a:xfrm>
+          <a:prstGeom prst="rect">
+            <a:avLst/>
+          </a:prstGeom>
+          <a:noFill/>
+          <a:ln/>
+        </p:spPr>
+        <p:txBody>
+          <a:bodyPr wrap="square" rtlCol="0" anchor="ctr"/>
+          <a:lstStyle/>
+          <a:p>
+            <a:pPr algn="ctr" indent="0" marL="0">
+              <a:buNone/>
+            </a:pPr>
+            <a:r>
+              <a:rPr lang="en-US" sz="2200" dirty="0">
+                <a:solidFill>
+                  <a:srgbClr val="6366F1"/>
+                </a:solidFill>
+                <a:latin typeface="Calibri" pitchFamily="34" charset="0"/>
+                <a:ea typeface="Calibri" pitchFamily="34" charset="-122"/>
+                <a:cs typeface="Calibri" pitchFamily="34" charset="-120"/>
+              </a:rPr>
+              <a:t>☁</a:t>
+            </a:r>
+            <a:endParaRPr lang="en-US" sz="2200" dirty="0"/>
+          </a:p>
+        </p:txBody>
+      </p:sp>
+      <p:sp>
+        <p:nvSpPr>
+          <p:cNvPr id="30" name="Text 28"/>
+          <p:cNvSpPr/>
+          <p:nvPr/>
+        </p:nvSpPr>
+        <p:spPr>
+          <a:xfrm>
+            <a:off x="457200" y="6446520"/>
+            <a:ext cx="7315200" cy="274320"/>
+          </a:xfrm>
+          <a:prstGeom prst="rect">
+            <a:avLst/>
+          </a:prstGeom>
+          <a:noFill/>
+          <a:ln/>
+        </p:spPr>
+        <p:txBody>
+          <a:bodyPr wrap="square" rtlCol="0" anchor="ctr"/>
+          <a:lstStyle/>
+          <a:p>
+            <a:pPr algn="l" indent="0" marL="0">
+              <a:buNone/>
+            </a:pPr>
+            <a:r>
+              <a:rPr lang="en-US" sz="1000" dirty="0">
+                <a:solidFill>
+                  <a:srgbClr val="6B6B8F"/>
+                </a:solidFill>
+                <a:latin typeface="Calibri" pitchFamily="34" charset="0"/>
+                <a:ea typeface="Calibri" pitchFamily="34" charset="-122"/>
+                <a:cs typeface="Calibri" pitchFamily="34" charset="-120"/>
+              </a:rPr>
+              <a:t>Unifying Local and Cloud AI</a:t>
+            </a:r>
+            <a:pPr algn="l" indent="0" marL="0">
+              <a:buNone/>
+            </a:pPr>
+            <a:r>
+              <a:rPr lang="en-US" sz="1000" dirty="0">
+                <a:solidFill>
+                  <a:srgbClr val="6B6B8F"/>
+                </a:solidFill>
+                <a:latin typeface="Calibri" pitchFamily="34" charset="0"/>
+                <a:ea typeface="Calibri" pitchFamily="34" charset="-122"/>
+                <a:cs typeface="Calibri" pitchFamily="34" charset="-120"/>
+              </a:rPr>
+              <a:t>  ·  </a:t>
+            </a:r>
+            <a:pPr algn="l" indent="0" marL="0">
+              <a:buNone/>
+            </a:pPr>
+            <a:r>
+              <a:rPr lang="en-US" sz="1000" b="1" dirty="0">
+                <a:solidFill>
+                  <a:srgbClr val="FB7185"/>
+                </a:solidFill>
+                <a:latin typeface="Calibri" pitchFamily="34" charset="0"/>
+                <a:ea typeface="Calibri" pitchFamily="34" charset="-122"/>
+                <a:cs typeface="Calibri" pitchFamily="34" charset="-120"/>
+              </a:rPr>
+              <a:t>@mattleibow</a:t>
+            </a:r>
+            <a:pPr algn="l" indent="0" marL="0">
+              <a:buNone/>
+            </a:pPr>
+            <a:r>
+              <a:rPr lang="en-US" sz="1000" dirty="0">
+                <a:solidFill>
+                  <a:srgbClr val="6B6B8F"/>
+                </a:solidFill>
+                <a:latin typeface="Calibri" pitchFamily="34" charset="0"/>
+                <a:ea typeface="Calibri" pitchFamily="34" charset="-122"/>
+                <a:cs typeface="Calibri" pitchFamily="34" charset="-120"/>
+              </a:rPr>
+              <a:t>  ·  @CPTMSDUG</a:t>
+            </a:r>
+            <a:endParaRPr lang="en-US" sz="1000" dirty="0"/>
+          </a:p>
+        </p:txBody>
+      </p:sp>
+      <p:sp>
+        <p:nvSpPr>
+          <p:cNvPr id="31" name="Text 29"/>
+          <p:cNvSpPr/>
+          <p:nvPr/>
+        </p:nvSpPr>
+        <p:spPr>
+          <a:xfrm>
+            <a:off x="10820095" y="6446520"/>
+            <a:ext cx="914400" cy="274320"/>
+          </a:xfrm>
+          <a:prstGeom prst="rect">
+            <a:avLst/>
+          </a:prstGeom>
+          <a:noFill/>
+          <a:ln/>
+        </p:spPr>
+        <p:txBody>
+          <a:bodyPr wrap="square" rtlCol="0" anchor="ctr"/>
+          <a:lstStyle/>
+          <a:p>
+            <a:pPr algn="r" indent="0" marL="0">
+              <a:buNone/>
+            </a:pPr>
+            <a:r>
+              <a:rPr lang="en-US" sz="1000" dirty="0">
+                <a:solidFill>
+                  <a:srgbClr val="6B6B8F"/>
+                </a:solidFill>
+                <a:latin typeface="Calibri" pitchFamily="34" charset="0"/>
+                <a:ea typeface="Calibri" pitchFamily="34" charset="-122"/>
+                <a:cs typeface="Calibri" pitchFamily="34" charset="-120"/>
+              </a:rPr>
+              <a:t>11 / 14</a:t>
+            </a:r>
+            <a:endParaRPr lang="en-US" sz="1000" dirty="0"/>
+          </a:p>
+        </p:txBody>
+      </p:sp>
+    </p:spTree>
+  </p:cSld>
+  <p:clrMapOvr>
+    <a:masterClrMapping/>
+  </p:clrMapOvr>
+</p:sld>
+</file>
+
+<file path=ppt/slides/slide12.xml><?xml version="1.0" encoding="utf-8"?>
+<p:sld xmlns:a="http://schemas.openxmlformats.org/drawingml/2006/main" xmlns:r="http://schemas.openxmlformats.org/officeDocument/2006/relationships" xmlns:p="http://schemas.openxmlformats.org/presentationml/2006/main">
+  <p:cSld name="Slide 12">
     <p:bg>
       <p:bgPr>
         <a:solidFill>
@@ -3915,13 +6540,10 @@
           <a:lstStyle/>
           <a:p>
             <a:pPr indent="0" marL="0">
-              <a:spcAft>
-                <a:spcPts val="200"/>
-              </a:spcAft>
-              <a:buNone/>
-            </a:pPr>
-            <a:r>
-              <a:rPr lang="en-US" sz="1100" dirty="0">
+              <a:buNone/>
+            </a:pPr>
+            <a:r>
+              <a:rPr lang="en-US" sz="1000" dirty="0">
                 <a:solidFill>
                   <a:srgbClr val="FAF8FF"/>
                 </a:solidFill>
@@ -3929,19 +6551,27 @@
                 <a:ea typeface="Consolas" pitchFamily="34" charset="-122"/>
                 <a:cs typeface="Consolas" pitchFamily="34" charset="-120"/>
               </a:rPr>
-              <a:t>chatClient = new AppleIntelligenceChatClient();</a:t>
-            </a:r>
-            <a:endParaRPr lang="en-US" sz="1100" dirty="0"/>
-          </a:p>
-          <a:p>
-            <a:pPr indent="0" marL="0">
-              <a:spcAft>
-                <a:spcPts val="200"/>
-              </a:spcAft>
-              <a:buNone/>
-            </a:pPr>
-            <a:r>
-              <a:rPr lang="en-US" sz="1100" dirty="0">
+              <a:t>chatClient </a:t>
+            </a:r>
+            <a:pPr indent="0" marL="0">
+              <a:buNone/>
+            </a:pPr>
+            <a:r>
+              <a:rPr lang="en-US" sz="1000" dirty="0">
+                <a:solidFill>
+                  <a:srgbClr val="CFCBED"/>
+                </a:solidFill>
+                <a:latin typeface="Consolas" pitchFamily="34" charset="0"/>
+                <a:ea typeface="Consolas" pitchFamily="34" charset="-122"/>
+                <a:cs typeface="Consolas" pitchFamily="34" charset="-120"/>
+              </a:rPr>
+              <a:t>=</a:t>
+            </a:r>
+            <a:pPr indent="0" marL="0">
+              <a:buNone/>
+            </a:pPr>
+            <a:r>
+              <a:rPr lang="en-US" sz="1000" dirty="0">
                 <a:solidFill>
                   <a:srgbClr val="FAF8FF"/>
                 </a:solidFill>
@@ -3949,9 +6579,113 @@
                 <a:ea typeface="Consolas" pitchFamily="34" charset="-122"/>
                 <a:cs typeface="Consolas" pitchFamily="34" charset="-120"/>
               </a:rPr>
+              <a:t> </a:t>
+            </a:r>
+            <a:pPr indent="0" marL="0">
+              <a:buNone/>
+            </a:pPr>
+            <a:r>
+              <a:rPr lang="en-US" sz="1000" dirty="0">
+                <a:solidFill>
+                  <a:srgbClr val="FB7185"/>
+                </a:solidFill>
+                <a:latin typeface="Consolas" pitchFamily="34" charset="0"/>
+                <a:ea typeface="Consolas" pitchFamily="34" charset="-122"/>
+                <a:cs typeface="Consolas" pitchFamily="34" charset="-120"/>
+              </a:rPr>
+              <a:t>new</a:t>
+            </a:r>
+            <a:pPr indent="0" marL="0">
+              <a:buNone/>
+            </a:pPr>
+            <a:r>
+              <a:rPr lang="en-US" sz="1000" dirty="0">
+                <a:solidFill>
+                  <a:srgbClr val="FAF8FF"/>
+                </a:solidFill>
+                <a:latin typeface="Consolas" pitchFamily="34" charset="0"/>
+                <a:ea typeface="Consolas" pitchFamily="34" charset="-122"/>
+                <a:cs typeface="Consolas" pitchFamily="34" charset="-120"/>
+              </a:rPr>
+              <a:t> </a:t>
+            </a:r>
+            <a:pPr indent="0" marL="0">
+              <a:buNone/>
+            </a:pPr>
+            <a:r>
+              <a:rPr lang="en-US" sz="1000" dirty="0">
+                <a:solidFill>
+                  <a:srgbClr val="FAF8FF"/>
+                </a:solidFill>
+                <a:latin typeface="Consolas" pitchFamily="34" charset="0"/>
+                <a:ea typeface="Consolas" pitchFamily="34" charset="-122"/>
+                <a:cs typeface="Consolas" pitchFamily="34" charset="-120"/>
+              </a:rPr>
+              <a:t>AppleIntelligenceChatClient</a:t>
+            </a:r>
+            <a:pPr indent="0" marL="0">
+              <a:buNone/>
+            </a:pPr>
+            <a:r>
+              <a:rPr lang="en-US" sz="1000" dirty="0">
+                <a:solidFill>
+                  <a:srgbClr val="B8B5D9"/>
+                </a:solidFill>
+                <a:latin typeface="Consolas" pitchFamily="34" charset="0"/>
+                <a:ea typeface="Consolas" pitchFamily="34" charset="-122"/>
+                <a:cs typeface="Consolas" pitchFamily="34" charset="-120"/>
+              </a:rPr>
+              <a:t>(</a:t>
+            </a:r>
+            <a:pPr indent="0" marL="0">
+              <a:buNone/>
+            </a:pPr>
+            <a:r>
+              <a:rPr lang="en-US" sz="1000" dirty="0">
+                <a:solidFill>
+                  <a:srgbClr val="B8B5D9"/>
+                </a:solidFill>
+                <a:latin typeface="Consolas" pitchFamily="34" charset="0"/>
+                <a:ea typeface="Consolas" pitchFamily="34" charset="-122"/>
+                <a:cs typeface="Consolas" pitchFamily="34" charset="-120"/>
+              </a:rPr>
+              <a:t>)</a:t>
+            </a:r>
+            <a:pPr indent="0" marL="0">
+              <a:buNone/>
+            </a:pPr>
+            <a:r>
+              <a:rPr lang="en-US" sz="1000" dirty="0">
+                <a:solidFill>
+                  <a:srgbClr val="B8B5D9"/>
+                </a:solidFill>
+                <a:latin typeface="Consolas" pitchFamily="34" charset="0"/>
+                <a:ea typeface="Consolas" pitchFamily="34" charset="-122"/>
+                <a:cs typeface="Consolas" pitchFamily="34" charset="-120"/>
+              </a:rPr>
+              <a:t>;</a:t>
+            </a:r>
+            <a:pPr indent="0" marL="0">
+              <a:buNone/>
+            </a:pPr>
+            <a:endParaRPr lang="en-US" sz="1000" dirty="0"/>
+          </a:p>
+          <a:p>
+            <a:pPr indent="0" marL="0">
+              <a:buNone/>
+            </a:pPr>
+            <a:r>
+              <a:rPr lang="en-US" sz="1000" i="1" dirty="0">
+                <a:solidFill>
+                  <a:srgbClr val="8B88B5"/>
+                </a:solidFill>
+                <a:latin typeface="Consolas" pitchFamily="34" charset="0"/>
+                <a:ea typeface="Consolas" pitchFamily="34" charset="-122"/>
+                <a:cs typeface="Consolas" pitchFamily="34" charset="-120"/>
+              </a:rPr>
               <a:t>//  Microsoft.Maui.Essentials.AI</a:t>
             </a:r>
-            <a:endParaRPr lang="en-US" sz="1100" dirty="0"/>
+            <a:endParaRPr lang="en-US" sz="1000" dirty="0"/>
           </a:p>
         </p:txBody>
       </p:sp>
@@ -4043,13 +6777,10 @@
           <a:lstStyle/>
           <a:p>
             <a:pPr indent="0" marL="0">
-              <a:spcAft>
-                <a:spcPts val="200"/>
-              </a:spcAft>
-              <a:buNone/>
-            </a:pPr>
-            <a:r>
-              <a:rPr lang="en-US" sz="1100" dirty="0">
+              <a:buNone/>
+            </a:pPr>
+            <a:r>
+              <a:rPr lang="en-US" sz="1000" dirty="0">
                 <a:solidFill>
                   <a:srgbClr val="FAF8FF"/>
                 </a:solidFill>
@@ -4057,19 +6788,27 @@
                 <a:ea typeface="Consolas" pitchFamily="34" charset="-122"/>
                 <a:cs typeface="Consolas" pitchFamily="34" charset="-120"/>
               </a:rPr>
-              <a:t>chatClient = new OpenAIClient(</a:t>
-            </a:r>
-            <a:endParaRPr lang="en-US" sz="1100" dirty="0"/>
-          </a:p>
-          <a:p>
-            <a:pPr indent="0" marL="0">
-              <a:spcAft>
-                <a:spcPts val="200"/>
-              </a:spcAft>
-              <a:buNone/>
-            </a:pPr>
-            <a:r>
-              <a:rPr lang="en-US" sz="1100" dirty="0">
+              <a:t>chatClient </a:t>
+            </a:r>
+            <a:pPr indent="0" marL="0">
+              <a:buNone/>
+            </a:pPr>
+            <a:r>
+              <a:rPr lang="en-US" sz="1000" dirty="0">
+                <a:solidFill>
+                  <a:srgbClr val="CFCBED"/>
+                </a:solidFill>
+                <a:latin typeface="Consolas" pitchFamily="34" charset="0"/>
+                <a:ea typeface="Consolas" pitchFamily="34" charset="-122"/>
+                <a:cs typeface="Consolas" pitchFamily="34" charset="-120"/>
+              </a:rPr>
+              <a:t>=</a:t>
+            </a:r>
+            <a:pPr indent="0" marL="0">
+              <a:buNone/>
+            </a:pPr>
+            <a:r>
+              <a:rPr lang="en-US" sz="1000" dirty="0">
                 <a:solidFill>
                   <a:srgbClr val="FAF8FF"/>
                 </a:solidFill>
@@ -4077,19 +6816,27 @@
                 <a:ea typeface="Consolas" pitchFamily="34" charset="-122"/>
                 <a:cs typeface="Consolas" pitchFamily="34" charset="-120"/>
               </a:rPr>
-              <a:t>    new ApiKeyCredential("not-used"),</a:t>
-            </a:r>
-            <a:endParaRPr lang="en-US" sz="1100" dirty="0"/>
-          </a:p>
-          <a:p>
-            <a:pPr indent="0" marL="0">
-              <a:spcAft>
-                <a:spcPts val="200"/>
-              </a:spcAft>
-              <a:buNone/>
-            </a:pPr>
-            <a:r>
-              <a:rPr lang="en-US" sz="1100" dirty="0">
+              <a:t> </a:t>
+            </a:r>
+            <a:pPr indent="0" marL="0">
+              <a:buNone/>
+            </a:pPr>
+            <a:r>
+              <a:rPr lang="en-US" sz="1000" dirty="0">
+                <a:solidFill>
+                  <a:srgbClr val="FB7185"/>
+                </a:solidFill>
+                <a:latin typeface="Consolas" pitchFamily="34" charset="0"/>
+                <a:ea typeface="Consolas" pitchFamily="34" charset="-122"/>
+                <a:cs typeface="Consolas" pitchFamily="34" charset="-120"/>
+              </a:rPr>
+              <a:t>new</a:t>
+            </a:r>
+            <a:pPr indent="0" marL="0">
+              <a:buNone/>
+            </a:pPr>
+            <a:r>
+              <a:rPr lang="en-US" sz="1000" dirty="0">
                 <a:solidFill>
                   <a:srgbClr val="FAF8FF"/>
                 </a:solidFill>
@@ -4097,19 +6844,13 @@
                 <a:ea typeface="Consolas" pitchFamily="34" charset="-122"/>
                 <a:cs typeface="Consolas" pitchFamily="34" charset="-120"/>
               </a:rPr>
-              <a:t>    new OpenAIClientOptions {</a:t>
-            </a:r>
-            <a:endParaRPr lang="en-US" sz="1100" dirty="0"/>
-          </a:p>
-          <a:p>
-            <a:pPr indent="0" marL="0">
-              <a:spcAft>
-                <a:spcPts val="200"/>
-              </a:spcAft>
-              <a:buNone/>
-            </a:pPr>
-            <a:r>
-              <a:rPr lang="en-US" sz="1100" dirty="0">
+              <a:t> </a:t>
+            </a:r>
+            <a:pPr indent="0" marL="0">
+              <a:buNone/>
+            </a:pPr>
+            <a:r>
+              <a:rPr lang="en-US" sz="1000" dirty="0">
                 <a:solidFill>
                   <a:srgbClr val="FAF8FF"/>
                 </a:solidFill>
@@ -4117,19 +6858,33 @@
                 <a:ea typeface="Consolas" pitchFamily="34" charset="-122"/>
                 <a:cs typeface="Consolas" pitchFamily="34" charset="-120"/>
               </a:rPr>
-              <a:t>      Endpoint = manager.Endpoint</a:t>
-            </a:r>
-            <a:endParaRPr lang="en-US" sz="1100" dirty="0"/>
-          </a:p>
-          <a:p>
-            <a:pPr indent="0" marL="0">
-              <a:spcAft>
-                <a:spcPts val="200"/>
-              </a:spcAft>
-              <a:buNone/>
-            </a:pPr>
-            <a:r>
-              <a:rPr lang="en-US" sz="1100" dirty="0">
+              <a:t>OpenAIClient</a:t>
+            </a:r>
+            <a:pPr indent="0" marL="0">
+              <a:buNone/>
+            </a:pPr>
+            <a:r>
+              <a:rPr lang="en-US" sz="1000" dirty="0">
+                <a:solidFill>
+                  <a:srgbClr val="B8B5D9"/>
+                </a:solidFill>
+                <a:latin typeface="Consolas" pitchFamily="34" charset="0"/>
+                <a:ea typeface="Consolas" pitchFamily="34" charset="-122"/>
+                <a:cs typeface="Consolas" pitchFamily="34" charset="-120"/>
+              </a:rPr>
+              <a:t>(</a:t>
+            </a:r>
+            <a:pPr indent="0" marL="0">
+              <a:buNone/>
+            </a:pPr>
+            <a:endParaRPr lang="en-US" sz="1000" dirty="0"/>
+          </a:p>
+          <a:p>
+            <a:pPr indent="0" marL="0">
+              <a:buNone/>
+            </a:pPr>
+            <a:r>
+              <a:rPr lang="en-US" sz="1000" dirty="0">
                 <a:solidFill>
                   <a:srgbClr val="FAF8FF"/>
                 </a:solidFill>
@@ -4137,19 +6892,27 @@
                 <a:ea typeface="Consolas" pitchFamily="34" charset="-122"/>
                 <a:cs typeface="Consolas" pitchFamily="34" charset="-120"/>
               </a:rPr>
-              <a:t>    })</a:t>
-            </a:r>
-            <a:endParaRPr lang="en-US" sz="1100" dirty="0"/>
-          </a:p>
-          <a:p>
-            <a:pPr indent="0" marL="0">
-              <a:spcAft>
-                <a:spcPts val="200"/>
-              </a:spcAft>
-              <a:buNone/>
-            </a:pPr>
-            <a:r>
-              <a:rPr lang="en-US" sz="1100" dirty="0">
+              <a:t>    </a:t>
+            </a:r>
+            <a:pPr indent="0" marL="0">
+              <a:buNone/>
+            </a:pPr>
+            <a:r>
+              <a:rPr lang="en-US" sz="1000" dirty="0">
+                <a:solidFill>
+                  <a:srgbClr val="FB7185"/>
+                </a:solidFill>
+                <a:latin typeface="Consolas" pitchFamily="34" charset="0"/>
+                <a:ea typeface="Consolas" pitchFamily="34" charset="-122"/>
+                <a:cs typeface="Consolas" pitchFamily="34" charset="-120"/>
+              </a:rPr>
+              <a:t>new</a:t>
+            </a:r>
+            <a:pPr indent="0" marL="0">
+              <a:buNone/>
+            </a:pPr>
+            <a:r>
+              <a:rPr lang="en-US" sz="1000" dirty="0">
                 <a:solidFill>
                   <a:srgbClr val="FAF8FF"/>
                 </a:solidFill>
@@ -4157,19 +6920,13 @@
                 <a:ea typeface="Consolas" pitchFamily="34" charset="-122"/>
                 <a:cs typeface="Consolas" pitchFamily="34" charset="-120"/>
               </a:rPr>
-              <a:t>    .GetChatClient("phi-4-mini")</a:t>
-            </a:r>
-            <a:endParaRPr lang="en-US" sz="1100" dirty="0"/>
-          </a:p>
-          <a:p>
-            <a:pPr indent="0" marL="0">
-              <a:spcAft>
-                <a:spcPts val="200"/>
-              </a:spcAft>
-              <a:buNone/>
-            </a:pPr>
-            <a:r>
-              <a:rPr lang="en-US" sz="1100" dirty="0">
+              <a:t> </a:t>
+            </a:r>
+            <a:pPr indent="0" marL="0">
+              <a:buNone/>
+            </a:pPr>
+            <a:r>
+              <a:rPr lang="en-US" sz="1000" dirty="0">
                 <a:solidFill>
                   <a:srgbClr val="FAF8FF"/>
                 </a:solidFill>
@@ -4177,9 +6934,459 @@
                 <a:ea typeface="Consolas" pitchFamily="34" charset="-122"/>
                 <a:cs typeface="Consolas" pitchFamily="34" charset="-120"/>
               </a:rPr>
-              <a:t>    .AsIChatClient();</a:t>
-            </a:r>
-            <a:endParaRPr lang="en-US" sz="1100" dirty="0"/>
+              <a:t>ApiKeyCredential</a:t>
+            </a:r>
+            <a:pPr indent="0" marL="0">
+              <a:buNone/>
+            </a:pPr>
+            <a:r>
+              <a:rPr lang="en-US" sz="1000" dirty="0">
+                <a:solidFill>
+                  <a:srgbClr val="B8B5D9"/>
+                </a:solidFill>
+                <a:latin typeface="Consolas" pitchFamily="34" charset="0"/>
+                <a:ea typeface="Consolas" pitchFamily="34" charset="-122"/>
+                <a:cs typeface="Consolas" pitchFamily="34" charset="-120"/>
+              </a:rPr>
+              <a:t>(</a:t>
+            </a:r>
+            <a:pPr indent="0" marL="0">
+              <a:buNone/>
+            </a:pPr>
+            <a:r>
+              <a:rPr lang="en-US" sz="1000" dirty="0">
+                <a:solidFill>
+                  <a:srgbClr val="FBBF24"/>
+                </a:solidFill>
+                <a:latin typeface="Consolas" pitchFamily="34" charset="0"/>
+                <a:ea typeface="Consolas" pitchFamily="34" charset="-122"/>
+                <a:cs typeface="Consolas" pitchFamily="34" charset="-120"/>
+              </a:rPr>
+              <a:t>"not-used"</a:t>
+            </a:r>
+            <a:pPr indent="0" marL="0">
+              <a:buNone/>
+            </a:pPr>
+            <a:r>
+              <a:rPr lang="en-US" sz="1000" dirty="0">
+                <a:solidFill>
+                  <a:srgbClr val="B8B5D9"/>
+                </a:solidFill>
+                <a:latin typeface="Consolas" pitchFamily="34" charset="0"/>
+                <a:ea typeface="Consolas" pitchFamily="34" charset="-122"/>
+                <a:cs typeface="Consolas" pitchFamily="34" charset="-120"/>
+              </a:rPr>
+              <a:t>)</a:t>
+            </a:r>
+            <a:pPr indent="0" marL="0">
+              <a:buNone/>
+            </a:pPr>
+            <a:r>
+              <a:rPr lang="en-US" sz="1000" dirty="0">
+                <a:solidFill>
+                  <a:srgbClr val="B8B5D9"/>
+                </a:solidFill>
+                <a:latin typeface="Consolas" pitchFamily="34" charset="0"/>
+                <a:ea typeface="Consolas" pitchFamily="34" charset="-122"/>
+                <a:cs typeface="Consolas" pitchFamily="34" charset="-120"/>
+              </a:rPr>
+              <a:t>,</a:t>
+            </a:r>
+            <a:pPr indent="0" marL="0">
+              <a:buNone/>
+            </a:pPr>
+            <a:endParaRPr lang="en-US" sz="1000" dirty="0"/>
+          </a:p>
+          <a:p>
+            <a:pPr indent="0" marL="0">
+              <a:buNone/>
+            </a:pPr>
+            <a:r>
+              <a:rPr lang="en-US" sz="1000" dirty="0">
+                <a:solidFill>
+                  <a:srgbClr val="FAF8FF"/>
+                </a:solidFill>
+                <a:latin typeface="Consolas" pitchFamily="34" charset="0"/>
+                <a:ea typeface="Consolas" pitchFamily="34" charset="-122"/>
+                <a:cs typeface="Consolas" pitchFamily="34" charset="-120"/>
+              </a:rPr>
+              <a:t>    </a:t>
+            </a:r>
+            <a:pPr indent="0" marL="0">
+              <a:buNone/>
+            </a:pPr>
+            <a:r>
+              <a:rPr lang="en-US" sz="1000" dirty="0">
+                <a:solidFill>
+                  <a:srgbClr val="FB7185"/>
+                </a:solidFill>
+                <a:latin typeface="Consolas" pitchFamily="34" charset="0"/>
+                <a:ea typeface="Consolas" pitchFamily="34" charset="-122"/>
+                <a:cs typeface="Consolas" pitchFamily="34" charset="-120"/>
+              </a:rPr>
+              <a:t>new</a:t>
+            </a:r>
+            <a:pPr indent="0" marL="0">
+              <a:buNone/>
+            </a:pPr>
+            <a:r>
+              <a:rPr lang="en-US" sz="1000" dirty="0">
+                <a:solidFill>
+                  <a:srgbClr val="FAF8FF"/>
+                </a:solidFill>
+                <a:latin typeface="Consolas" pitchFamily="34" charset="0"/>
+                <a:ea typeface="Consolas" pitchFamily="34" charset="-122"/>
+                <a:cs typeface="Consolas" pitchFamily="34" charset="-120"/>
+              </a:rPr>
+              <a:t> </a:t>
+            </a:r>
+            <a:pPr indent="0" marL="0">
+              <a:buNone/>
+            </a:pPr>
+            <a:r>
+              <a:rPr lang="en-US" sz="1000" dirty="0">
+                <a:solidFill>
+                  <a:srgbClr val="FAF8FF"/>
+                </a:solidFill>
+                <a:latin typeface="Consolas" pitchFamily="34" charset="0"/>
+                <a:ea typeface="Consolas" pitchFamily="34" charset="-122"/>
+                <a:cs typeface="Consolas" pitchFamily="34" charset="-120"/>
+              </a:rPr>
+              <a:t>OpenAIClientOptions</a:t>
+            </a:r>
+            <a:pPr indent="0" marL="0">
+              <a:buNone/>
+            </a:pPr>
+            <a:r>
+              <a:rPr lang="en-US" sz="1000" dirty="0">
+                <a:solidFill>
+                  <a:srgbClr val="FAF8FF"/>
+                </a:solidFill>
+                <a:latin typeface="Consolas" pitchFamily="34" charset="0"/>
+                <a:ea typeface="Consolas" pitchFamily="34" charset="-122"/>
+                <a:cs typeface="Consolas" pitchFamily="34" charset="-120"/>
+              </a:rPr>
+              <a:t> </a:t>
+            </a:r>
+            <a:pPr indent="0" marL="0">
+              <a:buNone/>
+            </a:pPr>
+            <a:r>
+              <a:rPr lang="en-US" sz="1000" dirty="0">
+                <a:solidFill>
+                  <a:srgbClr val="B8B5D9"/>
+                </a:solidFill>
+                <a:latin typeface="Consolas" pitchFamily="34" charset="0"/>
+                <a:ea typeface="Consolas" pitchFamily="34" charset="-122"/>
+                <a:cs typeface="Consolas" pitchFamily="34" charset="-120"/>
+              </a:rPr>
+              <a:t>{</a:t>
+            </a:r>
+            <a:pPr indent="0" marL="0">
+              <a:buNone/>
+            </a:pPr>
+            <a:endParaRPr lang="en-US" sz="1000" dirty="0"/>
+          </a:p>
+          <a:p>
+            <a:pPr indent="0" marL="0">
+              <a:buNone/>
+            </a:pPr>
+            <a:r>
+              <a:rPr lang="en-US" sz="1000" dirty="0">
+                <a:solidFill>
+                  <a:srgbClr val="FAF8FF"/>
+                </a:solidFill>
+                <a:latin typeface="Consolas" pitchFamily="34" charset="0"/>
+                <a:ea typeface="Consolas" pitchFamily="34" charset="-122"/>
+                <a:cs typeface="Consolas" pitchFamily="34" charset="-120"/>
+              </a:rPr>
+              <a:t>      Endpoint </a:t>
+            </a:r>
+            <a:pPr indent="0" marL="0">
+              <a:buNone/>
+            </a:pPr>
+            <a:r>
+              <a:rPr lang="en-US" sz="1000" dirty="0">
+                <a:solidFill>
+                  <a:srgbClr val="CFCBED"/>
+                </a:solidFill>
+                <a:latin typeface="Consolas" pitchFamily="34" charset="0"/>
+                <a:ea typeface="Consolas" pitchFamily="34" charset="-122"/>
+                <a:cs typeface="Consolas" pitchFamily="34" charset="-120"/>
+              </a:rPr>
+              <a:t>=</a:t>
+            </a:r>
+            <a:pPr indent="0" marL="0">
+              <a:buNone/>
+            </a:pPr>
+            <a:r>
+              <a:rPr lang="en-US" sz="1000" dirty="0">
+                <a:solidFill>
+                  <a:srgbClr val="FAF8FF"/>
+                </a:solidFill>
+                <a:latin typeface="Consolas" pitchFamily="34" charset="0"/>
+                <a:ea typeface="Consolas" pitchFamily="34" charset="-122"/>
+                <a:cs typeface="Consolas" pitchFamily="34" charset="-120"/>
+              </a:rPr>
+              <a:t> manager</a:t>
+            </a:r>
+            <a:pPr indent="0" marL="0">
+              <a:buNone/>
+            </a:pPr>
+            <a:r>
+              <a:rPr lang="en-US" sz="1000" dirty="0">
+                <a:solidFill>
+                  <a:srgbClr val="B8B5D9"/>
+                </a:solidFill>
+                <a:latin typeface="Consolas" pitchFamily="34" charset="0"/>
+                <a:ea typeface="Consolas" pitchFamily="34" charset="-122"/>
+                <a:cs typeface="Consolas" pitchFamily="34" charset="-120"/>
+              </a:rPr>
+              <a:t>.</a:t>
+            </a:r>
+            <a:pPr indent="0" marL="0">
+              <a:buNone/>
+            </a:pPr>
+            <a:r>
+              <a:rPr lang="en-US" sz="1000" dirty="0">
+                <a:solidFill>
+                  <a:srgbClr val="FAF8FF"/>
+                </a:solidFill>
+                <a:latin typeface="Consolas" pitchFamily="34" charset="0"/>
+                <a:ea typeface="Consolas" pitchFamily="34" charset="-122"/>
+                <a:cs typeface="Consolas" pitchFamily="34" charset="-120"/>
+              </a:rPr>
+              <a:t>Endpoint</a:t>
+            </a:r>
+            <a:pPr indent="0" marL="0">
+              <a:buNone/>
+            </a:pPr>
+            <a:endParaRPr lang="en-US" sz="1000" dirty="0"/>
+          </a:p>
+          <a:p>
+            <a:pPr indent="0" marL="0">
+              <a:buNone/>
+            </a:pPr>
+            <a:r>
+              <a:rPr lang="en-US" sz="1000" dirty="0">
+                <a:solidFill>
+                  <a:srgbClr val="FAF8FF"/>
+                </a:solidFill>
+                <a:latin typeface="Consolas" pitchFamily="34" charset="0"/>
+                <a:ea typeface="Consolas" pitchFamily="34" charset="-122"/>
+                <a:cs typeface="Consolas" pitchFamily="34" charset="-120"/>
+              </a:rPr>
+              <a:t>    </a:t>
+            </a:r>
+            <a:pPr indent="0" marL="0">
+              <a:buNone/>
+            </a:pPr>
+            <a:r>
+              <a:rPr lang="en-US" sz="1000" dirty="0">
+                <a:solidFill>
+                  <a:srgbClr val="B8B5D9"/>
+                </a:solidFill>
+                <a:latin typeface="Consolas" pitchFamily="34" charset="0"/>
+                <a:ea typeface="Consolas" pitchFamily="34" charset="-122"/>
+                <a:cs typeface="Consolas" pitchFamily="34" charset="-120"/>
+              </a:rPr>
+              <a:t>}</a:t>
+            </a:r>
+            <a:pPr indent="0" marL="0">
+              <a:buNone/>
+            </a:pPr>
+            <a:r>
+              <a:rPr lang="en-US" sz="1000" dirty="0">
+                <a:solidFill>
+                  <a:srgbClr val="B8B5D9"/>
+                </a:solidFill>
+                <a:latin typeface="Consolas" pitchFamily="34" charset="0"/>
+                <a:ea typeface="Consolas" pitchFamily="34" charset="-122"/>
+                <a:cs typeface="Consolas" pitchFamily="34" charset="-120"/>
+              </a:rPr>
+              <a:t>)</a:t>
+            </a:r>
+            <a:pPr indent="0" marL="0">
+              <a:buNone/>
+            </a:pPr>
+            <a:endParaRPr lang="en-US" sz="1000" dirty="0"/>
+          </a:p>
+          <a:p>
+            <a:pPr indent="0" marL="0">
+              <a:buNone/>
+            </a:pPr>
+            <a:r>
+              <a:rPr lang="en-US" sz="1000" dirty="0">
+                <a:solidFill>
+                  <a:srgbClr val="FAF8FF"/>
+                </a:solidFill>
+                <a:latin typeface="Consolas" pitchFamily="34" charset="0"/>
+                <a:ea typeface="Consolas" pitchFamily="34" charset="-122"/>
+                <a:cs typeface="Consolas" pitchFamily="34" charset="-120"/>
+              </a:rPr>
+              <a:t>    </a:t>
+            </a:r>
+            <a:pPr indent="0" marL="0">
+              <a:buNone/>
+            </a:pPr>
+            <a:r>
+              <a:rPr lang="en-US" sz="1000" dirty="0">
+                <a:solidFill>
+                  <a:srgbClr val="B8B5D9"/>
+                </a:solidFill>
+                <a:latin typeface="Consolas" pitchFamily="34" charset="0"/>
+                <a:ea typeface="Consolas" pitchFamily="34" charset="-122"/>
+                <a:cs typeface="Consolas" pitchFamily="34" charset="-120"/>
+              </a:rPr>
+              <a:t>.</a:t>
+            </a:r>
+            <a:pPr indent="0" marL="0">
+              <a:buNone/>
+            </a:pPr>
+            <a:r>
+              <a:rPr lang="en-US" sz="1000" dirty="0">
+                <a:solidFill>
+                  <a:srgbClr val="86EFAC"/>
+                </a:solidFill>
+                <a:latin typeface="Consolas" pitchFamily="34" charset="0"/>
+                <a:ea typeface="Consolas" pitchFamily="34" charset="-122"/>
+                <a:cs typeface="Consolas" pitchFamily="34" charset="-120"/>
+              </a:rPr>
+              <a:t>GetChatClient</a:t>
+            </a:r>
+            <a:pPr indent="0" marL="0">
+              <a:buNone/>
+            </a:pPr>
+            <a:r>
+              <a:rPr lang="en-US" sz="1000" dirty="0">
+                <a:solidFill>
+                  <a:srgbClr val="B8B5D9"/>
+                </a:solidFill>
+                <a:latin typeface="Consolas" pitchFamily="34" charset="0"/>
+                <a:ea typeface="Consolas" pitchFamily="34" charset="-122"/>
+                <a:cs typeface="Consolas" pitchFamily="34" charset="-120"/>
+              </a:rPr>
+              <a:t>(</a:t>
+            </a:r>
+            <a:pPr indent="0" marL="0">
+              <a:buNone/>
+            </a:pPr>
+            <a:r>
+              <a:rPr lang="en-US" sz="1000" dirty="0">
+                <a:solidFill>
+                  <a:srgbClr val="FBBF24"/>
+                </a:solidFill>
+                <a:latin typeface="Consolas" pitchFamily="34" charset="0"/>
+                <a:ea typeface="Consolas" pitchFamily="34" charset="-122"/>
+                <a:cs typeface="Consolas" pitchFamily="34" charset="-120"/>
+              </a:rPr>
+              <a:t>"phi-4-mini"</a:t>
+            </a:r>
+            <a:pPr indent="0" marL="0">
+              <a:buNone/>
+            </a:pPr>
+            <a:r>
+              <a:rPr lang="en-US" sz="1000" dirty="0">
+                <a:solidFill>
+                  <a:srgbClr val="B8B5D9"/>
+                </a:solidFill>
+                <a:latin typeface="Consolas" pitchFamily="34" charset="0"/>
+                <a:ea typeface="Consolas" pitchFamily="34" charset="-122"/>
+                <a:cs typeface="Consolas" pitchFamily="34" charset="-120"/>
+              </a:rPr>
+              <a:t>)</a:t>
+            </a:r>
+            <a:pPr indent="0" marL="0">
+              <a:buNone/>
+            </a:pPr>
+            <a:endParaRPr lang="en-US" sz="1000" dirty="0"/>
+          </a:p>
+          <a:p>
+            <a:pPr indent="0" marL="0">
+              <a:buNone/>
+            </a:pPr>
+            <a:r>
+              <a:rPr lang="en-US" sz="1000" dirty="0">
+                <a:solidFill>
+                  <a:srgbClr val="FAF8FF"/>
+                </a:solidFill>
+                <a:latin typeface="Consolas" pitchFamily="34" charset="0"/>
+                <a:ea typeface="Consolas" pitchFamily="34" charset="-122"/>
+                <a:cs typeface="Consolas" pitchFamily="34" charset="-120"/>
+              </a:rPr>
+              <a:t>    </a:t>
+            </a:r>
+            <a:pPr indent="0" marL="0">
+              <a:buNone/>
+            </a:pPr>
+            <a:r>
+              <a:rPr lang="en-US" sz="1000" dirty="0">
+                <a:solidFill>
+                  <a:srgbClr val="B8B5D9"/>
+                </a:solidFill>
+                <a:latin typeface="Consolas" pitchFamily="34" charset="0"/>
+                <a:ea typeface="Consolas" pitchFamily="34" charset="-122"/>
+                <a:cs typeface="Consolas" pitchFamily="34" charset="-120"/>
+              </a:rPr>
+              <a:t>.</a:t>
+            </a:r>
+            <a:pPr indent="0" marL="0">
+              <a:buNone/>
+            </a:pPr>
+            <a:r>
+              <a:rPr lang="en-US" sz="1000" dirty="0">
+                <a:solidFill>
+                  <a:srgbClr val="86EFAC"/>
+                </a:solidFill>
+                <a:latin typeface="Consolas" pitchFamily="34" charset="0"/>
+                <a:ea typeface="Consolas" pitchFamily="34" charset="-122"/>
+                <a:cs typeface="Consolas" pitchFamily="34" charset="-120"/>
+              </a:rPr>
+              <a:t>AsIChatClient</a:t>
+            </a:r>
+            <a:pPr indent="0" marL="0">
+              <a:buNone/>
+            </a:pPr>
+            <a:r>
+              <a:rPr lang="en-US" sz="1000" dirty="0">
+                <a:solidFill>
+                  <a:srgbClr val="B8B5D9"/>
+                </a:solidFill>
+                <a:latin typeface="Consolas" pitchFamily="34" charset="0"/>
+                <a:ea typeface="Consolas" pitchFamily="34" charset="-122"/>
+                <a:cs typeface="Consolas" pitchFamily="34" charset="-120"/>
+              </a:rPr>
+              <a:t>(</a:t>
+            </a:r>
+            <a:pPr indent="0" marL="0">
+              <a:buNone/>
+            </a:pPr>
+            <a:r>
+              <a:rPr lang="en-US" sz="1000" dirty="0">
+                <a:solidFill>
+                  <a:srgbClr val="B8B5D9"/>
+                </a:solidFill>
+                <a:latin typeface="Consolas" pitchFamily="34" charset="0"/>
+                <a:ea typeface="Consolas" pitchFamily="34" charset="-122"/>
+                <a:cs typeface="Consolas" pitchFamily="34" charset="-120"/>
+              </a:rPr>
+              <a:t>)</a:t>
+            </a:r>
+            <a:pPr indent="0" marL="0">
+              <a:buNone/>
+            </a:pPr>
+            <a:r>
+              <a:rPr lang="en-US" sz="1000" dirty="0">
+                <a:solidFill>
+                  <a:srgbClr val="B8B5D9"/>
+                </a:solidFill>
+                <a:latin typeface="Consolas" pitchFamily="34" charset="0"/>
+                <a:ea typeface="Consolas" pitchFamily="34" charset="-122"/>
+                <a:cs typeface="Consolas" pitchFamily="34" charset="-120"/>
+              </a:rPr>
+              <a:t>;</a:t>
+            </a:r>
+            <a:endParaRPr lang="en-US" sz="1000" dirty="0"/>
           </a:p>
         </p:txBody>
       </p:sp>
@@ -4271,13 +7478,10 @@
           <a:lstStyle/>
           <a:p>
             <a:pPr indent="0" marL="0">
-              <a:spcAft>
-                <a:spcPts val="200"/>
-              </a:spcAft>
-              <a:buNone/>
-            </a:pPr>
-            <a:r>
-              <a:rPr lang="en-US" sz="1100" dirty="0">
+              <a:buNone/>
+            </a:pPr>
+            <a:r>
+              <a:rPr lang="en-US" sz="1000" dirty="0">
                 <a:solidFill>
                   <a:srgbClr val="FAF8FF"/>
                 </a:solidFill>
@@ -4285,19 +7489,27 @@
                 <a:ea typeface="Consolas" pitchFamily="34" charset="-122"/>
                 <a:cs typeface="Consolas" pitchFamily="34" charset="-120"/>
               </a:rPr>
-              <a:t>chatClient = new AzureOpenAIClient(</a:t>
-            </a:r>
-            <a:endParaRPr lang="en-US" sz="1100" dirty="0"/>
-          </a:p>
-          <a:p>
-            <a:pPr indent="0" marL="0">
-              <a:spcAft>
-                <a:spcPts val="200"/>
-              </a:spcAft>
-              <a:buNone/>
-            </a:pPr>
-            <a:r>
-              <a:rPr lang="en-US" sz="1100" dirty="0">
+              <a:t>chatClient </a:t>
+            </a:r>
+            <a:pPr indent="0" marL="0">
+              <a:buNone/>
+            </a:pPr>
+            <a:r>
+              <a:rPr lang="en-US" sz="1000" dirty="0">
+                <a:solidFill>
+                  <a:srgbClr val="CFCBED"/>
+                </a:solidFill>
+                <a:latin typeface="Consolas" pitchFamily="34" charset="0"/>
+                <a:ea typeface="Consolas" pitchFamily="34" charset="-122"/>
+                <a:cs typeface="Consolas" pitchFamily="34" charset="-120"/>
+              </a:rPr>
+              <a:t>=</a:t>
+            </a:r>
+            <a:pPr indent="0" marL="0">
+              <a:buNone/>
+            </a:pPr>
+            <a:r>
+              <a:rPr lang="en-US" sz="1000" dirty="0">
                 <a:solidFill>
                   <a:srgbClr val="FAF8FF"/>
                 </a:solidFill>
@@ -4305,19 +7517,27 @@
                 <a:ea typeface="Consolas" pitchFamily="34" charset="-122"/>
                 <a:cs typeface="Consolas" pitchFamily="34" charset="-120"/>
               </a:rPr>
-              <a:t>    endpoint, new DefaultAzureCredential())</a:t>
-            </a:r>
-            <a:endParaRPr lang="en-US" sz="1100" dirty="0"/>
-          </a:p>
-          <a:p>
-            <a:pPr indent="0" marL="0">
-              <a:spcAft>
-                <a:spcPts val="200"/>
-              </a:spcAft>
-              <a:buNone/>
-            </a:pPr>
-            <a:r>
-              <a:rPr lang="en-US" sz="1100" dirty="0">
+              <a:t> </a:t>
+            </a:r>
+            <a:pPr indent="0" marL="0">
+              <a:buNone/>
+            </a:pPr>
+            <a:r>
+              <a:rPr lang="en-US" sz="1000" dirty="0">
+                <a:solidFill>
+                  <a:srgbClr val="FB7185"/>
+                </a:solidFill>
+                <a:latin typeface="Consolas" pitchFamily="34" charset="0"/>
+                <a:ea typeface="Consolas" pitchFamily="34" charset="-122"/>
+                <a:cs typeface="Consolas" pitchFamily="34" charset="-120"/>
+              </a:rPr>
+              <a:t>new</a:t>
+            </a:r>
+            <a:pPr indent="0" marL="0">
+              <a:buNone/>
+            </a:pPr>
+            <a:r>
+              <a:rPr lang="en-US" sz="1000" dirty="0">
                 <a:solidFill>
                   <a:srgbClr val="FAF8FF"/>
                 </a:solidFill>
@@ -4325,19 +7545,13 @@
                 <a:ea typeface="Consolas" pitchFamily="34" charset="-122"/>
                 <a:cs typeface="Consolas" pitchFamily="34" charset="-120"/>
               </a:rPr>
-              <a:t>    .GetChatClient("gpt-4.1")</a:t>
-            </a:r>
-            <a:endParaRPr lang="en-US" sz="1100" dirty="0"/>
-          </a:p>
-          <a:p>
-            <a:pPr indent="0" marL="0">
-              <a:spcAft>
-                <a:spcPts val="200"/>
-              </a:spcAft>
-              <a:buNone/>
-            </a:pPr>
-            <a:r>
-              <a:rPr lang="en-US" sz="1100" dirty="0">
+              <a:t> </a:t>
+            </a:r>
+            <a:pPr indent="0" marL="0">
+              <a:buNone/>
+            </a:pPr>
+            <a:r>
+              <a:rPr lang="en-US" sz="1000" dirty="0">
                 <a:solidFill>
                   <a:srgbClr val="FAF8FF"/>
                 </a:solidFill>
@@ -4345,9 +7559,335 @@
                 <a:ea typeface="Consolas" pitchFamily="34" charset="-122"/>
                 <a:cs typeface="Consolas" pitchFamily="34" charset="-120"/>
               </a:rPr>
-              <a:t>    .AsIChatClient();</a:t>
-            </a:r>
-            <a:endParaRPr lang="en-US" sz="1100" dirty="0"/>
+              <a:t>AzureOpenAIClient</a:t>
+            </a:r>
+            <a:pPr indent="0" marL="0">
+              <a:buNone/>
+            </a:pPr>
+            <a:r>
+              <a:rPr lang="en-US" sz="1000" dirty="0">
+                <a:solidFill>
+                  <a:srgbClr val="B8B5D9"/>
+                </a:solidFill>
+                <a:latin typeface="Consolas" pitchFamily="34" charset="0"/>
+                <a:ea typeface="Consolas" pitchFamily="34" charset="-122"/>
+                <a:cs typeface="Consolas" pitchFamily="34" charset="-120"/>
+              </a:rPr>
+              <a:t>(</a:t>
+            </a:r>
+            <a:pPr indent="0" marL="0">
+              <a:buNone/>
+            </a:pPr>
+            <a:endParaRPr lang="en-US" sz="1000" dirty="0"/>
+          </a:p>
+          <a:p>
+            <a:pPr indent="0" marL="0">
+              <a:buNone/>
+            </a:pPr>
+            <a:r>
+              <a:rPr lang="en-US" sz="1000" dirty="0">
+                <a:solidFill>
+                  <a:srgbClr val="FAF8FF"/>
+                </a:solidFill>
+                <a:latin typeface="Consolas" pitchFamily="34" charset="0"/>
+                <a:ea typeface="Consolas" pitchFamily="34" charset="-122"/>
+                <a:cs typeface="Consolas" pitchFamily="34" charset="-120"/>
+              </a:rPr>
+              <a:t>    endpoint</a:t>
+            </a:r>
+            <a:pPr indent="0" marL="0">
+              <a:buNone/>
+            </a:pPr>
+            <a:r>
+              <a:rPr lang="en-US" sz="1000" dirty="0">
+                <a:solidFill>
+                  <a:srgbClr val="B8B5D9"/>
+                </a:solidFill>
+                <a:latin typeface="Consolas" pitchFamily="34" charset="0"/>
+                <a:ea typeface="Consolas" pitchFamily="34" charset="-122"/>
+                <a:cs typeface="Consolas" pitchFamily="34" charset="-120"/>
+              </a:rPr>
+              <a:t>,</a:t>
+            </a:r>
+            <a:pPr indent="0" marL="0">
+              <a:buNone/>
+            </a:pPr>
+            <a:r>
+              <a:rPr lang="en-US" sz="1000" dirty="0">
+                <a:solidFill>
+                  <a:srgbClr val="FAF8FF"/>
+                </a:solidFill>
+                <a:latin typeface="Consolas" pitchFamily="34" charset="0"/>
+                <a:ea typeface="Consolas" pitchFamily="34" charset="-122"/>
+                <a:cs typeface="Consolas" pitchFamily="34" charset="-120"/>
+              </a:rPr>
+              <a:t> </a:t>
+            </a:r>
+            <a:pPr indent="0" marL="0">
+              <a:buNone/>
+            </a:pPr>
+            <a:r>
+              <a:rPr lang="en-US" sz="1000" dirty="0">
+                <a:solidFill>
+                  <a:srgbClr val="FB7185"/>
+                </a:solidFill>
+                <a:latin typeface="Consolas" pitchFamily="34" charset="0"/>
+                <a:ea typeface="Consolas" pitchFamily="34" charset="-122"/>
+                <a:cs typeface="Consolas" pitchFamily="34" charset="-120"/>
+              </a:rPr>
+              <a:t>new</a:t>
+            </a:r>
+            <a:pPr indent="0" marL="0">
+              <a:buNone/>
+            </a:pPr>
+            <a:r>
+              <a:rPr lang="en-US" sz="1000" dirty="0">
+                <a:solidFill>
+                  <a:srgbClr val="FAF8FF"/>
+                </a:solidFill>
+                <a:latin typeface="Consolas" pitchFamily="34" charset="0"/>
+                <a:ea typeface="Consolas" pitchFamily="34" charset="-122"/>
+                <a:cs typeface="Consolas" pitchFamily="34" charset="-120"/>
+              </a:rPr>
+              <a:t> </a:t>
+            </a:r>
+            <a:pPr indent="0" marL="0">
+              <a:buNone/>
+            </a:pPr>
+            <a:r>
+              <a:rPr lang="en-US" sz="1000" dirty="0">
+                <a:solidFill>
+                  <a:srgbClr val="FAF8FF"/>
+                </a:solidFill>
+                <a:latin typeface="Consolas" pitchFamily="34" charset="0"/>
+                <a:ea typeface="Consolas" pitchFamily="34" charset="-122"/>
+                <a:cs typeface="Consolas" pitchFamily="34" charset="-120"/>
+              </a:rPr>
+              <a:t>DefaultAzureCredential</a:t>
+            </a:r>
+            <a:pPr indent="0" marL="0">
+              <a:buNone/>
+            </a:pPr>
+            <a:r>
+              <a:rPr lang="en-US" sz="1000" dirty="0">
+                <a:solidFill>
+                  <a:srgbClr val="B8B5D9"/>
+                </a:solidFill>
+                <a:latin typeface="Consolas" pitchFamily="34" charset="0"/>
+                <a:ea typeface="Consolas" pitchFamily="34" charset="-122"/>
+                <a:cs typeface="Consolas" pitchFamily="34" charset="-120"/>
+              </a:rPr>
+              <a:t>(</a:t>
+            </a:r>
+            <a:pPr indent="0" marL="0">
+              <a:buNone/>
+            </a:pPr>
+            <a:r>
+              <a:rPr lang="en-US" sz="1000" dirty="0">
+                <a:solidFill>
+                  <a:srgbClr val="B8B5D9"/>
+                </a:solidFill>
+                <a:latin typeface="Consolas" pitchFamily="34" charset="0"/>
+                <a:ea typeface="Consolas" pitchFamily="34" charset="-122"/>
+                <a:cs typeface="Consolas" pitchFamily="34" charset="-120"/>
+              </a:rPr>
+              <a:t>)</a:t>
+            </a:r>
+            <a:pPr indent="0" marL="0">
+              <a:buNone/>
+            </a:pPr>
+            <a:r>
+              <a:rPr lang="en-US" sz="1000" dirty="0">
+                <a:solidFill>
+                  <a:srgbClr val="B8B5D9"/>
+                </a:solidFill>
+                <a:latin typeface="Consolas" pitchFamily="34" charset="0"/>
+                <a:ea typeface="Consolas" pitchFamily="34" charset="-122"/>
+                <a:cs typeface="Consolas" pitchFamily="34" charset="-120"/>
+              </a:rPr>
+              <a:t>)</a:t>
+            </a:r>
+            <a:pPr indent="0" marL="0">
+              <a:buNone/>
+            </a:pPr>
+            <a:endParaRPr lang="en-US" sz="1000" dirty="0"/>
+          </a:p>
+          <a:p>
+            <a:pPr indent="0" marL="0">
+              <a:buNone/>
+            </a:pPr>
+            <a:r>
+              <a:rPr lang="en-US" sz="1000" dirty="0">
+                <a:solidFill>
+                  <a:srgbClr val="FAF8FF"/>
+                </a:solidFill>
+                <a:latin typeface="Consolas" pitchFamily="34" charset="0"/>
+                <a:ea typeface="Consolas" pitchFamily="34" charset="-122"/>
+                <a:cs typeface="Consolas" pitchFamily="34" charset="-120"/>
+              </a:rPr>
+              <a:t>    </a:t>
+            </a:r>
+            <a:pPr indent="0" marL="0">
+              <a:buNone/>
+            </a:pPr>
+            <a:r>
+              <a:rPr lang="en-US" sz="1000" dirty="0">
+                <a:solidFill>
+                  <a:srgbClr val="B8B5D9"/>
+                </a:solidFill>
+                <a:latin typeface="Consolas" pitchFamily="34" charset="0"/>
+                <a:ea typeface="Consolas" pitchFamily="34" charset="-122"/>
+                <a:cs typeface="Consolas" pitchFamily="34" charset="-120"/>
+              </a:rPr>
+              <a:t>.</a:t>
+            </a:r>
+            <a:pPr indent="0" marL="0">
+              <a:buNone/>
+            </a:pPr>
+            <a:r>
+              <a:rPr lang="en-US" sz="1000" dirty="0">
+                <a:solidFill>
+                  <a:srgbClr val="86EFAC"/>
+                </a:solidFill>
+                <a:latin typeface="Consolas" pitchFamily="34" charset="0"/>
+                <a:ea typeface="Consolas" pitchFamily="34" charset="-122"/>
+                <a:cs typeface="Consolas" pitchFamily="34" charset="-120"/>
+              </a:rPr>
+              <a:t>GetChatClient</a:t>
+            </a:r>
+            <a:pPr indent="0" marL="0">
+              <a:buNone/>
+            </a:pPr>
+            <a:r>
+              <a:rPr lang="en-US" sz="1000" dirty="0">
+                <a:solidFill>
+                  <a:srgbClr val="B8B5D9"/>
+                </a:solidFill>
+                <a:latin typeface="Consolas" pitchFamily="34" charset="0"/>
+                <a:ea typeface="Consolas" pitchFamily="34" charset="-122"/>
+                <a:cs typeface="Consolas" pitchFamily="34" charset="-120"/>
+              </a:rPr>
+              <a:t>(</a:t>
+            </a:r>
+            <a:pPr indent="0" marL="0">
+              <a:buNone/>
+            </a:pPr>
+            <a:r>
+              <a:rPr lang="en-US" sz="1000" dirty="0">
+                <a:solidFill>
+                  <a:srgbClr val="FBBF24"/>
+                </a:solidFill>
+                <a:latin typeface="Consolas" pitchFamily="34" charset="0"/>
+                <a:ea typeface="Consolas" pitchFamily="34" charset="-122"/>
+                <a:cs typeface="Consolas" pitchFamily="34" charset="-120"/>
+              </a:rPr>
+              <a:t>"gpt-4.1"</a:t>
+            </a:r>
+            <a:pPr indent="0" marL="0">
+              <a:buNone/>
+            </a:pPr>
+            <a:r>
+              <a:rPr lang="en-US" sz="1000" dirty="0">
+                <a:solidFill>
+                  <a:srgbClr val="B8B5D9"/>
+                </a:solidFill>
+                <a:latin typeface="Consolas" pitchFamily="34" charset="0"/>
+                <a:ea typeface="Consolas" pitchFamily="34" charset="-122"/>
+                <a:cs typeface="Consolas" pitchFamily="34" charset="-120"/>
+              </a:rPr>
+              <a:t>)</a:t>
+            </a:r>
+            <a:pPr indent="0" marL="0">
+              <a:buNone/>
+            </a:pPr>
+            <a:endParaRPr lang="en-US" sz="1000" dirty="0"/>
+          </a:p>
+          <a:p>
+            <a:pPr indent="0" marL="0">
+              <a:buNone/>
+            </a:pPr>
+            <a:r>
+              <a:rPr lang="en-US" sz="1000" dirty="0">
+                <a:solidFill>
+                  <a:srgbClr val="FAF8FF"/>
+                </a:solidFill>
+                <a:latin typeface="Consolas" pitchFamily="34" charset="0"/>
+                <a:ea typeface="Consolas" pitchFamily="34" charset="-122"/>
+                <a:cs typeface="Consolas" pitchFamily="34" charset="-120"/>
+              </a:rPr>
+              <a:t>    </a:t>
+            </a:r>
+            <a:pPr indent="0" marL="0">
+              <a:buNone/>
+            </a:pPr>
+            <a:r>
+              <a:rPr lang="en-US" sz="1000" dirty="0">
+                <a:solidFill>
+                  <a:srgbClr val="B8B5D9"/>
+                </a:solidFill>
+                <a:latin typeface="Consolas" pitchFamily="34" charset="0"/>
+                <a:ea typeface="Consolas" pitchFamily="34" charset="-122"/>
+                <a:cs typeface="Consolas" pitchFamily="34" charset="-120"/>
+              </a:rPr>
+              <a:t>.</a:t>
+            </a:r>
+            <a:pPr indent="0" marL="0">
+              <a:buNone/>
+            </a:pPr>
+            <a:r>
+              <a:rPr lang="en-US" sz="1000" dirty="0">
+                <a:solidFill>
+                  <a:srgbClr val="86EFAC"/>
+                </a:solidFill>
+                <a:latin typeface="Consolas" pitchFamily="34" charset="0"/>
+                <a:ea typeface="Consolas" pitchFamily="34" charset="-122"/>
+                <a:cs typeface="Consolas" pitchFamily="34" charset="-120"/>
+              </a:rPr>
+              <a:t>AsIChatClient</a:t>
+            </a:r>
+            <a:pPr indent="0" marL="0">
+              <a:buNone/>
+            </a:pPr>
+            <a:r>
+              <a:rPr lang="en-US" sz="1000" dirty="0">
+                <a:solidFill>
+                  <a:srgbClr val="B8B5D9"/>
+                </a:solidFill>
+                <a:latin typeface="Consolas" pitchFamily="34" charset="0"/>
+                <a:ea typeface="Consolas" pitchFamily="34" charset="-122"/>
+                <a:cs typeface="Consolas" pitchFamily="34" charset="-120"/>
+              </a:rPr>
+              <a:t>(</a:t>
+            </a:r>
+            <a:pPr indent="0" marL="0">
+              <a:buNone/>
+            </a:pPr>
+            <a:r>
+              <a:rPr lang="en-US" sz="1000" dirty="0">
+                <a:solidFill>
+                  <a:srgbClr val="B8B5D9"/>
+                </a:solidFill>
+                <a:latin typeface="Consolas" pitchFamily="34" charset="0"/>
+                <a:ea typeface="Consolas" pitchFamily="34" charset="-122"/>
+                <a:cs typeface="Consolas" pitchFamily="34" charset="-120"/>
+              </a:rPr>
+              <a:t>)</a:t>
+            </a:r>
+            <a:pPr indent="0" marL="0">
+              <a:buNone/>
+            </a:pPr>
+            <a:r>
+              <a:rPr lang="en-US" sz="1000" dirty="0">
+                <a:solidFill>
+                  <a:srgbClr val="B8B5D9"/>
+                </a:solidFill>
+                <a:latin typeface="Consolas" pitchFamily="34" charset="0"/>
+                <a:ea typeface="Consolas" pitchFamily="34" charset="-122"/>
+                <a:cs typeface="Consolas" pitchFamily="34" charset="-120"/>
+              </a:rPr>
+              <a:t>;</a:t>
+            </a:r>
+            <a:endParaRPr lang="en-US" sz="1000" dirty="0"/>
           </a:p>
         </p:txBody>
       </p:sp>
@@ -4405,13 +7945,139 @@
             <a:r>
               <a:rPr lang="en-US" sz="1500" dirty="0">
                 <a:solidFill>
+                  <a:srgbClr val="FB7185"/>
+                </a:solidFill>
+                <a:latin typeface="Consolas" pitchFamily="34" charset="0"/>
+                <a:ea typeface="Consolas" pitchFamily="34" charset="-122"/>
+                <a:cs typeface="Consolas" pitchFamily="34" charset="-120"/>
+              </a:rPr>
+              <a:t>var</a:t>
+            </a:r>
+            <a:pPr algn="ctr" indent="0" marL="0">
+              <a:buNone/>
+            </a:pPr>
+            <a:r>
+              <a:rPr lang="en-US" sz="1500" dirty="0">
+                <a:solidFill>
                   <a:srgbClr val="FAF8FF"/>
                 </a:solidFill>
                 <a:latin typeface="Consolas" pitchFamily="34" charset="0"/>
                 <a:ea typeface="Consolas" pitchFamily="34" charset="-122"/>
                 <a:cs typeface="Consolas" pitchFamily="34" charset="-120"/>
               </a:rPr>
-              <a:t>var agent = chatClient.CreateAIAgent("You are helpful.");</a:t>
+              <a:t> agent </a:t>
+            </a:r>
+            <a:pPr algn="ctr" indent="0" marL="0">
+              <a:buNone/>
+            </a:pPr>
+            <a:r>
+              <a:rPr lang="en-US" sz="1500" dirty="0">
+                <a:solidFill>
+                  <a:srgbClr val="CFCBED"/>
+                </a:solidFill>
+                <a:latin typeface="Consolas" pitchFamily="34" charset="0"/>
+                <a:ea typeface="Consolas" pitchFamily="34" charset="-122"/>
+                <a:cs typeface="Consolas" pitchFamily="34" charset="-120"/>
+              </a:rPr>
+              <a:t>=</a:t>
+            </a:r>
+            <a:pPr algn="ctr" indent="0" marL="0">
+              <a:buNone/>
+            </a:pPr>
+            <a:r>
+              <a:rPr lang="en-US" sz="1500" dirty="0">
+                <a:solidFill>
+                  <a:srgbClr val="FAF8FF"/>
+                </a:solidFill>
+                <a:latin typeface="Consolas" pitchFamily="34" charset="0"/>
+                <a:ea typeface="Consolas" pitchFamily="34" charset="-122"/>
+                <a:cs typeface="Consolas" pitchFamily="34" charset="-120"/>
+              </a:rPr>
+              <a:t> chatClient</a:t>
+            </a:r>
+            <a:pPr algn="ctr" indent="0" marL="0">
+              <a:buNone/>
+            </a:pPr>
+            <a:r>
+              <a:rPr lang="en-US" sz="1500" dirty="0">
+                <a:solidFill>
+                  <a:srgbClr val="B8B5D9"/>
+                </a:solidFill>
+                <a:latin typeface="Consolas" pitchFamily="34" charset="0"/>
+                <a:ea typeface="Consolas" pitchFamily="34" charset="-122"/>
+                <a:cs typeface="Consolas" pitchFamily="34" charset="-120"/>
+              </a:rPr>
+              <a:t>.</a:t>
+            </a:r>
+            <a:pPr algn="ctr" indent="0" marL="0">
+              <a:buNone/>
+            </a:pPr>
+            <a:r>
+              <a:rPr lang="en-US" sz="1500" dirty="0">
+                <a:solidFill>
+                  <a:srgbClr val="86EFAC"/>
+                </a:solidFill>
+                <a:latin typeface="Consolas" pitchFamily="34" charset="0"/>
+                <a:ea typeface="Consolas" pitchFamily="34" charset="-122"/>
+                <a:cs typeface="Consolas" pitchFamily="34" charset="-120"/>
+              </a:rPr>
+              <a:t>CreateAIAgent</a:t>
+            </a:r>
+            <a:pPr algn="ctr" indent="0" marL="0">
+              <a:buNone/>
+            </a:pPr>
+            <a:r>
+              <a:rPr lang="en-US" sz="1500" dirty="0">
+                <a:solidFill>
+                  <a:srgbClr val="B8B5D9"/>
+                </a:solidFill>
+                <a:latin typeface="Consolas" pitchFamily="34" charset="0"/>
+                <a:ea typeface="Consolas" pitchFamily="34" charset="-122"/>
+                <a:cs typeface="Consolas" pitchFamily="34" charset="-120"/>
+              </a:rPr>
+              <a:t>(</a:t>
+            </a:r>
+            <a:pPr algn="ctr" indent="0" marL="0">
+              <a:buNone/>
+            </a:pPr>
+            <a:r>
+              <a:rPr lang="en-US" sz="1500" dirty="0">
+                <a:solidFill>
+                  <a:srgbClr val="FBBF24"/>
+                </a:solidFill>
+                <a:latin typeface="Consolas" pitchFamily="34" charset="0"/>
+                <a:ea typeface="Consolas" pitchFamily="34" charset="-122"/>
+                <a:cs typeface="Consolas" pitchFamily="34" charset="-120"/>
+              </a:rPr>
+              <a:t>"You are helpful."</a:t>
+            </a:r>
+            <a:pPr algn="ctr" indent="0" marL="0">
+              <a:buNone/>
+            </a:pPr>
+            <a:r>
+              <a:rPr lang="en-US" sz="1500" dirty="0">
+                <a:solidFill>
+                  <a:srgbClr val="B8B5D9"/>
+                </a:solidFill>
+                <a:latin typeface="Consolas" pitchFamily="34" charset="0"/>
+                <a:ea typeface="Consolas" pitchFamily="34" charset="-122"/>
+                <a:cs typeface="Consolas" pitchFamily="34" charset="-120"/>
+              </a:rPr>
+              <a:t>)</a:t>
+            </a:r>
+            <a:pPr algn="ctr" indent="0" marL="0">
+              <a:buNone/>
+            </a:pPr>
+            <a:r>
+              <a:rPr lang="en-US" sz="1500" dirty="0">
+                <a:solidFill>
+                  <a:srgbClr val="B8B5D9"/>
+                </a:solidFill>
+                <a:latin typeface="Consolas" pitchFamily="34" charset="0"/>
+                <a:ea typeface="Consolas" pitchFamily="34" charset="-122"/>
+                <a:cs typeface="Consolas" pitchFamily="34" charset="-120"/>
+              </a:rPr>
+              <a:t>;</a:t>
             </a:r>
             <a:pPr algn="ctr" indent="0" marL="0">
               <a:buNone/>
@@ -4439,9 +8105,9 @@
 </p:sld>
 </file>
 
-<file path=ppt/slides/slide12.xml><?xml version="1.0" encoding="utf-8"?>
+<file path=ppt/slides/slide13.xml><?xml version="1.0" encoding="utf-8"?>
 <p:sld xmlns:a="http://schemas.openxmlformats.org/drawingml/2006/main" xmlns:r="http://schemas.openxmlformats.org/officeDocument/2006/relationships" xmlns:p="http://schemas.openxmlformats.org/presentationml/2006/main">
-  <p:cSld name="Slide 12">
+  <p:cSld name="Slide 13">
     <p:bg>
       <p:bgPr>
         <a:solidFill>
@@ -5511,7 +9177,7 @@
                 <a:ea typeface="Calibri" pitchFamily="34" charset="-122"/>
                 <a:cs typeface="Calibri" pitchFamily="34" charset="-120"/>
               </a:rPr>
-              <a:t>12 / 13</a:t>
+              <a:t>13 / 14</a:t>
             </a:r>
             <a:endParaRPr lang="en-US" sz="1000" dirty="0"/>
           </a:p>
@@ -5525,9 +9191,9 @@
 </p:sld>
 </file>
 
-<file path=ppt/slides/slide13.xml><?xml version="1.0" encoding="utf-8"?>
+<file path=ppt/slides/slide14.xml><?xml version="1.0" encoding="utf-8"?>
 <p:sld xmlns:a="http://schemas.openxmlformats.org/drawingml/2006/main" xmlns:r="http://schemas.openxmlformats.org/officeDocument/2006/relationships" xmlns:p="http://schemas.openxmlformats.org/presentationml/2006/main">
-  <p:cSld name="Slide 13">
+  <p:cSld name="Slide 14">
     <p:bg>
       <p:bgPr>
         <a:solidFill>
@@ -7648,7 +11314,7 @@
                 <a:ea typeface="Calibri" pitchFamily="34" charset="-122"/>
                 <a:cs typeface="Calibri" pitchFamily="34" charset="-120"/>
               </a:rPr>
-              <a:t>2 / 13</a:t>
+              <a:t>2 / 14</a:t>
             </a:r>
             <a:endParaRPr lang="en-US" sz="1000" dirty="0"/>
           </a:p>
@@ -8580,7 +12246,7 @@
                 <a:ea typeface="Calibri" pitchFamily="34" charset="-122"/>
                 <a:cs typeface="Calibri" pitchFamily="34" charset="-120"/>
               </a:rPr>
-              <a:t>3 / 13</a:t>
+              <a:t>3 / 14</a:t>
             </a:r>
             <a:endParaRPr lang="en-US" sz="1000" dirty="0"/>
           </a:p>
@@ -9641,7 +13307,7 @@
                 <a:ea typeface="Calibri" pitchFamily="34" charset="-122"/>
                 <a:cs typeface="Calibri" pitchFamily="34" charset="-120"/>
               </a:rPr>
-              <a:t>4 / 13</a:t>
+              <a:t>4 / 14</a:t>
             </a:r>
             <a:endParaRPr lang="en-US" sz="1000" dirty="0"/>
           </a:p>
@@ -9870,13 +13536,24 @@
           <a:lstStyle/>
           <a:p>
             <a:pPr indent="0" marL="0">
-              <a:spcAft>
-                <a:spcPts val="200"/>
-              </a:spcAft>
-              <a:buNone/>
-            </a:pPr>
-            <a:r>
-              <a:rPr lang="en-US" sz="1400" dirty="0">
+              <a:buNone/>
+            </a:pPr>
+            <a:r>
+              <a:rPr lang="en-US" sz="1300" dirty="0">
+                <a:solidFill>
+                  <a:srgbClr val="FB7185"/>
+                </a:solidFill>
+                <a:latin typeface="Consolas" pitchFamily="34" charset="0"/>
+                <a:ea typeface="Consolas" pitchFamily="34" charset="-122"/>
+                <a:cs typeface="Consolas" pitchFamily="34" charset="-120"/>
+              </a:rPr>
+              <a:t>var</a:t>
+            </a:r>
+            <a:pPr indent="0" marL="0">
+              <a:buNone/>
+            </a:pPr>
+            <a:r>
+              <a:rPr lang="en-US" sz="1300" dirty="0">
                 <a:solidFill>
                   <a:srgbClr val="FAF8FF"/>
                 </a:solidFill>
@@ -9884,19 +13561,27 @@
                 <a:ea typeface="Consolas" pitchFamily="34" charset="-122"/>
                 <a:cs typeface="Consolas" pitchFamily="34" charset="-120"/>
               </a:rPr>
-              <a:t>var client = new AzureOpenAIClient(</a:t>
-            </a:r>
-            <a:endParaRPr lang="en-US" sz="1400" dirty="0"/>
-          </a:p>
-          <a:p>
-            <a:pPr indent="0" marL="0">
-              <a:spcAft>
-                <a:spcPts val="200"/>
-              </a:spcAft>
-              <a:buNone/>
-            </a:pPr>
-            <a:r>
-              <a:rPr lang="en-US" sz="1400" dirty="0">
+              <a:t> client </a:t>
+            </a:r>
+            <a:pPr indent="0" marL="0">
+              <a:buNone/>
+            </a:pPr>
+            <a:r>
+              <a:rPr lang="en-US" sz="1300" dirty="0">
+                <a:solidFill>
+                  <a:srgbClr val="CFCBED"/>
+                </a:solidFill>
+                <a:latin typeface="Consolas" pitchFamily="34" charset="0"/>
+                <a:ea typeface="Consolas" pitchFamily="34" charset="-122"/>
+                <a:cs typeface="Consolas" pitchFamily="34" charset="-120"/>
+              </a:rPr>
+              <a:t>=</a:t>
+            </a:r>
+            <a:pPr indent="0" marL="0">
+              <a:buNone/>
+            </a:pPr>
+            <a:r>
+              <a:rPr lang="en-US" sz="1300" dirty="0">
                 <a:solidFill>
                   <a:srgbClr val="FAF8FF"/>
                 </a:solidFill>
@@ -9904,19 +13589,27 @@
                 <a:ea typeface="Consolas" pitchFamily="34" charset="-122"/>
                 <a:cs typeface="Consolas" pitchFamily="34" charset="-120"/>
               </a:rPr>
-              <a:t>    new Uri(endpoint),</a:t>
-            </a:r>
-            <a:endParaRPr lang="en-US" sz="1400" dirty="0"/>
-          </a:p>
-          <a:p>
-            <a:pPr indent="0" marL="0">
-              <a:spcAft>
-                <a:spcPts val="200"/>
-              </a:spcAft>
-              <a:buNone/>
-            </a:pPr>
-            <a:r>
-              <a:rPr lang="en-US" sz="1400" dirty="0">
+              <a:t> </a:t>
+            </a:r>
+            <a:pPr indent="0" marL="0">
+              <a:buNone/>
+            </a:pPr>
+            <a:r>
+              <a:rPr lang="en-US" sz="1300" dirty="0">
+                <a:solidFill>
+                  <a:srgbClr val="FB7185"/>
+                </a:solidFill>
+                <a:latin typeface="Consolas" pitchFamily="34" charset="0"/>
+                <a:ea typeface="Consolas" pitchFamily="34" charset="-122"/>
+                <a:cs typeface="Consolas" pitchFamily="34" charset="-120"/>
+              </a:rPr>
+              <a:t>new</a:t>
+            </a:r>
+            <a:pPr indent="0" marL="0">
+              <a:buNone/>
+            </a:pPr>
+            <a:r>
+              <a:rPr lang="en-US" sz="1300" dirty="0">
                 <a:solidFill>
                   <a:srgbClr val="FAF8FF"/>
                 </a:solidFill>
@@ -9924,28 +13617,13 @@
                 <a:ea typeface="Consolas" pitchFamily="34" charset="-122"/>
                 <a:cs typeface="Consolas" pitchFamily="34" charset="-120"/>
               </a:rPr>
-              <a:t>    new DefaultAzureCredential());</a:t>
-            </a:r>
-            <a:endParaRPr lang="en-US" sz="1400" dirty="0"/>
-          </a:p>
-          <a:p>
-            <a:pPr indent="0" marL="0">
-              <a:spcAft>
-                <a:spcPts val="200"/>
-              </a:spcAft>
-              <a:buNone/>
-            </a:pPr>
-            <a:endParaRPr lang="en-US" sz="1400" dirty="0"/>
-          </a:p>
-          <a:p>
-            <a:pPr indent="0" marL="0">
-              <a:spcAft>
-                <a:spcPts val="200"/>
-              </a:spcAft>
-              <a:buNone/>
-            </a:pPr>
-            <a:r>
-              <a:rPr lang="en-US" sz="1400" dirty="0">
+              <a:t> </a:t>
+            </a:r>
+            <a:pPr indent="0" marL="0">
+              <a:buNone/>
+            </a:pPr>
+            <a:r>
+              <a:rPr lang="en-US" sz="1300" dirty="0">
                 <a:solidFill>
                   <a:srgbClr val="FAF8FF"/>
                 </a:solidFill>
@@ -9953,28 +13631,33 @@
                 <a:ea typeface="Consolas" pitchFamily="34" charset="-122"/>
                 <a:cs typeface="Consolas" pitchFamily="34" charset="-120"/>
               </a:rPr>
-              <a:t>var chat = client.GetChatClient("gpt-4.1");</a:t>
-            </a:r>
-            <a:endParaRPr lang="en-US" sz="1400" dirty="0"/>
-          </a:p>
-          <a:p>
-            <a:pPr indent="0" marL="0">
-              <a:spcAft>
-                <a:spcPts val="200"/>
-              </a:spcAft>
-              <a:buNone/>
-            </a:pPr>
-            <a:endParaRPr lang="en-US" sz="1400" dirty="0"/>
-          </a:p>
-          <a:p>
-            <a:pPr indent="0" marL="0">
-              <a:spcAft>
-                <a:spcPts val="200"/>
-              </a:spcAft>
-              <a:buNone/>
-            </a:pPr>
-            <a:r>
-              <a:rPr lang="en-US" sz="1400" dirty="0">
+              <a:t>AzureOpenAIClient</a:t>
+            </a:r>
+            <a:pPr indent="0" marL="0">
+              <a:buNone/>
+            </a:pPr>
+            <a:r>
+              <a:rPr lang="en-US" sz="1300" dirty="0">
+                <a:solidFill>
+                  <a:srgbClr val="B8B5D9"/>
+                </a:solidFill>
+                <a:latin typeface="Consolas" pitchFamily="34" charset="0"/>
+                <a:ea typeface="Consolas" pitchFamily="34" charset="-122"/>
+                <a:cs typeface="Consolas" pitchFamily="34" charset="-120"/>
+              </a:rPr>
+              <a:t>(</a:t>
+            </a:r>
+            <a:pPr indent="0" marL="0">
+              <a:buNone/>
+            </a:pPr>
+            <a:endParaRPr lang="en-US" sz="1300" dirty="0"/>
+          </a:p>
+          <a:p>
+            <a:pPr indent="0" marL="0">
+              <a:buNone/>
+            </a:pPr>
+            <a:r>
+              <a:rPr lang="en-US" sz="1300" dirty="0">
                 <a:solidFill>
                   <a:srgbClr val="FAF8FF"/>
                 </a:solidFill>
@@ -9982,19 +13665,27 @@
                 <a:ea typeface="Consolas" pitchFamily="34" charset="-122"/>
                 <a:cs typeface="Consolas" pitchFamily="34" charset="-120"/>
               </a:rPr>
-              <a:t>var response = await chat.CompleteChatAsync(</a:t>
-            </a:r>
-            <a:endParaRPr lang="en-US" sz="1400" dirty="0"/>
-          </a:p>
-          <a:p>
-            <a:pPr indent="0" marL="0">
-              <a:spcAft>
-                <a:spcPts val="200"/>
-              </a:spcAft>
-              <a:buNone/>
-            </a:pPr>
-            <a:r>
-              <a:rPr lang="en-US" sz="1400" dirty="0">
+              <a:t>    </a:t>
+            </a:r>
+            <a:pPr indent="0" marL="0">
+              <a:buNone/>
+            </a:pPr>
+            <a:r>
+              <a:rPr lang="en-US" sz="1300" dirty="0">
+                <a:solidFill>
+                  <a:srgbClr val="FB7185"/>
+                </a:solidFill>
+                <a:latin typeface="Consolas" pitchFamily="34" charset="0"/>
+                <a:ea typeface="Consolas" pitchFamily="34" charset="-122"/>
+                <a:cs typeface="Consolas" pitchFamily="34" charset="-120"/>
+              </a:rPr>
+              <a:t>new</a:t>
+            </a:r>
+            <a:pPr indent="0" marL="0">
+              <a:buNone/>
+            </a:pPr>
+            <a:r>
+              <a:rPr lang="en-US" sz="1300" dirty="0">
                 <a:solidFill>
                   <a:srgbClr val="FAF8FF"/>
                 </a:solidFill>
@@ -10002,28 +13693,13 @@
                 <a:ea typeface="Consolas" pitchFamily="34" charset="-122"/>
                 <a:cs typeface="Consolas" pitchFamily="34" charset="-120"/>
               </a:rPr>
-              <a:t>    "Summarise the agenda for today.");</a:t>
-            </a:r>
-            <a:endParaRPr lang="en-US" sz="1400" dirty="0"/>
-          </a:p>
-          <a:p>
-            <a:pPr indent="0" marL="0">
-              <a:spcAft>
-                <a:spcPts val="200"/>
-              </a:spcAft>
-              <a:buNone/>
-            </a:pPr>
-            <a:endParaRPr lang="en-US" sz="1400" dirty="0"/>
-          </a:p>
-          <a:p>
-            <a:pPr indent="0" marL="0">
-              <a:spcAft>
-                <a:spcPts val="200"/>
-              </a:spcAft>
-              <a:buNone/>
-            </a:pPr>
-            <a:r>
-              <a:rPr lang="en-US" sz="1400" dirty="0">
+              <a:t> </a:t>
+            </a:r>
+            <a:pPr indent="0" marL="0">
+              <a:buNone/>
+            </a:pPr>
+            <a:r>
+              <a:rPr lang="en-US" sz="1300" dirty="0">
                 <a:solidFill>
                   <a:srgbClr val="FAF8FF"/>
                 </a:solidFill>
@@ -10031,9 +13707,771 @@
                 <a:ea typeface="Consolas" pitchFamily="34" charset="-122"/>
                 <a:cs typeface="Consolas" pitchFamily="34" charset="-120"/>
               </a:rPr>
-              <a:t>Console.WriteLine(response.Value.Content[0].Text);</a:t>
-            </a:r>
-            <a:endParaRPr lang="en-US" sz="1400" dirty="0"/>
+              <a:t>Uri</a:t>
+            </a:r>
+            <a:pPr indent="0" marL="0">
+              <a:buNone/>
+            </a:pPr>
+            <a:r>
+              <a:rPr lang="en-US" sz="1300" dirty="0">
+                <a:solidFill>
+                  <a:srgbClr val="B8B5D9"/>
+                </a:solidFill>
+                <a:latin typeface="Consolas" pitchFamily="34" charset="0"/>
+                <a:ea typeface="Consolas" pitchFamily="34" charset="-122"/>
+                <a:cs typeface="Consolas" pitchFamily="34" charset="-120"/>
+              </a:rPr>
+              <a:t>(</a:t>
+            </a:r>
+            <a:pPr indent="0" marL="0">
+              <a:buNone/>
+            </a:pPr>
+            <a:r>
+              <a:rPr lang="en-US" sz="1300" dirty="0">
+                <a:solidFill>
+                  <a:srgbClr val="FAF8FF"/>
+                </a:solidFill>
+                <a:latin typeface="Consolas" pitchFamily="34" charset="0"/>
+                <a:ea typeface="Consolas" pitchFamily="34" charset="-122"/>
+                <a:cs typeface="Consolas" pitchFamily="34" charset="-120"/>
+              </a:rPr>
+              <a:t>endpoint</a:t>
+            </a:r>
+            <a:pPr indent="0" marL="0">
+              <a:buNone/>
+            </a:pPr>
+            <a:r>
+              <a:rPr lang="en-US" sz="1300" dirty="0">
+                <a:solidFill>
+                  <a:srgbClr val="B8B5D9"/>
+                </a:solidFill>
+                <a:latin typeface="Consolas" pitchFamily="34" charset="0"/>
+                <a:ea typeface="Consolas" pitchFamily="34" charset="-122"/>
+                <a:cs typeface="Consolas" pitchFamily="34" charset="-120"/>
+              </a:rPr>
+              <a:t>)</a:t>
+            </a:r>
+            <a:pPr indent="0" marL="0">
+              <a:buNone/>
+            </a:pPr>
+            <a:r>
+              <a:rPr lang="en-US" sz="1300" dirty="0">
+                <a:solidFill>
+                  <a:srgbClr val="B8B5D9"/>
+                </a:solidFill>
+                <a:latin typeface="Consolas" pitchFamily="34" charset="0"/>
+                <a:ea typeface="Consolas" pitchFamily="34" charset="-122"/>
+                <a:cs typeface="Consolas" pitchFamily="34" charset="-120"/>
+              </a:rPr>
+              <a:t>,</a:t>
+            </a:r>
+            <a:pPr indent="0" marL="0">
+              <a:buNone/>
+            </a:pPr>
+            <a:endParaRPr lang="en-US" sz="1300" dirty="0"/>
+          </a:p>
+          <a:p>
+            <a:pPr indent="0" marL="0">
+              <a:buNone/>
+            </a:pPr>
+            <a:r>
+              <a:rPr lang="en-US" sz="1300" dirty="0">
+                <a:solidFill>
+                  <a:srgbClr val="FAF8FF"/>
+                </a:solidFill>
+                <a:latin typeface="Consolas" pitchFamily="34" charset="0"/>
+                <a:ea typeface="Consolas" pitchFamily="34" charset="-122"/>
+                <a:cs typeface="Consolas" pitchFamily="34" charset="-120"/>
+              </a:rPr>
+              <a:t>    </a:t>
+            </a:r>
+            <a:pPr indent="0" marL="0">
+              <a:buNone/>
+            </a:pPr>
+            <a:r>
+              <a:rPr lang="en-US" sz="1300" dirty="0">
+                <a:solidFill>
+                  <a:srgbClr val="FB7185"/>
+                </a:solidFill>
+                <a:latin typeface="Consolas" pitchFamily="34" charset="0"/>
+                <a:ea typeface="Consolas" pitchFamily="34" charset="-122"/>
+                <a:cs typeface="Consolas" pitchFamily="34" charset="-120"/>
+              </a:rPr>
+              <a:t>new</a:t>
+            </a:r>
+            <a:pPr indent="0" marL="0">
+              <a:buNone/>
+            </a:pPr>
+            <a:r>
+              <a:rPr lang="en-US" sz="1300" dirty="0">
+                <a:solidFill>
+                  <a:srgbClr val="FAF8FF"/>
+                </a:solidFill>
+                <a:latin typeface="Consolas" pitchFamily="34" charset="0"/>
+                <a:ea typeface="Consolas" pitchFamily="34" charset="-122"/>
+                <a:cs typeface="Consolas" pitchFamily="34" charset="-120"/>
+              </a:rPr>
+              <a:t> </a:t>
+            </a:r>
+            <a:pPr indent="0" marL="0">
+              <a:buNone/>
+            </a:pPr>
+            <a:r>
+              <a:rPr lang="en-US" sz="1300" dirty="0">
+                <a:solidFill>
+                  <a:srgbClr val="FAF8FF"/>
+                </a:solidFill>
+                <a:latin typeface="Consolas" pitchFamily="34" charset="0"/>
+                <a:ea typeface="Consolas" pitchFamily="34" charset="-122"/>
+                <a:cs typeface="Consolas" pitchFamily="34" charset="-120"/>
+              </a:rPr>
+              <a:t>DefaultAzureCredential</a:t>
+            </a:r>
+            <a:pPr indent="0" marL="0">
+              <a:buNone/>
+            </a:pPr>
+            <a:r>
+              <a:rPr lang="en-US" sz="1300" dirty="0">
+                <a:solidFill>
+                  <a:srgbClr val="B8B5D9"/>
+                </a:solidFill>
+                <a:latin typeface="Consolas" pitchFamily="34" charset="0"/>
+                <a:ea typeface="Consolas" pitchFamily="34" charset="-122"/>
+                <a:cs typeface="Consolas" pitchFamily="34" charset="-120"/>
+              </a:rPr>
+              <a:t>(</a:t>
+            </a:r>
+            <a:pPr indent="0" marL="0">
+              <a:buNone/>
+            </a:pPr>
+            <a:r>
+              <a:rPr lang="en-US" sz="1300" dirty="0">
+                <a:solidFill>
+                  <a:srgbClr val="B8B5D9"/>
+                </a:solidFill>
+                <a:latin typeface="Consolas" pitchFamily="34" charset="0"/>
+                <a:ea typeface="Consolas" pitchFamily="34" charset="-122"/>
+                <a:cs typeface="Consolas" pitchFamily="34" charset="-120"/>
+              </a:rPr>
+              <a:t>)</a:t>
+            </a:r>
+            <a:pPr indent="0" marL="0">
+              <a:buNone/>
+            </a:pPr>
+            <a:r>
+              <a:rPr lang="en-US" sz="1300" dirty="0">
+                <a:solidFill>
+                  <a:srgbClr val="B8B5D9"/>
+                </a:solidFill>
+                <a:latin typeface="Consolas" pitchFamily="34" charset="0"/>
+                <a:ea typeface="Consolas" pitchFamily="34" charset="-122"/>
+                <a:cs typeface="Consolas" pitchFamily="34" charset="-120"/>
+              </a:rPr>
+              <a:t>)</a:t>
+            </a:r>
+            <a:pPr indent="0" marL="0">
+              <a:buNone/>
+            </a:pPr>
+            <a:r>
+              <a:rPr lang="en-US" sz="1300" dirty="0">
+                <a:solidFill>
+                  <a:srgbClr val="B8B5D9"/>
+                </a:solidFill>
+                <a:latin typeface="Consolas" pitchFamily="34" charset="0"/>
+                <a:ea typeface="Consolas" pitchFamily="34" charset="-122"/>
+                <a:cs typeface="Consolas" pitchFamily="34" charset="-120"/>
+              </a:rPr>
+              <a:t>;</a:t>
+            </a:r>
+            <a:pPr indent="0" marL="0">
+              <a:buNone/>
+            </a:pPr>
+            <a:endParaRPr lang="en-US" sz="1300" dirty="0"/>
+          </a:p>
+          <a:p>
+            <a:pPr indent="0" marL="0">
+              <a:buNone/>
+            </a:pPr>
+            <a:endParaRPr lang="en-US" sz="1300" dirty="0"/>
+          </a:p>
+          <a:p>
+            <a:pPr indent="0" marL="0">
+              <a:buNone/>
+            </a:pPr>
+            <a:r>
+              <a:rPr lang="en-US" sz="1300" dirty="0">
+                <a:solidFill>
+                  <a:srgbClr val="FB7185"/>
+                </a:solidFill>
+                <a:latin typeface="Consolas" pitchFamily="34" charset="0"/>
+                <a:ea typeface="Consolas" pitchFamily="34" charset="-122"/>
+                <a:cs typeface="Consolas" pitchFamily="34" charset="-120"/>
+              </a:rPr>
+              <a:t>var</a:t>
+            </a:r>
+            <a:pPr indent="0" marL="0">
+              <a:buNone/>
+            </a:pPr>
+            <a:r>
+              <a:rPr lang="en-US" sz="1300" dirty="0">
+                <a:solidFill>
+                  <a:srgbClr val="FAF8FF"/>
+                </a:solidFill>
+                <a:latin typeface="Consolas" pitchFamily="34" charset="0"/>
+                <a:ea typeface="Consolas" pitchFamily="34" charset="-122"/>
+                <a:cs typeface="Consolas" pitchFamily="34" charset="-120"/>
+              </a:rPr>
+              <a:t> chat </a:t>
+            </a:r>
+            <a:pPr indent="0" marL="0">
+              <a:buNone/>
+            </a:pPr>
+            <a:r>
+              <a:rPr lang="en-US" sz="1300" dirty="0">
+                <a:solidFill>
+                  <a:srgbClr val="CFCBED"/>
+                </a:solidFill>
+                <a:latin typeface="Consolas" pitchFamily="34" charset="0"/>
+                <a:ea typeface="Consolas" pitchFamily="34" charset="-122"/>
+                <a:cs typeface="Consolas" pitchFamily="34" charset="-120"/>
+              </a:rPr>
+              <a:t>=</a:t>
+            </a:r>
+            <a:pPr indent="0" marL="0">
+              <a:buNone/>
+            </a:pPr>
+            <a:r>
+              <a:rPr lang="en-US" sz="1300" dirty="0">
+                <a:solidFill>
+                  <a:srgbClr val="FAF8FF"/>
+                </a:solidFill>
+                <a:latin typeface="Consolas" pitchFamily="34" charset="0"/>
+                <a:ea typeface="Consolas" pitchFamily="34" charset="-122"/>
+                <a:cs typeface="Consolas" pitchFamily="34" charset="-120"/>
+              </a:rPr>
+              <a:t> client</a:t>
+            </a:r>
+            <a:pPr indent="0" marL="0">
+              <a:buNone/>
+            </a:pPr>
+            <a:r>
+              <a:rPr lang="en-US" sz="1300" dirty="0">
+                <a:solidFill>
+                  <a:srgbClr val="B8B5D9"/>
+                </a:solidFill>
+                <a:latin typeface="Consolas" pitchFamily="34" charset="0"/>
+                <a:ea typeface="Consolas" pitchFamily="34" charset="-122"/>
+                <a:cs typeface="Consolas" pitchFamily="34" charset="-120"/>
+              </a:rPr>
+              <a:t>.</a:t>
+            </a:r>
+            <a:pPr indent="0" marL="0">
+              <a:buNone/>
+            </a:pPr>
+            <a:r>
+              <a:rPr lang="en-US" sz="1300" dirty="0">
+                <a:solidFill>
+                  <a:srgbClr val="86EFAC"/>
+                </a:solidFill>
+                <a:latin typeface="Consolas" pitchFamily="34" charset="0"/>
+                <a:ea typeface="Consolas" pitchFamily="34" charset="-122"/>
+                <a:cs typeface="Consolas" pitchFamily="34" charset="-120"/>
+              </a:rPr>
+              <a:t>GetChatClient</a:t>
+            </a:r>
+            <a:pPr indent="0" marL="0">
+              <a:buNone/>
+            </a:pPr>
+            <a:r>
+              <a:rPr lang="en-US" sz="1300" dirty="0">
+                <a:solidFill>
+                  <a:srgbClr val="B8B5D9"/>
+                </a:solidFill>
+                <a:latin typeface="Consolas" pitchFamily="34" charset="0"/>
+                <a:ea typeface="Consolas" pitchFamily="34" charset="-122"/>
+                <a:cs typeface="Consolas" pitchFamily="34" charset="-120"/>
+              </a:rPr>
+              <a:t>(</a:t>
+            </a:r>
+            <a:pPr indent="0" marL="0">
+              <a:buNone/>
+            </a:pPr>
+            <a:r>
+              <a:rPr lang="en-US" sz="1300" dirty="0">
+                <a:solidFill>
+                  <a:srgbClr val="FBBF24"/>
+                </a:solidFill>
+                <a:latin typeface="Consolas" pitchFamily="34" charset="0"/>
+                <a:ea typeface="Consolas" pitchFamily="34" charset="-122"/>
+                <a:cs typeface="Consolas" pitchFamily="34" charset="-120"/>
+              </a:rPr>
+              <a:t>"gpt-4.1"</a:t>
+            </a:r>
+            <a:pPr indent="0" marL="0">
+              <a:buNone/>
+            </a:pPr>
+            <a:r>
+              <a:rPr lang="en-US" sz="1300" dirty="0">
+                <a:solidFill>
+                  <a:srgbClr val="B8B5D9"/>
+                </a:solidFill>
+                <a:latin typeface="Consolas" pitchFamily="34" charset="0"/>
+                <a:ea typeface="Consolas" pitchFamily="34" charset="-122"/>
+                <a:cs typeface="Consolas" pitchFamily="34" charset="-120"/>
+              </a:rPr>
+              <a:t>)</a:t>
+            </a:r>
+            <a:pPr indent="0" marL="0">
+              <a:buNone/>
+            </a:pPr>
+            <a:r>
+              <a:rPr lang="en-US" sz="1300" dirty="0">
+                <a:solidFill>
+                  <a:srgbClr val="B8B5D9"/>
+                </a:solidFill>
+                <a:latin typeface="Consolas" pitchFamily="34" charset="0"/>
+                <a:ea typeface="Consolas" pitchFamily="34" charset="-122"/>
+                <a:cs typeface="Consolas" pitchFamily="34" charset="-120"/>
+              </a:rPr>
+              <a:t>;</a:t>
+            </a:r>
+            <a:pPr indent="0" marL="0">
+              <a:buNone/>
+            </a:pPr>
+            <a:endParaRPr lang="en-US" sz="1300" dirty="0"/>
+          </a:p>
+          <a:p>
+            <a:pPr indent="0" marL="0">
+              <a:buNone/>
+            </a:pPr>
+            <a:endParaRPr lang="en-US" sz="1300" dirty="0"/>
+          </a:p>
+          <a:p>
+            <a:pPr indent="0" marL="0">
+              <a:buNone/>
+            </a:pPr>
+            <a:r>
+              <a:rPr lang="en-US" sz="1300" dirty="0">
+                <a:solidFill>
+                  <a:srgbClr val="FB7185"/>
+                </a:solidFill>
+                <a:latin typeface="Consolas" pitchFamily="34" charset="0"/>
+                <a:ea typeface="Consolas" pitchFamily="34" charset="-122"/>
+                <a:cs typeface="Consolas" pitchFamily="34" charset="-120"/>
+              </a:rPr>
+              <a:t>var</a:t>
+            </a:r>
+            <a:pPr indent="0" marL="0">
+              <a:buNone/>
+            </a:pPr>
+            <a:r>
+              <a:rPr lang="en-US" sz="1300" dirty="0">
+                <a:solidFill>
+                  <a:srgbClr val="FAF8FF"/>
+                </a:solidFill>
+                <a:latin typeface="Consolas" pitchFamily="34" charset="0"/>
+                <a:ea typeface="Consolas" pitchFamily="34" charset="-122"/>
+                <a:cs typeface="Consolas" pitchFamily="34" charset="-120"/>
+              </a:rPr>
+              <a:t> response </a:t>
+            </a:r>
+            <a:pPr indent="0" marL="0">
+              <a:buNone/>
+            </a:pPr>
+            <a:r>
+              <a:rPr lang="en-US" sz="1300" dirty="0">
+                <a:solidFill>
+                  <a:srgbClr val="CFCBED"/>
+                </a:solidFill>
+                <a:latin typeface="Consolas" pitchFamily="34" charset="0"/>
+                <a:ea typeface="Consolas" pitchFamily="34" charset="-122"/>
+                <a:cs typeface="Consolas" pitchFamily="34" charset="-120"/>
+              </a:rPr>
+              <a:t>=</a:t>
+            </a:r>
+            <a:pPr indent="0" marL="0">
+              <a:buNone/>
+            </a:pPr>
+            <a:r>
+              <a:rPr lang="en-US" sz="1300" dirty="0">
+                <a:solidFill>
+                  <a:srgbClr val="FAF8FF"/>
+                </a:solidFill>
+                <a:latin typeface="Consolas" pitchFamily="34" charset="0"/>
+                <a:ea typeface="Consolas" pitchFamily="34" charset="-122"/>
+                <a:cs typeface="Consolas" pitchFamily="34" charset="-120"/>
+              </a:rPr>
+              <a:t> </a:t>
+            </a:r>
+            <a:pPr indent="0" marL="0">
+              <a:buNone/>
+            </a:pPr>
+            <a:r>
+              <a:rPr lang="en-US" sz="1300" dirty="0">
+                <a:solidFill>
+                  <a:srgbClr val="FB7185"/>
+                </a:solidFill>
+                <a:latin typeface="Consolas" pitchFamily="34" charset="0"/>
+                <a:ea typeface="Consolas" pitchFamily="34" charset="-122"/>
+                <a:cs typeface="Consolas" pitchFamily="34" charset="-120"/>
+              </a:rPr>
+              <a:t>await</a:t>
+            </a:r>
+            <a:pPr indent="0" marL="0">
+              <a:buNone/>
+            </a:pPr>
+            <a:r>
+              <a:rPr lang="en-US" sz="1300" dirty="0">
+                <a:solidFill>
+                  <a:srgbClr val="FAF8FF"/>
+                </a:solidFill>
+                <a:latin typeface="Consolas" pitchFamily="34" charset="0"/>
+                <a:ea typeface="Consolas" pitchFamily="34" charset="-122"/>
+                <a:cs typeface="Consolas" pitchFamily="34" charset="-120"/>
+              </a:rPr>
+              <a:t> chat</a:t>
+            </a:r>
+            <a:pPr indent="0" marL="0">
+              <a:buNone/>
+            </a:pPr>
+            <a:r>
+              <a:rPr lang="en-US" sz="1300" dirty="0">
+                <a:solidFill>
+                  <a:srgbClr val="B8B5D9"/>
+                </a:solidFill>
+                <a:latin typeface="Consolas" pitchFamily="34" charset="0"/>
+                <a:ea typeface="Consolas" pitchFamily="34" charset="-122"/>
+                <a:cs typeface="Consolas" pitchFamily="34" charset="-120"/>
+              </a:rPr>
+              <a:t>.</a:t>
+            </a:r>
+            <a:pPr indent="0" marL="0">
+              <a:buNone/>
+            </a:pPr>
+            <a:r>
+              <a:rPr lang="en-US" sz="1300" dirty="0">
+                <a:solidFill>
+                  <a:srgbClr val="86EFAC"/>
+                </a:solidFill>
+                <a:latin typeface="Consolas" pitchFamily="34" charset="0"/>
+                <a:ea typeface="Consolas" pitchFamily="34" charset="-122"/>
+                <a:cs typeface="Consolas" pitchFamily="34" charset="-120"/>
+              </a:rPr>
+              <a:t>CompleteChatAsync</a:t>
+            </a:r>
+            <a:pPr indent="0" marL="0">
+              <a:buNone/>
+            </a:pPr>
+            <a:r>
+              <a:rPr lang="en-US" sz="1300" dirty="0">
+                <a:solidFill>
+                  <a:srgbClr val="B8B5D9"/>
+                </a:solidFill>
+                <a:latin typeface="Consolas" pitchFamily="34" charset="0"/>
+                <a:ea typeface="Consolas" pitchFamily="34" charset="-122"/>
+                <a:cs typeface="Consolas" pitchFamily="34" charset="-120"/>
+              </a:rPr>
+              <a:t>(</a:t>
+            </a:r>
+            <a:pPr indent="0" marL="0">
+              <a:buNone/>
+            </a:pPr>
+            <a:endParaRPr lang="en-US" sz="1300" dirty="0"/>
+          </a:p>
+          <a:p>
+            <a:pPr indent="0" marL="0">
+              <a:buNone/>
+            </a:pPr>
+            <a:r>
+              <a:rPr lang="en-US" sz="1300" dirty="0">
+                <a:solidFill>
+                  <a:srgbClr val="FAF8FF"/>
+                </a:solidFill>
+                <a:latin typeface="Consolas" pitchFamily="34" charset="0"/>
+                <a:ea typeface="Consolas" pitchFamily="34" charset="-122"/>
+                <a:cs typeface="Consolas" pitchFamily="34" charset="-120"/>
+              </a:rPr>
+              <a:t>    </a:t>
+            </a:r>
+            <a:pPr indent="0" marL="0">
+              <a:buNone/>
+            </a:pPr>
+            <a:r>
+              <a:rPr lang="en-US" sz="1300" dirty="0">
+                <a:solidFill>
+                  <a:srgbClr val="FBBF24"/>
+                </a:solidFill>
+                <a:latin typeface="Consolas" pitchFamily="34" charset="0"/>
+                <a:ea typeface="Consolas" pitchFamily="34" charset="-122"/>
+                <a:cs typeface="Consolas" pitchFamily="34" charset="-120"/>
+              </a:rPr>
+              <a:t>"Summarise the agenda for today."</a:t>
+            </a:r>
+            <a:pPr indent="0" marL="0">
+              <a:buNone/>
+            </a:pPr>
+            <a:r>
+              <a:rPr lang="en-US" sz="1300" dirty="0">
+                <a:solidFill>
+                  <a:srgbClr val="B8B5D9"/>
+                </a:solidFill>
+                <a:latin typeface="Consolas" pitchFamily="34" charset="0"/>
+                <a:ea typeface="Consolas" pitchFamily="34" charset="-122"/>
+                <a:cs typeface="Consolas" pitchFamily="34" charset="-120"/>
+              </a:rPr>
+              <a:t>)</a:t>
+            </a:r>
+            <a:pPr indent="0" marL="0">
+              <a:buNone/>
+            </a:pPr>
+            <a:r>
+              <a:rPr lang="en-US" sz="1300" dirty="0">
+                <a:solidFill>
+                  <a:srgbClr val="B8B5D9"/>
+                </a:solidFill>
+                <a:latin typeface="Consolas" pitchFamily="34" charset="0"/>
+                <a:ea typeface="Consolas" pitchFamily="34" charset="-122"/>
+                <a:cs typeface="Consolas" pitchFamily="34" charset="-120"/>
+              </a:rPr>
+              <a:t>;</a:t>
+            </a:r>
+            <a:pPr indent="0" marL="0">
+              <a:buNone/>
+            </a:pPr>
+            <a:endParaRPr lang="en-US" sz="1300" dirty="0"/>
+          </a:p>
+          <a:p>
+            <a:pPr indent="0" marL="0">
+              <a:buNone/>
+            </a:pPr>
+            <a:endParaRPr lang="en-US" sz="1300" dirty="0"/>
+          </a:p>
+          <a:p>
+            <a:pPr indent="0" marL="0">
+              <a:buNone/>
+            </a:pPr>
+            <a:r>
+              <a:rPr lang="en-US" sz="1300" dirty="0">
+                <a:solidFill>
+                  <a:srgbClr val="FAF8FF"/>
+                </a:solidFill>
+                <a:latin typeface="Consolas" pitchFamily="34" charset="0"/>
+                <a:ea typeface="Consolas" pitchFamily="34" charset="-122"/>
+                <a:cs typeface="Consolas" pitchFamily="34" charset="-120"/>
+              </a:rPr>
+              <a:t>Console</a:t>
+            </a:r>
+            <a:pPr indent="0" marL="0">
+              <a:buNone/>
+            </a:pPr>
+            <a:r>
+              <a:rPr lang="en-US" sz="1300" dirty="0">
+                <a:solidFill>
+                  <a:srgbClr val="B8B5D9"/>
+                </a:solidFill>
+                <a:latin typeface="Consolas" pitchFamily="34" charset="0"/>
+                <a:ea typeface="Consolas" pitchFamily="34" charset="-122"/>
+                <a:cs typeface="Consolas" pitchFamily="34" charset="-120"/>
+              </a:rPr>
+              <a:t>.</a:t>
+            </a:r>
+            <a:pPr indent="0" marL="0">
+              <a:buNone/>
+            </a:pPr>
+            <a:r>
+              <a:rPr lang="en-US" sz="1300" dirty="0">
+                <a:solidFill>
+                  <a:srgbClr val="86EFAC"/>
+                </a:solidFill>
+                <a:latin typeface="Consolas" pitchFamily="34" charset="0"/>
+                <a:ea typeface="Consolas" pitchFamily="34" charset="-122"/>
+                <a:cs typeface="Consolas" pitchFamily="34" charset="-120"/>
+              </a:rPr>
+              <a:t>WriteLine</a:t>
+            </a:r>
+            <a:pPr indent="0" marL="0">
+              <a:buNone/>
+            </a:pPr>
+            <a:r>
+              <a:rPr lang="en-US" sz="1300" dirty="0">
+                <a:solidFill>
+                  <a:srgbClr val="B8B5D9"/>
+                </a:solidFill>
+                <a:latin typeface="Consolas" pitchFamily="34" charset="0"/>
+                <a:ea typeface="Consolas" pitchFamily="34" charset="-122"/>
+                <a:cs typeface="Consolas" pitchFamily="34" charset="-120"/>
+              </a:rPr>
+              <a:t>(</a:t>
+            </a:r>
+            <a:pPr indent="0" marL="0">
+              <a:buNone/>
+            </a:pPr>
+            <a:r>
+              <a:rPr lang="en-US" sz="1300" dirty="0">
+                <a:solidFill>
+                  <a:srgbClr val="FAF8FF"/>
+                </a:solidFill>
+                <a:latin typeface="Consolas" pitchFamily="34" charset="0"/>
+                <a:ea typeface="Consolas" pitchFamily="34" charset="-122"/>
+                <a:cs typeface="Consolas" pitchFamily="34" charset="-120"/>
+              </a:rPr>
+              <a:t>response</a:t>
+            </a:r>
+            <a:pPr indent="0" marL="0">
+              <a:buNone/>
+            </a:pPr>
+            <a:r>
+              <a:rPr lang="en-US" sz="1300" dirty="0">
+                <a:solidFill>
+                  <a:srgbClr val="B8B5D9"/>
+                </a:solidFill>
+                <a:latin typeface="Consolas" pitchFamily="34" charset="0"/>
+                <a:ea typeface="Consolas" pitchFamily="34" charset="-122"/>
+                <a:cs typeface="Consolas" pitchFamily="34" charset="-120"/>
+              </a:rPr>
+              <a:t>.</a:t>
+            </a:r>
+            <a:pPr indent="0" marL="0">
+              <a:buNone/>
+            </a:pPr>
+            <a:r>
+              <a:rPr lang="en-US" sz="1300" dirty="0">
+                <a:solidFill>
+                  <a:srgbClr val="FAF8FF"/>
+                </a:solidFill>
+                <a:latin typeface="Consolas" pitchFamily="34" charset="0"/>
+                <a:ea typeface="Consolas" pitchFamily="34" charset="-122"/>
+                <a:cs typeface="Consolas" pitchFamily="34" charset="-120"/>
+              </a:rPr>
+              <a:t>Value</a:t>
+            </a:r>
+            <a:pPr indent="0" marL="0">
+              <a:buNone/>
+            </a:pPr>
+            <a:r>
+              <a:rPr lang="en-US" sz="1300" dirty="0">
+                <a:solidFill>
+                  <a:srgbClr val="B8B5D9"/>
+                </a:solidFill>
+                <a:latin typeface="Consolas" pitchFamily="34" charset="0"/>
+                <a:ea typeface="Consolas" pitchFamily="34" charset="-122"/>
+                <a:cs typeface="Consolas" pitchFamily="34" charset="-120"/>
+              </a:rPr>
+              <a:t>.</a:t>
+            </a:r>
+            <a:pPr indent="0" marL="0">
+              <a:buNone/>
+            </a:pPr>
+            <a:r>
+              <a:rPr lang="en-US" sz="1300" dirty="0">
+                <a:solidFill>
+                  <a:srgbClr val="FAF8FF"/>
+                </a:solidFill>
+                <a:latin typeface="Consolas" pitchFamily="34" charset="0"/>
+                <a:ea typeface="Consolas" pitchFamily="34" charset="-122"/>
+                <a:cs typeface="Consolas" pitchFamily="34" charset="-120"/>
+              </a:rPr>
+              <a:t>Content</a:t>
+            </a:r>
+            <a:pPr indent="0" marL="0">
+              <a:buNone/>
+            </a:pPr>
+            <a:r>
+              <a:rPr lang="en-US" sz="1300" dirty="0">
+                <a:solidFill>
+                  <a:srgbClr val="B8B5D9"/>
+                </a:solidFill>
+                <a:latin typeface="Consolas" pitchFamily="34" charset="0"/>
+                <a:ea typeface="Consolas" pitchFamily="34" charset="-122"/>
+                <a:cs typeface="Consolas" pitchFamily="34" charset="-120"/>
+              </a:rPr>
+              <a:t>[</a:t>
+            </a:r>
+            <a:pPr indent="0" marL="0">
+              <a:buNone/>
+            </a:pPr>
+            <a:r>
+              <a:rPr lang="en-US" sz="1300" dirty="0">
+                <a:solidFill>
+                  <a:srgbClr val="F472B6"/>
+                </a:solidFill>
+                <a:latin typeface="Consolas" pitchFamily="34" charset="0"/>
+                <a:ea typeface="Consolas" pitchFamily="34" charset="-122"/>
+                <a:cs typeface="Consolas" pitchFamily="34" charset="-120"/>
+              </a:rPr>
+              <a:t>0</a:t>
+            </a:r>
+            <a:pPr indent="0" marL="0">
+              <a:buNone/>
+            </a:pPr>
+            <a:r>
+              <a:rPr lang="en-US" sz="1300" dirty="0">
+                <a:solidFill>
+                  <a:srgbClr val="B8B5D9"/>
+                </a:solidFill>
+                <a:latin typeface="Consolas" pitchFamily="34" charset="0"/>
+                <a:ea typeface="Consolas" pitchFamily="34" charset="-122"/>
+                <a:cs typeface="Consolas" pitchFamily="34" charset="-120"/>
+              </a:rPr>
+              <a:t>]</a:t>
+            </a:r>
+            <a:pPr indent="0" marL="0">
+              <a:buNone/>
+            </a:pPr>
+            <a:r>
+              <a:rPr lang="en-US" sz="1300" dirty="0">
+                <a:solidFill>
+                  <a:srgbClr val="B8B5D9"/>
+                </a:solidFill>
+                <a:latin typeface="Consolas" pitchFamily="34" charset="0"/>
+                <a:ea typeface="Consolas" pitchFamily="34" charset="-122"/>
+                <a:cs typeface="Consolas" pitchFamily="34" charset="-120"/>
+              </a:rPr>
+              <a:t>.</a:t>
+            </a:r>
+            <a:pPr indent="0" marL="0">
+              <a:buNone/>
+            </a:pPr>
+            <a:r>
+              <a:rPr lang="en-US" sz="1300" dirty="0">
+                <a:solidFill>
+                  <a:srgbClr val="FAF8FF"/>
+                </a:solidFill>
+                <a:latin typeface="Consolas" pitchFamily="34" charset="0"/>
+                <a:ea typeface="Consolas" pitchFamily="34" charset="-122"/>
+                <a:cs typeface="Consolas" pitchFamily="34" charset="-120"/>
+              </a:rPr>
+              <a:t>Text</a:t>
+            </a:r>
+            <a:pPr indent="0" marL="0">
+              <a:buNone/>
+            </a:pPr>
+            <a:r>
+              <a:rPr lang="en-US" sz="1300" dirty="0">
+                <a:solidFill>
+                  <a:srgbClr val="B8B5D9"/>
+                </a:solidFill>
+                <a:latin typeface="Consolas" pitchFamily="34" charset="0"/>
+                <a:ea typeface="Consolas" pitchFamily="34" charset="-122"/>
+                <a:cs typeface="Consolas" pitchFamily="34" charset="-120"/>
+              </a:rPr>
+              <a:t>)</a:t>
+            </a:r>
+            <a:pPr indent="0" marL="0">
+              <a:buNone/>
+            </a:pPr>
+            <a:r>
+              <a:rPr lang="en-US" sz="1300" dirty="0">
+                <a:solidFill>
+                  <a:srgbClr val="B8B5D9"/>
+                </a:solidFill>
+                <a:latin typeface="Consolas" pitchFamily="34" charset="0"/>
+                <a:ea typeface="Consolas" pitchFamily="34" charset="-122"/>
+                <a:cs typeface="Consolas" pitchFamily="34" charset="-120"/>
+              </a:rPr>
+              <a:t>;</a:t>
+            </a:r>
+            <a:endParaRPr lang="en-US" sz="1300" dirty="0"/>
           </a:p>
         </p:txBody>
       </p:sp>
@@ -11572,7 +16010,7 @@
                 <a:ea typeface="Calibri" pitchFamily="34" charset="-122"/>
                 <a:cs typeface="Calibri" pitchFamily="34" charset="-120"/>
               </a:rPr>
-              <a:t>🔬  .NET wrapper in scope</a:t>
+              <a:t>🔬  .NET wrapper under investigation</a:t>
             </a:r>
             <a:endParaRPr lang="en-US" sz="1200" dirty="0"/>
           </a:p>
@@ -11666,7 +16104,7 @@
                 <a:ea typeface="Calibri" pitchFamily="34" charset="-122"/>
                 <a:cs typeface="Calibri" pitchFamily="34" charset="-120"/>
               </a:rPr>
-              <a:t>  →  one IChatClient shape, Apple today · Phi Silica next · Gemini in scope</a:t>
+              <a:t>  →  one IChatClient shape, Apple today · Phi Silica in progress · Gemini under investigation</a:t>
             </a:r>
             <a:endParaRPr lang="en-US" sz="1300" dirty="0"/>
           </a:p>
@@ -11888,7 +16326,7 @@
                 <a:ea typeface="Calibri" pitchFamily="34" charset="-122"/>
                 <a:cs typeface="Calibri" pitchFamily="34" charset="-120"/>
               </a:rPr>
-              <a:t>6 / 13</a:t>
+              <a:t>6 / 14</a:t>
             </a:r>
             <a:endParaRPr lang="en-US" sz="1000" dirty="0"/>
           </a:p>
@@ -12117,13 +16555,24 @@
           <a:lstStyle/>
           <a:p>
             <a:pPr indent="0" marL="0">
-              <a:spcAft>
-                <a:spcPts val="200"/>
-              </a:spcAft>
-              <a:buNone/>
-            </a:pPr>
-            <a:r>
-              <a:rPr lang="en-US" sz="1300" dirty="0">
+              <a:buNone/>
+            </a:pPr>
+            <a:r>
+              <a:rPr lang="en-US" sz="1200" dirty="0">
+                <a:solidFill>
+                  <a:srgbClr val="FB7185"/>
+                </a:solidFill>
+                <a:latin typeface="Consolas" pitchFamily="34" charset="0"/>
+                <a:ea typeface="Consolas" pitchFamily="34" charset="-122"/>
+                <a:cs typeface="Consolas" pitchFamily="34" charset="-120"/>
+              </a:rPr>
+              <a:t>using</a:t>
+            </a:r>
+            <a:pPr indent="0" marL="0">
+              <a:buNone/>
+            </a:pPr>
+            <a:r>
+              <a:rPr lang="en-US" sz="1200" dirty="0">
                 <a:solidFill>
                   <a:srgbClr val="FAF8FF"/>
                 </a:solidFill>
@@ -12131,19 +16580,13 @@
                 <a:ea typeface="Consolas" pitchFamily="34" charset="-122"/>
                 <a:cs typeface="Consolas" pitchFamily="34" charset="-120"/>
               </a:rPr>
-              <a:t>using Microsoft.Maui.Essentials.AI;</a:t>
-            </a:r>
-            <a:endParaRPr lang="en-US" sz="1300" dirty="0"/>
-          </a:p>
-          <a:p>
-            <a:pPr indent="0" marL="0">
-              <a:spcAft>
-                <a:spcPts val="200"/>
-              </a:spcAft>
-              <a:buNone/>
-            </a:pPr>
-            <a:r>
-              <a:rPr lang="en-US" sz="1300" dirty="0">
+              <a:t> </a:t>
+            </a:r>
+            <a:pPr indent="0" marL="0">
+              <a:buNone/>
+            </a:pPr>
+            <a:r>
+              <a:rPr lang="en-US" sz="1200" dirty="0">
                 <a:solidFill>
                   <a:srgbClr val="FAF8FF"/>
                 </a:solidFill>
@@ -12151,28 +16594,27 @@
                 <a:ea typeface="Consolas" pitchFamily="34" charset="-122"/>
                 <a:cs typeface="Consolas" pitchFamily="34" charset="-120"/>
               </a:rPr>
-              <a:t>using Microsoft.Extensions.AI;</a:t>
-            </a:r>
-            <a:endParaRPr lang="en-US" sz="1300" dirty="0"/>
-          </a:p>
-          <a:p>
-            <a:pPr indent="0" marL="0">
-              <a:spcAft>
-                <a:spcPts val="200"/>
-              </a:spcAft>
-              <a:buNone/>
-            </a:pPr>
-            <a:endParaRPr lang="en-US" sz="1300" dirty="0"/>
-          </a:p>
-          <a:p>
-            <a:pPr indent="0" marL="0">
-              <a:spcAft>
-                <a:spcPts val="200"/>
-              </a:spcAft>
-              <a:buNone/>
-            </a:pPr>
-            <a:r>
-              <a:rPr lang="en-US" sz="1300" dirty="0">
+              <a:t>Microsoft</a:t>
+            </a:r>
+            <a:pPr indent="0" marL="0">
+              <a:buNone/>
+            </a:pPr>
+            <a:r>
+              <a:rPr lang="en-US" sz="1200" dirty="0">
+                <a:solidFill>
+                  <a:srgbClr val="B8B5D9"/>
+                </a:solidFill>
+                <a:latin typeface="Consolas" pitchFamily="34" charset="0"/>
+                <a:ea typeface="Consolas" pitchFamily="34" charset="-122"/>
+                <a:cs typeface="Consolas" pitchFamily="34" charset="-120"/>
+              </a:rPr>
+              <a:t>.</a:t>
+            </a:r>
+            <a:pPr indent="0" marL="0">
+              <a:buNone/>
+            </a:pPr>
+            <a:r>
+              <a:rPr lang="en-US" sz="1200" dirty="0">
                 <a:solidFill>
                   <a:srgbClr val="FAF8FF"/>
                 </a:solidFill>
@@ -12180,28 +16622,27 @@
                 <a:ea typeface="Consolas" pitchFamily="34" charset="-122"/>
                 <a:cs typeface="Consolas" pitchFamily="34" charset="-120"/>
               </a:rPr>
-              <a:t>IChatClient chat = new AppleIntelligenceChatClient();</a:t>
-            </a:r>
-            <a:endParaRPr lang="en-US" sz="1300" dirty="0"/>
-          </a:p>
-          <a:p>
-            <a:pPr indent="0" marL="0">
-              <a:spcAft>
-                <a:spcPts val="200"/>
-              </a:spcAft>
-              <a:buNone/>
-            </a:pPr>
-            <a:endParaRPr lang="en-US" sz="1300" dirty="0"/>
-          </a:p>
-          <a:p>
-            <a:pPr indent="0" marL="0">
-              <a:spcAft>
-                <a:spcPts val="200"/>
-              </a:spcAft>
-              <a:buNone/>
-            </a:pPr>
-            <a:r>
-              <a:rPr lang="en-US" sz="1300" dirty="0">
+              <a:t>Maui</a:t>
+            </a:r>
+            <a:pPr indent="0" marL="0">
+              <a:buNone/>
+            </a:pPr>
+            <a:r>
+              <a:rPr lang="en-US" sz="1200" dirty="0">
+                <a:solidFill>
+                  <a:srgbClr val="B8B5D9"/>
+                </a:solidFill>
+                <a:latin typeface="Consolas" pitchFamily="34" charset="0"/>
+                <a:ea typeface="Consolas" pitchFamily="34" charset="-122"/>
+                <a:cs typeface="Consolas" pitchFamily="34" charset="-120"/>
+              </a:rPr>
+              <a:t>.</a:t>
+            </a:r>
+            <a:pPr indent="0" marL="0">
+              <a:buNone/>
+            </a:pPr>
+            <a:r>
+              <a:rPr lang="en-US" sz="1200" dirty="0">
                 <a:solidFill>
                   <a:srgbClr val="FAF8FF"/>
                 </a:solidFill>
@@ -12209,19 +16650,27 @@
                 <a:ea typeface="Consolas" pitchFamily="34" charset="-122"/>
                 <a:cs typeface="Consolas" pitchFamily="34" charset="-120"/>
               </a:rPr>
-              <a:t>var response = await chat.GetResponseAsync(</a:t>
-            </a:r>
-            <a:endParaRPr lang="en-US" sz="1300" dirty="0"/>
-          </a:p>
-          <a:p>
-            <a:pPr indent="0" marL="0">
-              <a:spcAft>
-                <a:spcPts val="200"/>
-              </a:spcAft>
-              <a:buNone/>
-            </a:pPr>
-            <a:r>
-              <a:rPr lang="en-US" sz="1300" dirty="0">
+              <a:t>Essentials</a:t>
+            </a:r>
+            <a:pPr indent="0" marL="0">
+              <a:buNone/>
+            </a:pPr>
+            <a:r>
+              <a:rPr lang="en-US" sz="1200" dirty="0">
+                <a:solidFill>
+                  <a:srgbClr val="B8B5D9"/>
+                </a:solidFill>
+                <a:latin typeface="Consolas" pitchFamily="34" charset="0"/>
+                <a:ea typeface="Consolas" pitchFamily="34" charset="-122"/>
+                <a:cs typeface="Consolas" pitchFamily="34" charset="-120"/>
+              </a:rPr>
+              <a:t>.</a:t>
+            </a:r>
+            <a:pPr indent="0" marL="0">
+              <a:buNone/>
+            </a:pPr>
+            <a:r>
+              <a:rPr lang="en-US" sz="1200" dirty="0">
                 <a:solidFill>
                   <a:srgbClr val="FAF8FF"/>
                 </a:solidFill>
@@ -12229,28 +16678,47 @@
                 <a:ea typeface="Consolas" pitchFamily="34" charset="-122"/>
                 <a:cs typeface="Consolas" pitchFamily="34" charset="-120"/>
               </a:rPr>
-              <a:t>    "Summarise the agenda for today.");</a:t>
-            </a:r>
-            <a:endParaRPr lang="en-US" sz="1300" dirty="0"/>
-          </a:p>
-          <a:p>
-            <a:pPr indent="0" marL="0">
-              <a:spcAft>
-                <a:spcPts val="200"/>
-              </a:spcAft>
-              <a:buNone/>
-            </a:pPr>
-            <a:endParaRPr lang="en-US" sz="1300" dirty="0"/>
-          </a:p>
-          <a:p>
-            <a:pPr indent="0" marL="0">
-              <a:spcAft>
-                <a:spcPts val="200"/>
-              </a:spcAft>
-              <a:buNone/>
-            </a:pPr>
-            <a:r>
-              <a:rPr lang="en-US" sz="1300" dirty="0">
+              <a:t>AI</a:t>
+            </a:r>
+            <a:pPr indent="0" marL="0">
+              <a:buNone/>
+            </a:pPr>
+            <a:r>
+              <a:rPr lang="en-US" sz="1200" dirty="0">
+                <a:solidFill>
+                  <a:srgbClr val="B8B5D9"/>
+                </a:solidFill>
+                <a:latin typeface="Consolas" pitchFamily="34" charset="0"/>
+                <a:ea typeface="Consolas" pitchFamily="34" charset="-122"/>
+                <a:cs typeface="Consolas" pitchFamily="34" charset="-120"/>
+              </a:rPr>
+              <a:t>;</a:t>
+            </a:r>
+            <a:pPr indent="0" marL="0">
+              <a:buNone/>
+            </a:pPr>
+            <a:endParaRPr lang="en-US" sz="1200" dirty="0"/>
+          </a:p>
+          <a:p>
+            <a:pPr indent="0" marL="0">
+              <a:buNone/>
+            </a:pPr>
+            <a:r>
+              <a:rPr lang="en-US" sz="1200" dirty="0">
+                <a:solidFill>
+                  <a:srgbClr val="FB7185"/>
+                </a:solidFill>
+                <a:latin typeface="Consolas" pitchFamily="34" charset="0"/>
+                <a:ea typeface="Consolas" pitchFamily="34" charset="-122"/>
+                <a:cs typeface="Consolas" pitchFamily="34" charset="-120"/>
+              </a:rPr>
+              <a:t>using</a:t>
+            </a:r>
+            <a:pPr indent="0" marL="0">
+              <a:buNone/>
+            </a:pPr>
+            <a:r>
+              <a:rPr lang="en-US" sz="1200" dirty="0">
                 <a:solidFill>
                   <a:srgbClr val="FAF8FF"/>
                 </a:solidFill>
@@ -12258,28 +16726,13 @@
                 <a:ea typeface="Consolas" pitchFamily="34" charset="-122"/>
                 <a:cs typeface="Consolas" pitchFamily="34" charset="-120"/>
               </a:rPr>
-              <a:t>Console.WriteLine(response.Text);</a:t>
-            </a:r>
-            <a:endParaRPr lang="en-US" sz="1300" dirty="0"/>
-          </a:p>
-          <a:p>
-            <a:pPr indent="0" marL="0">
-              <a:spcAft>
-                <a:spcPts val="200"/>
-              </a:spcAft>
-              <a:buNone/>
-            </a:pPr>
-            <a:endParaRPr lang="en-US" sz="1300" dirty="0"/>
-          </a:p>
-          <a:p>
-            <a:pPr indent="0" marL="0">
-              <a:spcAft>
-                <a:spcPts val="200"/>
-              </a:spcAft>
-              <a:buNone/>
-            </a:pPr>
-            <a:r>
-              <a:rPr lang="en-US" sz="1300" dirty="0">
+              <a:t> </a:t>
+            </a:r>
+            <a:pPr indent="0" marL="0">
+              <a:buNone/>
+            </a:pPr>
+            <a:r>
+              <a:rPr lang="en-US" sz="1200" dirty="0">
                 <a:solidFill>
                   <a:srgbClr val="FAF8FF"/>
                 </a:solidFill>
@@ -12287,21 +16740,607 @@
                 <a:ea typeface="Consolas" pitchFamily="34" charset="-122"/>
                 <a:cs typeface="Consolas" pitchFamily="34" charset="-120"/>
               </a:rPr>
+              <a:t>Microsoft</a:t>
+            </a:r>
+            <a:pPr indent="0" marL="0">
+              <a:buNone/>
+            </a:pPr>
+            <a:r>
+              <a:rPr lang="en-US" sz="1200" dirty="0">
+                <a:solidFill>
+                  <a:srgbClr val="B8B5D9"/>
+                </a:solidFill>
+                <a:latin typeface="Consolas" pitchFamily="34" charset="0"/>
+                <a:ea typeface="Consolas" pitchFamily="34" charset="-122"/>
+                <a:cs typeface="Consolas" pitchFamily="34" charset="-120"/>
+              </a:rPr>
+              <a:t>.</a:t>
+            </a:r>
+            <a:pPr indent="0" marL="0">
+              <a:buNone/>
+            </a:pPr>
+            <a:r>
+              <a:rPr lang="en-US" sz="1200" dirty="0">
+                <a:solidFill>
+                  <a:srgbClr val="FAF8FF"/>
+                </a:solidFill>
+                <a:latin typeface="Consolas" pitchFamily="34" charset="0"/>
+                <a:ea typeface="Consolas" pitchFamily="34" charset="-122"/>
+                <a:cs typeface="Consolas" pitchFamily="34" charset="-120"/>
+              </a:rPr>
+              <a:t>Extensions</a:t>
+            </a:r>
+            <a:pPr indent="0" marL="0">
+              <a:buNone/>
+            </a:pPr>
+            <a:r>
+              <a:rPr lang="en-US" sz="1200" dirty="0">
+                <a:solidFill>
+                  <a:srgbClr val="B8B5D9"/>
+                </a:solidFill>
+                <a:latin typeface="Consolas" pitchFamily="34" charset="0"/>
+                <a:ea typeface="Consolas" pitchFamily="34" charset="-122"/>
+                <a:cs typeface="Consolas" pitchFamily="34" charset="-120"/>
+              </a:rPr>
+              <a:t>.</a:t>
+            </a:r>
+            <a:pPr indent="0" marL="0">
+              <a:buNone/>
+            </a:pPr>
+            <a:r>
+              <a:rPr lang="en-US" sz="1200" dirty="0">
+                <a:solidFill>
+                  <a:srgbClr val="FAF8FF"/>
+                </a:solidFill>
+                <a:latin typeface="Consolas" pitchFamily="34" charset="0"/>
+                <a:ea typeface="Consolas" pitchFamily="34" charset="-122"/>
+                <a:cs typeface="Consolas" pitchFamily="34" charset="-120"/>
+              </a:rPr>
+              <a:t>AI</a:t>
+            </a:r>
+            <a:pPr indent="0" marL="0">
+              <a:buNone/>
+            </a:pPr>
+            <a:r>
+              <a:rPr lang="en-US" sz="1200" dirty="0">
+                <a:solidFill>
+                  <a:srgbClr val="B8B5D9"/>
+                </a:solidFill>
+                <a:latin typeface="Consolas" pitchFamily="34" charset="0"/>
+                <a:ea typeface="Consolas" pitchFamily="34" charset="-122"/>
+                <a:cs typeface="Consolas" pitchFamily="34" charset="-120"/>
+              </a:rPr>
+              <a:t>;</a:t>
+            </a:r>
+            <a:pPr indent="0" marL="0">
+              <a:buNone/>
+            </a:pPr>
+            <a:endParaRPr lang="en-US" sz="1200" dirty="0"/>
+          </a:p>
+          <a:p>
+            <a:pPr indent="0" marL="0">
+              <a:buNone/>
+            </a:pPr>
+            <a:endParaRPr lang="en-US" sz="1200" dirty="0"/>
+          </a:p>
+          <a:p>
+            <a:pPr indent="0" marL="0">
+              <a:buNone/>
+            </a:pPr>
+            <a:r>
+              <a:rPr lang="en-US" sz="1200" dirty="0">
+                <a:solidFill>
+                  <a:srgbClr val="A78BFA"/>
+                </a:solidFill>
+                <a:latin typeface="Consolas" pitchFamily="34" charset="0"/>
+                <a:ea typeface="Consolas" pitchFamily="34" charset="-122"/>
+                <a:cs typeface="Consolas" pitchFamily="34" charset="-120"/>
+              </a:rPr>
+              <a:t>IChatClient</a:t>
+            </a:r>
+            <a:pPr indent="0" marL="0">
+              <a:buNone/>
+            </a:pPr>
+            <a:r>
+              <a:rPr lang="en-US" sz="1200" dirty="0">
+                <a:solidFill>
+                  <a:srgbClr val="FAF8FF"/>
+                </a:solidFill>
+                <a:latin typeface="Consolas" pitchFamily="34" charset="0"/>
+                <a:ea typeface="Consolas" pitchFamily="34" charset="-122"/>
+                <a:cs typeface="Consolas" pitchFamily="34" charset="-120"/>
+              </a:rPr>
+              <a:t> chat </a:t>
+            </a:r>
+            <a:pPr indent="0" marL="0">
+              <a:buNone/>
+            </a:pPr>
+            <a:r>
+              <a:rPr lang="en-US" sz="1200" dirty="0">
+                <a:solidFill>
+                  <a:srgbClr val="CFCBED"/>
+                </a:solidFill>
+                <a:latin typeface="Consolas" pitchFamily="34" charset="0"/>
+                <a:ea typeface="Consolas" pitchFamily="34" charset="-122"/>
+                <a:cs typeface="Consolas" pitchFamily="34" charset="-120"/>
+              </a:rPr>
+              <a:t>=</a:t>
+            </a:r>
+            <a:pPr indent="0" marL="0">
+              <a:buNone/>
+            </a:pPr>
+            <a:r>
+              <a:rPr lang="en-US" sz="1200" dirty="0">
+                <a:solidFill>
+                  <a:srgbClr val="FAF8FF"/>
+                </a:solidFill>
+                <a:latin typeface="Consolas" pitchFamily="34" charset="0"/>
+                <a:ea typeface="Consolas" pitchFamily="34" charset="-122"/>
+                <a:cs typeface="Consolas" pitchFamily="34" charset="-120"/>
+              </a:rPr>
+              <a:t> </a:t>
+            </a:r>
+            <a:pPr indent="0" marL="0">
+              <a:buNone/>
+            </a:pPr>
+            <a:r>
+              <a:rPr lang="en-US" sz="1200" dirty="0">
+                <a:solidFill>
+                  <a:srgbClr val="FB7185"/>
+                </a:solidFill>
+                <a:latin typeface="Consolas" pitchFamily="34" charset="0"/>
+                <a:ea typeface="Consolas" pitchFamily="34" charset="-122"/>
+                <a:cs typeface="Consolas" pitchFamily="34" charset="-120"/>
+              </a:rPr>
+              <a:t>new</a:t>
+            </a:r>
+            <a:pPr indent="0" marL="0">
+              <a:buNone/>
+            </a:pPr>
+            <a:r>
+              <a:rPr lang="en-US" sz="1200" dirty="0">
+                <a:solidFill>
+                  <a:srgbClr val="FAF8FF"/>
+                </a:solidFill>
+                <a:latin typeface="Consolas" pitchFamily="34" charset="0"/>
+                <a:ea typeface="Consolas" pitchFamily="34" charset="-122"/>
+                <a:cs typeface="Consolas" pitchFamily="34" charset="-120"/>
+              </a:rPr>
+              <a:t> </a:t>
+            </a:r>
+            <a:pPr indent="0" marL="0">
+              <a:buNone/>
+            </a:pPr>
+            <a:r>
+              <a:rPr lang="en-US" sz="1200" dirty="0">
+                <a:solidFill>
+                  <a:srgbClr val="FAF8FF"/>
+                </a:solidFill>
+                <a:latin typeface="Consolas" pitchFamily="34" charset="0"/>
+                <a:ea typeface="Consolas" pitchFamily="34" charset="-122"/>
+                <a:cs typeface="Consolas" pitchFamily="34" charset="-120"/>
+              </a:rPr>
+              <a:t>AppleIntelligenceChatClient</a:t>
+            </a:r>
+            <a:pPr indent="0" marL="0">
+              <a:buNone/>
+            </a:pPr>
+            <a:r>
+              <a:rPr lang="en-US" sz="1200" dirty="0">
+                <a:solidFill>
+                  <a:srgbClr val="B8B5D9"/>
+                </a:solidFill>
+                <a:latin typeface="Consolas" pitchFamily="34" charset="0"/>
+                <a:ea typeface="Consolas" pitchFamily="34" charset="-122"/>
+                <a:cs typeface="Consolas" pitchFamily="34" charset="-120"/>
+              </a:rPr>
+              <a:t>(</a:t>
+            </a:r>
+            <a:pPr indent="0" marL="0">
+              <a:buNone/>
+            </a:pPr>
+            <a:r>
+              <a:rPr lang="en-US" sz="1200" dirty="0">
+                <a:solidFill>
+                  <a:srgbClr val="B8B5D9"/>
+                </a:solidFill>
+                <a:latin typeface="Consolas" pitchFamily="34" charset="0"/>
+                <a:ea typeface="Consolas" pitchFamily="34" charset="-122"/>
+                <a:cs typeface="Consolas" pitchFamily="34" charset="-120"/>
+              </a:rPr>
+              <a:t>)</a:t>
+            </a:r>
+            <a:pPr indent="0" marL="0">
+              <a:buNone/>
+            </a:pPr>
+            <a:r>
+              <a:rPr lang="en-US" sz="1200" dirty="0">
+                <a:solidFill>
+                  <a:srgbClr val="B8B5D9"/>
+                </a:solidFill>
+                <a:latin typeface="Consolas" pitchFamily="34" charset="0"/>
+                <a:ea typeface="Consolas" pitchFamily="34" charset="-122"/>
+                <a:cs typeface="Consolas" pitchFamily="34" charset="-120"/>
+              </a:rPr>
+              <a:t>;</a:t>
+            </a:r>
+            <a:pPr indent="0" marL="0">
+              <a:buNone/>
+            </a:pPr>
+            <a:endParaRPr lang="en-US" sz="1200" dirty="0"/>
+          </a:p>
+          <a:p>
+            <a:pPr indent="0" marL="0">
+              <a:buNone/>
+            </a:pPr>
+            <a:endParaRPr lang="en-US" sz="1200" dirty="0"/>
+          </a:p>
+          <a:p>
+            <a:pPr indent="0" marL="0">
+              <a:buNone/>
+            </a:pPr>
+            <a:r>
+              <a:rPr lang="en-US" sz="1200" dirty="0">
+                <a:solidFill>
+                  <a:srgbClr val="FB7185"/>
+                </a:solidFill>
+                <a:latin typeface="Consolas" pitchFamily="34" charset="0"/>
+                <a:ea typeface="Consolas" pitchFamily="34" charset="-122"/>
+                <a:cs typeface="Consolas" pitchFamily="34" charset="-120"/>
+              </a:rPr>
+              <a:t>var</a:t>
+            </a:r>
+            <a:pPr indent="0" marL="0">
+              <a:buNone/>
+            </a:pPr>
+            <a:r>
+              <a:rPr lang="en-US" sz="1200" dirty="0">
+                <a:solidFill>
+                  <a:srgbClr val="FAF8FF"/>
+                </a:solidFill>
+                <a:latin typeface="Consolas" pitchFamily="34" charset="0"/>
+                <a:ea typeface="Consolas" pitchFamily="34" charset="-122"/>
+                <a:cs typeface="Consolas" pitchFamily="34" charset="-120"/>
+              </a:rPr>
+              <a:t> response </a:t>
+            </a:r>
+            <a:pPr indent="0" marL="0">
+              <a:buNone/>
+            </a:pPr>
+            <a:r>
+              <a:rPr lang="en-US" sz="1200" dirty="0">
+                <a:solidFill>
+                  <a:srgbClr val="CFCBED"/>
+                </a:solidFill>
+                <a:latin typeface="Consolas" pitchFamily="34" charset="0"/>
+                <a:ea typeface="Consolas" pitchFamily="34" charset="-122"/>
+                <a:cs typeface="Consolas" pitchFamily="34" charset="-120"/>
+              </a:rPr>
+              <a:t>=</a:t>
+            </a:r>
+            <a:pPr indent="0" marL="0">
+              <a:buNone/>
+            </a:pPr>
+            <a:r>
+              <a:rPr lang="en-US" sz="1200" dirty="0">
+                <a:solidFill>
+                  <a:srgbClr val="FAF8FF"/>
+                </a:solidFill>
+                <a:latin typeface="Consolas" pitchFamily="34" charset="0"/>
+                <a:ea typeface="Consolas" pitchFamily="34" charset="-122"/>
+                <a:cs typeface="Consolas" pitchFamily="34" charset="-120"/>
+              </a:rPr>
+              <a:t> </a:t>
+            </a:r>
+            <a:pPr indent="0" marL="0">
+              <a:buNone/>
+            </a:pPr>
+            <a:r>
+              <a:rPr lang="en-US" sz="1200" dirty="0">
+                <a:solidFill>
+                  <a:srgbClr val="FB7185"/>
+                </a:solidFill>
+                <a:latin typeface="Consolas" pitchFamily="34" charset="0"/>
+                <a:ea typeface="Consolas" pitchFamily="34" charset="-122"/>
+                <a:cs typeface="Consolas" pitchFamily="34" charset="-120"/>
+              </a:rPr>
+              <a:t>await</a:t>
+            </a:r>
+            <a:pPr indent="0" marL="0">
+              <a:buNone/>
+            </a:pPr>
+            <a:r>
+              <a:rPr lang="en-US" sz="1200" dirty="0">
+                <a:solidFill>
+                  <a:srgbClr val="FAF8FF"/>
+                </a:solidFill>
+                <a:latin typeface="Consolas" pitchFamily="34" charset="0"/>
+                <a:ea typeface="Consolas" pitchFamily="34" charset="-122"/>
+                <a:cs typeface="Consolas" pitchFamily="34" charset="-120"/>
+              </a:rPr>
+              <a:t> chat</a:t>
+            </a:r>
+            <a:pPr indent="0" marL="0">
+              <a:buNone/>
+            </a:pPr>
+            <a:r>
+              <a:rPr lang="en-US" sz="1200" dirty="0">
+                <a:solidFill>
+                  <a:srgbClr val="B8B5D9"/>
+                </a:solidFill>
+                <a:latin typeface="Consolas" pitchFamily="34" charset="0"/>
+                <a:ea typeface="Consolas" pitchFamily="34" charset="-122"/>
+                <a:cs typeface="Consolas" pitchFamily="34" charset="-120"/>
+              </a:rPr>
+              <a:t>.</a:t>
+            </a:r>
+            <a:pPr indent="0" marL="0">
+              <a:buNone/>
+            </a:pPr>
+            <a:r>
+              <a:rPr lang="en-US" sz="1200" dirty="0">
+                <a:solidFill>
+                  <a:srgbClr val="86EFAC"/>
+                </a:solidFill>
+                <a:latin typeface="Consolas" pitchFamily="34" charset="0"/>
+                <a:ea typeface="Consolas" pitchFamily="34" charset="-122"/>
+                <a:cs typeface="Consolas" pitchFamily="34" charset="-120"/>
+              </a:rPr>
+              <a:t>GetResponseAsync</a:t>
+            </a:r>
+            <a:pPr indent="0" marL="0">
+              <a:buNone/>
+            </a:pPr>
+            <a:r>
+              <a:rPr lang="en-US" sz="1200" dirty="0">
+                <a:solidFill>
+                  <a:srgbClr val="B8B5D9"/>
+                </a:solidFill>
+                <a:latin typeface="Consolas" pitchFamily="34" charset="0"/>
+                <a:ea typeface="Consolas" pitchFamily="34" charset="-122"/>
+                <a:cs typeface="Consolas" pitchFamily="34" charset="-120"/>
+              </a:rPr>
+              <a:t>(</a:t>
+            </a:r>
+            <a:pPr indent="0" marL="0">
+              <a:buNone/>
+            </a:pPr>
+            <a:endParaRPr lang="en-US" sz="1200" dirty="0"/>
+          </a:p>
+          <a:p>
+            <a:pPr indent="0" marL="0">
+              <a:buNone/>
+            </a:pPr>
+            <a:r>
+              <a:rPr lang="en-US" sz="1200" dirty="0">
+                <a:solidFill>
+                  <a:srgbClr val="FAF8FF"/>
+                </a:solidFill>
+                <a:latin typeface="Consolas" pitchFamily="34" charset="0"/>
+                <a:ea typeface="Consolas" pitchFamily="34" charset="-122"/>
+                <a:cs typeface="Consolas" pitchFamily="34" charset="-120"/>
+              </a:rPr>
+              <a:t>    </a:t>
+            </a:r>
+            <a:pPr indent="0" marL="0">
+              <a:buNone/>
+            </a:pPr>
+            <a:r>
+              <a:rPr lang="en-US" sz="1200" dirty="0">
+                <a:solidFill>
+                  <a:srgbClr val="FBBF24"/>
+                </a:solidFill>
+                <a:latin typeface="Consolas" pitchFamily="34" charset="0"/>
+                <a:ea typeface="Consolas" pitchFamily="34" charset="-122"/>
+                <a:cs typeface="Consolas" pitchFamily="34" charset="-120"/>
+              </a:rPr>
+              <a:t>"Summarise the agenda for today."</a:t>
+            </a:r>
+            <a:pPr indent="0" marL="0">
+              <a:buNone/>
+            </a:pPr>
+            <a:r>
+              <a:rPr lang="en-US" sz="1200" dirty="0">
+                <a:solidFill>
+                  <a:srgbClr val="B8B5D9"/>
+                </a:solidFill>
+                <a:latin typeface="Consolas" pitchFamily="34" charset="0"/>
+                <a:ea typeface="Consolas" pitchFamily="34" charset="-122"/>
+                <a:cs typeface="Consolas" pitchFamily="34" charset="-120"/>
+              </a:rPr>
+              <a:t>)</a:t>
+            </a:r>
+            <a:pPr indent="0" marL="0">
+              <a:buNone/>
+            </a:pPr>
+            <a:r>
+              <a:rPr lang="en-US" sz="1200" dirty="0">
+                <a:solidFill>
+                  <a:srgbClr val="B8B5D9"/>
+                </a:solidFill>
+                <a:latin typeface="Consolas" pitchFamily="34" charset="0"/>
+                <a:ea typeface="Consolas" pitchFamily="34" charset="-122"/>
+                <a:cs typeface="Consolas" pitchFamily="34" charset="-120"/>
+              </a:rPr>
+              <a:t>;</a:t>
+            </a:r>
+            <a:pPr indent="0" marL="0">
+              <a:buNone/>
+            </a:pPr>
+            <a:endParaRPr lang="en-US" sz="1200" dirty="0"/>
+          </a:p>
+          <a:p>
+            <a:pPr indent="0" marL="0">
+              <a:buNone/>
+            </a:pPr>
+            <a:endParaRPr lang="en-US" sz="1200" dirty="0"/>
+          </a:p>
+          <a:p>
+            <a:pPr indent="0" marL="0">
+              <a:buNone/>
+            </a:pPr>
+            <a:r>
+              <a:rPr lang="en-US" sz="1200" dirty="0">
+                <a:solidFill>
+                  <a:srgbClr val="FAF8FF"/>
+                </a:solidFill>
+                <a:latin typeface="Consolas" pitchFamily="34" charset="0"/>
+                <a:ea typeface="Consolas" pitchFamily="34" charset="-122"/>
+                <a:cs typeface="Consolas" pitchFamily="34" charset="-120"/>
+              </a:rPr>
+              <a:t>Console</a:t>
+            </a:r>
+            <a:pPr indent="0" marL="0">
+              <a:buNone/>
+            </a:pPr>
+            <a:r>
+              <a:rPr lang="en-US" sz="1200" dirty="0">
+                <a:solidFill>
+                  <a:srgbClr val="B8B5D9"/>
+                </a:solidFill>
+                <a:latin typeface="Consolas" pitchFamily="34" charset="0"/>
+                <a:ea typeface="Consolas" pitchFamily="34" charset="-122"/>
+                <a:cs typeface="Consolas" pitchFamily="34" charset="-120"/>
+              </a:rPr>
+              <a:t>.</a:t>
+            </a:r>
+            <a:pPr indent="0" marL="0">
+              <a:buNone/>
+            </a:pPr>
+            <a:r>
+              <a:rPr lang="en-US" sz="1200" dirty="0">
+                <a:solidFill>
+                  <a:srgbClr val="86EFAC"/>
+                </a:solidFill>
+                <a:latin typeface="Consolas" pitchFamily="34" charset="0"/>
+                <a:ea typeface="Consolas" pitchFamily="34" charset="-122"/>
+                <a:cs typeface="Consolas" pitchFamily="34" charset="-120"/>
+              </a:rPr>
+              <a:t>WriteLine</a:t>
+            </a:r>
+            <a:pPr indent="0" marL="0">
+              <a:buNone/>
+            </a:pPr>
+            <a:r>
+              <a:rPr lang="en-US" sz="1200" dirty="0">
+                <a:solidFill>
+                  <a:srgbClr val="B8B5D9"/>
+                </a:solidFill>
+                <a:latin typeface="Consolas" pitchFamily="34" charset="0"/>
+                <a:ea typeface="Consolas" pitchFamily="34" charset="-122"/>
+                <a:cs typeface="Consolas" pitchFamily="34" charset="-120"/>
+              </a:rPr>
+              <a:t>(</a:t>
+            </a:r>
+            <a:pPr indent="0" marL="0">
+              <a:buNone/>
+            </a:pPr>
+            <a:r>
+              <a:rPr lang="en-US" sz="1200" dirty="0">
+                <a:solidFill>
+                  <a:srgbClr val="FAF8FF"/>
+                </a:solidFill>
+                <a:latin typeface="Consolas" pitchFamily="34" charset="0"/>
+                <a:ea typeface="Consolas" pitchFamily="34" charset="-122"/>
+                <a:cs typeface="Consolas" pitchFamily="34" charset="-120"/>
+              </a:rPr>
+              <a:t>response</a:t>
+            </a:r>
+            <a:pPr indent="0" marL="0">
+              <a:buNone/>
+            </a:pPr>
+            <a:r>
+              <a:rPr lang="en-US" sz="1200" dirty="0">
+                <a:solidFill>
+                  <a:srgbClr val="B8B5D9"/>
+                </a:solidFill>
+                <a:latin typeface="Consolas" pitchFamily="34" charset="0"/>
+                <a:ea typeface="Consolas" pitchFamily="34" charset="-122"/>
+                <a:cs typeface="Consolas" pitchFamily="34" charset="-120"/>
+              </a:rPr>
+              <a:t>.</a:t>
+            </a:r>
+            <a:pPr indent="0" marL="0">
+              <a:buNone/>
+            </a:pPr>
+            <a:r>
+              <a:rPr lang="en-US" sz="1200" dirty="0">
+                <a:solidFill>
+                  <a:srgbClr val="FAF8FF"/>
+                </a:solidFill>
+                <a:latin typeface="Consolas" pitchFamily="34" charset="0"/>
+                <a:ea typeface="Consolas" pitchFamily="34" charset="-122"/>
+                <a:cs typeface="Consolas" pitchFamily="34" charset="-120"/>
+              </a:rPr>
+              <a:t>Text</a:t>
+            </a:r>
+            <a:pPr indent="0" marL="0">
+              <a:buNone/>
+            </a:pPr>
+            <a:r>
+              <a:rPr lang="en-US" sz="1200" dirty="0">
+                <a:solidFill>
+                  <a:srgbClr val="B8B5D9"/>
+                </a:solidFill>
+                <a:latin typeface="Consolas" pitchFamily="34" charset="0"/>
+                <a:ea typeface="Consolas" pitchFamily="34" charset="-122"/>
+                <a:cs typeface="Consolas" pitchFamily="34" charset="-120"/>
+              </a:rPr>
+              <a:t>)</a:t>
+            </a:r>
+            <a:pPr indent="0" marL="0">
+              <a:buNone/>
+            </a:pPr>
+            <a:r>
+              <a:rPr lang="en-US" sz="1200" dirty="0">
+                <a:solidFill>
+                  <a:srgbClr val="B8B5D9"/>
+                </a:solidFill>
+                <a:latin typeface="Consolas" pitchFamily="34" charset="0"/>
+                <a:ea typeface="Consolas" pitchFamily="34" charset="-122"/>
+                <a:cs typeface="Consolas" pitchFamily="34" charset="-120"/>
+              </a:rPr>
+              <a:t>;</a:t>
+            </a:r>
+            <a:pPr indent="0" marL="0">
+              <a:buNone/>
+            </a:pPr>
+            <a:endParaRPr lang="en-US" sz="1200" dirty="0"/>
+          </a:p>
+          <a:p>
+            <a:pPr indent="0" marL="0">
+              <a:buNone/>
+            </a:pPr>
+            <a:endParaRPr lang="en-US" sz="1200" dirty="0"/>
+          </a:p>
+          <a:p>
+            <a:pPr indent="0" marL="0">
+              <a:buNone/>
+            </a:pPr>
+            <a:r>
+              <a:rPr lang="en-US" sz="1200" i="1" dirty="0">
+                <a:solidFill>
+                  <a:srgbClr val="8B88B5"/>
+                </a:solidFill>
+                <a:latin typeface="Consolas" pitchFamily="34" charset="0"/>
+                <a:ea typeface="Consolas" pitchFamily="34" charset="-122"/>
+                <a:cs typeface="Consolas" pitchFamily="34" charset="-120"/>
+              </a:rPr>
               <a:t>// ✈️  Works in airplane mode</a:t>
             </a:r>
-            <a:endParaRPr lang="en-US" sz="1300" dirty="0"/>
-          </a:p>
-          <a:p>
-            <a:pPr indent="0" marL="0">
-              <a:spcAft>
-                <a:spcPts val="200"/>
-              </a:spcAft>
-              <a:buNone/>
-            </a:pPr>
-            <a:r>
-              <a:rPr lang="en-US" sz="1300" dirty="0">
-                <a:solidFill>
-                  <a:srgbClr val="FAF8FF"/>
+            <a:pPr indent="0" marL="0">
+              <a:buNone/>
+            </a:pPr>
+            <a:endParaRPr lang="en-US" sz="1200" dirty="0"/>
+          </a:p>
+          <a:p>
+            <a:pPr indent="0" marL="0">
+              <a:buNone/>
+            </a:pPr>
+            <a:r>
+              <a:rPr lang="en-US" sz="1200" i="1" dirty="0">
+                <a:solidFill>
+                  <a:srgbClr val="8B88B5"/>
                 </a:solidFill>
                 <a:latin typeface="Consolas" pitchFamily="34" charset="0"/>
                 <a:ea typeface="Consolas" pitchFamily="34" charset="-122"/>
@@ -12309,19 +17348,19 @@
               </a:rPr>
               <a:t>// 🆓  No API key, no per-token cost</a:t>
             </a:r>
-            <a:endParaRPr lang="en-US" sz="1300" dirty="0"/>
-          </a:p>
-          <a:p>
-            <a:pPr indent="0" marL="0">
-              <a:spcAft>
-                <a:spcPts val="200"/>
-              </a:spcAft>
-              <a:buNone/>
-            </a:pPr>
-            <a:r>
-              <a:rPr lang="en-US" sz="1300" dirty="0">
-                <a:solidFill>
-                  <a:srgbClr val="FAF8FF"/>
+            <a:pPr indent="0" marL="0">
+              <a:buNone/>
+            </a:pPr>
+            <a:endParaRPr lang="en-US" sz="1200" dirty="0"/>
+          </a:p>
+          <a:p>
+            <a:pPr indent="0" marL="0">
+              <a:buNone/>
+            </a:pPr>
+            <a:r>
+              <a:rPr lang="en-US" sz="1200" i="1" dirty="0">
+                <a:solidFill>
+                  <a:srgbClr val="8B88B5"/>
                 </a:solidFill>
                 <a:latin typeface="Consolas" pitchFamily="34" charset="0"/>
                 <a:ea typeface="Consolas" pitchFamily="34" charset="-122"/>
@@ -12329,7 +17368,7 @@
               </a:rPr>
               <a:t>// 🔒  Data never leaves the device</a:t>
             </a:r>
-            <a:endParaRPr lang="en-US" sz="1300" dirty="0"/>
+            <a:endParaRPr lang="en-US" sz="1200" dirty="0"/>
           </a:p>
         </p:txBody>
       </p:sp>
@@ -13781,7 +18820,7 @@
                 <a:ea typeface="Calibri" pitchFamily="34" charset="-122"/>
                 <a:cs typeface="Calibri" pitchFamily="34" charset="-120"/>
               </a:rPr>
-              <a:t>8 / 13</a:t>
+              <a:t>8 / 14</a:t>
             </a:r>
             <a:endParaRPr lang="en-US" sz="1000" dirty="0"/>
           </a:p>
@@ -14010,13 +19049,44 @@
           <a:lstStyle/>
           <a:p>
             <a:pPr indent="0" marL="0">
-              <a:spcAft>
-                <a:spcPts val="200"/>
-              </a:spcAft>
-              <a:buNone/>
-            </a:pPr>
-            <a:r>
-              <a:rPr lang="en-US" sz="1200" dirty="0">
+              <a:buNone/>
+            </a:pPr>
+            <a:r>
+              <a:rPr lang="en-US" sz="1100" i="1" dirty="0">
+                <a:solidFill>
+                  <a:srgbClr val="8B88B5"/>
+                </a:solidFill>
+                <a:latin typeface="Consolas" pitchFamily="34" charset="0"/>
+                <a:ea typeface="Consolas" pitchFamily="34" charset="-122"/>
+                <a:cs typeface="Consolas" pitchFamily="34" charset="-120"/>
+              </a:rPr>
+              <a:t># Start a local model from the CLI</a:t>
+            </a:r>
+            <a:pPr indent="0" marL="0">
+              <a:buNone/>
+            </a:pPr>
+            <a:endParaRPr lang="en-US" sz="1100" dirty="0"/>
+          </a:p>
+          <a:p>
+            <a:pPr indent="0" marL="0">
+              <a:buNone/>
+            </a:pPr>
+            <a:r>
+              <a:rPr lang="en-US" sz="1100" dirty="0">
+                <a:solidFill>
+                  <a:srgbClr val="CFCBED"/>
+                </a:solidFill>
+                <a:latin typeface="Consolas" pitchFamily="34" charset="0"/>
+                <a:ea typeface="Consolas" pitchFamily="34" charset="-122"/>
+                <a:cs typeface="Consolas" pitchFamily="34" charset="-120"/>
+              </a:rPr>
+              <a:t>&gt;</a:t>
+            </a:r>
+            <a:pPr indent="0" marL="0">
+              <a:buNone/>
+            </a:pPr>
+            <a:r>
+              <a:rPr lang="en-US" sz="1100" dirty="0">
                 <a:solidFill>
                   <a:srgbClr val="FAF8FF"/>
                 </a:solidFill>
@@ -14024,19 +19094,59 @@
                 <a:ea typeface="Consolas" pitchFamily="34" charset="-122"/>
                 <a:cs typeface="Consolas" pitchFamily="34" charset="-120"/>
               </a:rPr>
-              <a:t># Start a local model from the CLI</a:t>
-            </a:r>
-            <a:endParaRPr lang="en-US" sz="1200" dirty="0"/>
-          </a:p>
-          <a:p>
-            <a:pPr indent="0" marL="0">
-              <a:spcAft>
-                <a:spcPts val="200"/>
-              </a:spcAft>
-              <a:buNone/>
-            </a:pPr>
-            <a:r>
-              <a:rPr lang="en-US" sz="1200" dirty="0">
+              <a:t> foundry model run phi-4-mini</a:t>
+            </a:r>
+            <a:pPr indent="0" marL="0">
+              <a:buNone/>
+            </a:pPr>
+            <a:endParaRPr lang="en-US" sz="1100" dirty="0"/>
+          </a:p>
+          <a:p>
+            <a:pPr indent="0" marL="0">
+              <a:buNone/>
+            </a:pPr>
+            <a:endParaRPr lang="en-US" sz="1100" dirty="0"/>
+          </a:p>
+          <a:p>
+            <a:pPr indent="0" marL="0">
+              <a:buNone/>
+            </a:pPr>
+            <a:r>
+              <a:rPr lang="en-US" sz="1100" i="1" dirty="0">
+                <a:solidFill>
+                  <a:srgbClr val="8B88B5"/>
+                </a:solidFill>
+                <a:latin typeface="Consolas" pitchFamily="34" charset="0"/>
+                <a:ea typeface="Consolas" pitchFamily="34" charset="-122"/>
+                <a:cs typeface="Consolas" pitchFamily="34" charset="-120"/>
+              </a:rPr>
+              <a:t>// Manager owns the dynamic endpoint + key</a:t>
+            </a:r>
+            <a:pPr indent="0" marL="0">
+              <a:buNone/>
+            </a:pPr>
+            <a:endParaRPr lang="en-US" sz="1100" dirty="0"/>
+          </a:p>
+          <a:p>
+            <a:pPr indent="0" marL="0">
+              <a:buNone/>
+            </a:pPr>
+            <a:r>
+              <a:rPr lang="en-US" sz="1100" dirty="0">
+                <a:solidFill>
+                  <a:srgbClr val="FB7185"/>
+                </a:solidFill>
+                <a:latin typeface="Consolas" pitchFamily="34" charset="0"/>
+                <a:ea typeface="Consolas" pitchFamily="34" charset="-122"/>
+                <a:cs typeface="Consolas" pitchFamily="34" charset="-120"/>
+              </a:rPr>
+              <a:t>var</a:t>
+            </a:r>
+            <a:pPr indent="0" marL="0">
+              <a:buNone/>
+            </a:pPr>
+            <a:r>
+              <a:rPr lang="en-US" sz="1100" dirty="0">
                 <a:solidFill>
                   <a:srgbClr val="FAF8FF"/>
                 </a:solidFill>
@@ -14044,28 +19154,27 @@
                 <a:ea typeface="Consolas" pitchFamily="34" charset="-122"/>
                 <a:cs typeface="Consolas" pitchFamily="34" charset="-120"/>
               </a:rPr>
-              <a:t>&gt; foundry model run phi-4-mini</a:t>
-            </a:r>
-            <a:endParaRPr lang="en-US" sz="1200" dirty="0"/>
-          </a:p>
-          <a:p>
-            <a:pPr indent="0" marL="0">
-              <a:spcAft>
-                <a:spcPts val="200"/>
-              </a:spcAft>
-              <a:buNone/>
-            </a:pPr>
-            <a:endParaRPr lang="en-US" sz="1200" dirty="0"/>
-          </a:p>
-          <a:p>
-            <a:pPr indent="0" marL="0">
-              <a:spcAft>
-                <a:spcPts val="200"/>
-              </a:spcAft>
-              <a:buNone/>
-            </a:pPr>
-            <a:r>
-              <a:rPr lang="en-US" sz="1200" dirty="0">
+              <a:t> manager </a:t>
+            </a:r>
+            <a:pPr indent="0" marL="0">
+              <a:buNone/>
+            </a:pPr>
+            <a:r>
+              <a:rPr lang="en-US" sz="1100" dirty="0">
+                <a:solidFill>
+                  <a:srgbClr val="CFCBED"/>
+                </a:solidFill>
+                <a:latin typeface="Consolas" pitchFamily="34" charset="0"/>
+                <a:ea typeface="Consolas" pitchFamily="34" charset="-122"/>
+                <a:cs typeface="Consolas" pitchFamily="34" charset="-120"/>
+              </a:rPr>
+              <a:t>=</a:t>
+            </a:r>
+            <a:pPr indent="0" marL="0">
+              <a:buNone/>
+            </a:pPr>
+            <a:r>
+              <a:rPr lang="en-US" sz="1100" dirty="0">
                 <a:solidFill>
                   <a:srgbClr val="FAF8FF"/>
                 </a:solidFill>
@@ -14073,19 +19182,27 @@
                 <a:ea typeface="Consolas" pitchFamily="34" charset="-122"/>
                 <a:cs typeface="Consolas" pitchFamily="34" charset="-120"/>
               </a:rPr>
-              <a:t>// Manager owns the dynamic endpoint + key</a:t>
-            </a:r>
-            <a:endParaRPr lang="en-US" sz="1200" dirty="0"/>
-          </a:p>
-          <a:p>
-            <a:pPr indent="0" marL="0">
-              <a:spcAft>
-                <a:spcPts val="200"/>
-              </a:spcAft>
-              <a:buNone/>
-            </a:pPr>
-            <a:r>
-              <a:rPr lang="en-US" sz="1200" dirty="0">
+              <a:t> </a:t>
+            </a:r>
+            <a:pPr indent="0" marL="0">
+              <a:buNone/>
+            </a:pPr>
+            <a:r>
+              <a:rPr lang="en-US" sz="1100" dirty="0">
+                <a:solidFill>
+                  <a:srgbClr val="FB7185"/>
+                </a:solidFill>
+                <a:latin typeface="Consolas" pitchFamily="34" charset="0"/>
+                <a:ea typeface="Consolas" pitchFamily="34" charset="-122"/>
+                <a:cs typeface="Consolas" pitchFamily="34" charset="-120"/>
+              </a:rPr>
+              <a:t>await</a:t>
+            </a:r>
+            <a:pPr indent="0" marL="0">
+              <a:buNone/>
+            </a:pPr>
+            <a:r>
+              <a:rPr lang="en-US" sz="1100" dirty="0">
                 <a:solidFill>
                   <a:srgbClr val="FAF8FF"/>
                 </a:solidFill>
@@ -14093,19 +19210,19 @@
                 <a:ea typeface="Consolas" pitchFamily="34" charset="-122"/>
                 <a:cs typeface="Consolas" pitchFamily="34" charset="-120"/>
               </a:rPr>
-              <a:t>var manager = await FoundryLocalManager</a:t>
-            </a:r>
-            <a:endParaRPr lang="en-US" sz="1200" dirty="0"/>
-          </a:p>
-          <a:p>
-            <a:pPr indent="0" marL="0">
-              <a:spcAft>
-                <a:spcPts val="200"/>
-              </a:spcAft>
-              <a:buNone/>
-            </a:pPr>
-            <a:r>
-              <a:rPr lang="en-US" sz="1200" dirty="0">
+              <a:t> FoundryLocalManager</a:t>
+            </a:r>
+            <a:pPr indent="0" marL="0">
+              <a:buNone/>
+            </a:pPr>
+            <a:endParaRPr lang="en-US" sz="1100" dirty="0"/>
+          </a:p>
+          <a:p>
+            <a:pPr indent="0" marL="0">
+              <a:buNone/>
+            </a:pPr>
+            <a:r>
+              <a:rPr lang="en-US" sz="1100" dirty="0">
                 <a:solidFill>
                   <a:srgbClr val="FAF8FF"/>
                 </a:solidFill>
@@ -14113,28 +19230,123 @@
                 <a:ea typeface="Consolas" pitchFamily="34" charset="-122"/>
                 <a:cs typeface="Consolas" pitchFamily="34" charset="-120"/>
               </a:rPr>
-              <a:t>    .StartModelAsync("phi-4-mini");</a:t>
-            </a:r>
-            <a:endParaRPr lang="en-US" sz="1200" dirty="0"/>
-          </a:p>
-          <a:p>
-            <a:pPr indent="0" marL="0">
-              <a:spcAft>
-                <a:spcPts val="200"/>
-              </a:spcAft>
-              <a:buNone/>
-            </a:pPr>
-            <a:endParaRPr lang="en-US" sz="1200" dirty="0"/>
-          </a:p>
-          <a:p>
-            <a:pPr indent="0" marL="0">
-              <a:spcAft>
-                <a:spcPts val="200"/>
-              </a:spcAft>
-              <a:buNone/>
-            </a:pPr>
-            <a:r>
-              <a:rPr lang="en-US" sz="1200" dirty="0">
+              <a:t>    </a:t>
+            </a:r>
+            <a:pPr indent="0" marL="0">
+              <a:buNone/>
+            </a:pPr>
+            <a:r>
+              <a:rPr lang="en-US" sz="1100" dirty="0">
+                <a:solidFill>
+                  <a:srgbClr val="B8B5D9"/>
+                </a:solidFill>
+                <a:latin typeface="Consolas" pitchFamily="34" charset="0"/>
+                <a:ea typeface="Consolas" pitchFamily="34" charset="-122"/>
+                <a:cs typeface="Consolas" pitchFamily="34" charset="-120"/>
+              </a:rPr>
+              <a:t>.</a:t>
+            </a:r>
+            <a:pPr indent="0" marL="0">
+              <a:buNone/>
+            </a:pPr>
+            <a:r>
+              <a:rPr lang="en-US" sz="1100" dirty="0">
+                <a:solidFill>
+                  <a:srgbClr val="86EFAC"/>
+                </a:solidFill>
+                <a:latin typeface="Consolas" pitchFamily="34" charset="0"/>
+                <a:ea typeface="Consolas" pitchFamily="34" charset="-122"/>
+                <a:cs typeface="Consolas" pitchFamily="34" charset="-120"/>
+              </a:rPr>
+              <a:t>StartModelAsync</a:t>
+            </a:r>
+            <a:pPr indent="0" marL="0">
+              <a:buNone/>
+            </a:pPr>
+            <a:r>
+              <a:rPr lang="en-US" sz="1100" dirty="0">
+                <a:solidFill>
+                  <a:srgbClr val="B8B5D9"/>
+                </a:solidFill>
+                <a:latin typeface="Consolas" pitchFamily="34" charset="0"/>
+                <a:ea typeface="Consolas" pitchFamily="34" charset="-122"/>
+                <a:cs typeface="Consolas" pitchFamily="34" charset="-120"/>
+              </a:rPr>
+              <a:t>(</a:t>
+            </a:r>
+            <a:pPr indent="0" marL="0">
+              <a:buNone/>
+            </a:pPr>
+            <a:r>
+              <a:rPr lang="en-US" sz="1100" dirty="0">
+                <a:solidFill>
+                  <a:srgbClr val="FBBF24"/>
+                </a:solidFill>
+                <a:latin typeface="Consolas" pitchFamily="34" charset="0"/>
+                <a:ea typeface="Consolas" pitchFamily="34" charset="-122"/>
+                <a:cs typeface="Consolas" pitchFamily="34" charset="-120"/>
+              </a:rPr>
+              <a:t>"phi-4-mini"</a:t>
+            </a:r>
+            <a:pPr indent="0" marL="0">
+              <a:buNone/>
+            </a:pPr>
+            <a:r>
+              <a:rPr lang="en-US" sz="1100" dirty="0">
+                <a:solidFill>
+                  <a:srgbClr val="B8B5D9"/>
+                </a:solidFill>
+                <a:latin typeface="Consolas" pitchFamily="34" charset="0"/>
+                <a:ea typeface="Consolas" pitchFamily="34" charset="-122"/>
+                <a:cs typeface="Consolas" pitchFamily="34" charset="-120"/>
+              </a:rPr>
+              <a:t>)</a:t>
+            </a:r>
+            <a:pPr indent="0" marL="0">
+              <a:buNone/>
+            </a:pPr>
+            <a:r>
+              <a:rPr lang="en-US" sz="1100" dirty="0">
+                <a:solidFill>
+                  <a:srgbClr val="B8B5D9"/>
+                </a:solidFill>
+                <a:latin typeface="Consolas" pitchFamily="34" charset="0"/>
+                <a:ea typeface="Consolas" pitchFamily="34" charset="-122"/>
+                <a:cs typeface="Consolas" pitchFamily="34" charset="-120"/>
+              </a:rPr>
+              <a:t>;</a:t>
+            </a:r>
+            <a:pPr indent="0" marL="0">
+              <a:buNone/>
+            </a:pPr>
+            <a:endParaRPr lang="en-US" sz="1100" dirty="0"/>
+          </a:p>
+          <a:p>
+            <a:pPr indent="0" marL="0">
+              <a:buNone/>
+            </a:pPr>
+            <a:endParaRPr lang="en-US" sz="1100" dirty="0"/>
+          </a:p>
+          <a:p>
+            <a:pPr indent="0" marL="0">
+              <a:buNone/>
+            </a:pPr>
+            <a:r>
+              <a:rPr lang="en-US" sz="1100" dirty="0">
+                <a:solidFill>
+                  <a:srgbClr val="FB7185"/>
+                </a:solidFill>
+                <a:latin typeface="Consolas" pitchFamily="34" charset="0"/>
+                <a:ea typeface="Consolas" pitchFamily="34" charset="-122"/>
+                <a:cs typeface="Consolas" pitchFamily="34" charset="-120"/>
+              </a:rPr>
+              <a:t>var</a:t>
+            </a:r>
+            <a:pPr indent="0" marL="0">
+              <a:buNone/>
+            </a:pPr>
+            <a:r>
+              <a:rPr lang="en-US" sz="1100" dirty="0">
                 <a:solidFill>
                   <a:srgbClr val="FAF8FF"/>
                 </a:solidFill>
@@ -14142,19 +19354,27 @@
                 <a:ea typeface="Consolas" pitchFamily="34" charset="-122"/>
                 <a:cs typeface="Consolas" pitchFamily="34" charset="-120"/>
               </a:rPr>
-              <a:t>var client = new OpenAIClient(</a:t>
-            </a:r>
-            <a:endParaRPr lang="en-US" sz="1200" dirty="0"/>
-          </a:p>
-          <a:p>
-            <a:pPr indent="0" marL="0">
-              <a:spcAft>
-                <a:spcPts val="200"/>
-              </a:spcAft>
-              <a:buNone/>
-            </a:pPr>
-            <a:r>
-              <a:rPr lang="en-US" sz="1200" dirty="0">
+              <a:t> client </a:t>
+            </a:r>
+            <a:pPr indent="0" marL="0">
+              <a:buNone/>
+            </a:pPr>
+            <a:r>
+              <a:rPr lang="en-US" sz="1100" dirty="0">
+                <a:solidFill>
+                  <a:srgbClr val="CFCBED"/>
+                </a:solidFill>
+                <a:latin typeface="Consolas" pitchFamily="34" charset="0"/>
+                <a:ea typeface="Consolas" pitchFamily="34" charset="-122"/>
+                <a:cs typeface="Consolas" pitchFamily="34" charset="-120"/>
+              </a:rPr>
+              <a:t>=</a:t>
+            </a:r>
+            <a:pPr indent="0" marL="0">
+              <a:buNone/>
+            </a:pPr>
+            <a:r>
+              <a:rPr lang="en-US" sz="1100" dirty="0">
                 <a:solidFill>
                   <a:srgbClr val="FAF8FF"/>
                 </a:solidFill>
@@ -14162,19 +19382,27 @@
                 <a:ea typeface="Consolas" pitchFamily="34" charset="-122"/>
                 <a:cs typeface="Consolas" pitchFamily="34" charset="-120"/>
               </a:rPr>
-              <a:t>    new ApiKeyCredential(manager.ApiKey),</a:t>
-            </a:r>
-            <a:endParaRPr lang="en-US" sz="1200" dirty="0"/>
-          </a:p>
-          <a:p>
-            <a:pPr indent="0" marL="0">
-              <a:spcAft>
-                <a:spcPts val="200"/>
-              </a:spcAft>
-              <a:buNone/>
-            </a:pPr>
-            <a:r>
-              <a:rPr lang="en-US" sz="1200" dirty="0">
+              <a:t> </a:t>
+            </a:r>
+            <a:pPr indent="0" marL="0">
+              <a:buNone/>
+            </a:pPr>
+            <a:r>
+              <a:rPr lang="en-US" sz="1100" dirty="0">
+                <a:solidFill>
+                  <a:srgbClr val="FB7185"/>
+                </a:solidFill>
+                <a:latin typeface="Consolas" pitchFamily="34" charset="0"/>
+                <a:ea typeface="Consolas" pitchFamily="34" charset="-122"/>
+                <a:cs typeface="Consolas" pitchFamily="34" charset="-120"/>
+              </a:rPr>
+              <a:t>new</a:t>
+            </a:r>
+            <a:pPr indent="0" marL="0">
+              <a:buNone/>
+            </a:pPr>
+            <a:r>
+              <a:rPr lang="en-US" sz="1100" dirty="0">
                 <a:solidFill>
                   <a:srgbClr val="FAF8FF"/>
                 </a:solidFill>
@@ -14182,28 +19410,13 @@
                 <a:ea typeface="Consolas" pitchFamily="34" charset="-122"/>
                 <a:cs typeface="Consolas" pitchFamily="34" charset="-120"/>
               </a:rPr>
-              <a:t>    new OpenAIClientOptions { Endpoint = manager.Endpoint });</a:t>
-            </a:r>
-            <a:endParaRPr lang="en-US" sz="1200" dirty="0"/>
-          </a:p>
-          <a:p>
-            <a:pPr indent="0" marL="0">
-              <a:spcAft>
-                <a:spcPts val="200"/>
-              </a:spcAft>
-              <a:buNone/>
-            </a:pPr>
-            <a:endParaRPr lang="en-US" sz="1200" dirty="0"/>
-          </a:p>
-          <a:p>
-            <a:pPr indent="0" marL="0">
-              <a:spcAft>
-                <a:spcPts val="200"/>
-              </a:spcAft>
-              <a:buNone/>
-            </a:pPr>
-            <a:r>
-              <a:rPr lang="en-US" sz="1200" dirty="0">
+              <a:t> </a:t>
+            </a:r>
+            <a:pPr indent="0" marL="0">
+              <a:buNone/>
+            </a:pPr>
+            <a:r>
+              <a:rPr lang="en-US" sz="1100" dirty="0">
                 <a:solidFill>
                   <a:srgbClr val="FAF8FF"/>
                 </a:solidFill>
@@ -14211,9 +19424,523 @@
                 <a:ea typeface="Consolas" pitchFamily="34" charset="-122"/>
                 <a:cs typeface="Consolas" pitchFamily="34" charset="-120"/>
               </a:rPr>
-              <a:t>var chat = client.GetChatClient("phi-4-mini");</a:t>
-            </a:r>
-            <a:endParaRPr lang="en-US" sz="1200" dirty="0"/>
+              <a:t>OpenAIClient</a:t>
+            </a:r>
+            <a:pPr indent="0" marL="0">
+              <a:buNone/>
+            </a:pPr>
+            <a:r>
+              <a:rPr lang="en-US" sz="1100" dirty="0">
+                <a:solidFill>
+                  <a:srgbClr val="B8B5D9"/>
+                </a:solidFill>
+                <a:latin typeface="Consolas" pitchFamily="34" charset="0"/>
+                <a:ea typeface="Consolas" pitchFamily="34" charset="-122"/>
+                <a:cs typeface="Consolas" pitchFamily="34" charset="-120"/>
+              </a:rPr>
+              <a:t>(</a:t>
+            </a:r>
+            <a:pPr indent="0" marL="0">
+              <a:buNone/>
+            </a:pPr>
+            <a:endParaRPr lang="en-US" sz="1100" dirty="0"/>
+          </a:p>
+          <a:p>
+            <a:pPr indent="0" marL="0">
+              <a:buNone/>
+            </a:pPr>
+            <a:r>
+              <a:rPr lang="en-US" sz="1100" dirty="0">
+                <a:solidFill>
+                  <a:srgbClr val="FAF8FF"/>
+                </a:solidFill>
+                <a:latin typeface="Consolas" pitchFamily="34" charset="0"/>
+                <a:ea typeface="Consolas" pitchFamily="34" charset="-122"/>
+                <a:cs typeface="Consolas" pitchFamily="34" charset="-120"/>
+              </a:rPr>
+              <a:t>    </a:t>
+            </a:r>
+            <a:pPr indent="0" marL="0">
+              <a:buNone/>
+            </a:pPr>
+            <a:r>
+              <a:rPr lang="en-US" sz="1100" dirty="0">
+                <a:solidFill>
+                  <a:srgbClr val="FB7185"/>
+                </a:solidFill>
+                <a:latin typeface="Consolas" pitchFamily="34" charset="0"/>
+                <a:ea typeface="Consolas" pitchFamily="34" charset="-122"/>
+                <a:cs typeface="Consolas" pitchFamily="34" charset="-120"/>
+              </a:rPr>
+              <a:t>new</a:t>
+            </a:r>
+            <a:pPr indent="0" marL="0">
+              <a:buNone/>
+            </a:pPr>
+            <a:r>
+              <a:rPr lang="en-US" sz="1100" dirty="0">
+                <a:solidFill>
+                  <a:srgbClr val="FAF8FF"/>
+                </a:solidFill>
+                <a:latin typeface="Consolas" pitchFamily="34" charset="0"/>
+                <a:ea typeface="Consolas" pitchFamily="34" charset="-122"/>
+                <a:cs typeface="Consolas" pitchFamily="34" charset="-120"/>
+              </a:rPr>
+              <a:t> </a:t>
+            </a:r>
+            <a:pPr indent="0" marL="0">
+              <a:buNone/>
+            </a:pPr>
+            <a:r>
+              <a:rPr lang="en-US" sz="1100" dirty="0">
+                <a:solidFill>
+                  <a:srgbClr val="FAF8FF"/>
+                </a:solidFill>
+                <a:latin typeface="Consolas" pitchFamily="34" charset="0"/>
+                <a:ea typeface="Consolas" pitchFamily="34" charset="-122"/>
+                <a:cs typeface="Consolas" pitchFamily="34" charset="-120"/>
+              </a:rPr>
+              <a:t>ApiKeyCredential</a:t>
+            </a:r>
+            <a:pPr indent="0" marL="0">
+              <a:buNone/>
+            </a:pPr>
+            <a:r>
+              <a:rPr lang="en-US" sz="1100" dirty="0">
+                <a:solidFill>
+                  <a:srgbClr val="B8B5D9"/>
+                </a:solidFill>
+                <a:latin typeface="Consolas" pitchFamily="34" charset="0"/>
+                <a:ea typeface="Consolas" pitchFamily="34" charset="-122"/>
+                <a:cs typeface="Consolas" pitchFamily="34" charset="-120"/>
+              </a:rPr>
+              <a:t>(</a:t>
+            </a:r>
+            <a:pPr indent="0" marL="0">
+              <a:buNone/>
+            </a:pPr>
+            <a:r>
+              <a:rPr lang="en-US" sz="1100" dirty="0">
+                <a:solidFill>
+                  <a:srgbClr val="FAF8FF"/>
+                </a:solidFill>
+                <a:latin typeface="Consolas" pitchFamily="34" charset="0"/>
+                <a:ea typeface="Consolas" pitchFamily="34" charset="-122"/>
+                <a:cs typeface="Consolas" pitchFamily="34" charset="-120"/>
+              </a:rPr>
+              <a:t>manager</a:t>
+            </a:r>
+            <a:pPr indent="0" marL="0">
+              <a:buNone/>
+            </a:pPr>
+            <a:r>
+              <a:rPr lang="en-US" sz="1100" dirty="0">
+                <a:solidFill>
+                  <a:srgbClr val="B8B5D9"/>
+                </a:solidFill>
+                <a:latin typeface="Consolas" pitchFamily="34" charset="0"/>
+                <a:ea typeface="Consolas" pitchFamily="34" charset="-122"/>
+                <a:cs typeface="Consolas" pitchFamily="34" charset="-120"/>
+              </a:rPr>
+              <a:t>.</a:t>
+            </a:r>
+            <a:pPr indent="0" marL="0">
+              <a:buNone/>
+            </a:pPr>
+            <a:r>
+              <a:rPr lang="en-US" sz="1100" dirty="0">
+                <a:solidFill>
+                  <a:srgbClr val="FAF8FF"/>
+                </a:solidFill>
+                <a:latin typeface="Consolas" pitchFamily="34" charset="0"/>
+                <a:ea typeface="Consolas" pitchFamily="34" charset="-122"/>
+                <a:cs typeface="Consolas" pitchFamily="34" charset="-120"/>
+              </a:rPr>
+              <a:t>ApiKey</a:t>
+            </a:r>
+            <a:pPr indent="0" marL="0">
+              <a:buNone/>
+            </a:pPr>
+            <a:r>
+              <a:rPr lang="en-US" sz="1100" dirty="0">
+                <a:solidFill>
+                  <a:srgbClr val="B8B5D9"/>
+                </a:solidFill>
+                <a:latin typeface="Consolas" pitchFamily="34" charset="0"/>
+                <a:ea typeface="Consolas" pitchFamily="34" charset="-122"/>
+                <a:cs typeface="Consolas" pitchFamily="34" charset="-120"/>
+              </a:rPr>
+              <a:t>)</a:t>
+            </a:r>
+            <a:pPr indent="0" marL="0">
+              <a:buNone/>
+            </a:pPr>
+            <a:r>
+              <a:rPr lang="en-US" sz="1100" dirty="0">
+                <a:solidFill>
+                  <a:srgbClr val="B8B5D9"/>
+                </a:solidFill>
+                <a:latin typeface="Consolas" pitchFamily="34" charset="0"/>
+                <a:ea typeface="Consolas" pitchFamily="34" charset="-122"/>
+                <a:cs typeface="Consolas" pitchFamily="34" charset="-120"/>
+              </a:rPr>
+              <a:t>,</a:t>
+            </a:r>
+            <a:pPr indent="0" marL="0">
+              <a:buNone/>
+            </a:pPr>
+            <a:endParaRPr lang="en-US" sz="1100" dirty="0"/>
+          </a:p>
+          <a:p>
+            <a:pPr indent="0" marL="0">
+              <a:buNone/>
+            </a:pPr>
+            <a:r>
+              <a:rPr lang="en-US" sz="1100" dirty="0">
+                <a:solidFill>
+                  <a:srgbClr val="FAF8FF"/>
+                </a:solidFill>
+                <a:latin typeface="Consolas" pitchFamily="34" charset="0"/>
+                <a:ea typeface="Consolas" pitchFamily="34" charset="-122"/>
+                <a:cs typeface="Consolas" pitchFamily="34" charset="-120"/>
+              </a:rPr>
+              <a:t>    </a:t>
+            </a:r>
+            <a:pPr indent="0" marL="0">
+              <a:buNone/>
+            </a:pPr>
+            <a:r>
+              <a:rPr lang="en-US" sz="1100" dirty="0">
+                <a:solidFill>
+                  <a:srgbClr val="FB7185"/>
+                </a:solidFill>
+                <a:latin typeface="Consolas" pitchFamily="34" charset="0"/>
+                <a:ea typeface="Consolas" pitchFamily="34" charset="-122"/>
+                <a:cs typeface="Consolas" pitchFamily="34" charset="-120"/>
+              </a:rPr>
+              <a:t>new</a:t>
+            </a:r>
+            <a:pPr indent="0" marL="0">
+              <a:buNone/>
+            </a:pPr>
+            <a:r>
+              <a:rPr lang="en-US" sz="1100" dirty="0">
+                <a:solidFill>
+                  <a:srgbClr val="FAF8FF"/>
+                </a:solidFill>
+                <a:latin typeface="Consolas" pitchFamily="34" charset="0"/>
+                <a:ea typeface="Consolas" pitchFamily="34" charset="-122"/>
+                <a:cs typeface="Consolas" pitchFamily="34" charset="-120"/>
+              </a:rPr>
+              <a:t> </a:t>
+            </a:r>
+            <a:pPr indent="0" marL="0">
+              <a:buNone/>
+            </a:pPr>
+            <a:r>
+              <a:rPr lang="en-US" sz="1100" dirty="0">
+                <a:solidFill>
+                  <a:srgbClr val="FAF8FF"/>
+                </a:solidFill>
+                <a:latin typeface="Consolas" pitchFamily="34" charset="0"/>
+                <a:ea typeface="Consolas" pitchFamily="34" charset="-122"/>
+                <a:cs typeface="Consolas" pitchFamily="34" charset="-120"/>
+              </a:rPr>
+              <a:t>OpenAIClientOptions</a:t>
+            </a:r>
+            <a:pPr indent="0" marL="0">
+              <a:buNone/>
+            </a:pPr>
+            <a:r>
+              <a:rPr lang="en-US" sz="1100" dirty="0">
+                <a:solidFill>
+                  <a:srgbClr val="FAF8FF"/>
+                </a:solidFill>
+                <a:latin typeface="Consolas" pitchFamily="34" charset="0"/>
+                <a:ea typeface="Consolas" pitchFamily="34" charset="-122"/>
+                <a:cs typeface="Consolas" pitchFamily="34" charset="-120"/>
+              </a:rPr>
+              <a:t> </a:t>
+            </a:r>
+            <a:pPr indent="0" marL="0">
+              <a:buNone/>
+            </a:pPr>
+            <a:r>
+              <a:rPr lang="en-US" sz="1100" dirty="0">
+                <a:solidFill>
+                  <a:srgbClr val="B8B5D9"/>
+                </a:solidFill>
+                <a:latin typeface="Consolas" pitchFamily="34" charset="0"/>
+                <a:ea typeface="Consolas" pitchFamily="34" charset="-122"/>
+                <a:cs typeface="Consolas" pitchFamily="34" charset="-120"/>
+              </a:rPr>
+              <a:t>{</a:t>
+            </a:r>
+            <a:pPr indent="0" marL="0">
+              <a:buNone/>
+            </a:pPr>
+            <a:r>
+              <a:rPr lang="en-US" sz="1100" dirty="0">
+                <a:solidFill>
+                  <a:srgbClr val="FAF8FF"/>
+                </a:solidFill>
+                <a:latin typeface="Consolas" pitchFamily="34" charset="0"/>
+                <a:ea typeface="Consolas" pitchFamily="34" charset="-122"/>
+                <a:cs typeface="Consolas" pitchFamily="34" charset="-120"/>
+              </a:rPr>
+              <a:t> Endpoint </a:t>
+            </a:r>
+            <a:pPr indent="0" marL="0">
+              <a:buNone/>
+            </a:pPr>
+            <a:r>
+              <a:rPr lang="en-US" sz="1100" dirty="0">
+                <a:solidFill>
+                  <a:srgbClr val="CFCBED"/>
+                </a:solidFill>
+                <a:latin typeface="Consolas" pitchFamily="34" charset="0"/>
+                <a:ea typeface="Consolas" pitchFamily="34" charset="-122"/>
+                <a:cs typeface="Consolas" pitchFamily="34" charset="-120"/>
+              </a:rPr>
+              <a:t>=</a:t>
+            </a:r>
+            <a:pPr indent="0" marL="0">
+              <a:buNone/>
+            </a:pPr>
+            <a:r>
+              <a:rPr lang="en-US" sz="1100" dirty="0">
+                <a:solidFill>
+                  <a:srgbClr val="FAF8FF"/>
+                </a:solidFill>
+                <a:latin typeface="Consolas" pitchFamily="34" charset="0"/>
+                <a:ea typeface="Consolas" pitchFamily="34" charset="-122"/>
+                <a:cs typeface="Consolas" pitchFamily="34" charset="-120"/>
+              </a:rPr>
+              <a:t> manager</a:t>
+            </a:r>
+            <a:pPr indent="0" marL="0">
+              <a:buNone/>
+            </a:pPr>
+            <a:r>
+              <a:rPr lang="en-US" sz="1100" dirty="0">
+                <a:solidFill>
+                  <a:srgbClr val="B8B5D9"/>
+                </a:solidFill>
+                <a:latin typeface="Consolas" pitchFamily="34" charset="0"/>
+                <a:ea typeface="Consolas" pitchFamily="34" charset="-122"/>
+                <a:cs typeface="Consolas" pitchFamily="34" charset="-120"/>
+              </a:rPr>
+              <a:t>.</a:t>
+            </a:r>
+            <a:pPr indent="0" marL="0">
+              <a:buNone/>
+            </a:pPr>
+            <a:r>
+              <a:rPr lang="en-US" sz="1100" dirty="0">
+                <a:solidFill>
+                  <a:srgbClr val="FAF8FF"/>
+                </a:solidFill>
+                <a:latin typeface="Consolas" pitchFamily="34" charset="0"/>
+                <a:ea typeface="Consolas" pitchFamily="34" charset="-122"/>
+                <a:cs typeface="Consolas" pitchFamily="34" charset="-120"/>
+              </a:rPr>
+              <a:t>Endpoint </a:t>
+            </a:r>
+            <a:pPr indent="0" marL="0">
+              <a:buNone/>
+            </a:pPr>
+            <a:r>
+              <a:rPr lang="en-US" sz="1100" dirty="0">
+                <a:solidFill>
+                  <a:srgbClr val="B8B5D9"/>
+                </a:solidFill>
+                <a:latin typeface="Consolas" pitchFamily="34" charset="0"/>
+                <a:ea typeface="Consolas" pitchFamily="34" charset="-122"/>
+                <a:cs typeface="Consolas" pitchFamily="34" charset="-120"/>
+              </a:rPr>
+              <a:t>}</a:t>
+            </a:r>
+            <a:pPr indent="0" marL="0">
+              <a:buNone/>
+            </a:pPr>
+            <a:r>
+              <a:rPr lang="en-US" sz="1100" dirty="0">
+                <a:solidFill>
+                  <a:srgbClr val="B8B5D9"/>
+                </a:solidFill>
+                <a:latin typeface="Consolas" pitchFamily="34" charset="0"/>
+                <a:ea typeface="Consolas" pitchFamily="34" charset="-122"/>
+                <a:cs typeface="Consolas" pitchFamily="34" charset="-120"/>
+              </a:rPr>
+              <a:t>)</a:t>
+            </a:r>
+            <a:pPr indent="0" marL="0">
+              <a:buNone/>
+            </a:pPr>
+            <a:r>
+              <a:rPr lang="en-US" sz="1100" dirty="0">
+                <a:solidFill>
+                  <a:srgbClr val="B8B5D9"/>
+                </a:solidFill>
+                <a:latin typeface="Consolas" pitchFamily="34" charset="0"/>
+                <a:ea typeface="Consolas" pitchFamily="34" charset="-122"/>
+                <a:cs typeface="Consolas" pitchFamily="34" charset="-120"/>
+              </a:rPr>
+              <a:t>;</a:t>
+            </a:r>
+            <a:pPr indent="0" marL="0">
+              <a:buNone/>
+            </a:pPr>
+            <a:endParaRPr lang="en-US" sz="1100" dirty="0"/>
+          </a:p>
+          <a:p>
+            <a:pPr indent="0" marL="0">
+              <a:buNone/>
+            </a:pPr>
+            <a:endParaRPr lang="en-US" sz="1100" dirty="0"/>
+          </a:p>
+          <a:p>
+            <a:pPr indent="0" marL="0">
+              <a:buNone/>
+            </a:pPr>
+            <a:r>
+              <a:rPr lang="en-US" sz="1100" dirty="0">
+                <a:solidFill>
+                  <a:srgbClr val="FB7185"/>
+                </a:solidFill>
+                <a:latin typeface="Consolas" pitchFamily="34" charset="0"/>
+                <a:ea typeface="Consolas" pitchFamily="34" charset="-122"/>
+                <a:cs typeface="Consolas" pitchFamily="34" charset="-120"/>
+              </a:rPr>
+              <a:t>var</a:t>
+            </a:r>
+            <a:pPr indent="0" marL="0">
+              <a:buNone/>
+            </a:pPr>
+            <a:r>
+              <a:rPr lang="en-US" sz="1100" dirty="0">
+                <a:solidFill>
+                  <a:srgbClr val="FAF8FF"/>
+                </a:solidFill>
+                <a:latin typeface="Consolas" pitchFamily="34" charset="0"/>
+                <a:ea typeface="Consolas" pitchFamily="34" charset="-122"/>
+                <a:cs typeface="Consolas" pitchFamily="34" charset="-120"/>
+              </a:rPr>
+              <a:t> chat </a:t>
+            </a:r>
+            <a:pPr indent="0" marL="0">
+              <a:buNone/>
+            </a:pPr>
+            <a:r>
+              <a:rPr lang="en-US" sz="1100" dirty="0">
+                <a:solidFill>
+                  <a:srgbClr val="CFCBED"/>
+                </a:solidFill>
+                <a:latin typeface="Consolas" pitchFamily="34" charset="0"/>
+                <a:ea typeface="Consolas" pitchFamily="34" charset="-122"/>
+                <a:cs typeface="Consolas" pitchFamily="34" charset="-120"/>
+              </a:rPr>
+              <a:t>=</a:t>
+            </a:r>
+            <a:pPr indent="0" marL="0">
+              <a:buNone/>
+            </a:pPr>
+            <a:r>
+              <a:rPr lang="en-US" sz="1100" dirty="0">
+                <a:solidFill>
+                  <a:srgbClr val="FAF8FF"/>
+                </a:solidFill>
+                <a:latin typeface="Consolas" pitchFamily="34" charset="0"/>
+                <a:ea typeface="Consolas" pitchFamily="34" charset="-122"/>
+                <a:cs typeface="Consolas" pitchFamily="34" charset="-120"/>
+              </a:rPr>
+              <a:t> client</a:t>
+            </a:r>
+            <a:pPr indent="0" marL="0">
+              <a:buNone/>
+            </a:pPr>
+            <a:r>
+              <a:rPr lang="en-US" sz="1100" dirty="0">
+                <a:solidFill>
+                  <a:srgbClr val="B8B5D9"/>
+                </a:solidFill>
+                <a:latin typeface="Consolas" pitchFamily="34" charset="0"/>
+                <a:ea typeface="Consolas" pitchFamily="34" charset="-122"/>
+                <a:cs typeface="Consolas" pitchFamily="34" charset="-120"/>
+              </a:rPr>
+              <a:t>.</a:t>
+            </a:r>
+            <a:pPr indent="0" marL="0">
+              <a:buNone/>
+            </a:pPr>
+            <a:r>
+              <a:rPr lang="en-US" sz="1100" dirty="0">
+                <a:solidFill>
+                  <a:srgbClr val="86EFAC"/>
+                </a:solidFill>
+                <a:latin typeface="Consolas" pitchFamily="34" charset="0"/>
+                <a:ea typeface="Consolas" pitchFamily="34" charset="-122"/>
+                <a:cs typeface="Consolas" pitchFamily="34" charset="-120"/>
+              </a:rPr>
+              <a:t>GetChatClient</a:t>
+            </a:r>
+            <a:pPr indent="0" marL="0">
+              <a:buNone/>
+            </a:pPr>
+            <a:r>
+              <a:rPr lang="en-US" sz="1100" dirty="0">
+                <a:solidFill>
+                  <a:srgbClr val="B8B5D9"/>
+                </a:solidFill>
+                <a:latin typeface="Consolas" pitchFamily="34" charset="0"/>
+                <a:ea typeface="Consolas" pitchFamily="34" charset="-122"/>
+                <a:cs typeface="Consolas" pitchFamily="34" charset="-120"/>
+              </a:rPr>
+              <a:t>(</a:t>
+            </a:r>
+            <a:pPr indent="0" marL="0">
+              <a:buNone/>
+            </a:pPr>
+            <a:r>
+              <a:rPr lang="en-US" sz="1100" dirty="0">
+                <a:solidFill>
+                  <a:srgbClr val="FBBF24"/>
+                </a:solidFill>
+                <a:latin typeface="Consolas" pitchFamily="34" charset="0"/>
+                <a:ea typeface="Consolas" pitchFamily="34" charset="-122"/>
+                <a:cs typeface="Consolas" pitchFamily="34" charset="-120"/>
+              </a:rPr>
+              <a:t>"phi-4-mini"</a:t>
+            </a:r>
+            <a:pPr indent="0" marL="0">
+              <a:buNone/>
+            </a:pPr>
+            <a:r>
+              <a:rPr lang="en-US" sz="1100" dirty="0">
+                <a:solidFill>
+                  <a:srgbClr val="B8B5D9"/>
+                </a:solidFill>
+                <a:latin typeface="Consolas" pitchFamily="34" charset="0"/>
+                <a:ea typeface="Consolas" pitchFamily="34" charset="-122"/>
+                <a:cs typeface="Consolas" pitchFamily="34" charset="-120"/>
+              </a:rPr>
+              <a:t>)</a:t>
+            </a:r>
+            <a:pPr indent="0" marL="0">
+              <a:buNone/>
+            </a:pPr>
+            <a:r>
+              <a:rPr lang="en-US" sz="1100" dirty="0">
+                <a:solidFill>
+                  <a:srgbClr val="B8B5D9"/>
+                </a:solidFill>
+                <a:latin typeface="Consolas" pitchFamily="34" charset="0"/>
+                <a:ea typeface="Consolas" pitchFamily="34" charset="-122"/>
+                <a:cs typeface="Consolas" pitchFamily="34" charset="-120"/>
+              </a:rPr>
+              <a:t>;</a:t>
+            </a:r>
+            <a:endParaRPr lang="en-US" sz="1100" dirty="0"/>
           </a:p>
         </p:txBody>
       </p:sp>

--- a/slides/Unifying-Local-Cloud-AI.pptx
+++ b/slides/Unifying-Local-Cloud-AI.pptx
@@ -19,9 +19,11 @@
     <p:sldId id="267" r:id="rId13"/>
     <p:sldId id="268" r:id="rId14"/>
     <p:sldId id="269" r:id="rId15"/>
+    <p:sldId id="270" r:id="rId16"/>
+    <p:sldId id="271" r:id="rId17"/>
   </p:sldIdLst>
   <p:notesMasterIdLst>
-    <p:notesMasterId r:id="rId16"/>
+    <p:notesMasterId r:id="rId18"/>
   </p:notesMasterIdLst>
   <p:sldSz cx="12192000" cy="6858000"/>
   <p:notesSz cx="6858000" cy="12192000"/>
@@ -979,6 +981,182 @@
             <a:fld id="{F7021451-1387-4CA6-816F-3879F97B5CBC}" type="slidenum">
               <a:rPr lang="en-US"/>
               <a:t>14</a:t>
+            </a:fld>
+            <a:endParaRPr lang="en-US"/>
+          </a:p>
+        </p:txBody>
+      </p:sp>
+    </p:spTree>
+    <p:extLst>
+      <p:ext uri="{BB962C8B-B14F-4D97-AF65-F5344CB8AC3E}">
+        <p14:creationId xmlns:p14="http://schemas.microsoft.com/office/powerpoint/2010/main" val="1024086991"/>
+      </p:ext>
+    </p:extLst>
+  </p:cSld>
+  <p:clrMapOvr>
+    <a:masterClrMapping/>
+  </p:clrMapOvr>
+</p:notes>
+</file>
+
+<file path=ppt/notesSlides/notesSlide15.xml><?xml version="1.0" encoding="utf-8"?>
+<p:notes xmlns:a="http://schemas.openxmlformats.org/drawingml/2006/main" xmlns:r="http://schemas.openxmlformats.org/officeDocument/2006/relationships" xmlns:p="http://schemas.openxmlformats.org/presentationml/2006/main">
+  <p:cSld>
+    <p:spTree>
+      <p:nvGrpSpPr>
+        <p:cNvPr id="1" name=""/>
+        <p:cNvGrpSpPr/>
+        <p:nvPr/>
+      </p:nvGrpSpPr>
+      <p:grpSpPr>
+        <a:xfrm>
+          <a:off x="0" y="0"/>
+          <a:ext cx="0" cy="0"/>
+          <a:chOff x="0" y="0"/>
+          <a:chExt cx="0" cy="0"/>
+        </a:xfrm>
+      </p:grpSpPr>
+      <p:sp>
+        <p:nvSpPr>
+          <p:cNvPr id="2" name="Slide Image Placeholder 1"/>
+          <p:cNvSpPr>
+            <a:spLocks noGrp="1" noRot="1" noChangeAspect="1"/>
+          </p:cNvSpPr>
+          <p:nvPr>
+            <p:ph type="sldImg"/>
+          </p:nvPr>
+        </p:nvSpPr>
+        <p:spPr/>
+      </p:sp>
+      <p:sp>
+        <p:nvSpPr>
+          <p:cNvPr id="3" name="Notes Placeholder 2"/>
+          <p:cNvSpPr>
+            <a:spLocks noGrp="1"/>
+          </p:cNvSpPr>
+          <p:nvPr>
+            <p:ph type="body" idx="1"/>
+          </p:nvPr>
+        </p:nvSpPr>
+        <p:spPr/>
+        <p:txBody>
+          <a:bodyPr/>
+          <a:lstStyle/>
+          <a:p>
+            <a:r>
+              <a:rPr lang="en-US" dirty="0"/>
+              <a:t/>
+            </a:r>
+            <a:endParaRPr lang="en-US" dirty="0"/>
+          </a:p>
+        </p:txBody>
+      </p:sp>
+      <p:sp>
+        <p:nvSpPr>
+          <p:cNvPr id="4" name="Slide Number Placeholder 3"/>
+          <p:cNvSpPr>
+            <a:spLocks noGrp="1"/>
+          </p:cNvSpPr>
+          <p:nvPr>
+            <p:ph type="sldNum" sz="quarter" idx="10"/>
+          </p:nvPr>
+        </p:nvSpPr>
+        <p:spPr/>
+        <p:txBody>
+          <a:bodyPr/>
+          <a:lstStyle/>
+          <a:p>
+            <a:fld id="{F7021451-1387-4CA6-816F-3879F97B5CBC}" type="slidenum">
+              <a:rPr lang="en-US"/>
+              <a:t>15</a:t>
+            </a:fld>
+            <a:endParaRPr lang="en-US"/>
+          </a:p>
+        </p:txBody>
+      </p:sp>
+    </p:spTree>
+    <p:extLst>
+      <p:ext uri="{BB962C8B-B14F-4D97-AF65-F5344CB8AC3E}">
+        <p14:creationId xmlns:p14="http://schemas.microsoft.com/office/powerpoint/2010/main" val="1024086991"/>
+      </p:ext>
+    </p:extLst>
+  </p:cSld>
+  <p:clrMapOvr>
+    <a:masterClrMapping/>
+  </p:clrMapOvr>
+</p:notes>
+</file>
+
+<file path=ppt/notesSlides/notesSlide16.xml><?xml version="1.0" encoding="utf-8"?>
+<p:notes xmlns:a="http://schemas.openxmlformats.org/drawingml/2006/main" xmlns:r="http://schemas.openxmlformats.org/officeDocument/2006/relationships" xmlns:p="http://schemas.openxmlformats.org/presentationml/2006/main">
+  <p:cSld>
+    <p:spTree>
+      <p:nvGrpSpPr>
+        <p:cNvPr id="1" name=""/>
+        <p:cNvGrpSpPr/>
+        <p:nvPr/>
+      </p:nvGrpSpPr>
+      <p:grpSpPr>
+        <a:xfrm>
+          <a:off x="0" y="0"/>
+          <a:ext cx="0" cy="0"/>
+          <a:chOff x="0" y="0"/>
+          <a:chExt cx="0" cy="0"/>
+        </a:xfrm>
+      </p:grpSpPr>
+      <p:sp>
+        <p:nvSpPr>
+          <p:cNvPr id="2" name="Slide Image Placeholder 1"/>
+          <p:cNvSpPr>
+            <a:spLocks noGrp="1" noRot="1" noChangeAspect="1"/>
+          </p:cNvSpPr>
+          <p:nvPr>
+            <p:ph type="sldImg"/>
+          </p:nvPr>
+        </p:nvSpPr>
+        <p:spPr/>
+      </p:sp>
+      <p:sp>
+        <p:nvSpPr>
+          <p:cNvPr id="3" name="Notes Placeholder 2"/>
+          <p:cNvSpPr>
+            <a:spLocks noGrp="1"/>
+          </p:cNvSpPr>
+          <p:nvPr>
+            <p:ph type="body" idx="1"/>
+          </p:nvPr>
+        </p:nvSpPr>
+        <p:spPr/>
+        <p:txBody>
+          <a:bodyPr/>
+          <a:lstStyle/>
+          <a:p>
+            <a:r>
+              <a:rPr lang="en-US" dirty="0"/>
+              <a:t/>
+            </a:r>
+            <a:endParaRPr lang="en-US" dirty="0"/>
+          </a:p>
+        </p:txBody>
+      </p:sp>
+      <p:sp>
+        <p:nvSpPr>
+          <p:cNvPr id="4" name="Slide Number Placeholder 3"/>
+          <p:cNvSpPr>
+            <a:spLocks noGrp="1"/>
+          </p:cNvSpPr>
+          <p:nvPr>
+            <p:ph type="sldNum" sz="quarter" idx="10"/>
+          </p:nvPr>
+        </p:nvSpPr>
+        <p:spPr/>
+        <p:txBody>
+          <a:bodyPr/>
+          <a:lstStyle/>
+          <a:p>
+            <a:fld id="{F7021451-1387-4CA6-816F-3879F97B5CBC}" type="slidenum">
+              <a:rPr lang="en-US"/>
+              <a:t>16</a:t>
             </a:fld>
             <a:endParaRPr lang="en-US"/>
           </a:p>
@@ -3949,7 +4127,7 @@
                 <a:ea typeface="Calibri" pitchFamily="34" charset="-122"/>
                 <a:cs typeface="Calibri" pitchFamily="34" charset="-120"/>
               </a:rPr>
-              <a:t>10 / 14</a:t>
+              <a:t>10 / 16</a:t>
             </a:r>
             <a:endParaRPr lang="en-US" sz="1000" dirty="0"/>
           </a:p>
@@ -4600,13 +4778,343 @@
             <a:r>
               <a:rPr lang="en-US" sz="1100" dirty="0">
                 <a:solidFill>
+                  <a:srgbClr val="B8B5D9"/>
+                </a:solidFill>
+                <a:latin typeface="Consolas" pitchFamily="34" charset="0"/>
+                <a:ea typeface="Consolas" pitchFamily="34" charset="-122"/>
+                <a:cs typeface="Consolas" pitchFamily="34" charset="-120"/>
+              </a:rPr>
+              <a:t>[</a:t>
+            </a:r>
+            <a:pPr indent="0" marL="0">
+              <a:buNone/>
+            </a:pPr>
+            <a:r>
+              <a:rPr lang="en-US" sz="1100" dirty="0">
+                <a:solidFill>
+                  <a:srgbClr val="FAF8FF"/>
+                </a:solidFill>
+                <a:latin typeface="Consolas" pitchFamily="34" charset="0"/>
+                <a:ea typeface="Consolas" pitchFamily="34" charset="-122"/>
+                <a:cs typeface="Consolas" pitchFamily="34" charset="-120"/>
+              </a:rPr>
+              <a:t>..</a:t>
+            </a:r>
+            <a:pPr indent="0" marL="0">
+              <a:buNone/>
+            </a:pPr>
+            <a:r>
+              <a:rPr lang="en-US" sz="1100" dirty="0">
+                <a:solidFill>
+                  <a:srgbClr val="FAF8FF"/>
+                </a:solidFill>
+                <a:latin typeface="Consolas" pitchFamily="34" charset="0"/>
+                <a:ea typeface="Consolas" pitchFamily="34" charset="-122"/>
+                <a:cs typeface="Consolas" pitchFamily="34" charset="-120"/>
+              </a:rPr>
+              <a:t> TravelToolContext</a:t>
+            </a:r>
+            <a:pPr indent="0" marL="0">
+              <a:buNone/>
+            </a:pPr>
+            <a:r>
+              <a:rPr lang="en-US" sz="1100" dirty="0">
+                <a:solidFill>
+                  <a:srgbClr val="B8B5D9"/>
+                </a:solidFill>
+                <a:latin typeface="Consolas" pitchFamily="34" charset="0"/>
+                <a:ea typeface="Consolas" pitchFamily="34" charset="-122"/>
+                <a:cs typeface="Consolas" pitchFamily="34" charset="-120"/>
+              </a:rPr>
+              <a:t>.</a:t>
+            </a:r>
+            <a:pPr indent="0" marL="0">
+              <a:buNone/>
+            </a:pPr>
+            <a:r>
+              <a:rPr lang="en-US" sz="1100" dirty="0">
+                <a:solidFill>
+                  <a:srgbClr val="FAF8FF"/>
+                </a:solidFill>
+                <a:latin typeface="Consolas" pitchFamily="34" charset="0"/>
+                <a:ea typeface="Consolas" pitchFamily="34" charset="-122"/>
+                <a:cs typeface="Consolas" pitchFamily="34" charset="-120"/>
+              </a:rPr>
+              <a:t>Default</a:t>
+            </a:r>
+            <a:pPr indent="0" marL="0">
+              <a:buNone/>
+            </a:pPr>
+            <a:r>
+              <a:rPr lang="en-US" sz="1100" dirty="0">
+                <a:solidFill>
+                  <a:srgbClr val="B8B5D9"/>
+                </a:solidFill>
+                <a:latin typeface="Consolas" pitchFamily="34" charset="0"/>
+                <a:ea typeface="Consolas" pitchFamily="34" charset="-122"/>
+                <a:cs typeface="Consolas" pitchFamily="34" charset="-120"/>
+              </a:rPr>
+              <a:t>.</a:t>
+            </a:r>
+            <a:pPr indent="0" marL="0">
+              <a:buNone/>
+            </a:pPr>
+            <a:r>
+              <a:rPr lang="en-US" sz="1100" dirty="0">
+                <a:solidFill>
+                  <a:srgbClr val="FAF8FF"/>
+                </a:solidFill>
+                <a:latin typeface="Consolas" pitchFamily="34" charset="0"/>
+                <a:ea typeface="Consolas" pitchFamily="34" charset="-122"/>
+                <a:cs typeface="Consolas" pitchFamily="34" charset="-120"/>
+              </a:rPr>
+              <a:t>Tools</a:t>
+            </a:r>
+            <a:pPr indent="0" marL="0">
+              <a:buNone/>
+            </a:pPr>
+            <a:r>
+              <a:rPr lang="en-US" sz="1100" dirty="0">
+                <a:solidFill>
+                  <a:srgbClr val="B8B5D9"/>
+                </a:solidFill>
+                <a:latin typeface="Consolas" pitchFamily="34" charset="0"/>
+                <a:ea typeface="Consolas" pitchFamily="34" charset="-122"/>
+                <a:cs typeface="Consolas" pitchFamily="34" charset="-120"/>
+              </a:rPr>
+              <a:t>]</a:t>
+            </a:r>
+            <a:pPr indent="0" marL="0">
+              <a:buNone/>
+            </a:pPr>
+            <a:r>
+              <a:rPr lang="en-US" sz="1100" dirty="0">
+                <a:solidFill>
+                  <a:srgbClr val="B8B5D9"/>
+                </a:solidFill>
+                <a:latin typeface="Consolas" pitchFamily="34" charset="0"/>
+                <a:ea typeface="Consolas" pitchFamily="34" charset="-122"/>
+                <a:cs typeface="Consolas" pitchFamily="34" charset="-120"/>
+              </a:rPr>
+              <a:t>)</a:t>
+            </a:r>
+            <a:pPr indent="0" marL="0">
+              <a:buNone/>
+            </a:pPr>
+            <a:r>
+              <a:rPr lang="en-US" sz="1100" dirty="0">
+                <a:solidFill>
+                  <a:srgbClr val="B8B5D9"/>
+                </a:solidFill>
+                <a:latin typeface="Consolas" pitchFamily="34" charset="0"/>
+                <a:ea typeface="Consolas" pitchFamily="34" charset="-122"/>
+                <a:cs typeface="Consolas" pitchFamily="34" charset="-120"/>
+              </a:rPr>
+              <a:t>;</a:t>
+            </a:r>
+            <a:pPr indent="0" marL="0">
+              <a:buNone/>
+            </a:pPr>
+            <a:endParaRPr lang="en-US" sz="1100" dirty="0"/>
+          </a:p>
+          <a:p>
+            <a:pPr indent="0" marL="0">
+              <a:buNone/>
+            </a:pPr>
+            <a:endParaRPr lang="en-US" sz="1100" dirty="0"/>
+          </a:p>
+          <a:p>
+            <a:pPr indent="0" marL="0">
+              <a:buNone/>
+            </a:pPr>
+            <a:r>
+              <a:rPr lang="en-US" sz="1100" i="1" dirty="0">
+                <a:solidFill>
+                  <a:srgbClr val="8B88B5"/>
+                </a:solidFill>
+                <a:latin typeface="Consolas" pitchFamily="34" charset="0"/>
+                <a:ea typeface="Consolas" pitchFamily="34" charset="-122"/>
+                <a:cs typeface="Consolas" pitchFamily="34" charset="-120"/>
+              </a:rPr>
+              <a:t>// 3. Keep a thread for conversation state</a:t>
+            </a:r>
+            <a:pPr indent="0" marL="0">
+              <a:buNone/>
+            </a:pPr>
+            <a:endParaRPr lang="en-US" sz="1100" dirty="0"/>
+          </a:p>
+          <a:p>
+            <a:pPr indent="0" marL="0">
+              <a:buNone/>
+            </a:pPr>
+            <a:r>
+              <a:rPr lang="en-US" sz="1100" dirty="0">
+                <a:solidFill>
+                  <a:srgbClr val="A78BFA"/>
+                </a:solidFill>
+                <a:latin typeface="Consolas" pitchFamily="34" charset="0"/>
+                <a:ea typeface="Consolas" pitchFamily="34" charset="-122"/>
+                <a:cs typeface="Consolas" pitchFamily="34" charset="-120"/>
+              </a:rPr>
+              <a:t>AgentThread</a:t>
+            </a:r>
+            <a:pPr indent="0" marL="0">
+              <a:buNone/>
+            </a:pPr>
+            <a:r>
+              <a:rPr lang="en-US" sz="1100" dirty="0">
+                <a:solidFill>
+                  <a:srgbClr val="FAF8FF"/>
+                </a:solidFill>
+                <a:latin typeface="Consolas" pitchFamily="34" charset="0"/>
+                <a:ea typeface="Consolas" pitchFamily="34" charset="-122"/>
+                <a:cs typeface="Consolas" pitchFamily="34" charset="-120"/>
+              </a:rPr>
+              <a:t> thread </a:t>
+            </a:r>
+            <a:pPr indent="0" marL="0">
+              <a:buNone/>
+            </a:pPr>
+            <a:r>
+              <a:rPr lang="en-US" sz="1100" dirty="0">
+                <a:solidFill>
+                  <a:srgbClr val="CFCBED"/>
+                </a:solidFill>
+                <a:latin typeface="Consolas" pitchFamily="34" charset="0"/>
+                <a:ea typeface="Consolas" pitchFamily="34" charset="-122"/>
+                <a:cs typeface="Consolas" pitchFamily="34" charset="-120"/>
+              </a:rPr>
+              <a:t>=</a:t>
+            </a:r>
+            <a:pPr indent="0" marL="0">
+              <a:buNone/>
+            </a:pPr>
+            <a:r>
+              <a:rPr lang="en-US" sz="1100" dirty="0">
+                <a:solidFill>
+                  <a:srgbClr val="FAF8FF"/>
+                </a:solidFill>
+                <a:latin typeface="Consolas" pitchFamily="34" charset="0"/>
+                <a:ea typeface="Consolas" pitchFamily="34" charset="-122"/>
+                <a:cs typeface="Consolas" pitchFamily="34" charset="-120"/>
+              </a:rPr>
+              <a:t> agent</a:t>
+            </a:r>
+            <a:pPr indent="0" marL="0">
+              <a:buNone/>
+            </a:pPr>
+            <a:r>
+              <a:rPr lang="en-US" sz="1100" dirty="0">
+                <a:solidFill>
+                  <a:srgbClr val="B8B5D9"/>
+                </a:solidFill>
+                <a:latin typeface="Consolas" pitchFamily="34" charset="0"/>
+                <a:ea typeface="Consolas" pitchFamily="34" charset="-122"/>
+                <a:cs typeface="Consolas" pitchFamily="34" charset="-120"/>
+              </a:rPr>
+              <a:t>.</a:t>
+            </a:r>
+            <a:pPr indent="0" marL="0">
+              <a:buNone/>
+            </a:pPr>
+            <a:r>
+              <a:rPr lang="en-US" sz="1100" dirty="0">
+                <a:solidFill>
+                  <a:srgbClr val="86EFAC"/>
+                </a:solidFill>
+                <a:latin typeface="Consolas" pitchFamily="34" charset="0"/>
+                <a:ea typeface="Consolas" pitchFamily="34" charset="-122"/>
+                <a:cs typeface="Consolas" pitchFamily="34" charset="-120"/>
+              </a:rPr>
+              <a:t>GetNewThread</a:t>
+            </a:r>
+            <a:pPr indent="0" marL="0">
+              <a:buNone/>
+            </a:pPr>
+            <a:r>
+              <a:rPr lang="en-US" sz="1100" dirty="0">
+                <a:solidFill>
+                  <a:srgbClr val="B8B5D9"/>
+                </a:solidFill>
+                <a:latin typeface="Consolas" pitchFamily="34" charset="0"/>
+                <a:ea typeface="Consolas" pitchFamily="34" charset="-122"/>
+                <a:cs typeface="Consolas" pitchFamily="34" charset="-120"/>
+              </a:rPr>
+              <a:t>(</a:t>
+            </a:r>
+            <a:pPr indent="0" marL="0">
+              <a:buNone/>
+            </a:pPr>
+            <a:r>
+              <a:rPr lang="en-US" sz="1100" dirty="0">
+                <a:solidFill>
+                  <a:srgbClr val="B8B5D9"/>
+                </a:solidFill>
+                <a:latin typeface="Consolas" pitchFamily="34" charset="0"/>
+                <a:ea typeface="Consolas" pitchFamily="34" charset="-122"/>
+                <a:cs typeface="Consolas" pitchFamily="34" charset="-120"/>
+              </a:rPr>
+              <a:t>)</a:t>
+            </a:r>
+            <a:pPr indent="0" marL="0">
+              <a:buNone/>
+            </a:pPr>
+            <a:r>
+              <a:rPr lang="en-US" sz="1100" dirty="0">
+                <a:solidFill>
+                  <a:srgbClr val="B8B5D9"/>
+                </a:solidFill>
+                <a:latin typeface="Consolas" pitchFamily="34" charset="0"/>
+                <a:ea typeface="Consolas" pitchFamily="34" charset="-122"/>
+                <a:cs typeface="Consolas" pitchFamily="34" charset="-120"/>
+              </a:rPr>
+              <a:t>;</a:t>
+            </a:r>
+            <a:pPr indent="0" marL="0">
+              <a:buNone/>
+            </a:pPr>
+            <a:endParaRPr lang="en-US" sz="1100" dirty="0"/>
+          </a:p>
+          <a:p>
+            <a:pPr indent="0" marL="0">
+              <a:buNone/>
+            </a:pPr>
+            <a:endParaRPr lang="en-US" sz="1100" dirty="0"/>
+          </a:p>
+          <a:p>
+            <a:pPr indent="0" marL="0">
+              <a:buNone/>
+            </a:pPr>
+            <a:r>
+              <a:rPr lang="en-US" sz="1100" i="1" dirty="0">
+                <a:solidFill>
+                  <a:srgbClr val="8B88B5"/>
+                </a:solidFill>
+                <a:latin typeface="Consolas" pitchFamily="34" charset="0"/>
+                <a:ea typeface="Consolas" pitchFamily="34" charset="-122"/>
+                <a:cs typeface="Consolas" pitchFamily="34" charset="-120"/>
+              </a:rPr>
+              <a:t>// 4. Stream the response, token by token</a:t>
+            </a:r>
+            <a:pPr indent="0" marL="0">
+              <a:buNone/>
+            </a:pPr>
+            <a:endParaRPr lang="en-US" sz="1100" dirty="0"/>
+          </a:p>
+          <a:p>
+            <a:pPr indent="0" marL="0">
+              <a:buNone/>
+            </a:pPr>
+            <a:r>
+              <a:rPr lang="en-US" sz="1100" dirty="0">
+                <a:solidFill>
                   <a:srgbClr val="FB7185"/>
                 </a:solidFill>
                 <a:latin typeface="Consolas" pitchFamily="34" charset="0"/>
                 <a:ea typeface="Consolas" pitchFamily="34" charset="-122"/>
                 <a:cs typeface="Consolas" pitchFamily="34" charset="-120"/>
               </a:rPr>
-              <a:t>new</a:t>
+              <a:t>await</a:t>
             </a:r>
             <a:pPr indent="0" marL="0">
               <a:buNone/>
@@ -4628,13 +5136,27 @@
             <a:r>
               <a:rPr lang="en-US" sz="1100" dirty="0">
                 <a:solidFill>
+                  <a:srgbClr val="FB7185"/>
+                </a:solidFill>
+                <a:latin typeface="Consolas" pitchFamily="34" charset="0"/>
+                <a:ea typeface="Consolas" pitchFamily="34" charset="-122"/>
+                <a:cs typeface="Consolas" pitchFamily="34" charset="-120"/>
+              </a:rPr>
+              <a:t>foreach</a:t>
+            </a:r>
+            <a:pPr indent="0" marL="0">
+              <a:buNone/>
+            </a:pPr>
+            <a:r>
+              <a:rPr lang="en-US" sz="1100" dirty="0">
+                <a:solidFill>
                   <a:srgbClr val="FAF8FF"/>
                 </a:solidFill>
                 <a:latin typeface="Consolas" pitchFamily="34" charset="0"/>
                 <a:ea typeface="Consolas" pitchFamily="34" charset="-122"/>
                 <a:cs typeface="Consolas" pitchFamily="34" charset="-120"/>
               </a:rPr>
-              <a:t>TravelToolContext</a:t>
+              <a:t> </a:t>
             </a:r>
             <a:pPr indent="0" marL="0">
               <a:buNone/>
@@ -4656,13 +5178,13 @@
             <a:r>
               <a:rPr lang="en-US" sz="1100" dirty="0">
                 <a:solidFill>
-                  <a:srgbClr val="B8B5D9"/>
-                </a:solidFill>
-                <a:latin typeface="Consolas" pitchFamily="34" charset="0"/>
-                <a:ea typeface="Consolas" pitchFamily="34" charset="-122"/>
-                <a:cs typeface="Consolas" pitchFamily="34" charset="-120"/>
-              </a:rPr>
-              <a:t>)</a:t>
+                  <a:srgbClr val="FB7185"/>
+                </a:solidFill>
+                <a:latin typeface="Consolas" pitchFamily="34" charset="0"/>
+                <a:ea typeface="Consolas" pitchFamily="34" charset="-122"/>
+                <a:cs typeface="Consolas" pitchFamily="34" charset="-120"/>
+              </a:rPr>
+              <a:t>var</a:t>
             </a:r>
             <a:pPr indent="0" marL="0">
               <a:buNone/>
@@ -4670,13 +5192,13 @@
             <a:r>
               <a:rPr lang="en-US" sz="1100" dirty="0">
                 <a:solidFill>
-                  <a:srgbClr val="B8B5D9"/>
-                </a:solidFill>
-                <a:latin typeface="Consolas" pitchFamily="34" charset="0"/>
-                <a:ea typeface="Consolas" pitchFamily="34" charset="-122"/>
-                <a:cs typeface="Consolas" pitchFamily="34" charset="-120"/>
-              </a:rPr>
-              <a:t>.</a:t>
+                  <a:srgbClr val="FAF8FF"/>
+                </a:solidFill>
+                <a:latin typeface="Consolas" pitchFamily="34" charset="0"/>
+                <a:ea typeface="Consolas" pitchFamily="34" charset="-122"/>
+                <a:cs typeface="Consolas" pitchFamily="34" charset="-120"/>
+              </a:rPr>
+              <a:t> update </a:t>
             </a:r>
             <a:pPr indent="0" marL="0">
               <a:buNone/>
@@ -4684,363 +5206,27 @@
             <a:r>
               <a:rPr lang="en-US" sz="1100" dirty="0">
                 <a:solidFill>
+                  <a:srgbClr val="FB7185"/>
+                </a:solidFill>
+                <a:latin typeface="Consolas" pitchFamily="34" charset="0"/>
+                <a:ea typeface="Consolas" pitchFamily="34" charset="-122"/>
+                <a:cs typeface="Consolas" pitchFamily="34" charset="-120"/>
+              </a:rPr>
+              <a:t>in</a:t>
+            </a:r>
+            <a:pPr indent="0" marL="0">
+              <a:buNone/>
+            </a:pPr>
+            <a:r>
+              <a:rPr lang="en-US" sz="1100" dirty="0">
+                <a:solidFill>
                   <a:srgbClr val="FAF8FF"/>
                 </a:solidFill>
                 <a:latin typeface="Consolas" pitchFamily="34" charset="0"/>
                 <a:ea typeface="Consolas" pitchFamily="34" charset="-122"/>
                 <a:cs typeface="Consolas" pitchFamily="34" charset="-120"/>
               </a:rPr>
-              <a:t>Tools</a:t>
-            </a:r>
-            <a:pPr indent="0" marL="0">
-              <a:buNone/>
-            </a:pPr>
-            <a:r>
-              <a:rPr lang="en-US" sz="1100" dirty="0">
-                <a:solidFill>
-                  <a:srgbClr val="B8B5D9"/>
-                </a:solidFill>
-                <a:latin typeface="Consolas" pitchFamily="34" charset="0"/>
-                <a:ea typeface="Consolas" pitchFamily="34" charset="-122"/>
-                <a:cs typeface="Consolas" pitchFamily="34" charset="-120"/>
-              </a:rPr>
-              <a:t>)</a:t>
-            </a:r>
-            <a:pPr indent="0" marL="0">
-              <a:buNone/>
-            </a:pPr>
-            <a:r>
-              <a:rPr lang="en-US" sz="1100" dirty="0">
-                <a:solidFill>
-                  <a:srgbClr val="B8B5D9"/>
-                </a:solidFill>
-                <a:latin typeface="Consolas" pitchFamily="34" charset="0"/>
-                <a:ea typeface="Consolas" pitchFamily="34" charset="-122"/>
-                <a:cs typeface="Consolas" pitchFamily="34" charset="-120"/>
-              </a:rPr>
-              <a:t>;</a:t>
-            </a:r>
-            <a:pPr indent="0" marL="0">
-              <a:buNone/>
-            </a:pPr>
-            <a:endParaRPr lang="en-US" sz="1100" dirty="0"/>
-          </a:p>
-          <a:p>
-            <a:pPr indent="0" marL="0">
-              <a:buNone/>
-            </a:pPr>
-            <a:endParaRPr lang="en-US" sz="1100" dirty="0"/>
-          </a:p>
-          <a:p>
-            <a:pPr indent="0" marL="0">
-              <a:buNone/>
-            </a:pPr>
-            <a:r>
-              <a:rPr lang="en-US" sz="1100" i="1" dirty="0">
-                <a:solidFill>
-                  <a:srgbClr val="8B88B5"/>
-                </a:solidFill>
-                <a:latin typeface="Consolas" pitchFamily="34" charset="0"/>
-                <a:ea typeface="Consolas" pitchFamily="34" charset="-122"/>
-                <a:cs typeface="Consolas" pitchFamily="34" charset="-120"/>
-              </a:rPr>
-              <a:t>// 3. Keep a thread for conversation state</a:t>
-            </a:r>
-            <a:pPr indent="0" marL="0">
-              <a:buNone/>
-            </a:pPr>
-            <a:endParaRPr lang="en-US" sz="1100" dirty="0"/>
-          </a:p>
-          <a:p>
-            <a:pPr indent="0" marL="0">
-              <a:buNone/>
-            </a:pPr>
-            <a:r>
-              <a:rPr lang="en-US" sz="1100" dirty="0">
-                <a:solidFill>
-                  <a:srgbClr val="A78BFA"/>
-                </a:solidFill>
-                <a:latin typeface="Consolas" pitchFamily="34" charset="0"/>
-                <a:ea typeface="Consolas" pitchFamily="34" charset="-122"/>
-                <a:cs typeface="Consolas" pitchFamily="34" charset="-120"/>
-              </a:rPr>
-              <a:t>AgentThread</a:t>
-            </a:r>
-            <a:pPr indent="0" marL="0">
-              <a:buNone/>
-            </a:pPr>
-            <a:r>
-              <a:rPr lang="en-US" sz="1100" dirty="0">
-                <a:solidFill>
-                  <a:srgbClr val="FAF8FF"/>
-                </a:solidFill>
-                <a:latin typeface="Consolas" pitchFamily="34" charset="0"/>
-                <a:ea typeface="Consolas" pitchFamily="34" charset="-122"/>
-                <a:cs typeface="Consolas" pitchFamily="34" charset="-120"/>
-              </a:rPr>
-              <a:t> thread </a:t>
-            </a:r>
-            <a:pPr indent="0" marL="0">
-              <a:buNone/>
-            </a:pPr>
-            <a:r>
-              <a:rPr lang="en-US" sz="1100" dirty="0">
-                <a:solidFill>
-                  <a:srgbClr val="CFCBED"/>
-                </a:solidFill>
-                <a:latin typeface="Consolas" pitchFamily="34" charset="0"/>
-                <a:ea typeface="Consolas" pitchFamily="34" charset="-122"/>
-                <a:cs typeface="Consolas" pitchFamily="34" charset="-120"/>
-              </a:rPr>
-              <a:t>=</a:t>
-            </a:r>
-            <a:pPr indent="0" marL="0">
-              <a:buNone/>
-            </a:pPr>
-            <a:r>
-              <a:rPr lang="en-US" sz="1100" dirty="0">
-                <a:solidFill>
-                  <a:srgbClr val="FAF8FF"/>
-                </a:solidFill>
-                <a:latin typeface="Consolas" pitchFamily="34" charset="0"/>
-                <a:ea typeface="Consolas" pitchFamily="34" charset="-122"/>
-                <a:cs typeface="Consolas" pitchFamily="34" charset="-120"/>
-              </a:rPr>
               <a:t> agent</a:t>
-            </a:r>
-            <a:pPr indent="0" marL="0">
-              <a:buNone/>
-            </a:pPr>
-            <a:r>
-              <a:rPr lang="en-US" sz="1100" dirty="0">
-                <a:solidFill>
-                  <a:srgbClr val="B8B5D9"/>
-                </a:solidFill>
-                <a:latin typeface="Consolas" pitchFamily="34" charset="0"/>
-                <a:ea typeface="Consolas" pitchFamily="34" charset="-122"/>
-                <a:cs typeface="Consolas" pitchFamily="34" charset="-120"/>
-              </a:rPr>
-              <a:t>.</a:t>
-            </a:r>
-            <a:pPr indent="0" marL="0">
-              <a:buNone/>
-            </a:pPr>
-            <a:r>
-              <a:rPr lang="en-US" sz="1100" dirty="0">
-                <a:solidFill>
-                  <a:srgbClr val="86EFAC"/>
-                </a:solidFill>
-                <a:latin typeface="Consolas" pitchFamily="34" charset="0"/>
-                <a:ea typeface="Consolas" pitchFamily="34" charset="-122"/>
-                <a:cs typeface="Consolas" pitchFamily="34" charset="-120"/>
-              </a:rPr>
-              <a:t>GetNewThread</a:t>
-            </a:r>
-            <a:pPr indent="0" marL="0">
-              <a:buNone/>
-            </a:pPr>
-            <a:r>
-              <a:rPr lang="en-US" sz="1100" dirty="0">
-                <a:solidFill>
-                  <a:srgbClr val="B8B5D9"/>
-                </a:solidFill>
-                <a:latin typeface="Consolas" pitchFamily="34" charset="0"/>
-                <a:ea typeface="Consolas" pitchFamily="34" charset="-122"/>
-                <a:cs typeface="Consolas" pitchFamily="34" charset="-120"/>
-              </a:rPr>
-              <a:t>(</a:t>
-            </a:r>
-            <a:pPr indent="0" marL="0">
-              <a:buNone/>
-            </a:pPr>
-            <a:r>
-              <a:rPr lang="en-US" sz="1100" dirty="0">
-                <a:solidFill>
-                  <a:srgbClr val="B8B5D9"/>
-                </a:solidFill>
-                <a:latin typeface="Consolas" pitchFamily="34" charset="0"/>
-                <a:ea typeface="Consolas" pitchFamily="34" charset="-122"/>
-                <a:cs typeface="Consolas" pitchFamily="34" charset="-120"/>
-              </a:rPr>
-              <a:t>)</a:t>
-            </a:r>
-            <a:pPr indent="0" marL="0">
-              <a:buNone/>
-            </a:pPr>
-            <a:r>
-              <a:rPr lang="en-US" sz="1100" dirty="0">
-                <a:solidFill>
-                  <a:srgbClr val="B8B5D9"/>
-                </a:solidFill>
-                <a:latin typeface="Consolas" pitchFamily="34" charset="0"/>
-                <a:ea typeface="Consolas" pitchFamily="34" charset="-122"/>
-                <a:cs typeface="Consolas" pitchFamily="34" charset="-120"/>
-              </a:rPr>
-              <a:t>;</a:t>
-            </a:r>
-            <a:pPr indent="0" marL="0">
-              <a:buNone/>
-            </a:pPr>
-            <a:endParaRPr lang="en-US" sz="1100" dirty="0"/>
-          </a:p>
-          <a:p>
-            <a:pPr indent="0" marL="0">
-              <a:buNone/>
-            </a:pPr>
-            <a:endParaRPr lang="en-US" sz="1100" dirty="0"/>
-          </a:p>
-          <a:p>
-            <a:pPr indent="0" marL="0">
-              <a:buNone/>
-            </a:pPr>
-            <a:r>
-              <a:rPr lang="en-US" sz="1100" i="1" dirty="0">
-                <a:solidFill>
-                  <a:srgbClr val="8B88B5"/>
-                </a:solidFill>
-                <a:latin typeface="Consolas" pitchFamily="34" charset="0"/>
-                <a:ea typeface="Consolas" pitchFamily="34" charset="-122"/>
-                <a:cs typeface="Consolas" pitchFamily="34" charset="-120"/>
-              </a:rPr>
-              <a:t>// 4. Stream the response, token by token</a:t>
-            </a:r>
-            <a:pPr indent="0" marL="0">
-              <a:buNone/>
-            </a:pPr>
-            <a:endParaRPr lang="en-US" sz="1100" dirty="0"/>
-          </a:p>
-          <a:p>
-            <a:pPr indent="0" marL="0">
-              <a:buNone/>
-            </a:pPr>
-            <a:r>
-              <a:rPr lang="en-US" sz="1100" dirty="0">
-                <a:solidFill>
-                  <a:srgbClr val="FB7185"/>
-                </a:solidFill>
-                <a:latin typeface="Consolas" pitchFamily="34" charset="0"/>
-                <a:ea typeface="Consolas" pitchFamily="34" charset="-122"/>
-                <a:cs typeface="Consolas" pitchFamily="34" charset="-120"/>
-              </a:rPr>
-              <a:t>await</a:t>
-            </a:r>
-            <a:pPr indent="0" marL="0">
-              <a:buNone/>
-            </a:pPr>
-            <a:r>
-              <a:rPr lang="en-US" sz="1100" dirty="0">
-                <a:solidFill>
-                  <a:srgbClr val="FAF8FF"/>
-                </a:solidFill>
-                <a:latin typeface="Consolas" pitchFamily="34" charset="0"/>
-                <a:ea typeface="Consolas" pitchFamily="34" charset="-122"/>
-                <a:cs typeface="Consolas" pitchFamily="34" charset="-120"/>
-              </a:rPr>
-              <a:t> </a:t>
-            </a:r>
-            <a:pPr indent="0" marL="0">
-              <a:buNone/>
-            </a:pPr>
-            <a:r>
-              <a:rPr lang="en-US" sz="1100" dirty="0">
-                <a:solidFill>
-                  <a:srgbClr val="FB7185"/>
-                </a:solidFill>
-                <a:latin typeface="Consolas" pitchFamily="34" charset="0"/>
-                <a:ea typeface="Consolas" pitchFamily="34" charset="-122"/>
-                <a:cs typeface="Consolas" pitchFamily="34" charset="-120"/>
-              </a:rPr>
-              <a:t>foreach</a:t>
-            </a:r>
-            <a:pPr indent="0" marL="0">
-              <a:buNone/>
-            </a:pPr>
-            <a:r>
-              <a:rPr lang="en-US" sz="1100" dirty="0">
-                <a:solidFill>
-                  <a:srgbClr val="FAF8FF"/>
-                </a:solidFill>
-                <a:latin typeface="Consolas" pitchFamily="34" charset="0"/>
-                <a:ea typeface="Consolas" pitchFamily="34" charset="-122"/>
-                <a:cs typeface="Consolas" pitchFamily="34" charset="-120"/>
-              </a:rPr>
-              <a:t> </a:t>
-            </a:r>
-            <a:pPr indent="0" marL="0">
-              <a:buNone/>
-            </a:pPr>
-            <a:r>
-              <a:rPr lang="en-US" sz="1100" dirty="0">
-                <a:solidFill>
-                  <a:srgbClr val="B8B5D9"/>
-                </a:solidFill>
-                <a:latin typeface="Consolas" pitchFamily="34" charset="0"/>
-                <a:ea typeface="Consolas" pitchFamily="34" charset="-122"/>
-                <a:cs typeface="Consolas" pitchFamily="34" charset="-120"/>
-              </a:rPr>
-              <a:t>(</a:t>
-            </a:r>
-            <a:pPr indent="0" marL="0">
-              <a:buNone/>
-            </a:pPr>
-            <a:r>
-              <a:rPr lang="en-US" sz="1100" dirty="0">
-                <a:solidFill>
-                  <a:srgbClr val="FB7185"/>
-                </a:solidFill>
-                <a:latin typeface="Consolas" pitchFamily="34" charset="0"/>
-                <a:ea typeface="Consolas" pitchFamily="34" charset="-122"/>
-                <a:cs typeface="Consolas" pitchFamily="34" charset="-120"/>
-              </a:rPr>
-              <a:t>var</a:t>
-            </a:r>
-            <a:pPr indent="0" marL="0">
-              <a:buNone/>
-            </a:pPr>
-            <a:r>
-              <a:rPr lang="en-US" sz="1100" dirty="0">
-                <a:solidFill>
-                  <a:srgbClr val="FAF8FF"/>
-                </a:solidFill>
-                <a:latin typeface="Consolas" pitchFamily="34" charset="0"/>
-                <a:ea typeface="Consolas" pitchFamily="34" charset="-122"/>
-                <a:cs typeface="Consolas" pitchFamily="34" charset="-120"/>
-              </a:rPr>
-              <a:t> update </a:t>
-            </a:r>
-            <a:pPr indent="0" marL="0">
-              <a:buNone/>
-            </a:pPr>
-            <a:r>
-              <a:rPr lang="en-US" sz="1100" dirty="0">
-                <a:solidFill>
-                  <a:srgbClr val="FB7185"/>
-                </a:solidFill>
-                <a:latin typeface="Consolas" pitchFamily="34" charset="0"/>
-                <a:ea typeface="Consolas" pitchFamily="34" charset="-122"/>
-                <a:cs typeface="Consolas" pitchFamily="34" charset="-120"/>
-              </a:rPr>
-              <a:t>in</a:t>
-            </a:r>
-            <a:pPr indent="0" marL="0">
-              <a:buNone/>
-            </a:pPr>
-            <a:endParaRPr lang="en-US" sz="1100" dirty="0"/>
-          </a:p>
-          <a:p>
-            <a:pPr indent="0" marL="0">
-              <a:buNone/>
-            </a:pPr>
-            <a:r>
-              <a:rPr lang="en-US" sz="1100" dirty="0">
-                <a:solidFill>
-                  <a:srgbClr val="FAF8FF"/>
-                </a:solidFill>
-                <a:latin typeface="Consolas" pitchFamily="34" charset="0"/>
-                <a:ea typeface="Consolas" pitchFamily="34" charset="-122"/>
-                <a:cs typeface="Consolas" pitchFamily="34" charset="-120"/>
-              </a:rPr>
-              <a:t>    agent</a:t>
             </a:r>
             <a:pPr indent="0" marL="0">
               <a:buNone/>
@@ -6222,7 +6408,7 @@
                 <a:ea typeface="Calibri" pitchFamily="34" charset="-122"/>
                 <a:cs typeface="Calibri" pitchFamily="34" charset="-120"/>
               </a:rPr>
-              <a:t>11 / 14</a:t>
+              <a:t>11 / 16</a:t>
             </a:r>
             <a:endParaRPr lang="en-US" sz="1000" dirty="0"/>
           </a:p>
@@ -6344,7 +6530,7 @@
         <p:spPr>
           <a:xfrm>
             <a:off x="822960" y="640080"/>
-            <a:ext cx="5486400" cy="548640"/>
+            <a:ext cx="5486400" cy="457200"/>
           </a:xfrm>
           <a:prstGeom prst="rect">
             <a:avLst/>
@@ -6382,24 +6568,24 @@
         </p:nvSpPr>
         <p:spPr>
           <a:xfrm>
-            <a:off x="822960" y="1280160"/>
-            <a:ext cx="10972800" cy="1188720"/>
-          </a:xfrm>
-          <a:prstGeom prst="rect">
-            <a:avLst/>
-          </a:prstGeom>
-          <a:noFill/>
-          <a:ln/>
-        </p:spPr>
-        <p:txBody>
-          <a:bodyPr wrap="square" rtlCol="0" anchor="ctr"/>
-          <a:lstStyle/>
-          <a:p>
-            <a:pPr indent="0" marL="0">
-              <a:buNone/>
-            </a:pPr>
-            <a:r>
-              <a:rPr lang="en-US" sz="6000" b="1" dirty="0">
+            <a:off x="822960" y="1143000"/>
+            <a:ext cx="10972800" cy="914400"/>
+          </a:xfrm>
+          <a:prstGeom prst="rect">
+            <a:avLst/>
+          </a:prstGeom>
+          <a:noFill/>
+          <a:ln/>
+        </p:spPr>
+        <p:txBody>
+          <a:bodyPr wrap="square" rtlCol="0" anchor="ctr"/>
+          <a:lstStyle/>
+          <a:p>
+            <a:pPr indent="0" marL="0">
+              <a:buNone/>
+            </a:pPr>
+            <a:r>
+              <a:rPr lang="en-US" sz="5200" b="1" dirty="0">
                 <a:solidFill>
                   <a:srgbClr val="FAF8FF"/>
                 </a:solidFill>
@@ -6409,7 +6595,7 @@
               </a:rPr>
               <a:t>Mixing It All</a:t>
             </a:r>
-            <a:endParaRPr lang="en-US" sz="6000" dirty="0"/>
+            <a:endParaRPr lang="en-US" sz="5200" dirty="0"/>
           </a:p>
         </p:txBody>
       </p:sp>
@@ -6421,24 +6607,24 @@
         </p:nvSpPr>
         <p:spPr>
           <a:xfrm>
-            <a:off x="822960" y="2468880"/>
-            <a:ext cx="10972800" cy="457200"/>
-          </a:xfrm>
-          <a:prstGeom prst="rect">
-            <a:avLst/>
-          </a:prstGeom>
-          <a:noFill/>
-          <a:ln/>
-        </p:spPr>
-        <p:txBody>
-          <a:bodyPr wrap="square" rtlCol="0" anchor="ctr"/>
-          <a:lstStyle/>
-          <a:p>
-            <a:pPr indent="0" marL="0">
-              <a:buNone/>
-            </a:pPr>
-            <a:r>
-              <a:rPr lang="en-US" sz="1800" i="1" dirty="0">
+            <a:off x="822960" y="2148840"/>
+            <a:ext cx="10972800" cy="411480"/>
+          </a:xfrm>
+          <a:prstGeom prst="rect">
+            <a:avLst/>
+          </a:prstGeom>
+          <a:noFill/>
+          <a:ln/>
+        </p:spPr>
+        <p:txBody>
+          <a:bodyPr wrap="square" rtlCol="0" anchor="ctr"/>
+          <a:lstStyle/>
+          <a:p>
+            <a:pPr indent="0" marL="0">
+              <a:buNone/>
+            </a:pPr>
+            <a:r>
+              <a:rPr lang="en-US" sz="1700" i="1" dirty="0">
                 <a:solidFill>
                   <a:srgbClr val="CFCBED"/>
                 </a:solidFill>
@@ -6446,9 +6632,9 @@
                 <a:ea typeface="Calibri" pitchFamily="34" charset="-122"/>
                 <a:cs typeface="Calibri" pitchFamily="34" charset="-120"/>
               </a:rPr>
-              <a:t>One MAUI app. Three AI tiers. Same AIAgent code path.</a:t>
-            </a:r>
-            <a:endParaRPr lang="en-US" sz="1800" dirty="0"/>
+              <a:t>Three different chatClient brains.  Same agent code path.</a:t>
+            </a:r>
+            <a:endParaRPr lang="en-US" sz="1700" dirty="0"/>
           </a:p>
         </p:txBody>
       </p:sp>
@@ -6460,956 +6646,18 @@
         </p:nvSpPr>
         <p:spPr>
           <a:xfrm>
-            <a:off x="822960" y="3200400"/>
-            <a:ext cx="3657600" cy="2194560"/>
+            <a:off x="822960" y="2697480"/>
+            <a:ext cx="10911535" cy="3794760"/>
           </a:xfrm>
           <a:prstGeom prst="roundRect">
             <a:avLst>
-              <a:gd name="adj" fmla="val 4167"/>
+              <a:gd name="adj" fmla="val 2410"/>
             </a:avLst>
           </a:prstGeom>
           <a:solidFill>
             <a:srgbClr val="1E1B4B"/>
           </a:solidFill>
-          <a:ln w="25400">
-            <a:solidFill>
-              <a:srgbClr val="FB7185"/>
-            </a:solidFill>
-            <a:prstDash val="solid"/>
-          </a:ln>
-        </p:spPr>
-      </p:sp>
-      <p:sp>
-        <p:nvSpPr>
-          <p:cNvPr id="9" name="Text 7"/>
-          <p:cNvSpPr/>
-          <p:nvPr/>
-        </p:nvSpPr>
-        <p:spPr>
-          <a:xfrm>
-            <a:off x="1005840" y="3337560"/>
-            <a:ext cx="3291840" cy="320040"/>
-          </a:xfrm>
-          <a:prstGeom prst="rect">
-            <a:avLst/>
-          </a:prstGeom>
-          <a:noFill/>
-          <a:ln/>
-        </p:spPr>
-        <p:txBody>
-          <a:bodyPr wrap="square" rtlCol="0" anchor="ctr"/>
-          <a:lstStyle/>
-          <a:p>
-            <a:pPr indent="0" marL="0">
-              <a:buNone/>
-            </a:pPr>
-            <a:r>
-              <a:rPr lang="en-US" sz="1200" b="1" spc="300" kern="0" dirty="0">
-                <a:solidFill>
-                  <a:srgbClr val="FB7185"/>
-                </a:solidFill>
-                <a:latin typeface="Calibri" pitchFamily="34" charset="0"/>
-                <a:ea typeface="Calibri" pitchFamily="34" charset="-122"/>
-                <a:cs typeface="Calibri" pitchFamily="34" charset="-120"/>
-              </a:rPr>
-              <a:t>OS LOCAL</a:t>
-            </a:r>
-            <a:endParaRPr lang="en-US" sz="1200" dirty="0"/>
-          </a:p>
-        </p:txBody>
-      </p:sp>
-      <p:sp>
-        <p:nvSpPr>
-          <p:cNvPr id="10" name="Text 8"/>
-          <p:cNvSpPr/>
-          <p:nvPr/>
-        </p:nvSpPr>
-        <p:spPr>
-          <a:xfrm>
-            <a:off x="1005840" y="3703320"/>
-            <a:ext cx="3291840" cy="1645920"/>
-          </a:xfrm>
-          <a:prstGeom prst="rect">
-            <a:avLst/>
-          </a:prstGeom>
-          <a:noFill/>
-          <a:ln/>
-        </p:spPr>
-        <p:txBody>
-          <a:bodyPr wrap="square" rtlCol="0" anchor="ctr"/>
-          <a:lstStyle/>
-          <a:p>
-            <a:pPr indent="0" marL="0">
-              <a:buNone/>
-            </a:pPr>
-            <a:r>
-              <a:rPr lang="en-US" sz="1000" dirty="0">
-                <a:solidFill>
-                  <a:srgbClr val="FAF8FF"/>
-                </a:solidFill>
-                <a:latin typeface="Consolas" pitchFamily="34" charset="0"/>
-                <a:ea typeface="Consolas" pitchFamily="34" charset="-122"/>
-                <a:cs typeface="Consolas" pitchFamily="34" charset="-120"/>
-              </a:rPr>
-              <a:t>chatClient </a:t>
-            </a:r>
-            <a:pPr indent="0" marL="0">
-              <a:buNone/>
-            </a:pPr>
-            <a:r>
-              <a:rPr lang="en-US" sz="1000" dirty="0">
-                <a:solidFill>
-                  <a:srgbClr val="CFCBED"/>
-                </a:solidFill>
-                <a:latin typeface="Consolas" pitchFamily="34" charset="0"/>
-                <a:ea typeface="Consolas" pitchFamily="34" charset="-122"/>
-                <a:cs typeface="Consolas" pitchFamily="34" charset="-120"/>
-              </a:rPr>
-              <a:t>=</a:t>
-            </a:r>
-            <a:pPr indent="0" marL="0">
-              <a:buNone/>
-            </a:pPr>
-            <a:r>
-              <a:rPr lang="en-US" sz="1000" dirty="0">
-                <a:solidFill>
-                  <a:srgbClr val="FAF8FF"/>
-                </a:solidFill>
-                <a:latin typeface="Consolas" pitchFamily="34" charset="0"/>
-                <a:ea typeface="Consolas" pitchFamily="34" charset="-122"/>
-                <a:cs typeface="Consolas" pitchFamily="34" charset="-120"/>
-              </a:rPr>
-              <a:t> </a:t>
-            </a:r>
-            <a:pPr indent="0" marL="0">
-              <a:buNone/>
-            </a:pPr>
-            <a:r>
-              <a:rPr lang="en-US" sz="1000" dirty="0">
-                <a:solidFill>
-                  <a:srgbClr val="FB7185"/>
-                </a:solidFill>
-                <a:latin typeface="Consolas" pitchFamily="34" charset="0"/>
-                <a:ea typeface="Consolas" pitchFamily="34" charset="-122"/>
-                <a:cs typeface="Consolas" pitchFamily="34" charset="-120"/>
-              </a:rPr>
-              <a:t>new</a:t>
-            </a:r>
-            <a:pPr indent="0" marL="0">
-              <a:buNone/>
-            </a:pPr>
-            <a:r>
-              <a:rPr lang="en-US" sz="1000" dirty="0">
-                <a:solidFill>
-                  <a:srgbClr val="FAF8FF"/>
-                </a:solidFill>
-                <a:latin typeface="Consolas" pitchFamily="34" charset="0"/>
-                <a:ea typeface="Consolas" pitchFamily="34" charset="-122"/>
-                <a:cs typeface="Consolas" pitchFamily="34" charset="-120"/>
-              </a:rPr>
-              <a:t> </a:t>
-            </a:r>
-            <a:pPr indent="0" marL="0">
-              <a:buNone/>
-            </a:pPr>
-            <a:r>
-              <a:rPr lang="en-US" sz="1000" dirty="0">
-                <a:solidFill>
-                  <a:srgbClr val="FAF8FF"/>
-                </a:solidFill>
-                <a:latin typeface="Consolas" pitchFamily="34" charset="0"/>
-                <a:ea typeface="Consolas" pitchFamily="34" charset="-122"/>
-                <a:cs typeface="Consolas" pitchFamily="34" charset="-120"/>
-              </a:rPr>
-              <a:t>AppleIntelligenceChatClient</a:t>
-            </a:r>
-            <a:pPr indent="0" marL="0">
-              <a:buNone/>
-            </a:pPr>
-            <a:r>
-              <a:rPr lang="en-US" sz="1000" dirty="0">
-                <a:solidFill>
-                  <a:srgbClr val="B8B5D9"/>
-                </a:solidFill>
-                <a:latin typeface="Consolas" pitchFamily="34" charset="0"/>
-                <a:ea typeface="Consolas" pitchFamily="34" charset="-122"/>
-                <a:cs typeface="Consolas" pitchFamily="34" charset="-120"/>
-              </a:rPr>
-              <a:t>(</a:t>
-            </a:r>
-            <a:pPr indent="0" marL="0">
-              <a:buNone/>
-            </a:pPr>
-            <a:r>
-              <a:rPr lang="en-US" sz="1000" dirty="0">
-                <a:solidFill>
-                  <a:srgbClr val="B8B5D9"/>
-                </a:solidFill>
-                <a:latin typeface="Consolas" pitchFamily="34" charset="0"/>
-                <a:ea typeface="Consolas" pitchFamily="34" charset="-122"/>
-                <a:cs typeface="Consolas" pitchFamily="34" charset="-120"/>
-              </a:rPr>
-              <a:t>)</a:t>
-            </a:r>
-            <a:pPr indent="0" marL="0">
-              <a:buNone/>
-            </a:pPr>
-            <a:r>
-              <a:rPr lang="en-US" sz="1000" dirty="0">
-                <a:solidFill>
-                  <a:srgbClr val="B8B5D9"/>
-                </a:solidFill>
-                <a:latin typeface="Consolas" pitchFamily="34" charset="0"/>
-                <a:ea typeface="Consolas" pitchFamily="34" charset="-122"/>
-                <a:cs typeface="Consolas" pitchFamily="34" charset="-120"/>
-              </a:rPr>
-              <a:t>;</a:t>
-            </a:r>
-            <a:pPr indent="0" marL="0">
-              <a:buNone/>
-            </a:pPr>
-            <a:endParaRPr lang="en-US" sz="1000" dirty="0"/>
-          </a:p>
-          <a:p>
-            <a:pPr indent="0" marL="0">
-              <a:buNone/>
-            </a:pPr>
-            <a:r>
-              <a:rPr lang="en-US" sz="1000" i="1" dirty="0">
-                <a:solidFill>
-                  <a:srgbClr val="8B88B5"/>
-                </a:solidFill>
-                <a:latin typeface="Consolas" pitchFamily="34" charset="0"/>
-                <a:ea typeface="Consolas" pitchFamily="34" charset="-122"/>
-                <a:cs typeface="Consolas" pitchFamily="34" charset="-120"/>
-              </a:rPr>
-              <a:t>//  Microsoft.Maui.Essentials.AI</a:t>
-            </a:r>
-            <a:endParaRPr lang="en-US" sz="1000" dirty="0"/>
-          </a:p>
-        </p:txBody>
-      </p:sp>
-      <p:sp>
-        <p:nvSpPr>
-          <p:cNvPr id="11" name="Shape 9"/>
-          <p:cNvSpPr/>
-          <p:nvPr/>
-        </p:nvSpPr>
-        <p:spPr>
-          <a:xfrm>
-            <a:off x="4617720" y="3200400"/>
-            <a:ext cx="3657600" cy="2194560"/>
-          </a:xfrm>
-          <a:prstGeom prst="roundRect">
-            <a:avLst>
-              <a:gd name="adj" fmla="val 4167"/>
-            </a:avLst>
-          </a:prstGeom>
-          <a:solidFill>
-            <a:srgbClr val="1E1B4B"/>
-          </a:solidFill>
-          <a:ln w="25400">
-            <a:solidFill>
-              <a:srgbClr val="FBBF24"/>
-            </a:solidFill>
-            <a:prstDash val="solid"/>
-          </a:ln>
-        </p:spPr>
-      </p:sp>
-      <p:sp>
-        <p:nvSpPr>
-          <p:cNvPr id="12" name="Text 10"/>
-          <p:cNvSpPr/>
-          <p:nvPr/>
-        </p:nvSpPr>
-        <p:spPr>
-          <a:xfrm>
-            <a:off x="4800600" y="3337560"/>
-            <a:ext cx="3291840" cy="320040"/>
-          </a:xfrm>
-          <a:prstGeom prst="rect">
-            <a:avLst/>
-          </a:prstGeom>
-          <a:noFill/>
-          <a:ln/>
-        </p:spPr>
-        <p:txBody>
-          <a:bodyPr wrap="square" rtlCol="0" anchor="ctr"/>
-          <a:lstStyle/>
-          <a:p>
-            <a:pPr indent="0" marL="0">
-              <a:buNone/>
-            </a:pPr>
-            <a:r>
-              <a:rPr lang="en-US" sz="1200" b="1" spc="300" kern="0" dirty="0">
-                <a:solidFill>
-                  <a:srgbClr val="FBBF24"/>
-                </a:solidFill>
-                <a:latin typeface="Calibri" pitchFamily="34" charset="0"/>
-                <a:ea typeface="Calibri" pitchFamily="34" charset="-122"/>
-                <a:cs typeface="Calibri" pitchFamily="34" charset="-120"/>
-              </a:rPr>
-              <a:t>BYO LOCAL</a:t>
-            </a:r>
-            <a:endParaRPr lang="en-US" sz="1200" dirty="0"/>
-          </a:p>
-        </p:txBody>
-      </p:sp>
-      <p:sp>
-        <p:nvSpPr>
-          <p:cNvPr id="13" name="Text 11"/>
-          <p:cNvSpPr/>
-          <p:nvPr/>
-        </p:nvSpPr>
-        <p:spPr>
-          <a:xfrm>
-            <a:off x="4800600" y="3703320"/>
-            <a:ext cx="3291840" cy="1645920"/>
-          </a:xfrm>
-          <a:prstGeom prst="rect">
-            <a:avLst/>
-          </a:prstGeom>
-          <a:noFill/>
-          <a:ln/>
-        </p:spPr>
-        <p:txBody>
-          <a:bodyPr wrap="square" rtlCol="0" anchor="ctr"/>
-          <a:lstStyle/>
-          <a:p>
-            <a:pPr indent="0" marL="0">
-              <a:buNone/>
-            </a:pPr>
-            <a:r>
-              <a:rPr lang="en-US" sz="1000" dirty="0">
-                <a:solidFill>
-                  <a:srgbClr val="FAF8FF"/>
-                </a:solidFill>
-                <a:latin typeface="Consolas" pitchFamily="34" charset="0"/>
-                <a:ea typeface="Consolas" pitchFamily="34" charset="-122"/>
-                <a:cs typeface="Consolas" pitchFamily="34" charset="-120"/>
-              </a:rPr>
-              <a:t>chatClient </a:t>
-            </a:r>
-            <a:pPr indent="0" marL="0">
-              <a:buNone/>
-            </a:pPr>
-            <a:r>
-              <a:rPr lang="en-US" sz="1000" dirty="0">
-                <a:solidFill>
-                  <a:srgbClr val="CFCBED"/>
-                </a:solidFill>
-                <a:latin typeface="Consolas" pitchFamily="34" charset="0"/>
-                <a:ea typeface="Consolas" pitchFamily="34" charset="-122"/>
-                <a:cs typeface="Consolas" pitchFamily="34" charset="-120"/>
-              </a:rPr>
-              <a:t>=</a:t>
-            </a:r>
-            <a:pPr indent="0" marL="0">
-              <a:buNone/>
-            </a:pPr>
-            <a:r>
-              <a:rPr lang="en-US" sz="1000" dirty="0">
-                <a:solidFill>
-                  <a:srgbClr val="FAF8FF"/>
-                </a:solidFill>
-                <a:latin typeface="Consolas" pitchFamily="34" charset="0"/>
-                <a:ea typeface="Consolas" pitchFamily="34" charset="-122"/>
-                <a:cs typeface="Consolas" pitchFamily="34" charset="-120"/>
-              </a:rPr>
-              <a:t> </a:t>
-            </a:r>
-            <a:pPr indent="0" marL="0">
-              <a:buNone/>
-            </a:pPr>
-            <a:r>
-              <a:rPr lang="en-US" sz="1000" dirty="0">
-                <a:solidFill>
-                  <a:srgbClr val="FB7185"/>
-                </a:solidFill>
-                <a:latin typeface="Consolas" pitchFamily="34" charset="0"/>
-                <a:ea typeface="Consolas" pitchFamily="34" charset="-122"/>
-                <a:cs typeface="Consolas" pitchFamily="34" charset="-120"/>
-              </a:rPr>
-              <a:t>new</a:t>
-            </a:r>
-            <a:pPr indent="0" marL="0">
-              <a:buNone/>
-            </a:pPr>
-            <a:r>
-              <a:rPr lang="en-US" sz="1000" dirty="0">
-                <a:solidFill>
-                  <a:srgbClr val="FAF8FF"/>
-                </a:solidFill>
-                <a:latin typeface="Consolas" pitchFamily="34" charset="0"/>
-                <a:ea typeface="Consolas" pitchFamily="34" charset="-122"/>
-                <a:cs typeface="Consolas" pitchFamily="34" charset="-120"/>
-              </a:rPr>
-              <a:t> </a:t>
-            </a:r>
-            <a:pPr indent="0" marL="0">
-              <a:buNone/>
-            </a:pPr>
-            <a:r>
-              <a:rPr lang="en-US" sz="1000" dirty="0">
-                <a:solidFill>
-                  <a:srgbClr val="FAF8FF"/>
-                </a:solidFill>
-                <a:latin typeface="Consolas" pitchFamily="34" charset="0"/>
-                <a:ea typeface="Consolas" pitchFamily="34" charset="-122"/>
-                <a:cs typeface="Consolas" pitchFamily="34" charset="-120"/>
-              </a:rPr>
-              <a:t>OpenAIClient</a:t>
-            </a:r>
-            <a:pPr indent="0" marL="0">
-              <a:buNone/>
-            </a:pPr>
-            <a:r>
-              <a:rPr lang="en-US" sz="1000" dirty="0">
-                <a:solidFill>
-                  <a:srgbClr val="B8B5D9"/>
-                </a:solidFill>
-                <a:latin typeface="Consolas" pitchFamily="34" charset="0"/>
-                <a:ea typeface="Consolas" pitchFamily="34" charset="-122"/>
-                <a:cs typeface="Consolas" pitchFamily="34" charset="-120"/>
-              </a:rPr>
-              <a:t>(</a:t>
-            </a:r>
-            <a:pPr indent="0" marL="0">
-              <a:buNone/>
-            </a:pPr>
-            <a:endParaRPr lang="en-US" sz="1000" dirty="0"/>
-          </a:p>
-          <a:p>
-            <a:pPr indent="0" marL="0">
-              <a:buNone/>
-            </a:pPr>
-            <a:r>
-              <a:rPr lang="en-US" sz="1000" dirty="0">
-                <a:solidFill>
-                  <a:srgbClr val="FAF8FF"/>
-                </a:solidFill>
-                <a:latin typeface="Consolas" pitchFamily="34" charset="0"/>
-                <a:ea typeface="Consolas" pitchFamily="34" charset="-122"/>
-                <a:cs typeface="Consolas" pitchFamily="34" charset="-120"/>
-              </a:rPr>
-              <a:t>    </a:t>
-            </a:r>
-            <a:pPr indent="0" marL="0">
-              <a:buNone/>
-            </a:pPr>
-            <a:r>
-              <a:rPr lang="en-US" sz="1000" dirty="0">
-                <a:solidFill>
-                  <a:srgbClr val="FB7185"/>
-                </a:solidFill>
-                <a:latin typeface="Consolas" pitchFamily="34" charset="0"/>
-                <a:ea typeface="Consolas" pitchFamily="34" charset="-122"/>
-                <a:cs typeface="Consolas" pitchFamily="34" charset="-120"/>
-              </a:rPr>
-              <a:t>new</a:t>
-            </a:r>
-            <a:pPr indent="0" marL="0">
-              <a:buNone/>
-            </a:pPr>
-            <a:r>
-              <a:rPr lang="en-US" sz="1000" dirty="0">
-                <a:solidFill>
-                  <a:srgbClr val="FAF8FF"/>
-                </a:solidFill>
-                <a:latin typeface="Consolas" pitchFamily="34" charset="0"/>
-                <a:ea typeface="Consolas" pitchFamily="34" charset="-122"/>
-                <a:cs typeface="Consolas" pitchFamily="34" charset="-120"/>
-              </a:rPr>
-              <a:t> </a:t>
-            </a:r>
-            <a:pPr indent="0" marL="0">
-              <a:buNone/>
-            </a:pPr>
-            <a:r>
-              <a:rPr lang="en-US" sz="1000" dirty="0">
-                <a:solidFill>
-                  <a:srgbClr val="FAF8FF"/>
-                </a:solidFill>
-                <a:latin typeface="Consolas" pitchFamily="34" charset="0"/>
-                <a:ea typeface="Consolas" pitchFamily="34" charset="-122"/>
-                <a:cs typeface="Consolas" pitchFamily="34" charset="-120"/>
-              </a:rPr>
-              <a:t>ApiKeyCredential</a:t>
-            </a:r>
-            <a:pPr indent="0" marL="0">
-              <a:buNone/>
-            </a:pPr>
-            <a:r>
-              <a:rPr lang="en-US" sz="1000" dirty="0">
-                <a:solidFill>
-                  <a:srgbClr val="B8B5D9"/>
-                </a:solidFill>
-                <a:latin typeface="Consolas" pitchFamily="34" charset="0"/>
-                <a:ea typeface="Consolas" pitchFamily="34" charset="-122"/>
-                <a:cs typeface="Consolas" pitchFamily="34" charset="-120"/>
-              </a:rPr>
-              <a:t>(</a:t>
-            </a:r>
-            <a:pPr indent="0" marL="0">
-              <a:buNone/>
-            </a:pPr>
-            <a:r>
-              <a:rPr lang="en-US" sz="1000" dirty="0">
-                <a:solidFill>
-                  <a:srgbClr val="FBBF24"/>
-                </a:solidFill>
-                <a:latin typeface="Consolas" pitchFamily="34" charset="0"/>
-                <a:ea typeface="Consolas" pitchFamily="34" charset="-122"/>
-                <a:cs typeface="Consolas" pitchFamily="34" charset="-120"/>
-              </a:rPr>
-              <a:t>"not-used"</a:t>
-            </a:r>
-            <a:pPr indent="0" marL="0">
-              <a:buNone/>
-            </a:pPr>
-            <a:r>
-              <a:rPr lang="en-US" sz="1000" dirty="0">
-                <a:solidFill>
-                  <a:srgbClr val="B8B5D9"/>
-                </a:solidFill>
-                <a:latin typeface="Consolas" pitchFamily="34" charset="0"/>
-                <a:ea typeface="Consolas" pitchFamily="34" charset="-122"/>
-                <a:cs typeface="Consolas" pitchFamily="34" charset="-120"/>
-              </a:rPr>
-              <a:t>)</a:t>
-            </a:r>
-            <a:pPr indent="0" marL="0">
-              <a:buNone/>
-            </a:pPr>
-            <a:r>
-              <a:rPr lang="en-US" sz="1000" dirty="0">
-                <a:solidFill>
-                  <a:srgbClr val="B8B5D9"/>
-                </a:solidFill>
-                <a:latin typeface="Consolas" pitchFamily="34" charset="0"/>
-                <a:ea typeface="Consolas" pitchFamily="34" charset="-122"/>
-                <a:cs typeface="Consolas" pitchFamily="34" charset="-120"/>
-              </a:rPr>
-              <a:t>,</a:t>
-            </a:r>
-            <a:pPr indent="0" marL="0">
-              <a:buNone/>
-            </a:pPr>
-            <a:endParaRPr lang="en-US" sz="1000" dirty="0"/>
-          </a:p>
-          <a:p>
-            <a:pPr indent="0" marL="0">
-              <a:buNone/>
-            </a:pPr>
-            <a:r>
-              <a:rPr lang="en-US" sz="1000" dirty="0">
-                <a:solidFill>
-                  <a:srgbClr val="FAF8FF"/>
-                </a:solidFill>
-                <a:latin typeface="Consolas" pitchFamily="34" charset="0"/>
-                <a:ea typeface="Consolas" pitchFamily="34" charset="-122"/>
-                <a:cs typeface="Consolas" pitchFamily="34" charset="-120"/>
-              </a:rPr>
-              <a:t>    </a:t>
-            </a:r>
-            <a:pPr indent="0" marL="0">
-              <a:buNone/>
-            </a:pPr>
-            <a:r>
-              <a:rPr lang="en-US" sz="1000" dirty="0">
-                <a:solidFill>
-                  <a:srgbClr val="FB7185"/>
-                </a:solidFill>
-                <a:latin typeface="Consolas" pitchFamily="34" charset="0"/>
-                <a:ea typeface="Consolas" pitchFamily="34" charset="-122"/>
-                <a:cs typeface="Consolas" pitchFamily="34" charset="-120"/>
-              </a:rPr>
-              <a:t>new</a:t>
-            </a:r>
-            <a:pPr indent="0" marL="0">
-              <a:buNone/>
-            </a:pPr>
-            <a:r>
-              <a:rPr lang="en-US" sz="1000" dirty="0">
-                <a:solidFill>
-                  <a:srgbClr val="FAF8FF"/>
-                </a:solidFill>
-                <a:latin typeface="Consolas" pitchFamily="34" charset="0"/>
-                <a:ea typeface="Consolas" pitchFamily="34" charset="-122"/>
-                <a:cs typeface="Consolas" pitchFamily="34" charset="-120"/>
-              </a:rPr>
-              <a:t> </a:t>
-            </a:r>
-            <a:pPr indent="0" marL="0">
-              <a:buNone/>
-            </a:pPr>
-            <a:r>
-              <a:rPr lang="en-US" sz="1000" dirty="0">
-                <a:solidFill>
-                  <a:srgbClr val="FAF8FF"/>
-                </a:solidFill>
-                <a:latin typeface="Consolas" pitchFamily="34" charset="0"/>
-                <a:ea typeface="Consolas" pitchFamily="34" charset="-122"/>
-                <a:cs typeface="Consolas" pitchFamily="34" charset="-120"/>
-              </a:rPr>
-              <a:t>OpenAIClientOptions</a:t>
-            </a:r>
-            <a:pPr indent="0" marL="0">
-              <a:buNone/>
-            </a:pPr>
-            <a:r>
-              <a:rPr lang="en-US" sz="1000" dirty="0">
-                <a:solidFill>
-                  <a:srgbClr val="FAF8FF"/>
-                </a:solidFill>
-                <a:latin typeface="Consolas" pitchFamily="34" charset="0"/>
-                <a:ea typeface="Consolas" pitchFamily="34" charset="-122"/>
-                <a:cs typeface="Consolas" pitchFamily="34" charset="-120"/>
-              </a:rPr>
-              <a:t> </a:t>
-            </a:r>
-            <a:pPr indent="0" marL="0">
-              <a:buNone/>
-            </a:pPr>
-            <a:r>
-              <a:rPr lang="en-US" sz="1000" dirty="0">
-                <a:solidFill>
-                  <a:srgbClr val="B8B5D9"/>
-                </a:solidFill>
-                <a:latin typeface="Consolas" pitchFamily="34" charset="0"/>
-                <a:ea typeface="Consolas" pitchFamily="34" charset="-122"/>
-                <a:cs typeface="Consolas" pitchFamily="34" charset="-120"/>
-              </a:rPr>
-              <a:t>{</a:t>
-            </a:r>
-            <a:pPr indent="0" marL="0">
-              <a:buNone/>
-            </a:pPr>
-            <a:endParaRPr lang="en-US" sz="1000" dirty="0"/>
-          </a:p>
-          <a:p>
-            <a:pPr indent="0" marL="0">
-              <a:buNone/>
-            </a:pPr>
-            <a:r>
-              <a:rPr lang="en-US" sz="1000" dirty="0">
-                <a:solidFill>
-                  <a:srgbClr val="FAF8FF"/>
-                </a:solidFill>
-                <a:latin typeface="Consolas" pitchFamily="34" charset="0"/>
-                <a:ea typeface="Consolas" pitchFamily="34" charset="-122"/>
-                <a:cs typeface="Consolas" pitchFamily="34" charset="-120"/>
-              </a:rPr>
-              <a:t>      Endpoint </a:t>
-            </a:r>
-            <a:pPr indent="0" marL="0">
-              <a:buNone/>
-            </a:pPr>
-            <a:r>
-              <a:rPr lang="en-US" sz="1000" dirty="0">
-                <a:solidFill>
-                  <a:srgbClr val="CFCBED"/>
-                </a:solidFill>
-                <a:latin typeface="Consolas" pitchFamily="34" charset="0"/>
-                <a:ea typeface="Consolas" pitchFamily="34" charset="-122"/>
-                <a:cs typeface="Consolas" pitchFamily="34" charset="-120"/>
-              </a:rPr>
-              <a:t>=</a:t>
-            </a:r>
-            <a:pPr indent="0" marL="0">
-              <a:buNone/>
-            </a:pPr>
-            <a:r>
-              <a:rPr lang="en-US" sz="1000" dirty="0">
-                <a:solidFill>
-                  <a:srgbClr val="FAF8FF"/>
-                </a:solidFill>
-                <a:latin typeface="Consolas" pitchFamily="34" charset="0"/>
-                <a:ea typeface="Consolas" pitchFamily="34" charset="-122"/>
-                <a:cs typeface="Consolas" pitchFamily="34" charset="-120"/>
-              </a:rPr>
-              <a:t> manager</a:t>
-            </a:r>
-            <a:pPr indent="0" marL="0">
-              <a:buNone/>
-            </a:pPr>
-            <a:r>
-              <a:rPr lang="en-US" sz="1000" dirty="0">
-                <a:solidFill>
-                  <a:srgbClr val="B8B5D9"/>
-                </a:solidFill>
-                <a:latin typeface="Consolas" pitchFamily="34" charset="0"/>
-                <a:ea typeface="Consolas" pitchFamily="34" charset="-122"/>
-                <a:cs typeface="Consolas" pitchFamily="34" charset="-120"/>
-              </a:rPr>
-              <a:t>.</a:t>
-            </a:r>
-            <a:pPr indent="0" marL="0">
-              <a:buNone/>
-            </a:pPr>
-            <a:r>
-              <a:rPr lang="en-US" sz="1000" dirty="0">
-                <a:solidFill>
-                  <a:srgbClr val="FAF8FF"/>
-                </a:solidFill>
-                <a:latin typeface="Consolas" pitchFamily="34" charset="0"/>
-                <a:ea typeface="Consolas" pitchFamily="34" charset="-122"/>
-                <a:cs typeface="Consolas" pitchFamily="34" charset="-120"/>
-              </a:rPr>
-              <a:t>Endpoint</a:t>
-            </a:r>
-            <a:pPr indent="0" marL="0">
-              <a:buNone/>
-            </a:pPr>
-            <a:endParaRPr lang="en-US" sz="1000" dirty="0"/>
-          </a:p>
-          <a:p>
-            <a:pPr indent="0" marL="0">
-              <a:buNone/>
-            </a:pPr>
-            <a:r>
-              <a:rPr lang="en-US" sz="1000" dirty="0">
-                <a:solidFill>
-                  <a:srgbClr val="FAF8FF"/>
-                </a:solidFill>
-                <a:latin typeface="Consolas" pitchFamily="34" charset="0"/>
-                <a:ea typeface="Consolas" pitchFamily="34" charset="-122"/>
-                <a:cs typeface="Consolas" pitchFamily="34" charset="-120"/>
-              </a:rPr>
-              <a:t>    </a:t>
-            </a:r>
-            <a:pPr indent="0" marL="0">
-              <a:buNone/>
-            </a:pPr>
-            <a:r>
-              <a:rPr lang="en-US" sz="1000" dirty="0">
-                <a:solidFill>
-                  <a:srgbClr val="B8B5D9"/>
-                </a:solidFill>
-                <a:latin typeface="Consolas" pitchFamily="34" charset="0"/>
-                <a:ea typeface="Consolas" pitchFamily="34" charset="-122"/>
-                <a:cs typeface="Consolas" pitchFamily="34" charset="-120"/>
-              </a:rPr>
-              <a:t>}</a:t>
-            </a:r>
-            <a:pPr indent="0" marL="0">
-              <a:buNone/>
-            </a:pPr>
-            <a:r>
-              <a:rPr lang="en-US" sz="1000" dirty="0">
-                <a:solidFill>
-                  <a:srgbClr val="B8B5D9"/>
-                </a:solidFill>
-                <a:latin typeface="Consolas" pitchFamily="34" charset="0"/>
-                <a:ea typeface="Consolas" pitchFamily="34" charset="-122"/>
-                <a:cs typeface="Consolas" pitchFamily="34" charset="-120"/>
-              </a:rPr>
-              <a:t>)</a:t>
-            </a:r>
-            <a:pPr indent="0" marL="0">
-              <a:buNone/>
-            </a:pPr>
-            <a:endParaRPr lang="en-US" sz="1000" dirty="0"/>
-          </a:p>
-          <a:p>
-            <a:pPr indent="0" marL="0">
-              <a:buNone/>
-            </a:pPr>
-            <a:r>
-              <a:rPr lang="en-US" sz="1000" dirty="0">
-                <a:solidFill>
-                  <a:srgbClr val="FAF8FF"/>
-                </a:solidFill>
-                <a:latin typeface="Consolas" pitchFamily="34" charset="0"/>
-                <a:ea typeface="Consolas" pitchFamily="34" charset="-122"/>
-                <a:cs typeface="Consolas" pitchFamily="34" charset="-120"/>
-              </a:rPr>
-              <a:t>    </a:t>
-            </a:r>
-            <a:pPr indent="0" marL="0">
-              <a:buNone/>
-            </a:pPr>
-            <a:r>
-              <a:rPr lang="en-US" sz="1000" dirty="0">
-                <a:solidFill>
-                  <a:srgbClr val="B8B5D9"/>
-                </a:solidFill>
-                <a:latin typeface="Consolas" pitchFamily="34" charset="0"/>
-                <a:ea typeface="Consolas" pitchFamily="34" charset="-122"/>
-                <a:cs typeface="Consolas" pitchFamily="34" charset="-120"/>
-              </a:rPr>
-              <a:t>.</a:t>
-            </a:r>
-            <a:pPr indent="0" marL="0">
-              <a:buNone/>
-            </a:pPr>
-            <a:r>
-              <a:rPr lang="en-US" sz="1000" dirty="0">
-                <a:solidFill>
-                  <a:srgbClr val="86EFAC"/>
-                </a:solidFill>
-                <a:latin typeface="Consolas" pitchFamily="34" charset="0"/>
-                <a:ea typeface="Consolas" pitchFamily="34" charset="-122"/>
-                <a:cs typeface="Consolas" pitchFamily="34" charset="-120"/>
-              </a:rPr>
-              <a:t>GetChatClient</a:t>
-            </a:r>
-            <a:pPr indent="0" marL="0">
-              <a:buNone/>
-            </a:pPr>
-            <a:r>
-              <a:rPr lang="en-US" sz="1000" dirty="0">
-                <a:solidFill>
-                  <a:srgbClr val="B8B5D9"/>
-                </a:solidFill>
-                <a:latin typeface="Consolas" pitchFamily="34" charset="0"/>
-                <a:ea typeface="Consolas" pitchFamily="34" charset="-122"/>
-                <a:cs typeface="Consolas" pitchFamily="34" charset="-120"/>
-              </a:rPr>
-              <a:t>(</a:t>
-            </a:r>
-            <a:pPr indent="0" marL="0">
-              <a:buNone/>
-            </a:pPr>
-            <a:r>
-              <a:rPr lang="en-US" sz="1000" dirty="0">
-                <a:solidFill>
-                  <a:srgbClr val="FBBF24"/>
-                </a:solidFill>
-                <a:latin typeface="Consolas" pitchFamily="34" charset="0"/>
-                <a:ea typeface="Consolas" pitchFamily="34" charset="-122"/>
-                <a:cs typeface="Consolas" pitchFamily="34" charset="-120"/>
-              </a:rPr>
-              <a:t>"phi-4-mini"</a:t>
-            </a:r>
-            <a:pPr indent="0" marL="0">
-              <a:buNone/>
-            </a:pPr>
-            <a:r>
-              <a:rPr lang="en-US" sz="1000" dirty="0">
-                <a:solidFill>
-                  <a:srgbClr val="B8B5D9"/>
-                </a:solidFill>
-                <a:latin typeface="Consolas" pitchFamily="34" charset="0"/>
-                <a:ea typeface="Consolas" pitchFamily="34" charset="-122"/>
-                <a:cs typeface="Consolas" pitchFamily="34" charset="-120"/>
-              </a:rPr>
-              <a:t>)</a:t>
-            </a:r>
-            <a:pPr indent="0" marL="0">
-              <a:buNone/>
-            </a:pPr>
-            <a:endParaRPr lang="en-US" sz="1000" dirty="0"/>
-          </a:p>
-          <a:p>
-            <a:pPr indent="0" marL="0">
-              <a:buNone/>
-            </a:pPr>
-            <a:r>
-              <a:rPr lang="en-US" sz="1000" dirty="0">
-                <a:solidFill>
-                  <a:srgbClr val="FAF8FF"/>
-                </a:solidFill>
-                <a:latin typeface="Consolas" pitchFamily="34" charset="0"/>
-                <a:ea typeface="Consolas" pitchFamily="34" charset="-122"/>
-                <a:cs typeface="Consolas" pitchFamily="34" charset="-120"/>
-              </a:rPr>
-              <a:t>    </a:t>
-            </a:r>
-            <a:pPr indent="0" marL="0">
-              <a:buNone/>
-            </a:pPr>
-            <a:r>
-              <a:rPr lang="en-US" sz="1000" dirty="0">
-                <a:solidFill>
-                  <a:srgbClr val="B8B5D9"/>
-                </a:solidFill>
-                <a:latin typeface="Consolas" pitchFamily="34" charset="0"/>
-                <a:ea typeface="Consolas" pitchFamily="34" charset="-122"/>
-                <a:cs typeface="Consolas" pitchFamily="34" charset="-120"/>
-              </a:rPr>
-              <a:t>.</a:t>
-            </a:r>
-            <a:pPr indent="0" marL="0">
-              <a:buNone/>
-            </a:pPr>
-            <a:r>
-              <a:rPr lang="en-US" sz="1000" dirty="0">
-                <a:solidFill>
-                  <a:srgbClr val="86EFAC"/>
-                </a:solidFill>
-                <a:latin typeface="Consolas" pitchFamily="34" charset="0"/>
-                <a:ea typeface="Consolas" pitchFamily="34" charset="-122"/>
-                <a:cs typeface="Consolas" pitchFamily="34" charset="-120"/>
-              </a:rPr>
-              <a:t>AsIChatClient</a:t>
-            </a:r>
-            <a:pPr indent="0" marL="0">
-              <a:buNone/>
-            </a:pPr>
-            <a:r>
-              <a:rPr lang="en-US" sz="1000" dirty="0">
-                <a:solidFill>
-                  <a:srgbClr val="B8B5D9"/>
-                </a:solidFill>
-                <a:latin typeface="Consolas" pitchFamily="34" charset="0"/>
-                <a:ea typeface="Consolas" pitchFamily="34" charset="-122"/>
-                <a:cs typeface="Consolas" pitchFamily="34" charset="-120"/>
-              </a:rPr>
-              <a:t>(</a:t>
-            </a:r>
-            <a:pPr indent="0" marL="0">
-              <a:buNone/>
-            </a:pPr>
-            <a:r>
-              <a:rPr lang="en-US" sz="1000" dirty="0">
-                <a:solidFill>
-                  <a:srgbClr val="B8B5D9"/>
-                </a:solidFill>
-                <a:latin typeface="Consolas" pitchFamily="34" charset="0"/>
-                <a:ea typeface="Consolas" pitchFamily="34" charset="-122"/>
-                <a:cs typeface="Consolas" pitchFamily="34" charset="-120"/>
-              </a:rPr>
-              <a:t>)</a:t>
-            </a:r>
-            <a:pPr indent="0" marL="0">
-              <a:buNone/>
-            </a:pPr>
-            <a:r>
-              <a:rPr lang="en-US" sz="1000" dirty="0">
-                <a:solidFill>
-                  <a:srgbClr val="B8B5D9"/>
-                </a:solidFill>
-                <a:latin typeface="Consolas" pitchFamily="34" charset="0"/>
-                <a:ea typeface="Consolas" pitchFamily="34" charset="-122"/>
-                <a:cs typeface="Consolas" pitchFamily="34" charset="-120"/>
-              </a:rPr>
-              <a:t>;</a:t>
-            </a:r>
-            <a:endParaRPr lang="en-US" sz="1000" dirty="0"/>
-          </a:p>
-        </p:txBody>
-      </p:sp>
-      <p:sp>
-        <p:nvSpPr>
-          <p:cNvPr id="14" name="Shape 12"/>
-          <p:cNvSpPr/>
-          <p:nvPr/>
-        </p:nvSpPr>
-        <p:spPr>
-          <a:xfrm>
-            <a:off x="8412480" y="3200400"/>
-            <a:ext cx="3657600" cy="2194560"/>
-          </a:xfrm>
-          <a:prstGeom prst="roundRect">
-            <a:avLst>
-              <a:gd name="adj" fmla="val 4167"/>
-            </a:avLst>
-          </a:prstGeom>
-          <a:solidFill>
-            <a:srgbClr val="1E1B4B"/>
-          </a:solidFill>
-          <a:ln w="25400">
+          <a:ln w="12700">
             <a:solidFill>
               <a:srgbClr val="6366F1"/>
             </a:solidFill>
@@ -7419,69 +6667,50 @@
       </p:sp>
       <p:sp>
         <p:nvSpPr>
-          <p:cNvPr id="15" name="Text 13"/>
-          <p:cNvSpPr/>
-          <p:nvPr/>
-        </p:nvSpPr>
-        <p:spPr>
-          <a:xfrm>
-            <a:off x="8595360" y="3337560"/>
-            <a:ext cx="3291840" cy="320040"/>
-          </a:xfrm>
-          <a:prstGeom prst="rect">
-            <a:avLst/>
-          </a:prstGeom>
-          <a:noFill/>
-          <a:ln/>
-        </p:spPr>
-        <p:txBody>
-          <a:bodyPr wrap="square" rtlCol="0" anchor="ctr"/>
-          <a:lstStyle/>
-          <a:p>
-            <a:pPr indent="0" marL="0">
-              <a:buNone/>
-            </a:pPr>
-            <a:r>
-              <a:rPr lang="en-US" sz="1200" b="1" spc="300" kern="0" dirty="0">
-                <a:solidFill>
-                  <a:srgbClr val="6366F1"/>
-                </a:solidFill>
-                <a:latin typeface="Calibri" pitchFamily="34" charset="0"/>
-                <a:ea typeface="Calibri" pitchFamily="34" charset="-122"/>
-                <a:cs typeface="Calibri" pitchFamily="34" charset="-120"/>
-              </a:rPr>
-              <a:t>CLOUD</a:t>
-            </a:r>
-            <a:endParaRPr lang="en-US" sz="1200" dirty="0"/>
-          </a:p>
-        </p:txBody>
-      </p:sp>
-      <p:sp>
-        <p:nvSpPr>
-          <p:cNvPr id="16" name="Text 14"/>
-          <p:cNvSpPr/>
-          <p:nvPr/>
-        </p:nvSpPr>
-        <p:spPr>
-          <a:xfrm>
-            <a:off x="8595360" y="3703320"/>
-            <a:ext cx="3291840" cy="1645920"/>
-          </a:xfrm>
-          <a:prstGeom prst="rect">
-            <a:avLst/>
-          </a:prstGeom>
-          <a:noFill/>
-          <a:ln/>
-        </p:spPr>
-        <p:txBody>
-          <a:bodyPr wrap="square" rtlCol="0" anchor="ctr"/>
-          <a:lstStyle/>
-          <a:p>
-            <a:pPr indent="0" marL="0">
-              <a:buNone/>
-            </a:pPr>
-            <a:r>
-              <a:rPr lang="en-US" sz="1000" dirty="0">
+          <p:cNvPr id="9" name="Text 7"/>
+          <p:cNvSpPr/>
+          <p:nvPr/>
+        </p:nvSpPr>
+        <p:spPr>
+          <a:xfrm>
+            <a:off x="1051560" y="2862072"/>
+            <a:ext cx="10454335" cy="3474720"/>
+          </a:xfrm>
+          <a:prstGeom prst="rect">
+            <a:avLst/>
+          </a:prstGeom>
+          <a:noFill/>
+          <a:ln/>
+        </p:spPr>
+        <p:txBody>
+          <a:bodyPr wrap="square" rtlCol="0" anchor="t"/>
+          <a:lstStyle/>
+          <a:p>
+            <a:pPr indent="0" marL="0">
+              <a:buNone/>
+            </a:pPr>
+            <a:r>
+              <a:rPr lang="en-US" sz="1400" i="1" dirty="0">
+                <a:solidFill>
+                  <a:srgbClr val="8B88B5"/>
+                </a:solidFill>
+                <a:latin typeface="Consolas" pitchFamily="34" charset="0"/>
+                <a:ea typeface="Consolas" pitchFamily="34" charset="-122"/>
+                <a:cs typeface="Consolas" pitchFamily="34" charset="-120"/>
+              </a:rPr>
+              <a:t>// 📱  OS Local — Apple Intelligence</a:t>
+            </a:r>
+            <a:pPr indent="0" marL="0">
+              <a:buNone/>
+            </a:pPr>
+            <a:endParaRPr lang="en-US" sz="1400" dirty="0"/>
+          </a:p>
+          <a:p>
+            <a:pPr indent="0" marL="0">
+              <a:buNone/>
+            </a:pPr>
+            <a:r>
+              <a:rPr lang="en-US" sz="1400" dirty="0">
                 <a:solidFill>
                   <a:srgbClr val="FAF8FF"/>
                 </a:solidFill>
@@ -7495,7 +6724,7 @@
               <a:buNone/>
             </a:pPr>
             <a:r>
-              <a:rPr lang="en-US" sz="1000" dirty="0">
+              <a:rPr lang="en-US" sz="1400" dirty="0">
                 <a:solidFill>
                   <a:srgbClr val="CFCBED"/>
                 </a:solidFill>
@@ -7509,7 +6738,7 @@
               <a:buNone/>
             </a:pPr>
             <a:r>
-              <a:rPr lang="en-US" sz="1000" dirty="0">
+              <a:rPr lang="en-US" sz="1400" dirty="0">
                 <a:solidFill>
                   <a:srgbClr val="FAF8FF"/>
                 </a:solidFill>
@@ -7523,7 +6752,7 @@
               <a:buNone/>
             </a:pPr>
             <a:r>
-              <a:rPr lang="en-US" sz="1000" dirty="0">
+              <a:rPr lang="en-US" sz="1400" dirty="0">
                 <a:solidFill>
                   <a:srgbClr val="FB7185"/>
                 </a:solidFill>
@@ -7537,7 +6766,7 @@
               <a:buNone/>
             </a:pPr>
             <a:r>
-              <a:rPr lang="en-US" sz="1000" dirty="0">
+              <a:rPr lang="en-US" sz="1400" dirty="0">
                 <a:solidFill>
                   <a:srgbClr val="FAF8FF"/>
                 </a:solidFill>
@@ -7551,7 +6780,7 @@
               <a:buNone/>
             </a:pPr>
             <a:r>
-              <a:rPr lang="en-US" sz="1000" dirty="0">
+              <a:rPr lang="en-US" sz="1400" dirty="0">
                 <a:solidFill>
                   <a:srgbClr val="FAF8FF"/>
                 </a:solidFill>
@@ -7559,13 +6788,969 @@
                 <a:ea typeface="Consolas" pitchFamily="34" charset="-122"/>
                 <a:cs typeface="Consolas" pitchFamily="34" charset="-120"/>
               </a:rPr>
+              <a:t>AppleIntelligenceChatClient</a:t>
+            </a:r>
+            <a:pPr indent="0" marL="0">
+              <a:buNone/>
+            </a:pPr>
+            <a:r>
+              <a:rPr lang="en-US" sz="1400" dirty="0">
+                <a:solidFill>
+                  <a:srgbClr val="B8B5D9"/>
+                </a:solidFill>
+                <a:latin typeface="Consolas" pitchFamily="34" charset="0"/>
+                <a:ea typeface="Consolas" pitchFamily="34" charset="-122"/>
+                <a:cs typeface="Consolas" pitchFamily="34" charset="-120"/>
+              </a:rPr>
+              <a:t>(</a:t>
+            </a:r>
+            <a:pPr indent="0" marL="0">
+              <a:buNone/>
+            </a:pPr>
+            <a:r>
+              <a:rPr lang="en-US" sz="1400" dirty="0">
+                <a:solidFill>
+                  <a:srgbClr val="B8B5D9"/>
+                </a:solidFill>
+                <a:latin typeface="Consolas" pitchFamily="34" charset="0"/>
+                <a:ea typeface="Consolas" pitchFamily="34" charset="-122"/>
+                <a:cs typeface="Consolas" pitchFamily="34" charset="-120"/>
+              </a:rPr>
+              <a:t>)</a:t>
+            </a:r>
+            <a:pPr indent="0" marL="0">
+              <a:buNone/>
+            </a:pPr>
+            <a:r>
+              <a:rPr lang="en-US" sz="1400" dirty="0">
+                <a:solidFill>
+                  <a:srgbClr val="B8B5D9"/>
+                </a:solidFill>
+                <a:latin typeface="Consolas" pitchFamily="34" charset="0"/>
+                <a:ea typeface="Consolas" pitchFamily="34" charset="-122"/>
+                <a:cs typeface="Consolas" pitchFamily="34" charset="-120"/>
+              </a:rPr>
+              <a:t>;</a:t>
+            </a:r>
+            <a:pPr indent="0" marL="0">
+              <a:buNone/>
+            </a:pPr>
+            <a:endParaRPr lang="en-US" sz="1400" dirty="0"/>
+          </a:p>
+          <a:p>
+            <a:pPr indent="0" marL="0">
+              <a:buNone/>
+            </a:pPr>
+            <a:endParaRPr lang="en-US" sz="1400" dirty="0"/>
+          </a:p>
+          <a:p>
+            <a:pPr indent="0" marL="0">
+              <a:buNone/>
+            </a:pPr>
+            <a:r>
+              <a:rPr lang="en-US" sz="1400" i="1" dirty="0">
+                <a:solidFill>
+                  <a:srgbClr val="8B88B5"/>
+                </a:solidFill>
+                <a:latin typeface="Consolas" pitchFamily="34" charset="0"/>
+                <a:ea typeface="Consolas" pitchFamily="34" charset="-122"/>
+                <a:cs typeface="Consolas" pitchFamily="34" charset="-120"/>
+              </a:rPr>
+              <a:t>// 🧪  BYO Local — Foundry Local hosting a Phi-class LLM</a:t>
+            </a:r>
+            <a:pPr indent="0" marL="0">
+              <a:buNone/>
+            </a:pPr>
+            <a:endParaRPr lang="en-US" sz="1400" dirty="0"/>
+          </a:p>
+          <a:p>
+            <a:pPr indent="0" marL="0">
+              <a:buNone/>
+            </a:pPr>
+            <a:r>
+              <a:rPr lang="en-US" sz="1400" dirty="0">
+                <a:solidFill>
+                  <a:srgbClr val="FB7185"/>
+                </a:solidFill>
+                <a:latin typeface="Consolas" pitchFamily="34" charset="0"/>
+                <a:ea typeface="Consolas" pitchFamily="34" charset="-122"/>
+                <a:cs typeface="Consolas" pitchFamily="34" charset="-120"/>
+              </a:rPr>
+              <a:t>var</a:t>
+            </a:r>
+            <a:pPr indent="0" marL="0">
+              <a:buNone/>
+            </a:pPr>
+            <a:r>
+              <a:rPr lang="en-US" sz="1400" dirty="0">
+                <a:solidFill>
+                  <a:srgbClr val="FAF8FF"/>
+                </a:solidFill>
+                <a:latin typeface="Consolas" pitchFamily="34" charset="0"/>
+                <a:ea typeface="Consolas" pitchFamily="34" charset="-122"/>
+                <a:cs typeface="Consolas" pitchFamily="34" charset="-120"/>
+              </a:rPr>
+              <a:t> mgr </a:t>
+            </a:r>
+            <a:pPr indent="0" marL="0">
+              <a:buNone/>
+            </a:pPr>
+            <a:r>
+              <a:rPr lang="en-US" sz="1400" dirty="0">
+                <a:solidFill>
+                  <a:srgbClr val="CFCBED"/>
+                </a:solidFill>
+                <a:latin typeface="Consolas" pitchFamily="34" charset="0"/>
+                <a:ea typeface="Consolas" pitchFamily="34" charset="-122"/>
+                <a:cs typeface="Consolas" pitchFamily="34" charset="-120"/>
+              </a:rPr>
+              <a:t>=</a:t>
+            </a:r>
+            <a:pPr indent="0" marL="0">
+              <a:buNone/>
+            </a:pPr>
+            <a:r>
+              <a:rPr lang="en-US" sz="1400" dirty="0">
+                <a:solidFill>
+                  <a:srgbClr val="FAF8FF"/>
+                </a:solidFill>
+                <a:latin typeface="Consolas" pitchFamily="34" charset="0"/>
+                <a:ea typeface="Consolas" pitchFamily="34" charset="-122"/>
+                <a:cs typeface="Consolas" pitchFamily="34" charset="-120"/>
+              </a:rPr>
+              <a:t> </a:t>
+            </a:r>
+            <a:pPr indent="0" marL="0">
+              <a:buNone/>
+            </a:pPr>
+            <a:r>
+              <a:rPr lang="en-US" sz="1400" dirty="0">
+                <a:solidFill>
+                  <a:srgbClr val="FB7185"/>
+                </a:solidFill>
+                <a:latin typeface="Consolas" pitchFamily="34" charset="0"/>
+                <a:ea typeface="Consolas" pitchFamily="34" charset="-122"/>
+                <a:cs typeface="Consolas" pitchFamily="34" charset="-120"/>
+              </a:rPr>
+              <a:t>await</a:t>
+            </a:r>
+            <a:pPr indent="0" marL="0">
+              <a:buNone/>
+            </a:pPr>
+            <a:r>
+              <a:rPr lang="en-US" sz="1400" dirty="0">
+                <a:solidFill>
+                  <a:srgbClr val="FAF8FF"/>
+                </a:solidFill>
+                <a:latin typeface="Consolas" pitchFamily="34" charset="0"/>
+                <a:ea typeface="Consolas" pitchFamily="34" charset="-122"/>
+                <a:cs typeface="Consolas" pitchFamily="34" charset="-120"/>
+              </a:rPr>
+              <a:t> FoundryLocalManager</a:t>
+            </a:r>
+            <a:pPr indent="0" marL="0">
+              <a:buNone/>
+            </a:pPr>
+            <a:r>
+              <a:rPr lang="en-US" sz="1400" dirty="0">
+                <a:solidFill>
+                  <a:srgbClr val="B8B5D9"/>
+                </a:solidFill>
+                <a:latin typeface="Consolas" pitchFamily="34" charset="0"/>
+                <a:ea typeface="Consolas" pitchFamily="34" charset="-122"/>
+                <a:cs typeface="Consolas" pitchFamily="34" charset="-120"/>
+              </a:rPr>
+              <a:t>.</a:t>
+            </a:r>
+            <a:pPr indent="0" marL="0">
+              <a:buNone/>
+            </a:pPr>
+            <a:r>
+              <a:rPr lang="en-US" sz="1400" dirty="0">
+                <a:solidFill>
+                  <a:srgbClr val="86EFAC"/>
+                </a:solidFill>
+                <a:latin typeface="Consolas" pitchFamily="34" charset="0"/>
+                <a:ea typeface="Consolas" pitchFamily="34" charset="-122"/>
+                <a:cs typeface="Consolas" pitchFamily="34" charset="-120"/>
+              </a:rPr>
+              <a:t>StartModelAsync</a:t>
+            </a:r>
+            <a:pPr indent="0" marL="0">
+              <a:buNone/>
+            </a:pPr>
+            <a:r>
+              <a:rPr lang="en-US" sz="1400" dirty="0">
+                <a:solidFill>
+                  <a:srgbClr val="B8B5D9"/>
+                </a:solidFill>
+                <a:latin typeface="Consolas" pitchFamily="34" charset="0"/>
+                <a:ea typeface="Consolas" pitchFamily="34" charset="-122"/>
+                <a:cs typeface="Consolas" pitchFamily="34" charset="-120"/>
+              </a:rPr>
+              <a:t>(</a:t>
+            </a:r>
+            <a:pPr indent="0" marL="0">
+              <a:buNone/>
+            </a:pPr>
+            <a:r>
+              <a:rPr lang="en-US" sz="1400" dirty="0">
+                <a:solidFill>
+                  <a:srgbClr val="FBBF24"/>
+                </a:solidFill>
+                <a:latin typeface="Consolas" pitchFamily="34" charset="0"/>
+                <a:ea typeface="Consolas" pitchFamily="34" charset="-122"/>
+                <a:cs typeface="Consolas" pitchFamily="34" charset="-120"/>
+              </a:rPr>
+              <a:t>"phi-4-mini"</a:t>
+            </a:r>
+            <a:pPr indent="0" marL="0">
+              <a:buNone/>
+            </a:pPr>
+            <a:r>
+              <a:rPr lang="en-US" sz="1400" dirty="0">
+                <a:solidFill>
+                  <a:srgbClr val="B8B5D9"/>
+                </a:solidFill>
+                <a:latin typeface="Consolas" pitchFamily="34" charset="0"/>
+                <a:ea typeface="Consolas" pitchFamily="34" charset="-122"/>
+                <a:cs typeface="Consolas" pitchFamily="34" charset="-120"/>
+              </a:rPr>
+              <a:t>)</a:t>
+            </a:r>
+            <a:pPr indent="0" marL="0">
+              <a:buNone/>
+            </a:pPr>
+            <a:r>
+              <a:rPr lang="en-US" sz="1400" dirty="0">
+                <a:solidFill>
+                  <a:srgbClr val="B8B5D9"/>
+                </a:solidFill>
+                <a:latin typeface="Consolas" pitchFamily="34" charset="0"/>
+                <a:ea typeface="Consolas" pitchFamily="34" charset="-122"/>
+                <a:cs typeface="Consolas" pitchFamily="34" charset="-120"/>
+              </a:rPr>
+              <a:t>;</a:t>
+            </a:r>
+            <a:pPr indent="0" marL="0">
+              <a:buNone/>
+            </a:pPr>
+            <a:endParaRPr lang="en-US" sz="1400" dirty="0"/>
+          </a:p>
+          <a:p>
+            <a:pPr indent="0" marL="0">
+              <a:buNone/>
+            </a:pPr>
+            <a:r>
+              <a:rPr lang="en-US" sz="1400" dirty="0">
+                <a:solidFill>
+                  <a:srgbClr val="FAF8FF"/>
+                </a:solidFill>
+                <a:latin typeface="Consolas" pitchFamily="34" charset="0"/>
+                <a:ea typeface="Consolas" pitchFamily="34" charset="-122"/>
+                <a:cs typeface="Consolas" pitchFamily="34" charset="-120"/>
+              </a:rPr>
+              <a:t>chatClient </a:t>
+            </a:r>
+            <a:pPr indent="0" marL="0">
+              <a:buNone/>
+            </a:pPr>
+            <a:r>
+              <a:rPr lang="en-US" sz="1400" dirty="0">
+                <a:solidFill>
+                  <a:srgbClr val="CFCBED"/>
+                </a:solidFill>
+                <a:latin typeface="Consolas" pitchFamily="34" charset="0"/>
+                <a:ea typeface="Consolas" pitchFamily="34" charset="-122"/>
+                <a:cs typeface="Consolas" pitchFamily="34" charset="-120"/>
+              </a:rPr>
+              <a:t>=</a:t>
+            </a:r>
+            <a:pPr indent="0" marL="0">
+              <a:buNone/>
+            </a:pPr>
+            <a:r>
+              <a:rPr lang="en-US" sz="1400" dirty="0">
+                <a:solidFill>
+                  <a:srgbClr val="FAF8FF"/>
+                </a:solidFill>
+                <a:latin typeface="Consolas" pitchFamily="34" charset="0"/>
+                <a:ea typeface="Consolas" pitchFamily="34" charset="-122"/>
+                <a:cs typeface="Consolas" pitchFamily="34" charset="-120"/>
+              </a:rPr>
+              <a:t> </a:t>
+            </a:r>
+            <a:pPr indent="0" marL="0">
+              <a:buNone/>
+            </a:pPr>
+            <a:r>
+              <a:rPr lang="en-US" sz="1400" dirty="0">
+                <a:solidFill>
+                  <a:srgbClr val="FB7185"/>
+                </a:solidFill>
+                <a:latin typeface="Consolas" pitchFamily="34" charset="0"/>
+                <a:ea typeface="Consolas" pitchFamily="34" charset="-122"/>
+                <a:cs typeface="Consolas" pitchFamily="34" charset="-120"/>
+              </a:rPr>
+              <a:t>new</a:t>
+            </a:r>
+            <a:pPr indent="0" marL="0">
+              <a:buNone/>
+            </a:pPr>
+            <a:r>
+              <a:rPr lang="en-US" sz="1400" dirty="0">
+                <a:solidFill>
+                  <a:srgbClr val="FAF8FF"/>
+                </a:solidFill>
+                <a:latin typeface="Consolas" pitchFamily="34" charset="0"/>
+                <a:ea typeface="Consolas" pitchFamily="34" charset="-122"/>
+                <a:cs typeface="Consolas" pitchFamily="34" charset="-120"/>
+              </a:rPr>
+              <a:t> </a:t>
+            </a:r>
+            <a:pPr indent="0" marL="0">
+              <a:buNone/>
+            </a:pPr>
+            <a:r>
+              <a:rPr lang="en-US" sz="1400" dirty="0">
+                <a:solidFill>
+                  <a:srgbClr val="FAF8FF"/>
+                </a:solidFill>
+                <a:latin typeface="Consolas" pitchFamily="34" charset="0"/>
+                <a:ea typeface="Consolas" pitchFamily="34" charset="-122"/>
+                <a:cs typeface="Consolas" pitchFamily="34" charset="-120"/>
+              </a:rPr>
+              <a:t>OpenAIClient</a:t>
+            </a:r>
+            <a:pPr indent="0" marL="0">
+              <a:buNone/>
+            </a:pPr>
+            <a:r>
+              <a:rPr lang="en-US" sz="1400" dirty="0">
+                <a:solidFill>
+                  <a:srgbClr val="B8B5D9"/>
+                </a:solidFill>
+                <a:latin typeface="Consolas" pitchFamily="34" charset="0"/>
+                <a:ea typeface="Consolas" pitchFamily="34" charset="-122"/>
+                <a:cs typeface="Consolas" pitchFamily="34" charset="-120"/>
+              </a:rPr>
+              <a:t>(</a:t>
+            </a:r>
+            <a:pPr indent="0" marL="0">
+              <a:buNone/>
+            </a:pPr>
+            <a:endParaRPr lang="en-US" sz="1400" dirty="0"/>
+          </a:p>
+          <a:p>
+            <a:pPr indent="0" marL="0">
+              <a:buNone/>
+            </a:pPr>
+            <a:r>
+              <a:rPr lang="en-US" sz="1400" dirty="0">
+                <a:solidFill>
+                  <a:srgbClr val="FAF8FF"/>
+                </a:solidFill>
+                <a:latin typeface="Consolas" pitchFamily="34" charset="0"/>
+                <a:ea typeface="Consolas" pitchFamily="34" charset="-122"/>
+                <a:cs typeface="Consolas" pitchFamily="34" charset="-120"/>
+              </a:rPr>
+              <a:t>        </a:t>
+            </a:r>
+            <a:pPr indent="0" marL="0">
+              <a:buNone/>
+            </a:pPr>
+            <a:r>
+              <a:rPr lang="en-US" sz="1400" dirty="0">
+                <a:solidFill>
+                  <a:srgbClr val="FB7185"/>
+                </a:solidFill>
+                <a:latin typeface="Consolas" pitchFamily="34" charset="0"/>
+                <a:ea typeface="Consolas" pitchFamily="34" charset="-122"/>
+                <a:cs typeface="Consolas" pitchFamily="34" charset="-120"/>
+              </a:rPr>
+              <a:t>new</a:t>
+            </a:r>
+            <a:pPr indent="0" marL="0">
+              <a:buNone/>
+            </a:pPr>
+            <a:r>
+              <a:rPr lang="en-US" sz="1400" dirty="0">
+                <a:solidFill>
+                  <a:srgbClr val="FAF8FF"/>
+                </a:solidFill>
+                <a:latin typeface="Consolas" pitchFamily="34" charset="0"/>
+                <a:ea typeface="Consolas" pitchFamily="34" charset="-122"/>
+                <a:cs typeface="Consolas" pitchFamily="34" charset="-120"/>
+              </a:rPr>
+              <a:t> </a:t>
+            </a:r>
+            <a:pPr indent="0" marL="0">
+              <a:buNone/>
+            </a:pPr>
+            <a:r>
+              <a:rPr lang="en-US" sz="1400" dirty="0">
+                <a:solidFill>
+                  <a:srgbClr val="FAF8FF"/>
+                </a:solidFill>
+                <a:latin typeface="Consolas" pitchFamily="34" charset="0"/>
+                <a:ea typeface="Consolas" pitchFamily="34" charset="-122"/>
+                <a:cs typeface="Consolas" pitchFamily="34" charset="-120"/>
+              </a:rPr>
+              <a:t>ApiKeyCredential</a:t>
+            </a:r>
+            <a:pPr indent="0" marL="0">
+              <a:buNone/>
+            </a:pPr>
+            <a:r>
+              <a:rPr lang="en-US" sz="1400" dirty="0">
+                <a:solidFill>
+                  <a:srgbClr val="B8B5D9"/>
+                </a:solidFill>
+                <a:latin typeface="Consolas" pitchFamily="34" charset="0"/>
+                <a:ea typeface="Consolas" pitchFamily="34" charset="-122"/>
+                <a:cs typeface="Consolas" pitchFamily="34" charset="-120"/>
+              </a:rPr>
+              <a:t>(</a:t>
+            </a:r>
+            <a:pPr indent="0" marL="0">
+              <a:buNone/>
+            </a:pPr>
+            <a:r>
+              <a:rPr lang="en-US" sz="1400" dirty="0">
+                <a:solidFill>
+                  <a:srgbClr val="FBBF24"/>
+                </a:solidFill>
+                <a:latin typeface="Consolas" pitchFamily="34" charset="0"/>
+                <a:ea typeface="Consolas" pitchFamily="34" charset="-122"/>
+                <a:cs typeface="Consolas" pitchFamily="34" charset="-120"/>
+              </a:rPr>
+              <a:t>"nope"</a:t>
+            </a:r>
+            <a:pPr indent="0" marL="0">
+              <a:buNone/>
+            </a:pPr>
+            <a:r>
+              <a:rPr lang="en-US" sz="1400" dirty="0">
+                <a:solidFill>
+                  <a:srgbClr val="B8B5D9"/>
+                </a:solidFill>
+                <a:latin typeface="Consolas" pitchFamily="34" charset="0"/>
+                <a:ea typeface="Consolas" pitchFamily="34" charset="-122"/>
+                <a:cs typeface="Consolas" pitchFamily="34" charset="-120"/>
+              </a:rPr>
+              <a:t>)</a:t>
+            </a:r>
+            <a:pPr indent="0" marL="0">
+              <a:buNone/>
+            </a:pPr>
+            <a:r>
+              <a:rPr lang="en-US" sz="1400" dirty="0">
+                <a:solidFill>
+                  <a:srgbClr val="B8B5D9"/>
+                </a:solidFill>
+                <a:latin typeface="Consolas" pitchFamily="34" charset="0"/>
+                <a:ea typeface="Consolas" pitchFamily="34" charset="-122"/>
+                <a:cs typeface="Consolas" pitchFamily="34" charset="-120"/>
+              </a:rPr>
+              <a:t>,</a:t>
+            </a:r>
+            <a:pPr indent="0" marL="0">
+              <a:buNone/>
+            </a:pPr>
+            <a:endParaRPr lang="en-US" sz="1400" dirty="0"/>
+          </a:p>
+          <a:p>
+            <a:pPr indent="0" marL="0">
+              <a:buNone/>
+            </a:pPr>
+            <a:r>
+              <a:rPr lang="en-US" sz="1400" dirty="0">
+                <a:solidFill>
+                  <a:srgbClr val="FAF8FF"/>
+                </a:solidFill>
+                <a:latin typeface="Consolas" pitchFamily="34" charset="0"/>
+                <a:ea typeface="Consolas" pitchFamily="34" charset="-122"/>
+                <a:cs typeface="Consolas" pitchFamily="34" charset="-120"/>
+              </a:rPr>
+              <a:t>        </a:t>
+            </a:r>
+            <a:pPr indent="0" marL="0">
+              <a:buNone/>
+            </a:pPr>
+            <a:r>
+              <a:rPr lang="en-US" sz="1400" dirty="0">
+                <a:solidFill>
+                  <a:srgbClr val="FB7185"/>
+                </a:solidFill>
+                <a:latin typeface="Consolas" pitchFamily="34" charset="0"/>
+                <a:ea typeface="Consolas" pitchFamily="34" charset="-122"/>
+                <a:cs typeface="Consolas" pitchFamily="34" charset="-120"/>
+              </a:rPr>
+              <a:t>new</a:t>
+            </a:r>
+            <a:pPr indent="0" marL="0">
+              <a:buNone/>
+            </a:pPr>
+            <a:r>
+              <a:rPr lang="en-US" sz="1400" dirty="0">
+                <a:solidFill>
+                  <a:srgbClr val="FAF8FF"/>
+                </a:solidFill>
+                <a:latin typeface="Consolas" pitchFamily="34" charset="0"/>
+                <a:ea typeface="Consolas" pitchFamily="34" charset="-122"/>
+                <a:cs typeface="Consolas" pitchFamily="34" charset="-120"/>
+              </a:rPr>
+              <a:t> </a:t>
+            </a:r>
+            <a:pPr indent="0" marL="0">
+              <a:buNone/>
+            </a:pPr>
+            <a:r>
+              <a:rPr lang="en-US" sz="1400" dirty="0">
+                <a:solidFill>
+                  <a:srgbClr val="FAF8FF"/>
+                </a:solidFill>
+                <a:latin typeface="Consolas" pitchFamily="34" charset="0"/>
+                <a:ea typeface="Consolas" pitchFamily="34" charset="-122"/>
+                <a:cs typeface="Consolas" pitchFamily="34" charset="-120"/>
+              </a:rPr>
+              <a:t>OpenAIClientOptions</a:t>
+            </a:r>
+            <a:pPr indent="0" marL="0">
+              <a:buNone/>
+            </a:pPr>
+            <a:r>
+              <a:rPr lang="en-US" sz="1400" dirty="0">
+                <a:solidFill>
+                  <a:srgbClr val="FAF8FF"/>
+                </a:solidFill>
+                <a:latin typeface="Consolas" pitchFamily="34" charset="0"/>
+                <a:ea typeface="Consolas" pitchFamily="34" charset="-122"/>
+                <a:cs typeface="Consolas" pitchFamily="34" charset="-120"/>
+              </a:rPr>
+              <a:t> </a:t>
+            </a:r>
+            <a:pPr indent="0" marL="0">
+              <a:buNone/>
+            </a:pPr>
+            <a:r>
+              <a:rPr lang="en-US" sz="1400" dirty="0">
+                <a:solidFill>
+                  <a:srgbClr val="B8B5D9"/>
+                </a:solidFill>
+                <a:latin typeface="Consolas" pitchFamily="34" charset="0"/>
+                <a:ea typeface="Consolas" pitchFamily="34" charset="-122"/>
+                <a:cs typeface="Consolas" pitchFamily="34" charset="-120"/>
+              </a:rPr>
+              <a:t>{</a:t>
+            </a:r>
+            <a:pPr indent="0" marL="0">
+              <a:buNone/>
+            </a:pPr>
+            <a:r>
+              <a:rPr lang="en-US" sz="1400" dirty="0">
+                <a:solidFill>
+                  <a:srgbClr val="FAF8FF"/>
+                </a:solidFill>
+                <a:latin typeface="Consolas" pitchFamily="34" charset="0"/>
+                <a:ea typeface="Consolas" pitchFamily="34" charset="-122"/>
+                <a:cs typeface="Consolas" pitchFamily="34" charset="-120"/>
+              </a:rPr>
+              <a:t> Endpoint </a:t>
+            </a:r>
+            <a:pPr indent="0" marL="0">
+              <a:buNone/>
+            </a:pPr>
+            <a:r>
+              <a:rPr lang="en-US" sz="1400" dirty="0">
+                <a:solidFill>
+                  <a:srgbClr val="CFCBED"/>
+                </a:solidFill>
+                <a:latin typeface="Consolas" pitchFamily="34" charset="0"/>
+                <a:ea typeface="Consolas" pitchFamily="34" charset="-122"/>
+                <a:cs typeface="Consolas" pitchFamily="34" charset="-120"/>
+              </a:rPr>
+              <a:t>=</a:t>
+            </a:r>
+            <a:pPr indent="0" marL="0">
+              <a:buNone/>
+            </a:pPr>
+            <a:r>
+              <a:rPr lang="en-US" sz="1400" dirty="0">
+                <a:solidFill>
+                  <a:srgbClr val="FAF8FF"/>
+                </a:solidFill>
+                <a:latin typeface="Consolas" pitchFamily="34" charset="0"/>
+                <a:ea typeface="Consolas" pitchFamily="34" charset="-122"/>
+                <a:cs typeface="Consolas" pitchFamily="34" charset="-120"/>
+              </a:rPr>
+              <a:t> mgr</a:t>
+            </a:r>
+            <a:pPr indent="0" marL="0">
+              <a:buNone/>
+            </a:pPr>
+            <a:r>
+              <a:rPr lang="en-US" sz="1400" dirty="0">
+                <a:solidFill>
+                  <a:srgbClr val="B8B5D9"/>
+                </a:solidFill>
+                <a:latin typeface="Consolas" pitchFamily="34" charset="0"/>
+                <a:ea typeface="Consolas" pitchFamily="34" charset="-122"/>
+                <a:cs typeface="Consolas" pitchFamily="34" charset="-120"/>
+              </a:rPr>
+              <a:t>.</a:t>
+            </a:r>
+            <a:pPr indent="0" marL="0">
+              <a:buNone/>
+            </a:pPr>
+            <a:r>
+              <a:rPr lang="en-US" sz="1400" dirty="0">
+                <a:solidFill>
+                  <a:srgbClr val="FAF8FF"/>
+                </a:solidFill>
+                <a:latin typeface="Consolas" pitchFamily="34" charset="0"/>
+                <a:ea typeface="Consolas" pitchFamily="34" charset="-122"/>
+                <a:cs typeface="Consolas" pitchFamily="34" charset="-120"/>
+              </a:rPr>
+              <a:t>Endpoint </a:t>
+            </a:r>
+            <a:pPr indent="0" marL="0">
+              <a:buNone/>
+            </a:pPr>
+            <a:r>
+              <a:rPr lang="en-US" sz="1400" dirty="0">
+                <a:solidFill>
+                  <a:srgbClr val="B8B5D9"/>
+                </a:solidFill>
+                <a:latin typeface="Consolas" pitchFamily="34" charset="0"/>
+                <a:ea typeface="Consolas" pitchFamily="34" charset="-122"/>
+                <a:cs typeface="Consolas" pitchFamily="34" charset="-120"/>
+              </a:rPr>
+              <a:t>}</a:t>
+            </a:r>
+            <a:pPr indent="0" marL="0">
+              <a:buNone/>
+            </a:pPr>
+            <a:r>
+              <a:rPr lang="en-US" sz="1400" dirty="0">
+                <a:solidFill>
+                  <a:srgbClr val="B8B5D9"/>
+                </a:solidFill>
+                <a:latin typeface="Consolas" pitchFamily="34" charset="0"/>
+                <a:ea typeface="Consolas" pitchFamily="34" charset="-122"/>
+                <a:cs typeface="Consolas" pitchFamily="34" charset="-120"/>
+              </a:rPr>
+              <a:t>)</a:t>
+            </a:r>
+            <a:pPr indent="0" marL="0">
+              <a:buNone/>
+            </a:pPr>
+            <a:endParaRPr lang="en-US" sz="1400" dirty="0"/>
+          </a:p>
+          <a:p>
+            <a:pPr indent="0" marL="0">
+              <a:buNone/>
+            </a:pPr>
+            <a:r>
+              <a:rPr lang="en-US" sz="1400" dirty="0">
+                <a:solidFill>
+                  <a:srgbClr val="FAF8FF"/>
+                </a:solidFill>
+                <a:latin typeface="Consolas" pitchFamily="34" charset="0"/>
+                <a:ea typeface="Consolas" pitchFamily="34" charset="-122"/>
+                <a:cs typeface="Consolas" pitchFamily="34" charset="-120"/>
+              </a:rPr>
+              <a:t>    </a:t>
+            </a:r>
+            <a:pPr indent="0" marL="0">
+              <a:buNone/>
+            </a:pPr>
+            <a:r>
+              <a:rPr lang="en-US" sz="1400" dirty="0">
+                <a:solidFill>
+                  <a:srgbClr val="B8B5D9"/>
+                </a:solidFill>
+                <a:latin typeface="Consolas" pitchFamily="34" charset="0"/>
+                <a:ea typeface="Consolas" pitchFamily="34" charset="-122"/>
+                <a:cs typeface="Consolas" pitchFamily="34" charset="-120"/>
+              </a:rPr>
+              <a:t>.</a:t>
+            </a:r>
+            <a:pPr indent="0" marL="0">
+              <a:buNone/>
+            </a:pPr>
+            <a:r>
+              <a:rPr lang="en-US" sz="1400" dirty="0">
+                <a:solidFill>
+                  <a:srgbClr val="86EFAC"/>
+                </a:solidFill>
+                <a:latin typeface="Consolas" pitchFamily="34" charset="0"/>
+                <a:ea typeface="Consolas" pitchFamily="34" charset="-122"/>
+                <a:cs typeface="Consolas" pitchFamily="34" charset="-120"/>
+              </a:rPr>
+              <a:t>GetChatClient</a:t>
+            </a:r>
+            <a:pPr indent="0" marL="0">
+              <a:buNone/>
+            </a:pPr>
+            <a:r>
+              <a:rPr lang="en-US" sz="1400" dirty="0">
+                <a:solidFill>
+                  <a:srgbClr val="B8B5D9"/>
+                </a:solidFill>
+                <a:latin typeface="Consolas" pitchFamily="34" charset="0"/>
+                <a:ea typeface="Consolas" pitchFamily="34" charset="-122"/>
+                <a:cs typeface="Consolas" pitchFamily="34" charset="-120"/>
+              </a:rPr>
+              <a:t>(</a:t>
+            </a:r>
+            <a:pPr indent="0" marL="0">
+              <a:buNone/>
+            </a:pPr>
+            <a:r>
+              <a:rPr lang="en-US" sz="1400" dirty="0">
+                <a:solidFill>
+                  <a:srgbClr val="FAF8FF"/>
+                </a:solidFill>
+                <a:latin typeface="Consolas" pitchFamily="34" charset="0"/>
+                <a:ea typeface="Consolas" pitchFamily="34" charset="-122"/>
+                <a:cs typeface="Consolas" pitchFamily="34" charset="-120"/>
+              </a:rPr>
+              <a:t>mgr</a:t>
+            </a:r>
+            <a:pPr indent="0" marL="0">
+              <a:buNone/>
+            </a:pPr>
+            <a:r>
+              <a:rPr lang="en-US" sz="1400" dirty="0">
+                <a:solidFill>
+                  <a:srgbClr val="B8B5D9"/>
+                </a:solidFill>
+                <a:latin typeface="Consolas" pitchFamily="34" charset="0"/>
+                <a:ea typeface="Consolas" pitchFamily="34" charset="-122"/>
+                <a:cs typeface="Consolas" pitchFamily="34" charset="-120"/>
+              </a:rPr>
+              <a:t>.</a:t>
+            </a:r>
+            <a:pPr indent="0" marL="0">
+              <a:buNone/>
+            </a:pPr>
+            <a:r>
+              <a:rPr lang="en-US" sz="1400" dirty="0">
+                <a:solidFill>
+                  <a:srgbClr val="FAF8FF"/>
+                </a:solidFill>
+                <a:latin typeface="Consolas" pitchFamily="34" charset="0"/>
+                <a:ea typeface="Consolas" pitchFamily="34" charset="-122"/>
+                <a:cs typeface="Consolas" pitchFamily="34" charset="-120"/>
+              </a:rPr>
+              <a:t>ModelId</a:t>
+            </a:r>
+            <a:pPr indent="0" marL="0">
+              <a:buNone/>
+            </a:pPr>
+            <a:r>
+              <a:rPr lang="en-US" sz="1400" dirty="0">
+                <a:solidFill>
+                  <a:srgbClr val="B8B5D9"/>
+                </a:solidFill>
+                <a:latin typeface="Consolas" pitchFamily="34" charset="0"/>
+                <a:ea typeface="Consolas" pitchFamily="34" charset="-122"/>
+                <a:cs typeface="Consolas" pitchFamily="34" charset="-120"/>
+              </a:rPr>
+              <a:t>)</a:t>
+            </a:r>
+            <a:pPr indent="0" marL="0">
+              <a:buNone/>
+            </a:pPr>
+            <a:r>
+              <a:rPr lang="en-US" sz="1400" dirty="0">
+                <a:solidFill>
+                  <a:srgbClr val="B8B5D9"/>
+                </a:solidFill>
+                <a:latin typeface="Consolas" pitchFamily="34" charset="0"/>
+                <a:ea typeface="Consolas" pitchFamily="34" charset="-122"/>
+                <a:cs typeface="Consolas" pitchFamily="34" charset="-120"/>
+              </a:rPr>
+              <a:t>.</a:t>
+            </a:r>
+            <a:pPr indent="0" marL="0">
+              <a:buNone/>
+            </a:pPr>
+            <a:r>
+              <a:rPr lang="en-US" sz="1400" dirty="0">
+                <a:solidFill>
+                  <a:srgbClr val="86EFAC"/>
+                </a:solidFill>
+                <a:latin typeface="Consolas" pitchFamily="34" charset="0"/>
+                <a:ea typeface="Consolas" pitchFamily="34" charset="-122"/>
+                <a:cs typeface="Consolas" pitchFamily="34" charset="-120"/>
+              </a:rPr>
+              <a:t>AsIChatClient</a:t>
+            </a:r>
+            <a:pPr indent="0" marL="0">
+              <a:buNone/>
+            </a:pPr>
+            <a:r>
+              <a:rPr lang="en-US" sz="1400" dirty="0">
+                <a:solidFill>
+                  <a:srgbClr val="B8B5D9"/>
+                </a:solidFill>
+                <a:latin typeface="Consolas" pitchFamily="34" charset="0"/>
+                <a:ea typeface="Consolas" pitchFamily="34" charset="-122"/>
+                <a:cs typeface="Consolas" pitchFamily="34" charset="-120"/>
+              </a:rPr>
+              <a:t>(</a:t>
+            </a:r>
+            <a:pPr indent="0" marL="0">
+              <a:buNone/>
+            </a:pPr>
+            <a:r>
+              <a:rPr lang="en-US" sz="1400" dirty="0">
+                <a:solidFill>
+                  <a:srgbClr val="B8B5D9"/>
+                </a:solidFill>
+                <a:latin typeface="Consolas" pitchFamily="34" charset="0"/>
+                <a:ea typeface="Consolas" pitchFamily="34" charset="-122"/>
+                <a:cs typeface="Consolas" pitchFamily="34" charset="-120"/>
+              </a:rPr>
+              <a:t>)</a:t>
+            </a:r>
+            <a:pPr indent="0" marL="0">
+              <a:buNone/>
+            </a:pPr>
+            <a:r>
+              <a:rPr lang="en-US" sz="1400" dirty="0">
+                <a:solidFill>
+                  <a:srgbClr val="B8B5D9"/>
+                </a:solidFill>
+                <a:latin typeface="Consolas" pitchFamily="34" charset="0"/>
+                <a:ea typeface="Consolas" pitchFamily="34" charset="-122"/>
+                <a:cs typeface="Consolas" pitchFamily="34" charset="-120"/>
+              </a:rPr>
+              <a:t>;</a:t>
+            </a:r>
+            <a:pPr indent="0" marL="0">
+              <a:buNone/>
+            </a:pPr>
+            <a:endParaRPr lang="en-US" sz="1400" dirty="0"/>
+          </a:p>
+          <a:p>
+            <a:pPr indent="0" marL="0">
+              <a:buNone/>
+            </a:pPr>
+            <a:endParaRPr lang="en-US" sz="1400" dirty="0"/>
+          </a:p>
+          <a:p>
+            <a:pPr indent="0" marL="0">
+              <a:buNone/>
+            </a:pPr>
+            <a:r>
+              <a:rPr lang="en-US" sz="1400" i="1" dirty="0">
+                <a:solidFill>
+                  <a:srgbClr val="8B88B5"/>
+                </a:solidFill>
+                <a:latin typeface="Consolas" pitchFamily="34" charset="0"/>
+                <a:ea typeface="Consolas" pitchFamily="34" charset="-122"/>
+                <a:cs typeface="Consolas" pitchFamily="34" charset="-120"/>
+              </a:rPr>
+              <a:t>// ☁️   Cloud — Azure OpenAI</a:t>
+            </a:r>
+            <a:pPr indent="0" marL="0">
+              <a:buNone/>
+            </a:pPr>
+            <a:endParaRPr lang="en-US" sz="1400" dirty="0"/>
+          </a:p>
+          <a:p>
+            <a:pPr indent="0" marL="0">
+              <a:buNone/>
+            </a:pPr>
+            <a:r>
+              <a:rPr lang="en-US" sz="1400" dirty="0">
+                <a:solidFill>
+                  <a:srgbClr val="FAF8FF"/>
+                </a:solidFill>
+                <a:latin typeface="Consolas" pitchFamily="34" charset="0"/>
+                <a:ea typeface="Consolas" pitchFamily="34" charset="-122"/>
+                <a:cs typeface="Consolas" pitchFamily="34" charset="-120"/>
+              </a:rPr>
+              <a:t>chatClient </a:t>
+            </a:r>
+            <a:pPr indent="0" marL="0">
+              <a:buNone/>
+            </a:pPr>
+            <a:r>
+              <a:rPr lang="en-US" sz="1400" dirty="0">
+                <a:solidFill>
+                  <a:srgbClr val="CFCBED"/>
+                </a:solidFill>
+                <a:latin typeface="Consolas" pitchFamily="34" charset="0"/>
+                <a:ea typeface="Consolas" pitchFamily="34" charset="-122"/>
+                <a:cs typeface="Consolas" pitchFamily="34" charset="-120"/>
+              </a:rPr>
+              <a:t>=</a:t>
+            </a:r>
+            <a:pPr indent="0" marL="0">
+              <a:buNone/>
+            </a:pPr>
+            <a:r>
+              <a:rPr lang="en-US" sz="1400" dirty="0">
+                <a:solidFill>
+                  <a:srgbClr val="FAF8FF"/>
+                </a:solidFill>
+                <a:latin typeface="Consolas" pitchFamily="34" charset="0"/>
+                <a:ea typeface="Consolas" pitchFamily="34" charset="-122"/>
+                <a:cs typeface="Consolas" pitchFamily="34" charset="-120"/>
+              </a:rPr>
+              <a:t> </a:t>
+            </a:r>
+            <a:pPr indent="0" marL="0">
+              <a:buNone/>
+            </a:pPr>
+            <a:r>
+              <a:rPr lang="en-US" sz="1400" dirty="0">
+                <a:solidFill>
+                  <a:srgbClr val="FB7185"/>
+                </a:solidFill>
+                <a:latin typeface="Consolas" pitchFamily="34" charset="0"/>
+                <a:ea typeface="Consolas" pitchFamily="34" charset="-122"/>
+                <a:cs typeface="Consolas" pitchFamily="34" charset="-120"/>
+              </a:rPr>
+              <a:t>new</a:t>
+            </a:r>
+            <a:pPr indent="0" marL="0">
+              <a:buNone/>
+            </a:pPr>
+            <a:r>
+              <a:rPr lang="en-US" sz="1400" dirty="0">
+                <a:solidFill>
+                  <a:srgbClr val="FAF8FF"/>
+                </a:solidFill>
+                <a:latin typeface="Consolas" pitchFamily="34" charset="0"/>
+                <a:ea typeface="Consolas" pitchFamily="34" charset="-122"/>
+                <a:cs typeface="Consolas" pitchFamily="34" charset="-120"/>
+              </a:rPr>
+              <a:t> </a:t>
+            </a:r>
+            <a:pPr indent="0" marL="0">
+              <a:buNone/>
+            </a:pPr>
+            <a:r>
+              <a:rPr lang="en-US" sz="1400" dirty="0">
+                <a:solidFill>
+                  <a:srgbClr val="FAF8FF"/>
+                </a:solidFill>
+                <a:latin typeface="Consolas" pitchFamily="34" charset="0"/>
+                <a:ea typeface="Consolas" pitchFamily="34" charset="-122"/>
+                <a:cs typeface="Consolas" pitchFamily="34" charset="-120"/>
+              </a:rPr>
               <a:t>AzureOpenAIClient</a:t>
             </a:r>
             <a:pPr indent="0" marL="0">
               <a:buNone/>
             </a:pPr>
             <a:r>
-              <a:rPr lang="en-US" sz="1000" dirty="0">
+              <a:rPr lang="en-US" sz="1400" dirty="0">
                 <a:solidFill>
                   <a:srgbClr val="B8B5D9"/>
                 </a:solidFill>
@@ -7578,14 +7763,8 @@
             <a:pPr indent="0" marL="0">
               <a:buNone/>
             </a:pPr>
-            <a:endParaRPr lang="en-US" sz="1000" dirty="0"/>
-          </a:p>
-          <a:p>
-            <a:pPr indent="0" marL="0">
-              <a:buNone/>
-            </a:pPr>
-            <a:r>
-              <a:rPr lang="en-US" sz="1000" dirty="0">
+            <a:r>
+              <a:rPr lang="en-US" sz="1400" dirty="0">
                 <a:solidFill>
                   <a:srgbClr val="FAF8FF"/>
                 </a:solidFill>
@@ -7593,13 +7772,13 @@
                 <a:ea typeface="Consolas" pitchFamily="34" charset="-122"/>
                 <a:cs typeface="Consolas" pitchFamily="34" charset="-120"/>
               </a:rPr>
-              <a:t>    endpoint</a:t>
-            </a:r>
-            <a:pPr indent="0" marL="0">
-              <a:buNone/>
-            </a:pPr>
-            <a:r>
-              <a:rPr lang="en-US" sz="1000" dirty="0">
+              <a:t>endpoint</a:t>
+            </a:r>
+            <a:pPr indent="0" marL="0">
+              <a:buNone/>
+            </a:pPr>
+            <a:r>
+              <a:rPr lang="en-US" sz="1400" dirty="0">
                 <a:solidFill>
                   <a:srgbClr val="B8B5D9"/>
                 </a:solidFill>
@@ -7613,7 +7792,7 @@
               <a:buNone/>
             </a:pPr>
             <a:r>
-              <a:rPr lang="en-US" sz="1000" dirty="0">
+              <a:rPr lang="en-US" sz="1400" dirty="0">
                 <a:solidFill>
                   <a:srgbClr val="FAF8FF"/>
                 </a:solidFill>
@@ -7627,7 +7806,7 @@
               <a:buNone/>
             </a:pPr>
             <a:r>
-              <a:rPr lang="en-US" sz="1000" dirty="0">
+              <a:rPr lang="en-US" sz="1400" dirty="0">
                 <a:solidFill>
                   <a:srgbClr val="FB7185"/>
                 </a:solidFill>
@@ -7641,7 +7820,7 @@
               <a:buNone/>
             </a:pPr>
             <a:r>
-              <a:rPr lang="en-US" sz="1000" dirty="0">
+              <a:rPr lang="en-US" sz="1400" dirty="0">
                 <a:solidFill>
                   <a:srgbClr val="FAF8FF"/>
                 </a:solidFill>
@@ -7655,7 +7834,7 @@
               <a:buNone/>
             </a:pPr>
             <a:r>
-              <a:rPr lang="en-US" sz="1000" dirty="0">
+              <a:rPr lang="en-US" sz="1400" dirty="0">
                 <a:solidFill>
                   <a:srgbClr val="FAF8FF"/>
                 </a:solidFill>
@@ -7669,7 +7848,7 @@
               <a:buNone/>
             </a:pPr>
             <a:r>
-              <a:rPr lang="en-US" sz="1000" dirty="0">
+              <a:rPr lang="en-US" sz="1400" dirty="0">
                 <a:solidFill>
                   <a:srgbClr val="B8B5D9"/>
                 </a:solidFill>
@@ -7683,7 +7862,7 @@
               <a:buNone/>
             </a:pPr>
             <a:r>
-              <a:rPr lang="en-US" sz="1000" dirty="0">
+              <a:rPr lang="en-US" sz="1400" dirty="0">
                 <a:solidFill>
                   <a:srgbClr val="B8B5D9"/>
                 </a:solidFill>
@@ -7697,7 +7876,7 @@
               <a:buNone/>
             </a:pPr>
             <a:r>
-              <a:rPr lang="en-US" sz="1000" dirty="0">
+              <a:rPr lang="en-US" sz="1400" dirty="0">
                 <a:solidFill>
                   <a:srgbClr val="B8B5D9"/>
                 </a:solidFill>
@@ -7710,14 +7889,14 @@
             <a:pPr indent="0" marL="0">
               <a:buNone/>
             </a:pPr>
-            <a:endParaRPr lang="en-US" sz="1000" dirty="0"/>
-          </a:p>
-          <a:p>
-            <a:pPr indent="0" marL="0">
-              <a:buNone/>
-            </a:pPr>
-            <a:r>
-              <a:rPr lang="en-US" sz="1000" dirty="0">
+            <a:endParaRPr lang="en-US" sz="1400" dirty="0"/>
+          </a:p>
+          <a:p>
+            <a:pPr indent="0" marL="0">
+              <a:buNone/>
+            </a:pPr>
+            <a:r>
+              <a:rPr lang="en-US" sz="1400" dirty="0">
                 <a:solidFill>
                   <a:srgbClr val="FAF8FF"/>
                 </a:solidFill>
@@ -7731,7 +7910,7 @@
               <a:buNone/>
             </a:pPr>
             <a:r>
-              <a:rPr lang="en-US" sz="1000" dirty="0">
+              <a:rPr lang="en-US" sz="1400" dirty="0">
                 <a:solidFill>
                   <a:srgbClr val="B8B5D9"/>
                 </a:solidFill>
@@ -7745,7 +7924,7 @@
               <a:buNone/>
             </a:pPr>
             <a:r>
-              <a:rPr lang="en-US" sz="1000" dirty="0">
+              <a:rPr lang="en-US" sz="1400" dirty="0">
                 <a:solidFill>
                   <a:srgbClr val="86EFAC"/>
                 </a:solidFill>
@@ -7759,7 +7938,7 @@
               <a:buNone/>
             </a:pPr>
             <a:r>
-              <a:rPr lang="en-US" sz="1000" dirty="0">
+              <a:rPr lang="en-US" sz="1400" dirty="0">
                 <a:solidFill>
                   <a:srgbClr val="B8B5D9"/>
                 </a:solidFill>
@@ -7773,7 +7952,7 @@
               <a:buNone/>
             </a:pPr>
             <a:r>
-              <a:rPr lang="en-US" sz="1000" dirty="0">
+              <a:rPr lang="en-US" sz="1400" dirty="0">
                 <a:solidFill>
                   <a:srgbClr val="FBBF24"/>
                 </a:solidFill>
@@ -7787,7 +7966,7 @@
               <a:buNone/>
             </a:pPr>
             <a:r>
-              <a:rPr lang="en-US" sz="1000" dirty="0">
+              <a:rPr lang="en-US" sz="1400" dirty="0">
                 <a:solidFill>
                   <a:srgbClr val="B8B5D9"/>
                 </a:solidFill>
@@ -7800,14 +7979,124 @@
             <a:pPr indent="0" marL="0">
               <a:buNone/>
             </a:pPr>
-            <a:endParaRPr lang="en-US" sz="1000" dirty="0"/>
-          </a:p>
-          <a:p>
-            <a:pPr indent="0" marL="0">
-              <a:buNone/>
-            </a:pPr>
-            <a:r>
-              <a:rPr lang="en-US" sz="1000" dirty="0">
+            <a:r>
+              <a:rPr lang="en-US" sz="1400" dirty="0">
+                <a:solidFill>
+                  <a:srgbClr val="B8B5D9"/>
+                </a:solidFill>
+                <a:latin typeface="Consolas" pitchFamily="34" charset="0"/>
+                <a:ea typeface="Consolas" pitchFamily="34" charset="-122"/>
+                <a:cs typeface="Consolas" pitchFamily="34" charset="-120"/>
+              </a:rPr>
+              <a:t>.</a:t>
+            </a:r>
+            <a:pPr indent="0" marL="0">
+              <a:buNone/>
+            </a:pPr>
+            <a:r>
+              <a:rPr lang="en-US" sz="1400" dirty="0">
+                <a:solidFill>
+                  <a:srgbClr val="86EFAC"/>
+                </a:solidFill>
+                <a:latin typeface="Consolas" pitchFamily="34" charset="0"/>
+                <a:ea typeface="Consolas" pitchFamily="34" charset="-122"/>
+                <a:cs typeface="Consolas" pitchFamily="34" charset="-120"/>
+              </a:rPr>
+              <a:t>AsIChatClient</a:t>
+            </a:r>
+            <a:pPr indent="0" marL="0">
+              <a:buNone/>
+            </a:pPr>
+            <a:r>
+              <a:rPr lang="en-US" sz="1400" dirty="0">
+                <a:solidFill>
+                  <a:srgbClr val="B8B5D9"/>
+                </a:solidFill>
+                <a:latin typeface="Consolas" pitchFamily="34" charset="0"/>
+                <a:ea typeface="Consolas" pitchFamily="34" charset="-122"/>
+                <a:cs typeface="Consolas" pitchFamily="34" charset="-120"/>
+              </a:rPr>
+              <a:t>(</a:t>
+            </a:r>
+            <a:pPr indent="0" marL="0">
+              <a:buNone/>
+            </a:pPr>
+            <a:r>
+              <a:rPr lang="en-US" sz="1400" dirty="0">
+                <a:solidFill>
+                  <a:srgbClr val="B8B5D9"/>
+                </a:solidFill>
+                <a:latin typeface="Consolas" pitchFamily="34" charset="0"/>
+                <a:ea typeface="Consolas" pitchFamily="34" charset="-122"/>
+                <a:cs typeface="Consolas" pitchFamily="34" charset="-120"/>
+              </a:rPr>
+              <a:t>)</a:t>
+            </a:r>
+            <a:pPr indent="0" marL="0">
+              <a:buNone/>
+            </a:pPr>
+            <a:r>
+              <a:rPr lang="en-US" sz="1400" dirty="0">
+                <a:solidFill>
+                  <a:srgbClr val="B8B5D9"/>
+                </a:solidFill>
+                <a:latin typeface="Consolas" pitchFamily="34" charset="0"/>
+                <a:ea typeface="Consolas" pitchFamily="34" charset="-122"/>
+                <a:cs typeface="Consolas" pitchFamily="34" charset="-120"/>
+              </a:rPr>
+              <a:t>;</a:t>
+            </a:r>
+            <a:pPr indent="0" marL="0">
+              <a:buNone/>
+            </a:pPr>
+            <a:endParaRPr lang="en-US" sz="1400" dirty="0"/>
+          </a:p>
+          <a:p>
+            <a:pPr indent="0" marL="0">
+              <a:buNone/>
+            </a:pPr>
+            <a:endParaRPr lang="en-US" sz="1400" dirty="0"/>
+          </a:p>
+          <a:p>
+            <a:pPr indent="0" marL="0">
+              <a:buNone/>
+            </a:pPr>
+            <a:r>
+              <a:rPr lang="en-US" sz="1400" i="1" dirty="0">
+                <a:solidFill>
+                  <a:srgbClr val="8B88B5"/>
+                </a:solidFill>
+                <a:latin typeface="Consolas" pitchFamily="34" charset="0"/>
+                <a:ea typeface="Consolas" pitchFamily="34" charset="-122"/>
+                <a:cs typeface="Consolas" pitchFamily="34" charset="-120"/>
+              </a:rPr>
+              <a:t>// ✨  Same agent. Every tier.</a:t>
+            </a:r>
+            <a:pPr indent="0" marL="0">
+              <a:buNone/>
+            </a:pPr>
+            <a:endParaRPr lang="en-US" sz="1400" dirty="0"/>
+          </a:p>
+          <a:p>
+            <a:pPr indent="0" marL="0">
+              <a:buNone/>
+            </a:pPr>
+            <a:r>
+              <a:rPr lang="en-US" sz="1400" dirty="0">
+                <a:solidFill>
+                  <a:srgbClr val="FB7185"/>
+                </a:solidFill>
+                <a:latin typeface="Consolas" pitchFamily="34" charset="0"/>
+                <a:ea typeface="Consolas" pitchFamily="34" charset="-122"/>
+                <a:cs typeface="Consolas" pitchFamily="34" charset="-120"/>
+              </a:rPr>
+              <a:t>var</a:t>
+            </a:r>
+            <a:pPr indent="0" marL="0">
+              <a:buNone/>
+            </a:pPr>
+            <a:r>
+              <a:rPr lang="en-US" sz="1400" dirty="0">
                 <a:solidFill>
                   <a:srgbClr val="FAF8FF"/>
                 </a:solidFill>
@@ -7815,13 +8104,41 @@
                 <a:ea typeface="Consolas" pitchFamily="34" charset="-122"/>
                 <a:cs typeface="Consolas" pitchFamily="34" charset="-120"/>
               </a:rPr>
-              <a:t>    </a:t>
-            </a:r>
-            <a:pPr indent="0" marL="0">
-              <a:buNone/>
-            </a:pPr>
-            <a:r>
-              <a:rPr lang="en-US" sz="1000" dirty="0">
+              <a:t> agent </a:t>
+            </a:r>
+            <a:pPr indent="0" marL="0">
+              <a:buNone/>
+            </a:pPr>
+            <a:r>
+              <a:rPr lang="en-US" sz="1400" dirty="0">
+                <a:solidFill>
+                  <a:srgbClr val="CFCBED"/>
+                </a:solidFill>
+                <a:latin typeface="Consolas" pitchFamily="34" charset="0"/>
+                <a:ea typeface="Consolas" pitchFamily="34" charset="-122"/>
+                <a:cs typeface="Consolas" pitchFamily="34" charset="-120"/>
+              </a:rPr>
+              <a:t>=</a:t>
+            </a:r>
+            <a:pPr indent="0" marL="0">
+              <a:buNone/>
+            </a:pPr>
+            <a:r>
+              <a:rPr lang="en-US" sz="1400" dirty="0">
+                <a:solidFill>
+                  <a:srgbClr val="FAF8FF"/>
+                </a:solidFill>
+                <a:latin typeface="Consolas" pitchFamily="34" charset="0"/>
+                <a:ea typeface="Consolas" pitchFamily="34" charset="-122"/>
+                <a:cs typeface="Consolas" pitchFamily="34" charset="-120"/>
+              </a:rPr>
+              <a:t> chatClient</a:t>
+            </a:r>
+            <a:pPr indent="0" marL="0">
+              <a:buNone/>
+            </a:pPr>
+            <a:r>
+              <a:rPr lang="en-US" sz="1400" dirty="0">
                 <a:solidFill>
                   <a:srgbClr val="B8B5D9"/>
                 </a:solidFill>
@@ -7835,7 +8152,7 @@
               <a:buNone/>
             </a:pPr>
             <a:r>
-              <a:rPr lang="en-US" sz="1000" dirty="0">
+              <a:rPr lang="en-US" sz="1400" dirty="0">
                 <a:solidFill>
                   <a:srgbClr val="86EFAC"/>
                 </a:solidFill>
@@ -7843,13 +8160,13 @@
                 <a:ea typeface="Consolas" pitchFamily="34" charset="-122"/>
                 <a:cs typeface="Consolas" pitchFamily="34" charset="-120"/>
               </a:rPr>
-              <a:t>AsIChatClient</a:t>
-            </a:r>
-            <a:pPr indent="0" marL="0">
-              <a:buNone/>
-            </a:pPr>
-            <a:r>
-              <a:rPr lang="en-US" sz="1000" dirty="0">
+              <a:t>CreateAIAgent</a:t>
+            </a:r>
+            <a:pPr indent="0" marL="0">
+              <a:buNone/>
+            </a:pPr>
+            <a:r>
+              <a:rPr lang="en-US" sz="1400" dirty="0">
                 <a:solidFill>
                   <a:srgbClr val="B8B5D9"/>
                 </a:solidFill>
@@ -7863,7 +8180,21 @@
               <a:buNone/>
             </a:pPr>
             <a:r>
-              <a:rPr lang="en-US" sz="1000" dirty="0">
+              <a:rPr lang="en-US" sz="1400" dirty="0">
+                <a:solidFill>
+                  <a:srgbClr val="FBBF24"/>
+                </a:solidFill>
+                <a:latin typeface="Consolas" pitchFamily="34" charset="0"/>
+                <a:ea typeface="Consolas" pitchFamily="34" charset="-122"/>
+                <a:cs typeface="Consolas" pitchFamily="34" charset="-120"/>
+              </a:rPr>
+              <a:t>"You are helpful."</a:t>
+            </a:r>
+            <a:pPr indent="0" marL="0">
+              <a:buNone/>
+            </a:pPr>
+            <a:r>
+              <a:rPr lang="en-US" sz="1400" dirty="0">
                 <a:solidFill>
                   <a:srgbClr val="B8B5D9"/>
                 </a:solidFill>
@@ -7877,7 +8208,7 @@
               <a:buNone/>
             </a:pPr>
             <a:r>
-              <a:rPr lang="en-US" sz="1000" dirty="0">
+              <a:rPr lang="en-US" sz="1400" dirty="0">
                 <a:solidFill>
                   <a:srgbClr val="B8B5D9"/>
                 </a:solidFill>
@@ -7887,213 +8218,7 @@
               </a:rPr>
               <a:t>;</a:t>
             </a:r>
-            <a:endParaRPr lang="en-US" sz="1000" dirty="0"/>
-          </a:p>
-        </p:txBody>
-      </p:sp>
-      <p:sp>
-        <p:nvSpPr>
-          <p:cNvPr id="17" name="Shape 15"/>
-          <p:cNvSpPr/>
-          <p:nvPr/>
-        </p:nvSpPr>
-        <p:spPr>
-          <a:xfrm>
-            <a:off x="822960" y="5577840"/>
-            <a:ext cx="10545775" cy="822960"/>
-          </a:xfrm>
-          <a:prstGeom prst="roundRect">
-            <a:avLst>
-              <a:gd name="adj" fmla="val 11111"/>
-            </a:avLst>
-          </a:prstGeom>
-          <a:solidFill>
-            <a:srgbClr val="0F0A2E"/>
-          </a:solidFill>
-          <a:ln w="12700">
-            <a:solidFill>
-              <a:srgbClr val="FB7185"/>
-            </a:solidFill>
-            <a:prstDash val="solid"/>
-          </a:ln>
-        </p:spPr>
-      </p:sp>
-      <p:sp>
-        <p:nvSpPr>
-          <p:cNvPr id="18" name="Text 16"/>
-          <p:cNvSpPr/>
-          <p:nvPr/>
-        </p:nvSpPr>
-        <p:spPr>
-          <a:xfrm>
-            <a:off x="822960" y="5577840"/>
-            <a:ext cx="10545775" cy="822960"/>
-          </a:xfrm>
-          <a:prstGeom prst="rect">
-            <a:avLst/>
-          </a:prstGeom>
-          <a:noFill/>
-          <a:ln/>
-        </p:spPr>
-        <p:txBody>
-          <a:bodyPr wrap="square" rtlCol="0" anchor="ctr"/>
-          <a:lstStyle/>
-          <a:p>
-            <a:pPr algn="ctr" indent="0" marL="0">
-              <a:buNone/>
-            </a:pPr>
-            <a:r>
-              <a:rPr lang="en-US" sz="1500" dirty="0">
-                <a:solidFill>
-                  <a:srgbClr val="FB7185"/>
-                </a:solidFill>
-                <a:latin typeface="Consolas" pitchFamily="34" charset="0"/>
-                <a:ea typeface="Consolas" pitchFamily="34" charset="-122"/>
-                <a:cs typeface="Consolas" pitchFamily="34" charset="-120"/>
-              </a:rPr>
-              <a:t>var</a:t>
-            </a:r>
-            <a:pPr algn="ctr" indent="0" marL="0">
-              <a:buNone/>
-            </a:pPr>
-            <a:r>
-              <a:rPr lang="en-US" sz="1500" dirty="0">
-                <a:solidFill>
-                  <a:srgbClr val="FAF8FF"/>
-                </a:solidFill>
-                <a:latin typeface="Consolas" pitchFamily="34" charset="0"/>
-                <a:ea typeface="Consolas" pitchFamily="34" charset="-122"/>
-                <a:cs typeface="Consolas" pitchFamily="34" charset="-120"/>
-              </a:rPr>
-              <a:t> agent </a:t>
-            </a:r>
-            <a:pPr algn="ctr" indent="0" marL="0">
-              <a:buNone/>
-            </a:pPr>
-            <a:r>
-              <a:rPr lang="en-US" sz="1500" dirty="0">
-                <a:solidFill>
-                  <a:srgbClr val="CFCBED"/>
-                </a:solidFill>
-                <a:latin typeface="Consolas" pitchFamily="34" charset="0"/>
-                <a:ea typeface="Consolas" pitchFamily="34" charset="-122"/>
-                <a:cs typeface="Consolas" pitchFamily="34" charset="-120"/>
-              </a:rPr>
-              <a:t>=</a:t>
-            </a:r>
-            <a:pPr algn="ctr" indent="0" marL="0">
-              <a:buNone/>
-            </a:pPr>
-            <a:r>
-              <a:rPr lang="en-US" sz="1500" dirty="0">
-                <a:solidFill>
-                  <a:srgbClr val="FAF8FF"/>
-                </a:solidFill>
-                <a:latin typeface="Consolas" pitchFamily="34" charset="0"/>
-                <a:ea typeface="Consolas" pitchFamily="34" charset="-122"/>
-                <a:cs typeface="Consolas" pitchFamily="34" charset="-120"/>
-              </a:rPr>
-              <a:t> chatClient</a:t>
-            </a:r>
-            <a:pPr algn="ctr" indent="0" marL="0">
-              <a:buNone/>
-            </a:pPr>
-            <a:r>
-              <a:rPr lang="en-US" sz="1500" dirty="0">
-                <a:solidFill>
-                  <a:srgbClr val="B8B5D9"/>
-                </a:solidFill>
-                <a:latin typeface="Consolas" pitchFamily="34" charset="0"/>
-                <a:ea typeface="Consolas" pitchFamily="34" charset="-122"/>
-                <a:cs typeface="Consolas" pitchFamily="34" charset="-120"/>
-              </a:rPr>
-              <a:t>.</a:t>
-            </a:r>
-            <a:pPr algn="ctr" indent="0" marL="0">
-              <a:buNone/>
-            </a:pPr>
-            <a:r>
-              <a:rPr lang="en-US" sz="1500" dirty="0">
-                <a:solidFill>
-                  <a:srgbClr val="86EFAC"/>
-                </a:solidFill>
-                <a:latin typeface="Consolas" pitchFamily="34" charset="0"/>
-                <a:ea typeface="Consolas" pitchFamily="34" charset="-122"/>
-                <a:cs typeface="Consolas" pitchFamily="34" charset="-120"/>
-              </a:rPr>
-              <a:t>CreateAIAgent</a:t>
-            </a:r>
-            <a:pPr algn="ctr" indent="0" marL="0">
-              <a:buNone/>
-            </a:pPr>
-            <a:r>
-              <a:rPr lang="en-US" sz="1500" dirty="0">
-                <a:solidFill>
-                  <a:srgbClr val="B8B5D9"/>
-                </a:solidFill>
-                <a:latin typeface="Consolas" pitchFamily="34" charset="0"/>
-                <a:ea typeface="Consolas" pitchFamily="34" charset="-122"/>
-                <a:cs typeface="Consolas" pitchFamily="34" charset="-120"/>
-              </a:rPr>
-              <a:t>(</a:t>
-            </a:r>
-            <a:pPr algn="ctr" indent="0" marL="0">
-              <a:buNone/>
-            </a:pPr>
-            <a:r>
-              <a:rPr lang="en-US" sz="1500" dirty="0">
-                <a:solidFill>
-                  <a:srgbClr val="FBBF24"/>
-                </a:solidFill>
-                <a:latin typeface="Consolas" pitchFamily="34" charset="0"/>
-                <a:ea typeface="Consolas" pitchFamily="34" charset="-122"/>
-                <a:cs typeface="Consolas" pitchFamily="34" charset="-120"/>
-              </a:rPr>
-              <a:t>"You are helpful."</a:t>
-            </a:r>
-            <a:pPr algn="ctr" indent="0" marL="0">
-              <a:buNone/>
-            </a:pPr>
-            <a:r>
-              <a:rPr lang="en-US" sz="1500" dirty="0">
-                <a:solidFill>
-                  <a:srgbClr val="B8B5D9"/>
-                </a:solidFill>
-                <a:latin typeface="Consolas" pitchFamily="34" charset="0"/>
-                <a:ea typeface="Consolas" pitchFamily="34" charset="-122"/>
-                <a:cs typeface="Consolas" pitchFamily="34" charset="-120"/>
-              </a:rPr>
-              <a:t>)</a:t>
-            </a:r>
-            <a:pPr algn="ctr" indent="0" marL="0">
-              <a:buNone/>
-            </a:pPr>
-            <a:r>
-              <a:rPr lang="en-US" sz="1500" dirty="0">
-                <a:solidFill>
-                  <a:srgbClr val="B8B5D9"/>
-                </a:solidFill>
-                <a:latin typeface="Consolas" pitchFamily="34" charset="0"/>
-                <a:ea typeface="Consolas" pitchFamily="34" charset="-122"/>
-                <a:cs typeface="Consolas" pitchFamily="34" charset="-120"/>
-              </a:rPr>
-              <a:t>;</a:t>
-            </a:r>
-            <a:pPr algn="ctr" indent="0" marL="0">
-              <a:buNone/>
-            </a:pPr>
-            <a:r>
-              <a:rPr lang="en-US" sz="1500" i="1" dirty="0">
-                <a:solidFill>
-                  <a:srgbClr val="FB7185"/>
-                </a:solidFill>
-                <a:latin typeface="Consolas" pitchFamily="34" charset="0"/>
-                <a:ea typeface="Consolas" pitchFamily="34" charset="-122"/>
-                <a:cs typeface="Consolas" pitchFamily="34" charset="-120"/>
-              </a:rPr>
-              <a:t>   ←  identical for every tier</a:t>
-            </a:r>
-            <a:endParaRPr lang="en-US" sz="1500" dirty="0"/>
+            <a:endParaRPr lang="en-US" sz="1400" dirty="0"/>
           </a:p>
         </p:txBody>
       </p:sp>
@@ -9177,7 +9302,7 @@
                 <a:ea typeface="Calibri" pitchFamily="34" charset="-122"/>
                 <a:cs typeface="Calibri" pitchFamily="34" charset="-120"/>
               </a:rPr>
-              <a:t>13 / 14</a:t>
+              <a:t>13 / 16</a:t>
             </a:r>
             <a:endParaRPr lang="en-US" sz="1000" dirty="0"/>
           </a:p>
@@ -9194,6 +9319,3031 @@
 <file path=ppt/slides/slide14.xml><?xml version="1.0" encoding="utf-8"?>
 <p:sld xmlns:a="http://schemas.openxmlformats.org/drawingml/2006/main" xmlns:r="http://schemas.openxmlformats.org/officeDocument/2006/relationships" xmlns:p="http://schemas.openxmlformats.org/presentationml/2006/main">
   <p:cSld name="Slide 14">
+    <p:bg>
+      <p:bgPr>
+        <a:solidFill>
+          <a:srgbClr val="FAF8FF"/>
+        </a:solidFill>
+      </p:bgPr>
+    </p:bg>
+    <p:spTree>
+      <p:nvGrpSpPr>
+        <p:cNvPr id="1" name=""/>
+        <p:cNvGrpSpPr/>
+        <p:nvPr/>
+      </p:nvGrpSpPr>
+      <p:grpSpPr>
+        <a:xfrm>
+          <a:off x="0" y="0"/>
+          <a:ext cx="0" cy="0"/>
+          <a:chOff x="0" y="0"/>
+          <a:chExt cx="0" cy="0"/>
+        </a:xfrm>
+      </p:grpSpPr>
+      <p:sp>
+        <p:nvSpPr>
+          <p:cNvPr id="2" name="Text 0"/>
+          <p:cNvSpPr/>
+          <p:nvPr/>
+        </p:nvSpPr>
+        <p:spPr>
+          <a:xfrm>
+            <a:off x="548640" y="502920"/>
+            <a:ext cx="7315200" cy="320040"/>
+          </a:xfrm>
+          <a:prstGeom prst="rect">
+            <a:avLst/>
+          </a:prstGeom>
+          <a:noFill/>
+          <a:ln/>
+        </p:spPr>
+        <p:txBody>
+          <a:bodyPr wrap="square" rtlCol="0" anchor="ctr"/>
+          <a:lstStyle/>
+          <a:p>
+            <a:pPr indent="0" marL="0">
+              <a:buNone/>
+            </a:pPr>
+            <a:r>
+              <a:rPr lang="en-US" sz="1200" b="1" spc="400" kern="0" dirty="0">
+                <a:solidFill>
+                  <a:srgbClr val="FB7185"/>
+                </a:solidFill>
+                <a:latin typeface="Calibri" pitchFamily="34" charset="0"/>
+                <a:ea typeface="Calibri" pitchFamily="34" charset="-122"/>
+                <a:cs typeface="Calibri" pitchFamily="34" charset="-120"/>
+              </a:rPr>
+              <a:t>RULES OF THUMB</a:t>
+            </a:r>
+            <a:endParaRPr lang="en-US" sz="1200" dirty="0"/>
+          </a:p>
+        </p:txBody>
+      </p:sp>
+      <p:sp>
+        <p:nvSpPr>
+          <p:cNvPr id="3" name="Text 1"/>
+          <p:cNvSpPr/>
+          <p:nvPr/>
+        </p:nvSpPr>
+        <p:spPr>
+          <a:xfrm>
+            <a:off x="548640" y="822960"/>
+            <a:ext cx="10058400" cy="822960"/>
+          </a:xfrm>
+          <a:prstGeom prst="rect">
+            <a:avLst/>
+          </a:prstGeom>
+          <a:noFill/>
+          <a:ln/>
+        </p:spPr>
+        <p:txBody>
+          <a:bodyPr wrap="square" rtlCol="0" anchor="ctr"/>
+          <a:lstStyle/>
+          <a:p>
+            <a:pPr indent="0" marL="0">
+              <a:buNone/>
+            </a:pPr>
+            <a:r>
+              <a:rPr lang="en-US" sz="3800" b="1" dirty="0">
+                <a:solidFill>
+                  <a:srgbClr val="0F0A2E"/>
+                </a:solidFill>
+                <a:latin typeface="Georgia" pitchFamily="34" charset="0"/>
+                <a:ea typeface="Georgia" pitchFamily="34" charset="-122"/>
+                <a:cs typeface="Georgia" pitchFamily="34" charset="-120"/>
+              </a:rPr>
+              <a:t>Your choice. Your code stays the same.</a:t>
+            </a:r>
+            <a:endParaRPr lang="en-US" sz="3800" dirty="0"/>
+          </a:p>
+        </p:txBody>
+      </p:sp>
+      <p:sp>
+        <p:nvSpPr>
+          <p:cNvPr id="4" name="Text 2"/>
+          <p:cNvSpPr/>
+          <p:nvPr/>
+        </p:nvSpPr>
+        <p:spPr>
+          <a:xfrm>
+            <a:off x="548640" y="1691640"/>
+            <a:ext cx="10972800" cy="411480"/>
+          </a:xfrm>
+          <a:prstGeom prst="rect">
+            <a:avLst/>
+          </a:prstGeom>
+          <a:noFill/>
+          <a:ln/>
+        </p:spPr>
+        <p:txBody>
+          <a:bodyPr wrap="square" rtlCol="0" anchor="ctr"/>
+          <a:lstStyle/>
+          <a:p>
+            <a:pPr indent="0" marL="0">
+              <a:buNone/>
+            </a:pPr>
+            <a:r>
+              <a:rPr lang="en-US" sz="1600" i="1" dirty="0">
+                <a:solidFill>
+                  <a:srgbClr val="6B6B8F"/>
+                </a:solidFill>
+                <a:latin typeface="Calibri" pitchFamily="34" charset="0"/>
+                <a:ea typeface="Calibri" pitchFamily="34" charset="-122"/>
+                <a:cs typeface="Calibri" pitchFamily="34" charset="-120"/>
+              </a:rPr>
+              <a:t>There's no single right answer — pick the tier that fits the task, and let MAF handle the rest.</a:t>
+            </a:r>
+            <a:endParaRPr lang="en-US" sz="1600" dirty="0"/>
+          </a:p>
+        </p:txBody>
+      </p:sp>
+      <p:sp>
+        <p:nvSpPr>
+          <p:cNvPr id="5" name="Shape 3"/>
+          <p:cNvSpPr/>
+          <p:nvPr/>
+        </p:nvSpPr>
+        <p:spPr>
+          <a:xfrm>
+            <a:off x="548640" y="2331720"/>
+            <a:ext cx="5410048" cy="3291840"/>
+          </a:xfrm>
+          <a:prstGeom prst="roundRect">
+            <a:avLst>
+              <a:gd name="adj" fmla="val 3333"/>
+            </a:avLst>
+          </a:prstGeom>
+          <a:solidFill>
+            <a:srgbClr val="FFFFFF"/>
+          </a:solidFill>
+          <a:ln w="12700">
+            <a:solidFill>
+              <a:srgbClr val="E5E1F5"/>
+            </a:solidFill>
+            <a:prstDash val="solid"/>
+          </a:ln>
+        </p:spPr>
+      </p:sp>
+      <p:sp>
+        <p:nvSpPr>
+          <p:cNvPr id="6" name="Shape 4"/>
+          <p:cNvSpPr/>
+          <p:nvPr/>
+        </p:nvSpPr>
+        <p:spPr>
+          <a:xfrm>
+            <a:off x="548640" y="2331720"/>
+            <a:ext cx="5410048" cy="164592"/>
+          </a:xfrm>
+          <a:prstGeom prst="rect">
+            <a:avLst/>
+          </a:prstGeom>
+          <a:solidFill>
+            <a:srgbClr val="FB7185"/>
+          </a:solidFill>
+          <a:ln w="12700">
+            <a:solidFill>
+              <a:srgbClr val="FB7185"/>
+            </a:solidFill>
+            <a:prstDash val="solid"/>
+          </a:ln>
+        </p:spPr>
+      </p:sp>
+      <p:sp>
+        <p:nvSpPr>
+          <p:cNvPr id="7" name="Text 5"/>
+          <p:cNvSpPr/>
+          <p:nvPr/>
+        </p:nvSpPr>
+        <p:spPr>
+          <a:xfrm>
+            <a:off x="822960" y="2651760"/>
+            <a:ext cx="4861408" cy="320040"/>
+          </a:xfrm>
+          <a:prstGeom prst="rect">
+            <a:avLst/>
+          </a:prstGeom>
+          <a:noFill/>
+          <a:ln/>
+        </p:spPr>
+        <p:txBody>
+          <a:bodyPr wrap="square" rtlCol="0" anchor="ctr"/>
+          <a:lstStyle/>
+          <a:p>
+            <a:pPr indent="0" marL="0">
+              <a:buNone/>
+            </a:pPr>
+            <a:r>
+              <a:rPr lang="en-US" sz="1200" b="1" spc="400" kern="0" dirty="0">
+                <a:solidFill>
+                  <a:srgbClr val="FB7185"/>
+                </a:solidFill>
+                <a:latin typeface="Calibri" pitchFamily="34" charset="0"/>
+                <a:ea typeface="Calibri" pitchFamily="34" charset="-122"/>
+                <a:cs typeface="Calibri" pitchFamily="34" charset="-120"/>
+              </a:rPr>
+              <a:t>Stay Local</a:t>
+            </a:r>
+            <a:endParaRPr lang="en-US" sz="1200" dirty="0"/>
+          </a:p>
+        </p:txBody>
+      </p:sp>
+      <p:sp>
+        <p:nvSpPr>
+          <p:cNvPr id="8" name="Text 6"/>
+          <p:cNvSpPr/>
+          <p:nvPr/>
+        </p:nvSpPr>
+        <p:spPr>
+          <a:xfrm>
+            <a:off x="822960" y="2971800"/>
+            <a:ext cx="4861408" cy="502920"/>
+          </a:xfrm>
+          <a:prstGeom prst="rect">
+            <a:avLst/>
+          </a:prstGeom>
+          <a:noFill/>
+          <a:ln/>
+        </p:spPr>
+        <p:txBody>
+          <a:bodyPr wrap="square" rtlCol="0" anchor="ctr"/>
+          <a:lstStyle/>
+          <a:p>
+            <a:pPr indent="0" marL="0">
+              <a:buNone/>
+            </a:pPr>
+            <a:r>
+              <a:rPr lang="en-US" sz="2600" b="1" dirty="0">
+                <a:solidFill>
+                  <a:srgbClr val="0F0A2E"/>
+                </a:solidFill>
+                <a:latin typeface="Georgia" pitchFamily="34" charset="0"/>
+                <a:ea typeface="Georgia" pitchFamily="34" charset="-122"/>
+                <a:cs typeface="Georgia" pitchFamily="34" charset="-120"/>
+              </a:rPr>
+              <a:t>Keep it on the device</a:t>
+            </a:r>
+            <a:endParaRPr lang="en-US" sz="2600" dirty="0"/>
+          </a:p>
+        </p:txBody>
+      </p:sp>
+      <p:sp>
+        <p:nvSpPr>
+          <p:cNvPr id="9" name="Shape 7"/>
+          <p:cNvSpPr/>
+          <p:nvPr/>
+        </p:nvSpPr>
+        <p:spPr>
+          <a:xfrm>
+            <a:off x="868680" y="3685032"/>
+            <a:ext cx="164592" cy="164592"/>
+          </a:xfrm>
+          <a:prstGeom prst="ellipse">
+            <a:avLst/>
+          </a:prstGeom>
+          <a:solidFill>
+            <a:srgbClr val="FB7185"/>
+          </a:solidFill>
+          <a:ln w="12700">
+            <a:solidFill>
+              <a:srgbClr val="FB7185"/>
+            </a:solidFill>
+            <a:prstDash val="solid"/>
+          </a:ln>
+        </p:spPr>
+      </p:sp>
+      <p:sp>
+        <p:nvSpPr>
+          <p:cNvPr id="10" name="Text 8"/>
+          <p:cNvSpPr/>
+          <p:nvPr/>
+        </p:nvSpPr>
+        <p:spPr>
+          <a:xfrm>
+            <a:off x="1143000" y="3611880"/>
+            <a:ext cx="4632808" cy="411480"/>
+          </a:xfrm>
+          <a:prstGeom prst="rect">
+            <a:avLst/>
+          </a:prstGeom>
+          <a:noFill/>
+          <a:ln/>
+        </p:spPr>
+        <p:txBody>
+          <a:bodyPr wrap="square" rtlCol="0" anchor="ctr"/>
+          <a:lstStyle/>
+          <a:p>
+            <a:pPr indent="0" marL="0">
+              <a:buNone/>
+            </a:pPr>
+            <a:r>
+              <a:rPr lang="en-US" sz="1300" b="1" dirty="0">
+                <a:solidFill>
+                  <a:srgbClr val="0F0A2E"/>
+                </a:solidFill>
+                <a:latin typeface="Calibri" pitchFamily="34" charset="0"/>
+                <a:ea typeface="Calibri" pitchFamily="34" charset="-122"/>
+                <a:cs typeface="Calibri" pitchFamily="34" charset="-120"/>
+              </a:rPr>
+              <a:t>Privacy non-negotiable</a:t>
+            </a:r>
+            <a:pPr indent="0" marL="0">
+              <a:buNone/>
+            </a:pPr>
+            <a:r>
+              <a:rPr lang="en-US" sz="1300" dirty="0">
+                <a:solidFill>
+                  <a:srgbClr val="E5E1F5"/>
+                </a:solidFill>
+                <a:latin typeface="Calibri" pitchFamily="34" charset="0"/>
+                <a:ea typeface="Calibri" pitchFamily="34" charset="-122"/>
+                <a:cs typeface="Calibri" pitchFamily="34" charset="-120"/>
+              </a:rPr>
+              <a:t>  ·  </a:t>
+            </a:r>
+            <a:pPr indent="0" marL="0">
+              <a:buNone/>
+            </a:pPr>
+            <a:r>
+              <a:rPr lang="en-US" sz="1300" i="1" dirty="0">
+                <a:solidFill>
+                  <a:srgbClr val="6B6B8F"/>
+                </a:solidFill>
+                <a:latin typeface="Calibri" pitchFamily="34" charset="0"/>
+                <a:ea typeface="Calibri" pitchFamily="34" charset="-122"/>
+                <a:cs typeface="Calibri" pitchFamily="34" charset="-120"/>
+              </a:rPr>
+              <a:t>OS Local · BYO Local</a:t>
+            </a:r>
+            <a:endParaRPr lang="en-US" sz="1300" dirty="0"/>
+          </a:p>
+        </p:txBody>
+      </p:sp>
+      <p:sp>
+        <p:nvSpPr>
+          <p:cNvPr id="11" name="Shape 9"/>
+          <p:cNvSpPr/>
+          <p:nvPr/>
+        </p:nvSpPr>
+        <p:spPr>
+          <a:xfrm>
+            <a:off x="868680" y="4187952"/>
+            <a:ext cx="164592" cy="164592"/>
+          </a:xfrm>
+          <a:prstGeom prst="ellipse">
+            <a:avLst/>
+          </a:prstGeom>
+          <a:solidFill>
+            <a:srgbClr val="FB7185"/>
+          </a:solidFill>
+          <a:ln w="12700">
+            <a:solidFill>
+              <a:srgbClr val="FB7185"/>
+            </a:solidFill>
+            <a:prstDash val="solid"/>
+          </a:ln>
+        </p:spPr>
+      </p:sp>
+      <p:sp>
+        <p:nvSpPr>
+          <p:cNvPr id="12" name="Text 10"/>
+          <p:cNvSpPr/>
+          <p:nvPr/>
+        </p:nvSpPr>
+        <p:spPr>
+          <a:xfrm>
+            <a:off x="1143000" y="4114800"/>
+            <a:ext cx="4632808" cy="411480"/>
+          </a:xfrm>
+          <a:prstGeom prst="rect">
+            <a:avLst/>
+          </a:prstGeom>
+          <a:noFill/>
+          <a:ln/>
+        </p:spPr>
+        <p:txBody>
+          <a:bodyPr wrap="square" rtlCol="0" anchor="ctr"/>
+          <a:lstStyle/>
+          <a:p>
+            <a:pPr indent="0" marL="0">
+              <a:buNone/>
+            </a:pPr>
+            <a:r>
+              <a:rPr lang="en-US" sz="1300" b="1" dirty="0">
+                <a:solidFill>
+                  <a:srgbClr val="0F0A2E"/>
+                </a:solidFill>
+                <a:latin typeface="Calibri" pitchFamily="34" charset="0"/>
+                <a:ea typeface="Calibri" pitchFamily="34" charset="-122"/>
+                <a:cs typeface="Calibri" pitchFamily="34" charset="-120"/>
+              </a:rPr>
+              <a:t>Offline / poor network</a:t>
+            </a:r>
+            <a:pPr indent="0" marL="0">
+              <a:buNone/>
+            </a:pPr>
+            <a:r>
+              <a:rPr lang="en-US" sz="1300" dirty="0">
+                <a:solidFill>
+                  <a:srgbClr val="E5E1F5"/>
+                </a:solidFill>
+                <a:latin typeface="Calibri" pitchFamily="34" charset="0"/>
+                <a:ea typeface="Calibri" pitchFamily="34" charset="-122"/>
+                <a:cs typeface="Calibri" pitchFamily="34" charset="-120"/>
+              </a:rPr>
+              <a:t>  ·  </a:t>
+            </a:r>
+            <a:pPr indent="0" marL="0">
+              <a:buNone/>
+            </a:pPr>
+            <a:r>
+              <a:rPr lang="en-US" sz="1300" i="1" dirty="0">
+                <a:solidFill>
+                  <a:srgbClr val="6B6B8F"/>
+                </a:solidFill>
+                <a:latin typeface="Calibri" pitchFamily="34" charset="0"/>
+                <a:ea typeface="Calibri" pitchFamily="34" charset="-122"/>
+                <a:cs typeface="Calibri" pitchFamily="34" charset="-120"/>
+              </a:rPr>
+              <a:t>OS Local · BYO Local</a:t>
+            </a:r>
+            <a:endParaRPr lang="en-US" sz="1300" dirty="0"/>
+          </a:p>
+        </p:txBody>
+      </p:sp>
+      <p:sp>
+        <p:nvSpPr>
+          <p:cNvPr id="13" name="Shape 11"/>
+          <p:cNvSpPr/>
+          <p:nvPr/>
+        </p:nvSpPr>
+        <p:spPr>
+          <a:xfrm>
+            <a:off x="868680" y="4690872"/>
+            <a:ext cx="164592" cy="164592"/>
+          </a:xfrm>
+          <a:prstGeom prst="ellipse">
+            <a:avLst/>
+          </a:prstGeom>
+          <a:solidFill>
+            <a:srgbClr val="FB7185"/>
+          </a:solidFill>
+          <a:ln w="12700">
+            <a:solidFill>
+              <a:srgbClr val="FB7185"/>
+            </a:solidFill>
+            <a:prstDash val="solid"/>
+          </a:ln>
+        </p:spPr>
+      </p:sp>
+      <p:sp>
+        <p:nvSpPr>
+          <p:cNvPr id="14" name="Text 12"/>
+          <p:cNvSpPr/>
+          <p:nvPr/>
+        </p:nvSpPr>
+        <p:spPr>
+          <a:xfrm>
+            <a:off x="1143000" y="4617720"/>
+            <a:ext cx="4632808" cy="411480"/>
+          </a:xfrm>
+          <a:prstGeom prst="rect">
+            <a:avLst/>
+          </a:prstGeom>
+          <a:noFill/>
+          <a:ln/>
+        </p:spPr>
+        <p:txBody>
+          <a:bodyPr wrap="square" rtlCol="0" anchor="ctr"/>
+          <a:lstStyle/>
+          <a:p>
+            <a:pPr indent="0" marL="0">
+              <a:buNone/>
+            </a:pPr>
+            <a:r>
+              <a:rPr lang="en-US" sz="1300" b="1" dirty="0">
+                <a:solidFill>
+                  <a:srgbClr val="0F0A2E"/>
+                </a:solidFill>
+                <a:latin typeface="Calibri" pitchFamily="34" charset="0"/>
+                <a:ea typeface="Calibri" pitchFamily="34" charset="-122"/>
+                <a:cs typeface="Calibri" pitchFamily="34" charset="-120"/>
+              </a:rPr>
+              <a:t>Instant first token</a:t>
+            </a:r>
+            <a:pPr indent="0" marL="0">
+              <a:buNone/>
+            </a:pPr>
+            <a:r>
+              <a:rPr lang="en-US" sz="1300" dirty="0">
+                <a:solidFill>
+                  <a:srgbClr val="E5E1F5"/>
+                </a:solidFill>
+                <a:latin typeface="Calibri" pitchFamily="34" charset="0"/>
+                <a:ea typeface="Calibri" pitchFamily="34" charset="-122"/>
+                <a:cs typeface="Calibri" pitchFamily="34" charset="-120"/>
+              </a:rPr>
+              <a:t>  ·  </a:t>
+            </a:r>
+            <a:pPr indent="0" marL="0">
+              <a:buNone/>
+            </a:pPr>
+            <a:r>
+              <a:rPr lang="en-US" sz="1300" i="1" dirty="0">
+                <a:solidFill>
+                  <a:srgbClr val="6B6B8F"/>
+                </a:solidFill>
+                <a:latin typeface="Calibri" pitchFamily="34" charset="0"/>
+                <a:ea typeface="Calibri" pitchFamily="34" charset="-122"/>
+                <a:cs typeface="Calibri" pitchFamily="34" charset="-120"/>
+              </a:rPr>
+              <a:t>OS Local</a:t>
+            </a:r>
+            <a:endParaRPr lang="en-US" sz="1300" dirty="0"/>
+          </a:p>
+        </p:txBody>
+      </p:sp>
+      <p:sp>
+        <p:nvSpPr>
+          <p:cNvPr id="15" name="Shape 13"/>
+          <p:cNvSpPr/>
+          <p:nvPr/>
+        </p:nvSpPr>
+        <p:spPr>
+          <a:xfrm>
+            <a:off x="868680" y="5193792"/>
+            <a:ext cx="164592" cy="164592"/>
+          </a:xfrm>
+          <a:prstGeom prst="ellipse">
+            <a:avLst/>
+          </a:prstGeom>
+          <a:solidFill>
+            <a:srgbClr val="FB7185"/>
+          </a:solidFill>
+          <a:ln w="12700">
+            <a:solidFill>
+              <a:srgbClr val="FB7185"/>
+            </a:solidFill>
+            <a:prstDash val="solid"/>
+          </a:ln>
+        </p:spPr>
+      </p:sp>
+      <p:sp>
+        <p:nvSpPr>
+          <p:cNvPr id="16" name="Text 14"/>
+          <p:cNvSpPr/>
+          <p:nvPr/>
+        </p:nvSpPr>
+        <p:spPr>
+          <a:xfrm>
+            <a:off x="1143000" y="5120640"/>
+            <a:ext cx="4632808" cy="411480"/>
+          </a:xfrm>
+          <a:prstGeom prst="rect">
+            <a:avLst/>
+          </a:prstGeom>
+          <a:noFill/>
+          <a:ln/>
+        </p:spPr>
+        <p:txBody>
+          <a:bodyPr wrap="square" rtlCol="0" anchor="ctr"/>
+          <a:lstStyle/>
+          <a:p>
+            <a:pPr indent="0" marL="0">
+              <a:buNone/>
+            </a:pPr>
+            <a:r>
+              <a:rPr lang="en-US" sz="1300" b="1" dirty="0">
+                <a:solidFill>
+                  <a:srgbClr val="0F0A2E"/>
+                </a:solidFill>
+                <a:latin typeface="Calibri" pitchFamily="34" charset="0"/>
+                <a:ea typeface="Calibri" pitchFamily="34" charset="-122"/>
+                <a:cs typeface="Calibri" pitchFamily="34" charset="-120"/>
+              </a:rPr>
+              <a:t>Cost matters at scale</a:t>
+            </a:r>
+            <a:pPr indent="0" marL="0">
+              <a:buNone/>
+            </a:pPr>
+            <a:r>
+              <a:rPr lang="en-US" sz="1300" dirty="0">
+                <a:solidFill>
+                  <a:srgbClr val="E5E1F5"/>
+                </a:solidFill>
+                <a:latin typeface="Calibri" pitchFamily="34" charset="0"/>
+                <a:ea typeface="Calibri" pitchFamily="34" charset="-122"/>
+                <a:cs typeface="Calibri" pitchFamily="34" charset="-120"/>
+              </a:rPr>
+              <a:t>  ·  </a:t>
+            </a:r>
+            <a:pPr indent="0" marL="0">
+              <a:buNone/>
+            </a:pPr>
+            <a:r>
+              <a:rPr lang="en-US" sz="1300" i="1" dirty="0">
+                <a:solidFill>
+                  <a:srgbClr val="6B6B8F"/>
+                </a:solidFill>
+                <a:latin typeface="Calibri" pitchFamily="34" charset="0"/>
+                <a:ea typeface="Calibri" pitchFamily="34" charset="-122"/>
+                <a:cs typeface="Calibri" pitchFamily="34" charset="-120"/>
+              </a:rPr>
+              <a:t>Local pre/post-roll</a:t>
+            </a:r>
+            <a:endParaRPr lang="en-US" sz="1300" dirty="0"/>
+          </a:p>
+        </p:txBody>
+      </p:sp>
+      <p:sp>
+        <p:nvSpPr>
+          <p:cNvPr id="17" name="Shape 15"/>
+          <p:cNvSpPr/>
+          <p:nvPr/>
+        </p:nvSpPr>
+        <p:spPr>
+          <a:xfrm>
+            <a:off x="6233008" y="2331720"/>
+            <a:ext cx="5410048" cy="3291840"/>
+          </a:xfrm>
+          <a:prstGeom prst="roundRect">
+            <a:avLst>
+              <a:gd name="adj" fmla="val 3333"/>
+            </a:avLst>
+          </a:prstGeom>
+          <a:solidFill>
+            <a:srgbClr val="FFFFFF"/>
+          </a:solidFill>
+          <a:ln w="12700">
+            <a:solidFill>
+              <a:srgbClr val="E5E1F5"/>
+            </a:solidFill>
+            <a:prstDash val="solid"/>
+          </a:ln>
+        </p:spPr>
+      </p:sp>
+      <p:sp>
+        <p:nvSpPr>
+          <p:cNvPr id="18" name="Shape 16"/>
+          <p:cNvSpPr/>
+          <p:nvPr/>
+        </p:nvSpPr>
+        <p:spPr>
+          <a:xfrm>
+            <a:off x="6233008" y="2331720"/>
+            <a:ext cx="5410048" cy="164592"/>
+          </a:xfrm>
+          <a:prstGeom prst="rect">
+            <a:avLst/>
+          </a:prstGeom>
+          <a:solidFill>
+            <a:srgbClr val="6366F1"/>
+          </a:solidFill>
+          <a:ln w="12700">
+            <a:solidFill>
+              <a:srgbClr val="6366F1"/>
+            </a:solidFill>
+            <a:prstDash val="solid"/>
+          </a:ln>
+        </p:spPr>
+      </p:sp>
+      <p:sp>
+        <p:nvSpPr>
+          <p:cNvPr id="19" name="Text 17"/>
+          <p:cNvSpPr/>
+          <p:nvPr/>
+        </p:nvSpPr>
+        <p:spPr>
+          <a:xfrm>
+            <a:off x="6507328" y="2651760"/>
+            <a:ext cx="4861408" cy="320040"/>
+          </a:xfrm>
+          <a:prstGeom prst="rect">
+            <a:avLst/>
+          </a:prstGeom>
+          <a:noFill/>
+          <a:ln/>
+        </p:spPr>
+        <p:txBody>
+          <a:bodyPr wrap="square" rtlCol="0" anchor="ctr"/>
+          <a:lstStyle/>
+          <a:p>
+            <a:pPr indent="0" marL="0">
+              <a:buNone/>
+            </a:pPr>
+            <a:r>
+              <a:rPr lang="en-US" sz="1200" b="1" spc="400" kern="0" dirty="0">
+                <a:solidFill>
+                  <a:srgbClr val="6366F1"/>
+                </a:solidFill>
+                <a:latin typeface="Calibri" pitchFamily="34" charset="0"/>
+                <a:ea typeface="Calibri" pitchFamily="34" charset="-122"/>
+                <a:cs typeface="Calibri" pitchFamily="34" charset="-120"/>
+              </a:rPr>
+              <a:t>Reach for Cloud</a:t>
+            </a:r>
+            <a:endParaRPr lang="en-US" sz="1200" dirty="0"/>
+          </a:p>
+        </p:txBody>
+      </p:sp>
+      <p:sp>
+        <p:nvSpPr>
+          <p:cNvPr id="20" name="Text 18"/>
+          <p:cNvSpPr/>
+          <p:nvPr/>
+        </p:nvSpPr>
+        <p:spPr>
+          <a:xfrm>
+            <a:off x="6507328" y="2971800"/>
+            <a:ext cx="4861408" cy="502920"/>
+          </a:xfrm>
+          <a:prstGeom prst="rect">
+            <a:avLst/>
+          </a:prstGeom>
+          <a:noFill/>
+          <a:ln/>
+        </p:spPr>
+        <p:txBody>
+          <a:bodyPr wrap="square" rtlCol="0" anchor="ctr"/>
+          <a:lstStyle/>
+          <a:p>
+            <a:pPr indent="0" marL="0">
+              <a:buNone/>
+            </a:pPr>
+            <a:r>
+              <a:rPr lang="en-US" sz="2600" b="1" dirty="0">
+                <a:solidFill>
+                  <a:srgbClr val="0F0A2E"/>
+                </a:solidFill>
+                <a:latin typeface="Georgia" pitchFamily="34" charset="0"/>
+                <a:ea typeface="Georgia" pitchFamily="34" charset="-122"/>
+                <a:cs typeface="Georgia" pitchFamily="34" charset="-120"/>
+              </a:rPr>
+              <a:t>Use the frontier brain</a:t>
+            </a:r>
+            <a:endParaRPr lang="en-US" sz="2600" dirty="0"/>
+          </a:p>
+        </p:txBody>
+      </p:sp>
+      <p:sp>
+        <p:nvSpPr>
+          <p:cNvPr id="21" name="Shape 19"/>
+          <p:cNvSpPr/>
+          <p:nvPr/>
+        </p:nvSpPr>
+        <p:spPr>
+          <a:xfrm>
+            <a:off x="6553048" y="3685032"/>
+            <a:ext cx="164592" cy="164592"/>
+          </a:xfrm>
+          <a:prstGeom prst="ellipse">
+            <a:avLst/>
+          </a:prstGeom>
+          <a:solidFill>
+            <a:srgbClr val="6366F1"/>
+          </a:solidFill>
+          <a:ln w="12700">
+            <a:solidFill>
+              <a:srgbClr val="6366F1"/>
+            </a:solidFill>
+            <a:prstDash val="solid"/>
+          </a:ln>
+        </p:spPr>
+      </p:sp>
+      <p:sp>
+        <p:nvSpPr>
+          <p:cNvPr id="22" name="Text 20"/>
+          <p:cNvSpPr/>
+          <p:nvPr/>
+        </p:nvSpPr>
+        <p:spPr>
+          <a:xfrm>
+            <a:off x="6827368" y="3611880"/>
+            <a:ext cx="4632808" cy="411480"/>
+          </a:xfrm>
+          <a:prstGeom prst="rect">
+            <a:avLst/>
+          </a:prstGeom>
+          <a:noFill/>
+          <a:ln/>
+        </p:spPr>
+        <p:txBody>
+          <a:bodyPr wrap="square" rtlCol="0" anchor="ctr"/>
+          <a:lstStyle/>
+          <a:p>
+            <a:pPr indent="0" marL="0">
+              <a:buNone/>
+            </a:pPr>
+            <a:r>
+              <a:rPr lang="en-US" sz="1300" b="1" dirty="0">
+                <a:solidFill>
+                  <a:srgbClr val="0F0A2E"/>
+                </a:solidFill>
+                <a:latin typeface="Calibri" pitchFamily="34" charset="0"/>
+                <a:ea typeface="Calibri" pitchFamily="34" charset="-122"/>
+                <a:cs typeface="Calibri" pitchFamily="34" charset="-120"/>
+              </a:rPr>
+              <a:t>Need deep reasoning</a:t>
+            </a:r>
+            <a:pPr indent="0" marL="0">
+              <a:buNone/>
+            </a:pPr>
+            <a:r>
+              <a:rPr lang="en-US" sz="1300" dirty="0">
+                <a:solidFill>
+                  <a:srgbClr val="E5E1F5"/>
+                </a:solidFill>
+                <a:latin typeface="Calibri" pitchFamily="34" charset="0"/>
+                <a:ea typeface="Calibri" pitchFamily="34" charset="-122"/>
+                <a:cs typeface="Calibri" pitchFamily="34" charset="-120"/>
+              </a:rPr>
+              <a:t>  ·  </a:t>
+            </a:r>
+            <a:pPr indent="0" marL="0">
+              <a:buNone/>
+            </a:pPr>
+            <a:r>
+              <a:rPr lang="en-US" sz="1300" i="1" dirty="0">
+                <a:solidFill>
+                  <a:srgbClr val="6B6B8F"/>
+                </a:solidFill>
+                <a:latin typeface="Calibri" pitchFamily="34" charset="0"/>
+                <a:ea typeface="Calibri" pitchFamily="34" charset="-122"/>
+                <a:cs typeface="Calibri" pitchFamily="34" charset="-120"/>
+              </a:rPr>
+              <a:t>Cloud</a:t>
+            </a:r>
+            <a:endParaRPr lang="en-US" sz="1300" dirty="0"/>
+          </a:p>
+        </p:txBody>
+      </p:sp>
+      <p:sp>
+        <p:nvSpPr>
+          <p:cNvPr id="23" name="Shape 21"/>
+          <p:cNvSpPr/>
+          <p:nvPr/>
+        </p:nvSpPr>
+        <p:spPr>
+          <a:xfrm>
+            <a:off x="6553048" y="4187952"/>
+            <a:ext cx="164592" cy="164592"/>
+          </a:xfrm>
+          <a:prstGeom prst="ellipse">
+            <a:avLst/>
+          </a:prstGeom>
+          <a:solidFill>
+            <a:srgbClr val="6366F1"/>
+          </a:solidFill>
+          <a:ln w="12700">
+            <a:solidFill>
+              <a:srgbClr val="6366F1"/>
+            </a:solidFill>
+            <a:prstDash val="solid"/>
+          </a:ln>
+        </p:spPr>
+      </p:sp>
+      <p:sp>
+        <p:nvSpPr>
+          <p:cNvPr id="24" name="Text 22"/>
+          <p:cNvSpPr/>
+          <p:nvPr/>
+        </p:nvSpPr>
+        <p:spPr>
+          <a:xfrm>
+            <a:off x="6827368" y="4114800"/>
+            <a:ext cx="4632808" cy="411480"/>
+          </a:xfrm>
+          <a:prstGeom prst="rect">
+            <a:avLst/>
+          </a:prstGeom>
+          <a:noFill/>
+          <a:ln/>
+        </p:spPr>
+        <p:txBody>
+          <a:bodyPr wrap="square" rtlCol="0" anchor="ctr"/>
+          <a:lstStyle/>
+          <a:p>
+            <a:pPr indent="0" marL="0">
+              <a:buNone/>
+            </a:pPr>
+            <a:r>
+              <a:rPr lang="en-US" sz="1300" b="1" dirty="0">
+                <a:solidFill>
+                  <a:srgbClr val="0F0A2E"/>
+                </a:solidFill>
+                <a:latin typeface="Calibri" pitchFamily="34" charset="0"/>
+                <a:ea typeface="Calibri" pitchFamily="34" charset="-122"/>
+                <a:cs typeface="Calibri" pitchFamily="34" charset="-120"/>
+              </a:rPr>
+              <a:t>Huge context · multimodal</a:t>
+            </a:r>
+            <a:pPr indent="0" marL="0">
+              <a:buNone/>
+            </a:pPr>
+            <a:r>
+              <a:rPr lang="en-US" sz="1300" dirty="0">
+                <a:solidFill>
+                  <a:srgbClr val="E5E1F5"/>
+                </a:solidFill>
+                <a:latin typeface="Calibri" pitchFamily="34" charset="0"/>
+                <a:ea typeface="Calibri" pitchFamily="34" charset="-122"/>
+                <a:cs typeface="Calibri" pitchFamily="34" charset="-120"/>
+              </a:rPr>
+              <a:t>  ·  </a:t>
+            </a:r>
+            <a:pPr indent="0" marL="0">
+              <a:buNone/>
+            </a:pPr>
+            <a:r>
+              <a:rPr lang="en-US" sz="1300" i="1" dirty="0">
+                <a:solidFill>
+                  <a:srgbClr val="6B6B8F"/>
+                </a:solidFill>
+                <a:latin typeface="Calibri" pitchFamily="34" charset="0"/>
+                <a:ea typeface="Calibri" pitchFamily="34" charset="-122"/>
+                <a:cs typeface="Calibri" pitchFamily="34" charset="-120"/>
+              </a:rPr>
+              <a:t>Cloud</a:t>
+            </a:r>
+            <a:endParaRPr lang="en-US" sz="1300" dirty="0"/>
+          </a:p>
+        </p:txBody>
+      </p:sp>
+      <p:sp>
+        <p:nvSpPr>
+          <p:cNvPr id="25" name="Shape 23"/>
+          <p:cNvSpPr/>
+          <p:nvPr/>
+        </p:nvSpPr>
+        <p:spPr>
+          <a:xfrm>
+            <a:off x="6553048" y="4690872"/>
+            <a:ext cx="164592" cy="164592"/>
+          </a:xfrm>
+          <a:prstGeom prst="ellipse">
+            <a:avLst/>
+          </a:prstGeom>
+          <a:solidFill>
+            <a:srgbClr val="6366F1"/>
+          </a:solidFill>
+          <a:ln w="12700">
+            <a:solidFill>
+              <a:srgbClr val="6366F1"/>
+            </a:solidFill>
+            <a:prstDash val="solid"/>
+          </a:ln>
+        </p:spPr>
+      </p:sp>
+      <p:sp>
+        <p:nvSpPr>
+          <p:cNvPr id="26" name="Text 24"/>
+          <p:cNvSpPr/>
+          <p:nvPr/>
+        </p:nvSpPr>
+        <p:spPr>
+          <a:xfrm>
+            <a:off x="6827368" y="4617720"/>
+            <a:ext cx="4632808" cy="411480"/>
+          </a:xfrm>
+          <a:prstGeom prst="rect">
+            <a:avLst/>
+          </a:prstGeom>
+          <a:noFill/>
+          <a:ln/>
+        </p:spPr>
+        <p:txBody>
+          <a:bodyPr wrap="square" rtlCol="0" anchor="ctr"/>
+          <a:lstStyle/>
+          <a:p>
+            <a:pPr indent="0" marL="0">
+              <a:buNone/>
+            </a:pPr>
+            <a:r>
+              <a:rPr lang="en-US" sz="1300" b="1" dirty="0">
+                <a:solidFill>
+                  <a:srgbClr val="0F0A2E"/>
+                </a:solidFill>
+                <a:latin typeface="Calibri" pitchFamily="34" charset="0"/>
+                <a:ea typeface="Calibri" pitchFamily="34" charset="-122"/>
+                <a:cs typeface="Calibri" pitchFamily="34" charset="-120"/>
+              </a:rPr>
+              <a:t>Tools requiring web data</a:t>
+            </a:r>
+            <a:pPr indent="0" marL="0">
+              <a:buNone/>
+            </a:pPr>
+            <a:r>
+              <a:rPr lang="en-US" sz="1300" dirty="0">
+                <a:solidFill>
+                  <a:srgbClr val="E5E1F5"/>
+                </a:solidFill>
+                <a:latin typeface="Calibri" pitchFamily="34" charset="0"/>
+                <a:ea typeface="Calibri" pitchFamily="34" charset="-122"/>
+                <a:cs typeface="Calibri" pitchFamily="34" charset="-120"/>
+              </a:rPr>
+              <a:t>  ·  </a:t>
+            </a:r>
+            <a:pPr indent="0" marL="0">
+              <a:buNone/>
+            </a:pPr>
+            <a:r>
+              <a:rPr lang="en-US" sz="1300" i="1" dirty="0">
+                <a:solidFill>
+                  <a:srgbClr val="6B6B8F"/>
+                </a:solidFill>
+                <a:latin typeface="Calibri" pitchFamily="34" charset="0"/>
+                <a:ea typeface="Calibri" pitchFamily="34" charset="-122"/>
+                <a:cs typeface="Calibri" pitchFamily="34" charset="-120"/>
+              </a:rPr>
+              <a:t>Cloud</a:t>
+            </a:r>
+            <a:endParaRPr lang="en-US" sz="1300" dirty="0"/>
+          </a:p>
+        </p:txBody>
+      </p:sp>
+      <p:sp>
+        <p:nvSpPr>
+          <p:cNvPr id="27" name="Shape 25"/>
+          <p:cNvSpPr/>
+          <p:nvPr/>
+        </p:nvSpPr>
+        <p:spPr>
+          <a:xfrm>
+            <a:off x="6553048" y="5193792"/>
+            <a:ext cx="164592" cy="164592"/>
+          </a:xfrm>
+          <a:prstGeom prst="ellipse">
+            <a:avLst/>
+          </a:prstGeom>
+          <a:solidFill>
+            <a:srgbClr val="6366F1"/>
+          </a:solidFill>
+          <a:ln w="12700">
+            <a:solidFill>
+              <a:srgbClr val="6366F1"/>
+            </a:solidFill>
+            <a:prstDash val="solid"/>
+          </a:ln>
+        </p:spPr>
+      </p:sp>
+      <p:sp>
+        <p:nvSpPr>
+          <p:cNvPr id="28" name="Text 26"/>
+          <p:cNvSpPr/>
+          <p:nvPr/>
+        </p:nvSpPr>
+        <p:spPr>
+          <a:xfrm>
+            <a:off x="6827368" y="5120640"/>
+            <a:ext cx="4632808" cy="411480"/>
+          </a:xfrm>
+          <a:prstGeom prst="rect">
+            <a:avLst/>
+          </a:prstGeom>
+          <a:noFill/>
+          <a:ln/>
+        </p:spPr>
+        <p:txBody>
+          <a:bodyPr wrap="square" rtlCol="0" anchor="ctr"/>
+          <a:lstStyle/>
+          <a:p>
+            <a:pPr indent="0" marL="0">
+              <a:buNone/>
+            </a:pPr>
+            <a:r>
+              <a:rPr lang="en-US" sz="1300" b="1" dirty="0">
+                <a:solidFill>
+                  <a:srgbClr val="0F0A2E"/>
+                </a:solidFill>
+                <a:latin typeface="Calibri" pitchFamily="34" charset="0"/>
+                <a:ea typeface="Calibri" pitchFamily="34" charset="-122"/>
+                <a:cs typeface="Calibri" pitchFamily="34" charset="-120"/>
+              </a:rPr>
+              <a:t>Cloud capability, no egress</a:t>
+            </a:r>
+            <a:pPr indent="0" marL="0">
+              <a:buNone/>
+            </a:pPr>
+            <a:r>
+              <a:rPr lang="en-US" sz="1300" dirty="0">
+                <a:solidFill>
+                  <a:srgbClr val="E5E1F5"/>
+                </a:solidFill>
+                <a:latin typeface="Calibri" pitchFamily="34" charset="0"/>
+                <a:ea typeface="Calibri" pitchFamily="34" charset="-122"/>
+                <a:cs typeface="Calibri" pitchFamily="34" charset="-120"/>
+              </a:rPr>
+              <a:t>  ·  </a:t>
+            </a:r>
+            <a:pPr indent="0" marL="0">
+              <a:buNone/>
+            </a:pPr>
+            <a:r>
+              <a:rPr lang="en-US" sz="1300" i="1" dirty="0">
+                <a:solidFill>
+                  <a:srgbClr val="6B6B8F"/>
+                </a:solidFill>
+                <a:latin typeface="Calibri" pitchFamily="34" charset="0"/>
+                <a:ea typeface="Calibri" pitchFamily="34" charset="-122"/>
+                <a:cs typeface="Calibri" pitchFamily="34" charset="-120"/>
+              </a:rPr>
+              <a:t>BYO Local (Foundry Local)</a:t>
+            </a:r>
+            <a:endParaRPr lang="en-US" sz="1300" dirty="0"/>
+          </a:p>
+        </p:txBody>
+      </p:sp>
+      <p:sp>
+        <p:nvSpPr>
+          <p:cNvPr id="29" name="Text 27"/>
+          <p:cNvSpPr/>
+          <p:nvPr/>
+        </p:nvSpPr>
+        <p:spPr>
+          <a:xfrm>
+            <a:off x="548640" y="5852160"/>
+            <a:ext cx="10972800" cy="411480"/>
+          </a:xfrm>
+          <a:prstGeom prst="rect">
+            <a:avLst/>
+          </a:prstGeom>
+          <a:noFill/>
+          <a:ln/>
+        </p:spPr>
+        <p:txBody>
+          <a:bodyPr wrap="square" rtlCol="0" anchor="ctr"/>
+          <a:lstStyle/>
+          <a:p>
+            <a:pPr algn="ctr" indent="0" marL="0">
+              <a:buNone/>
+            </a:pPr>
+            <a:r>
+              <a:rPr lang="en-US" sz="1600" b="1" i="1" dirty="0">
+                <a:solidFill>
+                  <a:srgbClr val="FB7185"/>
+                </a:solidFill>
+                <a:latin typeface="Georgia" pitchFamily="34" charset="0"/>
+                <a:ea typeface="Georgia" pitchFamily="34" charset="-122"/>
+                <a:cs typeface="Georgia" pitchFamily="34" charset="-120"/>
+              </a:rPr>
+              <a:t>📐  Hand-off pattern:  local triage  →  cloud reasoning  →  local rendering</a:t>
+            </a:r>
+            <a:endParaRPr lang="en-US" sz="1600" dirty="0"/>
+          </a:p>
+        </p:txBody>
+      </p:sp>
+      <p:sp>
+        <p:nvSpPr>
+          <p:cNvPr id="30" name="Shape 28"/>
+          <p:cNvSpPr/>
+          <p:nvPr/>
+        </p:nvSpPr>
+        <p:spPr>
+          <a:xfrm>
+            <a:off x="10180015" y="502920"/>
+            <a:ext cx="292608" cy="292608"/>
+          </a:xfrm>
+          <a:prstGeom prst="roundRect">
+            <a:avLst>
+              <a:gd name="adj" fmla="val 15625"/>
+            </a:avLst>
+          </a:prstGeom>
+          <a:ln w="19050">
+            <a:solidFill>
+              <a:srgbClr val="6366F1"/>
+            </a:solidFill>
+            <a:prstDash val="solid"/>
+          </a:ln>
+        </p:spPr>
+      </p:sp>
+      <p:sp>
+        <p:nvSpPr>
+          <p:cNvPr id="31" name="Text 29"/>
+          <p:cNvSpPr/>
+          <p:nvPr/>
+        </p:nvSpPr>
+        <p:spPr>
+          <a:xfrm>
+            <a:off x="10472623" y="457200"/>
+            <a:ext cx="411480" cy="384048"/>
+          </a:xfrm>
+          <a:prstGeom prst="rect">
+            <a:avLst/>
+          </a:prstGeom>
+          <a:noFill/>
+          <a:ln/>
+        </p:spPr>
+        <p:txBody>
+          <a:bodyPr wrap="square" rtlCol="0" anchor="ctr"/>
+          <a:lstStyle/>
+          <a:p>
+            <a:pPr algn="ctr" indent="0" marL="0">
+              <a:buNone/>
+            </a:pPr>
+            <a:r>
+              <a:rPr lang="en-US" sz="1800" b="1" dirty="0">
+                <a:solidFill>
+                  <a:srgbClr val="6366F1"/>
+                </a:solidFill>
+                <a:latin typeface="Calibri" pitchFamily="34" charset="0"/>
+                <a:ea typeface="Calibri" pitchFamily="34" charset="-122"/>
+                <a:cs typeface="Calibri" pitchFamily="34" charset="-120"/>
+              </a:rPr>
+              <a:t>↔</a:t>
+            </a:r>
+            <a:endParaRPr lang="en-US" sz="1800" dirty="0"/>
+          </a:p>
+        </p:txBody>
+      </p:sp>
+      <p:sp>
+        <p:nvSpPr>
+          <p:cNvPr id="32" name="Text 30"/>
+          <p:cNvSpPr/>
+          <p:nvPr/>
+        </p:nvSpPr>
+        <p:spPr>
+          <a:xfrm>
+            <a:off x="10893247" y="429768"/>
+            <a:ext cx="411480" cy="457200"/>
+          </a:xfrm>
+          <a:prstGeom prst="rect">
+            <a:avLst/>
+          </a:prstGeom>
+          <a:noFill/>
+          <a:ln/>
+        </p:spPr>
+        <p:txBody>
+          <a:bodyPr wrap="square" rtlCol="0" anchor="ctr"/>
+          <a:lstStyle/>
+          <a:p>
+            <a:pPr algn="ctr" indent="0" marL="0">
+              <a:buNone/>
+            </a:pPr>
+            <a:r>
+              <a:rPr lang="en-US" sz="2200" dirty="0">
+                <a:solidFill>
+                  <a:srgbClr val="6366F1"/>
+                </a:solidFill>
+                <a:latin typeface="Calibri" pitchFamily="34" charset="0"/>
+                <a:ea typeface="Calibri" pitchFamily="34" charset="-122"/>
+                <a:cs typeface="Calibri" pitchFamily="34" charset="-120"/>
+              </a:rPr>
+              <a:t>☁</a:t>
+            </a:r>
+            <a:endParaRPr lang="en-US" sz="2200" dirty="0"/>
+          </a:p>
+        </p:txBody>
+      </p:sp>
+      <p:sp>
+        <p:nvSpPr>
+          <p:cNvPr id="33" name="Text 31"/>
+          <p:cNvSpPr/>
+          <p:nvPr/>
+        </p:nvSpPr>
+        <p:spPr>
+          <a:xfrm>
+            <a:off x="457200" y="6446520"/>
+            <a:ext cx="7315200" cy="274320"/>
+          </a:xfrm>
+          <a:prstGeom prst="rect">
+            <a:avLst/>
+          </a:prstGeom>
+          <a:noFill/>
+          <a:ln/>
+        </p:spPr>
+        <p:txBody>
+          <a:bodyPr wrap="square" rtlCol="0" anchor="ctr"/>
+          <a:lstStyle/>
+          <a:p>
+            <a:pPr algn="l" indent="0" marL="0">
+              <a:buNone/>
+            </a:pPr>
+            <a:r>
+              <a:rPr lang="en-US" sz="1000" dirty="0">
+                <a:solidFill>
+                  <a:srgbClr val="6B6B8F"/>
+                </a:solidFill>
+                <a:latin typeface="Calibri" pitchFamily="34" charset="0"/>
+                <a:ea typeface="Calibri" pitchFamily="34" charset="-122"/>
+                <a:cs typeface="Calibri" pitchFamily="34" charset="-120"/>
+              </a:rPr>
+              <a:t>Unifying Local and Cloud AI</a:t>
+            </a:r>
+            <a:pPr algn="l" indent="0" marL="0">
+              <a:buNone/>
+            </a:pPr>
+            <a:r>
+              <a:rPr lang="en-US" sz="1000" dirty="0">
+                <a:solidFill>
+                  <a:srgbClr val="6B6B8F"/>
+                </a:solidFill>
+                <a:latin typeface="Calibri" pitchFamily="34" charset="0"/>
+                <a:ea typeface="Calibri" pitchFamily="34" charset="-122"/>
+                <a:cs typeface="Calibri" pitchFamily="34" charset="-120"/>
+              </a:rPr>
+              <a:t>  ·  </a:t>
+            </a:r>
+            <a:pPr algn="l" indent="0" marL="0">
+              <a:buNone/>
+            </a:pPr>
+            <a:r>
+              <a:rPr lang="en-US" sz="1000" b="1" dirty="0">
+                <a:solidFill>
+                  <a:srgbClr val="FB7185"/>
+                </a:solidFill>
+                <a:latin typeface="Calibri" pitchFamily="34" charset="0"/>
+                <a:ea typeface="Calibri" pitchFamily="34" charset="-122"/>
+                <a:cs typeface="Calibri" pitchFamily="34" charset="-120"/>
+              </a:rPr>
+              <a:t>@mattleibow</a:t>
+            </a:r>
+            <a:pPr algn="l" indent="0" marL="0">
+              <a:buNone/>
+            </a:pPr>
+            <a:r>
+              <a:rPr lang="en-US" sz="1000" dirty="0">
+                <a:solidFill>
+                  <a:srgbClr val="6B6B8F"/>
+                </a:solidFill>
+                <a:latin typeface="Calibri" pitchFamily="34" charset="0"/>
+                <a:ea typeface="Calibri" pitchFamily="34" charset="-122"/>
+                <a:cs typeface="Calibri" pitchFamily="34" charset="-120"/>
+              </a:rPr>
+              <a:t>  ·  @CPTMSDUG</a:t>
+            </a:r>
+            <a:endParaRPr lang="en-US" sz="1000" dirty="0"/>
+          </a:p>
+        </p:txBody>
+      </p:sp>
+      <p:sp>
+        <p:nvSpPr>
+          <p:cNvPr id="34" name="Text 32"/>
+          <p:cNvSpPr/>
+          <p:nvPr/>
+        </p:nvSpPr>
+        <p:spPr>
+          <a:xfrm>
+            <a:off x="10820095" y="6446520"/>
+            <a:ext cx="914400" cy="274320"/>
+          </a:xfrm>
+          <a:prstGeom prst="rect">
+            <a:avLst/>
+          </a:prstGeom>
+          <a:noFill/>
+          <a:ln/>
+        </p:spPr>
+        <p:txBody>
+          <a:bodyPr wrap="square" rtlCol="0" anchor="ctr"/>
+          <a:lstStyle/>
+          <a:p>
+            <a:pPr algn="r" indent="0" marL="0">
+              <a:buNone/>
+            </a:pPr>
+            <a:r>
+              <a:rPr lang="en-US" sz="1000" dirty="0">
+                <a:solidFill>
+                  <a:srgbClr val="6B6B8F"/>
+                </a:solidFill>
+                <a:latin typeface="Calibri" pitchFamily="34" charset="0"/>
+                <a:ea typeface="Calibri" pitchFamily="34" charset="-122"/>
+                <a:cs typeface="Calibri" pitchFamily="34" charset="-120"/>
+              </a:rPr>
+              <a:t>14 / 16</a:t>
+            </a:r>
+            <a:endParaRPr lang="en-US" sz="1000" dirty="0"/>
+          </a:p>
+        </p:txBody>
+      </p:sp>
+    </p:spTree>
+  </p:cSld>
+  <p:clrMapOvr>
+    <a:masterClrMapping/>
+  </p:clrMapOvr>
+</p:sld>
+</file>
+
+<file path=ppt/slides/slide15.xml><?xml version="1.0" encoding="utf-8"?>
+<p:sld xmlns:a="http://schemas.openxmlformats.org/drawingml/2006/main" xmlns:r="http://schemas.openxmlformats.org/officeDocument/2006/relationships" xmlns:p="http://schemas.openxmlformats.org/presentationml/2006/main">
+  <p:cSld name="Slide 15">
+    <p:bg>
+      <p:bgPr>
+        <a:solidFill>
+          <a:srgbClr val="FAF8FF"/>
+        </a:solidFill>
+      </p:bgPr>
+    </p:bg>
+    <p:spTree>
+      <p:nvGrpSpPr>
+        <p:cNvPr id="1" name=""/>
+        <p:cNvGrpSpPr/>
+        <p:nvPr/>
+      </p:nvGrpSpPr>
+      <p:grpSpPr>
+        <a:xfrm>
+          <a:off x="0" y="0"/>
+          <a:ext cx="0" cy="0"/>
+          <a:chOff x="0" y="0"/>
+          <a:chExt cx="0" cy="0"/>
+        </a:xfrm>
+      </p:grpSpPr>
+      <p:sp>
+        <p:nvSpPr>
+          <p:cNvPr id="2" name="Text 0"/>
+          <p:cNvSpPr/>
+          <p:nvPr/>
+        </p:nvSpPr>
+        <p:spPr>
+          <a:xfrm>
+            <a:off x="548640" y="502920"/>
+            <a:ext cx="7315200" cy="320040"/>
+          </a:xfrm>
+          <a:prstGeom prst="rect">
+            <a:avLst/>
+          </a:prstGeom>
+          <a:noFill/>
+          <a:ln/>
+        </p:spPr>
+        <p:txBody>
+          <a:bodyPr wrap="square" rtlCol="0" anchor="ctr"/>
+          <a:lstStyle/>
+          <a:p>
+            <a:pPr indent="0" marL="0">
+              <a:buNone/>
+            </a:pPr>
+            <a:r>
+              <a:rPr lang="en-US" sz="1200" b="1" spc="400" kern="0" dirty="0">
+                <a:solidFill>
+                  <a:srgbClr val="FB7185"/>
+                </a:solidFill>
+                <a:latin typeface="Calibri" pitchFamily="34" charset="0"/>
+                <a:ea typeface="Calibri" pitchFamily="34" charset="-122"/>
+                <a:cs typeface="Calibri" pitchFamily="34" charset="-120"/>
+              </a:rPr>
+              <a:t>RESOURCES</a:t>
+            </a:r>
+            <a:endParaRPr lang="en-US" sz="1200" dirty="0"/>
+          </a:p>
+        </p:txBody>
+      </p:sp>
+      <p:sp>
+        <p:nvSpPr>
+          <p:cNvPr id="3" name="Text 1"/>
+          <p:cNvSpPr/>
+          <p:nvPr/>
+        </p:nvSpPr>
+        <p:spPr>
+          <a:xfrm>
+            <a:off x="548640" y="822960"/>
+            <a:ext cx="10058400" cy="822960"/>
+          </a:xfrm>
+          <a:prstGeom prst="rect">
+            <a:avLst/>
+          </a:prstGeom>
+          <a:noFill/>
+          <a:ln/>
+        </p:spPr>
+        <p:txBody>
+          <a:bodyPr wrap="square" rtlCol="0" anchor="ctr"/>
+          <a:lstStyle/>
+          <a:p>
+            <a:pPr indent="0" marL="0">
+              <a:buNone/>
+            </a:pPr>
+            <a:r>
+              <a:rPr lang="en-US" sz="3800" b="1" dirty="0">
+                <a:solidFill>
+                  <a:srgbClr val="0F0A2E"/>
+                </a:solidFill>
+                <a:latin typeface="Georgia" pitchFamily="34" charset="0"/>
+                <a:ea typeface="Georgia" pitchFamily="34" charset="-122"/>
+                <a:cs typeface="Georgia" pitchFamily="34" charset="-120"/>
+              </a:rPr>
+              <a:t>Where to go next</a:t>
+            </a:r>
+            <a:endParaRPr lang="en-US" sz="3800" dirty="0"/>
+          </a:p>
+        </p:txBody>
+      </p:sp>
+      <p:sp>
+        <p:nvSpPr>
+          <p:cNvPr id="4" name="Text 2"/>
+          <p:cNvSpPr/>
+          <p:nvPr/>
+        </p:nvSpPr>
+        <p:spPr>
+          <a:xfrm>
+            <a:off x="548640" y="1691640"/>
+            <a:ext cx="10972800" cy="411480"/>
+          </a:xfrm>
+          <a:prstGeom prst="rect">
+            <a:avLst/>
+          </a:prstGeom>
+          <a:noFill/>
+          <a:ln/>
+        </p:spPr>
+        <p:txBody>
+          <a:bodyPr wrap="square" rtlCol="0" anchor="ctr"/>
+          <a:lstStyle/>
+          <a:p>
+            <a:pPr indent="0" marL="0">
+              <a:buNone/>
+            </a:pPr>
+            <a:r>
+              <a:rPr lang="en-US" sz="1600" i="1" dirty="0">
+                <a:solidFill>
+                  <a:srgbClr val="6B6B8F"/>
+                </a:solidFill>
+                <a:latin typeface="Calibri" pitchFamily="34" charset="0"/>
+                <a:ea typeface="Calibri" pitchFamily="34" charset="-122"/>
+                <a:cs typeface="Calibri" pitchFamily="34" charset="-120"/>
+              </a:rPr>
+              <a:t>Start with these — the deck, the demos, and the docs that back every claim today.</a:t>
+            </a:r>
+            <a:endParaRPr lang="en-US" sz="1600" dirty="0"/>
+          </a:p>
+        </p:txBody>
+      </p:sp>
+      <p:sp>
+        <p:nvSpPr>
+          <p:cNvPr id="5" name="Shape 3"/>
+          <p:cNvSpPr/>
+          <p:nvPr/>
+        </p:nvSpPr>
+        <p:spPr>
+          <a:xfrm>
+            <a:off x="548640" y="2286000"/>
+            <a:ext cx="5410048" cy="1325880"/>
+          </a:xfrm>
+          <a:prstGeom prst="roundRect">
+            <a:avLst>
+              <a:gd name="adj" fmla="val 6897"/>
+            </a:avLst>
+          </a:prstGeom>
+          <a:solidFill>
+            <a:srgbClr val="FFFFFF"/>
+          </a:solidFill>
+          <a:ln w="12700">
+            <a:solidFill>
+              <a:srgbClr val="E5E1F5"/>
+            </a:solidFill>
+            <a:prstDash val="solid"/>
+          </a:ln>
+        </p:spPr>
+      </p:sp>
+      <p:sp>
+        <p:nvSpPr>
+          <p:cNvPr id="6" name="Shape 4"/>
+          <p:cNvSpPr/>
+          <p:nvPr/>
+        </p:nvSpPr>
+        <p:spPr>
+          <a:xfrm>
+            <a:off x="548640" y="2286000"/>
+            <a:ext cx="109728" cy="1325880"/>
+          </a:xfrm>
+          <a:prstGeom prst="rect">
+            <a:avLst/>
+          </a:prstGeom>
+          <a:solidFill>
+            <a:srgbClr val="FB7185"/>
+          </a:solidFill>
+          <a:ln w="12700">
+            <a:solidFill>
+              <a:srgbClr val="FB7185"/>
+            </a:solidFill>
+            <a:prstDash val="solid"/>
+          </a:ln>
+        </p:spPr>
+      </p:sp>
+      <p:sp>
+        <p:nvSpPr>
+          <p:cNvPr id="7" name="Text 5"/>
+          <p:cNvSpPr/>
+          <p:nvPr/>
+        </p:nvSpPr>
+        <p:spPr>
+          <a:xfrm>
+            <a:off x="777240" y="2468880"/>
+            <a:ext cx="457200" cy="457200"/>
+          </a:xfrm>
+          <a:prstGeom prst="rect">
+            <a:avLst/>
+          </a:prstGeom>
+          <a:noFill/>
+          <a:ln/>
+        </p:spPr>
+        <p:txBody>
+          <a:bodyPr wrap="square" rtlCol="0" anchor="ctr"/>
+          <a:lstStyle/>
+          <a:p>
+            <a:pPr algn="ctr" indent="0" marL="0">
+              <a:buNone/>
+            </a:pPr>
+            <a:r>
+              <a:rPr lang="en-US" sz="2200" b="1" dirty="0">
+                <a:solidFill>
+                  <a:srgbClr val="FB7185"/>
+                </a:solidFill>
+                <a:latin typeface="Georgia" pitchFamily="34" charset="0"/>
+                <a:ea typeface="Georgia" pitchFamily="34" charset="-122"/>
+                <a:cs typeface="Georgia" pitchFamily="34" charset="-120"/>
+              </a:rPr>
+              <a:t>★</a:t>
+            </a:r>
+            <a:endParaRPr lang="en-US" sz="2200" dirty="0"/>
+          </a:p>
+        </p:txBody>
+      </p:sp>
+      <p:sp>
+        <p:nvSpPr>
+          <p:cNvPr id="8" name="Text 6"/>
+          <p:cNvSpPr/>
+          <p:nvPr/>
+        </p:nvSpPr>
+        <p:spPr>
+          <a:xfrm>
+            <a:off x="1325880" y="2423160"/>
+            <a:ext cx="4495648" cy="365760"/>
+          </a:xfrm>
+          <a:prstGeom prst="rect">
+            <a:avLst/>
+          </a:prstGeom>
+          <a:noFill/>
+          <a:ln/>
+        </p:spPr>
+        <p:txBody>
+          <a:bodyPr wrap="square" rtlCol="0" anchor="ctr"/>
+          <a:lstStyle/>
+          <a:p>
+            <a:pPr indent="0" marL="0">
+              <a:buNone/>
+            </a:pPr>
+            <a:r>
+              <a:rPr lang="en-US" sz="1400" b="1" dirty="0">
+                <a:solidFill>
+                  <a:srgbClr val="0F0A2E"/>
+                </a:solidFill>
+                <a:latin typeface="Calibri" pitchFamily="34" charset="0"/>
+                <a:ea typeface="Calibri" pitchFamily="34" charset="-122"/>
+                <a:cs typeface="Calibri" pitchFamily="34" charset="-120"/>
+              </a:rPr>
+              <a:t>Today's deck + demo code</a:t>
+            </a:r>
+            <a:endParaRPr lang="en-US" sz="1400" dirty="0"/>
+          </a:p>
+        </p:txBody>
+      </p:sp>
+      <p:sp>
+        <p:nvSpPr>
+          <p:cNvPr id="9" name="Text 7"/>
+          <p:cNvSpPr/>
+          <p:nvPr/>
+        </p:nvSpPr>
+        <p:spPr>
+          <a:xfrm>
+            <a:off x="1325880" y="2788920"/>
+            <a:ext cx="4495648" cy="320040"/>
+          </a:xfrm>
+          <a:prstGeom prst="rect">
+            <a:avLst/>
+          </a:prstGeom>
+          <a:noFill/>
+          <a:ln/>
+        </p:spPr>
+        <p:txBody>
+          <a:bodyPr wrap="square" rtlCol="0" anchor="ctr"/>
+          <a:lstStyle/>
+          <a:p>
+            <a:pPr indent="0" marL="0">
+              <a:buNone/>
+            </a:pPr>
+            <a:r>
+              <a:rPr lang="en-US" sz="1100" dirty="0">
+                <a:solidFill>
+                  <a:srgbClr val="FB7185"/>
+                </a:solidFill>
+                <a:latin typeface="Consolas" pitchFamily="34" charset="0"/>
+                <a:ea typeface="Consolas" pitchFamily="34" charset="-122"/>
+                <a:cs typeface="Consolas" pitchFamily="34" charset="-120"/>
+              </a:rPr>
+              <a:t>github.com/mattleibow/cptmsdug-local-cloud-agent-framework</a:t>
+            </a:r>
+            <a:endParaRPr lang="en-US" sz="1100" dirty="0"/>
+          </a:p>
+        </p:txBody>
+      </p:sp>
+      <p:sp>
+        <p:nvSpPr>
+          <p:cNvPr id="10" name="Text 8"/>
+          <p:cNvSpPr/>
+          <p:nvPr/>
+        </p:nvSpPr>
+        <p:spPr>
+          <a:xfrm>
+            <a:off x="1325880" y="3154680"/>
+            <a:ext cx="4495648" cy="411480"/>
+          </a:xfrm>
+          <a:prstGeom prst="rect">
+            <a:avLst/>
+          </a:prstGeom>
+          <a:noFill/>
+          <a:ln/>
+        </p:spPr>
+        <p:txBody>
+          <a:bodyPr wrap="square" rtlCol="0" anchor="ctr"/>
+          <a:lstStyle/>
+          <a:p>
+            <a:pPr indent="0" marL="0">
+              <a:buNone/>
+            </a:pPr>
+            <a:r>
+              <a:rPr lang="en-US" sz="1100" i="1" dirty="0">
+                <a:solidFill>
+                  <a:srgbClr val="6B6B8F"/>
+                </a:solidFill>
+                <a:latin typeface="Calibri" pitchFamily="34" charset="0"/>
+                <a:ea typeface="Calibri" pitchFamily="34" charset="-122"/>
+                <a:cs typeface="Calibri" pitchFamily="34" charset="-120"/>
+              </a:rPr>
+              <a:t>All slides, all four demos, ready to clone &amp; run</a:t>
+            </a:r>
+            <a:endParaRPr lang="en-US" sz="1100" dirty="0"/>
+          </a:p>
+        </p:txBody>
+      </p:sp>
+      <p:sp>
+        <p:nvSpPr>
+          <p:cNvPr id="11" name="Shape 9"/>
+          <p:cNvSpPr/>
+          <p:nvPr/>
+        </p:nvSpPr>
+        <p:spPr>
+          <a:xfrm>
+            <a:off x="6233008" y="2286000"/>
+            <a:ext cx="5410048" cy="1325880"/>
+          </a:xfrm>
+          <a:prstGeom prst="roundRect">
+            <a:avLst>
+              <a:gd name="adj" fmla="val 6897"/>
+            </a:avLst>
+          </a:prstGeom>
+          <a:solidFill>
+            <a:srgbClr val="FFFFFF"/>
+          </a:solidFill>
+          <a:ln w="12700">
+            <a:solidFill>
+              <a:srgbClr val="E5E1F5"/>
+            </a:solidFill>
+            <a:prstDash val="solid"/>
+          </a:ln>
+        </p:spPr>
+      </p:sp>
+      <p:sp>
+        <p:nvSpPr>
+          <p:cNvPr id="12" name="Shape 10"/>
+          <p:cNvSpPr/>
+          <p:nvPr/>
+        </p:nvSpPr>
+        <p:spPr>
+          <a:xfrm>
+            <a:off x="6233008" y="2286000"/>
+            <a:ext cx="109728" cy="1325880"/>
+          </a:xfrm>
+          <a:prstGeom prst="rect">
+            <a:avLst/>
+          </a:prstGeom>
+          <a:solidFill>
+            <a:srgbClr val="6366F1"/>
+          </a:solidFill>
+          <a:ln w="12700">
+            <a:solidFill>
+              <a:srgbClr val="6366F1"/>
+            </a:solidFill>
+            <a:prstDash val="solid"/>
+          </a:ln>
+        </p:spPr>
+      </p:sp>
+      <p:sp>
+        <p:nvSpPr>
+          <p:cNvPr id="13" name="Text 11"/>
+          <p:cNvSpPr/>
+          <p:nvPr/>
+        </p:nvSpPr>
+        <p:spPr>
+          <a:xfrm>
+            <a:off x="6461608" y="2468880"/>
+            <a:ext cx="457200" cy="457200"/>
+          </a:xfrm>
+          <a:prstGeom prst="rect">
+            <a:avLst/>
+          </a:prstGeom>
+          <a:noFill/>
+          <a:ln/>
+        </p:spPr>
+        <p:txBody>
+          <a:bodyPr wrap="square" rtlCol="0" anchor="ctr"/>
+          <a:lstStyle/>
+          <a:p>
+            <a:pPr algn="ctr" indent="0" marL="0">
+              <a:buNone/>
+            </a:pPr>
+            <a:r>
+              <a:rPr lang="en-US" sz="2200" b="1" dirty="0">
+                <a:solidFill>
+                  <a:srgbClr val="6366F1"/>
+                </a:solidFill>
+                <a:latin typeface="Georgia" pitchFamily="34" charset="0"/>
+                <a:ea typeface="Georgia" pitchFamily="34" charset="-122"/>
+                <a:cs typeface="Georgia" pitchFamily="34" charset="-120"/>
+              </a:rPr>
+              <a:t>◆</a:t>
+            </a:r>
+            <a:endParaRPr lang="en-US" sz="2200" dirty="0"/>
+          </a:p>
+        </p:txBody>
+      </p:sp>
+      <p:sp>
+        <p:nvSpPr>
+          <p:cNvPr id="14" name="Text 12"/>
+          <p:cNvSpPr/>
+          <p:nvPr/>
+        </p:nvSpPr>
+        <p:spPr>
+          <a:xfrm>
+            <a:off x="7010248" y="2423160"/>
+            <a:ext cx="4495648" cy="365760"/>
+          </a:xfrm>
+          <a:prstGeom prst="rect">
+            <a:avLst/>
+          </a:prstGeom>
+          <a:noFill/>
+          <a:ln/>
+        </p:spPr>
+        <p:txBody>
+          <a:bodyPr wrap="square" rtlCol="0" anchor="ctr"/>
+          <a:lstStyle/>
+          <a:p>
+            <a:pPr indent="0" marL="0">
+              <a:buNone/>
+            </a:pPr>
+            <a:r>
+              <a:rPr lang="en-US" sz="1400" b="1" dirty="0">
+                <a:solidFill>
+                  <a:srgbClr val="0F0A2E"/>
+                </a:solidFill>
+                <a:latin typeface="Calibri" pitchFamily="34" charset="0"/>
+                <a:ea typeface="Calibri" pitchFamily="34" charset="-122"/>
+                <a:cs typeface="Calibri" pitchFamily="34" charset="-120"/>
+              </a:rPr>
+              <a:t>Microsoft Agent Framework</a:t>
+            </a:r>
+            <a:endParaRPr lang="en-US" sz="1400" dirty="0"/>
+          </a:p>
+        </p:txBody>
+      </p:sp>
+      <p:sp>
+        <p:nvSpPr>
+          <p:cNvPr id="15" name="Text 13"/>
+          <p:cNvSpPr/>
+          <p:nvPr/>
+        </p:nvSpPr>
+        <p:spPr>
+          <a:xfrm>
+            <a:off x="7010248" y="2788920"/>
+            <a:ext cx="4495648" cy="320040"/>
+          </a:xfrm>
+          <a:prstGeom prst="rect">
+            <a:avLst/>
+          </a:prstGeom>
+          <a:noFill/>
+          <a:ln/>
+        </p:spPr>
+        <p:txBody>
+          <a:bodyPr wrap="square" rtlCol="0" anchor="ctr"/>
+          <a:lstStyle/>
+          <a:p>
+            <a:pPr indent="0" marL="0">
+              <a:buNone/>
+            </a:pPr>
+            <a:r>
+              <a:rPr lang="en-US" sz="1100" dirty="0">
+                <a:solidFill>
+                  <a:srgbClr val="6366F1"/>
+                </a:solidFill>
+                <a:latin typeface="Consolas" pitchFamily="34" charset="0"/>
+                <a:ea typeface="Consolas" pitchFamily="34" charset="-122"/>
+                <a:cs typeface="Consolas" pitchFamily="34" charset="-120"/>
+              </a:rPr>
+              <a:t>github.com/microsoft/agent-framework</a:t>
+            </a:r>
+            <a:endParaRPr lang="en-US" sz="1100" dirty="0"/>
+          </a:p>
+        </p:txBody>
+      </p:sp>
+      <p:sp>
+        <p:nvSpPr>
+          <p:cNvPr id="16" name="Text 14"/>
+          <p:cNvSpPr/>
+          <p:nvPr/>
+        </p:nvSpPr>
+        <p:spPr>
+          <a:xfrm>
+            <a:off x="7010248" y="3154680"/>
+            <a:ext cx="4495648" cy="411480"/>
+          </a:xfrm>
+          <a:prstGeom prst="rect">
+            <a:avLst/>
+          </a:prstGeom>
+          <a:noFill/>
+          <a:ln/>
+        </p:spPr>
+        <p:txBody>
+          <a:bodyPr wrap="square" rtlCol="0" anchor="ctr"/>
+          <a:lstStyle/>
+          <a:p>
+            <a:pPr indent="0" marL="0">
+              <a:buNone/>
+            </a:pPr>
+            <a:r>
+              <a:rPr lang="en-US" sz="1100" i="1" dirty="0">
+                <a:solidFill>
+                  <a:srgbClr val="6B6B8F"/>
+                </a:solidFill>
+                <a:latin typeface="Calibri" pitchFamily="34" charset="0"/>
+                <a:ea typeface="Calibri" pitchFamily="34" charset="-122"/>
+                <a:cs typeface="Calibri" pitchFamily="34" charset="-120"/>
+              </a:rPr>
+              <a:t>AIAgent · AgentThread · workflows · DevUI</a:t>
+            </a:r>
+            <a:endParaRPr lang="en-US" sz="1100" dirty="0"/>
+          </a:p>
+        </p:txBody>
+      </p:sp>
+      <p:sp>
+        <p:nvSpPr>
+          <p:cNvPr id="17" name="Shape 15"/>
+          <p:cNvSpPr/>
+          <p:nvPr/>
+        </p:nvSpPr>
+        <p:spPr>
+          <a:xfrm>
+            <a:off x="548640" y="3749040"/>
+            <a:ext cx="5410048" cy="1325880"/>
+          </a:xfrm>
+          <a:prstGeom prst="roundRect">
+            <a:avLst>
+              <a:gd name="adj" fmla="val 6897"/>
+            </a:avLst>
+          </a:prstGeom>
+          <a:solidFill>
+            <a:srgbClr val="FFFFFF"/>
+          </a:solidFill>
+          <a:ln w="12700">
+            <a:solidFill>
+              <a:srgbClr val="E5E1F5"/>
+            </a:solidFill>
+            <a:prstDash val="solid"/>
+          </a:ln>
+        </p:spPr>
+      </p:sp>
+      <p:sp>
+        <p:nvSpPr>
+          <p:cNvPr id="18" name="Shape 16"/>
+          <p:cNvSpPr/>
+          <p:nvPr/>
+        </p:nvSpPr>
+        <p:spPr>
+          <a:xfrm>
+            <a:off x="548640" y="3749040"/>
+            <a:ext cx="109728" cy="1325880"/>
+          </a:xfrm>
+          <a:prstGeom prst="rect">
+            <a:avLst/>
+          </a:prstGeom>
+          <a:solidFill>
+            <a:srgbClr val="6366F1"/>
+          </a:solidFill>
+          <a:ln w="12700">
+            <a:solidFill>
+              <a:srgbClr val="6366F1"/>
+            </a:solidFill>
+            <a:prstDash val="solid"/>
+          </a:ln>
+        </p:spPr>
+      </p:sp>
+      <p:sp>
+        <p:nvSpPr>
+          <p:cNvPr id="19" name="Text 17"/>
+          <p:cNvSpPr/>
+          <p:nvPr/>
+        </p:nvSpPr>
+        <p:spPr>
+          <a:xfrm>
+            <a:off x="777240" y="3931920"/>
+            <a:ext cx="457200" cy="457200"/>
+          </a:xfrm>
+          <a:prstGeom prst="rect">
+            <a:avLst/>
+          </a:prstGeom>
+          <a:noFill/>
+          <a:ln/>
+        </p:spPr>
+        <p:txBody>
+          <a:bodyPr wrap="square" rtlCol="0" anchor="ctr"/>
+          <a:lstStyle/>
+          <a:p>
+            <a:pPr algn="ctr" indent="0" marL="0">
+              <a:buNone/>
+            </a:pPr>
+            <a:r>
+              <a:rPr lang="en-US" sz="2200" b="1" dirty="0">
+                <a:solidFill>
+                  <a:srgbClr val="6366F1"/>
+                </a:solidFill>
+                <a:latin typeface="Georgia" pitchFamily="34" charset="0"/>
+                <a:ea typeface="Georgia" pitchFamily="34" charset="-122"/>
+                <a:cs typeface="Georgia" pitchFamily="34" charset="-120"/>
+              </a:rPr>
+              <a:t>◆</a:t>
+            </a:r>
+            <a:endParaRPr lang="en-US" sz="2200" dirty="0"/>
+          </a:p>
+        </p:txBody>
+      </p:sp>
+      <p:sp>
+        <p:nvSpPr>
+          <p:cNvPr id="20" name="Text 18"/>
+          <p:cNvSpPr/>
+          <p:nvPr/>
+        </p:nvSpPr>
+        <p:spPr>
+          <a:xfrm>
+            <a:off x="1325880" y="3886200"/>
+            <a:ext cx="4495648" cy="365760"/>
+          </a:xfrm>
+          <a:prstGeom prst="rect">
+            <a:avLst/>
+          </a:prstGeom>
+          <a:noFill/>
+          <a:ln/>
+        </p:spPr>
+        <p:txBody>
+          <a:bodyPr wrap="square" rtlCol="0" anchor="ctr"/>
+          <a:lstStyle/>
+          <a:p>
+            <a:pPr indent="0" marL="0">
+              <a:buNone/>
+            </a:pPr>
+            <a:r>
+              <a:rPr lang="en-US" sz="1400" b="1" dirty="0">
+                <a:solidFill>
+                  <a:srgbClr val="0F0A2E"/>
+                </a:solidFill>
+                <a:latin typeface="Calibri" pitchFamily="34" charset="0"/>
+                <a:ea typeface="Calibri" pitchFamily="34" charset="-122"/>
+                <a:cs typeface="Calibri" pitchFamily="34" charset="-120"/>
+              </a:rPr>
+              <a:t>Microsoft.Extensions.AI</a:t>
+            </a:r>
+            <a:endParaRPr lang="en-US" sz="1400" dirty="0"/>
+          </a:p>
+        </p:txBody>
+      </p:sp>
+      <p:sp>
+        <p:nvSpPr>
+          <p:cNvPr id="21" name="Text 19"/>
+          <p:cNvSpPr/>
+          <p:nvPr/>
+        </p:nvSpPr>
+        <p:spPr>
+          <a:xfrm>
+            <a:off x="1325880" y="4251960"/>
+            <a:ext cx="4495648" cy="320040"/>
+          </a:xfrm>
+          <a:prstGeom prst="rect">
+            <a:avLst/>
+          </a:prstGeom>
+          <a:noFill/>
+          <a:ln/>
+        </p:spPr>
+        <p:txBody>
+          <a:bodyPr wrap="square" rtlCol="0" anchor="ctr"/>
+          <a:lstStyle/>
+          <a:p>
+            <a:pPr indent="0" marL="0">
+              <a:buNone/>
+            </a:pPr>
+            <a:r>
+              <a:rPr lang="en-US" sz="1100" dirty="0">
+                <a:solidFill>
+                  <a:srgbClr val="6366F1"/>
+                </a:solidFill>
+                <a:latin typeface="Consolas" pitchFamily="34" charset="0"/>
+                <a:ea typeface="Consolas" pitchFamily="34" charset="-122"/>
+                <a:cs typeface="Consolas" pitchFamily="34" charset="-120"/>
+              </a:rPr>
+              <a:t>learn.microsoft.com/dotnet/ai/microsoft-extensions-ai</a:t>
+            </a:r>
+            <a:endParaRPr lang="en-US" sz="1100" dirty="0"/>
+          </a:p>
+        </p:txBody>
+      </p:sp>
+      <p:sp>
+        <p:nvSpPr>
+          <p:cNvPr id="22" name="Text 20"/>
+          <p:cNvSpPr/>
+          <p:nvPr/>
+        </p:nvSpPr>
+        <p:spPr>
+          <a:xfrm>
+            <a:off x="1325880" y="4617720"/>
+            <a:ext cx="4495648" cy="411480"/>
+          </a:xfrm>
+          <a:prstGeom prst="rect">
+            <a:avLst/>
+          </a:prstGeom>
+          <a:noFill/>
+          <a:ln/>
+        </p:spPr>
+        <p:txBody>
+          <a:bodyPr wrap="square" rtlCol="0" anchor="ctr"/>
+          <a:lstStyle/>
+          <a:p>
+            <a:pPr indent="0" marL="0">
+              <a:buNone/>
+            </a:pPr>
+            <a:r>
+              <a:rPr lang="en-US" sz="1100" i="1" dirty="0">
+                <a:solidFill>
+                  <a:srgbClr val="6B6B8F"/>
+                </a:solidFill>
+                <a:latin typeface="Calibri" pitchFamily="34" charset="0"/>
+                <a:ea typeface="Calibri" pitchFamily="34" charset="-122"/>
+                <a:cs typeface="Calibri" pitchFamily="34" charset="-120"/>
+              </a:rPr>
+              <a:t>The IChatClient abstraction MAF builds on</a:t>
+            </a:r>
+            <a:endParaRPr lang="en-US" sz="1100" dirty="0"/>
+          </a:p>
+        </p:txBody>
+      </p:sp>
+      <p:sp>
+        <p:nvSpPr>
+          <p:cNvPr id="23" name="Shape 21"/>
+          <p:cNvSpPr/>
+          <p:nvPr/>
+        </p:nvSpPr>
+        <p:spPr>
+          <a:xfrm>
+            <a:off x="6233008" y="3749040"/>
+            <a:ext cx="5410048" cy="1325880"/>
+          </a:xfrm>
+          <a:prstGeom prst="roundRect">
+            <a:avLst>
+              <a:gd name="adj" fmla="val 6897"/>
+            </a:avLst>
+          </a:prstGeom>
+          <a:solidFill>
+            <a:srgbClr val="FFFFFF"/>
+          </a:solidFill>
+          <a:ln w="12700">
+            <a:solidFill>
+              <a:srgbClr val="E5E1F5"/>
+            </a:solidFill>
+            <a:prstDash val="solid"/>
+          </a:ln>
+        </p:spPr>
+      </p:sp>
+      <p:sp>
+        <p:nvSpPr>
+          <p:cNvPr id="24" name="Shape 22"/>
+          <p:cNvSpPr/>
+          <p:nvPr/>
+        </p:nvSpPr>
+        <p:spPr>
+          <a:xfrm>
+            <a:off x="6233008" y="3749040"/>
+            <a:ext cx="109728" cy="1325880"/>
+          </a:xfrm>
+          <a:prstGeom prst="rect">
+            <a:avLst/>
+          </a:prstGeom>
+          <a:solidFill>
+            <a:srgbClr val="FB7185"/>
+          </a:solidFill>
+          <a:ln w="12700">
+            <a:solidFill>
+              <a:srgbClr val="FB7185"/>
+            </a:solidFill>
+            <a:prstDash val="solid"/>
+          </a:ln>
+        </p:spPr>
+      </p:sp>
+      <p:sp>
+        <p:nvSpPr>
+          <p:cNvPr id="25" name="Text 23"/>
+          <p:cNvSpPr/>
+          <p:nvPr/>
+        </p:nvSpPr>
+        <p:spPr>
+          <a:xfrm>
+            <a:off x="6461608" y="3931920"/>
+            <a:ext cx="457200" cy="457200"/>
+          </a:xfrm>
+          <a:prstGeom prst="rect">
+            <a:avLst/>
+          </a:prstGeom>
+          <a:noFill/>
+          <a:ln/>
+        </p:spPr>
+        <p:txBody>
+          <a:bodyPr wrap="square" rtlCol="0" anchor="ctr"/>
+          <a:lstStyle/>
+          <a:p>
+            <a:pPr algn="ctr" indent="0" marL="0">
+              <a:buNone/>
+            </a:pPr>
+            <a:r>
+              <a:rPr lang="en-US" sz="2200" b="1" dirty="0">
+                <a:solidFill>
+                  <a:srgbClr val="FB7185"/>
+                </a:solidFill>
+                <a:latin typeface="Georgia" pitchFamily="34" charset="0"/>
+                <a:ea typeface="Georgia" pitchFamily="34" charset="-122"/>
+                <a:cs typeface="Georgia" pitchFamily="34" charset="-120"/>
+              </a:rPr>
+              <a:t>◆</a:t>
+            </a:r>
+            <a:endParaRPr lang="en-US" sz="2200" dirty="0"/>
+          </a:p>
+        </p:txBody>
+      </p:sp>
+      <p:sp>
+        <p:nvSpPr>
+          <p:cNvPr id="26" name="Text 24"/>
+          <p:cNvSpPr/>
+          <p:nvPr/>
+        </p:nvSpPr>
+        <p:spPr>
+          <a:xfrm>
+            <a:off x="7010248" y="3886200"/>
+            <a:ext cx="4495648" cy="365760"/>
+          </a:xfrm>
+          <a:prstGeom prst="rect">
+            <a:avLst/>
+          </a:prstGeom>
+          <a:noFill/>
+          <a:ln/>
+        </p:spPr>
+        <p:txBody>
+          <a:bodyPr wrap="square" rtlCol="0" anchor="ctr"/>
+          <a:lstStyle/>
+          <a:p>
+            <a:pPr indent="0" marL="0">
+              <a:buNone/>
+            </a:pPr>
+            <a:r>
+              <a:rPr lang="en-US" sz="1400" b="1" dirty="0">
+                <a:solidFill>
+                  <a:srgbClr val="0F0A2E"/>
+                </a:solidFill>
+                <a:latin typeface="Calibri" pitchFamily="34" charset="0"/>
+                <a:ea typeface="Calibri" pitchFamily="34" charset="-122"/>
+                <a:cs typeface="Calibri" pitchFamily="34" charset="-120"/>
+              </a:rPr>
+              <a:t>maui-labs (Essentials.AI · AI.Attributes · DevFlow)</a:t>
+            </a:r>
+            <a:endParaRPr lang="en-US" sz="1400" dirty="0"/>
+          </a:p>
+        </p:txBody>
+      </p:sp>
+      <p:sp>
+        <p:nvSpPr>
+          <p:cNvPr id="27" name="Text 25"/>
+          <p:cNvSpPr/>
+          <p:nvPr/>
+        </p:nvSpPr>
+        <p:spPr>
+          <a:xfrm>
+            <a:off x="7010248" y="4251960"/>
+            <a:ext cx="4495648" cy="320040"/>
+          </a:xfrm>
+          <a:prstGeom prst="rect">
+            <a:avLst/>
+          </a:prstGeom>
+          <a:noFill/>
+          <a:ln/>
+        </p:spPr>
+        <p:txBody>
+          <a:bodyPr wrap="square" rtlCol="0" anchor="ctr"/>
+          <a:lstStyle/>
+          <a:p>
+            <a:pPr indent="0" marL="0">
+              <a:buNone/>
+            </a:pPr>
+            <a:r>
+              <a:rPr lang="en-US" sz="1100" dirty="0">
+                <a:solidFill>
+                  <a:srgbClr val="FB7185"/>
+                </a:solidFill>
+                <a:latin typeface="Consolas" pitchFamily="34" charset="0"/>
+                <a:ea typeface="Consolas" pitchFamily="34" charset="-122"/>
+                <a:cs typeface="Consolas" pitchFamily="34" charset="-120"/>
+              </a:rPr>
+              <a:t>github.com/dotnet/maui-labs</a:t>
+            </a:r>
+            <a:endParaRPr lang="en-US" sz="1100" dirty="0"/>
+          </a:p>
+        </p:txBody>
+      </p:sp>
+      <p:sp>
+        <p:nvSpPr>
+          <p:cNvPr id="28" name="Text 26"/>
+          <p:cNvSpPr/>
+          <p:nvPr/>
+        </p:nvSpPr>
+        <p:spPr>
+          <a:xfrm>
+            <a:off x="7010248" y="4617720"/>
+            <a:ext cx="4495648" cy="411480"/>
+          </a:xfrm>
+          <a:prstGeom prst="rect">
+            <a:avLst/>
+          </a:prstGeom>
+          <a:noFill/>
+          <a:ln/>
+        </p:spPr>
+        <p:txBody>
+          <a:bodyPr wrap="square" rtlCol="0" anchor="ctr"/>
+          <a:lstStyle/>
+          <a:p>
+            <a:pPr indent="0" marL="0">
+              <a:buNone/>
+            </a:pPr>
+            <a:r>
+              <a:rPr lang="en-US" sz="1100" i="1" dirty="0">
+                <a:solidFill>
+                  <a:srgbClr val="6B6B8F"/>
+                </a:solidFill>
+                <a:latin typeface="Calibri" pitchFamily="34" charset="0"/>
+                <a:ea typeface="Calibri" pitchFamily="34" charset="-122"/>
+                <a:cs typeface="Calibri" pitchFamily="34" charset="-120"/>
+              </a:rPr>
+              <a:t>Apple Intelligence wrapper, source-gen tools, AI-driven app debugging</a:t>
+            </a:r>
+            <a:endParaRPr lang="en-US" sz="1100" dirty="0"/>
+          </a:p>
+        </p:txBody>
+      </p:sp>
+      <p:sp>
+        <p:nvSpPr>
+          <p:cNvPr id="29" name="Shape 27"/>
+          <p:cNvSpPr/>
+          <p:nvPr/>
+        </p:nvSpPr>
+        <p:spPr>
+          <a:xfrm>
+            <a:off x="548640" y="5212080"/>
+            <a:ext cx="5410048" cy="1325880"/>
+          </a:xfrm>
+          <a:prstGeom prst="roundRect">
+            <a:avLst>
+              <a:gd name="adj" fmla="val 6897"/>
+            </a:avLst>
+          </a:prstGeom>
+          <a:solidFill>
+            <a:srgbClr val="FFFFFF"/>
+          </a:solidFill>
+          <a:ln w="12700">
+            <a:solidFill>
+              <a:srgbClr val="E5E1F5"/>
+            </a:solidFill>
+            <a:prstDash val="solid"/>
+          </a:ln>
+        </p:spPr>
+      </p:sp>
+      <p:sp>
+        <p:nvSpPr>
+          <p:cNvPr id="30" name="Shape 28"/>
+          <p:cNvSpPr/>
+          <p:nvPr/>
+        </p:nvSpPr>
+        <p:spPr>
+          <a:xfrm>
+            <a:off x="548640" y="5212080"/>
+            <a:ext cx="109728" cy="1325880"/>
+          </a:xfrm>
+          <a:prstGeom prst="rect">
+            <a:avLst/>
+          </a:prstGeom>
+          <a:solidFill>
+            <a:srgbClr val="FBBF24"/>
+          </a:solidFill>
+          <a:ln w="12700">
+            <a:solidFill>
+              <a:srgbClr val="FBBF24"/>
+            </a:solidFill>
+            <a:prstDash val="solid"/>
+          </a:ln>
+        </p:spPr>
+      </p:sp>
+      <p:sp>
+        <p:nvSpPr>
+          <p:cNvPr id="31" name="Text 29"/>
+          <p:cNvSpPr/>
+          <p:nvPr/>
+        </p:nvSpPr>
+        <p:spPr>
+          <a:xfrm>
+            <a:off x="777240" y="5394960"/>
+            <a:ext cx="457200" cy="457200"/>
+          </a:xfrm>
+          <a:prstGeom prst="rect">
+            <a:avLst/>
+          </a:prstGeom>
+          <a:noFill/>
+          <a:ln/>
+        </p:spPr>
+        <p:txBody>
+          <a:bodyPr wrap="square" rtlCol="0" anchor="ctr"/>
+          <a:lstStyle/>
+          <a:p>
+            <a:pPr algn="ctr" indent="0" marL="0">
+              <a:buNone/>
+            </a:pPr>
+            <a:r>
+              <a:rPr lang="en-US" sz="2200" b="1" dirty="0">
+                <a:solidFill>
+                  <a:srgbClr val="FBBF24"/>
+                </a:solidFill>
+                <a:latin typeface="Georgia" pitchFamily="34" charset="0"/>
+                <a:ea typeface="Georgia" pitchFamily="34" charset="-122"/>
+                <a:cs typeface="Georgia" pitchFamily="34" charset="-120"/>
+              </a:rPr>
+              <a:t>▣</a:t>
+            </a:r>
+            <a:endParaRPr lang="en-US" sz="2200" dirty="0"/>
+          </a:p>
+        </p:txBody>
+      </p:sp>
+      <p:sp>
+        <p:nvSpPr>
+          <p:cNvPr id="32" name="Text 30"/>
+          <p:cNvSpPr/>
+          <p:nvPr/>
+        </p:nvSpPr>
+        <p:spPr>
+          <a:xfrm>
+            <a:off x="1325880" y="5349240"/>
+            <a:ext cx="4495648" cy="365760"/>
+          </a:xfrm>
+          <a:prstGeom prst="rect">
+            <a:avLst/>
+          </a:prstGeom>
+          <a:noFill/>
+          <a:ln/>
+        </p:spPr>
+        <p:txBody>
+          <a:bodyPr wrap="square" rtlCol="0" anchor="ctr"/>
+          <a:lstStyle/>
+          <a:p>
+            <a:pPr indent="0" marL="0">
+              <a:buNone/>
+            </a:pPr>
+            <a:r>
+              <a:rPr lang="en-US" sz="1400" b="1" dirty="0">
+                <a:solidFill>
+                  <a:srgbClr val="0F0A2E"/>
+                </a:solidFill>
+                <a:latin typeface="Calibri" pitchFamily="34" charset="0"/>
+                <a:ea typeface="Calibri" pitchFamily="34" charset="-122"/>
+                <a:cs typeface="Calibri" pitchFamily="34" charset="-120"/>
+              </a:rPr>
+              <a:t>Foundry Local</a:t>
+            </a:r>
+            <a:endParaRPr lang="en-US" sz="1400" dirty="0"/>
+          </a:p>
+        </p:txBody>
+      </p:sp>
+      <p:sp>
+        <p:nvSpPr>
+          <p:cNvPr id="33" name="Text 31"/>
+          <p:cNvSpPr/>
+          <p:nvPr/>
+        </p:nvSpPr>
+        <p:spPr>
+          <a:xfrm>
+            <a:off x="1325880" y="5715000"/>
+            <a:ext cx="4495648" cy="320040"/>
+          </a:xfrm>
+          <a:prstGeom prst="rect">
+            <a:avLst/>
+          </a:prstGeom>
+          <a:noFill/>
+          <a:ln/>
+        </p:spPr>
+        <p:txBody>
+          <a:bodyPr wrap="square" rtlCol="0" anchor="ctr"/>
+          <a:lstStyle/>
+          <a:p>
+            <a:pPr indent="0" marL="0">
+              <a:buNone/>
+            </a:pPr>
+            <a:r>
+              <a:rPr lang="en-US" sz="1100" dirty="0">
+                <a:solidFill>
+                  <a:srgbClr val="FBBF24"/>
+                </a:solidFill>
+                <a:latin typeface="Consolas" pitchFamily="34" charset="0"/>
+                <a:ea typeface="Consolas" pitchFamily="34" charset="-122"/>
+                <a:cs typeface="Consolas" pitchFamily="34" charset="-120"/>
+              </a:rPr>
+              <a:t>github.com/microsoft/Foundry-Local</a:t>
+            </a:r>
+            <a:endParaRPr lang="en-US" sz="1100" dirty="0"/>
+          </a:p>
+        </p:txBody>
+      </p:sp>
+      <p:sp>
+        <p:nvSpPr>
+          <p:cNvPr id="34" name="Text 32"/>
+          <p:cNvSpPr/>
+          <p:nvPr/>
+        </p:nvSpPr>
+        <p:spPr>
+          <a:xfrm>
+            <a:off x="1325880" y="6080760"/>
+            <a:ext cx="4495648" cy="411480"/>
+          </a:xfrm>
+          <a:prstGeom prst="rect">
+            <a:avLst/>
+          </a:prstGeom>
+          <a:noFill/>
+          <a:ln/>
+        </p:spPr>
+        <p:txBody>
+          <a:bodyPr wrap="square" rtlCol="0" anchor="ctr"/>
+          <a:lstStyle/>
+          <a:p>
+            <a:pPr indent="0" marL="0">
+              <a:buNone/>
+            </a:pPr>
+            <a:r>
+              <a:rPr lang="en-US" sz="1100" i="1" dirty="0">
+                <a:solidFill>
+                  <a:srgbClr val="6B6B8F"/>
+                </a:solidFill>
+                <a:latin typeface="Calibri" pitchFamily="34" charset="0"/>
+                <a:ea typeface="Calibri" pitchFamily="34" charset="-122"/>
+                <a:cs typeface="Calibri" pitchFamily="34" charset="-120"/>
+              </a:rPr>
+              <a:t>Cloud-grade LLMs running on your laptop</a:t>
+            </a:r>
+            <a:endParaRPr lang="en-US" sz="1100" dirty="0"/>
+          </a:p>
+        </p:txBody>
+      </p:sp>
+      <p:sp>
+        <p:nvSpPr>
+          <p:cNvPr id="35" name="Shape 33"/>
+          <p:cNvSpPr/>
+          <p:nvPr/>
+        </p:nvSpPr>
+        <p:spPr>
+          <a:xfrm>
+            <a:off x="6233008" y="5212080"/>
+            <a:ext cx="5410048" cy="1325880"/>
+          </a:xfrm>
+          <a:prstGeom prst="roundRect">
+            <a:avLst>
+              <a:gd name="adj" fmla="val 6897"/>
+            </a:avLst>
+          </a:prstGeom>
+          <a:solidFill>
+            <a:srgbClr val="FFFFFF"/>
+          </a:solidFill>
+          <a:ln w="12700">
+            <a:solidFill>
+              <a:srgbClr val="E5E1F5"/>
+            </a:solidFill>
+            <a:prstDash val="solid"/>
+          </a:ln>
+        </p:spPr>
+      </p:sp>
+      <p:sp>
+        <p:nvSpPr>
+          <p:cNvPr id="36" name="Shape 34"/>
+          <p:cNvSpPr/>
+          <p:nvPr/>
+        </p:nvSpPr>
+        <p:spPr>
+          <a:xfrm>
+            <a:off x="6233008" y="5212080"/>
+            <a:ext cx="109728" cy="1325880"/>
+          </a:xfrm>
+          <a:prstGeom prst="rect">
+            <a:avLst/>
+          </a:prstGeom>
+          <a:solidFill>
+            <a:srgbClr val="FBBF24"/>
+          </a:solidFill>
+          <a:ln w="12700">
+            <a:solidFill>
+              <a:srgbClr val="FBBF24"/>
+            </a:solidFill>
+            <a:prstDash val="solid"/>
+          </a:ln>
+        </p:spPr>
+      </p:sp>
+      <p:sp>
+        <p:nvSpPr>
+          <p:cNvPr id="37" name="Text 35"/>
+          <p:cNvSpPr/>
+          <p:nvPr/>
+        </p:nvSpPr>
+        <p:spPr>
+          <a:xfrm>
+            <a:off x="6461608" y="5394960"/>
+            <a:ext cx="457200" cy="457200"/>
+          </a:xfrm>
+          <a:prstGeom prst="rect">
+            <a:avLst/>
+          </a:prstGeom>
+          <a:noFill/>
+          <a:ln/>
+        </p:spPr>
+        <p:txBody>
+          <a:bodyPr wrap="square" rtlCol="0" anchor="ctr"/>
+          <a:lstStyle/>
+          <a:p>
+            <a:pPr algn="ctr" indent="0" marL="0">
+              <a:buNone/>
+            </a:pPr>
+            <a:r>
+              <a:rPr lang="en-US" sz="2200" b="1" dirty="0">
+                <a:solidFill>
+                  <a:srgbClr val="FBBF24"/>
+                </a:solidFill>
+                <a:latin typeface="Georgia" pitchFamily="34" charset="0"/>
+                <a:ea typeface="Georgia" pitchFamily="34" charset="-122"/>
+                <a:cs typeface="Georgia" pitchFamily="34" charset="-120"/>
+              </a:rPr>
+              <a:t>▣</a:t>
+            </a:r>
+            <a:endParaRPr lang="en-US" sz="2200" dirty="0"/>
+          </a:p>
+        </p:txBody>
+      </p:sp>
+      <p:sp>
+        <p:nvSpPr>
+          <p:cNvPr id="38" name="Text 36"/>
+          <p:cNvSpPr/>
+          <p:nvPr/>
+        </p:nvSpPr>
+        <p:spPr>
+          <a:xfrm>
+            <a:off x="7010248" y="5349240"/>
+            <a:ext cx="4495648" cy="365760"/>
+          </a:xfrm>
+          <a:prstGeom prst="rect">
+            <a:avLst/>
+          </a:prstGeom>
+          <a:noFill/>
+          <a:ln/>
+        </p:spPr>
+        <p:txBody>
+          <a:bodyPr wrap="square" rtlCol="0" anchor="ctr"/>
+          <a:lstStyle/>
+          <a:p>
+            <a:pPr indent="0" marL="0">
+              <a:buNone/>
+            </a:pPr>
+            <a:r>
+              <a:rPr lang="en-US" sz="1400" b="1" dirty="0">
+                <a:solidFill>
+                  <a:srgbClr val="0F0A2E"/>
+                </a:solidFill>
+                <a:latin typeface="Calibri" pitchFamily="34" charset="0"/>
+                <a:ea typeface="Calibri" pitchFamily="34" charset="-122"/>
+                <a:cs typeface="Calibri" pitchFamily="34" charset="-120"/>
+              </a:rPr>
+              <a:t>Apple FoundationModels  ·  Windows AI APIs</a:t>
+            </a:r>
+            <a:endParaRPr lang="en-US" sz="1400" dirty="0"/>
+          </a:p>
+        </p:txBody>
+      </p:sp>
+      <p:sp>
+        <p:nvSpPr>
+          <p:cNvPr id="39" name="Text 37"/>
+          <p:cNvSpPr/>
+          <p:nvPr/>
+        </p:nvSpPr>
+        <p:spPr>
+          <a:xfrm>
+            <a:off x="7010248" y="5715000"/>
+            <a:ext cx="4495648" cy="320040"/>
+          </a:xfrm>
+          <a:prstGeom prst="rect">
+            <a:avLst/>
+          </a:prstGeom>
+          <a:noFill/>
+          <a:ln/>
+        </p:spPr>
+        <p:txBody>
+          <a:bodyPr wrap="square" rtlCol="0" anchor="ctr"/>
+          <a:lstStyle/>
+          <a:p>
+            <a:pPr indent="0" marL="0">
+              <a:buNone/>
+            </a:pPr>
+            <a:r>
+              <a:rPr lang="en-US" sz="1100" dirty="0">
+                <a:solidFill>
+                  <a:srgbClr val="FBBF24"/>
+                </a:solidFill>
+                <a:latin typeface="Consolas" pitchFamily="34" charset="0"/>
+                <a:ea typeface="Consolas" pitchFamily="34" charset="-122"/>
+                <a:cs typeface="Consolas" pitchFamily="34" charset="-120"/>
+              </a:rPr>
+              <a:t>developer.apple.com/documentation/foundationmodels  ·  learn.microsoft.com/windows/ai/apis</a:t>
+            </a:r>
+            <a:endParaRPr lang="en-US" sz="1100" dirty="0"/>
+          </a:p>
+        </p:txBody>
+      </p:sp>
+      <p:sp>
+        <p:nvSpPr>
+          <p:cNvPr id="40" name="Text 38"/>
+          <p:cNvSpPr/>
+          <p:nvPr/>
+        </p:nvSpPr>
+        <p:spPr>
+          <a:xfrm>
+            <a:off x="7010248" y="6080760"/>
+            <a:ext cx="4495648" cy="411480"/>
+          </a:xfrm>
+          <a:prstGeom prst="rect">
+            <a:avLst/>
+          </a:prstGeom>
+          <a:noFill/>
+          <a:ln/>
+        </p:spPr>
+        <p:txBody>
+          <a:bodyPr wrap="square" rtlCol="0" anchor="ctr"/>
+          <a:lstStyle/>
+          <a:p>
+            <a:pPr indent="0" marL="0">
+              <a:buNone/>
+            </a:pPr>
+            <a:r>
+              <a:rPr lang="en-US" sz="1100" i="1" dirty="0">
+                <a:solidFill>
+                  <a:srgbClr val="6B6B8F"/>
+                </a:solidFill>
+                <a:latin typeface="Calibri" pitchFamily="34" charset="0"/>
+                <a:ea typeface="Calibri" pitchFamily="34" charset="-122"/>
+                <a:cs typeface="Calibri" pitchFamily="34" charset="-120"/>
+              </a:rPr>
+              <a:t>On-device LLM platforms — straight from the source</a:t>
+            </a:r>
+            <a:endParaRPr lang="en-US" sz="1100" dirty="0"/>
+          </a:p>
+        </p:txBody>
+      </p:sp>
+      <p:sp>
+        <p:nvSpPr>
+          <p:cNvPr id="41" name="Shape 39"/>
+          <p:cNvSpPr/>
+          <p:nvPr/>
+        </p:nvSpPr>
+        <p:spPr>
+          <a:xfrm>
+            <a:off x="10180015" y="502920"/>
+            <a:ext cx="292608" cy="292608"/>
+          </a:xfrm>
+          <a:prstGeom prst="roundRect">
+            <a:avLst>
+              <a:gd name="adj" fmla="val 15625"/>
+            </a:avLst>
+          </a:prstGeom>
+          <a:ln w="19050">
+            <a:solidFill>
+              <a:srgbClr val="6366F1"/>
+            </a:solidFill>
+            <a:prstDash val="solid"/>
+          </a:ln>
+        </p:spPr>
+      </p:sp>
+      <p:sp>
+        <p:nvSpPr>
+          <p:cNvPr id="42" name="Text 40"/>
+          <p:cNvSpPr/>
+          <p:nvPr/>
+        </p:nvSpPr>
+        <p:spPr>
+          <a:xfrm>
+            <a:off x="10472623" y="457200"/>
+            <a:ext cx="411480" cy="384048"/>
+          </a:xfrm>
+          <a:prstGeom prst="rect">
+            <a:avLst/>
+          </a:prstGeom>
+          <a:noFill/>
+          <a:ln/>
+        </p:spPr>
+        <p:txBody>
+          <a:bodyPr wrap="square" rtlCol="0" anchor="ctr"/>
+          <a:lstStyle/>
+          <a:p>
+            <a:pPr algn="ctr" indent="0" marL="0">
+              <a:buNone/>
+            </a:pPr>
+            <a:r>
+              <a:rPr lang="en-US" sz="1800" b="1" dirty="0">
+                <a:solidFill>
+                  <a:srgbClr val="6366F1"/>
+                </a:solidFill>
+                <a:latin typeface="Calibri" pitchFamily="34" charset="0"/>
+                <a:ea typeface="Calibri" pitchFamily="34" charset="-122"/>
+                <a:cs typeface="Calibri" pitchFamily="34" charset="-120"/>
+              </a:rPr>
+              <a:t>↔</a:t>
+            </a:r>
+            <a:endParaRPr lang="en-US" sz="1800" dirty="0"/>
+          </a:p>
+        </p:txBody>
+      </p:sp>
+      <p:sp>
+        <p:nvSpPr>
+          <p:cNvPr id="43" name="Text 41"/>
+          <p:cNvSpPr/>
+          <p:nvPr/>
+        </p:nvSpPr>
+        <p:spPr>
+          <a:xfrm>
+            <a:off x="10893247" y="429768"/>
+            <a:ext cx="411480" cy="457200"/>
+          </a:xfrm>
+          <a:prstGeom prst="rect">
+            <a:avLst/>
+          </a:prstGeom>
+          <a:noFill/>
+          <a:ln/>
+        </p:spPr>
+        <p:txBody>
+          <a:bodyPr wrap="square" rtlCol="0" anchor="ctr"/>
+          <a:lstStyle/>
+          <a:p>
+            <a:pPr algn="ctr" indent="0" marL="0">
+              <a:buNone/>
+            </a:pPr>
+            <a:r>
+              <a:rPr lang="en-US" sz="2200" dirty="0">
+                <a:solidFill>
+                  <a:srgbClr val="6366F1"/>
+                </a:solidFill>
+                <a:latin typeface="Calibri" pitchFamily="34" charset="0"/>
+                <a:ea typeface="Calibri" pitchFamily="34" charset="-122"/>
+                <a:cs typeface="Calibri" pitchFamily="34" charset="-120"/>
+              </a:rPr>
+              <a:t>☁</a:t>
+            </a:r>
+            <a:endParaRPr lang="en-US" sz="2200" dirty="0"/>
+          </a:p>
+        </p:txBody>
+      </p:sp>
+      <p:sp>
+        <p:nvSpPr>
+          <p:cNvPr id="44" name="Text 42"/>
+          <p:cNvSpPr/>
+          <p:nvPr/>
+        </p:nvSpPr>
+        <p:spPr>
+          <a:xfrm>
+            <a:off x="457200" y="6446520"/>
+            <a:ext cx="7315200" cy="274320"/>
+          </a:xfrm>
+          <a:prstGeom prst="rect">
+            <a:avLst/>
+          </a:prstGeom>
+          <a:noFill/>
+          <a:ln/>
+        </p:spPr>
+        <p:txBody>
+          <a:bodyPr wrap="square" rtlCol="0" anchor="ctr"/>
+          <a:lstStyle/>
+          <a:p>
+            <a:pPr algn="l" indent="0" marL="0">
+              <a:buNone/>
+            </a:pPr>
+            <a:r>
+              <a:rPr lang="en-US" sz="1000" dirty="0">
+                <a:solidFill>
+                  <a:srgbClr val="6B6B8F"/>
+                </a:solidFill>
+                <a:latin typeface="Calibri" pitchFamily="34" charset="0"/>
+                <a:ea typeface="Calibri" pitchFamily="34" charset="-122"/>
+                <a:cs typeface="Calibri" pitchFamily="34" charset="-120"/>
+              </a:rPr>
+              <a:t>Unifying Local and Cloud AI</a:t>
+            </a:r>
+            <a:pPr algn="l" indent="0" marL="0">
+              <a:buNone/>
+            </a:pPr>
+            <a:r>
+              <a:rPr lang="en-US" sz="1000" dirty="0">
+                <a:solidFill>
+                  <a:srgbClr val="6B6B8F"/>
+                </a:solidFill>
+                <a:latin typeface="Calibri" pitchFamily="34" charset="0"/>
+                <a:ea typeface="Calibri" pitchFamily="34" charset="-122"/>
+                <a:cs typeface="Calibri" pitchFamily="34" charset="-120"/>
+              </a:rPr>
+              <a:t>  ·  </a:t>
+            </a:r>
+            <a:pPr algn="l" indent="0" marL="0">
+              <a:buNone/>
+            </a:pPr>
+            <a:r>
+              <a:rPr lang="en-US" sz="1000" b="1" dirty="0">
+                <a:solidFill>
+                  <a:srgbClr val="FB7185"/>
+                </a:solidFill>
+                <a:latin typeface="Calibri" pitchFamily="34" charset="0"/>
+                <a:ea typeface="Calibri" pitchFamily="34" charset="-122"/>
+                <a:cs typeface="Calibri" pitchFamily="34" charset="-120"/>
+              </a:rPr>
+              <a:t>@mattleibow</a:t>
+            </a:r>
+            <a:pPr algn="l" indent="0" marL="0">
+              <a:buNone/>
+            </a:pPr>
+            <a:r>
+              <a:rPr lang="en-US" sz="1000" dirty="0">
+                <a:solidFill>
+                  <a:srgbClr val="6B6B8F"/>
+                </a:solidFill>
+                <a:latin typeface="Calibri" pitchFamily="34" charset="0"/>
+                <a:ea typeface="Calibri" pitchFamily="34" charset="-122"/>
+                <a:cs typeface="Calibri" pitchFamily="34" charset="-120"/>
+              </a:rPr>
+              <a:t>  ·  @CPTMSDUG</a:t>
+            </a:r>
+            <a:endParaRPr lang="en-US" sz="1000" dirty="0"/>
+          </a:p>
+        </p:txBody>
+      </p:sp>
+      <p:sp>
+        <p:nvSpPr>
+          <p:cNvPr id="45" name="Text 43"/>
+          <p:cNvSpPr/>
+          <p:nvPr/>
+        </p:nvSpPr>
+        <p:spPr>
+          <a:xfrm>
+            <a:off x="10820095" y="6446520"/>
+            <a:ext cx="914400" cy="274320"/>
+          </a:xfrm>
+          <a:prstGeom prst="rect">
+            <a:avLst/>
+          </a:prstGeom>
+          <a:noFill/>
+          <a:ln/>
+        </p:spPr>
+        <p:txBody>
+          <a:bodyPr wrap="square" rtlCol="0" anchor="ctr"/>
+          <a:lstStyle/>
+          <a:p>
+            <a:pPr algn="r" indent="0" marL="0">
+              <a:buNone/>
+            </a:pPr>
+            <a:r>
+              <a:rPr lang="en-US" sz="1000" dirty="0">
+                <a:solidFill>
+                  <a:srgbClr val="6B6B8F"/>
+                </a:solidFill>
+                <a:latin typeface="Calibri" pitchFamily="34" charset="0"/>
+                <a:ea typeface="Calibri" pitchFamily="34" charset="-122"/>
+                <a:cs typeface="Calibri" pitchFamily="34" charset="-120"/>
+              </a:rPr>
+              <a:t>15 / 16</a:t>
+            </a:r>
+            <a:endParaRPr lang="en-US" sz="1000" dirty="0"/>
+          </a:p>
+        </p:txBody>
+      </p:sp>
+    </p:spTree>
+  </p:cSld>
+  <p:clrMapOvr>
+    <a:masterClrMapping/>
+  </p:clrMapOvr>
+</p:sld>
+</file>
+
+<file path=ppt/slides/slide16.xml><?xml version="1.0" encoding="utf-8"?>
+<p:sld xmlns:a="http://schemas.openxmlformats.org/drawingml/2006/main" xmlns:r="http://schemas.openxmlformats.org/officeDocument/2006/relationships" xmlns:p="http://schemas.openxmlformats.org/presentationml/2006/main">
+  <p:cSld name="Slide 16">
     <p:bg>
       <p:bgPr>
         <a:solidFill>
@@ -9217,261 +12367,16 @@
       </p:grpSpPr>
       <p:sp>
         <p:nvSpPr>
-          <p:cNvPr id="2" name="Text 0"/>
-          <p:cNvSpPr/>
-          <p:nvPr/>
-        </p:nvSpPr>
-        <p:spPr>
-          <a:xfrm>
-            <a:off x="548640" y="502920"/>
-            <a:ext cx="7315200" cy="365760"/>
-          </a:xfrm>
-          <a:prstGeom prst="rect">
-            <a:avLst/>
-          </a:prstGeom>
-          <a:noFill/>
-          <a:ln/>
-        </p:spPr>
-        <p:txBody>
-          <a:bodyPr wrap="square" rtlCol="0" anchor="ctr"/>
-          <a:lstStyle/>
-          <a:p>
-            <a:pPr indent="0" marL="0">
-              <a:buNone/>
-            </a:pPr>
-            <a:r>
-              <a:rPr lang="en-US" sz="1400" b="1" spc="600" kern="0" dirty="0">
-                <a:solidFill>
-                  <a:srgbClr val="FB7185"/>
-                </a:solidFill>
-                <a:latin typeface="Calibri" pitchFamily="34" charset="0"/>
-                <a:ea typeface="Calibri" pitchFamily="34" charset="-122"/>
-                <a:cs typeface="Calibri" pitchFamily="34" charset="-120"/>
-              </a:rPr>
-              <a:t>RULES OF THUMB</a:t>
-            </a:r>
-            <a:endParaRPr lang="en-US" sz="1400" dirty="0"/>
-          </a:p>
-        </p:txBody>
-      </p:sp>
-      <p:sp>
-        <p:nvSpPr>
-          <p:cNvPr id="3" name="Text 1"/>
-          <p:cNvSpPr/>
-          <p:nvPr/>
-        </p:nvSpPr>
-        <p:spPr>
-          <a:xfrm>
-            <a:off x="548640" y="914400"/>
-            <a:ext cx="10972800" cy="822960"/>
-          </a:xfrm>
-          <a:prstGeom prst="rect">
-            <a:avLst/>
-          </a:prstGeom>
-          <a:noFill/>
-          <a:ln/>
-        </p:spPr>
-        <p:txBody>
-          <a:bodyPr wrap="square" rtlCol="0" anchor="ctr"/>
-          <a:lstStyle/>
-          <a:p>
-            <a:pPr indent="0" marL="0">
-              <a:buNone/>
-            </a:pPr>
-            <a:r>
-              <a:rPr lang="en-US" sz="4000" b="1" dirty="0">
-                <a:solidFill>
-                  <a:srgbClr val="FAF8FF"/>
-                </a:solidFill>
-                <a:latin typeface="Georgia" pitchFamily="34" charset="0"/>
-                <a:ea typeface="Georgia" pitchFamily="34" charset="-122"/>
-                <a:cs typeface="Georgia" pitchFamily="34" charset="-120"/>
-              </a:rPr>
-              <a:t>Your choice. Your code stays the same.</a:t>
-            </a:r>
-            <a:endParaRPr lang="en-US" sz="4000" dirty="0"/>
-          </a:p>
-        </p:txBody>
-      </p:sp>
-      <p:sp>
-        <p:nvSpPr>
-          <p:cNvPr id="4" name="Shape 2"/>
-          <p:cNvSpPr/>
-          <p:nvPr/>
-        </p:nvSpPr>
-        <p:spPr>
-          <a:xfrm>
-            <a:off x="548640" y="2103120"/>
-            <a:ext cx="7315200" cy="457200"/>
-          </a:xfrm>
-          <a:prstGeom prst="rect">
-            <a:avLst/>
-          </a:prstGeom>
-          <a:solidFill>
-            <a:srgbClr val="1E1B4B"/>
-          </a:solidFill>
-          <a:ln w="12700">
-            <a:solidFill>
-              <a:srgbClr val="1E1B4B"/>
-            </a:solidFill>
-            <a:prstDash val="solid"/>
-          </a:ln>
-        </p:spPr>
-      </p:sp>
-      <p:sp>
-        <p:nvSpPr>
-          <p:cNvPr id="5" name="Text 3"/>
-          <p:cNvSpPr/>
-          <p:nvPr/>
-        </p:nvSpPr>
-        <p:spPr>
-          <a:xfrm>
-            <a:off x="731520" y="2103120"/>
-            <a:ext cx="4114800" cy="457200"/>
-          </a:xfrm>
-          <a:prstGeom prst="rect">
-            <a:avLst/>
-          </a:prstGeom>
-          <a:noFill/>
-          <a:ln/>
-        </p:spPr>
-        <p:txBody>
-          <a:bodyPr wrap="square" rtlCol="0" anchor="ctr"/>
-          <a:lstStyle/>
-          <a:p>
-            <a:pPr indent="0" marL="0">
-              <a:buNone/>
-            </a:pPr>
-            <a:r>
-              <a:rPr lang="en-US" sz="1100" b="1" spc="300" kern="0" dirty="0">
-                <a:solidFill>
-                  <a:srgbClr val="CFCBED"/>
-                </a:solidFill>
-                <a:latin typeface="Calibri" pitchFamily="34" charset="0"/>
-                <a:ea typeface="Calibri" pitchFamily="34" charset="-122"/>
-                <a:cs typeface="Calibri" pitchFamily="34" charset="-120"/>
-              </a:rPr>
-              <a:t>WHEN…</a:t>
-            </a:r>
-            <a:endParaRPr lang="en-US" sz="1100" dirty="0"/>
-          </a:p>
-        </p:txBody>
-      </p:sp>
-      <p:sp>
-        <p:nvSpPr>
-          <p:cNvPr id="6" name="Text 4"/>
-          <p:cNvSpPr/>
-          <p:nvPr/>
-        </p:nvSpPr>
-        <p:spPr>
-          <a:xfrm>
-            <a:off x="4663440" y="2103120"/>
-            <a:ext cx="3017520" cy="457200"/>
-          </a:xfrm>
-          <a:prstGeom prst="rect">
-            <a:avLst/>
-          </a:prstGeom>
-          <a:noFill/>
-          <a:ln/>
-        </p:spPr>
-        <p:txBody>
-          <a:bodyPr wrap="square" rtlCol="0" anchor="ctr"/>
-          <a:lstStyle/>
-          <a:p>
-            <a:pPr indent="0" marL="0">
-              <a:buNone/>
-            </a:pPr>
-            <a:r>
-              <a:rPr lang="en-US" sz="1100" b="1" spc="300" kern="0" dirty="0">
-                <a:solidFill>
-                  <a:srgbClr val="CFCBED"/>
-                </a:solidFill>
-                <a:latin typeface="Calibri" pitchFamily="34" charset="0"/>
-                <a:ea typeface="Calibri" pitchFamily="34" charset="-122"/>
-                <a:cs typeface="Calibri" pitchFamily="34" charset="-120"/>
-              </a:rPr>
-              <a:t>REACH FOR</a:t>
-            </a:r>
-            <a:endParaRPr lang="en-US" sz="1100" dirty="0"/>
-          </a:p>
-        </p:txBody>
-      </p:sp>
-      <p:sp>
-        <p:nvSpPr>
-          <p:cNvPr id="7" name="Shape 5"/>
-          <p:cNvSpPr/>
-          <p:nvPr/>
-        </p:nvSpPr>
-        <p:spPr>
-          <a:xfrm>
-            <a:off x="548640" y="2606040"/>
-            <a:ext cx="7315200" cy="502920"/>
-          </a:xfrm>
-          <a:prstGeom prst="rect">
-            <a:avLst/>
-          </a:prstGeom>
-          <a:solidFill>
-            <a:srgbClr val="1E1B4B"/>
-          </a:solidFill>
-          <a:ln w="12700">
-            <a:solidFill>
-              <a:srgbClr val="1E1B4B"/>
-            </a:solidFill>
-            <a:prstDash val="solid"/>
-          </a:ln>
-        </p:spPr>
-      </p:sp>
-      <p:sp>
-        <p:nvSpPr>
-          <p:cNvPr id="8" name="Text 6"/>
-          <p:cNvSpPr/>
-          <p:nvPr/>
-        </p:nvSpPr>
-        <p:spPr>
-          <a:xfrm>
-            <a:off x="731520" y="2606040"/>
-            <a:ext cx="3931920" cy="502920"/>
-          </a:xfrm>
-          <a:prstGeom prst="rect">
-            <a:avLst/>
-          </a:prstGeom>
-          <a:noFill/>
-          <a:ln/>
-        </p:spPr>
-        <p:txBody>
-          <a:bodyPr wrap="square" rtlCol="0" anchor="ctr"/>
-          <a:lstStyle/>
-          <a:p>
-            <a:pPr indent="0" marL="0">
-              <a:buNone/>
-            </a:pPr>
-            <a:r>
-              <a:rPr lang="en-US" sz="1300" dirty="0">
-                <a:solidFill>
-                  <a:srgbClr val="FAF8FF"/>
-                </a:solidFill>
-                <a:latin typeface="Calibri" pitchFamily="34" charset="0"/>
-                <a:ea typeface="Calibri" pitchFamily="34" charset="-122"/>
-                <a:cs typeface="Calibri" pitchFamily="34" charset="-120"/>
-              </a:rPr>
-              <a:t>Privacy is non-negotiable</a:t>
-            </a:r>
-            <a:endParaRPr lang="en-US" sz="1300" dirty="0"/>
-          </a:p>
-        </p:txBody>
-      </p:sp>
-      <p:sp>
-        <p:nvSpPr>
-          <p:cNvPr id="9" name="Shape 7"/>
-          <p:cNvSpPr/>
-          <p:nvPr/>
-        </p:nvSpPr>
-        <p:spPr>
-          <a:xfrm>
-            <a:off x="4663440" y="2752344"/>
-            <a:ext cx="201168" cy="201168"/>
-          </a:xfrm>
-          <a:prstGeom prst="ellipse">
+          <p:cNvPr id="2" name="Shape 0"/>
+          <p:cNvSpPr/>
+          <p:nvPr/>
+        </p:nvSpPr>
+        <p:spPr>
+          <a:xfrm>
+            <a:off x="11825935" y="0"/>
+            <a:ext cx="365760" cy="6858000"/>
+          </a:xfrm>
+          <a:prstGeom prst="rect">
             <a:avLst/>
           </a:prstGeom>
           <a:solidFill>
@@ -9487,1001 +12392,186 @@
       </p:sp>
       <p:sp>
         <p:nvSpPr>
-          <p:cNvPr id="10" name="Text 8"/>
-          <p:cNvSpPr/>
-          <p:nvPr/>
-        </p:nvSpPr>
-        <p:spPr>
-          <a:xfrm>
-            <a:off x="4937760" y="2606040"/>
-            <a:ext cx="2743200" cy="502920"/>
-          </a:xfrm>
-          <a:prstGeom prst="rect">
-            <a:avLst/>
-          </a:prstGeom>
-          <a:noFill/>
-          <a:ln/>
-        </p:spPr>
-        <p:txBody>
-          <a:bodyPr wrap="square" rtlCol="0" anchor="ctr"/>
-          <a:lstStyle/>
-          <a:p>
-            <a:pPr indent="0" marL="0">
-              <a:buNone/>
-            </a:pPr>
-            <a:r>
-              <a:rPr lang="en-US" sz="1300" b="1" dirty="0">
+          <p:cNvPr id="3" name="Text 1"/>
+          <p:cNvSpPr/>
+          <p:nvPr/>
+        </p:nvSpPr>
+        <p:spPr>
+          <a:xfrm>
+            <a:off x="822960" y="502920"/>
+            <a:ext cx="1097280" cy="1143000"/>
+          </a:xfrm>
+          <a:prstGeom prst="rect">
+            <a:avLst/>
+          </a:prstGeom>
+          <a:noFill/>
+          <a:ln/>
+        </p:spPr>
+        <p:txBody>
+          <a:bodyPr wrap="square" rtlCol="0" anchor="ctr"/>
+          <a:lstStyle/>
+          <a:p>
+            <a:pPr algn="ctr" indent="0" marL="0">
+              <a:buNone/>
+            </a:pPr>
+            <a:r>
+              <a:rPr lang="en-US" sz="6400" dirty="0">
+                <a:solidFill>
+                  <a:srgbClr val="6366F1"/>
+                </a:solidFill>
+                <a:latin typeface="Calibri" pitchFamily="34" charset="0"/>
+                <a:ea typeface="Calibri" pitchFamily="34" charset="-122"/>
+                <a:cs typeface="Calibri" pitchFamily="34" charset="-120"/>
+              </a:rPr>
+              <a:t>☁</a:t>
+            </a:r>
+            <a:endParaRPr lang="en-US" sz="6400" dirty="0"/>
+          </a:p>
+        </p:txBody>
+      </p:sp>
+      <p:sp>
+        <p:nvSpPr>
+          <p:cNvPr id="4" name="Text 2"/>
+          <p:cNvSpPr/>
+          <p:nvPr/>
+        </p:nvSpPr>
+        <p:spPr>
+          <a:xfrm>
+            <a:off x="1554480" y="731520"/>
+            <a:ext cx="914400" cy="914400"/>
+          </a:xfrm>
+          <a:prstGeom prst="rect">
+            <a:avLst/>
+          </a:prstGeom>
+          <a:noFill/>
+          <a:ln/>
+        </p:spPr>
+        <p:txBody>
+          <a:bodyPr wrap="square" rtlCol="0" anchor="ctr"/>
+          <a:lstStyle/>
+          <a:p>
+            <a:pPr algn="ctr" indent="0" marL="0">
+              <a:buNone/>
+            </a:pPr>
+            <a:r>
+              <a:rPr lang="en-US" sz="5000" b="1" dirty="0">
+                <a:solidFill>
+                  <a:srgbClr val="CFCBED"/>
+                </a:solidFill>
+                <a:latin typeface="Calibri" pitchFamily="34" charset="0"/>
+                <a:ea typeface="Calibri" pitchFamily="34" charset="-122"/>
+                <a:cs typeface="Calibri" pitchFamily="34" charset="-120"/>
+              </a:rPr>
+              <a:t>↔</a:t>
+            </a:r>
+            <a:endParaRPr lang="en-US" sz="5000" dirty="0"/>
+          </a:p>
+        </p:txBody>
+      </p:sp>
+      <p:sp>
+        <p:nvSpPr>
+          <p:cNvPr id="5" name="Text 3"/>
+          <p:cNvSpPr/>
+          <p:nvPr/>
+        </p:nvSpPr>
+        <p:spPr>
+          <a:xfrm>
+            <a:off x="2286000" y="548640"/>
+            <a:ext cx="1097280" cy="1097280"/>
+          </a:xfrm>
+          <a:prstGeom prst="rect">
+            <a:avLst/>
+          </a:prstGeom>
+          <a:noFill/>
+          <a:ln/>
+        </p:spPr>
+        <p:txBody>
+          <a:bodyPr wrap="square" rtlCol="0" anchor="ctr"/>
+          <a:lstStyle/>
+          <a:p>
+            <a:pPr algn="ctr" indent="0" marL="0">
+              <a:buNone/>
+            </a:pPr>
+            <a:r>
+              <a:rPr lang="en-US" sz="6000" dirty="0">
+                <a:solidFill>
+                  <a:srgbClr val="FB7185"/>
+                </a:solidFill>
+                <a:latin typeface="Calibri" pitchFamily="34" charset="0"/>
+                <a:ea typeface="Calibri" pitchFamily="34" charset="-122"/>
+                <a:cs typeface="Calibri" pitchFamily="34" charset="-120"/>
+              </a:rPr>
+              <a:t>📱</a:t>
+            </a:r>
+            <a:endParaRPr lang="en-US" sz="6000" dirty="0"/>
+          </a:p>
+        </p:txBody>
+      </p:sp>
+      <p:sp>
+        <p:nvSpPr>
+          <p:cNvPr id="6" name="Text 4"/>
+          <p:cNvSpPr/>
+          <p:nvPr/>
+        </p:nvSpPr>
+        <p:spPr>
+          <a:xfrm>
+            <a:off x="822960" y="2377440"/>
+            <a:ext cx="10972800" cy="1280160"/>
+          </a:xfrm>
+          <a:prstGeom prst="rect">
+            <a:avLst/>
+          </a:prstGeom>
+          <a:noFill/>
+          <a:ln/>
+        </p:spPr>
+        <p:txBody>
+          <a:bodyPr wrap="square" rtlCol="0" anchor="ctr"/>
+          <a:lstStyle/>
+          <a:p>
+            <a:pPr indent="0" marL="0">
+              <a:buNone/>
+            </a:pPr>
+            <a:r>
+              <a:rPr lang="en-US" sz="11000" b="1" dirty="0">
                 <a:solidFill>
                   <a:srgbClr val="FAF8FF"/>
-                </a:solidFill>
-                <a:latin typeface="Calibri" pitchFamily="34" charset="0"/>
-                <a:ea typeface="Calibri" pitchFamily="34" charset="-122"/>
-                <a:cs typeface="Calibri" pitchFamily="34" charset="-120"/>
-              </a:rPr>
-              <a:t>OS Local · BYO Local</a:t>
-            </a:r>
-            <a:endParaRPr lang="en-US" sz="1300" dirty="0"/>
-          </a:p>
-        </p:txBody>
-      </p:sp>
-      <p:sp>
-        <p:nvSpPr>
-          <p:cNvPr id="11" name="Text 9"/>
-          <p:cNvSpPr/>
-          <p:nvPr/>
-        </p:nvSpPr>
-        <p:spPr>
-          <a:xfrm>
-            <a:off x="731520" y="3108960"/>
-            <a:ext cx="3931920" cy="502920"/>
-          </a:xfrm>
-          <a:prstGeom prst="rect">
-            <a:avLst/>
-          </a:prstGeom>
-          <a:noFill/>
-          <a:ln/>
-        </p:spPr>
-        <p:txBody>
-          <a:bodyPr wrap="square" rtlCol="0" anchor="ctr"/>
-          <a:lstStyle/>
-          <a:p>
-            <a:pPr indent="0" marL="0">
-              <a:buNone/>
-            </a:pPr>
-            <a:r>
-              <a:rPr lang="en-US" sz="1300" dirty="0">
-                <a:solidFill>
-                  <a:srgbClr val="FAF8FF"/>
-                </a:solidFill>
-                <a:latin typeface="Calibri" pitchFamily="34" charset="0"/>
-                <a:ea typeface="Calibri" pitchFamily="34" charset="-122"/>
-                <a:cs typeface="Calibri" pitchFamily="34" charset="-120"/>
-              </a:rPr>
-              <a:t>Offline / poor connectivity</a:t>
-            </a:r>
-            <a:endParaRPr lang="en-US" sz="1300" dirty="0"/>
-          </a:p>
-        </p:txBody>
-      </p:sp>
-      <p:sp>
-        <p:nvSpPr>
-          <p:cNvPr id="12" name="Shape 10"/>
-          <p:cNvSpPr/>
-          <p:nvPr/>
-        </p:nvSpPr>
-        <p:spPr>
-          <a:xfrm>
-            <a:off x="4663440" y="3255264"/>
-            <a:ext cx="201168" cy="201168"/>
-          </a:xfrm>
-          <a:prstGeom prst="ellipse">
-            <a:avLst/>
-          </a:prstGeom>
-          <a:solidFill>
-            <a:srgbClr val="FB7185"/>
-          </a:solidFill>
-          <a:ln w="12700">
-            <a:solidFill>
-              <a:srgbClr val="FB7185"/>
-            </a:solidFill>
-            <a:prstDash val="solid"/>
-          </a:ln>
-        </p:spPr>
-      </p:sp>
-      <p:sp>
-        <p:nvSpPr>
-          <p:cNvPr id="13" name="Text 11"/>
-          <p:cNvSpPr/>
-          <p:nvPr/>
-        </p:nvSpPr>
-        <p:spPr>
-          <a:xfrm>
-            <a:off x="4937760" y="3108960"/>
-            <a:ext cx="2743200" cy="502920"/>
-          </a:xfrm>
-          <a:prstGeom prst="rect">
-            <a:avLst/>
-          </a:prstGeom>
-          <a:noFill/>
-          <a:ln/>
-        </p:spPr>
-        <p:txBody>
-          <a:bodyPr wrap="square" rtlCol="0" anchor="ctr"/>
-          <a:lstStyle/>
-          <a:p>
-            <a:pPr indent="0" marL="0">
-              <a:buNone/>
-            </a:pPr>
-            <a:r>
-              <a:rPr lang="en-US" sz="1300" b="1" dirty="0">
-                <a:solidFill>
-                  <a:srgbClr val="FAF8FF"/>
-                </a:solidFill>
-                <a:latin typeface="Calibri" pitchFamily="34" charset="0"/>
-                <a:ea typeface="Calibri" pitchFamily="34" charset="-122"/>
-                <a:cs typeface="Calibri" pitchFamily="34" charset="-120"/>
-              </a:rPr>
-              <a:t>OS Local · BYO Local</a:t>
-            </a:r>
-            <a:endParaRPr lang="en-US" sz="1300" dirty="0"/>
-          </a:p>
-        </p:txBody>
-      </p:sp>
-      <p:sp>
-        <p:nvSpPr>
-          <p:cNvPr id="14" name="Shape 12"/>
-          <p:cNvSpPr/>
-          <p:nvPr/>
-        </p:nvSpPr>
-        <p:spPr>
-          <a:xfrm>
-            <a:off x="548640" y="3611880"/>
-            <a:ext cx="7315200" cy="502920"/>
-          </a:xfrm>
-          <a:prstGeom prst="rect">
-            <a:avLst/>
-          </a:prstGeom>
-          <a:solidFill>
-            <a:srgbClr val="1E1B4B"/>
-          </a:solidFill>
-          <a:ln w="12700">
-            <a:solidFill>
-              <a:srgbClr val="1E1B4B"/>
-            </a:solidFill>
-            <a:prstDash val="solid"/>
-          </a:ln>
-        </p:spPr>
-      </p:sp>
-      <p:sp>
-        <p:nvSpPr>
-          <p:cNvPr id="15" name="Text 13"/>
-          <p:cNvSpPr/>
-          <p:nvPr/>
-        </p:nvSpPr>
-        <p:spPr>
-          <a:xfrm>
-            <a:off x="731520" y="3611880"/>
-            <a:ext cx="3931920" cy="502920"/>
-          </a:xfrm>
-          <a:prstGeom prst="rect">
-            <a:avLst/>
-          </a:prstGeom>
-          <a:noFill/>
-          <a:ln/>
-        </p:spPr>
-        <p:txBody>
-          <a:bodyPr wrap="square" rtlCol="0" anchor="ctr"/>
-          <a:lstStyle/>
-          <a:p>
-            <a:pPr indent="0" marL="0">
-              <a:buNone/>
-            </a:pPr>
-            <a:r>
-              <a:rPr lang="en-US" sz="1300" dirty="0">
-                <a:solidFill>
-                  <a:srgbClr val="FAF8FF"/>
-                </a:solidFill>
-                <a:latin typeface="Calibri" pitchFamily="34" charset="0"/>
-                <a:ea typeface="Calibri" pitchFamily="34" charset="-122"/>
-                <a:cs typeface="Calibri" pitchFamily="34" charset="-120"/>
-              </a:rPr>
-              <a:t>Instant first token matters</a:t>
-            </a:r>
-            <a:endParaRPr lang="en-US" sz="1300" dirty="0"/>
-          </a:p>
-        </p:txBody>
-      </p:sp>
-      <p:sp>
-        <p:nvSpPr>
-          <p:cNvPr id="16" name="Shape 14"/>
-          <p:cNvSpPr/>
-          <p:nvPr/>
-        </p:nvSpPr>
-        <p:spPr>
-          <a:xfrm>
-            <a:off x="4663440" y="3758184"/>
-            <a:ext cx="201168" cy="201168"/>
-          </a:xfrm>
-          <a:prstGeom prst="ellipse">
-            <a:avLst/>
-          </a:prstGeom>
-          <a:solidFill>
-            <a:srgbClr val="FB7185"/>
-          </a:solidFill>
-          <a:ln w="12700">
-            <a:solidFill>
-              <a:srgbClr val="FB7185"/>
-            </a:solidFill>
-            <a:prstDash val="solid"/>
-          </a:ln>
-        </p:spPr>
-      </p:sp>
-      <p:sp>
-        <p:nvSpPr>
-          <p:cNvPr id="17" name="Text 15"/>
-          <p:cNvSpPr/>
-          <p:nvPr/>
-        </p:nvSpPr>
-        <p:spPr>
-          <a:xfrm>
-            <a:off x="4937760" y="3611880"/>
-            <a:ext cx="2743200" cy="502920"/>
-          </a:xfrm>
-          <a:prstGeom prst="rect">
-            <a:avLst/>
-          </a:prstGeom>
-          <a:noFill/>
-          <a:ln/>
-        </p:spPr>
-        <p:txBody>
-          <a:bodyPr wrap="square" rtlCol="0" anchor="ctr"/>
-          <a:lstStyle/>
-          <a:p>
-            <a:pPr indent="0" marL="0">
-              <a:buNone/>
-            </a:pPr>
-            <a:r>
-              <a:rPr lang="en-US" sz="1300" b="1" dirty="0">
-                <a:solidFill>
-                  <a:srgbClr val="FAF8FF"/>
-                </a:solidFill>
-                <a:latin typeface="Calibri" pitchFamily="34" charset="0"/>
-                <a:ea typeface="Calibri" pitchFamily="34" charset="-122"/>
-                <a:cs typeface="Calibri" pitchFamily="34" charset="-120"/>
-              </a:rPr>
-              <a:t>OS Local</a:t>
-            </a:r>
-            <a:endParaRPr lang="en-US" sz="1300" dirty="0"/>
-          </a:p>
-        </p:txBody>
-      </p:sp>
-      <p:sp>
-        <p:nvSpPr>
-          <p:cNvPr id="18" name="Text 16"/>
-          <p:cNvSpPr/>
-          <p:nvPr/>
-        </p:nvSpPr>
-        <p:spPr>
-          <a:xfrm>
-            <a:off x="731520" y="4114800"/>
-            <a:ext cx="3931920" cy="502920"/>
-          </a:xfrm>
-          <a:prstGeom prst="rect">
-            <a:avLst/>
-          </a:prstGeom>
-          <a:noFill/>
-          <a:ln/>
-        </p:spPr>
-        <p:txBody>
-          <a:bodyPr wrap="square" rtlCol="0" anchor="ctr"/>
-          <a:lstStyle/>
-          <a:p>
-            <a:pPr indent="0" marL="0">
-              <a:buNone/>
-            </a:pPr>
-            <a:r>
-              <a:rPr lang="en-US" sz="1300" dirty="0">
-                <a:solidFill>
-                  <a:srgbClr val="FAF8FF"/>
-                </a:solidFill>
-                <a:latin typeface="Calibri" pitchFamily="34" charset="0"/>
-                <a:ea typeface="Calibri" pitchFamily="34" charset="-122"/>
-                <a:cs typeface="Calibri" pitchFamily="34" charset="-120"/>
-              </a:rPr>
-              <a:t>Need frontier reasoning / tools</a:t>
-            </a:r>
-            <a:endParaRPr lang="en-US" sz="1300" dirty="0"/>
-          </a:p>
-        </p:txBody>
-      </p:sp>
-      <p:sp>
-        <p:nvSpPr>
-          <p:cNvPr id="19" name="Shape 17"/>
-          <p:cNvSpPr/>
-          <p:nvPr/>
-        </p:nvSpPr>
-        <p:spPr>
-          <a:xfrm>
-            <a:off x="4663440" y="4261104"/>
-            <a:ext cx="201168" cy="201168"/>
-          </a:xfrm>
-          <a:prstGeom prst="ellipse">
-            <a:avLst/>
-          </a:prstGeom>
-          <a:solidFill>
-            <a:srgbClr val="6366F1"/>
-          </a:solidFill>
-          <a:ln w="12700">
-            <a:solidFill>
-              <a:srgbClr val="6366F1"/>
-            </a:solidFill>
-            <a:prstDash val="solid"/>
-          </a:ln>
-        </p:spPr>
-      </p:sp>
-      <p:sp>
-        <p:nvSpPr>
-          <p:cNvPr id="20" name="Text 18"/>
-          <p:cNvSpPr/>
-          <p:nvPr/>
-        </p:nvSpPr>
-        <p:spPr>
-          <a:xfrm>
-            <a:off x="4937760" y="4114800"/>
-            <a:ext cx="2743200" cy="502920"/>
-          </a:xfrm>
-          <a:prstGeom prst="rect">
-            <a:avLst/>
-          </a:prstGeom>
-          <a:noFill/>
-          <a:ln/>
-        </p:spPr>
-        <p:txBody>
-          <a:bodyPr wrap="square" rtlCol="0" anchor="ctr"/>
-          <a:lstStyle/>
-          <a:p>
-            <a:pPr indent="0" marL="0">
-              <a:buNone/>
-            </a:pPr>
-            <a:r>
-              <a:rPr lang="en-US" sz="1300" b="1" dirty="0">
-                <a:solidFill>
-                  <a:srgbClr val="FAF8FF"/>
-                </a:solidFill>
-                <a:latin typeface="Calibri" pitchFamily="34" charset="0"/>
-                <a:ea typeface="Calibri" pitchFamily="34" charset="-122"/>
-                <a:cs typeface="Calibri" pitchFamily="34" charset="-120"/>
-              </a:rPr>
-              <a:t>Cloud</a:t>
-            </a:r>
-            <a:endParaRPr lang="en-US" sz="1300" dirty="0"/>
-          </a:p>
-        </p:txBody>
-      </p:sp>
-      <p:sp>
-        <p:nvSpPr>
-          <p:cNvPr id="21" name="Shape 19"/>
-          <p:cNvSpPr/>
-          <p:nvPr/>
-        </p:nvSpPr>
-        <p:spPr>
-          <a:xfrm>
-            <a:off x="548640" y="4617720"/>
-            <a:ext cx="7315200" cy="502920"/>
-          </a:xfrm>
-          <a:prstGeom prst="rect">
-            <a:avLst/>
-          </a:prstGeom>
-          <a:solidFill>
-            <a:srgbClr val="1E1B4B"/>
-          </a:solidFill>
-          <a:ln w="12700">
-            <a:solidFill>
-              <a:srgbClr val="1E1B4B"/>
-            </a:solidFill>
-            <a:prstDash val="solid"/>
-          </a:ln>
-        </p:spPr>
-      </p:sp>
-      <p:sp>
-        <p:nvSpPr>
-          <p:cNvPr id="22" name="Text 20"/>
-          <p:cNvSpPr/>
-          <p:nvPr/>
-        </p:nvSpPr>
-        <p:spPr>
-          <a:xfrm>
-            <a:off x="731520" y="4617720"/>
-            <a:ext cx="3931920" cy="502920"/>
-          </a:xfrm>
-          <a:prstGeom prst="rect">
-            <a:avLst/>
-          </a:prstGeom>
-          <a:noFill/>
-          <a:ln/>
-        </p:spPr>
-        <p:txBody>
-          <a:bodyPr wrap="square" rtlCol="0" anchor="ctr"/>
-          <a:lstStyle/>
-          <a:p>
-            <a:pPr indent="0" marL="0">
-              <a:buNone/>
-            </a:pPr>
-            <a:r>
-              <a:rPr lang="en-US" sz="1300" dirty="0">
-                <a:solidFill>
-                  <a:srgbClr val="FAF8FF"/>
-                </a:solidFill>
-                <a:latin typeface="Calibri" pitchFamily="34" charset="0"/>
-                <a:ea typeface="Calibri" pitchFamily="34" charset="-122"/>
-                <a:cs typeface="Calibri" pitchFamily="34" charset="-120"/>
-              </a:rPr>
-              <a:t>Huge context / multimodal</a:t>
-            </a:r>
-            <a:endParaRPr lang="en-US" sz="1300" dirty="0"/>
-          </a:p>
-        </p:txBody>
-      </p:sp>
-      <p:sp>
-        <p:nvSpPr>
-          <p:cNvPr id="23" name="Shape 21"/>
-          <p:cNvSpPr/>
-          <p:nvPr/>
-        </p:nvSpPr>
-        <p:spPr>
-          <a:xfrm>
-            <a:off x="4663440" y="4764024"/>
-            <a:ext cx="201168" cy="201168"/>
-          </a:xfrm>
-          <a:prstGeom prst="ellipse">
-            <a:avLst/>
-          </a:prstGeom>
-          <a:solidFill>
-            <a:srgbClr val="6366F1"/>
-          </a:solidFill>
-          <a:ln w="12700">
-            <a:solidFill>
-              <a:srgbClr val="6366F1"/>
-            </a:solidFill>
-            <a:prstDash val="solid"/>
-          </a:ln>
-        </p:spPr>
-      </p:sp>
-      <p:sp>
-        <p:nvSpPr>
-          <p:cNvPr id="24" name="Text 22"/>
-          <p:cNvSpPr/>
-          <p:nvPr/>
-        </p:nvSpPr>
-        <p:spPr>
-          <a:xfrm>
-            <a:off x="4937760" y="4617720"/>
-            <a:ext cx="2743200" cy="502920"/>
-          </a:xfrm>
-          <a:prstGeom prst="rect">
-            <a:avLst/>
-          </a:prstGeom>
-          <a:noFill/>
-          <a:ln/>
-        </p:spPr>
-        <p:txBody>
-          <a:bodyPr wrap="square" rtlCol="0" anchor="ctr"/>
-          <a:lstStyle/>
-          <a:p>
-            <a:pPr indent="0" marL="0">
-              <a:buNone/>
-            </a:pPr>
-            <a:r>
-              <a:rPr lang="en-US" sz="1300" b="1" dirty="0">
-                <a:solidFill>
-                  <a:srgbClr val="FAF8FF"/>
-                </a:solidFill>
-                <a:latin typeface="Calibri" pitchFamily="34" charset="0"/>
-                <a:ea typeface="Calibri" pitchFamily="34" charset="-122"/>
-                <a:cs typeface="Calibri" pitchFamily="34" charset="-120"/>
-              </a:rPr>
-              <a:t>Cloud</a:t>
-            </a:r>
-            <a:endParaRPr lang="en-US" sz="1300" dirty="0"/>
-          </a:p>
-        </p:txBody>
-      </p:sp>
-      <p:sp>
-        <p:nvSpPr>
-          <p:cNvPr id="25" name="Text 23"/>
-          <p:cNvSpPr/>
-          <p:nvPr/>
-        </p:nvSpPr>
-        <p:spPr>
-          <a:xfrm>
-            <a:off x="731520" y="5120640"/>
-            <a:ext cx="3931920" cy="502920"/>
-          </a:xfrm>
-          <a:prstGeom prst="rect">
-            <a:avLst/>
-          </a:prstGeom>
-          <a:noFill/>
-          <a:ln/>
-        </p:spPr>
-        <p:txBody>
-          <a:bodyPr wrap="square" rtlCol="0" anchor="ctr"/>
-          <a:lstStyle/>
-          <a:p>
-            <a:pPr indent="0" marL="0">
-              <a:buNone/>
-            </a:pPr>
-            <a:r>
-              <a:rPr lang="en-US" sz="1300" dirty="0">
-                <a:solidFill>
-                  <a:srgbClr val="FAF8FF"/>
-                </a:solidFill>
-                <a:latin typeface="Calibri" pitchFamily="34" charset="0"/>
-                <a:ea typeface="Calibri" pitchFamily="34" charset="-122"/>
-                <a:cs typeface="Calibri" pitchFamily="34" charset="-120"/>
-              </a:rPr>
-              <a:t>Cloud capability, no data egress</a:t>
-            </a:r>
-            <a:endParaRPr lang="en-US" sz="1300" dirty="0"/>
-          </a:p>
-        </p:txBody>
-      </p:sp>
-      <p:sp>
-        <p:nvSpPr>
-          <p:cNvPr id="26" name="Shape 24"/>
-          <p:cNvSpPr/>
-          <p:nvPr/>
-        </p:nvSpPr>
-        <p:spPr>
-          <a:xfrm>
-            <a:off x="4663440" y="5266944"/>
-            <a:ext cx="201168" cy="201168"/>
-          </a:xfrm>
-          <a:prstGeom prst="ellipse">
-            <a:avLst/>
-          </a:prstGeom>
-          <a:solidFill>
-            <a:srgbClr val="FBBF24"/>
-          </a:solidFill>
-          <a:ln w="12700">
-            <a:solidFill>
-              <a:srgbClr val="FBBF24"/>
-            </a:solidFill>
-            <a:prstDash val="solid"/>
-          </a:ln>
-        </p:spPr>
-      </p:sp>
-      <p:sp>
-        <p:nvSpPr>
-          <p:cNvPr id="27" name="Text 25"/>
-          <p:cNvSpPr/>
-          <p:nvPr/>
-        </p:nvSpPr>
-        <p:spPr>
-          <a:xfrm>
-            <a:off x="4937760" y="5120640"/>
-            <a:ext cx="2743200" cy="502920"/>
-          </a:xfrm>
-          <a:prstGeom prst="rect">
-            <a:avLst/>
-          </a:prstGeom>
-          <a:noFill/>
-          <a:ln/>
-        </p:spPr>
-        <p:txBody>
-          <a:bodyPr wrap="square" rtlCol="0" anchor="ctr"/>
-          <a:lstStyle/>
-          <a:p>
-            <a:pPr indent="0" marL="0">
-              <a:buNone/>
-            </a:pPr>
-            <a:r>
-              <a:rPr lang="en-US" sz="1300" b="1" dirty="0">
-                <a:solidFill>
-                  <a:srgbClr val="FAF8FF"/>
-                </a:solidFill>
-                <a:latin typeface="Calibri" pitchFamily="34" charset="0"/>
-                <a:ea typeface="Calibri" pitchFamily="34" charset="-122"/>
-                <a:cs typeface="Calibri" pitchFamily="34" charset="-120"/>
-              </a:rPr>
-              <a:t>BYO Local (Foundry Local)</a:t>
-            </a:r>
-            <a:endParaRPr lang="en-US" sz="1300" dirty="0"/>
-          </a:p>
-        </p:txBody>
-      </p:sp>
-      <p:sp>
-        <p:nvSpPr>
-          <p:cNvPr id="28" name="Shape 26"/>
-          <p:cNvSpPr/>
-          <p:nvPr/>
-        </p:nvSpPr>
-        <p:spPr>
-          <a:xfrm>
-            <a:off x="548640" y="5623560"/>
-            <a:ext cx="7315200" cy="502920"/>
-          </a:xfrm>
-          <a:prstGeom prst="rect">
-            <a:avLst/>
-          </a:prstGeom>
-          <a:solidFill>
-            <a:srgbClr val="1E1B4B"/>
-          </a:solidFill>
-          <a:ln w="12700">
-            <a:solidFill>
-              <a:srgbClr val="1E1B4B"/>
-            </a:solidFill>
-            <a:prstDash val="solid"/>
-          </a:ln>
-        </p:spPr>
-      </p:sp>
-      <p:sp>
-        <p:nvSpPr>
-          <p:cNvPr id="29" name="Text 27"/>
-          <p:cNvSpPr/>
-          <p:nvPr/>
-        </p:nvSpPr>
-        <p:spPr>
-          <a:xfrm>
-            <a:off x="731520" y="5623560"/>
-            <a:ext cx="3931920" cy="502920"/>
-          </a:xfrm>
-          <a:prstGeom prst="rect">
-            <a:avLst/>
-          </a:prstGeom>
-          <a:noFill/>
-          <a:ln/>
-        </p:spPr>
-        <p:txBody>
-          <a:bodyPr wrap="square" rtlCol="0" anchor="ctr"/>
-          <a:lstStyle/>
-          <a:p>
-            <a:pPr indent="0" marL="0">
-              <a:buNone/>
-            </a:pPr>
-            <a:r>
-              <a:rPr lang="en-US" sz="1300" dirty="0">
-                <a:solidFill>
-                  <a:srgbClr val="FAF8FF"/>
-                </a:solidFill>
-                <a:latin typeface="Calibri" pitchFamily="34" charset="0"/>
-                <a:ea typeface="Calibri" pitchFamily="34" charset="-122"/>
-                <a:cs typeface="Calibri" pitchFamily="34" charset="-120"/>
-              </a:rPr>
-              <a:t>Cost matters at scale</a:t>
-            </a:r>
-            <a:endParaRPr lang="en-US" sz="1300" dirty="0"/>
-          </a:p>
-        </p:txBody>
-      </p:sp>
-      <p:sp>
-        <p:nvSpPr>
-          <p:cNvPr id="30" name="Shape 28"/>
-          <p:cNvSpPr/>
-          <p:nvPr/>
-        </p:nvSpPr>
-        <p:spPr>
-          <a:xfrm>
-            <a:off x="4663440" y="5769864"/>
-            <a:ext cx="201168" cy="201168"/>
-          </a:xfrm>
-          <a:prstGeom prst="ellipse">
-            <a:avLst/>
-          </a:prstGeom>
-          <a:solidFill>
-            <a:srgbClr val="FBBF24"/>
-          </a:solidFill>
-          <a:ln w="12700">
-            <a:solidFill>
-              <a:srgbClr val="FBBF24"/>
-            </a:solidFill>
-            <a:prstDash val="solid"/>
-          </a:ln>
-        </p:spPr>
-      </p:sp>
-      <p:sp>
-        <p:nvSpPr>
-          <p:cNvPr id="31" name="Text 29"/>
-          <p:cNvSpPr/>
-          <p:nvPr/>
-        </p:nvSpPr>
-        <p:spPr>
-          <a:xfrm>
-            <a:off x="4937760" y="5623560"/>
-            <a:ext cx="2743200" cy="502920"/>
-          </a:xfrm>
-          <a:prstGeom prst="rect">
-            <a:avLst/>
-          </a:prstGeom>
-          <a:noFill/>
-          <a:ln/>
-        </p:spPr>
-        <p:txBody>
-          <a:bodyPr wrap="square" rtlCol="0" anchor="ctr"/>
-          <a:lstStyle/>
-          <a:p>
-            <a:pPr indent="0" marL="0">
-              <a:buNone/>
-            </a:pPr>
-            <a:r>
-              <a:rPr lang="en-US" sz="1300" b="1" dirty="0">
-                <a:solidFill>
-                  <a:srgbClr val="FAF8FF"/>
-                </a:solidFill>
-                <a:latin typeface="Calibri" pitchFamily="34" charset="0"/>
-                <a:ea typeface="Calibri" pitchFamily="34" charset="-122"/>
-                <a:cs typeface="Calibri" pitchFamily="34" charset="-120"/>
-              </a:rPr>
-              <a:t>Local — pre-roll, post-roll</a:t>
-            </a:r>
-            <a:endParaRPr lang="en-US" sz="1300" dirty="0"/>
-          </a:p>
-        </p:txBody>
-      </p:sp>
-      <p:sp>
-        <p:nvSpPr>
-          <p:cNvPr id="32" name="Shape 30"/>
-          <p:cNvSpPr/>
-          <p:nvPr/>
-        </p:nvSpPr>
-        <p:spPr>
-          <a:xfrm>
-            <a:off x="8229600" y="2103120"/>
-            <a:ext cx="3504895" cy="4023360"/>
-          </a:xfrm>
-          <a:prstGeom prst="roundRect">
-            <a:avLst>
-              <a:gd name="adj" fmla="val 3131"/>
-            </a:avLst>
-          </a:prstGeom>
-          <a:solidFill>
-            <a:srgbClr val="FB7185"/>
-          </a:solidFill>
-          <a:ln w="12700">
-            <a:solidFill>
-              <a:srgbClr val="FB7185"/>
-            </a:solidFill>
-            <a:prstDash val="solid"/>
-          </a:ln>
-        </p:spPr>
-      </p:sp>
-      <p:sp>
-        <p:nvSpPr>
-          <p:cNvPr id="33" name="Text 31"/>
-          <p:cNvSpPr/>
-          <p:nvPr/>
-        </p:nvSpPr>
-        <p:spPr>
-          <a:xfrm>
-            <a:off x="8503920" y="2286000"/>
-            <a:ext cx="2956255" cy="320040"/>
-          </a:xfrm>
-          <a:prstGeom prst="rect">
-            <a:avLst/>
-          </a:prstGeom>
-          <a:noFill/>
-          <a:ln/>
-        </p:spPr>
-        <p:txBody>
-          <a:bodyPr wrap="square" rtlCol="0" anchor="ctr"/>
-          <a:lstStyle/>
-          <a:p>
-            <a:pPr indent="0" marL="0">
-              <a:buNone/>
-            </a:pPr>
-            <a:r>
-              <a:rPr lang="en-US" sz="1200" b="1" spc="400" kern="0" dirty="0">
-                <a:solidFill>
-                  <a:srgbClr val="0F0A2E"/>
-                </a:solidFill>
-                <a:latin typeface="Calibri" pitchFamily="34" charset="0"/>
-                <a:ea typeface="Calibri" pitchFamily="34" charset="-122"/>
-                <a:cs typeface="Calibri" pitchFamily="34" charset="-120"/>
-              </a:rPr>
-              <a:t>THANK YOU</a:t>
-            </a:r>
-            <a:endParaRPr lang="en-US" sz="1200" dirty="0"/>
-          </a:p>
-        </p:txBody>
-      </p:sp>
-      <p:sp>
-        <p:nvSpPr>
-          <p:cNvPr id="34" name="Text 32"/>
-          <p:cNvSpPr/>
-          <p:nvPr/>
-        </p:nvSpPr>
-        <p:spPr>
-          <a:xfrm>
-            <a:off x="8503920" y="2697480"/>
-            <a:ext cx="2956255" cy="502920"/>
-          </a:xfrm>
-          <a:prstGeom prst="rect">
-            <a:avLst/>
-          </a:prstGeom>
-          <a:noFill/>
-          <a:ln/>
-        </p:spPr>
-        <p:txBody>
-          <a:bodyPr wrap="square" rtlCol="0" anchor="ctr"/>
-          <a:lstStyle/>
-          <a:p>
-            <a:pPr indent="0" marL="0">
-              <a:buNone/>
-            </a:pPr>
-            <a:r>
-              <a:rPr lang="en-US" sz="2800" b="1" dirty="0">
-                <a:solidFill>
-                  <a:srgbClr val="0F0A2E"/>
                 </a:solidFill>
                 <a:latin typeface="Georgia" pitchFamily="34" charset="0"/>
                 <a:ea typeface="Georgia" pitchFamily="34" charset="-122"/>
                 <a:cs typeface="Georgia" pitchFamily="34" charset="-120"/>
               </a:rPr>
-              <a:t>Find me</a:t>
-            </a:r>
-            <a:endParaRPr lang="en-US" sz="2800" dirty="0"/>
-          </a:p>
-        </p:txBody>
-      </p:sp>
-      <p:sp>
-        <p:nvSpPr>
-          <p:cNvPr id="35" name="Text 33"/>
-          <p:cNvSpPr/>
-          <p:nvPr/>
-        </p:nvSpPr>
-        <p:spPr>
-          <a:xfrm>
-            <a:off x="8503920" y="3291840"/>
-            <a:ext cx="2956255" cy="2743200"/>
-          </a:xfrm>
-          <a:prstGeom prst="rect">
-            <a:avLst/>
-          </a:prstGeom>
-          <a:noFill/>
-          <a:ln/>
-        </p:spPr>
-        <p:txBody>
-          <a:bodyPr wrap="square" rtlCol="0" anchor="ctr"/>
-          <a:lstStyle/>
-          <a:p>
-            <a:pPr indent="0" marL="0">
-              <a:spcAft>
-                <a:spcPts val="200"/>
-              </a:spcAft>
-              <a:buNone/>
-            </a:pPr>
-            <a:r>
-              <a:rPr lang="en-US" sz="1800" b="1" dirty="0">
-                <a:solidFill>
-                  <a:srgbClr val="0F0A2E"/>
-                </a:solidFill>
-                <a:latin typeface="Calibri" pitchFamily="34" charset="0"/>
-                <a:ea typeface="Calibri" pitchFamily="34" charset="-122"/>
-                <a:cs typeface="Calibri" pitchFamily="34" charset="-120"/>
-              </a:rPr>
-              <a:t>@mattleibow
-</a:t>
-            </a:r>
-            <a:pPr indent="0" marL="0">
-              <a:spcAft>
-                <a:spcPts val="200"/>
-              </a:spcAft>
-              <a:buNone/>
-            </a:pPr>
-            <a:r>
-              <a:rPr lang="en-US" sz="1200" i="1" dirty="0">
-                <a:solidFill>
-                  <a:srgbClr val="0F0A2E"/>
-                </a:solidFill>
-                <a:latin typeface="Calibri" pitchFamily="34" charset="0"/>
-                <a:ea typeface="Calibri" pitchFamily="34" charset="-122"/>
-                <a:cs typeface="Calibri" pitchFamily="34" charset="-120"/>
-              </a:rPr>
-              <a:t>GitHub · X · LinkedIn
-</a:t>
-            </a:r>
-            <a:pPr indent="0" marL="0">
-              <a:spcAft>
-                <a:spcPts val="200"/>
-              </a:spcAft>
-              <a:buNone/>
-            </a:pPr>
-            <a:r>
-              <a:rPr lang="en-US" sz="1400" b="1" dirty="0">
-                <a:solidFill>
-                  <a:srgbClr val="0F0A2E"/>
-                </a:solidFill>
-                <a:latin typeface="Calibri" pitchFamily="34" charset="0"/>
-                <a:ea typeface="Calibri" pitchFamily="34" charset="-122"/>
-                <a:cs typeface="Calibri" pitchFamily="34" charset="-120"/>
-              </a:rPr>
-              <a:t>Slides + demo code
-</a:t>
-            </a:r>
-            <a:pPr indent="0" marL="0">
-              <a:spcAft>
-                <a:spcPts val="200"/>
-              </a:spcAft>
-              <a:buNone/>
-            </a:pPr>
-            <a:r>
-              <a:rPr lang="en-US" sz="1300" i="1" dirty="0">
-                <a:solidFill>
-                  <a:srgbClr val="0F0A2E"/>
-                </a:solidFill>
-                <a:latin typeface="Consolas" pitchFamily="34" charset="0"/>
-                <a:ea typeface="Consolas" pitchFamily="34" charset="-122"/>
-                <a:cs typeface="Consolas" pitchFamily="34" charset="-120"/>
-              </a:rPr>
-              <a:t>github.com/mattleibow
-</a:t>
-            </a:r>
-            <a:pPr indent="0" marL="0">
-              <a:spcAft>
-                <a:spcPts val="200"/>
-              </a:spcAft>
-              <a:buNone/>
-            </a:pPr>
-            <a:r>
-              <a:rPr lang="en-US" sz="1100" i="1" dirty="0">
-                <a:solidFill>
-                  <a:srgbClr val="0F0A2E"/>
-                </a:solidFill>
-                <a:latin typeface="Consolas" pitchFamily="34" charset="0"/>
-                <a:ea typeface="Consolas" pitchFamily="34" charset="-122"/>
-                <a:cs typeface="Consolas" pitchFamily="34" charset="-120"/>
-              </a:rPr>
-              <a:t>  /cptmsdug-local-cloud-</a:t>
-            </a:r>
-            <a:endParaRPr lang="en-US" sz="1800" dirty="0"/>
-          </a:p>
-          <a:p>
-            <a:pPr indent="0" marL="0">
-              <a:spcAft>
-                <a:spcPts val="200"/>
-              </a:spcAft>
-              <a:buNone/>
-            </a:pPr>
-            <a:r>
-              <a:rPr lang="en-US" sz="1100" i="1" dirty="0">
-                <a:solidFill>
-                  <a:srgbClr val="0F0A2E"/>
-                </a:solidFill>
-                <a:latin typeface="Consolas" pitchFamily="34" charset="0"/>
-                <a:ea typeface="Consolas" pitchFamily="34" charset="-122"/>
-                <a:cs typeface="Consolas" pitchFamily="34" charset="-120"/>
-              </a:rPr>
-              <a:t>  agent-framework</a:t>
-            </a:r>
-            <a:endParaRPr lang="en-US" sz="1800" dirty="0"/>
-          </a:p>
-        </p:txBody>
-      </p:sp>
-      <p:sp>
-        <p:nvSpPr>
-          <p:cNvPr id="36" name="Text 34"/>
-          <p:cNvSpPr/>
-          <p:nvPr/>
-        </p:nvSpPr>
-        <p:spPr>
-          <a:xfrm>
-            <a:off x="548640" y="6035040"/>
-            <a:ext cx="7315200" cy="457200"/>
-          </a:xfrm>
-          <a:prstGeom prst="rect">
-            <a:avLst/>
-          </a:prstGeom>
-          <a:noFill/>
-          <a:ln/>
-        </p:spPr>
-        <p:txBody>
-          <a:bodyPr wrap="square" rtlCol="0" anchor="ctr"/>
-          <a:lstStyle/>
-          <a:p>
-            <a:pPr indent="0" marL="0">
-              <a:buNone/>
-            </a:pPr>
-            <a:r>
-              <a:rPr lang="en-US" sz="2200" i="1" dirty="0">
+              <a:t>Thank you.</a:t>
+            </a:r>
+            <a:endParaRPr lang="en-US" sz="11000" dirty="0"/>
+          </a:p>
+        </p:txBody>
+      </p:sp>
+      <p:sp>
+        <p:nvSpPr>
+          <p:cNvPr id="7" name="Text 5"/>
+          <p:cNvSpPr/>
+          <p:nvPr/>
+        </p:nvSpPr>
+        <p:spPr>
+          <a:xfrm>
+            <a:off x="822960" y="3749040"/>
+            <a:ext cx="10972800" cy="822960"/>
+          </a:xfrm>
+          <a:prstGeom prst="rect">
+            <a:avLst/>
+          </a:prstGeom>
+          <a:noFill/>
+          <a:ln/>
+        </p:spPr>
+        <p:txBody>
+          <a:bodyPr wrap="square" rtlCol="0" anchor="ctr"/>
+          <a:lstStyle/>
+          <a:p>
+            <a:pPr indent="0" marL="0">
+              <a:buNone/>
+            </a:pPr>
+            <a:r>
+              <a:rPr lang="en-US" sz="5400" i="1" dirty="0">
                 <a:solidFill>
                   <a:srgbClr val="FB7185"/>
                 </a:solidFill>
@@ -10491,7 +12581,113 @@
               </a:rPr>
               <a:t>Questions?</a:t>
             </a:r>
-            <a:endParaRPr lang="en-US" sz="2200" dirty="0"/>
+            <a:endParaRPr lang="en-US" sz="5400" dirty="0"/>
+          </a:p>
+        </p:txBody>
+      </p:sp>
+      <p:sp>
+        <p:nvSpPr>
+          <p:cNvPr id="8" name="Text 6"/>
+          <p:cNvSpPr/>
+          <p:nvPr/>
+        </p:nvSpPr>
+        <p:spPr>
+          <a:xfrm>
+            <a:off x="822960" y="5577840"/>
+            <a:ext cx="10972800" cy="365760"/>
+          </a:xfrm>
+          <a:prstGeom prst="rect">
+            <a:avLst/>
+          </a:prstGeom>
+          <a:noFill/>
+          <a:ln/>
+        </p:spPr>
+        <p:txBody>
+          <a:bodyPr wrap="square" rtlCol="0" anchor="ctr"/>
+          <a:lstStyle/>
+          <a:p>
+            <a:pPr indent="0" marL="0">
+              <a:buNone/>
+            </a:pPr>
+            <a:r>
+              <a:rPr lang="en-US" sz="1600" b="1" dirty="0">
+                <a:solidFill>
+                  <a:srgbClr val="FAF8FF"/>
+                </a:solidFill>
+                <a:latin typeface="Calibri" pitchFamily="34" charset="0"/>
+                <a:ea typeface="Calibri" pitchFamily="34" charset="-122"/>
+                <a:cs typeface="Calibri" pitchFamily="34" charset="-120"/>
+              </a:rPr>
+              <a:t>Matthew Leibowitz</a:t>
+            </a:r>
+            <a:pPr indent="0" marL="0">
+              <a:buNone/>
+            </a:pPr>
+            <a:r>
+              <a:rPr lang="en-US" sz="1600" dirty="0">
+                <a:solidFill>
+                  <a:srgbClr val="CFCBED"/>
+                </a:solidFill>
+                <a:latin typeface="Calibri" pitchFamily="34" charset="0"/>
+                <a:ea typeface="Calibri" pitchFamily="34" charset="-122"/>
+                <a:cs typeface="Calibri" pitchFamily="34" charset="-120"/>
+              </a:rPr>
+              <a:t>   ·   Software Engineer @ Microsoft   ·   </a:t>
+            </a:r>
+            <a:pPr indent="0" marL="0">
+              <a:buNone/>
+            </a:pPr>
+            <a:r>
+              <a:rPr lang="en-US" sz="1600" b="1" dirty="0">
+                <a:solidFill>
+                  <a:srgbClr val="FBBF24"/>
+                </a:solidFill>
+                <a:latin typeface="Calibri" pitchFamily="34" charset="0"/>
+                <a:ea typeface="Calibri" pitchFamily="34" charset="-122"/>
+                <a:cs typeface="Calibri" pitchFamily="34" charset="-120"/>
+              </a:rPr>
+              <a:t>@mattleibow</a:t>
+            </a:r>
+            <a:endParaRPr lang="en-US" sz="1600" dirty="0"/>
+          </a:p>
+        </p:txBody>
+      </p:sp>
+      <p:sp>
+        <p:nvSpPr>
+          <p:cNvPr id="9" name="Text 7"/>
+          <p:cNvSpPr/>
+          <p:nvPr/>
+        </p:nvSpPr>
+        <p:spPr>
+          <a:xfrm>
+            <a:off x="822960" y="6035040"/>
+            <a:ext cx="10972800" cy="365760"/>
+          </a:xfrm>
+          <a:prstGeom prst="rect">
+            <a:avLst/>
+          </a:prstGeom>
+          <a:noFill/>
+          <a:ln/>
+        </p:spPr>
+        <p:txBody>
+          <a:bodyPr wrap="square" rtlCol="0" anchor="ctr"/>
+          <a:lstStyle/>
+          <a:p>
+            <a:pPr indent="0" marL="0">
+              <a:buNone/>
+            </a:pPr>
+            <a:r>
+              <a:rPr lang="en-US" sz="1300" i="1" dirty="0">
+                <a:solidFill>
+                  <a:srgbClr val="FB7185"/>
+                </a:solidFill>
+                <a:latin typeface="Consolas" pitchFamily="34" charset="0"/>
+                <a:ea typeface="Consolas" pitchFamily="34" charset="-122"/>
+                <a:cs typeface="Consolas" pitchFamily="34" charset="-120"/>
+              </a:rPr>
+              <a:t>github.com/mattleibow/cptmsdug-local-cloud-agent-framework</a:t>
+            </a:r>
+            <a:endParaRPr lang="en-US" sz="1300" dirty="0"/>
           </a:p>
         </p:txBody>
       </p:sp>
@@ -11314,7 +13510,7 @@
                 <a:ea typeface="Calibri" pitchFamily="34" charset="-122"/>
                 <a:cs typeface="Calibri" pitchFamily="34" charset="-120"/>
               </a:rPr>
-              <a:t>2 / 14</a:t>
+              <a:t>2 / 16</a:t>
             </a:r>
             <a:endParaRPr lang="en-US" sz="1000" dirty="0"/>
           </a:p>
@@ -12246,7 +14442,7 @@
                 <a:ea typeface="Calibri" pitchFamily="34" charset="-122"/>
                 <a:cs typeface="Calibri" pitchFamily="34" charset="-120"/>
               </a:rPr>
-              <a:t>3 / 14</a:t>
+              <a:t>3 / 16</a:t>
             </a:r>
             <a:endParaRPr lang="en-US" sz="1000" dirty="0"/>
           </a:p>
@@ -13307,7 +15503,7 @@
                 <a:ea typeface="Calibri" pitchFamily="34" charset="-122"/>
                 <a:cs typeface="Calibri" pitchFamily="34" charset="-120"/>
               </a:rPr>
-              <a:t>4 / 14</a:t>
+              <a:t>4 / 16</a:t>
             </a:r>
             <a:endParaRPr lang="en-US" sz="1000" dirty="0"/>
           </a:p>
@@ -16326,7 +18522,7 @@
                 <a:ea typeface="Calibri" pitchFamily="34" charset="-122"/>
                 <a:cs typeface="Calibri" pitchFamily="34" charset="-120"/>
               </a:rPr>
-              <a:t>6 / 14</a:t>
+              <a:t>6 / 16</a:t>
             </a:r>
             <a:endParaRPr lang="en-US" sz="1000" dirty="0"/>
           </a:p>
@@ -18820,7 +21016,7 @@
                 <a:ea typeface="Calibri" pitchFamily="34" charset="-122"/>
                 <a:cs typeface="Calibri" pitchFamily="34" charset="-120"/>
               </a:rPr>
-              <a:t>8 / 14</a:t>
+              <a:t>8 / 16</a:t>
             </a:r>
             <a:endParaRPr lang="en-US" sz="1000" dirty="0"/>
           </a:p>

--- a/slides/Unifying-Local-Cloud-AI.pptx
+++ b/slides/Unifying-Local-Cloud-AI.pptx
@@ -6455,7 +6455,7 @@
         <p:spPr>
           <a:xfrm>
             <a:off x="0" y="0"/>
-            <a:ext cx="365760" cy="2286000"/>
+            <a:ext cx="365760" cy="3429000"/>
           </a:xfrm>
           <a:prstGeom prst="rect">
             <a:avLst/>
@@ -6479,33 +6479,8 @@
         </p:nvSpPr>
         <p:spPr>
           <a:xfrm>
-            <a:off x="0" y="2286000"/>
-            <a:ext cx="365760" cy="2286000"/>
-          </a:xfrm>
-          <a:prstGeom prst="rect">
-            <a:avLst/>
-          </a:prstGeom>
-          <a:solidFill>
-            <a:srgbClr val="FBBF24"/>
-          </a:solidFill>
-          <a:ln w="12700">
-            <a:solidFill>
-              <a:srgbClr val="FBBF24"/>
-            </a:solidFill>
-            <a:prstDash val="solid"/>
-          </a:ln>
-        </p:spPr>
-      </p:sp>
-      <p:sp>
-        <p:nvSpPr>
-          <p:cNvPr id="4" name="Shape 2"/>
-          <p:cNvSpPr/>
-          <p:nvPr/>
-        </p:nvSpPr>
-        <p:spPr>
-          <a:xfrm>
-            <a:off x="0" y="4572000"/>
-            <a:ext cx="365760" cy="2286000"/>
+            <a:off x="0" y="3429000"/>
+            <a:ext cx="365760" cy="3429000"/>
           </a:xfrm>
           <a:prstGeom prst="rect">
             <a:avLst/>
@@ -6523,69 +6498,69 @@
       </p:sp>
       <p:sp>
         <p:nvSpPr>
+          <p:cNvPr id="4" name="Text 2"/>
+          <p:cNvSpPr/>
+          <p:nvPr/>
+        </p:nvSpPr>
+        <p:spPr>
+          <a:xfrm>
+            <a:off x="822960" y="502920"/>
+            <a:ext cx="5486400" cy="411480"/>
+          </a:xfrm>
+          <a:prstGeom prst="rect">
+            <a:avLst/>
+          </a:prstGeom>
+          <a:noFill/>
+          <a:ln/>
+        </p:spPr>
+        <p:txBody>
+          <a:bodyPr wrap="square" rtlCol="0" anchor="ctr"/>
+          <a:lstStyle/>
+          <a:p>
+            <a:pPr indent="0" marL="0">
+              <a:buNone/>
+            </a:pPr>
+            <a:r>
+              <a:rPr lang="en-US" sz="1800" b="1" spc="800" kern="0" dirty="0">
+                <a:solidFill>
+                  <a:srgbClr val="CFCBED"/>
+                </a:solidFill>
+                <a:latin typeface="Calibri" pitchFamily="34" charset="0"/>
+                <a:ea typeface="Calibri" pitchFamily="34" charset="-122"/>
+                <a:cs typeface="Calibri" pitchFamily="34" charset="-120"/>
+              </a:rPr>
+              <a:t>DEMO  04</a:t>
+            </a:r>
+            <a:endParaRPr lang="en-US" sz="1800" dirty="0"/>
+          </a:p>
+        </p:txBody>
+      </p:sp>
+      <p:sp>
+        <p:nvSpPr>
           <p:cNvPr id="5" name="Text 3"/>
           <p:cNvSpPr/>
           <p:nvPr/>
         </p:nvSpPr>
         <p:spPr>
           <a:xfrm>
-            <a:off x="822960" y="640080"/>
-            <a:ext cx="5486400" cy="457200"/>
-          </a:xfrm>
-          <a:prstGeom prst="rect">
-            <a:avLst/>
-          </a:prstGeom>
-          <a:noFill/>
-          <a:ln/>
-        </p:spPr>
-        <p:txBody>
-          <a:bodyPr wrap="square" rtlCol="0" anchor="ctr"/>
-          <a:lstStyle/>
-          <a:p>
-            <a:pPr indent="0" marL="0">
-              <a:buNone/>
-            </a:pPr>
-            <a:r>
-              <a:rPr lang="en-US" sz="1800" b="1" spc="800" kern="0" dirty="0">
-                <a:solidFill>
-                  <a:srgbClr val="CFCBED"/>
-                </a:solidFill>
-                <a:latin typeface="Calibri" pitchFamily="34" charset="0"/>
-                <a:ea typeface="Calibri" pitchFamily="34" charset="-122"/>
-                <a:cs typeface="Calibri" pitchFamily="34" charset="-120"/>
-              </a:rPr>
-              <a:t>DEMO  04</a:t>
-            </a:r>
-            <a:endParaRPr lang="en-US" sz="1800" dirty="0"/>
-          </a:p>
-        </p:txBody>
-      </p:sp>
-      <p:sp>
-        <p:nvSpPr>
-          <p:cNvPr id="6" name="Text 4"/>
-          <p:cNvSpPr/>
-          <p:nvPr/>
-        </p:nvSpPr>
-        <p:spPr>
-          <a:xfrm>
-            <a:off x="822960" y="1143000"/>
-            <a:ext cx="10972800" cy="914400"/>
-          </a:xfrm>
-          <a:prstGeom prst="rect">
-            <a:avLst/>
-          </a:prstGeom>
-          <a:noFill/>
-          <a:ln/>
-        </p:spPr>
-        <p:txBody>
-          <a:bodyPr wrap="square" rtlCol="0" anchor="ctr"/>
-          <a:lstStyle/>
-          <a:p>
-            <a:pPr indent="0" marL="0">
-              <a:buNone/>
-            </a:pPr>
-            <a:r>
-              <a:rPr lang="en-US" sz="5200" b="1" dirty="0">
+            <a:off x="822960" y="960120"/>
+            <a:ext cx="10972800" cy="868680"/>
+          </a:xfrm>
+          <a:prstGeom prst="rect">
+            <a:avLst/>
+          </a:prstGeom>
+          <a:noFill/>
+          <a:ln/>
+        </p:spPr>
+        <p:txBody>
+          <a:bodyPr wrap="square" rtlCol="0" anchor="ctr"/>
+          <a:lstStyle/>
+          <a:p>
+            <a:pPr indent="0" marL="0">
+              <a:buNone/>
+            </a:pPr>
+            <a:r>
+              <a:rPr lang="en-US" sz="4800" b="1" dirty="0">
                 <a:solidFill>
                   <a:srgbClr val="FAF8FF"/>
                 </a:solidFill>
@@ -6593,21 +6568,21 @@
                 <a:ea typeface="Georgia" pitchFamily="34" charset="-122"/>
                 <a:cs typeface="Georgia" pitchFamily="34" charset="-120"/>
               </a:rPr>
-              <a:t>Mixing It All</a:t>
-            </a:r>
-            <a:endParaRPr lang="en-US" sz="5200" dirty="0"/>
-          </a:p>
-        </p:txBody>
-      </p:sp>
-      <p:sp>
-        <p:nvSpPr>
-          <p:cNvPr id="7" name="Text 5"/>
-          <p:cNvSpPr/>
-          <p:nvPr/>
-        </p:nvSpPr>
-        <p:spPr>
-          <a:xfrm>
-            <a:off x="822960" y="2148840"/>
+              <a:t>A Workflow of Agents</a:t>
+            </a:r>
+            <a:endParaRPr lang="en-US" sz="4800" dirty="0"/>
+          </a:p>
+        </p:txBody>
+      </p:sp>
+      <p:sp>
+        <p:nvSpPr>
+          <p:cNvPr id="6" name="Text 4"/>
+          <p:cNvSpPr/>
+          <p:nvPr/>
+        </p:nvSpPr>
+        <p:spPr>
+          <a:xfrm>
+            <a:off x="822960" y="1874520"/>
             <a:ext cx="10972800" cy="411480"/>
           </a:xfrm>
           <a:prstGeom prst="rect">
@@ -6624,7 +6599,7 @@
               <a:buNone/>
             </a:pPr>
             <a:r>
-              <a:rPr lang="en-US" sz="1700" i="1" dirty="0">
+              <a:rPr lang="en-US" sz="1600" i="1" dirty="0">
                 <a:solidFill>
                   <a:srgbClr val="CFCBED"/>
                 </a:solidFill>
@@ -6632,26 +6607,546 @@
                 <a:ea typeface="Calibri" pitchFamily="34" charset="-122"/>
                 <a:cs typeface="Calibri" pitchFamily="34" charset="-120"/>
               </a:rPr>
-              <a:t>Three different chatClient brains.  Same agent code path.</a:t>
-            </a:r>
-            <a:endParaRPr lang="en-US" sz="1700" dirty="0"/>
-          </a:p>
-        </p:txBody>
-      </p:sp>
-      <p:sp>
-        <p:nvSpPr>
-          <p:cNvPr id="8" name="Shape 6"/>
-          <p:cNvSpPr/>
-          <p:nvPr/>
-        </p:nvSpPr>
-        <p:spPr>
-          <a:xfrm>
-            <a:off x="822960" y="2697480"/>
-            <a:ext cx="10911535" cy="3794760"/>
+              <a:t>MAF workflows compose agents — local privacy on the bookends, cloud reasoning in the middle.</a:t>
+            </a:r>
+            <a:endParaRPr lang="en-US" sz="1600" dirty="0"/>
+          </a:p>
+        </p:txBody>
+      </p:sp>
+      <p:sp>
+        <p:nvSpPr>
+          <p:cNvPr id="7" name="Shape 5"/>
+          <p:cNvSpPr/>
+          <p:nvPr/>
+        </p:nvSpPr>
+        <p:spPr>
+          <a:xfrm>
+            <a:off x="822960" y="2468880"/>
+            <a:ext cx="2377440" cy="548640"/>
           </a:xfrm>
           <a:prstGeom prst="roundRect">
             <a:avLst>
-              <a:gd name="adj" fmla="val 2410"/>
+              <a:gd name="adj" fmla="val 50000"/>
+            </a:avLst>
+          </a:prstGeom>
+          <a:solidFill>
+            <a:srgbClr val="1E1B4B"/>
+          </a:solidFill>
+          <a:ln w="25400">
+            <a:solidFill>
+              <a:srgbClr val="CFCBED"/>
+            </a:solidFill>
+            <a:prstDash val="solid"/>
+          </a:ln>
+        </p:spPr>
+      </p:sp>
+      <p:sp>
+        <p:nvSpPr>
+          <p:cNvPr id="8" name="Text 6"/>
+          <p:cNvSpPr/>
+          <p:nvPr/>
+        </p:nvSpPr>
+        <p:spPr>
+          <a:xfrm>
+            <a:off x="914400" y="2468880"/>
+            <a:ext cx="2194560" cy="548640"/>
+          </a:xfrm>
+          <a:prstGeom prst="rect">
+            <a:avLst/>
+          </a:prstGeom>
+          <a:noFill/>
+          <a:ln/>
+        </p:spPr>
+        <p:txBody>
+          <a:bodyPr wrap="square" rtlCol="0" anchor="ctr"/>
+          <a:lstStyle/>
+          <a:p>
+            <a:pPr algn="ctr" indent="0" marL="0">
+              <a:buNone/>
+            </a:pPr>
+            <a:r>
+              <a:rPr lang="en-US" sz="1600" dirty="0">
+                <a:solidFill>
+                  <a:srgbClr val="000000"/>
+                </a:solidFill>
+                <a:latin typeface="Calibri" pitchFamily="34" charset="0"/>
+                <a:ea typeface="Calibri" pitchFamily="34" charset="-122"/>
+                <a:cs typeface="Calibri" pitchFamily="34" charset="-120"/>
+              </a:rPr>
+              <a:t>👤  </a:t>
+            </a:r>
+            <a:pPr algn="ctr" indent="0" marL="0">
+              <a:buNone/>
+            </a:pPr>
+            <a:r>
+              <a:rPr lang="en-US" sz="1400" b="1" dirty="0">
+                <a:solidFill>
+                  <a:srgbClr val="FAF8FF"/>
+                </a:solidFill>
+                <a:latin typeface="Calibri" pitchFamily="34" charset="0"/>
+                <a:ea typeface="Calibri" pitchFamily="34" charset="-122"/>
+                <a:cs typeface="Calibri" pitchFamily="34" charset="-120"/>
+              </a:rPr>
+              <a:t>User</a:t>
+            </a:r>
+            <a:pPr algn="ctr" indent="0" marL="0">
+              <a:buNone/>
+            </a:pPr>
+            <a:r>
+              <a:rPr lang="en-US" sz="1100" i="1" dirty="0">
+                <a:solidFill>
+                  <a:srgbClr val="CFCBED"/>
+                </a:solidFill>
+                <a:latin typeface="Calibri" pitchFamily="34" charset="0"/>
+                <a:ea typeface="Calibri" pitchFamily="34" charset="-122"/>
+                <a:cs typeface="Calibri" pitchFamily="34" charset="-120"/>
+              </a:rPr>
+              <a:t>   input</a:t>
+            </a:r>
+            <a:endParaRPr lang="en-US" sz="1600" dirty="0"/>
+          </a:p>
+        </p:txBody>
+      </p:sp>
+      <p:sp>
+        <p:nvSpPr>
+          <p:cNvPr id="9" name="Shape 7"/>
+          <p:cNvSpPr/>
+          <p:nvPr/>
+        </p:nvSpPr>
+        <p:spPr>
+          <a:xfrm>
+            <a:off x="3246120" y="2743200"/>
+            <a:ext cx="253898" cy="0"/>
+          </a:xfrm>
+          <a:prstGeom prst="line">
+            <a:avLst/>
+          </a:prstGeom>
+          <a:noFill/>
+          <a:ln w="25400">
+            <a:solidFill>
+              <a:srgbClr val="FB7185"/>
+            </a:solidFill>
+            <a:prstDash val="solid"/>
+          </a:ln>
+        </p:spPr>
+      </p:sp>
+      <p:sp>
+        <p:nvSpPr>
+          <p:cNvPr id="10" name="Shape 8"/>
+          <p:cNvSpPr/>
+          <p:nvPr/>
+        </p:nvSpPr>
+        <p:spPr>
+          <a:xfrm rot="5400000">
+            <a:off x="3362858" y="2670048"/>
+            <a:ext cx="164592" cy="146304"/>
+          </a:xfrm>
+          <a:prstGeom prst="rightTriangle">
+            <a:avLst/>
+          </a:prstGeom>
+          <a:solidFill>
+            <a:srgbClr val="FB7185"/>
+          </a:solidFill>
+          <a:ln w="12700">
+            <a:solidFill>
+              <a:srgbClr val="FB7185"/>
+            </a:solidFill>
+            <a:prstDash val="solid"/>
+          </a:ln>
+        </p:spPr>
+      </p:sp>
+      <p:sp>
+        <p:nvSpPr>
+          <p:cNvPr id="11" name="Shape 9"/>
+          <p:cNvSpPr/>
+          <p:nvPr/>
+        </p:nvSpPr>
+        <p:spPr>
+          <a:xfrm>
+            <a:off x="3545738" y="2468880"/>
+            <a:ext cx="2377440" cy="548640"/>
+          </a:xfrm>
+          <a:prstGeom prst="roundRect">
+            <a:avLst>
+              <a:gd name="adj" fmla="val 50000"/>
+            </a:avLst>
+          </a:prstGeom>
+          <a:solidFill>
+            <a:srgbClr val="1E1B4B"/>
+          </a:solidFill>
+          <a:ln w="25400">
+            <a:solidFill>
+              <a:srgbClr val="FB7185"/>
+            </a:solidFill>
+            <a:prstDash val="solid"/>
+          </a:ln>
+        </p:spPr>
+      </p:sp>
+      <p:sp>
+        <p:nvSpPr>
+          <p:cNvPr id="12" name="Text 10"/>
+          <p:cNvSpPr/>
+          <p:nvPr/>
+        </p:nvSpPr>
+        <p:spPr>
+          <a:xfrm>
+            <a:off x="3637178" y="2468880"/>
+            <a:ext cx="2194560" cy="548640"/>
+          </a:xfrm>
+          <a:prstGeom prst="rect">
+            <a:avLst/>
+          </a:prstGeom>
+          <a:noFill/>
+          <a:ln/>
+        </p:spPr>
+        <p:txBody>
+          <a:bodyPr wrap="square" rtlCol="0" anchor="ctr"/>
+          <a:lstStyle/>
+          <a:p>
+            <a:pPr algn="ctr" indent="0" marL="0">
+              <a:buNone/>
+            </a:pPr>
+            <a:r>
+              <a:rPr lang="en-US" sz="1600" dirty="0">
+                <a:solidFill>
+                  <a:srgbClr val="000000"/>
+                </a:solidFill>
+                <a:latin typeface="Calibri" pitchFamily="34" charset="0"/>
+                <a:ea typeface="Calibri" pitchFamily="34" charset="-122"/>
+                <a:cs typeface="Calibri" pitchFamily="34" charset="-120"/>
+              </a:rPr>
+              <a:t>📱  </a:t>
+            </a:r>
+            <a:pPr algn="ctr" indent="0" marL="0">
+              <a:buNone/>
+            </a:pPr>
+            <a:r>
+              <a:rPr lang="en-US" sz="1400" b="1" dirty="0">
+                <a:solidFill>
+                  <a:srgbClr val="FAF8FF"/>
+                </a:solidFill>
+                <a:latin typeface="Calibri" pitchFamily="34" charset="0"/>
+                <a:ea typeface="Calibri" pitchFamily="34" charset="-122"/>
+                <a:cs typeface="Calibri" pitchFamily="34" charset="-120"/>
+              </a:rPr>
+              <a:t>triage</a:t>
+            </a:r>
+            <a:pPr algn="ctr" indent="0" marL="0">
+              <a:buNone/>
+            </a:pPr>
+            <a:r>
+              <a:rPr lang="en-US" sz="1100" i="1" dirty="0">
+                <a:solidFill>
+                  <a:srgbClr val="CFCBED"/>
+                </a:solidFill>
+                <a:latin typeface="Calibri" pitchFamily="34" charset="0"/>
+                <a:ea typeface="Calibri" pitchFamily="34" charset="-122"/>
+                <a:cs typeface="Calibri" pitchFamily="34" charset="-120"/>
+              </a:rPr>
+              <a:t>   Apple Intelligence</a:t>
+            </a:r>
+            <a:endParaRPr lang="en-US" sz="1600" dirty="0"/>
+          </a:p>
+        </p:txBody>
+      </p:sp>
+      <p:sp>
+        <p:nvSpPr>
+          <p:cNvPr id="13" name="Shape 11"/>
+          <p:cNvSpPr/>
+          <p:nvPr/>
+        </p:nvSpPr>
+        <p:spPr>
+          <a:xfrm>
+            <a:off x="5968898" y="2743200"/>
+            <a:ext cx="253898" cy="0"/>
+          </a:xfrm>
+          <a:prstGeom prst="line">
+            <a:avLst/>
+          </a:prstGeom>
+          <a:noFill/>
+          <a:ln w="25400">
+            <a:solidFill>
+              <a:srgbClr val="FB7185"/>
+            </a:solidFill>
+            <a:prstDash val="solid"/>
+          </a:ln>
+        </p:spPr>
+      </p:sp>
+      <p:sp>
+        <p:nvSpPr>
+          <p:cNvPr id="14" name="Shape 12"/>
+          <p:cNvSpPr/>
+          <p:nvPr/>
+        </p:nvSpPr>
+        <p:spPr>
+          <a:xfrm rot="5400000">
+            <a:off x="6085637" y="2670048"/>
+            <a:ext cx="164592" cy="146304"/>
+          </a:xfrm>
+          <a:prstGeom prst="rightTriangle">
+            <a:avLst/>
+          </a:prstGeom>
+          <a:solidFill>
+            <a:srgbClr val="FB7185"/>
+          </a:solidFill>
+          <a:ln w="12700">
+            <a:solidFill>
+              <a:srgbClr val="FB7185"/>
+            </a:solidFill>
+            <a:prstDash val="solid"/>
+          </a:ln>
+        </p:spPr>
+      </p:sp>
+      <p:sp>
+        <p:nvSpPr>
+          <p:cNvPr id="15" name="Shape 13"/>
+          <p:cNvSpPr/>
+          <p:nvPr/>
+        </p:nvSpPr>
+        <p:spPr>
+          <a:xfrm>
+            <a:off x="6268517" y="2468880"/>
+            <a:ext cx="2377440" cy="548640"/>
+          </a:xfrm>
+          <a:prstGeom prst="roundRect">
+            <a:avLst>
+              <a:gd name="adj" fmla="val 50000"/>
+            </a:avLst>
+          </a:prstGeom>
+          <a:solidFill>
+            <a:srgbClr val="1E1B4B"/>
+          </a:solidFill>
+          <a:ln w="25400">
+            <a:solidFill>
+              <a:srgbClr val="6366F1"/>
+            </a:solidFill>
+            <a:prstDash val="solid"/>
+          </a:ln>
+        </p:spPr>
+      </p:sp>
+      <p:sp>
+        <p:nvSpPr>
+          <p:cNvPr id="16" name="Text 14"/>
+          <p:cNvSpPr/>
+          <p:nvPr/>
+        </p:nvSpPr>
+        <p:spPr>
+          <a:xfrm>
+            <a:off x="6359957" y="2468880"/>
+            <a:ext cx="2194560" cy="548640"/>
+          </a:xfrm>
+          <a:prstGeom prst="rect">
+            <a:avLst/>
+          </a:prstGeom>
+          <a:noFill/>
+          <a:ln/>
+        </p:spPr>
+        <p:txBody>
+          <a:bodyPr wrap="square" rtlCol="0" anchor="ctr"/>
+          <a:lstStyle/>
+          <a:p>
+            <a:pPr algn="ctr" indent="0" marL="0">
+              <a:buNone/>
+            </a:pPr>
+            <a:r>
+              <a:rPr lang="en-US" sz="1600" dirty="0">
+                <a:solidFill>
+                  <a:srgbClr val="000000"/>
+                </a:solidFill>
+                <a:latin typeface="Calibri" pitchFamily="34" charset="0"/>
+                <a:ea typeface="Calibri" pitchFamily="34" charset="-122"/>
+                <a:cs typeface="Calibri" pitchFamily="34" charset="-120"/>
+              </a:rPr>
+              <a:t>☁️  </a:t>
+            </a:r>
+            <a:pPr algn="ctr" indent="0" marL="0">
+              <a:buNone/>
+            </a:pPr>
+            <a:r>
+              <a:rPr lang="en-US" sz="1400" b="1" dirty="0">
+                <a:solidFill>
+                  <a:srgbClr val="FAF8FF"/>
+                </a:solidFill>
+                <a:latin typeface="Calibri" pitchFamily="34" charset="0"/>
+                <a:ea typeface="Calibri" pitchFamily="34" charset="-122"/>
+                <a:cs typeface="Calibri" pitchFamily="34" charset="-120"/>
+              </a:rPr>
+              <a:t>expert</a:t>
+            </a:r>
+            <a:pPr algn="ctr" indent="0" marL="0">
+              <a:buNone/>
+            </a:pPr>
+            <a:r>
+              <a:rPr lang="en-US" sz="1100" i="1" dirty="0">
+                <a:solidFill>
+                  <a:srgbClr val="CFCBED"/>
+                </a:solidFill>
+                <a:latin typeface="Calibri" pitchFamily="34" charset="0"/>
+                <a:ea typeface="Calibri" pitchFamily="34" charset="-122"/>
+                <a:cs typeface="Calibri" pitchFamily="34" charset="-120"/>
+              </a:rPr>
+              <a:t>   Azure OpenAI</a:t>
+            </a:r>
+            <a:endParaRPr lang="en-US" sz="1600" dirty="0"/>
+          </a:p>
+        </p:txBody>
+      </p:sp>
+      <p:sp>
+        <p:nvSpPr>
+          <p:cNvPr id="17" name="Shape 15"/>
+          <p:cNvSpPr/>
+          <p:nvPr/>
+        </p:nvSpPr>
+        <p:spPr>
+          <a:xfrm>
+            <a:off x="8691677" y="2743200"/>
+            <a:ext cx="253898" cy="0"/>
+          </a:xfrm>
+          <a:prstGeom prst="line">
+            <a:avLst/>
+          </a:prstGeom>
+          <a:noFill/>
+          <a:ln w="25400">
+            <a:solidFill>
+              <a:srgbClr val="FB7185"/>
+            </a:solidFill>
+            <a:prstDash val="solid"/>
+          </a:ln>
+        </p:spPr>
+      </p:sp>
+      <p:sp>
+        <p:nvSpPr>
+          <p:cNvPr id="18" name="Shape 16"/>
+          <p:cNvSpPr/>
+          <p:nvPr/>
+        </p:nvSpPr>
+        <p:spPr>
+          <a:xfrm rot="5400000">
+            <a:off x="8808415" y="2670048"/>
+            <a:ext cx="164592" cy="146304"/>
+          </a:xfrm>
+          <a:prstGeom prst="rightTriangle">
+            <a:avLst/>
+          </a:prstGeom>
+          <a:solidFill>
+            <a:srgbClr val="FB7185"/>
+          </a:solidFill>
+          <a:ln w="12700">
+            <a:solidFill>
+              <a:srgbClr val="FB7185"/>
+            </a:solidFill>
+            <a:prstDash val="solid"/>
+          </a:ln>
+        </p:spPr>
+      </p:sp>
+      <p:sp>
+        <p:nvSpPr>
+          <p:cNvPr id="19" name="Shape 17"/>
+          <p:cNvSpPr/>
+          <p:nvPr/>
+        </p:nvSpPr>
+        <p:spPr>
+          <a:xfrm>
+            <a:off x="8991295" y="2468880"/>
+            <a:ext cx="2377440" cy="548640"/>
+          </a:xfrm>
+          <a:prstGeom prst="roundRect">
+            <a:avLst>
+              <a:gd name="adj" fmla="val 50000"/>
+            </a:avLst>
+          </a:prstGeom>
+          <a:solidFill>
+            <a:srgbClr val="1E1B4B"/>
+          </a:solidFill>
+          <a:ln w="25400">
+            <a:solidFill>
+              <a:srgbClr val="CFCBED"/>
+            </a:solidFill>
+            <a:prstDash val="solid"/>
+          </a:ln>
+        </p:spPr>
+      </p:sp>
+      <p:sp>
+        <p:nvSpPr>
+          <p:cNvPr id="20" name="Text 18"/>
+          <p:cNvSpPr/>
+          <p:nvPr/>
+        </p:nvSpPr>
+        <p:spPr>
+          <a:xfrm>
+            <a:off x="9082735" y="2468880"/>
+            <a:ext cx="2194560" cy="548640"/>
+          </a:xfrm>
+          <a:prstGeom prst="rect">
+            <a:avLst/>
+          </a:prstGeom>
+          <a:noFill/>
+          <a:ln/>
+        </p:spPr>
+        <p:txBody>
+          <a:bodyPr wrap="square" rtlCol="0" anchor="ctr"/>
+          <a:lstStyle/>
+          <a:p>
+            <a:pPr algn="ctr" indent="0" marL="0">
+              <a:buNone/>
+            </a:pPr>
+            <a:r>
+              <a:rPr lang="en-US" sz="1600" dirty="0">
+                <a:solidFill>
+                  <a:srgbClr val="000000"/>
+                </a:solidFill>
+                <a:latin typeface="Calibri" pitchFamily="34" charset="0"/>
+                <a:ea typeface="Calibri" pitchFamily="34" charset="-122"/>
+                <a:cs typeface="Calibri" pitchFamily="34" charset="-120"/>
+              </a:rPr>
+              <a:t>👤  </a:t>
+            </a:r>
+            <a:pPr algn="ctr" indent="0" marL="0">
+              <a:buNone/>
+            </a:pPr>
+            <a:r>
+              <a:rPr lang="en-US" sz="1400" b="1" dirty="0">
+                <a:solidFill>
+                  <a:srgbClr val="FAF8FF"/>
+                </a:solidFill>
+                <a:latin typeface="Calibri" pitchFamily="34" charset="0"/>
+                <a:ea typeface="Calibri" pitchFamily="34" charset="-122"/>
+                <a:cs typeface="Calibri" pitchFamily="34" charset="-120"/>
+              </a:rPr>
+              <a:t>User</a:t>
+            </a:r>
+            <a:pPr algn="ctr" indent="0" marL="0">
+              <a:buNone/>
+            </a:pPr>
+            <a:r>
+              <a:rPr lang="en-US" sz="1100" i="1" dirty="0">
+                <a:solidFill>
+                  <a:srgbClr val="CFCBED"/>
+                </a:solidFill>
+                <a:latin typeface="Calibri" pitchFamily="34" charset="0"/>
+                <a:ea typeface="Calibri" pitchFamily="34" charset="-122"/>
+                <a:cs typeface="Calibri" pitchFamily="34" charset="-120"/>
+              </a:rPr>
+              <a:t>   answer</a:t>
+            </a:r>
+            <a:endParaRPr lang="en-US" sz="1600" dirty="0"/>
+          </a:p>
+        </p:txBody>
+      </p:sp>
+      <p:sp>
+        <p:nvSpPr>
+          <p:cNvPr id="21" name="Shape 19"/>
+          <p:cNvSpPr/>
+          <p:nvPr/>
+        </p:nvSpPr>
+        <p:spPr>
+          <a:xfrm>
+            <a:off x="822960" y="3291840"/>
+            <a:ext cx="10911535" cy="3200400"/>
+          </a:xfrm>
+          <a:prstGeom prst="roundRect">
+            <a:avLst>
+              <a:gd name="adj" fmla="val 2857"/>
             </a:avLst>
           </a:prstGeom>
           <a:solidFill>
@@ -6667,14 +7162,14 @@
       </p:sp>
       <p:sp>
         <p:nvSpPr>
-          <p:cNvPr id="9" name="Text 7"/>
-          <p:cNvSpPr/>
-          <p:nvPr/>
-        </p:nvSpPr>
-        <p:spPr>
-          <a:xfrm>
-            <a:off x="1051560" y="2862072"/>
-            <a:ext cx="10454335" cy="3474720"/>
+          <p:cNvPr id="22" name="Text 20"/>
+          <p:cNvSpPr/>
+          <p:nvPr/>
+        </p:nvSpPr>
+        <p:spPr>
+          <a:xfrm>
+            <a:off x="1051560" y="3456432"/>
+            <a:ext cx="10454335" cy="2880360"/>
           </a:xfrm>
           <a:prstGeom prst="rect">
             <a:avLst/>
@@ -6690,7 +7185,7 @@
               <a:buNone/>
             </a:pPr>
             <a:r>
-              <a:rPr lang="en-US" sz="1400" i="1" dirty="0">
+              <a:rPr lang="en-US" sz="1200" i="1" dirty="0">
                 <a:solidFill>
                   <a:srgbClr val="8B88B5"/>
                 </a:solidFill>
@@ -6698,19 +7193,33 @@
                 <a:ea typeface="Consolas" pitchFamily="34" charset="-122"/>
                 <a:cs typeface="Consolas" pitchFamily="34" charset="-120"/>
               </a:rPr>
-              <a:t>// 📱  OS Local — Apple Intelligence</a:t>
-            </a:r>
-            <a:pPr indent="0" marL="0">
-              <a:buNone/>
-            </a:pPr>
-            <a:endParaRPr lang="en-US" sz="1400" dirty="0"/>
-          </a:p>
-          <a:p>
-            <a:pPr indent="0" marL="0">
-              <a:buNone/>
-            </a:pPr>
-            <a:r>
-              <a:rPr lang="en-US" sz="1400" dirty="0">
+              <a:t>// 📱  Local — Apple Intelligence, on the device</a:t>
+            </a:r>
+            <a:pPr indent="0" marL="0">
+              <a:buNone/>
+            </a:pPr>
+            <a:endParaRPr lang="en-US" sz="1200" dirty="0"/>
+          </a:p>
+          <a:p>
+            <a:pPr indent="0" marL="0">
+              <a:buNone/>
+            </a:pPr>
+            <a:r>
+              <a:rPr lang="en-US" sz="1200" dirty="0">
+                <a:solidFill>
+                  <a:srgbClr val="A78BFA"/>
+                </a:solidFill>
+                <a:latin typeface="Consolas" pitchFamily="34" charset="0"/>
+                <a:ea typeface="Consolas" pitchFamily="34" charset="-122"/>
+                <a:cs typeface="Consolas" pitchFamily="34" charset="-120"/>
+              </a:rPr>
+              <a:t>AIAgent</a:t>
+            </a:r>
+            <a:pPr indent="0" marL="0">
+              <a:buNone/>
+            </a:pPr>
+            <a:r>
+              <a:rPr lang="en-US" sz="1200" dirty="0">
                 <a:solidFill>
                   <a:srgbClr val="FAF8FF"/>
                 </a:solidFill>
@@ -6718,13 +7227,13 @@
                 <a:ea typeface="Consolas" pitchFamily="34" charset="-122"/>
                 <a:cs typeface="Consolas" pitchFamily="34" charset="-120"/>
               </a:rPr>
-              <a:t>chatClient </a:t>
-            </a:r>
-            <a:pPr indent="0" marL="0">
-              <a:buNone/>
-            </a:pPr>
-            <a:r>
-              <a:rPr lang="en-US" sz="1400" dirty="0">
+              <a:t> triage </a:t>
+            </a:r>
+            <a:pPr indent="0" marL="0">
+              <a:buNone/>
+            </a:pPr>
+            <a:r>
+              <a:rPr lang="en-US" sz="1200" dirty="0">
                 <a:solidFill>
                   <a:srgbClr val="CFCBED"/>
                 </a:solidFill>
@@ -6738,7 +7247,7 @@
               <a:buNone/>
             </a:pPr>
             <a:r>
-              <a:rPr lang="en-US" sz="1400" dirty="0">
+              <a:rPr lang="en-US" sz="1200" dirty="0">
                 <a:solidFill>
                   <a:srgbClr val="FAF8FF"/>
                 </a:solidFill>
@@ -6752,7 +7261,7 @@
               <a:buNone/>
             </a:pPr>
             <a:r>
-              <a:rPr lang="en-US" sz="1400" dirty="0">
+              <a:rPr lang="en-US" sz="1200" dirty="0">
                 <a:solidFill>
                   <a:srgbClr val="FB7185"/>
                 </a:solidFill>
@@ -6766,7 +7275,7 @@
               <a:buNone/>
             </a:pPr>
             <a:r>
-              <a:rPr lang="en-US" sz="1400" dirty="0">
+              <a:rPr lang="en-US" sz="1200" dirty="0">
                 <a:solidFill>
                   <a:srgbClr val="FAF8FF"/>
                 </a:solidFill>
@@ -6780,7 +7289,7 @@
               <a:buNone/>
             </a:pPr>
             <a:r>
-              <a:rPr lang="en-US" sz="1400" dirty="0">
+              <a:rPr lang="en-US" sz="1200" dirty="0">
                 <a:solidFill>
                   <a:srgbClr val="FAF8FF"/>
                 </a:solidFill>
@@ -6794,7 +7303,7 @@
               <a:buNone/>
             </a:pPr>
             <a:r>
-              <a:rPr lang="en-US" sz="1400" dirty="0">
+              <a:rPr lang="en-US" sz="1200" dirty="0">
                 <a:solidFill>
                   <a:srgbClr val="B8B5D9"/>
                 </a:solidFill>
@@ -6808,7 +7317,7 @@
               <a:buNone/>
             </a:pPr>
             <a:r>
-              <a:rPr lang="en-US" sz="1400" dirty="0">
+              <a:rPr lang="en-US" sz="1200" dirty="0">
                 <a:solidFill>
                   <a:srgbClr val="B8B5D9"/>
                 </a:solidFill>
@@ -6821,8 +7330,28 @@
             <a:pPr indent="0" marL="0">
               <a:buNone/>
             </a:pPr>
-            <a:r>
-              <a:rPr lang="en-US" sz="1400" dirty="0">
+            <a:endParaRPr lang="en-US" sz="1200" dirty="0"/>
+          </a:p>
+          <a:p>
+            <a:pPr indent="0" marL="0">
+              <a:buNone/>
+            </a:pPr>
+            <a:r>
+              <a:rPr lang="en-US" sz="1200" dirty="0">
+                <a:solidFill>
+                  <a:srgbClr val="FAF8FF"/>
+                </a:solidFill>
+                <a:latin typeface="Consolas" pitchFamily="34" charset="0"/>
+                <a:ea typeface="Consolas" pitchFamily="34" charset="-122"/>
+                <a:cs typeface="Consolas" pitchFamily="34" charset="-120"/>
+              </a:rPr>
+              <a:t>    </a:t>
+            </a:r>
+            <a:pPr indent="0" marL="0">
+              <a:buNone/>
+            </a:pPr>
+            <a:r>
+              <a:rPr lang="en-US" sz="1200" dirty="0">
                 <a:solidFill>
                   <a:srgbClr val="B8B5D9"/>
                 </a:solidFill>
@@ -6830,25 +7359,179 @@
                 <a:ea typeface="Consolas" pitchFamily="34" charset="-122"/>
                 <a:cs typeface="Consolas" pitchFamily="34" charset="-120"/>
               </a:rPr>
+              <a:t>.</a:t>
+            </a:r>
+            <a:pPr indent="0" marL="0">
+              <a:buNone/>
+            </a:pPr>
+            <a:r>
+              <a:rPr lang="en-US" sz="1200" dirty="0">
+                <a:solidFill>
+                  <a:srgbClr val="86EFAC"/>
+                </a:solidFill>
+                <a:latin typeface="Consolas" pitchFamily="34" charset="0"/>
+                <a:ea typeface="Consolas" pitchFamily="34" charset="-122"/>
+                <a:cs typeface="Consolas" pitchFamily="34" charset="-120"/>
+              </a:rPr>
+              <a:t>CreateAIAgent</a:t>
+            </a:r>
+            <a:pPr indent="0" marL="0">
+              <a:buNone/>
+            </a:pPr>
+            <a:r>
+              <a:rPr lang="en-US" sz="1200" dirty="0">
+                <a:solidFill>
+                  <a:srgbClr val="B8B5D9"/>
+                </a:solidFill>
+                <a:latin typeface="Consolas" pitchFamily="34" charset="0"/>
+                <a:ea typeface="Consolas" pitchFamily="34" charset="-122"/>
+                <a:cs typeface="Consolas" pitchFamily="34" charset="-120"/>
+              </a:rPr>
+              <a:t>(</a:t>
+            </a:r>
+            <a:pPr indent="0" marL="0">
+              <a:buNone/>
+            </a:pPr>
+            <a:r>
+              <a:rPr lang="en-US" sz="1200" dirty="0">
+                <a:solidFill>
+                  <a:srgbClr val="FBBF24"/>
+                </a:solidFill>
+                <a:latin typeface="Consolas" pitchFamily="34" charset="0"/>
+                <a:ea typeface="Consolas" pitchFamily="34" charset="-122"/>
+                <a:cs typeface="Consolas" pitchFamily="34" charset="-120"/>
+              </a:rPr>
+              <a:t>"Strip personal info. Return only topic + intent."</a:t>
+            </a:r>
+            <a:pPr indent="0" marL="0">
+              <a:buNone/>
+            </a:pPr>
+            <a:r>
+              <a:rPr lang="en-US" sz="1200" dirty="0">
+                <a:solidFill>
+                  <a:srgbClr val="B8B5D9"/>
+                </a:solidFill>
+                <a:latin typeface="Consolas" pitchFamily="34" charset="0"/>
+                <a:ea typeface="Consolas" pitchFamily="34" charset="-122"/>
+                <a:cs typeface="Consolas" pitchFamily="34" charset="-120"/>
+              </a:rPr>
+              <a:t>,</a:t>
+            </a:r>
+            <a:pPr indent="0" marL="0">
+              <a:buNone/>
+            </a:pPr>
+            <a:r>
+              <a:rPr lang="en-US" sz="1200" dirty="0">
+                <a:solidFill>
+                  <a:srgbClr val="FAF8FF"/>
+                </a:solidFill>
+                <a:latin typeface="Consolas" pitchFamily="34" charset="0"/>
+                <a:ea typeface="Consolas" pitchFamily="34" charset="-122"/>
+                <a:cs typeface="Consolas" pitchFamily="34" charset="-120"/>
+              </a:rPr>
+              <a:t> </a:t>
+            </a:r>
+            <a:pPr indent="0" marL="0">
+              <a:buNone/>
+            </a:pPr>
+            <a:r>
+              <a:rPr lang="en-US" sz="1200" dirty="0">
+                <a:solidFill>
+                  <a:srgbClr val="FAF8FF"/>
+                </a:solidFill>
+                <a:latin typeface="Consolas" pitchFamily="34" charset="0"/>
+                <a:ea typeface="Consolas" pitchFamily="34" charset="-122"/>
+                <a:cs typeface="Consolas" pitchFamily="34" charset="-120"/>
+              </a:rPr>
+              <a:t>name</a:t>
+            </a:r>
+            <a:pPr indent="0" marL="0">
+              <a:buNone/>
+            </a:pPr>
+            <a:r>
+              <a:rPr lang="en-US" sz="1200" dirty="0">
+                <a:solidFill>
+                  <a:srgbClr val="B8B5D9"/>
+                </a:solidFill>
+                <a:latin typeface="Consolas" pitchFamily="34" charset="0"/>
+                <a:ea typeface="Consolas" pitchFamily="34" charset="-122"/>
+                <a:cs typeface="Consolas" pitchFamily="34" charset="-120"/>
+              </a:rPr>
+              <a:t>:</a:t>
+            </a:r>
+            <a:pPr indent="0" marL="0">
+              <a:buNone/>
+            </a:pPr>
+            <a:r>
+              <a:rPr lang="en-US" sz="1200" dirty="0">
+                <a:solidFill>
+                  <a:srgbClr val="FAF8FF"/>
+                </a:solidFill>
+                <a:latin typeface="Consolas" pitchFamily="34" charset="0"/>
+                <a:ea typeface="Consolas" pitchFamily="34" charset="-122"/>
+                <a:cs typeface="Consolas" pitchFamily="34" charset="-120"/>
+              </a:rPr>
+              <a:t> </a:t>
+            </a:r>
+            <a:pPr indent="0" marL="0">
+              <a:buNone/>
+            </a:pPr>
+            <a:r>
+              <a:rPr lang="en-US" sz="1200" dirty="0">
+                <a:solidFill>
+                  <a:srgbClr val="FBBF24"/>
+                </a:solidFill>
+                <a:latin typeface="Consolas" pitchFamily="34" charset="0"/>
+                <a:ea typeface="Consolas" pitchFamily="34" charset="-122"/>
+                <a:cs typeface="Consolas" pitchFamily="34" charset="-120"/>
+              </a:rPr>
+              <a:t>"triage"</a:t>
+            </a:r>
+            <a:pPr indent="0" marL="0">
+              <a:buNone/>
+            </a:pPr>
+            <a:r>
+              <a:rPr lang="en-US" sz="1200" dirty="0">
+                <a:solidFill>
+                  <a:srgbClr val="B8B5D9"/>
+                </a:solidFill>
+                <a:latin typeface="Consolas" pitchFamily="34" charset="0"/>
+                <a:ea typeface="Consolas" pitchFamily="34" charset="-122"/>
+                <a:cs typeface="Consolas" pitchFamily="34" charset="-120"/>
+              </a:rPr>
+              <a:t>)</a:t>
+            </a:r>
+            <a:pPr indent="0" marL="0">
+              <a:buNone/>
+            </a:pPr>
+            <a:r>
+              <a:rPr lang="en-US" sz="1200" dirty="0">
+                <a:solidFill>
+                  <a:srgbClr val="B8B5D9"/>
+                </a:solidFill>
+                <a:latin typeface="Consolas" pitchFamily="34" charset="0"/>
+                <a:ea typeface="Consolas" pitchFamily="34" charset="-122"/>
+                <a:cs typeface="Consolas" pitchFamily="34" charset="-120"/>
+              </a:rPr>
               <a:t>;</a:t>
             </a:r>
             <a:pPr indent="0" marL="0">
               <a:buNone/>
             </a:pPr>
-            <a:endParaRPr lang="en-US" sz="1400" dirty="0"/>
-          </a:p>
-          <a:p>
-            <a:pPr indent="0" marL="0">
-              <a:buNone/>
-            </a:pPr>
-            <a:endParaRPr lang="en-US" sz="1400" dirty="0"/>
-          </a:p>
-          <a:p>
-            <a:pPr indent="0" marL="0">
-              <a:buNone/>
-            </a:pPr>
-            <a:r>
-              <a:rPr lang="en-US" sz="1400" i="1" dirty="0">
+            <a:endParaRPr lang="en-US" sz="1200" dirty="0"/>
+          </a:p>
+          <a:p>
+            <a:pPr indent="0" marL="0">
+              <a:buNone/>
+            </a:pPr>
+            <a:endParaRPr lang="en-US" sz="1200" dirty="0"/>
+          </a:p>
+          <a:p>
+            <a:pPr indent="0" marL="0">
+              <a:buNone/>
+            </a:pPr>
+            <a:r>
+              <a:rPr lang="en-US" sz="1200" i="1" dirty="0">
                 <a:solidFill>
                   <a:srgbClr val="8B88B5"/>
                 </a:solidFill>
@@ -6856,19 +7539,75 @@
                 <a:ea typeface="Consolas" pitchFamily="34" charset="-122"/>
                 <a:cs typeface="Consolas" pitchFamily="34" charset="-120"/>
               </a:rPr>
-              <a:t>// 🧪  BYO Local — Foundry Local hosting a Phi-class LLM</a:t>
-            </a:r>
-            <a:pPr indent="0" marL="0">
-              <a:buNone/>
-            </a:pPr>
-            <a:endParaRPr lang="en-US" sz="1400" dirty="0"/>
-          </a:p>
-          <a:p>
-            <a:pPr indent="0" marL="0">
-              <a:buNone/>
-            </a:pPr>
-            <a:r>
-              <a:rPr lang="en-US" sz="1400" dirty="0">
+              <a:t>// ☁️  Cloud — Azure OpenAI, frontier reasoning</a:t>
+            </a:r>
+            <a:pPr indent="0" marL="0">
+              <a:buNone/>
+            </a:pPr>
+            <a:endParaRPr lang="en-US" sz="1200" dirty="0"/>
+          </a:p>
+          <a:p>
+            <a:pPr indent="0" marL="0">
+              <a:buNone/>
+            </a:pPr>
+            <a:r>
+              <a:rPr lang="en-US" sz="1200" dirty="0">
+                <a:solidFill>
+                  <a:srgbClr val="A78BFA"/>
+                </a:solidFill>
+                <a:latin typeface="Consolas" pitchFamily="34" charset="0"/>
+                <a:ea typeface="Consolas" pitchFamily="34" charset="-122"/>
+                <a:cs typeface="Consolas" pitchFamily="34" charset="-120"/>
+              </a:rPr>
+              <a:t>AIAgent</a:t>
+            </a:r>
+            <a:pPr indent="0" marL="0">
+              <a:buNone/>
+            </a:pPr>
+            <a:r>
+              <a:rPr lang="en-US" sz="1200" dirty="0">
+                <a:solidFill>
+                  <a:srgbClr val="FAF8FF"/>
+                </a:solidFill>
+                <a:latin typeface="Consolas" pitchFamily="34" charset="0"/>
+                <a:ea typeface="Consolas" pitchFamily="34" charset="-122"/>
+                <a:cs typeface="Consolas" pitchFamily="34" charset="-120"/>
+              </a:rPr>
+              <a:t> expert </a:t>
+            </a:r>
+            <a:pPr indent="0" marL="0">
+              <a:buNone/>
+            </a:pPr>
+            <a:r>
+              <a:rPr lang="en-US" sz="1200" dirty="0">
+                <a:solidFill>
+                  <a:srgbClr val="CFCBED"/>
+                </a:solidFill>
+                <a:latin typeface="Consolas" pitchFamily="34" charset="0"/>
+                <a:ea typeface="Consolas" pitchFamily="34" charset="-122"/>
+                <a:cs typeface="Consolas" pitchFamily="34" charset="-120"/>
+              </a:rPr>
+              <a:t>=</a:t>
+            </a:r>
+            <a:pPr indent="0" marL="0">
+              <a:buNone/>
+            </a:pPr>
+            <a:r>
+              <a:rPr lang="en-US" sz="1200" dirty="0">
+                <a:solidFill>
+                  <a:srgbClr val="FAF8FF"/>
+                </a:solidFill>
+                <a:latin typeface="Consolas" pitchFamily="34" charset="0"/>
+                <a:ea typeface="Consolas" pitchFamily="34" charset="-122"/>
+                <a:cs typeface="Consolas" pitchFamily="34" charset="-120"/>
+              </a:rPr>
+              <a:t> </a:t>
+            </a:r>
+            <a:pPr indent="0" marL="0">
+              <a:buNone/>
+            </a:pPr>
+            <a:r>
+              <a:rPr lang="en-US" sz="1200" dirty="0">
                 <a:solidFill>
                   <a:srgbClr val="FB7185"/>
                 </a:solidFill>
@@ -6876,13 +7615,561 @@
                 <a:ea typeface="Consolas" pitchFamily="34" charset="-122"/>
                 <a:cs typeface="Consolas" pitchFamily="34" charset="-120"/>
               </a:rPr>
+              <a:t>new</a:t>
+            </a:r>
+            <a:pPr indent="0" marL="0">
+              <a:buNone/>
+            </a:pPr>
+            <a:r>
+              <a:rPr lang="en-US" sz="1200" dirty="0">
+                <a:solidFill>
+                  <a:srgbClr val="FAF8FF"/>
+                </a:solidFill>
+                <a:latin typeface="Consolas" pitchFamily="34" charset="0"/>
+                <a:ea typeface="Consolas" pitchFamily="34" charset="-122"/>
+                <a:cs typeface="Consolas" pitchFamily="34" charset="-120"/>
+              </a:rPr>
+              <a:t> </a:t>
+            </a:r>
+            <a:pPr indent="0" marL="0">
+              <a:buNone/>
+            </a:pPr>
+            <a:r>
+              <a:rPr lang="en-US" sz="1200" dirty="0">
+                <a:solidFill>
+                  <a:srgbClr val="FAF8FF"/>
+                </a:solidFill>
+                <a:latin typeface="Consolas" pitchFamily="34" charset="0"/>
+                <a:ea typeface="Consolas" pitchFamily="34" charset="-122"/>
+                <a:cs typeface="Consolas" pitchFamily="34" charset="-120"/>
+              </a:rPr>
+              <a:t>AzureOpenAIClient</a:t>
+            </a:r>
+            <a:pPr indent="0" marL="0">
+              <a:buNone/>
+            </a:pPr>
+            <a:r>
+              <a:rPr lang="en-US" sz="1200" dirty="0">
+                <a:solidFill>
+                  <a:srgbClr val="B8B5D9"/>
+                </a:solidFill>
+                <a:latin typeface="Consolas" pitchFamily="34" charset="0"/>
+                <a:ea typeface="Consolas" pitchFamily="34" charset="-122"/>
+                <a:cs typeface="Consolas" pitchFamily="34" charset="-120"/>
+              </a:rPr>
+              <a:t>(</a:t>
+            </a:r>
+            <a:pPr indent="0" marL="0">
+              <a:buNone/>
+            </a:pPr>
+            <a:r>
+              <a:rPr lang="en-US" sz="1200" dirty="0">
+                <a:solidFill>
+                  <a:srgbClr val="FAF8FF"/>
+                </a:solidFill>
+                <a:latin typeface="Consolas" pitchFamily="34" charset="0"/>
+                <a:ea typeface="Consolas" pitchFamily="34" charset="-122"/>
+                <a:cs typeface="Consolas" pitchFamily="34" charset="-120"/>
+              </a:rPr>
+              <a:t>endpoint</a:t>
+            </a:r>
+            <a:pPr indent="0" marL="0">
+              <a:buNone/>
+            </a:pPr>
+            <a:r>
+              <a:rPr lang="en-US" sz="1200" dirty="0">
+                <a:solidFill>
+                  <a:srgbClr val="B8B5D9"/>
+                </a:solidFill>
+                <a:latin typeface="Consolas" pitchFamily="34" charset="0"/>
+                <a:ea typeface="Consolas" pitchFamily="34" charset="-122"/>
+                <a:cs typeface="Consolas" pitchFamily="34" charset="-120"/>
+              </a:rPr>
+              <a:t>,</a:t>
+            </a:r>
+            <a:pPr indent="0" marL="0">
+              <a:buNone/>
+            </a:pPr>
+            <a:r>
+              <a:rPr lang="en-US" sz="1200" dirty="0">
+                <a:solidFill>
+                  <a:srgbClr val="FAF8FF"/>
+                </a:solidFill>
+                <a:latin typeface="Consolas" pitchFamily="34" charset="0"/>
+                <a:ea typeface="Consolas" pitchFamily="34" charset="-122"/>
+                <a:cs typeface="Consolas" pitchFamily="34" charset="-120"/>
+              </a:rPr>
+              <a:t> </a:t>
+            </a:r>
+            <a:pPr indent="0" marL="0">
+              <a:buNone/>
+            </a:pPr>
+            <a:r>
+              <a:rPr lang="en-US" sz="1200" dirty="0">
+                <a:solidFill>
+                  <a:srgbClr val="FB7185"/>
+                </a:solidFill>
+                <a:latin typeface="Consolas" pitchFamily="34" charset="0"/>
+                <a:ea typeface="Consolas" pitchFamily="34" charset="-122"/>
+                <a:cs typeface="Consolas" pitchFamily="34" charset="-120"/>
+              </a:rPr>
+              <a:t>new</a:t>
+            </a:r>
+            <a:pPr indent="0" marL="0">
+              <a:buNone/>
+            </a:pPr>
+            <a:r>
+              <a:rPr lang="en-US" sz="1200" dirty="0">
+                <a:solidFill>
+                  <a:srgbClr val="FAF8FF"/>
+                </a:solidFill>
+                <a:latin typeface="Consolas" pitchFamily="34" charset="0"/>
+                <a:ea typeface="Consolas" pitchFamily="34" charset="-122"/>
+                <a:cs typeface="Consolas" pitchFamily="34" charset="-120"/>
+              </a:rPr>
+              <a:t> </a:t>
+            </a:r>
+            <a:pPr indent="0" marL="0">
+              <a:buNone/>
+            </a:pPr>
+            <a:r>
+              <a:rPr lang="en-US" sz="1200" dirty="0">
+                <a:solidFill>
+                  <a:srgbClr val="FAF8FF"/>
+                </a:solidFill>
+                <a:latin typeface="Consolas" pitchFamily="34" charset="0"/>
+                <a:ea typeface="Consolas" pitchFamily="34" charset="-122"/>
+                <a:cs typeface="Consolas" pitchFamily="34" charset="-120"/>
+              </a:rPr>
+              <a:t>DefaultAzureCredential</a:t>
+            </a:r>
+            <a:pPr indent="0" marL="0">
+              <a:buNone/>
+            </a:pPr>
+            <a:r>
+              <a:rPr lang="en-US" sz="1200" dirty="0">
+                <a:solidFill>
+                  <a:srgbClr val="B8B5D9"/>
+                </a:solidFill>
+                <a:latin typeface="Consolas" pitchFamily="34" charset="0"/>
+                <a:ea typeface="Consolas" pitchFamily="34" charset="-122"/>
+                <a:cs typeface="Consolas" pitchFamily="34" charset="-120"/>
+              </a:rPr>
+              <a:t>(</a:t>
+            </a:r>
+            <a:pPr indent="0" marL="0">
+              <a:buNone/>
+            </a:pPr>
+            <a:r>
+              <a:rPr lang="en-US" sz="1200" dirty="0">
+                <a:solidFill>
+                  <a:srgbClr val="B8B5D9"/>
+                </a:solidFill>
+                <a:latin typeface="Consolas" pitchFamily="34" charset="0"/>
+                <a:ea typeface="Consolas" pitchFamily="34" charset="-122"/>
+                <a:cs typeface="Consolas" pitchFamily="34" charset="-120"/>
+              </a:rPr>
+              <a:t>)</a:t>
+            </a:r>
+            <a:pPr indent="0" marL="0">
+              <a:buNone/>
+            </a:pPr>
+            <a:r>
+              <a:rPr lang="en-US" sz="1200" dirty="0">
+                <a:solidFill>
+                  <a:srgbClr val="B8B5D9"/>
+                </a:solidFill>
+                <a:latin typeface="Consolas" pitchFamily="34" charset="0"/>
+                <a:ea typeface="Consolas" pitchFamily="34" charset="-122"/>
+                <a:cs typeface="Consolas" pitchFamily="34" charset="-120"/>
+              </a:rPr>
+              <a:t>)</a:t>
+            </a:r>
+            <a:pPr indent="0" marL="0">
+              <a:buNone/>
+            </a:pPr>
+            <a:endParaRPr lang="en-US" sz="1200" dirty="0"/>
+          </a:p>
+          <a:p>
+            <a:pPr indent="0" marL="0">
+              <a:buNone/>
+            </a:pPr>
+            <a:r>
+              <a:rPr lang="en-US" sz="1200" dirty="0">
+                <a:solidFill>
+                  <a:srgbClr val="FAF8FF"/>
+                </a:solidFill>
+                <a:latin typeface="Consolas" pitchFamily="34" charset="0"/>
+                <a:ea typeface="Consolas" pitchFamily="34" charset="-122"/>
+                <a:cs typeface="Consolas" pitchFamily="34" charset="-120"/>
+              </a:rPr>
+              <a:t>    </a:t>
+            </a:r>
+            <a:pPr indent="0" marL="0">
+              <a:buNone/>
+            </a:pPr>
+            <a:r>
+              <a:rPr lang="en-US" sz="1200" dirty="0">
+                <a:solidFill>
+                  <a:srgbClr val="B8B5D9"/>
+                </a:solidFill>
+                <a:latin typeface="Consolas" pitchFamily="34" charset="0"/>
+                <a:ea typeface="Consolas" pitchFamily="34" charset="-122"/>
+                <a:cs typeface="Consolas" pitchFamily="34" charset="-120"/>
+              </a:rPr>
+              <a:t>.</a:t>
+            </a:r>
+            <a:pPr indent="0" marL="0">
+              <a:buNone/>
+            </a:pPr>
+            <a:r>
+              <a:rPr lang="en-US" sz="1200" dirty="0">
+                <a:solidFill>
+                  <a:srgbClr val="86EFAC"/>
+                </a:solidFill>
+                <a:latin typeface="Consolas" pitchFamily="34" charset="0"/>
+                <a:ea typeface="Consolas" pitchFamily="34" charset="-122"/>
+                <a:cs typeface="Consolas" pitchFamily="34" charset="-120"/>
+              </a:rPr>
+              <a:t>GetChatClient</a:t>
+            </a:r>
+            <a:pPr indent="0" marL="0">
+              <a:buNone/>
+            </a:pPr>
+            <a:r>
+              <a:rPr lang="en-US" sz="1200" dirty="0">
+                <a:solidFill>
+                  <a:srgbClr val="B8B5D9"/>
+                </a:solidFill>
+                <a:latin typeface="Consolas" pitchFamily="34" charset="0"/>
+                <a:ea typeface="Consolas" pitchFamily="34" charset="-122"/>
+                <a:cs typeface="Consolas" pitchFamily="34" charset="-120"/>
+              </a:rPr>
+              <a:t>(</a:t>
+            </a:r>
+            <a:pPr indent="0" marL="0">
+              <a:buNone/>
+            </a:pPr>
+            <a:r>
+              <a:rPr lang="en-US" sz="1200" dirty="0">
+                <a:solidFill>
+                  <a:srgbClr val="FBBF24"/>
+                </a:solidFill>
+                <a:latin typeface="Consolas" pitchFamily="34" charset="0"/>
+                <a:ea typeface="Consolas" pitchFamily="34" charset="-122"/>
+                <a:cs typeface="Consolas" pitchFamily="34" charset="-120"/>
+              </a:rPr>
+              <a:t>"gpt-4.1"</a:t>
+            </a:r>
+            <a:pPr indent="0" marL="0">
+              <a:buNone/>
+            </a:pPr>
+            <a:r>
+              <a:rPr lang="en-US" sz="1200" dirty="0">
+                <a:solidFill>
+                  <a:srgbClr val="B8B5D9"/>
+                </a:solidFill>
+                <a:latin typeface="Consolas" pitchFamily="34" charset="0"/>
+                <a:ea typeface="Consolas" pitchFamily="34" charset="-122"/>
+                <a:cs typeface="Consolas" pitchFamily="34" charset="-120"/>
+              </a:rPr>
+              <a:t>)</a:t>
+            </a:r>
+            <a:pPr indent="0" marL="0">
+              <a:buNone/>
+            </a:pPr>
+            <a:r>
+              <a:rPr lang="en-US" sz="1200" dirty="0">
+                <a:solidFill>
+                  <a:srgbClr val="B8B5D9"/>
+                </a:solidFill>
+                <a:latin typeface="Consolas" pitchFamily="34" charset="0"/>
+                <a:ea typeface="Consolas" pitchFamily="34" charset="-122"/>
+                <a:cs typeface="Consolas" pitchFamily="34" charset="-120"/>
+              </a:rPr>
+              <a:t>.</a:t>
+            </a:r>
+            <a:pPr indent="0" marL="0">
+              <a:buNone/>
+            </a:pPr>
+            <a:r>
+              <a:rPr lang="en-US" sz="1200" dirty="0">
+                <a:solidFill>
+                  <a:srgbClr val="86EFAC"/>
+                </a:solidFill>
+                <a:latin typeface="Consolas" pitchFamily="34" charset="0"/>
+                <a:ea typeface="Consolas" pitchFamily="34" charset="-122"/>
+                <a:cs typeface="Consolas" pitchFamily="34" charset="-120"/>
+              </a:rPr>
+              <a:t>AsIChatClient</a:t>
+            </a:r>
+            <a:pPr indent="0" marL="0">
+              <a:buNone/>
+            </a:pPr>
+            <a:r>
+              <a:rPr lang="en-US" sz="1200" dirty="0">
+                <a:solidFill>
+                  <a:srgbClr val="B8B5D9"/>
+                </a:solidFill>
+                <a:latin typeface="Consolas" pitchFamily="34" charset="0"/>
+                <a:ea typeface="Consolas" pitchFamily="34" charset="-122"/>
+                <a:cs typeface="Consolas" pitchFamily="34" charset="-120"/>
+              </a:rPr>
+              <a:t>(</a:t>
+            </a:r>
+            <a:pPr indent="0" marL="0">
+              <a:buNone/>
+            </a:pPr>
+            <a:r>
+              <a:rPr lang="en-US" sz="1200" dirty="0">
+                <a:solidFill>
+                  <a:srgbClr val="B8B5D9"/>
+                </a:solidFill>
+                <a:latin typeface="Consolas" pitchFamily="34" charset="0"/>
+                <a:ea typeface="Consolas" pitchFamily="34" charset="-122"/>
+                <a:cs typeface="Consolas" pitchFamily="34" charset="-120"/>
+              </a:rPr>
+              <a:t>)</a:t>
+            </a:r>
+            <a:pPr indent="0" marL="0">
+              <a:buNone/>
+            </a:pPr>
+            <a:endParaRPr lang="en-US" sz="1200" dirty="0"/>
+          </a:p>
+          <a:p>
+            <a:pPr indent="0" marL="0">
+              <a:buNone/>
+            </a:pPr>
+            <a:r>
+              <a:rPr lang="en-US" sz="1200" dirty="0">
+                <a:solidFill>
+                  <a:srgbClr val="FAF8FF"/>
+                </a:solidFill>
+                <a:latin typeface="Consolas" pitchFamily="34" charset="0"/>
+                <a:ea typeface="Consolas" pitchFamily="34" charset="-122"/>
+                <a:cs typeface="Consolas" pitchFamily="34" charset="-120"/>
+              </a:rPr>
+              <a:t>    </a:t>
+            </a:r>
+            <a:pPr indent="0" marL="0">
+              <a:buNone/>
+            </a:pPr>
+            <a:r>
+              <a:rPr lang="en-US" sz="1200" dirty="0">
+                <a:solidFill>
+                  <a:srgbClr val="B8B5D9"/>
+                </a:solidFill>
+                <a:latin typeface="Consolas" pitchFamily="34" charset="0"/>
+                <a:ea typeface="Consolas" pitchFamily="34" charset="-122"/>
+                <a:cs typeface="Consolas" pitchFamily="34" charset="-120"/>
+              </a:rPr>
+              <a:t>.</a:t>
+            </a:r>
+            <a:pPr indent="0" marL="0">
+              <a:buNone/>
+            </a:pPr>
+            <a:r>
+              <a:rPr lang="en-US" sz="1200" dirty="0">
+                <a:solidFill>
+                  <a:srgbClr val="86EFAC"/>
+                </a:solidFill>
+                <a:latin typeface="Consolas" pitchFamily="34" charset="0"/>
+                <a:ea typeface="Consolas" pitchFamily="34" charset="-122"/>
+                <a:cs typeface="Consolas" pitchFamily="34" charset="-120"/>
+              </a:rPr>
+              <a:t>CreateAIAgent</a:t>
+            </a:r>
+            <a:pPr indent="0" marL="0">
+              <a:buNone/>
+            </a:pPr>
+            <a:r>
+              <a:rPr lang="en-US" sz="1200" dirty="0">
+                <a:solidFill>
+                  <a:srgbClr val="B8B5D9"/>
+                </a:solidFill>
+                <a:latin typeface="Consolas" pitchFamily="34" charset="0"/>
+                <a:ea typeface="Consolas" pitchFamily="34" charset="-122"/>
+                <a:cs typeface="Consolas" pitchFamily="34" charset="-120"/>
+              </a:rPr>
+              <a:t>(</a:t>
+            </a:r>
+            <a:pPr indent="0" marL="0">
+              <a:buNone/>
+            </a:pPr>
+            <a:r>
+              <a:rPr lang="en-US" sz="1200" dirty="0">
+                <a:solidFill>
+                  <a:srgbClr val="FBBF24"/>
+                </a:solidFill>
+                <a:latin typeface="Consolas" pitchFamily="34" charset="0"/>
+                <a:ea typeface="Consolas" pitchFamily="34" charset="-122"/>
+                <a:cs typeface="Consolas" pitchFamily="34" charset="-120"/>
+              </a:rPr>
+              <a:t>"Answer with depth and current context."</a:t>
+            </a:r>
+            <a:pPr indent="0" marL="0">
+              <a:buNone/>
+            </a:pPr>
+            <a:r>
+              <a:rPr lang="en-US" sz="1200" dirty="0">
+                <a:solidFill>
+                  <a:srgbClr val="B8B5D9"/>
+                </a:solidFill>
+                <a:latin typeface="Consolas" pitchFamily="34" charset="0"/>
+                <a:ea typeface="Consolas" pitchFamily="34" charset="-122"/>
+                <a:cs typeface="Consolas" pitchFamily="34" charset="-120"/>
+              </a:rPr>
+              <a:t>,</a:t>
+            </a:r>
+            <a:pPr indent="0" marL="0">
+              <a:buNone/>
+            </a:pPr>
+            <a:r>
+              <a:rPr lang="en-US" sz="1200" dirty="0">
+                <a:solidFill>
+                  <a:srgbClr val="FAF8FF"/>
+                </a:solidFill>
+                <a:latin typeface="Consolas" pitchFamily="34" charset="0"/>
+                <a:ea typeface="Consolas" pitchFamily="34" charset="-122"/>
+                <a:cs typeface="Consolas" pitchFamily="34" charset="-120"/>
+              </a:rPr>
+              <a:t> </a:t>
+            </a:r>
+            <a:pPr indent="0" marL="0">
+              <a:buNone/>
+            </a:pPr>
+            <a:r>
+              <a:rPr lang="en-US" sz="1200" dirty="0">
+                <a:solidFill>
+                  <a:srgbClr val="FAF8FF"/>
+                </a:solidFill>
+                <a:latin typeface="Consolas" pitchFamily="34" charset="0"/>
+                <a:ea typeface="Consolas" pitchFamily="34" charset="-122"/>
+                <a:cs typeface="Consolas" pitchFamily="34" charset="-120"/>
+              </a:rPr>
+              <a:t>name</a:t>
+            </a:r>
+            <a:pPr indent="0" marL="0">
+              <a:buNone/>
+            </a:pPr>
+            <a:r>
+              <a:rPr lang="en-US" sz="1200" dirty="0">
+                <a:solidFill>
+                  <a:srgbClr val="B8B5D9"/>
+                </a:solidFill>
+                <a:latin typeface="Consolas" pitchFamily="34" charset="0"/>
+                <a:ea typeface="Consolas" pitchFamily="34" charset="-122"/>
+                <a:cs typeface="Consolas" pitchFamily="34" charset="-120"/>
+              </a:rPr>
+              <a:t>:</a:t>
+            </a:r>
+            <a:pPr indent="0" marL="0">
+              <a:buNone/>
+            </a:pPr>
+            <a:r>
+              <a:rPr lang="en-US" sz="1200" dirty="0">
+                <a:solidFill>
+                  <a:srgbClr val="FAF8FF"/>
+                </a:solidFill>
+                <a:latin typeface="Consolas" pitchFamily="34" charset="0"/>
+                <a:ea typeface="Consolas" pitchFamily="34" charset="-122"/>
+                <a:cs typeface="Consolas" pitchFamily="34" charset="-120"/>
+              </a:rPr>
+              <a:t> </a:t>
+            </a:r>
+            <a:pPr indent="0" marL="0">
+              <a:buNone/>
+            </a:pPr>
+            <a:r>
+              <a:rPr lang="en-US" sz="1200" dirty="0">
+                <a:solidFill>
+                  <a:srgbClr val="FBBF24"/>
+                </a:solidFill>
+                <a:latin typeface="Consolas" pitchFamily="34" charset="0"/>
+                <a:ea typeface="Consolas" pitchFamily="34" charset="-122"/>
+                <a:cs typeface="Consolas" pitchFamily="34" charset="-120"/>
+              </a:rPr>
+              <a:t>"expert"</a:t>
+            </a:r>
+            <a:pPr indent="0" marL="0">
+              <a:buNone/>
+            </a:pPr>
+            <a:r>
+              <a:rPr lang="en-US" sz="1200" dirty="0">
+                <a:solidFill>
+                  <a:srgbClr val="B8B5D9"/>
+                </a:solidFill>
+                <a:latin typeface="Consolas" pitchFamily="34" charset="0"/>
+                <a:ea typeface="Consolas" pitchFamily="34" charset="-122"/>
+                <a:cs typeface="Consolas" pitchFamily="34" charset="-120"/>
+              </a:rPr>
+              <a:t>)</a:t>
+            </a:r>
+            <a:pPr indent="0" marL="0">
+              <a:buNone/>
+            </a:pPr>
+            <a:r>
+              <a:rPr lang="en-US" sz="1200" dirty="0">
+                <a:solidFill>
+                  <a:srgbClr val="B8B5D9"/>
+                </a:solidFill>
+                <a:latin typeface="Consolas" pitchFamily="34" charset="0"/>
+                <a:ea typeface="Consolas" pitchFamily="34" charset="-122"/>
+                <a:cs typeface="Consolas" pitchFamily="34" charset="-120"/>
+              </a:rPr>
+              <a:t>;</a:t>
+            </a:r>
+            <a:pPr indent="0" marL="0">
+              <a:buNone/>
+            </a:pPr>
+            <a:endParaRPr lang="en-US" sz="1200" dirty="0"/>
+          </a:p>
+          <a:p>
+            <a:pPr indent="0" marL="0">
+              <a:buNone/>
+            </a:pPr>
+            <a:endParaRPr lang="en-US" sz="1200" dirty="0"/>
+          </a:p>
+          <a:p>
+            <a:pPr indent="0" marL="0">
+              <a:buNone/>
+            </a:pPr>
+            <a:r>
+              <a:rPr lang="en-US" sz="1200" i="1" dirty="0">
+                <a:solidFill>
+                  <a:srgbClr val="8B88B5"/>
+                </a:solidFill>
+                <a:latin typeface="Consolas" pitchFamily="34" charset="0"/>
+                <a:ea typeface="Consolas" pitchFamily="34" charset="-122"/>
+                <a:cs typeface="Consolas" pitchFamily="34" charset="-120"/>
+              </a:rPr>
+              <a:t>// 🔗  MAF workflow — pipe local → cloud, expose as an agent</a:t>
+            </a:r>
+            <a:pPr indent="0" marL="0">
+              <a:buNone/>
+            </a:pPr>
+            <a:endParaRPr lang="en-US" sz="1200" dirty="0"/>
+          </a:p>
+          <a:p>
+            <a:pPr indent="0" marL="0">
+              <a:buNone/>
+            </a:pPr>
+            <a:r>
+              <a:rPr lang="en-US" sz="1200" dirty="0">
+                <a:solidFill>
+                  <a:srgbClr val="FB7185"/>
+                </a:solidFill>
+                <a:latin typeface="Consolas" pitchFamily="34" charset="0"/>
+                <a:ea typeface="Consolas" pitchFamily="34" charset="-122"/>
+                <a:cs typeface="Consolas" pitchFamily="34" charset="-120"/>
+              </a:rPr>
               <a:t>var</a:t>
             </a:r>
             <a:pPr indent="0" marL="0">
               <a:buNone/>
             </a:pPr>
             <a:r>
-              <a:rPr lang="en-US" sz="1400" dirty="0">
+              <a:rPr lang="en-US" sz="1200" dirty="0">
                 <a:solidFill>
                   <a:srgbClr val="FAF8FF"/>
                 </a:solidFill>
@@ -6890,13 +8177,13 @@
                 <a:ea typeface="Consolas" pitchFamily="34" charset="-122"/>
                 <a:cs typeface="Consolas" pitchFamily="34" charset="-120"/>
               </a:rPr>
-              <a:t> mgr </a:t>
-            </a:r>
-            <a:pPr indent="0" marL="0">
-              <a:buNone/>
-            </a:pPr>
-            <a:r>
-              <a:rPr lang="en-US" sz="1400" dirty="0">
+              <a:t> workflow </a:t>
+            </a:r>
+            <a:pPr indent="0" marL="0">
+              <a:buNone/>
+            </a:pPr>
+            <a:r>
+              <a:rPr lang="en-US" sz="1200" dirty="0">
                 <a:solidFill>
                   <a:srgbClr val="CFCBED"/>
                 </a:solidFill>
@@ -6910,7 +8197,7 @@
               <a:buNone/>
             </a:pPr>
             <a:r>
-              <a:rPr lang="en-US" sz="1400" dirty="0">
+              <a:rPr lang="en-US" sz="1200" dirty="0">
                 <a:solidFill>
                   <a:srgbClr val="FAF8FF"/>
                 </a:solidFill>
@@ -6918,13 +8205,289 @@
                 <a:ea typeface="Consolas" pitchFamily="34" charset="-122"/>
                 <a:cs typeface="Consolas" pitchFamily="34" charset="-120"/>
               </a:rPr>
+              <a:t> AgentWorkflowBuilder</a:t>
+            </a:r>
+            <a:pPr indent="0" marL="0">
+              <a:buNone/>
+            </a:pPr>
+            <a:endParaRPr lang="en-US" sz="1200" dirty="0"/>
+          </a:p>
+          <a:p>
+            <a:pPr indent="0" marL="0">
+              <a:buNone/>
+            </a:pPr>
+            <a:r>
+              <a:rPr lang="en-US" sz="1200" dirty="0">
+                <a:solidFill>
+                  <a:srgbClr val="FAF8FF"/>
+                </a:solidFill>
+                <a:latin typeface="Consolas" pitchFamily="34" charset="0"/>
+                <a:ea typeface="Consolas" pitchFamily="34" charset="-122"/>
+                <a:cs typeface="Consolas" pitchFamily="34" charset="-120"/>
+              </a:rPr>
+              <a:t>    </a:t>
+            </a:r>
+            <a:pPr indent="0" marL="0">
+              <a:buNone/>
+            </a:pPr>
+            <a:r>
+              <a:rPr lang="en-US" sz="1200" dirty="0">
+                <a:solidFill>
+                  <a:srgbClr val="B8B5D9"/>
+                </a:solidFill>
+                <a:latin typeface="Consolas" pitchFamily="34" charset="0"/>
+                <a:ea typeface="Consolas" pitchFamily="34" charset="-122"/>
+                <a:cs typeface="Consolas" pitchFamily="34" charset="-120"/>
+              </a:rPr>
+              <a:t>.</a:t>
+            </a:r>
+            <a:pPr indent="0" marL="0">
+              <a:buNone/>
+            </a:pPr>
+            <a:r>
+              <a:rPr lang="en-US" sz="1200" dirty="0">
+                <a:solidFill>
+                  <a:srgbClr val="86EFAC"/>
+                </a:solidFill>
+                <a:latin typeface="Consolas" pitchFamily="34" charset="0"/>
+                <a:ea typeface="Consolas" pitchFamily="34" charset="-122"/>
+                <a:cs typeface="Consolas" pitchFamily="34" charset="-120"/>
+              </a:rPr>
+              <a:t>BuildSequential</a:t>
+            </a:r>
+            <a:pPr indent="0" marL="0">
+              <a:buNone/>
+            </a:pPr>
+            <a:r>
+              <a:rPr lang="en-US" sz="1200" dirty="0">
+                <a:solidFill>
+                  <a:srgbClr val="B8B5D9"/>
+                </a:solidFill>
+                <a:latin typeface="Consolas" pitchFamily="34" charset="0"/>
+                <a:ea typeface="Consolas" pitchFamily="34" charset="-122"/>
+                <a:cs typeface="Consolas" pitchFamily="34" charset="-120"/>
+              </a:rPr>
+              <a:t>(</a:t>
+            </a:r>
+            <a:pPr indent="0" marL="0">
+              <a:buNone/>
+            </a:pPr>
+            <a:r>
+              <a:rPr lang="en-US" sz="1200" dirty="0">
+                <a:solidFill>
+                  <a:srgbClr val="FBBF24"/>
+                </a:solidFill>
+                <a:latin typeface="Consolas" pitchFamily="34" charset="0"/>
+                <a:ea typeface="Consolas" pitchFamily="34" charset="-122"/>
+                <a:cs typeface="Consolas" pitchFamily="34" charset="-120"/>
+              </a:rPr>
+              <a:t>"local-then-cloud"</a:t>
+            </a:r>
+            <a:pPr indent="0" marL="0">
+              <a:buNone/>
+            </a:pPr>
+            <a:r>
+              <a:rPr lang="en-US" sz="1200" dirty="0">
+                <a:solidFill>
+                  <a:srgbClr val="B8B5D9"/>
+                </a:solidFill>
+                <a:latin typeface="Consolas" pitchFamily="34" charset="0"/>
+                <a:ea typeface="Consolas" pitchFamily="34" charset="-122"/>
+                <a:cs typeface="Consolas" pitchFamily="34" charset="-120"/>
+              </a:rPr>
+              <a:t>,</a:t>
+            </a:r>
+            <a:pPr indent="0" marL="0">
+              <a:buNone/>
+            </a:pPr>
+            <a:r>
+              <a:rPr lang="en-US" sz="1200" dirty="0">
+                <a:solidFill>
+                  <a:srgbClr val="FAF8FF"/>
+                </a:solidFill>
+                <a:latin typeface="Consolas" pitchFamily="34" charset="0"/>
+                <a:ea typeface="Consolas" pitchFamily="34" charset="-122"/>
+                <a:cs typeface="Consolas" pitchFamily="34" charset="-120"/>
+              </a:rPr>
+              <a:t> triage</a:t>
+            </a:r>
+            <a:pPr indent="0" marL="0">
+              <a:buNone/>
+            </a:pPr>
+            <a:r>
+              <a:rPr lang="en-US" sz="1200" dirty="0">
+                <a:solidFill>
+                  <a:srgbClr val="B8B5D9"/>
+                </a:solidFill>
+                <a:latin typeface="Consolas" pitchFamily="34" charset="0"/>
+                <a:ea typeface="Consolas" pitchFamily="34" charset="-122"/>
+                <a:cs typeface="Consolas" pitchFamily="34" charset="-120"/>
+              </a:rPr>
+              <a:t>,</a:t>
+            </a:r>
+            <a:pPr indent="0" marL="0">
+              <a:buNone/>
+            </a:pPr>
+            <a:r>
+              <a:rPr lang="en-US" sz="1200" dirty="0">
+                <a:solidFill>
+                  <a:srgbClr val="FAF8FF"/>
+                </a:solidFill>
+                <a:latin typeface="Consolas" pitchFamily="34" charset="0"/>
+                <a:ea typeface="Consolas" pitchFamily="34" charset="-122"/>
+                <a:cs typeface="Consolas" pitchFamily="34" charset="-120"/>
+              </a:rPr>
+              <a:t> expert</a:t>
+            </a:r>
+            <a:pPr indent="0" marL="0">
+              <a:buNone/>
+            </a:pPr>
+            <a:r>
+              <a:rPr lang="en-US" sz="1200" dirty="0">
+                <a:solidFill>
+                  <a:srgbClr val="B8B5D9"/>
+                </a:solidFill>
+                <a:latin typeface="Consolas" pitchFamily="34" charset="0"/>
+                <a:ea typeface="Consolas" pitchFamily="34" charset="-122"/>
+                <a:cs typeface="Consolas" pitchFamily="34" charset="-120"/>
+              </a:rPr>
+              <a:t>)</a:t>
+            </a:r>
+            <a:pPr indent="0" marL="0">
+              <a:buNone/>
+            </a:pPr>
+            <a:endParaRPr lang="en-US" sz="1200" dirty="0"/>
+          </a:p>
+          <a:p>
+            <a:pPr indent="0" marL="0">
+              <a:buNone/>
+            </a:pPr>
+            <a:r>
+              <a:rPr lang="en-US" sz="1200" dirty="0">
+                <a:solidFill>
+                  <a:srgbClr val="FAF8FF"/>
+                </a:solidFill>
+                <a:latin typeface="Consolas" pitchFamily="34" charset="0"/>
+                <a:ea typeface="Consolas" pitchFamily="34" charset="-122"/>
+                <a:cs typeface="Consolas" pitchFamily="34" charset="-120"/>
+              </a:rPr>
+              <a:t>    </a:t>
+            </a:r>
+            <a:pPr indent="0" marL="0">
+              <a:buNone/>
+            </a:pPr>
+            <a:r>
+              <a:rPr lang="en-US" sz="1200" dirty="0">
+                <a:solidFill>
+                  <a:srgbClr val="B8B5D9"/>
+                </a:solidFill>
+                <a:latin typeface="Consolas" pitchFamily="34" charset="0"/>
+                <a:ea typeface="Consolas" pitchFamily="34" charset="-122"/>
+                <a:cs typeface="Consolas" pitchFamily="34" charset="-120"/>
+              </a:rPr>
+              <a:t>.</a:t>
+            </a:r>
+            <a:pPr indent="0" marL="0">
+              <a:buNone/>
+            </a:pPr>
+            <a:r>
+              <a:rPr lang="en-US" sz="1200" dirty="0">
+                <a:solidFill>
+                  <a:srgbClr val="86EFAC"/>
+                </a:solidFill>
+                <a:latin typeface="Consolas" pitchFamily="34" charset="0"/>
+                <a:ea typeface="Consolas" pitchFamily="34" charset="-122"/>
+                <a:cs typeface="Consolas" pitchFamily="34" charset="-120"/>
+              </a:rPr>
+              <a:t>AsAgent</a:t>
+            </a:r>
+            <a:pPr indent="0" marL="0">
+              <a:buNone/>
+            </a:pPr>
+            <a:r>
+              <a:rPr lang="en-US" sz="1200" dirty="0">
+                <a:solidFill>
+                  <a:srgbClr val="B8B5D9"/>
+                </a:solidFill>
+                <a:latin typeface="Consolas" pitchFamily="34" charset="0"/>
+                <a:ea typeface="Consolas" pitchFamily="34" charset="-122"/>
+                <a:cs typeface="Consolas" pitchFamily="34" charset="-120"/>
+              </a:rPr>
+              <a:t>(</a:t>
+            </a:r>
+            <a:pPr indent="0" marL="0">
+              <a:buNone/>
+            </a:pPr>
+            <a:r>
+              <a:rPr lang="en-US" sz="1200" dirty="0">
+                <a:solidFill>
+                  <a:srgbClr val="B8B5D9"/>
+                </a:solidFill>
+                <a:latin typeface="Consolas" pitchFamily="34" charset="0"/>
+                <a:ea typeface="Consolas" pitchFamily="34" charset="-122"/>
+                <a:cs typeface="Consolas" pitchFamily="34" charset="-120"/>
+              </a:rPr>
+              <a:t>)</a:t>
+            </a:r>
+            <a:pPr indent="0" marL="0">
+              <a:buNone/>
+            </a:pPr>
+            <a:r>
+              <a:rPr lang="en-US" sz="1200" dirty="0">
+                <a:solidFill>
+                  <a:srgbClr val="B8B5D9"/>
+                </a:solidFill>
+                <a:latin typeface="Consolas" pitchFamily="34" charset="0"/>
+                <a:ea typeface="Consolas" pitchFamily="34" charset="-122"/>
+                <a:cs typeface="Consolas" pitchFamily="34" charset="-120"/>
+              </a:rPr>
+              <a:t>;</a:t>
+            </a:r>
+            <a:pPr indent="0" marL="0">
+              <a:buNone/>
+            </a:pPr>
+            <a:endParaRPr lang="en-US" sz="1200" dirty="0"/>
+          </a:p>
+          <a:p>
+            <a:pPr indent="0" marL="0">
+              <a:buNone/>
+            </a:pPr>
+            <a:endParaRPr lang="en-US" sz="1200" dirty="0"/>
+          </a:p>
+          <a:p>
+            <a:pPr indent="0" marL="0">
+              <a:buNone/>
+            </a:pPr>
+            <a:r>
+              <a:rPr lang="en-US" sz="1200" dirty="0">
+                <a:solidFill>
+                  <a:srgbClr val="FB7185"/>
+                </a:solidFill>
+                <a:latin typeface="Consolas" pitchFamily="34" charset="0"/>
+                <a:ea typeface="Consolas" pitchFamily="34" charset="-122"/>
+                <a:cs typeface="Consolas" pitchFamily="34" charset="-120"/>
+              </a:rPr>
+              <a:t>await</a:t>
+            </a:r>
+            <a:pPr indent="0" marL="0">
+              <a:buNone/>
+            </a:pPr>
+            <a:r>
+              <a:rPr lang="en-US" sz="1200" dirty="0">
+                <a:solidFill>
+                  <a:srgbClr val="FAF8FF"/>
+                </a:solidFill>
+                <a:latin typeface="Consolas" pitchFamily="34" charset="0"/>
+                <a:ea typeface="Consolas" pitchFamily="34" charset="-122"/>
+                <a:cs typeface="Consolas" pitchFamily="34" charset="-120"/>
+              </a:rPr>
               <a:t> </a:t>
             </a:r>
             <a:pPr indent="0" marL="0">
               <a:buNone/>
             </a:pPr>
             <a:r>
-              <a:rPr lang="en-US" sz="1400" dirty="0">
+              <a:rPr lang="en-US" sz="1200" dirty="0">
                 <a:solidFill>
                   <a:srgbClr val="FB7185"/>
                 </a:solidFill>
@@ -6932,13 +8495,13 @@
                 <a:ea typeface="Consolas" pitchFamily="34" charset="-122"/>
                 <a:cs typeface="Consolas" pitchFamily="34" charset="-120"/>
               </a:rPr>
-              <a:t>await</a:t>
-            </a:r>
-            <a:pPr indent="0" marL="0">
-              <a:buNone/>
-            </a:pPr>
-            <a:r>
-              <a:rPr lang="en-US" sz="1400" dirty="0">
+              <a:t>foreach</a:t>
+            </a:r>
+            <a:pPr indent="0" marL="0">
+              <a:buNone/>
+            </a:pPr>
+            <a:r>
+              <a:rPr lang="en-US" sz="1200" dirty="0">
                 <a:solidFill>
                   <a:srgbClr val="FAF8FF"/>
                 </a:solidFill>
@@ -6946,13 +8509,13 @@
                 <a:ea typeface="Consolas" pitchFamily="34" charset="-122"/>
                 <a:cs typeface="Consolas" pitchFamily="34" charset="-120"/>
               </a:rPr>
-              <a:t> FoundryLocalManager</a:t>
-            </a:r>
-            <a:pPr indent="0" marL="0">
-              <a:buNone/>
-            </a:pPr>
-            <a:r>
-              <a:rPr lang="en-US" sz="1400" dirty="0">
+              <a:t> </a:t>
+            </a:r>
+            <a:pPr indent="0" marL="0">
+              <a:buNone/>
+            </a:pPr>
+            <a:r>
+              <a:rPr lang="en-US" sz="1200" dirty="0">
                 <a:solidFill>
                   <a:srgbClr val="B8B5D9"/>
                 </a:solidFill>
@@ -6960,13 +8523,83 @@
                 <a:ea typeface="Consolas" pitchFamily="34" charset="-122"/>
                 <a:cs typeface="Consolas" pitchFamily="34" charset="-120"/>
               </a:rPr>
+              <a:t>(</a:t>
+            </a:r>
+            <a:pPr indent="0" marL="0">
+              <a:buNone/>
+            </a:pPr>
+            <a:r>
+              <a:rPr lang="en-US" sz="1200" dirty="0">
+                <a:solidFill>
+                  <a:srgbClr val="FB7185"/>
+                </a:solidFill>
+                <a:latin typeface="Consolas" pitchFamily="34" charset="0"/>
+                <a:ea typeface="Consolas" pitchFamily="34" charset="-122"/>
+                <a:cs typeface="Consolas" pitchFamily="34" charset="-120"/>
+              </a:rPr>
+              <a:t>var</a:t>
+            </a:r>
+            <a:pPr indent="0" marL="0">
+              <a:buNone/>
+            </a:pPr>
+            <a:r>
+              <a:rPr lang="en-US" sz="1200" dirty="0">
+                <a:solidFill>
+                  <a:srgbClr val="FAF8FF"/>
+                </a:solidFill>
+                <a:latin typeface="Consolas" pitchFamily="34" charset="0"/>
+                <a:ea typeface="Consolas" pitchFamily="34" charset="-122"/>
+                <a:cs typeface="Consolas" pitchFamily="34" charset="-120"/>
+              </a:rPr>
+              <a:t> update </a:t>
+            </a:r>
+            <a:pPr indent="0" marL="0">
+              <a:buNone/>
+            </a:pPr>
+            <a:r>
+              <a:rPr lang="en-US" sz="1200" dirty="0">
+                <a:solidFill>
+                  <a:srgbClr val="FB7185"/>
+                </a:solidFill>
+                <a:latin typeface="Consolas" pitchFamily="34" charset="0"/>
+                <a:ea typeface="Consolas" pitchFamily="34" charset="-122"/>
+                <a:cs typeface="Consolas" pitchFamily="34" charset="-120"/>
+              </a:rPr>
+              <a:t>in</a:t>
+            </a:r>
+            <a:pPr indent="0" marL="0">
+              <a:buNone/>
+            </a:pPr>
+            <a:r>
+              <a:rPr lang="en-US" sz="1200" dirty="0">
+                <a:solidFill>
+                  <a:srgbClr val="FAF8FF"/>
+                </a:solidFill>
+                <a:latin typeface="Consolas" pitchFamily="34" charset="0"/>
+                <a:ea typeface="Consolas" pitchFamily="34" charset="-122"/>
+                <a:cs typeface="Consolas" pitchFamily="34" charset="-120"/>
+              </a:rPr>
+              <a:t> workflow</a:t>
+            </a:r>
+            <a:pPr indent="0" marL="0">
+              <a:buNone/>
+            </a:pPr>
+            <a:r>
+              <a:rPr lang="en-US" sz="1200" dirty="0">
+                <a:solidFill>
+                  <a:srgbClr val="B8B5D9"/>
+                </a:solidFill>
+                <a:latin typeface="Consolas" pitchFamily="34" charset="0"/>
+                <a:ea typeface="Consolas" pitchFamily="34" charset="-122"/>
+                <a:cs typeface="Consolas" pitchFamily="34" charset="-120"/>
+              </a:rPr>
               <a:t>.</a:t>
             </a:r>
             <a:pPr indent="0" marL="0">
               <a:buNone/>
             </a:pPr>
             <a:r>
-              <a:rPr lang="en-US" sz="1400" dirty="0">
+              <a:rPr lang="en-US" sz="1200" dirty="0">
                 <a:solidFill>
                   <a:srgbClr val="86EFAC"/>
                 </a:solidFill>
@@ -6974,13 +8607,13 @@
                 <a:ea typeface="Consolas" pitchFamily="34" charset="-122"/>
                 <a:cs typeface="Consolas" pitchFamily="34" charset="-120"/>
               </a:rPr>
-              <a:t>StartModelAsync</a:t>
-            </a:r>
-            <a:pPr indent="0" marL="0">
-              <a:buNone/>
-            </a:pPr>
-            <a:r>
-              <a:rPr lang="en-US" sz="1400" dirty="0">
+              <a:t>RunStreamingAsync</a:t>
+            </a:r>
+            <a:pPr indent="0" marL="0">
+              <a:buNone/>
+            </a:pPr>
+            <a:r>
+              <a:rPr lang="en-US" sz="1200" dirty="0">
                 <a:solidFill>
                   <a:srgbClr val="B8B5D9"/>
                 </a:solidFill>
@@ -6994,21 +8627,21 @@
               <a:buNone/>
             </a:pPr>
             <a:r>
-              <a:rPr lang="en-US" sz="1400" dirty="0">
-                <a:solidFill>
-                  <a:srgbClr val="FBBF24"/>
-                </a:solidFill>
-                <a:latin typeface="Consolas" pitchFamily="34" charset="0"/>
-                <a:ea typeface="Consolas" pitchFamily="34" charset="-122"/>
-                <a:cs typeface="Consolas" pitchFamily="34" charset="-120"/>
-              </a:rPr>
-              <a:t>"phi-4-mini"</a:t>
-            </a:r>
-            <a:pPr indent="0" marL="0">
-              <a:buNone/>
-            </a:pPr>
-            <a:r>
-              <a:rPr lang="en-US" sz="1400" dirty="0">
+              <a:rPr lang="en-US" sz="1200" dirty="0">
+                <a:solidFill>
+                  <a:srgbClr val="FAF8FF"/>
+                </a:solidFill>
+                <a:latin typeface="Consolas" pitchFamily="34" charset="0"/>
+                <a:ea typeface="Consolas" pitchFamily="34" charset="-122"/>
+                <a:cs typeface="Consolas" pitchFamily="34" charset="-120"/>
+              </a:rPr>
+              <a:t>userInput</a:t>
+            </a:r>
+            <a:pPr indent="0" marL="0">
+              <a:buNone/>
+            </a:pPr>
+            <a:r>
+              <a:rPr lang="en-US" sz="1200" dirty="0">
                 <a:solidFill>
                   <a:srgbClr val="B8B5D9"/>
                 </a:solidFill>
@@ -7022,7 +8655,7 @@
               <a:buNone/>
             </a:pPr>
             <a:r>
-              <a:rPr lang="en-US" sz="1400" dirty="0">
+              <a:rPr lang="en-US" sz="1200" dirty="0">
                 <a:solidFill>
                   <a:srgbClr val="B8B5D9"/>
                 </a:solidFill>
@@ -7030,1195 +8663,141 @@
                 <a:ea typeface="Consolas" pitchFamily="34" charset="-122"/>
                 <a:cs typeface="Consolas" pitchFamily="34" charset="-120"/>
               </a:rPr>
+              <a:t>)</a:t>
+            </a:r>
+            <a:pPr indent="0" marL="0">
+              <a:buNone/>
+            </a:pPr>
+            <a:endParaRPr lang="en-US" sz="1200" dirty="0"/>
+          </a:p>
+          <a:p>
+            <a:pPr indent="0" marL="0">
+              <a:buNone/>
+            </a:pPr>
+            <a:r>
+              <a:rPr lang="en-US" sz="1200" dirty="0">
+                <a:solidFill>
+                  <a:srgbClr val="FAF8FF"/>
+                </a:solidFill>
+                <a:latin typeface="Consolas" pitchFamily="34" charset="0"/>
+                <a:ea typeface="Consolas" pitchFamily="34" charset="-122"/>
+                <a:cs typeface="Consolas" pitchFamily="34" charset="-120"/>
+              </a:rPr>
+              <a:t>    Console</a:t>
+            </a:r>
+            <a:pPr indent="0" marL="0">
+              <a:buNone/>
+            </a:pPr>
+            <a:r>
+              <a:rPr lang="en-US" sz="1200" dirty="0">
+                <a:solidFill>
+                  <a:srgbClr val="B8B5D9"/>
+                </a:solidFill>
+                <a:latin typeface="Consolas" pitchFamily="34" charset="0"/>
+                <a:ea typeface="Consolas" pitchFamily="34" charset="-122"/>
+                <a:cs typeface="Consolas" pitchFamily="34" charset="-120"/>
+              </a:rPr>
+              <a:t>.</a:t>
+            </a:r>
+            <a:pPr indent="0" marL="0">
+              <a:buNone/>
+            </a:pPr>
+            <a:r>
+              <a:rPr lang="en-US" sz="1200" dirty="0">
+                <a:solidFill>
+                  <a:srgbClr val="86EFAC"/>
+                </a:solidFill>
+                <a:latin typeface="Consolas" pitchFamily="34" charset="0"/>
+                <a:ea typeface="Consolas" pitchFamily="34" charset="-122"/>
+                <a:cs typeface="Consolas" pitchFamily="34" charset="-120"/>
+              </a:rPr>
+              <a:t>Write</a:t>
+            </a:r>
+            <a:pPr indent="0" marL="0">
+              <a:buNone/>
+            </a:pPr>
+            <a:r>
+              <a:rPr lang="en-US" sz="1200" dirty="0">
+                <a:solidFill>
+                  <a:srgbClr val="B8B5D9"/>
+                </a:solidFill>
+                <a:latin typeface="Consolas" pitchFamily="34" charset="0"/>
+                <a:ea typeface="Consolas" pitchFamily="34" charset="-122"/>
+                <a:cs typeface="Consolas" pitchFamily="34" charset="-120"/>
+              </a:rPr>
+              <a:t>(</a:t>
+            </a:r>
+            <a:pPr indent="0" marL="0">
+              <a:buNone/>
+            </a:pPr>
+            <a:r>
+              <a:rPr lang="en-US" sz="1200" dirty="0">
+                <a:solidFill>
+                  <a:srgbClr val="FAF8FF"/>
+                </a:solidFill>
+                <a:latin typeface="Consolas" pitchFamily="34" charset="0"/>
+                <a:ea typeface="Consolas" pitchFamily="34" charset="-122"/>
+                <a:cs typeface="Consolas" pitchFamily="34" charset="-120"/>
+              </a:rPr>
+              <a:t>update</a:t>
+            </a:r>
+            <a:pPr indent="0" marL="0">
+              <a:buNone/>
+            </a:pPr>
+            <a:r>
+              <a:rPr lang="en-US" sz="1200" dirty="0">
+                <a:solidFill>
+                  <a:srgbClr val="B8B5D9"/>
+                </a:solidFill>
+                <a:latin typeface="Consolas" pitchFamily="34" charset="0"/>
+                <a:ea typeface="Consolas" pitchFamily="34" charset="-122"/>
+                <a:cs typeface="Consolas" pitchFamily="34" charset="-120"/>
+              </a:rPr>
+              <a:t>.</a:t>
+            </a:r>
+            <a:pPr indent="0" marL="0">
+              <a:buNone/>
+            </a:pPr>
+            <a:r>
+              <a:rPr lang="en-US" sz="1200" dirty="0">
+                <a:solidFill>
+                  <a:srgbClr val="FAF8FF"/>
+                </a:solidFill>
+                <a:latin typeface="Consolas" pitchFamily="34" charset="0"/>
+                <a:ea typeface="Consolas" pitchFamily="34" charset="-122"/>
+                <a:cs typeface="Consolas" pitchFamily="34" charset="-120"/>
+              </a:rPr>
+              <a:t>Text</a:t>
+            </a:r>
+            <a:pPr indent="0" marL="0">
+              <a:buNone/>
+            </a:pPr>
+            <a:r>
+              <a:rPr lang="en-US" sz="1200" dirty="0">
+                <a:solidFill>
+                  <a:srgbClr val="B8B5D9"/>
+                </a:solidFill>
+                <a:latin typeface="Consolas" pitchFamily="34" charset="0"/>
+                <a:ea typeface="Consolas" pitchFamily="34" charset="-122"/>
+                <a:cs typeface="Consolas" pitchFamily="34" charset="-120"/>
+              </a:rPr>
+              <a:t>)</a:t>
+            </a:r>
+            <a:pPr indent="0" marL="0">
+              <a:buNone/>
+            </a:pPr>
+            <a:r>
+              <a:rPr lang="en-US" sz="1200" dirty="0">
+                <a:solidFill>
+                  <a:srgbClr val="B8B5D9"/>
+                </a:solidFill>
+                <a:latin typeface="Consolas" pitchFamily="34" charset="0"/>
+                <a:ea typeface="Consolas" pitchFamily="34" charset="-122"/>
+                <a:cs typeface="Consolas" pitchFamily="34" charset="-120"/>
+              </a:rPr>
               <a:t>;</a:t>
             </a:r>
-            <a:pPr indent="0" marL="0">
-              <a:buNone/>
-            </a:pPr>
-            <a:endParaRPr lang="en-US" sz="1400" dirty="0"/>
-          </a:p>
-          <a:p>
-            <a:pPr indent="0" marL="0">
-              <a:buNone/>
-            </a:pPr>
-            <a:r>
-              <a:rPr lang="en-US" sz="1400" dirty="0">
-                <a:solidFill>
-                  <a:srgbClr val="FAF8FF"/>
-                </a:solidFill>
-                <a:latin typeface="Consolas" pitchFamily="34" charset="0"/>
-                <a:ea typeface="Consolas" pitchFamily="34" charset="-122"/>
-                <a:cs typeface="Consolas" pitchFamily="34" charset="-120"/>
-              </a:rPr>
-              <a:t>chatClient </a:t>
-            </a:r>
-            <a:pPr indent="0" marL="0">
-              <a:buNone/>
-            </a:pPr>
-            <a:r>
-              <a:rPr lang="en-US" sz="1400" dirty="0">
-                <a:solidFill>
-                  <a:srgbClr val="CFCBED"/>
-                </a:solidFill>
-                <a:latin typeface="Consolas" pitchFamily="34" charset="0"/>
-                <a:ea typeface="Consolas" pitchFamily="34" charset="-122"/>
-                <a:cs typeface="Consolas" pitchFamily="34" charset="-120"/>
-              </a:rPr>
-              <a:t>=</a:t>
-            </a:r>
-            <a:pPr indent="0" marL="0">
-              <a:buNone/>
-            </a:pPr>
-            <a:r>
-              <a:rPr lang="en-US" sz="1400" dirty="0">
-                <a:solidFill>
-                  <a:srgbClr val="FAF8FF"/>
-                </a:solidFill>
-                <a:latin typeface="Consolas" pitchFamily="34" charset="0"/>
-                <a:ea typeface="Consolas" pitchFamily="34" charset="-122"/>
-                <a:cs typeface="Consolas" pitchFamily="34" charset="-120"/>
-              </a:rPr>
-              <a:t> </a:t>
-            </a:r>
-            <a:pPr indent="0" marL="0">
-              <a:buNone/>
-            </a:pPr>
-            <a:r>
-              <a:rPr lang="en-US" sz="1400" dirty="0">
-                <a:solidFill>
-                  <a:srgbClr val="FB7185"/>
-                </a:solidFill>
-                <a:latin typeface="Consolas" pitchFamily="34" charset="0"/>
-                <a:ea typeface="Consolas" pitchFamily="34" charset="-122"/>
-                <a:cs typeface="Consolas" pitchFamily="34" charset="-120"/>
-              </a:rPr>
-              <a:t>new</a:t>
-            </a:r>
-            <a:pPr indent="0" marL="0">
-              <a:buNone/>
-            </a:pPr>
-            <a:r>
-              <a:rPr lang="en-US" sz="1400" dirty="0">
-                <a:solidFill>
-                  <a:srgbClr val="FAF8FF"/>
-                </a:solidFill>
-                <a:latin typeface="Consolas" pitchFamily="34" charset="0"/>
-                <a:ea typeface="Consolas" pitchFamily="34" charset="-122"/>
-                <a:cs typeface="Consolas" pitchFamily="34" charset="-120"/>
-              </a:rPr>
-              <a:t> </a:t>
-            </a:r>
-            <a:pPr indent="0" marL="0">
-              <a:buNone/>
-            </a:pPr>
-            <a:r>
-              <a:rPr lang="en-US" sz="1400" dirty="0">
-                <a:solidFill>
-                  <a:srgbClr val="FAF8FF"/>
-                </a:solidFill>
-                <a:latin typeface="Consolas" pitchFamily="34" charset="0"/>
-                <a:ea typeface="Consolas" pitchFamily="34" charset="-122"/>
-                <a:cs typeface="Consolas" pitchFamily="34" charset="-120"/>
-              </a:rPr>
-              <a:t>OpenAIClient</a:t>
-            </a:r>
-            <a:pPr indent="0" marL="0">
-              <a:buNone/>
-            </a:pPr>
-            <a:r>
-              <a:rPr lang="en-US" sz="1400" dirty="0">
-                <a:solidFill>
-                  <a:srgbClr val="B8B5D9"/>
-                </a:solidFill>
-                <a:latin typeface="Consolas" pitchFamily="34" charset="0"/>
-                <a:ea typeface="Consolas" pitchFamily="34" charset="-122"/>
-                <a:cs typeface="Consolas" pitchFamily="34" charset="-120"/>
-              </a:rPr>
-              <a:t>(</a:t>
-            </a:r>
-            <a:pPr indent="0" marL="0">
-              <a:buNone/>
-            </a:pPr>
-            <a:endParaRPr lang="en-US" sz="1400" dirty="0"/>
-          </a:p>
-          <a:p>
-            <a:pPr indent="0" marL="0">
-              <a:buNone/>
-            </a:pPr>
-            <a:r>
-              <a:rPr lang="en-US" sz="1400" dirty="0">
-                <a:solidFill>
-                  <a:srgbClr val="FAF8FF"/>
-                </a:solidFill>
-                <a:latin typeface="Consolas" pitchFamily="34" charset="0"/>
-                <a:ea typeface="Consolas" pitchFamily="34" charset="-122"/>
-                <a:cs typeface="Consolas" pitchFamily="34" charset="-120"/>
-              </a:rPr>
-              <a:t>        </a:t>
-            </a:r>
-            <a:pPr indent="0" marL="0">
-              <a:buNone/>
-            </a:pPr>
-            <a:r>
-              <a:rPr lang="en-US" sz="1400" dirty="0">
-                <a:solidFill>
-                  <a:srgbClr val="FB7185"/>
-                </a:solidFill>
-                <a:latin typeface="Consolas" pitchFamily="34" charset="0"/>
-                <a:ea typeface="Consolas" pitchFamily="34" charset="-122"/>
-                <a:cs typeface="Consolas" pitchFamily="34" charset="-120"/>
-              </a:rPr>
-              <a:t>new</a:t>
-            </a:r>
-            <a:pPr indent="0" marL="0">
-              <a:buNone/>
-            </a:pPr>
-            <a:r>
-              <a:rPr lang="en-US" sz="1400" dirty="0">
-                <a:solidFill>
-                  <a:srgbClr val="FAF8FF"/>
-                </a:solidFill>
-                <a:latin typeface="Consolas" pitchFamily="34" charset="0"/>
-                <a:ea typeface="Consolas" pitchFamily="34" charset="-122"/>
-                <a:cs typeface="Consolas" pitchFamily="34" charset="-120"/>
-              </a:rPr>
-              <a:t> </a:t>
-            </a:r>
-            <a:pPr indent="0" marL="0">
-              <a:buNone/>
-            </a:pPr>
-            <a:r>
-              <a:rPr lang="en-US" sz="1400" dirty="0">
-                <a:solidFill>
-                  <a:srgbClr val="FAF8FF"/>
-                </a:solidFill>
-                <a:latin typeface="Consolas" pitchFamily="34" charset="0"/>
-                <a:ea typeface="Consolas" pitchFamily="34" charset="-122"/>
-                <a:cs typeface="Consolas" pitchFamily="34" charset="-120"/>
-              </a:rPr>
-              <a:t>ApiKeyCredential</a:t>
-            </a:r>
-            <a:pPr indent="0" marL="0">
-              <a:buNone/>
-            </a:pPr>
-            <a:r>
-              <a:rPr lang="en-US" sz="1400" dirty="0">
-                <a:solidFill>
-                  <a:srgbClr val="B8B5D9"/>
-                </a:solidFill>
-                <a:latin typeface="Consolas" pitchFamily="34" charset="0"/>
-                <a:ea typeface="Consolas" pitchFamily="34" charset="-122"/>
-                <a:cs typeface="Consolas" pitchFamily="34" charset="-120"/>
-              </a:rPr>
-              <a:t>(</a:t>
-            </a:r>
-            <a:pPr indent="0" marL="0">
-              <a:buNone/>
-            </a:pPr>
-            <a:r>
-              <a:rPr lang="en-US" sz="1400" dirty="0">
-                <a:solidFill>
-                  <a:srgbClr val="FBBF24"/>
-                </a:solidFill>
-                <a:latin typeface="Consolas" pitchFamily="34" charset="0"/>
-                <a:ea typeface="Consolas" pitchFamily="34" charset="-122"/>
-                <a:cs typeface="Consolas" pitchFamily="34" charset="-120"/>
-              </a:rPr>
-              <a:t>"nope"</a:t>
-            </a:r>
-            <a:pPr indent="0" marL="0">
-              <a:buNone/>
-            </a:pPr>
-            <a:r>
-              <a:rPr lang="en-US" sz="1400" dirty="0">
-                <a:solidFill>
-                  <a:srgbClr val="B8B5D9"/>
-                </a:solidFill>
-                <a:latin typeface="Consolas" pitchFamily="34" charset="0"/>
-                <a:ea typeface="Consolas" pitchFamily="34" charset="-122"/>
-                <a:cs typeface="Consolas" pitchFamily="34" charset="-120"/>
-              </a:rPr>
-              <a:t>)</a:t>
-            </a:r>
-            <a:pPr indent="0" marL="0">
-              <a:buNone/>
-            </a:pPr>
-            <a:r>
-              <a:rPr lang="en-US" sz="1400" dirty="0">
-                <a:solidFill>
-                  <a:srgbClr val="B8B5D9"/>
-                </a:solidFill>
-                <a:latin typeface="Consolas" pitchFamily="34" charset="0"/>
-                <a:ea typeface="Consolas" pitchFamily="34" charset="-122"/>
-                <a:cs typeface="Consolas" pitchFamily="34" charset="-120"/>
-              </a:rPr>
-              <a:t>,</a:t>
-            </a:r>
-            <a:pPr indent="0" marL="0">
-              <a:buNone/>
-            </a:pPr>
-            <a:endParaRPr lang="en-US" sz="1400" dirty="0"/>
-          </a:p>
-          <a:p>
-            <a:pPr indent="0" marL="0">
-              <a:buNone/>
-            </a:pPr>
-            <a:r>
-              <a:rPr lang="en-US" sz="1400" dirty="0">
-                <a:solidFill>
-                  <a:srgbClr val="FAF8FF"/>
-                </a:solidFill>
-                <a:latin typeface="Consolas" pitchFamily="34" charset="0"/>
-                <a:ea typeface="Consolas" pitchFamily="34" charset="-122"/>
-                <a:cs typeface="Consolas" pitchFamily="34" charset="-120"/>
-              </a:rPr>
-              <a:t>        </a:t>
-            </a:r>
-            <a:pPr indent="0" marL="0">
-              <a:buNone/>
-            </a:pPr>
-            <a:r>
-              <a:rPr lang="en-US" sz="1400" dirty="0">
-                <a:solidFill>
-                  <a:srgbClr val="FB7185"/>
-                </a:solidFill>
-                <a:latin typeface="Consolas" pitchFamily="34" charset="0"/>
-                <a:ea typeface="Consolas" pitchFamily="34" charset="-122"/>
-                <a:cs typeface="Consolas" pitchFamily="34" charset="-120"/>
-              </a:rPr>
-              <a:t>new</a:t>
-            </a:r>
-            <a:pPr indent="0" marL="0">
-              <a:buNone/>
-            </a:pPr>
-            <a:r>
-              <a:rPr lang="en-US" sz="1400" dirty="0">
-                <a:solidFill>
-                  <a:srgbClr val="FAF8FF"/>
-                </a:solidFill>
-                <a:latin typeface="Consolas" pitchFamily="34" charset="0"/>
-                <a:ea typeface="Consolas" pitchFamily="34" charset="-122"/>
-                <a:cs typeface="Consolas" pitchFamily="34" charset="-120"/>
-              </a:rPr>
-              <a:t> </a:t>
-            </a:r>
-            <a:pPr indent="0" marL="0">
-              <a:buNone/>
-            </a:pPr>
-            <a:r>
-              <a:rPr lang="en-US" sz="1400" dirty="0">
-                <a:solidFill>
-                  <a:srgbClr val="FAF8FF"/>
-                </a:solidFill>
-                <a:latin typeface="Consolas" pitchFamily="34" charset="0"/>
-                <a:ea typeface="Consolas" pitchFamily="34" charset="-122"/>
-                <a:cs typeface="Consolas" pitchFamily="34" charset="-120"/>
-              </a:rPr>
-              <a:t>OpenAIClientOptions</a:t>
-            </a:r>
-            <a:pPr indent="0" marL="0">
-              <a:buNone/>
-            </a:pPr>
-            <a:r>
-              <a:rPr lang="en-US" sz="1400" dirty="0">
-                <a:solidFill>
-                  <a:srgbClr val="FAF8FF"/>
-                </a:solidFill>
-                <a:latin typeface="Consolas" pitchFamily="34" charset="0"/>
-                <a:ea typeface="Consolas" pitchFamily="34" charset="-122"/>
-                <a:cs typeface="Consolas" pitchFamily="34" charset="-120"/>
-              </a:rPr>
-              <a:t> </a:t>
-            </a:r>
-            <a:pPr indent="0" marL="0">
-              <a:buNone/>
-            </a:pPr>
-            <a:r>
-              <a:rPr lang="en-US" sz="1400" dirty="0">
-                <a:solidFill>
-                  <a:srgbClr val="B8B5D9"/>
-                </a:solidFill>
-                <a:latin typeface="Consolas" pitchFamily="34" charset="0"/>
-                <a:ea typeface="Consolas" pitchFamily="34" charset="-122"/>
-                <a:cs typeface="Consolas" pitchFamily="34" charset="-120"/>
-              </a:rPr>
-              <a:t>{</a:t>
-            </a:r>
-            <a:pPr indent="0" marL="0">
-              <a:buNone/>
-            </a:pPr>
-            <a:r>
-              <a:rPr lang="en-US" sz="1400" dirty="0">
-                <a:solidFill>
-                  <a:srgbClr val="FAF8FF"/>
-                </a:solidFill>
-                <a:latin typeface="Consolas" pitchFamily="34" charset="0"/>
-                <a:ea typeface="Consolas" pitchFamily="34" charset="-122"/>
-                <a:cs typeface="Consolas" pitchFamily="34" charset="-120"/>
-              </a:rPr>
-              <a:t> Endpoint </a:t>
-            </a:r>
-            <a:pPr indent="0" marL="0">
-              <a:buNone/>
-            </a:pPr>
-            <a:r>
-              <a:rPr lang="en-US" sz="1400" dirty="0">
-                <a:solidFill>
-                  <a:srgbClr val="CFCBED"/>
-                </a:solidFill>
-                <a:latin typeface="Consolas" pitchFamily="34" charset="0"/>
-                <a:ea typeface="Consolas" pitchFamily="34" charset="-122"/>
-                <a:cs typeface="Consolas" pitchFamily="34" charset="-120"/>
-              </a:rPr>
-              <a:t>=</a:t>
-            </a:r>
-            <a:pPr indent="0" marL="0">
-              <a:buNone/>
-            </a:pPr>
-            <a:r>
-              <a:rPr lang="en-US" sz="1400" dirty="0">
-                <a:solidFill>
-                  <a:srgbClr val="FAF8FF"/>
-                </a:solidFill>
-                <a:latin typeface="Consolas" pitchFamily="34" charset="0"/>
-                <a:ea typeface="Consolas" pitchFamily="34" charset="-122"/>
-                <a:cs typeface="Consolas" pitchFamily="34" charset="-120"/>
-              </a:rPr>
-              <a:t> mgr</a:t>
-            </a:r>
-            <a:pPr indent="0" marL="0">
-              <a:buNone/>
-            </a:pPr>
-            <a:r>
-              <a:rPr lang="en-US" sz="1400" dirty="0">
-                <a:solidFill>
-                  <a:srgbClr val="B8B5D9"/>
-                </a:solidFill>
-                <a:latin typeface="Consolas" pitchFamily="34" charset="0"/>
-                <a:ea typeface="Consolas" pitchFamily="34" charset="-122"/>
-                <a:cs typeface="Consolas" pitchFamily="34" charset="-120"/>
-              </a:rPr>
-              <a:t>.</a:t>
-            </a:r>
-            <a:pPr indent="0" marL="0">
-              <a:buNone/>
-            </a:pPr>
-            <a:r>
-              <a:rPr lang="en-US" sz="1400" dirty="0">
-                <a:solidFill>
-                  <a:srgbClr val="FAF8FF"/>
-                </a:solidFill>
-                <a:latin typeface="Consolas" pitchFamily="34" charset="0"/>
-                <a:ea typeface="Consolas" pitchFamily="34" charset="-122"/>
-                <a:cs typeface="Consolas" pitchFamily="34" charset="-120"/>
-              </a:rPr>
-              <a:t>Endpoint </a:t>
-            </a:r>
-            <a:pPr indent="0" marL="0">
-              <a:buNone/>
-            </a:pPr>
-            <a:r>
-              <a:rPr lang="en-US" sz="1400" dirty="0">
-                <a:solidFill>
-                  <a:srgbClr val="B8B5D9"/>
-                </a:solidFill>
-                <a:latin typeface="Consolas" pitchFamily="34" charset="0"/>
-                <a:ea typeface="Consolas" pitchFamily="34" charset="-122"/>
-                <a:cs typeface="Consolas" pitchFamily="34" charset="-120"/>
-              </a:rPr>
-              <a:t>}</a:t>
-            </a:r>
-            <a:pPr indent="0" marL="0">
-              <a:buNone/>
-            </a:pPr>
-            <a:r>
-              <a:rPr lang="en-US" sz="1400" dirty="0">
-                <a:solidFill>
-                  <a:srgbClr val="B8B5D9"/>
-                </a:solidFill>
-                <a:latin typeface="Consolas" pitchFamily="34" charset="0"/>
-                <a:ea typeface="Consolas" pitchFamily="34" charset="-122"/>
-                <a:cs typeface="Consolas" pitchFamily="34" charset="-120"/>
-              </a:rPr>
-              <a:t>)</a:t>
-            </a:r>
-            <a:pPr indent="0" marL="0">
-              <a:buNone/>
-            </a:pPr>
-            <a:endParaRPr lang="en-US" sz="1400" dirty="0"/>
-          </a:p>
-          <a:p>
-            <a:pPr indent="0" marL="0">
-              <a:buNone/>
-            </a:pPr>
-            <a:r>
-              <a:rPr lang="en-US" sz="1400" dirty="0">
-                <a:solidFill>
-                  <a:srgbClr val="FAF8FF"/>
-                </a:solidFill>
-                <a:latin typeface="Consolas" pitchFamily="34" charset="0"/>
-                <a:ea typeface="Consolas" pitchFamily="34" charset="-122"/>
-                <a:cs typeface="Consolas" pitchFamily="34" charset="-120"/>
-              </a:rPr>
-              <a:t>    </a:t>
-            </a:r>
-            <a:pPr indent="0" marL="0">
-              <a:buNone/>
-            </a:pPr>
-            <a:r>
-              <a:rPr lang="en-US" sz="1400" dirty="0">
-                <a:solidFill>
-                  <a:srgbClr val="B8B5D9"/>
-                </a:solidFill>
-                <a:latin typeface="Consolas" pitchFamily="34" charset="0"/>
-                <a:ea typeface="Consolas" pitchFamily="34" charset="-122"/>
-                <a:cs typeface="Consolas" pitchFamily="34" charset="-120"/>
-              </a:rPr>
-              <a:t>.</a:t>
-            </a:r>
-            <a:pPr indent="0" marL="0">
-              <a:buNone/>
-            </a:pPr>
-            <a:r>
-              <a:rPr lang="en-US" sz="1400" dirty="0">
-                <a:solidFill>
-                  <a:srgbClr val="86EFAC"/>
-                </a:solidFill>
-                <a:latin typeface="Consolas" pitchFamily="34" charset="0"/>
-                <a:ea typeface="Consolas" pitchFamily="34" charset="-122"/>
-                <a:cs typeface="Consolas" pitchFamily="34" charset="-120"/>
-              </a:rPr>
-              <a:t>GetChatClient</a:t>
-            </a:r>
-            <a:pPr indent="0" marL="0">
-              <a:buNone/>
-            </a:pPr>
-            <a:r>
-              <a:rPr lang="en-US" sz="1400" dirty="0">
-                <a:solidFill>
-                  <a:srgbClr val="B8B5D9"/>
-                </a:solidFill>
-                <a:latin typeface="Consolas" pitchFamily="34" charset="0"/>
-                <a:ea typeface="Consolas" pitchFamily="34" charset="-122"/>
-                <a:cs typeface="Consolas" pitchFamily="34" charset="-120"/>
-              </a:rPr>
-              <a:t>(</a:t>
-            </a:r>
-            <a:pPr indent="0" marL="0">
-              <a:buNone/>
-            </a:pPr>
-            <a:r>
-              <a:rPr lang="en-US" sz="1400" dirty="0">
-                <a:solidFill>
-                  <a:srgbClr val="FAF8FF"/>
-                </a:solidFill>
-                <a:latin typeface="Consolas" pitchFamily="34" charset="0"/>
-                <a:ea typeface="Consolas" pitchFamily="34" charset="-122"/>
-                <a:cs typeface="Consolas" pitchFamily="34" charset="-120"/>
-              </a:rPr>
-              <a:t>mgr</a:t>
-            </a:r>
-            <a:pPr indent="0" marL="0">
-              <a:buNone/>
-            </a:pPr>
-            <a:r>
-              <a:rPr lang="en-US" sz="1400" dirty="0">
-                <a:solidFill>
-                  <a:srgbClr val="B8B5D9"/>
-                </a:solidFill>
-                <a:latin typeface="Consolas" pitchFamily="34" charset="0"/>
-                <a:ea typeface="Consolas" pitchFamily="34" charset="-122"/>
-                <a:cs typeface="Consolas" pitchFamily="34" charset="-120"/>
-              </a:rPr>
-              <a:t>.</a:t>
-            </a:r>
-            <a:pPr indent="0" marL="0">
-              <a:buNone/>
-            </a:pPr>
-            <a:r>
-              <a:rPr lang="en-US" sz="1400" dirty="0">
-                <a:solidFill>
-                  <a:srgbClr val="FAF8FF"/>
-                </a:solidFill>
-                <a:latin typeface="Consolas" pitchFamily="34" charset="0"/>
-                <a:ea typeface="Consolas" pitchFamily="34" charset="-122"/>
-                <a:cs typeface="Consolas" pitchFamily="34" charset="-120"/>
-              </a:rPr>
-              <a:t>ModelId</a:t>
-            </a:r>
-            <a:pPr indent="0" marL="0">
-              <a:buNone/>
-            </a:pPr>
-            <a:r>
-              <a:rPr lang="en-US" sz="1400" dirty="0">
-                <a:solidFill>
-                  <a:srgbClr val="B8B5D9"/>
-                </a:solidFill>
-                <a:latin typeface="Consolas" pitchFamily="34" charset="0"/>
-                <a:ea typeface="Consolas" pitchFamily="34" charset="-122"/>
-                <a:cs typeface="Consolas" pitchFamily="34" charset="-120"/>
-              </a:rPr>
-              <a:t>)</a:t>
-            </a:r>
-            <a:pPr indent="0" marL="0">
-              <a:buNone/>
-            </a:pPr>
-            <a:r>
-              <a:rPr lang="en-US" sz="1400" dirty="0">
-                <a:solidFill>
-                  <a:srgbClr val="B8B5D9"/>
-                </a:solidFill>
-                <a:latin typeface="Consolas" pitchFamily="34" charset="0"/>
-                <a:ea typeface="Consolas" pitchFamily="34" charset="-122"/>
-                <a:cs typeface="Consolas" pitchFamily="34" charset="-120"/>
-              </a:rPr>
-              <a:t>.</a:t>
-            </a:r>
-            <a:pPr indent="0" marL="0">
-              <a:buNone/>
-            </a:pPr>
-            <a:r>
-              <a:rPr lang="en-US" sz="1400" dirty="0">
-                <a:solidFill>
-                  <a:srgbClr val="86EFAC"/>
-                </a:solidFill>
-                <a:latin typeface="Consolas" pitchFamily="34" charset="0"/>
-                <a:ea typeface="Consolas" pitchFamily="34" charset="-122"/>
-                <a:cs typeface="Consolas" pitchFamily="34" charset="-120"/>
-              </a:rPr>
-              <a:t>AsIChatClient</a:t>
-            </a:r>
-            <a:pPr indent="0" marL="0">
-              <a:buNone/>
-            </a:pPr>
-            <a:r>
-              <a:rPr lang="en-US" sz="1400" dirty="0">
-                <a:solidFill>
-                  <a:srgbClr val="B8B5D9"/>
-                </a:solidFill>
-                <a:latin typeface="Consolas" pitchFamily="34" charset="0"/>
-                <a:ea typeface="Consolas" pitchFamily="34" charset="-122"/>
-                <a:cs typeface="Consolas" pitchFamily="34" charset="-120"/>
-              </a:rPr>
-              <a:t>(</a:t>
-            </a:r>
-            <a:pPr indent="0" marL="0">
-              <a:buNone/>
-            </a:pPr>
-            <a:r>
-              <a:rPr lang="en-US" sz="1400" dirty="0">
-                <a:solidFill>
-                  <a:srgbClr val="B8B5D9"/>
-                </a:solidFill>
-                <a:latin typeface="Consolas" pitchFamily="34" charset="0"/>
-                <a:ea typeface="Consolas" pitchFamily="34" charset="-122"/>
-                <a:cs typeface="Consolas" pitchFamily="34" charset="-120"/>
-              </a:rPr>
-              <a:t>)</a:t>
-            </a:r>
-            <a:pPr indent="0" marL="0">
-              <a:buNone/>
-            </a:pPr>
-            <a:r>
-              <a:rPr lang="en-US" sz="1400" dirty="0">
-                <a:solidFill>
-                  <a:srgbClr val="B8B5D9"/>
-                </a:solidFill>
-                <a:latin typeface="Consolas" pitchFamily="34" charset="0"/>
-                <a:ea typeface="Consolas" pitchFamily="34" charset="-122"/>
-                <a:cs typeface="Consolas" pitchFamily="34" charset="-120"/>
-              </a:rPr>
-              <a:t>;</a:t>
-            </a:r>
-            <a:pPr indent="0" marL="0">
-              <a:buNone/>
-            </a:pPr>
-            <a:endParaRPr lang="en-US" sz="1400" dirty="0"/>
-          </a:p>
-          <a:p>
-            <a:pPr indent="0" marL="0">
-              <a:buNone/>
-            </a:pPr>
-            <a:endParaRPr lang="en-US" sz="1400" dirty="0"/>
-          </a:p>
-          <a:p>
-            <a:pPr indent="0" marL="0">
-              <a:buNone/>
-            </a:pPr>
-            <a:r>
-              <a:rPr lang="en-US" sz="1400" i="1" dirty="0">
-                <a:solidFill>
-                  <a:srgbClr val="8B88B5"/>
-                </a:solidFill>
-                <a:latin typeface="Consolas" pitchFamily="34" charset="0"/>
-                <a:ea typeface="Consolas" pitchFamily="34" charset="-122"/>
-                <a:cs typeface="Consolas" pitchFamily="34" charset="-120"/>
-              </a:rPr>
-              <a:t>// ☁️   Cloud — Azure OpenAI</a:t>
-            </a:r>
-            <a:pPr indent="0" marL="0">
-              <a:buNone/>
-            </a:pPr>
-            <a:endParaRPr lang="en-US" sz="1400" dirty="0"/>
-          </a:p>
-          <a:p>
-            <a:pPr indent="0" marL="0">
-              <a:buNone/>
-            </a:pPr>
-            <a:r>
-              <a:rPr lang="en-US" sz="1400" dirty="0">
-                <a:solidFill>
-                  <a:srgbClr val="FAF8FF"/>
-                </a:solidFill>
-                <a:latin typeface="Consolas" pitchFamily="34" charset="0"/>
-                <a:ea typeface="Consolas" pitchFamily="34" charset="-122"/>
-                <a:cs typeface="Consolas" pitchFamily="34" charset="-120"/>
-              </a:rPr>
-              <a:t>chatClient </a:t>
-            </a:r>
-            <a:pPr indent="0" marL="0">
-              <a:buNone/>
-            </a:pPr>
-            <a:r>
-              <a:rPr lang="en-US" sz="1400" dirty="0">
-                <a:solidFill>
-                  <a:srgbClr val="CFCBED"/>
-                </a:solidFill>
-                <a:latin typeface="Consolas" pitchFamily="34" charset="0"/>
-                <a:ea typeface="Consolas" pitchFamily="34" charset="-122"/>
-                <a:cs typeface="Consolas" pitchFamily="34" charset="-120"/>
-              </a:rPr>
-              <a:t>=</a:t>
-            </a:r>
-            <a:pPr indent="0" marL="0">
-              <a:buNone/>
-            </a:pPr>
-            <a:r>
-              <a:rPr lang="en-US" sz="1400" dirty="0">
-                <a:solidFill>
-                  <a:srgbClr val="FAF8FF"/>
-                </a:solidFill>
-                <a:latin typeface="Consolas" pitchFamily="34" charset="0"/>
-                <a:ea typeface="Consolas" pitchFamily="34" charset="-122"/>
-                <a:cs typeface="Consolas" pitchFamily="34" charset="-120"/>
-              </a:rPr>
-              <a:t> </a:t>
-            </a:r>
-            <a:pPr indent="0" marL="0">
-              <a:buNone/>
-            </a:pPr>
-            <a:r>
-              <a:rPr lang="en-US" sz="1400" dirty="0">
-                <a:solidFill>
-                  <a:srgbClr val="FB7185"/>
-                </a:solidFill>
-                <a:latin typeface="Consolas" pitchFamily="34" charset="0"/>
-                <a:ea typeface="Consolas" pitchFamily="34" charset="-122"/>
-                <a:cs typeface="Consolas" pitchFamily="34" charset="-120"/>
-              </a:rPr>
-              <a:t>new</a:t>
-            </a:r>
-            <a:pPr indent="0" marL="0">
-              <a:buNone/>
-            </a:pPr>
-            <a:r>
-              <a:rPr lang="en-US" sz="1400" dirty="0">
-                <a:solidFill>
-                  <a:srgbClr val="FAF8FF"/>
-                </a:solidFill>
-                <a:latin typeface="Consolas" pitchFamily="34" charset="0"/>
-                <a:ea typeface="Consolas" pitchFamily="34" charset="-122"/>
-                <a:cs typeface="Consolas" pitchFamily="34" charset="-120"/>
-              </a:rPr>
-              <a:t> </a:t>
-            </a:r>
-            <a:pPr indent="0" marL="0">
-              <a:buNone/>
-            </a:pPr>
-            <a:r>
-              <a:rPr lang="en-US" sz="1400" dirty="0">
-                <a:solidFill>
-                  <a:srgbClr val="FAF8FF"/>
-                </a:solidFill>
-                <a:latin typeface="Consolas" pitchFamily="34" charset="0"/>
-                <a:ea typeface="Consolas" pitchFamily="34" charset="-122"/>
-                <a:cs typeface="Consolas" pitchFamily="34" charset="-120"/>
-              </a:rPr>
-              <a:t>AzureOpenAIClient</a:t>
-            </a:r>
-            <a:pPr indent="0" marL="0">
-              <a:buNone/>
-            </a:pPr>
-            <a:r>
-              <a:rPr lang="en-US" sz="1400" dirty="0">
-                <a:solidFill>
-                  <a:srgbClr val="B8B5D9"/>
-                </a:solidFill>
-                <a:latin typeface="Consolas" pitchFamily="34" charset="0"/>
-                <a:ea typeface="Consolas" pitchFamily="34" charset="-122"/>
-                <a:cs typeface="Consolas" pitchFamily="34" charset="-120"/>
-              </a:rPr>
-              <a:t>(</a:t>
-            </a:r>
-            <a:pPr indent="0" marL="0">
-              <a:buNone/>
-            </a:pPr>
-            <a:r>
-              <a:rPr lang="en-US" sz="1400" dirty="0">
-                <a:solidFill>
-                  <a:srgbClr val="FAF8FF"/>
-                </a:solidFill>
-                <a:latin typeface="Consolas" pitchFamily="34" charset="0"/>
-                <a:ea typeface="Consolas" pitchFamily="34" charset="-122"/>
-                <a:cs typeface="Consolas" pitchFamily="34" charset="-120"/>
-              </a:rPr>
-              <a:t>endpoint</a:t>
-            </a:r>
-            <a:pPr indent="0" marL="0">
-              <a:buNone/>
-            </a:pPr>
-            <a:r>
-              <a:rPr lang="en-US" sz="1400" dirty="0">
-                <a:solidFill>
-                  <a:srgbClr val="B8B5D9"/>
-                </a:solidFill>
-                <a:latin typeface="Consolas" pitchFamily="34" charset="0"/>
-                <a:ea typeface="Consolas" pitchFamily="34" charset="-122"/>
-                <a:cs typeface="Consolas" pitchFamily="34" charset="-120"/>
-              </a:rPr>
-              <a:t>,</a:t>
-            </a:r>
-            <a:pPr indent="0" marL="0">
-              <a:buNone/>
-            </a:pPr>
-            <a:r>
-              <a:rPr lang="en-US" sz="1400" dirty="0">
-                <a:solidFill>
-                  <a:srgbClr val="FAF8FF"/>
-                </a:solidFill>
-                <a:latin typeface="Consolas" pitchFamily="34" charset="0"/>
-                <a:ea typeface="Consolas" pitchFamily="34" charset="-122"/>
-                <a:cs typeface="Consolas" pitchFamily="34" charset="-120"/>
-              </a:rPr>
-              <a:t> </a:t>
-            </a:r>
-            <a:pPr indent="0" marL="0">
-              <a:buNone/>
-            </a:pPr>
-            <a:r>
-              <a:rPr lang="en-US" sz="1400" dirty="0">
-                <a:solidFill>
-                  <a:srgbClr val="FB7185"/>
-                </a:solidFill>
-                <a:latin typeface="Consolas" pitchFamily="34" charset="0"/>
-                <a:ea typeface="Consolas" pitchFamily="34" charset="-122"/>
-                <a:cs typeface="Consolas" pitchFamily="34" charset="-120"/>
-              </a:rPr>
-              <a:t>new</a:t>
-            </a:r>
-            <a:pPr indent="0" marL="0">
-              <a:buNone/>
-            </a:pPr>
-            <a:r>
-              <a:rPr lang="en-US" sz="1400" dirty="0">
-                <a:solidFill>
-                  <a:srgbClr val="FAF8FF"/>
-                </a:solidFill>
-                <a:latin typeface="Consolas" pitchFamily="34" charset="0"/>
-                <a:ea typeface="Consolas" pitchFamily="34" charset="-122"/>
-                <a:cs typeface="Consolas" pitchFamily="34" charset="-120"/>
-              </a:rPr>
-              <a:t> </a:t>
-            </a:r>
-            <a:pPr indent="0" marL="0">
-              <a:buNone/>
-            </a:pPr>
-            <a:r>
-              <a:rPr lang="en-US" sz="1400" dirty="0">
-                <a:solidFill>
-                  <a:srgbClr val="FAF8FF"/>
-                </a:solidFill>
-                <a:latin typeface="Consolas" pitchFamily="34" charset="0"/>
-                <a:ea typeface="Consolas" pitchFamily="34" charset="-122"/>
-                <a:cs typeface="Consolas" pitchFamily="34" charset="-120"/>
-              </a:rPr>
-              <a:t>DefaultAzureCredential</a:t>
-            </a:r>
-            <a:pPr indent="0" marL="0">
-              <a:buNone/>
-            </a:pPr>
-            <a:r>
-              <a:rPr lang="en-US" sz="1400" dirty="0">
-                <a:solidFill>
-                  <a:srgbClr val="B8B5D9"/>
-                </a:solidFill>
-                <a:latin typeface="Consolas" pitchFamily="34" charset="0"/>
-                <a:ea typeface="Consolas" pitchFamily="34" charset="-122"/>
-                <a:cs typeface="Consolas" pitchFamily="34" charset="-120"/>
-              </a:rPr>
-              <a:t>(</a:t>
-            </a:r>
-            <a:pPr indent="0" marL="0">
-              <a:buNone/>
-            </a:pPr>
-            <a:r>
-              <a:rPr lang="en-US" sz="1400" dirty="0">
-                <a:solidFill>
-                  <a:srgbClr val="B8B5D9"/>
-                </a:solidFill>
-                <a:latin typeface="Consolas" pitchFamily="34" charset="0"/>
-                <a:ea typeface="Consolas" pitchFamily="34" charset="-122"/>
-                <a:cs typeface="Consolas" pitchFamily="34" charset="-120"/>
-              </a:rPr>
-              <a:t>)</a:t>
-            </a:r>
-            <a:pPr indent="0" marL="0">
-              <a:buNone/>
-            </a:pPr>
-            <a:r>
-              <a:rPr lang="en-US" sz="1400" dirty="0">
-                <a:solidFill>
-                  <a:srgbClr val="B8B5D9"/>
-                </a:solidFill>
-                <a:latin typeface="Consolas" pitchFamily="34" charset="0"/>
-                <a:ea typeface="Consolas" pitchFamily="34" charset="-122"/>
-                <a:cs typeface="Consolas" pitchFamily="34" charset="-120"/>
-              </a:rPr>
-              <a:t>)</a:t>
-            </a:r>
-            <a:pPr indent="0" marL="0">
-              <a:buNone/>
-            </a:pPr>
-            <a:endParaRPr lang="en-US" sz="1400" dirty="0"/>
-          </a:p>
-          <a:p>
-            <a:pPr indent="0" marL="0">
-              <a:buNone/>
-            </a:pPr>
-            <a:r>
-              <a:rPr lang="en-US" sz="1400" dirty="0">
-                <a:solidFill>
-                  <a:srgbClr val="FAF8FF"/>
-                </a:solidFill>
-                <a:latin typeface="Consolas" pitchFamily="34" charset="0"/>
-                <a:ea typeface="Consolas" pitchFamily="34" charset="-122"/>
-                <a:cs typeface="Consolas" pitchFamily="34" charset="-120"/>
-              </a:rPr>
-              <a:t>    </a:t>
-            </a:r>
-            <a:pPr indent="0" marL="0">
-              <a:buNone/>
-            </a:pPr>
-            <a:r>
-              <a:rPr lang="en-US" sz="1400" dirty="0">
-                <a:solidFill>
-                  <a:srgbClr val="B8B5D9"/>
-                </a:solidFill>
-                <a:latin typeface="Consolas" pitchFamily="34" charset="0"/>
-                <a:ea typeface="Consolas" pitchFamily="34" charset="-122"/>
-                <a:cs typeface="Consolas" pitchFamily="34" charset="-120"/>
-              </a:rPr>
-              <a:t>.</a:t>
-            </a:r>
-            <a:pPr indent="0" marL="0">
-              <a:buNone/>
-            </a:pPr>
-            <a:r>
-              <a:rPr lang="en-US" sz="1400" dirty="0">
-                <a:solidFill>
-                  <a:srgbClr val="86EFAC"/>
-                </a:solidFill>
-                <a:latin typeface="Consolas" pitchFamily="34" charset="0"/>
-                <a:ea typeface="Consolas" pitchFamily="34" charset="-122"/>
-                <a:cs typeface="Consolas" pitchFamily="34" charset="-120"/>
-              </a:rPr>
-              <a:t>GetChatClient</a:t>
-            </a:r>
-            <a:pPr indent="0" marL="0">
-              <a:buNone/>
-            </a:pPr>
-            <a:r>
-              <a:rPr lang="en-US" sz="1400" dirty="0">
-                <a:solidFill>
-                  <a:srgbClr val="B8B5D9"/>
-                </a:solidFill>
-                <a:latin typeface="Consolas" pitchFamily="34" charset="0"/>
-                <a:ea typeface="Consolas" pitchFamily="34" charset="-122"/>
-                <a:cs typeface="Consolas" pitchFamily="34" charset="-120"/>
-              </a:rPr>
-              <a:t>(</a:t>
-            </a:r>
-            <a:pPr indent="0" marL="0">
-              <a:buNone/>
-            </a:pPr>
-            <a:r>
-              <a:rPr lang="en-US" sz="1400" dirty="0">
-                <a:solidFill>
-                  <a:srgbClr val="FBBF24"/>
-                </a:solidFill>
-                <a:latin typeface="Consolas" pitchFamily="34" charset="0"/>
-                <a:ea typeface="Consolas" pitchFamily="34" charset="-122"/>
-                <a:cs typeface="Consolas" pitchFamily="34" charset="-120"/>
-              </a:rPr>
-              <a:t>"gpt-4.1"</a:t>
-            </a:r>
-            <a:pPr indent="0" marL="0">
-              <a:buNone/>
-            </a:pPr>
-            <a:r>
-              <a:rPr lang="en-US" sz="1400" dirty="0">
-                <a:solidFill>
-                  <a:srgbClr val="B8B5D9"/>
-                </a:solidFill>
-                <a:latin typeface="Consolas" pitchFamily="34" charset="0"/>
-                <a:ea typeface="Consolas" pitchFamily="34" charset="-122"/>
-                <a:cs typeface="Consolas" pitchFamily="34" charset="-120"/>
-              </a:rPr>
-              <a:t>)</a:t>
-            </a:r>
-            <a:pPr indent="0" marL="0">
-              <a:buNone/>
-            </a:pPr>
-            <a:r>
-              <a:rPr lang="en-US" sz="1400" dirty="0">
-                <a:solidFill>
-                  <a:srgbClr val="B8B5D9"/>
-                </a:solidFill>
-                <a:latin typeface="Consolas" pitchFamily="34" charset="0"/>
-                <a:ea typeface="Consolas" pitchFamily="34" charset="-122"/>
-                <a:cs typeface="Consolas" pitchFamily="34" charset="-120"/>
-              </a:rPr>
-              <a:t>.</a:t>
-            </a:r>
-            <a:pPr indent="0" marL="0">
-              <a:buNone/>
-            </a:pPr>
-            <a:r>
-              <a:rPr lang="en-US" sz="1400" dirty="0">
-                <a:solidFill>
-                  <a:srgbClr val="86EFAC"/>
-                </a:solidFill>
-                <a:latin typeface="Consolas" pitchFamily="34" charset="0"/>
-                <a:ea typeface="Consolas" pitchFamily="34" charset="-122"/>
-                <a:cs typeface="Consolas" pitchFamily="34" charset="-120"/>
-              </a:rPr>
-              <a:t>AsIChatClient</a:t>
-            </a:r>
-            <a:pPr indent="0" marL="0">
-              <a:buNone/>
-            </a:pPr>
-            <a:r>
-              <a:rPr lang="en-US" sz="1400" dirty="0">
-                <a:solidFill>
-                  <a:srgbClr val="B8B5D9"/>
-                </a:solidFill>
-                <a:latin typeface="Consolas" pitchFamily="34" charset="0"/>
-                <a:ea typeface="Consolas" pitchFamily="34" charset="-122"/>
-                <a:cs typeface="Consolas" pitchFamily="34" charset="-120"/>
-              </a:rPr>
-              <a:t>(</a:t>
-            </a:r>
-            <a:pPr indent="0" marL="0">
-              <a:buNone/>
-            </a:pPr>
-            <a:r>
-              <a:rPr lang="en-US" sz="1400" dirty="0">
-                <a:solidFill>
-                  <a:srgbClr val="B8B5D9"/>
-                </a:solidFill>
-                <a:latin typeface="Consolas" pitchFamily="34" charset="0"/>
-                <a:ea typeface="Consolas" pitchFamily="34" charset="-122"/>
-                <a:cs typeface="Consolas" pitchFamily="34" charset="-120"/>
-              </a:rPr>
-              <a:t>)</a:t>
-            </a:r>
-            <a:pPr indent="0" marL="0">
-              <a:buNone/>
-            </a:pPr>
-            <a:r>
-              <a:rPr lang="en-US" sz="1400" dirty="0">
-                <a:solidFill>
-                  <a:srgbClr val="B8B5D9"/>
-                </a:solidFill>
-                <a:latin typeface="Consolas" pitchFamily="34" charset="0"/>
-                <a:ea typeface="Consolas" pitchFamily="34" charset="-122"/>
-                <a:cs typeface="Consolas" pitchFamily="34" charset="-120"/>
-              </a:rPr>
-              <a:t>;</a:t>
-            </a:r>
-            <a:pPr indent="0" marL="0">
-              <a:buNone/>
-            </a:pPr>
-            <a:endParaRPr lang="en-US" sz="1400" dirty="0"/>
-          </a:p>
-          <a:p>
-            <a:pPr indent="0" marL="0">
-              <a:buNone/>
-            </a:pPr>
-            <a:endParaRPr lang="en-US" sz="1400" dirty="0"/>
-          </a:p>
-          <a:p>
-            <a:pPr indent="0" marL="0">
-              <a:buNone/>
-            </a:pPr>
-            <a:r>
-              <a:rPr lang="en-US" sz="1400" i="1" dirty="0">
-                <a:solidFill>
-                  <a:srgbClr val="8B88B5"/>
-                </a:solidFill>
-                <a:latin typeface="Consolas" pitchFamily="34" charset="0"/>
-                <a:ea typeface="Consolas" pitchFamily="34" charset="-122"/>
-                <a:cs typeface="Consolas" pitchFamily="34" charset="-120"/>
-              </a:rPr>
-              <a:t>// ✨  Same agent. Every tier.</a:t>
-            </a:r>
-            <a:pPr indent="0" marL="0">
-              <a:buNone/>
-            </a:pPr>
-            <a:endParaRPr lang="en-US" sz="1400" dirty="0"/>
-          </a:p>
-          <a:p>
-            <a:pPr indent="0" marL="0">
-              <a:buNone/>
-            </a:pPr>
-            <a:r>
-              <a:rPr lang="en-US" sz="1400" dirty="0">
-                <a:solidFill>
-                  <a:srgbClr val="FB7185"/>
-                </a:solidFill>
-                <a:latin typeface="Consolas" pitchFamily="34" charset="0"/>
-                <a:ea typeface="Consolas" pitchFamily="34" charset="-122"/>
-                <a:cs typeface="Consolas" pitchFamily="34" charset="-120"/>
-              </a:rPr>
-              <a:t>var</a:t>
-            </a:r>
-            <a:pPr indent="0" marL="0">
-              <a:buNone/>
-            </a:pPr>
-            <a:r>
-              <a:rPr lang="en-US" sz="1400" dirty="0">
-                <a:solidFill>
-                  <a:srgbClr val="FAF8FF"/>
-                </a:solidFill>
-                <a:latin typeface="Consolas" pitchFamily="34" charset="0"/>
-                <a:ea typeface="Consolas" pitchFamily="34" charset="-122"/>
-                <a:cs typeface="Consolas" pitchFamily="34" charset="-120"/>
-              </a:rPr>
-              <a:t> agent </a:t>
-            </a:r>
-            <a:pPr indent="0" marL="0">
-              <a:buNone/>
-            </a:pPr>
-            <a:r>
-              <a:rPr lang="en-US" sz="1400" dirty="0">
-                <a:solidFill>
-                  <a:srgbClr val="CFCBED"/>
-                </a:solidFill>
-                <a:latin typeface="Consolas" pitchFamily="34" charset="0"/>
-                <a:ea typeface="Consolas" pitchFamily="34" charset="-122"/>
-                <a:cs typeface="Consolas" pitchFamily="34" charset="-120"/>
-              </a:rPr>
-              <a:t>=</a:t>
-            </a:r>
-            <a:pPr indent="0" marL="0">
-              <a:buNone/>
-            </a:pPr>
-            <a:r>
-              <a:rPr lang="en-US" sz="1400" dirty="0">
-                <a:solidFill>
-                  <a:srgbClr val="FAF8FF"/>
-                </a:solidFill>
-                <a:latin typeface="Consolas" pitchFamily="34" charset="0"/>
-                <a:ea typeface="Consolas" pitchFamily="34" charset="-122"/>
-                <a:cs typeface="Consolas" pitchFamily="34" charset="-120"/>
-              </a:rPr>
-              <a:t> chatClient</a:t>
-            </a:r>
-            <a:pPr indent="0" marL="0">
-              <a:buNone/>
-            </a:pPr>
-            <a:r>
-              <a:rPr lang="en-US" sz="1400" dirty="0">
-                <a:solidFill>
-                  <a:srgbClr val="B8B5D9"/>
-                </a:solidFill>
-                <a:latin typeface="Consolas" pitchFamily="34" charset="0"/>
-                <a:ea typeface="Consolas" pitchFamily="34" charset="-122"/>
-                <a:cs typeface="Consolas" pitchFamily="34" charset="-120"/>
-              </a:rPr>
-              <a:t>.</a:t>
-            </a:r>
-            <a:pPr indent="0" marL="0">
-              <a:buNone/>
-            </a:pPr>
-            <a:r>
-              <a:rPr lang="en-US" sz="1400" dirty="0">
-                <a:solidFill>
-                  <a:srgbClr val="86EFAC"/>
-                </a:solidFill>
-                <a:latin typeface="Consolas" pitchFamily="34" charset="0"/>
-                <a:ea typeface="Consolas" pitchFamily="34" charset="-122"/>
-                <a:cs typeface="Consolas" pitchFamily="34" charset="-120"/>
-              </a:rPr>
-              <a:t>CreateAIAgent</a:t>
-            </a:r>
-            <a:pPr indent="0" marL="0">
-              <a:buNone/>
-            </a:pPr>
-            <a:r>
-              <a:rPr lang="en-US" sz="1400" dirty="0">
-                <a:solidFill>
-                  <a:srgbClr val="B8B5D9"/>
-                </a:solidFill>
-                <a:latin typeface="Consolas" pitchFamily="34" charset="0"/>
-                <a:ea typeface="Consolas" pitchFamily="34" charset="-122"/>
-                <a:cs typeface="Consolas" pitchFamily="34" charset="-120"/>
-              </a:rPr>
-              <a:t>(</a:t>
-            </a:r>
-            <a:pPr indent="0" marL="0">
-              <a:buNone/>
-            </a:pPr>
-            <a:r>
-              <a:rPr lang="en-US" sz="1400" dirty="0">
-                <a:solidFill>
-                  <a:srgbClr val="FBBF24"/>
-                </a:solidFill>
-                <a:latin typeface="Consolas" pitchFamily="34" charset="0"/>
-                <a:ea typeface="Consolas" pitchFamily="34" charset="-122"/>
-                <a:cs typeface="Consolas" pitchFamily="34" charset="-120"/>
-              </a:rPr>
-              <a:t>"You are helpful."</a:t>
-            </a:r>
-            <a:pPr indent="0" marL="0">
-              <a:buNone/>
-            </a:pPr>
-            <a:r>
-              <a:rPr lang="en-US" sz="1400" dirty="0">
-                <a:solidFill>
-                  <a:srgbClr val="B8B5D9"/>
-                </a:solidFill>
-                <a:latin typeface="Consolas" pitchFamily="34" charset="0"/>
-                <a:ea typeface="Consolas" pitchFamily="34" charset="-122"/>
-                <a:cs typeface="Consolas" pitchFamily="34" charset="-120"/>
-              </a:rPr>
-              <a:t>)</a:t>
-            </a:r>
-            <a:pPr indent="0" marL="0">
-              <a:buNone/>
-            </a:pPr>
-            <a:r>
-              <a:rPr lang="en-US" sz="1400" dirty="0">
-                <a:solidFill>
-                  <a:srgbClr val="B8B5D9"/>
-                </a:solidFill>
-                <a:latin typeface="Consolas" pitchFamily="34" charset="0"/>
-                <a:ea typeface="Consolas" pitchFamily="34" charset="-122"/>
-                <a:cs typeface="Consolas" pitchFamily="34" charset="-120"/>
-              </a:rPr>
-              <a:t>;</a:t>
-            </a:r>
-            <a:endParaRPr lang="en-US" sz="1400" dirty="0"/>
+            <a:endParaRPr lang="en-US" sz="1200" dirty="0"/>
           </a:p>
         </p:txBody>
       </p:sp>

--- a/slides/Unifying-Local-Cloud-AI.pptx
+++ b/slides/Unifying-Local-Cloud-AI.pptx
@@ -6621,12 +6621,12 @@
         </p:nvSpPr>
         <p:spPr>
           <a:xfrm>
-            <a:off x="822960" y="2468880"/>
-            <a:ext cx="2377440" cy="548640"/>
+            <a:off x="9082735" y="2377440"/>
+            <a:ext cx="2651760" cy="685800"/>
           </a:xfrm>
           <a:prstGeom prst="roundRect">
             <a:avLst>
-              <a:gd name="adj" fmla="val 50000"/>
+              <a:gd name="adj" fmla="val 24000"/>
             </a:avLst>
           </a:prstGeom>
           <a:solidFill>
@@ -6648,8 +6648,8 @@
         </p:nvSpPr>
         <p:spPr>
           <a:xfrm>
-            <a:off x="914400" y="2468880"/>
-            <a:ext cx="2194560" cy="548640"/>
+            <a:off x="9219895" y="2377440"/>
+            <a:ext cx="548640" cy="685800"/>
           </a:xfrm>
           <a:prstGeom prst="rect">
             <a:avLst/>
@@ -6665,7 +6665,7 @@
               <a:buNone/>
             </a:pPr>
             <a:r>
-              <a:rPr lang="en-US" sz="1600" dirty="0">
+              <a:rPr lang="en-US" sz="2200" dirty="0">
                 <a:solidFill>
                   <a:srgbClr val="000000"/>
                 </a:solidFill>
@@ -6673,13 +6673,38 @@
                 <a:ea typeface="Calibri" pitchFamily="34" charset="-122"/>
                 <a:cs typeface="Calibri" pitchFamily="34" charset="-120"/>
               </a:rPr>
-              <a:t>👤  </a:t>
-            </a:r>
-            <a:pPr algn="ctr" indent="0" marL="0">
-              <a:buNone/>
-            </a:pPr>
-            <a:r>
-              <a:rPr lang="en-US" sz="1400" b="1" dirty="0">
+              <a:t>👤</a:t>
+            </a:r>
+            <a:endParaRPr lang="en-US" sz="2200" dirty="0"/>
+          </a:p>
+        </p:txBody>
+      </p:sp>
+      <p:sp>
+        <p:nvSpPr>
+          <p:cNvPr id="9" name="Text 7"/>
+          <p:cNvSpPr/>
+          <p:nvPr/>
+        </p:nvSpPr>
+        <p:spPr>
+          <a:xfrm>
+            <a:off x="9859975" y="2468880"/>
+            <a:ext cx="1783080" cy="320040"/>
+          </a:xfrm>
+          <a:prstGeom prst="rect">
+            <a:avLst/>
+          </a:prstGeom>
+          <a:noFill/>
+          <a:ln/>
+        </p:spPr>
+        <p:txBody>
+          <a:bodyPr wrap="square" rtlCol="0" anchor="ctr"/>
+          <a:lstStyle/>
+          <a:p>
+            <a:pPr indent="0" marL="0">
+              <a:buNone/>
+            </a:pPr>
+            <a:r>
+              <a:rPr lang="en-US" sz="1600" b="1" dirty="0">
                 <a:solidFill>
                   <a:srgbClr val="FAF8FF"/>
                 </a:solidFill>
@@ -6687,9 +6712,34 @@
                 <a:ea typeface="Calibri" pitchFamily="34" charset="-122"/>
                 <a:cs typeface="Calibri" pitchFamily="34" charset="-120"/>
               </a:rPr>
-              <a:t>User</a:t>
-            </a:r>
-            <a:pPr algn="ctr" indent="0" marL="0">
+              <a:t>User input</a:t>
+            </a:r>
+            <a:endParaRPr lang="en-US" sz="1600" dirty="0"/>
+          </a:p>
+        </p:txBody>
+      </p:sp>
+      <p:sp>
+        <p:nvSpPr>
+          <p:cNvPr id="10" name="Text 8"/>
+          <p:cNvSpPr/>
+          <p:nvPr/>
+        </p:nvSpPr>
+        <p:spPr>
+          <a:xfrm>
+            <a:off x="9859975" y="2743200"/>
+            <a:ext cx="1783080" cy="274320"/>
+          </a:xfrm>
+          <a:prstGeom prst="rect">
+            <a:avLst/>
+          </a:prstGeom>
+          <a:noFill/>
+          <a:ln/>
+        </p:spPr>
+        <p:txBody>
+          <a:bodyPr wrap="square" rtlCol="0" anchor="ctr"/>
+          <a:lstStyle/>
+          <a:p>
+            <a:pPr indent="0" marL="0">
               <a:buNone/>
             </a:pPr>
             <a:r>
@@ -6701,22 +6751,22 @@
                 <a:ea typeface="Calibri" pitchFamily="34" charset="-122"/>
                 <a:cs typeface="Calibri" pitchFamily="34" charset="-120"/>
               </a:rPr>
-              <a:t>   input</a:t>
-            </a:r>
-            <a:endParaRPr lang="en-US" sz="1600" dirty="0"/>
-          </a:p>
-        </p:txBody>
-      </p:sp>
-      <p:sp>
-        <p:nvSpPr>
-          <p:cNvPr id="9" name="Shape 7"/>
-          <p:cNvSpPr/>
-          <p:nvPr/>
-        </p:nvSpPr>
-        <p:spPr>
-          <a:xfrm>
-            <a:off x="3246120" y="2743200"/>
-            <a:ext cx="253898" cy="0"/>
+              <a:t>raw, may have PII</a:t>
+            </a:r>
+            <a:endParaRPr lang="en-US" sz="1100" dirty="0"/>
+          </a:p>
+        </p:txBody>
+      </p:sp>
+      <p:sp>
+        <p:nvSpPr>
+          <p:cNvPr id="11" name="Shape 9"/>
+          <p:cNvSpPr/>
+          <p:nvPr/>
+        </p:nvSpPr>
+        <p:spPr>
+          <a:xfrm>
+            <a:off x="10408615" y="3108960"/>
+            <a:ext cx="0" cy="228600"/>
           </a:xfrm>
           <a:prstGeom prst="line">
             <a:avLst/>
@@ -6732,16 +6782,16 @@
       </p:sp>
       <p:sp>
         <p:nvSpPr>
-          <p:cNvPr id="10" name="Shape 8"/>
-          <p:cNvSpPr/>
-          <p:nvPr/>
-        </p:nvSpPr>
-        <p:spPr>
-          <a:xfrm rot="5400000">
-            <a:off x="3362858" y="2670048"/>
-            <a:ext cx="164592" cy="146304"/>
-          </a:xfrm>
-          <a:prstGeom prst="rightTriangle">
+          <p:cNvPr id="12" name="Shape 10"/>
+          <p:cNvSpPr/>
+          <p:nvPr/>
+        </p:nvSpPr>
+        <p:spPr>
+          <a:xfrm flipV="1">
+            <a:off x="10317175" y="3337560"/>
+            <a:ext cx="182880" cy="164592"/>
+          </a:xfrm>
+          <a:prstGeom prst="triangle">
             <a:avLst/>
           </a:prstGeom>
           <a:solidFill>
@@ -6757,18 +6807,18 @@
       </p:sp>
       <p:sp>
         <p:nvSpPr>
-          <p:cNvPr id="11" name="Shape 9"/>
-          <p:cNvSpPr/>
-          <p:nvPr/>
-        </p:nvSpPr>
-        <p:spPr>
-          <a:xfrm>
-            <a:off x="3545738" y="2468880"/>
-            <a:ext cx="2377440" cy="548640"/>
+          <p:cNvPr id="13" name="Shape 11"/>
+          <p:cNvSpPr/>
+          <p:nvPr/>
+        </p:nvSpPr>
+        <p:spPr>
+          <a:xfrm>
+            <a:off x="9082735" y="3474720"/>
+            <a:ext cx="2651760" cy="685800"/>
           </a:xfrm>
           <a:prstGeom prst="roundRect">
             <a:avLst>
-              <a:gd name="adj" fmla="val 50000"/>
+              <a:gd name="adj" fmla="val 24000"/>
             </a:avLst>
           </a:prstGeom>
           <a:solidFill>
@@ -6784,14 +6834,14 @@
       </p:sp>
       <p:sp>
         <p:nvSpPr>
-          <p:cNvPr id="12" name="Text 10"/>
-          <p:cNvSpPr/>
-          <p:nvPr/>
-        </p:nvSpPr>
-        <p:spPr>
-          <a:xfrm>
-            <a:off x="3637178" y="2468880"/>
-            <a:ext cx="2194560" cy="548640"/>
+          <p:cNvPr id="14" name="Text 12"/>
+          <p:cNvSpPr/>
+          <p:nvPr/>
+        </p:nvSpPr>
+        <p:spPr>
+          <a:xfrm>
+            <a:off x="9219895" y="3474720"/>
+            <a:ext cx="548640" cy="685800"/>
           </a:xfrm>
           <a:prstGeom prst="rect">
             <a:avLst/>
@@ -6807,7 +6857,7 @@
               <a:buNone/>
             </a:pPr>
             <a:r>
-              <a:rPr lang="en-US" sz="1600" dirty="0">
+              <a:rPr lang="en-US" sz="2200" dirty="0">
                 <a:solidFill>
                   <a:srgbClr val="000000"/>
                 </a:solidFill>
@@ -6815,13 +6865,38 @@
                 <a:ea typeface="Calibri" pitchFamily="34" charset="-122"/>
                 <a:cs typeface="Calibri" pitchFamily="34" charset="-120"/>
               </a:rPr>
-              <a:t>📱  </a:t>
-            </a:r>
-            <a:pPr algn="ctr" indent="0" marL="0">
-              <a:buNone/>
-            </a:pPr>
-            <a:r>
-              <a:rPr lang="en-US" sz="1400" b="1" dirty="0">
+              <a:t>📱</a:t>
+            </a:r>
+            <a:endParaRPr lang="en-US" sz="2200" dirty="0"/>
+          </a:p>
+        </p:txBody>
+      </p:sp>
+      <p:sp>
+        <p:nvSpPr>
+          <p:cNvPr id="15" name="Text 13"/>
+          <p:cNvSpPr/>
+          <p:nvPr/>
+        </p:nvSpPr>
+        <p:spPr>
+          <a:xfrm>
+            <a:off x="9859975" y="3566160"/>
+            <a:ext cx="1783080" cy="320040"/>
+          </a:xfrm>
+          <a:prstGeom prst="rect">
+            <a:avLst/>
+          </a:prstGeom>
+          <a:noFill/>
+          <a:ln/>
+        </p:spPr>
+        <p:txBody>
+          <a:bodyPr wrap="square" rtlCol="0" anchor="ctr"/>
+          <a:lstStyle/>
+          <a:p>
+            <a:pPr indent="0" marL="0">
+              <a:buNone/>
+            </a:pPr>
+            <a:r>
+              <a:rPr lang="en-US" sz="1600" b="1" dirty="0">
                 <a:solidFill>
                   <a:srgbClr val="FAF8FF"/>
                 </a:solidFill>
@@ -6831,7 +6906,32 @@
               </a:rPr>
               <a:t>triage</a:t>
             </a:r>
-            <a:pPr algn="ctr" indent="0" marL="0">
+            <a:endParaRPr lang="en-US" sz="1600" dirty="0"/>
+          </a:p>
+        </p:txBody>
+      </p:sp>
+      <p:sp>
+        <p:nvSpPr>
+          <p:cNvPr id="16" name="Text 14"/>
+          <p:cNvSpPr/>
+          <p:nvPr/>
+        </p:nvSpPr>
+        <p:spPr>
+          <a:xfrm>
+            <a:off x="9859975" y="3840480"/>
+            <a:ext cx="1783080" cy="274320"/>
+          </a:xfrm>
+          <a:prstGeom prst="rect">
+            <a:avLst/>
+          </a:prstGeom>
+          <a:noFill/>
+          <a:ln/>
+        </p:spPr>
+        <p:txBody>
+          <a:bodyPr wrap="square" rtlCol="0" anchor="ctr"/>
+          <a:lstStyle/>
+          <a:p>
+            <a:pPr indent="0" marL="0">
               <a:buNone/>
             </a:pPr>
             <a:r>
@@ -6843,22 +6943,22 @@
                 <a:ea typeface="Calibri" pitchFamily="34" charset="-122"/>
                 <a:cs typeface="Calibri" pitchFamily="34" charset="-120"/>
               </a:rPr>
-              <a:t>   Apple Intelligence</a:t>
-            </a:r>
-            <a:endParaRPr lang="en-US" sz="1600" dirty="0"/>
-          </a:p>
-        </p:txBody>
-      </p:sp>
-      <p:sp>
-        <p:nvSpPr>
-          <p:cNvPr id="13" name="Shape 11"/>
-          <p:cNvSpPr/>
-          <p:nvPr/>
-        </p:nvSpPr>
-        <p:spPr>
-          <a:xfrm>
-            <a:off x="5968898" y="2743200"/>
-            <a:ext cx="253898" cy="0"/>
+              <a:t>Apple Intelligence</a:t>
+            </a:r>
+            <a:endParaRPr lang="en-US" sz="1100" dirty="0"/>
+          </a:p>
+        </p:txBody>
+      </p:sp>
+      <p:sp>
+        <p:nvSpPr>
+          <p:cNvPr id="17" name="Shape 15"/>
+          <p:cNvSpPr/>
+          <p:nvPr/>
+        </p:nvSpPr>
+        <p:spPr>
+          <a:xfrm>
+            <a:off x="10408615" y="4206240"/>
+            <a:ext cx="0" cy="228600"/>
           </a:xfrm>
           <a:prstGeom prst="line">
             <a:avLst/>
@@ -6874,16 +6974,16 @@
       </p:sp>
       <p:sp>
         <p:nvSpPr>
-          <p:cNvPr id="14" name="Shape 12"/>
-          <p:cNvSpPr/>
-          <p:nvPr/>
-        </p:nvSpPr>
-        <p:spPr>
-          <a:xfrm rot="5400000">
-            <a:off x="6085637" y="2670048"/>
-            <a:ext cx="164592" cy="146304"/>
-          </a:xfrm>
-          <a:prstGeom prst="rightTriangle">
+          <p:cNvPr id="18" name="Shape 16"/>
+          <p:cNvSpPr/>
+          <p:nvPr/>
+        </p:nvSpPr>
+        <p:spPr>
+          <a:xfrm flipV="1">
+            <a:off x="10317175" y="4434840"/>
+            <a:ext cx="182880" cy="164592"/>
+          </a:xfrm>
+          <a:prstGeom prst="triangle">
             <a:avLst/>
           </a:prstGeom>
           <a:solidFill>
@@ -6899,18 +6999,18 @@
       </p:sp>
       <p:sp>
         <p:nvSpPr>
-          <p:cNvPr id="15" name="Shape 13"/>
-          <p:cNvSpPr/>
-          <p:nvPr/>
-        </p:nvSpPr>
-        <p:spPr>
-          <a:xfrm>
-            <a:off x="6268517" y="2468880"/>
-            <a:ext cx="2377440" cy="548640"/>
+          <p:cNvPr id="19" name="Shape 17"/>
+          <p:cNvSpPr/>
+          <p:nvPr/>
+        </p:nvSpPr>
+        <p:spPr>
+          <a:xfrm>
+            <a:off x="9082735" y="4572000"/>
+            <a:ext cx="2651760" cy="685800"/>
           </a:xfrm>
           <a:prstGeom prst="roundRect">
             <a:avLst>
-              <a:gd name="adj" fmla="val 50000"/>
+              <a:gd name="adj" fmla="val 24000"/>
             </a:avLst>
           </a:prstGeom>
           <a:solidFill>
@@ -6926,14 +7026,14 @@
       </p:sp>
       <p:sp>
         <p:nvSpPr>
-          <p:cNvPr id="16" name="Text 14"/>
-          <p:cNvSpPr/>
-          <p:nvPr/>
-        </p:nvSpPr>
-        <p:spPr>
-          <a:xfrm>
-            <a:off x="6359957" y="2468880"/>
-            <a:ext cx="2194560" cy="548640"/>
+          <p:cNvPr id="20" name="Text 18"/>
+          <p:cNvSpPr/>
+          <p:nvPr/>
+        </p:nvSpPr>
+        <p:spPr>
+          <a:xfrm>
+            <a:off x="9219895" y="4572000"/>
+            <a:ext cx="548640" cy="685800"/>
           </a:xfrm>
           <a:prstGeom prst="rect">
             <a:avLst/>
@@ -6949,7 +7049,7 @@
               <a:buNone/>
             </a:pPr>
             <a:r>
-              <a:rPr lang="en-US" sz="1600" dirty="0">
+              <a:rPr lang="en-US" sz="2200" dirty="0">
                 <a:solidFill>
                   <a:srgbClr val="000000"/>
                 </a:solidFill>
@@ -6957,13 +7057,38 @@
                 <a:ea typeface="Calibri" pitchFamily="34" charset="-122"/>
                 <a:cs typeface="Calibri" pitchFamily="34" charset="-120"/>
               </a:rPr>
-              <a:t>☁️  </a:t>
-            </a:r>
-            <a:pPr algn="ctr" indent="0" marL="0">
-              <a:buNone/>
-            </a:pPr>
-            <a:r>
-              <a:rPr lang="en-US" sz="1400" b="1" dirty="0">
+              <a:t>☁️</a:t>
+            </a:r>
+            <a:endParaRPr lang="en-US" sz="2200" dirty="0"/>
+          </a:p>
+        </p:txBody>
+      </p:sp>
+      <p:sp>
+        <p:nvSpPr>
+          <p:cNvPr id="21" name="Text 19"/>
+          <p:cNvSpPr/>
+          <p:nvPr/>
+        </p:nvSpPr>
+        <p:spPr>
+          <a:xfrm>
+            <a:off x="9859975" y="4663440"/>
+            <a:ext cx="1783080" cy="320040"/>
+          </a:xfrm>
+          <a:prstGeom prst="rect">
+            <a:avLst/>
+          </a:prstGeom>
+          <a:noFill/>
+          <a:ln/>
+        </p:spPr>
+        <p:txBody>
+          <a:bodyPr wrap="square" rtlCol="0" anchor="ctr"/>
+          <a:lstStyle/>
+          <a:p>
+            <a:pPr indent="0" marL="0">
+              <a:buNone/>
+            </a:pPr>
+            <a:r>
+              <a:rPr lang="en-US" sz="1600" b="1" dirty="0">
                 <a:solidFill>
                   <a:srgbClr val="FAF8FF"/>
                 </a:solidFill>
@@ -6973,7 +7098,32 @@
               </a:rPr>
               <a:t>expert</a:t>
             </a:r>
-            <a:pPr algn="ctr" indent="0" marL="0">
+            <a:endParaRPr lang="en-US" sz="1600" dirty="0"/>
+          </a:p>
+        </p:txBody>
+      </p:sp>
+      <p:sp>
+        <p:nvSpPr>
+          <p:cNvPr id="22" name="Text 20"/>
+          <p:cNvSpPr/>
+          <p:nvPr/>
+        </p:nvSpPr>
+        <p:spPr>
+          <a:xfrm>
+            <a:off x="9859975" y="4937760"/>
+            <a:ext cx="1783080" cy="274320"/>
+          </a:xfrm>
+          <a:prstGeom prst="rect">
+            <a:avLst/>
+          </a:prstGeom>
+          <a:noFill/>
+          <a:ln/>
+        </p:spPr>
+        <p:txBody>
+          <a:bodyPr wrap="square" rtlCol="0" anchor="ctr"/>
+          <a:lstStyle/>
+          <a:p>
+            <a:pPr indent="0" marL="0">
               <a:buNone/>
             </a:pPr>
             <a:r>
@@ -6985,22 +7135,22 @@
                 <a:ea typeface="Calibri" pitchFamily="34" charset="-122"/>
                 <a:cs typeface="Calibri" pitchFamily="34" charset="-120"/>
               </a:rPr>
-              <a:t>   Azure OpenAI</a:t>
-            </a:r>
-            <a:endParaRPr lang="en-US" sz="1600" dirty="0"/>
-          </a:p>
-        </p:txBody>
-      </p:sp>
-      <p:sp>
-        <p:nvSpPr>
-          <p:cNvPr id="17" name="Shape 15"/>
-          <p:cNvSpPr/>
-          <p:nvPr/>
-        </p:nvSpPr>
-        <p:spPr>
-          <a:xfrm>
-            <a:off x="8691677" y="2743200"/>
-            <a:ext cx="253898" cy="0"/>
+              <a:t>Azure OpenAI</a:t>
+            </a:r>
+            <a:endParaRPr lang="en-US" sz="1100" dirty="0"/>
+          </a:p>
+        </p:txBody>
+      </p:sp>
+      <p:sp>
+        <p:nvSpPr>
+          <p:cNvPr id="23" name="Shape 21"/>
+          <p:cNvSpPr/>
+          <p:nvPr/>
+        </p:nvSpPr>
+        <p:spPr>
+          <a:xfrm>
+            <a:off x="10408615" y="5303520"/>
+            <a:ext cx="0" cy="228600"/>
           </a:xfrm>
           <a:prstGeom prst="line">
             <a:avLst/>
@@ -7016,16 +7166,16 @@
       </p:sp>
       <p:sp>
         <p:nvSpPr>
-          <p:cNvPr id="18" name="Shape 16"/>
-          <p:cNvSpPr/>
-          <p:nvPr/>
-        </p:nvSpPr>
-        <p:spPr>
-          <a:xfrm rot="5400000">
-            <a:off x="8808415" y="2670048"/>
-            <a:ext cx="164592" cy="146304"/>
-          </a:xfrm>
-          <a:prstGeom prst="rightTriangle">
+          <p:cNvPr id="24" name="Shape 22"/>
+          <p:cNvSpPr/>
+          <p:nvPr/>
+        </p:nvSpPr>
+        <p:spPr>
+          <a:xfrm flipV="1">
+            <a:off x="10317175" y="5532120"/>
+            <a:ext cx="182880" cy="164592"/>
+          </a:xfrm>
+          <a:prstGeom prst="triangle">
             <a:avLst/>
           </a:prstGeom>
           <a:solidFill>
@@ -7041,18 +7191,18 @@
       </p:sp>
       <p:sp>
         <p:nvSpPr>
-          <p:cNvPr id="19" name="Shape 17"/>
-          <p:cNvSpPr/>
-          <p:nvPr/>
-        </p:nvSpPr>
-        <p:spPr>
-          <a:xfrm>
-            <a:off x="8991295" y="2468880"/>
-            <a:ext cx="2377440" cy="548640"/>
+          <p:cNvPr id="25" name="Shape 23"/>
+          <p:cNvSpPr/>
+          <p:nvPr/>
+        </p:nvSpPr>
+        <p:spPr>
+          <a:xfrm>
+            <a:off x="9082735" y="5669280"/>
+            <a:ext cx="2651760" cy="685800"/>
           </a:xfrm>
           <a:prstGeom prst="roundRect">
             <a:avLst>
-              <a:gd name="adj" fmla="val 50000"/>
+              <a:gd name="adj" fmla="val 24000"/>
             </a:avLst>
           </a:prstGeom>
           <a:solidFill>
@@ -7068,14 +7218,14 @@
       </p:sp>
       <p:sp>
         <p:nvSpPr>
-          <p:cNvPr id="20" name="Text 18"/>
-          <p:cNvSpPr/>
-          <p:nvPr/>
-        </p:nvSpPr>
-        <p:spPr>
-          <a:xfrm>
-            <a:off x="9082735" y="2468880"/>
-            <a:ext cx="2194560" cy="548640"/>
+          <p:cNvPr id="26" name="Text 24"/>
+          <p:cNvSpPr/>
+          <p:nvPr/>
+        </p:nvSpPr>
+        <p:spPr>
+          <a:xfrm>
+            <a:off x="9219895" y="5669280"/>
+            <a:ext cx="548640" cy="685800"/>
           </a:xfrm>
           <a:prstGeom prst="rect">
             <a:avLst/>
@@ -7091,7 +7241,7 @@
               <a:buNone/>
             </a:pPr>
             <a:r>
-              <a:rPr lang="en-US" sz="1600" dirty="0">
+              <a:rPr lang="en-US" sz="2200" dirty="0">
                 <a:solidFill>
                   <a:srgbClr val="000000"/>
                 </a:solidFill>
@@ -7099,13 +7249,38 @@
                 <a:ea typeface="Calibri" pitchFamily="34" charset="-122"/>
                 <a:cs typeface="Calibri" pitchFamily="34" charset="-120"/>
               </a:rPr>
-              <a:t>👤  </a:t>
-            </a:r>
-            <a:pPr algn="ctr" indent="0" marL="0">
-              <a:buNone/>
-            </a:pPr>
-            <a:r>
-              <a:rPr lang="en-US" sz="1400" b="1" dirty="0">
+              <a:t>👤</a:t>
+            </a:r>
+            <a:endParaRPr lang="en-US" sz="2200" dirty="0"/>
+          </a:p>
+        </p:txBody>
+      </p:sp>
+      <p:sp>
+        <p:nvSpPr>
+          <p:cNvPr id="27" name="Text 25"/>
+          <p:cNvSpPr/>
+          <p:nvPr/>
+        </p:nvSpPr>
+        <p:spPr>
+          <a:xfrm>
+            <a:off x="9859975" y="5760720"/>
+            <a:ext cx="1783080" cy="320040"/>
+          </a:xfrm>
+          <a:prstGeom prst="rect">
+            <a:avLst/>
+          </a:prstGeom>
+          <a:noFill/>
+          <a:ln/>
+        </p:spPr>
+        <p:txBody>
+          <a:bodyPr wrap="square" rtlCol="0" anchor="ctr"/>
+          <a:lstStyle/>
+          <a:p>
+            <a:pPr indent="0" marL="0">
+              <a:buNone/>
+            </a:pPr>
+            <a:r>
+              <a:rPr lang="en-US" sz="1600" b="1" dirty="0">
                 <a:solidFill>
                   <a:srgbClr val="FAF8FF"/>
                 </a:solidFill>
@@ -7113,9 +7288,34 @@
                 <a:ea typeface="Calibri" pitchFamily="34" charset="-122"/>
                 <a:cs typeface="Calibri" pitchFamily="34" charset="-120"/>
               </a:rPr>
-              <a:t>User</a:t>
-            </a:r>
-            <a:pPr algn="ctr" indent="0" marL="0">
+              <a:t>User answer</a:t>
+            </a:r>
+            <a:endParaRPr lang="en-US" sz="1600" dirty="0"/>
+          </a:p>
+        </p:txBody>
+      </p:sp>
+      <p:sp>
+        <p:nvSpPr>
+          <p:cNvPr id="28" name="Text 26"/>
+          <p:cNvSpPr/>
+          <p:nvPr/>
+        </p:nvSpPr>
+        <p:spPr>
+          <a:xfrm>
+            <a:off x="9859975" y="6035040"/>
+            <a:ext cx="1783080" cy="274320"/>
+          </a:xfrm>
+          <a:prstGeom prst="rect">
+            <a:avLst/>
+          </a:prstGeom>
+          <a:noFill/>
+          <a:ln/>
+        </p:spPr>
+        <p:txBody>
+          <a:bodyPr wrap="square" rtlCol="0" anchor="ctr"/>
+          <a:lstStyle/>
+          <a:p>
+            <a:pPr indent="0" marL="0">
               <a:buNone/>
             </a:pPr>
             <a:r>
@@ -7127,26 +7327,26 @@
                 <a:ea typeface="Calibri" pitchFamily="34" charset="-122"/>
                 <a:cs typeface="Calibri" pitchFamily="34" charset="-120"/>
               </a:rPr>
-              <a:t>   answer</a:t>
-            </a:r>
-            <a:endParaRPr lang="en-US" sz="1600" dirty="0"/>
-          </a:p>
-        </p:txBody>
-      </p:sp>
-      <p:sp>
-        <p:nvSpPr>
-          <p:cNvPr id="21" name="Shape 19"/>
-          <p:cNvSpPr/>
-          <p:nvPr/>
-        </p:nvSpPr>
-        <p:spPr>
-          <a:xfrm>
-            <a:off x="822960" y="3291840"/>
-            <a:ext cx="10911535" cy="3200400"/>
+              <a:t>sanitised reply</a:t>
+            </a:r>
+            <a:endParaRPr lang="en-US" sz="1100" dirty="0"/>
+          </a:p>
+        </p:txBody>
+      </p:sp>
+      <p:sp>
+        <p:nvSpPr>
+          <p:cNvPr id="29" name="Shape 27"/>
+          <p:cNvSpPr/>
+          <p:nvPr/>
+        </p:nvSpPr>
+        <p:spPr>
+          <a:xfrm>
+            <a:off x="822960" y="2377440"/>
+            <a:ext cx="7985455" cy="4114800"/>
           </a:xfrm>
           <a:prstGeom prst="roundRect">
             <a:avLst>
-              <a:gd name="adj" fmla="val 2857"/>
+              <a:gd name="adj" fmla="val 2222"/>
             </a:avLst>
           </a:prstGeom>
           <a:solidFill>
@@ -7162,14 +7362,14 @@
       </p:sp>
       <p:sp>
         <p:nvSpPr>
-          <p:cNvPr id="22" name="Text 20"/>
-          <p:cNvSpPr/>
-          <p:nvPr/>
-        </p:nvSpPr>
-        <p:spPr>
-          <a:xfrm>
-            <a:off x="1051560" y="3456432"/>
-            <a:ext cx="10454335" cy="2880360"/>
+          <p:cNvPr id="30" name="Text 28"/>
+          <p:cNvSpPr/>
+          <p:nvPr/>
+        </p:nvSpPr>
+        <p:spPr>
+          <a:xfrm>
+            <a:off x="1051560" y="2542032"/>
+            <a:ext cx="7528255" cy="3794760"/>
           </a:xfrm>
           <a:prstGeom prst="rect">
             <a:avLst/>
@@ -7392,9 +7592,29 @@
             <a:pPr indent="0" marL="0">
               <a:buNone/>
             </a:pPr>
+            <a:endParaRPr lang="en-US" sz="1200" dirty="0"/>
+          </a:p>
+          <a:p>
+            <a:pPr indent="0" marL="0">
+              <a:buNone/>
+            </a:pPr>
             <a:r>
               <a:rPr lang="en-US" sz="1200" dirty="0">
                 <a:solidFill>
+                  <a:srgbClr val="FAF8FF"/>
+                </a:solidFill>
+                <a:latin typeface="Consolas" pitchFamily="34" charset="0"/>
+                <a:ea typeface="Consolas" pitchFamily="34" charset="-122"/>
+                <a:cs typeface="Consolas" pitchFamily="34" charset="-120"/>
+              </a:rPr>
+              <a:t>        </a:t>
+            </a:r>
+            <a:pPr indent="0" marL="0">
+              <a:buNone/>
+            </a:pPr>
+            <a:r>
+              <a:rPr lang="en-US" sz="1200" dirty="0">
+                <a:solidFill>
                   <a:srgbClr val="FBBF24"/>
                 </a:solidFill>
                 <a:latin typeface="Consolas" pitchFamily="34" charset="0"/>
@@ -7420,6 +7640,12 @@
             <a:pPr indent="0" marL="0">
               <a:buNone/>
             </a:pPr>
+            <a:endParaRPr lang="en-US" sz="1200" dirty="0"/>
+          </a:p>
+          <a:p>
+            <a:pPr indent="0" marL="0">
+              <a:buNone/>
+            </a:pPr>
             <a:r>
               <a:rPr lang="en-US" sz="1200" dirty="0">
                 <a:solidFill>
@@ -7429,6 +7655,48 @@
                 <a:ea typeface="Consolas" pitchFamily="34" charset="-122"/>
                 <a:cs typeface="Consolas" pitchFamily="34" charset="-120"/>
               </a:rPr>
+              <a:t>        </a:t>
+            </a:r>
+            <a:pPr indent="0" marL="0">
+              <a:buNone/>
+            </a:pPr>
+            <a:r>
+              <a:rPr lang="en-US" sz="1200" dirty="0">
+                <a:solidFill>
+                  <a:srgbClr val="FAF8FF"/>
+                </a:solidFill>
+                <a:latin typeface="Consolas" pitchFamily="34" charset="0"/>
+                <a:ea typeface="Consolas" pitchFamily="34" charset="-122"/>
+                <a:cs typeface="Consolas" pitchFamily="34" charset="-120"/>
+              </a:rPr>
+              <a:t>name</a:t>
+            </a:r>
+            <a:pPr indent="0" marL="0">
+              <a:buNone/>
+            </a:pPr>
+            <a:r>
+              <a:rPr lang="en-US" sz="1200" dirty="0">
+                <a:solidFill>
+                  <a:srgbClr val="B8B5D9"/>
+                </a:solidFill>
+                <a:latin typeface="Consolas" pitchFamily="34" charset="0"/>
+                <a:ea typeface="Consolas" pitchFamily="34" charset="-122"/>
+                <a:cs typeface="Consolas" pitchFamily="34" charset="-120"/>
+              </a:rPr>
+              <a:t>:</a:t>
+            </a:r>
+            <a:pPr indent="0" marL="0">
+              <a:buNone/>
+            </a:pPr>
+            <a:r>
+              <a:rPr lang="en-US" sz="1200" dirty="0">
+                <a:solidFill>
+                  <a:srgbClr val="FAF8FF"/>
+                </a:solidFill>
+                <a:latin typeface="Consolas" pitchFamily="34" charset="0"/>
+                <a:ea typeface="Consolas" pitchFamily="34" charset="-122"/>
+                <a:cs typeface="Consolas" pitchFamily="34" charset="-120"/>
+              </a:rPr>
               <a:t> </a:t>
             </a:r>
             <a:pPr indent="0" marL="0">
@@ -7437,13 +7705,101 @@
             <a:r>
               <a:rPr lang="en-US" sz="1200" dirty="0">
                 <a:solidFill>
+                  <a:srgbClr val="FBBF24"/>
+                </a:solidFill>
+                <a:latin typeface="Consolas" pitchFamily="34" charset="0"/>
+                <a:ea typeface="Consolas" pitchFamily="34" charset="-122"/>
+                <a:cs typeface="Consolas" pitchFamily="34" charset="-120"/>
+              </a:rPr>
+              <a:t>"triage"</a:t>
+            </a:r>
+            <a:pPr indent="0" marL="0">
+              <a:buNone/>
+            </a:pPr>
+            <a:r>
+              <a:rPr lang="en-US" sz="1200" dirty="0">
+                <a:solidFill>
+                  <a:srgbClr val="B8B5D9"/>
+                </a:solidFill>
+                <a:latin typeface="Consolas" pitchFamily="34" charset="0"/>
+                <a:ea typeface="Consolas" pitchFamily="34" charset="-122"/>
+                <a:cs typeface="Consolas" pitchFamily="34" charset="-120"/>
+              </a:rPr>
+              <a:t>)</a:t>
+            </a:r>
+            <a:pPr indent="0" marL="0">
+              <a:buNone/>
+            </a:pPr>
+            <a:r>
+              <a:rPr lang="en-US" sz="1200" dirty="0">
+                <a:solidFill>
+                  <a:srgbClr val="B8B5D9"/>
+                </a:solidFill>
+                <a:latin typeface="Consolas" pitchFamily="34" charset="0"/>
+                <a:ea typeface="Consolas" pitchFamily="34" charset="-122"/>
+                <a:cs typeface="Consolas" pitchFamily="34" charset="-120"/>
+              </a:rPr>
+              <a:t>;</a:t>
+            </a:r>
+            <a:pPr indent="0" marL="0">
+              <a:buNone/>
+            </a:pPr>
+            <a:endParaRPr lang="en-US" sz="1200" dirty="0"/>
+          </a:p>
+          <a:p>
+            <a:pPr indent="0" marL="0">
+              <a:buNone/>
+            </a:pPr>
+            <a:endParaRPr lang="en-US" sz="1200" dirty="0"/>
+          </a:p>
+          <a:p>
+            <a:pPr indent="0" marL="0">
+              <a:buNone/>
+            </a:pPr>
+            <a:r>
+              <a:rPr lang="en-US" sz="1200" i="1" dirty="0">
+                <a:solidFill>
+                  <a:srgbClr val="8B88B5"/>
+                </a:solidFill>
+                <a:latin typeface="Consolas" pitchFamily="34" charset="0"/>
+                <a:ea typeface="Consolas" pitchFamily="34" charset="-122"/>
+                <a:cs typeface="Consolas" pitchFamily="34" charset="-120"/>
+              </a:rPr>
+              <a:t>// ☁️  Cloud — Azure OpenAI, frontier reasoning</a:t>
+            </a:r>
+            <a:pPr indent="0" marL="0">
+              <a:buNone/>
+            </a:pPr>
+            <a:endParaRPr lang="en-US" sz="1200" dirty="0"/>
+          </a:p>
+          <a:p>
+            <a:pPr indent="0" marL="0">
+              <a:buNone/>
+            </a:pPr>
+            <a:r>
+              <a:rPr lang="en-US" sz="1200" dirty="0">
+                <a:solidFill>
+                  <a:srgbClr val="A78BFA"/>
+                </a:solidFill>
+                <a:latin typeface="Consolas" pitchFamily="34" charset="0"/>
+                <a:ea typeface="Consolas" pitchFamily="34" charset="-122"/>
+                <a:cs typeface="Consolas" pitchFamily="34" charset="-120"/>
+              </a:rPr>
+              <a:t>AIAgent</a:t>
+            </a:r>
+            <a:pPr indent="0" marL="0">
+              <a:buNone/>
+            </a:pPr>
+            <a:r>
+              <a:rPr lang="en-US" sz="1200" dirty="0">
+                <a:solidFill>
                   <a:srgbClr val="FAF8FF"/>
                 </a:solidFill>
                 <a:latin typeface="Consolas" pitchFamily="34" charset="0"/>
                 <a:ea typeface="Consolas" pitchFamily="34" charset="-122"/>
                 <a:cs typeface="Consolas" pitchFamily="34" charset="-120"/>
               </a:rPr>
-              <a:t>name</a:t>
+              <a:t> expert </a:t>
             </a:r>
             <a:pPr indent="0" marL="0">
               <a:buNone/>
@@ -7451,14 +7807,90 @@
             <a:r>
               <a:rPr lang="en-US" sz="1200" dirty="0">
                 <a:solidFill>
+                  <a:srgbClr val="CFCBED"/>
+                </a:solidFill>
+                <a:latin typeface="Consolas" pitchFamily="34" charset="0"/>
+                <a:ea typeface="Consolas" pitchFamily="34" charset="-122"/>
+                <a:cs typeface="Consolas" pitchFamily="34" charset="-120"/>
+              </a:rPr>
+              <a:t>=</a:t>
+            </a:r>
+            <a:pPr indent="0" marL="0">
+              <a:buNone/>
+            </a:pPr>
+            <a:r>
+              <a:rPr lang="en-US" sz="1200" dirty="0">
+                <a:solidFill>
+                  <a:srgbClr val="FAF8FF"/>
+                </a:solidFill>
+                <a:latin typeface="Consolas" pitchFamily="34" charset="0"/>
+                <a:ea typeface="Consolas" pitchFamily="34" charset="-122"/>
+                <a:cs typeface="Consolas" pitchFamily="34" charset="-120"/>
+              </a:rPr>
+              <a:t> </a:t>
+            </a:r>
+            <a:pPr indent="0" marL="0">
+              <a:buNone/>
+            </a:pPr>
+            <a:r>
+              <a:rPr lang="en-US" sz="1200" dirty="0">
+                <a:solidFill>
+                  <a:srgbClr val="FB7185"/>
+                </a:solidFill>
+                <a:latin typeface="Consolas" pitchFamily="34" charset="0"/>
+                <a:ea typeface="Consolas" pitchFamily="34" charset="-122"/>
+                <a:cs typeface="Consolas" pitchFamily="34" charset="-120"/>
+              </a:rPr>
+              <a:t>new</a:t>
+            </a:r>
+            <a:pPr indent="0" marL="0">
+              <a:buNone/>
+            </a:pPr>
+            <a:r>
+              <a:rPr lang="en-US" sz="1200" dirty="0">
+                <a:solidFill>
+                  <a:srgbClr val="FAF8FF"/>
+                </a:solidFill>
+                <a:latin typeface="Consolas" pitchFamily="34" charset="0"/>
+                <a:ea typeface="Consolas" pitchFamily="34" charset="-122"/>
+                <a:cs typeface="Consolas" pitchFamily="34" charset="-120"/>
+              </a:rPr>
+              <a:t> </a:t>
+            </a:r>
+            <a:pPr indent="0" marL="0">
+              <a:buNone/>
+            </a:pPr>
+            <a:r>
+              <a:rPr lang="en-US" sz="1200" dirty="0">
+                <a:solidFill>
+                  <a:srgbClr val="FAF8FF"/>
+                </a:solidFill>
+                <a:latin typeface="Consolas" pitchFamily="34" charset="0"/>
+                <a:ea typeface="Consolas" pitchFamily="34" charset="-122"/>
+                <a:cs typeface="Consolas" pitchFamily="34" charset="-120"/>
+              </a:rPr>
+              <a:t>AzureOpenAIClient</a:t>
+            </a:r>
+            <a:pPr indent="0" marL="0">
+              <a:buNone/>
+            </a:pPr>
+            <a:r>
+              <a:rPr lang="en-US" sz="1200" dirty="0">
+                <a:solidFill>
                   <a:srgbClr val="B8B5D9"/>
                 </a:solidFill>
                 <a:latin typeface="Consolas" pitchFamily="34" charset="0"/>
                 <a:ea typeface="Consolas" pitchFamily="34" charset="-122"/>
                 <a:cs typeface="Consolas" pitchFamily="34" charset="-120"/>
               </a:rPr>
-              <a:t>:</a:t>
-            </a:r>
+              <a:t>(</a:t>
+            </a:r>
+            <a:pPr indent="0" marL="0">
+              <a:buNone/>
+            </a:pPr>
+            <a:endParaRPr lang="en-US" sz="1200" dirty="0"/>
+          </a:p>
+          <a:p>
             <a:pPr indent="0" marL="0">
               <a:buNone/>
             </a:pPr>
@@ -7471,6 +7903,34 @@
                 <a:ea typeface="Consolas" pitchFamily="34" charset="-122"/>
                 <a:cs typeface="Consolas" pitchFamily="34" charset="-120"/>
               </a:rPr>
+              <a:t>        endpoint</a:t>
+            </a:r>
+            <a:pPr indent="0" marL="0">
+              <a:buNone/>
+            </a:pPr>
+            <a:r>
+              <a:rPr lang="en-US" sz="1200" dirty="0">
+                <a:solidFill>
+                  <a:srgbClr val="B8B5D9"/>
+                </a:solidFill>
+                <a:latin typeface="Consolas" pitchFamily="34" charset="0"/>
+                <a:ea typeface="Consolas" pitchFamily="34" charset="-122"/>
+                <a:cs typeface="Consolas" pitchFamily="34" charset="-120"/>
+              </a:rPr>
+              <a:t>,</a:t>
+            </a:r>
+            <a:pPr indent="0" marL="0">
+              <a:buNone/>
+            </a:pPr>
+            <a:r>
+              <a:rPr lang="en-US" sz="1200" dirty="0">
+                <a:solidFill>
+                  <a:srgbClr val="FAF8FF"/>
+                </a:solidFill>
+                <a:latin typeface="Consolas" pitchFamily="34" charset="0"/>
+                <a:ea typeface="Consolas" pitchFamily="34" charset="-122"/>
+                <a:cs typeface="Consolas" pitchFamily="34" charset="-120"/>
+              </a:rPr>
               <a:t> </a:t>
             </a:r>
             <a:pPr indent="0" marL="0">
@@ -7479,13 +7939,159 @@
             <a:r>
               <a:rPr lang="en-US" sz="1200" dirty="0">
                 <a:solidFill>
+                  <a:srgbClr val="FB7185"/>
+                </a:solidFill>
+                <a:latin typeface="Consolas" pitchFamily="34" charset="0"/>
+                <a:ea typeface="Consolas" pitchFamily="34" charset="-122"/>
+                <a:cs typeface="Consolas" pitchFamily="34" charset="-120"/>
+              </a:rPr>
+              <a:t>new</a:t>
+            </a:r>
+            <a:pPr indent="0" marL="0">
+              <a:buNone/>
+            </a:pPr>
+            <a:r>
+              <a:rPr lang="en-US" sz="1200" dirty="0">
+                <a:solidFill>
+                  <a:srgbClr val="FAF8FF"/>
+                </a:solidFill>
+                <a:latin typeface="Consolas" pitchFamily="34" charset="0"/>
+                <a:ea typeface="Consolas" pitchFamily="34" charset="-122"/>
+                <a:cs typeface="Consolas" pitchFamily="34" charset="-120"/>
+              </a:rPr>
+              <a:t> </a:t>
+            </a:r>
+            <a:pPr indent="0" marL="0">
+              <a:buNone/>
+            </a:pPr>
+            <a:r>
+              <a:rPr lang="en-US" sz="1200" dirty="0">
+                <a:solidFill>
+                  <a:srgbClr val="FAF8FF"/>
+                </a:solidFill>
+                <a:latin typeface="Consolas" pitchFamily="34" charset="0"/>
+                <a:ea typeface="Consolas" pitchFamily="34" charset="-122"/>
+                <a:cs typeface="Consolas" pitchFamily="34" charset="-120"/>
+              </a:rPr>
+              <a:t>DefaultAzureCredential</a:t>
+            </a:r>
+            <a:pPr indent="0" marL="0">
+              <a:buNone/>
+            </a:pPr>
+            <a:r>
+              <a:rPr lang="en-US" sz="1200" dirty="0">
+                <a:solidFill>
+                  <a:srgbClr val="B8B5D9"/>
+                </a:solidFill>
+                <a:latin typeface="Consolas" pitchFamily="34" charset="0"/>
+                <a:ea typeface="Consolas" pitchFamily="34" charset="-122"/>
+                <a:cs typeface="Consolas" pitchFamily="34" charset="-120"/>
+              </a:rPr>
+              <a:t>(</a:t>
+            </a:r>
+            <a:pPr indent="0" marL="0">
+              <a:buNone/>
+            </a:pPr>
+            <a:r>
+              <a:rPr lang="en-US" sz="1200" dirty="0">
+                <a:solidFill>
+                  <a:srgbClr val="B8B5D9"/>
+                </a:solidFill>
+                <a:latin typeface="Consolas" pitchFamily="34" charset="0"/>
+                <a:ea typeface="Consolas" pitchFamily="34" charset="-122"/>
+                <a:cs typeface="Consolas" pitchFamily="34" charset="-120"/>
+              </a:rPr>
+              <a:t>)</a:t>
+            </a:r>
+            <a:pPr indent="0" marL="0">
+              <a:buNone/>
+            </a:pPr>
+            <a:r>
+              <a:rPr lang="en-US" sz="1200" dirty="0">
+                <a:solidFill>
+                  <a:srgbClr val="B8B5D9"/>
+                </a:solidFill>
+                <a:latin typeface="Consolas" pitchFamily="34" charset="0"/>
+                <a:ea typeface="Consolas" pitchFamily="34" charset="-122"/>
+                <a:cs typeface="Consolas" pitchFamily="34" charset="-120"/>
+              </a:rPr>
+              <a:t>)</a:t>
+            </a:r>
+            <a:pPr indent="0" marL="0">
+              <a:buNone/>
+            </a:pPr>
+            <a:endParaRPr lang="en-US" sz="1200" dirty="0"/>
+          </a:p>
+          <a:p>
+            <a:pPr indent="0" marL="0">
+              <a:buNone/>
+            </a:pPr>
+            <a:r>
+              <a:rPr lang="en-US" sz="1200" dirty="0">
+                <a:solidFill>
+                  <a:srgbClr val="FAF8FF"/>
+                </a:solidFill>
+                <a:latin typeface="Consolas" pitchFamily="34" charset="0"/>
+                <a:ea typeface="Consolas" pitchFamily="34" charset="-122"/>
+                <a:cs typeface="Consolas" pitchFamily="34" charset="-120"/>
+              </a:rPr>
+              <a:t>    </a:t>
+            </a:r>
+            <a:pPr indent="0" marL="0">
+              <a:buNone/>
+            </a:pPr>
+            <a:r>
+              <a:rPr lang="en-US" sz="1200" dirty="0">
+                <a:solidFill>
+                  <a:srgbClr val="B8B5D9"/>
+                </a:solidFill>
+                <a:latin typeface="Consolas" pitchFamily="34" charset="0"/>
+                <a:ea typeface="Consolas" pitchFamily="34" charset="-122"/>
+                <a:cs typeface="Consolas" pitchFamily="34" charset="-120"/>
+              </a:rPr>
+              <a:t>.</a:t>
+            </a:r>
+            <a:pPr indent="0" marL="0">
+              <a:buNone/>
+            </a:pPr>
+            <a:r>
+              <a:rPr lang="en-US" sz="1200" dirty="0">
+                <a:solidFill>
+                  <a:srgbClr val="86EFAC"/>
+                </a:solidFill>
+                <a:latin typeface="Consolas" pitchFamily="34" charset="0"/>
+                <a:ea typeface="Consolas" pitchFamily="34" charset="-122"/>
+                <a:cs typeface="Consolas" pitchFamily="34" charset="-120"/>
+              </a:rPr>
+              <a:t>GetChatClient</a:t>
+            </a:r>
+            <a:pPr indent="0" marL="0">
+              <a:buNone/>
+            </a:pPr>
+            <a:r>
+              <a:rPr lang="en-US" sz="1200" dirty="0">
+                <a:solidFill>
+                  <a:srgbClr val="B8B5D9"/>
+                </a:solidFill>
+                <a:latin typeface="Consolas" pitchFamily="34" charset="0"/>
+                <a:ea typeface="Consolas" pitchFamily="34" charset="-122"/>
+                <a:cs typeface="Consolas" pitchFamily="34" charset="-120"/>
+              </a:rPr>
+              <a:t>(</a:t>
+            </a:r>
+            <a:pPr indent="0" marL="0">
+              <a:buNone/>
+            </a:pPr>
+            <a:r>
+              <a:rPr lang="en-US" sz="1200" dirty="0">
+                <a:solidFill>
                   <a:srgbClr val="FBBF24"/>
                 </a:solidFill>
                 <a:latin typeface="Consolas" pitchFamily="34" charset="0"/>
                 <a:ea typeface="Consolas" pitchFamily="34" charset="-122"/>
                 <a:cs typeface="Consolas" pitchFamily="34" charset="-120"/>
               </a:rPr>
-              <a:t>"triage"</a:t>
+              <a:t>"gpt-4.1"</a:t>
             </a:r>
             <a:pPr indent="0" marL="0">
               <a:buNone/>
@@ -7513,7 +8119,49 @@
                 <a:ea typeface="Consolas" pitchFamily="34" charset="-122"/>
                 <a:cs typeface="Consolas" pitchFamily="34" charset="-120"/>
               </a:rPr>
-              <a:t>;</a:t>
+              <a:t>.</a:t>
+            </a:r>
+            <a:pPr indent="0" marL="0">
+              <a:buNone/>
+            </a:pPr>
+            <a:r>
+              <a:rPr lang="en-US" sz="1200" dirty="0">
+                <a:solidFill>
+                  <a:srgbClr val="86EFAC"/>
+                </a:solidFill>
+                <a:latin typeface="Consolas" pitchFamily="34" charset="0"/>
+                <a:ea typeface="Consolas" pitchFamily="34" charset="-122"/>
+                <a:cs typeface="Consolas" pitchFamily="34" charset="-120"/>
+              </a:rPr>
+              <a:t>AsIChatClient</a:t>
+            </a:r>
+            <a:pPr indent="0" marL="0">
+              <a:buNone/>
+            </a:pPr>
+            <a:r>
+              <a:rPr lang="en-US" sz="1200" dirty="0">
+                <a:solidFill>
+                  <a:srgbClr val="B8B5D9"/>
+                </a:solidFill>
+                <a:latin typeface="Consolas" pitchFamily="34" charset="0"/>
+                <a:ea typeface="Consolas" pitchFamily="34" charset="-122"/>
+                <a:cs typeface="Consolas" pitchFamily="34" charset="-120"/>
+              </a:rPr>
+              <a:t>(</a:t>
+            </a:r>
+            <a:pPr indent="0" marL="0">
+              <a:buNone/>
+            </a:pPr>
+            <a:r>
+              <a:rPr lang="en-US" sz="1200" dirty="0">
+                <a:solidFill>
+                  <a:srgbClr val="B8B5D9"/>
+                </a:solidFill>
+                <a:latin typeface="Consolas" pitchFamily="34" charset="0"/>
+                <a:ea typeface="Consolas" pitchFamily="34" charset="-122"/>
+                <a:cs typeface="Consolas" pitchFamily="34" charset="-120"/>
+              </a:rPr>
+              <a:t>)</a:t>
             </a:r>
             <a:pPr indent="0" marL="0">
               <a:buNone/>
@@ -7524,6 +8172,62 @@
             <a:pPr indent="0" marL="0">
               <a:buNone/>
             </a:pPr>
+            <a:r>
+              <a:rPr lang="en-US" sz="1200" dirty="0">
+                <a:solidFill>
+                  <a:srgbClr val="FAF8FF"/>
+                </a:solidFill>
+                <a:latin typeface="Consolas" pitchFamily="34" charset="0"/>
+                <a:ea typeface="Consolas" pitchFamily="34" charset="-122"/>
+                <a:cs typeface="Consolas" pitchFamily="34" charset="-120"/>
+              </a:rPr>
+              <a:t>    </a:t>
+            </a:r>
+            <a:pPr indent="0" marL="0">
+              <a:buNone/>
+            </a:pPr>
+            <a:r>
+              <a:rPr lang="en-US" sz="1200" dirty="0">
+                <a:solidFill>
+                  <a:srgbClr val="B8B5D9"/>
+                </a:solidFill>
+                <a:latin typeface="Consolas" pitchFamily="34" charset="0"/>
+                <a:ea typeface="Consolas" pitchFamily="34" charset="-122"/>
+                <a:cs typeface="Consolas" pitchFamily="34" charset="-120"/>
+              </a:rPr>
+              <a:t>.</a:t>
+            </a:r>
+            <a:pPr indent="0" marL="0">
+              <a:buNone/>
+            </a:pPr>
+            <a:r>
+              <a:rPr lang="en-US" sz="1200" dirty="0">
+                <a:solidFill>
+                  <a:srgbClr val="86EFAC"/>
+                </a:solidFill>
+                <a:latin typeface="Consolas" pitchFamily="34" charset="0"/>
+                <a:ea typeface="Consolas" pitchFamily="34" charset="-122"/>
+                <a:cs typeface="Consolas" pitchFamily="34" charset="-120"/>
+              </a:rPr>
+              <a:t>CreateAIAgent</a:t>
+            </a:r>
+            <a:pPr indent="0" marL="0">
+              <a:buNone/>
+            </a:pPr>
+            <a:r>
+              <a:rPr lang="en-US" sz="1200" dirty="0">
+                <a:solidFill>
+                  <a:srgbClr val="B8B5D9"/>
+                </a:solidFill>
+                <a:latin typeface="Consolas" pitchFamily="34" charset="0"/>
+                <a:ea typeface="Consolas" pitchFamily="34" charset="-122"/>
+                <a:cs typeface="Consolas" pitchFamily="34" charset="-120"/>
+              </a:rPr>
+              <a:t>(</a:t>
+            </a:r>
+            <a:pPr indent="0" marL="0">
+              <a:buNone/>
+            </a:pPr>
             <a:endParaRPr lang="en-US" sz="1200" dirty="0"/>
           </a:p>
           <a:p>
@@ -7531,15 +8235,43 @@
               <a:buNone/>
             </a:pPr>
             <a:r>
-              <a:rPr lang="en-US" sz="1200" i="1" dirty="0">
-                <a:solidFill>
-                  <a:srgbClr val="8B88B5"/>
-                </a:solidFill>
-                <a:latin typeface="Consolas" pitchFamily="34" charset="0"/>
-                <a:ea typeface="Consolas" pitchFamily="34" charset="-122"/>
-                <a:cs typeface="Consolas" pitchFamily="34" charset="-120"/>
-              </a:rPr>
-              <a:t>// ☁️  Cloud — Azure OpenAI, frontier reasoning</a:t>
+              <a:rPr lang="en-US" sz="1200" dirty="0">
+                <a:solidFill>
+                  <a:srgbClr val="FAF8FF"/>
+                </a:solidFill>
+                <a:latin typeface="Consolas" pitchFamily="34" charset="0"/>
+                <a:ea typeface="Consolas" pitchFamily="34" charset="-122"/>
+                <a:cs typeface="Consolas" pitchFamily="34" charset="-120"/>
+              </a:rPr>
+              <a:t>        </a:t>
+            </a:r>
+            <a:pPr indent="0" marL="0">
+              <a:buNone/>
+            </a:pPr>
+            <a:r>
+              <a:rPr lang="en-US" sz="1200" dirty="0">
+                <a:solidFill>
+                  <a:srgbClr val="FBBF24"/>
+                </a:solidFill>
+                <a:latin typeface="Consolas" pitchFamily="34" charset="0"/>
+                <a:ea typeface="Consolas" pitchFamily="34" charset="-122"/>
+                <a:cs typeface="Consolas" pitchFamily="34" charset="-120"/>
+              </a:rPr>
+              <a:t>"Answer with depth and current context."</a:t>
+            </a:r>
+            <a:pPr indent="0" marL="0">
+              <a:buNone/>
+            </a:pPr>
+            <a:r>
+              <a:rPr lang="en-US" sz="1200" dirty="0">
+                <a:solidFill>
+                  <a:srgbClr val="B8B5D9"/>
+                </a:solidFill>
+                <a:latin typeface="Consolas" pitchFamily="34" charset="0"/>
+                <a:ea typeface="Consolas" pitchFamily="34" charset="-122"/>
+                <a:cs typeface="Consolas" pitchFamily="34" charset="-120"/>
+              </a:rPr>
+              <a:t>,</a:t>
             </a:r>
             <a:pPr indent="0" marL="0">
               <a:buNone/>
@@ -7553,487 +8285,13 @@
             <a:r>
               <a:rPr lang="en-US" sz="1200" dirty="0">
                 <a:solidFill>
-                  <a:srgbClr val="A78BFA"/>
-                </a:solidFill>
-                <a:latin typeface="Consolas" pitchFamily="34" charset="0"/>
-                <a:ea typeface="Consolas" pitchFamily="34" charset="-122"/>
-                <a:cs typeface="Consolas" pitchFamily="34" charset="-120"/>
-              </a:rPr>
-              <a:t>AIAgent</a:t>
-            </a:r>
-            <a:pPr indent="0" marL="0">
-              <a:buNone/>
-            </a:pPr>
-            <a:r>
-              <a:rPr lang="en-US" sz="1200" dirty="0">
-                <a:solidFill>
                   <a:srgbClr val="FAF8FF"/>
                 </a:solidFill>
                 <a:latin typeface="Consolas" pitchFamily="34" charset="0"/>
                 <a:ea typeface="Consolas" pitchFamily="34" charset="-122"/>
                 <a:cs typeface="Consolas" pitchFamily="34" charset="-120"/>
               </a:rPr>
-              <a:t> expert </a:t>
-            </a:r>
-            <a:pPr indent="0" marL="0">
-              <a:buNone/>
-            </a:pPr>
-            <a:r>
-              <a:rPr lang="en-US" sz="1200" dirty="0">
-                <a:solidFill>
-                  <a:srgbClr val="CFCBED"/>
-                </a:solidFill>
-                <a:latin typeface="Consolas" pitchFamily="34" charset="0"/>
-                <a:ea typeface="Consolas" pitchFamily="34" charset="-122"/>
-                <a:cs typeface="Consolas" pitchFamily="34" charset="-120"/>
-              </a:rPr>
-              <a:t>=</a:t>
-            </a:r>
-            <a:pPr indent="0" marL="0">
-              <a:buNone/>
-            </a:pPr>
-            <a:r>
-              <a:rPr lang="en-US" sz="1200" dirty="0">
-                <a:solidFill>
-                  <a:srgbClr val="FAF8FF"/>
-                </a:solidFill>
-                <a:latin typeface="Consolas" pitchFamily="34" charset="0"/>
-                <a:ea typeface="Consolas" pitchFamily="34" charset="-122"/>
-                <a:cs typeface="Consolas" pitchFamily="34" charset="-120"/>
-              </a:rPr>
-              <a:t> </a:t>
-            </a:r>
-            <a:pPr indent="0" marL="0">
-              <a:buNone/>
-            </a:pPr>
-            <a:r>
-              <a:rPr lang="en-US" sz="1200" dirty="0">
-                <a:solidFill>
-                  <a:srgbClr val="FB7185"/>
-                </a:solidFill>
-                <a:latin typeface="Consolas" pitchFamily="34" charset="0"/>
-                <a:ea typeface="Consolas" pitchFamily="34" charset="-122"/>
-                <a:cs typeface="Consolas" pitchFamily="34" charset="-120"/>
-              </a:rPr>
-              <a:t>new</a:t>
-            </a:r>
-            <a:pPr indent="0" marL="0">
-              <a:buNone/>
-            </a:pPr>
-            <a:r>
-              <a:rPr lang="en-US" sz="1200" dirty="0">
-                <a:solidFill>
-                  <a:srgbClr val="FAF8FF"/>
-                </a:solidFill>
-                <a:latin typeface="Consolas" pitchFamily="34" charset="0"/>
-                <a:ea typeface="Consolas" pitchFamily="34" charset="-122"/>
-                <a:cs typeface="Consolas" pitchFamily="34" charset="-120"/>
-              </a:rPr>
-              <a:t> </a:t>
-            </a:r>
-            <a:pPr indent="0" marL="0">
-              <a:buNone/>
-            </a:pPr>
-            <a:r>
-              <a:rPr lang="en-US" sz="1200" dirty="0">
-                <a:solidFill>
-                  <a:srgbClr val="FAF8FF"/>
-                </a:solidFill>
-                <a:latin typeface="Consolas" pitchFamily="34" charset="0"/>
-                <a:ea typeface="Consolas" pitchFamily="34" charset="-122"/>
-                <a:cs typeface="Consolas" pitchFamily="34" charset="-120"/>
-              </a:rPr>
-              <a:t>AzureOpenAIClient</a:t>
-            </a:r>
-            <a:pPr indent="0" marL="0">
-              <a:buNone/>
-            </a:pPr>
-            <a:r>
-              <a:rPr lang="en-US" sz="1200" dirty="0">
-                <a:solidFill>
-                  <a:srgbClr val="B8B5D9"/>
-                </a:solidFill>
-                <a:latin typeface="Consolas" pitchFamily="34" charset="0"/>
-                <a:ea typeface="Consolas" pitchFamily="34" charset="-122"/>
-                <a:cs typeface="Consolas" pitchFamily="34" charset="-120"/>
-              </a:rPr>
-              <a:t>(</a:t>
-            </a:r>
-            <a:pPr indent="0" marL="0">
-              <a:buNone/>
-            </a:pPr>
-            <a:r>
-              <a:rPr lang="en-US" sz="1200" dirty="0">
-                <a:solidFill>
-                  <a:srgbClr val="FAF8FF"/>
-                </a:solidFill>
-                <a:latin typeface="Consolas" pitchFamily="34" charset="0"/>
-                <a:ea typeface="Consolas" pitchFamily="34" charset="-122"/>
-                <a:cs typeface="Consolas" pitchFamily="34" charset="-120"/>
-              </a:rPr>
-              <a:t>endpoint</a:t>
-            </a:r>
-            <a:pPr indent="0" marL="0">
-              <a:buNone/>
-            </a:pPr>
-            <a:r>
-              <a:rPr lang="en-US" sz="1200" dirty="0">
-                <a:solidFill>
-                  <a:srgbClr val="B8B5D9"/>
-                </a:solidFill>
-                <a:latin typeface="Consolas" pitchFamily="34" charset="0"/>
-                <a:ea typeface="Consolas" pitchFamily="34" charset="-122"/>
-                <a:cs typeface="Consolas" pitchFamily="34" charset="-120"/>
-              </a:rPr>
-              <a:t>,</a:t>
-            </a:r>
-            <a:pPr indent="0" marL="0">
-              <a:buNone/>
-            </a:pPr>
-            <a:r>
-              <a:rPr lang="en-US" sz="1200" dirty="0">
-                <a:solidFill>
-                  <a:srgbClr val="FAF8FF"/>
-                </a:solidFill>
-                <a:latin typeface="Consolas" pitchFamily="34" charset="0"/>
-                <a:ea typeface="Consolas" pitchFamily="34" charset="-122"/>
-                <a:cs typeface="Consolas" pitchFamily="34" charset="-120"/>
-              </a:rPr>
-              <a:t> </a:t>
-            </a:r>
-            <a:pPr indent="0" marL="0">
-              <a:buNone/>
-            </a:pPr>
-            <a:r>
-              <a:rPr lang="en-US" sz="1200" dirty="0">
-                <a:solidFill>
-                  <a:srgbClr val="FB7185"/>
-                </a:solidFill>
-                <a:latin typeface="Consolas" pitchFamily="34" charset="0"/>
-                <a:ea typeface="Consolas" pitchFamily="34" charset="-122"/>
-                <a:cs typeface="Consolas" pitchFamily="34" charset="-120"/>
-              </a:rPr>
-              <a:t>new</a:t>
-            </a:r>
-            <a:pPr indent="0" marL="0">
-              <a:buNone/>
-            </a:pPr>
-            <a:r>
-              <a:rPr lang="en-US" sz="1200" dirty="0">
-                <a:solidFill>
-                  <a:srgbClr val="FAF8FF"/>
-                </a:solidFill>
-                <a:latin typeface="Consolas" pitchFamily="34" charset="0"/>
-                <a:ea typeface="Consolas" pitchFamily="34" charset="-122"/>
-                <a:cs typeface="Consolas" pitchFamily="34" charset="-120"/>
-              </a:rPr>
-              <a:t> </a:t>
-            </a:r>
-            <a:pPr indent="0" marL="0">
-              <a:buNone/>
-            </a:pPr>
-            <a:r>
-              <a:rPr lang="en-US" sz="1200" dirty="0">
-                <a:solidFill>
-                  <a:srgbClr val="FAF8FF"/>
-                </a:solidFill>
-                <a:latin typeface="Consolas" pitchFamily="34" charset="0"/>
-                <a:ea typeface="Consolas" pitchFamily="34" charset="-122"/>
-                <a:cs typeface="Consolas" pitchFamily="34" charset="-120"/>
-              </a:rPr>
-              <a:t>DefaultAzureCredential</a:t>
-            </a:r>
-            <a:pPr indent="0" marL="0">
-              <a:buNone/>
-            </a:pPr>
-            <a:r>
-              <a:rPr lang="en-US" sz="1200" dirty="0">
-                <a:solidFill>
-                  <a:srgbClr val="B8B5D9"/>
-                </a:solidFill>
-                <a:latin typeface="Consolas" pitchFamily="34" charset="0"/>
-                <a:ea typeface="Consolas" pitchFamily="34" charset="-122"/>
-                <a:cs typeface="Consolas" pitchFamily="34" charset="-120"/>
-              </a:rPr>
-              <a:t>(</a:t>
-            </a:r>
-            <a:pPr indent="0" marL="0">
-              <a:buNone/>
-            </a:pPr>
-            <a:r>
-              <a:rPr lang="en-US" sz="1200" dirty="0">
-                <a:solidFill>
-                  <a:srgbClr val="B8B5D9"/>
-                </a:solidFill>
-                <a:latin typeface="Consolas" pitchFamily="34" charset="0"/>
-                <a:ea typeface="Consolas" pitchFamily="34" charset="-122"/>
-                <a:cs typeface="Consolas" pitchFamily="34" charset="-120"/>
-              </a:rPr>
-              <a:t>)</a:t>
-            </a:r>
-            <a:pPr indent="0" marL="0">
-              <a:buNone/>
-            </a:pPr>
-            <a:r>
-              <a:rPr lang="en-US" sz="1200" dirty="0">
-                <a:solidFill>
-                  <a:srgbClr val="B8B5D9"/>
-                </a:solidFill>
-                <a:latin typeface="Consolas" pitchFamily="34" charset="0"/>
-                <a:ea typeface="Consolas" pitchFamily="34" charset="-122"/>
-                <a:cs typeface="Consolas" pitchFamily="34" charset="-120"/>
-              </a:rPr>
-              <a:t>)</a:t>
-            </a:r>
-            <a:pPr indent="0" marL="0">
-              <a:buNone/>
-            </a:pPr>
-            <a:endParaRPr lang="en-US" sz="1200" dirty="0"/>
-          </a:p>
-          <a:p>
-            <a:pPr indent="0" marL="0">
-              <a:buNone/>
-            </a:pPr>
-            <a:r>
-              <a:rPr lang="en-US" sz="1200" dirty="0">
-                <a:solidFill>
-                  <a:srgbClr val="FAF8FF"/>
-                </a:solidFill>
-                <a:latin typeface="Consolas" pitchFamily="34" charset="0"/>
-                <a:ea typeface="Consolas" pitchFamily="34" charset="-122"/>
-                <a:cs typeface="Consolas" pitchFamily="34" charset="-120"/>
-              </a:rPr>
-              <a:t>    </a:t>
-            </a:r>
-            <a:pPr indent="0" marL="0">
-              <a:buNone/>
-            </a:pPr>
-            <a:r>
-              <a:rPr lang="en-US" sz="1200" dirty="0">
-                <a:solidFill>
-                  <a:srgbClr val="B8B5D9"/>
-                </a:solidFill>
-                <a:latin typeface="Consolas" pitchFamily="34" charset="0"/>
-                <a:ea typeface="Consolas" pitchFamily="34" charset="-122"/>
-                <a:cs typeface="Consolas" pitchFamily="34" charset="-120"/>
-              </a:rPr>
-              <a:t>.</a:t>
-            </a:r>
-            <a:pPr indent="0" marL="0">
-              <a:buNone/>
-            </a:pPr>
-            <a:r>
-              <a:rPr lang="en-US" sz="1200" dirty="0">
-                <a:solidFill>
-                  <a:srgbClr val="86EFAC"/>
-                </a:solidFill>
-                <a:latin typeface="Consolas" pitchFamily="34" charset="0"/>
-                <a:ea typeface="Consolas" pitchFamily="34" charset="-122"/>
-                <a:cs typeface="Consolas" pitchFamily="34" charset="-120"/>
-              </a:rPr>
-              <a:t>GetChatClient</a:t>
-            </a:r>
-            <a:pPr indent="0" marL="0">
-              <a:buNone/>
-            </a:pPr>
-            <a:r>
-              <a:rPr lang="en-US" sz="1200" dirty="0">
-                <a:solidFill>
-                  <a:srgbClr val="B8B5D9"/>
-                </a:solidFill>
-                <a:latin typeface="Consolas" pitchFamily="34" charset="0"/>
-                <a:ea typeface="Consolas" pitchFamily="34" charset="-122"/>
-                <a:cs typeface="Consolas" pitchFamily="34" charset="-120"/>
-              </a:rPr>
-              <a:t>(</a:t>
-            </a:r>
-            <a:pPr indent="0" marL="0">
-              <a:buNone/>
-            </a:pPr>
-            <a:r>
-              <a:rPr lang="en-US" sz="1200" dirty="0">
-                <a:solidFill>
-                  <a:srgbClr val="FBBF24"/>
-                </a:solidFill>
-                <a:latin typeface="Consolas" pitchFamily="34" charset="0"/>
-                <a:ea typeface="Consolas" pitchFamily="34" charset="-122"/>
-                <a:cs typeface="Consolas" pitchFamily="34" charset="-120"/>
-              </a:rPr>
-              <a:t>"gpt-4.1"</a:t>
-            </a:r>
-            <a:pPr indent="0" marL="0">
-              <a:buNone/>
-            </a:pPr>
-            <a:r>
-              <a:rPr lang="en-US" sz="1200" dirty="0">
-                <a:solidFill>
-                  <a:srgbClr val="B8B5D9"/>
-                </a:solidFill>
-                <a:latin typeface="Consolas" pitchFamily="34" charset="0"/>
-                <a:ea typeface="Consolas" pitchFamily="34" charset="-122"/>
-                <a:cs typeface="Consolas" pitchFamily="34" charset="-120"/>
-              </a:rPr>
-              <a:t>)</a:t>
-            </a:r>
-            <a:pPr indent="0" marL="0">
-              <a:buNone/>
-            </a:pPr>
-            <a:r>
-              <a:rPr lang="en-US" sz="1200" dirty="0">
-                <a:solidFill>
-                  <a:srgbClr val="B8B5D9"/>
-                </a:solidFill>
-                <a:latin typeface="Consolas" pitchFamily="34" charset="0"/>
-                <a:ea typeface="Consolas" pitchFamily="34" charset="-122"/>
-                <a:cs typeface="Consolas" pitchFamily="34" charset="-120"/>
-              </a:rPr>
-              <a:t>.</a:t>
-            </a:r>
-            <a:pPr indent="0" marL="0">
-              <a:buNone/>
-            </a:pPr>
-            <a:r>
-              <a:rPr lang="en-US" sz="1200" dirty="0">
-                <a:solidFill>
-                  <a:srgbClr val="86EFAC"/>
-                </a:solidFill>
-                <a:latin typeface="Consolas" pitchFamily="34" charset="0"/>
-                <a:ea typeface="Consolas" pitchFamily="34" charset="-122"/>
-                <a:cs typeface="Consolas" pitchFamily="34" charset="-120"/>
-              </a:rPr>
-              <a:t>AsIChatClient</a:t>
-            </a:r>
-            <a:pPr indent="0" marL="0">
-              <a:buNone/>
-            </a:pPr>
-            <a:r>
-              <a:rPr lang="en-US" sz="1200" dirty="0">
-                <a:solidFill>
-                  <a:srgbClr val="B8B5D9"/>
-                </a:solidFill>
-                <a:latin typeface="Consolas" pitchFamily="34" charset="0"/>
-                <a:ea typeface="Consolas" pitchFamily="34" charset="-122"/>
-                <a:cs typeface="Consolas" pitchFamily="34" charset="-120"/>
-              </a:rPr>
-              <a:t>(</a:t>
-            </a:r>
-            <a:pPr indent="0" marL="0">
-              <a:buNone/>
-            </a:pPr>
-            <a:r>
-              <a:rPr lang="en-US" sz="1200" dirty="0">
-                <a:solidFill>
-                  <a:srgbClr val="B8B5D9"/>
-                </a:solidFill>
-                <a:latin typeface="Consolas" pitchFamily="34" charset="0"/>
-                <a:ea typeface="Consolas" pitchFamily="34" charset="-122"/>
-                <a:cs typeface="Consolas" pitchFamily="34" charset="-120"/>
-              </a:rPr>
-              <a:t>)</a:t>
-            </a:r>
-            <a:pPr indent="0" marL="0">
-              <a:buNone/>
-            </a:pPr>
-            <a:endParaRPr lang="en-US" sz="1200" dirty="0"/>
-          </a:p>
-          <a:p>
-            <a:pPr indent="0" marL="0">
-              <a:buNone/>
-            </a:pPr>
-            <a:r>
-              <a:rPr lang="en-US" sz="1200" dirty="0">
-                <a:solidFill>
-                  <a:srgbClr val="FAF8FF"/>
-                </a:solidFill>
-                <a:latin typeface="Consolas" pitchFamily="34" charset="0"/>
-                <a:ea typeface="Consolas" pitchFamily="34" charset="-122"/>
-                <a:cs typeface="Consolas" pitchFamily="34" charset="-120"/>
-              </a:rPr>
-              <a:t>    </a:t>
-            </a:r>
-            <a:pPr indent="0" marL="0">
-              <a:buNone/>
-            </a:pPr>
-            <a:r>
-              <a:rPr lang="en-US" sz="1200" dirty="0">
-                <a:solidFill>
-                  <a:srgbClr val="B8B5D9"/>
-                </a:solidFill>
-                <a:latin typeface="Consolas" pitchFamily="34" charset="0"/>
-                <a:ea typeface="Consolas" pitchFamily="34" charset="-122"/>
-                <a:cs typeface="Consolas" pitchFamily="34" charset="-120"/>
-              </a:rPr>
-              <a:t>.</a:t>
-            </a:r>
-            <a:pPr indent="0" marL="0">
-              <a:buNone/>
-            </a:pPr>
-            <a:r>
-              <a:rPr lang="en-US" sz="1200" dirty="0">
-                <a:solidFill>
-                  <a:srgbClr val="86EFAC"/>
-                </a:solidFill>
-                <a:latin typeface="Consolas" pitchFamily="34" charset="0"/>
-                <a:ea typeface="Consolas" pitchFamily="34" charset="-122"/>
-                <a:cs typeface="Consolas" pitchFamily="34" charset="-120"/>
-              </a:rPr>
-              <a:t>CreateAIAgent</a:t>
-            </a:r>
-            <a:pPr indent="0" marL="0">
-              <a:buNone/>
-            </a:pPr>
-            <a:r>
-              <a:rPr lang="en-US" sz="1200" dirty="0">
-                <a:solidFill>
-                  <a:srgbClr val="B8B5D9"/>
-                </a:solidFill>
-                <a:latin typeface="Consolas" pitchFamily="34" charset="0"/>
-                <a:ea typeface="Consolas" pitchFamily="34" charset="-122"/>
-                <a:cs typeface="Consolas" pitchFamily="34" charset="-120"/>
-              </a:rPr>
-              <a:t>(</a:t>
-            </a:r>
-            <a:pPr indent="0" marL="0">
-              <a:buNone/>
-            </a:pPr>
-            <a:r>
-              <a:rPr lang="en-US" sz="1200" dirty="0">
-                <a:solidFill>
-                  <a:srgbClr val="FBBF24"/>
-                </a:solidFill>
-                <a:latin typeface="Consolas" pitchFamily="34" charset="0"/>
-                <a:ea typeface="Consolas" pitchFamily="34" charset="-122"/>
-                <a:cs typeface="Consolas" pitchFamily="34" charset="-120"/>
-              </a:rPr>
-              <a:t>"Answer with depth and current context."</a:t>
-            </a:r>
-            <a:pPr indent="0" marL="0">
-              <a:buNone/>
-            </a:pPr>
-            <a:r>
-              <a:rPr lang="en-US" sz="1200" dirty="0">
-                <a:solidFill>
-                  <a:srgbClr val="B8B5D9"/>
-                </a:solidFill>
-                <a:latin typeface="Consolas" pitchFamily="34" charset="0"/>
-                <a:ea typeface="Consolas" pitchFamily="34" charset="-122"/>
-                <a:cs typeface="Consolas" pitchFamily="34" charset="-120"/>
-              </a:rPr>
-              <a:t>,</a:t>
-            </a:r>
-            <a:pPr indent="0" marL="0">
-              <a:buNone/>
-            </a:pPr>
-            <a:r>
-              <a:rPr lang="en-US" sz="1200" dirty="0">
-                <a:solidFill>
-                  <a:srgbClr val="FAF8FF"/>
-                </a:solidFill>
-                <a:latin typeface="Consolas" pitchFamily="34" charset="0"/>
-                <a:ea typeface="Consolas" pitchFamily="34" charset="-122"/>
-                <a:cs typeface="Consolas" pitchFamily="34" charset="-120"/>
-              </a:rPr>
-              <a:t> </a:t>
+              <a:t>        </a:t>
             </a:r>
             <a:pPr indent="0" marL="0">
               <a:buNone/>

--- a/slides/Unifying-Local-Cloud-AI.pptx
+++ b/slides/Unifying-Local-Cloud-AI.pptx
@@ -6640,48 +6640,39 @@
           </a:ln>
         </p:spPr>
       </p:sp>
-      <p:sp>
-        <p:nvSpPr>
-          <p:cNvPr id="8" name="Text 6"/>
-          <p:cNvSpPr/>
-          <p:nvPr/>
-        </p:nvSpPr>
-        <p:spPr>
-          <a:xfrm>
-            <a:off x="9219895" y="2377440"/>
-            <a:ext cx="548640" cy="685800"/>
-          </a:xfrm>
-          <a:prstGeom prst="rect">
-            <a:avLst/>
-          </a:prstGeom>
-          <a:noFill/>
-          <a:ln/>
-        </p:spPr>
-        <p:txBody>
-          <a:bodyPr wrap="square" rtlCol="0" anchor="ctr"/>
-          <a:lstStyle/>
-          <a:p>
-            <a:pPr algn="ctr" indent="0" marL="0">
-              <a:buNone/>
-            </a:pPr>
-            <a:r>
-              <a:rPr lang="en-US" sz="2200" dirty="0">
-                <a:solidFill>
-                  <a:srgbClr val="000000"/>
-                </a:solidFill>
-                <a:latin typeface="Calibri" pitchFamily="34" charset="0"/>
-                <a:ea typeface="Calibri" pitchFamily="34" charset="-122"/>
-                <a:cs typeface="Calibri" pitchFamily="34" charset="-120"/>
-              </a:rPr>
-              <a:t>👤</a:t>
-            </a:r>
-            <a:endParaRPr lang="en-US" sz="2200" dirty="0"/>
-          </a:p>
-        </p:txBody>
-      </p:sp>
-      <p:sp>
-        <p:nvSpPr>
-          <p:cNvPr id="9" name="Text 7"/>
+      <p:pic>
+        <p:nvPicPr>
+          <p:cNvPr id="8" name="Image 0" descr="preencoded.png">    </p:cNvPr>
+          <p:cNvPicPr>
+            <a:picLocks noChangeAspect="1"/>
+          </p:cNvPicPr>
+          <p:nvPr/>
+        </p:nvPicPr>
+        <p:blipFill>
+          <a:blip r:embed="rId1">
+            <a:extLst>
+              <a:ext uri="{96DAC541-7B7A-43D3-8B79-37D633B846F1}">
+                <asvg:svgBlip xmlns:asvg="http://schemas.microsoft.com/office/drawing/2016/SVG/main" r:embed="rId2"/>
+              </a:ext>
+            </a:extLst>
+          </a:blip>
+          <a:stretch>
+            <a:fillRect/>
+          </a:stretch>
+        </p:blipFill>
+        <p:spPr>
+          <a:xfrm>
+            <a:off x="9265615" y="2528316"/>
+            <a:ext cx="384048" cy="384048"/>
+          </a:xfrm>
+          <a:prstGeom prst="rect">
+            <a:avLst/>
+          </a:prstGeom>
+        </p:spPr>
+      </p:pic>
+      <p:sp>
+        <p:nvSpPr>
+          <p:cNvPr id="9" name="Text 6"/>
           <p:cNvSpPr/>
           <p:nvPr/>
         </p:nvSpPr>
@@ -6720,7 +6711,7 @@
       </p:sp>
       <p:sp>
         <p:nvSpPr>
-          <p:cNvPr id="10" name="Text 8"/>
+          <p:cNvPr id="10" name="Text 7"/>
           <p:cNvSpPr/>
           <p:nvPr/>
         </p:nvSpPr>
@@ -6759,7 +6750,7 @@
       </p:sp>
       <p:sp>
         <p:nvSpPr>
-          <p:cNvPr id="11" name="Shape 9"/>
+          <p:cNvPr id="11" name="Shape 8"/>
           <p:cNvSpPr/>
           <p:nvPr/>
         </p:nvSpPr>
@@ -6782,7 +6773,7 @@
       </p:sp>
       <p:sp>
         <p:nvSpPr>
-          <p:cNvPr id="12" name="Shape 10"/>
+          <p:cNvPr id="12" name="Shape 9"/>
           <p:cNvSpPr/>
           <p:nvPr/>
         </p:nvSpPr>
@@ -6807,7 +6798,7 @@
       </p:sp>
       <p:sp>
         <p:nvSpPr>
-          <p:cNvPr id="13" name="Shape 11"/>
+          <p:cNvPr id="13" name="Shape 10"/>
           <p:cNvSpPr/>
           <p:nvPr/>
         </p:nvSpPr>
@@ -6832,48 +6823,39 @@
           </a:ln>
         </p:spPr>
       </p:sp>
-      <p:sp>
-        <p:nvSpPr>
-          <p:cNvPr id="14" name="Text 12"/>
-          <p:cNvSpPr/>
-          <p:nvPr/>
-        </p:nvSpPr>
-        <p:spPr>
-          <a:xfrm>
-            <a:off x="9219895" y="3474720"/>
-            <a:ext cx="548640" cy="685800"/>
-          </a:xfrm>
-          <a:prstGeom prst="rect">
-            <a:avLst/>
-          </a:prstGeom>
-          <a:noFill/>
-          <a:ln/>
-        </p:spPr>
-        <p:txBody>
-          <a:bodyPr wrap="square" rtlCol="0" anchor="ctr"/>
-          <a:lstStyle/>
-          <a:p>
-            <a:pPr algn="ctr" indent="0" marL="0">
-              <a:buNone/>
-            </a:pPr>
-            <a:r>
-              <a:rPr lang="en-US" sz="2200" dirty="0">
-                <a:solidFill>
-                  <a:srgbClr val="000000"/>
-                </a:solidFill>
-                <a:latin typeface="Calibri" pitchFamily="34" charset="0"/>
-                <a:ea typeface="Calibri" pitchFamily="34" charset="-122"/>
-                <a:cs typeface="Calibri" pitchFamily="34" charset="-120"/>
-              </a:rPr>
-              <a:t>📱</a:t>
-            </a:r>
-            <a:endParaRPr lang="en-US" sz="2200" dirty="0"/>
-          </a:p>
-        </p:txBody>
-      </p:sp>
-      <p:sp>
-        <p:nvSpPr>
-          <p:cNvPr id="15" name="Text 13"/>
+      <p:pic>
+        <p:nvPicPr>
+          <p:cNvPr id="14" name="Image 1" descr="preencoded.png">    </p:cNvPr>
+          <p:cNvPicPr>
+            <a:picLocks noChangeAspect="1"/>
+          </p:cNvPicPr>
+          <p:nvPr/>
+        </p:nvPicPr>
+        <p:blipFill>
+          <a:blip r:embed="rId3">
+            <a:extLst>
+              <a:ext uri="{96DAC541-7B7A-43D3-8B79-37D633B846F1}">
+                <asvg:svgBlip xmlns:asvg="http://schemas.microsoft.com/office/drawing/2016/SVG/main" r:embed="rId4"/>
+              </a:ext>
+            </a:extLst>
+          </a:blip>
+          <a:stretch>
+            <a:fillRect/>
+          </a:stretch>
+        </p:blipFill>
+        <p:spPr>
+          <a:xfrm>
+            <a:off x="9265615" y="3625596"/>
+            <a:ext cx="384048" cy="384048"/>
+          </a:xfrm>
+          <a:prstGeom prst="rect">
+            <a:avLst/>
+          </a:prstGeom>
+        </p:spPr>
+      </p:pic>
+      <p:sp>
+        <p:nvSpPr>
+          <p:cNvPr id="15" name="Text 11"/>
           <p:cNvSpPr/>
           <p:nvPr/>
         </p:nvSpPr>
@@ -6912,7 +6894,7 @@
       </p:sp>
       <p:sp>
         <p:nvSpPr>
-          <p:cNvPr id="16" name="Text 14"/>
+          <p:cNvPr id="16" name="Text 12"/>
           <p:cNvSpPr/>
           <p:nvPr/>
         </p:nvSpPr>
@@ -6951,7 +6933,7 @@
       </p:sp>
       <p:sp>
         <p:nvSpPr>
-          <p:cNvPr id="17" name="Shape 15"/>
+          <p:cNvPr id="17" name="Shape 13"/>
           <p:cNvSpPr/>
           <p:nvPr/>
         </p:nvSpPr>
@@ -6974,7 +6956,7 @@
       </p:sp>
       <p:sp>
         <p:nvSpPr>
-          <p:cNvPr id="18" name="Shape 16"/>
+          <p:cNvPr id="18" name="Shape 14"/>
           <p:cNvSpPr/>
           <p:nvPr/>
         </p:nvSpPr>
@@ -6999,7 +6981,7 @@
       </p:sp>
       <p:sp>
         <p:nvSpPr>
-          <p:cNvPr id="19" name="Shape 17"/>
+          <p:cNvPr id="19" name="Shape 15"/>
           <p:cNvSpPr/>
           <p:nvPr/>
         </p:nvSpPr>
@@ -7024,48 +7006,39 @@
           </a:ln>
         </p:spPr>
       </p:sp>
-      <p:sp>
-        <p:nvSpPr>
-          <p:cNvPr id="20" name="Text 18"/>
-          <p:cNvSpPr/>
-          <p:nvPr/>
-        </p:nvSpPr>
-        <p:spPr>
-          <a:xfrm>
-            <a:off x="9219895" y="4572000"/>
-            <a:ext cx="548640" cy="685800"/>
-          </a:xfrm>
-          <a:prstGeom prst="rect">
-            <a:avLst/>
-          </a:prstGeom>
-          <a:noFill/>
-          <a:ln/>
-        </p:spPr>
-        <p:txBody>
-          <a:bodyPr wrap="square" rtlCol="0" anchor="ctr"/>
-          <a:lstStyle/>
-          <a:p>
-            <a:pPr algn="ctr" indent="0" marL="0">
-              <a:buNone/>
-            </a:pPr>
-            <a:r>
-              <a:rPr lang="en-US" sz="2200" dirty="0">
-                <a:solidFill>
-                  <a:srgbClr val="000000"/>
-                </a:solidFill>
-                <a:latin typeface="Calibri" pitchFamily="34" charset="0"/>
-                <a:ea typeface="Calibri" pitchFamily="34" charset="-122"/>
-                <a:cs typeface="Calibri" pitchFamily="34" charset="-120"/>
-              </a:rPr>
-              <a:t>☁️</a:t>
-            </a:r>
-            <a:endParaRPr lang="en-US" sz="2200" dirty="0"/>
-          </a:p>
-        </p:txBody>
-      </p:sp>
-      <p:sp>
-        <p:nvSpPr>
-          <p:cNvPr id="21" name="Text 19"/>
+      <p:pic>
+        <p:nvPicPr>
+          <p:cNvPr id="20" name="Image 2" descr="preencoded.png">    </p:cNvPr>
+          <p:cNvPicPr>
+            <a:picLocks noChangeAspect="1"/>
+          </p:cNvPicPr>
+          <p:nvPr/>
+        </p:nvPicPr>
+        <p:blipFill>
+          <a:blip r:embed="rId5">
+            <a:extLst>
+              <a:ext uri="{96DAC541-7B7A-43D3-8B79-37D633B846F1}">
+                <asvg:svgBlip xmlns:asvg="http://schemas.microsoft.com/office/drawing/2016/SVG/main" r:embed="rId6"/>
+              </a:ext>
+            </a:extLst>
+          </a:blip>
+          <a:stretch>
+            <a:fillRect/>
+          </a:stretch>
+        </p:blipFill>
+        <p:spPr>
+          <a:xfrm>
+            <a:off x="9265615" y="4722876"/>
+            <a:ext cx="384048" cy="384048"/>
+          </a:xfrm>
+          <a:prstGeom prst="rect">
+            <a:avLst/>
+          </a:prstGeom>
+        </p:spPr>
+      </p:pic>
+      <p:sp>
+        <p:nvSpPr>
+          <p:cNvPr id="21" name="Text 16"/>
           <p:cNvSpPr/>
           <p:nvPr/>
         </p:nvSpPr>
@@ -7104,7 +7077,7 @@
       </p:sp>
       <p:sp>
         <p:nvSpPr>
-          <p:cNvPr id="22" name="Text 20"/>
+          <p:cNvPr id="22" name="Text 17"/>
           <p:cNvSpPr/>
           <p:nvPr/>
         </p:nvSpPr>
@@ -7143,7 +7116,7 @@
       </p:sp>
       <p:sp>
         <p:nvSpPr>
-          <p:cNvPr id="23" name="Shape 21"/>
+          <p:cNvPr id="23" name="Shape 18"/>
           <p:cNvSpPr/>
           <p:nvPr/>
         </p:nvSpPr>
@@ -7166,7 +7139,7 @@
       </p:sp>
       <p:sp>
         <p:nvSpPr>
-          <p:cNvPr id="24" name="Shape 22"/>
+          <p:cNvPr id="24" name="Shape 19"/>
           <p:cNvSpPr/>
           <p:nvPr/>
         </p:nvSpPr>
@@ -7191,7 +7164,7 @@
       </p:sp>
       <p:sp>
         <p:nvSpPr>
-          <p:cNvPr id="25" name="Shape 23"/>
+          <p:cNvPr id="25" name="Shape 20"/>
           <p:cNvSpPr/>
           <p:nvPr/>
         </p:nvSpPr>
@@ -7216,48 +7189,39 @@
           </a:ln>
         </p:spPr>
       </p:sp>
-      <p:sp>
-        <p:nvSpPr>
-          <p:cNvPr id="26" name="Text 24"/>
-          <p:cNvSpPr/>
-          <p:nvPr/>
-        </p:nvSpPr>
-        <p:spPr>
-          <a:xfrm>
-            <a:off x="9219895" y="5669280"/>
-            <a:ext cx="548640" cy="685800"/>
-          </a:xfrm>
-          <a:prstGeom prst="rect">
-            <a:avLst/>
-          </a:prstGeom>
-          <a:noFill/>
-          <a:ln/>
-        </p:spPr>
-        <p:txBody>
-          <a:bodyPr wrap="square" rtlCol="0" anchor="ctr"/>
-          <a:lstStyle/>
-          <a:p>
-            <a:pPr algn="ctr" indent="0" marL="0">
-              <a:buNone/>
-            </a:pPr>
-            <a:r>
-              <a:rPr lang="en-US" sz="2200" dirty="0">
-                <a:solidFill>
-                  <a:srgbClr val="000000"/>
-                </a:solidFill>
-                <a:latin typeface="Calibri" pitchFamily="34" charset="0"/>
-                <a:ea typeface="Calibri" pitchFamily="34" charset="-122"/>
-                <a:cs typeface="Calibri" pitchFamily="34" charset="-120"/>
-              </a:rPr>
-              <a:t>👤</a:t>
-            </a:r>
-            <a:endParaRPr lang="en-US" sz="2200" dirty="0"/>
-          </a:p>
-        </p:txBody>
-      </p:sp>
-      <p:sp>
-        <p:nvSpPr>
-          <p:cNvPr id="27" name="Text 25"/>
+      <p:pic>
+        <p:nvPicPr>
+          <p:cNvPr id="26" name="Image 3" descr="preencoded.png">    </p:cNvPr>
+          <p:cNvPicPr>
+            <a:picLocks noChangeAspect="1"/>
+          </p:cNvPicPr>
+          <p:nvPr/>
+        </p:nvPicPr>
+        <p:blipFill>
+          <a:blip r:embed="rId7">
+            <a:extLst>
+              <a:ext uri="{96DAC541-7B7A-43D3-8B79-37D633B846F1}">
+                <asvg:svgBlip xmlns:asvg="http://schemas.microsoft.com/office/drawing/2016/SVG/main" r:embed="rId8"/>
+              </a:ext>
+            </a:extLst>
+          </a:blip>
+          <a:stretch>
+            <a:fillRect/>
+          </a:stretch>
+        </p:blipFill>
+        <p:spPr>
+          <a:xfrm>
+            <a:off x="9265615" y="5820156"/>
+            <a:ext cx="384048" cy="384048"/>
+          </a:xfrm>
+          <a:prstGeom prst="rect">
+            <a:avLst/>
+          </a:prstGeom>
+        </p:spPr>
+      </p:pic>
+      <p:sp>
+        <p:nvSpPr>
+          <p:cNvPr id="27" name="Text 21"/>
           <p:cNvSpPr/>
           <p:nvPr/>
         </p:nvSpPr>
@@ -7296,7 +7260,7 @@
       </p:sp>
       <p:sp>
         <p:nvSpPr>
-          <p:cNvPr id="28" name="Text 26"/>
+          <p:cNvPr id="28" name="Text 22"/>
           <p:cNvSpPr/>
           <p:nvPr/>
         </p:nvSpPr>
@@ -7335,7 +7299,7 @@
       </p:sp>
       <p:sp>
         <p:nvSpPr>
-          <p:cNvPr id="29" name="Shape 27"/>
+          <p:cNvPr id="29" name="Shape 23"/>
           <p:cNvSpPr/>
           <p:nvPr/>
         </p:nvSpPr>
@@ -7362,7 +7326,7 @@
       </p:sp>
       <p:sp>
         <p:nvSpPr>
-          <p:cNvPr id="30" name="Text 28"/>
+          <p:cNvPr id="30" name="Text 24"/>
           <p:cNvSpPr/>
           <p:nvPr/>
         </p:nvSpPr>
@@ -7393,7 +7357,7 @@
                 <a:ea typeface="Consolas" pitchFamily="34" charset="-122"/>
                 <a:cs typeface="Consolas" pitchFamily="34" charset="-120"/>
               </a:rPr>
-              <a:t>// 📱  Local — Apple Intelligence, on the device</a:t>
+              <a:t>// Local — Apple Intelligence, on the device</a:t>
             </a:r>
             <a:pPr indent="0" marL="0">
               <a:buNone/>
@@ -7765,7 +7729,7 @@
                 <a:ea typeface="Consolas" pitchFamily="34" charset="-122"/>
                 <a:cs typeface="Consolas" pitchFamily="34" charset="-120"/>
               </a:rPr>
-              <a:t>// ☁️  Cloud — Azure OpenAI, frontier reasoning</a:t>
+              <a:t>// Cloud — Azure OpenAI, frontier reasoning</a:t>
             </a:r>
             <a:pPr indent="0" marL="0">
               <a:buNone/>
@@ -8401,7 +8365,7 @@
                 <a:ea typeface="Consolas" pitchFamily="34" charset="-122"/>
                 <a:cs typeface="Consolas" pitchFamily="34" charset="-120"/>
               </a:rPr>
-              <a:t>// 🔗  MAF workflow — pipe local → cloud, expose as an agent</a:t>
+              <a:t>// MAF workflow — pipe local → cloud, expose as an agent</a:t>
             </a:r>
             <a:pPr indent="0" marL="0">
               <a:buNone/>

--- a/slides/Unifying-Local-Cloud-AI.pptx
+++ b/slides/Unifying-Local-Cloud-AI.pptx
@@ -2235,126 +2235,99 @@
           </a:ln>
         </p:spPr>
       </p:sp>
-      <p:sp>
-        <p:nvSpPr>
-          <p:cNvPr id="3" name="Text 1"/>
-          <p:cNvSpPr/>
-          <p:nvPr/>
-        </p:nvSpPr>
-        <p:spPr>
-          <a:xfrm>
-            <a:off x="9265615" y="548640"/>
-            <a:ext cx="1097280" cy="1097280"/>
-          </a:xfrm>
-          <a:prstGeom prst="rect">
-            <a:avLst/>
-          </a:prstGeom>
-          <a:noFill/>
-          <a:ln/>
-        </p:spPr>
-        <p:txBody>
-          <a:bodyPr wrap="square" rtlCol="0" anchor="ctr"/>
-          <a:lstStyle/>
-          <a:p>
-            <a:pPr algn="ctr" indent="0" marL="0">
-              <a:buNone/>
-            </a:pPr>
-            <a:r>
-              <a:rPr lang="en-US" sz="6000" dirty="0">
-                <a:solidFill>
-                  <a:srgbClr val="FB7185"/>
-                </a:solidFill>
-                <a:latin typeface="Calibri" pitchFamily="34" charset="0"/>
-                <a:ea typeface="Calibri" pitchFamily="34" charset="-122"/>
-                <a:cs typeface="Calibri" pitchFamily="34" charset="-120"/>
-              </a:rPr>
-              <a:t>📱</a:t>
-            </a:r>
-            <a:endParaRPr lang="en-US" sz="6000" dirty="0"/>
-          </a:p>
-        </p:txBody>
-      </p:sp>
-      <p:sp>
-        <p:nvSpPr>
-          <p:cNvPr id="4" name="Text 2"/>
-          <p:cNvSpPr/>
-          <p:nvPr/>
-        </p:nvSpPr>
-        <p:spPr>
-          <a:xfrm>
-            <a:off x="10180015" y="731520"/>
-            <a:ext cx="914400" cy="914400"/>
-          </a:xfrm>
-          <a:prstGeom prst="rect">
-            <a:avLst/>
-          </a:prstGeom>
-          <a:noFill/>
-          <a:ln/>
-        </p:spPr>
-        <p:txBody>
-          <a:bodyPr wrap="square" rtlCol="0" anchor="ctr"/>
-          <a:lstStyle/>
-          <a:p>
-            <a:pPr algn="ctr" indent="0" marL="0">
-              <a:buNone/>
-            </a:pPr>
-            <a:r>
-              <a:rPr lang="en-US" sz="5000" b="1" dirty="0">
-                <a:solidFill>
-                  <a:srgbClr val="CFCBED"/>
-                </a:solidFill>
-                <a:latin typeface="Calibri" pitchFamily="34" charset="0"/>
-                <a:ea typeface="Calibri" pitchFamily="34" charset="-122"/>
-                <a:cs typeface="Calibri" pitchFamily="34" charset="-120"/>
-              </a:rPr>
-              <a:t>↔</a:t>
-            </a:r>
-            <a:endParaRPr lang="en-US" sz="5000" dirty="0"/>
-          </a:p>
-        </p:txBody>
-      </p:sp>
-      <p:sp>
-        <p:nvSpPr>
-          <p:cNvPr id="5" name="Text 3"/>
-          <p:cNvSpPr/>
-          <p:nvPr/>
-        </p:nvSpPr>
-        <p:spPr>
-          <a:xfrm>
-            <a:off x="10911535" y="502920"/>
-            <a:ext cx="1097280" cy="1143000"/>
-          </a:xfrm>
-          <a:prstGeom prst="rect">
-            <a:avLst/>
-          </a:prstGeom>
-          <a:noFill/>
-          <a:ln/>
-        </p:spPr>
-        <p:txBody>
-          <a:bodyPr wrap="square" rtlCol="0" anchor="ctr"/>
-          <a:lstStyle/>
-          <a:p>
-            <a:pPr algn="ctr" indent="0" marL="0">
-              <a:buNone/>
-            </a:pPr>
-            <a:r>
-              <a:rPr lang="en-US" sz="6400" dirty="0">
-                <a:solidFill>
-                  <a:srgbClr val="6366F1"/>
-                </a:solidFill>
-                <a:latin typeface="Calibri" pitchFamily="34" charset="0"/>
-                <a:ea typeface="Calibri" pitchFamily="34" charset="-122"/>
-                <a:cs typeface="Calibri" pitchFamily="34" charset="-120"/>
-              </a:rPr>
-              <a:t>☁</a:t>
-            </a:r>
-            <a:endParaRPr lang="en-US" sz="6400" dirty="0"/>
-          </a:p>
-        </p:txBody>
-      </p:sp>
-      <p:sp>
-        <p:nvSpPr>
-          <p:cNvPr id="6" name="Text 4"/>
+      <p:pic>
+        <p:nvPicPr>
+          <p:cNvPr id="3" name="Image 0" descr="preencoded.png">    </p:cNvPr>
+          <p:cNvPicPr>
+            <a:picLocks noChangeAspect="1"/>
+          </p:cNvPicPr>
+          <p:nvPr/>
+        </p:nvPicPr>
+        <p:blipFill>
+          <a:blip r:embed="rId1">
+            <a:extLst>
+              <a:ext uri="{96DAC541-7B7A-43D3-8B79-37D633B846F1}">
+                <asvg:svgBlip xmlns:asvg="http://schemas.microsoft.com/office/drawing/2016/SVG/main" r:embed="rId2"/>
+              </a:ext>
+            </a:extLst>
+          </a:blip>
+          <a:stretch>
+            <a:fillRect/>
+          </a:stretch>
+        </p:blipFill>
+        <p:spPr>
+          <a:xfrm>
+            <a:off x="9265615" y="640080"/>
+            <a:ext cx="1005840" cy="1005840"/>
+          </a:xfrm>
+          <a:prstGeom prst="rect">
+            <a:avLst/>
+          </a:prstGeom>
+        </p:spPr>
+      </p:pic>
+      <p:pic>
+        <p:nvPicPr>
+          <p:cNvPr id="4" name="Image 1" descr="preencoded.png">    </p:cNvPr>
+          <p:cNvPicPr>
+            <a:picLocks noChangeAspect="1"/>
+          </p:cNvPicPr>
+          <p:nvPr/>
+        </p:nvPicPr>
+        <p:blipFill>
+          <a:blip r:embed="rId3">
+            <a:extLst>
+              <a:ext uri="{96DAC541-7B7A-43D3-8B79-37D633B846F1}">
+                <asvg:svgBlip xmlns:asvg="http://schemas.microsoft.com/office/drawing/2016/SVG/main" r:embed="rId4"/>
+              </a:ext>
+            </a:extLst>
+          </a:blip>
+          <a:stretch>
+            <a:fillRect/>
+          </a:stretch>
+        </p:blipFill>
+        <p:spPr>
+          <a:xfrm>
+            <a:off x="10317175" y="713232"/>
+            <a:ext cx="868680" cy="868680"/>
+          </a:xfrm>
+          <a:prstGeom prst="rect">
+            <a:avLst/>
+          </a:prstGeom>
+        </p:spPr>
+      </p:pic>
+      <p:pic>
+        <p:nvPicPr>
+          <p:cNvPr id="5" name="Image 2" descr="preencoded.png">    </p:cNvPr>
+          <p:cNvPicPr>
+            <a:picLocks noChangeAspect="1"/>
+          </p:cNvPicPr>
+          <p:nvPr/>
+        </p:nvPicPr>
+        <p:blipFill>
+          <a:blip r:embed="rId5">
+            <a:extLst>
+              <a:ext uri="{96DAC541-7B7A-43D3-8B79-37D633B846F1}">
+                <asvg:svgBlip xmlns:asvg="http://schemas.microsoft.com/office/drawing/2016/SVG/main" r:embed="rId6"/>
+              </a:ext>
+            </a:extLst>
+          </a:blip>
+          <a:stretch>
+            <a:fillRect/>
+          </a:stretch>
+        </p:blipFill>
+        <p:spPr>
+          <a:xfrm>
+            <a:off x="10865815" y="640080"/>
+            <a:ext cx="1051560" cy="1051560"/>
+          </a:xfrm>
+          <a:prstGeom prst="rect">
+            <a:avLst/>
+          </a:prstGeom>
+        </p:spPr>
+      </p:pic>
+      <p:sp>
+        <p:nvSpPr>
+          <p:cNvPr id="6" name="Text 1"/>
           <p:cNvSpPr/>
           <p:nvPr/>
         </p:nvSpPr>
@@ -2393,7 +2366,7 @@
       </p:sp>
       <p:sp>
         <p:nvSpPr>
-          <p:cNvPr id="7" name="Text 5"/>
+          <p:cNvPr id="7" name="Text 2"/>
           <p:cNvSpPr/>
           <p:nvPr/>
         </p:nvSpPr>
@@ -2432,7 +2405,7 @@
       </p:sp>
       <p:sp>
         <p:nvSpPr>
-          <p:cNvPr id="8" name="Text 6"/>
+          <p:cNvPr id="8" name="Text 3"/>
           <p:cNvSpPr/>
           <p:nvPr/>
         </p:nvSpPr>
@@ -2513,7 +2486,7 @@
       </p:sp>
       <p:sp>
         <p:nvSpPr>
-          <p:cNvPr id="9" name="Text 7"/>
+          <p:cNvPr id="9" name="Text 4"/>
           <p:cNvSpPr/>
           <p:nvPr/>
         </p:nvSpPr>
@@ -2552,7 +2525,7 @@
       </p:sp>
       <p:sp>
         <p:nvSpPr>
-          <p:cNvPr id="10" name="Text 8"/>
+          <p:cNvPr id="10" name="Text 5"/>
           <p:cNvSpPr/>
           <p:nvPr/>
         </p:nvSpPr>
@@ -3911,111 +3884,99 @@
           </a:p>
         </p:txBody>
       </p:sp>
-      <p:sp>
-        <p:nvSpPr>
-          <p:cNvPr id="39" name="Shape 37"/>
-          <p:cNvSpPr/>
-          <p:nvPr/>
-        </p:nvSpPr>
+      <p:pic>
+        <p:nvPicPr>
+          <p:cNvPr id="39" name="Image 0" descr="preencoded.png">    </p:cNvPr>
+          <p:cNvPicPr>
+            <a:picLocks noChangeAspect="1"/>
+          </p:cNvPicPr>
+          <p:nvPr/>
+        </p:nvPicPr>
+        <p:blipFill>
+          <a:blip r:embed="rId1">
+            <a:extLst>
+              <a:ext uri="{96DAC541-7B7A-43D3-8B79-37D633B846F1}">
+                <asvg:svgBlip xmlns:asvg="http://schemas.microsoft.com/office/drawing/2016/SVG/main" r:embed="rId2"/>
+              </a:ext>
+            </a:extLst>
+          </a:blip>
+          <a:stretch>
+            <a:fillRect/>
+          </a:stretch>
+        </p:blipFill>
         <p:spPr>
           <a:xfrm>
             <a:off x="10180015" y="502920"/>
-            <a:ext cx="292608" cy="292608"/>
-          </a:xfrm>
-          <a:prstGeom prst="roundRect">
-            <a:avLst>
-              <a:gd name="adj" fmla="val 15625"/>
-            </a:avLst>
-          </a:prstGeom>
-          <a:ln w="19050">
-            <a:solidFill>
-              <a:srgbClr val="6366F1"/>
-            </a:solidFill>
-            <a:prstDash val="solid"/>
-          </a:ln>
-        </p:spPr>
-      </p:sp>
-      <p:sp>
-        <p:nvSpPr>
-          <p:cNvPr id="40" name="Text 38"/>
-          <p:cNvSpPr/>
-          <p:nvPr/>
-        </p:nvSpPr>
-        <p:spPr>
-          <a:xfrm>
-            <a:off x="10472623" y="457200"/>
-            <a:ext cx="411480" cy="384048"/>
-          </a:xfrm>
-          <a:prstGeom prst="rect">
-            <a:avLst/>
-          </a:prstGeom>
-          <a:noFill/>
-          <a:ln/>
-        </p:spPr>
-        <p:txBody>
-          <a:bodyPr wrap="square" rtlCol="0" anchor="ctr"/>
-          <a:lstStyle/>
-          <a:p>
-            <a:pPr algn="ctr" indent="0" marL="0">
-              <a:buNone/>
-            </a:pPr>
-            <a:r>
-              <a:rPr lang="en-US" sz="1800" b="1" dirty="0">
-                <a:solidFill>
-                  <a:srgbClr val="6366F1"/>
-                </a:solidFill>
-                <a:latin typeface="Calibri" pitchFamily="34" charset="0"/>
-                <a:ea typeface="Calibri" pitchFamily="34" charset="-122"/>
-                <a:cs typeface="Calibri" pitchFamily="34" charset="-120"/>
-              </a:rPr>
-              <a:t>↔</a:t>
-            </a:r>
-            <a:endParaRPr lang="en-US" sz="1800" dirty="0"/>
-          </a:p>
-        </p:txBody>
-      </p:sp>
-      <p:sp>
-        <p:nvSpPr>
-          <p:cNvPr id="41" name="Text 39"/>
-          <p:cNvSpPr/>
-          <p:nvPr/>
-        </p:nvSpPr>
-        <p:spPr>
-          <a:xfrm>
-            <a:off x="10893247" y="429768"/>
-            <a:ext cx="411480" cy="457200"/>
-          </a:xfrm>
-          <a:prstGeom prst="rect">
-            <a:avLst/>
-          </a:prstGeom>
-          <a:noFill/>
-          <a:ln/>
-        </p:spPr>
-        <p:txBody>
-          <a:bodyPr wrap="square" rtlCol="0" anchor="ctr"/>
-          <a:lstStyle/>
-          <a:p>
-            <a:pPr algn="ctr" indent="0" marL="0">
-              <a:buNone/>
-            </a:pPr>
-            <a:r>
-              <a:rPr lang="en-US" sz="2200" dirty="0">
-                <a:solidFill>
-                  <a:srgbClr val="6366F1"/>
-                </a:solidFill>
-                <a:latin typeface="Calibri" pitchFamily="34" charset="0"/>
-                <a:ea typeface="Calibri" pitchFamily="34" charset="-122"/>
-                <a:cs typeface="Calibri" pitchFamily="34" charset="-120"/>
-              </a:rPr>
-              <a:t>☁</a:t>
-            </a:r>
-            <a:endParaRPr lang="en-US" sz="2200" dirty="0"/>
-          </a:p>
-        </p:txBody>
-      </p:sp>
-      <p:sp>
-        <p:nvSpPr>
-          <p:cNvPr id="42" name="Text 40"/>
+            <a:ext cx="329184" cy="329184"/>
+          </a:xfrm>
+          <a:prstGeom prst="rect">
+            <a:avLst/>
+          </a:prstGeom>
+        </p:spPr>
+      </p:pic>
+      <p:pic>
+        <p:nvPicPr>
+          <p:cNvPr id="40" name="Image 1" descr="preencoded.png">    </p:cNvPr>
+          <p:cNvPicPr>
+            <a:picLocks noChangeAspect="1"/>
+          </p:cNvPicPr>
+          <p:nvPr/>
+        </p:nvPicPr>
+        <p:blipFill>
+          <a:blip r:embed="rId3">
+            <a:extLst>
+              <a:ext uri="{96DAC541-7B7A-43D3-8B79-37D633B846F1}">
+                <asvg:svgBlip xmlns:asvg="http://schemas.microsoft.com/office/drawing/2016/SVG/main" r:embed="rId4"/>
+              </a:ext>
+            </a:extLst>
+          </a:blip>
+          <a:stretch>
+            <a:fillRect/>
+          </a:stretch>
+        </p:blipFill>
+        <p:spPr>
+          <a:xfrm>
+            <a:off x="10564063" y="502920"/>
+            <a:ext cx="329184" cy="329184"/>
+          </a:xfrm>
+          <a:prstGeom prst="rect">
+            <a:avLst/>
+          </a:prstGeom>
+        </p:spPr>
+      </p:pic>
+      <p:pic>
+        <p:nvPicPr>
+          <p:cNvPr id="41" name="Image 2" descr="preencoded.png">    </p:cNvPr>
+          <p:cNvPicPr>
+            <a:picLocks noChangeAspect="1"/>
+          </p:cNvPicPr>
+          <p:nvPr/>
+        </p:nvPicPr>
+        <p:blipFill>
+          <a:blip r:embed="rId5">
+            <a:extLst>
+              <a:ext uri="{96DAC541-7B7A-43D3-8B79-37D633B846F1}">
+                <asvg:svgBlip xmlns:asvg="http://schemas.microsoft.com/office/drawing/2016/SVG/main" r:embed="rId6"/>
+              </a:ext>
+            </a:extLst>
+          </a:blip>
+          <a:stretch>
+            <a:fillRect/>
+          </a:stretch>
+        </p:blipFill>
+        <p:spPr>
+          <a:xfrm>
+            <a:off x="10948111" y="502920"/>
+            <a:ext cx="329184" cy="329184"/>
+          </a:xfrm>
+          <a:prstGeom prst="rect">
+            <a:avLst/>
+          </a:prstGeom>
+        </p:spPr>
+      </p:pic>
+      <p:sp>
+        <p:nvSpPr>
+          <p:cNvPr id="42" name="Text 37"/>
           <p:cNvSpPr/>
           <p:nvPr/>
         </p:nvSpPr>
@@ -4096,7 +4057,7 @@
       </p:sp>
       <p:sp>
         <p:nvSpPr>
-          <p:cNvPr id="43" name="Text 41"/>
+          <p:cNvPr id="43" name="Text 38"/>
           <p:cNvSpPr/>
           <p:nvPr/>
         </p:nvSpPr>
@@ -6192,111 +6153,99 @@
           </a:p>
         </p:txBody>
       </p:sp>
-      <p:sp>
-        <p:nvSpPr>
-          <p:cNvPr id="27" name="Shape 25"/>
-          <p:cNvSpPr/>
-          <p:nvPr/>
-        </p:nvSpPr>
+      <p:pic>
+        <p:nvPicPr>
+          <p:cNvPr id="27" name="Image 0" descr="preencoded.png">    </p:cNvPr>
+          <p:cNvPicPr>
+            <a:picLocks noChangeAspect="1"/>
+          </p:cNvPicPr>
+          <p:nvPr/>
+        </p:nvPicPr>
+        <p:blipFill>
+          <a:blip r:embed="rId1">
+            <a:extLst>
+              <a:ext uri="{96DAC541-7B7A-43D3-8B79-37D633B846F1}">
+                <asvg:svgBlip xmlns:asvg="http://schemas.microsoft.com/office/drawing/2016/SVG/main" r:embed="rId2"/>
+              </a:ext>
+            </a:extLst>
+          </a:blip>
+          <a:stretch>
+            <a:fillRect/>
+          </a:stretch>
+        </p:blipFill>
         <p:spPr>
           <a:xfrm>
             <a:off x="10180015" y="502920"/>
-            <a:ext cx="292608" cy="292608"/>
-          </a:xfrm>
-          <a:prstGeom prst="roundRect">
-            <a:avLst>
-              <a:gd name="adj" fmla="val 15625"/>
-            </a:avLst>
-          </a:prstGeom>
-          <a:ln w="19050">
-            <a:solidFill>
-              <a:srgbClr val="6366F1"/>
-            </a:solidFill>
-            <a:prstDash val="solid"/>
-          </a:ln>
-        </p:spPr>
-      </p:sp>
-      <p:sp>
-        <p:nvSpPr>
-          <p:cNvPr id="28" name="Text 26"/>
-          <p:cNvSpPr/>
-          <p:nvPr/>
-        </p:nvSpPr>
-        <p:spPr>
-          <a:xfrm>
-            <a:off x="10472623" y="457200"/>
-            <a:ext cx="411480" cy="384048"/>
-          </a:xfrm>
-          <a:prstGeom prst="rect">
-            <a:avLst/>
-          </a:prstGeom>
-          <a:noFill/>
-          <a:ln/>
-        </p:spPr>
-        <p:txBody>
-          <a:bodyPr wrap="square" rtlCol="0" anchor="ctr"/>
-          <a:lstStyle/>
-          <a:p>
-            <a:pPr algn="ctr" indent="0" marL="0">
-              <a:buNone/>
-            </a:pPr>
-            <a:r>
-              <a:rPr lang="en-US" sz="1800" b="1" dirty="0">
-                <a:solidFill>
-                  <a:srgbClr val="6366F1"/>
-                </a:solidFill>
-                <a:latin typeface="Calibri" pitchFamily="34" charset="0"/>
-                <a:ea typeface="Calibri" pitchFamily="34" charset="-122"/>
-                <a:cs typeface="Calibri" pitchFamily="34" charset="-120"/>
-              </a:rPr>
-              <a:t>↔</a:t>
-            </a:r>
-            <a:endParaRPr lang="en-US" sz="1800" dirty="0"/>
-          </a:p>
-        </p:txBody>
-      </p:sp>
-      <p:sp>
-        <p:nvSpPr>
-          <p:cNvPr id="29" name="Text 27"/>
-          <p:cNvSpPr/>
-          <p:nvPr/>
-        </p:nvSpPr>
-        <p:spPr>
-          <a:xfrm>
-            <a:off x="10893247" y="429768"/>
-            <a:ext cx="411480" cy="457200"/>
-          </a:xfrm>
-          <a:prstGeom prst="rect">
-            <a:avLst/>
-          </a:prstGeom>
-          <a:noFill/>
-          <a:ln/>
-        </p:spPr>
-        <p:txBody>
-          <a:bodyPr wrap="square" rtlCol="0" anchor="ctr"/>
-          <a:lstStyle/>
-          <a:p>
-            <a:pPr algn="ctr" indent="0" marL="0">
-              <a:buNone/>
-            </a:pPr>
-            <a:r>
-              <a:rPr lang="en-US" sz="2200" dirty="0">
-                <a:solidFill>
-                  <a:srgbClr val="6366F1"/>
-                </a:solidFill>
-                <a:latin typeface="Calibri" pitchFamily="34" charset="0"/>
-                <a:ea typeface="Calibri" pitchFamily="34" charset="-122"/>
-                <a:cs typeface="Calibri" pitchFamily="34" charset="-120"/>
-              </a:rPr>
-              <a:t>☁</a:t>
-            </a:r>
-            <a:endParaRPr lang="en-US" sz="2200" dirty="0"/>
-          </a:p>
-        </p:txBody>
-      </p:sp>
-      <p:sp>
-        <p:nvSpPr>
-          <p:cNvPr id="30" name="Text 28"/>
+            <a:ext cx="329184" cy="329184"/>
+          </a:xfrm>
+          <a:prstGeom prst="rect">
+            <a:avLst/>
+          </a:prstGeom>
+        </p:spPr>
+      </p:pic>
+      <p:pic>
+        <p:nvPicPr>
+          <p:cNvPr id="28" name="Image 1" descr="preencoded.png">    </p:cNvPr>
+          <p:cNvPicPr>
+            <a:picLocks noChangeAspect="1"/>
+          </p:cNvPicPr>
+          <p:nvPr/>
+        </p:nvPicPr>
+        <p:blipFill>
+          <a:blip r:embed="rId3">
+            <a:extLst>
+              <a:ext uri="{96DAC541-7B7A-43D3-8B79-37D633B846F1}">
+                <asvg:svgBlip xmlns:asvg="http://schemas.microsoft.com/office/drawing/2016/SVG/main" r:embed="rId4"/>
+              </a:ext>
+            </a:extLst>
+          </a:blip>
+          <a:stretch>
+            <a:fillRect/>
+          </a:stretch>
+        </p:blipFill>
+        <p:spPr>
+          <a:xfrm>
+            <a:off x="10564063" y="502920"/>
+            <a:ext cx="329184" cy="329184"/>
+          </a:xfrm>
+          <a:prstGeom prst="rect">
+            <a:avLst/>
+          </a:prstGeom>
+        </p:spPr>
+      </p:pic>
+      <p:pic>
+        <p:nvPicPr>
+          <p:cNvPr id="29" name="Image 2" descr="preencoded.png">    </p:cNvPr>
+          <p:cNvPicPr>
+            <a:picLocks noChangeAspect="1"/>
+          </p:cNvPicPr>
+          <p:nvPr/>
+        </p:nvPicPr>
+        <p:blipFill>
+          <a:blip r:embed="rId5">
+            <a:extLst>
+              <a:ext uri="{96DAC541-7B7A-43D3-8B79-37D633B846F1}">
+                <asvg:svgBlip xmlns:asvg="http://schemas.microsoft.com/office/drawing/2016/SVG/main" r:embed="rId6"/>
+              </a:ext>
+            </a:extLst>
+          </a:blip>
+          <a:stretch>
+            <a:fillRect/>
+          </a:stretch>
+        </p:blipFill>
+        <p:spPr>
+          <a:xfrm>
+            <a:off x="10948111" y="502920"/>
+            <a:ext cx="329184" cy="329184"/>
+          </a:xfrm>
+          <a:prstGeom prst="rect">
+            <a:avLst/>
+          </a:prstGeom>
+        </p:spPr>
+      </p:pic>
+      <p:sp>
+        <p:nvSpPr>
+          <p:cNvPr id="30" name="Text 25"/>
           <p:cNvSpPr/>
           <p:nvPr/>
         </p:nvSpPr>
@@ -6377,7 +6326,7 @@
       </p:sp>
       <p:sp>
         <p:nvSpPr>
-          <p:cNvPr id="31" name="Text 29"/>
+          <p:cNvPr id="31" name="Text 26"/>
           <p:cNvSpPr/>
           <p:nvPr/>
         </p:nvSpPr>
@@ -9887,111 +9836,99 @@
           </a:p>
         </p:txBody>
       </p:sp>
-      <p:sp>
-        <p:nvSpPr>
-          <p:cNvPr id="26" name="Shape 24"/>
-          <p:cNvSpPr/>
-          <p:nvPr/>
-        </p:nvSpPr>
+      <p:pic>
+        <p:nvPicPr>
+          <p:cNvPr id="26" name="Image 0" descr="preencoded.png">    </p:cNvPr>
+          <p:cNvPicPr>
+            <a:picLocks noChangeAspect="1"/>
+          </p:cNvPicPr>
+          <p:nvPr/>
+        </p:nvPicPr>
+        <p:blipFill>
+          <a:blip r:embed="rId1">
+            <a:extLst>
+              <a:ext uri="{96DAC541-7B7A-43D3-8B79-37D633B846F1}">
+                <asvg:svgBlip xmlns:asvg="http://schemas.microsoft.com/office/drawing/2016/SVG/main" r:embed="rId2"/>
+              </a:ext>
+            </a:extLst>
+          </a:blip>
+          <a:stretch>
+            <a:fillRect/>
+          </a:stretch>
+        </p:blipFill>
         <p:spPr>
           <a:xfrm>
             <a:off x="10180015" y="502920"/>
-            <a:ext cx="292608" cy="292608"/>
-          </a:xfrm>
-          <a:prstGeom prst="roundRect">
-            <a:avLst>
-              <a:gd name="adj" fmla="val 15625"/>
-            </a:avLst>
-          </a:prstGeom>
-          <a:ln w="19050">
-            <a:solidFill>
-              <a:srgbClr val="6366F1"/>
-            </a:solidFill>
-            <a:prstDash val="solid"/>
-          </a:ln>
-        </p:spPr>
-      </p:sp>
-      <p:sp>
-        <p:nvSpPr>
-          <p:cNvPr id="27" name="Text 25"/>
-          <p:cNvSpPr/>
-          <p:nvPr/>
-        </p:nvSpPr>
-        <p:spPr>
-          <a:xfrm>
-            <a:off x="10472623" y="457200"/>
-            <a:ext cx="411480" cy="384048"/>
-          </a:xfrm>
-          <a:prstGeom prst="rect">
-            <a:avLst/>
-          </a:prstGeom>
-          <a:noFill/>
-          <a:ln/>
-        </p:spPr>
-        <p:txBody>
-          <a:bodyPr wrap="square" rtlCol="0" anchor="ctr"/>
-          <a:lstStyle/>
-          <a:p>
-            <a:pPr algn="ctr" indent="0" marL="0">
-              <a:buNone/>
-            </a:pPr>
-            <a:r>
-              <a:rPr lang="en-US" sz="1800" b="1" dirty="0">
-                <a:solidFill>
-                  <a:srgbClr val="6366F1"/>
-                </a:solidFill>
-                <a:latin typeface="Calibri" pitchFamily="34" charset="0"/>
-                <a:ea typeface="Calibri" pitchFamily="34" charset="-122"/>
-                <a:cs typeface="Calibri" pitchFamily="34" charset="-120"/>
-              </a:rPr>
-              <a:t>↔</a:t>
-            </a:r>
-            <a:endParaRPr lang="en-US" sz="1800" dirty="0"/>
-          </a:p>
-        </p:txBody>
-      </p:sp>
-      <p:sp>
-        <p:nvSpPr>
-          <p:cNvPr id="28" name="Text 26"/>
-          <p:cNvSpPr/>
-          <p:nvPr/>
-        </p:nvSpPr>
-        <p:spPr>
-          <a:xfrm>
-            <a:off x="10893247" y="429768"/>
-            <a:ext cx="411480" cy="457200"/>
-          </a:xfrm>
-          <a:prstGeom prst="rect">
-            <a:avLst/>
-          </a:prstGeom>
-          <a:noFill/>
-          <a:ln/>
-        </p:spPr>
-        <p:txBody>
-          <a:bodyPr wrap="square" rtlCol="0" anchor="ctr"/>
-          <a:lstStyle/>
-          <a:p>
-            <a:pPr algn="ctr" indent="0" marL="0">
-              <a:buNone/>
-            </a:pPr>
-            <a:r>
-              <a:rPr lang="en-US" sz="2200" dirty="0">
-                <a:solidFill>
-                  <a:srgbClr val="6366F1"/>
-                </a:solidFill>
-                <a:latin typeface="Calibri" pitchFamily="34" charset="0"/>
-                <a:ea typeface="Calibri" pitchFamily="34" charset="-122"/>
-                <a:cs typeface="Calibri" pitchFamily="34" charset="-120"/>
-              </a:rPr>
-              <a:t>☁</a:t>
-            </a:r>
-            <a:endParaRPr lang="en-US" sz="2200" dirty="0"/>
-          </a:p>
-        </p:txBody>
-      </p:sp>
-      <p:sp>
-        <p:nvSpPr>
-          <p:cNvPr id="29" name="Text 27"/>
+            <a:ext cx="329184" cy="329184"/>
+          </a:xfrm>
+          <a:prstGeom prst="rect">
+            <a:avLst/>
+          </a:prstGeom>
+        </p:spPr>
+      </p:pic>
+      <p:pic>
+        <p:nvPicPr>
+          <p:cNvPr id="27" name="Image 1" descr="preencoded.png">    </p:cNvPr>
+          <p:cNvPicPr>
+            <a:picLocks noChangeAspect="1"/>
+          </p:cNvPicPr>
+          <p:nvPr/>
+        </p:nvPicPr>
+        <p:blipFill>
+          <a:blip r:embed="rId3">
+            <a:extLst>
+              <a:ext uri="{96DAC541-7B7A-43D3-8B79-37D633B846F1}">
+                <asvg:svgBlip xmlns:asvg="http://schemas.microsoft.com/office/drawing/2016/SVG/main" r:embed="rId4"/>
+              </a:ext>
+            </a:extLst>
+          </a:blip>
+          <a:stretch>
+            <a:fillRect/>
+          </a:stretch>
+        </p:blipFill>
+        <p:spPr>
+          <a:xfrm>
+            <a:off x="10564063" y="502920"/>
+            <a:ext cx="329184" cy="329184"/>
+          </a:xfrm>
+          <a:prstGeom prst="rect">
+            <a:avLst/>
+          </a:prstGeom>
+        </p:spPr>
+      </p:pic>
+      <p:pic>
+        <p:nvPicPr>
+          <p:cNvPr id="28" name="Image 2" descr="preencoded.png">    </p:cNvPr>
+          <p:cNvPicPr>
+            <a:picLocks noChangeAspect="1"/>
+          </p:cNvPicPr>
+          <p:nvPr/>
+        </p:nvPicPr>
+        <p:blipFill>
+          <a:blip r:embed="rId5">
+            <a:extLst>
+              <a:ext uri="{96DAC541-7B7A-43D3-8B79-37D633B846F1}">
+                <asvg:svgBlip xmlns:asvg="http://schemas.microsoft.com/office/drawing/2016/SVG/main" r:embed="rId6"/>
+              </a:ext>
+            </a:extLst>
+          </a:blip>
+          <a:stretch>
+            <a:fillRect/>
+          </a:stretch>
+        </p:blipFill>
+        <p:spPr>
+          <a:xfrm>
+            <a:off x="10948111" y="502920"/>
+            <a:ext cx="329184" cy="329184"/>
+          </a:xfrm>
+          <a:prstGeom prst="rect">
+            <a:avLst/>
+          </a:prstGeom>
+        </p:spPr>
+      </p:pic>
+      <p:sp>
+        <p:nvSpPr>
+          <p:cNvPr id="29" name="Text 24"/>
           <p:cNvSpPr/>
           <p:nvPr/>
         </p:nvSpPr>
@@ -10072,7 +10009,7 @@
       </p:sp>
       <p:sp>
         <p:nvSpPr>
-          <p:cNvPr id="30" name="Text 28"/>
+          <p:cNvPr id="30" name="Text 25"/>
           <p:cNvSpPr/>
           <p:nvPr/>
         </p:nvSpPr>
@@ -11254,28 +11191,58 @@
           </a:p>
         </p:txBody>
       </p:sp>
-      <p:sp>
-        <p:nvSpPr>
-          <p:cNvPr id="29" name="Text 27"/>
-          <p:cNvSpPr/>
-          <p:nvPr/>
-        </p:nvSpPr>
-        <p:spPr>
-          <a:xfrm>
-            <a:off x="548640" y="5852160"/>
-            <a:ext cx="10972800" cy="411480"/>
-          </a:xfrm>
-          <a:prstGeom prst="rect">
-            <a:avLst/>
-          </a:prstGeom>
-          <a:noFill/>
-          <a:ln/>
-        </p:spPr>
-        <p:txBody>
-          <a:bodyPr wrap="square" rtlCol="0" anchor="ctr"/>
-          <a:lstStyle/>
-          <a:p>
-            <a:pPr algn="ctr" indent="0" marL="0">
+      <p:pic>
+        <p:nvPicPr>
+          <p:cNvPr id="29" name="Image 0" descr="preencoded.png">    </p:cNvPr>
+          <p:cNvPicPr>
+            <a:picLocks noChangeAspect="1"/>
+          </p:cNvPicPr>
+          <p:nvPr/>
+        </p:nvPicPr>
+        <p:blipFill>
+          <a:blip r:embed="rId1">
+            <a:extLst>
+              <a:ext uri="{96DAC541-7B7A-43D3-8B79-37D633B846F1}">
+                <asvg:svgBlip xmlns:asvg="http://schemas.microsoft.com/office/drawing/2016/SVG/main" r:embed="rId2"/>
+              </a:ext>
+            </a:extLst>
+          </a:blip>
+          <a:stretch>
+            <a:fillRect/>
+          </a:stretch>
+        </p:blipFill>
+        <p:spPr>
+          <a:xfrm>
+            <a:off x="1828800" y="5870448"/>
+            <a:ext cx="310896" cy="310896"/>
+          </a:xfrm>
+          <a:prstGeom prst="rect">
+            <a:avLst/>
+          </a:prstGeom>
+        </p:spPr>
+      </p:pic>
+      <p:sp>
+        <p:nvSpPr>
+          <p:cNvPr id="30" name="Text 27"/>
+          <p:cNvSpPr/>
+          <p:nvPr/>
+        </p:nvSpPr>
+        <p:spPr>
+          <a:xfrm>
+            <a:off x="2240280" y="5852160"/>
+            <a:ext cx="9326880" cy="411480"/>
+          </a:xfrm>
+          <a:prstGeom prst="rect">
+            <a:avLst/>
+          </a:prstGeom>
+          <a:noFill/>
+          <a:ln/>
+        </p:spPr>
+        <p:txBody>
+          <a:bodyPr wrap="square" rtlCol="0" anchor="ctr"/>
+          <a:lstStyle/>
+          <a:p>
+            <a:pPr indent="0" marL="0">
               <a:buNone/>
             </a:pPr>
             <a:r>
@@ -11287,117 +11254,105 @@
                 <a:ea typeface="Georgia" pitchFamily="34" charset="-122"/>
                 <a:cs typeface="Georgia" pitchFamily="34" charset="-120"/>
               </a:rPr>
-              <a:t>📐  Hand-off pattern:  local triage  →  cloud reasoning  →  local rendering</a:t>
+              <a:t>Hand-off pattern:  local triage  →  cloud reasoning  →  local rendering</a:t>
             </a:r>
             <a:endParaRPr lang="en-US" sz="1600" dirty="0"/>
           </a:p>
         </p:txBody>
       </p:sp>
-      <p:sp>
-        <p:nvSpPr>
-          <p:cNvPr id="30" name="Shape 28"/>
-          <p:cNvSpPr/>
-          <p:nvPr/>
-        </p:nvSpPr>
+      <p:pic>
+        <p:nvPicPr>
+          <p:cNvPr id="31" name="Image 1" descr="preencoded.png">    </p:cNvPr>
+          <p:cNvPicPr>
+            <a:picLocks noChangeAspect="1"/>
+          </p:cNvPicPr>
+          <p:nvPr/>
+        </p:nvPicPr>
+        <p:blipFill>
+          <a:blip r:embed="rId3">
+            <a:extLst>
+              <a:ext uri="{96DAC541-7B7A-43D3-8B79-37D633B846F1}">
+                <asvg:svgBlip xmlns:asvg="http://schemas.microsoft.com/office/drawing/2016/SVG/main" r:embed="rId4"/>
+              </a:ext>
+            </a:extLst>
+          </a:blip>
+          <a:stretch>
+            <a:fillRect/>
+          </a:stretch>
+        </p:blipFill>
         <p:spPr>
           <a:xfrm>
             <a:off x="10180015" y="502920"/>
-            <a:ext cx="292608" cy="292608"/>
-          </a:xfrm>
-          <a:prstGeom prst="roundRect">
-            <a:avLst>
-              <a:gd name="adj" fmla="val 15625"/>
-            </a:avLst>
-          </a:prstGeom>
-          <a:ln w="19050">
-            <a:solidFill>
-              <a:srgbClr val="6366F1"/>
-            </a:solidFill>
-            <a:prstDash val="solid"/>
-          </a:ln>
-        </p:spPr>
-      </p:sp>
-      <p:sp>
-        <p:nvSpPr>
-          <p:cNvPr id="31" name="Text 29"/>
-          <p:cNvSpPr/>
-          <p:nvPr/>
-        </p:nvSpPr>
-        <p:spPr>
-          <a:xfrm>
-            <a:off x="10472623" y="457200"/>
-            <a:ext cx="411480" cy="384048"/>
-          </a:xfrm>
-          <a:prstGeom prst="rect">
-            <a:avLst/>
-          </a:prstGeom>
-          <a:noFill/>
-          <a:ln/>
-        </p:spPr>
-        <p:txBody>
-          <a:bodyPr wrap="square" rtlCol="0" anchor="ctr"/>
-          <a:lstStyle/>
-          <a:p>
-            <a:pPr algn="ctr" indent="0" marL="0">
-              <a:buNone/>
-            </a:pPr>
-            <a:r>
-              <a:rPr lang="en-US" sz="1800" b="1" dirty="0">
-                <a:solidFill>
-                  <a:srgbClr val="6366F1"/>
-                </a:solidFill>
-                <a:latin typeface="Calibri" pitchFamily="34" charset="0"/>
-                <a:ea typeface="Calibri" pitchFamily="34" charset="-122"/>
-                <a:cs typeface="Calibri" pitchFamily="34" charset="-120"/>
-              </a:rPr>
-              <a:t>↔</a:t>
-            </a:r>
-            <a:endParaRPr lang="en-US" sz="1800" dirty="0"/>
-          </a:p>
-        </p:txBody>
-      </p:sp>
-      <p:sp>
-        <p:nvSpPr>
-          <p:cNvPr id="32" name="Text 30"/>
-          <p:cNvSpPr/>
-          <p:nvPr/>
-        </p:nvSpPr>
-        <p:spPr>
-          <a:xfrm>
-            <a:off x="10893247" y="429768"/>
-            <a:ext cx="411480" cy="457200"/>
-          </a:xfrm>
-          <a:prstGeom prst="rect">
-            <a:avLst/>
-          </a:prstGeom>
-          <a:noFill/>
-          <a:ln/>
-        </p:spPr>
-        <p:txBody>
-          <a:bodyPr wrap="square" rtlCol="0" anchor="ctr"/>
-          <a:lstStyle/>
-          <a:p>
-            <a:pPr algn="ctr" indent="0" marL="0">
-              <a:buNone/>
-            </a:pPr>
-            <a:r>
-              <a:rPr lang="en-US" sz="2200" dirty="0">
-                <a:solidFill>
-                  <a:srgbClr val="6366F1"/>
-                </a:solidFill>
-                <a:latin typeface="Calibri" pitchFamily="34" charset="0"/>
-                <a:ea typeface="Calibri" pitchFamily="34" charset="-122"/>
-                <a:cs typeface="Calibri" pitchFamily="34" charset="-120"/>
-              </a:rPr>
-              <a:t>☁</a:t>
-            </a:r>
-            <a:endParaRPr lang="en-US" sz="2200" dirty="0"/>
-          </a:p>
-        </p:txBody>
-      </p:sp>
-      <p:sp>
-        <p:nvSpPr>
-          <p:cNvPr id="33" name="Text 31"/>
+            <a:ext cx="329184" cy="329184"/>
+          </a:xfrm>
+          <a:prstGeom prst="rect">
+            <a:avLst/>
+          </a:prstGeom>
+        </p:spPr>
+      </p:pic>
+      <p:pic>
+        <p:nvPicPr>
+          <p:cNvPr id="32" name="Image 2" descr="preencoded.png">    </p:cNvPr>
+          <p:cNvPicPr>
+            <a:picLocks noChangeAspect="1"/>
+          </p:cNvPicPr>
+          <p:nvPr/>
+        </p:nvPicPr>
+        <p:blipFill>
+          <a:blip r:embed="rId5">
+            <a:extLst>
+              <a:ext uri="{96DAC541-7B7A-43D3-8B79-37D633B846F1}">
+                <asvg:svgBlip xmlns:asvg="http://schemas.microsoft.com/office/drawing/2016/SVG/main" r:embed="rId6"/>
+              </a:ext>
+            </a:extLst>
+          </a:blip>
+          <a:stretch>
+            <a:fillRect/>
+          </a:stretch>
+        </p:blipFill>
+        <p:spPr>
+          <a:xfrm>
+            <a:off x="10564063" y="502920"/>
+            <a:ext cx="329184" cy="329184"/>
+          </a:xfrm>
+          <a:prstGeom prst="rect">
+            <a:avLst/>
+          </a:prstGeom>
+        </p:spPr>
+      </p:pic>
+      <p:pic>
+        <p:nvPicPr>
+          <p:cNvPr id="33" name="Image 3" descr="preencoded.png">    </p:cNvPr>
+          <p:cNvPicPr>
+            <a:picLocks noChangeAspect="1"/>
+          </p:cNvPicPr>
+          <p:nvPr/>
+        </p:nvPicPr>
+        <p:blipFill>
+          <a:blip r:embed="rId7">
+            <a:extLst>
+              <a:ext uri="{96DAC541-7B7A-43D3-8B79-37D633B846F1}">
+                <asvg:svgBlip xmlns:asvg="http://schemas.microsoft.com/office/drawing/2016/SVG/main" r:embed="rId8"/>
+              </a:ext>
+            </a:extLst>
+          </a:blip>
+          <a:stretch>
+            <a:fillRect/>
+          </a:stretch>
+        </p:blipFill>
+        <p:spPr>
+          <a:xfrm>
+            <a:off x="10948111" y="502920"/>
+            <a:ext cx="329184" cy="329184"/>
+          </a:xfrm>
+          <a:prstGeom prst="rect">
+            <a:avLst/>
+          </a:prstGeom>
+        </p:spPr>
+      </p:pic>
+      <p:sp>
+        <p:nvSpPr>
+          <p:cNvPr id="34" name="Text 28"/>
           <p:cNvSpPr/>
           <p:nvPr/>
         </p:nvSpPr>
@@ -11478,7 +11433,7 @@
       </p:sp>
       <p:sp>
         <p:nvSpPr>
-          <p:cNvPr id="34" name="Text 32"/>
+          <p:cNvPr id="35" name="Text 29"/>
           <p:cNvSpPr/>
           <p:nvPr/>
         </p:nvSpPr>
@@ -12912,111 +12867,99 @@
           </a:p>
         </p:txBody>
       </p:sp>
-      <p:sp>
-        <p:nvSpPr>
-          <p:cNvPr id="41" name="Shape 39"/>
-          <p:cNvSpPr/>
-          <p:nvPr/>
-        </p:nvSpPr>
+      <p:pic>
+        <p:nvPicPr>
+          <p:cNvPr id="41" name="Image 0" descr="preencoded.png">    </p:cNvPr>
+          <p:cNvPicPr>
+            <a:picLocks noChangeAspect="1"/>
+          </p:cNvPicPr>
+          <p:nvPr/>
+        </p:nvPicPr>
+        <p:blipFill>
+          <a:blip r:embed="rId1">
+            <a:extLst>
+              <a:ext uri="{96DAC541-7B7A-43D3-8B79-37D633B846F1}">
+                <asvg:svgBlip xmlns:asvg="http://schemas.microsoft.com/office/drawing/2016/SVG/main" r:embed="rId2"/>
+              </a:ext>
+            </a:extLst>
+          </a:blip>
+          <a:stretch>
+            <a:fillRect/>
+          </a:stretch>
+        </p:blipFill>
         <p:spPr>
           <a:xfrm>
             <a:off x="10180015" y="502920"/>
-            <a:ext cx="292608" cy="292608"/>
-          </a:xfrm>
-          <a:prstGeom prst="roundRect">
-            <a:avLst>
-              <a:gd name="adj" fmla="val 15625"/>
-            </a:avLst>
-          </a:prstGeom>
-          <a:ln w="19050">
-            <a:solidFill>
-              <a:srgbClr val="6366F1"/>
-            </a:solidFill>
-            <a:prstDash val="solid"/>
-          </a:ln>
-        </p:spPr>
-      </p:sp>
-      <p:sp>
-        <p:nvSpPr>
-          <p:cNvPr id="42" name="Text 40"/>
-          <p:cNvSpPr/>
-          <p:nvPr/>
-        </p:nvSpPr>
-        <p:spPr>
-          <a:xfrm>
-            <a:off x="10472623" y="457200"/>
-            <a:ext cx="411480" cy="384048"/>
-          </a:xfrm>
-          <a:prstGeom prst="rect">
-            <a:avLst/>
-          </a:prstGeom>
-          <a:noFill/>
-          <a:ln/>
-        </p:spPr>
-        <p:txBody>
-          <a:bodyPr wrap="square" rtlCol="0" anchor="ctr"/>
-          <a:lstStyle/>
-          <a:p>
-            <a:pPr algn="ctr" indent="0" marL="0">
-              <a:buNone/>
-            </a:pPr>
-            <a:r>
-              <a:rPr lang="en-US" sz="1800" b="1" dirty="0">
-                <a:solidFill>
-                  <a:srgbClr val="6366F1"/>
-                </a:solidFill>
-                <a:latin typeface="Calibri" pitchFamily="34" charset="0"/>
-                <a:ea typeface="Calibri" pitchFamily="34" charset="-122"/>
-                <a:cs typeface="Calibri" pitchFamily="34" charset="-120"/>
-              </a:rPr>
-              <a:t>↔</a:t>
-            </a:r>
-            <a:endParaRPr lang="en-US" sz="1800" dirty="0"/>
-          </a:p>
-        </p:txBody>
-      </p:sp>
-      <p:sp>
-        <p:nvSpPr>
-          <p:cNvPr id="43" name="Text 41"/>
-          <p:cNvSpPr/>
-          <p:nvPr/>
-        </p:nvSpPr>
-        <p:spPr>
-          <a:xfrm>
-            <a:off x="10893247" y="429768"/>
-            <a:ext cx="411480" cy="457200"/>
-          </a:xfrm>
-          <a:prstGeom prst="rect">
-            <a:avLst/>
-          </a:prstGeom>
-          <a:noFill/>
-          <a:ln/>
-        </p:spPr>
-        <p:txBody>
-          <a:bodyPr wrap="square" rtlCol="0" anchor="ctr"/>
-          <a:lstStyle/>
-          <a:p>
-            <a:pPr algn="ctr" indent="0" marL="0">
-              <a:buNone/>
-            </a:pPr>
-            <a:r>
-              <a:rPr lang="en-US" sz="2200" dirty="0">
-                <a:solidFill>
-                  <a:srgbClr val="6366F1"/>
-                </a:solidFill>
-                <a:latin typeface="Calibri" pitchFamily="34" charset="0"/>
-                <a:ea typeface="Calibri" pitchFamily="34" charset="-122"/>
-                <a:cs typeface="Calibri" pitchFamily="34" charset="-120"/>
-              </a:rPr>
-              <a:t>☁</a:t>
-            </a:r>
-            <a:endParaRPr lang="en-US" sz="2200" dirty="0"/>
-          </a:p>
-        </p:txBody>
-      </p:sp>
-      <p:sp>
-        <p:nvSpPr>
-          <p:cNvPr id="44" name="Text 42"/>
+            <a:ext cx="329184" cy="329184"/>
+          </a:xfrm>
+          <a:prstGeom prst="rect">
+            <a:avLst/>
+          </a:prstGeom>
+        </p:spPr>
+      </p:pic>
+      <p:pic>
+        <p:nvPicPr>
+          <p:cNvPr id="42" name="Image 1" descr="preencoded.png">    </p:cNvPr>
+          <p:cNvPicPr>
+            <a:picLocks noChangeAspect="1"/>
+          </p:cNvPicPr>
+          <p:nvPr/>
+        </p:nvPicPr>
+        <p:blipFill>
+          <a:blip r:embed="rId3">
+            <a:extLst>
+              <a:ext uri="{96DAC541-7B7A-43D3-8B79-37D633B846F1}">
+                <asvg:svgBlip xmlns:asvg="http://schemas.microsoft.com/office/drawing/2016/SVG/main" r:embed="rId4"/>
+              </a:ext>
+            </a:extLst>
+          </a:blip>
+          <a:stretch>
+            <a:fillRect/>
+          </a:stretch>
+        </p:blipFill>
+        <p:spPr>
+          <a:xfrm>
+            <a:off x="10564063" y="502920"/>
+            <a:ext cx="329184" cy="329184"/>
+          </a:xfrm>
+          <a:prstGeom prst="rect">
+            <a:avLst/>
+          </a:prstGeom>
+        </p:spPr>
+      </p:pic>
+      <p:pic>
+        <p:nvPicPr>
+          <p:cNvPr id="43" name="Image 2" descr="preencoded.png">    </p:cNvPr>
+          <p:cNvPicPr>
+            <a:picLocks noChangeAspect="1"/>
+          </p:cNvPicPr>
+          <p:nvPr/>
+        </p:nvPicPr>
+        <p:blipFill>
+          <a:blip r:embed="rId5">
+            <a:extLst>
+              <a:ext uri="{96DAC541-7B7A-43D3-8B79-37D633B846F1}">
+                <asvg:svgBlip xmlns:asvg="http://schemas.microsoft.com/office/drawing/2016/SVG/main" r:embed="rId6"/>
+              </a:ext>
+            </a:extLst>
+          </a:blip>
+          <a:stretch>
+            <a:fillRect/>
+          </a:stretch>
+        </p:blipFill>
+        <p:spPr>
+          <a:xfrm>
+            <a:off x="10948111" y="502920"/>
+            <a:ext cx="329184" cy="329184"/>
+          </a:xfrm>
+          <a:prstGeom prst="rect">
+            <a:avLst/>
+          </a:prstGeom>
+        </p:spPr>
+      </p:pic>
+      <p:sp>
+        <p:nvSpPr>
+          <p:cNvPr id="44" name="Text 39"/>
           <p:cNvSpPr/>
           <p:nvPr/>
         </p:nvSpPr>
@@ -13097,7 +13040,7 @@
       </p:sp>
       <p:sp>
         <p:nvSpPr>
-          <p:cNvPr id="45" name="Text 43"/>
+          <p:cNvPr id="45" name="Text 40"/>
           <p:cNvSpPr/>
           <p:nvPr/>
         </p:nvSpPr>
@@ -13191,126 +13134,99 @@
           </a:ln>
         </p:spPr>
       </p:sp>
-      <p:sp>
-        <p:nvSpPr>
-          <p:cNvPr id="3" name="Text 1"/>
-          <p:cNvSpPr/>
-          <p:nvPr/>
-        </p:nvSpPr>
-        <p:spPr>
-          <a:xfrm>
-            <a:off x="822960" y="502920"/>
-            <a:ext cx="1097280" cy="1143000"/>
-          </a:xfrm>
-          <a:prstGeom prst="rect">
-            <a:avLst/>
-          </a:prstGeom>
-          <a:noFill/>
-          <a:ln/>
-        </p:spPr>
-        <p:txBody>
-          <a:bodyPr wrap="square" rtlCol="0" anchor="ctr"/>
-          <a:lstStyle/>
-          <a:p>
-            <a:pPr algn="ctr" indent="0" marL="0">
-              <a:buNone/>
-            </a:pPr>
-            <a:r>
-              <a:rPr lang="en-US" sz="6400" dirty="0">
-                <a:solidFill>
-                  <a:srgbClr val="6366F1"/>
-                </a:solidFill>
-                <a:latin typeface="Calibri" pitchFamily="34" charset="0"/>
-                <a:ea typeface="Calibri" pitchFamily="34" charset="-122"/>
-                <a:cs typeface="Calibri" pitchFamily="34" charset="-120"/>
-              </a:rPr>
-              <a:t>☁</a:t>
-            </a:r>
-            <a:endParaRPr lang="en-US" sz="6400" dirty="0"/>
-          </a:p>
-        </p:txBody>
-      </p:sp>
-      <p:sp>
-        <p:nvSpPr>
-          <p:cNvPr id="4" name="Text 2"/>
-          <p:cNvSpPr/>
-          <p:nvPr/>
-        </p:nvSpPr>
-        <p:spPr>
-          <a:xfrm>
-            <a:off x="1554480" y="731520"/>
-            <a:ext cx="914400" cy="914400"/>
-          </a:xfrm>
-          <a:prstGeom prst="rect">
-            <a:avLst/>
-          </a:prstGeom>
-          <a:noFill/>
-          <a:ln/>
-        </p:spPr>
-        <p:txBody>
-          <a:bodyPr wrap="square" rtlCol="0" anchor="ctr"/>
-          <a:lstStyle/>
-          <a:p>
-            <a:pPr algn="ctr" indent="0" marL="0">
-              <a:buNone/>
-            </a:pPr>
-            <a:r>
-              <a:rPr lang="en-US" sz="5000" b="1" dirty="0">
-                <a:solidFill>
-                  <a:srgbClr val="CFCBED"/>
-                </a:solidFill>
-                <a:latin typeface="Calibri" pitchFamily="34" charset="0"/>
-                <a:ea typeface="Calibri" pitchFamily="34" charset="-122"/>
-                <a:cs typeface="Calibri" pitchFamily="34" charset="-120"/>
-              </a:rPr>
-              <a:t>↔</a:t>
-            </a:r>
-            <a:endParaRPr lang="en-US" sz="5000" dirty="0"/>
-          </a:p>
-        </p:txBody>
-      </p:sp>
-      <p:sp>
-        <p:nvSpPr>
-          <p:cNvPr id="5" name="Text 3"/>
-          <p:cNvSpPr/>
-          <p:nvPr/>
-        </p:nvSpPr>
-        <p:spPr>
-          <a:xfrm>
-            <a:off x="2286000" y="548640"/>
-            <a:ext cx="1097280" cy="1097280"/>
-          </a:xfrm>
-          <a:prstGeom prst="rect">
-            <a:avLst/>
-          </a:prstGeom>
-          <a:noFill/>
-          <a:ln/>
-        </p:spPr>
-        <p:txBody>
-          <a:bodyPr wrap="square" rtlCol="0" anchor="ctr"/>
-          <a:lstStyle/>
-          <a:p>
-            <a:pPr algn="ctr" indent="0" marL="0">
-              <a:buNone/>
-            </a:pPr>
-            <a:r>
-              <a:rPr lang="en-US" sz="6000" dirty="0">
-                <a:solidFill>
-                  <a:srgbClr val="FB7185"/>
-                </a:solidFill>
-                <a:latin typeface="Calibri" pitchFamily="34" charset="0"/>
-                <a:ea typeface="Calibri" pitchFamily="34" charset="-122"/>
-                <a:cs typeface="Calibri" pitchFamily="34" charset="-120"/>
-              </a:rPr>
-              <a:t>📱</a:t>
-            </a:r>
-            <a:endParaRPr lang="en-US" sz="6000" dirty="0"/>
-          </a:p>
-        </p:txBody>
-      </p:sp>
-      <p:sp>
-        <p:nvSpPr>
-          <p:cNvPr id="6" name="Text 4"/>
+      <p:pic>
+        <p:nvPicPr>
+          <p:cNvPr id="3" name="Image 0" descr="preencoded.png">    </p:cNvPr>
+          <p:cNvPicPr>
+            <a:picLocks noChangeAspect="1"/>
+          </p:cNvPicPr>
+          <p:nvPr/>
+        </p:nvPicPr>
+        <p:blipFill>
+          <a:blip r:embed="rId1">
+            <a:extLst>
+              <a:ext uri="{96DAC541-7B7A-43D3-8B79-37D633B846F1}">
+                <asvg:svgBlip xmlns:asvg="http://schemas.microsoft.com/office/drawing/2016/SVG/main" r:embed="rId2"/>
+              </a:ext>
+            </a:extLst>
+          </a:blip>
+          <a:stretch>
+            <a:fillRect/>
+          </a:stretch>
+        </p:blipFill>
+        <p:spPr>
+          <a:xfrm>
+            <a:off x="822960" y="594360"/>
+            <a:ext cx="1051560" cy="1051560"/>
+          </a:xfrm>
+          <a:prstGeom prst="rect">
+            <a:avLst/>
+          </a:prstGeom>
+        </p:spPr>
+      </p:pic>
+      <p:pic>
+        <p:nvPicPr>
+          <p:cNvPr id="4" name="Image 1" descr="preencoded.png">    </p:cNvPr>
+          <p:cNvPicPr>
+            <a:picLocks noChangeAspect="1"/>
+          </p:cNvPicPr>
+          <p:nvPr/>
+        </p:nvPicPr>
+        <p:blipFill>
+          <a:blip r:embed="rId3">
+            <a:extLst>
+              <a:ext uri="{96DAC541-7B7A-43D3-8B79-37D633B846F1}">
+                <asvg:svgBlip xmlns:asvg="http://schemas.microsoft.com/office/drawing/2016/SVG/main" r:embed="rId4"/>
+              </a:ext>
+            </a:extLst>
+          </a:blip>
+          <a:stretch>
+            <a:fillRect/>
+          </a:stretch>
+        </p:blipFill>
+        <p:spPr>
+          <a:xfrm>
+            <a:off x="1965960" y="713232"/>
+            <a:ext cx="868680" cy="868680"/>
+          </a:xfrm>
+          <a:prstGeom prst="rect">
+            <a:avLst/>
+          </a:prstGeom>
+        </p:spPr>
+      </p:pic>
+      <p:pic>
+        <p:nvPicPr>
+          <p:cNvPr id="5" name="Image 2" descr="preencoded.png">    </p:cNvPr>
+          <p:cNvPicPr>
+            <a:picLocks noChangeAspect="1"/>
+          </p:cNvPicPr>
+          <p:nvPr/>
+        </p:nvPicPr>
+        <p:blipFill>
+          <a:blip r:embed="rId5">
+            <a:extLst>
+              <a:ext uri="{96DAC541-7B7A-43D3-8B79-37D633B846F1}">
+                <asvg:svgBlip xmlns:asvg="http://schemas.microsoft.com/office/drawing/2016/SVG/main" r:embed="rId6"/>
+              </a:ext>
+            </a:extLst>
+          </a:blip>
+          <a:stretch>
+            <a:fillRect/>
+          </a:stretch>
+        </p:blipFill>
+        <p:spPr>
+          <a:xfrm>
+            <a:off x="2926080" y="640080"/>
+            <a:ext cx="1005840" cy="1005840"/>
+          </a:xfrm>
+          <a:prstGeom prst="rect">
+            <a:avLst/>
+          </a:prstGeom>
+        </p:spPr>
+      </p:pic>
+      <p:sp>
+        <p:nvSpPr>
+          <p:cNvPr id="6" name="Text 1"/>
           <p:cNvSpPr/>
           <p:nvPr/>
         </p:nvSpPr>
@@ -13349,7 +13265,7 @@
       </p:sp>
       <p:sp>
         <p:nvSpPr>
-          <p:cNvPr id="7" name="Text 5"/>
+          <p:cNvPr id="7" name="Text 2"/>
           <p:cNvSpPr/>
           <p:nvPr/>
         </p:nvSpPr>
@@ -13388,7 +13304,7 @@
       </p:sp>
       <p:sp>
         <p:nvSpPr>
-          <p:cNvPr id="8" name="Text 6"/>
+          <p:cNvPr id="8" name="Text 3"/>
           <p:cNvSpPr/>
           <p:nvPr/>
         </p:nvSpPr>
@@ -13455,7 +13371,7 @@
       </p:sp>
       <p:sp>
         <p:nvSpPr>
-          <p:cNvPr id="9" name="Text 7"/>
+          <p:cNvPr id="9" name="Text 4"/>
           <p:cNvSpPr/>
           <p:nvPr/>
         </p:nvSpPr>
@@ -14095,111 +14011,99 @@
           </a:p>
         </p:txBody>
       </p:sp>
-      <p:sp>
-        <p:nvSpPr>
-          <p:cNvPr id="17" name="Shape 15"/>
-          <p:cNvSpPr/>
-          <p:nvPr/>
-        </p:nvSpPr>
+      <p:pic>
+        <p:nvPicPr>
+          <p:cNvPr id="17" name="Image 0" descr="preencoded.png">    </p:cNvPr>
+          <p:cNvPicPr>
+            <a:picLocks noChangeAspect="1"/>
+          </p:cNvPicPr>
+          <p:nvPr/>
+        </p:nvPicPr>
+        <p:blipFill>
+          <a:blip r:embed="rId1">
+            <a:extLst>
+              <a:ext uri="{96DAC541-7B7A-43D3-8B79-37D633B846F1}">
+                <asvg:svgBlip xmlns:asvg="http://schemas.microsoft.com/office/drawing/2016/SVG/main" r:embed="rId2"/>
+              </a:ext>
+            </a:extLst>
+          </a:blip>
+          <a:stretch>
+            <a:fillRect/>
+          </a:stretch>
+        </p:blipFill>
         <p:spPr>
           <a:xfrm>
             <a:off x="10180015" y="502920"/>
-            <a:ext cx="292608" cy="292608"/>
-          </a:xfrm>
-          <a:prstGeom prst="roundRect">
-            <a:avLst>
-              <a:gd name="adj" fmla="val 15625"/>
-            </a:avLst>
-          </a:prstGeom>
-          <a:ln w="19050">
-            <a:solidFill>
-              <a:srgbClr val="6366F1"/>
-            </a:solidFill>
-            <a:prstDash val="solid"/>
-          </a:ln>
-        </p:spPr>
-      </p:sp>
-      <p:sp>
-        <p:nvSpPr>
-          <p:cNvPr id="18" name="Text 16"/>
-          <p:cNvSpPr/>
-          <p:nvPr/>
-        </p:nvSpPr>
-        <p:spPr>
-          <a:xfrm>
-            <a:off x="10472623" y="457200"/>
-            <a:ext cx="411480" cy="384048"/>
-          </a:xfrm>
-          <a:prstGeom prst="rect">
-            <a:avLst/>
-          </a:prstGeom>
-          <a:noFill/>
-          <a:ln/>
-        </p:spPr>
-        <p:txBody>
-          <a:bodyPr wrap="square" rtlCol="0" anchor="ctr"/>
-          <a:lstStyle/>
-          <a:p>
-            <a:pPr algn="ctr" indent="0" marL="0">
-              <a:buNone/>
-            </a:pPr>
-            <a:r>
-              <a:rPr lang="en-US" sz="1800" b="1" dirty="0">
-                <a:solidFill>
-                  <a:srgbClr val="6366F1"/>
-                </a:solidFill>
-                <a:latin typeface="Calibri" pitchFamily="34" charset="0"/>
-                <a:ea typeface="Calibri" pitchFamily="34" charset="-122"/>
-                <a:cs typeface="Calibri" pitchFamily="34" charset="-120"/>
-              </a:rPr>
-              <a:t>↔</a:t>
-            </a:r>
-            <a:endParaRPr lang="en-US" sz="1800" dirty="0"/>
-          </a:p>
-        </p:txBody>
-      </p:sp>
-      <p:sp>
-        <p:nvSpPr>
-          <p:cNvPr id="19" name="Text 17"/>
-          <p:cNvSpPr/>
-          <p:nvPr/>
-        </p:nvSpPr>
-        <p:spPr>
-          <a:xfrm>
-            <a:off x="10893247" y="429768"/>
-            <a:ext cx="411480" cy="457200"/>
-          </a:xfrm>
-          <a:prstGeom prst="rect">
-            <a:avLst/>
-          </a:prstGeom>
-          <a:noFill/>
-          <a:ln/>
-        </p:spPr>
-        <p:txBody>
-          <a:bodyPr wrap="square" rtlCol="0" anchor="ctr"/>
-          <a:lstStyle/>
-          <a:p>
-            <a:pPr algn="ctr" indent="0" marL="0">
-              <a:buNone/>
-            </a:pPr>
-            <a:r>
-              <a:rPr lang="en-US" sz="2200" dirty="0">
-                <a:solidFill>
-                  <a:srgbClr val="6366F1"/>
-                </a:solidFill>
-                <a:latin typeface="Calibri" pitchFamily="34" charset="0"/>
-                <a:ea typeface="Calibri" pitchFamily="34" charset="-122"/>
-                <a:cs typeface="Calibri" pitchFamily="34" charset="-120"/>
-              </a:rPr>
-              <a:t>☁</a:t>
-            </a:r>
-            <a:endParaRPr lang="en-US" sz="2200" dirty="0"/>
-          </a:p>
-        </p:txBody>
-      </p:sp>
-      <p:sp>
-        <p:nvSpPr>
-          <p:cNvPr id="20" name="Text 18"/>
+            <a:ext cx="329184" cy="329184"/>
+          </a:xfrm>
+          <a:prstGeom prst="rect">
+            <a:avLst/>
+          </a:prstGeom>
+        </p:spPr>
+      </p:pic>
+      <p:pic>
+        <p:nvPicPr>
+          <p:cNvPr id="18" name="Image 1" descr="preencoded.png">    </p:cNvPr>
+          <p:cNvPicPr>
+            <a:picLocks noChangeAspect="1"/>
+          </p:cNvPicPr>
+          <p:nvPr/>
+        </p:nvPicPr>
+        <p:blipFill>
+          <a:blip r:embed="rId3">
+            <a:extLst>
+              <a:ext uri="{96DAC541-7B7A-43D3-8B79-37D633B846F1}">
+                <asvg:svgBlip xmlns:asvg="http://schemas.microsoft.com/office/drawing/2016/SVG/main" r:embed="rId4"/>
+              </a:ext>
+            </a:extLst>
+          </a:blip>
+          <a:stretch>
+            <a:fillRect/>
+          </a:stretch>
+        </p:blipFill>
+        <p:spPr>
+          <a:xfrm>
+            <a:off x="10564063" y="502920"/>
+            <a:ext cx="329184" cy="329184"/>
+          </a:xfrm>
+          <a:prstGeom prst="rect">
+            <a:avLst/>
+          </a:prstGeom>
+        </p:spPr>
+      </p:pic>
+      <p:pic>
+        <p:nvPicPr>
+          <p:cNvPr id="19" name="Image 2" descr="preencoded.png">    </p:cNvPr>
+          <p:cNvPicPr>
+            <a:picLocks noChangeAspect="1"/>
+          </p:cNvPicPr>
+          <p:nvPr/>
+        </p:nvPicPr>
+        <p:blipFill>
+          <a:blip r:embed="rId5">
+            <a:extLst>
+              <a:ext uri="{96DAC541-7B7A-43D3-8B79-37D633B846F1}">
+                <asvg:svgBlip xmlns:asvg="http://schemas.microsoft.com/office/drawing/2016/SVG/main" r:embed="rId6"/>
+              </a:ext>
+            </a:extLst>
+          </a:blip>
+          <a:stretch>
+            <a:fillRect/>
+          </a:stretch>
+        </p:blipFill>
+        <p:spPr>
+          <a:xfrm>
+            <a:off x="10948111" y="502920"/>
+            <a:ext cx="329184" cy="329184"/>
+          </a:xfrm>
+          <a:prstGeom prst="rect">
+            <a:avLst/>
+          </a:prstGeom>
+        </p:spPr>
+      </p:pic>
+      <p:sp>
+        <p:nvSpPr>
+          <p:cNvPr id="20" name="Text 15"/>
           <p:cNvSpPr/>
           <p:nvPr/>
         </p:nvSpPr>
@@ -14280,7 +14184,7 @@
       </p:sp>
       <p:sp>
         <p:nvSpPr>
-          <p:cNvPr id="21" name="Text 19"/>
+          <p:cNvPr id="21" name="Text 16"/>
           <p:cNvSpPr/>
           <p:nvPr/>
         </p:nvSpPr>
@@ -15027,111 +14931,99 @@
           </a:p>
         </p:txBody>
       </p:sp>
-      <p:sp>
-        <p:nvSpPr>
-          <p:cNvPr id="22" name="Shape 20"/>
-          <p:cNvSpPr/>
-          <p:nvPr/>
-        </p:nvSpPr>
+      <p:pic>
+        <p:nvPicPr>
+          <p:cNvPr id="22" name="Image 0" descr="preencoded.png">    </p:cNvPr>
+          <p:cNvPicPr>
+            <a:picLocks noChangeAspect="1"/>
+          </p:cNvPicPr>
+          <p:nvPr/>
+        </p:nvPicPr>
+        <p:blipFill>
+          <a:blip r:embed="rId1">
+            <a:extLst>
+              <a:ext uri="{96DAC541-7B7A-43D3-8B79-37D633B846F1}">
+                <asvg:svgBlip xmlns:asvg="http://schemas.microsoft.com/office/drawing/2016/SVG/main" r:embed="rId2"/>
+              </a:ext>
+            </a:extLst>
+          </a:blip>
+          <a:stretch>
+            <a:fillRect/>
+          </a:stretch>
+        </p:blipFill>
         <p:spPr>
           <a:xfrm>
             <a:off x="10180015" y="502920"/>
-            <a:ext cx="292608" cy="292608"/>
-          </a:xfrm>
-          <a:prstGeom prst="roundRect">
-            <a:avLst>
-              <a:gd name="adj" fmla="val 15625"/>
-            </a:avLst>
-          </a:prstGeom>
-          <a:ln w="19050">
-            <a:solidFill>
-              <a:srgbClr val="6366F1"/>
-            </a:solidFill>
-            <a:prstDash val="solid"/>
-          </a:ln>
-        </p:spPr>
-      </p:sp>
-      <p:sp>
-        <p:nvSpPr>
-          <p:cNvPr id="23" name="Text 21"/>
-          <p:cNvSpPr/>
-          <p:nvPr/>
-        </p:nvSpPr>
-        <p:spPr>
-          <a:xfrm>
-            <a:off x="10472623" y="457200"/>
-            <a:ext cx="411480" cy="384048"/>
-          </a:xfrm>
-          <a:prstGeom prst="rect">
-            <a:avLst/>
-          </a:prstGeom>
-          <a:noFill/>
-          <a:ln/>
-        </p:spPr>
-        <p:txBody>
-          <a:bodyPr wrap="square" rtlCol="0" anchor="ctr"/>
-          <a:lstStyle/>
-          <a:p>
-            <a:pPr algn="ctr" indent="0" marL="0">
-              <a:buNone/>
-            </a:pPr>
-            <a:r>
-              <a:rPr lang="en-US" sz="1800" b="1" dirty="0">
-                <a:solidFill>
-                  <a:srgbClr val="6366F1"/>
-                </a:solidFill>
-                <a:latin typeface="Calibri" pitchFamily="34" charset="0"/>
-                <a:ea typeface="Calibri" pitchFamily="34" charset="-122"/>
-                <a:cs typeface="Calibri" pitchFamily="34" charset="-120"/>
-              </a:rPr>
-              <a:t>↔</a:t>
-            </a:r>
-            <a:endParaRPr lang="en-US" sz="1800" dirty="0"/>
-          </a:p>
-        </p:txBody>
-      </p:sp>
-      <p:sp>
-        <p:nvSpPr>
-          <p:cNvPr id="24" name="Text 22"/>
-          <p:cNvSpPr/>
-          <p:nvPr/>
-        </p:nvSpPr>
-        <p:spPr>
-          <a:xfrm>
-            <a:off x="10893247" y="429768"/>
-            <a:ext cx="411480" cy="457200"/>
-          </a:xfrm>
-          <a:prstGeom prst="rect">
-            <a:avLst/>
-          </a:prstGeom>
-          <a:noFill/>
-          <a:ln/>
-        </p:spPr>
-        <p:txBody>
-          <a:bodyPr wrap="square" rtlCol="0" anchor="ctr"/>
-          <a:lstStyle/>
-          <a:p>
-            <a:pPr algn="ctr" indent="0" marL="0">
-              <a:buNone/>
-            </a:pPr>
-            <a:r>
-              <a:rPr lang="en-US" sz="2200" dirty="0">
-                <a:solidFill>
-                  <a:srgbClr val="6366F1"/>
-                </a:solidFill>
-                <a:latin typeface="Calibri" pitchFamily="34" charset="0"/>
-                <a:ea typeface="Calibri" pitchFamily="34" charset="-122"/>
-                <a:cs typeface="Calibri" pitchFamily="34" charset="-120"/>
-              </a:rPr>
-              <a:t>☁</a:t>
-            </a:r>
-            <a:endParaRPr lang="en-US" sz="2200" dirty="0"/>
-          </a:p>
-        </p:txBody>
-      </p:sp>
-      <p:sp>
-        <p:nvSpPr>
-          <p:cNvPr id="25" name="Text 23"/>
+            <a:ext cx="329184" cy="329184"/>
+          </a:xfrm>
+          <a:prstGeom prst="rect">
+            <a:avLst/>
+          </a:prstGeom>
+        </p:spPr>
+      </p:pic>
+      <p:pic>
+        <p:nvPicPr>
+          <p:cNvPr id="23" name="Image 1" descr="preencoded.png">    </p:cNvPr>
+          <p:cNvPicPr>
+            <a:picLocks noChangeAspect="1"/>
+          </p:cNvPicPr>
+          <p:nvPr/>
+        </p:nvPicPr>
+        <p:blipFill>
+          <a:blip r:embed="rId3">
+            <a:extLst>
+              <a:ext uri="{96DAC541-7B7A-43D3-8B79-37D633B846F1}">
+                <asvg:svgBlip xmlns:asvg="http://schemas.microsoft.com/office/drawing/2016/SVG/main" r:embed="rId4"/>
+              </a:ext>
+            </a:extLst>
+          </a:blip>
+          <a:stretch>
+            <a:fillRect/>
+          </a:stretch>
+        </p:blipFill>
+        <p:spPr>
+          <a:xfrm>
+            <a:off x="10564063" y="502920"/>
+            <a:ext cx="329184" cy="329184"/>
+          </a:xfrm>
+          <a:prstGeom prst="rect">
+            <a:avLst/>
+          </a:prstGeom>
+        </p:spPr>
+      </p:pic>
+      <p:pic>
+        <p:nvPicPr>
+          <p:cNvPr id="24" name="Image 2" descr="preencoded.png">    </p:cNvPr>
+          <p:cNvPicPr>
+            <a:picLocks noChangeAspect="1"/>
+          </p:cNvPicPr>
+          <p:nvPr/>
+        </p:nvPicPr>
+        <p:blipFill>
+          <a:blip r:embed="rId5">
+            <a:extLst>
+              <a:ext uri="{96DAC541-7B7A-43D3-8B79-37D633B846F1}">
+                <asvg:svgBlip xmlns:asvg="http://schemas.microsoft.com/office/drawing/2016/SVG/main" r:embed="rId6"/>
+              </a:ext>
+            </a:extLst>
+          </a:blip>
+          <a:stretch>
+            <a:fillRect/>
+          </a:stretch>
+        </p:blipFill>
+        <p:spPr>
+          <a:xfrm>
+            <a:off x="10948111" y="502920"/>
+            <a:ext cx="329184" cy="329184"/>
+          </a:xfrm>
+          <a:prstGeom prst="rect">
+            <a:avLst/>
+          </a:prstGeom>
+        </p:spPr>
+      </p:pic>
+      <p:sp>
+        <p:nvSpPr>
+          <p:cNvPr id="25" name="Text 20"/>
           <p:cNvSpPr/>
           <p:nvPr/>
         </p:nvSpPr>
@@ -15212,7 +15104,7 @@
       </p:sp>
       <p:sp>
         <p:nvSpPr>
-          <p:cNvPr id="26" name="Text 24"/>
+          <p:cNvPr id="26" name="Text 21"/>
           <p:cNvSpPr/>
           <p:nvPr/>
         </p:nvSpPr>
@@ -15359,48 +15251,39 @@
           </a:p>
         </p:txBody>
       </p:sp>
-      <p:sp>
-        <p:nvSpPr>
-          <p:cNvPr id="4" name="Text 2"/>
-          <p:cNvSpPr/>
-          <p:nvPr/>
-        </p:nvSpPr>
-        <p:spPr>
-          <a:xfrm>
-            <a:off x="548640" y="2194560"/>
-            <a:ext cx="4114800" cy="3657600"/>
-          </a:xfrm>
-          <a:prstGeom prst="rect">
-            <a:avLst/>
-          </a:prstGeom>
-          <a:noFill/>
-          <a:ln/>
-        </p:spPr>
-        <p:txBody>
-          <a:bodyPr wrap="square" rtlCol="0" anchor="ctr"/>
-          <a:lstStyle/>
-          <a:p>
-            <a:pPr algn="ctr" indent="0" marL="0">
-              <a:buNone/>
-            </a:pPr>
-            <a:r>
-              <a:rPr lang="en-US" sz="22000" dirty="0">
-                <a:solidFill>
-                  <a:srgbClr val="6366F1"/>
-                </a:solidFill>
-                <a:latin typeface="Calibri" pitchFamily="34" charset="0"/>
-                <a:ea typeface="Calibri" pitchFamily="34" charset="-122"/>
-                <a:cs typeface="Calibri" pitchFamily="34" charset="-120"/>
-              </a:rPr>
-              <a:t>☁</a:t>
-            </a:r>
-            <a:endParaRPr lang="en-US" sz="22000" dirty="0"/>
-          </a:p>
-        </p:txBody>
-      </p:sp>
-      <p:sp>
-        <p:nvSpPr>
-          <p:cNvPr id="5" name="Text 3"/>
+      <p:pic>
+        <p:nvPicPr>
+          <p:cNvPr id="4" name="Image 0" descr="preencoded.png">    </p:cNvPr>
+          <p:cNvPicPr>
+            <a:picLocks noChangeAspect="1"/>
+          </p:cNvPicPr>
+          <p:nvPr/>
+        </p:nvPicPr>
+        <p:blipFill>
+          <a:blip r:embed="rId1">
+            <a:extLst>
+              <a:ext uri="{96DAC541-7B7A-43D3-8B79-37D633B846F1}">
+                <asvg:svgBlip xmlns:asvg="http://schemas.microsoft.com/office/drawing/2016/SVG/main" r:embed="rId2"/>
+              </a:ext>
+            </a:extLst>
+          </a:blip>
+          <a:stretch>
+            <a:fillRect/>
+          </a:stretch>
+        </p:blipFill>
+        <p:spPr>
+          <a:xfrm>
+            <a:off x="548640" y="2377440"/>
+            <a:ext cx="3291840" cy="3291840"/>
+          </a:xfrm>
+          <a:prstGeom prst="rect">
+            <a:avLst/>
+          </a:prstGeom>
+        </p:spPr>
+      </p:pic>
+      <p:sp>
+        <p:nvSpPr>
+          <p:cNvPr id="5" name="Text 2"/>
           <p:cNvSpPr/>
           <p:nvPr/>
         </p:nvSpPr>
@@ -15439,7 +15322,7 @@
       </p:sp>
       <p:sp>
         <p:nvSpPr>
-          <p:cNvPr id="6" name="Shape 4"/>
+          <p:cNvPr id="6" name="Shape 3"/>
           <p:cNvSpPr/>
           <p:nvPr/>
         </p:nvSpPr>
@@ -15466,7 +15349,7 @@
       </p:sp>
       <p:sp>
         <p:nvSpPr>
-          <p:cNvPr id="7" name="Text 5"/>
+          <p:cNvPr id="7" name="Text 4"/>
           <p:cNvSpPr/>
           <p:nvPr/>
         </p:nvSpPr>
@@ -15505,7 +15388,7 @@
       </p:sp>
       <p:sp>
         <p:nvSpPr>
-          <p:cNvPr id="8" name="Text 6"/>
+          <p:cNvPr id="8" name="Text 5"/>
           <p:cNvSpPr/>
           <p:nvPr/>
         </p:nvSpPr>
@@ -15544,7 +15427,7 @@
       </p:sp>
       <p:sp>
         <p:nvSpPr>
-          <p:cNvPr id="9" name="Shape 7"/>
+          <p:cNvPr id="9" name="Shape 6"/>
           <p:cNvSpPr/>
           <p:nvPr/>
         </p:nvSpPr>
@@ -15571,7 +15454,7 @@
       </p:sp>
       <p:sp>
         <p:nvSpPr>
-          <p:cNvPr id="10" name="Text 8"/>
+          <p:cNvPr id="10" name="Text 7"/>
           <p:cNvSpPr/>
           <p:nvPr/>
         </p:nvSpPr>
@@ -15610,7 +15493,7 @@
       </p:sp>
       <p:sp>
         <p:nvSpPr>
-          <p:cNvPr id="11" name="Text 9"/>
+          <p:cNvPr id="11" name="Text 8"/>
           <p:cNvSpPr/>
           <p:nvPr/>
         </p:nvSpPr>
@@ -15649,7 +15532,7 @@
       </p:sp>
       <p:sp>
         <p:nvSpPr>
-          <p:cNvPr id="12" name="Shape 10"/>
+          <p:cNvPr id="12" name="Shape 9"/>
           <p:cNvSpPr/>
           <p:nvPr/>
         </p:nvSpPr>
@@ -15676,7 +15559,7 @@
       </p:sp>
       <p:sp>
         <p:nvSpPr>
-          <p:cNvPr id="13" name="Text 11"/>
+          <p:cNvPr id="13" name="Text 10"/>
           <p:cNvSpPr/>
           <p:nvPr/>
         </p:nvSpPr>
@@ -15715,7 +15598,7 @@
       </p:sp>
       <p:sp>
         <p:nvSpPr>
-          <p:cNvPr id="14" name="Text 12"/>
+          <p:cNvPr id="14" name="Text 11"/>
           <p:cNvSpPr/>
           <p:nvPr/>
         </p:nvSpPr>
@@ -15754,7 +15637,7 @@
       </p:sp>
       <p:sp>
         <p:nvSpPr>
-          <p:cNvPr id="15" name="Shape 13"/>
+          <p:cNvPr id="15" name="Shape 12"/>
           <p:cNvSpPr/>
           <p:nvPr/>
         </p:nvSpPr>
@@ -15781,7 +15664,7 @@
       </p:sp>
       <p:sp>
         <p:nvSpPr>
-          <p:cNvPr id="16" name="Text 14"/>
+          <p:cNvPr id="16" name="Text 13"/>
           <p:cNvSpPr/>
           <p:nvPr/>
         </p:nvSpPr>
@@ -15820,7 +15703,7 @@
       </p:sp>
       <p:sp>
         <p:nvSpPr>
-          <p:cNvPr id="17" name="Text 15"/>
+          <p:cNvPr id="17" name="Text 14"/>
           <p:cNvSpPr/>
           <p:nvPr/>
         </p:nvSpPr>
@@ -15922,7 +15805,7 @@
       </p:sp>
       <p:sp>
         <p:nvSpPr>
-          <p:cNvPr id="18" name="Shape 16"/>
+          <p:cNvPr id="18" name="Shape 15"/>
           <p:cNvSpPr/>
           <p:nvPr/>
         </p:nvSpPr>
@@ -15949,7 +15832,7 @@
       </p:sp>
       <p:sp>
         <p:nvSpPr>
-          <p:cNvPr id="19" name="Text 17"/>
+          <p:cNvPr id="19" name="Text 16"/>
           <p:cNvSpPr/>
           <p:nvPr/>
         </p:nvSpPr>
@@ -15988,7 +15871,7 @@
       </p:sp>
       <p:sp>
         <p:nvSpPr>
-          <p:cNvPr id="20" name="Text 18"/>
+          <p:cNvPr id="20" name="Text 17"/>
           <p:cNvSpPr/>
           <p:nvPr/>
         </p:nvSpPr>
@@ -16088,111 +15971,99 @@
           </a:p>
         </p:txBody>
       </p:sp>
-      <p:sp>
-        <p:nvSpPr>
-          <p:cNvPr id="21" name="Shape 19"/>
-          <p:cNvSpPr/>
-          <p:nvPr/>
-        </p:nvSpPr>
+      <p:pic>
+        <p:nvPicPr>
+          <p:cNvPr id="21" name="Image 1" descr="preencoded.png">    </p:cNvPr>
+          <p:cNvPicPr>
+            <a:picLocks noChangeAspect="1"/>
+          </p:cNvPicPr>
+          <p:nvPr/>
+        </p:nvPicPr>
+        <p:blipFill>
+          <a:blip r:embed="rId3">
+            <a:extLst>
+              <a:ext uri="{96DAC541-7B7A-43D3-8B79-37D633B846F1}">
+                <asvg:svgBlip xmlns:asvg="http://schemas.microsoft.com/office/drawing/2016/SVG/main" r:embed="rId4"/>
+              </a:ext>
+            </a:extLst>
+          </a:blip>
+          <a:stretch>
+            <a:fillRect/>
+          </a:stretch>
+        </p:blipFill>
         <p:spPr>
           <a:xfrm>
             <a:off x="10180015" y="502920"/>
-            <a:ext cx="292608" cy="292608"/>
-          </a:xfrm>
-          <a:prstGeom prst="roundRect">
-            <a:avLst>
-              <a:gd name="adj" fmla="val 15625"/>
-            </a:avLst>
-          </a:prstGeom>
-          <a:ln w="19050">
-            <a:solidFill>
-              <a:srgbClr val="6366F1"/>
-            </a:solidFill>
-            <a:prstDash val="solid"/>
-          </a:ln>
-        </p:spPr>
-      </p:sp>
-      <p:sp>
-        <p:nvSpPr>
-          <p:cNvPr id="22" name="Text 20"/>
-          <p:cNvSpPr/>
-          <p:nvPr/>
-        </p:nvSpPr>
-        <p:spPr>
-          <a:xfrm>
-            <a:off x="10472623" y="457200"/>
-            <a:ext cx="411480" cy="384048"/>
-          </a:xfrm>
-          <a:prstGeom prst="rect">
-            <a:avLst/>
-          </a:prstGeom>
-          <a:noFill/>
-          <a:ln/>
-        </p:spPr>
-        <p:txBody>
-          <a:bodyPr wrap="square" rtlCol="0" anchor="ctr"/>
-          <a:lstStyle/>
-          <a:p>
-            <a:pPr algn="ctr" indent="0" marL="0">
-              <a:buNone/>
-            </a:pPr>
-            <a:r>
-              <a:rPr lang="en-US" sz="1800" b="1" dirty="0">
-                <a:solidFill>
-                  <a:srgbClr val="6366F1"/>
-                </a:solidFill>
-                <a:latin typeface="Calibri" pitchFamily="34" charset="0"/>
-                <a:ea typeface="Calibri" pitchFamily="34" charset="-122"/>
-                <a:cs typeface="Calibri" pitchFamily="34" charset="-120"/>
-              </a:rPr>
-              <a:t>↔</a:t>
-            </a:r>
-            <a:endParaRPr lang="en-US" sz="1800" dirty="0"/>
-          </a:p>
-        </p:txBody>
-      </p:sp>
-      <p:sp>
-        <p:nvSpPr>
-          <p:cNvPr id="23" name="Text 21"/>
-          <p:cNvSpPr/>
-          <p:nvPr/>
-        </p:nvSpPr>
-        <p:spPr>
-          <a:xfrm>
-            <a:off x="10893247" y="429768"/>
-            <a:ext cx="411480" cy="457200"/>
-          </a:xfrm>
-          <a:prstGeom prst="rect">
-            <a:avLst/>
-          </a:prstGeom>
-          <a:noFill/>
-          <a:ln/>
-        </p:spPr>
-        <p:txBody>
-          <a:bodyPr wrap="square" rtlCol="0" anchor="ctr"/>
-          <a:lstStyle/>
-          <a:p>
-            <a:pPr algn="ctr" indent="0" marL="0">
-              <a:buNone/>
-            </a:pPr>
-            <a:r>
-              <a:rPr lang="en-US" sz="2200" dirty="0">
-                <a:solidFill>
-                  <a:srgbClr val="6366F1"/>
-                </a:solidFill>
-                <a:latin typeface="Calibri" pitchFamily="34" charset="0"/>
-                <a:ea typeface="Calibri" pitchFamily="34" charset="-122"/>
-                <a:cs typeface="Calibri" pitchFamily="34" charset="-120"/>
-              </a:rPr>
-              <a:t>☁</a:t>
-            </a:r>
-            <a:endParaRPr lang="en-US" sz="2200" dirty="0"/>
-          </a:p>
-        </p:txBody>
-      </p:sp>
-      <p:sp>
-        <p:nvSpPr>
-          <p:cNvPr id="24" name="Text 22"/>
+            <a:ext cx="329184" cy="329184"/>
+          </a:xfrm>
+          <a:prstGeom prst="rect">
+            <a:avLst/>
+          </a:prstGeom>
+        </p:spPr>
+      </p:pic>
+      <p:pic>
+        <p:nvPicPr>
+          <p:cNvPr id="22" name="Image 2" descr="preencoded.png">    </p:cNvPr>
+          <p:cNvPicPr>
+            <a:picLocks noChangeAspect="1"/>
+          </p:cNvPicPr>
+          <p:nvPr/>
+        </p:nvPicPr>
+        <p:blipFill>
+          <a:blip r:embed="rId5">
+            <a:extLst>
+              <a:ext uri="{96DAC541-7B7A-43D3-8B79-37D633B846F1}">
+                <asvg:svgBlip xmlns:asvg="http://schemas.microsoft.com/office/drawing/2016/SVG/main" r:embed="rId6"/>
+              </a:ext>
+            </a:extLst>
+          </a:blip>
+          <a:stretch>
+            <a:fillRect/>
+          </a:stretch>
+        </p:blipFill>
+        <p:spPr>
+          <a:xfrm>
+            <a:off x="10564063" y="502920"/>
+            <a:ext cx="329184" cy="329184"/>
+          </a:xfrm>
+          <a:prstGeom prst="rect">
+            <a:avLst/>
+          </a:prstGeom>
+        </p:spPr>
+      </p:pic>
+      <p:pic>
+        <p:nvPicPr>
+          <p:cNvPr id="23" name="Image 3" descr="preencoded.png">    </p:cNvPr>
+          <p:cNvPicPr>
+            <a:picLocks noChangeAspect="1"/>
+          </p:cNvPicPr>
+          <p:nvPr/>
+        </p:nvPicPr>
+        <p:blipFill>
+          <a:blip r:embed="rId7">
+            <a:extLst>
+              <a:ext uri="{96DAC541-7B7A-43D3-8B79-37D633B846F1}">
+                <asvg:svgBlip xmlns:asvg="http://schemas.microsoft.com/office/drawing/2016/SVG/main" r:embed="rId8"/>
+              </a:ext>
+            </a:extLst>
+          </a:blip>
+          <a:stretch>
+            <a:fillRect/>
+          </a:stretch>
+        </p:blipFill>
+        <p:spPr>
+          <a:xfrm>
+            <a:off x="10948111" y="502920"/>
+            <a:ext cx="329184" cy="329184"/>
+          </a:xfrm>
+          <a:prstGeom prst="rect">
+            <a:avLst/>
+          </a:prstGeom>
+        </p:spPr>
+      </p:pic>
+      <p:sp>
+        <p:nvSpPr>
+          <p:cNvPr id="24" name="Text 18"/>
           <p:cNvSpPr/>
           <p:nvPr/>
         </p:nvSpPr>
@@ -16273,7 +16144,7 @@
       </p:sp>
       <p:sp>
         <p:nvSpPr>
-          <p:cNvPr id="25" name="Text 23"/>
+          <p:cNvPr id="25" name="Text 19"/>
           <p:cNvSpPr/>
           <p:nvPr/>
         </p:nvSpPr>
@@ -17511,16 +17382,46 @@
           </a:p>
         </p:txBody>
       </p:sp>
-      <p:sp>
-        <p:nvSpPr>
-          <p:cNvPr id="9" name="Text 7"/>
-          <p:cNvSpPr/>
-          <p:nvPr/>
-        </p:nvSpPr>
-        <p:spPr>
-          <a:xfrm>
-            <a:off x="8046720" y="3611880"/>
-            <a:ext cx="3657600" cy="274320"/>
+      <p:pic>
+        <p:nvPicPr>
+          <p:cNvPr id="9" name="Image 0" descr="preencoded.png">    </p:cNvPr>
+          <p:cNvPicPr>
+            <a:picLocks noChangeAspect="1"/>
+          </p:cNvPicPr>
+          <p:nvPr/>
+        </p:nvPicPr>
+        <p:blipFill>
+          <a:blip r:embed="rId1">
+            <a:extLst>
+              <a:ext uri="{96DAC541-7B7A-43D3-8B79-37D633B846F1}">
+                <asvg:svgBlip xmlns:asvg="http://schemas.microsoft.com/office/drawing/2016/SVG/main" r:embed="rId2"/>
+              </a:ext>
+            </a:extLst>
+          </a:blip>
+          <a:stretch>
+            <a:fillRect/>
+          </a:stretch>
+        </p:blipFill>
+        <p:spPr>
+          <a:xfrm>
+            <a:off x="8046720" y="3648456"/>
+            <a:ext cx="256032" cy="256032"/>
+          </a:xfrm>
+          <a:prstGeom prst="rect">
+            <a:avLst/>
+          </a:prstGeom>
+        </p:spPr>
+      </p:pic>
+      <p:sp>
+        <p:nvSpPr>
+          <p:cNvPr id="10" name="Text 7"/>
+          <p:cNvSpPr/>
+          <p:nvPr/>
+        </p:nvSpPr>
+        <p:spPr>
+          <a:xfrm>
+            <a:off x="8394192" y="3611880"/>
+            <a:ext cx="3291840" cy="274320"/>
           </a:xfrm>
           <a:prstGeom prst="rect">
             <a:avLst/>
@@ -17544,7 +17445,7 @@
                 <a:ea typeface="Calibri" pitchFamily="34" charset="-122"/>
                 <a:cs typeface="Calibri" pitchFamily="34" charset="-120"/>
               </a:rPr>
-              <a:t>⚡ Latency</a:t>
+              <a:t>Latency</a:t>
             </a:r>
             <a:endParaRPr lang="en-US" sz="1400" dirty="0"/>
           </a:p>
@@ -17552,14 +17453,14 @@
       </p:sp>
       <p:sp>
         <p:nvSpPr>
-          <p:cNvPr id="10" name="Text 8"/>
-          <p:cNvSpPr/>
-          <p:nvPr/>
-        </p:nvSpPr>
-        <p:spPr>
-          <a:xfrm>
-            <a:off x="8046720" y="3886200"/>
-            <a:ext cx="3657600" cy="274320"/>
+          <p:cNvPr id="11" name="Text 8"/>
+          <p:cNvSpPr/>
+          <p:nvPr/>
+        </p:nvSpPr>
+        <p:spPr>
+          <a:xfrm>
+            <a:off x="8394192" y="3886200"/>
+            <a:ext cx="3291840" cy="274320"/>
           </a:xfrm>
           <a:prstGeom prst="rect">
             <a:avLst/>
@@ -17589,16 +17490,46 @@
           </a:p>
         </p:txBody>
       </p:sp>
-      <p:sp>
-        <p:nvSpPr>
-          <p:cNvPr id="11" name="Text 9"/>
-          <p:cNvSpPr/>
-          <p:nvPr/>
-        </p:nvSpPr>
-        <p:spPr>
-          <a:xfrm>
-            <a:off x="8046720" y="4251960"/>
-            <a:ext cx="3657600" cy="274320"/>
+      <p:pic>
+        <p:nvPicPr>
+          <p:cNvPr id="12" name="Image 1" descr="preencoded.png">    </p:cNvPr>
+          <p:cNvPicPr>
+            <a:picLocks noChangeAspect="1"/>
+          </p:cNvPicPr>
+          <p:nvPr/>
+        </p:nvPicPr>
+        <p:blipFill>
+          <a:blip r:embed="rId3">
+            <a:extLst>
+              <a:ext uri="{96DAC541-7B7A-43D3-8B79-37D633B846F1}">
+                <asvg:svgBlip xmlns:asvg="http://schemas.microsoft.com/office/drawing/2016/SVG/main" r:embed="rId4"/>
+              </a:ext>
+            </a:extLst>
+          </a:blip>
+          <a:stretch>
+            <a:fillRect/>
+          </a:stretch>
+        </p:blipFill>
+        <p:spPr>
+          <a:xfrm>
+            <a:off x="8046720" y="4288536"/>
+            <a:ext cx="256032" cy="256032"/>
+          </a:xfrm>
+          <a:prstGeom prst="rect">
+            <a:avLst/>
+          </a:prstGeom>
+        </p:spPr>
+      </p:pic>
+      <p:sp>
+        <p:nvSpPr>
+          <p:cNvPr id="13" name="Text 9"/>
+          <p:cNvSpPr/>
+          <p:nvPr/>
+        </p:nvSpPr>
+        <p:spPr>
+          <a:xfrm>
+            <a:off x="8394192" y="4251960"/>
+            <a:ext cx="3291840" cy="274320"/>
           </a:xfrm>
           <a:prstGeom prst="rect">
             <a:avLst/>
@@ -17622,7 +17553,7 @@
                 <a:ea typeface="Calibri" pitchFamily="34" charset="-122"/>
                 <a:cs typeface="Calibri" pitchFamily="34" charset="-120"/>
               </a:rPr>
-              <a:t>🌐 Connectivity</a:t>
+              <a:t>Connectivity</a:t>
             </a:r>
             <a:endParaRPr lang="en-US" sz="1400" dirty="0"/>
           </a:p>
@@ -17630,14 +17561,14 @@
       </p:sp>
       <p:sp>
         <p:nvSpPr>
-          <p:cNvPr id="12" name="Text 10"/>
-          <p:cNvSpPr/>
-          <p:nvPr/>
-        </p:nvSpPr>
-        <p:spPr>
-          <a:xfrm>
-            <a:off x="8046720" y="4526280"/>
-            <a:ext cx="3657600" cy="274320"/>
+          <p:cNvPr id="14" name="Text 10"/>
+          <p:cNvSpPr/>
+          <p:nvPr/>
+        </p:nvSpPr>
+        <p:spPr>
+          <a:xfrm>
+            <a:off x="8394192" y="4526280"/>
+            <a:ext cx="3291840" cy="274320"/>
           </a:xfrm>
           <a:prstGeom prst="rect">
             <a:avLst/>
@@ -17667,16 +17598,46 @@
           </a:p>
         </p:txBody>
       </p:sp>
-      <p:sp>
-        <p:nvSpPr>
-          <p:cNvPr id="13" name="Text 11"/>
-          <p:cNvSpPr/>
-          <p:nvPr/>
-        </p:nvSpPr>
-        <p:spPr>
-          <a:xfrm>
-            <a:off x="8046720" y="4892040"/>
-            <a:ext cx="3657600" cy="274320"/>
+      <p:pic>
+        <p:nvPicPr>
+          <p:cNvPr id="15" name="Image 2" descr="preencoded.png">    </p:cNvPr>
+          <p:cNvPicPr>
+            <a:picLocks noChangeAspect="1"/>
+          </p:cNvPicPr>
+          <p:nvPr/>
+        </p:nvPicPr>
+        <p:blipFill>
+          <a:blip r:embed="rId5">
+            <a:extLst>
+              <a:ext uri="{96DAC541-7B7A-43D3-8B79-37D633B846F1}">
+                <asvg:svgBlip xmlns:asvg="http://schemas.microsoft.com/office/drawing/2016/SVG/main" r:embed="rId6"/>
+              </a:ext>
+            </a:extLst>
+          </a:blip>
+          <a:stretch>
+            <a:fillRect/>
+          </a:stretch>
+        </p:blipFill>
+        <p:spPr>
+          <a:xfrm>
+            <a:off x="8046720" y="4928616"/>
+            <a:ext cx="256032" cy="256032"/>
+          </a:xfrm>
+          <a:prstGeom prst="rect">
+            <a:avLst/>
+          </a:prstGeom>
+        </p:spPr>
+      </p:pic>
+      <p:sp>
+        <p:nvSpPr>
+          <p:cNvPr id="16" name="Text 11"/>
+          <p:cNvSpPr/>
+          <p:nvPr/>
+        </p:nvSpPr>
+        <p:spPr>
+          <a:xfrm>
+            <a:off x="8394192" y="4892040"/>
+            <a:ext cx="3291840" cy="274320"/>
           </a:xfrm>
           <a:prstGeom prst="rect">
             <a:avLst/>
@@ -17700,7 +17661,7 @@
                 <a:ea typeface="Calibri" pitchFamily="34" charset="-122"/>
                 <a:cs typeface="Calibri" pitchFamily="34" charset="-120"/>
               </a:rPr>
-              <a:t>🧠 Quality</a:t>
+              <a:t>Quality</a:t>
             </a:r>
             <a:endParaRPr lang="en-US" sz="1400" dirty="0"/>
           </a:p>
@@ -17708,14 +17669,14 @@
       </p:sp>
       <p:sp>
         <p:nvSpPr>
-          <p:cNvPr id="14" name="Text 12"/>
-          <p:cNvSpPr/>
-          <p:nvPr/>
-        </p:nvSpPr>
-        <p:spPr>
-          <a:xfrm>
-            <a:off x="8046720" y="5166360"/>
-            <a:ext cx="3657600" cy="274320"/>
+          <p:cNvPr id="17" name="Text 12"/>
+          <p:cNvSpPr/>
+          <p:nvPr/>
+        </p:nvSpPr>
+        <p:spPr>
+          <a:xfrm>
+            <a:off x="8394192" y="5166360"/>
+            <a:ext cx="3291840" cy="274320"/>
           </a:xfrm>
           <a:prstGeom prst="rect">
             <a:avLst/>
@@ -17745,16 +17706,46 @@
           </a:p>
         </p:txBody>
       </p:sp>
-      <p:sp>
-        <p:nvSpPr>
-          <p:cNvPr id="15" name="Text 13"/>
-          <p:cNvSpPr/>
-          <p:nvPr/>
-        </p:nvSpPr>
-        <p:spPr>
-          <a:xfrm>
-            <a:off x="8046720" y="5532120"/>
-            <a:ext cx="3657600" cy="274320"/>
+      <p:pic>
+        <p:nvPicPr>
+          <p:cNvPr id="18" name="Image 3" descr="preencoded.png">    </p:cNvPr>
+          <p:cNvPicPr>
+            <a:picLocks noChangeAspect="1"/>
+          </p:cNvPicPr>
+          <p:nvPr/>
+        </p:nvPicPr>
+        <p:blipFill>
+          <a:blip r:embed="rId7">
+            <a:extLst>
+              <a:ext uri="{96DAC541-7B7A-43D3-8B79-37D633B846F1}">
+                <asvg:svgBlip xmlns:asvg="http://schemas.microsoft.com/office/drawing/2016/SVG/main" r:embed="rId8"/>
+              </a:ext>
+            </a:extLst>
+          </a:blip>
+          <a:stretch>
+            <a:fillRect/>
+          </a:stretch>
+        </p:blipFill>
+        <p:spPr>
+          <a:xfrm>
+            <a:off x="8046720" y="5568696"/>
+            <a:ext cx="256032" cy="256032"/>
+          </a:xfrm>
+          <a:prstGeom prst="rect">
+            <a:avLst/>
+          </a:prstGeom>
+        </p:spPr>
+      </p:pic>
+      <p:sp>
+        <p:nvSpPr>
+          <p:cNvPr id="19" name="Text 13"/>
+          <p:cNvSpPr/>
+          <p:nvPr/>
+        </p:nvSpPr>
+        <p:spPr>
+          <a:xfrm>
+            <a:off x="8394192" y="5532120"/>
+            <a:ext cx="3291840" cy="274320"/>
           </a:xfrm>
           <a:prstGeom prst="rect">
             <a:avLst/>
@@ -17778,7 +17769,7 @@
                 <a:ea typeface="Calibri" pitchFamily="34" charset="-122"/>
                 <a:cs typeface="Calibri" pitchFamily="34" charset="-120"/>
               </a:rPr>
-              <a:t>💸 Cost</a:t>
+              <a:t>Cost</a:t>
             </a:r>
             <a:endParaRPr lang="en-US" sz="1400" dirty="0"/>
           </a:p>
@@ -17786,14 +17777,14 @@
       </p:sp>
       <p:sp>
         <p:nvSpPr>
-          <p:cNvPr id="16" name="Text 14"/>
-          <p:cNvSpPr/>
-          <p:nvPr/>
-        </p:nvSpPr>
-        <p:spPr>
-          <a:xfrm>
-            <a:off x="8046720" y="5806440"/>
-            <a:ext cx="3657600" cy="274320"/>
+          <p:cNvPr id="20" name="Text 14"/>
+          <p:cNvSpPr/>
+          <p:nvPr/>
+        </p:nvSpPr>
+        <p:spPr>
+          <a:xfrm>
+            <a:off x="8394192" y="5806440"/>
+            <a:ext cx="3291840" cy="274320"/>
           </a:xfrm>
           <a:prstGeom prst="rect">
             <a:avLst/>
@@ -17823,108 +17814,96 @@
           </a:p>
         </p:txBody>
       </p:sp>
-      <p:sp>
-        <p:nvSpPr>
-          <p:cNvPr id="17" name="Shape 15"/>
-          <p:cNvSpPr/>
-          <p:nvPr/>
-        </p:nvSpPr>
+      <p:pic>
+        <p:nvPicPr>
+          <p:cNvPr id="21" name="Image 4" descr="preencoded.png">    </p:cNvPr>
+          <p:cNvPicPr>
+            <a:picLocks noChangeAspect="1"/>
+          </p:cNvPicPr>
+          <p:nvPr/>
+        </p:nvPicPr>
+        <p:blipFill>
+          <a:blip r:embed="rId9">
+            <a:extLst>
+              <a:ext uri="{96DAC541-7B7A-43D3-8B79-37D633B846F1}">
+                <asvg:svgBlip xmlns:asvg="http://schemas.microsoft.com/office/drawing/2016/SVG/main" r:embed="rId10"/>
+              </a:ext>
+            </a:extLst>
+          </a:blip>
+          <a:stretch>
+            <a:fillRect/>
+          </a:stretch>
+        </p:blipFill>
         <p:spPr>
           <a:xfrm>
             <a:off x="10180015" y="502920"/>
-            <a:ext cx="292608" cy="292608"/>
-          </a:xfrm>
-          <a:prstGeom prst="roundRect">
-            <a:avLst>
-              <a:gd name="adj" fmla="val 15625"/>
-            </a:avLst>
-          </a:prstGeom>
-          <a:ln w="19050">
-            <a:solidFill>
-              <a:srgbClr val="6366F1"/>
-            </a:solidFill>
-            <a:prstDash val="solid"/>
-          </a:ln>
-        </p:spPr>
-      </p:sp>
-      <p:sp>
-        <p:nvSpPr>
-          <p:cNvPr id="18" name="Text 16"/>
-          <p:cNvSpPr/>
-          <p:nvPr/>
-        </p:nvSpPr>
-        <p:spPr>
-          <a:xfrm>
-            <a:off x="10472623" y="457200"/>
-            <a:ext cx="411480" cy="384048"/>
-          </a:xfrm>
-          <a:prstGeom prst="rect">
-            <a:avLst/>
-          </a:prstGeom>
-          <a:noFill/>
-          <a:ln/>
-        </p:spPr>
-        <p:txBody>
-          <a:bodyPr wrap="square" rtlCol="0" anchor="ctr"/>
-          <a:lstStyle/>
-          <a:p>
-            <a:pPr algn="ctr" indent="0" marL="0">
-              <a:buNone/>
-            </a:pPr>
-            <a:r>
-              <a:rPr lang="en-US" sz="1800" b="1" dirty="0">
-                <a:solidFill>
-                  <a:srgbClr val="6366F1"/>
-                </a:solidFill>
-                <a:latin typeface="Calibri" pitchFamily="34" charset="0"/>
-                <a:ea typeface="Calibri" pitchFamily="34" charset="-122"/>
-                <a:cs typeface="Calibri" pitchFamily="34" charset="-120"/>
-              </a:rPr>
-              <a:t>↔</a:t>
-            </a:r>
-            <a:endParaRPr lang="en-US" sz="1800" dirty="0"/>
-          </a:p>
-        </p:txBody>
-      </p:sp>
-      <p:sp>
-        <p:nvSpPr>
-          <p:cNvPr id="19" name="Text 17"/>
-          <p:cNvSpPr/>
-          <p:nvPr/>
-        </p:nvSpPr>
-        <p:spPr>
-          <a:xfrm>
-            <a:off x="10893247" y="429768"/>
-            <a:ext cx="411480" cy="457200"/>
-          </a:xfrm>
-          <a:prstGeom prst="rect">
-            <a:avLst/>
-          </a:prstGeom>
-          <a:noFill/>
-          <a:ln/>
-        </p:spPr>
-        <p:txBody>
-          <a:bodyPr wrap="square" rtlCol="0" anchor="ctr"/>
-          <a:lstStyle/>
-          <a:p>
-            <a:pPr algn="ctr" indent="0" marL="0">
-              <a:buNone/>
-            </a:pPr>
-            <a:r>
-              <a:rPr lang="en-US" sz="2200" dirty="0">
-                <a:solidFill>
-                  <a:srgbClr val="6366F1"/>
-                </a:solidFill>
-                <a:latin typeface="Calibri" pitchFamily="34" charset="0"/>
-                <a:ea typeface="Calibri" pitchFamily="34" charset="-122"/>
-                <a:cs typeface="Calibri" pitchFamily="34" charset="-120"/>
-              </a:rPr>
-              <a:t>☁</a:t>
-            </a:r>
-            <a:endParaRPr lang="en-US" sz="2200" dirty="0"/>
-          </a:p>
-        </p:txBody>
-      </p:sp>
+            <a:ext cx="329184" cy="329184"/>
+          </a:xfrm>
+          <a:prstGeom prst="rect">
+            <a:avLst/>
+          </a:prstGeom>
+        </p:spPr>
+      </p:pic>
+      <p:pic>
+        <p:nvPicPr>
+          <p:cNvPr id="22" name="Image 5" descr="preencoded.png">    </p:cNvPr>
+          <p:cNvPicPr>
+            <a:picLocks noChangeAspect="1"/>
+          </p:cNvPicPr>
+          <p:nvPr/>
+        </p:nvPicPr>
+        <p:blipFill>
+          <a:blip r:embed="rId11">
+            <a:extLst>
+              <a:ext uri="{96DAC541-7B7A-43D3-8B79-37D633B846F1}">
+                <asvg:svgBlip xmlns:asvg="http://schemas.microsoft.com/office/drawing/2016/SVG/main" r:embed="rId12"/>
+              </a:ext>
+            </a:extLst>
+          </a:blip>
+          <a:stretch>
+            <a:fillRect/>
+          </a:stretch>
+        </p:blipFill>
+        <p:spPr>
+          <a:xfrm>
+            <a:off x="10564063" y="502920"/>
+            <a:ext cx="329184" cy="329184"/>
+          </a:xfrm>
+          <a:prstGeom prst="rect">
+            <a:avLst/>
+          </a:prstGeom>
+        </p:spPr>
+      </p:pic>
+      <p:pic>
+        <p:nvPicPr>
+          <p:cNvPr id="23" name="Image 6" descr="preencoded.png">    </p:cNvPr>
+          <p:cNvPicPr>
+            <a:picLocks noChangeAspect="1"/>
+          </p:cNvPicPr>
+          <p:nvPr/>
+        </p:nvPicPr>
+        <p:blipFill>
+          <a:blip r:embed="rId13">
+            <a:extLst>
+              <a:ext uri="{96DAC541-7B7A-43D3-8B79-37D633B846F1}">
+                <asvg:svgBlip xmlns:asvg="http://schemas.microsoft.com/office/drawing/2016/SVG/main" r:embed="rId14"/>
+              </a:ext>
+            </a:extLst>
+          </a:blip>
+          <a:stretch>
+            <a:fillRect/>
+          </a:stretch>
+        </p:blipFill>
+        <p:spPr>
+          <a:xfrm>
+            <a:off x="10948111" y="502920"/>
+            <a:ext cx="329184" cy="329184"/>
+          </a:xfrm>
+          <a:prstGeom prst="rect">
+            <a:avLst/>
+          </a:prstGeom>
+        </p:spPr>
+      </p:pic>
     </p:spTree>
   </p:cSld>
   <p:clrMapOvr>
@@ -19107,111 +19086,99 @@
           </a:p>
         </p:txBody>
       </p:sp>
-      <p:sp>
-        <p:nvSpPr>
-          <p:cNvPr id="31" name="Shape 29"/>
-          <p:cNvSpPr/>
-          <p:nvPr/>
-        </p:nvSpPr>
+      <p:pic>
+        <p:nvPicPr>
+          <p:cNvPr id="31" name="Image 0" descr="preencoded.png">    </p:cNvPr>
+          <p:cNvPicPr>
+            <a:picLocks noChangeAspect="1"/>
+          </p:cNvPicPr>
+          <p:nvPr/>
+        </p:nvPicPr>
+        <p:blipFill>
+          <a:blip r:embed="rId1">
+            <a:extLst>
+              <a:ext uri="{96DAC541-7B7A-43D3-8B79-37D633B846F1}">
+                <asvg:svgBlip xmlns:asvg="http://schemas.microsoft.com/office/drawing/2016/SVG/main" r:embed="rId2"/>
+              </a:ext>
+            </a:extLst>
+          </a:blip>
+          <a:stretch>
+            <a:fillRect/>
+          </a:stretch>
+        </p:blipFill>
         <p:spPr>
           <a:xfrm>
             <a:off x="10180015" y="502920"/>
-            <a:ext cx="292608" cy="292608"/>
-          </a:xfrm>
-          <a:prstGeom prst="roundRect">
-            <a:avLst>
-              <a:gd name="adj" fmla="val 15625"/>
-            </a:avLst>
-          </a:prstGeom>
-          <a:ln w="19050">
-            <a:solidFill>
-              <a:srgbClr val="6366F1"/>
-            </a:solidFill>
-            <a:prstDash val="solid"/>
-          </a:ln>
-        </p:spPr>
-      </p:sp>
-      <p:sp>
-        <p:nvSpPr>
-          <p:cNvPr id="32" name="Text 30"/>
-          <p:cNvSpPr/>
-          <p:nvPr/>
-        </p:nvSpPr>
-        <p:spPr>
-          <a:xfrm>
-            <a:off x="10472623" y="457200"/>
-            <a:ext cx="411480" cy="384048"/>
-          </a:xfrm>
-          <a:prstGeom prst="rect">
-            <a:avLst/>
-          </a:prstGeom>
-          <a:noFill/>
-          <a:ln/>
-        </p:spPr>
-        <p:txBody>
-          <a:bodyPr wrap="square" rtlCol="0" anchor="ctr"/>
-          <a:lstStyle/>
-          <a:p>
-            <a:pPr algn="ctr" indent="0" marL="0">
-              <a:buNone/>
-            </a:pPr>
-            <a:r>
-              <a:rPr lang="en-US" sz="1800" b="1" dirty="0">
-                <a:solidFill>
-                  <a:srgbClr val="6366F1"/>
-                </a:solidFill>
-                <a:latin typeface="Calibri" pitchFamily="34" charset="0"/>
-                <a:ea typeface="Calibri" pitchFamily="34" charset="-122"/>
-                <a:cs typeface="Calibri" pitchFamily="34" charset="-120"/>
-              </a:rPr>
-              <a:t>↔</a:t>
-            </a:r>
-            <a:endParaRPr lang="en-US" sz="1800" dirty="0"/>
-          </a:p>
-        </p:txBody>
-      </p:sp>
-      <p:sp>
-        <p:nvSpPr>
-          <p:cNvPr id="33" name="Text 31"/>
-          <p:cNvSpPr/>
-          <p:nvPr/>
-        </p:nvSpPr>
-        <p:spPr>
-          <a:xfrm>
-            <a:off x="10893247" y="429768"/>
-            <a:ext cx="411480" cy="457200"/>
-          </a:xfrm>
-          <a:prstGeom prst="rect">
-            <a:avLst/>
-          </a:prstGeom>
-          <a:noFill/>
-          <a:ln/>
-        </p:spPr>
-        <p:txBody>
-          <a:bodyPr wrap="square" rtlCol="0" anchor="ctr"/>
-          <a:lstStyle/>
-          <a:p>
-            <a:pPr algn="ctr" indent="0" marL="0">
-              <a:buNone/>
-            </a:pPr>
-            <a:r>
-              <a:rPr lang="en-US" sz="2200" dirty="0">
-                <a:solidFill>
-                  <a:srgbClr val="6366F1"/>
-                </a:solidFill>
-                <a:latin typeface="Calibri" pitchFamily="34" charset="0"/>
-                <a:ea typeface="Calibri" pitchFamily="34" charset="-122"/>
-                <a:cs typeface="Calibri" pitchFamily="34" charset="-120"/>
-              </a:rPr>
-              <a:t>☁</a:t>
-            </a:r>
-            <a:endParaRPr lang="en-US" sz="2200" dirty="0"/>
-          </a:p>
-        </p:txBody>
-      </p:sp>
-      <p:sp>
-        <p:nvSpPr>
-          <p:cNvPr id="34" name="Text 32"/>
+            <a:ext cx="329184" cy="329184"/>
+          </a:xfrm>
+          <a:prstGeom prst="rect">
+            <a:avLst/>
+          </a:prstGeom>
+        </p:spPr>
+      </p:pic>
+      <p:pic>
+        <p:nvPicPr>
+          <p:cNvPr id="32" name="Image 1" descr="preencoded.png">    </p:cNvPr>
+          <p:cNvPicPr>
+            <a:picLocks noChangeAspect="1"/>
+          </p:cNvPicPr>
+          <p:nvPr/>
+        </p:nvPicPr>
+        <p:blipFill>
+          <a:blip r:embed="rId3">
+            <a:extLst>
+              <a:ext uri="{96DAC541-7B7A-43D3-8B79-37D633B846F1}">
+                <asvg:svgBlip xmlns:asvg="http://schemas.microsoft.com/office/drawing/2016/SVG/main" r:embed="rId4"/>
+              </a:ext>
+            </a:extLst>
+          </a:blip>
+          <a:stretch>
+            <a:fillRect/>
+          </a:stretch>
+        </p:blipFill>
+        <p:spPr>
+          <a:xfrm>
+            <a:off x="10564063" y="502920"/>
+            <a:ext cx="329184" cy="329184"/>
+          </a:xfrm>
+          <a:prstGeom prst="rect">
+            <a:avLst/>
+          </a:prstGeom>
+        </p:spPr>
+      </p:pic>
+      <p:pic>
+        <p:nvPicPr>
+          <p:cNvPr id="33" name="Image 2" descr="preencoded.png">    </p:cNvPr>
+          <p:cNvPicPr>
+            <a:picLocks noChangeAspect="1"/>
+          </p:cNvPicPr>
+          <p:nvPr/>
+        </p:nvPicPr>
+        <p:blipFill>
+          <a:blip r:embed="rId5">
+            <a:extLst>
+              <a:ext uri="{96DAC541-7B7A-43D3-8B79-37D633B846F1}">
+                <asvg:svgBlip xmlns:asvg="http://schemas.microsoft.com/office/drawing/2016/SVG/main" r:embed="rId6"/>
+              </a:ext>
+            </a:extLst>
+          </a:blip>
+          <a:stretch>
+            <a:fillRect/>
+          </a:stretch>
+        </p:blipFill>
+        <p:spPr>
+          <a:xfrm>
+            <a:off x="10948111" y="502920"/>
+            <a:ext cx="329184" cy="329184"/>
+          </a:xfrm>
+          <a:prstGeom prst="rect">
+            <a:avLst/>
+          </a:prstGeom>
+        </p:spPr>
+      </p:pic>
+      <p:sp>
+        <p:nvSpPr>
+          <p:cNvPr id="34" name="Text 29"/>
           <p:cNvSpPr/>
           <p:nvPr/>
         </p:nvSpPr>
@@ -19292,7 +19259,7 @@
       </p:sp>
       <p:sp>
         <p:nvSpPr>
-          <p:cNvPr id="35" name="Text 33"/>
+          <p:cNvPr id="35" name="Text 30"/>
           <p:cNvSpPr/>
           <p:nvPr/>
         </p:nvSpPr>
@@ -20323,7 +20290,7 @@
                 <a:ea typeface="Consolas" pitchFamily="34" charset="-122"/>
                 <a:cs typeface="Consolas" pitchFamily="34" charset="-120"/>
               </a:rPr>
-              <a:t>// ✈️  Works in airplane mode</a:t>
+              <a:t>// Works in airplane mode</a:t>
             </a:r>
             <a:pPr indent="0" marL="0">
               <a:buNone/>
@@ -20343,7 +20310,7 @@
                 <a:ea typeface="Consolas" pitchFamily="34" charset="-122"/>
                 <a:cs typeface="Consolas" pitchFamily="34" charset="-120"/>
               </a:rPr>
-              <a:t>// 🆓  No API key, no per-token cost</a:t>
+              <a:t>// No API key, no per-token cost</a:t>
             </a:r>
             <a:pPr indent="0" marL="0">
               <a:buNone/>
@@ -20363,7 +20330,7 @@
                 <a:ea typeface="Consolas" pitchFamily="34" charset="-122"/>
                 <a:cs typeface="Consolas" pitchFamily="34" charset="-120"/>
               </a:rPr>
-              <a:t>// 🔒  Data never leaves the device</a:t>
+              <a:t>// Data never leaves the device</a:t>
             </a:r>
             <a:endParaRPr lang="en-US" sz="1200" dirty="0"/>
           </a:p>
@@ -20408,16 +20375,46 @@
           </a:p>
         </p:txBody>
       </p:sp>
-      <p:sp>
-        <p:nvSpPr>
-          <p:cNvPr id="9" name="Text 7"/>
-          <p:cNvSpPr/>
-          <p:nvPr/>
-        </p:nvSpPr>
-        <p:spPr>
-          <a:xfrm>
-            <a:off x="8046720" y="3611880"/>
-            <a:ext cx="3657600" cy="274320"/>
+      <p:pic>
+        <p:nvPicPr>
+          <p:cNvPr id="9" name="Image 0" descr="preencoded.png">    </p:cNvPr>
+          <p:cNvPicPr>
+            <a:picLocks noChangeAspect="1"/>
+          </p:cNvPicPr>
+          <p:nvPr/>
+        </p:nvPicPr>
+        <p:blipFill>
+          <a:blip r:embed="rId1">
+            <a:extLst>
+              <a:ext uri="{96DAC541-7B7A-43D3-8B79-37D633B846F1}">
+                <asvg:svgBlip xmlns:asvg="http://schemas.microsoft.com/office/drawing/2016/SVG/main" r:embed="rId2"/>
+              </a:ext>
+            </a:extLst>
+          </a:blip>
+          <a:stretch>
+            <a:fillRect/>
+          </a:stretch>
+        </p:blipFill>
+        <p:spPr>
+          <a:xfrm>
+            <a:off x="8046720" y="3648456"/>
+            <a:ext cx="256032" cy="256032"/>
+          </a:xfrm>
+          <a:prstGeom prst="rect">
+            <a:avLst/>
+          </a:prstGeom>
+        </p:spPr>
+      </p:pic>
+      <p:sp>
+        <p:nvSpPr>
+          <p:cNvPr id="10" name="Text 7"/>
+          <p:cNvSpPr/>
+          <p:nvPr/>
+        </p:nvSpPr>
+        <p:spPr>
+          <a:xfrm>
+            <a:off x="8394192" y="3611880"/>
+            <a:ext cx="3291840" cy="274320"/>
           </a:xfrm>
           <a:prstGeom prst="rect">
             <a:avLst/>
@@ -20441,7 +20438,7 @@
                 <a:ea typeface="Calibri" pitchFamily="34" charset="-122"/>
                 <a:cs typeface="Calibri" pitchFamily="34" charset="-120"/>
               </a:rPr>
-              <a:t>⚡ Instant first token</a:t>
+              <a:t>Instant first token</a:t>
             </a:r>
             <a:endParaRPr lang="en-US" sz="1400" dirty="0"/>
           </a:p>
@@ -20449,14 +20446,14 @@
       </p:sp>
       <p:sp>
         <p:nvSpPr>
-          <p:cNvPr id="10" name="Text 8"/>
-          <p:cNvSpPr/>
-          <p:nvPr/>
-        </p:nvSpPr>
-        <p:spPr>
-          <a:xfrm>
-            <a:off x="8046720" y="3886200"/>
-            <a:ext cx="3657600" cy="274320"/>
+          <p:cNvPr id="11" name="Text 8"/>
+          <p:cNvSpPr/>
+          <p:nvPr/>
+        </p:nvSpPr>
+        <p:spPr>
+          <a:xfrm>
+            <a:off x="8394192" y="3886200"/>
+            <a:ext cx="3291840" cy="274320"/>
           </a:xfrm>
           <a:prstGeom prst="rect">
             <a:avLst/>
@@ -20486,16 +20483,46 @@
           </a:p>
         </p:txBody>
       </p:sp>
-      <p:sp>
-        <p:nvSpPr>
-          <p:cNvPr id="11" name="Text 9"/>
-          <p:cNvSpPr/>
-          <p:nvPr/>
-        </p:nvSpPr>
-        <p:spPr>
-          <a:xfrm>
-            <a:off x="8046720" y="4251960"/>
-            <a:ext cx="3657600" cy="274320"/>
+      <p:pic>
+        <p:nvPicPr>
+          <p:cNvPr id="12" name="Image 1" descr="preencoded.png">    </p:cNvPr>
+          <p:cNvPicPr>
+            <a:picLocks noChangeAspect="1"/>
+          </p:cNvPicPr>
+          <p:nvPr/>
+        </p:nvPicPr>
+        <p:blipFill>
+          <a:blip r:embed="rId3">
+            <a:extLst>
+              <a:ext uri="{96DAC541-7B7A-43D3-8B79-37D633B846F1}">
+                <asvg:svgBlip xmlns:asvg="http://schemas.microsoft.com/office/drawing/2016/SVG/main" r:embed="rId4"/>
+              </a:ext>
+            </a:extLst>
+          </a:blip>
+          <a:stretch>
+            <a:fillRect/>
+          </a:stretch>
+        </p:blipFill>
+        <p:spPr>
+          <a:xfrm>
+            <a:off x="8046720" y="4288536"/>
+            <a:ext cx="256032" cy="256032"/>
+          </a:xfrm>
+          <a:prstGeom prst="rect">
+            <a:avLst/>
+          </a:prstGeom>
+        </p:spPr>
+      </p:pic>
+      <p:sp>
+        <p:nvSpPr>
+          <p:cNvPr id="13" name="Text 9"/>
+          <p:cNvSpPr/>
+          <p:nvPr/>
+        </p:nvSpPr>
+        <p:spPr>
+          <a:xfrm>
+            <a:off x="8394192" y="4251960"/>
+            <a:ext cx="3291840" cy="274320"/>
           </a:xfrm>
           <a:prstGeom prst="rect">
             <a:avLst/>
@@ -20519,7 +20546,7 @@
                 <a:ea typeface="Calibri" pitchFamily="34" charset="-122"/>
                 <a:cs typeface="Calibri" pitchFamily="34" charset="-120"/>
               </a:rPr>
-              <a:t>🔒 Airplane mode</a:t>
+              <a:t>Airplane mode</a:t>
             </a:r>
             <a:endParaRPr lang="en-US" sz="1400" dirty="0"/>
           </a:p>
@@ -20527,14 +20554,14 @@
       </p:sp>
       <p:sp>
         <p:nvSpPr>
-          <p:cNvPr id="12" name="Text 10"/>
-          <p:cNvSpPr/>
-          <p:nvPr/>
-        </p:nvSpPr>
-        <p:spPr>
-          <a:xfrm>
-            <a:off x="8046720" y="4526280"/>
-            <a:ext cx="3657600" cy="274320"/>
+          <p:cNvPr id="14" name="Text 10"/>
+          <p:cNvSpPr/>
+          <p:nvPr/>
+        </p:nvSpPr>
+        <p:spPr>
+          <a:xfrm>
+            <a:off x="8394192" y="4526280"/>
+            <a:ext cx="3291840" cy="274320"/>
           </a:xfrm>
           <a:prstGeom prst="rect">
             <a:avLst/>
@@ -20564,16 +20591,46 @@
           </a:p>
         </p:txBody>
       </p:sp>
-      <p:sp>
-        <p:nvSpPr>
-          <p:cNvPr id="13" name="Text 11"/>
-          <p:cNvSpPr/>
-          <p:nvPr/>
-        </p:nvSpPr>
-        <p:spPr>
-          <a:xfrm>
-            <a:off x="8046720" y="4892040"/>
-            <a:ext cx="3657600" cy="274320"/>
+      <p:pic>
+        <p:nvPicPr>
+          <p:cNvPr id="15" name="Image 2" descr="preencoded.png">    </p:cNvPr>
+          <p:cNvPicPr>
+            <a:picLocks noChangeAspect="1"/>
+          </p:cNvPicPr>
+          <p:nvPr/>
+        </p:nvPicPr>
+        <p:blipFill>
+          <a:blip r:embed="rId5">
+            <a:extLst>
+              <a:ext uri="{96DAC541-7B7A-43D3-8B79-37D633B846F1}">
+                <asvg:svgBlip xmlns:asvg="http://schemas.microsoft.com/office/drawing/2016/SVG/main" r:embed="rId6"/>
+              </a:ext>
+            </a:extLst>
+          </a:blip>
+          <a:stretch>
+            <a:fillRect/>
+          </a:stretch>
+        </p:blipFill>
+        <p:spPr>
+          <a:xfrm>
+            <a:off x="8046720" y="4928616"/>
+            <a:ext cx="256032" cy="256032"/>
+          </a:xfrm>
+          <a:prstGeom prst="rect">
+            <a:avLst/>
+          </a:prstGeom>
+        </p:spPr>
+      </p:pic>
+      <p:sp>
+        <p:nvSpPr>
+          <p:cNvPr id="16" name="Text 11"/>
+          <p:cNvSpPr/>
+          <p:nvPr/>
+        </p:nvSpPr>
+        <p:spPr>
+          <a:xfrm>
+            <a:off x="8394192" y="4892040"/>
+            <a:ext cx="3291840" cy="274320"/>
           </a:xfrm>
           <a:prstGeom prst="rect">
             <a:avLst/>
@@ -20597,7 +20654,7 @@
                 <a:ea typeface="Calibri" pitchFamily="34" charset="-122"/>
                 <a:cs typeface="Calibri" pitchFamily="34" charset="-120"/>
               </a:rPr>
-              <a:t>📏 Tiny but capable</a:t>
+              <a:t>Tiny but capable</a:t>
             </a:r>
             <a:endParaRPr lang="en-US" sz="1400" dirty="0"/>
           </a:p>
@@ -20605,14 +20662,14 @@
       </p:sp>
       <p:sp>
         <p:nvSpPr>
-          <p:cNvPr id="14" name="Text 12"/>
-          <p:cNvSpPr/>
-          <p:nvPr/>
-        </p:nvSpPr>
-        <p:spPr>
-          <a:xfrm>
-            <a:off x="8046720" y="5166360"/>
-            <a:ext cx="3657600" cy="274320"/>
+          <p:cNvPr id="17" name="Text 12"/>
+          <p:cNvSpPr/>
+          <p:nvPr/>
+        </p:nvSpPr>
+        <p:spPr>
+          <a:xfrm>
+            <a:off x="8394192" y="5166360"/>
+            <a:ext cx="3291840" cy="274320"/>
           </a:xfrm>
           <a:prstGeom prst="rect">
             <a:avLst/>
@@ -20642,16 +20699,46 @@
           </a:p>
         </p:txBody>
       </p:sp>
-      <p:sp>
-        <p:nvSpPr>
-          <p:cNvPr id="15" name="Text 13"/>
-          <p:cNvSpPr/>
-          <p:nvPr/>
-        </p:nvSpPr>
-        <p:spPr>
-          <a:xfrm>
-            <a:off x="8046720" y="5532120"/>
-            <a:ext cx="3657600" cy="274320"/>
+      <p:pic>
+        <p:nvPicPr>
+          <p:cNvPr id="18" name="Image 3" descr="preencoded.png">    </p:cNvPr>
+          <p:cNvPicPr>
+            <a:picLocks noChangeAspect="1"/>
+          </p:cNvPicPr>
+          <p:nvPr/>
+        </p:nvPicPr>
+        <p:blipFill>
+          <a:blip r:embed="rId7">
+            <a:extLst>
+              <a:ext uri="{96DAC541-7B7A-43D3-8B79-37D633B846F1}">
+                <asvg:svgBlip xmlns:asvg="http://schemas.microsoft.com/office/drawing/2016/SVG/main" r:embed="rId8"/>
+              </a:ext>
+            </a:extLst>
+          </a:blip>
+          <a:stretch>
+            <a:fillRect/>
+          </a:stretch>
+        </p:blipFill>
+        <p:spPr>
+          <a:xfrm>
+            <a:off x="8046720" y="5568696"/>
+            <a:ext cx="256032" cy="256032"/>
+          </a:xfrm>
+          <a:prstGeom prst="rect">
+            <a:avLst/>
+          </a:prstGeom>
+        </p:spPr>
+      </p:pic>
+      <p:sp>
+        <p:nvSpPr>
+          <p:cNvPr id="19" name="Text 13"/>
+          <p:cNvSpPr/>
+          <p:nvPr/>
+        </p:nvSpPr>
+        <p:spPr>
+          <a:xfrm>
+            <a:off x="8394192" y="5532120"/>
+            <a:ext cx="3291840" cy="274320"/>
           </a:xfrm>
           <a:prstGeom prst="rect">
             <a:avLst/>
@@ -20675,7 +20762,7 @@
                 <a:ea typeface="Calibri" pitchFamily="34" charset="-122"/>
                 <a:cs typeface="Calibri" pitchFamily="34" charset="-120"/>
               </a:rPr>
-              <a:t>⚠ The limit</a:t>
+              <a:t>The limit</a:t>
             </a:r>
             <a:endParaRPr lang="en-US" sz="1400" dirty="0"/>
           </a:p>
@@ -20683,14 +20770,14 @@
       </p:sp>
       <p:sp>
         <p:nvSpPr>
-          <p:cNvPr id="16" name="Text 14"/>
-          <p:cNvSpPr/>
-          <p:nvPr/>
-        </p:nvSpPr>
-        <p:spPr>
-          <a:xfrm>
-            <a:off x="8046720" y="5806440"/>
-            <a:ext cx="3657600" cy="274320"/>
+          <p:cNvPr id="20" name="Text 14"/>
+          <p:cNvSpPr/>
+          <p:nvPr/>
+        </p:nvSpPr>
+        <p:spPr>
+          <a:xfrm>
+            <a:off x="8394192" y="5806440"/>
+            <a:ext cx="3291840" cy="274320"/>
           </a:xfrm>
           <a:prstGeom prst="rect">
             <a:avLst/>
@@ -20720,108 +20807,96 @@
           </a:p>
         </p:txBody>
       </p:sp>
-      <p:sp>
-        <p:nvSpPr>
-          <p:cNvPr id="17" name="Shape 15"/>
-          <p:cNvSpPr/>
-          <p:nvPr/>
-        </p:nvSpPr>
+      <p:pic>
+        <p:nvPicPr>
+          <p:cNvPr id="21" name="Image 4" descr="preencoded.png">    </p:cNvPr>
+          <p:cNvPicPr>
+            <a:picLocks noChangeAspect="1"/>
+          </p:cNvPicPr>
+          <p:nvPr/>
+        </p:nvPicPr>
+        <p:blipFill>
+          <a:blip r:embed="rId9">
+            <a:extLst>
+              <a:ext uri="{96DAC541-7B7A-43D3-8B79-37D633B846F1}">
+                <asvg:svgBlip xmlns:asvg="http://schemas.microsoft.com/office/drawing/2016/SVG/main" r:embed="rId10"/>
+              </a:ext>
+            </a:extLst>
+          </a:blip>
+          <a:stretch>
+            <a:fillRect/>
+          </a:stretch>
+        </p:blipFill>
         <p:spPr>
           <a:xfrm>
             <a:off x="10180015" y="502920"/>
-            <a:ext cx="292608" cy="292608"/>
-          </a:xfrm>
-          <a:prstGeom prst="roundRect">
-            <a:avLst>
-              <a:gd name="adj" fmla="val 15625"/>
-            </a:avLst>
-          </a:prstGeom>
-          <a:ln w="19050">
-            <a:solidFill>
-              <a:srgbClr val="FB7185"/>
-            </a:solidFill>
-            <a:prstDash val="solid"/>
-          </a:ln>
-        </p:spPr>
-      </p:sp>
-      <p:sp>
-        <p:nvSpPr>
-          <p:cNvPr id="18" name="Text 16"/>
-          <p:cNvSpPr/>
-          <p:nvPr/>
-        </p:nvSpPr>
-        <p:spPr>
-          <a:xfrm>
-            <a:off x="10472623" y="457200"/>
-            <a:ext cx="411480" cy="384048"/>
-          </a:xfrm>
-          <a:prstGeom prst="rect">
-            <a:avLst/>
-          </a:prstGeom>
-          <a:noFill/>
-          <a:ln/>
-        </p:spPr>
-        <p:txBody>
-          <a:bodyPr wrap="square" rtlCol="0" anchor="ctr"/>
-          <a:lstStyle/>
-          <a:p>
-            <a:pPr algn="ctr" indent="0" marL="0">
-              <a:buNone/>
-            </a:pPr>
-            <a:r>
-              <a:rPr lang="en-US" sz="1800" b="1" dirty="0">
-                <a:solidFill>
-                  <a:srgbClr val="FB7185"/>
-                </a:solidFill>
-                <a:latin typeface="Calibri" pitchFamily="34" charset="0"/>
-                <a:ea typeface="Calibri" pitchFamily="34" charset="-122"/>
-                <a:cs typeface="Calibri" pitchFamily="34" charset="-120"/>
-              </a:rPr>
-              <a:t>↔</a:t>
-            </a:r>
-            <a:endParaRPr lang="en-US" sz="1800" dirty="0"/>
-          </a:p>
-        </p:txBody>
-      </p:sp>
-      <p:sp>
-        <p:nvSpPr>
-          <p:cNvPr id="19" name="Text 17"/>
-          <p:cNvSpPr/>
-          <p:nvPr/>
-        </p:nvSpPr>
-        <p:spPr>
-          <a:xfrm>
-            <a:off x="10893247" y="429768"/>
-            <a:ext cx="411480" cy="457200"/>
-          </a:xfrm>
-          <a:prstGeom prst="rect">
-            <a:avLst/>
-          </a:prstGeom>
-          <a:noFill/>
-          <a:ln/>
-        </p:spPr>
-        <p:txBody>
-          <a:bodyPr wrap="square" rtlCol="0" anchor="ctr"/>
-          <a:lstStyle/>
-          <a:p>
-            <a:pPr algn="ctr" indent="0" marL="0">
-              <a:buNone/>
-            </a:pPr>
-            <a:r>
-              <a:rPr lang="en-US" sz="2200" dirty="0">
-                <a:solidFill>
-                  <a:srgbClr val="FB7185"/>
-                </a:solidFill>
-                <a:latin typeface="Calibri" pitchFamily="34" charset="0"/>
-                <a:ea typeface="Calibri" pitchFamily="34" charset="-122"/>
-                <a:cs typeface="Calibri" pitchFamily="34" charset="-120"/>
-              </a:rPr>
-              <a:t>☁</a:t>
-            </a:r>
-            <a:endParaRPr lang="en-US" sz="2200" dirty="0"/>
-          </a:p>
-        </p:txBody>
-      </p:sp>
+            <a:ext cx="329184" cy="329184"/>
+          </a:xfrm>
+          <a:prstGeom prst="rect">
+            <a:avLst/>
+          </a:prstGeom>
+        </p:spPr>
+      </p:pic>
+      <p:pic>
+        <p:nvPicPr>
+          <p:cNvPr id="22" name="Image 5" descr="preencoded.png">    </p:cNvPr>
+          <p:cNvPicPr>
+            <a:picLocks noChangeAspect="1"/>
+          </p:cNvPicPr>
+          <p:nvPr/>
+        </p:nvPicPr>
+        <p:blipFill>
+          <a:blip r:embed="rId11">
+            <a:extLst>
+              <a:ext uri="{96DAC541-7B7A-43D3-8B79-37D633B846F1}">
+                <asvg:svgBlip xmlns:asvg="http://schemas.microsoft.com/office/drawing/2016/SVG/main" r:embed="rId12"/>
+              </a:ext>
+            </a:extLst>
+          </a:blip>
+          <a:stretch>
+            <a:fillRect/>
+          </a:stretch>
+        </p:blipFill>
+        <p:spPr>
+          <a:xfrm>
+            <a:off x="10564063" y="502920"/>
+            <a:ext cx="329184" cy="329184"/>
+          </a:xfrm>
+          <a:prstGeom prst="rect">
+            <a:avLst/>
+          </a:prstGeom>
+        </p:spPr>
+      </p:pic>
+      <p:pic>
+        <p:nvPicPr>
+          <p:cNvPr id="23" name="Image 6" descr="preencoded.png">    </p:cNvPr>
+          <p:cNvPicPr>
+            <a:picLocks noChangeAspect="1"/>
+          </p:cNvPicPr>
+          <p:nvPr/>
+        </p:nvPicPr>
+        <p:blipFill>
+          <a:blip r:embed="rId13">
+            <a:extLst>
+              <a:ext uri="{96DAC541-7B7A-43D3-8B79-37D633B846F1}">
+                <asvg:svgBlip xmlns:asvg="http://schemas.microsoft.com/office/drawing/2016/SVG/main" r:embed="rId14"/>
+              </a:ext>
+            </a:extLst>
+          </a:blip>
+          <a:stretch>
+            <a:fillRect/>
+          </a:stretch>
+        </p:blipFill>
+        <p:spPr>
+          <a:xfrm>
+            <a:off x="10948111" y="502920"/>
+            <a:ext cx="329184" cy="329184"/>
+          </a:xfrm>
+          <a:prstGeom prst="rect">
+            <a:avLst/>
+          </a:prstGeom>
+        </p:spPr>
+      </p:pic>
     </p:spTree>
   </p:cSld>
   <p:clrMapOvr>
@@ -21601,111 +21676,99 @@
           </a:p>
         </p:txBody>
       </p:sp>
-      <p:sp>
-        <p:nvSpPr>
-          <p:cNvPr id="23" name="Shape 21"/>
-          <p:cNvSpPr/>
-          <p:nvPr/>
-        </p:nvSpPr>
+      <p:pic>
+        <p:nvPicPr>
+          <p:cNvPr id="23" name="Image 0" descr="preencoded.png">    </p:cNvPr>
+          <p:cNvPicPr>
+            <a:picLocks noChangeAspect="1"/>
+          </p:cNvPicPr>
+          <p:nvPr/>
+        </p:nvPicPr>
+        <p:blipFill>
+          <a:blip r:embed="rId1">
+            <a:extLst>
+              <a:ext uri="{96DAC541-7B7A-43D3-8B79-37D633B846F1}">
+                <asvg:svgBlip xmlns:asvg="http://schemas.microsoft.com/office/drawing/2016/SVG/main" r:embed="rId2"/>
+              </a:ext>
+            </a:extLst>
+          </a:blip>
+          <a:stretch>
+            <a:fillRect/>
+          </a:stretch>
+        </p:blipFill>
         <p:spPr>
           <a:xfrm>
             <a:off x="10180015" y="502920"/>
-            <a:ext cx="292608" cy="292608"/>
-          </a:xfrm>
-          <a:prstGeom prst="roundRect">
-            <a:avLst>
-              <a:gd name="adj" fmla="val 15625"/>
-            </a:avLst>
-          </a:prstGeom>
-          <a:ln w="19050">
-            <a:solidFill>
-              <a:srgbClr val="6366F1"/>
-            </a:solidFill>
-            <a:prstDash val="solid"/>
-          </a:ln>
-        </p:spPr>
-      </p:sp>
-      <p:sp>
-        <p:nvSpPr>
-          <p:cNvPr id="24" name="Text 22"/>
-          <p:cNvSpPr/>
-          <p:nvPr/>
-        </p:nvSpPr>
-        <p:spPr>
-          <a:xfrm>
-            <a:off x="10472623" y="457200"/>
-            <a:ext cx="411480" cy="384048"/>
-          </a:xfrm>
-          <a:prstGeom prst="rect">
-            <a:avLst/>
-          </a:prstGeom>
-          <a:noFill/>
-          <a:ln/>
-        </p:spPr>
-        <p:txBody>
-          <a:bodyPr wrap="square" rtlCol="0" anchor="ctr"/>
-          <a:lstStyle/>
-          <a:p>
-            <a:pPr algn="ctr" indent="0" marL="0">
-              <a:buNone/>
-            </a:pPr>
-            <a:r>
-              <a:rPr lang="en-US" sz="1800" b="1" dirty="0">
-                <a:solidFill>
-                  <a:srgbClr val="6366F1"/>
-                </a:solidFill>
-                <a:latin typeface="Calibri" pitchFamily="34" charset="0"/>
-                <a:ea typeface="Calibri" pitchFamily="34" charset="-122"/>
-                <a:cs typeface="Calibri" pitchFamily="34" charset="-120"/>
-              </a:rPr>
-              <a:t>↔</a:t>
-            </a:r>
-            <a:endParaRPr lang="en-US" sz="1800" dirty="0"/>
-          </a:p>
-        </p:txBody>
-      </p:sp>
-      <p:sp>
-        <p:nvSpPr>
-          <p:cNvPr id="25" name="Text 23"/>
-          <p:cNvSpPr/>
-          <p:nvPr/>
-        </p:nvSpPr>
-        <p:spPr>
-          <a:xfrm>
-            <a:off x="10893247" y="429768"/>
-            <a:ext cx="411480" cy="457200"/>
-          </a:xfrm>
-          <a:prstGeom prst="rect">
-            <a:avLst/>
-          </a:prstGeom>
-          <a:noFill/>
-          <a:ln/>
-        </p:spPr>
-        <p:txBody>
-          <a:bodyPr wrap="square" rtlCol="0" anchor="ctr"/>
-          <a:lstStyle/>
-          <a:p>
-            <a:pPr algn="ctr" indent="0" marL="0">
-              <a:buNone/>
-            </a:pPr>
-            <a:r>
-              <a:rPr lang="en-US" sz="2200" dirty="0">
-                <a:solidFill>
-                  <a:srgbClr val="6366F1"/>
-                </a:solidFill>
-                <a:latin typeface="Calibri" pitchFamily="34" charset="0"/>
-                <a:ea typeface="Calibri" pitchFamily="34" charset="-122"/>
-                <a:cs typeface="Calibri" pitchFamily="34" charset="-120"/>
-              </a:rPr>
-              <a:t>☁</a:t>
-            </a:r>
-            <a:endParaRPr lang="en-US" sz="2200" dirty="0"/>
-          </a:p>
-        </p:txBody>
-      </p:sp>
-      <p:sp>
-        <p:nvSpPr>
-          <p:cNvPr id="26" name="Text 24"/>
+            <a:ext cx="329184" cy="329184"/>
+          </a:xfrm>
+          <a:prstGeom prst="rect">
+            <a:avLst/>
+          </a:prstGeom>
+        </p:spPr>
+      </p:pic>
+      <p:pic>
+        <p:nvPicPr>
+          <p:cNvPr id="24" name="Image 1" descr="preencoded.png">    </p:cNvPr>
+          <p:cNvPicPr>
+            <a:picLocks noChangeAspect="1"/>
+          </p:cNvPicPr>
+          <p:nvPr/>
+        </p:nvPicPr>
+        <p:blipFill>
+          <a:blip r:embed="rId3">
+            <a:extLst>
+              <a:ext uri="{96DAC541-7B7A-43D3-8B79-37D633B846F1}">
+                <asvg:svgBlip xmlns:asvg="http://schemas.microsoft.com/office/drawing/2016/SVG/main" r:embed="rId4"/>
+              </a:ext>
+            </a:extLst>
+          </a:blip>
+          <a:stretch>
+            <a:fillRect/>
+          </a:stretch>
+        </p:blipFill>
+        <p:spPr>
+          <a:xfrm>
+            <a:off x="10564063" y="502920"/>
+            <a:ext cx="329184" cy="329184"/>
+          </a:xfrm>
+          <a:prstGeom prst="rect">
+            <a:avLst/>
+          </a:prstGeom>
+        </p:spPr>
+      </p:pic>
+      <p:pic>
+        <p:nvPicPr>
+          <p:cNvPr id="25" name="Image 2" descr="preencoded.png">    </p:cNvPr>
+          <p:cNvPicPr>
+            <a:picLocks noChangeAspect="1"/>
+          </p:cNvPicPr>
+          <p:nvPr/>
+        </p:nvPicPr>
+        <p:blipFill>
+          <a:blip r:embed="rId5">
+            <a:extLst>
+              <a:ext uri="{96DAC541-7B7A-43D3-8B79-37D633B846F1}">
+                <asvg:svgBlip xmlns:asvg="http://schemas.microsoft.com/office/drawing/2016/SVG/main" r:embed="rId6"/>
+              </a:ext>
+            </a:extLst>
+          </a:blip>
+          <a:stretch>
+            <a:fillRect/>
+          </a:stretch>
+        </p:blipFill>
+        <p:spPr>
+          <a:xfrm>
+            <a:off x="10948111" y="502920"/>
+            <a:ext cx="329184" cy="329184"/>
+          </a:xfrm>
+          <a:prstGeom prst="rect">
+            <a:avLst/>
+          </a:prstGeom>
+        </p:spPr>
+      </p:pic>
+      <p:sp>
+        <p:nvSpPr>
+          <p:cNvPr id="26" name="Text 21"/>
           <p:cNvSpPr/>
           <p:nvPr/>
         </p:nvSpPr>
@@ -21786,7 +21849,7 @@
       </p:sp>
       <p:sp>
         <p:nvSpPr>
-          <p:cNvPr id="27" name="Text 25"/>
+          <p:cNvPr id="27" name="Text 22"/>
           <p:cNvSpPr/>
           <p:nvPr/>
         </p:nvSpPr>
@@ -22980,16 +23043,46 @@
           </a:p>
         </p:txBody>
       </p:sp>
-      <p:sp>
-        <p:nvSpPr>
-          <p:cNvPr id="9" name="Text 7"/>
-          <p:cNvSpPr/>
-          <p:nvPr/>
-        </p:nvSpPr>
-        <p:spPr>
-          <a:xfrm>
-            <a:off x="8046720" y="3611880"/>
-            <a:ext cx="3657600" cy="274320"/>
+      <p:pic>
+        <p:nvPicPr>
+          <p:cNvPr id="9" name="Image 0" descr="preencoded.png">    </p:cNvPr>
+          <p:cNvPicPr>
+            <a:picLocks noChangeAspect="1"/>
+          </p:cNvPicPr>
+          <p:nvPr/>
+        </p:nvPicPr>
+        <p:blipFill>
+          <a:blip r:embed="rId1">
+            <a:extLst>
+              <a:ext uri="{96DAC541-7B7A-43D3-8B79-37D633B846F1}">
+                <asvg:svgBlip xmlns:asvg="http://schemas.microsoft.com/office/drawing/2016/SVG/main" r:embed="rId2"/>
+              </a:ext>
+            </a:extLst>
+          </a:blip>
+          <a:stretch>
+            <a:fillRect/>
+          </a:stretch>
+        </p:blipFill>
+        <p:spPr>
+          <a:xfrm>
+            <a:off x="8046720" y="3648456"/>
+            <a:ext cx="256032" cy="256032"/>
+          </a:xfrm>
+          <a:prstGeom prst="rect">
+            <a:avLst/>
+          </a:prstGeom>
+        </p:spPr>
+      </p:pic>
+      <p:sp>
+        <p:nvSpPr>
+          <p:cNvPr id="10" name="Text 7"/>
+          <p:cNvSpPr/>
+          <p:nvPr/>
+        </p:nvSpPr>
+        <p:spPr>
+          <a:xfrm>
+            <a:off x="8394192" y="3611880"/>
+            <a:ext cx="3291840" cy="274320"/>
           </a:xfrm>
           <a:prstGeom prst="rect">
             <a:avLst/>
@@ -23013,7 +23106,7 @@
                 <a:ea typeface="Calibri" pitchFamily="34" charset="-122"/>
                 <a:cs typeface="Calibri" pitchFamily="34" charset="-120"/>
               </a:rPr>
-              <a:t>🧠 Real reasoning</a:t>
+              <a:t>Real reasoning</a:t>
             </a:r>
             <a:endParaRPr lang="en-US" sz="1400" dirty="0"/>
           </a:p>
@@ -23021,14 +23114,14 @@
       </p:sp>
       <p:sp>
         <p:nvSpPr>
-          <p:cNvPr id="10" name="Text 8"/>
-          <p:cNvSpPr/>
-          <p:nvPr/>
-        </p:nvSpPr>
-        <p:spPr>
-          <a:xfrm>
-            <a:off x="8046720" y="3886200"/>
-            <a:ext cx="3657600" cy="274320"/>
+          <p:cNvPr id="11" name="Text 8"/>
+          <p:cNvSpPr/>
+          <p:nvPr/>
+        </p:nvSpPr>
+        <p:spPr>
+          <a:xfrm>
+            <a:off x="8394192" y="3886200"/>
+            <a:ext cx="3291840" cy="274320"/>
           </a:xfrm>
           <a:prstGeom prst="rect">
             <a:avLst/>
@@ -23058,16 +23151,46 @@
           </a:p>
         </p:txBody>
       </p:sp>
-      <p:sp>
-        <p:nvSpPr>
-          <p:cNvPr id="11" name="Text 9"/>
-          <p:cNvSpPr/>
-          <p:nvPr/>
-        </p:nvSpPr>
-        <p:spPr>
-          <a:xfrm>
-            <a:off x="8046720" y="4251960"/>
-            <a:ext cx="3657600" cy="274320"/>
+      <p:pic>
+        <p:nvPicPr>
+          <p:cNvPr id="12" name="Image 1" descr="preencoded.png">    </p:cNvPr>
+          <p:cNvPicPr>
+            <a:picLocks noChangeAspect="1"/>
+          </p:cNvPicPr>
+          <p:nvPr/>
+        </p:nvPicPr>
+        <p:blipFill>
+          <a:blip r:embed="rId3">
+            <a:extLst>
+              <a:ext uri="{96DAC541-7B7A-43D3-8B79-37D633B846F1}">
+                <asvg:svgBlip xmlns:asvg="http://schemas.microsoft.com/office/drawing/2016/SVG/main" r:embed="rId4"/>
+              </a:ext>
+            </a:extLst>
+          </a:blip>
+          <a:stretch>
+            <a:fillRect/>
+          </a:stretch>
+        </p:blipFill>
+        <p:spPr>
+          <a:xfrm>
+            <a:off x="8046720" y="4288536"/>
+            <a:ext cx="256032" cy="256032"/>
+          </a:xfrm>
+          <a:prstGeom prst="rect">
+            <a:avLst/>
+          </a:prstGeom>
+        </p:spPr>
+      </p:pic>
+      <p:sp>
+        <p:nvSpPr>
+          <p:cNvPr id="13" name="Text 9"/>
+          <p:cNvSpPr/>
+          <p:nvPr/>
+        </p:nvSpPr>
+        <p:spPr>
+          <a:xfrm>
+            <a:off x="8394192" y="4251960"/>
+            <a:ext cx="3291840" cy="274320"/>
           </a:xfrm>
           <a:prstGeom prst="rect">
             <a:avLst/>
@@ -23091,7 +23214,7 @@
                 <a:ea typeface="Calibri" pitchFamily="34" charset="-122"/>
                 <a:cs typeface="Calibri" pitchFamily="34" charset="-120"/>
               </a:rPr>
-              <a:t>🔒 Stays on device</a:t>
+              <a:t>Stays on device</a:t>
             </a:r>
             <a:endParaRPr lang="en-US" sz="1400" dirty="0"/>
           </a:p>
@@ -23099,14 +23222,14 @@
       </p:sp>
       <p:sp>
         <p:nvSpPr>
-          <p:cNvPr id="12" name="Text 10"/>
-          <p:cNvSpPr/>
-          <p:nvPr/>
-        </p:nvSpPr>
-        <p:spPr>
-          <a:xfrm>
-            <a:off x="8046720" y="4526280"/>
-            <a:ext cx="3657600" cy="274320"/>
+          <p:cNvPr id="14" name="Text 10"/>
+          <p:cNvSpPr/>
+          <p:nvPr/>
+        </p:nvSpPr>
+        <p:spPr>
+          <a:xfrm>
+            <a:off x="8394192" y="4526280"/>
+            <a:ext cx="3291840" cy="274320"/>
           </a:xfrm>
           <a:prstGeom prst="rect">
             <a:avLst/>
@@ -23136,16 +23259,46 @@
           </a:p>
         </p:txBody>
       </p:sp>
-      <p:sp>
-        <p:nvSpPr>
-          <p:cNvPr id="13" name="Text 11"/>
-          <p:cNvSpPr/>
-          <p:nvPr/>
-        </p:nvSpPr>
-        <p:spPr>
-          <a:xfrm>
-            <a:off x="8046720" y="4892040"/>
-            <a:ext cx="3657600" cy="274320"/>
+      <p:pic>
+        <p:nvPicPr>
+          <p:cNvPr id="15" name="Image 2" descr="preencoded.png">    </p:cNvPr>
+          <p:cNvPicPr>
+            <a:picLocks noChangeAspect="1"/>
+          </p:cNvPicPr>
+          <p:nvPr/>
+        </p:nvPicPr>
+        <p:blipFill>
+          <a:blip r:embed="rId5">
+            <a:extLst>
+              <a:ext uri="{96DAC541-7B7A-43D3-8B79-37D633B846F1}">
+                <asvg:svgBlip xmlns:asvg="http://schemas.microsoft.com/office/drawing/2016/SVG/main" r:embed="rId6"/>
+              </a:ext>
+            </a:extLst>
+          </a:blip>
+          <a:stretch>
+            <a:fillRect/>
+          </a:stretch>
+        </p:blipFill>
+        <p:spPr>
+          <a:xfrm>
+            <a:off x="8046720" y="4928616"/>
+            <a:ext cx="256032" cy="256032"/>
+          </a:xfrm>
+          <a:prstGeom prst="rect">
+            <a:avLst/>
+          </a:prstGeom>
+        </p:spPr>
+      </p:pic>
+      <p:sp>
+        <p:nvSpPr>
+          <p:cNvPr id="16" name="Text 11"/>
+          <p:cNvSpPr/>
+          <p:nvPr/>
+        </p:nvSpPr>
+        <p:spPr>
+          <a:xfrm>
+            <a:off x="8394192" y="4892040"/>
+            <a:ext cx="3291840" cy="274320"/>
           </a:xfrm>
           <a:prstGeom prst="rect">
             <a:avLst/>
@@ -23169,7 +23322,7 @@
                 <a:ea typeface="Calibri" pitchFamily="34" charset="-122"/>
                 <a:cs typeface="Calibri" pitchFamily="34" charset="-120"/>
               </a:rPr>
-              <a:t>🔌 OpenAI-compatible</a:t>
+              <a:t>OpenAI-compatible</a:t>
             </a:r>
             <a:endParaRPr lang="en-US" sz="1400" dirty="0"/>
           </a:p>
@@ -23177,14 +23330,14 @@
       </p:sp>
       <p:sp>
         <p:nvSpPr>
-          <p:cNvPr id="14" name="Text 12"/>
-          <p:cNvSpPr/>
-          <p:nvPr/>
-        </p:nvSpPr>
-        <p:spPr>
-          <a:xfrm>
-            <a:off x="8046720" y="5166360"/>
-            <a:ext cx="3657600" cy="274320"/>
+          <p:cNvPr id="17" name="Text 12"/>
+          <p:cNvSpPr/>
+          <p:nvPr/>
+        </p:nvSpPr>
+        <p:spPr>
+          <a:xfrm>
+            <a:off x="8394192" y="5166360"/>
+            <a:ext cx="3291840" cy="274320"/>
           </a:xfrm>
           <a:prstGeom prst="rect">
             <a:avLst/>
@@ -23214,16 +23367,46 @@
           </a:p>
         </p:txBody>
       </p:sp>
-      <p:sp>
-        <p:nvSpPr>
-          <p:cNvPr id="15" name="Text 13"/>
-          <p:cNvSpPr/>
-          <p:nvPr/>
-        </p:nvSpPr>
-        <p:spPr>
-          <a:xfrm>
-            <a:off x="8046720" y="5532120"/>
-            <a:ext cx="3657600" cy="274320"/>
+      <p:pic>
+        <p:nvPicPr>
+          <p:cNvPr id="18" name="Image 3" descr="preencoded.png">    </p:cNvPr>
+          <p:cNvPicPr>
+            <a:picLocks noChangeAspect="1"/>
+          </p:cNvPicPr>
+          <p:nvPr/>
+        </p:nvPicPr>
+        <p:blipFill>
+          <a:blip r:embed="rId7">
+            <a:extLst>
+              <a:ext uri="{96DAC541-7B7A-43D3-8B79-37D633B846F1}">
+                <asvg:svgBlip xmlns:asvg="http://schemas.microsoft.com/office/drawing/2016/SVG/main" r:embed="rId8"/>
+              </a:ext>
+            </a:extLst>
+          </a:blip>
+          <a:stretch>
+            <a:fillRect/>
+          </a:stretch>
+        </p:blipFill>
+        <p:spPr>
+          <a:xfrm>
+            <a:off x="8046720" y="5568696"/>
+            <a:ext cx="256032" cy="256032"/>
+          </a:xfrm>
+          <a:prstGeom prst="rect">
+            <a:avLst/>
+          </a:prstGeom>
+        </p:spPr>
+      </p:pic>
+      <p:sp>
+        <p:nvSpPr>
+          <p:cNvPr id="19" name="Text 13"/>
+          <p:cNvSpPr/>
+          <p:nvPr/>
+        </p:nvSpPr>
+        <p:spPr>
+          <a:xfrm>
+            <a:off x="8394192" y="5532120"/>
+            <a:ext cx="3291840" cy="274320"/>
           </a:xfrm>
           <a:prstGeom prst="rect">
             <a:avLst/>
@@ -23247,7 +23430,7 @@
                 <a:ea typeface="Calibri" pitchFamily="34" charset="-122"/>
                 <a:cs typeface="Calibri" pitchFamily="34" charset="-120"/>
               </a:rPr>
-              <a:t>💾 The tradeoff</a:t>
+              <a:t>The tradeoff</a:t>
             </a:r>
             <a:endParaRPr lang="en-US" sz="1400" dirty="0"/>
           </a:p>
@@ -23255,14 +23438,14 @@
       </p:sp>
       <p:sp>
         <p:nvSpPr>
-          <p:cNvPr id="16" name="Text 14"/>
-          <p:cNvSpPr/>
-          <p:nvPr/>
-        </p:nvSpPr>
-        <p:spPr>
-          <a:xfrm>
-            <a:off x="8046720" y="5806440"/>
-            <a:ext cx="3657600" cy="274320"/>
+          <p:cNvPr id="20" name="Text 14"/>
+          <p:cNvSpPr/>
+          <p:nvPr/>
+        </p:nvSpPr>
+        <p:spPr>
+          <a:xfrm>
+            <a:off x="8394192" y="5806440"/>
+            <a:ext cx="3291840" cy="274320"/>
           </a:xfrm>
           <a:prstGeom prst="rect">
             <a:avLst/>
@@ -23292,108 +23475,96 @@
           </a:p>
         </p:txBody>
       </p:sp>
-      <p:sp>
-        <p:nvSpPr>
-          <p:cNvPr id="17" name="Shape 15"/>
-          <p:cNvSpPr/>
-          <p:nvPr/>
-        </p:nvSpPr>
+      <p:pic>
+        <p:nvPicPr>
+          <p:cNvPr id="21" name="Image 4" descr="preencoded.png">    </p:cNvPr>
+          <p:cNvPicPr>
+            <a:picLocks noChangeAspect="1"/>
+          </p:cNvPicPr>
+          <p:nvPr/>
+        </p:nvPicPr>
+        <p:blipFill>
+          <a:blip r:embed="rId9">
+            <a:extLst>
+              <a:ext uri="{96DAC541-7B7A-43D3-8B79-37D633B846F1}">
+                <asvg:svgBlip xmlns:asvg="http://schemas.microsoft.com/office/drawing/2016/SVG/main" r:embed="rId10"/>
+              </a:ext>
+            </a:extLst>
+          </a:blip>
+          <a:stretch>
+            <a:fillRect/>
+          </a:stretch>
+        </p:blipFill>
         <p:spPr>
           <a:xfrm>
             <a:off x="10180015" y="502920"/>
-            <a:ext cx="292608" cy="292608"/>
-          </a:xfrm>
-          <a:prstGeom prst="roundRect">
-            <a:avLst>
-              <a:gd name="adj" fmla="val 15625"/>
-            </a:avLst>
-          </a:prstGeom>
-          <a:ln w="19050">
-            <a:solidFill>
-              <a:srgbClr val="FBBF24"/>
-            </a:solidFill>
-            <a:prstDash val="solid"/>
-          </a:ln>
-        </p:spPr>
-      </p:sp>
-      <p:sp>
-        <p:nvSpPr>
-          <p:cNvPr id="18" name="Text 16"/>
-          <p:cNvSpPr/>
-          <p:nvPr/>
-        </p:nvSpPr>
-        <p:spPr>
-          <a:xfrm>
-            <a:off x="10472623" y="457200"/>
-            <a:ext cx="411480" cy="384048"/>
-          </a:xfrm>
-          <a:prstGeom prst="rect">
-            <a:avLst/>
-          </a:prstGeom>
-          <a:noFill/>
-          <a:ln/>
-        </p:spPr>
-        <p:txBody>
-          <a:bodyPr wrap="square" rtlCol="0" anchor="ctr"/>
-          <a:lstStyle/>
-          <a:p>
-            <a:pPr algn="ctr" indent="0" marL="0">
-              <a:buNone/>
-            </a:pPr>
-            <a:r>
-              <a:rPr lang="en-US" sz="1800" b="1" dirty="0">
-                <a:solidFill>
-                  <a:srgbClr val="FBBF24"/>
-                </a:solidFill>
-                <a:latin typeface="Calibri" pitchFamily="34" charset="0"/>
-                <a:ea typeface="Calibri" pitchFamily="34" charset="-122"/>
-                <a:cs typeface="Calibri" pitchFamily="34" charset="-120"/>
-              </a:rPr>
-              <a:t>↔</a:t>
-            </a:r>
-            <a:endParaRPr lang="en-US" sz="1800" dirty="0"/>
-          </a:p>
-        </p:txBody>
-      </p:sp>
-      <p:sp>
-        <p:nvSpPr>
-          <p:cNvPr id="19" name="Text 17"/>
-          <p:cNvSpPr/>
-          <p:nvPr/>
-        </p:nvSpPr>
-        <p:spPr>
-          <a:xfrm>
-            <a:off x="10893247" y="429768"/>
-            <a:ext cx="411480" cy="457200"/>
-          </a:xfrm>
-          <a:prstGeom prst="rect">
-            <a:avLst/>
-          </a:prstGeom>
-          <a:noFill/>
-          <a:ln/>
-        </p:spPr>
-        <p:txBody>
-          <a:bodyPr wrap="square" rtlCol="0" anchor="ctr"/>
-          <a:lstStyle/>
-          <a:p>
-            <a:pPr algn="ctr" indent="0" marL="0">
-              <a:buNone/>
-            </a:pPr>
-            <a:r>
-              <a:rPr lang="en-US" sz="2200" dirty="0">
-                <a:solidFill>
-                  <a:srgbClr val="FBBF24"/>
-                </a:solidFill>
-                <a:latin typeface="Calibri" pitchFamily="34" charset="0"/>
-                <a:ea typeface="Calibri" pitchFamily="34" charset="-122"/>
-                <a:cs typeface="Calibri" pitchFamily="34" charset="-120"/>
-              </a:rPr>
-              <a:t>☁</a:t>
-            </a:r>
-            <a:endParaRPr lang="en-US" sz="2200" dirty="0"/>
-          </a:p>
-        </p:txBody>
-      </p:sp>
+            <a:ext cx="329184" cy="329184"/>
+          </a:xfrm>
+          <a:prstGeom prst="rect">
+            <a:avLst/>
+          </a:prstGeom>
+        </p:spPr>
+      </p:pic>
+      <p:pic>
+        <p:nvPicPr>
+          <p:cNvPr id="22" name="Image 5" descr="preencoded.png">    </p:cNvPr>
+          <p:cNvPicPr>
+            <a:picLocks noChangeAspect="1"/>
+          </p:cNvPicPr>
+          <p:nvPr/>
+        </p:nvPicPr>
+        <p:blipFill>
+          <a:blip r:embed="rId11">
+            <a:extLst>
+              <a:ext uri="{96DAC541-7B7A-43D3-8B79-37D633B846F1}">
+                <asvg:svgBlip xmlns:asvg="http://schemas.microsoft.com/office/drawing/2016/SVG/main" r:embed="rId12"/>
+              </a:ext>
+            </a:extLst>
+          </a:blip>
+          <a:stretch>
+            <a:fillRect/>
+          </a:stretch>
+        </p:blipFill>
+        <p:spPr>
+          <a:xfrm>
+            <a:off x="10564063" y="502920"/>
+            <a:ext cx="329184" cy="329184"/>
+          </a:xfrm>
+          <a:prstGeom prst="rect">
+            <a:avLst/>
+          </a:prstGeom>
+        </p:spPr>
+      </p:pic>
+      <p:pic>
+        <p:nvPicPr>
+          <p:cNvPr id="23" name="Image 6" descr="preencoded.png">    </p:cNvPr>
+          <p:cNvPicPr>
+            <a:picLocks noChangeAspect="1"/>
+          </p:cNvPicPr>
+          <p:nvPr/>
+        </p:nvPicPr>
+        <p:blipFill>
+          <a:blip r:embed="rId13">
+            <a:extLst>
+              <a:ext uri="{96DAC541-7B7A-43D3-8B79-37D633B846F1}">
+                <asvg:svgBlip xmlns:asvg="http://schemas.microsoft.com/office/drawing/2016/SVG/main" r:embed="rId14"/>
+              </a:ext>
+            </a:extLst>
+          </a:blip>
+          <a:stretch>
+            <a:fillRect/>
+          </a:stretch>
+        </p:blipFill>
+        <p:spPr>
+          <a:xfrm>
+            <a:off x="10948111" y="502920"/>
+            <a:ext cx="329184" cy="329184"/>
+          </a:xfrm>
+          <a:prstGeom prst="rect">
+            <a:avLst/>
+          </a:prstGeom>
+        </p:spPr>
+      </p:pic>
     </p:spTree>
   </p:cSld>
   <p:clrMapOvr>

--- a/slides/Unifying-Local-Cloud-AI.pptx
+++ b/slides/Unifying-Local-Cloud-AI.pptx
@@ -3144,11 +3144,11 @@
             <a:avLst/>
           </a:prstGeom>
           <a:solidFill>
-            <a:srgbClr val="E5E1F5"/>
+            <a:srgbClr val="6366F1"/>
           </a:solidFill>
           <a:ln w="12700">
             <a:solidFill>
-              <a:srgbClr val="E5E1F5"/>
+              <a:srgbClr val="6366F1"/>
             </a:solidFill>
             <a:prstDash val="solid"/>
           </a:ln>
@@ -3169,11 +3169,11 @@
             <a:avLst/>
           </a:prstGeom>
           <a:solidFill>
-            <a:srgbClr val="E5E1F5"/>
+            <a:srgbClr val="6366F1"/>
           </a:solidFill>
           <a:ln w="12700">
             <a:solidFill>
-              <a:srgbClr val="E5E1F5"/>
+              <a:srgbClr val="6366F1"/>
             </a:solidFill>
             <a:prstDash val="solid"/>
           </a:ln>
@@ -3194,11 +3194,11 @@
             <a:avLst/>
           </a:prstGeom>
           <a:solidFill>
-            <a:srgbClr val="E5E1F5"/>
+            <a:srgbClr val="6366F1"/>
           </a:solidFill>
           <a:ln w="12700">
             <a:solidFill>
-              <a:srgbClr val="E5E1F5"/>
+              <a:srgbClr val="6366F1"/>
             </a:solidFill>
             <a:prstDash val="solid"/>
           </a:ln>
@@ -3303,7 +3303,7 @@
                 <a:ea typeface="Calibri" pitchFamily="34" charset="-122"/>
                 <a:cs typeface="Calibri" pitchFamily="34" charset="-120"/>
               </a:rPr>
-              <a:t>AgentThread  ·  Tools  ·  Workflows  ·  Streaming</a:t>
+              <a:t>AgentSession  ·  Tools  ·  Workflows  ·  Streaming</a:t>
             </a:r>
             <a:endParaRPr lang="en-US" sz="1400" dirty="0"/>
           </a:p>
@@ -3368,7 +3368,7 @@
                 <a:ea typeface="Calibri" pitchFamily="34" charset="-122"/>
                 <a:cs typeface="Calibri" pitchFamily="34" charset="-120"/>
               </a:rPr>
-              <a:t>ChatClientAgent  ·  WorkflowAgent</a:t>
+              <a:t>ChatClientAgent  ·  Workflow.AsAIAgent()</a:t>
             </a:r>
             <a:endParaRPr lang="en-US" sz="1300" dirty="0"/>
           </a:p>
@@ -3633,7 +3633,7 @@
                 <a:ea typeface="Calibri" pitchFamily="34" charset="-122"/>
                 <a:cs typeface="Calibri" pitchFamily="34" charset="-120"/>
               </a:rPr>
-              <a:t>AgentThread persists conversation</a:t>
+              <a:t>AgentSession persists conversation</a:t>
             </a:r>
             <a:endParaRPr lang="en-US" sz="1100" dirty="0"/>
           </a:p>
@@ -4565,7 +4565,7 @@
                 <a:ea typeface="Consolas" pitchFamily="34" charset="-122"/>
                 <a:cs typeface="Consolas" pitchFamily="34" charset="-120"/>
               </a:rPr>
-              <a:t>CreateAIAgent</a:t>
+              <a:t>AsAIAgent</a:t>
             </a:r>
             <a:pPr indent="0" marL="0">
               <a:buNone/>
@@ -4613,6 +4613,96 @@
                 <a:ea typeface="Consolas" pitchFamily="34" charset="-122"/>
                 <a:cs typeface="Consolas" pitchFamily="34" charset="-120"/>
               </a:rPr>
+              <a:t>name</a:t>
+            </a:r>
+            <a:pPr indent="0" marL="0">
+              <a:buNone/>
+            </a:pPr>
+            <a:r>
+              <a:rPr lang="en-US" sz="1100" dirty="0">
+                <a:solidFill>
+                  <a:srgbClr val="B8B5D9"/>
+                </a:solidFill>
+                <a:latin typeface="Consolas" pitchFamily="34" charset="0"/>
+                <a:ea typeface="Consolas" pitchFamily="34" charset="-122"/>
+                <a:cs typeface="Consolas" pitchFamily="34" charset="-120"/>
+              </a:rPr>
+              <a:t>:</a:t>
+            </a:r>
+            <a:pPr indent="0" marL="0">
+              <a:buNone/>
+            </a:pPr>
+            <a:r>
+              <a:rPr lang="en-US" sz="1100" dirty="0">
+                <a:solidFill>
+                  <a:srgbClr val="FAF8FF"/>
+                </a:solidFill>
+                <a:latin typeface="Consolas" pitchFamily="34" charset="0"/>
+                <a:ea typeface="Consolas" pitchFamily="34" charset="-122"/>
+                <a:cs typeface="Consolas" pitchFamily="34" charset="-120"/>
+              </a:rPr>
+              <a:t> </a:t>
+            </a:r>
+            <a:pPr indent="0" marL="0">
+              <a:buNone/>
+            </a:pPr>
+            <a:r>
+              <a:rPr lang="en-US" sz="1100" dirty="0">
+                <a:solidFill>
+                  <a:srgbClr val="FBBF24"/>
+                </a:solidFill>
+                <a:latin typeface="Consolas" pitchFamily="34" charset="0"/>
+                <a:ea typeface="Consolas" pitchFamily="34" charset="-122"/>
+                <a:cs typeface="Consolas" pitchFamily="34" charset="-120"/>
+              </a:rPr>
+              <a:t>"agent"</a:t>
+            </a:r>
+            <a:pPr indent="0" marL="0">
+              <a:buNone/>
+            </a:pPr>
+            <a:r>
+              <a:rPr lang="en-US" sz="1100" dirty="0">
+                <a:solidFill>
+                  <a:srgbClr val="B8B5D9"/>
+                </a:solidFill>
+                <a:latin typeface="Consolas" pitchFamily="34" charset="0"/>
+                <a:ea typeface="Consolas" pitchFamily="34" charset="-122"/>
+                <a:cs typeface="Consolas" pitchFamily="34" charset="-120"/>
+              </a:rPr>
+              <a:t>,</a:t>
+            </a:r>
+            <a:pPr indent="0" marL="0">
+              <a:buNone/>
+            </a:pPr>
+            <a:endParaRPr lang="en-US" sz="1100" dirty="0"/>
+          </a:p>
+          <a:p>
+            <a:pPr indent="0" marL="0">
+              <a:buNone/>
+            </a:pPr>
+            <a:r>
+              <a:rPr lang="en-US" sz="1100" dirty="0">
+                <a:solidFill>
+                  <a:srgbClr val="FAF8FF"/>
+                </a:solidFill>
+                <a:latin typeface="Consolas" pitchFamily="34" charset="0"/>
+                <a:ea typeface="Consolas" pitchFamily="34" charset="-122"/>
+                <a:cs typeface="Consolas" pitchFamily="34" charset="-120"/>
+              </a:rPr>
+              <a:t>    </a:t>
+            </a:r>
+            <a:pPr indent="0" marL="0">
+              <a:buNone/>
+            </a:pPr>
+            <a:r>
+              <a:rPr lang="en-US" sz="1100" dirty="0">
+                <a:solidFill>
+                  <a:srgbClr val="FAF8FF"/>
+                </a:solidFill>
+                <a:latin typeface="Consolas" pitchFamily="34" charset="0"/>
+                <a:ea typeface="Consolas" pitchFamily="34" charset="-122"/>
+                <a:cs typeface="Consolas" pitchFamily="34" charset="-120"/>
+              </a:rPr>
               <a:t>instructions</a:t>
             </a:r>
             <a:pPr indent="0" marL="0">
@@ -4897,7 +4987,7 @@
                 <a:ea typeface="Consolas" pitchFamily="34" charset="-122"/>
                 <a:cs typeface="Consolas" pitchFamily="34" charset="-120"/>
               </a:rPr>
-              <a:t>// 3. Keep a thread for conversation state</a:t>
+              <a:t>// 3. Keep a session for conversation state</a:t>
             </a:r>
             <a:pPr indent="0" marL="0">
               <a:buNone/>
@@ -4917,7 +5007,7 @@
                 <a:ea typeface="Consolas" pitchFamily="34" charset="-122"/>
                 <a:cs typeface="Consolas" pitchFamily="34" charset="-120"/>
               </a:rPr>
-              <a:t>AgentThread</a:t>
+              <a:t>AgentSession</a:t>
             </a:r>
             <a:pPr indent="0" marL="0">
               <a:buNone/>
@@ -4931,7 +5021,7 @@
                 <a:ea typeface="Consolas" pitchFamily="34" charset="-122"/>
                 <a:cs typeface="Consolas" pitchFamily="34" charset="-120"/>
               </a:rPr>
-              <a:t> thread </a:t>
+              <a:t> session </a:t>
             </a:r>
             <a:pPr indent="0" marL="0">
               <a:buNone/>
@@ -4959,6 +5049,34 @@
                 <a:ea typeface="Consolas" pitchFamily="34" charset="-122"/>
                 <a:cs typeface="Consolas" pitchFamily="34" charset="-120"/>
               </a:rPr>
+              <a:t> </a:t>
+            </a:r>
+            <a:pPr indent="0" marL="0">
+              <a:buNone/>
+            </a:pPr>
+            <a:r>
+              <a:rPr lang="en-US" sz="1100" dirty="0">
+                <a:solidFill>
+                  <a:srgbClr val="FB7185"/>
+                </a:solidFill>
+                <a:latin typeface="Consolas" pitchFamily="34" charset="0"/>
+                <a:ea typeface="Consolas" pitchFamily="34" charset="-122"/>
+                <a:cs typeface="Consolas" pitchFamily="34" charset="-120"/>
+              </a:rPr>
+              <a:t>await</a:t>
+            </a:r>
+            <a:pPr indent="0" marL="0">
+              <a:buNone/>
+            </a:pPr>
+            <a:r>
+              <a:rPr lang="en-US" sz="1100" dirty="0">
+                <a:solidFill>
+                  <a:srgbClr val="FAF8FF"/>
+                </a:solidFill>
+                <a:latin typeface="Consolas" pitchFamily="34" charset="0"/>
+                <a:ea typeface="Consolas" pitchFamily="34" charset="-122"/>
+                <a:cs typeface="Consolas" pitchFamily="34" charset="-120"/>
+              </a:rPr>
               <a:t> agent</a:t>
             </a:r>
             <a:pPr indent="0" marL="0">
@@ -4987,7 +5105,7 @@
                 <a:ea typeface="Consolas" pitchFamily="34" charset="-122"/>
                 <a:cs typeface="Consolas" pitchFamily="34" charset="-120"/>
               </a:rPr>
-              <a:t>GetNewThread</a:t>
+              <a:t>CreateSessionAsync</a:t>
             </a:r>
             <a:pPr indent="0" marL="0">
               <a:buNone/>
@@ -5271,7 +5389,7 @@
                 <a:ea typeface="Consolas" pitchFamily="34" charset="-122"/>
                 <a:cs typeface="Consolas" pitchFamily="34" charset="-120"/>
               </a:rPr>
-              <a:t> thread</a:t>
+              <a:t> session</a:t>
             </a:r>
             <a:pPr indent="0" marL="0">
               <a:buNone/>
@@ -5978,7 +6096,7 @@
                 <a:ea typeface="Calibri" pitchFamily="34" charset="-122"/>
                 <a:cs typeface="Calibri" pitchFamily="34" charset="-120"/>
               </a:rPr>
-              <a:t>AgentThread carries history across runs — no manual list-juggling</a:t>
+              <a:t>AgentSession carries history across runs — no manual list-juggling</a:t>
             </a:r>
             <a:endParaRPr lang="en-US" sz="1000" dirty="0"/>
           </a:p>
@@ -6147,7 +6265,7 @@
                 <a:ea typeface="Calibri" pitchFamily="34" charset="-122"/>
                 <a:cs typeface="Calibri" pitchFamily="34" charset="-120"/>
               </a:rPr>
-              <a:t>RunStreamingAsync yields AgentRunResponseUpdate — wire to your UI</a:t>
+              <a:t>RunStreamingAsync yields AgentResponseUpdate — wire to your UI</a:t>
             </a:r>
             <a:endParaRPr lang="en-US" sz="1000" dirty="0"/>
           </a:p>
@@ -7486,7 +7604,7 @@
                 <a:ea typeface="Consolas" pitchFamily="34" charset="-122"/>
                 <a:cs typeface="Consolas" pitchFamily="34" charset="-120"/>
               </a:rPr>
-              <a:t>CreateAIAgent</a:t>
+              <a:t>AsAIAgent</a:t>
             </a:r>
             <a:pPr indent="0" marL="0">
               <a:buNone/>
@@ -7528,12 +7646,144 @@
             <a:r>
               <a:rPr lang="en-US" sz="1200" dirty="0">
                 <a:solidFill>
+                  <a:srgbClr val="FAF8FF"/>
+                </a:solidFill>
+                <a:latin typeface="Consolas" pitchFamily="34" charset="0"/>
+                <a:ea typeface="Consolas" pitchFamily="34" charset="-122"/>
+                <a:cs typeface="Consolas" pitchFamily="34" charset="-120"/>
+              </a:rPr>
+              <a:t>name</a:t>
+            </a:r>
+            <a:pPr indent="0" marL="0">
+              <a:buNone/>
+            </a:pPr>
+            <a:r>
+              <a:rPr lang="en-US" sz="1200" dirty="0">
+                <a:solidFill>
+                  <a:srgbClr val="B8B5D9"/>
+                </a:solidFill>
+                <a:latin typeface="Consolas" pitchFamily="34" charset="0"/>
+                <a:ea typeface="Consolas" pitchFamily="34" charset="-122"/>
+                <a:cs typeface="Consolas" pitchFamily="34" charset="-120"/>
+              </a:rPr>
+              <a:t>:</a:t>
+            </a:r>
+            <a:pPr indent="0" marL="0">
+              <a:buNone/>
+            </a:pPr>
+            <a:r>
+              <a:rPr lang="en-US" sz="1200" dirty="0">
+                <a:solidFill>
+                  <a:srgbClr val="FAF8FF"/>
+                </a:solidFill>
+                <a:latin typeface="Consolas" pitchFamily="34" charset="0"/>
+                <a:ea typeface="Consolas" pitchFamily="34" charset="-122"/>
+                <a:cs typeface="Consolas" pitchFamily="34" charset="-120"/>
+              </a:rPr>
+              <a:t> </a:t>
+            </a:r>
+            <a:pPr indent="0" marL="0">
+              <a:buNone/>
+            </a:pPr>
+            <a:r>
+              <a:rPr lang="en-US" sz="1200" dirty="0">
+                <a:solidFill>
                   <a:srgbClr val="FBBF24"/>
                 </a:solidFill>
                 <a:latin typeface="Consolas" pitchFamily="34" charset="0"/>
                 <a:ea typeface="Consolas" pitchFamily="34" charset="-122"/>
                 <a:cs typeface="Consolas" pitchFamily="34" charset="-120"/>
               </a:rPr>
+              <a:t>"triage"</a:t>
+            </a:r>
+            <a:pPr indent="0" marL="0">
+              <a:buNone/>
+            </a:pPr>
+            <a:r>
+              <a:rPr lang="en-US" sz="1200" dirty="0">
+                <a:solidFill>
+                  <a:srgbClr val="B8B5D9"/>
+                </a:solidFill>
+                <a:latin typeface="Consolas" pitchFamily="34" charset="0"/>
+                <a:ea typeface="Consolas" pitchFamily="34" charset="-122"/>
+                <a:cs typeface="Consolas" pitchFamily="34" charset="-120"/>
+              </a:rPr>
+              <a:t>,</a:t>
+            </a:r>
+            <a:pPr indent="0" marL="0">
+              <a:buNone/>
+            </a:pPr>
+            <a:endParaRPr lang="en-US" sz="1200" dirty="0"/>
+          </a:p>
+          <a:p>
+            <a:pPr indent="0" marL="0">
+              <a:buNone/>
+            </a:pPr>
+            <a:r>
+              <a:rPr lang="en-US" sz="1200" dirty="0">
+                <a:solidFill>
+                  <a:srgbClr val="FAF8FF"/>
+                </a:solidFill>
+                <a:latin typeface="Consolas" pitchFamily="34" charset="0"/>
+                <a:ea typeface="Consolas" pitchFamily="34" charset="-122"/>
+                <a:cs typeface="Consolas" pitchFamily="34" charset="-120"/>
+              </a:rPr>
+              <a:t>        </a:t>
+            </a:r>
+            <a:pPr indent="0" marL="0">
+              <a:buNone/>
+            </a:pPr>
+            <a:r>
+              <a:rPr lang="en-US" sz="1200" dirty="0">
+                <a:solidFill>
+                  <a:srgbClr val="FAF8FF"/>
+                </a:solidFill>
+                <a:latin typeface="Consolas" pitchFamily="34" charset="0"/>
+                <a:ea typeface="Consolas" pitchFamily="34" charset="-122"/>
+                <a:cs typeface="Consolas" pitchFamily="34" charset="-120"/>
+              </a:rPr>
+              <a:t>instructions</a:t>
+            </a:r>
+            <a:pPr indent="0" marL="0">
+              <a:buNone/>
+            </a:pPr>
+            <a:r>
+              <a:rPr lang="en-US" sz="1200" dirty="0">
+                <a:solidFill>
+                  <a:srgbClr val="B8B5D9"/>
+                </a:solidFill>
+                <a:latin typeface="Consolas" pitchFamily="34" charset="0"/>
+                <a:ea typeface="Consolas" pitchFamily="34" charset="-122"/>
+                <a:cs typeface="Consolas" pitchFamily="34" charset="-120"/>
+              </a:rPr>
+              <a:t>:</a:t>
+            </a:r>
+            <a:pPr indent="0" marL="0">
+              <a:buNone/>
+            </a:pPr>
+            <a:r>
+              <a:rPr lang="en-US" sz="1200" dirty="0">
+                <a:solidFill>
+                  <a:srgbClr val="FAF8FF"/>
+                </a:solidFill>
+                <a:latin typeface="Consolas" pitchFamily="34" charset="0"/>
+                <a:ea typeface="Consolas" pitchFamily="34" charset="-122"/>
+                <a:cs typeface="Consolas" pitchFamily="34" charset="-120"/>
+              </a:rPr>
+              <a:t> </a:t>
+            </a:r>
+            <a:pPr indent="0" marL="0">
+              <a:buNone/>
+            </a:pPr>
+            <a:r>
+              <a:rPr lang="en-US" sz="1200" dirty="0">
+                <a:solidFill>
+                  <a:srgbClr val="FBBF24"/>
+                </a:solidFill>
+                <a:latin typeface="Consolas" pitchFamily="34" charset="0"/>
+                <a:ea typeface="Consolas" pitchFamily="34" charset="-122"/>
+                <a:cs typeface="Consolas" pitchFamily="34" charset="-120"/>
+              </a:rPr>
               <a:t>"Strip personal info. Return only topic + intent."</a:t>
             </a:r>
             <a:pPr indent="0" marL="0">
@@ -7548,11 +7798,385 @@
                 <a:ea typeface="Consolas" pitchFamily="34" charset="-122"/>
                 <a:cs typeface="Consolas" pitchFamily="34" charset="-120"/>
               </a:rPr>
+              <a:t>)</a:t>
+            </a:r>
+            <a:pPr indent="0" marL="0">
+              <a:buNone/>
+            </a:pPr>
+            <a:r>
+              <a:rPr lang="en-US" sz="1200" dirty="0">
+                <a:solidFill>
+                  <a:srgbClr val="B8B5D9"/>
+                </a:solidFill>
+                <a:latin typeface="Consolas" pitchFamily="34" charset="0"/>
+                <a:ea typeface="Consolas" pitchFamily="34" charset="-122"/>
+                <a:cs typeface="Consolas" pitchFamily="34" charset="-120"/>
+              </a:rPr>
+              <a:t>;</a:t>
+            </a:r>
+            <a:pPr indent="0" marL="0">
+              <a:buNone/>
+            </a:pPr>
+            <a:endParaRPr lang="en-US" sz="1200" dirty="0"/>
+          </a:p>
+          <a:p>
+            <a:pPr indent="0" marL="0">
+              <a:buNone/>
+            </a:pPr>
+            <a:endParaRPr lang="en-US" sz="1200" dirty="0"/>
+          </a:p>
+          <a:p>
+            <a:pPr indent="0" marL="0">
+              <a:buNone/>
+            </a:pPr>
+            <a:r>
+              <a:rPr lang="en-US" sz="1200" i="1" dirty="0">
+                <a:solidFill>
+                  <a:srgbClr val="8B88B5"/>
+                </a:solidFill>
+                <a:latin typeface="Consolas" pitchFamily="34" charset="0"/>
+                <a:ea typeface="Consolas" pitchFamily="34" charset="-122"/>
+                <a:cs typeface="Consolas" pitchFamily="34" charset="-120"/>
+              </a:rPr>
+              <a:t>// Cloud — Azure OpenAI, frontier reasoning</a:t>
+            </a:r>
+            <a:pPr indent="0" marL="0">
+              <a:buNone/>
+            </a:pPr>
+            <a:endParaRPr lang="en-US" sz="1200" dirty="0"/>
+          </a:p>
+          <a:p>
+            <a:pPr indent="0" marL="0">
+              <a:buNone/>
+            </a:pPr>
+            <a:r>
+              <a:rPr lang="en-US" sz="1200" dirty="0">
+                <a:solidFill>
+                  <a:srgbClr val="A78BFA"/>
+                </a:solidFill>
+                <a:latin typeface="Consolas" pitchFamily="34" charset="0"/>
+                <a:ea typeface="Consolas" pitchFamily="34" charset="-122"/>
+                <a:cs typeface="Consolas" pitchFamily="34" charset="-120"/>
+              </a:rPr>
+              <a:t>AIAgent</a:t>
+            </a:r>
+            <a:pPr indent="0" marL="0">
+              <a:buNone/>
+            </a:pPr>
+            <a:r>
+              <a:rPr lang="en-US" sz="1200" dirty="0">
+                <a:solidFill>
+                  <a:srgbClr val="FAF8FF"/>
+                </a:solidFill>
+                <a:latin typeface="Consolas" pitchFamily="34" charset="0"/>
+                <a:ea typeface="Consolas" pitchFamily="34" charset="-122"/>
+                <a:cs typeface="Consolas" pitchFamily="34" charset="-120"/>
+              </a:rPr>
+              <a:t> expert </a:t>
+            </a:r>
+            <a:pPr indent="0" marL="0">
+              <a:buNone/>
+            </a:pPr>
+            <a:r>
+              <a:rPr lang="en-US" sz="1200" dirty="0">
+                <a:solidFill>
+                  <a:srgbClr val="CFCBED"/>
+                </a:solidFill>
+                <a:latin typeface="Consolas" pitchFamily="34" charset="0"/>
+                <a:ea typeface="Consolas" pitchFamily="34" charset="-122"/>
+                <a:cs typeface="Consolas" pitchFamily="34" charset="-120"/>
+              </a:rPr>
+              <a:t>=</a:t>
+            </a:r>
+            <a:pPr indent="0" marL="0">
+              <a:buNone/>
+            </a:pPr>
+            <a:r>
+              <a:rPr lang="en-US" sz="1200" dirty="0">
+                <a:solidFill>
+                  <a:srgbClr val="FAF8FF"/>
+                </a:solidFill>
+                <a:latin typeface="Consolas" pitchFamily="34" charset="0"/>
+                <a:ea typeface="Consolas" pitchFamily="34" charset="-122"/>
+                <a:cs typeface="Consolas" pitchFamily="34" charset="-120"/>
+              </a:rPr>
+              <a:t> </a:t>
+            </a:r>
+            <a:pPr indent="0" marL="0">
+              <a:buNone/>
+            </a:pPr>
+            <a:r>
+              <a:rPr lang="en-US" sz="1200" dirty="0">
+                <a:solidFill>
+                  <a:srgbClr val="FB7185"/>
+                </a:solidFill>
+                <a:latin typeface="Consolas" pitchFamily="34" charset="0"/>
+                <a:ea typeface="Consolas" pitchFamily="34" charset="-122"/>
+                <a:cs typeface="Consolas" pitchFamily="34" charset="-120"/>
+              </a:rPr>
+              <a:t>new</a:t>
+            </a:r>
+            <a:pPr indent="0" marL="0">
+              <a:buNone/>
+            </a:pPr>
+            <a:r>
+              <a:rPr lang="en-US" sz="1200" dirty="0">
+                <a:solidFill>
+                  <a:srgbClr val="FAF8FF"/>
+                </a:solidFill>
+                <a:latin typeface="Consolas" pitchFamily="34" charset="0"/>
+                <a:ea typeface="Consolas" pitchFamily="34" charset="-122"/>
+                <a:cs typeface="Consolas" pitchFamily="34" charset="-120"/>
+              </a:rPr>
+              <a:t> </a:t>
+            </a:r>
+            <a:pPr indent="0" marL="0">
+              <a:buNone/>
+            </a:pPr>
+            <a:r>
+              <a:rPr lang="en-US" sz="1200" dirty="0">
+                <a:solidFill>
+                  <a:srgbClr val="FAF8FF"/>
+                </a:solidFill>
+                <a:latin typeface="Consolas" pitchFamily="34" charset="0"/>
+                <a:ea typeface="Consolas" pitchFamily="34" charset="-122"/>
+                <a:cs typeface="Consolas" pitchFamily="34" charset="-120"/>
+              </a:rPr>
+              <a:t>AzureOpenAIClient</a:t>
+            </a:r>
+            <a:pPr indent="0" marL="0">
+              <a:buNone/>
+            </a:pPr>
+            <a:r>
+              <a:rPr lang="en-US" sz="1200" dirty="0">
+                <a:solidFill>
+                  <a:srgbClr val="B8B5D9"/>
+                </a:solidFill>
+                <a:latin typeface="Consolas" pitchFamily="34" charset="0"/>
+                <a:ea typeface="Consolas" pitchFamily="34" charset="-122"/>
+                <a:cs typeface="Consolas" pitchFamily="34" charset="-120"/>
+              </a:rPr>
+              <a:t>(</a:t>
+            </a:r>
+            <a:pPr indent="0" marL="0">
+              <a:buNone/>
+            </a:pPr>
+            <a:endParaRPr lang="en-US" sz="1200" dirty="0"/>
+          </a:p>
+          <a:p>
+            <a:pPr indent="0" marL="0">
+              <a:buNone/>
+            </a:pPr>
+            <a:r>
+              <a:rPr lang="en-US" sz="1200" dirty="0">
+                <a:solidFill>
+                  <a:srgbClr val="FAF8FF"/>
+                </a:solidFill>
+                <a:latin typeface="Consolas" pitchFamily="34" charset="0"/>
+                <a:ea typeface="Consolas" pitchFamily="34" charset="-122"/>
+                <a:cs typeface="Consolas" pitchFamily="34" charset="-120"/>
+              </a:rPr>
+              <a:t>        </a:t>
+            </a:r>
+            <a:pPr indent="0" marL="0">
+              <a:buNone/>
+            </a:pPr>
+            <a:r>
+              <a:rPr lang="en-US" sz="1200" dirty="0">
+                <a:solidFill>
+                  <a:srgbClr val="FB7185"/>
+                </a:solidFill>
+                <a:latin typeface="Consolas" pitchFamily="34" charset="0"/>
+                <a:ea typeface="Consolas" pitchFamily="34" charset="-122"/>
+                <a:cs typeface="Consolas" pitchFamily="34" charset="-120"/>
+              </a:rPr>
+              <a:t>new</a:t>
+            </a:r>
+            <a:pPr indent="0" marL="0">
+              <a:buNone/>
+            </a:pPr>
+            <a:r>
+              <a:rPr lang="en-US" sz="1200" dirty="0">
+                <a:solidFill>
+                  <a:srgbClr val="FAF8FF"/>
+                </a:solidFill>
+                <a:latin typeface="Consolas" pitchFamily="34" charset="0"/>
+                <a:ea typeface="Consolas" pitchFamily="34" charset="-122"/>
+                <a:cs typeface="Consolas" pitchFamily="34" charset="-120"/>
+              </a:rPr>
+              <a:t> </a:t>
+            </a:r>
+            <a:pPr indent="0" marL="0">
+              <a:buNone/>
+            </a:pPr>
+            <a:r>
+              <a:rPr lang="en-US" sz="1200" dirty="0">
+                <a:solidFill>
+                  <a:srgbClr val="FAF8FF"/>
+                </a:solidFill>
+                <a:latin typeface="Consolas" pitchFamily="34" charset="0"/>
+                <a:ea typeface="Consolas" pitchFamily="34" charset="-122"/>
+                <a:cs typeface="Consolas" pitchFamily="34" charset="-120"/>
+              </a:rPr>
+              <a:t>Uri</a:t>
+            </a:r>
+            <a:pPr indent="0" marL="0">
+              <a:buNone/>
+            </a:pPr>
+            <a:r>
+              <a:rPr lang="en-US" sz="1200" dirty="0">
+                <a:solidFill>
+                  <a:srgbClr val="B8B5D9"/>
+                </a:solidFill>
+                <a:latin typeface="Consolas" pitchFamily="34" charset="0"/>
+                <a:ea typeface="Consolas" pitchFamily="34" charset="-122"/>
+                <a:cs typeface="Consolas" pitchFamily="34" charset="-120"/>
+              </a:rPr>
+              <a:t>(</a:t>
+            </a:r>
+            <a:pPr indent="0" marL="0">
+              <a:buNone/>
+            </a:pPr>
+            <a:r>
+              <a:rPr lang="en-US" sz="1200" dirty="0">
+                <a:solidFill>
+                  <a:srgbClr val="FAF8FF"/>
+                </a:solidFill>
+                <a:latin typeface="Consolas" pitchFamily="34" charset="0"/>
+                <a:ea typeface="Consolas" pitchFamily="34" charset="-122"/>
+                <a:cs typeface="Consolas" pitchFamily="34" charset="-120"/>
+              </a:rPr>
+              <a:t>endpoint</a:t>
+            </a:r>
+            <a:pPr indent="0" marL="0">
+              <a:buNone/>
+            </a:pPr>
+            <a:r>
+              <a:rPr lang="en-US" sz="1200" dirty="0">
+                <a:solidFill>
+                  <a:srgbClr val="B8B5D9"/>
+                </a:solidFill>
+                <a:latin typeface="Consolas" pitchFamily="34" charset="0"/>
+                <a:ea typeface="Consolas" pitchFamily="34" charset="-122"/>
+                <a:cs typeface="Consolas" pitchFamily="34" charset="-120"/>
+              </a:rPr>
+              <a:t>)</a:t>
+            </a:r>
+            <a:pPr indent="0" marL="0">
+              <a:buNone/>
+            </a:pPr>
+            <a:r>
+              <a:rPr lang="en-US" sz="1200" dirty="0">
+                <a:solidFill>
+                  <a:srgbClr val="B8B5D9"/>
+                </a:solidFill>
+                <a:latin typeface="Consolas" pitchFamily="34" charset="0"/>
+                <a:ea typeface="Consolas" pitchFamily="34" charset="-122"/>
+                <a:cs typeface="Consolas" pitchFamily="34" charset="-120"/>
+              </a:rPr>
               <a:t>,</a:t>
             </a:r>
             <a:pPr indent="0" marL="0">
               <a:buNone/>
             </a:pPr>
+            <a:r>
+              <a:rPr lang="en-US" sz="1200" dirty="0">
+                <a:solidFill>
+                  <a:srgbClr val="FAF8FF"/>
+                </a:solidFill>
+                <a:latin typeface="Consolas" pitchFamily="34" charset="0"/>
+                <a:ea typeface="Consolas" pitchFamily="34" charset="-122"/>
+                <a:cs typeface="Consolas" pitchFamily="34" charset="-120"/>
+              </a:rPr>
+              <a:t> </a:t>
+            </a:r>
+            <a:pPr indent="0" marL="0">
+              <a:buNone/>
+            </a:pPr>
+            <a:r>
+              <a:rPr lang="en-US" sz="1200" dirty="0">
+                <a:solidFill>
+                  <a:srgbClr val="FB7185"/>
+                </a:solidFill>
+                <a:latin typeface="Consolas" pitchFamily="34" charset="0"/>
+                <a:ea typeface="Consolas" pitchFamily="34" charset="-122"/>
+                <a:cs typeface="Consolas" pitchFamily="34" charset="-120"/>
+              </a:rPr>
+              <a:t>new</a:t>
+            </a:r>
+            <a:pPr indent="0" marL="0">
+              <a:buNone/>
+            </a:pPr>
+            <a:r>
+              <a:rPr lang="en-US" sz="1200" dirty="0">
+                <a:solidFill>
+                  <a:srgbClr val="FAF8FF"/>
+                </a:solidFill>
+                <a:latin typeface="Consolas" pitchFamily="34" charset="0"/>
+                <a:ea typeface="Consolas" pitchFamily="34" charset="-122"/>
+                <a:cs typeface="Consolas" pitchFamily="34" charset="-120"/>
+              </a:rPr>
+              <a:t> </a:t>
+            </a:r>
+            <a:pPr indent="0" marL="0">
+              <a:buNone/>
+            </a:pPr>
+            <a:r>
+              <a:rPr lang="en-US" sz="1200" dirty="0">
+                <a:solidFill>
+                  <a:srgbClr val="FAF8FF"/>
+                </a:solidFill>
+                <a:latin typeface="Consolas" pitchFamily="34" charset="0"/>
+                <a:ea typeface="Consolas" pitchFamily="34" charset="-122"/>
+                <a:cs typeface="Consolas" pitchFamily="34" charset="-120"/>
+              </a:rPr>
+              <a:t>DefaultAzureCredential</a:t>
+            </a:r>
+            <a:pPr indent="0" marL="0">
+              <a:buNone/>
+            </a:pPr>
+            <a:r>
+              <a:rPr lang="en-US" sz="1200" dirty="0">
+                <a:solidFill>
+                  <a:srgbClr val="B8B5D9"/>
+                </a:solidFill>
+                <a:latin typeface="Consolas" pitchFamily="34" charset="0"/>
+                <a:ea typeface="Consolas" pitchFamily="34" charset="-122"/>
+                <a:cs typeface="Consolas" pitchFamily="34" charset="-120"/>
+              </a:rPr>
+              <a:t>(</a:t>
+            </a:r>
+            <a:pPr indent="0" marL="0">
+              <a:buNone/>
+            </a:pPr>
+            <a:r>
+              <a:rPr lang="en-US" sz="1200" dirty="0">
+                <a:solidFill>
+                  <a:srgbClr val="B8B5D9"/>
+                </a:solidFill>
+                <a:latin typeface="Consolas" pitchFamily="34" charset="0"/>
+                <a:ea typeface="Consolas" pitchFamily="34" charset="-122"/>
+                <a:cs typeface="Consolas" pitchFamily="34" charset="-120"/>
+              </a:rPr>
+              <a:t>)</a:t>
+            </a:r>
+            <a:pPr indent="0" marL="0">
+              <a:buNone/>
+            </a:pPr>
+            <a:r>
+              <a:rPr lang="en-US" sz="1200" dirty="0">
+                <a:solidFill>
+                  <a:srgbClr val="B8B5D9"/>
+                </a:solidFill>
+                <a:latin typeface="Consolas" pitchFamily="34" charset="0"/>
+                <a:ea typeface="Consolas" pitchFamily="34" charset="-122"/>
+                <a:cs typeface="Consolas" pitchFamily="34" charset="-120"/>
+              </a:rPr>
+              <a:t>)</a:t>
+            </a:r>
+            <a:pPr indent="0" marL="0">
+              <a:buNone/>
+            </a:pPr>
             <a:endParaRPr lang="en-US" sz="1200" dirty="0"/>
           </a:p>
           <a:p>
@@ -7568,6 +8192,214 @@
                 <a:ea typeface="Consolas" pitchFamily="34" charset="-122"/>
                 <a:cs typeface="Consolas" pitchFamily="34" charset="-120"/>
               </a:rPr>
+              <a:t>    </a:t>
+            </a:r>
+            <a:pPr indent="0" marL="0">
+              <a:buNone/>
+            </a:pPr>
+            <a:r>
+              <a:rPr lang="en-US" sz="1200" dirty="0">
+                <a:solidFill>
+                  <a:srgbClr val="B8B5D9"/>
+                </a:solidFill>
+                <a:latin typeface="Consolas" pitchFamily="34" charset="0"/>
+                <a:ea typeface="Consolas" pitchFamily="34" charset="-122"/>
+                <a:cs typeface="Consolas" pitchFamily="34" charset="-120"/>
+              </a:rPr>
+              <a:t>.</a:t>
+            </a:r>
+            <a:pPr indent="0" marL="0">
+              <a:buNone/>
+            </a:pPr>
+            <a:r>
+              <a:rPr lang="en-US" sz="1200" dirty="0">
+                <a:solidFill>
+                  <a:srgbClr val="86EFAC"/>
+                </a:solidFill>
+                <a:latin typeface="Consolas" pitchFamily="34" charset="0"/>
+                <a:ea typeface="Consolas" pitchFamily="34" charset="-122"/>
+                <a:cs typeface="Consolas" pitchFamily="34" charset="-120"/>
+              </a:rPr>
+              <a:t>GetChatClient</a:t>
+            </a:r>
+            <a:pPr indent="0" marL="0">
+              <a:buNone/>
+            </a:pPr>
+            <a:r>
+              <a:rPr lang="en-US" sz="1200" dirty="0">
+                <a:solidFill>
+                  <a:srgbClr val="B8B5D9"/>
+                </a:solidFill>
+                <a:latin typeface="Consolas" pitchFamily="34" charset="0"/>
+                <a:ea typeface="Consolas" pitchFamily="34" charset="-122"/>
+                <a:cs typeface="Consolas" pitchFamily="34" charset="-120"/>
+              </a:rPr>
+              <a:t>(</a:t>
+            </a:r>
+            <a:pPr indent="0" marL="0">
+              <a:buNone/>
+            </a:pPr>
+            <a:r>
+              <a:rPr lang="en-US" sz="1200" dirty="0">
+                <a:solidFill>
+                  <a:srgbClr val="FBBF24"/>
+                </a:solidFill>
+                <a:latin typeface="Consolas" pitchFamily="34" charset="0"/>
+                <a:ea typeface="Consolas" pitchFamily="34" charset="-122"/>
+                <a:cs typeface="Consolas" pitchFamily="34" charset="-120"/>
+              </a:rPr>
+              <a:t>"gpt-4.1"</a:t>
+            </a:r>
+            <a:pPr indent="0" marL="0">
+              <a:buNone/>
+            </a:pPr>
+            <a:r>
+              <a:rPr lang="en-US" sz="1200" dirty="0">
+                <a:solidFill>
+                  <a:srgbClr val="B8B5D9"/>
+                </a:solidFill>
+                <a:latin typeface="Consolas" pitchFamily="34" charset="0"/>
+                <a:ea typeface="Consolas" pitchFamily="34" charset="-122"/>
+                <a:cs typeface="Consolas" pitchFamily="34" charset="-120"/>
+              </a:rPr>
+              <a:t>)</a:t>
+            </a:r>
+            <a:pPr indent="0" marL="0">
+              <a:buNone/>
+            </a:pPr>
+            <a:r>
+              <a:rPr lang="en-US" sz="1200" dirty="0">
+                <a:solidFill>
+                  <a:srgbClr val="B8B5D9"/>
+                </a:solidFill>
+                <a:latin typeface="Consolas" pitchFamily="34" charset="0"/>
+                <a:ea typeface="Consolas" pitchFamily="34" charset="-122"/>
+                <a:cs typeface="Consolas" pitchFamily="34" charset="-120"/>
+              </a:rPr>
+              <a:t>.</a:t>
+            </a:r>
+            <a:pPr indent="0" marL="0">
+              <a:buNone/>
+            </a:pPr>
+            <a:r>
+              <a:rPr lang="en-US" sz="1200" dirty="0">
+                <a:solidFill>
+                  <a:srgbClr val="86EFAC"/>
+                </a:solidFill>
+                <a:latin typeface="Consolas" pitchFamily="34" charset="0"/>
+                <a:ea typeface="Consolas" pitchFamily="34" charset="-122"/>
+                <a:cs typeface="Consolas" pitchFamily="34" charset="-120"/>
+              </a:rPr>
+              <a:t>AsIChatClient</a:t>
+            </a:r>
+            <a:pPr indent="0" marL="0">
+              <a:buNone/>
+            </a:pPr>
+            <a:r>
+              <a:rPr lang="en-US" sz="1200" dirty="0">
+                <a:solidFill>
+                  <a:srgbClr val="B8B5D9"/>
+                </a:solidFill>
+                <a:latin typeface="Consolas" pitchFamily="34" charset="0"/>
+                <a:ea typeface="Consolas" pitchFamily="34" charset="-122"/>
+                <a:cs typeface="Consolas" pitchFamily="34" charset="-120"/>
+              </a:rPr>
+              <a:t>(</a:t>
+            </a:r>
+            <a:pPr indent="0" marL="0">
+              <a:buNone/>
+            </a:pPr>
+            <a:r>
+              <a:rPr lang="en-US" sz="1200" dirty="0">
+                <a:solidFill>
+                  <a:srgbClr val="B8B5D9"/>
+                </a:solidFill>
+                <a:latin typeface="Consolas" pitchFamily="34" charset="0"/>
+                <a:ea typeface="Consolas" pitchFamily="34" charset="-122"/>
+                <a:cs typeface="Consolas" pitchFamily="34" charset="-120"/>
+              </a:rPr>
+              <a:t>)</a:t>
+            </a:r>
+            <a:pPr indent="0" marL="0">
+              <a:buNone/>
+            </a:pPr>
+            <a:endParaRPr lang="en-US" sz="1200" dirty="0"/>
+          </a:p>
+          <a:p>
+            <a:pPr indent="0" marL="0">
+              <a:buNone/>
+            </a:pPr>
+            <a:r>
+              <a:rPr lang="en-US" sz="1200" dirty="0">
+                <a:solidFill>
+                  <a:srgbClr val="FAF8FF"/>
+                </a:solidFill>
+                <a:latin typeface="Consolas" pitchFamily="34" charset="0"/>
+                <a:ea typeface="Consolas" pitchFamily="34" charset="-122"/>
+                <a:cs typeface="Consolas" pitchFamily="34" charset="-120"/>
+              </a:rPr>
+              <a:t>    </a:t>
+            </a:r>
+            <a:pPr indent="0" marL="0">
+              <a:buNone/>
+            </a:pPr>
+            <a:r>
+              <a:rPr lang="en-US" sz="1200" dirty="0">
+                <a:solidFill>
+                  <a:srgbClr val="B8B5D9"/>
+                </a:solidFill>
+                <a:latin typeface="Consolas" pitchFamily="34" charset="0"/>
+                <a:ea typeface="Consolas" pitchFamily="34" charset="-122"/>
+                <a:cs typeface="Consolas" pitchFamily="34" charset="-120"/>
+              </a:rPr>
+              <a:t>.</a:t>
+            </a:r>
+            <a:pPr indent="0" marL="0">
+              <a:buNone/>
+            </a:pPr>
+            <a:r>
+              <a:rPr lang="en-US" sz="1200" dirty="0">
+                <a:solidFill>
+                  <a:srgbClr val="86EFAC"/>
+                </a:solidFill>
+                <a:latin typeface="Consolas" pitchFamily="34" charset="0"/>
+                <a:ea typeface="Consolas" pitchFamily="34" charset="-122"/>
+                <a:cs typeface="Consolas" pitchFamily="34" charset="-120"/>
+              </a:rPr>
+              <a:t>AsAIAgent</a:t>
+            </a:r>
+            <a:pPr indent="0" marL="0">
+              <a:buNone/>
+            </a:pPr>
+            <a:r>
+              <a:rPr lang="en-US" sz="1200" dirty="0">
+                <a:solidFill>
+                  <a:srgbClr val="B8B5D9"/>
+                </a:solidFill>
+                <a:latin typeface="Consolas" pitchFamily="34" charset="0"/>
+                <a:ea typeface="Consolas" pitchFamily="34" charset="-122"/>
+                <a:cs typeface="Consolas" pitchFamily="34" charset="-120"/>
+              </a:rPr>
+              <a:t>(</a:t>
+            </a:r>
+            <a:pPr indent="0" marL="0">
+              <a:buNone/>
+            </a:pPr>
+            <a:endParaRPr lang="en-US" sz="1200" dirty="0"/>
+          </a:p>
+          <a:p>
+            <a:pPr indent="0" marL="0">
+              <a:buNone/>
+            </a:pPr>
+            <a:r>
+              <a:rPr lang="en-US" sz="1200" dirty="0">
+                <a:solidFill>
+                  <a:srgbClr val="FAF8FF"/>
+                </a:solidFill>
+                <a:latin typeface="Consolas" pitchFamily="34" charset="0"/>
+                <a:ea typeface="Consolas" pitchFamily="34" charset="-122"/>
+                <a:cs typeface="Consolas" pitchFamily="34" charset="-120"/>
+              </a:rPr>
               <a:t>        </a:t>
             </a:r>
             <a:pPr indent="0" marL="0">
@@ -7624,7 +8456,7 @@
                 <a:ea typeface="Consolas" pitchFamily="34" charset="-122"/>
                 <a:cs typeface="Consolas" pitchFamily="34" charset="-120"/>
               </a:rPr>
-              <a:t>"triage"</a:t>
+              <a:t>"expert"</a:t>
             </a:r>
             <a:pPr indent="0" marL="0">
               <a:buNone/>
@@ -7638,6 +8470,96 @@
                 <a:ea typeface="Consolas" pitchFamily="34" charset="-122"/>
                 <a:cs typeface="Consolas" pitchFamily="34" charset="-120"/>
               </a:rPr>
+              <a:t>,</a:t>
+            </a:r>
+            <a:pPr indent="0" marL="0">
+              <a:buNone/>
+            </a:pPr>
+            <a:endParaRPr lang="en-US" sz="1200" dirty="0"/>
+          </a:p>
+          <a:p>
+            <a:pPr indent="0" marL="0">
+              <a:buNone/>
+            </a:pPr>
+            <a:r>
+              <a:rPr lang="en-US" sz="1200" dirty="0">
+                <a:solidFill>
+                  <a:srgbClr val="FAF8FF"/>
+                </a:solidFill>
+                <a:latin typeface="Consolas" pitchFamily="34" charset="0"/>
+                <a:ea typeface="Consolas" pitchFamily="34" charset="-122"/>
+                <a:cs typeface="Consolas" pitchFamily="34" charset="-120"/>
+              </a:rPr>
+              <a:t>        </a:t>
+            </a:r>
+            <a:pPr indent="0" marL="0">
+              <a:buNone/>
+            </a:pPr>
+            <a:r>
+              <a:rPr lang="en-US" sz="1200" dirty="0">
+                <a:solidFill>
+                  <a:srgbClr val="FAF8FF"/>
+                </a:solidFill>
+                <a:latin typeface="Consolas" pitchFamily="34" charset="0"/>
+                <a:ea typeface="Consolas" pitchFamily="34" charset="-122"/>
+                <a:cs typeface="Consolas" pitchFamily="34" charset="-120"/>
+              </a:rPr>
+              <a:t>instructions</a:t>
+            </a:r>
+            <a:pPr indent="0" marL="0">
+              <a:buNone/>
+            </a:pPr>
+            <a:r>
+              <a:rPr lang="en-US" sz="1200" dirty="0">
+                <a:solidFill>
+                  <a:srgbClr val="B8B5D9"/>
+                </a:solidFill>
+                <a:latin typeface="Consolas" pitchFamily="34" charset="0"/>
+                <a:ea typeface="Consolas" pitchFamily="34" charset="-122"/>
+                <a:cs typeface="Consolas" pitchFamily="34" charset="-120"/>
+              </a:rPr>
+              <a:t>:</a:t>
+            </a:r>
+            <a:pPr indent="0" marL="0">
+              <a:buNone/>
+            </a:pPr>
+            <a:r>
+              <a:rPr lang="en-US" sz="1200" dirty="0">
+                <a:solidFill>
+                  <a:srgbClr val="FAF8FF"/>
+                </a:solidFill>
+                <a:latin typeface="Consolas" pitchFamily="34" charset="0"/>
+                <a:ea typeface="Consolas" pitchFamily="34" charset="-122"/>
+                <a:cs typeface="Consolas" pitchFamily="34" charset="-120"/>
+              </a:rPr>
+              <a:t> </a:t>
+            </a:r>
+            <a:pPr indent="0" marL="0">
+              <a:buNone/>
+            </a:pPr>
+            <a:r>
+              <a:rPr lang="en-US" sz="1200" dirty="0">
+                <a:solidFill>
+                  <a:srgbClr val="FBBF24"/>
+                </a:solidFill>
+                <a:latin typeface="Consolas" pitchFamily="34" charset="0"/>
+                <a:ea typeface="Consolas" pitchFamily="34" charset="-122"/>
+                <a:cs typeface="Consolas" pitchFamily="34" charset="-120"/>
+              </a:rPr>
+              <a:t>"Answer with depth and current context."</a:t>
+            </a:r>
+            <a:pPr indent="0" marL="0">
+              <a:buNone/>
+            </a:pPr>
+            <a:r>
+              <a:rPr lang="en-US" sz="1200" dirty="0">
+                <a:solidFill>
+                  <a:srgbClr val="B8B5D9"/>
+                </a:solidFill>
+                <a:latin typeface="Consolas" pitchFamily="34" charset="0"/>
+                <a:ea typeface="Consolas" pitchFamily="34" charset="-122"/>
+                <a:cs typeface="Consolas" pitchFamily="34" charset="-120"/>
+              </a:rPr>
               <a:t>)</a:t>
             </a:r>
             <a:pPr indent="0" marL="0">
@@ -7678,7 +8600,7 @@
                 <a:ea typeface="Consolas" pitchFamily="34" charset="-122"/>
                 <a:cs typeface="Consolas" pitchFamily="34" charset="-120"/>
               </a:rPr>
-              <a:t>// Cloud — Azure OpenAI, frontier reasoning</a:t>
+              <a:t>// MAF workflow — pipe local → cloud, expose as an agent</a:t>
             </a:r>
             <a:pPr indent="0" marL="0">
               <a:buNone/>
@@ -7692,13 +8614,13 @@
             <a:r>
               <a:rPr lang="en-US" sz="1200" dirty="0">
                 <a:solidFill>
-                  <a:srgbClr val="A78BFA"/>
-                </a:solidFill>
-                <a:latin typeface="Consolas" pitchFamily="34" charset="0"/>
-                <a:ea typeface="Consolas" pitchFamily="34" charset="-122"/>
-                <a:cs typeface="Consolas" pitchFamily="34" charset="-120"/>
-              </a:rPr>
-              <a:t>AIAgent</a:t>
+                  <a:srgbClr val="FB7185"/>
+                </a:solidFill>
+                <a:latin typeface="Consolas" pitchFamily="34" charset="0"/>
+                <a:ea typeface="Consolas" pitchFamily="34" charset="-122"/>
+                <a:cs typeface="Consolas" pitchFamily="34" charset="-120"/>
+              </a:rPr>
+              <a:t>var</a:t>
             </a:r>
             <a:pPr indent="0" marL="0">
               <a:buNone/>
@@ -7712,7 +8634,7 @@
                 <a:ea typeface="Consolas" pitchFamily="34" charset="-122"/>
                 <a:cs typeface="Consolas" pitchFamily="34" charset="-120"/>
               </a:rPr>
-              <a:t> expert </a:t>
+              <a:t> workflow </a:t>
             </a:r>
             <a:pPr indent="0" marL="0">
               <a:buNone/>
@@ -7740,6 +8662,256 @@
                 <a:ea typeface="Consolas" pitchFamily="34" charset="-122"/>
                 <a:cs typeface="Consolas" pitchFamily="34" charset="-120"/>
               </a:rPr>
+              <a:t> AgentWorkflowBuilder</a:t>
+            </a:r>
+            <a:pPr indent="0" marL="0">
+              <a:buNone/>
+            </a:pPr>
+            <a:endParaRPr lang="en-US" sz="1200" dirty="0"/>
+          </a:p>
+          <a:p>
+            <a:pPr indent="0" marL="0">
+              <a:buNone/>
+            </a:pPr>
+            <a:r>
+              <a:rPr lang="en-US" sz="1200" dirty="0">
+                <a:solidFill>
+                  <a:srgbClr val="FAF8FF"/>
+                </a:solidFill>
+                <a:latin typeface="Consolas" pitchFamily="34" charset="0"/>
+                <a:ea typeface="Consolas" pitchFamily="34" charset="-122"/>
+                <a:cs typeface="Consolas" pitchFamily="34" charset="-120"/>
+              </a:rPr>
+              <a:t>    </a:t>
+            </a:r>
+            <a:pPr indent="0" marL="0">
+              <a:buNone/>
+            </a:pPr>
+            <a:r>
+              <a:rPr lang="en-US" sz="1200" dirty="0">
+                <a:solidFill>
+                  <a:srgbClr val="B8B5D9"/>
+                </a:solidFill>
+                <a:latin typeface="Consolas" pitchFamily="34" charset="0"/>
+                <a:ea typeface="Consolas" pitchFamily="34" charset="-122"/>
+                <a:cs typeface="Consolas" pitchFamily="34" charset="-120"/>
+              </a:rPr>
+              <a:t>.</a:t>
+            </a:r>
+            <a:pPr indent="0" marL="0">
+              <a:buNone/>
+            </a:pPr>
+            <a:r>
+              <a:rPr lang="en-US" sz="1200" dirty="0">
+                <a:solidFill>
+                  <a:srgbClr val="86EFAC"/>
+                </a:solidFill>
+                <a:latin typeface="Consolas" pitchFamily="34" charset="0"/>
+                <a:ea typeface="Consolas" pitchFamily="34" charset="-122"/>
+                <a:cs typeface="Consolas" pitchFamily="34" charset="-120"/>
+              </a:rPr>
+              <a:t>BuildSequential</a:t>
+            </a:r>
+            <a:pPr indent="0" marL="0">
+              <a:buNone/>
+            </a:pPr>
+            <a:r>
+              <a:rPr lang="en-US" sz="1200" dirty="0">
+                <a:solidFill>
+                  <a:srgbClr val="B8B5D9"/>
+                </a:solidFill>
+                <a:latin typeface="Consolas" pitchFamily="34" charset="0"/>
+                <a:ea typeface="Consolas" pitchFamily="34" charset="-122"/>
+                <a:cs typeface="Consolas" pitchFamily="34" charset="-120"/>
+              </a:rPr>
+              <a:t>(</a:t>
+            </a:r>
+            <a:pPr indent="0" marL="0">
+              <a:buNone/>
+            </a:pPr>
+            <a:r>
+              <a:rPr lang="en-US" sz="1200" dirty="0">
+                <a:solidFill>
+                  <a:srgbClr val="FBBF24"/>
+                </a:solidFill>
+                <a:latin typeface="Consolas" pitchFamily="34" charset="0"/>
+                <a:ea typeface="Consolas" pitchFamily="34" charset="-122"/>
+                <a:cs typeface="Consolas" pitchFamily="34" charset="-120"/>
+              </a:rPr>
+              <a:t>"local-then-cloud"</a:t>
+            </a:r>
+            <a:pPr indent="0" marL="0">
+              <a:buNone/>
+            </a:pPr>
+            <a:r>
+              <a:rPr lang="en-US" sz="1200" dirty="0">
+                <a:solidFill>
+                  <a:srgbClr val="B8B5D9"/>
+                </a:solidFill>
+                <a:latin typeface="Consolas" pitchFamily="34" charset="0"/>
+                <a:ea typeface="Consolas" pitchFamily="34" charset="-122"/>
+                <a:cs typeface="Consolas" pitchFamily="34" charset="-120"/>
+              </a:rPr>
+              <a:t>,</a:t>
+            </a:r>
+            <a:pPr indent="0" marL="0">
+              <a:buNone/>
+            </a:pPr>
+            <a:r>
+              <a:rPr lang="en-US" sz="1200" dirty="0">
+                <a:solidFill>
+                  <a:srgbClr val="FAF8FF"/>
+                </a:solidFill>
+                <a:latin typeface="Consolas" pitchFamily="34" charset="0"/>
+                <a:ea typeface="Consolas" pitchFamily="34" charset="-122"/>
+                <a:cs typeface="Consolas" pitchFamily="34" charset="-120"/>
+              </a:rPr>
+              <a:t> triage</a:t>
+            </a:r>
+            <a:pPr indent="0" marL="0">
+              <a:buNone/>
+            </a:pPr>
+            <a:r>
+              <a:rPr lang="en-US" sz="1200" dirty="0">
+                <a:solidFill>
+                  <a:srgbClr val="B8B5D9"/>
+                </a:solidFill>
+                <a:latin typeface="Consolas" pitchFamily="34" charset="0"/>
+                <a:ea typeface="Consolas" pitchFamily="34" charset="-122"/>
+                <a:cs typeface="Consolas" pitchFamily="34" charset="-120"/>
+              </a:rPr>
+              <a:t>,</a:t>
+            </a:r>
+            <a:pPr indent="0" marL="0">
+              <a:buNone/>
+            </a:pPr>
+            <a:r>
+              <a:rPr lang="en-US" sz="1200" dirty="0">
+                <a:solidFill>
+                  <a:srgbClr val="FAF8FF"/>
+                </a:solidFill>
+                <a:latin typeface="Consolas" pitchFamily="34" charset="0"/>
+                <a:ea typeface="Consolas" pitchFamily="34" charset="-122"/>
+                <a:cs typeface="Consolas" pitchFamily="34" charset="-120"/>
+              </a:rPr>
+              <a:t> expert</a:t>
+            </a:r>
+            <a:pPr indent="0" marL="0">
+              <a:buNone/>
+            </a:pPr>
+            <a:r>
+              <a:rPr lang="en-US" sz="1200" dirty="0">
+                <a:solidFill>
+                  <a:srgbClr val="B8B5D9"/>
+                </a:solidFill>
+                <a:latin typeface="Consolas" pitchFamily="34" charset="0"/>
+                <a:ea typeface="Consolas" pitchFamily="34" charset="-122"/>
+                <a:cs typeface="Consolas" pitchFamily="34" charset="-120"/>
+              </a:rPr>
+              <a:t>)</a:t>
+            </a:r>
+            <a:pPr indent="0" marL="0">
+              <a:buNone/>
+            </a:pPr>
+            <a:endParaRPr lang="en-US" sz="1200" dirty="0"/>
+          </a:p>
+          <a:p>
+            <a:pPr indent="0" marL="0">
+              <a:buNone/>
+            </a:pPr>
+            <a:r>
+              <a:rPr lang="en-US" sz="1200" dirty="0">
+                <a:solidFill>
+                  <a:srgbClr val="FAF8FF"/>
+                </a:solidFill>
+                <a:latin typeface="Consolas" pitchFamily="34" charset="0"/>
+                <a:ea typeface="Consolas" pitchFamily="34" charset="-122"/>
+                <a:cs typeface="Consolas" pitchFamily="34" charset="-120"/>
+              </a:rPr>
+              <a:t>    </a:t>
+            </a:r>
+            <a:pPr indent="0" marL="0">
+              <a:buNone/>
+            </a:pPr>
+            <a:r>
+              <a:rPr lang="en-US" sz="1200" dirty="0">
+                <a:solidFill>
+                  <a:srgbClr val="B8B5D9"/>
+                </a:solidFill>
+                <a:latin typeface="Consolas" pitchFamily="34" charset="0"/>
+                <a:ea typeface="Consolas" pitchFamily="34" charset="-122"/>
+                <a:cs typeface="Consolas" pitchFamily="34" charset="-120"/>
+              </a:rPr>
+              <a:t>.</a:t>
+            </a:r>
+            <a:pPr indent="0" marL="0">
+              <a:buNone/>
+            </a:pPr>
+            <a:r>
+              <a:rPr lang="en-US" sz="1200" dirty="0">
+                <a:solidFill>
+                  <a:srgbClr val="86EFAC"/>
+                </a:solidFill>
+                <a:latin typeface="Consolas" pitchFamily="34" charset="0"/>
+                <a:ea typeface="Consolas" pitchFamily="34" charset="-122"/>
+                <a:cs typeface="Consolas" pitchFamily="34" charset="-120"/>
+              </a:rPr>
+              <a:t>AsAIAgent</a:t>
+            </a:r>
+            <a:pPr indent="0" marL="0">
+              <a:buNone/>
+            </a:pPr>
+            <a:r>
+              <a:rPr lang="en-US" sz="1200" dirty="0">
+                <a:solidFill>
+                  <a:srgbClr val="B8B5D9"/>
+                </a:solidFill>
+                <a:latin typeface="Consolas" pitchFamily="34" charset="0"/>
+                <a:ea typeface="Consolas" pitchFamily="34" charset="-122"/>
+                <a:cs typeface="Consolas" pitchFamily="34" charset="-120"/>
+              </a:rPr>
+              <a:t>(</a:t>
+            </a:r>
+            <a:pPr indent="0" marL="0">
+              <a:buNone/>
+            </a:pPr>
+            <a:r>
+              <a:rPr lang="en-US" sz="1200" dirty="0">
+                <a:solidFill>
+                  <a:srgbClr val="FBBF24"/>
+                </a:solidFill>
+                <a:latin typeface="Consolas" pitchFamily="34" charset="0"/>
+                <a:ea typeface="Consolas" pitchFamily="34" charset="-122"/>
+                <a:cs typeface="Consolas" pitchFamily="34" charset="-120"/>
+              </a:rPr>
+              <a:t>"local-then-cloud"</a:t>
+            </a:r>
+            <a:pPr indent="0" marL="0">
+              <a:buNone/>
+            </a:pPr>
+            <a:r>
+              <a:rPr lang="en-US" sz="1200" dirty="0">
+                <a:solidFill>
+                  <a:srgbClr val="B8B5D9"/>
+                </a:solidFill>
+                <a:latin typeface="Consolas" pitchFamily="34" charset="0"/>
+                <a:ea typeface="Consolas" pitchFamily="34" charset="-122"/>
+                <a:cs typeface="Consolas" pitchFamily="34" charset="-120"/>
+              </a:rPr>
+              <a:t>,</a:t>
+            </a:r>
+            <a:pPr indent="0" marL="0">
+              <a:buNone/>
+            </a:pPr>
+            <a:r>
+              <a:rPr lang="en-US" sz="1200" dirty="0">
+                <a:solidFill>
+                  <a:srgbClr val="FAF8FF"/>
+                </a:solidFill>
+                <a:latin typeface="Consolas" pitchFamily="34" charset="0"/>
+                <a:ea typeface="Consolas" pitchFamily="34" charset="-122"/>
+                <a:cs typeface="Consolas" pitchFamily="34" charset="-120"/>
+              </a:rPr>
               <a:t> </a:t>
             </a:r>
             <a:pPr indent="0" marL="0">
@@ -7748,843 +8920,13 @@
             <a:r>
               <a:rPr lang="en-US" sz="1200" dirty="0">
                 <a:solidFill>
-                  <a:srgbClr val="FB7185"/>
-                </a:solidFill>
-                <a:latin typeface="Consolas" pitchFamily="34" charset="0"/>
-                <a:ea typeface="Consolas" pitchFamily="34" charset="-122"/>
-                <a:cs typeface="Consolas" pitchFamily="34" charset="-120"/>
-              </a:rPr>
-              <a:t>new</a:t>
-            </a:r>
-            <a:pPr indent="0" marL="0">
-              <a:buNone/>
-            </a:pPr>
-            <a:r>
-              <a:rPr lang="en-US" sz="1200" dirty="0">
-                <a:solidFill>
-                  <a:srgbClr val="FAF8FF"/>
-                </a:solidFill>
-                <a:latin typeface="Consolas" pitchFamily="34" charset="0"/>
-                <a:ea typeface="Consolas" pitchFamily="34" charset="-122"/>
-                <a:cs typeface="Consolas" pitchFamily="34" charset="-120"/>
-              </a:rPr>
-              <a:t> </a:t>
-            </a:r>
-            <a:pPr indent="0" marL="0">
-              <a:buNone/>
-            </a:pPr>
-            <a:r>
-              <a:rPr lang="en-US" sz="1200" dirty="0">
-                <a:solidFill>
-                  <a:srgbClr val="FAF8FF"/>
-                </a:solidFill>
-                <a:latin typeface="Consolas" pitchFamily="34" charset="0"/>
-                <a:ea typeface="Consolas" pitchFamily="34" charset="-122"/>
-                <a:cs typeface="Consolas" pitchFamily="34" charset="-120"/>
-              </a:rPr>
-              <a:t>AzureOpenAIClient</a:t>
-            </a:r>
-            <a:pPr indent="0" marL="0">
-              <a:buNone/>
-            </a:pPr>
-            <a:r>
-              <a:rPr lang="en-US" sz="1200" dirty="0">
-                <a:solidFill>
-                  <a:srgbClr val="B8B5D9"/>
-                </a:solidFill>
-                <a:latin typeface="Consolas" pitchFamily="34" charset="0"/>
-                <a:ea typeface="Consolas" pitchFamily="34" charset="-122"/>
-                <a:cs typeface="Consolas" pitchFamily="34" charset="-120"/>
-              </a:rPr>
-              <a:t>(</a:t>
-            </a:r>
-            <a:pPr indent="0" marL="0">
-              <a:buNone/>
-            </a:pPr>
-            <a:endParaRPr lang="en-US" sz="1200" dirty="0"/>
-          </a:p>
-          <a:p>
-            <a:pPr indent="0" marL="0">
-              <a:buNone/>
-            </a:pPr>
-            <a:r>
-              <a:rPr lang="en-US" sz="1200" dirty="0">
-                <a:solidFill>
-                  <a:srgbClr val="FAF8FF"/>
-                </a:solidFill>
-                <a:latin typeface="Consolas" pitchFamily="34" charset="0"/>
-                <a:ea typeface="Consolas" pitchFamily="34" charset="-122"/>
-                <a:cs typeface="Consolas" pitchFamily="34" charset="-120"/>
-              </a:rPr>
-              <a:t>        endpoint</a:t>
-            </a:r>
-            <a:pPr indent="0" marL="0">
-              <a:buNone/>
-            </a:pPr>
-            <a:r>
-              <a:rPr lang="en-US" sz="1200" dirty="0">
-                <a:solidFill>
-                  <a:srgbClr val="B8B5D9"/>
-                </a:solidFill>
-                <a:latin typeface="Consolas" pitchFamily="34" charset="0"/>
-                <a:ea typeface="Consolas" pitchFamily="34" charset="-122"/>
-                <a:cs typeface="Consolas" pitchFamily="34" charset="-120"/>
-              </a:rPr>
-              <a:t>,</a:t>
-            </a:r>
-            <a:pPr indent="0" marL="0">
-              <a:buNone/>
-            </a:pPr>
-            <a:r>
-              <a:rPr lang="en-US" sz="1200" dirty="0">
-                <a:solidFill>
-                  <a:srgbClr val="FAF8FF"/>
-                </a:solidFill>
-                <a:latin typeface="Consolas" pitchFamily="34" charset="0"/>
-                <a:ea typeface="Consolas" pitchFamily="34" charset="-122"/>
-                <a:cs typeface="Consolas" pitchFamily="34" charset="-120"/>
-              </a:rPr>
-              <a:t> </a:t>
-            </a:r>
-            <a:pPr indent="0" marL="0">
-              <a:buNone/>
-            </a:pPr>
-            <a:r>
-              <a:rPr lang="en-US" sz="1200" dirty="0">
-                <a:solidFill>
-                  <a:srgbClr val="FB7185"/>
-                </a:solidFill>
-                <a:latin typeface="Consolas" pitchFamily="34" charset="0"/>
-                <a:ea typeface="Consolas" pitchFamily="34" charset="-122"/>
-                <a:cs typeface="Consolas" pitchFamily="34" charset="-120"/>
-              </a:rPr>
-              <a:t>new</a:t>
-            </a:r>
-            <a:pPr indent="0" marL="0">
-              <a:buNone/>
-            </a:pPr>
-            <a:r>
-              <a:rPr lang="en-US" sz="1200" dirty="0">
-                <a:solidFill>
-                  <a:srgbClr val="FAF8FF"/>
-                </a:solidFill>
-                <a:latin typeface="Consolas" pitchFamily="34" charset="0"/>
-                <a:ea typeface="Consolas" pitchFamily="34" charset="-122"/>
-                <a:cs typeface="Consolas" pitchFamily="34" charset="-120"/>
-              </a:rPr>
-              <a:t> </a:t>
-            </a:r>
-            <a:pPr indent="0" marL="0">
-              <a:buNone/>
-            </a:pPr>
-            <a:r>
-              <a:rPr lang="en-US" sz="1200" dirty="0">
-                <a:solidFill>
-                  <a:srgbClr val="FAF8FF"/>
-                </a:solidFill>
-                <a:latin typeface="Consolas" pitchFamily="34" charset="0"/>
-                <a:ea typeface="Consolas" pitchFamily="34" charset="-122"/>
-                <a:cs typeface="Consolas" pitchFamily="34" charset="-120"/>
-              </a:rPr>
-              <a:t>DefaultAzureCredential</a:t>
-            </a:r>
-            <a:pPr indent="0" marL="0">
-              <a:buNone/>
-            </a:pPr>
-            <a:r>
-              <a:rPr lang="en-US" sz="1200" dirty="0">
-                <a:solidFill>
-                  <a:srgbClr val="B8B5D9"/>
-                </a:solidFill>
-                <a:latin typeface="Consolas" pitchFamily="34" charset="0"/>
-                <a:ea typeface="Consolas" pitchFamily="34" charset="-122"/>
-                <a:cs typeface="Consolas" pitchFamily="34" charset="-120"/>
-              </a:rPr>
-              <a:t>(</a:t>
-            </a:r>
-            <a:pPr indent="0" marL="0">
-              <a:buNone/>
-            </a:pPr>
-            <a:r>
-              <a:rPr lang="en-US" sz="1200" dirty="0">
-                <a:solidFill>
-                  <a:srgbClr val="B8B5D9"/>
-                </a:solidFill>
-                <a:latin typeface="Consolas" pitchFamily="34" charset="0"/>
-                <a:ea typeface="Consolas" pitchFamily="34" charset="-122"/>
-                <a:cs typeface="Consolas" pitchFamily="34" charset="-120"/>
-              </a:rPr>
-              <a:t>)</a:t>
-            </a:r>
-            <a:pPr indent="0" marL="0">
-              <a:buNone/>
-            </a:pPr>
-            <a:r>
-              <a:rPr lang="en-US" sz="1200" dirty="0">
-                <a:solidFill>
-                  <a:srgbClr val="B8B5D9"/>
-                </a:solidFill>
-                <a:latin typeface="Consolas" pitchFamily="34" charset="0"/>
-                <a:ea typeface="Consolas" pitchFamily="34" charset="-122"/>
-                <a:cs typeface="Consolas" pitchFamily="34" charset="-120"/>
-              </a:rPr>
-              <a:t>)</a:t>
-            </a:r>
-            <a:pPr indent="0" marL="0">
-              <a:buNone/>
-            </a:pPr>
-            <a:endParaRPr lang="en-US" sz="1200" dirty="0"/>
-          </a:p>
-          <a:p>
-            <a:pPr indent="0" marL="0">
-              <a:buNone/>
-            </a:pPr>
-            <a:r>
-              <a:rPr lang="en-US" sz="1200" dirty="0">
-                <a:solidFill>
-                  <a:srgbClr val="FAF8FF"/>
-                </a:solidFill>
-                <a:latin typeface="Consolas" pitchFamily="34" charset="0"/>
-                <a:ea typeface="Consolas" pitchFamily="34" charset="-122"/>
-                <a:cs typeface="Consolas" pitchFamily="34" charset="-120"/>
-              </a:rPr>
-              <a:t>    </a:t>
-            </a:r>
-            <a:pPr indent="0" marL="0">
-              <a:buNone/>
-            </a:pPr>
-            <a:r>
-              <a:rPr lang="en-US" sz="1200" dirty="0">
-                <a:solidFill>
-                  <a:srgbClr val="B8B5D9"/>
-                </a:solidFill>
-                <a:latin typeface="Consolas" pitchFamily="34" charset="0"/>
-                <a:ea typeface="Consolas" pitchFamily="34" charset="-122"/>
-                <a:cs typeface="Consolas" pitchFamily="34" charset="-120"/>
-              </a:rPr>
-              <a:t>.</a:t>
-            </a:r>
-            <a:pPr indent="0" marL="0">
-              <a:buNone/>
-            </a:pPr>
-            <a:r>
-              <a:rPr lang="en-US" sz="1200" dirty="0">
-                <a:solidFill>
-                  <a:srgbClr val="86EFAC"/>
-                </a:solidFill>
-                <a:latin typeface="Consolas" pitchFamily="34" charset="0"/>
-                <a:ea typeface="Consolas" pitchFamily="34" charset="-122"/>
-                <a:cs typeface="Consolas" pitchFamily="34" charset="-120"/>
-              </a:rPr>
-              <a:t>GetChatClient</a:t>
-            </a:r>
-            <a:pPr indent="0" marL="0">
-              <a:buNone/>
-            </a:pPr>
-            <a:r>
-              <a:rPr lang="en-US" sz="1200" dirty="0">
-                <a:solidFill>
-                  <a:srgbClr val="B8B5D9"/>
-                </a:solidFill>
-                <a:latin typeface="Consolas" pitchFamily="34" charset="0"/>
-                <a:ea typeface="Consolas" pitchFamily="34" charset="-122"/>
-                <a:cs typeface="Consolas" pitchFamily="34" charset="-120"/>
-              </a:rPr>
-              <a:t>(</a:t>
-            </a:r>
-            <a:pPr indent="0" marL="0">
-              <a:buNone/>
-            </a:pPr>
-            <a:r>
-              <a:rPr lang="en-US" sz="1200" dirty="0">
-                <a:solidFill>
                   <a:srgbClr val="FBBF24"/>
                 </a:solidFill>
                 <a:latin typeface="Consolas" pitchFamily="34" charset="0"/>
                 <a:ea typeface="Consolas" pitchFamily="34" charset="-122"/>
                 <a:cs typeface="Consolas" pitchFamily="34" charset="-120"/>
               </a:rPr>
-              <a:t>"gpt-4.1"</a:t>
-            </a:r>
-            <a:pPr indent="0" marL="0">
-              <a:buNone/>
-            </a:pPr>
-            <a:r>
-              <a:rPr lang="en-US" sz="1200" dirty="0">
-                <a:solidFill>
-                  <a:srgbClr val="B8B5D9"/>
-                </a:solidFill>
-                <a:latin typeface="Consolas" pitchFamily="34" charset="0"/>
-                <a:ea typeface="Consolas" pitchFamily="34" charset="-122"/>
-                <a:cs typeface="Consolas" pitchFamily="34" charset="-120"/>
-              </a:rPr>
-              <a:t>)</a:t>
-            </a:r>
-            <a:pPr indent="0" marL="0">
-              <a:buNone/>
-            </a:pPr>
-            <a:r>
-              <a:rPr lang="en-US" sz="1200" dirty="0">
-                <a:solidFill>
-                  <a:srgbClr val="B8B5D9"/>
-                </a:solidFill>
-                <a:latin typeface="Consolas" pitchFamily="34" charset="0"/>
-                <a:ea typeface="Consolas" pitchFamily="34" charset="-122"/>
-                <a:cs typeface="Consolas" pitchFamily="34" charset="-120"/>
-              </a:rPr>
-              <a:t>.</a:t>
-            </a:r>
-            <a:pPr indent="0" marL="0">
-              <a:buNone/>
-            </a:pPr>
-            <a:r>
-              <a:rPr lang="en-US" sz="1200" dirty="0">
-                <a:solidFill>
-                  <a:srgbClr val="86EFAC"/>
-                </a:solidFill>
-                <a:latin typeface="Consolas" pitchFamily="34" charset="0"/>
-                <a:ea typeface="Consolas" pitchFamily="34" charset="-122"/>
-                <a:cs typeface="Consolas" pitchFamily="34" charset="-120"/>
-              </a:rPr>
-              <a:t>AsIChatClient</a:t>
-            </a:r>
-            <a:pPr indent="0" marL="0">
-              <a:buNone/>
-            </a:pPr>
-            <a:r>
-              <a:rPr lang="en-US" sz="1200" dirty="0">
-                <a:solidFill>
-                  <a:srgbClr val="B8B5D9"/>
-                </a:solidFill>
-                <a:latin typeface="Consolas" pitchFamily="34" charset="0"/>
-                <a:ea typeface="Consolas" pitchFamily="34" charset="-122"/>
-                <a:cs typeface="Consolas" pitchFamily="34" charset="-120"/>
-              </a:rPr>
-              <a:t>(</a:t>
-            </a:r>
-            <a:pPr indent="0" marL="0">
-              <a:buNone/>
-            </a:pPr>
-            <a:r>
-              <a:rPr lang="en-US" sz="1200" dirty="0">
-                <a:solidFill>
-                  <a:srgbClr val="B8B5D9"/>
-                </a:solidFill>
-                <a:latin typeface="Consolas" pitchFamily="34" charset="0"/>
-                <a:ea typeface="Consolas" pitchFamily="34" charset="-122"/>
-                <a:cs typeface="Consolas" pitchFamily="34" charset="-120"/>
-              </a:rPr>
-              <a:t>)</a:t>
-            </a:r>
-            <a:pPr indent="0" marL="0">
-              <a:buNone/>
-            </a:pPr>
-            <a:endParaRPr lang="en-US" sz="1200" dirty="0"/>
-          </a:p>
-          <a:p>
-            <a:pPr indent="0" marL="0">
-              <a:buNone/>
-            </a:pPr>
-            <a:r>
-              <a:rPr lang="en-US" sz="1200" dirty="0">
-                <a:solidFill>
-                  <a:srgbClr val="FAF8FF"/>
-                </a:solidFill>
-                <a:latin typeface="Consolas" pitchFamily="34" charset="0"/>
-                <a:ea typeface="Consolas" pitchFamily="34" charset="-122"/>
-                <a:cs typeface="Consolas" pitchFamily="34" charset="-120"/>
-              </a:rPr>
-              <a:t>    </a:t>
-            </a:r>
-            <a:pPr indent="0" marL="0">
-              <a:buNone/>
-            </a:pPr>
-            <a:r>
-              <a:rPr lang="en-US" sz="1200" dirty="0">
-                <a:solidFill>
-                  <a:srgbClr val="B8B5D9"/>
-                </a:solidFill>
-                <a:latin typeface="Consolas" pitchFamily="34" charset="0"/>
-                <a:ea typeface="Consolas" pitchFamily="34" charset="-122"/>
-                <a:cs typeface="Consolas" pitchFamily="34" charset="-120"/>
-              </a:rPr>
-              <a:t>.</a:t>
-            </a:r>
-            <a:pPr indent="0" marL="0">
-              <a:buNone/>
-            </a:pPr>
-            <a:r>
-              <a:rPr lang="en-US" sz="1200" dirty="0">
-                <a:solidFill>
-                  <a:srgbClr val="86EFAC"/>
-                </a:solidFill>
-                <a:latin typeface="Consolas" pitchFamily="34" charset="0"/>
-                <a:ea typeface="Consolas" pitchFamily="34" charset="-122"/>
-                <a:cs typeface="Consolas" pitchFamily="34" charset="-120"/>
-              </a:rPr>
-              <a:t>CreateAIAgent</a:t>
-            </a:r>
-            <a:pPr indent="0" marL="0">
-              <a:buNone/>
-            </a:pPr>
-            <a:r>
-              <a:rPr lang="en-US" sz="1200" dirty="0">
-                <a:solidFill>
-                  <a:srgbClr val="B8B5D9"/>
-                </a:solidFill>
-                <a:latin typeface="Consolas" pitchFamily="34" charset="0"/>
-                <a:ea typeface="Consolas" pitchFamily="34" charset="-122"/>
-                <a:cs typeface="Consolas" pitchFamily="34" charset="-120"/>
-              </a:rPr>
-              <a:t>(</a:t>
-            </a:r>
-            <a:pPr indent="0" marL="0">
-              <a:buNone/>
-            </a:pPr>
-            <a:endParaRPr lang="en-US" sz="1200" dirty="0"/>
-          </a:p>
-          <a:p>
-            <a:pPr indent="0" marL="0">
-              <a:buNone/>
-            </a:pPr>
-            <a:r>
-              <a:rPr lang="en-US" sz="1200" dirty="0">
-                <a:solidFill>
-                  <a:srgbClr val="FAF8FF"/>
-                </a:solidFill>
-                <a:latin typeface="Consolas" pitchFamily="34" charset="0"/>
-                <a:ea typeface="Consolas" pitchFamily="34" charset="-122"/>
-                <a:cs typeface="Consolas" pitchFamily="34" charset="-120"/>
-              </a:rPr>
-              <a:t>        </a:t>
-            </a:r>
-            <a:pPr indent="0" marL="0">
-              <a:buNone/>
-            </a:pPr>
-            <a:r>
-              <a:rPr lang="en-US" sz="1200" dirty="0">
-                <a:solidFill>
-                  <a:srgbClr val="FBBF24"/>
-                </a:solidFill>
-                <a:latin typeface="Consolas" pitchFamily="34" charset="0"/>
-                <a:ea typeface="Consolas" pitchFamily="34" charset="-122"/>
-                <a:cs typeface="Consolas" pitchFamily="34" charset="-120"/>
-              </a:rPr>
-              <a:t>"Answer with depth and current context."</a:t>
-            </a:r>
-            <a:pPr indent="0" marL="0">
-              <a:buNone/>
-            </a:pPr>
-            <a:r>
-              <a:rPr lang="en-US" sz="1200" dirty="0">
-                <a:solidFill>
-                  <a:srgbClr val="B8B5D9"/>
-                </a:solidFill>
-                <a:latin typeface="Consolas" pitchFamily="34" charset="0"/>
-                <a:ea typeface="Consolas" pitchFamily="34" charset="-122"/>
-                <a:cs typeface="Consolas" pitchFamily="34" charset="-120"/>
-              </a:rPr>
-              <a:t>,</a:t>
-            </a:r>
-            <a:pPr indent="0" marL="0">
-              <a:buNone/>
-            </a:pPr>
-            <a:endParaRPr lang="en-US" sz="1200" dirty="0"/>
-          </a:p>
-          <a:p>
-            <a:pPr indent="0" marL="0">
-              <a:buNone/>
-            </a:pPr>
-            <a:r>
-              <a:rPr lang="en-US" sz="1200" dirty="0">
-                <a:solidFill>
-                  <a:srgbClr val="FAF8FF"/>
-                </a:solidFill>
-                <a:latin typeface="Consolas" pitchFamily="34" charset="0"/>
-                <a:ea typeface="Consolas" pitchFamily="34" charset="-122"/>
-                <a:cs typeface="Consolas" pitchFamily="34" charset="-120"/>
-              </a:rPr>
-              <a:t>        </a:t>
-            </a:r>
-            <a:pPr indent="0" marL="0">
-              <a:buNone/>
-            </a:pPr>
-            <a:r>
-              <a:rPr lang="en-US" sz="1200" dirty="0">
-                <a:solidFill>
-                  <a:srgbClr val="FAF8FF"/>
-                </a:solidFill>
-                <a:latin typeface="Consolas" pitchFamily="34" charset="0"/>
-                <a:ea typeface="Consolas" pitchFamily="34" charset="-122"/>
-                <a:cs typeface="Consolas" pitchFamily="34" charset="-120"/>
-              </a:rPr>
-              <a:t>name</a:t>
-            </a:r>
-            <a:pPr indent="0" marL="0">
-              <a:buNone/>
-            </a:pPr>
-            <a:r>
-              <a:rPr lang="en-US" sz="1200" dirty="0">
-                <a:solidFill>
-                  <a:srgbClr val="B8B5D9"/>
-                </a:solidFill>
-                <a:latin typeface="Consolas" pitchFamily="34" charset="0"/>
-                <a:ea typeface="Consolas" pitchFamily="34" charset="-122"/>
-                <a:cs typeface="Consolas" pitchFamily="34" charset="-120"/>
-              </a:rPr>
-              <a:t>:</a:t>
-            </a:r>
-            <a:pPr indent="0" marL="0">
-              <a:buNone/>
-            </a:pPr>
-            <a:r>
-              <a:rPr lang="en-US" sz="1200" dirty="0">
-                <a:solidFill>
-                  <a:srgbClr val="FAF8FF"/>
-                </a:solidFill>
-                <a:latin typeface="Consolas" pitchFamily="34" charset="0"/>
-                <a:ea typeface="Consolas" pitchFamily="34" charset="-122"/>
-                <a:cs typeface="Consolas" pitchFamily="34" charset="-120"/>
-              </a:rPr>
-              <a:t> </a:t>
-            </a:r>
-            <a:pPr indent="0" marL="0">
-              <a:buNone/>
-            </a:pPr>
-            <a:r>
-              <a:rPr lang="en-US" sz="1200" dirty="0">
-                <a:solidFill>
-                  <a:srgbClr val="FBBF24"/>
-                </a:solidFill>
-                <a:latin typeface="Consolas" pitchFamily="34" charset="0"/>
-                <a:ea typeface="Consolas" pitchFamily="34" charset="-122"/>
-                <a:cs typeface="Consolas" pitchFamily="34" charset="-120"/>
-              </a:rPr>
-              <a:t>"expert"</a:t>
-            </a:r>
-            <a:pPr indent="0" marL="0">
-              <a:buNone/>
-            </a:pPr>
-            <a:r>
-              <a:rPr lang="en-US" sz="1200" dirty="0">
-                <a:solidFill>
-                  <a:srgbClr val="B8B5D9"/>
-                </a:solidFill>
-                <a:latin typeface="Consolas" pitchFamily="34" charset="0"/>
-                <a:ea typeface="Consolas" pitchFamily="34" charset="-122"/>
-                <a:cs typeface="Consolas" pitchFamily="34" charset="-120"/>
-              </a:rPr>
-              <a:t>)</a:t>
-            </a:r>
-            <a:pPr indent="0" marL="0">
-              <a:buNone/>
-            </a:pPr>
-            <a:r>
-              <a:rPr lang="en-US" sz="1200" dirty="0">
-                <a:solidFill>
-                  <a:srgbClr val="B8B5D9"/>
-                </a:solidFill>
-                <a:latin typeface="Consolas" pitchFamily="34" charset="0"/>
-                <a:ea typeface="Consolas" pitchFamily="34" charset="-122"/>
-                <a:cs typeface="Consolas" pitchFamily="34" charset="-120"/>
-              </a:rPr>
-              <a:t>;</a:t>
-            </a:r>
-            <a:pPr indent="0" marL="0">
-              <a:buNone/>
-            </a:pPr>
-            <a:endParaRPr lang="en-US" sz="1200" dirty="0"/>
-          </a:p>
-          <a:p>
-            <a:pPr indent="0" marL="0">
-              <a:buNone/>
-            </a:pPr>
-            <a:endParaRPr lang="en-US" sz="1200" dirty="0"/>
-          </a:p>
-          <a:p>
-            <a:pPr indent="0" marL="0">
-              <a:buNone/>
-            </a:pPr>
-            <a:r>
-              <a:rPr lang="en-US" sz="1200" i="1" dirty="0">
-                <a:solidFill>
-                  <a:srgbClr val="8B88B5"/>
-                </a:solidFill>
-                <a:latin typeface="Consolas" pitchFamily="34" charset="0"/>
-                <a:ea typeface="Consolas" pitchFamily="34" charset="-122"/>
-                <a:cs typeface="Consolas" pitchFamily="34" charset="-120"/>
-              </a:rPr>
-              <a:t>// MAF workflow — pipe local → cloud, expose as an agent</a:t>
-            </a:r>
-            <a:pPr indent="0" marL="0">
-              <a:buNone/>
-            </a:pPr>
-            <a:endParaRPr lang="en-US" sz="1200" dirty="0"/>
-          </a:p>
-          <a:p>
-            <a:pPr indent="0" marL="0">
-              <a:buNone/>
-            </a:pPr>
-            <a:r>
-              <a:rPr lang="en-US" sz="1200" dirty="0">
-                <a:solidFill>
-                  <a:srgbClr val="FB7185"/>
-                </a:solidFill>
-                <a:latin typeface="Consolas" pitchFamily="34" charset="0"/>
-                <a:ea typeface="Consolas" pitchFamily="34" charset="-122"/>
-                <a:cs typeface="Consolas" pitchFamily="34" charset="-120"/>
-              </a:rPr>
-              <a:t>var</a:t>
-            </a:r>
-            <a:pPr indent="0" marL="0">
-              <a:buNone/>
-            </a:pPr>
-            <a:r>
-              <a:rPr lang="en-US" sz="1200" dirty="0">
-                <a:solidFill>
-                  <a:srgbClr val="FAF8FF"/>
-                </a:solidFill>
-                <a:latin typeface="Consolas" pitchFamily="34" charset="0"/>
-                <a:ea typeface="Consolas" pitchFamily="34" charset="-122"/>
-                <a:cs typeface="Consolas" pitchFamily="34" charset="-120"/>
-              </a:rPr>
-              <a:t> workflow </a:t>
-            </a:r>
-            <a:pPr indent="0" marL="0">
-              <a:buNone/>
-            </a:pPr>
-            <a:r>
-              <a:rPr lang="en-US" sz="1200" dirty="0">
-                <a:solidFill>
-                  <a:srgbClr val="CFCBED"/>
-                </a:solidFill>
-                <a:latin typeface="Consolas" pitchFamily="34" charset="0"/>
-                <a:ea typeface="Consolas" pitchFamily="34" charset="-122"/>
-                <a:cs typeface="Consolas" pitchFamily="34" charset="-120"/>
-              </a:rPr>
-              <a:t>=</a:t>
-            </a:r>
-            <a:pPr indent="0" marL="0">
-              <a:buNone/>
-            </a:pPr>
-            <a:r>
-              <a:rPr lang="en-US" sz="1200" dirty="0">
-                <a:solidFill>
-                  <a:srgbClr val="FAF8FF"/>
-                </a:solidFill>
-                <a:latin typeface="Consolas" pitchFamily="34" charset="0"/>
-                <a:ea typeface="Consolas" pitchFamily="34" charset="-122"/>
-                <a:cs typeface="Consolas" pitchFamily="34" charset="-120"/>
-              </a:rPr>
-              <a:t> AgentWorkflowBuilder</a:t>
-            </a:r>
-            <a:pPr indent="0" marL="0">
-              <a:buNone/>
-            </a:pPr>
-            <a:endParaRPr lang="en-US" sz="1200" dirty="0"/>
-          </a:p>
-          <a:p>
-            <a:pPr indent="0" marL="0">
-              <a:buNone/>
-            </a:pPr>
-            <a:r>
-              <a:rPr lang="en-US" sz="1200" dirty="0">
-                <a:solidFill>
-                  <a:srgbClr val="FAF8FF"/>
-                </a:solidFill>
-                <a:latin typeface="Consolas" pitchFamily="34" charset="0"/>
-                <a:ea typeface="Consolas" pitchFamily="34" charset="-122"/>
-                <a:cs typeface="Consolas" pitchFamily="34" charset="-120"/>
-              </a:rPr>
-              <a:t>    </a:t>
-            </a:r>
-            <a:pPr indent="0" marL="0">
-              <a:buNone/>
-            </a:pPr>
-            <a:r>
-              <a:rPr lang="en-US" sz="1200" dirty="0">
-                <a:solidFill>
-                  <a:srgbClr val="B8B5D9"/>
-                </a:solidFill>
-                <a:latin typeface="Consolas" pitchFamily="34" charset="0"/>
-                <a:ea typeface="Consolas" pitchFamily="34" charset="-122"/>
-                <a:cs typeface="Consolas" pitchFamily="34" charset="-120"/>
-              </a:rPr>
-              <a:t>.</a:t>
-            </a:r>
-            <a:pPr indent="0" marL="0">
-              <a:buNone/>
-            </a:pPr>
-            <a:r>
-              <a:rPr lang="en-US" sz="1200" dirty="0">
-                <a:solidFill>
-                  <a:srgbClr val="86EFAC"/>
-                </a:solidFill>
-                <a:latin typeface="Consolas" pitchFamily="34" charset="0"/>
-                <a:ea typeface="Consolas" pitchFamily="34" charset="-122"/>
-                <a:cs typeface="Consolas" pitchFamily="34" charset="-120"/>
-              </a:rPr>
-              <a:t>BuildSequential</a:t>
-            </a:r>
-            <a:pPr indent="0" marL="0">
-              <a:buNone/>
-            </a:pPr>
-            <a:r>
-              <a:rPr lang="en-US" sz="1200" dirty="0">
-                <a:solidFill>
-                  <a:srgbClr val="B8B5D9"/>
-                </a:solidFill>
-                <a:latin typeface="Consolas" pitchFamily="34" charset="0"/>
-                <a:ea typeface="Consolas" pitchFamily="34" charset="-122"/>
-                <a:cs typeface="Consolas" pitchFamily="34" charset="-120"/>
-              </a:rPr>
-              <a:t>(</a:t>
-            </a:r>
-            <a:pPr indent="0" marL="0">
-              <a:buNone/>
-            </a:pPr>
-            <a:r>
-              <a:rPr lang="en-US" sz="1200" dirty="0">
-                <a:solidFill>
-                  <a:srgbClr val="FBBF24"/>
-                </a:solidFill>
-                <a:latin typeface="Consolas" pitchFamily="34" charset="0"/>
-                <a:ea typeface="Consolas" pitchFamily="34" charset="-122"/>
-                <a:cs typeface="Consolas" pitchFamily="34" charset="-120"/>
-              </a:rPr>
-              <a:t>"local-then-cloud"</a:t>
-            </a:r>
-            <a:pPr indent="0" marL="0">
-              <a:buNone/>
-            </a:pPr>
-            <a:r>
-              <a:rPr lang="en-US" sz="1200" dirty="0">
-                <a:solidFill>
-                  <a:srgbClr val="B8B5D9"/>
-                </a:solidFill>
-                <a:latin typeface="Consolas" pitchFamily="34" charset="0"/>
-                <a:ea typeface="Consolas" pitchFamily="34" charset="-122"/>
-                <a:cs typeface="Consolas" pitchFamily="34" charset="-120"/>
-              </a:rPr>
-              <a:t>,</a:t>
-            </a:r>
-            <a:pPr indent="0" marL="0">
-              <a:buNone/>
-            </a:pPr>
-            <a:r>
-              <a:rPr lang="en-US" sz="1200" dirty="0">
-                <a:solidFill>
-                  <a:srgbClr val="FAF8FF"/>
-                </a:solidFill>
-                <a:latin typeface="Consolas" pitchFamily="34" charset="0"/>
-                <a:ea typeface="Consolas" pitchFamily="34" charset="-122"/>
-                <a:cs typeface="Consolas" pitchFamily="34" charset="-120"/>
-              </a:rPr>
-              <a:t> triage</a:t>
-            </a:r>
-            <a:pPr indent="0" marL="0">
-              <a:buNone/>
-            </a:pPr>
-            <a:r>
-              <a:rPr lang="en-US" sz="1200" dirty="0">
-                <a:solidFill>
-                  <a:srgbClr val="B8B5D9"/>
-                </a:solidFill>
-                <a:latin typeface="Consolas" pitchFamily="34" charset="0"/>
-                <a:ea typeface="Consolas" pitchFamily="34" charset="-122"/>
-                <a:cs typeface="Consolas" pitchFamily="34" charset="-120"/>
-              </a:rPr>
-              <a:t>,</a:t>
-            </a:r>
-            <a:pPr indent="0" marL="0">
-              <a:buNone/>
-            </a:pPr>
-            <a:r>
-              <a:rPr lang="en-US" sz="1200" dirty="0">
-                <a:solidFill>
-                  <a:srgbClr val="FAF8FF"/>
-                </a:solidFill>
-                <a:latin typeface="Consolas" pitchFamily="34" charset="0"/>
-                <a:ea typeface="Consolas" pitchFamily="34" charset="-122"/>
-                <a:cs typeface="Consolas" pitchFamily="34" charset="-120"/>
-              </a:rPr>
-              <a:t> expert</a:t>
-            </a:r>
-            <a:pPr indent="0" marL="0">
-              <a:buNone/>
-            </a:pPr>
-            <a:r>
-              <a:rPr lang="en-US" sz="1200" dirty="0">
-                <a:solidFill>
-                  <a:srgbClr val="B8B5D9"/>
-                </a:solidFill>
-                <a:latin typeface="Consolas" pitchFamily="34" charset="0"/>
-                <a:ea typeface="Consolas" pitchFamily="34" charset="-122"/>
-                <a:cs typeface="Consolas" pitchFamily="34" charset="-120"/>
-              </a:rPr>
-              <a:t>)</a:t>
-            </a:r>
-            <a:pPr indent="0" marL="0">
-              <a:buNone/>
-            </a:pPr>
-            <a:endParaRPr lang="en-US" sz="1200" dirty="0"/>
-          </a:p>
-          <a:p>
-            <a:pPr indent="0" marL="0">
-              <a:buNone/>
-            </a:pPr>
-            <a:r>
-              <a:rPr lang="en-US" sz="1200" dirty="0">
-                <a:solidFill>
-                  <a:srgbClr val="FAF8FF"/>
-                </a:solidFill>
-                <a:latin typeface="Consolas" pitchFamily="34" charset="0"/>
-                <a:ea typeface="Consolas" pitchFamily="34" charset="-122"/>
-                <a:cs typeface="Consolas" pitchFamily="34" charset="-120"/>
-              </a:rPr>
-              <a:t>    </a:t>
-            </a:r>
-            <a:pPr indent="0" marL="0">
-              <a:buNone/>
-            </a:pPr>
-            <a:r>
-              <a:rPr lang="en-US" sz="1200" dirty="0">
-                <a:solidFill>
-                  <a:srgbClr val="B8B5D9"/>
-                </a:solidFill>
-                <a:latin typeface="Consolas" pitchFamily="34" charset="0"/>
-                <a:ea typeface="Consolas" pitchFamily="34" charset="-122"/>
-                <a:cs typeface="Consolas" pitchFamily="34" charset="-120"/>
-              </a:rPr>
-              <a:t>.</a:t>
-            </a:r>
-            <a:pPr indent="0" marL="0">
-              <a:buNone/>
-            </a:pPr>
-            <a:r>
-              <a:rPr lang="en-US" sz="1200" dirty="0">
-                <a:solidFill>
-                  <a:srgbClr val="86EFAC"/>
-                </a:solidFill>
-                <a:latin typeface="Consolas" pitchFamily="34" charset="0"/>
-                <a:ea typeface="Consolas" pitchFamily="34" charset="-122"/>
-                <a:cs typeface="Consolas" pitchFamily="34" charset="-120"/>
-              </a:rPr>
-              <a:t>AsAgent</a:t>
-            </a:r>
-            <a:pPr indent="0" marL="0">
-              <a:buNone/>
-            </a:pPr>
-            <a:r>
-              <a:rPr lang="en-US" sz="1200" dirty="0">
-                <a:solidFill>
-                  <a:srgbClr val="B8B5D9"/>
-                </a:solidFill>
-                <a:latin typeface="Consolas" pitchFamily="34" charset="0"/>
-                <a:ea typeface="Consolas" pitchFamily="34" charset="-122"/>
-                <a:cs typeface="Consolas" pitchFamily="34" charset="-120"/>
-              </a:rPr>
-              <a:t>(</a:t>
+              <a:t>"Private triage → cloud expert."</a:t>
             </a:r>
             <a:pPr indent="0" marL="0">
               <a:buNone/>
@@ -11821,7 +12163,7 @@
                 <a:ea typeface="Calibri" pitchFamily="34" charset="-122"/>
                 <a:cs typeface="Calibri" pitchFamily="34" charset="-120"/>
               </a:rPr>
-              <a:t>All slides, all four demos, ready to clone &amp; run</a:t>
+              <a:t>Slides, MAUI app, web DevUI app, and orchestration samples</a:t>
             </a:r>
             <a:endParaRPr lang="en-US" sz="1100" dirty="0"/>
           </a:p>
@@ -12029,7 +12371,7 @@
                 <a:ea typeface="Calibri" pitchFamily="34" charset="-122"/>
                 <a:cs typeface="Calibri" pitchFamily="34" charset="-120"/>
               </a:rPr>
-              <a:t>AIAgent · AgentThread · workflows · DevUI</a:t>
+              <a:t>AIAgent · AgentSession · workflows · DevUI</a:t>
             </a:r>
             <a:endParaRPr lang="en-US" sz="1100" dirty="0"/>
           </a:p>
@@ -16407,6 +16749,26 @@
               <a:buNone/>
             </a:pPr>
             <a:r>
+              <a:rPr lang="en-US" sz="1300" i="1" dirty="0">
+                <a:solidFill>
+                  <a:srgbClr val="8B88B5"/>
+                </a:solidFill>
+                <a:latin typeface="Consolas" pitchFamily="34" charset="0"/>
+                <a:ea typeface="Consolas" pitchFamily="34" charset="-122"/>
+                <a:cs typeface="Consolas" pitchFamily="34" charset="-120"/>
+              </a:rPr>
+              <a:t>// Same client shape used in demos/Demo.WebAgentApp</a:t>
+            </a:r>
+            <a:pPr indent="0" marL="0">
+              <a:buNone/>
+            </a:pPr>
+            <a:endParaRPr lang="en-US" sz="1300" dirty="0"/>
+          </a:p>
+          <a:p>
+            <a:pPr indent="0" marL="0">
+              <a:buNone/>
+            </a:pPr>
+            <a:r>
               <a:rPr lang="en-US" sz="1300" dirty="0">
                 <a:solidFill>
                   <a:srgbClr val="FB7185"/>
@@ -16429,7 +16791,7 @@
                 <a:ea typeface="Consolas" pitchFamily="34" charset="-122"/>
                 <a:cs typeface="Consolas" pitchFamily="34" charset="-120"/>
               </a:rPr>
-              <a:t> client </a:t>
+              <a:t> endpoint </a:t>
             </a:r>
             <a:pPr indent="0" marL="0">
               <a:buNone/>
@@ -16499,7 +16861,7 @@
                 <a:ea typeface="Consolas" pitchFamily="34" charset="-122"/>
                 <a:cs typeface="Consolas" pitchFamily="34" charset="-120"/>
               </a:rPr>
-              <a:t>AzureOpenAIClient</a:t>
+              <a:t>Uri</a:t>
             </a:r>
             <a:pPr indent="0" marL="0">
               <a:buNone/>
@@ -16603,7 +16965,7 @@
                 <a:ea typeface="Consolas" pitchFamily="34" charset="-122"/>
                 <a:cs typeface="Consolas" pitchFamily="34" charset="-120"/>
               </a:rPr>
-              <a:t>endpoint</a:t>
+              <a:t>config</a:t>
             </a:r>
             <a:pPr indent="0" marL="0">
               <a:buNone/>
@@ -16617,6 +16979,62 @@
                 <a:ea typeface="Consolas" pitchFamily="34" charset="-122"/>
                 <a:cs typeface="Consolas" pitchFamily="34" charset="-120"/>
               </a:rPr>
+              <a:t>[</a:t>
+            </a:r>
+            <a:pPr indent="0" marL="0">
+              <a:buNone/>
+            </a:pPr>
+            <a:r>
+              <a:rPr lang="en-US" sz="1300" dirty="0">
+                <a:solidFill>
+                  <a:srgbClr val="FBBF24"/>
+                </a:solidFill>
+                <a:latin typeface="Consolas" pitchFamily="34" charset="0"/>
+                <a:ea typeface="Consolas" pitchFamily="34" charset="-122"/>
+                <a:cs typeface="Consolas" pitchFamily="34" charset="-120"/>
+              </a:rPr>
+              <a:t>"AzureOpenAI:Endpoint"</a:t>
+            </a:r>
+            <a:pPr indent="0" marL="0">
+              <a:buNone/>
+            </a:pPr>
+            <a:r>
+              <a:rPr lang="en-US" sz="1300" dirty="0">
+                <a:solidFill>
+                  <a:srgbClr val="B8B5D9"/>
+                </a:solidFill>
+                <a:latin typeface="Consolas" pitchFamily="34" charset="0"/>
+                <a:ea typeface="Consolas" pitchFamily="34" charset="-122"/>
+                <a:cs typeface="Consolas" pitchFamily="34" charset="-120"/>
+              </a:rPr>
+              <a:t>]</a:t>
+            </a:r>
+            <a:pPr indent="0" marL="0">
+              <a:buNone/>
+            </a:pPr>
+            <a:r>
+              <a:rPr lang="en-US" sz="1300" dirty="0">
+                <a:solidFill>
+                  <a:srgbClr val="CFCBED"/>
+                </a:solidFill>
+                <a:latin typeface="Consolas" pitchFamily="34" charset="0"/>
+                <a:ea typeface="Consolas" pitchFamily="34" charset="-122"/>
+                <a:cs typeface="Consolas" pitchFamily="34" charset="-120"/>
+              </a:rPr>
+              <a:t>!</a:t>
+            </a:r>
+            <a:pPr indent="0" marL="0">
+              <a:buNone/>
+            </a:pPr>
+            <a:r>
+              <a:rPr lang="en-US" sz="1300" dirty="0">
+                <a:solidFill>
+                  <a:srgbClr val="B8B5D9"/>
+                </a:solidFill>
+                <a:latin typeface="Consolas" pitchFamily="34" charset="0"/>
+                <a:ea typeface="Consolas" pitchFamily="34" charset="-122"/>
+                <a:cs typeface="Consolas" pitchFamily="34" charset="-120"/>
+              </a:rPr>
               <a:t>)</a:t>
             </a:r>
             <a:pPr indent="0" marL="0">
@@ -16636,21 +17054,709 @@
             <a:pPr indent="0" marL="0">
               <a:buNone/>
             </a:pPr>
+            <a:r>
+              <a:rPr lang="en-US" sz="1300" dirty="0">
+                <a:solidFill>
+                  <a:srgbClr val="FAF8FF"/>
+                </a:solidFill>
+                <a:latin typeface="Consolas" pitchFamily="34" charset="0"/>
+                <a:ea typeface="Consolas" pitchFamily="34" charset="-122"/>
+                <a:cs typeface="Consolas" pitchFamily="34" charset="-120"/>
+              </a:rPr>
+              <a:t> </a:t>
+            </a:r>
+            <a:pPr indent="0" marL="0">
+              <a:buNone/>
+            </a:pPr>
+            <a:r>
+              <a:rPr lang="en-US" sz="1300" dirty="0">
+                <a:solidFill>
+                  <a:srgbClr val="FBBF24"/>
+                </a:solidFill>
+                <a:latin typeface="Consolas" pitchFamily="34" charset="0"/>
+                <a:ea typeface="Consolas" pitchFamily="34" charset="-122"/>
+                <a:cs typeface="Consolas" pitchFamily="34" charset="-120"/>
+              </a:rPr>
+              <a:t>"/openai/v1"</a:t>
+            </a:r>
+            <a:pPr indent="0" marL="0">
+              <a:buNone/>
+            </a:pPr>
+            <a:r>
+              <a:rPr lang="en-US" sz="1300" dirty="0">
+                <a:solidFill>
+                  <a:srgbClr val="B8B5D9"/>
+                </a:solidFill>
+                <a:latin typeface="Consolas" pitchFamily="34" charset="0"/>
+                <a:ea typeface="Consolas" pitchFamily="34" charset="-122"/>
+                <a:cs typeface="Consolas" pitchFamily="34" charset="-120"/>
+              </a:rPr>
+              <a:t>)</a:t>
+            </a:r>
+            <a:pPr indent="0" marL="0">
+              <a:buNone/>
+            </a:pPr>
+            <a:r>
+              <a:rPr lang="en-US" sz="1300" dirty="0">
+                <a:solidFill>
+                  <a:srgbClr val="B8B5D9"/>
+                </a:solidFill>
+                <a:latin typeface="Consolas" pitchFamily="34" charset="0"/>
+                <a:ea typeface="Consolas" pitchFamily="34" charset="-122"/>
+                <a:cs typeface="Consolas" pitchFamily="34" charset="-120"/>
+              </a:rPr>
+              <a:t>;</a:t>
+            </a:r>
+            <a:pPr indent="0" marL="0">
+              <a:buNone/>
+            </a:pPr>
             <a:endParaRPr lang="en-US" sz="1300" dirty="0"/>
           </a:p>
           <a:p>
             <a:pPr indent="0" marL="0">
               <a:buNone/>
             </a:pPr>
+            <a:endParaRPr lang="en-US" sz="1300" dirty="0"/>
+          </a:p>
+          <a:p>
+            <a:pPr indent="0" marL="0">
+              <a:buNone/>
+            </a:pPr>
             <a:r>
               <a:rPr lang="en-US" sz="1300" dirty="0">
                 <a:solidFill>
+                  <a:srgbClr val="A78BFA"/>
+                </a:solidFill>
+                <a:latin typeface="Consolas" pitchFamily="34" charset="0"/>
+                <a:ea typeface="Consolas" pitchFamily="34" charset="-122"/>
+                <a:cs typeface="Consolas" pitchFamily="34" charset="-120"/>
+              </a:rPr>
+              <a:t>IChatClient</a:t>
+            </a:r>
+            <a:pPr indent="0" marL="0">
+              <a:buNone/>
+            </a:pPr>
+            <a:r>
+              <a:rPr lang="en-US" sz="1300" dirty="0">
+                <a:solidFill>
                   <a:srgbClr val="FAF8FF"/>
                 </a:solidFill>
                 <a:latin typeface="Consolas" pitchFamily="34" charset="0"/>
                 <a:ea typeface="Consolas" pitchFamily="34" charset="-122"/>
                 <a:cs typeface="Consolas" pitchFamily="34" charset="-120"/>
               </a:rPr>
+              <a:t> chat </a:t>
+            </a:r>
+            <a:pPr indent="0" marL="0">
+              <a:buNone/>
+            </a:pPr>
+            <a:r>
+              <a:rPr lang="en-US" sz="1300" dirty="0">
+                <a:solidFill>
+                  <a:srgbClr val="CFCBED"/>
+                </a:solidFill>
+                <a:latin typeface="Consolas" pitchFamily="34" charset="0"/>
+                <a:ea typeface="Consolas" pitchFamily="34" charset="-122"/>
+                <a:cs typeface="Consolas" pitchFamily="34" charset="-120"/>
+              </a:rPr>
+              <a:t>=</a:t>
+            </a:r>
+            <a:pPr indent="0" marL="0">
+              <a:buNone/>
+            </a:pPr>
+            <a:r>
+              <a:rPr lang="en-US" sz="1300" dirty="0">
+                <a:solidFill>
+                  <a:srgbClr val="FAF8FF"/>
+                </a:solidFill>
+                <a:latin typeface="Consolas" pitchFamily="34" charset="0"/>
+                <a:ea typeface="Consolas" pitchFamily="34" charset="-122"/>
+                <a:cs typeface="Consolas" pitchFamily="34" charset="-120"/>
+              </a:rPr>
+              <a:t> </a:t>
+            </a:r>
+            <a:pPr indent="0" marL="0">
+              <a:buNone/>
+            </a:pPr>
+            <a:r>
+              <a:rPr lang="en-US" sz="1300" dirty="0">
+                <a:solidFill>
+                  <a:srgbClr val="FB7185"/>
+                </a:solidFill>
+                <a:latin typeface="Consolas" pitchFamily="34" charset="0"/>
+                <a:ea typeface="Consolas" pitchFamily="34" charset="-122"/>
+                <a:cs typeface="Consolas" pitchFamily="34" charset="-120"/>
+              </a:rPr>
+              <a:t>new</a:t>
+            </a:r>
+            <a:pPr indent="0" marL="0">
+              <a:buNone/>
+            </a:pPr>
+            <a:r>
+              <a:rPr lang="en-US" sz="1300" dirty="0">
+                <a:solidFill>
+                  <a:srgbClr val="FAF8FF"/>
+                </a:solidFill>
+                <a:latin typeface="Consolas" pitchFamily="34" charset="0"/>
+                <a:ea typeface="Consolas" pitchFamily="34" charset="-122"/>
+                <a:cs typeface="Consolas" pitchFamily="34" charset="-120"/>
+              </a:rPr>
+              <a:t> </a:t>
+            </a:r>
+            <a:pPr indent="0" marL="0">
+              <a:buNone/>
+            </a:pPr>
+            <a:r>
+              <a:rPr lang="en-US" sz="1300" dirty="0">
+                <a:solidFill>
+                  <a:srgbClr val="FAF8FF"/>
+                </a:solidFill>
+                <a:latin typeface="Consolas" pitchFamily="34" charset="0"/>
+                <a:ea typeface="Consolas" pitchFamily="34" charset="-122"/>
+                <a:cs typeface="Consolas" pitchFamily="34" charset="-120"/>
+              </a:rPr>
+              <a:t>ChatClient</a:t>
+            </a:r>
+            <a:pPr indent="0" marL="0">
+              <a:buNone/>
+            </a:pPr>
+            <a:r>
+              <a:rPr lang="en-US" sz="1300" dirty="0">
+                <a:solidFill>
+                  <a:srgbClr val="B8B5D9"/>
+                </a:solidFill>
+                <a:latin typeface="Consolas" pitchFamily="34" charset="0"/>
+                <a:ea typeface="Consolas" pitchFamily="34" charset="-122"/>
+                <a:cs typeface="Consolas" pitchFamily="34" charset="-120"/>
+              </a:rPr>
+              <a:t>(</a:t>
+            </a:r>
+            <a:pPr indent="0" marL="0">
+              <a:buNone/>
+            </a:pPr>
+            <a:endParaRPr lang="en-US" sz="1300" dirty="0"/>
+          </a:p>
+          <a:p>
+            <a:pPr indent="0" marL="0">
+              <a:buNone/>
+            </a:pPr>
+            <a:r>
+              <a:rPr lang="en-US" sz="1300" dirty="0">
+                <a:solidFill>
+                  <a:srgbClr val="FAF8FF"/>
+                </a:solidFill>
+                <a:latin typeface="Consolas" pitchFamily="34" charset="0"/>
+                <a:ea typeface="Consolas" pitchFamily="34" charset="-122"/>
+                <a:cs typeface="Consolas" pitchFamily="34" charset="-120"/>
+              </a:rPr>
+              <a:t>        </a:t>
+            </a:r>
+            <a:pPr indent="0" marL="0">
+              <a:buNone/>
+            </a:pPr>
+            <a:r>
+              <a:rPr lang="en-US" sz="1300" dirty="0">
+                <a:solidFill>
+                  <a:srgbClr val="FAF8FF"/>
+                </a:solidFill>
+                <a:latin typeface="Consolas" pitchFamily="34" charset="0"/>
+                <a:ea typeface="Consolas" pitchFamily="34" charset="-122"/>
+                <a:cs typeface="Consolas" pitchFamily="34" charset="-120"/>
+              </a:rPr>
+              <a:t>model</a:t>
+            </a:r>
+            <a:pPr indent="0" marL="0">
+              <a:buNone/>
+            </a:pPr>
+            <a:r>
+              <a:rPr lang="en-US" sz="1300" dirty="0">
+                <a:solidFill>
+                  <a:srgbClr val="B8B5D9"/>
+                </a:solidFill>
+                <a:latin typeface="Consolas" pitchFamily="34" charset="0"/>
+                <a:ea typeface="Consolas" pitchFamily="34" charset="-122"/>
+                <a:cs typeface="Consolas" pitchFamily="34" charset="-120"/>
+              </a:rPr>
+              <a:t>:</a:t>
+            </a:r>
+            <a:pPr indent="0" marL="0">
+              <a:buNone/>
+            </a:pPr>
+            <a:r>
+              <a:rPr lang="en-US" sz="1300" dirty="0">
+                <a:solidFill>
+                  <a:srgbClr val="FAF8FF"/>
+                </a:solidFill>
+                <a:latin typeface="Consolas" pitchFamily="34" charset="0"/>
+                <a:ea typeface="Consolas" pitchFamily="34" charset="-122"/>
+                <a:cs typeface="Consolas" pitchFamily="34" charset="-120"/>
+              </a:rPr>
+              <a:t> </a:t>
+            </a:r>
+            <a:pPr indent="0" marL="0">
+              <a:buNone/>
+            </a:pPr>
+            <a:r>
+              <a:rPr lang="en-US" sz="1300" dirty="0">
+                <a:solidFill>
+                  <a:srgbClr val="FBBF24"/>
+                </a:solidFill>
+                <a:latin typeface="Consolas" pitchFamily="34" charset="0"/>
+                <a:ea typeface="Consolas" pitchFamily="34" charset="-122"/>
+                <a:cs typeface="Consolas" pitchFamily="34" charset="-120"/>
+              </a:rPr>
+              <a:t>"gpt-4.1"</a:t>
+            </a:r>
+            <a:pPr indent="0" marL="0">
+              <a:buNone/>
+            </a:pPr>
+            <a:r>
+              <a:rPr lang="en-US" sz="1300" dirty="0">
+                <a:solidFill>
+                  <a:srgbClr val="B8B5D9"/>
+                </a:solidFill>
+                <a:latin typeface="Consolas" pitchFamily="34" charset="0"/>
+                <a:ea typeface="Consolas" pitchFamily="34" charset="-122"/>
+                <a:cs typeface="Consolas" pitchFamily="34" charset="-120"/>
+              </a:rPr>
+              <a:t>,</a:t>
+            </a:r>
+            <a:pPr indent="0" marL="0">
+              <a:buNone/>
+            </a:pPr>
+            <a:endParaRPr lang="en-US" sz="1300" dirty="0"/>
+          </a:p>
+          <a:p>
+            <a:pPr indent="0" marL="0">
+              <a:buNone/>
+            </a:pPr>
+            <a:r>
+              <a:rPr lang="en-US" sz="1300" dirty="0">
+                <a:solidFill>
+                  <a:srgbClr val="FAF8FF"/>
+                </a:solidFill>
+                <a:latin typeface="Consolas" pitchFamily="34" charset="0"/>
+                <a:ea typeface="Consolas" pitchFamily="34" charset="-122"/>
+                <a:cs typeface="Consolas" pitchFamily="34" charset="-120"/>
+              </a:rPr>
+              <a:t>        </a:t>
+            </a:r>
+            <a:pPr indent="0" marL="0">
+              <a:buNone/>
+            </a:pPr>
+            <a:r>
+              <a:rPr lang="en-US" sz="1300" dirty="0">
+                <a:solidFill>
+                  <a:srgbClr val="FAF8FF"/>
+                </a:solidFill>
+                <a:latin typeface="Consolas" pitchFamily="34" charset="0"/>
+                <a:ea typeface="Consolas" pitchFamily="34" charset="-122"/>
+                <a:cs typeface="Consolas" pitchFamily="34" charset="-120"/>
+              </a:rPr>
+              <a:t>credential</a:t>
+            </a:r>
+            <a:pPr indent="0" marL="0">
+              <a:buNone/>
+            </a:pPr>
+            <a:r>
+              <a:rPr lang="en-US" sz="1300" dirty="0">
+                <a:solidFill>
+                  <a:srgbClr val="B8B5D9"/>
+                </a:solidFill>
+                <a:latin typeface="Consolas" pitchFamily="34" charset="0"/>
+                <a:ea typeface="Consolas" pitchFamily="34" charset="-122"/>
+                <a:cs typeface="Consolas" pitchFamily="34" charset="-120"/>
+              </a:rPr>
+              <a:t>:</a:t>
+            </a:r>
+            <a:pPr indent="0" marL="0">
+              <a:buNone/>
+            </a:pPr>
+            <a:r>
+              <a:rPr lang="en-US" sz="1300" dirty="0">
+                <a:solidFill>
+                  <a:srgbClr val="FAF8FF"/>
+                </a:solidFill>
+                <a:latin typeface="Consolas" pitchFamily="34" charset="0"/>
+                <a:ea typeface="Consolas" pitchFamily="34" charset="-122"/>
+                <a:cs typeface="Consolas" pitchFamily="34" charset="-120"/>
+              </a:rPr>
+              <a:t> </a:t>
+            </a:r>
+            <a:pPr indent="0" marL="0">
+              <a:buNone/>
+            </a:pPr>
+            <a:r>
+              <a:rPr lang="en-US" sz="1300" dirty="0">
+                <a:solidFill>
+                  <a:srgbClr val="FB7185"/>
+                </a:solidFill>
+                <a:latin typeface="Consolas" pitchFamily="34" charset="0"/>
+                <a:ea typeface="Consolas" pitchFamily="34" charset="-122"/>
+                <a:cs typeface="Consolas" pitchFamily="34" charset="-120"/>
+              </a:rPr>
+              <a:t>new</a:t>
+            </a:r>
+            <a:pPr indent="0" marL="0">
+              <a:buNone/>
+            </a:pPr>
+            <a:r>
+              <a:rPr lang="en-US" sz="1300" dirty="0">
+                <a:solidFill>
+                  <a:srgbClr val="FAF8FF"/>
+                </a:solidFill>
+                <a:latin typeface="Consolas" pitchFamily="34" charset="0"/>
+                <a:ea typeface="Consolas" pitchFamily="34" charset="-122"/>
+                <a:cs typeface="Consolas" pitchFamily="34" charset="-120"/>
+              </a:rPr>
+              <a:t> </a:t>
+            </a:r>
+            <a:pPr indent="0" marL="0">
+              <a:buNone/>
+            </a:pPr>
+            <a:r>
+              <a:rPr lang="en-US" sz="1300" dirty="0">
+                <a:solidFill>
+                  <a:srgbClr val="FAF8FF"/>
+                </a:solidFill>
+                <a:latin typeface="Consolas" pitchFamily="34" charset="0"/>
+                <a:ea typeface="Consolas" pitchFamily="34" charset="-122"/>
+                <a:cs typeface="Consolas" pitchFamily="34" charset="-120"/>
+              </a:rPr>
+              <a:t>ApiKeyCredential</a:t>
+            </a:r>
+            <a:pPr indent="0" marL="0">
+              <a:buNone/>
+            </a:pPr>
+            <a:r>
+              <a:rPr lang="en-US" sz="1300" dirty="0">
+                <a:solidFill>
+                  <a:srgbClr val="B8B5D9"/>
+                </a:solidFill>
+                <a:latin typeface="Consolas" pitchFamily="34" charset="0"/>
+                <a:ea typeface="Consolas" pitchFamily="34" charset="-122"/>
+                <a:cs typeface="Consolas" pitchFamily="34" charset="-120"/>
+              </a:rPr>
+              <a:t>(</a:t>
+            </a:r>
+            <a:pPr indent="0" marL="0">
+              <a:buNone/>
+            </a:pPr>
+            <a:r>
+              <a:rPr lang="en-US" sz="1300" dirty="0">
+                <a:solidFill>
+                  <a:srgbClr val="FAF8FF"/>
+                </a:solidFill>
+                <a:latin typeface="Consolas" pitchFamily="34" charset="0"/>
+                <a:ea typeface="Consolas" pitchFamily="34" charset="-122"/>
+                <a:cs typeface="Consolas" pitchFamily="34" charset="-120"/>
+              </a:rPr>
+              <a:t>config</a:t>
+            </a:r>
+            <a:pPr indent="0" marL="0">
+              <a:buNone/>
+            </a:pPr>
+            <a:r>
+              <a:rPr lang="en-US" sz="1300" dirty="0">
+                <a:solidFill>
+                  <a:srgbClr val="B8B5D9"/>
+                </a:solidFill>
+                <a:latin typeface="Consolas" pitchFamily="34" charset="0"/>
+                <a:ea typeface="Consolas" pitchFamily="34" charset="-122"/>
+                <a:cs typeface="Consolas" pitchFamily="34" charset="-120"/>
+              </a:rPr>
+              <a:t>[</a:t>
+            </a:r>
+            <a:pPr indent="0" marL="0">
+              <a:buNone/>
+            </a:pPr>
+            <a:r>
+              <a:rPr lang="en-US" sz="1300" dirty="0">
+                <a:solidFill>
+                  <a:srgbClr val="FBBF24"/>
+                </a:solidFill>
+                <a:latin typeface="Consolas" pitchFamily="34" charset="0"/>
+                <a:ea typeface="Consolas" pitchFamily="34" charset="-122"/>
+                <a:cs typeface="Consolas" pitchFamily="34" charset="-120"/>
+              </a:rPr>
+              <a:t>"AzureOpenAI:Key"</a:t>
+            </a:r>
+            <a:pPr indent="0" marL="0">
+              <a:buNone/>
+            </a:pPr>
+            <a:r>
+              <a:rPr lang="en-US" sz="1300" dirty="0">
+                <a:solidFill>
+                  <a:srgbClr val="B8B5D9"/>
+                </a:solidFill>
+                <a:latin typeface="Consolas" pitchFamily="34" charset="0"/>
+                <a:ea typeface="Consolas" pitchFamily="34" charset="-122"/>
+                <a:cs typeface="Consolas" pitchFamily="34" charset="-120"/>
+              </a:rPr>
+              <a:t>]</a:t>
+            </a:r>
+            <a:pPr indent="0" marL="0">
+              <a:buNone/>
+            </a:pPr>
+            <a:r>
+              <a:rPr lang="en-US" sz="1300" dirty="0">
+                <a:solidFill>
+                  <a:srgbClr val="CFCBED"/>
+                </a:solidFill>
+                <a:latin typeface="Consolas" pitchFamily="34" charset="0"/>
+                <a:ea typeface="Consolas" pitchFamily="34" charset="-122"/>
+                <a:cs typeface="Consolas" pitchFamily="34" charset="-120"/>
+              </a:rPr>
+              <a:t>!</a:t>
+            </a:r>
+            <a:pPr indent="0" marL="0">
+              <a:buNone/>
+            </a:pPr>
+            <a:r>
+              <a:rPr lang="en-US" sz="1300" dirty="0">
+                <a:solidFill>
+                  <a:srgbClr val="B8B5D9"/>
+                </a:solidFill>
+                <a:latin typeface="Consolas" pitchFamily="34" charset="0"/>
+                <a:ea typeface="Consolas" pitchFamily="34" charset="-122"/>
+                <a:cs typeface="Consolas" pitchFamily="34" charset="-120"/>
+              </a:rPr>
+              <a:t>)</a:t>
+            </a:r>
+            <a:pPr indent="0" marL="0">
+              <a:buNone/>
+            </a:pPr>
+            <a:r>
+              <a:rPr lang="en-US" sz="1300" dirty="0">
+                <a:solidFill>
+                  <a:srgbClr val="B8B5D9"/>
+                </a:solidFill>
+                <a:latin typeface="Consolas" pitchFamily="34" charset="0"/>
+                <a:ea typeface="Consolas" pitchFamily="34" charset="-122"/>
+                <a:cs typeface="Consolas" pitchFamily="34" charset="-120"/>
+              </a:rPr>
+              <a:t>,</a:t>
+            </a:r>
+            <a:pPr indent="0" marL="0">
+              <a:buNone/>
+            </a:pPr>
+            <a:endParaRPr lang="en-US" sz="1300" dirty="0"/>
+          </a:p>
+          <a:p>
+            <a:pPr indent="0" marL="0">
+              <a:buNone/>
+            </a:pPr>
+            <a:r>
+              <a:rPr lang="en-US" sz="1300" dirty="0">
+                <a:solidFill>
+                  <a:srgbClr val="FAF8FF"/>
+                </a:solidFill>
+                <a:latin typeface="Consolas" pitchFamily="34" charset="0"/>
+                <a:ea typeface="Consolas" pitchFamily="34" charset="-122"/>
+                <a:cs typeface="Consolas" pitchFamily="34" charset="-120"/>
+              </a:rPr>
+              <a:t>        </a:t>
+            </a:r>
+            <a:pPr indent="0" marL="0">
+              <a:buNone/>
+            </a:pPr>
+            <a:r>
+              <a:rPr lang="en-US" sz="1300" dirty="0">
+                <a:solidFill>
+                  <a:srgbClr val="FAF8FF"/>
+                </a:solidFill>
+                <a:latin typeface="Consolas" pitchFamily="34" charset="0"/>
+                <a:ea typeface="Consolas" pitchFamily="34" charset="-122"/>
+                <a:cs typeface="Consolas" pitchFamily="34" charset="-120"/>
+              </a:rPr>
+              <a:t>options</a:t>
+            </a:r>
+            <a:pPr indent="0" marL="0">
+              <a:buNone/>
+            </a:pPr>
+            <a:r>
+              <a:rPr lang="en-US" sz="1300" dirty="0">
+                <a:solidFill>
+                  <a:srgbClr val="B8B5D9"/>
+                </a:solidFill>
+                <a:latin typeface="Consolas" pitchFamily="34" charset="0"/>
+                <a:ea typeface="Consolas" pitchFamily="34" charset="-122"/>
+                <a:cs typeface="Consolas" pitchFamily="34" charset="-120"/>
+              </a:rPr>
+              <a:t>:</a:t>
+            </a:r>
+            <a:pPr indent="0" marL="0">
+              <a:buNone/>
+            </a:pPr>
+            <a:r>
+              <a:rPr lang="en-US" sz="1300" dirty="0">
+                <a:solidFill>
+                  <a:srgbClr val="FAF8FF"/>
+                </a:solidFill>
+                <a:latin typeface="Consolas" pitchFamily="34" charset="0"/>
+                <a:ea typeface="Consolas" pitchFamily="34" charset="-122"/>
+                <a:cs typeface="Consolas" pitchFamily="34" charset="-120"/>
+              </a:rPr>
+              <a:t> </a:t>
+            </a:r>
+            <a:pPr indent="0" marL="0">
+              <a:buNone/>
+            </a:pPr>
+            <a:r>
+              <a:rPr lang="en-US" sz="1300" dirty="0">
+                <a:solidFill>
+                  <a:srgbClr val="FB7185"/>
+                </a:solidFill>
+                <a:latin typeface="Consolas" pitchFamily="34" charset="0"/>
+                <a:ea typeface="Consolas" pitchFamily="34" charset="-122"/>
+                <a:cs typeface="Consolas" pitchFamily="34" charset="-120"/>
+              </a:rPr>
+              <a:t>new</a:t>
+            </a:r>
+            <a:pPr indent="0" marL="0">
+              <a:buNone/>
+            </a:pPr>
+            <a:r>
+              <a:rPr lang="en-US" sz="1300" dirty="0">
+                <a:solidFill>
+                  <a:srgbClr val="FAF8FF"/>
+                </a:solidFill>
+                <a:latin typeface="Consolas" pitchFamily="34" charset="0"/>
+                <a:ea typeface="Consolas" pitchFamily="34" charset="-122"/>
+                <a:cs typeface="Consolas" pitchFamily="34" charset="-120"/>
+              </a:rPr>
+              <a:t> </a:t>
+            </a:r>
+            <a:pPr indent="0" marL="0">
+              <a:buNone/>
+            </a:pPr>
+            <a:r>
+              <a:rPr lang="en-US" sz="1300" dirty="0">
+                <a:solidFill>
+                  <a:srgbClr val="FAF8FF"/>
+                </a:solidFill>
+                <a:latin typeface="Consolas" pitchFamily="34" charset="0"/>
+                <a:ea typeface="Consolas" pitchFamily="34" charset="-122"/>
+                <a:cs typeface="Consolas" pitchFamily="34" charset="-120"/>
+              </a:rPr>
+              <a:t>OpenAIClientOptions</a:t>
+            </a:r>
+            <a:pPr indent="0" marL="0">
+              <a:buNone/>
+            </a:pPr>
+            <a:r>
+              <a:rPr lang="en-US" sz="1300" dirty="0">
+                <a:solidFill>
+                  <a:srgbClr val="FAF8FF"/>
+                </a:solidFill>
+                <a:latin typeface="Consolas" pitchFamily="34" charset="0"/>
+                <a:ea typeface="Consolas" pitchFamily="34" charset="-122"/>
+                <a:cs typeface="Consolas" pitchFamily="34" charset="-120"/>
+              </a:rPr>
+              <a:t> </a:t>
+            </a:r>
+            <a:pPr indent="0" marL="0">
+              <a:buNone/>
+            </a:pPr>
+            <a:r>
+              <a:rPr lang="en-US" sz="1300" dirty="0">
+                <a:solidFill>
+                  <a:srgbClr val="B8B5D9"/>
+                </a:solidFill>
+                <a:latin typeface="Consolas" pitchFamily="34" charset="0"/>
+                <a:ea typeface="Consolas" pitchFamily="34" charset="-122"/>
+                <a:cs typeface="Consolas" pitchFamily="34" charset="-120"/>
+              </a:rPr>
+              <a:t>{</a:t>
+            </a:r>
+            <a:pPr indent="0" marL="0">
+              <a:buNone/>
+            </a:pPr>
+            <a:r>
+              <a:rPr lang="en-US" sz="1300" dirty="0">
+                <a:solidFill>
+                  <a:srgbClr val="FAF8FF"/>
+                </a:solidFill>
+                <a:latin typeface="Consolas" pitchFamily="34" charset="0"/>
+                <a:ea typeface="Consolas" pitchFamily="34" charset="-122"/>
+                <a:cs typeface="Consolas" pitchFamily="34" charset="-120"/>
+              </a:rPr>
+              <a:t> Endpoint </a:t>
+            </a:r>
+            <a:pPr indent="0" marL="0">
+              <a:buNone/>
+            </a:pPr>
+            <a:r>
+              <a:rPr lang="en-US" sz="1300" dirty="0">
+                <a:solidFill>
+                  <a:srgbClr val="CFCBED"/>
+                </a:solidFill>
+                <a:latin typeface="Consolas" pitchFamily="34" charset="0"/>
+                <a:ea typeface="Consolas" pitchFamily="34" charset="-122"/>
+                <a:cs typeface="Consolas" pitchFamily="34" charset="-120"/>
+              </a:rPr>
+              <a:t>=</a:t>
+            </a:r>
+            <a:pPr indent="0" marL="0">
+              <a:buNone/>
+            </a:pPr>
+            <a:r>
+              <a:rPr lang="en-US" sz="1300" dirty="0">
+                <a:solidFill>
+                  <a:srgbClr val="FAF8FF"/>
+                </a:solidFill>
+                <a:latin typeface="Consolas" pitchFamily="34" charset="0"/>
+                <a:ea typeface="Consolas" pitchFamily="34" charset="-122"/>
+                <a:cs typeface="Consolas" pitchFamily="34" charset="-120"/>
+              </a:rPr>
+              <a:t> endpoint </a:t>
+            </a:r>
+            <a:pPr indent="0" marL="0">
+              <a:buNone/>
+            </a:pPr>
+            <a:r>
+              <a:rPr lang="en-US" sz="1300" dirty="0">
+                <a:solidFill>
+                  <a:srgbClr val="B8B5D9"/>
+                </a:solidFill>
+                <a:latin typeface="Consolas" pitchFamily="34" charset="0"/>
+                <a:ea typeface="Consolas" pitchFamily="34" charset="-122"/>
+                <a:cs typeface="Consolas" pitchFamily="34" charset="-120"/>
+              </a:rPr>
+              <a:t>}</a:t>
+            </a:r>
+            <a:pPr indent="0" marL="0">
+              <a:buNone/>
+            </a:pPr>
+            <a:r>
+              <a:rPr lang="en-US" sz="1300" dirty="0">
+                <a:solidFill>
+                  <a:srgbClr val="B8B5D9"/>
+                </a:solidFill>
+                <a:latin typeface="Consolas" pitchFamily="34" charset="0"/>
+                <a:ea typeface="Consolas" pitchFamily="34" charset="-122"/>
+                <a:cs typeface="Consolas" pitchFamily="34" charset="-120"/>
+              </a:rPr>
+              <a:t>)</a:t>
+            </a:r>
+            <a:pPr indent="0" marL="0">
+              <a:buNone/>
+            </a:pPr>
+            <a:endParaRPr lang="en-US" sz="1300" dirty="0"/>
+          </a:p>
+          <a:p>
+            <a:pPr indent="0" marL="0">
+              <a:buNone/>
+            </a:pPr>
+            <a:r>
+              <a:rPr lang="en-US" sz="1300" dirty="0">
+                <a:solidFill>
+                  <a:srgbClr val="FAF8FF"/>
+                </a:solidFill>
+                <a:latin typeface="Consolas" pitchFamily="34" charset="0"/>
+                <a:ea typeface="Consolas" pitchFamily="34" charset="-122"/>
+                <a:cs typeface="Consolas" pitchFamily="34" charset="-120"/>
+              </a:rPr>
               <a:t>    </a:t>
             </a:r>
             <a:pPr indent="0" marL="0">
@@ -16659,13 +17765,95 @@
             <a:r>
               <a:rPr lang="en-US" sz="1300" dirty="0">
                 <a:solidFill>
+                  <a:srgbClr val="B8B5D9"/>
+                </a:solidFill>
+                <a:latin typeface="Consolas" pitchFamily="34" charset="0"/>
+                <a:ea typeface="Consolas" pitchFamily="34" charset="-122"/>
+                <a:cs typeface="Consolas" pitchFamily="34" charset="-120"/>
+              </a:rPr>
+              <a:t>.</a:t>
+            </a:r>
+            <a:pPr indent="0" marL="0">
+              <a:buNone/>
+            </a:pPr>
+            <a:r>
+              <a:rPr lang="en-US" sz="1300" dirty="0">
+                <a:solidFill>
+                  <a:srgbClr val="86EFAC"/>
+                </a:solidFill>
+                <a:latin typeface="Consolas" pitchFamily="34" charset="0"/>
+                <a:ea typeface="Consolas" pitchFamily="34" charset="-122"/>
+                <a:cs typeface="Consolas" pitchFamily="34" charset="-120"/>
+              </a:rPr>
+              <a:t>AsIChatClient</a:t>
+            </a:r>
+            <a:pPr indent="0" marL="0">
+              <a:buNone/>
+            </a:pPr>
+            <a:r>
+              <a:rPr lang="en-US" sz="1300" dirty="0">
+                <a:solidFill>
+                  <a:srgbClr val="B8B5D9"/>
+                </a:solidFill>
+                <a:latin typeface="Consolas" pitchFamily="34" charset="0"/>
+                <a:ea typeface="Consolas" pitchFamily="34" charset="-122"/>
+                <a:cs typeface="Consolas" pitchFamily="34" charset="-120"/>
+              </a:rPr>
+              <a:t>(</a:t>
+            </a:r>
+            <a:pPr indent="0" marL="0">
+              <a:buNone/>
+            </a:pPr>
+            <a:r>
+              <a:rPr lang="en-US" sz="1300" dirty="0">
+                <a:solidFill>
+                  <a:srgbClr val="B8B5D9"/>
+                </a:solidFill>
+                <a:latin typeface="Consolas" pitchFamily="34" charset="0"/>
+                <a:ea typeface="Consolas" pitchFamily="34" charset="-122"/>
+                <a:cs typeface="Consolas" pitchFamily="34" charset="-120"/>
+              </a:rPr>
+              <a:t>)</a:t>
+            </a:r>
+            <a:pPr indent="0" marL="0">
+              <a:buNone/>
+            </a:pPr>
+            <a:r>
+              <a:rPr lang="en-US" sz="1300" dirty="0">
+                <a:solidFill>
+                  <a:srgbClr val="B8B5D9"/>
+                </a:solidFill>
+                <a:latin typeface="Consolas" pitchFamily="34" charset="0"/>
+                <a:ea typeface="Consolas" pitchFamily="34" charset="-122"/>
+                <a:cs typeface="Consolas" pitchFamily="34" charset="-120"/>
+              </a:rPr>
+              <a:t>;</a:t>
+            </a:r>
+            <a:pPr indent="0" marL="0">
+              <a:buNone/>
+            </a:pPr>
+            <a:endParaRPr lang="en-US" sz="1300" dirty="0"/>
+          </a:p>
+          <a:p>
+            <a:pPr indent="0" marL="0">
+              <a:buNone/>
+            </a:pPr>
+            <a:endParaRPr lang="en-US" sz="1300" dirty="0"/>
+          </a:p>
+          <a:p>
+            <a:pPr indent="0" marL="0">
+              <a:buNone/>
+            </a:pPr>
+            <a:r>
+              <a:rPr lang="en-US" sz="1300" dirty="0">
+                <a:solidFill>
                   <a:srgbClr val="FB7185"/>
                 </a:solidFill>
                 <a:latin typeface="Consolas" pitchFamily="34" charset="0"/>
                 <a:ea typeface="Consolas" pitchFamily="34" charset="-122"/>
                 <a:cs typeface="Consolas" pitchFamily="34" charset="-120"/>
               </a:rPr>
-              <a:t>new</a:t>
+              <a:t>var</a:t>
             </a:r>
             <a:pPr indent="0" marL="0">
               <a:buNone/>
@@ -16679,6 +17867,34 @@
                 <a:ea typeface="Consolas" pitchFamily="34" charset="-122"/>
                 <a:cs typeface="Consolas" pitchFamily="34" charset="-120"/>
               </a:rPr>
+              <a:t> response </a:t>
+            </a:r>
+            <a:pPr indent="0" marL="0">
+              <a:buNone/>
+            </a:pPr>
+            <a:r>
+              <a:rPr lang="en-US" sz="1300" dirty="0">
+                <a:solidFill>
+                  <a:srgbClr val="CFCBED"/>
+                </a:solidFill>
+                <a:latin typeface="Consolas" pitchFamily="34" charset="0"/>
+                <a:ea typeface="Consolas" pitchFamily="34" charset="-122"/>
+                <a:cs typeface="Consolas" pitchFamily="34" charset="-120"/>
+              </a:rPr>
+              <a:t>=</a:t>
+            </a:r>
+            <a:pPr indent="0" marL="0">
+              <a:buNone/>
+            </a:pPr>
+            <a:r>
+              <a:rPr lang="en-US" sz="1300" dirty="0">
+                <a:solidFill>
+                  <a:srgbClr val="FAF8FF"/>
+                </a:solidFill>
+                <a:latin typeface="Consolas" pitchFamily="34" charset="0"/>
+                <a:ea typeface="Consolas" pitchFamily="34" charset="-122"/>
+                <a:cs typeface="Consolas" pitchFamily="34" charset="-120"/>
+              </a:rPr>
               <a:t> </a:t>
             </a:r>
             <a:pPr indent="0" marL="0">
@@ -16687,13 +17903,27 @@
             <a:r>
               <a:rPr lang="en-US" sz="1300" dirty="0">
                 <a:solidFill>
+                  <a:srgbClr val="FB7185"/>
+                </a:solidFill>
+                <a:latin typeface="Consolas" pitchFamily="34" charset="0"/>
+                <a:ea typeface="Consolas" pitchFamily="34" charset="-122"/>
+                <a:cs typeface="Consolas" pitchFamily="34" charset="-120"/>
+              </a:rPr>
+              <a:t>await</a:t>
+            </a:r>
+            <a:pPr indent="0" marL="0">
+              <a:buNone/>
+            </a:pPr>
+            <a:r>
+              <a:rPr lang="en-US" sz="1300" dirty="0">
+                <a:solidFill>
                   <a:srgbClr val="FAF8FF"/>
                 </a:solidFill>
                 <a:latin typeface="Consolas" pitchFamily="34" charset="0"/>
                 <a:ea typeface="Consolas" pitchFamily="34" charset="-122"/>
                 <a:cs typeface="Consolas" pitchFamily="34" charset="-120"/>
               </a:rPr>
-              <a:t>DefaultAzureCredential</a:t>
+              <a:t> chat</a:t>
             </a:r>
             <a:pPr indent="0" marL="0">
               <a:buNone/>
@@ -16707,14 +17937,76 @@
                 <a:ea typeface="Consolas" pitchFamily="34" charset="-122"/>
                 <a:cs typeface="Consolas" pitchFamily="34" charset="-120"/>
               </a:rPr>
+              <a:t>.</a:t>
+            </a:r>
+            <a:pPr indent="0" marL="0">
+              <a:buNone/>
+            </a:pPr>
+            <a:r>
+              <a:rPr lang="en-US" sz="1300" dirty="0">
+                <a:solidFill>
+                  <a:srgbClr val="86EFAC"/>
+                </a:solidFill>
+                <a:latin typeface="Consolas" pitchFamily="34" charset="0"/>
+                <a:ea typeface="Consolas" pitchFamily="34" charset="-122"/>
+                <a:cs typeface="Consolas" pitchFamily="34" charset="-120"/>
+              </a:rPr>
+              <a:t>GetResponseAsync</a:t>
+            </a:r>
+            <a:pPr indent="0" marL="0">
+              <a:buNone/>
+            </a:pPr>
+            <a:r>
+              <a:rPr lang="en-US" sz="1300" dirty="0">
+                <a:solidFill>
+                  <a:srgbClr val="B8B5D9"/>
+                </a:solidFill>
+                <a:latin typeface="Consolas" pitchFamily="34" charset="0"/>
+                <a:ea typeface="Consolas" pitchFamily="34" charset="-122"/>
+                <a:cs typeface="Consolas" pitchFamily="34" charset="-120"/>
+              </a:rPr>
               <a:t>(</a:t>
             </a:r>
             <a:pPr indent="0" marL="0">
               <a:buNone/>
             </a:pPr>
+            <a:endParaRPr lang="en-US" sz="1300" dirty="0"/>
+          </a:p>
+          <a:p>
+            <a:pPr indent="0" marL="0">
+              <a:buNone/>
+            </a:pPr>
             <a:r>
               <a:rPr lang="en-US" sz="1300" dirty="0">
                 <a:solidFill>
+                  <a:srgbClr val="FAF8FF"/>
+                </a:solidFill>
+                <a:latin typeface="Consolas" pitchFamily="34" charset="0"/>
+                <a:ea typeface="Consolas" pitchFamily="34" charset="-122"/>
+                <a:cs typeface="Consolas" pitchFamily="34" charset="-120"/>
+              </a:rPr>
+              <a:t>    </a:t>
+            </a:r>
+            <a:pPr indent="0" marL="0">
+              <a:buNone/>
+            </a:pPr>
+            <a:r>
+              <a:rPr lang="en-US" sz="1300" dirty="0">
+                <a:solidFill>
+                  <a:srgbClr val="FBBF24"/>
+                </a:solidFill>
+                <a:latin typeface="Consolas" pitchFamily="34" charset="0"/>
+                <a:ea typeface="Consolas" pitchFamily="34" charset="-122"/>
+                <a:cs typeface="Consolas" pitchFamily="34" charset="-120"/>
+              </a:rPr>
+              <a:t>"Summarise the agenda for today."</a:t>
+            </a:r>
+            <a:pPr indent="0" marL="0">
+              <a:buNone/>
+            </a:pPr>
+            <a:r>
+              <a:rPr lang="en-US" sz="1300" dirty="0">
+                <a:solidFill>
                   <a:srgbClr val="B8B5D9"/>
                 </a:solidFill>
                 <a:latin typeface="Consolas" pitchFamily="34" charset="0"/>
@@ -16735,47 +18027,55 @@
                 <a:ea typeface="Consolas" pitchFamily="34" charset="-122"/>
                 <a:cs typeface="Consolas" pitchFamily="34" charset="-120"/>
               </a:rPr>
-              <a:t>)</a:t>
-            </a:r>
+              <a:t>;</a:t>
+            </a:r>
+            <a:pPr indent="0" marL="0">
+              <a:buNone/>
+            </a:pPr>
+            <a:endParaRPr lang="en-US" sz="1300" dirty="0"/>
+          </a:p>
+          <a:p>
             <a:pPr indent="0" marL="0">
               <a:buNone/>
             </a:pPr>
             <a:r>
               <a:rPr lang="en-US" sz="1300" dirty="0">
                 <a:solidFill>
+                  <a:srgbClr val="FAF8FF"/>
+                </a:solidFill>
+                <a:latin typeface="Consolas" pitchFamily="34" charset="0"/>
+                <a:ea typeface="Consolas" pitchFamily="34" charset="-122"/>
+                <a:cs typeface="Consolas" pitchFamily="34" charset="-120"/>
+              </a:rPr>
+              <a:t>Console</a:t>
+            </a:r>
+            <a:pPr indent="0" marL="0">
+              <a:buNone/>
+            </a:pPr>
+            <a:r>
+              <a:rPr lang="en-US" sz="1300" dirty="0">
+                <a:solidFill>
                   <a:srgbClr val="B8B5D9"/>
                 </a:solidFill>
                 <a:latin typeface="Consolas" pitchFamily="34" charset="0"/>
                 <a:ea typeface="Consolas" pitchFamily="34" charset="-122"/>
                 <a:cs typeface="Consolas" pitchFamily="34" charset="-120"/>
               </a:rPr>
-              <a:t>;</a:t>
-            </a:r>
-            <a:pPr indent="0" marL="0">
-              <a:buNone/>
-            </a:pPr>
-            <a:endParaRPr lang="en-US" sz="1300" dirty="0"/>
-          </a:p>
-          <a:p>
-            <a:pPr indent="0" marL="0">
-              <a:buNone/>
-            </a:pPr>
-            <a:endParaRPr lang="en-US" sz="1300" dirty="0"/>
-          </a:p>
-          <a:p>
+              <a:t>.</a:t>
+            </a:r>
             <a:pPr indent="0" marL="0">
               <a:buNone/>
             </a:pPr>
             <a:r>
               <a:rPr lang="en-US" sz="1300" dirty="0">
                 <a:solidFill>
-                  <a:srgbClr val="FB7185"/>
-                </a:solidFill>
-                <a:latin typeface="Consolas" pitchFamily="34" charset="0"/>
-                <a:ea typeface="Consolas" pitchFamily="34" charset="-122"/>
-                <a:cs typeface="Consolas" pitchFamily="34" charset="-120"/>
-              </a:rPr>
-              <a:t>var</a:t>
+                  <a:srgbClr val="86EFAC"/>
+                </a:solidFill>
+                <a:latin typeface="Consolas" pitchFamily="34" charset="0"/>
+                <a:ea typeface="Consolas" pitchFamily="34" charset="-122"/>
+                <a:cs typeface="Consolas" pitchFamily="34" charset="-120"/>
+              </a:rPr>
+              <a:t>WriteLine</a:t>
             </a:r>
             <a:pPr indent="0" marL="0">
               <a:buNone/>
@@ -16783,505 +18083,27 @@
             <a:r>
               <a:rPr lang="en-US" sz="1300" dirty="0">
                 <a:solidFill>
+                  <a:srgbClr val="B8B5D9"/>
+                </a:solidFill>
+                <a:latin typeface="Consolas" pitchFamily="34" charset="0"/>
+                <a:ea typeface="Consolas" pitchFamily="34" charset="-122"/>
+                <a:cs typeface="Consolas" pitchFamily="34" charset="-120"/>
+              </a:rPr>
+              <a:t>(</a:t>
+            </a:r>
+            <a:pPr indent="0" marL="0">
+              <a:buNone/>
+            </a:pPr>
+            <a:r>
+              <a:rPr lang="en-US" sz="1300" dirty="0">
+                <a:solidFill>
                   <a:srgbClr val="FAF8FF"/>
                 </a:solidFill>
                 <a:latin typeface="Consolas" pitchFamily="34" charset="0"/>
                 <a:ea typeface="Consolas" pitchFamily="34" charset="-122"/>
                 <a:cs typeface="Consolas" pitchFamily="34" charset="-120"/>
               </a:rPr>
-              <a:t> chat </a:t>
-            </a:r>
-            <a:pPr indent="0" marL="0">
-              <a:buNone/>
-            </a:pPr>
-            <a:r>
-              <a:rPr lang="en-US" sz="1300" dirty="0">
-                <a:solidFill>
-                  <a:srgbClr val="CFCBED"/>
-                </a:solidFill>
-                <a:latin typeface="Consolas" pitchFamily="34" charset="0"/>
-                <a:ea typeface="Consolas" pitchFamily="34" charset="-122"/>
-                <a:cs typeface="Consolas" pitchFamily="34" charset="-120"/>
-              </a:rPr>
-              <a:t>=</a:t>
-            </a:r>
-            <a:pPr indent="0" marL="0">
-              <a:buNone/>
-            </a:pPr>
-            <a:r>
-              <a:rPr lang="en-US" sz="1300" dirty="0">
-                <a:solidFill>
-                  <a:srgbClr val="FAF8FF"/>
-                </a:solidFill>
-                <a:latin typeface="Consolas" pitchFamily="34" charset="0"/>
-                <a:ea typeface="Consolas" pitchFamily="34" charset="-122"/>
-                <a:cs typeface="Consolas" pitchFamily="34" charset="-120"/>
-              </a:rPr>
-              <a:t> client</a:t>
-            </a:r>
-            <a:pPr indent="0" marL="0">
-              <a:buNone/>
-            </a:pPr>
-            <a:r>
-              <a:rPr lang="en-US" sz="1300" dirty="0">
-                <a:solidFill>
-                  <a:srgbClr val="B8B5D9"/>
-                </a:solidFill>
-                <a:latin typeface="Consolas" pitchFamily="34" charset="0"/>
-                <a:ea typeface="Consolas" pitchFamily="34" charset="-122"/>
-                <a:cs typeface="Consolas" pitchFamily="34" charset="-120"/>
-              </a:rPr>
-              <a:t>.</a:t>
-            </a:r>
-            <a:pPr indent="0" marL="0">
-              <a:buNone/>
-            </a:pPr>
-            <a:r>
-              <a:rPr lang="en-US" sz="1300" dirty="0">
-                <a:solidFill>
-                  <a:srgbClr val="86EFAC"/>
-                </a:solidFill>
-                <a:latin typeface="Consolas" pitchFamily="34" charset="0"/>
-                <a:ea typeface="Consolas" pitchFamily="34" charset="-122"/>
-                <a:cs typeface="Consolas" pitchFamily="34" charset="-120"/>
-              </a:rPr>
-              <a:t>GetChatClient</a:t>
-            </a:r>
-            <a:pPr indent="0" marL="0">
-              <a:buNone/>
-            </a:pPr>
-            <a:r>
-              <a:rPr lang="en-US" sz="1300" dirty="0">
-                <a:solidFill>
-                  <a:srgbClr val="B8B5D9"/>
-                </a:solidFill>
-                <a:latin typeface="Consolas" pitchFamily="34" charset="0"/>
-                <a:ea typeface="Consolas" pitchFamily="34" charset="-122"/>
-                <a:cs typeface="Consolas" pitchFamily="34" charset="-120"/>
-              </a:rPr>
-              <a:t>(</a:t>
-            </a:r>
-            <a:pPr indent="0" marL="0">
-              <a:buNone/>
-            </a:pPr>
-            <a:r>
-              <a:rPr lang="en-US" sz="1300" dirty="0">
-                <a:solidFill>
-                  <a:srgbClr val="FBBF24"/>
-                </a:solidFill>
-                <a:latin typeface="Consolas" pitchFamily="34" charset="0"/>
-                <a:ea typeface="Consolas" pitchFamily="34" charset="-122"/>
-                <a:cs typeface="Consolas" pitchFamily="34" charset="-120"/>
-              </a:rPr>
-              <a:t>"gpt-4.1"</a:t>
-            </a:r>
-            <a:pPr indent="0" marL="0">
-              <a:buNone/>
-            </a:pPr>
-            <a:r>
-              <a:rPr lang="en-US" sz="1300" dirty="0">
-                <a:solidFill>
-                  <a:srgbClr val="B8B5D9"/>
-                </a:solidFill>
-                <a:latin typeface="Consolas" pitchFamily="34" charset="0"/>
-                <a:ea typeface="Consolas" pitchFamily="34" charset="-122"/>
-                <a:cs typeface="Consolas" pitchFamily="34" charset="-120"/>
-              </a:rPr>
-              <a:t>)</a:t>
-            </a:r>
-            <a:pPr indent="0" marL="0">
-              <a:buNone/>
-            </a:pPr>
-            <a:r>
-              <a:rPr lang="en-US" sz="1300" dirty="0">
-                <a:solidFill>
-                  <a:srgbClr val="B8B5D9"/>
-                </a:solidFill>
-                <a:latin typeface="Consolas" pitchFamily="34" charset="0"/>
-                <a:ea typeface="Consolas" pitchFamily="34" charset="-122"/>
-                <a:cs typeface="Consolas" pitchFamily="34" charset="-120"/>
-              </a:rPr>
-              <a:t>;</a:t>
-            </a:r>
-            <a:pPr indent="0" marL="0">
-              <a:buNone/>
-            </a:pPr>
-            <a:endParaRPr lang="en-US" sz="1300" dirty="0"/>
-          </a:p>
-          <a:p>
-            <a:pPr indent="0" marL="0">
-              <a:buNone/>
-            </a:pPr>
-            <a:endParaRPr lang="en-US" sz="1300" dirty="0"/>
-          </a:p>
-          <a:p>
-            <a:pPr indent="0" marL="0">
-              <a:buNone/>
-            </a:pPr>
-            <a:r>
-              <a:rPr lang="en-US" sz="1300" dirty="0">
-                <a:solidFill>
-                  <a:srgbClr val="FB7185"/>
-                </a:solidFill>
-                <a:latin typeface="Consolas" pitchFamily="34" charset="0"/>
-                <a:ea typeface="Consolas" pitchFamily="34" charset="-122"/>
-                <a:cs typeface="Consolas" pitchFamily="34" charset="-120"/>
-              </a:rPr>
-              <a:t>var</a:t>
-            </a:r>
-            <a:pPr indent="0" marL="0">
-              <a:buNone/>
-            </a:pPr>
-            <a:r>
-              <a:rPr lang="en-US" sz="1300" dirty="0">
-                <a:solidFill>
-                  <a:srgbClr val="FAF8FF"/>
-                </a:solidFill>
-                <a:latin typeface="Consolas" pitchFamily="34" charset="0"/>
-                <a:ea typeface="Consolas" pitchFamily="34" charset="-122"/>
-                <a:cs typeface="Consolas" pitchFamily="34" charset="-120"/>
-              </a:rPr>
-              <a:t> response </a:t>
-            </a:r>
-            <a:pPr indent="0" marL="0">
-              <a:buNone/>
-            </a:pPr>
-            <a:r>
-              <a:rPr lang="en-US" sz="1300" dirty="0">
-                <a:solidFill>
-                  <a:srgbClr val="CFCBED"/>
-                </a:solidFill>
-                <a:latin typeface="Consolas" pitchFamily="34" charset="0"/>
-                <a:ea typeface="Consolas" pitchFamily="34" charset="-122"/>
-                <a:cs typeface="Consolas" pitchFamily="34" charset="-120"/>
-              </a:rPr>
-              <a:t>=</a:t>
-            </a:r>
-            <a:pPr indent="0" marL="0">
-              <a:buNone/>
-            </a:pPr>
-            <a:r>
-              <a:rPr lang="en-US" sz="1300" dirty="0">
-                <a:solidFill>
-                  <a:srgbClr val="FAF8FF"/>
-                </a:solidFill>
-                <a:latin typeface="Consolas" pitchFamily="34" charset="0"/>
-                <a:ea typeface="Consolas" pitchFamily="34" charset="-122"/>
-                <a:cs typeface="Consolas" pitchFamily="34" charset="-120"/>
-              </a:rPr>
-              <a:t> </a:t>
-            </a:r>
-            <a:pPr indent="0" marL="0">
-              <a:buNone/>
-            </a:pPr>
-            <a:r>
-              <a:rPr lang="en-US" sz="1300" dirty="0">
-                <a:solidFill>
-                  <a:srgbClr val="FB7185"/>
-                </a:solidFill>
-                <a:latin typeface="Consolas" pitchFamily="34" charset="0"/>
-                <a:ea typeface="Consolas" pitchFamily="34" charset="-122"/>
-                <a:cs typeface="Consolas" pitchFamily="34" charset="-120"/>
-              </a:rPr>
-              <a:t>await</a:t>
-            </a:r>
-            <a:pPr indent="0" marL="0">
-              <a:buNone/>
-            </a:pPr>
-            <a:r>
-              <a:rPr lang="en-US" sz="1300" dirty="0">
-                <a:solidFill>
-                  <a:srgbClr val="FAF8FF"/>
-                </a:solidFill>
-                <a:latin typeface="Consolas" pitchFamily="34" charset="0"/>
-                <a:ea typeface="Consolas" pitchFamily="34" charset="-122"/>
-                <a:cs typeface="Consolas" pitchFamily="34" charset="-120"/>
-              </a:rPr>
-              <a:t> chat</a:t>
-            </a:r>
-            <a:pPr indent="0" marL="0">
-              <a:buNone/>
-            </a:pPr>
-            <a:r>
-              <a:rPr lang="en-US" sz="1300" dirty="0">
-                <a:solidFill>
-                  <a:srgbClr val="B8B5D9"/>
-                </a:solidFill>
-                <a:latin typeface="Consolas" pitchFamily="34" charset="0"/>
-                <a:ea typeface="Consolas" pitchFamily="34" charset="-122"/>
-                <a:cs typeface="Consolas" pitchFamily="34" charset="-120"/>
-              </a:rPr>
-              <a:t>.</a:t>
-            </a:r>
-            <a:pPr indent="0" marL="0">
-              <a:buNone/>
-            </a:pPr>
-            <a:r>
-              <a:rPr lang="en-US" sz="1300" dirty="0">
-                <a:solidFill>
-                  <a:srgbClr val="86EFAC"/>
-                </a:solidFill>
-                <a:latin typeface="Consolas" pitchFamily="34" charset="0"/>
-                <a:ea typeface="Consolas" pitchFamily="34" charset="-122"/>
-                <a:cs typeface="Consolas" pitchFamily="34" charset="-120"/>
-              </a:rPr>
-              <a:t>CompleteChatAsync</a:t>
-            </a:r>
-            <a:pPr indent="0" marL="0">
-              <a:buNone/>
-            </a:pPr>
-            <a:r>
-              <a:rPr lang="en-US" sz="1300" dirty="0">
-                <a:solidFill>
-                  <a:srgbClr val="B8B5D9"/>
-                </a:solidFill>
-                <a:latin typeface="Consolas" pitchFamily="34" charset="0"/>
-                <a:ea typeface="Consolas" pitchFamily="34" charset="-122"/>
-                <a:cs typeface="Consolas" pitchFamily="34" charset="-120"/>
-              </a:rPr>
-              <a:t>(</a:t>
-            </a:r>
-            <a:pPr indent="0" marL="0">
-              <a:buNone/>
-            </a:pPr>
-            <a:endParaRPr lang="en-US" sz="1300" dirty="0"/>
-          </a:p>
-          <a:p>
-            <a:pPr indent="0" marL="0">
-              <a:buNone/>
-            </a:pPr>
-            <a:r>
-              <a:rPr lang="en-US" sz="1300" dirty="0">
-                <a:solidFill>
-                  <a:srgbClr val="FAF8FF"/>
-                </a:solidFill>
-                <a:latin typeface="Consolas" pitchFamily="34" charset="0"/>
-                <a:ea typeface="Consolas" pitchFamily="34" charset="-122"/>
-                <a:cs typeface="Consolas" pitchFamily="34" charset="-120"/>
-              </a:rPr>
-              <a:t>    </a:t>
-            </a:r>
-            <a:pPr indent="0" marL="0">
-              <a:buNone/>
-            </a:pPr>
-            <a:r>
-              <a:rPr lang="en-US" sz="1300" dirty="0">
-                <a:solidFill>
-                  <a:srgbClr val="FBBF24"/>
-                </a:solidFill>
-                <a:latin typeface="Consolas" pitchFamily="34" charset="0"/>
-                <a:ea typeface="Consolas" pitchFamily="34" charset="-122"/>
-                <a:cs typeface="Consolas" pitchFamily="34" charset="-120"/>
-              </a:rPr>
-              <a:t>"Summarise the agenda for today."</a:t>
-            </a:r>
-            <a:pPr indent="0" marL="0">
-              <a:buNone/>
-            </a:pPr>
-            <a:r>
-              <a:rPr lang="en-US" sz="1300" dirty="0">
-                <a:solidFill>
-                  <a:srgbClr val="B8B5D9"/>
-                </a:solidFill>
-                <a:latin typeface="Consolas" pitchFamily="34" charset="0"/>
-                <a:ea typeface="Consolas" pitchFamily="34" charset="-122"/>
-                <a:cs typeface="Consolas" pitchFamily="34" charset="-120"/>
-              </a:rPr>
-              <a:t>)</a:t>
-            </a:r>
-            <a:pPr indent="0" marL="0">
-              <a:buNone/>
-            </a:pPr>
-            <a:r>
-              <a:rPr lang="en-US" sz="1300" dirty="0">
-                <a:solidFill>
-                  <a:srgbClr val="B8B5D9"/>
-                </a:solidFill>
-                <a:latin typeface="Consolas" pitchFamily="34" charset="0"/>
-                <a:ea typeface="Consolas" pitchFamily="34" charset="-122"/>
-                <a:cs typeface="Consolas" pitchFamily="34" charset="-120"/>
-              </a:rPr>
-              <a:t>;</a:t>
-            </a:r>
-            <a:pPr indent="0" marL="0">
-              <a:buNone/>
-            </a:pPr>
-            <a:endParaRPr lang="en-US" sz="1300" dirty="0"/>
-          </a:p>
-          <a:p>
-            <a:pPr indent="0" marL="0">
-              <a:buNone/>
-            </a:pPr>
-            <a:endParaRPr lang="en-US" sz="1300" dirty="0"/>
-          </a:p>
-          <a:p>
-            <a:pPr indent="0" marL="0">
-              <a:buNone/>
-            </a:pPr>
-            <a:r>
-              <a:rPr lang="en-US" sz="1300" dirty="0">
-                <a:solidFill>
-                  <a:srgbClr val="FAF8FF"/>
-                </a:solidFill>
-                <a:latin typeface="Consolas" pitchFamily="34" charset="0"/>
-                <a:ea typeface="Consolas" pitchFamily="34" charset="-122"/>
-                <a:cs typeface="Consolas" pitchFamily="34" charset="-120"/>
-              </a:rPr>
-              <a:t>Console</a:t>
-            </a:r>
-            <a:pPr indent="0" marL="0">
-              <a:buNone/>
-            </a:pPr>
-            <a:r>
-              <a:rPr lang="en-US" sz="1300" dirty="0">
-                <a:solidFill>
-                  <a:srgbClr val="B8B5D9"/>
-                </a:solidFill>
-                <a:latin typeface="Consolas" pitchFamily="34" charset="0"/>
-                <a:ea typeface="Consolas" pitchFamily="34" charset="-122"/>
-                <a:cs typeface="Consolas" pitchFamily="34" charset="-120"/>
-              </a:rPr>
-              <a:t>.</a:t>
-            </a:r>
-            <a:pPr indent="0" marL="0">
-              <a:buNone/>
-            </a:pPr>
-            <a:r>
-              <a:rPr lang="en-US" sz="1300" dirty="0">
-                <a:solidFill>
-                  <a:srgbClr val="86EFAC"/>
-                </a:solidFill>
-                <a:latin typeface="Consolas" pitchFamily="34" charset="0"/>
-                <a:ea typeface="Consolas" pitchFamily="34" charset="-122"/>
-                <a:cs typeface="Consolas" pitchFamily="34" charset="-120"/>
-              </a:rPr>
-              <a:t>WriteLine</a:t>
-            </a:r>
-            <a:pPr indent="0" marL="0">
-              <a:buNone/>
-            </a:pPr>
-            <a:r>
-              <a:rPr lang="en-US" sz="1300" dirty="0">
-                <a:solidFill>
-                  <a:srgbClr val="B8B5D9"/>
-                </a:solidFill>
-                <a:latin typeface="Consolas" pitchFamily="34" charset="0"/>
-                <a:ea typeface="Consolas" pitchFamily="34" charset="-122"/>
-                <a:cs typeface="Consolas" pitchFamily="34" charset="-120"/>
-              </a:rPr>
-              <a:t>(</a:t>
-            </a:r>
-            <a:pPr indent="0" marL="0">
-              <a:buNone/>
-            </a:pPr>
-            <a:r>
-              <a:rPr lang="en-US" sz="1300" dirty="0">
-                <a:solidFill>
-                  <a:srgbClr val="FAF8FF"/>
-                </a:solidFill>
-                <a:latin typeface="Consolas" pitchFamily="34" charset="0"/>
-                <a:ea typeface="Consolas" pitchFamily="34" charset="-122"/>
-                <a:cs typeface="Consolas" pitchFamily="34" charset="-120"/>
-              </a:rPr>
               <a:t>response</a:t>
-            </a:r>
-            <a:pPr indent="0" marL="0">
-              <a:buNone/>
-            </a:pPr>
-            <a:r>
-              <a:rPr lang="en-US" sz="1300" dirty="0">
-                <a:solidFill>
-                  <a:srgbClr val="B8B5D9"/>
-                </a:solidFill>
-                <a:latin typeface="Consolas" pitchFamily="34" charset="0"/>
-                <a:ea typeface="Consolas" pitchFamily="34" charset="-122"/>
-                <a:cs typeface="Consolas" pitchFamily="34" charset="-120"/>
-              </a:rPr>
-              <a:t>.</a:t>
-            </a:r>
-            <a:pPr indent="0" marL="0">
-              <a:buNone/>
-            </a:pPr>
-            <a:r>
-              <a:rPr lang="en-US" sz="1300" dirty="0">
-                <a:solidFill>
-                  <a:srgbClr val="FAF8FF"/>
-                </a:solidFill>
-                <a:latin typeface="Consolas" pitchFamily="34" charset="0"/>
-                <a:ea typeface="Consolas" pitchFamily="34" charset="-122"/>
-                <a:cs typeface="Consolas" pitchFamily="34" charset="-120"/>
-              </a:rPr>
-              <a:t>Value</a:t>
-            </a:r>
-            <a:pPr indent="0" marL="0">
-              <a:buNone/>
-            </a:pPr>
-            <a:r>
-              <a:rPr lang="en-US" sz="1300" dirty="0">
-                <a:solidFill>
-                  <a:srgbClr val="B8B5D9"/>
-                </a:solidFill>
-                <a:latin typeface="Consolas" pitchFamily="34" charset="0"/>
-                <a:ea typeface="Consolas" pitchFamily="34" charset="-122"/>
-                <a:cs typeface="Consolas" pitchFamily="34" charset="-120"/>
-              </a:rPr>
-              <a:t>.</a:t>
-            </a:r>
-            <a:pPr indent="0" marL="0">
-              <a:buNone/>
-            </a:pPr>
-            <a:r>
-              <a:rPr lang="en-US" sz="1300" dirty="0">
-                <a:solidFill>
-                  <a:srgbClr val="FAF8FF"/>
-                </a:solidFill>
-                <a:latin typeface="Consolas" pitchFamily="34" charset="0"/>
-                <a:ea typeface="Consolas" pitchFamily="34" charset="-122"/>
-                <a:cs typeface="Consolas" pitchFamily="34" charset="-120"/>
-              </a:rPr>
-              <a:t>Content</a:t>
-            </a:r>
-            <a:pPr indent="0" marL="0">
-              <a:buNone/>
-            </a:pPr>
-            <a:r>
-              <a:rPr lang="en-US" sz="1300" dirty="0">
-                <a:solidFill>
-                  <a:srgbClr val="B8B5D9"/>
-                </a:solidFill>
-                <a:latin typeface="Consolas" pitchFamily="34" charset="0"/>
-                <a:ea typeface="Consolas" pitchFamily="34" charset="-122"/>
-                <a:cs typeface="Consolas" pitchFamily="34" charset="-120"/>
-              </a:rPr>
-              <a:t>[</a:t>
-            </a:r>
-            <a:pPr indent="0" marL="0">
-              <a:buNone/>
-            </a:pPr>
-            <a:r>
-              <a:rPr lang="en-US" sz="1300" dirty="0">
-                <a:solidFill>
-                  <a:srgbClr val="F472B6"/>
-                </a:solidFill>
-                <a:latin typeface="Consolas" pitchFamily="34" charset="0"/>
-                <a:ea typeface="Consolas" pitchFamily="34" charset="-122"/>
-                <a:cs typeface="Consolas" pitchFamily="34" charset="-120"/>
-              </a:rPr>
-              <a:t>0</a:t>
-            </a:r>
-            <a:pPr indent="0" marL="0">
-              <a:buNone/>
-            </a:pPr>
-            <a:r>
-              <a:rPr lang="en-US" sz="1300" dirty="0">
-                <a:solidFill>
-                  <a:srgbClr val="B8B5D9"/>
-                </a:solidFill>
-                <a:latin typeface="Consolas" pitchFamily="34" charset="0"/>
-                <a:ea typeface="Consolas" pitchFamily="34" charset="-122"/>
-                <a:cs typeface="Consolas" pitchFamily="34" charset="-120"/>
-              </a:rPr>
-              <a:t>]</a:t>
             </a:r>
             <a:pPr indent="0" marL="0">
               <a:buNone/>
@@ -18281,7 +19103,7 @@
                 <a:ea typeface="Calibri" pitchFamily="34" charset="-122"/>
                 <a:cs typeface="Calibri" pitchFamily="34" charset="-120"/>
               </a:rPr>
-              <a:t>iOS 26 · macOS Tahoe</a:t>
+              <a:t>iOS 26 · macOS 26 Tahoe</a:t>
             </a:r>
             <a:endParaRPr lang="en-US" sz="1300" dirty="0"/>
           </a:p>
@@ -18301,7 +19123,7 @@
                 <a:ea typeface="Calibri" pitchFamily="34" charset="-122"/>
                 <a:cs typeface="Calibri" pitchFamily="34" charset="-120"/>
               </a:rPr>
-              <a:t>~3B params · multilingual</a:t>
+              <a:t>Multilingual</a:t>
             </a:r>
             <a:endParaRPr lang="en-US" sz="1300" dirty="0"/>
           </a:p>
@@ -18321,7 +19143,7 @@
                 <a:ea typeface="Calibri" pitchFamily="34" charset="-122"/>
                 <a:cs typeface="Calibri" pitchFamily="34" charset="-120"/>
               </a:rPr>
-              <a:t>LoRA adapters · tool calls</a:t>
+              <a:t>Tool calling</a:t>
             </a:r>
             <a:endParaRPr lang="en-US" sz="1300" dirty="0"/>
           </a:p>
@@ -18614,7 +19436,7 @@
                 <a:ea typeface="Calibri" pitchFamily="34" charset="-122"/>
                 <a:cs typeface="Calibri" pitchFamily="34" charset="-120"/>
               </a:rPr>
-              <a:t>~3.3B Phi-3.5-class model</a:t>
+              <a:t>Small language model</a:t>
             </a:r>
             <a:endParaRPr lang="en-US" sz="1300" dirty="0"/>
           </a:p>
@@ -22180,7 +23002,7 @@
                 <a:ea typeface="Consolas" pitchFamily="34" charset="-122"/>
                 <a:cs typeface="Consolas" pitchFamily="34" charset="-120"/>
               </a:rPr>
-              <a:t>// Manager owns the dynamic endpoint + key</a:t>
+              <a:t>// Foundry Local exposes an OpenAI-compatible endpoint —</a:t>
             </a:r>
             <a:pPr indent="0" marL="0">
               <a:buNone/>
@@ -22192,15 +23014,97 @@
               <a:buNone/>
             </a:pPr>
             <a:r>
+              <a:rPr lang="en-US" sz="1100" i="1" dirty="0">
+                <a:solidFill>
+                  <a:srgbClr val="8B88B5"/>
+                </a:solidFill>
+                <a:latin typeface="Consolas" pitchFamily="34" charset="0"/>
+                <a:ea typeface="Consolas" pitchFamily="34" charset="-122"/>
+                <a:cs typeface="Consolas" pitchFamily="34" charset="-120"/>
+              </a:rPr>
+              <a:t>// same SDK you'd use against the cloud, different URL.</a:t>
+            </a:r>
+            <a:pPr indent="0" marL="0">
+              <a:buNone/>
+            </a:pPr>
+            <a:endParaRPr lang="en-US" sz="1100" dirty="0"/>
+          </a:p>
+          <a:p>
+            <a:pPr indent="0" marL="0">
+              <a:buNone/>
+            </a:pPr>
+            <a:endParaRPr lang="en-US" sz="1100" dirty="0"/>
+          </a:p>
+          <a:p>
+            <a:pPr indent="0" marL="0">
+              <a:buNone/>
+            </a:pPr>
+            <a:r>
               <a:rPr lang="en-US" sz="1100" dirty="0">
                 <a:solidFill>
+                  <a:srgbClr val="A78BFA"/>
+                </a:solidFill>
+                <a:latin typeface="Consolas" pitchFamily="34" charset="0"/>
+                <a:ea typeface="Consolas" pitchFamily="34" charset="-122"/>
+                <a:cs typeface="Consolas" pitchFamily="34" charset="-120"/>
+              </a:rPr>
+              <a:t>IChatClient</a:t>
+            </a:r>
+            <a:pPr indent="0" marL="0">
+              <a:buNone/>
+            </a:pPr>
+            <a:r>
+              <a:rPr lang="en-US" sz="1100" dirty="0">
+                <a:solidFill>
+                  <a:srgbClr val="FAF8FF"/>
+                </a:solidFill>
+                <a:latin typeface="Consolas" pitchFamily="34" charset="0"/>
+                <a:ea typeface="Consolas" pitchFamily="34" charset="-122"/>
+                <a:cs typeface="Consolas" pitchFamily="34" charset="-120"/>
+              </a:rPr>
+              <a:t> chat </a:t>
+            </a:r>
+            <a:pPr indent="0" marL="0">
+              <a:buNone/>
+            </a:pPr>
+            <a:r>
+              <a:rPr lang="en-US" sz="1100" dirty="0">
+                <a:solidFill>
+                  <a:srgbClr val="CFCBED"/>
+                </a:solidFill>
+                <a:latin typeface="Consolas" pitchFamily="34" charset="0"/>
+                <a:ea typeface="Consolas" pitchFamily="34" charset="-122"/>
+                <a:cs typeface="Consolas" pitchFamily="34" charset="-120"/>
+              </a:rPr>
+              <a:t>=</a:t>
+            </a:r>
+            <a:pPr indent="0" marL="0">
+              <a:buNone/>
+            </a:pPr>
+            <a:r>
+              <a:rPr lang="en-US" sz="1100" dirty="0">
+                <a:solidFill>
+                  <a:srgbClr val="FAF8FF"/>
+                </a:solidFill>
+                <a:latin typeface="Consolas" pitchFamily="34" charset="0"/>
+                <a:ea typeface="Consolas" pitchFamily="34" charset="-122"/>
+                <a:cs typeface="Consolas" pitchFamily="34" charset="-120"/>
+              </a:rPr>
+              <a:t> </a:t>
+            </a:r>
+            <a:pPr indent="0" marL="0">
+              <a:buNone/>
+            </a:pPr>
+            <a:r>
+              <a:rPr lang="en-US" sz="1100" dirty="0">
+                <a:solidFill>
                   <a:srgbClr val="FB7185"/>
                 </a:solidFill>
                 <a:latin typeface="Consolas" pitchFamily="34" charset="0"/>
                 <a:ea typeface="Consolas" pitchFamily="34" charset="-122"/>
                 <a:cs typeface="Consolas" pitchFamily="34" charset="-120"/>
               </a:rPr>
-              <a:t>var</a:t>
+              <a:t>new</a:t>
             </a:r>
             <a:pPr indent="0" marL="0">
               <a:buNone/>
@@ -22214,7 +23118,7 @@
                 <a:ea typeface="Consolas" pitchFamily="34" charset="-122"/>
                 <a:cs typeface="Consolas" pitchFamily="34" charset="-120"/>
               </a:rPr>
-              <a:t> manager </a:t>
+              <a:t> </a:t>
             </a:r>
             <a:pPr indent="0" marL="0">
               <a:buNone/>
@@ -22222,6 +23126,442 @@
             <a:r>
               <a:rPr lang="en-US" sz="1100" dirty="0">
                 <a:solidFill>
+                  <a:srgbClr val="FAF8FF"/>
+                </a:solidFill>
+                <a:latin typeface="Consolas" pitchFamily="34" charset="0"/>
+                <a:ea typeface="Consolas" pitchFamily="34" charset="-122"/>
+                <a:cs typeface="Consolas" pitchFamily="34" charset="-120"/>
+              </a:rPr>
+              <a:t>ChatClient</a:t>
+            </a:r>
+            <a:pPr indent="0" marL="0">
+              <a:buNone/>
+            </a:pPr>
+            <a:r>
+              <a:rPr lang="en-US" sz="1100" dirty="0">
+                <a:solidFill>
+                  <a:srgbClr val="B8B5D9"/>
+                </a:solidFill>
+                <a:latin typeface="Consolas" pitchFamily="34" charset="0"/>
+                <a:ea typeface="Consolas" pitchFamily="34" charset="-122"/>
+                <a:cs typeface="Consolas" pitchFamily="34" charset="-120"/>
+              </a:rPr>
+              <a:t>(</a:t>
+            </a:r>
+            <a:pPr indent="0" marL="0">
+              <a:buNone/>
+            </a:pPr>
+            <a:endParaRPr lang="en-US" sz="1100" dirty="0"/>
+          </a:p>
+          <a:p>
+            <a:pPr indent="0" marL="0">
+              <a:buNone/>
+            </a:pPr>
+            <a:r>
+              <a:rPr lang="en-US" sz="1100" dirty="0">
+                <a:solidFill>
+                  <a:srgbClr val="FAF8FF"/>
+                </a:solidFill>
+                <a:latin typeface="Consolas" pitchFamily="34" charset="0"/>
+                <a:ea typeface="Consolas" pitchFamily="34" charset="-122"/>
+                <a:cs typeface="Consolas" pitchFamily="34" charset="-120"/>
+              </a:rPr>
+              <a:t>        </a:t>
+            </a:r>
+            <a:pPr indent="0" marL="0">
+              <a:buNone/>
+            </a:pPr>
+            <a:r>
+              <a:rPr lang="en-US" sz="1100" dirty="0">
+                <a:solidFill>
+                  <a:srgbClr val="FAF8FF"/>
+                </a:solidFill>
+                <a:latin typeface="Consolas" pitchFamily="34" charset="0"/>
+                <a:ea typeface="Consolas" pitchFamily="34" charset="-122"/>
+                <a:cs typeface="Consolas" pitchFamily="34" charset="-120"/>
+              </a:rPr>
+              <a:t>model</a:t>
+            </a:r>
+            <a:pPr indent="0" marL="0">
+              <a:buNone/>
+            </a:pPr>
+            <a:r>
+              <a:rPr lang="en-US" sz="1100" dirty="0">
+                <a:solidFill>
+                  <a:srgbClr val="B8B5D9"/>
+                </a:solidFill>
+                <a:latin typeface="Consolas" pitchFamily="34" charset="0"/>
+                <a:ea typeface="Consolas" pitchFamily="34" charset="-122"/>
+                <a:cs typeface="Consolas" pitchFamily="34" charset="-120"/>
+              </a:rPr>
+              <a:t>:</a:t>
+            </a:r>
+            <a:pPr indent="0" marL="0">
+              <a:buNone/>
+            </a:pPr>
+            <a:r>
+              <a:rPr lang="en-US" sz="1100" dirty="0">
+                <a:solidFill>
+                  <a:srgbClr val="FAF8FF"/>
+                </a:solidFill>
+                <a:latin typeface="Consolas" pitchFamily="34" charset="0"/>
+                <a:ea typeface="Consolas" pitchFamily="34" charset="-122"/>
+                <a:cs typeface="Consolas" pitchFamily="34" charset="-120"/>
+              </a:rPr>
+              <a:t> </a:t>
+            </a:r>
+            <a:pPr indent="0" marL="0">
+              <a:buNone/>
+            </a:pPr>
+            <a:r>
+              <a:rPr lang="en-US" sz="1100" dirty="0">
+                <a:solidFill>
+                  <a:srgbClr val="FBBF24"/>
+                </a:solidFill>
+                <a:latin typeface="Consolas" pitchFamily="34" charset="0"/>
+                <a:ea typeface="Consolas" pitchFamily="34" charset="-122"/>
+                <a:cs typeface="Consolas" pitchFamily="34" charset="-120"/>
+              </a:rPr>
+              <a:t>"phi-4-mini"</a:t>
+            </a:r>
+            <a:pPr indent="0" marL="0">
+              <a:buNone/>
+            </a:pPr>
+            <a:r>
+              <a:rPr lang="en-US" sz="1100" dirty="0">
+                <a:solidFill>
+                  <a:srgbClr val="B8B5D9"/>
+                </a:solidFill>
+                <a:latin typeface="Consolas" pitchFamily="34" charset="0"/>
+                <a:ea typeface="Consolas" pitchFamily="34" charset="-122"/>
+                <a:cs typeface="Consolas" pitchFamily="34" charset="-120"/>
+              </a:rPr>
+              <a:t>,</a:t>
+            </a:r>
+            <a:pPr indent="0" marL="0">
+              <a:buNone/>
+            </a:pPr>
+            <a:endParaRPr lang="en-US" sz="1100" dirty="0"/>
+          </a:p>
+          <a:p>
+            <a:pPr indent="0" marL="0">
+              <a:buNone/>
+            </a:pPr>
+            <a:r>
+              <a:rPr lang="en-US" sz="1100" dirty="0">
+                <a:solidFill>
+                  <a:srgbClr val="FAF8FF"/>
+                </a:solidFill>
+                <a:latin typeface="Consolas" pitchFamily="34" charset="0"/>
+                <a:ea typeface="Consolas" pitchFamily="34" charset="-122"/>
+                <a:cs typeface="Consolas" pitchFamily="34" charset="-120"/>
+              </a:rPr>
+              <a:t>        </a:t>
+            </a:r>
+            <a:pPr indent="0" marL="0">
+              <a:buNone/>
+            </a:pPr>
+            <a:r>
+              <a:rPr lang="en-US" sz="1100" dirty="0">
+                <a:solidFill>
+                  <a:srgbClr val="FAF8FF"/>
+                </a:solidFill>
+                <a:latin typeface="Consolas" pitchFamily="34" charset="0"/>
+                <a:ea typeface="Consolas" pitchFamily="34" charset="-122"/>
+                <a:cs typeface="Consolas" pitchFamily="34" charset="-120"/>
+              </a:rPr>
+              <a:t>credential</a:t>
+            </a:r>
+            <a:pPr indent="0" marL="0">
+              <a:buNone/>
+            </a:pPr>
+            <a:r>
+              <a:rPr lang="en-US" sz="1100" dirty="0">
+                <a:solidFill>
+                  <a:srgbClr val="B8B5D9"/>
+                </a:solidFill>
+                <a:latin typeface="Consolas" pitchFamily="34" charset="0"/>
+                <a:ea typeface="Consolas" pitchFamily="34" charset="-122"/>
+                <a:cs typeface="Consolas" pitchFamily="34" charset="-120"/>
+              </a:rPr>
+              <a:t>:</a:t>
+            </a:r>
+            <a:pPr indent="0" marL="0">
+              <a:buNone/>
+            </a:pPr>
+            <a:r>
+              <a:rPr lang="en-US" sz="1100" dirty="0">
+                <a:solidFill>
+                  <a:srgbClr val="FAF8FF"/>
+                </a:solidFill>
+                <a:latin typeface="Consolas" pitchFamily="34" charset="0"/>
+                <a:ea typeface="Consolas" pitchFamily="34" charset="-122"/>
+                <a:cs typeface="Consolas" pitchFamily="34" charset="-120"/>
+              </a:rPr>
+              <a:t> </a:t>
+            </a:r>
+            <a:pPr indent="0" marL="0">
+              <a:buNone/>
+            </a:pPr>
+            <a:r>
+              <a:rPr lang="en-US" sz="1100" dirty="0">
+                <a:solidFill>
+                  <a:srgbClr val="FB7185"/>
+                </a:solidFill>
+                <a:latin typeface="Consolas" pitchFamily="34" charset="0"/>
+                <a:ea typeface="Consolas" pitchFamily="34" charset="-122"/>
+                <a:cs typeface="Consolas" pitchFamily="34" charset="-120"/>
+              </a:rPr>
+              <a:t>new</a:t>
+            </a:r>
+            <a:pPr indent="0" marL="0">
+              <a:buNone/>
+            </a:pPr>
+            <a:r>
+              <a:rPr lang="en-US" sz="1100" dirty="0">
+                <a:solidFill>
+                  <a:srgbClr val="FAF8FF"/>
+                </a:solidFill>
+                <a:latin typeface="Consolas" pitchFamily="34" charset="0"/>
+                <a:ea typeface="Consolas" pitchFamily="34" charset="-122"/>
+                <a:cs typeface="Consolas" pitchFamily="34" charset="-120"/>
+              </a:rPr>
+              <a:t> </a:t>
+            </a:r>
+            <a:pPr indent="0" marL="0">
+              <a:buNone/>
+            </a:pPr>
+            <a:r>
+              <a:rPr lang="en-US" sz="1100" dirty="0">
+                <a:solidFill>
+                  <a:srgbClr val="FAF8FF"/>
+                </a:solidFill>
+                <a:latin typeface="Consolas" pitchFamily="34" charset="0"/>
+                <a:ea typeface="Consolas" pitchFamily="34" charset="-122"/>
+                <a:cs typeface="Consolas" pitchFamily="34" charset="-120"/>
+              </a:rPr>
+              <a:t>ApiKeyCredential</a:t>
+            </a:r>
+            <a:pPr indent="0" marL="0">
+              <a:buNone/>
+            </a:pPr>
+            <a:r>
+              <a:rPr lang="en-US" sz="1100" dirty="0">
+                <a:solidFill>
+                  <a:srgbClr val="B8B5D9"/>
+                </a:solidFill>
+                <a:latin typeface="Consolas" pitchFamily="34" charset="0"/>
+                <a:ea typeface="Consolas" pitchFamily="34" charset="-122"/>
+                <a:cs typeface="Consolas" pitchFamily="34" charset="-120"/>
+              </a:rPr>
+              <a:t>(</a:t>
+            </a:r>
+            <a:pPr indent="0" marL="0">
+              <a:buNone/>
+            </a:pPr>
+            <a:r>
+              <a:rPr lang="en-US" sz="1100" dirty="0">
+                <a:solidFill>
+                  <a:srgbClr val="FBBF24"/>
+                </a:solidFill>
+                <a:latin typeface="Consolas" pitchFamily="34" charset="0"/>
+                <a:ea typeface="Consolas" pitchFamily="34" charset="-122"/>
+                <a:cs typeface="Consolas" pitchFamily="34" charset="-120"/>
+              </a:rPr>
+              <a:t>"not-used"</a:t>
+            </a:r>
+            <a:pPr indent="0" marL="0">
+              <a:buNone/>
+            </a:pPr>
+            <a:r>
+              <a:rPr lang="en-US" sz="1100" dirty="0">
+                <a:solidFill>
+                  <a:srgbClr val="B8B5D9"/>
+                </a:solidFill>
+                <a:latin typeface="Consolas" pitchFamily="34" charset="0"/>
+                <a:ea typeface="Consolas" pitchFamily="34" charset="-122"/>
+                <a:cs typeface="Consolas" pitchFamily="34" charset="-120"/>
+              </a:rPr>
+              <a:t>)</a:t>
+            </a:r>
+            <a:pPr indent="0" marL="0">
+              <a:buNone/>
+            </a:pPr>
+            <a:r>
+              <a:rPr lang="en-US" sz="1100" dirty="0">
+                <a:solidFill>
+                  <a:srgbClr val="B8B5D9"/>
+                </a:solidFill>
+                <a:latin typeface="Consolas" pitchFamily="34" charset="0"/>
+                <a:ea typeface="Consolas" pitchFamily="34" charset="-122"/>
+                <a:cs typeface="Consolas" pitchFamily="34" charset="-120"/>
+              </a:rPr>
+              <a:t>,</a:t>
+            </a:r>
+            <a:pPr indent="0" marL="0">
+              <a:buNone/>
+            </a:pPr>
+            <a:endParaRPr lang="en-US" sz="1100" dirty="0"/>
+          </a:p>
+          <a:p>
+            <a:pPr indent="0" marL="0">
+              <a:buNone/>
+            </a:pPr>
+            <a:r>
+              <a:rPr lang="en-US" sz="1100" dirty="0">
+                <a:solidFill>
+                  <a:srgbClr val="FAF8FF"/>
+                </a:solidFill>
+                <a:latin typeface="Consolas" pitchFamily="34" charset="0"/>
+                <a:ea typeface="Consolas" pitchFamily="34" charset="-122"/>
+                <a:cs typeface="Consolas" pitchFamily="34" charset="-120"/>
+              </a:rPr>
+              <a:t>        </a:t>
+            </a:r>
+            <a:pPr indent="0" marL="0">
+              <a:buNone/>
+            </a:pPr>
+            <a:r>
+              <a:rPr lang="en-US" sz="1100" dirty="0">
+                <a:solidFill>
+                  <a:srgbClr val="FAF8FF"/>
+                </a:solidFill>
+                <a:latin typeface="Consolas" pitchFamily="34" charset="0"/>
+                <a:ea typeface="Consolas" pitchFamily="34" charset="-122"/>
+                <a:cs typeface="Consolas" pitchFamily="34" charset="-120"/>
+              </a:rPr>
+              <a:t>options</a:t>
+            </a:r>
+            <a:pPr indent="0" marL="0">
+              <a:buNone/>
+            </a:pPr>
+            <a:r>
+              <a:rPr lang="en-US" sz="1100" dirty="0">
+                <a:solidFill>
+                  <a:srgbClr val="B8B5D9"/>
+                </a:solidFill>
+                <a:latin typeface="Consolas" pitchFamily="34" charset="0"/>
+                <a:ea typeface="Consolas" pitchFamily="34" charset="-122"/>
+                <a:cs typeface="Consolas" pitchFamily="34" charset="-120"/>
+              </a:rPr>
+              <a:t>:</a:t>
+            </a:r>
+            <a:pPr indent="0" marL="0">
+              <a:buNone/>
+            </a:pPr>
+            <a:r>
+              <a:rPr lang="en-US" sz="1100" dirty="0">
+                <a:solidFill>
+                  <a:srgbClr val="FAF8FF"/>
+                </a:solidFill>
+                <a:latin typeface="Consolas" pitchFamily="34" charset="0"/>
+                <a:ea typeface="Consolas" pitchFamily="34" charset="-122"/>
+                <a:cs typeface="Consolas" pitchFamily="34" charset="-120"/>
+              </a:rPr>
+              <a:t> </a:t>
+            </a:r>
+            <a:pPr indent="0" marL="0">
+              <a:buNone/>
+            </a:pPr>
+            <a:r>
+              <a:rPr lang="en-US" sz="1100" dirty="0">
+                <a:solidFill>
+                  <a:srgbClr val="FB7185"/>
+                </a:solidFill>
+                <a:latin typeface="Consolas" pitchFamily="34" charset="0"/>
+                <a:ea typeface="Consolas" pitchFamily="34" charset="-122"/>
+                <a:cs typeface="Consolas" pitchFamily="34" charset="-120"/>
+              </a:rPr>
+              <a:t>new</a:t>
+            </a:r>
+            <a:pPr indent="0" marL="0">
+              <a:buNone/>
+            </a:pPr>
+            <a:r>
+              <a:rPr lang="en-US" sz="1100" dirty="0">
+                <a:solidFill>
+                  <a:srgbClr val="FAF8FF"/>
+                </a:solidFill>
+                <a:latin typeface="Consolas" pitchFamily="34" charset="0"/>
+                <a:ea typeface="Consolas" pitchFamily="34" charset="-122"/>
+                <a:cs typeface="Consolas" pitchFamily="34" charset="-120"/>
+              </a:rPr>
+              <a:t> </a:t>
+            </a:r>
+            <a:pPr indent="0" marL="0">
+              <a:buNone/>
+            </a:pPr>
+            <a:r>
+              <a:rPr lang="en-US" sz="1100" dirty="0">
+                <a:solidFill>
+                  <a:srgbClr val="FAF8FF"/>
+                </a:solidFill>
+                <a:latin typeface="Consolas" pitchFamily="34" charset="0"/>
+                <a:ea typeface="Consolas" pitchFamily="34" charset="-122"/>
+                <a:cs typeface="Consolas" pitchFamily="34" charset="-120"/>
+              </a:rPr>
+              <a:t>OpenAIClientOptions</a:t>
+            </a:r>
+            <a:pPr indent="0" marL="0">
+              <a:buNone/>
+            </a:pPr>
+            <a:endParaRPr lang="en-US" sz="1100" dirty="0"/>
+          </a:p>
+          <a:p>
+            <a:pPr indent="0" marL="0">
+              <a:buNone/>
+            </a:pPr>
+            <a:r>
+              <a:rPr lang="en-US" sz="1100" dirty="0">
+                <a:solidFill>
+                  <a:srgbClr val="FAF8FF"/>
+                </a:solidFill>
+                <a:latin typeface="Consolas" pitchFamily="34" charset="0"/>
+                <a:ea typeface="Consolas" pitchFamily="34" charset="-122"/>
+                <a:cs typeface="Consolas" pitchFamily="34" charset="-120"/>
+              </a:rPr>
+              <a:t>        </a:t>
+            </a:r>
+            <a:pPr indent="0" marL="0">
+              <a:buNone/>
+            </a:pPr>
+            <a:r>
+              <a:rPr lang="en-US" sz="1100" dirty="0">
+                <a:solidFill>
+                  <a:srgbClr val="B8B5D9"/>
+                </a:solidFill>
+                <a:latin typeface="Consolas" pitchFamily="34" charset="0"/>
+                <a:ea typeface="Consolas" pitchFamily="34" charset="-122"/>
+                <a:cs typeface="Consolas" pitchFamily="34" charset="-120"/>
+              </a:rPr>
+              <a:t>{</a:t>
+            </a:r>
+            <a:pPr indent="0" marL="0">
+              <a:buNone/>
+            </a:pPr>
+            <a:endParaRPr lang="en-US" sz="1100" dirty="0"/>
+          </a:p>
+          <a:p>
+            <a:pPr indent="0" marL="0">
+              <a:buNone/>
+            </a:pPr>
+            <a:r>
+              <a:rPr lang="en-US" sz="1100" dirty="0">
+                <a:solidFill>
+                  <a:srgbClr val="FAF8FF"/>
+                </a:solidFill>
+                <a:latin typeface="Consolas" pitchFamily="34" charset="0"/>
+                <a:ea typeface="Consolas" pitchFamily="34" charset="-122"/>
+                <a:cs typeface="Consolas" pitchFamily="34" charset="-120"/>
+              </a:rPr>
+              <a:t>            Endpoint </a:t>
+            </a:r>
+            <a:pPr indent="0" marL="0">
+              <a:buNone/>
+            </a:pPr>
+            <a:r>
+              <a:rPr lang="en-US" sz="1100" dirty="0">
+                <a:solidFill>
                   <a:srgbClr val="CFCBED"/>
                 </a:solidFill>
                 <a:latin typeface="Consolas" pitchFamily="34" charset="0"/>
@@ -22256,7 +23596,7 @@
                 <a:ea typeface="Consolas" pitchFamily="34" charset="-122"/>
                 <a:cs typeface="Consolas" pitchFamily="34" charset="-120"/>
               </a:rPr>
-              <a:t>await</a:t>
+              <a:t>new</a:t>
             </a:r>
             <a:pPr indent="0" marL="0">
               <a:buNone/>
@@ -22270,7 +23610,63 @@
                 <a:ea typeface="Consolas" pitchFamily="34" charset="-122"/>
                 <a:cs typeface="Consolas" pitchFamily="34" charset="-120"/>
               </a:rPr>
-              <a:t> FoundryLocalManager</a:t>
+              <a:t> </a:t>
+            </a:r>
+            <a:pPr indent="0" marL="0">
+              <a:buNone/>
+            </a:pPr>
+            <a:r>
+              <a:rPr lang="en-US" sz="1100" dirty="0">
+                <a:solidFill>
+                  <a:srgbClr val="FAF8FF"/>
+                </a:solidFill>
+                <a:latin typeface="Consolas" pitchFamily="34" charset="0"/>
+                <a:ea typeface="Consolas" pitchFamily="34" charset="-122"/>
+                <a:cs typeface="Consolas" pitchFamily="34" charset="-120"/>
+              </a:rPr>
+              <a:t>Uri</a:t>
+            </a:r>
+            <a:pPr indent="0" marL="0">
+              <a:buNone/>
+            </a:pPr>
+            <a:r>
+              <a:rPr lang="en-US" sz="1100" dirty="0">
+                <a:solidFill>
+                  <a:srgbClr val="B8B5D9"/>
+                </a:solidFill>
+                <a:latin typeface="Consolas" pitchFamily="34" charset="0"/>
+                <a:ea typeface="Consolas" pitchFamily="34" charset="-122"/>
+                <a:cs typeface="Consolas" pitchFamily="34" charset="-120"/>
+              </a:rPr>
+              <a:t>(</a:t>
+            </a:r>
+            <a:pPr indent="0" marL="0">
+              <a:buNone/>
+            </a:pPr>
+            <a:r>
+              <a:rPr lang="en-US" sz="1100" dirty="0">
+                <a:solidFill>
+                  <a:srgbClr val="FBBF24"/>
+                </a:solidFill>
+                <a:latin typeface="Consolas" pitchFamily="34" charset="0"/>
+                <a:ea typeface="Consolas" pitchFamily="34" charset="-122"/>
+                <a:cs typeface="Consolas" pitchFamily="34" charset="-120"/>
+              </a:rPr>
+              <a:t>"http://localhost:5273/v1"</a:t>
+            </a:r>
+            <a:pPr indent="0" marL="0">
+              <a:buNone/>
+            </a:pPr>
+            <a:r>
+              <a:rPr lang="en-US" sz="1100" dirty="0">
+                <a:solidFill>
+                  <a:srgbClr val="B8B5D9"/>
+                </a:solidFill>
+                <a:latin typeface="Consolas" pitchFamily="34" charset="0"/>
+                <a:ea typeface="Consolas" pitchFamily="34" charset="-122"/>
+                <a:cs typeface="Consolas" pitchFamily="34" charset="-120"/>
+              </a:rPr>
+              <a:t>)</a:t>
             </a:r>
             <a:pPr indent="0" marL="0">
               <a:buNone/>
@@ -22290,6 +23686,54 @@
                 <a:ea typeface="Consolas" pitchFamily="34" charset="-122"/>
                 <a:cs typeface="Consolas" pitchFamily="34" charset="-120"/>
               </a:rPr>
+              <a:t>        </a:t>
+            </a:r>
+            <a:pPr indent="0" marL="0">
+              <a:buNone/>
+            </a:pPr>
+            <a:r>
+              <a:rPr lang="en-US" sz="1100" dirty="0">
+                <a:solidFill>
+                  <a:srgbClr val="B8B5D9"/>
+                </a:solidFill>
+                <a:latin typeface="Consolas" pitchFamily="34" charset="0"/>
+                <a:ea typeface="Consolas" pitchFamily="34" charset="-122"/>
+                <a:cs typeface="Consolas" pitchFamily="34" charset="-120"/>
+              </a:rPr>
+              <a:t>}</a:t>
+            </a:r>
+            <a:pPr indent="0" marL="0">
+              <a:buNone/>
+            </a:pPr>
+            <a:r>
+              <a:rPr lang="en-US" sz="1100" dirty="0">
+                <a:solidFill>
+                  <a:srgbClr val="B8B5D9"/>
+                </a:solidFill>
+                <a:latin typeface="Consolas" pitchFamily="34" charset="0"/>
+                <a:ea typeface="Consolas" pitchFamily="34" charset="-122"/>
+                <a:cs typeface="Consolas" pitchFamily="34" charset="-120"/>
+              </a:rPr>
+              <a:t>)</a:t>
+            </a:r>
+            <a:pPr indent="0" marL="0">
+              <a:buNone/>
+            </a:pPr>
+            <a:endParaRPr lang="en-US" sz="1100" dirty="0"/>
+          </a:p>
+          <a:p>
+            <a:pPr indent="0" marL="0">
+              <a:buNone/>
+            </a:pPr>
+            <a:r>
+              <a:rPr lang="en-US" sz="1100" dirty="0">
+                <a:solidFill>
+                  <a:srgbClr val="FAF8FF"/>
+                </a:solidFill>
+                <a:latin typeface="Consolas" pitchFamily="34" charset="0"/>
+                <a:ea typeface="Consolas" pitchFamily="34" charset="-122"/>
+                <a:cs typeface="Consolas" pitchFamily="34" charset="-120"/>
+              </a:rPr>
               <a:t>    </a:t>
             </a:r>
             <a:pPr indent="0" marL="0">
@@ -22318,7 +23762,7 @@
                 <a:ea typeface="Consolas" pitchFamily="34" charset="-122"/>
                 <a:cs typeface="Consolas" pitchFamily="34" charset="-120"/>
               </a:rPr>
-              <a:t>StartModelAsync</a:t>
+              <a:t>AsIChatClient</a:t>
             </a:r>
             <a:pPr indent="0" marL="0">
               <a:buNone/>
@@ -22333,644 +23777,6 @@
                 <a:cs typeface="Consolas" pitchFamily="34" charset="-120"/>
               </a:rPr>
               <a:t>(</a:t>
-            </a:r>
-            <a:pPr indent="0" marL="0">
-              <a:buNone/>
-            </a:pPr>
-            <a:r>
-              <a:rPr lang="en-US" sz="1100" dirty="0">
-                <a:solidFill>
-                  <a:srgbClr val="FBBF24"/>
-                </a:solidFill>
-                <a:latin typeface="Consolas" pitchFamily="34" charset="0"/>
-                <a:ea typeface="Consolas" pitchFamily="34" charset="-122"/>
-                <a:cs typeface="Consolas" pitchFamily="34" charset="-120"/>
-              </a:rPr>
-              <a:t>"phi-4-mini"</a:t>
-            </a:r>
-            <a:pPr indent="0" marL="0">
-              <a:buNone/>
-            </a:pPr>
-            <a:r>
-              <a:rPr lang="en-US" sz="1100" dirty="0">
-                <a:solidFill>
-                  <a:srgbClr val="B8B5D9"/>
-                </a:solidFill>
-                <a:latin typeface="Consolas" pitchFamily="34" charset="0"/>
-                <a:ea typeface="Consolas" pitchFamily="34" charset="-122"/>
-                <a:cs typeface="Consolas" pitchFamily="34" charset="-120"/>
-              </a:rPr>
-              <a:t>)</a:t>
-            </a:r>
-            <a:pPr indent="0" marL="0">
-              <a:buNone/>
-            </a:pPr>
-            <a:r>
-              <a:rPr lang="en-US" sz="1100" dirty="0">
-                <a:solidFill>
-                  <a:srgbClr val="B8B5D9"/>
-                </a:solidFill>
-                <a:latin typeface="Consolas" pitchFamily="34" charset="0"/>
-                <a:ea typeface="Consolas" pitchFamily="34" charset="-122"/>
-                <a:cs typeface="Consolas" pitchFamily="34" charset="-120"/>
-              </a:rPr>
-              <a:t>;</a:t>
-            </a:r>
-            <a:pPr indent="0" marL="0">
-              <a:buNone/>
-            </a:pPr>
-            <a:endParaRPr lang="en-US" sz="1100" dirty="0"/>
-          </a:p>
-          <a:p>
-            <a:pPr indent="0" marL="0">
-              <a:buNone/>
-            </a:pPr>
-            <a:endParaRPr lang="en-US" sz="1100" dirty="0"/>
-          </a:p>
-          <a:p>
-            <a:pPr indent="0" marL="0">
-              <a:buNone/>
-            </a:pPr>
-            <a:r>
-              <a:rPr lang="en-US" sz="1100" dirty="0">
-                <a:solidFill>
-                  <a:srgbClr val="FB7185"/>
-                </a:solidFill>
-                <a:latin typeface="Consolas" pitchFamily="34" charset="0"/>
-                <a:ea typeface="Consolas" pitchFamily="34" charset="-122"/>
-                <a:cs typeface="Consolas" pitchFamily="34" charset="-120"/>
-              </a:rPr>
-              <a:t>var</a:t>
-            </a:r>
-            <a:pPr indent="0" marL="0">
-              <a:buNone/>
-            </a:pPr>
-            <a:r>
-              <a:rPr lang="en-US" sz="1100" dirty="0">
-                <a:solidFill>
-                  <a:srgbClr val="FAF8FF"/>
-                </a:solidFill>
-                <a:latin typeface="Consolas" pitchFamily="34" charset="0"/>
-                <a:ea typeface="Consolas" pitchFamily="34" charset="-122"/>
-                <a:cs typeface="Consolas" pitchFamily="34" charset="-120"/>
-              </a:rPr>
-              <a:t> client </a:t>
-            </a:r>
-            <a:pPr indent="0" marL="0">
-              <a:buNone/>
-            </a:pPr>
-            <a:r>
-              <a:rPr lang="en-US" sz="1100" dirty="0">
-                <a:solidFill>
-                  <a:srgbClr val="CFCBED"/>
-                </a:solidFill>
-                <a:latin typeface="Consolas" pitchFamily="34" charset="0"/>
-                <a:ea typeface="Consolas" pitchFamily="34" charset="-122"/>
-                <a:cs typeface="Consolas" pitchFamily="34" charset="-120"/>
-              </a:rPr>
-              <a:t>=</a:t>
-            </a:r>
-            <a:pPr indent="0" marL="0">
-              <a:buNone/>
-            </a:pPr>
-            <a:r>
-              <a:rPr lang="en-US" sz="1100" dirty="0">
-                <a:solidFill>
-                  <a:srgbClr val="FAF8FF"/>
-                </a:solidFill>
-                <a:latin typeface="Consolas" pitchFamily="34" charset="0"/>
-                <a:ea typeface="Consolas" pitchFamily="34" charset="-122"/>
-                <a:cs typeface="Consolas" pitchFamily="34" charset="-120"/>
-              </a:rPr>
-              <a:t> </a:t>
-            </a:r>
-            <a:pPr indent="0" marL="0">
-              <a:buNone/>
-            </a:pPr>
-            <a:r>
-              <a:rPr lang="en-US" sz="1100" dirty="0">
-                <a:solidFill>
-                  <a:srgbClr val="FB7185"/>
-                </a:solidFill>
-                <a:latin typeface="Consolas" pitchFamily="34" charset="0"/>
-                <a:ea typeface="Consolas" pitchFamily="34" charset="-122"/>
-                <a:cs typeface="Consolas" pitchFamily="34" charset="-120"/>
-              </a:rPr>
-              <a:t>new</a:t>
-            </a:r>
-            <a:pPr indent="0" marL="0">
-              <a:buNone/>
-            </a:pPr>
-            <a:r>
-              <a:rPr lang="en-US" sz="1100" dirty="0">
-                <a:solidFill>
-                  <a:srgbClr val="FAF8FF"/>
-                </a:solidFill>
-                <a:latin typeface="Consolas" pitchFamily="34" charset="0"/>
-                <a:ea typeface="Consolas" pitchFamily="34" charset="-122"/>
-                <a:cs typeface="Consolas" pitchFamily="34" charset="-120"/>
-              </a:rPr>
-              <a:t> </a:t>
-            </a:r>
-            <a:pPr indent="0" marL="0">
-              <a:buNone/>
-            </a:pPr>
-            <a:r>
-              <a:rPr lang="en-US" sz="1100" dirty="0">
-                <a:solidFill>
-                  <a:srgbClr val="FAF8FF"/>
-                </a:solidFill>
-                <a:latin typeface="Consolas" pitchFamily="34" charset="0"/>
-                <a:ea typeface="Consolas" pitchFamily="34" charset="-122"/>
-                <a:cs typeface="Consolas" pitchFamily="34" charset="-120"/>
-              </a:rPr>
-              <a:t>OpenAIClient</a:t>
-            </a:r>
-            <a:pPr indent="0" marL="0">
-              <a:buNone/>
-            </a:pPr>
-            <a:r>
-              <a:rPr lang="en-US" sz="1100" dirty="0">
-                <a:solidFill>
-                  <a:srgbClr val="B8B5D9"/>
-                </a:solidFill>
-                <a:latin typeface="Consolas" pitchFamily="34" charset="0"/>
-                <a:ea typeface="Consolas" pitchFamily="34" charset="-122"/>
-                <a:cs typeface="Consolas" pitchFamily="34" charset="-120"/>
-              </a:rPr>
-              <a:t>(</a:t>
-            </a:r>
-            <a:pPr indent="0" marL="0">
-              <a:buNone/>
-            </a:pPr>
-            <a:endParaRPr lang="en-US" sz="1100" dirty="0"/>
-          </a:p>
-          <a:p>
-            <a:pPr indent="0" marL="0">
-              <a:buNone/>
-            </a:pPr>
-            <a:r>
-              <a:rPr lang="en-US" sz="1100" dirty="0">
-                <a:solidFill>
-                  <a:srgbClr val="FAF8FF"/>
-                </a:solidFill>
-                <a:latin typeface="Consolas" pitchFamily="34" charset="0"/>
-                <a:ea typeface="Consolas" pitchFamily="34" charset="-122"/>
-                <a:cs typeface="Consolas" pitchFamily="34" charset="-120"/>
-              </a:rPr>
-              <a:t>    </a:t>
-            </a:r>
-            <a:pPr indent="0" marL="0">
-              <a:buNone/>
-            </a:pPr>
-            <a:r>
-              <a:rPr lang="en-US" sz="1100" dirty="0">
-                <a:solidFill>
-                  <a:srgbClr val="FB7185"/>
-                </a:solidFill>
-                <a:latin typeface="Consolas" pitchFamily="34" charset="0"/>
-                <a:ea typeface="Consolas" pitchFamily="34" charset="-122"/>
-                <a:cs typeface="Consolas" pitchFamily="34" charset="-120"/>
-              </a:rPr>
-              <a:t>new</a:t>
-            </a:r>
-            <a:pPr indent="0" marL="0">
-              <a:buNone/>
-            </a:pPr>
-            <a:r>
-              <a:rPr lang="en-US" sz="1100" dirty="0">
-                <a:solidFill>
-                  <a:srgbClr val="FAF8FF"/>
-                </a:solidFill>
-                <a:latin typeface="Consolas" pitchFamily="34" charset="0"/>
-                <a:ea typeface="Consolas" pitchFamily="34" charset="-122"/>
-                <a:cs typeface="Consolas" pitchFamily="34" charset="-120"/>
-              </a:rPr>
-              <a:t> </a:t>
-            </a:r>
-            <a:pPr indent="0" marL="0">
-              <a:buNone/>
-            </a:pPr>
-            <a:r>
-              <a:rPr lang="en-US" sz="1100" dirty="0">
-                <a:solidFill>
-                  <a:srgbClr val="FAF8FF"/>
-                </a:solidFill>
-                <a:latin typeface="Consolas" pitchFamily="34" charset="0"/>
-                <a:ea typeface="Consolas" pitchFamily="34" charset="-122"/>
-                <a:cs typeface="Consolas" pitchFamily="34" charset="-120"/>
-              </a:rPr>
-              <a:t>ApiKeyCredential</a:t>
-            </a:r>
-            <a:pPr indent="0" marL="0">
-              <a:buNone/>
-            </a:pPr>
-            <a:r>
-              <a:rPr lang="en-US" sz="1100" dirty="0">
-                <a:solidFill>
-                  <a:srgbClr val="B8B5D9"/>
-                </a:solidFill>
-                <a:latin typeface="Consolas" pitchFamily="34" charset="0"/>
-                <a:ea typeface="Consolas" pitchFamily="34" charset="-122"/>
-                <a:cs typeface="Consolas" pitchFamily="34" charset="-120"/>
-              </a:rPr>
-              <a:t>(</a:t>
-            </a:r>
-            <a:pPr indent="0" marL="0">
-              <a:buNone/>
-            </a:pPr>
-            <a:r>
-              <a:rPr lang="en-US" sz="1100" dirty="0">
-                <a:solidFill>
-                  <a:srgbClr val="FAF8FF"/>
-                </a:solidFill>
-                <a:latin typeface="Consolas" pitchFamily="34" charset="0"/>
-                <a:ea typeface="Consolas" pitchFamily="34" charset="-122"/>
-                <a:cs typeface="Consolas" pitchFamily="34" charset="-120"/>
-              </a:rPr>
-              <a:t>manager</a:t>
-            </a:r>
-            <a:pPr indent="0" marL="0">
-              <a:buNone/>
-            </a:pPr>
-            <a:r>
-              <a:rPr lang="en-US" sz="1100" dirty="0">
-                <a:solidFill>
-                  <a:srgbClr val="B8B5D9"/>
-                </a:solidFill>
-                <a:latin typeface="Consolas" pitchFamily="34" charset="0"/>
-                <a:ea typeface="Consolas" pitchFamily="34" charset="-122"/>
-                <a:cs typeface="Consolas" pitchFamily="34" charset="-120"/>
-              </a:rPr>
-              <a:t>.</a:t>
-            </a:r>
-            <a:pPr indent="0" marL="0">
-              <a:buNone/>
-            </a:pPr>
-            <a:r>
-              <a:rPr lang="en-US" sz="1100" dirty="0">
-                <a:solidFill>
-                  <a:srgbClr val="FAF8FF"/>
-                </a:solidFill>
-                <a:latin typeface="Consolas" pitchFamily="34" charset="0"/>
-                <a:ea typeface="Consolas" pitchFamily="34" charset="-122"/>
-                <a:cs typeface="Consolas" pitchFamily="34" charset="-120"/>
-              </a:rPr>
-              <a:t>ApiKey</a:t>
-            </a:r>
-            <a:pPr indent="0" marL="0">
-              <a:buNone/>
-            </a:pPr>
-            <a:r>
-              <a:rPr lang="en-US" sz="1100" dirty="0">
-                <a:solidFill>
-                  <a:srgbClr val="B8B5D9"/>
-                </a:solidFill>
-                <a:latin typeface="Consolas" pitchFamily="34" charset="0"/>
-                <a:ea typeface="Consolas" pitchFamily="34" charset="-122"/>
-                <a:cs typeface="Consolas" pitchFamily="34" charset="-120"/>
-              </a:rPr>
-              <a:t>)</a:t>
-            </a:r>
-            <a:pPr indent="0" marL="0">
-              <a:buNone/>
-            </a:pPr>
-            <a:r>
-              <a:rPr lang="en-US" sz="1100" dirty="0">
-                <a:solidFill>
-                  <a:srgbClr val="B8B5D9"/>
-                </a:solidFill>
-                <a:latin typeface="Consolas" pitchFamily="34" charset="0"/>
-                <a:ea typeface="Consolas" pitchFamily="34" charset="-122"/>
-                <a:cs typeface="Consolas" pitchFamily="34" charset="-120"/>
-              </a:rPr>
-              <a:t>,</a:t>
-            </a:r>
-            <a:pPr indent="0" marL="0">
-              <a:buNone/>
-            </a:pPr>
-            <a:endParaRPr lang="en-US" sz="1100" dirty="0"/>
-          </a:p>
-          <a:p>
-            <a:pPr indent="0" marL="0">
-              <a:buNone/>
-            </a:pPr>
-            <a:r>
-              <a:rPr lang="en-US" sz="1100" dirty="0">
-                <a:solidFill>
-                  <a:srgbClr val="FAF8FF"/>
-                </a:solidFill>
-                <a:latin typeface="Consolas" pitchFamily="34" charset="0"/>
-                <a:ea typeface="Consolas" pitchFamily="34" charset="-122"/>
-                <a:cs typeface="Consolas" pitchFamily="34" charset="-120"/>
-              </a:rPr>
-              <a:t>    </a:t>
-            </a:r>
-            <a:pPr indent="0" marL="0">
-              <a:buNone/>
-            </a:pPr>
-            <a:r>
-              <a:rPr lang="en-US" sz="1100" dirty="0">
-                <a:solidFill>
-                  <a:srgbClr val="FB7185"/>
-                </a:solidFill>
-                <a:latin typeface="Consolas" pitchFamily="34" charset="0"/>
-                <a:ea typeface="Consolas" pitchFamily="34" charset="-122"/>
-                <a:cs typeface="Consolas" pitchFamily="34" charset="-120"/>
-              </a:rPr>
-              <a:t>new</a:t>
-            </a:r>
-            <a:pPr indent="0" marL="0">
-              <a:buNone/>
-            </a:pPr>
-            <a:r>
-              <a:rPr lang="en-US" sz="1100" dirty="0">
-                <a:solidFill>
-                  <a:srgbClr val="FAF8FF"/>
-                </a:solidFill>
-                <a:latin typeface="Consolas" pitchFamily="34" charset="0"/>
-                <a:ea typeface="Consolas" pitchFamily="34" charset="-122"/>
-                <a:cs typeface="Consolas" pitchFamily="34" charset="-120"/>
-              </a:rPr>
-              <a:t> </a:t>
-            </a:r>
-            <a:pPr indent="0" marL="0">
-              <a:buNone/>
-            </a:pPr>
-            <a:r>
-              <a:rPr lang="en-US" sz="1100" dirty="0">
-                <a:solidFill>
-                  <a:srgbClr val="FAF8FF"/>
-                </a:solidFill>
-                <a:latin typeface="Consolas" pitchFamily="34" charset="0"/>
-                <a:ea typeface="Consolas" pitchFamily="34" charset="-122"/>
-                <a:cs typeface="Consolas" pitchFamily="34" charset="-120"/>
-              </a:rPr>
-              <a:t>OpenAIClientOptions</a:t>
-            </a:r>
-            <a:pPr indent="0" marL="0">
-              <a:buNone/>
-            </a:pPr>
-            <a:r>
-              <a:rPr lang="en-US" sz="1100" dirty="0">
-                <a:solidFill>
-                  <a:srgbClr val="FAF8FF"/>
-                </a:solidFill>
-                <a:latin typeface="Consolas" pitchFamily="34" charset="0"/>
-                <a:ea typeface="Consolas" pitchFamily="34" charset="-122"/>
-                <a:cs typeface="Consolas" pitchFamily="34" charset="-120"/>
-              </a:rPr>
-              <a:t> </a:t>
-            </a:r>
-            <a:pPr indent="0" marL="0">
-              <a:buNone/>
-            </a:pPr>
-            <a:r>
-              <a:rPr lang="en-US" sz="1100" dirty="0">
-                <a:solidFill>
-                  <a:srgbClr val="B8B5D9"/>
-                </a:solidFill>
-                <a:latin typeface="Consolas" pitchFamily="34" charset="0"/>
-                <a:ea typeface="Consolas" pitchFamily="34" charset="-122"/>
-                <a:cs typeface="Consolas" pitchFamily="34" charset="-120"/>
-              </a:rPr>
-              <a:t>{</a:t>
-            </a:r>
-            <a:pPr indent="0" marL="0">
-              <a:buNone/>
-            </a:pPr>
-            <a:r>
-              <a:rPr lang="en-US" sz="1100" dirty="0">
-                <a:solidFill>
-                  <a:srgbClr val="FAF8FF"/>
-                </a:solidFill>
-                <a:latin typeface="Consolas" pitchFamily="34" charset="0"/>
-                <a:ea typeface="Consolas" pitchFamily="34" charset="-122"/>
-                <a:cs typeface="Consolas" pitchFamily="34" charset="-120"/>
-              </a:rPr>
-              <a:t> Endpoint </a:t>
-            </a:r>
-            <a:pPr indent="0" marL="0">
-              <a:buNone/>
-            </a:pPr>
-            <a:r>
-              <a:rPr lang="en-US" sz="1100" dirty="0">
-                <a:solidFill>
-                  <a:srgbClr val="CFCBED"/>
-                </a:solidFill>
-                <a:latin typeface="Consolas" pitchFamily="34" charset="0"/>
-                <a:ea typeface="Consolas" pitchFamily="34" charset="-122"/>
-                <a:cs typeface="Consolas" pitchFamily="34" charset="-120"/>
-              </a:rPr>
-              <a:t>=</a:t>
-            </a:r>
-            <a:pPr indent="0" marL="0">
-              <a:buNone/>
-            </a:pPr>
-            <a:r>
-              <a:rPr lang="en-US" sz="1100" dirty="0">
-                <a:solidFill>
-                  <a:srgbClr val="FAF8FF"/>
-                </a:solidFill>
-                <a:latin typeface="Consolas" pitchFamily="34" charset="0"/>
-                <a:ea typeface="Consolas" pitchFamily="34" charset="-122"/>
-                <a:cs typeface="Consolas" pitchFamily="34" charset="-120"/>
-              </a:rPr>
-              <a:t> manager</a:t>
-            </a:r>
-            <a:pPr indent="0" marL="0">
-              <a:buNone/>
-            </a:pPr>
-            <a:r>
-              <a:rPr lang="en-US" sz="1100" dirty="0">
-                <a:solidFill>
-                  <a:srgbClr val="B8B5D9"/>
-                </a:solidFill>
-                <a:latin typeface="Consolas" pitchFamily="34" charset="0"/>
-                <a:ea typeface="Consolas" pitchFamily="34" charset="-122"/>
-                <a:cs typeface="Consolas" pitchFamily="34" charset="-120"/>
-              </a:rPr>
-              <a:t>.</a:t>
-            </a:r>
-            <a:pPr indent="0" marL="0">
-              <a:buNone/>
-            </a:pPr>
-            <a:r>
-              <a:rPr lang="en-US" sz="1100" dirty="0">
-                <a:solidFill>
-                  <a:srgbClr val="FAF8FF"/>
-                </a:solidFill>
-                <a:latin typeface="Consolas" pitchFamily="34" charset="0"/>
-                <a:ea typeface="Consolas" pitchFamily="34" charset="-122"/>
-                <a:cs typeface="Consolas" pitchFamily="34" charset="-120"/>
-              </a:rPr>
-              <a:t>Endpoint </a:t>
-            </a:r>
-            <a:pPr indent="0" marL="0">
-              <a:buNone/>
-            </a:pPr>
-            <a:r>
-              <a:rPr lang="en-US" sz="1100" dirty="0">
-                <a:solidFill>
-                  <a:srgbClr val="B8B5D9"/>
-                </a:solidFill>
-                <a:latin typeface="Consolas" pitchFamily="34" charset="0"/>
-                <a:ea typeface="Consolas" pitchFamily="34" charset="-122"/>
-                <a:cs typeface="Consolas" pitchFamily="34" charset="-120"/>
-              </a:rPr>
-              <a:t>}</a:t>
-            </a:r>
-            <a:pPr indent="0" marL="0">
-              <a:buNone/>
-            </a:pPr>
-            <a:r>
-              <a:rPr lang="en-US" sz="1100" dirty="0">
-                <a:solidFill>
-                  <a:srgbClr val="B8B5D9"/>
-                </a:solidFill>
-                <a:latin typeface="Consolas" pitchFamily="34" charset="0"/>
-                <a:ea typeface="Consolas" pitchFamily="34" charset="-122"/>
-                <a:cs typeface="Consolas" pitchFamily="34" charset="-120"/>
-              </a:rPr>
-              <a:t>)</a:t>
-            </a:r>
-            <a:pPr indent="0" marL="0">
-              <a:buNone/>
-            </a:pPr>
-            <a:r>
-              <a:rPr lang="en-US" sz="1100" dirty="0">
-                <a:solidFill>
-                  <a:srgbClr val="B8B5D9"/>
-                </a:solidFill>
-                <a:latin typeface="Consolas" pitchFamily="34" charset="0"/>
-                <a:ea typeface="Consolas" pitchFamily="34" charset="-122"/>
-                <a:cs typeface="Consolas" pitchFamily="34" charset="-120"/>
-              </a:rPr>
-              <a:t>;</a:t>
-            </a:r>
-            <a:pPr indent="0" marL="0">
-              <a:buNone/>
-            </a:pPr>
-            <a:endParaRPr lang="en-US" sz="1100" dirty="0"/>
-          </a:p>
-          <a:p>
-            <a:pPr indent="0" marL="0">
-              <a:buNone/>
-            </a:pPr>
-            <a:endParaRPr lang="en-US" sz="1100" dirty="0"/>
-          </a:p>
-          <a:p>
-            <a:pPr indent="0" marL="0">
-              <a:buNone/>
-            </a:pPr>
-            <a:r>
-              <a:rPr lang="en-US" sz="1100" dirty="0">
-                <a:solidFill>
-                  <a:srgbClr val="FB7185"/>
-                </a:solidFill>
-                <a:latin typeface="Consolas" pitchFamily="34" charset="0"/>
-                <a:ea typeface="Consolas" pitchFamily="34" charset="-122"/>
-                <a:cs typeface="Consolas" pitchFamily="34" charset="-120"/>
-              </a:rPr>
-              <a:t>var</a:t>
-            </a:r>
-            <a:pPr indent="0" marL="0">
-              <a:buNone/>
-            </a:pPr>
-            <a:r>
-              <a:rPr lang="en-US" sz="1100" dirty="0">
-                <a:solidFill>
-                  <a:srgbClr val="FAF8FF"/>
-                </a:solidFill>
-                <a:latin typeface="Consolas" pitchFamily="34" charset="0"/>
-                <a:ea typeface="Consolas" pitchFamily="34" charset="-122"/>
-                <a:cs typeface="Consolas" pitchFamily="34" charset="-120"/>
-              </a:rPr>
-              <a:t> chat </a:t>
-            </a:r>
-            <a:pPr indent="0" marL="0">
-              <a:buNone/>
-            </a:pPr>
-            <a:r>
-              <a:rPr lang="en-US" sz="1100" dirty="0">
-                <a:solidFill>
-                  <a:srgbClr val="CFCBED"/>
-                </a:solidFill>
-                <a:latin typeface="Consolas" pitchFamily="34" charset="0"/>
-                <a:ea typeface="Consolas" pitchFamily="34" charset="-122"/>
-                <a:cs typeface="Consolas" pitchFamily="34" charset="-120"/>
-              </a:rPr>
-              <a:t>=</a:t>
-            </a:r>
-            <a:pPr indent="0" marL="0">
-              <a:buNone/>
-            </a:pPr>
-            <a:r>
-              <a:rPr lang="en-US" sz="1100" dirty="0">
-                <a:solidFill>
-                  <a:srgbClr val="FAF8FF"/>
-                </a:solidFill>
-                <a:latin typeface="Consolas" pitchFamily="34" charset="0"/>
-                <a:ea typeface="Consolas" pitchFamily="34" charset="-122"/>
-                <a:cs typeface="Consolas" pitchFamily="34" charset="-120"/>
-              </a:rPr>
-              <a:t> client</a:t>
-            </a:r>
-            <a:pPr indent="0" marL="0">
-              <a:buNone/>
-            </a:pPr>
-            <a:r>
-              <a:rPr lang="en-US" sz="1100" dirty="0">
-                <a:solidFill>
-                  <a:srgbClr val="B8B5D9"/>
-                </a:solidFill>
-                <a:latin typeface="Consolas" pitchFamily="34" charset="0"/>
-                <a:ea typeface="Consolas" pitchFamily="34" charset="-122"/>
-                <a:cs typeface="Consolas" pitchFamily="34" charset="-120"/>
-              </a:rPr>
-              <a:t>.</a:t>
-            </a:r>
-            <a:pPr indent="0" marL="0">
-              <a:buNone/>
-            </a:pPr>
-            <a:r>
-              <a:rPr lang="en-US" sz="1100" dirty="0">
-                <a:solidFill>
-                  <a:srgbClr val="86EFAC"/>
-                </a:solidFill>
-                <a:latin typeface="Consolas" pitchFamily="34" charset="0"/>
-                <a:ea typeface="Consolas" pitchFamily="34" charset="-122"/>
-                <a:cs typeface="Consolas" pitchFamily="34" charset="-120"/>
-              </a:rPr>
-              <a:t>GetChatClient</a:t>
-            </a:r>
-            <a:pPr indent="0" marL="0">
-              <a:buNone/>
-            </a:pPr>
-            <a:r>
-              <a:rPr lang="en-US" sz="1100" dirty="0">
-                <a:solidFill>
-                  <a:srgbClr val="B8B5D9"/>
-                </a:solidFill>
-                <a:latin typeface="Consolas" pitchFamily="34" charset="0"/>
-                <a:ea typeface="Consolas" pitchFamily="34" charset="-122"/>
-                <a:cs typeface="Consolas" pitchFamily="34" charset="-120"/>
-              </a:rPr>
-              <a:t>(</a:t>
-            </a:r>
-            <a:pPr indent="0" marL="0">
-              <a:buNone/>
-            </a:pPr>
-            <a:r>
-              <a:rPr lang="en-US" sz="1100" dirty="0">
-                <a:solidFill>
-                  <a:srgbClr val="FBBF24"/>
-                </a:solidFill>
-                <a:latin typeface="Consolas" pitchFamily="34" charset="0"/>
-                <a:ea typeface="Consolas" pitchFamily="34" charset="-122"/>
-                <a:cs typeface="Consolas" pitchFamily="34" charset="-120"/>
-              </a:rPr>
-              <a:t>"phi-4-mini"</a:t>
             </a:r>
             <a:pPr indent="0" marL="0">
               <a:buNone/>

--- a/slides/Unifying-Local-Cloud-AI.pptx
+++ b/slides/Unifying-Local-Cloud-AI.pptx
@@ -7225,7 +7225,7 @@
                 <a:ea typeface="Consolas" pitchFamily="34" charset="-122"/>
                 <a:cs typeface="Consolas" pitchFamily="34" charset="-120"/>
               </a:rPr>
-              <a:t>// 1. Decorate any method — params get [Description], DI gets [FromServices]</a:t>
+              <a:t>// 1. Decorate any method</a:t>
             </a:r>
             <a:pPr indent="0" marL="0">
               <a:buNone/>
@@ -7237,6 +7237,26 @@
               <a:buNone/>
             </a:pPr>
             <a:r>
+              <a:rPr lang="en-US" sz="1200" i="1" dirty="0">
+                <a:solidFill>
+                  <a:srgbClr val="8B88B5"/>
+                </a:solidFill>
+                <a:latin typeface="Consolas" pitchFamily="34" charset="0"/>
+                <a:ea typeface="Consolas" pitchFamily="34" charset="-122"/>
+                <a:cs typeface="Consolas" pitchFamily="34" charset="-120"/>
+              </a:rPr>
+              <a:t>//    Params get [Description], DI gets [FromServices]</a:t>
+            </a:r>
+            <a:pPr indent="0" marL="0">
+              <a:buNone/>
+            </a:pPr>
+            <a:endParaRPr lang="en-US" sz="1200" dirty="0"/>
+          </a:p>
+          <a:p>
+            <a:pPr indent="0" marL="0">
+              <a:buNone/>
+            </a:pPr>
+            <a:r>
               <a:rPr lang="en-US" sz="1200" dirty="0">
                 <a:solidFill>
                   <a:srgbClr val="FB7185"/>
@@ -8085,15 +8105,29 @@
               <a:buNone/>
             </a:pPr>
             <a:r>
-              <a:rPr lang="en-US" sz="1200" i="1" dirty="0">
-                <a:solidFill>
-                  <a:srgbClr val="8B88B5"/>
-                </a:solidFill>
-                <a:latin typeface="Consolas" pitchFamily="34" charset="0"/>
-                <a:ea typeface="Consolas" pitchFamily="34" charset="-122"/>
-                <a:cs typeface="Consolas" pitchFamily="34" charset="-120"/>
-              </a:rPr>
-              <a:t>/* ... */</a:t>
+              <a:rPr lang="en-US" sz="1200" dirty="0">
+                <a:solidFill>
+                  <a:srgbClr val="FAF8FF"/>
+                </a:solidFill>
+                <a:latin typeface="Consolas" pitchFamily="34" charset="0"/>
+                <a:ea typeface="Consolas" pitchFamily="34" charset="-122"/>
+                <a:cs typeface="Consolas" pitchFamily="34" charset="-120"/>
+              </a:rPr>
+              <a:t>..</a:t>
+            </a:r>
+            <a:pPr indent="0" marL="0">
+              <a:buNone/>
+            </a:pPr>
+            <a:r>
+              <a:rPr lang="en-US" sz="1200" dirty="0">
+                <a:solidFill>
+                  <a:srgbClr val="B8B5D9"/>
+                </a:solidFill>
+                <a:latin typeface="Consolas" pitchFamily="34" charset="0"/>
+                <a:ea typeface="Consolas" pitchFamily="34" charset="-122"/>
+                <a:cs typeface="Consolas" pitchFamily="34" charset="-120"/>
+              </a:rPr>
+              <a:t>.</a:t>
             </a:r>
             <a:pPr indent="0" marL="0">
               <a:buNone/>
@@ -10164,6 +10198,172 @@
             <a:r>
               <a:rPr lang="en-US" sz="1100" dirty="0">
                 <a:solidFill>
+                  <a:srgbClr val="FAF8FF"/>
+                </a:solidFill>
+                <a:latin typeface="Consolas" pitchFamily="34" charset="0"/>
+                <a:ea typeface="Consolas" pitchFamily="34" charset="-122"/>
+                <a:cs typeface="Consolas" pitchFamily="34" charset="-120"/>
+              </a:rPr>
+              <a:t>..</a:t>
+            </a:r>
+            <a:pPr indent="0" marL="0">
+              <a:buNone/>
+            </a:pPr>
+            <a:r>
+              <a:rPr lang="en-US" sz="1100" dirty="0">
+                <a:solidFill>
+                  <a:srgbClr val="B8B5D9"/>
+                </a:solidFill>
+                <a:latin typeface="Consolas" pitchFamily="34" charset="0"/>
+                <a:ea typeface="Consolas" pitchFamily="34" charset="-122"/>
+                <a:cs typeface="Consolas" pitchFamily="34" charset="-120"/>
+              </a:rPr>
+              <a:t>.</a:t>
+            </a:r>
+            <a:pPr indent="0" marL="0">
+              <a:buNone/>
+            </a:pPr>
+            <a:r>
+              <a:rPr lang="en-US" sz="1100" dirty="0">
+                <a:solidFill>
+                  <a:srgbClr val="B8B5D9"/>
+                </a:solidFill>
+                <a:latin typeface="Consolas" pitchFamily="34" charset="0"/>
+                <a:ea typeface="Consolas" pitchFamily="34" charset="-122"/>
+                <a:cs typeface="Consolas" pitchFamily="34" charset="-120"/>
+              </a:rPr>
+              <a:t>)</a:t>
+            </a:r>
+            <a:pPr indent="0" marL="0">
+              <a:buNone/>
+            </a:pPr>
+            <a:r>
+              <a:rPr lang="en-US" sz="1100" dirty="0">
+                <a:solidFill>
+                  <a:srgbClr val="B8B5D9"/>
+                </a:solidFill>
+                <a:latin typeface="Consolas" pitchFamily="34" charset="0"/>
+                <a:ea typeface="Consolas" pitchFamily="34" charset="-122"/>
+                <a:cs typeface="Consolas" pitchFamily="34" charset="-120"/>
+              </a:rPr>
+              <a:t>;</a:t>
+            </a:r>
+            <a:pPr indent="0" marL="0">
+              <a:buNone/>
+            </a:pPr>
+            <a:endParaRPr lang="en-US" sz="1100" dirty="0"/>
+          </a:p>
+          <a:p>
+            <a:pPr indent="0" marL="0">
+              <a:buNone/>
+            </a:pPr>
+            <a:endParaRPr lang="en-US" sz="1100" dirty="0"/>
+          </a:p>
+          <a:p>
+            <a:pPr indent="0" marL="0">
+              <a:buNone/>
+            </a:pPr>
+            <a:r>
+              <a:rPr lang="en-US" sz="1100" dirty="0">
+                <a:solidFill>
+                  <a:srgbClr val="A78BFA"/>
+                </a:solidFill>
+                <a:latin typeface="Consolas" pitchFamily="34" charset="0"/>
+                <a:ea typeface="Consolas" pitchFamily="34" charset="-122"/>
+                <a:cs typeface="Consolas" pitchFamily="34" charset="-120"/>
+              </a:rPr>
+              <a:t>AIAgent</a:t>
+            </a:r>
+            <a:pPr indent="0" marL="0">
+              <a:buNone/>
+            </a:pPr>
+            <a:r>
+              <a:rPr lang="en-US" sz="1100" dirty="0">
+                <a:solidFill>
+                  <a:srgbClr val="FAF8FF"/>
+                </a:solidFill>
+                <a:latin typeface="Consolas" pitchFamily="34" charset="0"/>
+                <a:ea typeface="Consolas" pitchFamily="34" charset="-122"/>
+                <a:cs typeface="Consolas" pitchFamily="34" charset="-120"/>
+              </a:rPr>
+              <a:t> agent </a:t>
+            </a:r>
+            <a:pPr indent="0" marL="0">
+              <a:buNone/>
+            </a:pPr>
+            <a:r>
+              <a:rPr lang="en-US" sz="1100" dirty="0">
+                <a:solidFill>
+                  <a:srgbClr val="CFCBED"/>
+                </a:solidFill>
+                <a:latin typeface="Consolas" pitchFamily="34" charset="0"/>
+                <a:ea typeface="Consolas" pitchFamily="34" charset="-122"/>
+                <a:cs typeface="Consolas" pitchFamily="34" charset="-120"/>
+              </a:rPr>
+              <a:t>=</a:t>
+            </a:r>
+            <a:pPr indent="0" marL="0">
+              <a:buNone/>
+            </a:pPr>
+            <a:r>
+              <a:rPr lang="en-US" sz="1100" dirty="0">
+                <a:solidFill>
+                  <a:srgbClr val="FAF8FF"/>
+                </a:solidFill>
+                <a:latin typeface="Consolas" pitchFamily="34" charset="0"/>
+                <a:ea typeface="Consolas" pitchFamily="34" charset="-122"/>
+                <a:cs typeface="Consolas" pitchFamily="34" charset="-120"/>
+              </a:rPr>
+              <a:t> chatClient</a:t>
+            </a:r>
+            <a:pPr indent="0" marL="0">
+              <a:buNone/>
+            </a:pPr>
+            <a:r>
+              <a:rPr lang="en-US" sz="1100" dirty="0">
+                <a:solidFill>
+                  <a:srgbClr val="B8B5D9"/>
+                </a:solidFill>
+                <a:latin typeface="Consolas" pitchFamily="34" charset="0"/>
+                <a:ea typeface="Consolas" pitchFamily="34" charset="-122"/>
+                <a:cs typeface="Consolas" pitchFamily="34" charset="-120"/>
+              </a:rPr>
+              <a:t>.</a:t>
+            </a:r>
+            <a:pPr indent="0" marL="0">
+              <a:buNone/>
+            </a:pPr>
+            <a:r>
+              <a:rPr lang="en-US" sz="1100" dirty="0">
+                <a:solidFill>
+                  <a:srgbClr val="86EFAC"/>
+                </a:solidFill>
+                <a:latin typeface="Consolas" pitchFamily="34" charset="0"/>
+                <a:ea typeface="Consolas" pitchFamily="34" charset="-122"/>
+                <a:cs typeface="Consolas" pitchFamily="34" charset="-120"/>
+              </a:rPr>
+              <a:t>AsAIAgent</a:t>
+            </a:r>
+            <a:pPr indent="0" marL="0">
+              <a:buNone/>
+            </a:pPr>
+            <a:r>
+              <a:rPr lang="en-US" sz="1100" dirty="0">
+                <a:solidFill>
+                  <a:srgbClr val="B8B5D9"/>
+                </a:solidFill>
+                <a:latin typeface="Consolas" pitchFamily="34" charset="0"/>
+                <a:ea typeface="Consolas" pitchFamily="34" charset="-122"/>
+                <a:cs typeface="Consolas" pitchFamily="34" charset="-120"/>
+              </a:rPr>
+              <a:t>(</a:t>
+            </a:r>
+            <a:pPr indent="0" marL="0">
+              <a:buNone/>
+            </a:pPr>
+            <a:r>
+              <a:rPr lang="en-US" sz="1100" dirty="0">
+                <a:solidFill>
                   <a:srgbClr val="FB7185"/>
                 </a:solidFill>
                 <a:latin typeface="Consolas" pitchFamily="34" charset="0"/>
@@ -10178,12 +10378,224 @@
             <a:r>
               <a:rPr lang="en-US" sz="1100" dirty="0">
                 <a:solidFill>
+                  <a:srgbClr val="FAF8FF"/>
+                </a:solidFill>
+                <a:latin typeface="Consolas" pitchFamily="34" charset="0"/>
+                <a:ea typeface="Consolas" pitchFamily="34" charset="-122"/>
+                <a:cs typeface="Consolas" pitchFamily="34" charset="-120"/>
+              </a:rPr>
+              <a:t> </a:t>
+            </a:r>
+            <a:pPr indent="0" marL="0">
+              <a:buNone/>
+            </a:pPr>
+            <a:r>
+              <a:rPr lang="en-US" sz="1100" dirty="0">
+                <a:solidFill>
+                  <a:srgbClr val="FAF8FF"/>
+                </a:solidFill>
+                <a:latin typeface="Consolas" pitchFamily="34" charset="0"/>
+                <a:ea typeface="Consolas" pitchFamily="34" charset="-122"/>
+                <a:cs typeface="Consolas" pitchFamily="34" charset="-120"/>
+              </a:rPr>
+              <a:t>ChatClientAgentOptions</a:t>
+            </a:r>
+            <a:pPr indent="0" marL="0">
+              <a:buNone/>
+            </a:pPr>
+            <a:endParaRPr lang="en-US" sz="1100" dirty="0"/>
+          </a:p>
+          <a:p>
+            <a:pPr indent="0" marL="0">
+              <a:buNone/>
+            </a:pPr>
+            <a:r>
+              <a:rPr lang="en-US" sz="1100" dirty="0">
+                <a:solidFill>
                   <a:srgbClr val="B8B5D9"/>
                 </a:solidFill>
                 <a:latin typeface="Consolas" pitchFamily="34" charset="0"/>
                 <a:ea typeface="Consolas" pitchFamily="34" charset="-122"/>
                 <a:cs typeface="Consolas" pitchFamily="34" charset="-120"/>
               </a:rPr>
+              <a:t>{</a:t>
+            </a:r>
+            <a:pPr indent="0" marL="0">
+              <a:buNone/>
+            </a:pPr>
+            <a:endParaRPr lang="en-US" sz="1100" dirty="0"/>
+          </a:p>
+          <a:p>
+            <a:pPr indent="0" marL="0">
+              <a:buNone/>
+            </a:pPr>
+            <a:r>
+              <a:rPr lang="en-US" sz="1100" dirty="0">
+                <a:solidFill>
+                  <a:srgbClr val="FAF8FF"/>
+                </a:solidFill>
+                <a:latin typeface="Consolas" pitchFamily="34" charset="0"/>
+                <a:ea typeface="Consolas" pitchFamily="34" charset="-122"/>
+                <a:cs typeface="Consolas" pitchFamily="34" charset="-120"/>
+              </a:rPr>
+              <a:t>    AIContextProviders </a:t>
+            </a:r>
+            <a:pPr indent="0" marL="0">
+              <a:buNone/>
+            </a:pPr>
+            <a:r>
+              <a:rPr lang="en-US" sz="1100" dirty="0">
+                <a:solidFill>
+                  <a:srgbClr val="CFCBED"/>
+                </a:solidFill>
+                <a:latin typeface="Consolas" pitchFamily="34" charset="0"/>
+                <a:ea typeface="Consolas" pitchFamily="34" charset="-122"/>
+                <a:cs typeface="Consolas" pitchFamily="34" charset="-120"/>
+              </a:rPr>
+              <a:t>=</a:t>
+            </a:r>
+            <a:pPr indent="0" marL="0">
+              <a:buNone/>
+            </a:pPr>
+            <a:endParaRPr lang="en-US" sz="1100" dirty="0"/>
+          </a:p>
+          <a:p>
+            <a:pPr indent="0" marL="0">
+              <a:buNone/>
+            </a:pPr>
+            <a:r>
+              <a:rPr lang="en-US" sz="1100" dirty="0">
+                <a:solidFill>
+                  <a:srgbClr val="FAF8FF"/>
+                </a:solidFill>
+                <a:latin typeface="Consolas" pitchFamily="34" charset="0"/>
+                <a:ea typeface="Consolas" pitchFamily="34" charset="-122"/>
+                <a:cs typeface="Consolas" pitchFamily="34" charset="-120"/>
+              </a:rPr>
+              <a:t>    </a:t>
+            </a:r>
+            <a:pPr indent="0" marL="0">
+              <a:buNone/>
+            </a:pPr>
+            <a:r>
+              <a:rPr lang="en-US" sz="1100" dirty="0">
+                <a:solidFill>
+                  <a:srgbClr val="B8B5D9"/>
+                </a:solidFill>
+                <a:latin typeface="Consolas" pitchFamily="34" charset="0"/>
+                <a:ea typeface="Consolas" pitchFamily="34" charset="-122"/>
+                <a:cs typeface="Consolas" pitchFamily="34" charset="-120"/>
+              </a:rPr>
+              <a:t>[</a:t>
+            </a:r>
+            <a:pPr indent="0" marL="0">
+              <a:buNone/>
+            </a:pPr>
+            <a:endParaRPr lang="en-US" sz="1100" dirty="0"/>
+          </a:p>
+          <a:p>
+            <a:pPr indent="0" marL="0">
+              <a:buNone/>
+            </a:pPr>
+            <a:r>
+              <a:rPr lang="en-US" sz="1100" dirty="0">
+                <a:solidFill>
+                  <a:srgbClr val="FAF8FF"/>
+                </a:solidFill>
+                <a:latin typeface="Consolas" pitchFamily="34" charset="0"/>
+                <a:ea typeface="Consolas" pitchFamily="34" charset="-122"/>
+                <a:cs typeface="Consolas" pitchFamily="34" charset="-120"/>
+              </a:rPr>
+              <a:t>        </a:t>
+            </a:r>
+            <a:pPr indent="0" marL="0">
+              <a:buNone/>
+            </a:pPr>
+            <a:r>
+              <a:rPr lang="en-US" sz="1100" i="1" dirty="0">
+                <a:solidFill>
+                  <a:srgbClr val="8B88B5"/>
+                </a:solidFill>
+                <a:latin typeface="Consolas" pitchFamily="34" charset="0"/>
+                <a:ea typeface="Consolas" pitchFamily="34" charset="-122"/>
+                <a:cs typeface="Consolas" pitchFamily="34" charset="-120"/>
+              </a:rPr>
+              <a:t>// RAG — pull the top-k chunks before each model call</a:t>
+            </a:r>
+            <a:pPr indent="0" marL="0">
+              <a:buNone/>
+            </a:pPr>
+            <a:endParaRPr lang="en-US" sz="1100" dirty="0"/>
+          </a:p>
+          <a:p>
+            <a:pPr indent="0" marL="0">
+              <a:buNone/>
+            </a:pPr>
+            <a:r>
+              <a:rPr lang="en-US" sz="1100" dirty="0">
+                <a:solidFill>
+                  <a:srgbClr val="FAF8FF"/>
+                </a:solidFill>
+                <a:latin typeface="Consolas" pitchFamily="34" charset="0"/>
+                <a:ea typeface="Consolas" pitchFamily="34" charset="-122"/>
+                <a:cs typeface="Consolas" pitchFamily="34" charset="-120"/>
+              </a:rPr>
+              <a:t>        </a:t>
+            </a:r>
+            <a:pPr indent="0" marL="0">
+              <a:buNone/>
+            </a:pPr>
+            <a:r>
+              <a:rPr lang="en-US" sz="1100" dirty="0">
+                <a:solidFill>
+                  <a:srgbClr val="FB7185"/>
+                </a:solidFill>
+                <a:latin typeface="Consolas" pitchFamily="34" charset="0"/>
+                <a:ea typeface="Consolas" pitchFamily="34" charset="-122"/>
+                <a:cs typeface="Consolas" pitchFamily="34" charset="-120"/>
+              </a:rPr>
+              <a:t>new</a:t>
+            </a:r>
+            <a:pPr indent="0" marL="0">
+              <a:buNone/>
+            </a:pPr>
+            <a:r>
+              <a:rPr lang="en-US" sz="1100" dirty="0">
+                <a:solidFill>
+                  <a:srgbClr val="FAF8FF"/>
+                </a:solidFill>
+                <a:latin typeface="Consolas" pitchFamily="34" charset="0"/>
+                <a:ea typeface="Consolas" pitchFamily="34" charset="-122"/>
+                <a:cs typeface="Consolas" pitchFamily="34" charset="-120"/>
+              </a:rPr>
+              <a:t> </a:t>
+            </a:r>
+            <a:pPr indent="0" marL="0">
+              <a:buNone/>
+            </a:pPr>
+            <a:r>
+              <a:rPr lang="en-US" sz="1100" dirty="0">
+                <a:solidFill>
+                  <a:srgbClr val="FAF8FF"/>
+                </a:solidFill>
+                <a:latin typeface="Consolas" pitchFamily="34" charset="0"/>
+                <a:ea typeface="Consolas" pitchFamily="34" charset="-122"/>
+                <a:cs typeface="Consolas" pitchFamily="34" charset="-120"/>
+              </a:rPr>
+              <a:t>TextSearchProvider</a:t>
+            </a:r>
+            <a:pPr indent="0" marL="0">
+              <a:buNone/>
+            </a:pPr>
+            <a:r>
+              <a:rPr lang="en-US" sz="1100" dirty="0">
+                <a:solidFill>
+                  <a:srgbClr val="B8B5D9"/>
+                </a:solidFill>
+                <a:latin typeface="Consolas" pitchFamily="34" charset="0"/>
+                <a:ea typeface="Consolas" pitchFamily="34" charset="-122"/>
+                <a:cs typeface="Consolas" pitchFamily="34" charset="-120"/>
+              </a:rPr>
               <a:t>(</a:t>
             </a:r>
             <a:pPr indent="0" marL="0">
@@ -10192,17 +10604,129 @@
             <a:r>
               <a:rPr lang="en-US" sz="1100" dirty="0">
                 <a:solidFill>
+                  <a:srgbClr val="FB7185"/>
+                </a:solidFill>
+                <a:latin typeface="Consolas" pitchFamily="34" charset="0"/>
+                <a:ea typeface="Consolas" pitchFamily="34" charset="-122"/>
+                <a:cs typeface="Consolas" pitchFamily="34" charset="-120"/>
+              </a:rPr>
+              <a:t>async</a:t>
+            </a:r>
+            <a:pPr indent="0" marL="0">
+              <a:buNone/>
+            </a:pPr>
+            <a:r>
+              <a:rPr lang="en-US" sz="1100" dirty="0">
+                <a:solidFill>
+                  <a:srgbClr val="FAF8FF"/>
+                </a:solidFill>
+                <a:latin typeface="Consolas" pitchFamily="34" charset="0"/>
+                <a:ea typeface="Consolas" pitchFamily="34" charset="-122"/>
+                <a:cs typeface="Consolas" pitchFamily="34" charset="-120"/>
+              </a:rPr>
+              <a:t> </a:t>
+            </a:r>
+            <a:pPr indent="0" marL="0">
+              <a:buNone/>
+            </a:pPr>
+            <a:r>
+              <a:rPr lang="en-US" sz="1100" dirty="0">
+                <a:solidFill>
                   <a:srgbClr val="B8B5D9"/>
                 </a:solidFill>
                 <a:latin typeface="Consolas" pitchFamily="34" charset="0"/>
                 <a:ea typeface="Consolas" pitchFamily="34" charset="-122"/>
                 <a:cs typeface="Consolas" pitchFamily="34" charset="-120"/>
               </a:rPr>
+              <a:t>(</a:t>
+            </a:r>
+            <a:pPr indent="0" marL="0">
+              <a:buNone/>
+            </a:pPr>
+            <a:r>
+              <a:rPr lang="en-US" sz="1100" dirty="0">
+                <a:solidFill>
+                  <a:srgbClr val="FAF8FF"/>
+                </a:solidFill>
+                <a:latin typeface="Consolas" pitchFamily="34" charset="0"/>
+                <a:ea typeface="Consolas" pitchFamily="34" charset="-122"/>
+                <a:cs typeface="Consolas" pitchFamily="34" charset="-120"/>
+              </a:rPr>
+              <a:t>text</a:t>
+            </a:r>
+            <a:pPr indent="0" marL="0">
+              <a:buNone/>
+            </a:pPr>
+            <a:r>
+              <a:rPr lang="en-US" sz="1100" dirty="0">
+                <a:solidFill>
+                  <a:srgbClr val="B8B5D9"/>
+                </a:solidFill>
+                <a:latin typeface="Consolas" pitchFamily="34" charset="0"/>
+                <a:ea typeface="Consolas" pitchFamily="34" charset="-122"/>
+                <a:cs typeface="Consolas" pitchFamily="34" charset="-120"/>
+              </a:rPr>
+              <a:t>,</a:t>
+            </a:r>
+            <a:pPr indent="0" marL="0">
+              <a:buNone/>
+            </a:pPr>
+            <a:r>
+              <a:rPr lang="en-US" sz="1100" dirty="0">
+                <a:solidFill>
+                  <a:srgbClr val="FAF8FF"/>
+                </a:solidFill>
+                <a:latin typeface="Consolas" pitchFamily="34" charset="0"/>
+                <a:ea typeface="Consolas" pitchFamily="34" charset="-122"/>
+                <a:cs typeface="Consolas" pitchFamily="34" charset="-120"/>
+              </a:rPr>
+              <a:t> ct</a:t>
+            </a:r>
+            <a:pPr indent="0" marL="0">
+              <a:buNone/>
+            </a:pPr>
+            <a:r>
+              <a:rPr lang="en-US" sz="1100" dirty="0">
+                <a:solidFill>
+                  <a:srgbClr val="B8B5D9"/>
+                </a:solidFill>
+                <a:latin typeface="Consolas" pitchFamily="34" charset="0"/>
+                <a:ea typeface="Consolas" pitchFamily="34" charset="-122"/>
+                <a:cs typeface="Consolas" pitchFamily="34" charset="-120"/>
+              </a:rPr>
               <a:t>)</a:t>
             </a:r>
             <a:pPr indent="0" marL="0">
               <a:buNone/>
             </a:pPr>
+            <a:r>
+              <a:rPr lang="en-US" sz="1100" dirty="0">
+                <a:solidFill>
+                  <a:srgbClr val="FAF8FF"/>
+                </a:solidFill>
+                <a:latin typeface="Consolas" pitchFamily="34" charset="0"/>
+                <a:ea typeface="Consolas" pitchFamily="34" charset="-122"/>
+                <a:cs typeface="Consolas" pitchFamily="34" charset="-120"/>
+              </a:rPr>
+              <a:t> </a:t>
+            </a:r>
+            <a:pPr indent="0" marL="0">
+              <a:buNone/>
+            </a:pPr>
+            <a:r>
+              <a:rPr lang="en-US" sz="1100" dirty="0">
+                <a:solidFill>
+                  <a:srgbClr val="CFCBED"/>
+                </a:solidFill>
+                <a:latin typeface="Consolas" pitchFamily="34" charset="0"/>
+                <a:ea typeface="Consolas" pitchFamily="34" charset="-122"/>
+                <a:cs typeface="Consolas" pitchFamily="34" charset="-120"/>
+              </a:rPr>
+              <a:t>=&gt;</a:t>
+            </a:r>
+            <a:pPr indent="0" marL="0">
+              <a:buNone/>
+            </a:pPr>
             <a:endParaRPr lang="en-US" sz="1100" dirty="0"/>
           </a:p>
           <a:p>
@@ -10212,6 +10736,20 @@
             <a:r>
               <a:rPr lang="en-US" sz="1100" dirty="0">
                 <a:solidFill>
+                  <a:srgbClr val="FAF8FF"/>
+                </a:solidFill>
+                <a:latin typeface="Consolas" pitchFamily="34" charset="0"/>
+                <a:ea typeface="Consolas" pitchFamily="34" charset="-122"/>
+                <a:cs typeface="Consolas" pitchFamily="34" charset="-120"/>
+              </a:rPr>
+              <a:t>        </a:t>
+            </a:r>
+            <a:pPr indent="0" marL="0">
+              <a:buNone/>
+            </a:pPr>
+            <a:r>
+              <a:rPr lang="en-US" sz="1100" dirty="0">
+                <a:solidFill>
                   <a:srgbClr val="B8B5D9"/>
                 </a:solidFill>
                 <a:latin typeface="Consolas" pitchFamily="34" charset="0"/>
@@ -10238,7 +10776,7 @@
                 <a:ea typeface="Consolas" pitchFamily="34" charset="-122"/>
                 <a:cs typeface="Consolas" pitchFamily="34" charset="-120"/>
               </a:rPr>
-              <a:t>    EmbeddingGenerator </a:t>
+              <a:t>            </a:t>
             </a:r>
             <a:pPr indent="0" marL="0">
               <a:buNone/>
@@ -10246,6 +10784,34 @@
             <a:r>
               <a:rPr lang="en-US" sz="1100" dirty="0">
                 <a:solidFill>
+                  <a:srgbClr val="FB7185"/>
+                </a:solidFill>
+                <a:latin typeface="Consolas" pitchFamily="34" charset="0"/>
+                <a:ea typeface="Consolas" pitchFamily="34" charset="-122"/>
+                <a:cs typeface="Consolas" pitchFamily="34" charset="-120"/>
+              </a:rPr>
+              <a:t>var</a:t>
+            </a:r>
+            <a:pPr indent="0" marL="0">
+              <a:buNone/>
+            </a:pPr>
+            <a:r>
+              <a:rPr lang="en-US" sz="1100" dirty="0">
+                <a:solidFill>
+                  <a:srgbClr val="FAF8FF"/>
+                </a:solidFill>
+                <a:latin typeface="Consolas" pitchFamily="34" charset="0"/>
+                <a:ea typeface="Consolas" pitchFamily="34" charset="-122"/>
+                <a:cs typeface="Consolas" pitchFamily="34" charset="-120"/>
+              </a:rPr>
+              <a:t> hits </a:t>
+            </a:r>
+            <a:pPr indent="0" marL="0">
+              <a:buNone/>
+            </a:pPr>
+            <a:r>
+              <a:rPr lang="en-US" sz="1100" dirty="0">
+                <a:solidFill>
                   <a:srgbClr val="CFCBED"/>
                 </a:solidFill>
                 <a:latin typeface="Consolas" pitchFamily="34" charset="0"/>
@@ -10266,7 +10832,7 @@
                 <a:ea typeface="Consolas" pitchFamily="34" charset="-122"/>
                 <a:cs typeface="Consolas" pitchFamily="34" charset="-120"/>
               </a:rPr>
-              <a:t> embeddingClient</a:t>
+              <a:t> </a:t>
             </a:r>
             <a:pPr indent="0" marL="0">
               <a:buNone/>
@@ -10274,6 +10840,34 @@
             <a:r>
               <a:rPr lang="en-US" sz="1100" dirty="0">
                 <a:solidFill>
+                  <a:srgbClr val="FB7185"/>
+                </a:solidFill>
+                <a:latin typeface="Consolas" pitchFamily="34" charset="0"/>
+                <a:ea typeface="Consolas" pitchFamily="34" charset="-122"/>
+                <a:cs typeface="Consolas" pitchFamily="34" charset="-120"/>
+              </a:rPr>
+              <a:t>await</a:t>
+            </a:r>
+            <a:pPr indent="0" marL="0">
+              <a:buNone/>
+            </a:pPr>
+            <a:r>
+              <a:rPr lang="en-US" sz="1100" dirty="0">
+                <a:solidFill>
+                  <a:srgbClr val="FAF8FF"/>
+                </a:solidFill>
+                <a:latin typeface="Consolas" pitchFamily="34" charset="0"/>
+                <a:ea typeface="Consolas" pitchFamily="34" charset="-122"/>
+                <a:cs typeface="Consolas" pitchFamily="34" charset="-120"/>
+              </a:rPr>
+              <a:t> store</a:t>
+            </a:r>
+            <a:pPr indent="0" marL="0">
+              <a:buNone/>
+            </a:pPr>
+            <a:r>
+              <a:rPr lang="en-US" sz="1100" dirty="0">
+                <a:solidFill>
                   <a:srgbClr val="B8B5D9"/>
                 </a:solidFill>
                 <a:latin typeface="Consolas" pitchFamily="34" charset="0"/>
@@ -10294,7 +10888,7 @@
                 <a:ea typeface="Consolas" pitchFamily="34" charset="-122"/>
                 <a:cs typeface="Consolas" pitchFamily="34" charset="-120"/>
               </a:rPr>
-              <a:t>AsIEmbeddingGenerator</a:t>
+              <a:t>SearchAsync</a:t>
             </a:r>
             <a:pPr indent="0" marL="0">
               <a:buNone/>
@@ -10316,17 +10910,157 @@
             <a:r>
               <a:rPr lang="en-US" sz="1100" dirty="0">
                 <a:solidFill>
+                  <a:srgbClr val="FAF8FF"/>
+                </a:solidFill>
+                <a:latin typeface="Consolas" pitchFamily="34" charset="0"/>
+                <a:ea typeface="Consolas" pitchFamily="34" charset="-122"/>
+                <a:cs typeface="Consolas" pitchFamily="34" charset="-120"/>
+              </a:rPr>
+              <a:t>text</a:t>
+            </a:r>
+            <a:pPr indent="0" marL="0">
+              <a:buNone/>
+            </a:pPr>
+            <a:r>
+              <a:rPr lang="en-US" sz="1100" dirty="0">
+                <a:solidFill>
                   <a:srgbClr val="B8B5D9"/>
                 </a:solidFill>
                 <a:latin typeface="Consolas" pitchFamily="34" charset="0"/>
                 <a:ea typeface="Consolas" pitchFamily="34" charset="-122"/>
                 <a:cs typeface="Consolas" pitchFamily="34" charset="-120"/>
               </a:rPr>
+              <a:t>,</a:t>
+            </a:r>
+            <a:pPr indent="0" marL="0">
+              <a:buNone/>
+            </a:pPr>
+            <a:r>
+              <a:rPr lang="en-US" sz="1100" dirty="0">
+                <a:solidFill>
+                  <a:srgbClr val="FAF8FF"/>
+                </a:solidFill>
+                <a:latin typeface="Consolas" pitchFamily="34" charset="0"/>
+                <a:ea typeface="Consolas" pitchFamily="34" charset="-122"/>
+                <a:cs typeface="Consolas" pitchFamily="34" charset="-120"/>
+              </a:rPr>
+              <a:t> </a:t>
+            </a:r>
+            <a:pPr indent="0" marL="0">
+              <a:buNone/>
+            </a:pPr>
+            <a:r>
+              <a:rPr lang="en-US" sz="1100" dirty="0">
+                <a:solidFill>
+                  <a:srgbClr val="FAF8FF"/>
+                </a:solidFill>
+                <a:latin typeface="Consolas" pitchFamily="34" charset="0"/>
+                <a:ea typeface="Consolas" pitchFamily="34" charset="-122"/>
+                <a:cs typeface="Consolas" pitchFamily="34" charset="-120"/>
+              </a:rPr>
+              <a:t>topK</a:t>
+            </a:r>
+            <a:pPr indent="0" marL="0">
+              <a:buNone/>
+            </a:pPr>
+            <a:r>
+              <a:rPr lang="en-US" sz="1100" dirty="0">
+                <a:solidFill>
+                  <a:srgbClr val="B8B5D9"/>
+                </a:solidFill>
+                <a:latin typeface="Consolas" pitchFamily="34" charset="0"/>
+                <a:ea typeface="Consolas" pitchFamily="34" charset="-122"/>
+                <a:cs typeface="Consolas" pitchFamily="34" charset="-120"/>
+              </a:rPr>
+              <a:t>:</a:t>
+            </a:r>
+            <a:pPr indent="0" marL="0">
+              <a:buNone/>
+            </a:pPr>
+            <a:r>
+              <a:rPr lang="en-US" sz="1100" dirty="0">
+                <a:solidFill>
+                  <a:srgbClr val="FAF8FF"/>
+                </a:solidFill>
+                <a:latin typeface="Consolas" pitchFamily="34" charset="0"/>
+                <a:ea typeface="Consolas" pitchFamily="34" charset="-122"/>
+                <a:cs typeface="Consolas" pitchFamily="34" charset="-120"/>
+              </a:rPr>
+              <a:t> </a:t>
+            </a:r>
+            <a:pPr indent="0" marL="0">
+              <a:buNone/>
+            </a:pPr>
+            <a:r>
+              <a:rPr lang="en-US" sz="1100" dirty="0">
+                <a:solidFill>
+                  <a:srgbClr val="F472B6"/>
+                </a:solidFill>
+                <a:latin typeface="Consolas" pitchFamily="34" charset="0"/>
+                <a:ea typeface="Consolas" pitchFamily="34" charset="-122"/>
+                <a:cs typeface="Consolas" pitchFamily="34" charset="-120"/>
+              </a:rPr>
+              <a:t>3</a:t>
+            </a:r>
+            <a:pPr indent="0" marL="0">
+              <a:buNone/>
+            </a:pPr>
+            <a:r>
+              <a:rPr lang="en-US" sz="1100" dirty="0">
+                <a:solidFill>
+                  <a:srgbClr val="B8B5D9"/>
+                </a:solidFill>
+                <a:latin typeface="Consolas" pitchFamily="34" charset="0"/>
+                <a:ea typeface="Consolas" pitchFamily="34" charset="-122"/>
+                <a:cs typeface="Consolas" pitchFamily="34" charset="-120"/>
+              </a:rPr>
+              <a:t>,</a:t>
+            </a:r>
+            <a:pPr indent="0" marL="0">
+              <a:buNone/>
+            </a:pPr>
+            <a:r>
+              <a:rPr lang="en-US" sz="1100" dirty="0">
+                <a:solidFill>
+                  <a:srgbClr val="FAF8FF"/>
+                </a:solidFill>
+                <a:latin typeface="Consolas" pitchFamily="34" charset="0"/>
+                <a:ea typeface="Consolas" pitchFamily="34" charset="-122"/>
+                <a:cs typeface="Consolas" pitchFamily="34" charset="-120"/>
+              </a:rPr>
+              <a:t> ct</a:t>
+            </a:r>
+            <a:pPr indent="0" marL="0">
+              <a:buNone/>
+            </a:pPr>
+            <a:r>
+              <a:rPr lang="en-US" sz="1100" dirty="0">
+                <a:solidFill>
+                  <a:srgbClr val="B8B5D9"/>
+                </a:solidFill>
+                <a:latin typeface="Consolas" pitchFamily="34" charset="0"/>
+                <a:ea typeface="Consolas" pitchFamily="34" charset="-122"/>
+                <a:cs typeface="Consolas" pitchFamily="34" charset="-120"/>
+              </a:rPr>
               <a:t>)</a:t>
             </a:r>
             <a:pPr indent="0" marL="0">
               <a:buNone/>
             </a:pPr>
+            <a:r>
+              <a:rPr lang="en-US" sz="1100" dirty="0">
+                <a:solidFill>
+                  <a:srgbClr val="B8B5D9"/>
+                </a:solidFill>
+                <a:latin typeface="Consolas" pitchFamily="34" charset="0"/>
+                <a:ea typeface="Consolas" pitchFamily="34" charset="-122"/>
+                <a:cs typeface="Consolas" pitchFamily="34" charset="-120"/>
+              </a:rPr>
+              <a:t>;</a:t>
+            </a:r>
+            <a:pPr indent="0" marL="0">
+              <a:buNone/>
+            </a:pPr>
             <a:endParaRPr lang="en-US" sz="1100" dirty="0"/>
           </a:p>
           <a:p>
@@ -10336,12 +11070,396 @@
             <a:r>
               <a:rPr lang="en-US" sz="1100" dirty="0">
                 <a:solidFill>
+                  <a:srgbClr val="FAF8FF"/>
+                </a:solidFill>
+                <a:latin typeface="Consolas" pitchFamily="34" charset="0"/>
+                <a:ea typeface="Consolas" pitchFamily="34" charset="-122"/>
+                <a:cs typeface="Consolas" pitchFamily="34" charset="-120"/>
+              </a:rPr>
+              <a:t>            </a:t>
+            </a:r>
+            <a:pPr indent="0" marL="0">
+              <a:buNone/>
+            </a:pPr>
+            <a:r>
+              <a:rPr lang="en-US" sz="1100" dirty="0">
+                <a:solidFill>
+                  <a:srgbClr val="FB7185"/>
+                </a:solidFill>
+                <a:latin typeface="Consolas" pitchFamily="34" charset="0"/>
+                <a:ea typeface="Consolas" pitchFamily="34" charset="-122"/>
+                <a:cs typeface="Consolas" pitchFamily="34" charset="-120"/>
+              </a:rPr>
+              <a:t>return</a:t>
+            </a:r>
+            <a:pPr indent="0" marL="0">
+              <a:buNone/>
+            </a:pPr>
+            <a:r>
+              <a:rPr lang="en-US" sz="1100" dirty="0">
+                <a:solidFill>
+                  <a:srgbClr val="FAF8FF"/>
+                </a:solidFill>
+                <a:latin typeface="Consolas" pitchFamily="34" charset="0"/>
+                <a:ea typeface="Consolas" pitchFamily="34" charset="-122"/>
+                <a:cs typeface="Consolas" pitchFamily="34" charset="-120"/>
+              </a:rPr>
+              <a:t> hits</a:t>
+            </a:r>
+            <a:pPr indent="0" marL="0">
+              <a:buNone/>
+            </a:pPr>
+            <a:r>
+              <a:rPr lang="en-US" sz="1100" dirty="0">
+                <a:solidFill>
                   <a:srgbClr val="B8B5D9"/>
                 </a:solidFill>
                 <a:latin typeface="Consolas" pitchFamily="34" charset="0"/>
                 <a:ea typeface="Consolas" pitchFamily="34" charset="-122"/>
                 <a:cs typeface="Consolas" pitchFamily="34" charset="-120"/>
               </a:rPr>
+              <a:t>.</a:t>
+            </a:r>
+            <a:pPr indent="0" marL="0">
+              <a:buNone/>
+            </a:pPr>
+            <a:r>
+              <a:rPr lang="en-US" sz="1100" dirty="0">
+                <a:solidFill>
+                  <a:srgbClr val="86EFAC"/>
+                </a:solidFill>
+                <a:latin typeface="Consolas" pitchFamily="34" charset="0"/>
+                <a:ea typeface="Consolas" pitchFamily="34" charset="-122"/>
+                <a:cs typeface="Consolas" pitchFamily="34" charset="-120"/>
+              </a:rPr>
+              <a:t>Select</a:t>
+            </a:r>
+            <a:pPr indent="0" marL="0">
+              <a:buNone/>
+            </a:pPr>
+            <a:r>
+              <a:rPr lang="en-US" sz="1100" dirty="0">
+                <a:solidFill>
+                  <a:srgbClr val="B8B5D9"/>
+                </a:solidFill>
+                <a:latin typeface="Consolas" pitchFamily="34" charset="0"/>
+                <a:ea typeface="Consolas" pitchFamily="34" charset="-122"/>
+                <a:cs typeface="Consolas" pitchFamily="34" charset="-120"/>
+              </a:rPr>
+              <a:t>(</a:t>
+            </a:r>
+            <a:pPr indent="0" marL="0">
+              <a:buNone/>
+            </a:pPr>
+            <a:r>
+              <a:rPr lang="en-US" sz="1100" dirty="0">
+                <a:solidFill>
+                  <a:srgbClr val="FAF8FF"/>
+                </a:solidFill>
+                <a:latin typeface="Consolas" pitchFamily="34" charset="0"/>
+                <a:ea typeface="Consolas" pitchFamily="34" charset="-122"/>
+                <a:cs typeface="Consolas" pitchFamily="34" charset="-120"/>
+              </a:rPr>
+              <a:t>h </a:t>
+            </a:r>
+            <a:pPr indent="0" marL="0">
+              <a:buNone/>
+            </a:pPr>
+            <a:r>
+              <a:rPr lang="en-US" sz="1100" dirty="0">
+                <a:solidFill>
+                  <a:srgbClr val="CFCBED"/>
+                </a:solidFill>
+                <a:latin typeface="Consolas" pitchFamily="34" charset="0"/>
+                <a:ea typeface="Consolas" pitchFamily="34" charset="-122"/>
+                <a:cs typeface="Consolas" pitchFamily="34" charset="-120"/>
+              </a:rPr>
+              <a:t>=&gt;</a:t>
+            </a:r>
+            <a:pPr indent="0" marL="0">
+              <a:buNone/>
+            </a:pPr>
+            <a:r>
+              <a:rPr lang="en-US" sz="1100" dirty="0">
+                <a:solidFill>
+                  <a:srgbClr val="FAF8FF"/>
+                </a:solidFill>
+                <a:latin typeface="Consolas" pitchFamily="34" charset="0"/>
+                <a:ea typeface="Consolas" pitchFamily="34" charset="-122"/>
+                <a:cs typeface="Consolas" pitchFamily="34" charset="-120"/>
+              </a:rPr>
+              <a:t> </a:t>
+            </a:r>
+            <a:pPr indent="0" marL="0">
+              <a:buNone/>
+            </a:pPr>
+            <a:r>
+              <a:rPr lang="en-US" sz="1100" dirty="0">
+                <a:solidFill>
+                  <a:srgbClr val="FB7185"/>
+                </a:solidFill>
+                <a:latin typeface="Consolas" pitchFamily="34" charset="0"/>
+                <a:ea typeface="Consolas" pitchFamily="34" charset="-122"/>
+                <a:cs typeface="Consolas" pitchFamily="34" charset="-120"/>
+              </a:rPr>
+              <a:t>new</a:t>
+            </a:r>
+            <a:pPr indent="0" marL="0">
+              <a:buNone/>
+            </a:pPr>
+            <a:r>
+              <a:rPr lang="en-US" sz="1100" dirty="0">
+                <a:solidFill>
+                  <a:srgbClr val="FAF8FF"/>
+                </a:solidFill>
+                <a:latin typeface="Consolas" pitchFamily="34" charset="0"/>
+                <a:ea typeface="Consolas" pitchFamily="34" charset="-122"/>
+                <a:cs typeface="Consolas" pitchFamily="34" charset="-120"/>
+              </a:rPr>
+              <a:t> </a:t>
+            </a:r>
+            <a:pPr indent="0" marL="0">
+              <a:buNone/>
+            </a:pPr>
+            <a:r>
+              <a:rPr lang="en-US" sz="1100" dirty="0">
+                <a:solidFill>
+                  <a:srgbClr val="FAF8FF"/>
+                </a:solidFill>
+                <a:latin typeface="Consolas" pitchFamily="34" charset="0"/>
+                <a:ea typeface="Consolas" pitchFamily="34" charset="-122"/>
+                <a:cs typeface="Consolas" pitchFamily="34" charset="-120"/>
+              </a:rPr>
+              <a:t>TextSearchProvider</a:t>
+            </a:r>
+            <a:pPr indent="0" marL="0">
+              <a:buNone/>
+            </a:pPr>
+            <a:r>
+              <a:rPr lang="en-US" sz="1100" dirty="0">
+                <a:solidFill>
+                  <a:srgbClr val="B8B5D9"/>
+                </a:solidFill>
+                <a:latin typeface="Consolas" pitchFamily="34" charset="0"/>
+                <a:ea typeface="Consolas" pitchFamily="34" charset="-122"/>
+                <a:cs typeface="Consolas" pitchFamily="34" charset="-120"/>
+              </a:rPr>
+              <a:t>.</a:t>
+            </a:r>
+            <a:pPr indent="0" marL="0">
+              <a:buNone/>
+            </a:pPr>
+            <a:r>
+              <a:rPr lang="en-US" sz="1100" dirty="0">
+                <a:solidFill>
+                  <a:srgbClr val="FAF8FF"/>
+                </a:solidFill>
+                <a:latin typeface="Consolas" pitchFamily="34" charset="0"/>
+                <a:ea typeface="Consolas" pitchFamily="34" charset="-122"/>
+                <a:cs typeface="Consolas" pitchFamily="34" charset="-120"/>
+              </a:rPr>
+              <a:t>TextSearchResult</a:t>
+            </a:r>
+            <a:pPr indent="0" marL="0">
+              <a:buNone/>
+            </a:pPr>
+            <a:endParaRPr lang="en-US" sz="1100" dirty="0"/>
+          </a:p>
+          <a:p>
+            <a:pPr indent="0" marL="0">
+              <a:buNone/>
+            </a:pPr>
+            <a:r>
+              <a:rPr lang="en-US" sz="1100" dirty="0">
+                <a:solidFill>
+                  <a:srgbClr val="FAF8FF"/>
+                </a:solidFill>
+                <a:latin typeface="Consolas" pitchFamily="34" charset="0"/>
+                <a:ea typeface="Consolas" pitchFamily="34" charset="-122"/>
+                <a:cs typeface="Consolas" pitchFamily="34" charset="-120"/>
+              </a:rPr>
+              <a:t>                </a:t>
+            </a:r>
+            <a:pPr indent="0" marL="0">
+              <a:buNone/>
+            </a:pPr>
+            <a:r>
+              <a:rPr lang="en-US" sz="1100" dirty="0">
+                <a:solidFill>
+                  <a:srgbClr val="B8B5D9"/>
+                </a:solidFill>
+                <a:latin typeface="Consolas" pitchFamily="34" charset="0"/>
+                <a:ea typeface="Consolas" pitchFamily="34" charset="-122"/>
+                <a:cs typeface="Consolas" pitchFamily="34" charset="-120"/>
+              </a:rPr>
+              <a:t>{</a:t>
+            </a:r>
+            <a:pPr indent="0" marL="0">
+              <a:buNone/>
+            </a:pPr>
+            <a:r>
+              <a:rPr lang="en-US" sz="1100" dirty="0">
+                <a:solidFill>
+                  <a:srgbClr val="FAF8FF"/>
+                </a:solidFill>
+                <a:latin typeface="Consolas" pitchFamily="34" charset="0"/>
+                <a:ea typeface="Consolas" pitchFamily="34" charset="-122"/>
+                <a:cs typeface="Consolas" pitchFamily="34" charset="-120"/>
+              </a:rPr>
+              <a:t> SourceName </a:t>
+            </a:r>
+            <a:pPr indent="0" marL="0">
+              <a:buNone/>
+            </a:pPr>
+            <a:r>
+              <a:rPr lang="en-US" sz="1100" dirty="0">
+                <a:solidFill>
+                  <a:srgbClr val="CFCBED"/>
+                </a:solidFill>
+                <a:latin typeface="Consolas" pitchFamily="34" charset="0"/>
+                <a:ea typeface="Consolas" pitchFamily="34" charset="-122"/>
+                <a:cs typeface="Consolas" pitchFamily="34" charset="-120"/>
+              </a:rPr>
+              <a:t>=</a:t>
+            </a:r>
+            <a:pPr indent="0" marL="0">
+              <a:buNone/>
+            </a:pPr>
+            <a:r>
+              <a:rPr lang="en-US" sz="1100" dirty="0">
+                <a:solidFill>
+                  <a:srgbClr val="FAF8FF"/>
+                </a:solidFill>
+                <a:latin typeface="Consolas" pitchFamily="34" charset="0"/>
+                <a:ea typeface="Consolas" pitchFamily="34" charset="-122"/>
+                <a:cs typeface="Consolas" pitchFamily="34" charset="-120"/>
+              </a:rPr>
+              <a:t> h</a:t>
+            </a:r>
+            <a:pPr indent="0" marL="0">
+              <a:buNone/>
+            </a:pPr>
+            <a:r>
+              <a:rPr lang="en-US" sz="1100" dirty="0">
+                <a:solidFill>
+                  <a:srgbClr val="B8B5D9"/>
+                </a:solidFill>
+                <a:latin typeface="Consolas" pitchFamily="34" charset="0"/>
+                <a:ea typeface="Consolas" pitchFamily="34" charset="-122"/>
+                <a:cs typeface="Consolas" pitchFamily="34" charset="-120"/>
+              </a:rPr>
+              <a:t>.</a:t>
+            </a:r>
+            <a:pPr indent="0" marL="0">
+              <a:buNone/>
+            </a:pPr>
+            <a:r>
+              <a:rPr lang="en-US" sz="1100" dirty="0">
+                <a:solidFill>
+                  <a:srgbClr val="FAF8FF"/>
+                </a:solidFill>
+                <a:latin typeface="Consolas" pitchFamily="34" charset="0"/>
+                <a:ea typeface="Consolas" pitchFamily="34" charset="-122"/>
+                <a:cs typeface="Consolas" pitchFamily="34" charset="-120"/>
+              </a:rPr>
+              <a:t>Name</a:t>
+            </a:r>
+            <a:pPr indent="0" marL="0">
+              <a:buNone/>
+            </a:pPr>
+            <a:r>
+              <a:rPr lang="en-US" sz="1100" dirty="0">
+                <a:solidFill>
+                  <a:srgbClr val="B8B5D9"/>
+                </a:solidFill>
+                <a:latin typeface="Consolas" pitchFamily="34" charset="0"/>
+                <a:ea typeface="Consolas" pitchFamily="34" charset="-122"/>
+                <a:cs typeface="Consolas" pitchFamily="34" charset="-120"/>
+              </a:rPr>
+              <a:t>,</a:t>
+            </a:r>
+            <a:pPr indent="0" marL="0">
+              <a:buNone/>
+            </a:pPr>
+            <a:r>
+              <a:rPr lang="en-US" sz="1100" dirty="0">
+                <a:solidFill>
+                  <a:srgbClr val="FAF8FF"/>
+                </a:solidFill>
+                <a:latin typeface="Consolas" pitchFamily="34" charset="0"/>
+                <a:ea typeface="Consolas" pitchFamily="34" charset="-122"/>
+                <a:cs typeface="Consolas" pitchFamily="34" charset="-120"/>
+              </a:rPr>
+              <a:t> Text </a:t>
+            </a:r>
+            <a:pPr indent="0" marL="0">
+              <a:buNone/>
+            </a:pPr>
+            <a:r>
+              <a:rPr lang="en-US" sz="1100" dirty="0">
+                <a:solidFill>
+                  <a:srgbClr val="CFCBED"/>
+                </a:solidFill>
+                <a:latin typeface="Consolas" pitchFamily="34" charset="0"/>
+                <a:ea typeface="Consolas" pitchFamily="34" charset="-122"/>
+                <a:cs typeface="Consolas" pitchFamily="34" charset="-120"/>
+              </a:rPr>
+              <a:t>=</a:t>
+            </a:r>
+            <a:pPr indent="0" marL="0">
+              <a:buNone/>
+            </a:pPr>
+            <a:r>
+              <a:rPr lang="en-US" sz="1100" dirty="0">
+                <a:solidFill>
+                  <a:srgbClr val="FAF8FF"/>
+                </a:solidFill>
+                <a:latin typeface="Consolas" pitchFamily="34" charset="0"/>
+                <a:ea typeface="Consolas" pitchFamily="34" charset="-122"/>
+                <a:cs typeface="Consolas" pitchFamily="34" charset="-120"/>
+              </a:rPr>
+              <a:t> h</a:t>
+            </a:r>
+            <a:pPr indent="0" marL="0">
+              <a:buNone/>
+            </a:pPr>
+            <a:r>
+              <a:rPr lang="en-US" sz="1100" dirty="0">
+                <a:solidFill>
+                  <a:srgbClr val="B8B5D9"/>
+                </a:solidFill>
+                <a:latin typeface="Consolas" pitchFamily="34" charset="0"/>
+                <a:ea typeface="Consolas" pitchFamily="34" charset="-122"/>
+                <a:cs typeface="Consolas" pitchFamily="34" charset="-120"/>
+              </a:rPr>
+              <a:t>.</a:t>
+            </a:r>
+            <a:pPr indent="0" marL="0">
+              <a:buNone/>
+            </a:pPr>
+            <a:r>
+              <a:rPr lang="en-US" sz="1100" dirty="0">
+                <a:solidFill>
+                  <a:srgbClr val="FAF8FF"/>
+                </a:solidFill>
+                <a:latin typeface="Consolas" pitchFamily="34" charset="0"/>
+                <a:ea typeface="Consolas" pitchFamily="34" charset="-122"/>
+                <a:cs typeface="Consolas" pitchFamily="34" charset="-120"/>
+              </a:rPr>
+              <a:t>Text </a:t>
+            </a:r>
+            <a:pPr indent="0" marL="0">
+              <a:buNone/>
+            </a:pPr>
+            <a:r>
+              <a:rPr lang="en-US" sz="1100" dirty="0">
+                <a:solidFill>
+                  <a:srgbClr val="B8B5D9"/>
+                </a:solidFill>
+                <a:latin typeface="Consolas" pitchFamily="34" charset="0"/>
+                <a:ea typeface="Consolas" pitchFamily="34" charset="-122"/>
+                <a:cs typeface="Consolas" pitchFamily="34" charset="-120"/>
+              </a:rPr>
               <a:t>}</a:t>
             </a:r>
             <a:pPr indent="0" marL="0">
@@ -10381,22 +11499,16 @@
             <a:pPr indent="0" marL="0">
               <a:buNone/>
             </a:pPr>
-            <a:endParaRPr lang="en-US" sz="1100" dirty="0"/>
-          </a:p>
-          <a:p>
-            <a:pPr indent="0" marL="0">
-              <a:buNone/>
-            </a:pPr>
             <a:r>
               <a:rPr lang="en-US" sz="1100" dirty="0">
                 <a:solidFill>
-                  <a:srgbClr val="A78BFA"/>
-                </a:solidFill>
-                <a:latin typeface="Consolas" pitchFamily="34" charset="0"/>
-                <a:ea typeface="Consolas" pitchFamily="34" charset="-122"/>
-                <a:cs typeface="Consolas" pitchFamily="34" charset="-120"/>
-              </a:rPr>
-              <a:t>AIAgent</a:t>
+                  <a:srgbClr val="FAF8FF"/>
+                </a:solidFill>
+                <a:latin typeface="Consolas" pitchFamily="34" charset="0"/>
+                <a:ea typeface="Consolas" pitchFamily="34" charset="-122"/>
+                <a:cs typeface="Consolas" pitchFamily="34" charset="-120"/>
+              </a:rPr>
+              <a:t>        </a:t>
             </a:r>
             <a:pPr indent="0" marL="0">
               <a:buNone/>
@@ -10404,1097 +11516,13 @@
             <a:r>
               <a:rPr lang="en-US" sz="1100" dirty="0">
                 <a:solidFill>
-                  <a:srgbClr val="FAF8FF"/>
-                </a:solidFill>
-                <a:latin typeface="Consolas" pitchFamily="34" charset="0"/>
-                <a:ea typeface="Consolas" pitchFamily="34" charset="-122"/>
-                <a:cs typeface="Consolas" pitchFamily="34" charset="-120"/>
-              </a:rPr>
-              <a:t> agent </a:t>
-            </a:r>
-            <a:pPr indent="0" marL="0">
-              <a:buNone/>
-            </a:pPr>
-            <a:r>
-              <a:rPr lang="en-US" sz="1100" dirty="0">
-                <a:solidFill>
-                  <a:srgbClr val="CFCBED"/>
-                </a:solidFill>
-                <a:latin typeface="Consolas" pitchFamily="34" charset="0"/>
-                <a:ea typeface="Consolas" pitchFamily="34" charset="-122"/>
-                <a:cs typeface="Consolas" pitchFamily="34" charset="-120"/>
-              </a:rPr>
-              <a:t>=</a:t>
-            </a:r>
-            <a:pPr indent="0" marL="0">
-              <a:buNone/>
-            </a:pPr>
-            <a:r>
-              <a:rPr lang="en-US" sz="1100" dirty="0">
-                <a:solidFill>
-                  <a:srgbClr val="FAF8FF"/>
-                </a:solidFill>
-                <a:latin typeface="Consolas" pitchFamily="34" charset="0"/>
-                <a:ea typeface="Consolas" pitchFamily="34" charset="-122"/>
-                <a:cs typeface="Consolas" pitchFamily="34" charset="-120"/>
-              </a:rPr>
-              <a:t> chatClient</a:t>
-            </a:r>
-            <a:pPr indent="0" marL="0">
-              <a:buNone/>
-            </a:pPr>
-            <a:r>
-              <a:rPr lang="en-US" sz="1100" dirty="0">
-                <a:solidFill>
                   <a:srgbClr val="B8B5D9"/>
                 </a:solidFill>
                 <a:latin typeface="Consolas" pitchFamily="34" charset="0"/>
                 <a:ea typeface="Consolas" pitchFamily="34" charset="-122"/>
                 <a:cs typeface="Consolas" pitchFamily="34" charset="-120"/>
               </a:rPr>
-              <a:t>.</a:t>
-            </a:r>
-            <a:pPr indent="0" marL="0">
-              <a:buNone/>
-            </a:pPr>
-            <a:r>
-              <a:rPr lang="en-US" sz="1100" dirty="0">
-                <a:solidFill>
-                  <a:srgbClr val="86EFAC"/>
-                </a:solidFill>
-                <a:latin typeface="Consolas" pitchFamily="34" charset="0"/>
-                <a:ea typeface="Consolas" pitchFamily="34" charset="-122"/>
-                <a:cs typeface="Consolas" pitchFamily="34" charset="-120"/>
-              </a:rPr>
-              <a:t>AsAIAgent</a:t>
-            </a:r>
-            <a:pPr indent="0" marL="0">
-              <a:buNone/>
-            </a:pPr>
-            <a:r>
-              <a:rPr lang="en-US" sz="1100" dirty="0">
-                <a:solidFill>
-                  <a:srgbClr val="B8B5D9"/>
-                </a:solidFill>
-                <a:latin typeface="Consolas" pitchFamily="34" charset="0"/>
-                <a:ea typeface="Consolas" pitchFamily="34" charset="-122"/>
-                <a:cs typeface="Consolas" pitchFamily="34" charset="-120"/>
-              </a:rPr>
-              <a:t>(</a:t>
-            </a:r>
-            <a:pPr indent="0" marL="0">
-              <a:buNone/>
-            </a:pPr>
-            <a:r>
-              <a:rPr lang="en-US" sz="1100" dirty="0">
-                <a:solidFill>
-                  <a:srgbClr val="FB7185"/>
-                </a:solidFill>
-                <a:latin typeface="Consolas" pitchFamily="34" charset="0"/>
-                <a:ea typeface="Consolas" pitchFamily="34" charset="-122"/>
-                <a:cs typeface="Consolas" pitchFamily="34" charset="-120"/>
-              </a:rPr>
-              <a:t>new</a:t>
-            </a:r>
-            <a:pPr indent="0" marL="0">
-              <a:buNone/>
-            </a:pPr>
-            <a:r>
-              <a:rPr lang="en-US" sz="1100" dirty="0">
-                <a:solidFill>
-                  <a:srgbClr val="FAF8FF"/>
-                </a:solidFill>
-                <a:latin typeface="Consolas" pitchFamily="34" charset="0"/>
-                <a:ea typeface="Consolas" pitchFamily="34" charset="-122"/>
-                <a:cs typeface="Consolas" pitchFamily="34" charset="-120"/>
-              </a:rPr>
-              <a:t> </a:t>
-            </a:r>
-            <a:pPr indent="0" marL="0">
-              <a:buNone/>
-            </a:pPr>
-            <a:r>
-              <a:rPr lang="en-US" sz="1100" dirty="0">
-                <a:solidFill>
-                  <a:srgbClr val="FAF8FF"/>
-                </a:solidFill>
-                <a:latin typeface="Consolas" pitchFamily="34" charset="0"/>
-                <a:ea typeface="Consolas" pitchFamily="34" charset="-122"/>
-                <a:cs typeface="Consolas" pitchFamily="34" charset="-120"/>
-              </a:rPr>
-              <a:t>ChatClientAgentOptions</a:t>
-            </a:r>
-            <a:pPr indent="0" marL="0">
-              <a:buNone/>
-            </a:pPr>
-            <a:endParaRPr lang="en-US" sz="1100" dirty="0"/>
-          </a:p>
-          <a:p>
-            <a:pPr indent="0" marL="0">
-              <a:buNone/>
-            </a:pPr>
-            <a:r>
-              <a:rPr lang="en-US" sz="1100" dirty="0">
-                <a:solidFill>
-                  <a:srgbClr val="B8B5D9"/>
-                </a:solidFill>
-                <a:latin typeface="Consolas" pitchFamily="34" charset="0"/>
-                <a:ea typeface="Consolas" pitchFamily="34" charset="-122"/>
-                <a:cs typeface="Consolas" pitchFamily="34" charset="-120"/>
-              </a:rPr>
-              <a:t>{</a:t>
-            </a:r>
-            <a:pPr indent="0" marL="0">
-              <a:buNone/>
-            </a:pPr>
-            <a:endParaRPr lang="en-US" sz="1100" dirty="0"/>
-          </a:p>
-          <a:p>
-            <a:pPr indent="0" marL="0">
-              <a:buNone/>
-            </a:pPr>
-            <a:r>
-              <a:rPr lang="en-US" sz="1100" dirty="0">
-                <a:solidFill>
-                  <a:srgbClr val="FAF8FF"/>
-                </a:solidFill>
-                <a:latin typeface="Consolas" pitchFamily="34" charset="0"/>
-                <a:ea typeface="Consolas" pitchFamily="34" charset="-122"/>
-                <a:cs typeface="Consolas" pitchFamily="34" charset="-120"/>
-              </a:rPr>
-              <a:t>    AIContextProviders </a:t>
-            </a:r>
-            <a:pPr indent="0" marL="0">
-              <a:buNone/>
-            </a:pPr>
-            <a:r>
-              <a:rPr lang="en-US" sz="1100" dirty="0">
-                <a:solidFill>
-                  <a:srgbClr val="CFCBED"/>
-                </a:solidFill>
-                <a:latin typeface="Consolas" pitchFamily="34" charset="0"/>
-                <a:ea typeface="Consolas" pitchFamily="34" charset="-122"/>
-                <a:cs typeface="Consolas" pitchFamily="34" charset="-120"/>
-              </a:rPr>
-              <a:t>=</a:t>
-            </a:r>
-            <a:pPr indent="0" marL="0">
-              <a:buNone/>
-            </a:pPr>
-            <a:endParaRPr lang="en-US" sz="1100" dirty="0"/>
-          </a:p>
-          <a:p>
-            <a:pPr indent="0" marL="0">
-              <a:buNone/>
-            </a:pPr>
-            <a:r>
-              <a:rPr lang="en-US" sz="1100" dirty="0">
-                <a:solidFill>
-                  <a:srgbClr val="FAF8FF"/>
-                </a:solidFill>
-                <a:latin typeface="Consolas" pitchFamily="34" charset="0"/>
-                <a:ea typeface="Consolas" pitchFamily="34" charset="-122"/>
-                <a:cs typeface="Consolas" pitchFamily="34" charset="-120"/>
-              </a:rPr>
-              <a:t>    </a:t>
-            </a:r>
-            <a:pPr indent="0" marL="0">
-              <a:buNone/>
-            </a:pPr>
-            <a:r>
-              <a:rPr lang="en-US" sz="1100" dirty="0">
-                <a:solidFill>
-                  <a:srgbClr val="B8B5D9"/>
-                </a:solidFill>
-                <a:latin typeface="Consolas" pitchFamily="34" charset="0"/>
-                <a:ea typeface="Consolas" pitchFamily="34" charset="-122"/>
-                <a:cs typeface="Consolas" pitchFamily="34" charset="-120"/>
-              </a:rPr>
-              <a:t>[</a:t>
-            </a:r>
-            <a:pPr indent="0" marL="0">
-              <a:buNone/>
-            </a:pPr>
-            <a:endParaRPr lang="en-US" sz="1100" dirty="0"/>
-          </a:p>
-          <a:p>
-            <a:pPr indent="0" marL="0">
-              <a:buNone/>
-            </a:pPr>
-            <a:r>
-              <a:rPr lang="en-US" sz="1100" dirty="0">
-                <a:solidFill>
-                  <a:srgbClr val="FAF8FF"/>
-                </a:solidFill>
-                <a:latin typeface="Consolas" pitchFamily="34" charset="0"/>
-                <a:ea typeface="Consolas" pitchFamily="34" charset="-122"/>
-                <a:cs typeface="Consolas" pitchFamily="34" charset="-120"/>
-              </a:rPr>
-              <a:t>        </a:t>
-            </a:r>
-            <a:pPr indent="0" marL="0">
-              <a:buNone/>
-            </a:pPr>
-            <a:r>
-              <a:rPr lang="en-US" sz="1100" i="1" dirty="0">
-                <a:solidFill>
-                  <a:srgbClr val="8B88B5"/>
-                </a:solidFill>
-                <a:latin typeface="Consolas" pitchFamily="34" charset="0"/>
-                <a:ea typeface="Consolas" pitchFamily="34" charset="-122"/>
-                <a:cs typeface="Consolas" pitchFamily="34" charset="-120"/>
-              </a:rPr>
-              <a:t>// RAG — pull the top-k chunks before each model call</a:t>
-            </a:r>
-            <a:pPr indent="0" marL="0">
-              <a:buNone/>
-            </a:pPr>
-            <a:endParaRPr lang="en-US" sz="1100" dirty="0"/>
-          </a:p>
-          <a:p>
-            <a:pPr indent="0" marL="0">
-              <a:buNone/>
-            </a:pPr>
-            <a:r>
-              <a:rPr lang="en-US" sz="1100" dirty="0">
-                <a:solidFill>
-                  <a:srgbClr val="FAF8FF"/>
-                </a:solidFill>
-                <a:latin typeface="Consolas" pitchFamily="34" charset="0"/>
-                <a:ea typeface="Consolas" pitchFamily="34" charset="-122"/>
-                <a:cs typeface="Consolas" pitchFamily="34" charset="-120"/>
-              </a:rPr>
-              <a:t>        </a:t>
-            </a:r>
-            <a:pPr indent="0" marL="0">
-              <a:buNone/>
-            </a:pPr>
-            <a:r>
-              <a:rPr lang="en-US" sz="1100" dirty="0">
-                <a:solidFill>
-                  <a:srgbClr val="FB7185"/>
-                </a:solidFill>
-                <a:latin typeface="Consolas" pitchFamily="34" charset="0"/>
-                <a:ea typeface="Consolas" pitchFamily="34" charset="-122"/>
-                <a:cs typeface="Consolas" pitchFamily="34" charset="-120"/>
-              </a:rPr>
-              <a:t>new</a:t>
-            </a:r>
-            <a:pPr indent="0" marL="0">
-              <a:buNone/>
-            </a:pPr>
-            <a:r>
-              <a:rPr lang="en-US" sz="1100" dirty="0">
-                <a:solidFill>
-                  <a:srgbClr val="FAF8FF"/>
-                </a:solidFill>
-                <a:latin typeface="Consolas" pitchFamily="34" charset="0"/>
-                <a:ea typeface="Consolas" pitchFamily="34" charset="-122"/>
-                <a:cs typeface="Consolas" pitchFamily="34" charset="-120"/>
-              </a:rPr>
-              <a:t> </a:t>
-            </a:r>
-            <a:pPr indent="0" marL="0">
-              <a:buNone/>
-            </a:pPr>
-            <a:r>
-              <a:rPr lang="en-US" sz="1100" dirty="0">
-                <a:solidFill>
-                  <a:srgbClr val="FAF8FF"/>
-                </a:solidFill>
-                <a:latin typeface="Consolas" pitchFamily="34" charset="0"/>
-                <a:ea typeface="Consolas" pitchFamily="34" charset="-122"/>
-                <a:cs typeface="Consolas" pitchFamily="34" charset="-120"/>
-              </a:rPr>
-              <a:t>TextSearchProvider</a:t>
-            </a:r>
-            <a:pPr indent="0" marL="0">
-              <a:buNone/>
-            </a:pPr>
-            <a:r>
-              <a:rPr lang="en-US" sz="1100" dirty="0">
-                <a:solidFill>
-                  <a:srgbClr val="B8B5D9"/>
-                </a:solidFill>
-                <a:latin typeface="Consolas" pitchFamily="34" charset="0"/>
-                <a:ea typeface="Consolas" pitchFamily="34" charset="-122"/>
-                <a:cs typeface="Consolas" pitchFamily="34" charset="-120"/>
-              </a:rPr>
-              <a:t>(</a:t>
-            </a:r>
-            <a:pPr indent="0" marL="0">
-              <a:buNone/>
-            </a:pPr>
-            <a:r>
-              <a:rPr lang="en-US" sz="1100" dirty="0">
-                <a:solidFill>
-                  <a:srgbClr val="FB7185"/>
-                </a:solidFill>
-                <a:latin typeface="Consolas" pitchFamily="34" charset="0"/>
-                <a:ea typeface="Consolas" pitchFamily="34" charset="-122"/>
-                <a:cs typeface="Consolas" pitchFamily="34" charset="-120"/>
-              </a:rPr>
-              <a:t>async</a:t>
-            </a:r>
-            <a:pPr indent="0" marL="0">
-              <a:buNone/>
-            </a:pPr>
-            <a:r>
-              <a:rPr lang="en-US" sz="1100" dirty="0">
-                <a:solidFill>
-                  <a:srgbClr val="FAF8FF"/>
-                </a:solidFill>
-                <a:latin typeface="Consolas" pitchFamily="34" charset="0"/>
-                <a:ea typeface="Consolas" pitchFamily="34" charset="-122"/>
-                <a:cs typeface="Consolas" pitchFamily="34" charset="-120"/>
-              </a:rPr>
-              <a:t> </a:t>
-            </a:r>
-            <a:pPr indent="0" marL="0">
-              <a:buNone/>
-            </a:pPr>
-            <a:r>
-              <a:rPr lang="en-US" sz="1100" dirty="0">
-                <a:solidFill>
-                  <a:srgbClr val="B8B5D9"/>
-                </a:solidFill>
-                <a:latin typeface="Consolas" pitchFamily="34" charset="0"/>
-                <a:ea typeface="Consolas" pitchFamily="34" charset="-122"/>
-                <a:cs typeface="Consolas" pitchFamily="34" charset="-120"/>
-              </a:rPr>
-              <a:t>(</a:t>
-            </a:r>
-            <a:pPr indent="0" marL="0">
-              <a:buNone/>
-            </a:pPr>
-            <a:r>
-              <a:rPr lang="en-US" sz="1100" dirty="0">
-                <a:solidFill>
-                  <a:srgbClr val="FAF8FF"/>
-                </a:solidFill>
-                <a:latin typeface="Consolas" pitchFamily="34" charset="0"/>
-                <a:ea typeface="Consolas" pitchFamily="34" charset="-122"/>
-                <a:cs typeface="Consolas" pitchFamily="34" charset="-120"/>
-              </a:rPr>
-              <a:t>text</a:t>
-            </a:r>
-            <a:pPr indent="0" marL="0">
-              <a:buNone/>
-            </a:pPr>
-            <a:r>
-              <a:rPr lang="en-US" sz="1100" dirty="0">
-                <a:solidFill>
-                  <a:srgbClr val="B8B5D9"/>
-                </a:solidFill>
-                <a:latin typeface="Consolas" pitchFamily="34" charset="0"/>
-                <a:ea typeface="Consolas" pitchFamily="34" charset="-122"/>
-                <a:cs typeface="Consolas" pitchFamily="34" charset="-120"/>
-              </a:rPr>
-              <a:t>,</a:t>
-            </a:r>
-            <a:pPr indent="0" marL="0">
-              <a:buNone/>
-            </a:pPr>
-            <a:r>
-              <a:rPr lang="en-US" sz="1100" dirty="0">
-                <a:solidFill>
-                  <a:srgbClr val="FAF8FF"/>
-                </a:solidFill>
-                <a:latin typeface="Consolas" pitchFamily="34" charset="0"/>
-                <a:ea typeface="Consolas" pitchFamily="34" charset="-122"/>
-                <a:cs typeface="Consolas" pitchFamily="34" charset="-120"/>
-              </a:rPr>
-              <a:t> ct</a:t>
-            </a:r>
-            <a:pPr indent="0" marL="0">
-              <a:buNone/>
-            </a:pPr>
-            <a:r>
-              <a:rPr lang="en-US" sz="1100" dirty="0">
-                <a:solidFill>
-                  <a:srgbClr val="B8B5D9"/>
-                </a:solidFill>
-                <a:latin typeface="Consolas" pitchFamily="34" charset="0"/>
-                <a:ea typeface="Consolas" pitchFamily="34" charset="-122"/>
-                <a:cs typeface="Consolas" pitchFamily="34" charset="-120"/>
-              </a:rPr>
-              <a:t>)</a:t>
-            </a:r>
-            <a:pPr indent="0" marL="0">
-              <a:buNone/>
-            </a:pPr>
-            <a:r>
-              <a:rPr lang="en-US" sz="1100" dirty="0">
-                <a:solidFill>
-                  <a:srgbClr val="FAF8FF"/>
-                </a:solidFill>
-                <a:latin typeface="Consolas" pitchFamily="34" charset="0"/>
-                <a:ea typeface="Consolas" pitchFamily="34" charset="-122"/>
-                <a:cs typeface="Consolas" pitchFamily="34" charset="-120"/>
-              </a:rPr>
-              <a:t> </a:t>
-            </a:r>
-            <a:pPr indent="0" marL="0">
-              <a:buNone/>
-            </a:pPr>
-            <a:r>
-              <a:rPr lang="en-US" sz="1100" dirty="0">
-                <a:solidFill>
-                  <a:srgbClr val="CFCBED"/>
-                </a:solidFill>
-                <a:latin typeface="Consolas" pitchFamily="34" charset="0"/>
-                <a:ea typeface="Consolas" pitchFamily="34" charset="-122"/>
-                <a:cs typeface="Consolas" pitchFamily="34" charset="-120"/>
-              </a:rPr>
-              <a:t>=&gt;</a:t>
-            </a:r>
-            <a:pPr indent="0" marL="0">
-              <a:buNone/>
-            </a:pPr>
-            <a:endParaRPr lang="en-US" sz="1100" dirty="0"/>
-          </a:p>
-          <a:p>
-            <a:pPr indent="0" marL="0">
-              <a:buNone/>
-            </a:pPr>
-            <a:r>
-              <a:rPr lang="en-US" sz="1100" dirty="0">
-                <a:solidFill>
-                  <a:srgbClr val="FAF8FF"/>
-                </a:solidFill>
-                <a:latin typeface="Consolas" pitchFamily="34" charset="0"/>
-                <a:ea typeface="Consolas" pitchFamily="34" charset="-122"/>
-                <a:cs typeface="Consolas" pitchFamily="34" charset="-120"/>
-              </a:rPr>
-              <a:t>            </a:t>
-            </a:r>
-            <a:pPr indent="0" marL="0">
-              <a:buNone/>
-            </a:pPr>
-            <a:r>
-              <a:rPr lang="en-US" sz="1100" dirty="0">
-                <a:solidFill>
-                  <a:srgbClr val="B8B5D9"/>
-                </a:solidFill>
-                <a:latin typeface="Consolas" pitchFamily="34" charset="0"/>
-                <a:ea typeface="Consolas" pitchFamily="34" charset="-122"/>
-                <a:cs typeface="Consolas" pitchFamily="34" charset="-120"/>
-              </a:rPr>
-              <a:t>(</a:t>
-            </a:r>
-            <a:pPr indent="0" marL="0">
-              <a:buNone/>
-            </a:pPr>
-            <a:r>
-              <a:rPr lang="en-US" sz="1100" dirty="0">
-                <a:solidFill>
-                  <a:srgbClr val="FB7185"/>
-                </a:solidFill>
-                <a:latin typeface="Consolas" pitchFamily="34" charset="0"/>
-                <a:ea typeface="Consolas" pitchFamily="34" charset="-122"/>
-                <a:cs typeface="Consolas" pitchFamily="34" charset="-120"/>
-              </a:rPr>
-              <a:t>await</a:t>
-            </a:r>
-            <a:pPr indent="0" marL="0">
-              <a:buNone/>
-            </a:pPr>
-            <a:r>
-              <a:rPr lang="en-US" sz="1100" dirty="0">
-                <a:solidFill>
-                  <a:srgbClr val="FAF8FF"/>
-                </a:solidFill>
-                <a:latin typeface="Consolas" pitchFamily="34" charset="0"/>
-                <a:ea typeface="Consolas" pitchFamily="34" charset="-122"/>
-                <a:cs typeface="Consolas" pitchFamily="34" charset="-120"/>
-              </a:rPr>
-              <a:t> store</a:t>
-            </a:r>
-            <a:pPr indent="0" marL="0">
-              <a:buNone/>
-            </a:pPr>
-            <a:r>
-              <a:rPr lang="en-US" sz="1100" dirty="0">
-                <a:solidFill>
-                  <a:srgbClr val="B8B5D9"/>
-                </a:solidFill>
-                <a:latin typeface="Consolas" pitchFamily="34" charset="0"/>
-                <a:ea typeface="Consolas" pitchFamily="34" charset="-122"/>
-                <a:cs typeface="Consolas" pitchFamily="34" charset="-120"/>
-              </a:rPr>
-              <a:t>.</a:t>
-            </a:r>
-            <a:pPr indent="0" marL="0">
-              <a:buNone/>
-            </a:pPr>
-            <a:r>
-              <a:rPr lang="en-US" sz="1100" dirty="0">
-                <a:solidFill>
-                  <a:srgbClr val="86EFAC"/>
-                </a:solidFill>
-                <a:latin typeface="Consolas" pitchFamily="34" charset="0"/>
-                <a:ea typeface="Consolas" pitchFamily="34" charset="-122"/>
-                <a:cs typeface="Consolas" pitchFamily="34" charset="-120"/>
-              </a:rPr>
-              <a:t>SearchAsync</a:t>
-            </a:r>
-            <a:pPr indent="0" marL="0">
-              <a:buNone/>
-            </a:pPr>
-            <a:r>
-              <a:rPr lang="en-US" sz="1100" dirty="0">
-                <a:solidFill>
-                  <a:srgbClr val="B8B5D9"/>
-                </a:solidFill>
-                <a:latin typeface="Consolas" pitchFamily="34" charset="0"/>
-                <a:ea typeface="Consolas" pitchFamily="34" charset="-122"/>
-                <a:cs typeface="Consolas" pitchFamily="34" charset="-120"/>
-              </a:rPr>
-              <a:t>(</a:t>
-            </a:r>
-            <a:pPr indent="0" marL="0">
-              <a:buNone/>
-            </a:pPr>
-            <a:r>
-              <a:rPr lang="en-US" sz="1100" dirty="0">
-                <a:solidFill>
-                  <a:srgbClr val="FAF8FF"/>
-                </a:solidFill>
-                <a:latin typeface="Consolas" pitchFamily="34" charset="0"/>
-                <a:ea typeface="Consolas" pitchFamily="34" charset="-122"/>
-                <a:cs typeface="Consolas" pitchFamily="34" charset="-120"/>
-              </a:rPr>
-              <a:t>text</a:t>
-            </a:r>
-            <a:pPr indent="0" marL="0">
-              <a:buNone/>
-            </a:pPr>
-            <a:r>
-              <a:rPr lang="en-US" sz="1100" dirty="0">
-                <a:solidFill>
-                  <a:srgbClr val="B8B5D9"/>
-                </a:solidFill>
-                <a:latin typeface="Consolas" pitchFamily="34" charset="0"/>
-                <a:ea typeface="Consolas" pitchFamily="34" charset="-122"/>
-                <a:cs typeface="Consolas" pitchFamily="34" charset="-120"/>
-              </a:rPr>
-              <a:t>,</a:t>
-            </a:r>
-            <a:pPr indent="0" marL="0">
-              <a:buNone/>
-            </a:pPr>
-            <a:r>
-              <a:rPr lang="en-US" sz="1100" dirty="0">
-                <a:solidFill>
-                  <a:srgbClr val="FAF8FF"/>
-                </a:solidFill>
-                <a:latin typeface="Consolas" pitchFamily="34" charset="0"/>
-                <a:ea typeface="Consolas" pitchFamily="34" charset="-122"/>
-                <a:cs typeface="Consolas" pitchFamily="34" charset="-120"/>
-              </a:rPr>
-              <a:t> </a:t>
-            </a:r>
-            <a:pPr indent="0" marL="0">
-              <a:buNone/>
-            </a:pPr>
-            <a:r>
-              <a:rPr lang="en-US" sz="1100" dirty="0">
-                <a:solidFill>
-                  <a:srgbClr val="FAF8FF"/>
-                </a:solidFill>
-                <a:latin typeface="Consolas" pitchFamily="34" charset="0"/>
-                <a:ea typeface="Consolas" pitchFamily="34" charset="-122"/>
-                <a:cs typeface="Consolas" pitchFamily="34" charset="-120"/>
-              </a:rPr>
-              <a:t>topK</a:t>
-            </a:r>
-            <a:pPr indent="0" marL="0">
-              <a:buNone/>
-            </a:pPr>
-            <a:r>
-              <a:rPr lang="en-US" sz="1100" dirty="0">
-                <a:solidFill>
-                  <a:srgbClr val="B8B5D9"/>
-                </a:solidFill>
-                <a:latin typeface="Consolas" pitchFamily="34" charset="0"/>
-                <a:ea typeface="Consolas" pitchFamily="34" charset="-122"/>
-                <a:cs typeface="Consolas" pitchFamily="34" charset="-120"/>
-              </a:rPr>
-              <a:t>:</a:t>
-            </a:r>
-            <a:pPr indent="0" marL="0">
-              <a:buNone/>
-            </a:pPr>
-            <a:r>
-              <a:rPr lang="en-US" sz="1100" dirty="0">
-                <a:solidFill>
-                  <a:srgbClr val="FAF8FF"/>
-                </a:solidFill>
-                <a:latin typeface="Consolas" pitchFamily="34" charset="0"/>
-                <a:ea typeface="Consolas" pitchFamily="34" charset="-122"/>
-                <a:cs typeface="Consolas" pitchFamily="34" charset="-120"/>
-              </a:rPr>
-              <a:t> </a:t>
-            </a:r>
-            <a:pPr indent="0" marL="0">
-              <a:buNone/>
-            </a:pPr>
-            <a:r>
-              <a:rPr lang="en-US" sz="1100" dirty="0">
-                <a:solidFill>
-                  <a:srgbClr val="F472B6"/>
-                </a:solidFill>
-                <a:latin typeface="Consolas" pitchFamily="34" charset="0"/>
-                <a:ea typeface="Consolas" pitchFamily="34" charset="-122"/>
-                <a:cs typeface="Consolas" pitchFamily="34" charset="-120"/>
-              </a:rPr>
-              <a:t>3</a:t>
-            </a:r>
-            <a:pPr indent="0" marL="0">
-              <a:buNone/>
-            </a:pPr>
-            <a:r>
-              <a:rPr lang="en-US" sz="1100" dirty="0">
-                <a:solidFill>
-                  <a:srgbClr val="B8B5D9"/>
-                </a:solidFill>
-                <a:latin typeface="Consolas" pitchFamily="34" charset="0"/>
-                <a:ea typeface="Consolas" pitchFamily="34" charset="-122"/>
-                <a:cs typeface="Consolas" pitchFamily="34" charset="-120"/>
-              </a:rPr>
-              <a:t>,</a:t>
-            </a:r>
-            <a:pPr indent="0" marL="0">
-              <a:buNone/>
-            </a:pPr>
-            <a:r>
-              <a:rPr lang="en-US" sz="1100" dirty="0">
-                <a:solidFill>
-                  <a:srgbClr val="FAF8FF"/>
-                </a:solidFill>
-                <a:latin typeface="Consolas" pitchFamily="34" charset="0"/>
-                <a:ea typeface="Consolas" pitchFamily="34" charset="-122"/>
-                <a:cs typeface="Consolas" pitchFamily="34" charset="-120"/>
-              </a:rPr>
-              <a:t> ct</a:t>
-            </a:r>
-            <a:pPr indent="0" marL="0">
-              <a:buNone/>
-            </a:pPr>
-            <a:r>
-              <a:rPr lang="en-US" sz="1100" dirty="0">
-                <a:solidFill>
-                  <a:srgbClr val="B8B5D9"/>
-                </a:solidFill>
-                <a:latin typeface="Consolas" pitchFamily="34" charset="0"/>
-                <a:ea typeface="Consolas" pitchFamily="34" charset="-122"/>
-                <a:cs typeface="Consolas" pitchFamily="34" charset="-120"/>
-              </a:rPr>
-              <a:t>)</a:t>
-            </a:r>
-            <a:pPr indent="0" marL="0">
-              <a:buNone/>
-            </a:pPr>
-            <a:r>
-              <a:rPr lang="en-US" sz="1100" dirty="0">
-                <a:solidFill>
-                  <a:srgbClr val="B8B5D9"/>
-                </a:solidFill>
-                <a:latin typeface="Consolas" pitchFamily="34" charset="0"/>
-                <a:ea typeface="Consolas" pitchFamily="34" charset="-122"/>
-                <a:cs typeface="Consolas" pitchFamily="34" charset="-120"/>
-              </a:rPr>
-              <a:t>)</a:t>
-            </a:r>
-            <a:pPr indent="0" marL="0">
-              <a:buNone/>
-            </a:pPr>
-            <a:endParaRPr lang="en-US" sz="1100" dirty="0"/>
-          </a:p>
-          <a:p>
-            <a:pPr indent="0" marL="0">
-              <a:buNone/>
-            </a:pPr>
-            <a:r>
-              <a:rPr lang="en-US" sz="1100" dirty="0">
-                <a:solidFill>
-                  <a:srgbClr val="FAF8FF"/>
-                </a:solidFill>
-                <a:latin typeface="Consolas" pitchFamily="34" charset="0"/>
-                <a:ea typeface="Consolas" pitchFamily="34" charset="-122"/>
-                <a:cs typeface="Consolas" pitchFamily="34" charset="-120"/>
-              </a:rPr>
-              <a:t>                </a:t>
-            </a:r>
-            <a:pPr indent="0" marL="0">
-              <a:buNone/>
-            </a:pPr>
-            <a:r>
-              <a:rPr lang="en-US" sz="1100" dirty="0">
-                <a:solidFill>
-                  <a:srgbClr val="B8B5D9"/>
-                </a:solidFill>
-                <a:latin typeface="Consolas" pitchFamily="34" charset="0"/>
-                <a:ea typeface="Consolas" pitchFamily="34" charset="-122"/>
-                <a:cs typeface="Consolas" pitchFamily="34" charset="-120"/>
-              </a:rPr>
-              <a:t>.</a:t>
-            </a:r>
-            <a:pPr indent="0" marL="0">
-              <a:buNone/>
-            </a:pPr>
-            <a:r>
-              <a:rPr lang="en-US" sz="1100" dirty="0">
-                <a:solidFill>
-                  <a:srgbClr val="86EFAC"/>
-                </a:solidFill>
-                <a:latin typeface="Consolas" pitchFamily="34" charset="0"/>
-                <a:ea typeface="Consolas" pitchFamily="34" charset="-122"/>
-                <a:cs typeface="Consolas" pitchFamily="34" charset="-120"/>
-              </a:rPr>
-              <a:t>Select</a:t>
-            </a:r>
-            <a:pPr indent="0" marL="0">
-              <a:buNone/>
-            </a:pPr>
-            <a:r>
-              <a:rPr lang="en-US" sz="1100" dirty="0">
-                <a:solidFill>
-                  <a:srgbClr val="B8B5D9"/>
-                </a:solidFill>
-                <a:latin typeface="Consolas" pitchFamily="34" charset="0"/>
-                <a:ea typeface="Consolas" pitchFamily="34" charset="-122"/>
-                <a:cs typeface="Consolas" pitchFamily="34" charset="-120"/>
-              </a:rPr>
-              <a:t>(</a:t>
-            </a:r>
-            <a:pPr indent="0" marL="0">
-              <a:buNone/>
-            </a:pPr>
-            <a:r>
-              <a:rPr lang="en-US" sz="1100" dirty="0">
-                <a:solidFill>
-                  <a:srgbClr val="FAF8FF"/>
-                </a:solidFill>
-                <a:latin typeface="Consolas" pitchFamily="34" charset="0"/>
-                <a:ea typeface="Consolas" pitchFamily="34" charset="-122"/>
-                <a:cs typeface="Consolas" pitchFamily="34" charset="-120"/>
-              </a:rPr>
-              <a:t>r </a:t>
-            </a:r>
-            <a:pPr indent="0" marL="0">
-              <a:buNone/>
-            </a:pPr>
-            <a:r>
-              <a:rPr lang="en-US" sz="1100" dirty="0">
-                <a:solidFill>
-                  <a:srgbClr val="CFCBED"/>
-                </a:solidFill>
-                <a:latin typeface="Consolas" pitchFamily="34" charset="0"/>
-                <a:ea typeface="Consolas" pitchFamily="34" charset="-122"/>
-                <a:cs typeface="Consolas" pitchFamily="34" charset="-120"/>
-              </a:rPr>
-              <a:t>=&gt;</a:t>
-            </a:r>
-            <a:pPr indent="0" marL="0">
-              <a:buNone/>
-            </a:pPr>
-            <a:r>
-              <a:rPr lang="en-US" sz="1100" dirty="0">
-                <a:solidFill>
-                  <a:srgbClr val="FAF8FF"/>
-                </a:solidFill>
-                <a:latin typeface="Consolas" pitchFamily="34" charset="0"/>
-                <a:ea typeface="Consolas" pitchFamily="34" charset="-122"/>
-                <a:cs typeface="Consolas" pitchFamily="34" charset="-120"/>
-              </a:rPr>
-              <a:t> </a:t>
-            </a:r>
-            <a:pPr indent="0" marL="0">
-              <a:buNone/>
-            </a:pPr>
-            <a:r>
-              <a:rPr lang="en-US" sz="1100" dirty="0">
-                <a:solidFill>
-                  <a:srgbClr val="FB7185"/>
-                </a:solidFill>
-                <a:latin typeface="Consolas" pitchFamily="34" charset="0"/>
-                <a:ea typeface="Consolas" pitchFamily="34" charset="-122"/>
-                <a:cs typeface="Consolas" pitchFamily="34" charset="-120"/>
-              </a:rPr>
-              <a:t>new</a:t>
-            </a:r>
-            <a:pPr indent="0" marL="0">
-              <a:buNone/>
-            </a:pPr>
-            <a:r>
-              <a:rPr lang="en-US" sz="1100" dirty="0">
-                <a:solidFill>
-                  <a:srgbClr val="FAF8FF"/>
-                </a:solidFill>
-                <a:latin typeface="Consolas" pitchFamily="34" charset="0"/>
-                <a:ea typeface="Consolas" pitchFamily="34" charset="-122"/>
-                <a:cs typeface="Consolas" pitchFamily="34" charset="-120"/>
-              </a:rPr>
-              <a:t> </a:t>
-            </a:r>
-            <a:pPr indent="0" marL="0">
-              <a:buNone/>
-            </a:pPr>
-            <a:r>
-              <a:rPr lang="en-US" sz="1100" dirty="0">
-                <a:solidFill>
-                  <a:srgbClr val="FAF8FF"/>
-                </a:solidFill>
-                <a:latin typeface="Consolas" pitchFamily="34" charset="0"/>
-                <a:ea typeface="Consolas" pitchFamily="34" charset="-122"/>
-                <a:cs typeface="Consolas" pitchFamily="34" charset="-120"/>
-              </a:rPr>
-              <a:t>TextSearchProvider</a:t>
-            </a:r>
-            <a:pPr indent="0" marL="0">
-              <a:buNone/>
-            </a:pPr>
-            <a:r>
-              <a:rPr lang="en-US" sz="1100" dirty="0">
-                <a:solidFill>
-                  <a:srgbClr val="B8B5D9"/>
-                </a:solidFill>
-                <a:latin typeface="Consolas" pitchFamily="34" charset="0"/>
-                <a:ea typeface="Consolas" pitchFamily="34" charset="-122"/>
-                <a:cs typeface="Consolas" pitchFamily="34" charset="-120"/>
-              </a:rPr>
-              <a:t>.</a:t>
-            </a:r>
-            <a:pPr indent="0" marL="0">
-              <a:buNone/>
-            </a:pPr>
-            <a:r>
-              <a:rPr lang="en-US" sz="1100" dirty="0">
-                <a:solidFill>
-                  <a:srgbClr val="FAF8FF"/>
-                </a:solidFill>
-                <a:latin typeface="Consolas" pitchFamily="34" charset="0"/>
-                <a:ea typeface="Consolas" pitchFamily="34" charset="-122"/>
-                <a:cs typeface="Consolas" pitchFamily="34" charset="-120"/>
-              </a:rPr>
-              <a:t>TextSearchResult</a:t>
-            </a:r>
-            <a:pPr indent="0" marL="0">
-              <a:buNone/>
-            </a:pPr>
-            <a:endParaRPr lang="en-US" sz="1100" dirty="0"/>
-          </a:p>
-          <a:p>
-            <a:pPr indent="0" marL="0">
-              <a:buNone/>
-            </a:pPr>
-            <a:r>
-              <a:rPr lang="en-US" sz="1100" dirty="0">
-                <a:solidFill>
-                  <a:srgbClr val="FAF8FF"/>
-                </a:solidFill>
-                <a:latin typeface="Consolas" pitchFamily="34" charset="0"/>
-                <a:ea typeface="Consolas" pitchFamily="34" charset="-122"/>
-                <a:cs typeface="Consolas" pitchFamily="34" charset="-120"/>
-              </a:rPr>
-              <a:t>                    </a:t>
-            </a:r>
-            <a:pPr indent="0" marL="0">
-              <a:buNone/>
-            </a:pPr>
-            <a:r>
-              <a:rPr lang="en-US" sz="1100" dirty="0">
-                <a:solidFill>
-                  <a:srgbClr val="B8B5D9"/>
-                </a:solidFill>
-                <a:latin typeface="Consolas" pitchFamily="34" charset="0"/>
-                <a:ea typeface="Consolas" pitchFamily="34" charset="-122"/>
-                <a:cs typeface="Consolas" pitchFamily="34" charset="-120"/>
-              </a:rPr>
-              <a:t>{</a:t>
-            </a:r>
-            <a:pPr indent="0" marL="0">
-              <a:buNone/>
-            </a:pPr>
-            <a:r>
-              <a:rPr lang="en-US" sz="1100" dirty="0">
-                <a:solidFill>
-                  <a:srgbClr val="FAF8FF"/>
-                </a:solidFill>
-                <a:latin typeface="Consolas" pitchFamily="34" charset="0"/>
-                <a:ea typeface="Consolas" pitchFamily="34" charset="-122"/>
-                <a:cs typeface="Consolas" pitchFamily="34" charset="-120"/>
-              </a:rPr>
-              <a:t> SourceName </a:t>
-            </a:r>
-            <a:pPr indent="0" marL="0">
-              <a:buNone/>
-            </a:pPr>
-            <a:r>
-              <a:rPr lang="en-US" sz="1100" dirty="0">
-                <a:solidFill>
-                  <a:srgbClr val="CFCBED"/>
-                </a:solidFill>
-                <a:latin typeface="Consolas" pitchFamily="34" charset="0"/>
-                <a:ea typeface="Consolas" pitchFamily="34" charset="-122"/>
-                <a:cs typeface="Consolas" pitchFamily="34" charset="-120"/>
-              </a:rPr>
-              <a:t>=</a:t>
-            </a:r>
-            <a:pPr indent="0" marL="0">
-              <a:buNone/>
-            </a:pPr>
-            <a:r>
-              <a:rPr lang="en-US" sz="1100" dirty="0">
-                <a:solidFill>
-                  <a:srgbClr val="FAF8FF"/>
-                </a:solidFill>
-                <a:latin typeface="Consolas" pitchFamily="34" charset="0"/>
-                <a:ea typeface="Consolas" pitchFamily="34" charset="-122"/>
-                <a:cs typeface="Consolas" pitchFamily="34" charset="-120"/>
-              </a:rPr>
-              <a:t> r</a:t>
-            </a:r>
-            <a:pPr indent="0" marL="0">
-              <a:buNone/>
-            </a:pPr>
-            <a:r>
-              <a:rPr lang="en-US" sz="1100" dirty="0">
-                <a:solidFill>
-                  <a:srgbClr val="B8B5D9"/>
-                </a:solidFill>
-                <a:latin typeface="Consolas" pitchFamily="34" charset="0"/>
-                <a:ea typeface="Consolas" pitchFamily="34" charset="-122"/>
-                <a:cs typeface="Consolas" pitchFamily="34" charset="-120"/>
-              </a:rPr>
-              <a:t>.</a:t>
-            </a:r>
-            <a:pPr indent="0" marL="0">
-              <a:buNone/>
-            </a:pPr>
-            <a:r>
-              <a:rPr lang="en-US" sz="1100" dirty="0">
-                <a:solidFill>
-                  <a:srgbClr val="FAF8FF"/>
-                </a:solidFill>
-                <a:latin typeface="Consolas" pitchFamily="34" charset="0"/>
-                <a:ea typeface="Consolas" pitchFamily="34" charset="-122"/>
-                <a:cs typeface="Consolas" pitchFamily="34" charset="-120"/>
-              </a:rPr>
-              <a:t>Name</a:t>
-            </a:r>
-            <a:pPr indent="0" marL="0">
-              <a:buNone/>
-            </a:pPr>
-            <a:r>
-              <a:rPr lang="en-US" sz="1100" dirty="0">
-                <a:solidFill>
-                  <a:srgbClr val="B8B5D9"/>
-                </a:solidFill>
-                <a:latin typeface="Consolas" pitchFamily="34" charset="0"/>
-                <a:ea typeface="Consolas" pitchFamily="34" charset="-122"/>
-                <a:cs typeface="Consolas" pitchFamily="34" charset="-120"/>
-              </a:rPr>
-              <a:t>,</a:t>
-            </a:r>
-            <a:pPr indent="0" marL="0">
-              <a:buNone/>
-            </a:pPr>
-            <a:r>
-              <a:rPr lang="en-US" sz="1100" dirty="0">
-                <a:solidFill>
-                  <a:srgbClr val="FAF8FF"/>
-                </a:solidFill>
-                <a:latin typeface="Consolas" pitchFamily="34" charset="0"/>
-                <a:ea typeface="Consolas" pitchFamily="34" charset="-122"/>
-                <a:cs typeface="Consolas" pitchFamily="34" charset="-120"/>
-              </a:rPr>
-              <a:t> Text </a:t>
-            </a:r>
-            <a:pPr indent="0" marL="0">
-              <a:buNone/>
-            </a:pPr>
-            <a:r>
-              <a:rPr lang="en-US" sz="1100" dirty="0">
-                <a:solidFill>
-                  <a:srgbClr val="CFCBED"/>
-                </a:solidFill>
-                <a:latin typeface="Consolas" pitchFamily="34" charset="0"/>
-                <a:ea typeface="Consolas" pitchFamily="34" charset="-122"/>
-                <a:cs typeface="Consolas" pitchFamily="34" charset="-120"/>
-              </a:rPr>
-              <a:t>=</a:t>
-            </a:r>
-            <a:pPr indent="0" marL="0">
-              <a:buNone/>
-            </a:pPr>
-            <a:r>
-              <a:rPr lang="en-US" sz="1100" dirty="0">
-                <a:solidFill>
-                  <a:srgbClr val="FAF8FF"/>
-                </a:solidFill>
-                <a:latin typeface="Consolas" pitchFamily="34" charset="0"/>
-                <a:ea typeface="Consolas" pitchFamily="34" charset="-122"/>
-                <a:cs typeface="Consolas" pitchFamily="34" charset="-120"/>
-              </a:rPr>
-              <a:t> r</a:t>
-            </a:r>
-            <a:pPr indent="0" marL="0">
-              <a:buNone/>
-            </a:pPr>
-            <a:r>
-              <a:rPr lang="en-US" sz="1100" dirty="0">
-                <a:solidFill>
-                  <a:srgbClr val="B8B5D9"/>
-                </a:solidFill>
-                <a:latin typeface="Consolas" pitchFamily="34" charset="0"/>
-                <a:ea typeface="Consolas" pitchFamily="34" charset="-122"/>
-                <a:cs typeface="Consolas" pitchFamily="34" charset="-120"/>
-              </a:rPr>
-              <a:t>.</a:t>
-            </a:r>
-            <a:pPr indent="0" marL="0">
-              <a:buNone/>
-            </a:pPr>
-            <a:r>
-              <a:rPr lang="en-US" sz="1100" dirty="0">
-                <a:solidFill>
-                  <a:srgbClr val="FAF8FF"/>
-                </a:solidFill>
-                <a:latin typeface="Consolas" pitchFamily="34" charset="0"/>
-                <a:ea typeface="Consolas" pitchFamily="34" charset="-122"/>
-                <a:cs typeface="Consolas" pitchFamily="34" charset="-120"/>
-              </a:rPr>
-              <a:t>Text </a:t>
-            </a:r>
-            <a:pPr indent="0" marL="0">
-              <a:buNone/>
-            </a:pPr>
-            <a:r>
-              <a:rPr lang="en-US" sz="1100" dirty="0">
-                <a:solidFill>
-                  <a:srgbClr val="B8B5D9"/>
-                </a:solidFill>
-                <a:latin typeface="Consolas" pitchFamily="34" charset="0"/>
-                <a:ea typeface="Consolas" pitchFamily="34" charset="-122"/>
-                <a:cs typeface="Consolas" pitchFamily="34" charset="-120"/>
-              </a:rPr>
               <a:t>}</a:t>
-            </a:r>
-            <a:pPr indent="0" marL="0">
-              <a:buNone/>
-            </a:pPr>
-            <a:r>
-              <a:rPr lang="en-US" sz="1100" dirty="0">
-                <a:solidFill>
-                  <a:srgbClr val="B8B5D9"/>
-                </a:solidFill>
-                <a:latin typeface="Consolas" pitchFamily="34" charset="0"/>
-                <a:ea typeface="Consolas" pitchFamily="34" charset="-122"/>
-                <a:cs typeface="Consolas" pitchFamily="34" charset="-120"/>
-              </a:rPr>
-              <a:t>)</a:t>
             </a:r>
             <a:pPr indent="0" marL="0">
               <a:buNone/>
@@ -20254,22 +20282,126 @@
             <a:pPr indent="0" marL="0">
               <a:buNone/>
             </a:pPr>
+            <a:r>
+              <a:rPr lang="en-US" sz="1300" dirty="0">
+                <a:solidFill>
+                  <a:srgbClr val="FAF8FF"/>
+                </a:solidFill>
+                <a:latin typeface="Consolas" pitchFamily="34" charset="0"/>
+                <a:ea typeface="Consolas" pitchFamily="34" charset="-122"/>
+                <a:cs typeface="Consolas" pitchFamily="34" charset="-120"/>
+              </a:rPr>
+              <a:t>azureBase</a:t>
+            </a:r>
+            <a:pPr indent="0" marL="0">
+              <a:buNone/>
+            </a:pPr>
+            <a:r>
+              <a:rPr lang="en-US" sz="1300" dirty="0">
+                <a:solidFill>
+                  <a:srgbClr val="B8B5D9"/>
+                </a:solidFill>
+                <a:latin typeface="Consolas" pitchFamily="34" charset="0"/>
+                <a:ea typeface="Consolas" pitchFamily="34" charset="-122"/>
+                <a:cs typeface="Consolas" pitchFamily="34" charset="-120"/>
+              </a:rPr>
+              <a:t>,</a:t>
+            </a:r>
+            <a:pPr indent="0" marL="0">
+              <a:buNone/>
+            </a:pPr>
+            <a:r>
+              <a:rPr lang="en-US" sz="1300" dirty="0">
+                <a:solidFill>
+                  <a:srgbClr val="FAF8FF"/>
+                </a:solidFill>
+                <a:latin typeface="Consolas" pitchFamily="34" charset="0"/>
+                <a:ea typeface="Consolas" pitchFamily="34" charset="-122"/>
+                <a:cs typeface="Consolas" pitchFamily="34" charset="-120"/>
+              </a:rPr>
+              <a:t> </a:t>
+            </a:r>
+            <a:pPr indent="0" marL="0">
+              <a:buNone/>
+            </a:pPr>
+            <a:r>
+              <a:rPr lang="en-US" sz="1300" dirty="0">
+                <a:solidFill>
+                  <a:srgbClr val="FBBF24"/>
+                </a:solidFill>
+                <a:latin typeface="Consolas" pitchFamily="34" charset="0"/>
+                <a:ea typeface="Consolas" pitchFamily="34" charset="-122"/>
+                <a:cs typeface="Consolas" pitchFamily="34" charset="-120"/>
+              </a:rPr>
+              <a:t>"/openai/v1"</a:t>
+            </a:r>
+            <a:pPr indent="0" marL="0">
+              <a:buNone/>
+            </a:pPr>
+            <a:r>
+              <a:rPr lang="en-US" sz="1300" dirty="0">
+                <a:solidFill>
+                  <a:srgbClr val="B8B5D9"/>
+                </a:solidFill>
+                <a:latin typeface="Consolas" pitchFamily="34" charset="0"/>
+                <a:ea typeface="Consolas" pitchFamily="34" charset="-122"/>
+                <a:cs typeface="Consolas" pitchFamily="34" charset="-120"/>
+              </a:rPr>
+              <a:t>)</a:t>
+            </a:r>
+            <a:pPr indent="0" marL="0">
+              <a:buNone/>
+            </a:pPr>
+            <a:r>
+              <a:rPr lang="en-US" sz="1300" dirty="0">
+                <a:solidFill>
+                  <a:srgbClr val="B8B5D9"/>
+                </a:solidFill>
+                <a:latin typeface="Consolas" pitchFamily="34" charset="0"/>
+                <a:ea typeface="Consolas" pitchFamily="34" charset="-122"/>
+                <a:cs typeface="Consolas" pitchFamily="34" charset="-120"/>
+              </a:rPr>
+              <a:t>;</a:t>
+            </a:r>
+            <a:pPr indent="0" marL="0">
+              <a:buNone/>
+            </a:pPr>
             <a:endParaRPr lang="en-US" sz="1300" dirty="0"/>
           </a:p>
           <a:p>
             <a:pPr indent="0" marL="0">
               <a:buNone/>
             </a:pPr>
+            <a:endParaRPr lang="en-US" sz="1300" dirty="0"/>
+          </a:p>
+          <a:p>
+            <a:pPr indent="0" marL="0">
+              <a:buNone/>
+            </a:pPr>
             <a:r>
               <a:rPr lang="en-US" sz="1300" dirty="0">
                 <a:solidFill>
+                  <a:srgbClr val="A78BFA"/>
+                </a:solidFill>
+                <a:latin typeface="Consolas" pitchFamily="34" charset="0"/>
+                <a:ea typeface="Consolas" pitchFamily="34" charset="-122"/>
+                <a:cs typeface="Consolas" pitchFamily="34" charset="-120"/>
+              </a:rPr>
+              <a:t>IChatClient</a:t>
+            </a:r>
+            <a:pPr indent="0" marL="0">
+              <a:buNone/>
+            </a:pPr>
+            <a:r>
+              <a:rPr lang="en-US" sz="1300" dirty="0">
+                <a:solidFill>
                   <a:srgbClr val="FAF8FF"/>
                 </a:solidFill>
                 <a:latin typeface="Consolas" pitchFamily="34" charset="0"/>
                 <a:ea typeface="Consolas" pitchFamily="34" charset="-122"/>
                 <a:cs typeface="Consolas" pitchFamily="34" charset="-120"/>
               </a:rPr>
-              <a:t>    </a:t>
+              <a:t> chat </a:t>
             </a:r>
             <a:pPr indent="0" marL="0">
               <a:buNone/>
@@ -20277,6 +20409,34 @@
             <a:r>
               <a:rPr lang="en-US" sz="1300" dirty="0">
                 <a:solidFill>
+                  <a:srgbClr val="CFCBED"/>
+                </a:solidFill>
+                <a:latin typeface="Consolas" pitchFamily="34" charset="0"/>
+                <a:ea typeface="Consolas" pitchFamily="34" charset="-122"/>
+                <a:cs typeface="Consolas" pitchFamily="34" charset="-120"/>
+              </a:rPr>
+              <a:t>=</a:t>
+            </a:r>
+            <a:pPr indent="0" marL="0">
+              <a:buNone/>
+            </a:pPr>
+            <a:r>
+              <a:rPr lang="en-US" sz="1300" dirty="0">
+                <a:solidFill>
+                  <a:srgbClr val="FAF8FF"/>
+                </a:solidFill>
+                <a:latin typeface="Consolas" pitchFamily="34" charset="0"/>
+                <a:ea typeface="Consolas" pitchFamily="34" charset="-122"/>
+                <a:cs typeface="Consolas" pitchFamily="34" charset="-120"/>
+              </a:rPr>
+              <a:t> </a:t>
+            </a:r>
+            <a:pPr indent="0" marL="0">
+              <a:buNone/>
+            </a:pPr>
+            <a:r>
+              <a:rPr lang="en-US" sz="1300" dirty="0">
+                <a:solidFill>
                   <a:srgbClr val="FB7185"/>
                 </a:solidFill>
                 <a:latin typeface="Consolas" pitchFamily="34" charset="0"/>
@@ -20311,7 +20471,7 @@
                 <a:ea typeface="Consolas" pitchFamily="34" charset="-122"/>
                 <a:cs typeface="Consolas" pitchFamily="34" charset="-120"/>
               </a:rPr>
-              <a:t>Uri</a:t>
+              <a:t>ChatClient</a:t>
             </a:r>
             <a:pPr indent="0" marL="0">
               <a:buNone/>
@@ -20330,6 +20490,12 @@
             <a:pPr indent="0" marL="0">
               <a:buNone/>
             </a:pPr>
+            <a:endParaRPr lang="en-US" sz="1300" dirty="0"/>
+          </a:p>
+          <a:p>
+            <a:pPr indent="0" marL="0">
+              <a:buNone/>
+            </a:pPr>
             <a:r>
               <a:rPr lang="en-US" sz="1300" dirty="0">
                 <a:solidFill>
@@ -20339,7 +20505,7 @@
                 <a:ea typeface="Consolas" pitchFamily="34" charset="-122"/>
                 <a:cs typeface="Consolas" pitchFamily="34" charset="-120"/>
               </a:rPr>
-              <a:t>config</a:t>
+              <a:t>        </a:t>
             </a:r>
             <a:pPr indent="0" marL="0">
               <a:buNone/>
@@ -20347,13 +20513,27 @@
             <a:r>
               <a:rPr lang="en-US" sz="1300" dirty="0">
                 <a:solidFill>
+                  <a:srgbClr val="FAF8FF"/>
+                </a:solidFill>
+                <a:latin typeface="Consolas" pitchFamily="34" charset="0"/>
+                <a:ea typeface="Consolas" pitchFamily="34" charset="-122"/>
+                <a:cs typeface="Consolas" pitchFamily="34" charset="-120"/>
+              </a:rPr>
+              <a:t>model</a:t>
+            </a:r>
+            <a:pPr indent="0" marL="0">
+              <a:buNone/>
+            </a:pPr>
+            <a:r>
+              <a:rPr lang="en-US" sz="1300" dirty="0">
+                <a:solidFill>
                   <a:srgbClr val="B8B5D9"/>
                 </a:solidFill>
                 <a:latin typeface="Consolas" pitchFamily="34" charset="0"/>
                 <a:ea typeface="Consolas" pitchFamily="34" charset="-122"/>
                 <a:cs typeface="Consolas" pitchFamily="34" charset="-120"/>
               </a:rPr>
-              <a:t>[</a:t>
+              <a:t>:</a:t>
             </a:r>
             <a:pPr indent="0" marL="0">
               <a:buNone/>
@@ -20361,13 +20541,27 @@
             <a:r>
               <a:rPr lang="en-US" sz="1300" dirty="0">
                 <a:solidFill>
+                  <a:srgbClr val="FAF8FF"/>
+                </a:solidFill>
+                <a:latin typeface="Consolas" pitchFamily="34" charset="0"/>
+                <a:ea typeface="Consolas" pitchFamily="34" charset="-122"/>
+                <a:cs typeface="Consolas" pitchFamily="34" charset="-120"/>
+              </a:rPr>
+              <a:t> </a:t>
+            </a:r>
+            <a:pPr indent="0" marL="0">
+              <a:buNone/>
+            </a:pPr>
+            <a:r>
+              <a:rPr lang="en-US" sz="1300" dirty="0">
+                <a:solidFill>
                   <a:srgbClr val="FBBF24"/>
                 </a:solidFill>
                 <a:latin typeface="Consolas" pitchFamily="34" charset="0"/>
                 <a:ea typeface="Consolas" pitchFamily="34" charset="-122"/>
                 <a:cs typeface="Consolas" pitchFamily="34" charset="-120"/>
               </a:rPr>
-              <a:t>"AzureOpenAI:Endpoint"</a:t>
+              <a:t>"gpt-4.1"</a:t>
             </a:r>
             <a:pPr indent="0" marL="0">
               <a:buNone/>
@@ -20381,21 +20575,27 @@
                 <a:ea typeface="Consolas" pitchFamily="34" charset="-122"/>
                 <a:cs typeface="Consolas" pitchFamily="34" charset="-120"/>
               </a:rPr>
-              <a:t>]</a:t>
-            </a:r>
+              <a:t>,</a:t>
+            </a:r>
+            <a:pPr indent="0" marL="0">
+              <a:buNone/>
+            </a:pPr>
+            <a:endParaRPr lang="en-US" sz="1300" dirty="0"/>
+          </a:p>
+          <a:p>
             <a:pPr indent="0" marL="0">
               <a:buNone/>
             </a:pPr>
             <a:r>
               <a:rPr lang="en-US" sz="1300" dirty="0">
                 <a:solidFill>
-                  <a:srgbClr val="CFCBED"/>
-                </a:solidFill>
-                <a:latin typeface="Consolas" pitchFamily="34" charset="0"/>
-                <a:ea typeface="Consolas" pitchFamily="34" charset="-122"/>
-                <a:cs typeface="Consolas" pitchFamily="34" charset="-120"/>
-              </a:rPr>
-              <a:t>!</a:t>
+                  <a:srgbClr val="FAF8FF"/>
+                </a:solidFill>
+                <a:latin typeface="Consolas" pitchFamily="34" charset="0"/>
+                <a:ea typeface="Consolas" pitchFamily="34" charset="-122"/>
+                <a:cs typeface="Consolas" pitchFamily="34" charset="-120"/>
+              </a:rPr>
+              <a:t>        </a:t>
             </a:r>
             <a:pPr indent="0" marL="0">
               <a:buNone/>
@@ -20403,12 +20603,124 @@
             <a:r>
               <a:rPr lang="en-US" sz="1300" dirty="0">
                 <a:solidFill>
+                  <a:srgbClr val="FAF8FF"/>
+                </a:solidFill>
+                <a:latin typeface="Consolas" pitchFamily="34" charset="0"/>
+                <a:ea typeface="Consolas" pitchFamily="34" charset="-122"/>
+                <a:cs typeface="Consolas" pitchFamily="34" charset="-120"/>
+              </a:rPr>
+              <a:t>credential</a:t>
+            </a:r>
+            <a:pPr indent="0" marL="0">
+              <a:buNone/>
+            </a:pPr>
+            <a:r>
+              <a:rPr lang="en-US" sz="1300" dirty="0">
+                <a:solidFill>
                   <a:srgbClr val="B8B5D9"/>
                 </a:solidFill>
                 <a:latin typeface="Consolas" pitchFamily="34" charset="0"/>
                 <a:ea typeface="Consolas" pitchFamily="34" charset="-122"/>
                 <a:cs typeface="Consolas" pitchFamily="34" charset="-120"/>
               </a:rPr>
+              <a:t>:</a:t>
+            </a:r>
+            <a:pPr indent="0" marL="0">
+              <a:buNone/>
+            </a:pPr>
+            <a:r>
+              <a:rPr lang="en-US" sz="1300" dirty="0">
+                <a:solidFill>
+                  <a:srgbClr val="FAF8FF"/>
+                </a:solidFill>
+                <a:latin typeface="Consolas" pitchFamily="34" charset="0"/>
+                <a:ea typeface="Consolas" pitchFamily="34" charset="-122"/>
+                <a:cs typeface="Consolas" pitchFamily="34" charset="-120"/>
+              </a:rPr>
+              <a:t> </a:t>
+            </a:r>
+            <a:pPr indent="0" marL="0">
+              <a:buNone/>
+            </a:pPr>
+            <a:r>
+              <a:rPr lang="en-US" sz="1300" dirty="0">
+                <a:solidFill>
+                  <a:srgbClr val="FB7185"/>
+                </a:solidFill>
+                <a:latin typeface="Consolas" pitchFamily="34" charset="0"/>
+                <a:ea typeface="Consolas" pitchFamily="34" charset="-122"/>
+                <a:cs typeface="Consolas" pitchFamily="34" charset="-120"/>
+              </a:rPr>
+              <a:t>new</a:t>
+            </a:r>
+            <a:pPr indent="0" marL="0">
+              <a:buNone/>
+            </a:pPr>
+            <a:r>
+              <a:rPr lang="en-US" sz="1300" dirty="0">
+                <a:solidFill>
+                  <a:srgbClr val="FAF8FF"/>
+                </a:solidFill>
+                <a:latin typeface="Consolas" pitchFamily="34" charset="0"/>
+                <a:ea typeface="Consolas" pitchFamily="34" charset="-122"/>
+                <a:cs typeface="Consolas" pitchFamily="34" charset="-120"/>
+              </a:rPr>
+              <a:t> </a:t>
+            </a:r>
+            <a:pPr indent="0" marL="0">
+              <a:buNone/>
+            </a:pPr>
+            <a:r>
+              <a:rPr lang="en-US" sz="1300" dirty="0">
+                <a:solidFill>
+                  <a:srgbClr val="FAF8FF"/>
+                </a:solidFill>
+                <a:latin typeface="Consolas" pitchFamily="34" charset="0"/>
+                <a:ea typeface="Consolas" pitchFamily="34" charset="-122"/>
+                <a:cs typeface="Consolas" pitchFamily="34" charset="-120"/>
+              </a:rPr>
+              <a:t>ApiKeyCredential</a:t>
+            </a:r>
+            <a:pPr indent="0" marL="0">
+              <a:buNone/>
+            </a:pPr>
+            <a:r>
+              <a:rPr lang="en-US" sz="1300" dirty="0">
+                <a:solidFill>
+                  <a:srgbClr val="B8B5D9"/>
+                </a:solidFill>
+                <a:latin typeface="Consolas" pitchFamily="34" charset="0"/>
+                <a:ea typeface="Consolas" pitchFamily="34" charset="-122"/>
+                <a:cs typeface="Consolas" pitchFamily="34" charset="-120"/>
+              </a:rPr>
+              <a:t>(</a:t>
+            </a:r>
+            <a:pPr indent="0" marL="0">
+              <a:buNone/>
+            </a:pPr>
+            <a:r>
+              <a:rPr lang="en-US" sz="1300" dirty="0">
+                <a:solidFill>
+                  <a:srgbClr val="FAF8FF"/>
+                </a:solidFill>
+                <a:latin typeface="Consolas" pitchFamily="34" charset="0"/>
+                <a:ea typeface="Consolas" pitchFamily="34" charset="-122"/>
+                <a:cs typeface="Consolas" pitchFamily="34" charset="-120"/>
+              </a:rPr>
+              <a:t>apiKey</a:t>
+            </a:r>
+            <a:pPr indent="0" marL="0">
+              <a:buNone/>
+            </a:pPr>
+            <a:r>
+              <a:rPr lang="en-US" sz="1300" dirty="0">
+                <a:solidFill>
+                  <a:srgbClr val="B8B5D9"/>
+                </a:solidFill>
+                <a:latin typeface="Consolas" pitchFamily="34" charset="0"/>
+                <a:ea typeface="Consolas" pitchFamily="34" charset="-122"/>
+                <a:cs typeface="Consolas" pitchFamily="34" charset="-120"/>
+              </a:rPr>
               <a:t>)</a:t>
             </a:r>
             <a:pPr indent="0" marL="0">
@@ -20428,6 +20740,12 @@
             <a:pPr indent="0" marL="0">
               <a:buNone/>
             </a:pPr>
+            <a:endParaRPr lang="en-US" sz="1300" dirty="0"/>
+          </a:p>
+          <a:p>
+            <a:pPr indent="0" marL="0">
+              <a:buNone/>
+            </a:pPr>
             <a:r>
               <a:rPr lang="en-US" sz="1300" dirty="0">
                 <a:solidFill>
@@ -20437,6 +20755,48 @@
                 <a:ea typeface="Consolas" pitchFamily="34" charset="-122"/>
                 <a:cs typeface="Consolas" pitchFamily="34" charset="-120"/>
               </a:rPr>
+              <a:t>        </a:t>
+            </a:r>
+            <a:pPr indent="0" marL="0">
+              <a:buNone/>
+            </a:pPr>
+            <a:r>
+              <a:rPr lang="en-US" sz="1300" dirty="0">
+                <a:solidFill>
+                  <a:srgbClr val="FAF8FF"/>
+                </a:solidFill>
+                <a:latin typeface="Consolas" pitchFamily="34" charset="0"/>
+                <a:ea typeface="Consolas" pitchFamily="34" charset="-122"/>
+                <a:cs typeface="Consolas" pitchFamily="34" charset="-120"/>
+              </a:rPr>
+              <a:t>options</a:t>
+            </a:r>
+            <a:pPr indent="0" marL="0">
+              <a:buNone/>
+            </a:pPr>
+            <a:r>
+              <a:rPr lang="en-US" sz="1300" dirty="0">
+                <a:solidFill>
+                  <a:srgbClr val="B8B5D9"/>
+                </a:solidFill>
+                <a:latin typeface="Consolas" pitchFamily="34" charset="0"/>
+                <a:ea typeface="Consolas" pitchFamily="34" charset="-122"/>
+                <a:cs typeface="Consolas" pitchFamily="34" charset="-120"/>
+              </a:rPr>
+              <a:t>:</a:t>
+            </a:r>
+            <a:pPr indent="0" marL="0">
+              <a:buNone/>
+            </a:pPr>
+            <a:r>
+              <a:rPr lang="en-US" sz="1300" dirty="0">
+                <a:solidFill>
+                  <a:srgbClr val="FAF8FF"/>
+                </a:solidFill>
+                <a:latin typeface="Consolas" pitchFamily="34" charset="0"/>
+                <a:ea typeface="Consolas" pitchFamily="34" charset="-122"/>
+                <a:cs typeface="Consolas" pitchFamily="34" charset="-120"/>
+              </a:rPr>
               <a:t> </a:t>
             </a:r>
             <a:pPr indent="0" marL="0">
@@ -20445,13 +20805,13 @@
             <a:r>
               <a:rPr lang="en-US" sz="1300" dirty="0">
                 <a:solidFill>
-                  <a:srgbClr val="FBBF24"/>
-                </a:solidFill>
-                <a:latin typeface="Consolas" pitchFamily="34" charset="0"/>
-                <a:ea typeface="Consolas" pitchFamily="34" charset="-122"/>
-                <a:cs typeface="Consolas" pitchFamily="34" charset="-120"/>
-              </a:rPr>
-              <a:t>"/openai/v1"</a:t>
+                  <a:srgbClr val="FB7185"/>
+                </a:solidFill>
+                <a:latin typeface="Consolas" pitchFamily="34" charset="0"/>
+                <a:ea typeface="Consolas" pitchFamily="34" charset="-122"/>
+                <a:cs typeface="Consolas" pitchFamily="34" charset="-120"/>
+              </a:rPr>
+              <a:t>new</a:t>
             </a:r>
             <a:pPr indent="0" marL="0">
               <a:buNone/>
@@ -20465,555 +20825,21 @@
                 <a:ea typeface="Consolas" pitchFamily="34" charset="-122"/>
                 <a:cs typeface="Consolas" pitchFamily="34" charset="-120"/>
               </a:rPr>
+              <a:t>(</a:t>
+            </a:r>
+            <a:pPr indent="0" marL="0">
+              <a:buNone/>
+            </a:pPr>
+            <a:r>
+              <a:rPr lang="en-US" sz="1300" dirty="0">
+                <a:solidFill>
+                  <a:srgbClr val="B8B5D9"/>
+                </a:solidFill>
+                <a:latin typeface="Consolas" pitchFamily="34" charset="0"/>
+                <a:ea typeface="Consolas" pitchFamily="34" charset="-122"/>
+                <a:cs typeface="Consolas" pitchFamily="34" charset="-120"/>
+              </a:rPr>
               <a:t>)</a:t>
-            </a:r>
-            <a:pPr indent="0" marL="0">
-              <a:buNone/>
-            </a:pPr>
-            <a:r>
-              <a:rPr lang="en-US" sz="1300" dirty="0">
-                <a:solidFill>
-                  <a:srgbClr val="B8B5D9"/>
-                </a:solidFill>
-                <a:latin typeface="Consolas" pitchFamily="34" charset="0"/>
-                <a:ea typeface="Consolas" pitchFamily="34" charset="-122"/>
-                <a:cs typeface="Consolas" pitchFamily="34" charset="-120"/>
-              </a:rPr>
-              <a:t>;</a:t>
-            </a:r>
-            <a:pPr indent="0" marL="0">
-              <a:buNone/>
-            </a:pPr>
-            <a:endParaRPr lang="en-US" sz="1300" dirty="0"/>
-          </a:p>
-          <a:p>
-            <a:pPr indent="0" marL="0">
-              <a:buNone/>
-            </a:pPr>
-            <a:endParaRPr lang="en-US" sz="1300" dirty="0"/>
-          </a:p>
-          <a:p>
-            <a:pPr indent="0" marL="0">
-              <a:buNone/>
-            </a:pPr>
-            <a:r>
-              <a:rPr lang="en-US" sz="1300" dirty="0">
-                <a:solidFill>
-                  <a:srgbClr val="A78BFA"/>
-                </a:solidFill>
-                <a:latin typeface="Consolas" pitchFamily="34" charset="0"/>
-                <a:ea typeface="Consolas" pitchFamily="34" charset="-122"/>
-                <a:cs typeface="Consolas" pitchFamily="34" charset="-120"/>
-              </a:rPr>
-              <a:t>IChatClient</a:t>
-            </a:r>
-            <a:pPr indent="0" marL="0">
-              <a:buNone/>
-            </a:pPr>
-            <a:r>
-              <a:rPr lang="en-US" sz="1300" dirty="0">
-                <a:solidFill>
-                  <a:srgbClr val="FAF8FF"/>
-                </a:solidFill>
-                <a:latin typeface="Consolas" pitchFamily="34" charset="0"/>
-                <a:ea typeface="Consolas" pitchFamily="34" charset="-122"/>
-                <a:cs typeface="Consolas" pitchFamily="34" charset="-120"/>
-              </a:rPr>
-              <a:t> chat </a:t>
-            </a:r>
-            <a:pPr indent="0" marL="0">
-              <a:buNone/>
-            </a:pPr>
-            <a:r>
-              <a:rPr lang="en-US" sz="1300" dirty="0">
-                <a:solidFill>
-                  <a:srgbClr val="CFCBED"/>
-                </a:solidFill>
-                <a:latin typeface="Consolas" pitchFamily="34" charset="0"/>
-                <a:ea typeface="Consolas" pitchFamily="34" charset="-122"/>
-                <a:cs typeface="Consolas" pitchFamily="34" charset="-120"/>
-              </a:rPr>
-              <a:t>=</a:t>
-            </a:r>
-            <a:pPr indent="0" marL="0">
-              <a:buNone/>
-            </a:pPr>
-            <a:r>
-              <a:rPr lang="en-US" sz="1300" dirty="0">
-                <a:solidFill>
-                  <a:srgbClr val="FAF8FF"/>
-                </a:solidFill>
-                <a:latin typeface="Consolas" pitchFamily="34" charset="0"/>
-                <a:ea typeface="Consolas" pitchFamily="34" charset="-122"/>
-                <a:cs typeface="Consolas" pitchFamily="34" charset="-120"/>
-              </a:rPr>
-              <a:t> </a:t>
-            </a:r>
-            <a:pPr indent="0" marL="0">
-              <a:buNone/>
-            </a:pPr>
-            <a:r>
-              <a:rPr lang="en-US" sz="1300" dirty="0">
-                <a:solidFill>
-                  <a:srgbClr val="FB7185"/>
-                </a:solidFill>
-                <a:latin typeface="Consolas" pitchFamily="34" charset="0"/>
-                <a:ea typeface="Consolas" pitchFamily="34" charset="-122"/>
-                <a:cs typeface="Consolas" pitchFamily="34" charset="-120"/>
-              </a:rPr>
-              <a:t>new</a:t>
-            </a:r>
-            <a:pPr indent="0" marL="0">
-              <a:buNone/>
-            </a:pPr>
-            <a:r>
-              <a:rPr lang="en-US" sz="1300" dirty="0">
-                <a:solidFill>
-                  <a:srgbClr val="FAF8FF"/>
-                </a:solidFill>
-                <a:latin typeface="Consolas" pitchFamily="34" charset="0"/>
-                <a:ea typeface="Consolas" pitchFamily="34" charset="-122"/>
-                <a:cs typeface="Consolas" pitchFamily="34" charset="-120"/>
-              </a:rPr>
-              <a:t> </a:t>
-            </a:r>
-            <a:pPr indent="0" marL="0">
-              <a:buNone/>
-            </a:pPr>
-            <a:r>
-              <a:rPr lang="en-US" sz="1300" dirty="0">
-                <a:solidFill>
-                  <a:srgbClr val="FAF8FF"/>
-                </a:solidFill>
-                <a:latin typeface="Consolas" pitchFamily="34" charset="0"/>
-                <a:ea typeface="Consolas" pitchFamily="34" charset="-122"/>
-                <a:cs typeface="Consolas" pitchFamily="34" charset="-120"/>
-              </a:rPr>
-              <a:t>ChatClient</a:t>
-            </a:r>
-            <a:pPr indent="0" marL="0">
-              <a:buNone/>
-            </a:pPr>
-            <a:r>
-              <a:rPr lang="en-US" sz="1300" dirty="0">
-                <a:solidFill>
-                  <a:srgbClr val="B8B5D9"/>
-                </a:solidFill>
-                <a:latin typeface="Consolas" pitchFamily="34" charset="0"/>
-                <a:ea typeface="Consolas" pitchFamily="34" charset="-122"/>
-                <a:cs typeface="Consolas" pitchFamily="34" charset="-120"/>
-              </a:rPr>
-              <a:t>(</a:t>
-            </a:r>
-            <a:pPr indent="0" marL="0">
-              <a:buNone/>
-            </a:pPr>
-            <a:endParaRPr lang="en-US" sz="1300" dirty="0"/>
-          </a:p>
-          <a:p>
-            <a:pPr indent="0" marL="0">
-              <a:buNone/>
-            </a:pPr>
-            <a:r>
-              <a:rPr lang="en-US" sz="1300" dirty="0">
-                <a:solidFill>
-                  <a:srgbClr val="FAF8FF"/>
-                </a:solidFill>
-                <a:latin typeface="Consolas" pitchFamily="34" charset="0"/>
-                <a:ea typeface="Consolas" pitchFamily="34" charset="-122"/>
-                <a:cs typeface="Consolas" pitchFamily="34" charset="-120"/>
-              </a:rPr>
-              <a:t>        </a:t>
-            </a:r>
-            <a:pPr indent="0" marL="0">
-              <a:buNone/>
-            </a:pPr>
-            <a:r>
-              <a:rPr lang="en-US" sz="1300" dirty="0">
-                <a:solidFill>
-                  <a:srgbClr val="FAF8FF"/>
-                </a:solidFill>
-                <a:latin typeface="Consolas" pitchFamily="34" charset="0"/>
-                <a:ea typeface="Consolas" pitchFamily="34" charset="-122"/>
-                <a:cs typeface="Consolas" pitchFamily="34" charset="-120"/>
-              </a:rPr>
-              <a:t>model</a:t>
-            </a:r>
-            <a:pPr indent="0" marL="0">
-              <a:buNone/>
-            </a:pPr>
-            <a:r>
-              <a:rPr lang="en-US" sz="1300" dirty="0">
-                <a:solidFill>
-                  <a:srgbClr val="B8B5D9"/>
-                </a:solidFill>
-                <a:latin typeface="Consolas" pitchFamily="34" charset="0"/>
-                <a:ea typeface="Consolas" pitchFamily="34" charset="-122"/>
-                <a:cs typeface="Consolas" pitchFamily="34" charset="-120"/>
-              </a:rPr>
-              <a:t>:</a:t>
-            </a:r>
-            <a:pPr indent="0" marL="0">
-              <a:buNone/>
-            </a:pPr>
-            <a:r>
-              <a:rPr lang="en-US" sz="1300" dirty="0">
-                <a:solidFill>
-                  <a:srgbClr val="FAF8FF"/>
-                </a:solidFill>
-                <a:latin typeface="Consolas" pitchFamily="34" charset="0"/>
-                <a:ea typeface="Consolas" pitchFamily="34" charset="-122"/>
-                <a:cs typeface="Consolas" pitchFamily="34" charset="-120"/>
-              </a:rPr>
-              <a:t> </a:t>
-            </a:r>
-            <a:pPr indent="0" marL="0">
-              <a:buNone/>
-            </a:pPr>
-            <a:r>
-              <a:rPr lang="en-US" sz="1300" dirty="0">
-                <a:solidFill>
-                  <a:srgbClr val="FBBF24"/>
-                </a:solidFill>
-                <a:latin typeface="Consolas" pitchFamily="34" charset="0"/>
-                <a:ea typeface="Consolas" pitchFamily="34" charset="-122"/>
-                <a:cs typeface="Consolas" pitchFamily="34" charset="-120"/>
-              </a:rPr>
-              <a:t>"gpt-4.1"</a:t>
-            </a:r>
-            <a:pPr indent="0" marL="0">
-              <a:buNone/>
-            </a:pPr>
-            <a:r>
-              <a:rPr lang="en-US" sz="1300" dirty="0">
-                <a:solidFill>
-                  <a:srgbClr val="B8B5D9"/>
-                </a:solidFill>
-                <a:latin typeface="Consolas" pitchFamily="34" charset="0"/>
-                <a:ea typeface="Consolas" pitchFamily="34" charset="-122"/>
-                <a:cs typeface="Consolas" pitchFamily="34" charset="-120"/>
-              </a:rPr>
-              <a:t>,</a:t>
-            </a:r>
-            <a:pPr indent="0" marL="0">
-              <a:buNone/>
-            </a:pPr>
-            <a:endParaRPr lang="en-US" sz="1300" dirty="0"/>
-          </a:p>
-          <a:p>
-            <a:pPr indent="0" marL="0">
-              <a:buNone/>
-            </a:pPr>
-            <a:r>
-              <a:rPr lang="en-US" sz="1300" dirty="0">
-                <a:solidFill>
-                  <a:srgbClr val="FAF8FF"/>
-                </a:solidFill>
-                <a:latin typeface="Consolas" pitchFamily="34" charset="0"/>
-                <a:ea typeface="Consolas" pitchFamily="34" charset="-122"/>
-                <a:cs typeface="Consolas" pitchFamily="34" charset="-120"/>
-              </a:rPr>
-              <a:t>        </a:t>
-            </a:r>
-            <a:pPr indent="0" marL="0">
-              <a:buNone/>
-            </a:pPr>
-            <a:r>
-              <a:rPr lang="en-US" sz="1300" dirty="0">
-                <a:solidFill>
-                  <a:srgbClr val="FAF8FF"/>
-                </a:solidFill>
-                <a:latin typeface="Consolas" pitchFamily="34" charset="0"/>
-                <a:ea typeface="Consolas" pitchFamily="34" charset="-122"/>
-                <a:cs typeface="Consolas" pitchFamily="34" charset="-120"/>
-              </a:rPr>
-              <a:t>credential</a:t>
-            </a:r>
-            <a:pPr indent="0" marL="0">
-              <a:buNone/>
-            </a:pPr>
-            <a:r>
-              <a:rPr lang="en-US" sz="1300" dirty="0">
-                <a:solidFill>
-                  <a:srgbClr val="B8B5D9"/>
-                </a:solidFill>
-                <a:latin typeface="Consolas" pitchFamily="34" charset="0"/>
-                <a:ea typeface="Consolas" pitchFamily="34" charset="-122"/>
-                <a:cs typeface="Consolas" pitchFamily="34" charset="-120"/>
-              </a:rPr>
-              <a:t>:</a:t>
-            </a:r>
-            <a:pPr indent="0" marL="0">
-              <a:buNone/>
-            </a:pPr>
-            <a:r>
-              <a:rPr lang="en-US" sz="1300" dirty="0">
-                <a:solidFill>
-                  <a:srgbClr val="FAF8FF"/>
-                </a:solidFill>
-                <a:latin typeface="Consolas" pitchFamily="34" charset="0"/>
-                <a:ea typeface="Consolas" pitchFamily="34" charset="-122"/>
-                <a:cs typeface="Consolas" pitchFamily="34" charset="-120"/>
-              </a:rPr>
-              <a:t> </a:t>
-            </a:r>
-            <a:pPr indent="0" marL="0">
-              <a:buNone/>
-            </a:pPr>
-            <a:r>
-              <a:rPr lang="en-US" sz="1300" dirty="0">
-                <a:solidFill>
-                  <a:srgbClr val="FB7185"/>
-                </a:solidFill>
-                <a:latin typeface="Consolas" pitchFamily="34" charset="0"/>
-                <a:ea typeface="Consolas" pitchFamily="34" charset="-122"/>
-                <a:cs typeface="Consolas" pitchFamily="34" charset="-120"/>
-              </a:rPr>
-              <a:t>new</a:t>
-            </a:r>
-            <a:pPr indent="0" marL="0">
-              <a:buNone/>
-            </a:pPr>
-            <a:r>
-              <a:rPr lang="en-US" sz="1300" dirty="0">
-                <a:solidFill>
-                  <a:srgbClr val="FAF8FF"/>
-                </a:solidFill>
-                <a:latin typeface="Consolas" pitchFamily="34" charset="0"/>
-                <a:ea typeface="Consolas" pitchFamily="34" charset="-122"/>
-                <a:cs typeface="Consolas" pitchFamily="34" charset="-120"/>
-              </a:rPr>
-              <a:t> </a:t>
-            </a:r>
-            <a:pPr indent="0" marL="0">
-              <a:buNone/>
-            </a:pPr>
-            <a:r>
-              <a:rPr lang="en-US" sz="1300" dirty="0">
-                <a:solidFill>
-                  <a:srgbClr val="FAF8FF"/>
-                </a:solidFill>
-                <a:latin typeface="Consolas" pitchFamily="34" charset="0"/>
-                <a:ea typeface="Consolas" pitchFamily="34" charset="-122"/>
-                <a:cs typeface="Consolas" pitchFamily="34" charset="-120"/>
-              </a:rPr>
-              <a:t>ApiKeyCredential</a:t>
-            </a:r>
-            <a:pPr indent="0" marL="0">
-              <a:buNone/>
-            </a:pPr>
-            <a:r>
-              <a:rPr lang="en-US" sz="1300" dirty="0">
-                <a:solidFill>
-                  <a:srgbClr val="B8B5D9"/>
-                </a:solidFill>
-                <a:latin typeface="Consolas" pitchFamily="34" charset="0"/>
-                <a:ea typeface="Consolas" pitchFamily="34" charset="-122"/>
-                <a:cs typeface="Consolas" pitchFamily="34" charset="-120"/>
-              </a:rPr>
-              <a:t>(</a:t>
-            </a:r>
-            <a:pPr indent="0" marL="0">
-              <a:buNone/>
-            </a:pPr>
-            <a:r>
-              <a:rPr lang="en-US" sz="1300" dirty="0">
-                <a:solidFill>
-                  <a:srgbClr val="FAF8FF"/>
-                </a:solidFill>
-                <a:latin typeface="Consolas" pitchFamily="34" charset="0"/>
-                <a:ea typeface="Consolas" pitchFamily="34" charset="-122"/>
-                <a:cs typeface="Consolas" pitchFamily="34" charset="-120"/>
-              </a:rPr>
-              <a:t>config</a:t>
-            </a:r>
-            <a:pPr indent="0" marL="0">
-              <a:buNone/>
-            </a:pPr>
-            <a:r>
-              <a:rPr lang="en-US" sz="1300" dirty="0">
-                <a:solidFill>
-                  <a:srgbClr val="B8B5D9"/>
-                </a:solidFill>
-                <a:latin typeface="Consolas" pitchFamily="34" charset="0"/>
-                <a:ea typeface="Consolas" pitchFamily="34" charset="-122"/>
-                <a:cs typeface="Consolas" pitchFamily="34" charset="-120"/>
-              </a:rPr>
-              <a:t>[</a:t>
-            </a:r>
-            <a:pPr indent="0" marL="0">
-              <a:buNone/>
-            </a:pPr>
-            <a:r>
-              <a:rPr lang="en-US" sz="1300" dirty="0">
-                <a:solidFill>
-                  <a:srgbClr val="FBBF24"/>
-                </a:solidFill>
-                <a:latin typeface="Consolas" pitchFamily="34" charset="0"/>
-                <a:ea typeface="Consolas" pitchFamily="34" charset="-122"/>
-                <a:cs typeface="Consolas" pitchFamily="34" charset="-120"/>
-              </a:rPr>
-              <a:t>"AzureOpenAI:Key"</a:t>
-            </a:r>
-            <a:pPr indent="0" marL="0">
-              <a:buNone/>
-            </a:pPr>
-            <a:r>
-              <a:rPr lang="en-US" sz="1300" dirty="0">
-                <a:solidFill>
-                  <a:srgbClr val="B8B5D9"/>
-                </a:solidFill>
-                <a:latin typeface="Consolas" pitchFamily="34" charset="0"/>
-                <a:ea typeface="Consolas" pitchFamily="34" charset="-122"/>
-                <a:cs typeface="Consolas" pitchFamily="34" charset="-120"/>
-              </a:rPr>
-              <a:t>]</a:t>
-            </a:r>
-            <a:pPr indent="0" marL="0">
-              <a:buNone/>
-            </a:pPr>
-            <a:r>
-              <a:rPr lang="en-US" sz="1300" dirty="0">
-                <a:solidFill>
-                  <a:srgbClr val="CFCBED"/>
-                </a:solidFill>
-                <a:latin typeface="Consolas" pitchFamily="34" charset="0"/>
-                <a:ea typeface="Consolas" pitchFamily="34" charset="-122"/>
-                <a:cs typeface="Consolas" pitchFamily="34" charset="-120"/>
-              </a:rPr>
-              <a:t>!</a:t>
-            </a:r>
-            <a:pPr indent="0" marL="0">
-              <a:buNone/>
-            </a:pPr>
-            <a:r>
-              <a:rPr lang="en-US" sz="1300" dirty="0">
-                <a:solidFill>
-                  <a:srgbClr val="B8B5D9"/>
-                </a:solidFill>
-                <a:latin typeface="Consolas" pitchFamily="34" charset="0"/>
-                <a:ea typeface="Consolas" pitchFamily="34" charset="-122"/>
-                <a:cs typeface="Consolas" pitchFamily="34" charset="-120"/>
-              </a:rPr>
-              <a:t>)</a:t>
-            </a:r>
-            <a:pPr indent="0" marL="0">
-              <a:buNone/>
-            </a:pPr>
-            <a:r>
-              <a:rPr lang="en-US" sz="1300" dirty="0">
-                <a:solidFill>
-                  <a:srgbClr val="B8B5D9"/>
-                </a:solidFill>
-                <a:latin typeface="Consolas" pitchFamily="34" charset="0"/>
-                <a:ea typeface="Consolas" pitchFamily="34" charset="-122"/>
-                <a:cs typeface="Consolas" pitchFamily="34" charset="-120"/>
-              </a:rPr>
-              <a:t>,</a:t>
-            </a:r>
-            <a:pPr indent="0" marL="0">
-              <a:buNone/>
-            </a:pPr>
-            <a:endParaRPr lang="en-US" sz="1300" dirty="0"/>
-          </a:p>
-          <a:p>
-            <a:pPr indent="0" marL="0">
-              <a:buNone/>
-            </a:pPr>
-            <a:r>
-              <a:rPr lang="en-US" sz="1300" dirty="0">
-                <a:solidFill>
-                  <a:srgbClr val="FAF8FF"/>
-                </a:solidFill>
-                <a:latin typeface="Consolas" pitchFamily="34" charset="0"/>
-                <a:ea typeface="Consolas" pitchFamily="34" charset="-122"/>
-                <a:cs typeface="Consolas" pitchFamily="34" charset="-120"/>
-              </a:rPr>
-              <a:t>        </a:t>
-            </a:r>
-            <a:pPr indent="0" marL="0">
-              <a:buNone/>
-            </a:pPr>
-            <a:r>
-              <a:rPr lang="en-US" sz="1300" dirty="0">
-                <a:solidFill>
-                  <a:srgbClr val="FAF8FF"/>
-                </a:solidFill>
-                <a:latin typeface="Consolas" pitchFamily="34" charset="0"/>
-                <a:ea typeface="Consolas" pitchFamily="34" charset="-122"/>
-                <a:cs typeface="Consolas" pitchFamily="34" charset="-120"/>
-              </a:rPr>
-              <a:t>options</a:t>
-            </a:r>
-            <a:pPr indent="0" marL="0">
-              <a:buNone/>
-            </a:pPr>
-            <a:r>
-              <a:rPr lang="en-US" sz="1300" dirty="0">
-                <a:solidFill>
-                  <a:srgbClr val="B8B5D9"/>
-                </a:solidFill>
-                <a:latin typeface="Consolas" pitchFamily="34" charset="0"/>
-                <a:ea typeface="Consolas" pitchFamily="34" charset="-122"/>
-                <a:cs typeface="Consolas" pitchFamily="34" charset="-120"/>
-              </a:rPr>
-              <a:t>:</a:t>
-            </a:r>
-            <a:pPr indent="0" marL="0">
-              <a:buNone/>
-            </a:pPr>
-            <a:r>
-              <a:rPr lang="en-US" sz="1300" dirty="0">
-                <a:solidFill>
-                  <a:srgbClr val="FAF8FF"/>
-                </a:solidFill>
-                <a:latin typeface="Consolas" pitchFamily="34" charset="0"/>
-                <a:ea typeface="Consolas" pitchFamily="34" charset="-122"/>
-                <a:cs typeface="Consolas" pitchFamily="34" charset="-120"/>
-              </a:rPr>
-              <a:t> </a:t>
-            </a:r>
-            <a:pPr indent="0" marL="0">
-              <a:buNone/>
-            </a:pPr>
-            <a:r>
-              <a:rPr lang="en-US" sz="1300" dirty="0">
-                <a:solidFill>
-                  <a:srgbClr val="FB7185"/>
-                </a:solidFill>
-                <a:latin typeface="Consolas" pitchFamily="34" charset="0"/>
-                <a:ea typeface="Consolas" pitchFamily="34" charset="-122"/>
-                <a:cs typeface="Consolas" pitchFamily="34" charset="-120"/>
-              </a:rPr>
-              <a:t>new</a:t>
-            </a:r>
-            <a:pPr indent="0" marL="0">
-              <a:buNone/>
-            </a:pPr>
-            <a:r>
-              <a:rPr lang="en-US" sz="1300" dirty="0">
-                <a:solidFill>
-                  <a:srgbClr val="FAF8FF"/>
-                </a:solidFill>
-                <a:latin typeface="Consolas" pitchFamily="34" charset="0"/>
-                <a:ea typeface="Consolas" pitchFamily="34" charset="-122"/>
-                <a:cs typeface="Consolas" pitchFamily="34" charset="-120"/>
-              </a:rPr>
-              <a:t> </a:t>
-            </a:r>
-            <a:pPr indent="0" marL="0">
-              <a:buNone/>
-            </a:pPr>
-            <a:r>
-              <a:rPr lang="en-US" sz="1300" dirty="0">
-                <a:solidFill>
-                  <a:srgbClr val="FAF8FF"/>
-                </a:solidFill>
-                <a:latin typeface="Consolas" pitchFamily="34" charset="0"/>
-                <a:ea typeface="Consolas" pitchFamily="34" charset="-122"/>
-                <a:cs typeface="Consolas" pitchFamily="34" charset="-120"/>
-              </a:rPr>
-              <a:t>OpenAIClientOptions</a:t>
             </a:r>
             <a:pPr indent="0" marL="0">
               <a:buNone/>
@@ -26854,6 +26680,34 @@
             <a:r>
               <a:rPr lang="en-US" sz="1100" dirty="0">
                 <a:solidFill>
+                  <a:srgbClr val="B8B5D9"/>
+                </a:solidFill>
+                <a:latin typeface="Consolas" pitchFamily="34" charset="0"/>
+                <a:ea typeface="Consolas" pitchFamily="34" charset="-122"/>
+                <a:cs typeface="Consolas" pitchFamily="34" charset="-120"/>
+              </a:rPr>
+              <a:t>(</a:t>
+            </a:r>
+            <a:pPr indent="0" marL="0">
+              <a:buNone/>
+            </a:pPr>
+            <a:r>
+              <a:rPr lang="en-US" sz="1100" dirty="0">
+                <a:solidFill>
+                  <a:srgbClr val="B8B5D9"/>
+                </a:solidFill>
+                <a:latin typeface="Consolas" pitchFamily="34" charset="0"/>
+                <a:ea typeface="Consolas" pitchFamily="34" charset="-122"/>
+                <a:cs typeface="Consolas" pitchFamily="34" charset="-120"/>
+              </a:rPr>
+              <a:t>)</a:t>
+            </a:r>
+            <a:pPr indent="0" marL="0">
+              <a:buNone/>
+            </a:pPr>
+            <a:r>
+              <a:rPr lang="en-US" sz="1100" dirty="0">
+                <a:solidFill>
                   <a:srgbClr val="FAF8FF"/>
                 </a:solidFill>
                 <a:latin typeface="Consolas" pitchFamily="34" charset="0"/>
@@ -26868,33 +26722,55 @@
             <a:r>
               <a:rPr lang="en-US" sz="1100" dirty="0">
                 <a:solidFill>
+                  <a:srgbClr val="B8B5D9"/>
+                </a:solidFill>
+                <a:latin typeface="Consolas" pitchFamily="34" charset="0"/>
+                <a:ea typeface="Consolas" pitchFamily="34" charset="-122"/>
+                <a:cs typeface="Consolas" pitchFamily="34" charset="-120"/>
+              </a:rPr>
+              <a:t>{</a:t>
+            </a:r>
+            <a:pPr indent="0" marL="0">
+              <a:buNone/>
+            </a:pPr>
+            <a:r>
+              <a:rPr lang="en-US" sz="1100" dirty="0">
+                <a:solidFill>
                   <a:srgbClr val="FAF8FF"/>
                 </a:solidFill>
                 <a:latin typeface="Consolas" pitchFamily="34" charset="0"/>
                 <a:ea typeface="Consolas" pitchFamily="34" charset="-122"/>
                 <a:cs typeface="Consolas" pitchFamily="34" charset="-120"/>
               </a:rPr>
-              <a:t>OpenAIClientOptions</a:t>
-            </a:r>
-            <a:pPr indent="0" marL="0">
-              <a:buNone/>
-            </a:pPr>
-            <a:endParaRPr lang="en-US" sz="1100" dirty="0"/>
-          </a:p>
-          <a:p>
+              <a:t> Endpoint </a:t>
+            </a:r>
             <a:pPr indent="0" marL="0">
               <a:buNone/>
             </a:pPr>
             <a:r>
               <a:rPr lang="en-US" sz="1100" dirty="0">
                 <a:solidFill>
+                  <a:srgbClr val="CFCBED"/>
+                </a:solidFill>
+                <a:latin typeface="Consolas" pitchFamily="34" charset="0"/>
+                <a:ea typeface="Consolas" pitchFamily="34" charset="-122"/>
+                <a:cs typeface="Consolas" pitchFamily="34" charset="-120"/>
+              </a:rPr>
+              <a:t>=</a:t>
+            </a:r>
+            <a:pPr indent="0" marL="0">
+              <a:buNone/>
+            </a:pPr>
+            <a:r>
+              <a:rPr lang="en-US" sz="1100" dirty="0">
+                <a:solidFill>
                   <a:srgbClr val="FAF8FF"/>
                 </a:solidFill>
                 <a:latin typeface="Consolas" pitchFamily="34" charset="0"/>
                 <a:ea typeface="Consolas" pitchFamily="34" charset="-122"/>
                 <a:cs typeface="Consolas" pitchFamily="34" charset="-120"/>
               </a:rPr>
-              <a:t>        </a:t>
+              <a:t> </a:t>
             </a:r>
             <a:pPr indent="0" marL="0">
               <a:buNone/>
@@ -26902,165 +26778,97 @@
             <a:r>
               <a:rPr lang="en-US" sz="1100" dirty="0">
                 <a:solidFill>
+                  <a:srgbClr val="FB7185"/>
+                </a:solidFill>
+                <a:latin typeface="Consolas" pitchFamily="34" charset="0"/>
+                <a:ea typeface="Consolas" pitchFamily="34" charset="-122"/>
+                <a:cs typeface="Consolas" pitchFamily="34" charset="-120"/>
+              </a:rPr>
+              <a:t>new</a:t>
+            </a:r>
+            <a:pPr indent="0" marL="0">
+              <a:buNone/>
+            </a:pPr>
+            <a:r>
+              <a:rPr lang="en-US" sz="1100" dirty="0">
+                <a:solidFill>
+                  <a:srgbClr val="FAF8FF"/>
+                </a:solidFill>
+                <a:latin typeface="Consolas" pitchFamily="34" charset="0"/>
+                <a:ea typeface="Consolas" pitchFamily="34" charset="-122"/>
+                <a:cs typeface="Consolas" pitchFamily="34" charset="-120"/>
+              </a:rPr>
+              <a:t> </a:t>
+            </a:r>
+            <a:pPr indent="0" marL="0">
+              <a:buNone/>
+            </a:pPr>
+            <a:r>
+              <a:rPr lang="en-US" sz="1100" dirty="0">
+                <a:solidFill>
+                  <a:srgbClr val="FAF8FF"/>
+                </a:solidFill>
+                <a:latin typeface="Consolas" pitchFamily="34" charset="0"/>
+                <a:ea typeface="Consolas" pitchFamily="34" charset="-122"/>
+                <a:cs typeface="Consolas" pitchFamily="34" charset="-120"/>
+              </a:rPr>
+              <a:t>Uri</a:t>
+            </a:r>
+            <a:pPr indent="0" marL="0">
+              <a:buNone/>
+            </a:pPr>
+            <a:r>
+              <a:rPr lang="en-US" sz="1100" dirty="0">
+                <a:solidFill>
                   <a:srgbClr val="B8B5D9"/>
                 </a:solidFill>
                 <a:latin typeface="Consolas" pitchFamily="34" charset="0"/>
                 <a:ea typeface="Consolas" pitchFamily="34" charset="-122"/>
                 <a:cs typeface="Consolas" pitchFamily="34" charset="-120"/>
               </a:rPr>
-              <a:t>{</a:t>
-            </a:r>
-            <a:pPr indent="0" marL="0">
-              <a:buNone/>
-            </a:pPr>
-            <a:endParaRPr lang="en-US" sz="1100" dirty="0"/>
-          </a:p>
-          <a:p>
+              <a:t>(</a:t>
+            </a:r>
             <a:pPr indent="0" marL="0">
               <a:buNone/>
             </a:pPr>
             <a:r>
               <a:rPr lang="en-US" sz="1100" dirty="0">
                 <a:solidFill>
+                  <a:srgbClr val="FBBF24"/>
+                </a:solidFill>
+                <a:latin typeface="Consolas" pitchFamily="34" charset="0"/>
+                <a:ea typeface="Consolas" pitchFamily="34" charset="-122"/>
+                <a:cs typeface="Consolas" pitchFamily="34" charset="-120"/>
+              </a:rPr>
+              <a:t>"http://localhost:5273/v1"</a:t>
+            </a:r>
+            <a:pPr indent="0" marL="0">
+              <a:buNone/>
+            </a:pPr>
+            <a:r>
+              <a:rPr lang="en-US" sz="1100" dirty="0">
+                <a:solidFill>
+                  <a:srgbClr val="B8B5D9"/>
+                </a:solidFill>
+                <a:latin typeface="Consolas" pitchFamily="34" charset="0"/>
+                <a:ea typeface="Consolas" pitchFamily="34" charset="-122"/>
+                <a:cs typeface="Consolas" pitchFamily="34" charset="-120"/>
+              </a:rPr>
+              <a:t>)</a:t>
+            </a:r>
+            <a:pPr indent="0" marL="0">
+              <a:buNone/>
+            </a:pPr>
+            <a:r>
+              <a:rPr lang="en-US" sz="1100" dirty="0">
+                <a:solidFill>
                   <a:srgbClr val="FAF8FF"/>
                 </a:solidFill>
                 <a:latin typeface="Consolas" pitchFamily="34" charset="0"/>
                 <a:ea typeface="Consolas" pitchFamily="34" charset="-122"/>
                 <a:cs typeface="Consolas" pitchFamily="34" charset="-120"/>
               </a:rPr>
-              <a:t>            Endpoint </a:t>
-            </a:r>
-            <a:pPr indent="0" marL="0">
-              <a:buNone/>
-            </a:pPr>
-            <a:r>
-              <a:rPr lang="en-US" sz="1100" dirty="0">
-                <a:solidFill>
-                  <a:srgbClr val="CFCBED"/>
-                </a:solidFill>
-                <a:latin typeface="Consolas" pitchFamily="34" charset="0"/>
-                <a:ea typeface="Consolas" pitchFamily="34" charset="-122"/>
-                <a:cs typeface="Consolas" pitchFamily="34" charset="-120"/>
-              </a:rPr>
-              <a:t>=</a:t>
-            </a:r>
-            <a:pPr indent="0" marL="0">
-              <a:buNone/>
-            </a:pPr>
-            <a:r>
-              <a:rPr lang="en-US" sz="1100" dirty="0">
-                <a:solidFill>
-                  <a:srgbClr val="FAF8FF"/>
-                </a:solidFill>
-                <a:latin typeface="Consolas" pitchFamily="34" charset="0"/>
-                <a:ea typeface="Consolas" pitchFamily="34" charset="-122"/>
-                <a:cs typeface="Consolas" pitchFamily="34" charset="-120"/>
-              </a:rPr>
               <a:t> </a:t>
-            </a:r>
-            <a:pPr indent="0" marL="0">
-              <a:buNone/>
-            </a:pPr>
-            <a:r>
-              <a:rPr lang="en-US" sz="1100" dirty="0">
-                <a:solidFill>
-                  <a:srgbClr val="FB7185"/>
-                </a:solidFill>
-                <a:latin typeface="Consolas" pitchFamily="34" charset="0"/>
-                <a:ea typeface="Consolas" pitchFamily="34" charset="-122"/>
-                <a:cs typeface="Consolas" pitchFamily="34" charset="-120"/>
-              </a:rPr>
-              <a:t>new</a:t>
-            </a:r>
-            <a:pPr indent="0" marL="0">
-              <a:buNone/>
-            </a:pPr>
-            <a:r>
-              <a:rPr lang="en-US" sz="1100" dirty="0">
-                <a:solidFill>
-                  <a:srgbClr val="FAF8FF"/>
-                </a:solidFill>
-                <a:latin typeface="Consolas" pitchFamily="34" charset="0"/>
-                <a:ea typeface="Consolas" pitchFamily="34" charset="-122"/>
-                <a:cs typeface="Consolas" pitchFamily="34" charset="-120"/>
-              </a:rPr>
-              <a:t> </a:t>
-            </a:r>
-            <a:pPr indent="0" marL="0">
-              <a:buNone/>
-            </a:pPr>
-            <a:r>
-              <a:rPr lang="en-US" sz="1100" dirty="0">
-                <a:solidFill>
-                  <a:srgbClr val="FAF8FF"/>
-                </a:solidFill>
-                <a:latin typeface="Consolas" pitchFamily="34" charset="0"/>
-                <a:ea typeface="Consolas" pitchFamily="34" charset="-122"/>
-                <a:cs typeface="Consolas" pitchFamily="34" charset="-120"/>
-              </a:rPr>
-              <a:t>Uri</a:t>
-            </a:r>
-            <a:pPr indent="0" marL="0">
-              <a:buNone/>
-            </a:pPr>
-            <a:r>
-              <a:rPr lang="en-US" sz="1100" dirty="0">
-                <a:solidFill>
-                  <a:srgbClr val="B8B5D9"/>
-                </a:solidFill>
-                <a:latin typeface="Consolas" pitchFamily="34" charset="0"/>
-                <a:ea typeface="Consolas" pitchFamily="34" charset="-122"/>
-                <a:cs typeface="Consolas" pitchFamily="34" charset="-120"/>
-              </a:rPr>
-              <a:t>(</a:t>
-            </a:r>
-            <a:pPr indent="0" marL="0">
-              <a:buNone/>
-            </a:pPr>
-            <a:r>
-              <a:rPr lang="en-US" sz="1100" dirty="0">
-                <a:solidFill>
-                  <a:srgbClr val="FBBF24"/>
-                </a:solidFill>
-                <a:latin typeface="Consolas" pitchFamily="34" charset="0"/>
-                <a:ea typeface="Consolas" pitchFamily="34" charset="-122"/>
-                <a:cs typeface="Consolas" pitchFamily="34" charset="-120"/>
-              </a:rPr>
-              <a:t>"http://localhost:5273/v1"</a:t>
-            </a:r>
-            <a:pPr indent="0" marL="0">
-              <a:buNone/>
-            </a:pPr>
-            <a:r>
-              <a:rPr lang="en-US" sz="1100" dirty="0">
-                <a:solidFill>
-                  <a:srgbClr val="B8B5D9"/>
-                </a:solidFill>
-                <a:latin typeface="Consolas" pitchFamily="34" charset="0"/>
-                <a:ea typeface="Consolas" pitchFamily="34" charset="-122"/>
-                <a:cs typeface="Consolas" pitchFamily="34" charset="-120"/>
-              </a:rPr>
-              <a:t>)</a:t>
-            </a:r>
-            <a:pPr indent="0" marL="0">
-              <a:buNone/>
-            </a:pPr>
-            <a:endParaRPr lang="en-US" sz="1100" dirty="0"/>
-          </a:p>
-          <a:p>
-            <a:pPr indent="0" marL="0">
-              <a:buNone/>
-            </a:pPr>
-            <a:r>
-              <a:rPr lang="en-US" sz="1100" dirty="0">
-                <a:solidFill>
-                  <a:srgbClr val="FAF8FF"/>
-                </a:solidFill>
-                <a:latin typeface="Consolas" pitchFamily="34" charset="0"/>
-                <a:ea typeface="Consolas" pitchFamily="34" charset="-122"/>
-                <a:cs typeface="Consolas" pitchFamily="34" charset="-120"/>
-              </a:rPr>
-              <a:t>        </a:t>
             </a:r>
             <a:pPr indent="0" marL="0">
               <a:buNone/>

--- a/slides/Unifying-Local-Cloud-AI.pptx
+++ b/slides/Unifying-Local-Cloud-AI.pptx
@@ -22349,768 +22349,9 @@
           </a:p>
         </p:txBody>
       </p:sp>
-      <p:sp>
-        <p:nvSpPr>
-          <p:cNvPr id="12" name="Text 10"/>
-          <p:cNvSpPr/>
-          <p:nvPr/>
-        </p:nvSpPr>
-        <p:spPr>
-          <a:xfrm>
-            <a:off x="822960" y="5440680"/>
-            <a:ext cx="3154680" cy="320040"/>
-          </a:xfrm>
-          <a:prstGeom prst="rect">
-            <a:avLst/>
-          </a:prstGeom>
-          <a:noFill/>
-          <a:ln/>
-        </p:spPr>
-        <p:txBody>
-          <a:bodyPr wrap="square" rtlCol="0" anchor="ctr"/>
-          <a:lstStyle/>
-          <a:p>
-            <a:pPr indent="0" marL="0">
-              <a:buNone/>
-            </a:pPr>
-            <a:r>
-              <a:rPr lang="en-US" sz="1200" b="1" dirty="0">
-                <a:solidFill>
-                  <a:srgbClr val="FB7185"/>
-                </a:solidFill>
-                <a:latin typeface="Calibri" pitchFamily="34" charset="0"/>
-                <a:ea typeface="Calibri" pitchFamily="34" charset="-122"/>
-                <a:cs typeface="Calibri" pitchFamily="34" charset="-120"/>
-              </a:rPr>
-              <a:t>✅  shipped</a:t>
-            </a:r>
-            <a:endParaRPr lang="en-US" sz="1200" dirty="0"/>
-          </a:p>
-        </p:txBody>
-      </p:sp>
-      <p:sp>
-        <p:nvSpPr>
-          <p:cNvPr id="13" name="Shape 11"/>
-          <p:cNvSpPr/>
-          <p:nvPr/>
-        </p:nvSpPr>
-        <p:spPr>
-          <a:xfrm>
-            <a:off x="4389120" y="2286000"/>
-            <a:ext cx="3703320" cy="3566160"/>
-          </a:xfrm>
-          <a:prstGeom prst="roundRect">
-            <a:avLst>
-              <a:gd name="adj" fmla="val 3077"/>
-            </a:avLst>
-          </a:prstGeom>
-          <a:solidFill>
-            <a:srgbClr val="FFFFFF"/>
-          </a:solidFill>
-          <a:ln w="12700">
-            <a:solidFill>
-              <a:srgbClr val="E5E1F5"/>
-            </a:solidFill>
-            <a:prstDash val="solid"/>
-          </a:ln>
-        </p:spPr>
-      </p:sp>
-      <p:sp>
-        <p:nvSpPr>
-          <p:cNvPr id="14" name="Shape 12"/>
-          <p:cNvSpPr/>
-          <p:nvPr/>
-        </p:nvSpPr>
-        <p:spPr>
-          <a:xfrm>
-            <a:off x="4389120" y="2286000"/>
-            <a:ext cx="3703320" cy="164592"/>
-          </a:xfrm>
-          <a:prstGeom prst="rect">
-            <a:avLst/>
-          </a:prstGeom>
-          <a:solidFill>
-            <a:srgbClr val="6366F1"/>
-          </a:solidFill>
-          <a:ln w="12700">
-            <a:solidFill>
-              <a:srgbClr val="6366F1"/>
-            </a:solidFill>
-            <a:prstDash val="solid"/>
-          </a:ln>
-        </p:spPr>
-      </p:sp>
-      <p:sp>
-        <p:nvSpPr>
-          <p:cNvPr id="15" name="Text 13"/>
-          <p:cNvSpPr/>
-          <p:nvPr/>
-        </p:nvSpPr>
-        <p:spPr>
-          <a:xfrm>
-            <a:off x="4663440" y="2606040"/>
-            <a:ext cx="3154680" cy="320040"/>
-          </a:xfrm>
-          <a:prstGeom prst="rect">
-            <a:avLst/>
-          </a:prstGeom>
-          <a:noFill/>
-          <a:ln/>
-        </p:spPr>
-        <p:txBody>
-          <a:bodyPr wrap="square" rtlCol="0" anchor="ctr"/>
-          <a:lstStyle/>
-          <a:p>
-            <a:pPr indent="0" marL="0">
-              <a:buNone/>
-            </a:pPr>
-            <a:r>
-              <a:rPr lang="en-US" sz="1100" b="1" spc="300" kern="0" dirty="0">
-                <a:solidFill>
-                  <a:srgbClr val="6366F1"/>
-                </a:solidFill>
-                <a:latin typeface="Calibri" pitchFamily="34" charset="0"/>
-                <a:ea typeface="Calibri" pitchFamily="34" charset="-122"/>
-                <a:cs typeface="Calibri" pitchFamily="34" charset="-120"/>
-              </a:rPr>
-              <a:t>MICROSOFT</a:t>
-            </a:r>
-            <a:endParaRPr lang="en-US" sz="1100" dirty="0"/>
-          </a:p>
-        </p:txBody>
-      </p:sp>
-      <p:sp>
-        <p:nvSpPr>
-          <p:cNvPr id="16" name="Text 14"/>
-          <p:cNvSpPr/>
-          <p:nvPr/>
-        </p:nvSpPr>
-        <p:spPr>
-          <a:xfrm>
-            <a:off x="4663440" y="2926080"/>
-            <a:ext cx="3154680" cy="548640"/>
-          </a:xfrm>
-          <a:prstGeom prst="rect">
-            <a:avLst/>
-          </a:prstGeom>
-          <a:noFill/>
-          <a:ln/>
-        </p:spPr>
-        <p:txBody>
-          <a:bodyPr wrap="square" rtlCol="0" anchor="ctr"/>
-          <a:lstStyle/>
-          <a:p>
-            <a:pPr indent="0" marL="0">
-              <a:buNone/>
-            </a:pPr>
-            <a:r>
-              <a:rPr lang="en-US" sz="2200" b="1" dirty="0">
-                <a:solidFill>
-                  <a:srgbClr val="0F0A2E"/>
-                </a:solidFill>
-                <a:latin typeface="Georgia" pitchFamily="34" charset="0"/>
-                <a:ea typeface="Georgia" pitchFamily="34" charset="-122"/>
-                <a:cs typeface="Georgia" pitchFamily="34" charset="-120"/>
-              </a:rPr>
-              <a:t>Phi Silica</a:t>
-            </a:r>
-            <a:endParaRPr lang="en-US" sz="2200" dirty="0"/>
-          </a:p>
-        </p:txBody>
-      </p:sp>
-      <p:sp>
-        <p:nvSpPr>
-          <p:cNvPr id="17" name="Text 15"/>
-          <p:cNvSpPr/>
-          <p:nvPr/>
-        </p:nvSpPr>
-        <p:spPr>
-          <a:xfrm>
-            <a:off x="4663440" y="3474720"/>
-            <a:ext cx="3154680" cy="365760"/>
-          </a:xfrm>
-          <a:prstGeom prst="rect">
-            <a:avLst/>
-          </a:prstGeom>
-          <a:noFill/>
-          <a:ln/>
-        </p:spPr>
-        <p:txBody>
-          <a:bodyPr wrap="square" rtlCol="0" anchor="ctr"/>
-          <a:lstStyle/>
-          <a:p>
-            <a:pPr indent="0" marL="0">
-              <a:buNone/>
-            </a:pPr>
-            <a:r>
-              <a:rPr lang="en-US" sz="1300" i="1" dirty="0">
-                <a:solidFill>
-                  <a:srgbClr val="6B6B8F"/>
-                </a:solidFill>
-                <a:latin typeface="Consolas" pitchFamily="34" charset="0"/>
-                <a:ea typeface="Consolas" pitchFamily="34" charset="-122"/>
-                <a:cs typeface="Consolas" pitchFamily="34" charset="-120"/>
-              </a:rPr>
-              <a:t>Windows AI APIs (.NET)</a:t>
-            </a:r>
-            <a:endParaRPr lang="en-US" sz="1300" dirty="0"/>
-          </a:p>
-        </p:txBody>
-      </p:sp>
-      <p:sp>
-        <p:nvSpPr>
-          <p:cNvPr id="18" name="Shape 16"/>
-          <p:cNvSpPr/>
-          <p:nvPr/>
-        </p:nvSpPr>
-        <p:spPr>
-          <a:xfrm>
-            <a:off x="4663440" y="3931920"/>
-            <a:ext cx="3154680" cy="0"/>
-          </a:xfrm>
-          <a:prstGeom prst="line">
-            <a:avLst/>
-          </a:prstGeom>
-          <a:noFill/>
-          <a:ln w="12700">
-            <a:solidFill>
-              <a:srgbClr val="E5E1F5"/>
-            </a:solidFill>
-            <a:prstDash val="solid"/>
-          </a:ln>
-        </p:spPr>
-      </p:sp>
-      <p:sp>
-        <p:nvSpPr>
-          <p:cNvPr id="19" name="Text 17"/>
-          <p:cNvSpPr/>
-          <p:nvPr/>
-        </p:nvSpPr>
-        <p:spPr>
-          <a:xfrm>
-            <a:off x="4663440" y="4069080"/>
-            <a:ext cx="3154680" cy="1325880"/>
-          </a:xfrm>
-          <a:prstGeom prst="rect">
-            <a:avLst/>
-          </a:prstGeom>
-          <a:noFill/>
-          <a:ln/>
-        </p:spPr>
-        <p:txBody>
-          <a:bodyPr wrap="square" rtlCol="0" anchor="ctr"/>
-          <a:lstStyle/>
-          <a:p>
-            <a:pPr indent="0" marL="0">
-              <a:spcAft>
-                <a:spcPts val="400"/>
-              </a:spcAft>
-              <a:buNone/>
-            </a:pPr>
-            <a:r>
-              <a:rPr lang="en-US" sz="1300" dirty="0">
-                <a:solidFill>
-                  <a:srgbClr val="0F0A2E"/>
-                </a:solidFill>
-                <a:latin typeface="Calibri" pitchFamily="34" charset="0"/>
-                <a:ea typeface="Calibri" pitchFamily="34" charset="-122"/>
-                <a:cs typeface="Calibri" pitchFamily="34" charset="-120"/>
-              </a:rPr>
-              <a:t>Copilot+ PCs · NPU-accelerated</a:t>
-            </a:r>
-            <a:endParaRPr lang="en-US" sz="1300" dirty="0"/>
-          </a:p>
-          <a:p>
-            <a:pPr indent="0" marL="0">
-              <a:spcAft>
-                <a:spcPts val="400"/>
-              </a:spcAft>
-              <a:buNone/>
-            </a:pPr>
-            <a:r>
-              <a:rPr lang="en-US" sz="1300" dirty="0">
-                <a:solidFill>
-                  <a:srgbClr val="0F0A2E"/>
-                </a:solidFill>
-                <a:latin typeface="Calibri" pitchFamily="34" charset="0"/>
-                <a:ea typeface="Calibri" pitchFamily="34" charset="-122"/>
-                <a:cs typeface="Calibri" pitchFamily="34" charset="-120"/>
-              </a:rPr>
-              <a:t>Small language model</a:t>
-            </a:r>
-            <a:endParaRPr lang="en-US" sz="1300" dirty="0"/>
-          </a:p>
-          <a:p>
-            <a:pPr indent="0" marL="0">
-              <a:spcAft>
-                <a:spcPts val="400"/>
-              </a:spcAft>
-              <a:buNone/>
-            </a:pPr>
-            <a:r>
-              <a:rPr lang="en-US" sz="1300" dirty="0">
-                <a:solidFill>
-                  <a:srgbClr val="0F0A2E"/>
-                </a:solidFill>
-                <a:latin typeface="Calibri" pitchFamily="34" charset="0"/>
-                <a:ea typeface="Calibri" pitchFamily="34" charset="-122"/>
-                <a:cs typeface="Calibri" pitchFamily="34" charset="-120"/>
-              </a:rPr>
-              <a:t>Summarize · rewrite · generate</a:t>
-            </a:r>
-            <a:endParaRPr lang="en-US" sz="1300" dirty="0"/>
-          </a:p>
-        </p:txBody>
-      </p:sp>
-      <p:sp>
-        <p:nvSpPr>
-          <p:cNvPr id="20" name="Text 18"/>
-          <p:cNvSpPr/>
-          <p:nvPr/>
-        </p:nvSpPr>
-        <p:spPr>
-          <a:xfrm>
-            <a:off x="4663440" y="5440680"/>
-            <a:ext cx="3154680" cy="320040"/>
-          </a:xfrm>
-          <a:prstGeom prst="rect">
-            <a:avLst/>
-          </a:prstGeom>
-          <a:noFill/>
-          <a:ln/>
-        </p:spPr>
-        <p:txBody>
-          <a:bodyPr wrap="square" rtlCol="0" anchor="ctr"/>
-          <a:lstStyle/>
-          <a:p>
-            <a:pPr indent="0" marL="0">
-              <a:buNone/>
-            </a:pPr>
-            <a:r>
-              <a:rPr lang="en-US" sz="1200" b="1" dirty="0">
-                <a:solidFill>
-                  <a:srgbClr val="6366F1"/>
-                </a:solidFill>
-                <a:latin typeface="Calibri" pitchFamily="34" charset="0"/>
-                <a:ea typeface="Calibri" pitchFamily="34" charset="-122"/>
-                <a:cs typeface="Calibri" pitchFamily="34" charset="-120"/>
-              </a:rPr>
-              <a:t>🔜  maui-labs PR #178</a:t>
-            </a:r>
-            <a:endParaRPr lang="en-US" sz="1200" dirty="0"/>
-          </a:p>
-        </p:txBody>
-      </p:sp>
-      <p:sp>
-        <p:nvSpPr>
-          <p:cNvPr id="21" name="Shape 19"/>
-          <p:cNvSpPr/>
-          <p:nvPr/>
-        </p:nvSpPr>
-        <p:spPr>
-          <a:xfrm>
-            <a:off x="8229600" y="2286000"/>
-            <a:ext cx="3703320" cy="3566160"/>
-          </a:xfrm>
-          <a:prstGeom prst="roundRect">
-            <a:avLst>
-              <a:gd name="adj" fmla="val 3077"/>
-            </a:avLst>
-          </a:prstGeom>
-          <a:solidFill>
-            <a:srgbClr val="FFFFFF"/>
-          </a:solidFill>
-          <a:ln w="12700">
-            <a:solidFill>
-              <a:srgbClr val="E5E1F5"/>
-            </a:solidFill>
-            <a:prstDash val="solid"/>
-          </a:ln>
-        </p:spPr>
-      </p:sp>
-      <p:sp>
-        <p:nvSpPr>
-          <p:cNvPr id="22" name="Shape 20"/>
-          <p:cNvSpPr/>
-          <p:nvPr/>
-        </p:nvSpPr>
-        <p:spPr>
-          <a:xfrm>
-            <a:off x="8229600" y="2286000"/>
-            <a:ext cx="3703320" cy="164592"/>
-          </a:xfrm>
-          <a:prstGeom prst="rect">
-            <a:avLst/>
-          </a:prstGeom>
-          <a:solidFill>
-            <a:srgbClr val="FBBF24"/>
-          </a:solidFill>
-          <a:ln w="12700">
-            <a:solidFill>
-              <a:srgbClr val="FBBF24"/>
-            </a:solidFill>
-            <a:prstDash val="solid"/>
-          </a:ln>
-        </p:spPr>
-      </p:sp>
-      <p:sp>
-        <p:nvSpPr>
-          <p:cNvPr id="23" name="Text 21"/>
-          <p:cNvSpPr/>
-          <p:nvPr/>
-        </p:nvSpPr>
-        <p:spPr>
-          <a:xfrm>
-            <a:off x="8503920" y="2606040"/>
-            <a:ext cx="3154680" cy="320040"/>
-          </a:xfrm>
-          <a:prstGeom prst="rect">
-            <a:avLst/>
-          </a:prstGeom>
-          <a:noFill/>
-          <a:ln/>
-        </p:spPr>
-        <p:txBody>
-          <a:bodyPr wrap="square" rtlCol="0" anchor="ctr"/>
-          <a:lstStyle/>
-          <a:p>
-            <a:pPr indent="0" marL="0">
-              <a:buNone/>
-            </a:pPr>
-            <a:r>
-              <a:rPr lang="en-US" sz="1100" b="1" spc="300" kern="0" dirty="0">
-                <a:solidFill>
-                  <a:srgbClr val="FBBF24"/>
-                </a:solidFill>
-                <a:latin typeface="Calibri" pitchFamily="34" charset="0"/>
-                <a:ea typeface="Calibri" pitchFamily="34" charset="-122"/>
-                <a:cs typeface="Calibri" pitchFamily="34" charset="-120"/>
-              </a:rPr>
-              <a:t>GOOGLE</a:t>
-            </a:r>
-            <a:endParaRPr lang="en-US" sz="1100" dirty="0"/>
-          </a:p>
-        </p:txBody>
-      </p:sp>
-      <p:sp>
-        <p:nvSpPr>
-          <p:cNvPr id="24" name="Text 22"/>
-          <p:cNvSpPr/>
-          <p:nvPr/>
-        </p:nvSpPr>
-        <p:spPr>
-          <a:xfrm>
-            <a:off x="8503920" y="2926080"/>
-            <a:ext cx="3154680" cy="548640"/>
-          </a:xfrm>
-          <a:prstGeom prst="rect">
-            <a:avLst/>
-          </a:prstGeom>
-          <a:noFill/>
-          <a:ln/>
-        </p:spPr>
-        <p:txBody>
-          <a:bodyPr wrap="square" rtlCol="0" anchor="ctr"/>
-          <a:lstStyle/>
-          <a:p>
-            <a:pPr indent="0" marL="0">
-              <a:buNone/>
-            </a:pPr>
-            <a:r>
-              <a:rPr lang="en-US" sz="2200" b="1" dirty="0">
-                <a:solidFill>
-                  <a:srgbClr val="0F0A2E"/>
-                </a:solidFill>
-                <a:latin typeface="Georgia" pitchFamily="34" charset="0"/>
-                <a:ea typeface="Georgia" pitchFamily="34" charset="-122"/>
-                <a:cs typeface="Georgia" pitchFamily="34" charset="-120"/>
-              </a:rPr>
-              <a:t>ML Kit + Gemini Nano</a:t>
-            </a:r>
-            <a:endParaRPr lang="en-US" sz="2200" dirty="0"/>
-          </a:p>
-        </p:txBody>
-      </p:sp>
-      <p:sp>
-        <p:nvSpPr>
-          <p:cNvPr id="25" name="Text 23"/>
-          <p:cNvSpPr/>
-          <p:nvPr/>
-        </p:nvSpPr>
-        <p:spPr>
-          <a:xfrm>
-            <a:off x="8503920" y="3474720"/>
-            <a:ext cx="3154680" cy="365760"/>
-          </a:xfrm>
-          <a:prstGeom prst="rect">
-            <a:avLst/>
-          </a:prstGeom>
-          <a:noFill/>
-          <a:ln/>
-        </p:spPr>
-        <p:txBody>
-          <a:bodyPr wrap="square" rtlCol="0" anchor="ctr"/>
-          <a:lstStyle/>
-          <a:p>
-            <a:pPr indent="0" marL="0">
-              <a:buNone/>
-            </a:pPr>
-            <a:r>
-              <a:rPr lang="en-US" sz="1300" i="1" dirty="0">
-                <a:solidFill>
-                  <a:srgbClr val="6B6B8F"/>
-                </a:solidFill>
-                <a:latin typeface="Consolas" pitchFamily="34" charset="0"/>
-                <a:ea typeface="Consolas" pitchFamily="34" charset="-122"/>
-                <a:cs typeface="Consolas" pitchFamily="34" charset="-120"/>
-              </a:rPr>
-              <a:t>ML Kit (Kotlin/Java)</a:t>
-            </a:r>
-            <a:endParaRPr lang="en-US" sz="1300" dirty="0"/>
-          </a:p>
-        </p:txBody>
-      </p:sp>
-      <p:sp>
-        <p:nvSpPr>
-          <p:cNvPr id="26" name="Shape 24"/>
-          <p:cNvSpPr/>
-          <p:nvPr/>
-        </p:nvSpPr>
-        <p:spPr>
-          <a:xfrm>
-            <a:off x="8503920" y="3931920"/>
-            <a:ext cx="3154680" cy="0"/>
-          </a:xfrm>
-          <a:prstGeom prst="line">
-            <a:avLst/>
-          </a:prstGeom>
-          <a:noFill/>
-          <a:ln w="12700">
-            <a:solidFill>
-              <a:srgbClr val="E5E1F5"/>
-            </a:solidFill>
-            <a:prstDash val="solid"/>
-          </a:ln>
-        </p:spPr>
-      </p:sp>
-      <p:sp>
-        <p:nvSpPr>
-          <p:cNvPr id="27" name="Text 25"/>
-          <p:cNvSpPr/>
-          <p:nvPr/>
-        </p:nvSpPr>
-        <p:spPr>
-          <a:xfrm>
-            <a:off x="8503920" y="4069080"/>
-            <a:ext cx="3154680" cy="1325880"/>
-          </a:xfrm>
-          <a:prstGeom prst="rect">
-            <a:avLst/>
-          </a:prstGeom>
-          <a:noFill/>
-          <a:ln/>
-        </p:spPr>
-        <p:txBody>
-          <a:bodyPr wrap="square" rtlCol="0" anchor="ctr"/>
-          <a:lstStyle/>
-          <a:p>
-            <a:pPr indent="0" marL="0">
-              <a:spcAft>
-                <a:spcPts val="400"/>
-              </a:spcAft>
-              <a:buNone/>
-            </a:pPr>
-            <a:r>
-              <a:rPr lang="en-US" sz="1300" dirty="0">
-                <a:solidFill>
-                  <a:srgbClr val="0F0A2E"/>
-                </a:solidFill>
-                <a:latin typeface="Calibri" pitchFamily="34" charset="0"/>
-                <a:ea typeface="Calibri" pitchFamily="34" charset="-122"/>
-                <a:cs typeface="Calibri" pitchFamily="34" charset="-120"/>
-              </a:rPr>
-              <a:t>Android · AICore service</a:t>
-            </a:r>
-            <a:endParaRPr lang="en-US" sz="1300" dirty="0"/>
-          </a:p>
-          <a:p>
-            <a:pPr indent="0" marL="0">
-              <a:spcAft>
-                <a:spcPts val="400"/>
-              </a:spcAft>
-              <a:buNone/>
-            </a:pPr>
-            <a:r>
-              <a:rPr lang="en-US" sz="1300" dirty="0">
-                <a:solidFill>
-                  <a:srgbClr val="0F0A2E"/>
-                </a:solidFill>
-                <a:latin typeface="Calibri" pitchFamily="34" charset="0"/>
-                <a:ea typeface="Calibri" pitchFamily="34" charset="-122"/>
-                <a:cs typeface="Calibri" pitchFamily="34" charset="-120"/>
-              </a:rPr>
-              <a:t>Compact Gemini Nano</a:t>
-            </a:r>
-            <a:endParaRPr lang="en-US" sz="1300" dirty="0"/>
-          </a:p>
-          <a:p>
-            <a:pPr indent="0" marL="0">
-              <a:spcAft>
-                <a:spcPts val="400"/>
-              </a:spcAft>
-              <a:buNone/>
-            </a:pPr>
-            <a:r>
-              <a:rPr lang="en-US" sz="1300" dirty="0">
-                <a:solidFill>
-                  <a:srgbClr val="0F0A2E"/>
-                </a:solidFill>
-                <a:latin typeface="Calibri" pitchFamily="34" charset="0"/>
-                <a:ea typeface="Calibri" pitchFamily="34" charset="-122"/>
-                <a:cs typeface="Calibri" pitchFamily="34" charset="-120"/>
-              </a:rPr>
-              <a:t>Summarize · proofread · rewrite</a:t>
-            </a:r>
-            <a:endParaRPr lang="en-US" sz="1300" dirty="0"/>
-          </a:p>
-        </p:txBody>
-      </p:sp>
-      <p:sp>
-        <p:nvSpPr>
-          <p:cNvPr id="28" name="Text 26"/>
-          <p:cNvSpPr/>
-          <p:nvPr/>
-        </p:nvSpPr>
-        <p:spPr>
-          <a:xfrm>
-            <a:off x="8503920" y="5440680"/>
-            <a:ext cx="3154680" cy="320040"/>
-          </a:xfrm>
-          <a:prstGeom prst="rect">
-            <a:avLst/>
-          </a:prstGeom>
-          <a:noFill/>
-          <a:ln/>
-        </p:spPr>
-        <p:txBody>
-          <a:bodyPr wrap="square" rtlCol="0" anchor="ctr"/>
-          <a:lstStyle/>
-          <a:p>
-            <a:pPr indent="0" marL="0">
-              <a:buNone/>
-            </a:pPr>
-            <a:r>
-              <a:rPr lang="en-US" sz="1200" b="1" dirty="0">
-                <a:solidFill>
-                  <a:srgbClr val="FBBF24"/>
-                </a:solidFill>
-                <a:latin typeface="Calibri" pitchFamily="34" charset="0"/>
-                <a:ea typeface="Calibri" pitchFamily="34" charset="-122"/>
-                <a:cs typeface="Calibri" pitchFamily="34" charset="-120"/>
-              </a:rPr>
-              <a:t>🔬  .NET wrapper under investigation</a:t>
-            </a:r>
-            <a:endParaRPr lang="en-US" sz="1200" dirty="0"/>
-          </a:p>
-        </p:txBody>
-      </p:sp>
-      <p:sp>
-        <p:nvSpPr>
-          <p:cNvPr id="29" name="Shape 27"/>
-          <p:cNvSpPr/>
-          <p:nvPr/>
-        </p:nvSpPr>
-        <p:spPr>
-          <a:xfrm>
-            <a:off x="548640" y="5989320"/>
-            <a:ext cx="11094415" cy="502920"/>
-          </a:xfrm>
-          <a:prstGeom prst="roundRect">
-            <a:avLst>
-              <a:gd name="adj" fmla="val 14545"/>
-            </a:avLst>
-          </a:prstGeom>
-          <a:solidFill>
-            <a:srgbClr val="0F0A2E"/>
-          </a:solidFill>
-          <a:ln w="12700">
-            <a:solidFill>
-              <a:srgbClr val="0F0A2E"/>
-            </a:solidFill>
-            <a:prstDash val="solid"/>
-          </a:ln>
-        </p:spPr>
-      </p:sp>
-      <p:sp>
-        <p:nvSpPr>
-          <p:cNvPr id="30" name="Text 28"/>
-          <p:cNvSpPr/>
-          <p:nvPr/>
-        </p:nvSpPr>
-        <p:spPr>
-          <a:xfrm>
-            <a:off x="548640" y="5989320"/>
-            <a:ext cx="11094415" cy="502920"/>
-          </a:xfrm>
-          <a:prstGeom prst="rect">
-            <a:avLst/>
-          </a:prstGeom>
-          <a:noFill/>
-          <a:ln/>
-        </p:spPr>
-        <p:txBody>
-          <a:bodyPr wrap="square" rtlCol="0" anchor="ctr"/>
-          <a:lstStyle/>
-          <a:p>
-            <a:pPr algn="ctr" indent="0" marL="0">
-              <a:buNone/>
-            </a:pPr>
-            <a:r>
-              <a:rPr lang="en-US" sz="1300" dirty="0">
-                <a:solidFill>
-                  <a:srgbClr val="CFCBED"/>
-                </a:solidFill>
-                <a:latin typeface="Calibri" pitchFamily="34" charset="0"/>
-                <a:ea typeface="Calibri" pitchFamily="34" charset="-122"/>
-                <a:cs typeface="Calibri" pitchFamily="34" charset="-120"/>
-              </a:rPr>
-              <a:t>Unified for .NET MAUI:  </a:t>
-            </a:r>
-            <a:pPr algn="ctr" indent="0" marL="0">
-              <a:buNone/>
-            </a:pPr>
-            <a:r>
-              <a:rPr lang="en-US" sz="1300" b="1" dirty="0">
-                <a:solidFill>
-                  <a:srgbClr val="FB7185"/>
-                </a:solidFill>
-                <a:latin typeface="Consolas" pitchFamily="34" charset="0"/>
-                <a:ea typeface="Consolas" pitchFamily="34" charset="-122"/>
-                <a:cs typeface="Consolas" pitchFamily="34" charset="-120"/>
-              </a:rPr>
-              <a:t>Microsoft.Maui.Essentials.AI</a:t>
-            </a:r>
-            <a:pPr algn="ctr" indent="0" marL="0">
-              <a:buNone/>
-            </a:pPr>
-            <a:r>
-              <a:rPr lang="en-US" sz="1300" i="1" dirty="0">
-                <a:solidFill>
-                  <a:srgbClr val="CFCBED"/>
-                </a:solidFill>
-                <a:latin typeface="Calibri" pitchFamily="34" charset="0"/>
-                <a:ea typeface="Calibri" pitchFamily="34" charset="-122"/>
-                <a:cs typeface="Calibri" pitchFamily="34" charset="-120"/>
-              </a:rPr>
-              <a:t>  →  one IChatClient shape, Apple today · Phi Silica in progress · Gemini under investigation</a:t>
-            </a:r>
-            <a:endParaRPr lang="en-US" sz="1300" dirty="0"/>
-          </a:p>
-        </p:txBody>
-      </p:sp>
       <p:pic>
         <p:nvPicPr>
-          <p:cNvPr id="31" name="Image 0" descr="preencoded.png">    </p:cNvPr>
+          <p:cNvPr id="12" name="Image 0" descr="preencoded.png">    </p:cNvPr>
           <p:cNvPicPr>
             <a:picLocks noChangeAspect="1"/>
           </p:cNvPicPr>
@@ -23130,17 +22371,330 @@
         </p:blipFill>
         <p:spPr>
           <a:xfrm>
-            <a:off x="10180015" y="502920"/>
-            <a:ext cx="329184" cy="329184"/>
+            <a:off x="822960" y="5458968"/>
+            <a:ext cx="237744" cy="237744"/>
           </a:xfrm>
           <a:prstGeom prst="rect">
             <a:avLst/>
           </a:prstGeom>
         </p:spPr>
       </p:pic>
+      <p:sp>
+        <p:nvSpPr>
+          <p:cNvPr id="13" name="Text 10"/>
+          <p:cNvSpPr/>
+          <p:nvPr/>
+        </p:nvSpPr>
+        <p:spPr>
+          <a:xfrm>
+            <a:off x="1115568" y="5440680"/>
+            <a:ext cx="2862072" cy="320040"/>
+          </a:xfrm>
+          <a:prstGeom prst="rect">
+            <a:avLst/>
+          </a:prstGeom>
+          <a:noFill/>
+          <a:ln/>
+        </p:spPr>
+        <p:txBody>
+          <a:bodyPr wrap="square" rtlCol="0" anchor="ctr"/>
+          <a:lstStyle/>
+          <a:p>
+            <a:pPr indent="0" marL="0">
+              <a:buNone/>
+            </a:pPr>
+            <a:r>
+              <a:rPr lang="en-US" sz="1200" b="1" dirty="0">
+                <a:solidFill>
+                  <a:srgbClr val="FB7185"/>
+                </a:solidFill>
+                <a:latin typeface="Calibri" pitchFamily="34" charset="0"/>
+                <a:ea typeface="Calibri" pitchFamily="34" charset="-122"/>
+                <a:cs typeface="Calibri" pitchFamily="34" charset="-120"/>
+              </a:rPr>
+              <a:t>IChatClient ready</a:t>
+            </a:r>
+            <a:endParaRPr lang="en-US" sz="1200" dirty="0"/>
+          </a:p>
+        </p:txBody>
+      </p:sp>
+      <p:sp>
+        <p:nvSpPr>
+          <p:cNvPr id="14" name="Shape 11"/>
+          <p:cNvSpPr/>
+          <p:nvPr/>
+        </p:nvSpPr>
+        <p:spPr>
+          <a:xfrm>
+            <a:off x="4389120" y="2286000"/>
+            <a:ext cx="3703320" cy="3566160"/>
+          </a:xfrm>
+          <a:prstGeom prst="roundRect">
+            <a:avLst>
+              <a:gd name="adj" fmla="val 3077"/>
+            </a:avLst>
+          </a:prstGeom>
+          <a:solidFill>
+            <a:srgbClr val="FFFFFF"/>
+          </a:solidFill>
+          <a:ln w="12700">
+            <a:solidFill>
+              <a:srgbClr val="E5E1F5"/>
+            </a:solidFill>
+            <a:prstDash val="solid"/>
+          </a:ln>
+        </p:spPr>
+      </p:sp>
+      <p:sp>
+        <p:nvSpPr>
+          <p:cNvPr id="15" name="Shape 12"/>
+          <p:cNvSpPr/>
+          <p:nvPr/>
+        </p:nvSpPr>
+        <p:spPr>
+          <a:xfrm>
+            <a:off x="4389120" y="2286000"/>
+            <a:ext cx="3703320" cy="164592"/>
+          </a:xfrm>
+          <a:prstGeom prst="rect">
+            <a:avLst/>
+          </a:prstGeom>
+          <a:solidFill>
+            <a:srgbClr val="6366F1"/>
+          </a:solidFill>
+          <a:ln w="12700">
+            <a:solidFill>
+              <a:srgbClr val="6366F1"/>
+            </a:solidFill>
+            <a:prstDash val="solid"/>
+          </a:ln>
+        </p:spPr>
+      </p:sp>
+      <p:sp>
+        <p:nvSpPr>
+          <p:cNvPr id="16" name="Text 13"/>
+          <p:cNvSpPr/>
+          <p:nvPr/>
+        </p:nvSpPr>
+        <p:spPr>
+          <a:xfrm>
+            <a:off x="4663440" y="2606040"/>
+            <a:ext cx="3154680" cy="320040"/>
+          </a:xfrm>
+          <a:prstGeom prst="rect">
+            <a:avLst/>
+          </a:prstGeom>
+          <a:noFill/>
+          <a:ln/>
+        </p:spPr>
+        <p:txBody>
+          <a:bodyPr wrap="square" rtlCol="0" anchor="ctr"/>
+          <a:lstStyle/>
+          <a:p>
+            <a:pPr indent="0" marL="0">
+              <a:buNone/>
+            </a:pPr>
+            <a:r>
+              <a:rPr lang="en-US" sz="1100" b="1" spc="300" kern="0" dirty="0">
+                <a:solidFill>
+                  <a:srgbClr val="6366F1"/>
+                </a:solidFill>
+                <a:latin typeface="Calibri" pitchFamily="34" charset="0"/>
+                <a:ea typeface="Calibri" pitchFamily="34" charset="-122"/>
+                <a:cs typeface="Calibri" pitchFamily="34" charset="-120"/>
+              </a:rPr>
+              <a:t>MICROSOFT</a:t>
+            </a:r>
+            <a:endParaRPr lang="en-US" sz="1100" dirty="0"/>
+          </a:p>
+        </p:txBody>
+      </p:sp>
+      <p:sp>
+        <p:nvSpPr>
+          <p:cNvPr id="17" name="Text 14"/>
+          <p:cNvSpPr/>
+          <p:nvPr/>
+        </p:nvSpPr>
+        <p:spPr>
+          <a:xfrm>
+            <a:off x="4663440" y="2926080"/>
+            <a:ext cx="3154680" cy="548640"/>
+          </a:xfrm>
+          <a:prstGeom prst="rect">
+            <a:avLst/>
+          </a:prstGeom>
+          <a:noFill/>
+          <a:ln/>
+        </p:spPr>
+        <p:txBody>
+          <a:bodyPr wrap="square" rtlCol="0" anchor="ctr"/>
+          <a:lstStyle/>
+          <a:p>
+            <a:pPr indent="0" marL="0">
+              <a:buNone/>
+            </a:pPr>
+            <a:r>
+              <a:rPr lang="en-US" sz="2200" b="1" dirty="0">
+                <a:solidFill>
+                  <a:srgbClr val="0F0A2E"/>
+                </a:solidFill>
+                <a:latin typeface="Georgia" pitchFamily="34" charset="0"/>
+                <a:ea typeface="Georgia" pitchFamily="34" charset="-122"/>
+                <a:cs typeface="Georgia" pitchFamily="34" charset="-120"/>
+              </a:rPr>
+              <a:t>Phi Silica</a:t>
+            </a:r>
+            <a:endParaRPr lang="en-US" sz="2200" dirty="0"/>
+          </a:p>
+        </p:txBody>
+      </p:sp>
+      <p:sp>
+        <p:nvSpPr>
+          <p:cNvPr id="18" name="Text 15"/>
+          <p:cNvSpPr/>
+          <p:nvPr/>
+        </p:nvSpPr>
+        <p:spPr>
+          <a:xfrm>
+            <a:off x="4663440" y="3474720"/>
+            <a:ext cx="3154680" cy="365760"/>
+          </a:xfrm>
+          <a:prstGeom prst="rect">
+            <a:avLst/>
+          </a:prstGeom>
+          <a:noFill/>
+          <a:ln/>
+        </p:spPr>
+        <p:txBody>
+          <a:bodyPr wrap="square" rtlCol="0" anchor="ctr"/>
+          <a:lstStyle/>
+          <a:p>
+            <a:pPr indent="0" marL="0">
+              <a:buNone/>
+            </a:pPr>
+            <a:r>
+              <a:rPr lang="en-US" sz="1300" i="1" dirty="0">
+                <a:solidFill>
+                  <a:srgbClr val="6B6B8F"/>
+                </a:solidFill>
+                <a:latin typeface="Consolas" pitchFamily="34" charset="0"/>
+                <a:ea typeface="Consolas" pitchFamily="34" charset="-122"/>
+                <a:cs typeface="Consolas" pitchFamily="34" charset="-120"/>
+              </a:rPr>
+              <a:t>Windows AI APIs (.NET)</a:t>
+            </a:r>
+            <a:endParaRPr lang="en-US" sz="1300" dirty="0"/>
+          </a:p>
+        </p:txBody>
+      </p:sp>
+      <p:sp>
+        <p:nvSpPr>
+          <p:cNvPr id="19" name="Shape 16"/>
+          <p:cNvSpPr/>
+          <p:nvPr/>
+        </p:nvSpPr>
+        <p:spPr>
+          <a:xfrm>
+            <a:off x="4663440" y="3931920"/>
+            <a:ext cx="3154680" cy="0"/>
+          </a:xfrm>
+          <a:prstGeom prst="line">
+            <a:avLst/>
+          </a:prstGeom>
+          <a:noFill/>
+          <a:ln w="12700">
+            <a:solidFill>
+              <a:srgbClr val="E5E1F5"/>
+            </a:solidFill>
+            <a:prstDash val="solid"/>
+          </a:ln>
+        </p:spPr>
+      </p:sp>
+      <p:sp>
+        <p:nvSpPr>
+          <p:cNvPr id="20" name="Text 17"/>
+          <p:cNvSpPr/>
+          <p:nvPr/>
+        </p:nvSpPr>
+        <p:spPr>
+          <a:xfrm>
+            <a:off x="4663440" y="4069080"/>
+            <a:ext cx="3154680" cy="1325880"/>
+          </a:xfrm>
+          <a:prstGeom prst="rect">
+            <a:avLst/>
+          </a:prstGeom>
+          <a:noFill/>
+          <a:ln/>
+        </p:spPr>
+        <p:txBody>
+          <a:bodyPr wrap="square" rtlCol="0" anchor="ctr"/>
+          <a:lstStyle/>
+          <a:p>
+            <a:pPr indent="0" marL="0">
+              <a:spcAft>
+                <a:spcPts val="400"/>
+              </a:spcAft>
+              <a:buNone/>
+            </a:pPr>
+            <a:r>
+              <a:rPr lang="en-US" sz="1300" dirty="0">
+                <a:solidFill>
+                  <a:srgbClr val="0F0A2E"/>
+                </a:solidFill>
+                <a:latin typeface="Calibri" pitchFamily="34" charset="0"/>
+                <a:ea typeface="Calibri" pitchFamily="34" charset="-122"/>
+                <a:cs typeface="Calibri" pitchFamily="34" charset="-120"/>
+              </a:rPr>
+              <a:t>Copilot+ PCs · NPU-accelerated</a:t>
+            </a:r>
+            <a:endParaRPr lang="en-US" sz="1300" dirty="0"/>
+          </a:p>
+          <a:p>
+            <a:pPr indent="0" marL="0">
+              <a:spcAft>
+                <a:spcPts val="400"/>
+              </a:spcAft>
+              <a:buNone/>
+            </a:pPr>
+            <a:r>
+              <a:rPr lang="en-US" sz="1300" dirty="0">
+                <a:solidFill>
+                  <a:srgbClr val="0F0A2E"/>
+                </a:solidFill>
+                <a:latin typeface="Calibri" pitchFamily="34" charset="0"/>
+                <a:ea typeface="Calibri" pitchFamily="34" charset="-122"/>
+                <a:cs typeface="Calibri" pitchFamily="34" charset="-120"/>
+              </a:rPr>
+              <a:t>Small language model</a:t>
+            </a:r>
+            <a:endParaRPr lang="en-US" sz="1300" dirty="0"/>
+          </a:p>
+          <a:p>
+            <a:pPr indent="0" marL="0">
+              <a:spcAft>
+                <a:spcPts val="400"/>
+              </a:spcAft>
+              <a:buNone/>
+            </a:pPr>
+            <a:r>
+              <a:rPr lang="en-US" sz="1300" dirty="0">
+                <a:solidFill>
+                  <a:srgbClr val="0F0A2E"/>
+                </a:solidFill>
+                <a:latin typeface="Calibri" pitchFamily="34" charset="0"/>
+                <a:ea typeface="Calibri" pitchFamily="34" charset="-122"/>
+                <a:cs typeface="Calibri" pitchFamily="34" charset="-120"/>
+              </a:rPr>
+              <a:t>Summarize · rewrite · generate</a:t>
+            </a:r>
+            <a:endParaRPr lang="en-US" sz="1300" dirty="0"/>
+          </a:p>
+        </p:txBody>
+      </p:sp>
       <p:pic>
         <p:nvPicPr>
-          <p:cNvPr id="32" name="Image 1" descr="preencoded.png">    </p:cNvPr>
+          <p:cNvPr id="21" name="Image 1" descr="preencoded.png">    </p:cNvPr>
           <p:cNvPicPr>
             <a:picLocks noChangeAspect="1"/>
           </p:cNvPicPr>
@@ -23160,17 +22714,330 @@
         </p:blipFill>
         <p:spPr>
           <a:xfrm>
-            <a:off x="10564063" y="502920"/>
-            <a:ext cx="329184" cy="329184"/>
+            <a:off x="4663440" y="5458968"/>
+            <a:ext cx="237744" cy="237744"/>
           </a:xfrm>
           <a:prstGeom prst="rect">
             <a:avLst/>
           </a:prstGeom>
         </p:spPr>
       </p:pic>
+      <p:sp>
+        <p:nvSpPr>
+          <p:cNvPr id="22" name="Text 18"/>
+          <p:cNvSpPr/>
+          <p:nvPr/>
+        </p:nvSpPr>
+        <p:spPr>
+          <a:xfrm>
+            <a:off x="4956048" y="5440680"/>
+            <a:ext cx="2862072" cy="320040"/>
+          </a:xfrm>
+          <a:prstGeom prst="rect">
+            <a:avLst/>
+          </a:prstGeom>
+          <a:noFill/>
+          <a:ln/>
+        </p:spPr>
+        <p:txBody>
+          <a:bodyPr wrap="square" rtlCol="0" anchor="ctr"/>
+          <a:lstStyle/>
+          <a:p>
+            <a:pPr indent="0" marL="0">
+              <a:buNone/>
+            </a:pPr>
+            <a:r>
+              <a:rPr lang="en-US" sz="1200" b="1" dirty="0">
+                <a:solidFill>
+                  <a:srgbClr val="6366F1"/>
+                </a:solidFill>
+                <a:latin typeface="Calibri" pitchFamily="34" charset="0"/>
+                <a:ea typeface="Calibri" pitchFamily="34" charset="-122"/>
+                <a:cs typeface="Calibri" pitchFamily="34" charset="-120"/>
+              </a:rPr>
+              <a:t>IChatClient in PR #178</a:t>
+            </a:r>
+            <a:endParaRPr lang="en-US" sz="1200" dirty="0"/>
+          </a:p>
+        </p:txBody>
+      </p:sp>
+      <p:sp>
+        <p:nvSpPr>
+          <p:cNvPr id="23" name="Shape 19"/>
+          <p:cNvSpPr/>
+          <p:nvPr/>
+        </p:nvSpPr>
+        <p:spPr>
+          <a:xfrm>
+            <a:off x="8229600" y="2286000"/>
+            <a:ext cx="3703320" cy="3566160"/>
+          </a:xfrm>
+          <a:prstGeom prst="roundRect">
+            <a:avLst>
+              <a:gd name="adj" fmla="val 3077"/>
+            </a:avLst>
+          </a:prstGeom>
+          <a:solidFill>
+            <a:srgbClr val="FFFFFF"/>
+          </a:solidFill>
+          <a:ln w="12700">
+            <a:solidFill>
+              <a:srgbClr val="E5E1F5"/>
+            </a:solidFill>
+            <a:prstDash val="solid"/>
+          </a:ln>
+        </p:spPr>
+      </p:sp>
+      <p:sp>
+        <p:nvSpPr>
+          <p:cNvPr id="24" name="Shape 20"/>
+          <p:cNvSpPr/>
+          <p:nvPr/>
+        </p:nvSpPr>
+        <p:spPr>
+          <a:xfrm>
+            <a:off x="8229600" y="2286000"/>
+            <a:ext cx="3703320" cy="164592"/>
+          </a:xfrm>
+          <a:prstGeom prst="rect">
+            <a:avLst/>
+          </a:prstGeom>
+          <a:solidFill>
+            <a:srgbClr val="FBBF24"/>
+          </a:solidFill>
+          <a:ln w="12700">
+            <a:solidFill>
+              <a:srgbClr val="FBBF24"/>
+            </a:solidFill>
+            <a:prstDash val="solid"/>
+          </a:ln>
+        </p:spPr>
+      </p:sp>
+      <p:sp>
+        <p:nvSpPr>
+          <p:cNvPr id="25" name="Text 21"/>
+          <p:cNvSpPr/>
+          <p:nvPr/>
+        </p:nvSpPr>
+        <p:spPr>
+          <a:xfrm>
+            <a:off x="8503920" y="2606040"/>
+            <a:ext cx="3154680" cy="320040"/>
+          </a:xfrm>
+          <a:prstGeom prst="rect">
+            <a:avLst/>
+          </a:prstGeom>
+          <a:noFill/>
+          <a:ln/>
+        </p:spPr>
+        <p:txBody>
+          <a:bodyPr wrap="square" rtlCol="0" anchor="ctr"/>
+          <a:lstStyle/>
+          <a:p>
+            <a:pPr indent="0" marL="0">
+              <a:buNone/>
+            </a:pPr>
+            <a:r>
+              <a:rPr lang="en-US" sz="1100" b="1" spc="300" kern="0" dirty="0">
+                <a:solidFill>
+                  <a:srgbClr val="FBBF24"/>
+                </a:solidFill>
+                <a:latin typeface="Calibri" pitchFamily="34" charset="0"/>
+                <a:ea typeface="Calibri" pitchFamily="34" charset="-122"/>
+                <a:cs typeface="Calibri" pitchFamily="34" charset="-120"/>
+              </a:rPr>
+              <a:t>GOOGLE</a:t>
+            </a:r>
+            <a:endParaRPr lang="en-US" sz="1100" dirty="0"/>
+          </a:p>
+        </p:txBody>
+      </p:sp>
+      <p:sp>
+        <p:nvSpPr>
+          <p:cNvPr id="26" name="Text 22"/>
+          <p:cNvSpPr/>
+          <p:nvPr/>
+        </p:nvSpPr>
+        <p:spPr>
+          <a:xfrm>
+            <a:off x="8503920" y="2926080"/>
+            <a:ext cx="3154680" cy="548640"/>
+          </a:xfrm>
+          <a:prstGeom prst="rect">
+            <a:avLst/>
+          </a:prstGeom>
+          <a:noFill/>
+          <a:ln/>
+        </p:spPr>
+        <p:txBody>
+          <a:bodyPr wrap="square" rtlCol="0" anchor="ctr"/>
+          <a:lstStyle/>
+          <a:p>
+            <a:pPr indent="0" marL="0">
+              <a:buNone/>
+            </a:pPr>
+            <a:r>
+              <a:rPr lang="en-US" sz="2200" b="1" dirty="0">
+                <a:solidFill>
+                  <a:srgbClr val="0F0A2E"/>
+                </a:solidFill>
+                <a:latin typeface="Georgia" pitchFamily="34" charset="0"/>
+                <a:ea typeface="Georgia" pitchFamily="34" charset="-122"/>
+                <a:cs typeface="Georgia" pitchFamily="34" charset="-120"/>
+              </a:rPr>
+              <a:t>ML Kit + Gemini Nano</a:t>
+            </a:r>
+            <a:endParaRPr lang="en-US" sz="2200" dirty="0"/>
+          </a:p>
+        </p:txBody>
+      </p:sp>
+      <p:sp>
+        <p:nvSpPr>
+          <p:cNvPr id="27" name="Text 23"/>
+          <p:cNvSpPr/>
+          <p:nvPr/>
+        </p:nvSpPr>
+        <p:spPr>
+          <a:xfrm>
+            <a:off x="8503920" y="3474720"/>
+            <a:ext cx="3154680" cy="365760"/>
+          </a:xfrm>
+          <a:prstGeom prst="rect">
+            <a:avLst/>
+          </a:prstGeom>
+          <a:noFill/>
+          <a:ln/>
+        </p:spPr>
+        <p:txBody>
+          <a:bodyPr wrap="square" rtlCol="0" anchor="ctr"/>
+          <a:lstStyle/>
+          <a:p>
+            <a:pPr indent="0" marL="0">
+              <a:buNone/>
+            </a:pPr>
+            <a:r>
+              <a:rPr lang="en-US" sz="1300" i="1" dirty="0">
+                <a:solidFill>
+                  <a:srgbClr val="6B6B8F"/>
+                </a:solidFill>
+                <a:latin typeface="Consolas" pitchFamily="34" charset="0"/>
+                <a:ea typeface="Consolas" pitchFamily="34" charset="-122"/>
+                <a:cs typeface="Consolas" pitchFamily="34" charset="-120"/>
+              </a:rPr>
+              <a:t>ML Kit (Kotlin/Java)</a:t>
+            </a:r>
+            <a:endParaRPr lang="en-US" sz="1300" dirty="0"/>
+          </a:p>
+        </p:txBody>
+      </p:sp>
+      <p:sp>
+        <p:nvSpPr>
+          <p:cNvPr id="28" name="Shape 24"/>
+          <p:cNvSpPr/>
+          <p:nvPr/>
+        </p:nvSpPr>
+        <p:spPr>
+          <a:xfrm>
+            <a:off x="8503920" y="3931920"/>
+            <a:ext cx="3154680" cy="0"/>
+          </a:xfrm>
+          <a:prstGeom prst="line">
+            <a:avLst/>
+          </a:prstGeom>
+          <a:noFill/>
+          <a:ln w="12700">
+            <a:solidFill>
+              <a:srgbClr val="E5E1F5"/>
+            </a:solidFill>
+            <a:prstDash val="solid"/>
+          </a:ln>
+        </p:spPr>
+      </p:sp>
+      <p:sp>
+        <p:nvSpPr>
+          <p:cNvPr id="29" name="Text 25"/>
+          <p:cNvSpPr/>
+          <p:nvPr/>
+        </p:nvSpPr>
+        <p:spPr>
+          <a:xfrm>
+            <a:off x="8503920" y="4069080"/>
+            <a:ext cx="3154680" cy="1325880"/>
+          </a:xfrm>
+          <a:prstGeom prst="rect">
+            <a:avLst/>
+          </a:prstGeom>
+          <a:noFill/>
+          <a:ln/>
+        </p:spPr>
+        <p:txBody>
+          <a:bodyPr wrap="square" rtlCol="0" anchor="ctr"/>
+          <a:lstStyle/>
+          <a:p>
+            <a:pPr indent="0" marL="0">
+              <a:spcAft>
+                <a:spcPts val="400"/>
+              </a:spcAft>
+              <a:buNone/>
+            </a:pPr>
+            <a:r>
+              <a:rPr lang="en-US" sz="1300" dirty="0">
+                <a:solidFill>
+                  <a:srgbClr val="0F0A2E"/>
+                </a:solidFill>
+                <a:latin typeface="Calibri" pitchFamily="34" charset="0"/>
+                <a:ea typeface="Calibri" pitchFamily="34" charset="-122"/>
+                <a:cs typeface="Calibri" pitchFamily="34" charset="-120"/>
+              </a:rPr>
+              <a:t>Android · AICore service</a:t>
+            </a:r>
+            <a:endParaRPr lang="en-US" sz="1300" dirty="0"/>
+          </a:p>
+          <a:p>
+            <a:pPr indent="0" marL="0">
+              <a:spcAft>
+                <a:spcPts val="400"/>
+              </a:spcAft>
+              <a:buNone/>
+            </a:pPr>
+            <a:r>
+              <a:rPr lang="en-US" sz="1300" dirty="0">
+                <a:solidFill>
+                  <a:srgbClr val="0F0A2E"/>
+                </a:solidFill>
+                <a:latin typeface="Calibri" pitchFamily="34" charset="0"/>
+                <a:ea typeface="Calibri" pitchFamily="34" charset="-122"/>
+                <a:cs typeface="Calibri" pitchFamily="34" charset="-120"/>
+              </a:rPr>
+              <a:t>Compact Gemini Nano</a:t>
+            </a:r>
+            <a:endParaRPr lang="en-US" sz="1300" dirty="0"/>
+          </a:p>
+          <a:p>
+            <a:pPr indent="0" marL="0">
+              <a:spcAft>
+                <a:spcPts val="400"/>
+              </a:spcAft>
+              <a:buNone/>
+            </a:pPr>
+            <a:r>
+              <a:rPr lang="en-US" sz="1300" dirty="0">
+                <a:solidFill>
+                  <a:srgbClr val="0F0A2E"/>
+                </a:solidFill>
+                <a:latin typeface="Calibri" pitchFamily="34" charset="0"/>
+                <a:ea typeface="Calibri" pitchFamily="34" charset="-122"/>
+                <a:cs typeface="Calibri" pitchFamily="34" charset="-120"/>
+              </a:rPr>
+              <a:t>Summarize · proofread · rewrite</a:t>
+            </a:r>
+            <a:endParaRPr lang="en-US" sz="1300" dirty="0"/>
+          </a:p>
+        </p:txBody>
+      </p:sp>
       <p:pic>
         <p:nvPicPr>
-          <p:cNvPr id="33" name="Image 2" descr="preencoded.png">    </p:cNvPr>
+          <p:cNvPr id="30" name="Image 2" descr="preencoded.png">    </p:cNvPr>
           <p:cNvPicPr>
             <a:picLocks noChangeAspect="1"/>
           </p:cNvPicPr>
@@ -23190,8 +23057,8 @@
         </p:blipFill>
         <p:spPr>
           <a:xfrm>
-            <a:off x="10948111" y="502920"/>
-            <a:ext cx="329184" cy="329184"/>
+            <a:off x="8503920" y="5458968"/>
+            <a:ext cx="237744" cy="237744"/>
           </a:xfrm>
           <a:prstGeom prst="rect">
             <a:avLst/>
@@ -23200,14 +23067,14 @@
       </p:pic>
       <p:sp>
         <p:nvSpPr>
-          <p:cNvPr id="34" name="Text 29"/>
-          <p:cNvSpPr/>
-          <p:nvPr/>
-        </p:nvSpPr>
-        <p:spPr>
-          <a:xfrm>
-            <a:off x="457200" y="6446520"/>
-            <a:ext cx="7315200" cy="274320"/>
+          <p:cNvPr id="31" name="Text 26"/>
+          <p:cNvSpPr/>
+          <p:nvPr/>
+        </p:nvSpPr>
+        <p:spPr>
+          <a:xfrm>
+            <a:off x="8796528" y="5440680"/>
+            <a:ext cx="2862072" cy="320040"/>
           </a:xfrm>
           <a:prstGeom prst="rect">
             <a:avLst/>
@@ -23219,48 +23086,229 @@
           <a:bodyPr wrap="square" rtlCol="0" anchor="ctr"/>
           <a:lstStyle/>
           <a:p>
-            <a:pPr algn="l" indent="0" marL="0">
-              <a:buNone/>
-            </a:pPr>
-            <a:r>
-              <a:rPr lang="en-US" sz="1000" dirty="0">
-                <a:solidFill>
-                  <a:srgbClr val="6B6B8F"/>
+            <a:pPr indent="0" marL="0">
+              <a:buNone/>
+            </a:pPr>
+            <a:r>
+              <a:rPr lang="en-US" sz="1200" b="1" dirty="0">
+                <a:solidFill>
+                  <a:srgbClr val="FBBF24"/>
                 </a:solidFill>
                 <a:latin typeface="Calibri" pitchFamily="34" charset="0"/>
                 <a:ea typeface="Calibri" pitchFamily="34" charset="-122"/>
                 <a:cs typeface="Calibri" pitchFamily="34" charset="-120"/>
               </a:rPr>
-              <a:t>Unifying Local and Cloud AI</a:t>
-            </a:r>
-            <a:pPr algn="l" indent="0" marL="0">
-              <a:buNone/>
-            </a:pPr>
-            <a:r>
-              <a:rPr lang="en-US" sz="1000" dirty="0">
-                <a:solidFill>
-                  <a:srgbClr val="6B6B8F"/>
+              <a:t>IChatClient exploring</a:t>
+            </a:r>
+            <a:endParaRPr lang="en-US" sz="1200" dirty="0"/>
+          </a:p>
+        </p:txBody>
+      </p:sp>
+      <p:sp>
+        <p:nvSpPr>
+          <p:cNvPr id="32" name="Shape 27"/>
+          <p:cNvSpPr/>
+          <p:nvPr/>
+        </p:nvSpPr>
+        <p:spPr>
+          <a:xfrm>
+            <a:off x="548640" y="5989320"/>
+            <a:ext cx="11094415" cy="502920"/>
+          </a:xfrm>
+          <a:prstGeom prst="roundRect">
+            <a:avLst>
+              <a:gd name="adj" fmla="val 14545"/>
+            </a:avLst>
+          </a:prstGeom>
+          <a:solidFill>
+            <a:srgbClr val="0F0A2E"/>
+          </a:solidFill>
+          <a:ln w="12700">
+            <a:solidFill>
+              <a:srgbClr val="0F0A2E"/>
+            </a:solidFill>
+            <a:prstDash val="solid"/>
+          </a:ln>
+        </p:spPr>
+      </p:sp>
+      <p:sp>
+        <p:nvSpPr>
+          <p:cNvPr id="33" name="Text 28"/>
+          <p:cNvSpPr/>
+          <p:nvPr/>
+        </p:nvSpPr>
+        <p:spPr>
+          <a:xfrm>
+            <a:off x="548640" y="5989320"/>
+            <a:ext cx="11094415" cy="502920"/>
+          </a:xfrm>
+          <a:prstGeom prst="rect">
+            <a:avLst/>
+          </a:prstGeom>
+          <a:noFill/>
+          <a:ln/>
+        </p:spPr>
+        <p:txBody>
+          <a:bodyPr wrap="square" rtlCol="0" anchor="ctr"/>
+          <a:lstStyle/>
+          <a:p>
+            <a:pPr algn="ctr" indent="0" marL="0">
+              <a:buNone/>
+            </a:pPr>
+            <a:r>
+              <a:rPr lang="en-US" sz="1300" dirty="0">
+                <a:solidFill>
+                  <a:srgbClr val="CFCBED"/>
                 </a:solidFill>
                 <a:latin typeface="Calibri" pitchFamily="34" charset="0"/>
                 <a:ea typeface="Calibri" pitchFamily="34" charset="-122"/>
                 <a:cs typeface="Calibri" pitchFamily="34" charset="-120"/>
               </a:rPr>
-              <a:t>  ·  </a:t>
-            </a:r>
-            <a:pPr algn="l" indent="0" marL="0">
-              <a:buNone/>
-            </a:pPr>
-            <a:r>
-              <a:rPr lang="en-US" sz="1000" b="1" dirty="0">
+              <a:t>Unified for .NET MAUI:  </a:t>
+            </a:r>
+            <a:pPr algn="ctr" indent="0" marL="0">
+              <a:buNone/>
+            </a:pPr>
+            <a:r>
+              <a:rPr lang="en-US" sz="1300" b="1" dirty="0">
                 <a:solidFill>
                   <a:srgbClr val="FB7185"/>
+                </a:solidFill>
+                <a:latin typeface="Consolas" pitchFamily="34" charset="0"/>
+                <a:ea typeface="Consolas" pitchFamily="34" charset="-122"/>
+                <a:cs typeface="Consolas" pitchFamily="34" charset="-120"/>
+              </a:rPr>
+              <a:t>Microsoft.Maui.Essentials.AI</a:t>
+            </a:r>
+            <a:pPr algn="ctr" indent="0" marL="0">
+              <a:buNone/>
+            </a:pPr>
+            <a:r>
+              <a:rPr lang="en-US" sz="1300" i="1" dirty="0">
+                <a:solidFill>
+                  <a:srgbClr val="CFCBED"/>
                 </a:solidFill>
                 <a:latin typeface="Calibri" pitchFamily="34" charset="0"/>
                 <a:ea typeface="Calibri" pitchFamily="34" charset="-122"/>
                 <a:cs typeface="Calibri" pitchFamily="34" charset="-120"/>
               </a:rPr>
-              <a:t>@mattleibow</a:t>
-            </a:r>
+              <a:t>  →  one IChatClient. Apple ready, Phi Silica in PR, Gemini exploring.</a:t>
+            </a:r>
+            <a:endParaRPr lang="en-US" sz="1300" dirty="0"/>
+          </a:p>
+        </p:txBody>
+      </p:sp>
+      <p:pic>
+        <p:nvPicPr>
+          <p:cNvPr id="34" name="Image 3" descr="preencoded.png">    </p:cNvPr>
+          <p:cNvPicPr>
+            <a:picLocks noChangeAspect="1"/>
+          </p:cNvPicPr>
+          <p:nvPr/>
+        </p:nvPicPr>
+        <p:blipFill>
+          <a:blip r:embed="rId7">
+            <a:extLst>
+              <a:ext uri="{96DAC541-7B7A-43D3-8B79-37D633B846F1}">
+                <asvg:svgBlip xmlns:asvg="http://schemas.microsoft.com/office/drawing/2016/SVG/main" r:embed="rId8"/>
+              </a:ext>
+            </a:extLst>
+          </a:blip>
+          <a:stretch>
+            <a:fillRect/>
+          </a:stretch>
+        </p:blipFill>
+        <p:spPr>
+          <a:xfrm>
+            <a:off x="10180015" y="502920"/>
+            <a:ext cx="329184" cy="329184"/>
+          </a:xfrm>
+          <a:prstGeom prst="rect">
+            <a:avLst/>
+          </a:prstGeom>
+        </p:spPr>
+      </p:pic>
+      <p:pic>
+        <p:nvPicPr>
+          <p:cNvPr id="35" name="Image 4" descr="preencoded.png">    </p:cNvPr>
+          <p:cNvPicPr>
+            <a:picLocks noChangeAspect="1"/>
+          </p:cNvPicPr>
+          <p:nvPr/>
+        </p:nvPicPr>
+        <p:blipFill>
+          <a:blip r:embed="rId9">
+            <a:extLst>
+              <a:ext uri="{96DAC541-7B7A-43D3-8B79-37D633B846F1}">
+                <asvg:svgBlip xmlns:asvg="http://schemas.microsoft.com/office/drawing/2016/SVG/main" r:embed="rId10"/>
+              </a:ext>
+            </a:extLst>
+          </a:blip>
+          <a:stretch>
+            <a:fillRect/>
+          </a:stretch>
+        </p:blipFill>
+        <p:spPr>
+          <a:xfrm>
+            <a:off x="10564063" y="502920"/>
+            <a:ext cx="329184" cy="329184"/>
+          </a:xfrm>
+          <a:prstGeom prst="rect">
+            <a:avLst/>
+          </a:prstGeom>
+        </p:spPr>
+      </p:pic>
+      <p:pic>
+        <p:nvPicPr>
+          <p:cNvPr id="36" name="Image 5" descr="preencoded.png">    </p:cNvPr>
+          <p:cNvPicPr>
+            <a:picLocks noChangeAspect="1"/>
+          </p:cNvPicPr>
+          <p:nvPr/>
+        </p:nvPicPr>
+        <p:blipFill>
+          <a:blip r:embed="rId11">
+            <a:extLst>
+              <a:ext uri="{96DAC541-7B7A-43D3-8B79-37D633B846F1}">
+                <asvg:svgBlip xmlns:asvg="http://schemas.microsoft.com/office/drawing/2016/SVG/main" r:embed="rId12"/>
+              </a:ext>
+            </a:extLst>
+          </a:blip>
+          <a:stretch>
+            <a:fillRect/>
+          </a:stretch>
+        </p:blipFill>
+        <p:spPr>
+          <a:xfrm>
+            <a:off x="10948111" y="502920"/>
+            <a:ext cx="329184" cy="329184"/>
+          </a:xfrm>
+          <a:prstGeom prst="rect">
+            <a:avLst/>
+          </a:prstGeom>
+        </p:spPr>
+      </p:pic>
+      <p:sp>
+        <p:nvSpPr>
+          <p:cNvPr id="37" name="Text 29"/>
+          <p:cNvSpPr/>
+          <p:nvPr/>
+        </p:nvSpPr>
+        <p:spPr>
+          <a:xfrm>
+            <a:off x="457200" y="6446520"/>
+            <a:ext cx="7315200" cy="274320"/>
+          </a:xfrm>
+          <a:prstGeom prst="rect">
+            <a:avLst/>
+          </a:prstGeom>
+          <a:noFill/>
+          <a:ln/>
+        </p:spPr>
+        <p:txBody>
+          <a:bodyPr wrap="square" rtlCol="0" anchor="ctr"/>
+          <a:lstStyle/>
+          <a:p>
             <a:pPr algn="l" indent="0" marL="0">
               <a:buNone/>
             </a:pPr>
@@ -23273,6 +23321,48 @@
                 <a:ea typeface="Calibri" pitchFamily="34" charset="-122"/>
                 <a:cs typeface="Calibri" pitchFamily="34" charset="-120"/>
               </a:rPr>
+              <a:t>Unifying Local and Cloud AI</a:t>
+            </a:r>
+            <a:pPr algn="l" indent="0" marL="0">
+              <a:buNone/>
+            </a:pPr>
+            <a:r>
+              <a:rPr lang="en-US" sz="1000" dirty="0">
+                <a:solidFill>
+                  <a:srgbClr val="6B6B8F"/>
+                </a:solidFill>
+                <a:latin typeface="Calibri" pitchFamily="34" charset="0"/>
+                <a:ea typeface="Calibri" pitchFamily="34" charset="-122"/>
+                <a:cs typeface="Calibri" pitchFamily="34" charset="-120"/>
+              </a:rPr>
+              <a:t>  ·  </a:t>
+            </a:r>
+            <a:pPr algn="l" indent="0" marL="0">
+              <a:buNone/>
+            </a:pPr>
+            <a:r>
+              <a:rPr lang="en-US" sz="1000" b="1" dirty="0">
+                <a:solidFill>
+                  <a:srgbClr val="FB7185"/>
+                </a:solidFill>
+                <a:latin typeface="Calibri" pitchFamily="34" charset="0"/>
+                <a:ea typeface="Calibri" pitchFamily="34" charset="-122"/>
+                <a:cs typeface="Calibri" pitchFamily="34" charset="-120"/>
+              </a:rPr>
+              <a:t>@mattleibow</a:t>
+            </a:r>
+            <a:pPr algn="l" indent="0" marL="0">
+              <a:buNone/>
+            </a:pPr>
+            <a:r>
+              <a:rPr lang="en-US" sz="1000" dirty="0">
+                <a:solidFill>
+                  <a:srgbClr val="6B6B8F"/>
+                </a:solidFill>
+                <a:latin typeface="Calibri" pitchFamily="34" charset="0"/>
+                <a:ea typeface="Calibri" pitchFamily="34" charset="-122"/>
+                <a:cs typeface="Calibri" pitchFamily="34" charset="-120"/>
+              </a:rPr>
               <a:t>  ·  @CPTMSDUG</a:t>
             </a:r>
             <a:endParaRPr lang="en-US" sz="1000" dirty="0"/>
@@ -23281,7 +23371,7 @@
       </p:sp>
       <p:sp>
         <p:nvSpPr>
-          <p:cNvPr id="35" name="Text 30"/>
+          <p:cNvPr id="38" name="Text 30"/>
           <p:cNvSpPr/>
           <p:nvPr/>
         </p:nvSpPr>

--- a/slides/Unifying-Local-Cloud-AI.pptx
+++ b/slides/Unifying-Local-Cloud-AI.pptx
@@ -15455,13 +15455,13 @@
             <a:r>
               <a:rPr lang="en-US" sz="1200" b="1" spc="400" kern="0" dirty="0">
                 <a:solidFill>
-                  <a:srgbClr val="FB7185"/>
+                  <a:srgbClr val="FBBF24"/>
                 </a:solidFill>
                 <a:latin typeface="Calibri" pitchFamily="34" charset="0"/>
                 <a:ea typeface="Calibri" pitchFamily="34" charset="-122"/>
                 <a:cs typeface="Calibri" pitchFamily="34" charset="-120"/>
               </a:rPr>
-              <a:t>TIER 1  ·  THE SURPRISE</a:t>
+              <a:t>TIER 2  ·  THE PRACTICAL MIDDLE</a:t>
             </a:r>
             <a:endParaRPr lang="en-US" sz="1200" dirty="0"/>
           </a:p>
@@ -15500,7 +15500,7 @@
                 <a:ea typeface="Georgia" pitchFamily="34" charset="-122"/>
                 <a:cs typeface="Georgia" pitchFamily="34" charset="-120"/>
               </a:rPr>
-              <a:t>Your OS already ships an LLM</a:t>
+              <a:t>Bring your own local model</a:t>
             </a:r>
             <a:endParaRPr lang="en-US" sz="3800" dirty="0"/>
           </a:p>
@@ -15539,7 +15539,7 @@
                 <a:ea typeface="Calibri" pitchFamily="34" charset="-122"/>
                 <a:cs typeface="Calibri" pitchFamily="34" charset="-120"/>
               </a:rPr>
-              <a:t>Vendor-managed, shared across apps, zero cost, fully offline. ~3B-class models.</a:t>
+              <a:t>The forgotten tier — cloud-class capability with local-class privacy</a:t>
             </a:r>
             <a:endParaRPr lang="en-US" sz="1700" dirty="0"/>
           </a:p>
@@ -15554,19 +15554,19 @@
         <p:spPr>
           <a:xfrm>
             <a:off x="548640" y="2286000"/>
-            <a:ext cx="3703320" cy="3566160"/>
+            <a:ext cx="3703320" cy="3931920"/>
           </a:xfrm>
           <a:prstGeom prst="roundRect">
             <a:avLst>
-              <a:gd name="adj" fmla="val 3077"/>
+              <a:gd name="adj" fmla="val 2963"/>
             </a:avLst>
           </a:prstGeom>
           <a:solidFill>
             <a:srgbClr val="FFFFFF"/>
           </a:solidFill>
-          <a:ln w="12700">
+          <a:ln w="25400">
             <a:solidFill>
-              <a:srgbClr val="E5E1F5"/>
+              <a:srgbClr val="FB7185"/>
             </a:solidFill>
             <a:prstDash val="solid"/>
           </a:ln>
@@ -15580,11 +15580,13 @@
         </p:nvSpPr>
         <p:spPr>
           <a:xfrm>
-            <a:off x="548640" y="2286000"/>
-            <a:ext cx="3703320" cy="164592"/>
-          </a:xfrm>
-          <a:prstGeom prst="rect">
-            <a:avLst/>
+            <a:off x="822960" y="2514600"/>
+            <a:ext cx="1554480" cy="292608"/>
+          </a:xfrm>
+          <a:prstGeom prst="roundRect">
+            <a:avLst>
+              <a:gd name="adj" fmla="val 50000"/>
+            </a:avLst>
           </a:prstGeom>
           <a:solidFill>
             <a:srgbClr val="FB7185"/>
@@ -15605,8 +15607,8 @@
         </p:nvSpPr>
         <p:spPr>
           <a:xfrm>
-            <a:off x="822960" y="2606040"/>
-            <a:ext cx="3154680" cy="320040"/>
+            <a:off x="822960" y="2514600"/>
+            <a:ext cx="1554480" cy="292608"/>
           </a:xfrm>
           <a:prstGeom prst="rect">
             <a:avLst/>
@@ -15618,21 +15620,21 @@
           <a:bodyPr wrap="square" rtlCol="0" anchor="ctr"/>
           <a:lstStyle/>
           <a:p>
-            <a:pPr indent="0" marL="0">
-              <a:buNone/>
-            </a:pPr>
-            <a:r>
-              <a:rPr lang="en-US" sz="1100" b="1" spc="300" kern="0" dirty="0">
-                <a:solidFill>
-                  <a:srgbClr val="FB7185"/>
+            <a:pPr algn="ctr" indent="0" marL="0">
+              <a:buNone/>
+            </a:pPr>
+            <a:r>
+              <a:rPr lang="en-US" sz="900" b="1" spc="200" kern="0" dirty="0">
+                <a:solidFill>
+                  <a:srgbClr val="FAF8FF"/>
                 </a:solidFill>
                 <a:latin typeface="Calibri" pitchFamily="34" charset="0"/>
                 <a:ea typeface="Calibri" pitchFamily="34" charset="-122"/>
                 <a:cs typeface="Calibri" pitchFamily="34" charset="-120"/>
               </a:rPr>
-              <a:t>APPLE</a:t>
-            </a:r>
-            <a:endParaRPr lang="en-US" sz="1100" dirty="0"/>
+              <a:t>RECOMMENDED</a:t>
+            </a:r>
+            <a:endParaRPr lang="en-US" sz="900" dirty="0"/>
           </a:p>
         </p:txBody>
       </p:sp>
@@ -15644,7 +15646,7 @@
         </p:nvSpPr>
         <p:spPr>
           <a:xfrm>
-            <a:off x="822960" y="2926080"/>
+            <a:off x="822960" y="2971800"/>
             <a:ext cx="3154680" cy="548640"/>
           </a:xfrm>
           <a:prstGeom prst="rect">
@@ -15669,7 +15671,7 @@
                 <a:ea typeface="Georgia" pitchFamily="34" charset="-122"/>
                 <a:cs typeface="Georgia" pitchFamily="34" charset="-120"/>
               </a:rPr>
-              <a:t>Apple Intelligence</a:t>
+              <a:t>Foundry Local</a:t>
             </a:r>
             <a:endParaRPr lang="en-US" sz="2200" dirty="0"/>
           </a:p>
@@ -15683,7 +15685,7 @@
         </p:nvSpPr>
         <p:spPr>
           <a:xfrm>
-            <a:off x="822960" y="3474720"/>
+            <a:off x="822960" y="3520440"/>
             <a:ext cx="3154680" cy="365760"/>
           </a:xfrm>
           <a:prstGeom prst="rect">
@@ -15702,13 +15704,13 @@
             <a:r>
               <a:rPr lang="en-US" sz="1300" i="1" dirty="0">
                 <a:solidFill>
-                  <a:srgbClr val="6B6B8F"/>
-                </a:solidFill>
-                <a:latin typeface="Consolas" pitchFamily="34" charset="0"/>
-                <a:ea typeface="Consolas" pitchFamily="34" charset="-122"/>
-                <a:cs typeface="Consolas" pitchFamily="34" charset="-120"/>
-              </a:rPr>
-              <a:t>FoundationModels (Swift)</a:t>
+                  <a:srgbClr val="FB7185"/>
+                </a:solidFill>
+                <a:latin typeface="Calibri" pitchFamily="34" charset="0"/>
+                <a:ea typeface="Calibri" pitchFamily="34" charset="-122"/>
+                <a:cs typeface="Calibri" pitchFamily="34" charset="-120"/>
+              </a:rPr>
+              <a:t>Cloud-grade LLMs, local host</a:t>
             </a:r>
             <a:endParaRPr lang="en-US" sz="1300" dirty="0"/>
           </a:p>
@@ -15716,22 +15718,65 @@
       </p:sp>
       <p:sp>
         <p:nvSpPr>
-          <p:cNvPr id="10" name="Shape 8"/>
-          <p:cNvSpPr/>
-          <p:nvPr/>
-        </p:nvSpPr>
-        <p:spPr>
-          <a:xfrm>
-            <a:off x="822960" y="3931920"/>
-            <a:ext cx="3154680" cy="0"/>
-          </a:xfrm>
-          <a:prstGeom prst="line">
-            <a:avLst/>
-          </a:prstGeom>
-          <a:noFill/>
-          <a:ln w="12700">
+          <p:cNvPr id="10" name="Text 8"/>
+          <p:cNvSpPr/>
+          <p:nvPr/>
+        </p:nvSpPr>
+        <p:spPr>
+          <a:xfrm>
+            <a:off x="822960" y="4023360"/>
+            <a:ext cx="3154680" cy="2011680"/>
+          </a:xfrm>
+          <a:prstGeom prst="rect">
+            <a:avLst/>
+          </a:prstGeom>
+          <a:noFill/>
+          <a:ln/>
+        </p:spPr>
+        <p:txBody>
+          <a:bodyPr wrap="square" rtlCol="0" anchor="ctr"/>
+          <a:lstStyle/>
+          <a:p>
+            <a:pPr indent="0" marL="0">
+              <a:buNone/>
+            </a:pPr>
+            <a:r>
+              <a:rPr lang="en-US" sz="1300" dirty="0">
+                <a:solidFill>
+                  <a:srgbClr val="0F0A2E"/>
+                </a:solidFill>
+                <a:latin typeface="Calibri" pitchFamily="34" charset="0"/>
+                <a:ea typeface="Calibri" pitchFamily="34" charset="-122"/>
+                <a:cs typeface="Calibri" pitchFamily="34" charset="-120"/>
+              </a:rPr>
+              <a:t>Microsoft's runtime for running Phi, Llama, Qwen and friends on the user's box. .NET-friendly, ONNX-backed, GPU/NPU accelerated.</a:t>
+            </a:r>
+            <a:endParaRPr lang="en-US" sz="1300" dirty="0"/>
+          </a:p>
+        </p:txBody>
+      </p:sp>
+      <p:sp>
+        <p:nvSpPr>
+          <p:cNvPr id="11" name="Shape 9"/>
+          <p:cNvSpPr/>
+          <p:nvPr/>
+        </p:nvSpPr>
+        <p:spPr>
+          <a:xfrm>
+            <a:off x="4389120" y="2286000"/>
+            <a:ext cx="3703320" cy="3931920"/>
+          </a:xfrm>
+          <a:prstGeom prst="roundRect">
+            <a:avLst>
+              <a:gd name="adj" fmla="val 2963"/>
+            </a:avLst>
+          </a:prstGeom>
+          <a:solidFill>
+            <a:srgbClr val="FFFFFF"/>
+          </a:solidFill>
+          <a:ln w="25400">
             <a:solidFill>
-              <a:srgbClr val="E5E1F5"/>
+              <a:srgbClr val="6366F1"/>
             </a:solidFill>
             <a:prstDash val="solid"/>
           </a:ln>
@@ -15739,14 +15784,41 @@
       </p:sp>
       <p:sp>
         <p:nvSpPr>
-          <p:cNvPr id="11" name="Text 9"/>
-          <p:cNvSpPr/>
-          <p:nvPr/>
-        </p:nvSpPr>
-        <p:spPr>
-          <a:xfrm>
-            <a:off x="822960" y="4069080"/>
-            <a:ext cx="3154680" cy="1325880"/>
+          <p:cNvPr id="12" name="Shape 10"/>
+          <p:cNvSpPr/>
+          <p:nvPr/>
+        </p:nvSpPr>
+        <p:spPr>
+          <a:xfrm>
+            <a:off x="4663440" y="2514600"/>
+            <a:ext cx="1554480" cy="292608"/>
+          </a:xfrm>
+          <a:prstGeom prst="roundRect">
+            <a:avLst>
+              <a:gd name="adj" fmla="val 50000"/>
+            </a:avLst>
+          </a:prstGeom>
+          <a:solidFill>
+            <a:srgbClr val="6366F1"/>
+          </a:solidFill>
+          <a:ln w="12700">
+            <a:solidFill>
+              <a:srgbClr val="6366F1"/>
+            </a:solidFill>
+            <a:prstDash val="solid"/>
+          </a:ln>
+        </p:spPr>
+      </p:sp>
+      <p:sp>
+        <p:nvSpPr>
+          <p:cNvPr id="13" name="Text 11"/>
+          <p:cNvSpPr/>
+          <p:nvPr/>
+        </p:nvSpPr>
+        <p:spPr>
+          <a:xfrm>
+            <a:off x="4663440" y="2514600"/>
+            <a:ext cx="1554480" cy="292608"/>
           </a:xfrm>
           <a:prstGeom prst="rect">
             <a:avLst/>
@@ -15758,50 +15830,124 @@
           <a:bodyPr wrap="square" rtlCol="0" anchor="ctr"/>
           <a:lstStyle/>
           <a:p>
-            <a:pPr indent="0" marL="0">
-              <a:spcAft>
-                <a:spcPts val="400"/>
-              </a:spcAft>
-              <a:buNone/>
-            </a:pPr>
-            <a:r>
-              <a:rPr lang="en-US" sz="1300" dirty="0">
-                <a:solidFill>
-                  <a:srgbClr val="0F0A2E"/>
+            <a:pPr algn="ctr" indent="0" marL="0">
+              <a:buNone/>
+            </a:pPr>
+            <a:r>
+              <a:rPr lang="en-US" sz="900" b="1" spc="200" kern="0" dirty="0">
+                <a:solidFill>
+                  <a:srgbClr val="FAF8FF"/>
                 </a:solidFill>
                 <a:latin typeface="Calibri" pitchFamily="34" charset="0"/>
                 <a:ea typeface="Calibri" pitchFamily="34" charset="-122"/>
                 <a:cs typeface="Calibri" pitchFamily="34" charset="-120"/>
               </a:rPr>
-              <a:t>iOS 26 · macOS 26 Tahoe</a:t>
-            </a:r>
-            <a:endParaRPr lang="en-US" sz="1300" dirty="0"/>
-          </a:p>
-          <a:p>
-            <a:pPr indent="0" marL="0">
-              <a:spcAft>
-                <a:spcPts val="400"/>
-              </a:spcAft>
-              <a:buNone/>
-            </a:pPr>
-            <a:r>
-              <a:rPr lang="en-US" sz="1300" dirty="0">
+              <a:t>FLEXIBLE</a:t>
+            </a:r>
+            <a:endParaRPr lang="en-US" sz="900" dirty="0"/>
+          </a:p>
+        </p:txBody>
+      </p:sp>
+      <p:sp>
+        <p:nvSpPr>
+          <p:cNvPr id="14" name="Text 12"/>
+          <p:cNvSpPr/>
+          <p:nvPr/>
+        </p:nvSpPr>
+        <p:spPr>
+          <a:xfrm>
+            <a:off x="4663440" y="2971800"/>
+            <a:ext cx="3154680" cy="548640"/>
+          </a:xfrm>
+          <a:prstGeom prst="rect">
+            <a:avLst/>
+          </a:prstGeom>
+          <a:noFill/>
+          <a:ln/>
+        </p:spPr>
+        <p:txBody>
+          <a:bodyPr wrap="square" rtlCol="0" anchor="ctr"/>
+          <a:lstStyle/>
+          <a:p>
+            <a:pPr indent="0" marL="0">
+              <a:buNone/>
+            </a:pPr>
+            <a:r>
+              <a:rPr lang="en-US" sz="2200" b="1" dirty="0">
                 <a:solidFill>
                   <a:srgbClr val="0F0A2E"/>
+                </a:solidFill>
+                <a:latin typeface="Georgia" pitchFamily="34" charset="0"/>
+                <a:ea typeface="Georgia" pitchFamily="34" charset="-122"/>
+                <a:cs typeface="Georgia" pitchFamily="34" charset="-120"/>
+              </a:rPr>
+              <a:t>ONNX Runtime GenAI</a:t>
+            </a:r>
+            <a:endParaRPr lang="en-US" sz="2200" dirty="0"/>
+          </a:p>
+        </p:txBody>
+      </p:sp>
+      <p:sp>
+        <p:nvSpPr>
+          <p:cNvPr id="15" name="Text 13"/>
+          <p:cNvSpPr/>
+          <p:nvPr/>
+        </p:nvSpPr>
+        <p:spPr>
+          <a:xfrm>
+            <a:off x="4663440" y="3520440"/>
+            <a:ext cx="3154680" cy="365760"/>
+          </a:xfrm>
+          <a:prstGeom prst="rect">
+            <a:avLst/>
+          </a:prstGeom>
+          <a:noFill/>
+          <a:ln/>
+        </p:spPr>
+        <p:txBody>
+          <a:bodyPr wrap="square" rtlCol="0" anchor="ctr"/>
+          <a:lstStyle/>
+          <a:p>
+            <a:pPr indent="0" marL="0">
+              <a:buNone/>
+            </a:pPr>
+            <a:r>
+              <a:rPr lang="en-US" sz="1300" i="1" dirty="0">
+                <a:solidFill>
+                  <a:srgbClr val="6366F1"/>
                 </a:solidFill>
                 <a:latin typeface="Calibri" pitchFamily="34" charset="0"/>
                 <a:ea typeface="Calibri" pitchFamily="34" charset="-122"/>
                 <a:cs typeface="Calibri" pitchFamily="34" charset="-120"/>
               </a:rPr>
-              <a:t>Multilingual</a:t>
+              <a:t>Ship your own model</a:t>
             </a:r>
             <a:endParaRPr lang="en-US" sz="1300" dirty="0"/>
           </a:p>
-          <a:p>
-            <a:pPr indent="0" marL="0">
-              <a:spcAft>
-                <a:spcPts val="400"/>
-              </a:spcAft>
+        </p:txBody>
+      </p:sp>
+      <p:sp>
+        <p:nvSpPr>
+          <p:cNvPr id="16" name="Text 14"/>
+          <p:cNvSpPr/>
+          <p:nvPr/>
+        </p:nvSpPr>
+        <p:spPr>
+          <a:xfrm>
+            <a:off x="4663440" y="4023360"/>
+            <a:ext cx="3154680" cy="2011680"/>
+          </a:xfrm>
+          <a:prstGeom prst="rect">
+            <a:avLst/>
+          </a:prstGeom>
+          <a:noFill/>
+          <a:ln/>
+        </p:spPr>
+        <p:txBody>
+          <a:bodyPr wrap="square" rtlCol="0" anchor="ctr"/>
+          <a:lstStyle/>
+          <a:p>
+            <a:pPr indent="0" marL="0">
               <a:buNone/>
             </a:pPr>
             <a:r>
@@ -15813,7 +15959,217 @@
                 <a:ea typeface="Calibri" pitchFamily="34" charset="-122"/>
                 <a:cs typeface="Calibri" pitchFamily="34" charset="-120"/>
               </a:rPr>
-              <a:t>Tool calling</a:t>
+              <a:t>Cross-platform C# / native inference. Bring any ONNX-converted model — tiny custom classifiers to multi-billion-param LLMs.</a:t>
+            </a:r>
+            <a:endParaRPr lang="en-US" sz="1300" dirty="0"/>
+          </a:p>
+        </p:txBody>
+      </p:sp>
+      <p:sp>
+        <p:nvSpPr>
+          <p:cNvPr id="17" name="Shape 15"/>
+          <p:cNvSpPr/>
+          <p:nvPr/>
+        </p:nvSpPr>
+        <p:spPr>
+          <a:xfrm>
+            <a:off x="8229600" y="2286000"/>
+            <a:ext cx="3703320" cy="3931920"/>
+          </a:xfrm>
+          <a:prstGeom prst="roundRect">
+            <a:avLst>
+              <a:gd name="adj" fmla="val 2963"/>
+            </a:avLst>
+          </a:prstGeom>
+          <a:solidFill>
+            <a:srgbClr val="FFFFFF"/>
+          </a:solidFill>
+          <a:ln w="25400">
+            <a:solidFill>
+              <a:srgbClr val="FBBF24"/>
+            </a:solidFill>
+            <a:prstDash val="solid"/>
+          </a:ln>
+        </p:spPr>
+      </p:sp>
+      <p:sp>
+        <p:nvSpPr>
+          <p:cNvPr id="18" name="Shape 16"/>
+          <p:cNvSpPr/>
+          <p:nvPr/>
+        </p:nvSpPr>
+        <p:spPr>
+          <a:xfrm>
+            <a:off x="8503920" y="2514600"/>
+            <a:ext cx="1554480" cy="292608"/>
+          </a:xfrm>
+          <a:prstGeom prst="roundRect">
+            <a:avLst>
+              <a:gd name="adj" fmla="val 50000"/>
+            </a:avLst>
+          </a:prstGeom>
+          <a:solidFill>
+            <a:srgbClr val="FBBF24"/>
+          </a:solidFill>
+          <a:ln w="12700">
+            <a:solidFill>
+              <a:srgbClr val="FBBF24"/>
+            </a:solidFill>
+            <a:prstDash val="solid"/>
+          </a:ln>
+        </p:spPr>
+      </p:sp>
+      <p:sp>
+        <p:nvSpPr>
+          <p:cNvPr id="19" name="Text 17"/>
+          <p:cNvSpPr/>
+          <p:nvPr/>
+        </p:nvSpPr>
+        <p:spPr>
+          <a:xfrm>
+            <a:off x="8503920" y="2514600"/>
+            <a:ext cx="1554480" cy="292608"/>
+          </a:xfrm>
+          <a:prstGeom prst="rect">
+            <a:avLst/>
+          </a:prstGeom>
+          <a:noFill/>
+          <a:ln/>
+        </p:spPr>
+        <p:txBody>
+          <a:bodyPr wrap="square" rtlCol="0" anchor="ctr"/>
+          <a:lstStyle/>
+          <a:p>
+            <a:pPr algn="ctr" indent="0" marL="0">
+              <a:buNone/>
+            </a:pPr>
+            <a:r>
+              <a:rPr lang="en-US" sz="900" b="1" spc="200" kern="0" dirty="0">
+                <a:solidFill>
+                  <a:srgbClr val="FAF8FF"/>
+                </a:solidFill>
+                <a:latin typeface="Calibri" pitchFamily="34" charset="0"/>
+                <a:ea typeface="Calibri" pitchFamily="34" charset="-122"/>
+                <a:cs typeface="Calibri" pitchFamily="34" charset="-120"/>
+              </a:rPr>
+              <a:t>UNDERRATED</a:t>
+            </a:r>
+            <a:endParaRPr lang="en-US" sz="900" dirty="0"/>
+          </a:p>
+        </p:txBody>
+      </p:sp>
+      <p:sp>
+        <p:nvSpPr>
+          <p:cNvPr id="20" name="Text 18"/>
+          <p:cNvSpPr/>
+          <p:nvPr/>
+        </p:nvSpPr>
+        <p:spPr>
+          <a:xfrm>
+            <a:off x="8503920" y="2971800"/>
+            <a:ext cx="3154680" cy="548640"/>
+          </a:xfrm>
+          <a:prstGeom prst="rect">
+            <a:avLst/>
+          </a:prstGeom>
+          <a:noFill/>
+          <a:ln/>
+        </p:spPr>
+        <p:txBody>
+          <a:bodyPr wrap="square" rtlCol="0" anchor="ctr"/>
+          <a:lstStyle/>
+          <a:p>
+            <a:pPr indent="0" marL="0">
+              <a:buNone/>
+            </a:pPr>
+            <a:r>
+              <a:rPr lang="en-US" sz="2200" b="1" dirty="0">
+                <a:solidFill>
+                  <a:srgbClr val="0F0A2E"/>
+                </a:solidFill>
+                <a:latin typeface="Georgia" pitchFamily="34" charset="0"/>
+                <a:ea typeface="Georgia" pitchFamily="34" charset="-122"/>
+                <a:cs typeface="Georgia" pitchFamily="34" charset="-120"/>
+              </a:rPr>
+              <a:t>Tiny Bespoke Models</a:t>
+            </a:r>
+            <a:endParaRPr lang="en-US" sz="2200" dirty="0"/>
+          </a:p>
+        </p:txBody>
+      </p:sp>
+      <p:sp>
+        <p:nvSpPr>
+          <p:cNvPr id="21" name="Text 19"/>
+          <p:cNvSpPr/>
+          <p:nvPr/>
+        </p:nvSpPr>
+        <p:spPr>
+          <a:xfrm>
+            <a:off x="8503920" y="3520440"/>
+            <a:ext cx="3154680" cy="365760"/>
+          </a:xfrm>
+          <a:prstGeom prst="rect">
+            <a:avLst/>
+          </a:prstGeom>
+          <a:noFill/>
+          <a:ln/>
+        </p:spPr>
+        <p:txBody>
+          <a:bodyPr wrap="square" rtlCol="0" anchor="ctr"/>
+          <a:lstStyle/>
+          <a:p>
+            <a:pPr indent="0" marL="0">
+              <a:buNone/>
+            </a:pPr>
+            <a:r>
+              <a:rPr lang="en-US" sz="1300" i="1" dirty="0">
+                <a:solidFill>
+                  <a:srgbClr val="FBBF24"/>
+                </a:solidFill>
+                <a:latin typeface="Calibri" pitchFamily="34" charset="0"/>
+                <a:ea typeface="Calibri" pitchFamily="34" charset="-122"/>
+                <a:cs typeface="Calibri" pitchFamily="34" charset="-120"/>
+              </a:rPr>
+              <a:t>Right-sized for the task</a:t>
+            </a:r>
+            <a:endParaRPr lang="en-US" sz="1300" dirty="0"/>
+          </a:p>
+        </p:txBody>
+      </p:sp>
+      <p:sp>
+        <p:nvSpPr>
+          <p:cNvPr id="22" name="Text 20"/>
+          <p:cNvSpPr/>
+          <p:nvPr/>
+        </p:nvSpPr>
+        <p:spPr>
+          <a:xfrm>
+            <a:off x="8503920" y="4023360"/>
+            <a:ext cx="3154680" cy="2011680"/>
+          </a:xfrm>
+          <a:prstGeom prst="rect">
+            <a:avLst/>
+          </a:prstGeom>
+          <a:noFill/>
+          <a:ln/>
+        </p:spPr>
+        <p:txBody>
+          <a:bodyPr wrap="square" rtlCol="0" anchor="ctr"/>
+          <a:lstStyle/>
+          <a:p>
+            <a:pPr indent="0" marL="0">
+              <a:buNone/>
+            </a:pPr>
+            <a:r>
+              <a:rPr lang="en-US" sz="1300" dirty="0">
+                <a:solidFill>
+                  <a:srgbClr val="0F0A2E"/>
+                </a:solidFill>
+                <a:latin typeface="Calibri" pitchFamily="34" charset="0"/>
+                <a:ea typeface="Calibri" pitchFamily="34" charset="-122"/>
+                <a:cs typeface="Calibri" pitchFamily="34" charset="-120"/>
+              </a:rPr>
+              <a:t>Sometimes a 50MB classifier beats a 3B LLM. Embeddings, intent detection, structured extraction — fast, cheap, embarrassingly good.</a:t>
             </a:r>
             <a:endParaRPr lang="en-US" sz="1300" dirty="0"/>
           </a:p>
@@ -15821,7 +16177,7 @@
       </p:sp>
       <p:pic>
         <p:nvPicPr>
-          <p:cNvPr id="12" name="Image 0" descr="preencoded.png">    </p:cNvPr>
+          <p:cNvPr id="23" name="Image 0" descr="preencoded.png">    </p:cNvPr>
           <p:cNvPicPr>
             <a:picLocks noChangeAspect="1"/>
           </p:cNvPicPr>
@@ -15841,330 +16197,17 @@
         </p:blipFill>
         <p:spPr>
           <a:xfrm>
-            <a:off x="822960" y="5458968"/>
-            <a:ext cx="237744" cy="237744"/>
+            <a:off x="10180015" y="502920"/>
+            <a:ext cx="329184" cy="329184"/>
           </a:xfrm>
           <a:prstGeom prst="rect">
             <a:avLst/>
           </a:prstGeom>
         </p:spPr>
       </p:pic>
-      <p:sp>
-        <p:nvSpPr>
-          <p:cNvPr id="13" name="Text 10"/>
-          <p:cNvSpPr/>
-          <p:nvPr/>
-        </p:nvSpPr>
-        <p:spPr>
-          <a:xfrm>
-            <a:off x="1115568" y="5440680"/>
-            <a:ext cx="2862072" cy="320040"/>
-          </a:xfrm>
-          <a:prstGeom prst="rect">
-            <a:avLst/>
-          </a:prstGeom>
-          <a:noFill/>
-          <a:ln/>
-        </p:spPr>
-        <p:txBody>
-          <a:bodyPr wrap="square" rtlCol="0" anchor="ctr"/>
-          <a:lstStyle/>
-          <a:p>
-            <a:pPr indent="0" marL="0">
-              <a:buNone/>
-            </a:pPr>
-            <a:r>
-              <a:rPr lang="en-US" sz="1200" b="1" dirty="0">
-                <a:solidFill>
-                  <a:srgbClr val="FB7185"/>
-                </a:solidFill>
-                <a:latin typeface="Calibri" pitchFamily="34" charset="0"/>
-                <a:ea typeface="Calibri" pitchFamily="34" charset="-122"/>
-                <a:cs typeface="Calibri" pitchFamily="34" charset="-120"/>
-              </a:rPr>
-              <a:t>IChatClient ready</a:t>
-            </a:r>
-            <a:endParaRPr lang="en-US" sz="1200" dirty="0"/>
-          </a:p>
-        </p:txBody>
-      </p:sp>
-      <p:sp>
-        <p:nvSpPr>
-          <p:cNvPr id="14" name="Shape 11"/>
-          <p:cNvSpPr/>
-          <p:nvPr/>
-        </p:nvSpPr>
-        <p:spPr>
-          <a:xfrm>
-            <a:off x="4389120" y="2286000"/>
-            <a:ext cx="3703320" cy="3566160"/>
-          </a:xfrm>
-          <a:prstGeom prst="roundRect">
-            <a:avLst>
-              <a:gd name="adj" fmla="val 3077"/>
-            </a:avLst>
-          </a:prstGeom>
-          <a:solidFill>
-            <a:srgbClr val="FFFFFF"/>
-          </a:solidFill>
-          <a:ln w="12700">
-            <a:solidFill>
-              <a:srgbClr val="E5E1F5"/>
-            </a:solidFill>
-            <a:prstDash val="solid"/>
-          </a:ln>
-        </p:spPr>
-      </p:sp>
-      <p:sp>
-        <p:nvSpPr>
-          <p:cNvPr id="15" name="Shape 12"/>
-          <p:cNvSpPr/>
-          <p:nvPr/>
-        </p:nvSpPr>
-        <p:spPr>
-          <a:xfrm>
-            <a:off x="4389120" y="2286000"/>
-            <a:ext cx="3703320" cy="164592"/>
-          </a:xfrm>
-          <a:prstGeom prst="rect">
-            <a:avLst/>
-          </a:prstGeom>
-          <a:solidFill>
-            <a:srgbClr val="6366F1"/>
-          </a:solidFill>
-          <a:ln w="12700">
-            <a:solidFill>
-              <a:srgbClr val="6366F1"/>
-            </a:solidFill>
-            <a:prstDash val="solid"/>
-          </a:ln>
-        </p:spPr>
-      </p:sp>
-      <p:sp>
-        <p:nvSpPr>
-          <p:cNvPr id="16" name="Text 13"/>
-          <p:cNvSpPr/>
-          <p:nvPr/>
-        </p:nvSpPr>
-        <p:spPr>
-          <a:xfrm>
-            <a:off x="4663440" y="2606040"/>
-            <a:ext cx="3154680" cy="320040"/>
-          </a:xfrm>
-          <a:prstGeom prst="rect">
-            <a:avLst/>
-          </a:prstGeom>
-          <a:noFill/>
-          <a:ln/>
-        </p:spPr>
-        <p:txBody>
-          <a:bodyPr wrap="square" rtlCol="0" anchor="ctr"/>
-          <a:lstStyle/>
-          <a:p>
-            <a:pPr indent="0" marL="0">
-              <a:buNone/>
-            </a:pPr>
-            <a:r>
-              <a:rPr lang="en-US" sz="1100" b="1" spc="300" kern="0" dirty="0">
-                <a:solidFill>
-                  <a:srgbClr val="6366F1"/>
-                </a:solidFill>
-                <a:latin typeface="Calibri" pitchFamily="34" charset="0"/>
-                <a:ea typeface="Calibri" pitchFamily="34" charset="-122"/>
-                <a:cs typeface="Calibri" pitchFamily="34" charset="-120"/>
-              </a:rPr>
-              <a:t>MICROSOFT</a:t>
-            </a:r>
-            <a:endParaRPr lang="en-US" sz="1100" dirty="0"/>
-          </a:p>
-        </p:txBody>
-      </p:sp>
-      <p:sp>
-        <p:nvSpPr>
-          <p:cNvPr id="17" name="Text 14"/>
-          <p:cNvSpPr/>
-          <p:nvPr/>
-        </p:nvSpPr>
-        <p:spPr>
-          <a:xfrm>
-            <a:off x="4663440" y="2926080"/>
-            <a:ext cx="3154680" cy="548640"/>
-          </a:xfrm>
-          <a:prstGeom prst="rect">
-            <a:avLst/>
-          </a:prstGeom>
-          <a:noFill/>
-          <a:ln/>
-        </p:spPr>
-        <p:txBody>
-          <a:bodyPr wrap="square" rtlCol="0" anchor="ctr"/>
-          <a:lstStyle/>
-          <a:p>
-            <a:pPr indent="0" marL="0">
-              <a:buNone/>
-            </a:pPr>
-            <a:r>
-              <a:rPr lang="en-US" sz="2200" b="1" dirty="0">
-                <a:solidFill>
-                  <a:srgbClr val="0F0A2E"/>
-                </a:solidFill>
-                <a:latin typeface="Georgia" pitchFamily="34" charset="0"/>
-                <a:ea typeface="Georgia" pitchFamily="34" charset="-122"/>
-                <a:cs typeface="Georgia" pitchFamily="34" charset="-120"/>
-              </a:rPr>
-              <a:t>Phi Silica</a:t>
-            </a:r>
-            <a:endParaRPr lang="en-US" sz="2200" dirty="0"/>
-          </a:p>
-        </p:txBody>
-      </p:sp>
-      <p:sp>
-        <p:nvSpPr>
-          <p:cNvPr id="18" name="Text 15"/>
-          <p:cNvSpPr/>
-          <p:nvPr/>
-        </p:nvSpPr>
-        <p:spPr>
-          <a:xfrm>
-            <a:off x="4663440" y="3474720"/>
-            <a:ext cx="3154680" cy="365760"/>
-          </a:xfrm>
-          <a:prstGeom prst="rect">
-            <a:avLst/>
-          </a:prstGeom>
-          <a:noFill/>
-          <a:ln/>
-        </p:spPr>
-        <p:txBody>
-          <a:bodyPr wrap="square" rtlCol="0" anchor="ctr"/>
-          <a:lstStyle/>
-          <a:p>
-            <a:pPr indent="0" marL="0">
-              <a:buNone/>
-            </a:pPr>
-            <a:r>
-              <a:rPr lang="en-US" sz="1300" i="1" dirty="0">
-                <a:solidFill>
-                  <a:srgbClr val="6B6B8F"/>
-                </a:solidFill>
-                <a:latin typeface="Consolas" pitchFamily="34" charset="0"/>
-                <a:ea typeface="Consolas" pitchFamily="34" charset="-122"/>
-                <a:cs typeface="Consolas" pitchFamily="34" charset="-120"/>
-              </a:rPr>
-              <a:t>Windows AI APIs (.NET)</a:t>
-            </a:r>
-            <a:endParaRPr lang="en-US" sz="1300" dirty="0"/>
-          </a:p>
-        </p:txBody>
-      </p:sp>
-      <p:sp>
-        <p:nvSpPr>
-          <p:cNvPr id="19" name="Shape 16"/>
-          <p:cNvSpPr/>
-          <p:nvPr/>
-        </p:nvSpPr>
-        <p:spPr>
-          <a:xfrm>
-            <a:off x="4663440" y="3931920"/>
-            <a:ext cx="3154680" cy="0"/>
-          </a:xfrm>
-          <a:prstGeom prst="line">
-            <a:avLst/>
-          </a:prstGeom>
-          <a:noFill/>
-          <a:ln w="12700">
-            <a:solidFill>
-              <a:srgbClr val="E5E1F5"/>
-            </a:solidFill>
-            <a:prstDash val="solid"/>
-          </a:ln>
-        </p:spPr>
-      </p:sp>
-      <p:sp>
-        <p:nvSpPr>
-          <p:cNvPr id="20" name="Text 17"/>
-          <p:cNvSpPr/>
-          <p:nvPr/>
-        </p:nvSpPr>
-        <p:spPr>
-          <a:xfrm>
-            <a:off x="4663440" y="4069080"/>
-            <a:ext cx="3154680" cy="1325880"/>
-          </a:xfrm>
-          <a:prstGeom prst="rect">
-            <a:avLst/>
-          </a:prstGeom>
-          <a:noFill/>
-          <a:ln/>
-        </p:spPr>
-        <p:txBody>
-          <a:bodyPr wrap="square" rtlCol="0" anchor="ctr"/>
-          <a:lstStyle/>
-          <a:p>
-            <a:pPr indent="0" marL="0">
-              <a:spcAft>
-                <a:spcPts val="400"/>
-              </a:spcAft>
-              <a:buNone/>
-            </a:pPr>
-            <a:r>
-              <a:rPr lang="en-US" sz="1300" dirty="0">
-                <a:solidFill>
-                  <a:srgbClr val="0F0A2E"/>
-                </a:solidFill>
-                <a:latin typeface="Calibri" pitchFamily="34" charset="0"/>
-                <a:ea typeface="Calibri" pitchFamily="34" charset="-122"/>
-                <a:cs typeface="Calibri" pitchFamily="34" charset="-120"/>
-              </a:rPr>
-              <a:t>Copilot+ PCs · NPU-accelerated</a:t>
-            </a:r>
-            <a:endParaRPr lang="en-US" sz="1300" dirty="0"/>
-          </a:p>
-          <a:p>
-            <a:pPr indent="0" marL="0">
-              <a:spcAft>
-                <a:spcPts val="400"/>
-              </a:spcAft>
-              <a:buNone/>
-            </a:pPr>
-            <a:r>
-              <a:rPr lang="en-US" sz="1300" dirty="0">
-                <a:solidFill>
-                  <a:srgbClr val="0F0A2E"/>
-                </a:solidFill>
-                <a:latin typeface="Calibri" pitchFamily="34" charset="0"/>
-                <a:ea typeface="Calibri" pitchFamily="34" charset="-122"/>
-                <a:cs typeface="Calibri" pitchFamily="34" charset="-120"/>
-              </a:rPr>
-              <a:t>Small language model</a:t>
-            </a:r>
-            <a:endParaRPr lang="en-US" sz="1300" dirty="0"/>
-          </a:p>
-          <a:p>
-            <a:pPr indent="0" marL="0">
-              <a:spcAft>
-                <a:spcPts val="400"/>
-              </a:spcAft>
-              <a:buNone/>
-            </a:pPr>
-            <a:r>
-              <a:rPr lang="en-US" sz="1300" dirty="0">
-                <a:solidFill>
-                  <a:srgbClr val="0F0A2E"/>
-                </a:solidFill>
-                <a:latin typeface="Calibri" pitchFamily="34" charset="0"/>
-                <a:ea typeface="Calibri" pitchFamily="34" charset="-122"/>
-                <a:cs typeface="Calibri" pitchFamily="34" charset="-120"/>
-              </a:rPr>
-              <a:t>Summarize · rewrite · generate</a:t>
-            </a:r>
-            <a:endParaRPr lang="en-US" sz="1300" dirty="0"/>
-          </a:p>
-        </p:txBody>
-      </p:sp>
       <p:pic>
         <p:nvPicPr>
-          <p:cNvPr id="21" name="Image 1" descr="preencoded.png">    </p:cNvPr>
+          <p:cNvPr id="24" name="Image 1" descr="preencoded.png">    </p:cNvPr>
           <p:cNvPicPr>
             <a:picLocks noChangeAspect="1"/>
           </p:cNvPicPr>
@@ -16184,330 +16227,17 @@
         </p:blipFill>
         <p:spPr>
           <a:xfrm>
-            <a:off x="4663440" y="5458968"/>
-            <a:ext cx="237744" cy="237744"/>
+            <a:off x="10564063" y="502920"/>
+            <a:ext cx="329184" cy="329184"/>
           </a:xfrm>
           <a:prstGeom prst="rect">
             <a:avLst/>
           </a:prstGeom>
         </p:spPr>
       </p:pic>
-      <p:sp>
-        <p:nvSpPr>
-          <p:cNvPr id="22" name="Text 18"/>
-          <p:cNvSpPr/>
-          <p:nvPr/>
-        </p:nvSpPr>
-        <p:spPr>
-          <a:xfrm>
-            <a:off x="4956048" y="5440680"/>
-            <a:ext cx="2862072" cy="320040"/>
-          </a:xfrm>
-          <a:prstGeom prst="rect">
-            <a:avLst/>
-          </a:prstGeom>
-          <a:noFill/>
-          <a:ln/>
-        </p:spPr>
-        <p:txBody>
-          <a:bodyPr wrap="square" rtlCol="0" anchor="ctr"/>
-          <a:lstStyle/>
-          <a:p>
-            <a:pPr indent="0" marL="0">
-              <a:buNone/>
-            </a:pPr>
-            <a:r>
-              <a:rPr lang="en-US" sz="1200" b="1" dirty="0">
-                <a:solidFill>
-                  <a:srgbClr val="6366F1"/>
-                </a:solidFill>
-                <a:latin typeface="Calibri" pitchFamily="34" charset="0"/>
-                <a:ea typeface="Calibri" pitchFamily="34" charset="-122"/>
-                <a:cs typeface="Calibri" pitchFamily="34" charset="-120"/>
-              </a:rPr>
-              <a:t>IChatClient in PR #178</a:t>
-            </a:r>
-            <a:endParaRPr lang="en-US" sz="1200" dirty="0"/>
-          </a:p>
-        </p:txBody>
-      </p:sp>
-      <p:sp>
-        <p:nvSpPr>
-          <p:cNvPr id="23" name="Shape 19"/>
-          <p:cNvSpPr/>
-          <p:nvPr/>
-        </p:nvSpPr>
-        <p:spPr>
-          <a:xfrm>
-            <a:off x="8229600" y="2286000"/>
-            <a:ext cx="3703320" cy="3566160"/>
-          </a:xfrm>
-          <a:prstGeom prst="roundRect">
-            <a:avLst>
-              <a:gd name="adj" fmla="val 3077"/>
-            </a:avLst>
-          </a:prstGeom>
-          <a:solidFill>
-            <a:srgbClr val="FFFFFF"/>
-          </a:solidFill>
-          <a:ln w="12700">
-            <a:solidFill>
-              <a:srgbClr val="E5E1F5"/>
-            </a:solidFill>
-            <a:prstDash val="solid"/>
-          </a:ln>
-        </p:spPr>
-      </p:sp>
-      <p:sp>
-        <p:nvSpPr>
-          <p:cNvPr id="24" name="Shape 20"/>
-          <p:cNvSpPr/>
-          <p:nvPr/>
-        </p:nvSpPr>
-        <p:spPr>
-          <a:xfrm>
-            <a:off x="8229600" y="2286000"/>
-            <a:ext cx="3703320" cy="164592"/>
-          </a:xfrm>
-          <a:prstGeom prst="rect">
-            <a:avLst/>
-          </a:prstGeom>
-          <a:solidFill>
-            <a:srgbClr val="FBBF24"/>
-          </a:solidFill>
-          <a:ln w="12700">
-            <a:solidFill>
-              <a:srgbClr val="FBBF24"/>
-            </a:solidFill>
-            <a:prstDash val="solid"/>
-          </a:ln>
-        </p:spPr>
-      </p:sp>
-      <p:sp>
-        <p:nvSpPr>
-          <p:cNvPr id="25" name="Text 21"/>
-          <p:cNvSpPr/>
-          <p:nvPr/>
-        </p:nvSpPr>
-        <p:spPr>
-          <a:xfrm>
-            <a:off x="8503920" y="2606040"/>
-            <a:ext cx="3154680" cy="320040"/>
-          </a:xfrm>
-          <a:prstGeom prst="rect">
-            <a:avLst/>
-          </a:prstGeom>
-          <a:noFill/>
-          <a:ln/>
-        </p:spPr>
-        <p:txBody>
-          <a:bodyPr wrap="square" rtlCol="0" anchor="ctr"/>
-          <a:lstStyle/>
-          <a:p>
-            <a:pPr indent="0" marL="0">
-              <a:buNone/>
-            </a:pPr>
-            <a:r>
-              <a:rPr lang="en-US" sz="1100" b="1" spc="300" kern="0" dirty="0">
-                <a:solidFill>
-                  <a:srgbClr val="FBBF24"/>
-                </a:solidFill>
-                <a:latin typeface="Calibri" pitchFamily="34" charset="0"/>
-                <a:ea typeface="Calibri" pitchFamily="34" charset="-122"/>
-                <a:cs typeface="Calibri" pitchFamily="34" charset="-120"/>
-              </a:rPr>
-              <a:t>GOOGLE</a:t>
-            </a:r>
-            <a:endParaRPr lang="en-US" sz="1100" dirty="0"/>
-          </a:p>
-        </p:txBody>
-      </p:sp>
-      <p:sp>
-        <p:nvSpPr>
-          <p:cNvPr id="26" name="Text 22"/>
-          <p:cNvSpPr/>
-          <p:nvPr/>
-        </p:nvSpPr>
-        <p:spPr>
-          <a:xfrm>
-            <a:off x="8503920" y="2926080"/>
-            <a:ext cx="3154680" cy="548640"/>
-          </a:xfrm>
-          <a:prstGeom prst="rect">
-            <a:avLst/>
-          </a:prstGeom>
-          <a:noFill/>
-          <a:ln/>
-        </p:spPr>
-        <p:txBody>
-          <a:bodyPr wrap="square" rtlCol="0" anchor="ctr"/>
-          <a:lstStyle/>
-          <a:p>
-            <a:pPr indent="0" marL="0">
-              <a:buNone/>
-            </a:pPr>
-            <a:r>
-              <a:rPr lang="en-US" sz="2200" b="1" dirty="0">
-                <a:solidFill>
-                  <a:srgbClr val="0F0A2E"/>
-                </a:solidFill>
-                <a:latin typeface="Georgia" pitchFamily="34" charset="0"/>
-                <a:ea typeface="Georgia" pitchFamily="34" charset="-122"/>
-                <a:cs typeface="Georgia" pitchFamily="34" charset="-120"/>
-              </a:rPr>
-              <a:t>ML Kit + Gemini Nano</a:t>
-            </a:r>
-            <a:endParaRPr lang="en-US" sz="2200" dirty="0"/>
-          </a:p>
-        </p:txBody>
-      </p:sp>
-      <p:sp>
-        <p:nvSpPr>
-          <p:cNvPr id="27" name="Text 23"/>
-          <p:cNvSpPr/>
-          <p:nvPr/>
-        </p:nvSpPr>
-        <p:spPr>
-          <a:xfrm>
-            <a:off x="8503920" y="3474720"/>
-            <a:ext cx="3154680" cy="365760"/>
-          </a:xfrm>
-          <a:prstGeom prst="rect">
-            <a:avLst/>
-          </a:prstGeom>
-          <a:noFill/>
-          <a:ln/>
-        </p:spPr>
-        <p:txBody>
-          <a:bodyPr wrap="square" rtlCol="0" anchor="ctr"/>
-          <a:lstStyle/>
-          <a:p>
-            <a:pPr indent="0" marL="0">
-              <a:buNone/>
-            </a:pPr>
-            <a:r>
-              <a:rPr lang="en-US" sz="1300" i="1" dirty="0">
-                <a:solidFill>
-                  <a:srgbClr val="6B6B8F"/>
-                </a:solidFill>
-                <a:latin typeface="Consolas" pitchFamily="34" charset="0"/>
-                <a:ea typeface="Consolas" pitchFamily="34" charset="-122"/>
-                <a:cs typeface="Consolas" pitchFamily="34" charset="-120"/>
-              </a:rPr>
-              <a:t>ML Kit (Kotlin/Java)</a:t>
-            </a:r>
-            <a:endParaRPr lang="en-US" sz="1300" dirty="0"/>
-          </a:p>
-        </p:txBody>
-      </p:sp>
-      <p:sp>
-        <p:nvSpPr>
-          <p:cNvPr id="28" name="Shape 24"/>
-          <p:cNvSpPr/>
-          <p:nvPr/>
-        </p:nvSpPr>
-        <p:spPr>
-          <a:xfrm>
-            <a:off x="8503920" y="3931920"/>
-            <a:ext cx="3154680" cy="0"/>
-          </a:xfrm>
-          <a:prstGeom prst="line">
-            <a:avLst/>
-          </a:prstGeom>
-          <a:noFill/>
-          <a:ln w="12700">
-            <a:solidFill>
-              <a:srgbClr val="E5E1F5"/>
-            </a:solidFill>
-            <a:prstDash val="solid"/>
-          </a:ln>
-        </p:spPr>
-      </p:sp>
-      <p:sp>
-        <p:nvSpPr>
-          <p:cNvPr id="29" name="Text 25"/>
-          <p:cNvSpPr/>
-          <p:nvPr/>
-        </p:nvSpPr>
-        <p:spPr>
-          <a:xfrm>
-            <a:off x="8503920" y="4069080"/>
-            <a:ext cx="3154680" cy="1325880"/>
-          </a:xfrm>
-          <a:prstGeom prst="rect">
-            <a:avLst/>
-          </a:prstGeom>
-          <a:noFill/>
-          <a:ln/>
-        </p:spPr>
-        <p:txBody>
-          <a:bodyPr wrap="square" rtlCol="0" anchor="ctr"/>
-          <a:lstStyle/>
-          <a:p>
-            <a:pPr indent="0" marL="0">
-              <a:spcAft>
-                <a:spcPts val="400"/>
-              </a:spcAft>
-              <a:buNone/>
-            </a:pPr>
-            <a:r>
-              <a:rPr lang="en-US" sz="1300" dirty="0">
-                <a:solidFill>
-                  <a:srgbClr val="0F0A2E"/>
-                </a:solidFill>
-                <a:latin typeface="Calibri" pitchFamily="34" charset="0"/>
-                <a:ea typeface="Calibri" pitchFamily="34" charset="-122"/>
-                <a:cs typeface="Calibri" pitchFamily="34" charset="-120"/>
-              </a:rPr>
-              <a:t>Android · AICore service</a:t>
-            </a:r>
-            <a:endParaRPr lang="en-US" sz="1300" dirty="0"/>
-          </a:p>
-          <a:p>
-            <a:pPr indent="0" marL="0">
-              <a:spcAft>
-                <a:spcPts val="400"/>
-              </a:spcAft>
-              <a:buNone/>
-            </a:pPr>
-            <a:r>
-              <a:rPr lang="en-US" sz="1300" dirty="0">
-                <a:solidFill>
-                  <a:srgbClr val="0F0A2E"/>
-                </a:solidFill>
-                <a:latin typeface="Calibri" pitchFamily="34" charset="0"/>
-                <a:ea typeface="Calibri" pitchFamily="34" charset="-122"/>
-                <a:cs typeface="Calibri" pitchFamily="34" charset="-120"/>
-              </a:rPr>
-              <a:t>Compact Gemini Nano</a:t>
-            </a:r>
-            <a:endParaRPr lang="en-US" sz="1300" dirty="0"/>
-          </a:p>
-          <a:p>
-            <a:pPr indent="0" marL="0">
-              <a:spcAft>
-                <a:spcPts val="400"/>
-              </a:spcAft>
-              <a:buNone/>
-            </a:pPr>
-            <a:r>
-              <a:rPr lang="en-US" sz="1300" dirty="0">
-                <a:solidFill>
-                  <a:srgbClr val="0F0A2E"/>
-                </a:solidFill>
-                <a:latin typeface="Calibri" pitchFamily="34" charset="0"/>
-                <a:ea typeface="Calibri" pitchFamily="34" charset="-122"/>
-                <a:cs typeface="Calibri" pitchFamily="34" charset="-120"/>
-              </a:rPr>
-              <a:t>Summarize · proofread · rewrite</a:t>
-            </a:r>
-            <a:endParaRPr lang="en-US" sz="1300" dirty="0"/>
-          </a:p>
-        </p:txBody>
-      </p:sp>
       <p:pic>
         <p:nvPicPr>
-          <p:cNvPr id="30" name="Image 2" descr="preencoded.png">    </p:cNvPr>
+          <p:cNvPr id="25" name="Image 2" descr="preencoded.png">    </p:cNvPr>
           <p:cNvPicPr>
             <a:picLocks noChangeAspect="1"/>
           </p:cNvPicPr>
@@ -16527,6 +16257,1265 @@
         </p:blipFill>
         <p:spPr>
           <a:xfrm>
+            <a:off x="10948111" y="502920"/>
+            <a:ext cx="329184" cy="329184"/>
+          </a:xfrm>
+          <a:prstGeom prst="rect">
+            <a:avLst/>
+          </a:prstGeom>
+        </p:spPr>
+      </p:pic>
+      <p:sp>
+        <p:nvSpPr>
+          <p:cNvPr id="26" name="Text 21"/>
+          <p:cNvSpPr/>
+          <p:nvPr/>
+        </p:nvSpPr>
+        <p:spPr>
+          <a:xfrm>
+            <a:off x="457200" y="6446520"/>
+            <a:ext cx="7315200" cy="274320"/>
+          </a:xfrm>
+          <a:prstGeom prst="rect">
+            <a:avLst/>
+          </a:prstGeom>
+          <a:noFill/>
+          <a:ln/>
+        </p:spPr>
+        <p:txBody>
+          <a:bodyPr wrap="square" rtlCol="0" anchor="ctr"/>
+          <a:lstStyle/>
+          <a:p>
+            <a:pPr algn="l" indent="0" marL="0">
+              <a:buNone/>
+            </a:pPr>
+            <a:r>
+              <a:rPr lang="en-US" sz="1000" dirty="0">
+                <a:solidFill>
+                  <a:srgbClr val="6B6B8F"/>
+                </a:solidFill>
+                <a:latin typeface="Calibri" pitchFamily="34" charset="0"/>
+                <a:ea typeface="Calibri" pitchFamily="34" charset="-122"/>
+                <a:cs typeface="Calibri" pitchFamily="34" charset="-120"/>
+              </a:rPr>
+              <a:t>Unifying Local and Cloud AI</a:t>
+            </a:r>
+            <a:pPr algn="l" indent="0" marL="0">
+              <a:buNone/>
+            </a:pPr>
+            <a:r>
+              <a:rPr lang="en-US" sz="1000" dirty="0">
+                <a:solidFill>
+                  <a:srgbClr val="6B6B8F"/>
+                </a:solidFill>
+                <a:latin typeface="Calibri" pitchFamily="34" charset="0"/>
+                <a:ea typeface="Calibri" pitchFamily="34" charset="-122"/>
+                <a:cs typeface="Calibri" pitchFamily="34" charset="-120"/>
+              </a:rPr>
+              <a:t>  ·  </a:t>
+            </a:r>
+            <a:pPr algn="l" indent="0" marL="0">
+              <a:buNone/>
+            </a:pPr>
+            <a:r>
+              <a:rPr lang="en-US" sz="1000" b="1" dirty="0">
+                <a:solidFill>
+                  <a:srgbClr val="FB7185"/>
+                </a:solidFill>
+                <a:latin typeface="Calibri" pitchFamily="34" charset="0"/>
+                <a:ea typeface="Calibri" pitchFamily="34" charset="-122"/>
+                <a:cs typeface="Calibri" pitchFamily="34" charset="-120"/>
+              </a:rPr>
+              <a:t>@mattleibow</a:t>
+            </a:r>
+            <a:pPr algn="l" indent="0" marL="0">
+              <a:buNone/>
+            </a:pPr>
+            <a:r>
+              <a:rPr lang="en-US" sz="1000" dirty="0">
+                <a:solidFill>
+                  <a:srgbClr val="6B6B8F"/>
+                </a:solidFill>
+                <a:latin typeface="Calibri" pitchFamily="34" charset="0"/>
+                <a:ea typeface="Calibri" pitchFamily="34" charset="-122"/>
+                <a:cs typeface="Calibri" pitchFamily="34" charset="-120"/>
+              </a:rPr>
+              <a:t>  ·  @CPTMSDUG</a:t>
+            </a:r>
+            <a:endParaRPr lang="en-US" sz="1000" dirty="0"/>
+          </a:p>
+        </p:txBody>
+      </p:sp>
+      <p:sp>
+        <p:nvSpPr>
+          <p:cNvPr id="27" name="Text 22"/>
+          <p:cNvSpPr/>
+          <p:nvPr/>
+        </p:nvSpPr>
+        <p:spPr>
+          <a:xfrm>
+            <a:off x="10820095" y="6446520"/>
+            <a:ext cx="914400" cy="274320"/>
+          </a:xfrm>
+          <a:prstGeom prst="rect">
+            <a:avLst/>
+          </a:prstGeom>
+          <a:noFill/>
+          <a:ln/>
+        </p:spPr>
+        <p:txBody>
+          <a:bodyPr wrap="square" rtlCol="0" anchor="ctr"/>
+          <a:lstStyle/>
+          <a:p>
+            <a:pPr algn="r" indent="0" marL="0">
+              <a:buNone/>
+            </a:pPr>
+            <a:r>
+              <a:rPr lang="en-US" sz="1000" dirty="0">
+                <a:solidFill>
+                  <a:srgbClr val="6B6B8F"/>
+                </a:solidFill>
+                <a:latin typeface="Calibri" pitchFamily="34" charset="0"/>
+                <a:ea typeface="Calibri" pitchFamily="34" charset="-122"/>
+                <a:cs typeface="Calibri" pitchFamily="34" charset="-120"/>
+              </a:rPr>
+              <a:t>5 / 15</a:t>
+            </a:r>
+            <a:endParaRPr lang="en-US" sz="1000" dirty="0"/>
+          </a:p>
+        </p:txBody>
+      </p:sp>
+    </p:spTree>
+  </p:cSld>
+  <p:clrMapOvr>
+    <a:masterClrMapping/>
+  </p:clrMapOvr>
+</p:sld>
+</file>
+
+<file path=ppt/slides/slide6.xml><?xml version="1.0" encoding="utf-8"?>
+<p:sld xmlns:a="http://schemas.openxmlformats.org/drawingml/2006/main" xmlns:r="http://schemas.openxmlformats.org/officeDocument/2006/relationships" xmlns:p="http://schemas.openxmlformats.org/presentationml/2006/main">
+  <p:cSld name="Slide 6">
+    <p:bg>
+      <p:bgPr>
+        <a:solidFill>
+          <a:srgbClr val="FAF8FF"/>
+        </a:solidFill>
+      </p:bgPr>
+    </p:bg>
+    <p:spTree>
+      <p:nvGrpSpPr>
+        <p:cNvPr id="1" name=""/>
+        <p:cNvGrpSpPr/>
+        <p:nvPr/>
+      </p:nvGrpSpPr>
+      <p:grpSpPr>
+        <a:xfrm>
+          <a:off x="0" y="0"/>
+          <a:ext cx="0" cy="0"/>
+          <a:chOff x="0" y="0"/>
+          <a:chExt cx="0" cy="0"/>
+        </a:xfrm>
+      </p:grpSpPr>
+      <p:sp>
+        <p:nvSpPr>
+          <p:cNvPr id="2" name="Text 0"/>
+          <p:cNvSpPr/>
+          <p:nvPr/>
+        </p:nvSpPr>
+        <p:spPr>
+          <a:xfrm>
+            <a:off x="548640" y="502920"/>
+            <a:ext cx="7315200" cy="320040"/>
+          </a:xfrm>
+          <a:prstGeom prst="rect">
+            <a:avLst/>
+          </a:prstGeom>
+          <a:noFill/>
+          <a:ln/>
+        </p:spPr>
+        <p:txBody>
+          <a:bodyPr wrap="square" rtlCol="0" anchor="ctr"/>
+          <a:lstStyle/>
+          <a:p>
+            <a:pPr indent="0" marL="0">
+              <a:buNone/>
+            </a:pPr>
+            <a:r>
+              <a:rPr lang="en-US" sz="1200" b="1" spc="400" kern="0" dirty="0">
+                <a:solidFill>
+                  <a:srgbClr val="FB7185"/>
+                </a:solidFill>
+                <a:latin typeface="Calibri" pitchFamily="34" charset="0"/>
+                <a:ea typeface="Calibri" pitchFamily="34" charset="-122"/>
+                <a:cs typeface="Calibri" pitchFamily="34" charset="-120"/>
+              </a:rPr>
+              <a:t>TIER 1  ·  THE SURPRISE</a:t>
+            </a:r>
+            <a:endParaRPr lang="en-US" sz="1200" dirty="0"/>
+          </a:p>
+        </p:txBody>
+      </p:sp>
+      <p:sp>
+        <p:nvSpPr>
+          <p:cNvPr id="3" name="Text 1"/>
+          <p:cNvSpPr/>
+          <p:nvPr/>
+        </p:nvSpPr>
+        <p:spPr>
+          <a:xfrm>
+            <a:off x="548640" y="822960"/>
+            <a:ext cx="10058400" cy="822960"/>
+          </a:xfrm>
+          <a:prstGeom prst="rect">
+            <a:avLst/>
+          </a:prstGeom>
+          <a:noFill/>
+          <a:ln/>
+        </p:spPr>
+        <p:txBody>
+          <a:bodyPr wrap="square" rtlCol="0" anchor="ctr"/>
+          <a:lstStyle/>
+          <a:p>
+            <a:pPr indent="0" marL="0">
+              <a:buNone/>
+            </a:pPr>
+            <a:r>
+              <a:rPr lang="en-US" sz="3800" b="1" dirty="0">
+                <a:solidFill>
+                  <a:srgbClr val="0F0A2E"/>
+                </a:solidFill>
+                <a:latin typeface="Georgia" pitchFamily="34" charset="0"/>
+                <a:ea typeface="Georgia" pitchFamily="34" charset="-122"/>
+                <a:cs typeface="Georgia" pitchFamily="34" charset="-120"/>
+              </a:rPr>
+              <a:t>Your OS already ships an LLM</a:t>
+            </a:r>
+            <a:endParaRPr lang="en-US" sz="3800" dirty="0"/>
+          </a:p>
+        </p:txBody>
+      </p:sp>
+      <p:sp>
+        <p:nvSpPr>
+          <p:cNvPr id="4" name="Text 2"/>
+          <p:cNvSpPr/>
+          <p:nvPr/>
+        </p:nvSpPr>
+        <p:spPr>
+          <a:xfrm>
+            <a:off x="548640" y="1600200"/>
+            <a:ext cx="10972800" cy="457200"/>
+          </a:xfrm>
+          <a:prstGeom prst="rect">
+            <a:avLst/>
+          </a:prstGeom>
+          <a:noFill/>
+          <a:ln/>
+        </p:spPr>
+        <p:txBody>
+          <a:bodyPr wrap="square" rtlCol="0" anchor="ctr"/>
+          <a:lstStyle/>
+          <a:p>
+            <a:pPr indent="0" marL="0">
+              <a:buNone/>
+            </a:pPr>
+            <a:r>
+              <a:rPr lang="en-US" sz="1700" i="1" dirty="0">
+                <a:solidFill>
+                  <a:srgbClr val="6B6B8F"/>
+                </a:solidFill>
+                <a:latin typeface="Calibri" pitchFamily="34" charset="0"/>
+                <a:ea typeface="Calibri" pitchFamily="34" charset="-122"/>
+                <a:cs typeface="Calibri" pitchFamily="34" charset="-120"/>
+              </a:rPr>
+              <a:t>Vendor-managed, shared across apps, zero cost, fully offline. ~3B-class models.</a:t>
+            </a:r>
+            <a:endParaRPr lang="en-US" sz="1700" dirty="0"/>
+          </a:p>
+        </p:txBody>
+      </p:sp>
+      <p:sp>
+        <p:nvSpPr>
+          <p:cNvPr id="5" name="Shape 3"/>
+          <p:cNvSpPr/>
+          <p:nvPr/>
+        </p:nvSpPr>
+        <p:spPr>
+          <a:xfrm>
+            <a:off x="548640" y="2286000"/>
+            <a:ext cx="3703320" cy="3566160"/>
+          </a:xfrm>
+          <a:prstGeom prst="roundRect">
+            <a:avLst>
+              <a:gd name="adj" fmla="val 3077"/>
+            </a:avLst>
+          </a:prstGeom>
+          <a:solidFill>
+            <a:srgbClr val="FFFFFF"/>
+          </a:solidFill>
+          <a:ln w="12700">
+            <a:solidFill>
+              <a:srgbClr val="E5E1F5"/>
+            </a:solidFill>
+            <a:prstDash val="solid"/>
+          </a:ln>
+        </p:spPr>
+      </p:sp>
+      <p:sp>
+        <p:nvSpPr>
+          <p:cNvPr id="6" name="Shape 4"/>
+          <p:cNvSpPr/>
+          <p:nvPr/>
+        </p:nvSpPr>
+        <p:spPr>
+          <a:xfrm>
+            <a:off x="548640" y="2286000"/>
+            <a:ext cx="3703320" cy="164592"/>
+          </a:xfrm>
+          <a:prstGeom prst="rect">
+            <a:avLst/>
+          </a:prstGeom>
+          <a:solidFill>
+            <a:srgbClr val="FB7185"/>
+          </a:solidFill>
+          <a:ln w="12700">
+            <a:solidFill>
+              <a:srgbClr val="FB7185"/>
+            </a:solidFill>
+            <a:prstDash val="solid"/>
+          </a:ln>
+        </p:spPr>
+      </p:sp>
+      <p:sp>
+        <p:nvSpPr>
+          <p:cNvPr id="7" name="Text 5"/>
+          <p:cNvSpPr/>
+          <p:nvPr/>
+        </p:nvSpPr>
+        <p:spPr>
+          <a:xfrm>
+            <a:off x="822960" y="2606040"/>
+            <a:ext cx="3154680" cy="320040"/>
+          </a:xfrm>
+          <a:prstGeom prst="rect">
+            <a:avLst/>
+          </a:prstGeom>
+          <a:noFill/>
+          <a:ln/>
+        </p:spPr>
+        <p:txBody>
+          <a:bodyPr wrap="square" rtlCol="0" anchor="ctr"/>
+          <a:lstStyle/>
+          <a:p>
+            <a:pPr indent="0" marL="0">
+              <a:buNone/>
+            </a:pPr>
+            <a:r>
+              <a:rPr lang="en-US" sz="1100" b="1" spc="300" kern="0" dirty="0">
+                <a:solidFill>
+                  <a:srgbClr val="FB7185"/>
+                </a:solidFill>
+                <a:latin typeface="Calibri" pitchFamily="34" charset="0"/>
+                <a:ea typeface="Calibri" pitchFamily="34" charset="-122"/>
+                <a:cs typeface="Calibri" pitchFamily="34" charset="-120"/>
+              </a:rPr>
+              <a:t>APPLE</a:t>
+            </a:r>
+            <a:endParaRPr lang="en-US" sz="1100" dirty="0"/>
+          </a:p>
+        </p:txBody>
+      </p:sp>
+      <p:sp>
+        <p:nvSpPr>
+          <p:cNvPr id="8" name="Text 6"/>
+          <p:cNvSpPr/>
+          <p:nvPr/>
+        </p:nvSpPr>
+        <p:spPr>
+          <a:xfrm>
+            <a:off x="822960" y="2926080"/>
+            <a:ext cx="3154680" cy="548640"/>
+          </a:xfrm>
+          <a:prstGeom prst="rect">
+            <a:avLst/>
+          </a:prstGeom>
+          <a:noFill/>
+          <a:ln/>
+        </p:spPr>
+        <p:txBody>
+          <a:bodyPr wrap="square" rtlCol="0" anchor="ctr"/>
+          <a:lstStyle/>
+          <a:p>
+            <a:pPr indent="0" marL="0">
+              <a:buNone/>
+            </a:pPr>
+            <a:r>
+              <a:rPr lang="en-US" sz="2200" b="1" dirty="0">
+                <a:solidFill>
+                  <a:srgbClr val="0F0A2E"/>
+                </a:solidFill>
+                <a:latin typeface="Georgia" pitchFamily="34" charset="0"/>
+                <a:ea typeface="Georgia" pitchFamily="34" charset="-122"/>
+                <a:cs typeface="Georgia" pitchFamily="34" charset="-120"/>
+              </a:rPr>
+              <a:t>Apple Intelligence</a:t>
+            </a:r>
+            <a:endParaRPr lang="en-US" sz="2200" dirty="0"/>
+          </a:p>
+        </p:txBody>
+      </p:sp>
+      <p:sp>
+        <p:nvSpPr>
+          <p:cNvPr id="9" name="Text 7"/>
+          <p:cNvSpPr/>
+          <p:nvPr/>
+        </p:nvSpPr>
+        <p:spPr>
+          <a:xfrm>
+            <a:off x="822960" y="3474720"/>
+            <a:ext cx="3154680" cy="365760"/>
+          </a:xfrm>
+          <a:prstGeom prst="rect">
+            <a:avLst/>
+          </a:prstGeom>
+          <a:noFill/>
+          <a:ln/>
+        </p:spPr>
+        <p:txBody>
+          <a:bodyPr wrap="square" rtlCol="0" anchor="ctr"/>
+          <a:lstStyle/>
+          <a:p>
+            <a:pPr indent="0" marL="0">
+              <a:buNone/>
+            </a:pPr>
+            <a:r>
+              <a:rPr lang="en-US" sz="1300" i="1" dirty="0">
+                <a:solidFill>
+                  <a:srgbClr val="6B6B8F"/>
+                </a:solidFill>
+                <a:latin typeface="Consolas" pitchFamily="34" charset="0"/>
+                <a:ea typeface="Consolas" pitchFamily="34" charset="-122"/>
+                <a:cs typeface="Consolas" pitchFamily="34" charset="-120"/>
+              </a:rPr>
+              <a:t>FoundationModels (Swift)</a:t>
+            </a:r>
+            <a:endParaRPr lang="en-US" sz="1300" dirty="0"/>
+          </a:p>
+        </p:txBody>
+      </p:sp>
+      <p:sp>
+        <p:nvSpPr>
+          <p:cNvPr id="10" name="Shape 8"/>
+          <p:cNvSpPr/>
+          <p:nvPr/>
+        </p:nvSpPr>
+        <p:spPr>
+          <a:xfrm>
+            <a:off x="822960" y="3931920"/>
+            <a:ext cx="3154680" cy="0"/>
+          </a:xfrm>
+          <a:prstGeom prst="line">
+            <a:avLst/>
+          </a:prstGeom>
+          <a:noFill/>
+          <a:ln w="12700">
+            <a:solidFill>
+              <a:srgbClr val="E5E1F5"/>
+            </a:solidFill>
+            <a:prstDash val="solid"/>
+          </a:ln>
+        </p:spPr>
+      </p:sp>
+      <p:sp>
+        <p:nvSpPr>
+          <p:cNvPr id="11" name="Text 9"/>
+          <p:cNvSpPr/>
+          <p:nvPr/>
+        </p:nvSpPr>
+        <p:spPr>
+          <a:xfrm>
+            <a:off x="822960" y="4069080"/>
+            <a:ext cx="3154680" cy="1325880"/>
+          </a:xfrm>
+          <a:prstGeom prst="rect">
+            <a:avLst/>
+          </a:prstGeom>
+          <a:noFill/>
+          <a:ln/>
+        </p:spPr>
+        <p:txBody>
+          <a:bodyPr wrap="square" rtlCol="0" anchor="ctr"/>
+          <a:lstStyle/>
+          <a:p>
+            <a:pPr indent="0" marL="0">
+              <a:spcAft>
+                <a:spcPts val="400"/>
+              </a:spcAft>
+              <a:buNone/>
+            </a:pPr>
+            <a:r>
+              <a:rPr lang="en-US" sz="1300" dirty="0">
+                <a:solidFill>
+                  <a:srgbClr val="0F0A2E"/>
+                </a:solidFill>
+                <a:latin typeface="Calibri" pitchFamily="34" charset="0"/>
+                <a:ea typeface="Calibri" pitchFamily="34" charset="-122"/>
+                <a:cs typeface="Calibri" pitchFamily="34" charset="-120"/>
+              </a:rPr>
+              <a:t>iOS 26 · macOS 26 Tahoe</a:t>
+            </a:r>
+            <a:endParaRPr lang="en-US" sz="1300" dirty="0"/>
+          </a:p>
+          <a:p>
+            <a:pPr indent="0" marL="0">
+              <a:spcAft>
+                <a:spcPts val="400"/>
+              </a:spcAft>
+              <a:buNone/>
+            </a:pPr>
+            <a:r>
+              <a:rPr lang="en-US" sz="1300" dirty="0">
+                <a:solidFill>
+                  <a:srgbClr val="0F0A2E"/>
+                </a:solidFill>
+                <a:latin typeface="Calibri" pitchFamily="34" charset="0"/>
+                <a:ea typeface="Calibri" pitchFamily="34" charset="-122"/>
+                <a:cs typeface="Calibri" pitchFamily="34" charset="-120"/>
+              </a:rPr>
+              <a:t>Multilingual</a:t>
+            </a:r>
+            <a:endParaRPr lang="en-US" sz="1300" dirty="0"/>
+          </a:p>
+          <a:p>
+            <a:pPr indent="0" marL="0">
+              <a:spcAft>
+                <a:spcPts val="400"/>
+              </a:spcAft>
+              <a:buNone/>
+            </a:pPr>
+            <a:r>
+              <a:rPr lang="en-US" sz="1300" dirty="0">
+                <a:solidFill>
+                  <a:srgbClr val="0F0A2E"/>
+                </a:solidFill>
+                <a:latin typeface="Calibri" pitchFamily="34" charset="0"/>
+                <a:ea typeface="Calibri" pitchFamily="34" charset="-122"/>
+                <a:cs typeface="Calibri" pitchFamily="34" charset="-120"/>
+              </a:rPr>
+              <a:t>Tool calling</a:t>
+            </a:r>
+            <a:endParaRPr lang="en-US" sz="1300" dirty="0"/>
+          </a:p>
+        </p:txBody>
+      </p:sp>
+      <p:pic>
+        <p:nvPicPr>
+          <p:cNvPr id="12" name="Image 0" descr="preencoded.png">    </p:cNvPr>
+          <p:cNvPicPr>
+            <a:picLocks noChangeAspect="1"/>
+          </p:cNvPicPr>
+          <p:nvPr/>
+        </p:nvPicPr>
+        <p:blipFill>
+          <a:blip r:embed="rId1">
+            <a:extLst>
+              <a:ext uri="{96DAC541-7B7A-43D3-8B79-37D633B846F1}">
+                <asvg:svgBlip xmlns:asvg="http://schemas.microsoft.com/office/drawing/2016/SVG/main" r:embed="rId2"/>
+              </a:ext>
+            </a:extLst>
+          </a:blip>
+          <a:stretch>
+            <a:fillRect/>
+          </a:stretch>
+        </p:blipFill>
+        <p:spPr>
+          <a:xfrm>
+            <a:off x="822960" y="5458968"/>
+            <a:ext cx="237744" cy="237744"/>
+          </a:xfrm>
+          <a:prstGeom prst="rect">
+            <a:avLst/>
+          </a:prstGeom>
+        </p:spPr>
+      </p:pic>
+      <p:sp>
+        <p:nvSpPr>
+          <p:cNvPr id="13" name="Text 10"/>
+          <p:cNvSpPr/>
+          <p:nvPr/>
+        </p:nvSpPr>
+        <p:spPr>
+          <a:xfrm>
+            <a:off x="1115568" y="5440680"/>
+            <a:ext cx="2862072" cy="320040"/>
+          </a:xfrm>
+          <a:prstGeom prst="rect">
+            <a:avLst/>
+          </a:prstGeom>
+          <a:noFill/>
+          <a:ln/>
+        </p:spPr>
+        <p:txBody>
+          <a:bodyPr wrap="square" rtlCol="0" anchor="ctr"/>
+          <a:lstStyle/>
+          <a:p>
+            <a:pPr indent="0" marL="0">
+              <a:buNone/>
+            </a:pPr>
+            <a:r>
+              <a:rPr lang="en-US" sz="1200" b="1" dirty="0">
+                <a:solidFill>
+                  <a:srgbClr val="FB7185"/>
+                </a:solidFill>
+                <a:latin typeface="Calibri" pitchFamily="34" charset="0"/>
+                <a:ea typeface="Calibri" pitchFamily="34" charset="-122"/>
+                <a:cs typeface="Calibri" pitchFamily="34" charset="-120"/>
+              </a:rPr>
+              <a:t>IChatClient ready</a:t>
+            </a:r>
+            <a:endParaRPr lang="en-US" sz="1200" dirty="0"/>
+          </a:p>
+        </p:txBody>
+      </p:sp>
+      <p:sp>
+        <p:nvSpPr>
+          <p:cNvPr id="14" name="Shape 11"/>
+          <p:cNvSpPr/>
+          <p:nvPr/>
+        </p:nvSpPr>
+        <p:spPr>
+          <a:xfrm>
+            <a:off x="4389120" y="2286000"/>
+            <a:ext cx="3703320" cy="3566160"/>
+          </a:xfrm>
+          <a:prstGeom prst="roundRect">
+            <a:avLst>
+              <a:gd name="adj" fmla="val 3077"/>
+            </a:avLst>
+          </a:prstGeom>
+          <a:solidFill>
+            <a:srgbClr val="FFFFFF"/>
+          </a:solidFill>
+          <a:ln w="12700">
+            <a:solidFill>
+              <a:srgbClr val="E5E1F5"/>
+            </a:solidFill>
+            <a:prstDash val="solid"/>
+          </a:ln>
+        </p:spPr>
+      </p:sp>
+      <p:sp>
+        <p:nvSpPr>
+          <p:cNvPr id="15" name="Shape 12"/>
+          <p:cNvSpPr/>
+          <p:nvPr/>
+        </p:nvSpPr>
+        <p:spPr>
+          <a:xfrm>
+            <a:off x="4389120" y="2286000"/>
+            <a:ext cx="3703320" cy="164592"/>
+          </a:xfrm>
+          <a:prstGeom prst="rect">
+            <a:avLst/>
+          </a:prstGeom>
+          <a:solidFill>
+            <a:srgbClr val="6366F1"/>
+          </a:solidFill>
+          <a:ln w="12700">
+            <a:solidFill>
+              <a:srgbClr val="6366F1"/>
+            </a:solidFill>
+            <a:prstDash val="solid"/>
+          </a:ln>
+        </p:spPr>
+      </p:sp>
+      <p:sp>
+        <p:nvSpPr>
+          <p:cNvPr id="16" name="Text 13"/>
+          <p:cNvSpPr/>
+          <p:nvPr/>
+        </p:nvSpPr>
+        <p:spPr>
+          <a:xfrm>
+            <a:off x="4663440" y="2606040"/>
+            <a:ext cx="3154680" cy="320040"/>
+          </a:xfrm>
+          <a:prstGeom prst="rect">
+            <a:avLst/>
+          </a:prstGeom>
+          <a:noFill/>
+          <a:ln/>
+        </p:spPr>
+        <p:txBody>
+          <a:bodyPr wrap="square" rtlCol="0" anchor="ctr"/>
+          <a:lstStyle/>
+          <a:p>
+            <a:pPr indent="0" marL="0">
+              <a:buNone/>
+            </a:pPr>
+            <a:r>
+              <a:rPr lang="en-US" sz="1100" b="1" spc="300" kern="0" dirty="0">
+                <a:solidFill>
+                  <a:srgbClr val="6366F1"/>
+                </a:solidFill>
+                <a:latin typeface="Calibri" pitchFamily="34" charset="0"/>
+                <a:ea typeface="Calibri" pitchFamily="34" charset="-122"/>
+                <a:cs typeface="Calibri" pitchFamily="34" charset="-120"/>
+              </a:rPr>
+              <a:t>MICROSOFT</a:t>
+            </a:r>
+            <a:endParaRPr lang="en-US" sz="1100" dirty="0"/>
+          </a:p>
+        </p:txBody>
+      </p:sp>
+      <p:sp>
+        <p:nvSpPr>
+          <p:cNvPr id="17" name="Text 14"/>
+          <p:cNvSpPr/>
+          <p:nvPr/>
+        </p:nvSpPr>
+        <p:spPr>
+          <a:xfrm>
+            <a:off x="4663440" y="2926080"/>
+            <a:ext cx="3154680" cy="548640"/>
+          </a:xfrm>
+          <a:prstGeom prst="rect">
+            <a:avLst/>
+          </a:prstGeom>
+          <a:noFill/>
+          <a:ln/>
+        </p:spPr>
+        <p:txBody>
+          <a:bodyPr wrap="square" rtlCol="0" anchor="ctr"/>
+          <a:lstStyle/>
+          <a:p>
+            <a:pPr indent="0" marL="0">
+              <a:buNone/>
+            </a:pPr>
+            <a:r>
+              <a:rPr lang="en-US" sz="2200" b="1" dirty="0">
+                <a:solidFill>
+                  <a:srgbClr val="0F0A2E"/>
+                </a:solidFill>
+                <a:latin typeface="Georgia" pitchFamily="34" charset="0"/>
+                <a:ea typeface="Georgia" pitchFamily="34" charset="-122"/>
+                <a:cs typeface="Georgia" pitchFamily="34" charset="-120"/>
+              </a:rPr>
+              <a:t>Phi Silica</a:t>
+            </a:r>
+            <a:endParaRPr lang="en-US" sz="2200" dirty="0"/>
+          </a:p>
+        </p:txBody>
+      </p:sp>
+      <p:sp>
+        <p:nvSpPr>
+          <p:cNvPr id="18" name="Text 15"/>
+          <p:cNvSpPr/>
+          <p:nvPr/>
+        </p:nvSpPr>
+        <p:spPr>
+          <a:xfrm>
+            <a:off x="4663440" y="3474720"/>
+            <a:ext cx="3154680" cy="365760"/>
+          </a:xfrm>
+          <a:prstGeom prst="rect">
+            <a:avLst/>
+          </a:prstGeom>
+          <a:noFill/>
+          <a:ln/>
+        </p:spPr>
+        <p:txBody>
+          <a:bodyPr wrap="square" rtlCol="0" anchor="ctr"/>
+          <a:lstStyle/>
+          <a:p>
+            <a:pPr indent="0" marL="0">
+              <a:buNone/>
+            </a:pPr>
+            <a:r>
+              <a:rPr lang="en-US" sz="1300" i="1" dirty="0">
+                <a:solidFill>
+                  <a:srgbClr val="6B6B8F"/>
+                </a:solidFill>
+                <a:latin typeface="Consolas" pitchFamily="34" charset="0"/>
+                <a:ea typeface="Consolas" pitchFamily="34" charset="-122"/>
+                <a:cs typeface="Consolas" pitchFamily="34" charset="-120"/>
+              </a:rPr>
+              <a:t>Windows AI APIs (.NET)</a:t>
+            </a:r>
+            <a:endParaRPr lang="en-US" sz="1300" dirty="0"/>
+          </a:p>
+        </p:txBody>
+      </p:sp>
+      <p:sp>
+        <p:nvSpPr>
+          <p:cNvPr id="19" name="Shape 16"/>
+          <p:cNvSpPr/>
+          <p:nvPr/>
+        </p:nvSpPr>
+        <p:spPr>
+          <a:xfrm>
+            <a:off x="4663440" y="3931920"/>
+            <a:ext cx="3154680" cy="0"/>
+          </a:xfrm>
+          <a:prstGeom prst="line">
+            <a:avLst/>
+          </a:prstGeom>
+          <a:noFill/>
+          <a:ln w="12700">
+            <a:solidFill>
+              <a:srgbClr val="E5E1F5"/>
+            </a:solidFill>
+            <a:prstDash val="solid"/>
+          </a:ln>
+        </p:spPr>
+      </p:sp>
+      <p:sp>
+        <p:nvSpPr>
+          <p:cNvPr id="20" name="Text 17"/>
+          <p:cNvSpPr/>
+          <p:nvPr/>
+        </p:nvSpPr>
+        <p:spPr>
+          <a:xfrm>
+            <a:off x="4663440" y="4069080"/>
+            <a:ext cx="3154680" cy="1325880"/>
+          </a:xfrm>
+          <a:prstGeom prst="rect">
+            <a:avLst/>
+          </a:prstGeom>
+          <a:noFill/>
+          <a:ln/>
+        </p:spPr>
+        <p:txBody>
+          <a:bodyPr wrap="square" rtlCol="0" anchor="ctr"/>
+          <a:lstStyle/>
+          <a:p>
+            <a:pPr indent="0" marL="0">
+              <a:spcAft>
+                <a:spcPts val="400"/>
+              </a:spcAft>
+              <a:buNone/>
+            </a:pPr>
+            <a:r>
+              <a:rPr lang="en-US" sz="1300" dirty="0">
+                <a:solidFill>
+                  <a:srgbClr val="0F0A2E"/>
+                </a:solidFill>
+                <a:latin typeface="Calibri" pitchFamily="34" charset="0"/>
+                <a:ea typeface="Calibri" pitchFamily="34" charset="-122"/>
+                <a:cs typeface="Calibri" pitchFamily="34" charset="-120"/>
+              </a:rPr>
+              <a:t>Copilot+ PCs · NPU-accelerated</a:t>
+            </a:r>
+            <a:endParaRPr lang="en-US" sz="1300" dirty="0"/>
+          </a:p>
+          <a:p>
+            <a:pPr indent="0" marL="0">
+              <a:spcAft>
+                <a:spcPts val="400"/>
+              </a:spcAft>
+              <a:buNone/>
+            </a:pPr>
+            <a:r>
+              <a:rPr lang="en-US" sz="1300" dirty="0">
+                <a:solidFill>
+                  <a:srgbClr val="0F0A2E"/>
+                </a:solidFill>
+                <a:latin typeface="Calibri" pitchFamily="34" charset="0"/>
+                <a:ea typeface="Calibri" pitchFamily="34" charset="-122"/>
+                <a:cs typeface="Calibri" pitchFamily="34" charset="-120"/>
+              </a:rPr>
+              <a:t>Small language model</a:t>
+            </a:r>
+            <a:endParaRPr lang="en-US" sz="1300" dirty="0"/>
+          </a:p>
+          <a:p>
+            <a:pPr indent="0" marL="0">
+              <a:spcAft>
+                <a:spcPts val="400"/>
+              </a:spcAft>
+              <a:buNone/>
+            </a:pPr>
+            <a:r>
+              <a:rPr lang="en-US" sz="1300" dirty="0">
+                <a:solidFill>
+                  <a:srgbClr val="0F0A2E"/>
+                </a:solidFill>
+                <a:latin typeface="Calibri" pitchFamily="34" charset="0"/>
+                <a:ea typeface="Calibri" pitchFamily="34" charset="-122"/>
+                <a:cs typeface="Calibri" pitchFamily="34" charset="-120"/>
+              </a:rPr>
+              <a:t>Summarize · rewrite · generate</a:t>
+            </a:r>
+            <a:endParaRPr lang="en-US" sz="1300" dirty="0"/>
+          </a:p>
+        </p:txBody>
+      </p:sp>
+      <p:pic>
+        <p:nvPicPr>
+          <p:cNvPr id="21" name="Image 1" descr="preencoded.png">    </p:cNvPr>
+          <p:cNvPicPr>
+            <a:picLocks noChangeAspect="1"/>
+          </p:cNvPicPr>
+          <p:nvPr/>
+        </p:nvPicPr>
+        <p:blipFill>
+          <a:blip r:embed="rId3">
+            <a:extLst>
+              <a:ext uri="{96DAC541-7B7A-43D3-8B79-37D633B846F1}">
+                <asvg:svgBlip xmlns:asvg="http://schemas.microsoft.com/office/drawing/2016/SVG/main" r:embed="rId4"/>
+              </a:ext>
+            </a:extLst>
+          </a:blip>
+          <a:stretch>
+            <a:fillRect/>
+          </a:stretch>
+        </p:blipFill>
+        <p:spPr>
+          <a:xfrm>
+            <a:off x="4663440" y="5458968"/>
+            <a:ext cx="237744" cy="237744"/>
+          </a:xfrm>
+          <a:prstGeom prst="rect">
+            <a:avLst/>
+          </a:prstGeom>
+        </p:spPr>
+      </p:pic>
+      <p:sp>
+        <p:nvSpPr>
+          <p:cNvPr id="22" name="Text 18"/>
+          <p:cNvSpPr/>
+          <p:nvPr/>
+        </p:nvSpPr>
+        <p:spPr>
+          <a:xfrm>
+            <a:off x="4956048" y="5440680"/>
+            <a:ext cx="2862072" cy="320040"/>
+          </a:xfrm>
+          <a:prstGeom prst="rect">
+            <a:avLst/>
+          </a:prstGeom>
+          <a:noFill/>
+          <a:ln/>
+        </p:spPr>
+        <p:txBody>
+          <a:bodyPr wrap="square" rtlCol="0" anchor="ctr"/>
+          <a:lstStyle/>
+          <a:p>
+            <a:pPr indent="0" marL="0">
+              <a:buNone/>
+            </a:pPr>
+            <a:r>
+              <a:rPr lang="en-US" sz="1200" b="1" dirty="0">
+                <a:solidFill>
+                  <a:srgbClr val="6366F1"/>
+                </a:solidFill>
+                <a:latin typeface="Calibri" pitchFamily="34" charset="0"/>
+                <a:ea typeface="Calibri" pitchFamily="34" charset="-122"/>
+                <a:cs typeface="Calibri" pitchFamily="34" charset="-120"/>
+              </a:rPr>
+              <a:t>IChatClient in PR #178</a:t>
+            </a:r>
+            <a:endParaRPr lang="en-US" sz="1200" dirty="0"/>
+          </a:p>
+        </p:txBody>
+      </p:sp>
+      <p:sp>
+        <p:nvSpPr>
+          <p:cNvPr id="23" name="Shape 19"/>
+          <p:cNvSpPr/>
+          <p:nvPr/>
+        </p:nvSpPr>
+        <p:spPr>
+          <a:xfrm>
+            <a:off x="8229600" y="2286000"/>
+            <a:ext cx="3703320" cy="3566160"/>
+          </a:xfrm>
+          <a:prstGeom prst="roundRect">
+            <a:avLst>
+              <a:gd name="adj" fmla="val 3077"/>
+            </a:avLst>
+          </a:prstGeom>
+          <a:solidFill>
+            <a:srgbClr val="FFFFFF"/>
+          </a:solidFill>
+          <a:ln w="12700">
+            <a:solidFill>
+              <a:srgbClr val="E5E1F5"/>
+            </a:solidFill>
+            <a:prstDash val="solid"/>
+          </a:ln>
+        </p:spPr>
+      </p:sp>
+      <p:sp>
+        <p:nvSpPr>
+          <p:cNvPr id="24" name="Shape 20"/>
+          <p:cNvSpPr/>
+          <p:nvPr/>
+        </p:nvSpPr>
+        <p:spPr>
+          <a:xfrm>
+            <a:off x="8229600" y="2286000"/>
+            <a:ext cx="3703320" cy="164592"/>
+          </a:xfrm>
+          <a:prstGeom prst="rect">
+            <a:avLst/>
+          </a:prstGeom>
+          <a:solidFill>
+            <a:srgbClr val="FBBF24"/>
+          </a:solidFill>
+          <a:ln w="12700">
+            <a:solidFill>
+              <a:srgbClr val="FBBF24"/>
+            </a:solidFill>
+            <a:prstDash val="solid"/>
+          </a:ln>
+        </p:spPr>
+      </p:sp>
+      <p:sp>
+        <p:nvSpPr>
+          <p:cNvPr id="25" name="Text 21"/>
+          <p:cNvSpPr/>
+          <p:nvPr/>
+        </p:nvSpPr>
+        <p:spPr>
+          <a:xfrm>
+            <a:off x="8503920" y="2606040"/>
+            <a:ext cx="3154680" cy="320040"/>
+          </a:xfrm>
+          <a:prstGeom prst="rect">
+            <a:avLst/>
+          </a:prstGeom>
+          <a:noFill/>
+          <a:ln/>
+        </p:spPr>
+        <p:txBody>
+          <a:bodyPr wrap="square" rtlCol="0" anchor="ctr"/>
+          <a:lstStyle/>
+          <a:p>
+            <a:pPr indent="0" marL="0">
+              <a:buNone/>
+            </a:pPr>
+            <a:r>
+              <a:rPr lang="en-US" sz="1100" b="1" spc="300" kern="0" dirty="0">
+                <a:solidFill>
+                  <a:srgbClr val="FBBF24"/>
+                </a:solidFill>
+                <a:latin typeface="Calibri" pitchFamily="34" charset="0"/>
+                <a:ea typeface="Calibri" pitchFamily="34" charset="-122"/>
+                <a:cs typeface="Calibri" pitchFamily="34" charset="-120"/>
+              </a:rPr>
+              <a:t>GOOGLE</a:t>
+            </a:r>
+            <a:endParaRPr lang="en-US" sz="1100" dirty="0"/>
+          </a:p>
+        </p:txBody>
+      </p:sp>
+      <p:sp>
+        <p:nvSpPr>
+          <p:cNvPr id="26" name="Text 22"/>
+          <p:cNvSpPr/>
+          <p:nvPr/>
+        </p:nvSpPr>
+        <p:spPr>
+          <a:xfrm>
+            <a:off x="8503920" y="2926080"/>
+            <a:ext cx="3154680" cy="548640"/>
+          </a:xfrm>
+          <a:prstGeom prst="rect">
+            <a:avLst/>
+          </a:prstGeom>
+          <a:noFill/>
+          <a:ln/>
+        </p:spPr>
+        <p:txBody>
+          <a:bodyPr wrap="square" rtlCol="0" anchor="ctr"/>
+          <a:lstStyle/>
+          <a:p>
+            <a:pPr indent="0" marL="0">
+              <a:buNone/>
+            </a:pPr>
+            <a:r>
+              <a:rPr lang="en-US" sz="2200" b="1" dirty="0">
+                <a:solidFill>
+                  <a:srgbClr val="0F0A2E"/>
+                </a:solidFill>
+                <a:latin typeface="Georgia" pitchFamily="34" charset="0"/>
+                <a:ea typeface="Georgia" pitchFamily="34" charset="-122"/>
+                <a:cs typeface="Georgia" pitchFamily="34" charset="-120"/>
+              </a:rPr>
+              <a:t>ML Kit + Gemini Nano</a:t>
+            </a:r>
+            <a:endParaRPr lang="en-US" sz="2200" dirty="0"/>
+          </a:p>
+        </p:txBody>
+      </p:sp>
+      <p:sp>
+        <p:nvSpPr>
+          <p:cNvPr id="27" name="Text 23"/>
+          <p:cNvSpPr/>
+          <p:nvPr/>
+        </p:nvSpPr>
+        <p:spPr>
+          <a:xfrm>
+            <a:off x="8503920" y="3474720"/>
+            <a:ext cx="3154680" cy="365760"/>
+          </a:xfrm>
+          <a:prstGeom prst="rect">
+            <a:avLst/>
+          </a:prstGeom>
+          <a:noFill/>
+          <a:ln/>
+        </p:spPr>
+        <p:txBody>
+          <a:bodyPr wrap="square" rtlCol="0" anchor="ctr"/>
+          <a:lstStyle/>
+          <a:p>
+            <a:pPr indent="0" marL="0">
+              <a:buNone/>
+            </a:pPr>
+            <a:r>
+              <a:rPr lang="en-US" sz="1300" i="1" dirty="0">
+                <a:solidFill>
+                  <a:srgbClr val="6B6B8F"/>
+                </a:solidFill>
+                <a:latin typeface="Consolas" pitchFamily="34" charset="0"/>
+                <a:ea typeface="Consolas" pitchFamily="34" charset="-122"/>
+                <a:cs typeface="Consolas" pitchFamily="34" charset="-120"/>
+              </a:rPr>
+              <a:t>ML Kit (Kotlin/Java)</a:t>
+            </a:r>
+            <a:endParaRPr lang="en-US" sz="1300" dirty="0"/>
+          </a:p>
+        </p:txBody>
+      </p:sp>
+      <p:sp>
+        <p:nvSpPr>
+          <p:cNvPr id="28" name="Shape 24"/>
+          <p:cNvSpPr/>
+          <p:nvPr/>
+        </p:nvSpPr>
+        <p:spPr>
+          <a:xfrm>
+            <a:off x="8503920" y="3931920"/>
+            <a:ext cx="3154680" cy="0"/>
+          </a:xfrm>
+          <a:prstGeom prst="line">
+            <a:avLst/>
+          </a:prstGeom>
+          <a:noFill/>
+          <a:ln w="12700">
+            <a:solidFill>
+              <a:srgbClr val="E5E1F5"/>
+            </a:solidFill>
+            <a:prstDash val="solid"/>
+          </a:ln>
+        </p:spPr>
+      </p:sp>
+      <p:sp>
+        <p:nvSpPr>
+          <p:cNvPr id="29" name="Text 25"/>
+          <p:cNvSpPr/>
+          <p:nvPr/>
+        </p:nvSpPr>
+        <p:spPr>
+          <a:xfrm>
+            <a:off x="8503920" y="4069080"/>
+            <a:ext cx="3154680" cy="1325880"/>
+          </a:xfrm>
+          <a:prstGeom prst="rect">
+            <a:avLst/>
+          </a:prstGeom>
+          <a:noFill/>
+          <a:ln/>
+        </p:spPr>
+        <p:txBody>
+          <a:bodyPr wrap="square" rtlCol="0" anchor="ctr"/>
+          <a:lstStyle/>
+          <a:p>
+            <a:pPr indent="0" marL="0">
+              <a:spcAft>
+                <a:spcPts val="400"/>
+              </a:spcAft>
+              <a:buNone/>
+            </a:pPr>
+            <a:r>
+              <a:rPr lang="en-US" sz="1300" dirty="0">
+                <a:solidFill>
+                  <a:srgbClr val="0F0A2E"/>
+                </a:solidFill>
+                <a:latin typeface="Calibri" pitchFamily="34" charset="0"/>
+                <a:ea typeface="Calibri" pitchFamily="34" charset="-122"/>
+                <a:cs typeface="Calibri" pitchFamily="34" charset="-120"/>
+              </a:rPr>
+              <a:t>Android · AICore service</a:t>
+            </a:r>
+            <a:endParaRPr lang="en-US" sz="1300" dirty="0"/>
+          </a:p>
+          <a:p>
+            <a:pPr indent="0" marL="0">
+              <a:spcAft>
+                <a:spcPts val="400"/>
+              </a:spcAft>
+              <a:buNone/>
+            </a:pPr>
+            <a:r>
+              <a:rPr lang="en-US" sz="1300" dirty="0">
+                <a:solidFill>
+                  <a:srgbClr val="0F0A2E"/>
+                </a:solidFill>
+                <a:latin typeface="Calibri" pitchFamily="34" charset="0"/>
+                <a:ea typeface="Calibri" pitchFamily="34" charset="-122"/>
+                <a:cs typeface="Calibri" pitchFamily="34" charset="-120"/>
+              </a:rPr>
+              <a:t>Compact Gemini Nano</a:t>
+            </a:r>
+            <a:endParaRPr lang="en-US" sz="1300" dirty="0"/>
+          </a:p>
+          <a:p>
+            <a:pPr indent="0" marL="0">
+              <a:spcAft>
+                <a:spcPts val="400"/>
+              </a:spcAft>
+              <a:buNone/>
+            </a:pPr>
+            <a:r>
+              <a:rPr lang="en-US" sz="1300" dirty="0">
+                <a:solidFill>
+                  <a:srgbClr val="0F0A2E"/>
+                </a:solidFill>
+                <a:latin typeface="Calibri" pitchFamily="34" charset="0"/>
+                <a:ea typeface="Calibri" pitchFamily="34" charset="-122"/>
+                <a:cs typeface="Calibri" pitchFamily="34" charset="-120"/>
+              </a:rPr>
+              <a:t>Summarize · proofread · rewrite</a:t>
+            </a:r>
+            <a:endParaRPr lang="en-US" sz="1300" dirty="0"/>
+          </a:p>
+        </p:txBody>
+      </p:sp>
+      <p:pic>
+        <p:nvPicPr>
+          <p:cNvPr id="30" name="Image 2" descr="preencoded.png">    </p:cNvPr>
+          <p:cNvPicPr>
+            <a:picLocks noChangeAspect="1"/>
+          </p:cNvPicPr>
+          <p:nvPr/>
+        </p:nvPicPr>
+        <p:blipFill>
+          <a:blip r:embed="rId5">
+            <a:extLst>
+              <a:ext uri="{96DAC541-7B7A-43D3-8B79-37D633B846F1}">
+                <asvg:svgBlip xmlns:asvg="http://schemas.microsoft.com/office/drawing/2016/SVG/main" r:embed="rId6"/>
+              </a:ext>
+            </a:extLst>
+          </a:blip>
+          <a:stretch>
+            <a:fillRect/>
+          </a:stretch>
+        </p:blipFill>
+        <p:spPr>
+          <a:xfrm>
             <a:off x="8503920" y="5458968"/>
             <a:ext cx="237744" cy="237744"/>
           </a:xfrm>
@@ -16872,7 +17861,7 @@
                 <a:ea typeface="Calibri" pitchFamily="34" charset="-122"/>
                 <a:cs typeface="Calibri" pitchFamily="34" charset="-120"/>
               </a:rPr>
-              <a:t>5 / 15</a:t>
+              <a:t>6 / 15</a:t>
             </a:r>
             <a:endParaRPr lang="en-US" sz="1000" dirty="0"/>
           </a:p>
@@ -16886,9 +17875,9 @@
 </p:sld>
 </file>
 
-<file path=ppt/slides/slide6.xml><?xml version="1.0" encoding="utf-8"?>
+<file path=ppt/slides/slide7.xml><?xml version="1.0" encoding="utf-8"?>
 <p:sld xmlns:a="http://schemas.openxmlformats.org/drawingml/2006/main" xmlns:r="http://schemas.openxmlformats.org/officeDocument/2006/relationships" xmlns:p="http://schemas.openxmlformats.org/presentationml/2006/main">
-  <p:cSld name="Slide 6">
+  <p:cSld name="Slide 7">
     <p:bg>
       <p:bgPr>
         <a:solidFill>
@@ -18479,995 +19468,6 @@
           </a:prstGeom>
         </p:spPr>
       </p:pic>
-    </p:spTree>
-  </p:cSld>
-  <p:clrMapOvr>
-    <a:masterClrMapping/>
-  </p:clrMapOvr>
-</p:sld>
-</file>
-
-<file path=ppt/slides/slide7.xml><?xml version="1.0" encoding="utf-8"?>
-<p:sld xmlns:a="http://schemas.openxmlformats.org/drawingml/2006/main" xmlns:r="http://schemas.openxmlformats.org/officeDocument/2006/relationships" xmlns:p="http://schemas.openxmlformats.org/presentationml/2006/main">
-  <p:cSld name="Slide 7">
-    <p:bg>
-      <p:bgPr>
-        <a:solidFill>
-          <a:srgbClr val="FAF8FF"/>
-        </a:solidFill>
-      </p:bgPr>
-    </p:bg>
-    <p:spTree>
-      <p:nvGrpSpPr>
-        <p:cNvPr id="1" name=""/>
-        <p:cNvGrpSpPr/>
-        <p:nvPr/>
-      </p:nvGrpSpPr>
-      <p:grpSpPr>
-        <a:xfrm>
-          <a:off x="0" y="0"/>
-          <a:ext cx="0" cy="0"/>
-          <a:chOff x="0" y="0"/>
-          <a:chExt cx="0" cy="0"/>
-        </a:xfrm>
-      </p:grpSpPr>
-      <p:sp>
-        <p:nvSpPr>
-          <p:cNvPr id="2" name="Text 0"/>
-          <p:cNvSpPr/>
-          <p:nvPr/>
-        </p:nvSpPr>
-        <p:spPr>
-          <a:xfrm>
-            <a:off x="548640" y="502920"/>
-            <a:ext cx="7315200" cy="320040"/>
-          </a:xfrm>
-          <a:prstGeom prst="rect">
-            <a:avLst/>
-          </a:prstGeom>
-          <a:noFill/>
-          <a:ln/>
-        </p:spPr>
-        <p:txBody>
-          <a:bodyPr wrap="square" rtlCol="0" anchor="ctr"/>
-          <a:lstStyle/>
-          <a:p>
-            <a:pPr indent="0" marL="0">
-              <a:buNone/>
-            </a:pPr>
-            <a:r>
-              <a:rPr lang="en-US" sz="1200" b="1" spc="400" kern="0" dirty="0">
-                <a:solidFill>
-                  <a:srgbClr val="FBBF24"/>
-                </a:solidFill>
-                <a:latin typeface="Calibri" pitchFamily="34" charset="0"/>
-                <a:ea typeface="Calibri" pitchFamily="34" charset="-122"/>
-                <a:cs typeface="Calibri" pitchFamily="34" charset="-120"/>
-              </a:rPr>
-              <a:t>TIER 2  ·  THE PRACTICAL MIDDLE</a:t>
-            </a:r>
-            <a:endParaRPr lang="en-US" sz="1200" dirty="0"/>
-          </a:p>
-        </p:txBody>
-      </p:sp>
-      <p:sp>
-        <p:nvSpPr>
-          <p:cNvPr id="3" name="Text 1"/>
-          <p:cNvSpPr/>
-          <p:nvPr/>
-        </p:nvSpPr>
-        <p:spPr>
-          <a:xfrm>
-            <a:off x="548640" y="822960"/>
-            <a:ext cx="10058400" cy="822960"/>
-          </a:xfrm>
-          <a:prstGeom prst="rect">
-            <a:avLst/>
-          </a:prstGeom>
-          <a:noFill/>
-          <a:ln/>
-        </p:spPr>
-        <p:txBody>
-          <a:bodyPr wrap="square" rtlCol="0" anchor="ctr"/>
-          <a:lstStyle/>
-          <a:p>
-            <a:pPr indent="0" marL="0">
-              <a:buNone/>
-            </a:pPr>
-            <a:r>
-              <a:rPr lang="en-US" sz="3800" b="1" dirty="0">
-                <a:solidFill>
-                  <a:srgbClr val="0F0A2E"/>
-                </a:solidFill>
-                <a:latin typeface="Georgia" pitchFamily="34" charset="0"/>
-                <a:ea typeface="Georgia" pitchFamily="34" charset="-122"/>
-                <a:cs typeface="Georgia" pitchFamily="34" charset="-120"/>
-              </a:rPr>
-              <a:t>Bring your own local model</a:t>
-            </a:r>
-            <a:endParaRPr lang="en-US" sz="3800" dirty="0"/>
-          </a:p>
-        </p:txBody>
-      </p:sp>
-      <p:sp>
-        <p:nvSpPr>
-          <p:cNvPr id="4" name="Text 2"/>
-          <p:cNvSpPr/>
-          <p:nvPr/>
-        </p:nvSpPr>
-        <p:spPr>
-          <a:xfrm>
-            <a:off x="548640" y="1600200"/>
-            <a:ext cx="10972800" cy="457200"/>
-          </a:xfrm>
-          <a:prstGeom prst="rect">
-            <a:avLst/>
-          </a:prstGeom>
-          <a:noFill/>
-          <a:ln/>
-        </p:spPr>
-        <p:txBody>
-          <a:bodyPr wrap="square" rtlCol="0" anchor="ctr"/>
-          <a:lstStyle/>
-          <a:p>
-            <a:pPr indent="0" marL="0">
-              <a:buNone/>
-            </a:pPr>
-            <a:r>
-              <a:rPr lang="en-US" sz="1700" i="1" dirty="0">
-                <a:solidFill>
-                  <a:srgbClr val="6B6B8F"/>
-                </a:solidFill>
-                <a:latin typeface="Calibri" pitchFamily="34" charset="0"/>
-                <a:ea typeface="Calibri" pitchFamily="34" charset="-122"/>
-                <a:cs typeface="Calibri" pitchFamily="34" charset="-120"/>
-              </a:rPr>
-              <a:t>The forgotten tier — cloud-class capability with local-class privacy</a:t>
-            </a:r>
-            <a:endParaRPr lang="en-US" sz="1700" dirty="0"/>
-          </a:p>
-        </p:txBody>
-      </p:sp>
-      <p:sp>
-        <p:nvSpPr>
-          <p:cNvPr id="5" name="Shape 3"/>
-          <p:cNvSpPr/>
-          <p:nvPr/>
-        </p:nvSpPr>
-        <p:spPr>
-          <a:xfrm>
-            <a:off x="548640" y="2286000"/>
-            <a:ext cx="3703320" cy="3931920"/>
-          </a:xfrm>
-          <a:prstGeom prst="roundRect">
-            <a:avLst>
-              <a:gd name="adj" fmla="val 2963"/>
-            </a:avLst>
-          </a:prstGeom>
-          <a:solidFill>
-            <a:srgbClr val="FFFFFF"/>
-          </a:solidFill>
-          <a:ln w="25400">
-            <a:solidFill>
-              <a:srgbClr val="FB7185"/>
-            </a:solidFill>
-            <a:prstDash val="solid"/>
-          </a:ln>
-        </p:spPr>
-      </p:sp>
-      <p:sp>
-        <p:nvSpPr>
-          <p:cNvPr id="6" name="Shape 4"/>
-          <p:cNvSpPr/>
-          <p:nvPr/>
-        </p:nvSpPr>
-        <p:spPr>
-          <a:xfrm>
-            <a:off x="822960" y="2514600"/>
-            <a:ext cx="1554480" cy="292608"/>
-          </a:xfrm>
-          <a:prstGeom prst="roundRect">
-            <a:avLst>
-              <a:gd name="adj" fmla="val 50000"/>
-            </a:avLst>
-          </a:prstGeom>
-          <a:solidFill>
-            <a:srgbClr val="FB7185"/>
-          </a:solidFill>
-          <a:ln w="12700">
-            <a:solidFill>
-              <a:srgbClr val="FB7185"/>
-            </a:solidFill>
-            <a:prstDash val="solid"/>
-          </a:ln>
-        </p:spPr>
-      </p:sp>
-      <p:sp>
-        <p:nvSpPr>
-          <p:cNvPr id="7" name="Text 5"/>
-          <p:cNvSpPr/>
-          <p:nvPr/>
-        </p:nvSpPr>
-        <p:spPr>
-          <a:xfrm>
-            <a:off x="822960" y="2514600"/>
-            <a:ext cx="1554480" cy="292608"/>
-          </a:xfrm>
-          <a:prstGeom prst="rect">
-            <a:avLst/>
-          </a:prstGeom>
-          <a:noFill/>
-          <a:ln/>
-        </p:spPr>
-        <p:txBody>
-          <a:bodyPr wrap="square" rtlCol="0" anchor="ctr"/>
-          <a:lstStyle/>
-          <a:p>
-            <a:pPr algn="ctr" indent="0" marL="0">
-              <a:buNone/>
-            </a:pPr>
-            <a:r>
-              <a:rPr lang="en-US" sz="900" b="1" spc="200" kern="0" dirty="0">
-                <a:solidFill>
-                  <a:srgbClr val="FAF8FF"/>
-                </a:solidFill>
-                <a:latin typeface="Calibri" pitchFamily="34" charset="0"/>
-                <a:ea typeface="Calibri" pitchFamily="34" charset="-122"/>
-                <a:cs typeface="Calibri" pitchFamily="34" charset="-120"/>
-              </a:rPr>
-              <a:t>RECOMMENDED</a:t>
-            </a:r>
-            <a:endParaRPr lang="en-US" sz="900" dirty="0"/>
-          </a:p>
-        </p:txBody>
-      </p:sp>
-      <p:sp>
-        <p:nvSpPr>
-          <p:cNvPr id="8" name="Text 6"/>
-          <p:cNvSpPr/>
-          <p:nvPr/>
-        </p:nvSpPr>
-        <p:spPr>
-          <a:xfrm>
-            <a:off x="822960" y="2971800"/>
-            <a:ext cx="3154680" cy="548640"/>
-          </a:xfrm>
-          <a:prstGeom prst="rect">
-            <a:avLst/>
-          </a:prstGeom>
-          <a:noFill/>
-          <a:ln/>
-        </p:spPr>
-        <p:txBody>
-          <a:bodyPr wrap="square" rtlCol="0" anchor="ctr"/>
-          <a:lstStyle/>
-          <a:p>
-            <a:pPr indent="0" marL="0">
-              <a:buNone/>
-            </a:pPr>
-            <a:r>
-              <a:rPr lang="en-US" sz="2200" b="1" dirty="0">
-                <a:solidFill>
-                  <a:srgbClr val="0F0A2E"/>
-                </a:solidFill>
-                <a:latin typeface="Georgia" pitchFamily="34" charset="0"/>
-                <a:ea typeface="Georgia" pitchFamily="34" charset="-122"/>
-                <a:cs typeface="Georgia" pitchFamily="34" charset="-120"/>
-              </a:rPr>
-              <a:t>Foundry Local</a:t>
-            </a:r>
-            <a:endParaRPr lang="en-US" sz="2200" dirty="0"/>
-          </a:p>
-        </p:txBody>
-      </p:sp>
-      <p:sp>
-        <p:nvSpPr>
-          <p:cNvPr id="9" name="Text 7"/>
-          <p:cNvSpPr/>
-          <p:nvPr/>
-        </p:nvSpPr>
-        <p:spPr>
-          <a:xfrm>
-            <a:off x="822960" y="3520440"/>
-            <a:ext cx="3154680" cy="365760"/>
-          </a:xfrm>
-          <a:prstGeom prst="rect">
-            <a:avLst/>
-          </a:prstGeom>
-          <a:noFill/>
-          <a:ln/>
-        </p:spPr>
-        <p:txBody>
-          <a:bodyPr wrap="square" rtlCol="0" anchor="ctr"/>
-          <a:lstStyle/>
-          <a:p>
-            <a:pPr indent="0" marL="0">
-              <a:buNone/>
-            </a:pPr>
-            <a:r>
-              <a:rPr lang="en-US" sz="1300" i="1" dirty="0">
-                <a:solidFill>
-                  <a:srgbClr val="FB7185"/>
-                </a:solidFill>
-                <a:latin typeface="Calibri" pitchFamily="34" charset="0"/>
-                <a:ea typeface="Calibri" pitchFamily="34" charset="-122"/>
-                <a:cs typeface="Calibri" pitchFamily="34" charset="-120"/>
-              </a:rPr>
-              <a:t>Cloud-grade LLMs, local host</a:t>
-            </a:r>
-            <a:endParaRPr lang="en-US" sz="1300" dirty="0"/>
-          </a:p>
-        </p:txBody>
-      </p:sp>
-      <p:sp>
-        <p:nvSpPr>
-          <p:cNvPr id="10" name="Text 8"/>
-          <p:cNvSpPr/>
-          <p:nvPr/>
-        </p:nvSpPr>
-        <p:spPr>
-          <a:xfrm>
-            <a:off x="822960" y="4023360"/>
-            <a:ext cx="3154680" cy="2011680"/>
-          </a:xfrm>
-          <a:prstGeom prst="rect">
-            <a:avLst/>
-          </a:prstGeom>
-          <a:noFill/>
-          <a:ln/>
-        </p:spPr>
-        <p:txBody>
-          <a:bodyPr wrap="square" rtlCol="0" anchor="ctr"/>
-          <a:lstStyle/>
-          <a:p>
-            <a:pPr indent="0" marL="0">
-              <a:buNone/>
-            </a:pPr>
-            <a:r>
-              <a:rPr lang="en-US" sz="1300" dirty="0">
-                <a:solidFill>
-                  <a:srgbClr val="0F0A2E"/>
-                </a:solidFill>
-                <a:latin typeface="Calibri" pitchFamily="34" charset="0"/>
-                <a:ea typeface="Calibri" pitchFamily="34" charset="-122"/>
-                <a:cs typeface="Calibri" pitchFamily="34" charset="-120"/>
-              </a:rPr>
-              <a:t>Microsoft's runtime for running Phi, Llama, Qwen and friends on the user's box. .NET-friendly, ONNX-backed, GPU/NPU accelerated.</a:t>
-            </a:r>
-            <a:endParaRPr lang="en-US" sz="1300" dirty="0"/>
-          </a:p>
-        </p:txBody>
-      </p:sp>
-      <p:sp>
-        <p:nvSpPr>
-          <p:cNvPr id="11" name="Shape 9"/>
-          <p:cNvSpPr/>
-          <p:nvPr/>
-        </p:nvSpPr>
-        <p:spPr>
-          <a:xfrm>
-            <a:off x="4389120" y="2286000"/>
-            <a:ext cx="3703320" cy="3931920"/>
-          </a:xfrm>
-          <a:prstGeom prst="roundRect">
-            <a:avLst>
-              <a:gd name="adj" fmla="val 2963"/>
-            </a:avLst>
-          </a:prstGeom>
-          <a:solidFill>
-            <a:srgbClr val="FFFFFF"/>
-          </a:solidFill>
-          <a:ln w="25400">
-            <a:solidFill>
-              <a:srgbClr val="6366F1"/>
-            </a:solidFill>
-            <a:prstDash val="solid"/>
-          </a:ln>
-        </p:spPr>
-      </p:sp>
-      <p:sp>
-        <p:nvSpPr>
-          <p:cNvPr id="12" name="Shape 10"/>
-          <p:cNvSpPr/>
-          <p:nvPr/>
-        </p:nvSpPr>
-        <p:spPr>
-          <a:xfrm>
-            <a:off x="4663440" y="2514600"/>
-            <a:ext cx="1554480" cy="292608"/>
-          </a:xfrm>
-          <a:prstGeom prst="roundRect">
-            <a:avLst>
-              <a:gd name="adj" fmla="val 50000"/>
-            </a:avLst>
-          </a:prstGeom>
-          <a:solidFill>
-            <a:srgbClr val="6366F1"/>
-          </a:solidFill>
-          <a:ln w="12700">
-            <a:solidFill>
-              <a:srgbClr val="6366F1"/>
-            </a:solidFill>
-            <a:prstDash val="solid"/>
-          </a:ln>
-        </p:spPr>
-      </p:sp>
-      <p:sp>
-        <p:nvSpPr>
-          <p:cNvPr id="13" name="Text 11"/>
-          <p:cNvSpPr/>
-          <p:nvPr/>
-        </p:nvSpPr>
-        <p:spPr>
-          <a:xfrm>
-            <a:off x="4663440" y="2514600"/>
-            <a:ext cx="1554480" cy="292608"/>
-          </a:xfrm>
-          <a:prstGeom prst="rect">
-            <a:avLst/>
-          </a:prstGeom>
-          <a:noFill/>
-          <a:ln/>
-        </p:spPr>
-        <p:txBody>
-          <a:bodyPr wrap="square" rtlCol="0" anchor="ctr"/>
-          <a:lstStyle/>
-          <a:p>
-            <a:pPr algn="ctr" indent="0" marL="0">
-              <a:buNone/>
-            </a:pPr>
-            <a:r>
-              <a:rPr lang="en-US" sz="900" b="1" spc="200" kern="0" dirty="0">
-                <a:solidFill>
-                  <a:srgbClr val="FAF8FF"/>
-                </a:solidFill>
-                <a:latin typeface="Calibri" pitchFamily="34" charset="0"/>
-                <a:ea typeface="Calibri" pitchFamily="34" charset="-122"/>
-                <a:cs typeface="Calibri" pitchFamily="34" charset="-120"/>
-              </a:rPr>
-              <a:t>FLEXIBLE</a:t>
-            </a:r>
-            <a:endParaRPr lang="en-US" sz="900" dirty="0"/>
-          </a:p>
-        </p:txBody>
-      </p:sp>
-      <p:sp>
-        <p:nvSpPr>
-          <p:cNvPr id="14" name="Text 12"/>
-          <p:cNvSpPr/>
-          <p:nvPr/>
-        </p:nvSpPr>
-        <p:spPr>
-          <a:xfrm>
-            <a:off x="4663440" y="2971800"/>
-            <a:ext cx="3154680" cy="548640"/>
-          </a:xfrm>
-          <a:prstGeom prst="rect">
-            <a:avLst/>
-          </a:prstGeom>
-          <a:noFill/>
-          <a:ln/>
-        </p:spPr>
-        <p:txBody>
-          <a:bodyPr wrap="square" rtlCol="0" anchor="ctr"/>
-          <a:lstStyle/>
-          <a:p>
-            <a:pPr indent="0" marL="0">
-              <a:buNone/>
-            </a:pPr>
-            <a:r>
-              <a:rPr lang="en-US" sz="2200" b="1" dirty="0">
-                <a:solidFill>
-                  <a:srgbClr val="0F0A2E"/>
-                </a:solidFill>
-                <a:latin typeface="Georgia" pitchFamily="34" charset="0"/>
-                <a:ea typeface="Georgia" pitchFamily="34" charset="-122"/>
-                <a:cs typeface="Georgia" pitchFamily="34" charset="-120"/>
-              </a:rPr>
-              <a:t>ONNX Runtime GenAI</a:t>
-            </a:r>
-            <a:endParaRPr lang="en-US" sz="2200" dirty="0"/>
-          </a:p>
-        </p:txBody>
-      </p:sp>
-      <p:sp>
-        <p:nvSpPr>
-          <p:cNvPr id="15" name="Text 13"/>
-          <p:cNvSpPr/>
-          <p:nvPr/>
-        </p:nvSpPr>
-        <p:spPr>
-          <a:xfrm>
-            <a:off x="4663440" y="3520440"/>
-            <a:ext cx="3154680" cy="365760"/>
-          </a:xfrm>
-          <a:prstGeom prst="rect">
-            <a:avLst/>
-          </a:prstGeom>
-          <a:noFill/>
-          <a:ln/>
-        </p:spPr>
-        <p:txBody>
-          <a:bodyPr wrap="square" rtlCol="0" anchor="ctr"/>
-          <a:lstStyle/>
-          <a:p>
-            <a:pPr indent="0" marL="0">
-              <a:buNone/>
-            </a:pPr>
-            <a:r>
-              <a:rPr lang="en-US" sz="1300" i="1" dirty="0">
-                <a:solidFill>
-                  <a:srgbClr val="6366F1"/>
-                </a:solidFill>
-                <a:latin typeface="Calibri" pitchFamily="34" charset="0"/>
-                <a:ea typeface="Calibri" pitchFamily="34" charset="-122"/>
-                <a:cs typeface="Calibri" pitchFamily="34" charset="-120"/>
-              </a:rPr>
-              <a:t>Ship your own model</a:t>
-            </a:r>
-            <a:endParaRPr lang="en-US" sz="1300" dirty="0"/>
-          </a:p>
-        </p:txBody>
-      </p:sp>
-      <p:sp>
-        <p:nvSpPr>
-          <p:cNvPr id="16" name="Text 14"/>
-          <p:cNvSpPr/>
-          <p:nvPr/>
-        </p:nvSpPr>
-        <p:spPr>
-          <a:xfrm>
-            <a:off x="4663440" y="4023360"/>
-            <a:ext cx="3154680" cy="2011680"/>
-          </a:xfrm>
-          <a:prstGeom prst="rect">
-            <a:avLst/>
-          </a:prstGeom>
-          <a:noFill/>
-          <a:ln/>
-        </p:spPr>
-        <p:txBody>
-          <a:bodyPr wrap="square" rtlCol="0" anchor="ctr"/>
-          <a:lstStyle/>
-          <a:p>
-            <a:pPr indent="0" marL="0">
-              <a:buNone/>
-            </a:pPr>
-            <a:r>
-              <a:rPr lang="en-US" sz="1300" dirty="0">
-                <a:solidFill>
-                  <a:srgbClr val="0F0A2E"/>
-                </a:solidFill>
-                <a:latin typeface="Calibri" pitchFamily="34" charset="0"/>
-                <a:ea typeface="Calibri" pitchFamily="34" charset="-122"/>
-                <a:cs typeface="Calibri" pitchFamily="34" charset="-120"/>
-              </a:rPr>
-              <a:t>Cross-platform C# / native inference. Bring any ONNX-converted model — tiny custom classifiers to multi-billion-param LLMs.</a:t>
-            </a:r>
-            <a:endParaRPr lang="en-US" sz="1300" dirty="0"/>
-          </a:p>
-        </p:txBody>
-      </p:sp>
-      <p:sp>
-        <p:nvSpPr>
-          <p:cNvPr id="17" name="Shape 15"/>
-          <p:cNvSpPr/>
-          <p:nvPr/>
-        </p:nvSpPr>
-        <p:spPr>
-          <a:xfrm>
-            <a:off x="8229600" y="2286000"/>
-            <a:ext cx="3703320" cy="3931920"/>
-          </a:xfrm>
-          <a:prstGeom prst="roundRect">
-            <a:avLst>
-              <a:gd name="adj" fmla="val 2963"/>
-            </a:avLst>
-          </a:prstGeom>
-          <a:solidFill>
-            <a:srgbClr val="FFFFFF"/>
-          </a:solidFill>
-          <a:ln w="25400">
-            <a:solidFill>
-              <a:srgbClr val="FBBF24"/>
-            </a:solidFill>
-            <a:prstDash val="solid"/>
-          </a:ln>
-        </p:spPr>
-      </p:sp>
-      <p:sp>
-        <p:nvSpPr>
-          <p:cNvPr id="18" name="Shape 16"/>
-          <p:cNvSpPr/>
-          <p:nvPr/>
-        </p:nvSpPr>
-        <p:spPr>
-          <a:xfrm>
-            <a:off x="8503920" y="2514600"/>
-            <a:ext cx="1554480" cy="292608"/>
-          </a:xfrm>
-          <a:prstGeom prst="roundRect">
-            <a:avLst>
-              <a:gd name="adj" fmla="val 50000"/>
-            </a:avLst>
-          </a:prstGeom>
-          <a:solidFill>
-            <a:srgbClr val="FBBF24"/>
-          </a:solidFill>
-          <a:ln w="12700">
-            <a:solidFill>
-              <a:srgbClr val="FBBF24"/>
-            </a:solidFill>
-            <a:prstDash val="solid"/>
-          </a:ln>
-        </p:spPr>
-      </p:sp>
-      <p:sp>
-        <p:nvSpPr>
-          <p:cNvPr id="19" name="Text 17"/>
-          <p:cNvSpPr/>
-          <p:nvPr/>
-        </p:nvSpPr>
-        <p:spPr>
-          <a:xfrm>
-            <a:off x="8503920" y="2514600"/>
-            <a:ext cx="1554480" cy="292608"/>
-          </a:xfrm>
-          <a:prstGeom prst="rect">
-            <a:avLst/>
-          </a:prstGeom>
-          <a:noFill/>
-          <a:ln/>
-        </p:spPr>
-        <p:txBody>
-          <a:bodyPr wrap="square" rtlCol="0" anchor="ctr"/>
-          <a:lstStyle/>
-          <a:p>
-            <a:pPr algn="ctr" indent="0" marL="0">
-              <a:buNone/>
-            </a:pPr>
-            <a:r>
-              <a:rPr lang="en-US" sz="900" b="1" spc="200" kern="0" dirty="0">
-                <a:solidFill>
-                  <a:srgbClr val="FAF8FF"/>
-                </a:solidFill>
-                <a:latin typeface="Calibri" pitchFamily="34" charset="0"/>
-                <a:ea typeface="Calibri" pitchFamily="34" charset="-122"/>
-                <a:cs typeface="Calibri" pitchFamily="34" charset="-120"/>
-              </a:rPr>
-              <a:t>UNDERRATED</a:t>
-            </a:r>
-            <a:endParaRPr lang="en-US" sz="900" dirty="0"/>
-          </a:p>
-        </p:txBody>
-      </p:sp>
-      <p:sp>
-        <p:nvSpPr>
-          <p:cNvPr id="20" name="Text 18"/>
-          <p:cNvSpPr/>
-          <p:nvPr/>
-        </p:nvSpPr>
-        <p:spPr>
-          <a:xfrm>
-            <a:off x="8503920" y="2971800"/>
-            <a:ext cx="3154680" cy="548640"/>
-          </a:xfrm>
-          <a:prstGeom prst="rect">
-            <a:avLst/>
-          </a:prstGeom>
-          <a:noFill/>
-          <a:ln/>
-        </p:spPr>
-        <p:txBody>
-          <a:bodyPr wrap="square" rtlCol="0" anchor="ctr"/>
-          <a:lstStyle/>
-          <a:p>
-            <a:pPr indent="0" marL="0">
-              <a:buNone/>
-            </a:pPr>
-            <a:r>
-              <a:rPr lang="en-US" sz="2200" b="1" dirty="0">
-                <a:solidFill>
-                  <a:srgbClr val="0F0A2E"/>
-                </a:solidFill>
-                <a:latin typeface="Georgia" pitchFamily="34" charset="0"/>
-                <a:ea typeface="Georgia" pitchFamily="34" charset="-122"/>
-                <a:cs typeface="Georgia" pitchFamily="34" charset="-120"/>
-              </a:rPr>
-              <a:t>Tiny Bespoke Models</a:t>
-            </a:r>
-            <a:endParaRPr lang="en-US" sz="2200" dirty="0"/>
-          </a:p>
-        </p:txBody>
-      </p:sp>
-      <p:sp>
-        <p:nvSpPr>
-          <p:cNvPr id="21" name="Text 19"/>
-          <p:cNvSpPr/>
-          <p:nvPr/>
-        </p:nvSpPr>
-        <p:spPr>
-          <a:xfrm>
-            <a:off x="8503920" y="3520440"/>
-            <a:ext cx="3154680" cy="365760"/>
-          </a:xfrm>
-          <a:prstGeom prst="rect">
-            <a:avLst/>
-          </a:prstGeom>
-          <a:noFill/>
-          <a:ln/>
-        </p:spPr>
-        <p:txBody>
-          <a:bodyPr wrap="square" rtlCol="0" anchor="ctr"/>
-          <a:lstStyle/>
-          <a:p>
-            <a:pPr indent="0" marL="0">
-              <a:buNone/>
-            </a:pPr>
-            <a:r>
-              <a:rPr lang="en-US" sz="1300" i="1" dirty="0">
-                <a:solidFill>
-                  <a:srgbClr val="FBBF24"/>
-                </a:solidFill>
-                <a:latin typeface="Calibri" pitchFamily="34" charset="0"/>
-                <a:ea typeface="Calibri" pitchFamily="34" charset="-122"/>
-                <a:cs typeface="Calibri" pitchFamily="34" charset="-120"/>
-              </a:rPr>
-              <a:t>Right-sized for the task</a:t>
-            </a:r>
-            <a:endParaRPr lang="en-US" sz="1300" dirty="0"/>
-          </a:p>
-        </p:txBody>
-      </p:sp>
-      <p:sp>
-        <p:nvSpPr>
-          <p:cNvPr id="22" name="Text 20"/>
-          <p:cNvSpPr/>
-          <p:nvPr/>
-        </p:nvSpPr>
-        <p:spPr>
-          <a:xfrm>
-            <a:off x="8503920" y="4023360"/>
-            <a:ext cx="3154680" cy="2011680"/>
-          </a:xfrm>
-          <a:prstGeom prst="rect">
-            <a:avLst/>
-          </a:prstGeom>
-          <a:noFill/>
-          <a:ln/>
-        </p:spPr>
-        <p:txBody>
-          <a:bodyPr wrap="square" rtlCol="0" anchor="ctr"/>
-          <a:lstStyle/>
-          <a:p>
-            <a:pPr indent="0" marL="0">
-              <a:buNone/>
-            </a:pPr>
-            <a:r>
-              <a:rPr lang="en-US" sz="1300" dirty="0">
-                <a:solidFill>
-                  <a:srgbClr val="0F0A2E"/>
-                </a:solidFill>
-                <a:latin typeface="Calibri" pitchFamily="34" charset="0"/>
-                <a:ea typeface="Calibri" pitchFamily="34" charset="-122"/>
-                <a:cs typeface="Calibri" pitchFamily="34" charset="-120"/>
-              </a:rPr>
-              <a:t>Sometimes a 50MB classifier beats a 3B LLM. Embeddings, intent detection, structured extraction — fast, cheap, embarrassingly good.</a:t>
-            </a:r>
-            <a:endParaRPr lang="en-US" sz="1300" dirty="0"/>
-          </a:p>
-        </p:txBody>
-      </p:sp>
-      <p:pic>
-        <p:nvPicPr>
-          <p:cNvPr id="23" name="Image 0" descr="preencoded.png">    </p:cNvPr>
-          <p:cNvPicPr>
-            <a:picLocks noChangeAspect="1"/>
-          </p:cNvPicPr>
-          <p:nvPr/>
-        </p:nvPicPr>
-        <p:blipFill>
-          <a:blip r:embed="rId1">
-            <a:extLst>
-              <a:ext uri="{96DAC541-7B7A-43D3-8B79-37D633B846F1}">
-                <asvg:svgBlip xmlns:asvg="http://schemas.microsoft.com/office/drawing/2016/SVG/main" r:embed="rId2"/>
-              </a:ext>
-            </a:extLst>
-          </a:blip>
-          <a:stretch>
-            <a:fillRect/>
-          </a:stretch>
-        </p:blipFill>
-        <p:spPr>
-          <a:xfrm>
-            <a:off x="10180015" y="502920"/>
-            <a:ext cx="329184" cy="329184"/>
-          </a:xfrm>
-          <a:prstGeom prst="rect">
-            <a:avLst/>
-          </a:prstGeom>
-        </p:spPr>
-      </p:pic>
-      <p:pic>
-        <p:nvPicPr>
-          <p:cNvPr id="24" name="Image 1" descr="preencoded.png">    </p:cNvPr>
-          <p:cNvPicPr>
-            <a:picLocks noChangeAspect="1"/>
-          </p:cNvPicPr>
-          <p:nvPr/>
-        </p:nvPicPr>
-        <p:blipFill>
-          <a:blip r:embed="rId3">
-            <a:extLst>
-              <a:ext uri="{96DAC541-7B7A-43D3-8B79-37D633B846F1}">
-                <asvg:svgBlip xmlns:asvg="http://schemas.microsoft.com/office/drawing/2016/SVG/main" r:embed="rId4"/>
-              </a:ext>
-            </a:extLst>
-          </a:blip>
-          <a:stretch>
-            <a:fillRect/>
-          </a:stretch>
-        </p:blipFill>
-        <p:spPr>
-          <a:xfrm>
-            <a:off x="10564063" y="502920"/>
-            <a:ext cx="329184" cy="329184"/>
-          </a:xfrm>
-          <a:prstGeom prst="rect">
-            <a:avLst/>
-          </a:prstGeom>
-        </p:spPr>
-      </p:pic>
-      <p:pic>
-        <p:nvPicPr>
-          <p:cNvPr id="25" name="Image 2" descr="preencoded.png">    </p:cNvPr>
-          <p:cNvPicPr>
-            <a:picLocks noChangeAspect="1"/>
-          </p:cNvPicPr>
-          <p:nvPr/>
-        </p:nvPicPr>
-        <p:blipFill>
-          <a:blip r:embed="rId5">
-            <a:extLst>
-              <a:ext uri="{96DAC541-7B7A-43D3-8B79-37D633B846F1}">
-                <asvg:svgBlip xmlns:asvg="http://schemas.microsoft.com/office/drawing/2016/SVG/main" r:embed="rId6"/>
-              </a:ext>
-            </a:extLst>
-          </a:blip>
-          <a:stretch>
-            <a:fillRect/>
-          </a:stretch>
-        </p:blipFill>
-        <p:spPr>
-          <a:xfrm>
-            <a:off x="10948111" y="502920"/>
-            <a:ext cx="329184" cy="329184"/>
-          </a:xfrm>
-          <a:prstGeom prst="rect">
-            <a:avLst/>
-          </a:prstGeom>
-        </p:spPr>
-      </p:pic>
-      <p:sp>
-        <p:nvSpPr>
-          <p:cNvPr id="26" name="Text 21"/>
-          <p:cNvSpPr/>
-          <p:nvPr/>
-        </p:nvSpPr>
-        <p:spPr>
-          <a:xfrm>
-            <a:off x="457200" y="6446520"/>
-            <a:ext cx="7315200" cy="274320"/>
-          </a:xfrm>
-          <a:prstGeom prst="rect">
-            <a:avLst/>
-          </a:prstGeom>
-          <a:noFill/>
-          <a:ln/>
-        </p:spPr>
-        <p:txBody>
-          <a:bodyPr wrap="square" rtlCol="0" anchor="ctr"/>
-          <a:lstStyle/>
-          <a:p>
-            <a:pPr algn="l" indent="0" marL="0">
-              <a:buNone/>
-            </a:pPr>
-            <a:r>
-              <a:rPr lang="en-US" sz="1000" dirty="0">
-                <a:solidFill>
-                  <a:srgbClr val="6B6B8F"/>
-                </a:solidFill>
-                <a:latin typeface="Calibri" pitchFamily="34" charset="0"/>
-                <a:ea typeface="Calibri" pitchFamily="34" charset="-122"/>
-                <a:cs typeface="Calibri" pitchFamily="34" charset="-120"/>
-              </a:rPr>
-              <a:t>Unifying Local and Cloud AI</a:t>
-            </a:r>
-            <a:pPr algn="l" indent="0" marL="0">
-              <a:buNone/>
-            </a:pPr>
-            <a:r>
-              <a:rPr lang="en-US" sz="1000" dirty="0">
-                <a:solidFill>
-                  <a:srgbClr val="6B6B8F"/>
-                </a:solidFill>
-                <a:latin typeface="Calibri" pitchFamily="34" charset="0"/>
-                <a:ea typeface="Calibri" pitchFamily="34" charset="-122"/>
-                <a:cs typeface="Calibri" pitchFamily="34" charset="-120"/>
-              </a:rPr>
-              <a:t>  ·  </a:t>
-            </a:r>
-            <a:pPr algn="l" indent="0" marL="0">
-              <a:buNone/>
-            </a:pPr>
-            <a:r>
-              <a:rPr lang="en-US" sz="1000" b="1" dirty="0">
-                <a:solidFill>
-                  <a:srgbClr val="FB7185"/>
-                </a:solidFill>
-                <a:latin typeface="Calibri" pitchFamily="34" charset="0"/>
-                <a:ea typeface="Calibri" pitchFamily="34" charset="-122"/>
-                <a:cs typeface="Calibri" pitchFamily="34" charset="-120"/>
-              </a:rPr>
-              <a:t>@mattleibow</a:t>
-            </a:r>
-            <a:pPr algn="l" indent="0" marL="0">
-              <a:buNone/>
-            </a:pPr>
-            <a:r>
-              <a:rPr lang="en-US" sz="1000" dirty="0">
-                <a:solidFill>
-                  <a:srgbClr val="6B6B8F"/>
-                </a:solidFill>
-                <a:latin typeface="Calibri" pitchFamily="34" charset="0"/>
-                <a:ea typeface="Calibri" pitchFamily="34" charset="-122"/>
-                <a:cs typeface="Calibri" pitchFamily="34" charset="-120"/>
-              </a:rPr>
-              <a:t>  ·  @CPTMSDUG</a:t>
-            </a:r>
-            <a:endParaRPr lang="en-US" sz="1000" dirty="0"/>
-          </a:p>
-        </p:txBody>
-      </p:sp>
-      <p:sp>
-        <p:nvSpPr>
-          <p:cNvPr id="27" name="Text 22"/>
-          <p:cNvSpPr/>
-          <p:nvPr/>
-        </p:nvSpPr>
-        <p:spPr>
-          <a:xfrm>
-            <a:off x="10820095" y="6446520"/>
-            <a:ext cx="914400" cy="274320"/>
-          </a:xfrm>
-          <a:prstGeom prst="rect">
-            <a:avLst/>
-          </a:prstGeom>
-          <a:noFill/>
-          <a:ln/>
-        </p:spPr>
-        <p:txBody>
-          <a:bodyPr wrap="square" rtlCol="0" anchor="ctr"/>
-          <a:lstStyle/>
-          <a:p>
-            <a:pPr algn="r" indent="0" marL="0">
-              <a:buNone/>
-            </a:pPr>
-            <a:r>
-              <a:rPr lang="en-US" sz="1000" dirty="0">
-                <a:solidFill>
-                  <a:srgbClr val="6B6B8F"/>
-                </a:solidFill>
-                <a:latin typeface="Calibri" pitchFamily="34" charset="0"/>
-                <a:ea typeface="Calibri" pitchFamily="34" charset="-122"/>
-                <a:cs typeface="Calibri" pitchFamily="34" charset="-120"/>
-              </a:rPr>
-              <a:t>7 / 15</a:t>
-            </a:r>
-            <a:endParaRPr lang="en-US" sz="1000" dirty="0"/>
-          </a:p>
-        </p:txBody>
-      </p:sp>
     </p:spTree>
   </p:cSld>
   <p:clrMapOvr>

--- a/slides/Unifying-Local-Cloud-AI.pptx
+++ b/slides/Unifying-Local-Cloud-AI.pptx
@@ -12741,16 +12741,16 @@
         </p:nvSpPr>
         <p:spPr>
           <a:xfrm>
-            <a:off x="548640" y="2011680"/>
-            <a:ext cx="3291840" cy="3291840"/>
+            <a:off x="502920" y="1965960"/>
+            <a:ext cx="3383280" cy="3383280"/>
           </a:xfrm>
           <a:prstGeom prst="ellipse">
             <a:avLst/>
           </a:prstGeom>
           <a:solidFill>
-            <a:srgbClr val="1E1B4B"/>
+            <a:srgbClr val="FB7185"/>
           </a:solidFill>
-          <a:ln w="50800">
+          <a:ln w="12700">
             <a:solidFill>
               <a:srgbClr val="FB7185"/>
             </a:solidFill>
@@ -12758,16 +12758,40 @@
           </a:ln>
         </p:spPr>
       </p:sp>
-      <p:sp>
-        <p:nvSpPr>
-          <p:cNvPr id="5" name="Text 3"/>
-          <p:cNvSpPr/>
-          <p:nvPr/>
-        </p:nvSpPr>
-        <p:spPr>
-          <a:xfrm>
-            <a:off x="548640" y="2011680"/>
-            <a:ext cx="3291840" cy="3291840"/>
+      <p:pic>
+        <p:nvPicPr>
+          <p:cNvPr id="5" name="Image 0" descr="assets/profile.jpg">    </p:cNvPr>
+          <p:cNvPicPr>
+            <a:picLocks noChangeAspect="1"/>
+          </p:cNvPicPr>
+          <p:nvPr/>
+        </p:nvPicPr>
+        <p:blipFill>
+          <a:blip r:embed="rId1"/>
+          <a:stretch>
+            <a:fillRect/>
+          </a:stretch>
+        </p:blipFill>
+        <p:spPr>
+          <a:xfrm>
+            <a:off x="594360" y="2057400"/>
+            <a:ext cx="3200400" cy="3200400"/>
+          </a:xfrm>
+          <a:prstGeom prst="ellipse">
+            <a:avLst/>
+          </a:prstGeom>
+        </p:spPr>
+      </p:pic>
+      <p:sp>
+        <p:nvSpPr>
+          <p:cNvPr id="6" name="Text 3"/>
+          <p:cNvSpPr/>
+          <p:nvPr/>
+        </p:nvSpPr>
+        <p:spPr>
+          <a:xfrm>
+            <a:off x="4572000" y="2103120"/>
+            <a:ext cx="6858000" cy="640080"/>
           </a:xfrm>
           <a:prstGeom prst="rect">
             <a:avLst/>
@@ -12779,57 +12803,18 @@
           <a:bodyPr wrap="square" rtlCol="0" anchor="ctr"/>
           <a:lstStyle/>
           <a:p>
-            <a:pPr algn="ctr" indent="0" marL="0">
-              <a:buNone/>
-            </a:pPr>
-            <a:r>
-              <a:rPr lang="en-US" sz="9600" b="1" dirty="0">
-                <a:solidFill>
-                  <a:srgbClr val="FAF8FF"/>
+            <a:pPr indent="0" marL="0">
+              <a:buNone/>
+            </a:pPr>
+            <a:r>
+              <a:rPr lang="en-US" sz="3200" b="1" dirty="0">
+                <a:solidFill>
+                  <a:srgbClr val="0F0A2E"/>
                 </a:solidFill>
                 <a:latin typeface="Georgia" pitchFamily="34" charset="0"/>
                 <a:ea typeface="Georgia" pitchFamily="34" charset="-122"/>
                 <a:cs typeface="Georgia" pitchFamily="34" charset="-120"/>
               </a:rPr>
-              <a:t>ML</a:t>
-            </a:r>
-            <a:endParaRPr lang="en-US" sz="9600" dirty="0"/>
-          </a:p>
-        </p:txBody>
-      </p:sp>
-      <p:sp>
-        <p:nvSpPr>
-          <p:cNvPr id="6" name="Text 4"/>
-          <p:cNvSpPr/>
-          <p:nvPr/>
-        </p:nvSpPr>
-        <p:spPr>
-          <a:xfrm>
-            <a:off x="4572000" y="2103120"/>
-            <a:ext cx="6858000" cy="640080"/>
-          </a:xfrm>
-          <a:prstGeom prst="rect">
-            <a:avLst/>
-          </a:prstGeom>
-          <a:noFill/>
-          <a:ln/>
-        </p:spPr>
-        <p:txBody>
-          <a:bodyPr wrap="square" rtlCol="0" anchor="ctr"/>
-          <a:lstStyle/>
-          <a:p>
-            <a:pPr indent="0" marL="0">
-              <a:buNone/>
-            </a:pPr>
-            <a:r>
-              <a:rPr lang="en-US" sz="3200" b="1" dirty="0">
-                <a:solidFill>
-                  <a:srgbClr val="0F0A2E"/>
-                </a:solidFill>
-                <a:latin typeface="Georgia" pitchFamily="34" charset="0"/>
-                <a:ea typeface="Georgia" pitchFamily="34" charset="-122"/>
-                <a:cs typeface="Georgia" pitchFamily="34" charset="-120"/>
-              </a:rPr>
               <a:t>Matthew Leibowitz</a:t>
             </a:r>
             <a:endParaRPr lang="en-US" sz="3200" dirty="0"/>
@@ -12838,7 +12823,7 @@
       </p:sp>
       <p:sp>
         <p:nvSpPr>
-          <p:cNvPr id="7" name="Text 5"/>
+          <p:cNvPr id="7" name="Text 4"/>
           <p:cNvSpPr/>
           <p:nvPr/>
         </p:nvSpPr>
@@ -12877,7 +12862,7 @@
       </p:sp>
       <p:sp>
         <p:nvSpPr>
-          <p:cNvPr id="8" name="Shape 6"/>
+          <p:cNvPr id="8" name="Shape 5"/>
           <p:cNvSpPr/>
           <p:nvPr/>
         </p:nvSpPr>
@@ -12902,7 +12887,7 @@
       </p:sp>
       <p:sp>
         <p:nvSpPr>
-          <p:cNvPr id="9" name="Text 7"/>
+          <p:cNvPr id="9" name="Text 6"/>
           <p:cNvSpPr/>
           <p:nvPr/>
         </p:nvSpPr>
@@ -12941,7 +12926,7 @@
       </p:sp>
       <p:sp>
         <p:nvSpPr>
-          <p:cNvPr id="10" name="Text 8"/>
+          <p:cNvPr id="10" name="Text 7"/>
           <p:cNvSpPr/>
           <p:nvPr/>
         </p:nvSpPr>
@@ -12994,7 +12979,7 @@
       </p:sp>
       <p:sp>
         <p:nvSpPr>
-          <p:cNvPr id="11" name="Shape 9"/>
+          <p:cNvPr id="11" name="Shape 8"/>
           <p:cNvSpPr/>
           <p:nvPr/>
         </p:nvSpPr>
@@ -13019,7 +13004,7 @@
       </p:sp>
       <p:sp>
         <p:nvSpPr>
-          <p:cNvPr id="12" name="Text 10"/>
+          <p:cNvPr id="12" name="Text 9"/>
           <p:cNvSpPr/>
           <p:nvPr/>
         </p:nvSpPr>
@@ -13058,7 +13043,7 @@
       </p:sp>
       <p:sp>
         <p:nvSpPr>
-          <p:cNvPr id="13" name="Text 11"/>
+          <p:cNvPr id="13" name="Text 10"/>
           <p:cNvSpPr/>
           <p:nvPr/>
         </p:nvSpPr>
@@ -13111,7 +13096,7 @@
       </p:sp>
       <p:sp>
         <p:nvSpPr>
-          <p:cNvPr id="14" name="Shape 12"/>
+          <p:cNvPr id="14" name="Shape 11"/>
           <p:cNvSpPr/>
           <p:nvPr/>
         </p:nvSpPr>
@@ -13136,7 +13121,7 @@
       </p:sp>
       <p:sp>
         <p:nvSpPr>
-          <p:cNvPr id="15" name="Text 13"/>
+          <p:cNvPr id="15" name="Text 12"/>
           <p:cNvSpPr/>
           <p:nvPr/>
         </p:nvSpPr>
@@ -13175,7 +13160,7 @@
       </p:sp>
       <p:sp>
         <p:nvSpPr>
-          <p:cNvPr id="16" name="Text 14"/>
+          <p:cNvPr id="16" name="Text 13"/>
           <p:cNvSpPr/>
           <p:nvPr/>
         </p:nvSpPr>
@@ -13228,17 +13213,17 @@
       </p:sp>
       <p:pic>
         <p:nvPicPr>
-          <p:cNvPr id="17" name="Image 0" descr="preencoded.png">    </p:cNvPr>
+          <p:cNvPr id="17" name="Image 1" descr="preencoded.png">    </p:cNvPr>
           <p:cNvPicPr>
             <a:picLocks noChangeAspect="1"/>
           </p:cNvPicPr>
           <p:nvPr/>
         </p:nvPicPr>
         <p:blipFill>
-          <a:blip r:embed="rId1">
+          <a:blip r:embed="rId2">
             <a:extLst>
               <a:ext uri="{96DAC541-7B7A-43D3-8B79-37D633B846F1}">
-                <asvg:svgBlip xmlns:asvg="http://schemas.microsoft.com/office/drawing/2016/SVG/main" r:embed="rId2"/>
+                <asvg:svgBlip xmlns:asvg="http://schemas.microsoft.com/office/drawing/2016/SVG/main" r:embed="rId3"/>
               </a:ext>
             </a:extLst>
           </a:blip>
@@ -13258,17 +13243,17 @@
       </p:pic>
       <p:pic>
         <p:nvPicPr>
-          <p:cNvPr id="18" name="Image 1" descr="preencoded.png">    </p:cNvPr>
+          <p:cNvPr id="18" name="Image 2" descr="preencoded.png">    </p:cNvPr>
           <p:cNvPicPr>
             <a:picLocks noChangeAspect="1"/>
           </p:cNvPicPr>
           <p:nvPr/>
         </p:nvPicPr>
         <p:blipFill>
-          <a:blip r:embed="rId3">
+          <a:blip r:embed="rId4">
             <a:extLst>
               <a:ext uri="{96DAC541-7B7A-43D3-8B79-37D633B846F1}">
-                <asvg:svgBlip xmlns:asvg="http://schemas.microsoft.com/office/drawing/2016/SVG/main" r:embed="rId4"/>
+                <asvg:svgBlip xmlns:asvg="http://schemas.microsoft.com/office/drawing/2016/SVG/main" r:embed="rId5"/>
               </a:ext>
             </a:extLst>
           </a:blip>
@@ -13288,17 +13273,17 @@
       </p:pic>
       <p:pic>
         <p:nvPicPr>
-          <p:cNvPr id="19" name="Image 2" descr="preencoded.png">    </p:cNvPr>
+          <p:cNvPr id="19" name="Image 3" descr="preencoded.png">    </p:cNvPr>
           <p:cNvPicPr>
             <a:picLocks noChangeAspect="1"/>
           </p:cNvPicPr>
           <p:nvPr/>
         </p:nvPicPr>
         <p:blipFill>
-          <a:blip r:embed="rId5">
+          <a:blip r:embed="rId6">
             <a:extLst>
               <a:ext uri="{96DAC541-7B7A-43D3-8B79-37D633B846F1}">
-                <asvg:svgBlip xmlns:asvg="http://schemas.microsoft.com/office/drawing/2016/SVG/main" r:embed="rId6"/>
+                <asvg:svgBlip xmlns:asvg="http://schemas.microsoft.com/office/drawing/2016/SVG/main" r:embed="rId7"/>
               </a:ext>
             </a:extLst>
           </a:blip>
@@ -13318,7 +13303,7 @@
       </p:pic>
       <p:sp>
         <p:nvSpPr>
-          <p:cNvPr id="20" name="Text 15"/>
+          <p:cNvPr id="20" name="Text 14"/>
           <p:cNvSpPr/>
           <p:nvPr/>
         </p:nvSpPr>
@@ -13399,7 +13384,7 @@
       </p:sp>
       <p:sp>
         <p:nvSpPr>
-          <p:cNvPr id="21" name="Text 16"/>
+          <p:cNvPr id="21" name="Text 15"/>
           <p:cNvSpPr/>
           <p:nvPr/>
         </p:nvSpPr>
